--- a/slides/C24_Q_learning.pptx
+++ b/slides/C24_Q_learning.pptx
@@ -5,23 +5,30 @@
     <p:sldMasterId id="2147483648" r:id="rId1"/>
   </p:sldMasterIdLst>
   <p:notesMasterIdLst>
-    <p:notesMasterId r:id="rId13"/>
+    <p:notesMasterId r:id="rId20"/>
   </p:notesMasterIdLst>
   <p:handoutMasterIdLst>
-    <p:handoutMasterId r:id="rId14"/>
+    <p:handoutMasterId r:id="rId21"/>
   </p:handoutMasterIdLst>
   <p:sldIdLst>
     <p:sldId id="256" r:id="rId2"/>
-    <p:sldId id="307" r:id="rId3"/>
-    <p:sldId id="308" r:id="rId4"/>
-    <p:sldId id="309" r:id="rId5"/>
-    <p:sldId id="310" r:id="rId6"/>
-    <p:sldId id="311" r:id="rId7"/>
-    <p:sldId id="312" r:id="rId8"/>
-    <p:sldId id="313" r:id="rId9"/>
-    <p:sldId id="293" r:id="rId10"/>
-    <p:sldId id="314" r:id="rId11"/>
-    <p:sldId id="306" r:id="rId12"/>
+    <p:sldId id="315" r:id="rId3"/>
+    <p:sldId id="307" r:id="rId4"/>
+    <p:sldId id="317" r:id="rId5"/>
+    <p:sldId id="320" r:id="rId6"/>
+    <p:sldId id="321" r:id="rId7"/>
+    <p:sldId id="318" r:id="rId8"/>
+    <p:sldId id="316" r:id="rId9"/>
+    <p:sldId id="319" r:id="rId10"/>
+    <p:sldId id="322" r:id="rId11"/>
+    <p:sldId id="309" r:id="rId12"/>
+    <p:sldId id="310" r:id="rId13"/>
+    <p:sldId id="311" r:id="rId14"/>
+    <p:sldId id="312" r:id="rId15"/>
+    <p:sldId id="313" r:id="rId16"/>
+    <p:sldId id="293" r:id="rId17"/>
+    <p:sldId id="314" r:id="rId18"/>
+    <p:sldId id="306" r:id="rId19"/>
   </p:sldIdLst>
   <p:sldSz cx="12192000" cy="6858000"/>
   <p:notesSz cx="7315200" cy="9601200"/>
@@ -285,7 +292,7 @@
           <a:p>
             <a:fld id="{144F1436-6906-4D93-B7A2-786C327BFA14}" type="datetimeFigureOut">
               <a:rPr lang="nl-BE" smtClean="0"/>
-              <a:t>17/04/2026</a:t>
+              <a:t>22/04/2026</a:t>
             </a:fld>
             <a:endParaRPr lang="nl-BE"/>
           </a:p>
@@ -450,7 +457,7 @@
           <a:p>
             <a:fld id="{AA8CD09E-2914-4F47-B6C1-51B2C31814C9}" type="datetimeFigureOut">
               <a:rPr lang="pt-BR" smtClean="0"/>
-              <a:t>17/04/2026</a:t>
+              <a:t>22/04/2026</a:t>
             </a:fld>
             <a:endParaRPr lang="pt-BR"/>
           </a:p>
@@ -801,6 +808,606 @@
 </p:notes>
 </file>
 
+<file path=ppt/notesSlides/notesSlide2.xml><?xml version="1.0" encoding="utf-8"?>
+<p:notes xmlns:a="http://schemas.openxmlformats.org/drawingml/2006/main" xmlns:r="http://schemas.openxmlformats.org/officeDocument/2006/relationships" xmlns:p="http://schemas.openxmlformats.org/presentationml/2006/main">
+  <p:cSld>
+    <p:spTree>
+      <p:nvGrpSpPr>
+        <p:cNvPr id="1" name=""/>
+        <p:cNvGrpSpPr/>
+        <p:nvPr/>
+      </p:nvGrpSpPr>
+      <p:grpSpPr>
+        <a:xfrm>
+          <a:off x="0" y="0"/>
+          <a:ext cx="0" cy="0"/>
+          <a:chOff x="0" y="0"/>
+          <a:chExt cx="0" cy="0"/>
+        </a:xfrm>
+      </p:grpSpPr>
+      <p:sp>
+        <p:nvSpPr>
+          <p:cNvPr id="2" name="Slide Image Placeholder 1"/>
+          <p:cNvSpPr>
+            <a:spLocks noGrp="1" noRot="1" noChangeAspect="1"/>
+          </p:cNvSpPr>
+          <p:nvPr>
+            <p:ph type="sldImg"/>
+          </p:nvPr>
+        </p:nvSpPr>
+        <p:spPr/>
+      </p:sp>
+      <p:sp>
+        <p:nvSpPr>
+          <p:cNvPr id="3" name="Notes Placeholder 2"/>
+          <p:cNvSpPr>
+            <a:spLocks noGrp="1"/>
+          </p:cNvSpPr>
+          <p:nvPr>
+            <p:ph type="body" idx="1"/>
+          </p:nvPr>
+        </p:nvSpPr>
+        <p:spPr/>
+        <p:txBody>
+          <a:bodyPr/>
+          <a:lstStyle/>
+          <a:p>
+            <a:endParaRPr lang="en-US" dirty="0"/>
+          </a:p>
+        </p:txBody>
+      </p:sp>
+      <p:sp>
+        <p:nvSpPr>
+          <p:cNvPr id="4" name="Slide Number Placeholder 3"/>
+          <p:cNvSpPr>
+            <a:spLocks noGrp="1"/>
+          </p:cNvSpPr>
+          <p:nvPr>
+            <p:ph type="sldNum" sz="quarter" idx="5"/>
+          </p:nvPr>
+        </p:nvSpPr>
+        <p:spPr/>
+        <p:txBody>
+          <a:bodyPr/>
+          <a:lstStyle/>
+          <a:p>
+            <a:fld id="{6FC8D850-966F-45A6-8DE7-15B891E7D40D}" type="slidenum">
+              <a:rPr lang="pt-BR" smtClean="0"/>
+              <a:t>3</a:t>
+            </a:fld>
+            <a:endParaRPr lang="pt-BR"/>
+          </a:p>
+        </p:txBody>
+      </p:sp>
+    </p:spTree>
+    <p:extLst>
+      <p:ext uri="{BB962C8B-B14F-4D97-AF65-F5344CB8AC3E}">
+        <p14:creationId xmlns:p14="http://schemas.microsoft.com/office/powerpoint/2010/main" val="3286691423"/>
+      </p:ext>
+    </p:extLst>
+  </p:cSld>
+  <p:clrMapOvr>
+    <a:masterClrMapping/>
+  </p:clrMapOvr>
+</p:notes>
+</file>
+
+<file path=ppt/notesSlides/notesSlide3.xml><?xml version="1.0" encoding="utf-8"?>
+<p:notes xmlns:a="http://schemas.openxmlformats.org/drawingml/2006/main" xmlns:r="http://schemas.openxmlformats.org/officeDocument/2006/relationships" xmlns:p="http://schemas.openxmlformats.org/presentationml/2006/main">
+  <p:cSld>
+    <p:spTree>
+      <p:nvGrpSpPr>
+        <p:cNvPr id="1" name="">
+          <a:extLst>
+            <a:ext uri="{FF2B5EF4-FFF2-40B4-BE49-F238E27FC236}">
+              <a16:creationId xmlns:a16="http://schemas.microsoft.com/office/drawing/2014/main" id="{5B4C3711-83BC-221A-A341-2BE62BCF89DC}"/>
+            </a:ext>
+          </a:extLst>
+        </p:cNvPr>
+        <p:cNvGrpSpPr/>
+        <p:nvPr/>
+      </p:nvGrpSpPr>
+      <p:grpSpPr>
+        <a:xfrm>
+          <a:off x="0" y="0"/>
+          <a:ext cx="0" cy="0"/>
+          <a:chOff x="0" y="0"/>
+          <a:chExt cx="0" cy="0"/>
+        </a:xfrm>
+      </p:grpSpPr>
+      <p:sp>
+        <p:nvSpPr>
+          <p:cNvPr id="2" name="Slide Image Placeholder 1">
+            <a:extLst>
+              <a:ext uri="{FF2B5EF4-FFF2-40B4-BE49-F238E27FC236}">
+                <a16:creationId xmlns:a16="http://schemas.microsoft.com/office/drawing/2014/main" id="{5957728F-CFA3-D0A6-7780-F800EBAC1F6E}"/>
+              </a:ext>
+            </a:extLst>
+          </p:cNvPr>
+          <p:cNvSpPr>
+            <a:spLocks noGrp="1" noRot="1" noChangeAspect="1"/>
+          </p:cNvSpPr>
+          <p:nvPr>
+            <p:ph type="sldImg"/>
+          </p:nvPr>
+        </p:nvSpPr>
+        <p:spPr/>
+      </p:sp>
+      <p:sp>
+        <p:nvSpPr>
+          <p:cNvPr id="3" name="Notes Placeholder 2">
+            <a:extLst>
+              <a:ext uri="{FF2B5EF4-FFF2-40B4-BE49-F238E27FC236}">
+                <a16:creationId xmlns:a16="http://schemas.microsoft.com/office/drawing/2014/main" id="{4AD3E5CB-A8B8-7F4B-200F-94D044C81C3D}"/>
+              </a:ext>
+            </a:extLst>
+          </p:cNvPr>
+          <p:cNvSpPr>
+            <a:spLocks noGrp="1"/>
+          </p:cNvSpPr>
+          <p:nvPr>
+            <p:ph type="body" idx="1"/>
+          </p:nvPr>
+        </p:nvSpPr>
+        <p:spPr/>
+        <p:txBody>
+          <a:bodyPr/>
+          <a:lstStyle/>
+          <a:p>
+            <a:endParaRPr lang="en-US" dirty="0"/>
+          </a:p>
+        </p:txBody>
+      </p:sp>
+      <p:sp>
+        <p:nvSpPr>
+          <p:cNvPr id="4" name="Slide Number Placeholder 3">
+            <a:extLst>
+              <a:ext uri="{FF2B5EF4-FFF2-40B4-BE49-F238E27FC236}">
+                <a16:creationId xmlns:a16="http://schemas.microsoft.com/office/drawing/2014/main" id="{3F9D8EC2-522A-3A24-97FD-162C1CF3C132}"/>
+              </a:ext>
+            </a:extLst>
+          </p:cNvPr>
+          <p:cNvSpPr>
+            <a:spLocks noGrp="1"/>
+          </p:cNvSpPr>
+          <p:nvPr>
+            <p:ph type="sldNum" sz="quarter" idx="5"/>
+          </p:nvPr>
+        </p:nvSpPr>
+        <p:spPr/>
+        <p:txBody>
+          <a:bodyPr/>
+          <a:lstStyle/>
+          <a:p>
+            <a:fld id="{6FC8D850-966F-45A6-8DE7-15B891E7D40D}" type="slidenum">
+              <a:rPr lang="pt-BR" smtClean="0"/>
+              <a:t>4</a:t>
+            </a:fld>
+            <a:endParaRPr lang="pt-BR"/>
+          </a:p>
+        </p:txBody>
+      </p:sp>
+    </p:spTree>
+    <p:extLst>
+      <p:ext uri="{BB962C8B-B14F-4D97-AF65-F5344CB8AC3E}">
+        <p14:creationId xmlns:p14="http://schemas.microsoft.com/office/powerpoint/2010/main" val="1882326999"/>
+      </p:ext>
+    </p:extLst>
+  </p:cSld>
+  <p:clrMapOvr>
+    <a:masterClrMapping/>
+  </p:clrMapOvr>
+</p:notes>
+</file>
+
+<file path=ppt/notesSlides/notesSlide4.xml><?xml version="1.0" encoding="utf-8"?>
+<p:notes xmlns:a="http://schemas.openxmlformats.org/drawingml/2006/main" xmlns:r="http://schemas.openxmlformats.org/officeDocument/2006/relationships" xmlns:p="http://schemas.openxmlformats.org/presentationml/2006/main">
+  <p:cSld>
+    <p:spTree>
+      <p:nvGrpSpPr>
+        <p:cNvPr id="1" name="">
+          <a:extLst>
+            <a:ext uri="{FF2B5EF4-FFF2-40B4-BE49-F238E27FC236}">
+              <a16:creationId xmlns:a16="http://schemas.microsoft.com/office/drawing/2014/main" id="{478600EE-A6A2-2235-BCC6-6DE0C5D8DE78}"/>
+            </a:ext>
+          </a:extLst>
+        </p:cNvPr>
+        <p:cNvGrpSpPr/>
+        <p:nvPr/>
+      </p:nvGrpSpPr>
+      <p:grpSpPr>
+        <a:xfrm>
+          <a:off x="0" y="0"/>
+          <a:ext cx="0" cy="0"/>
+          <a:chOff x="0" y="0"/>
+          <a:chExt cx="0" cy="0"/>
+        </a:xfrm>
+      </p:grpSpPr>
+      <p:sp>
+        <p:nvSpPr>
+          <p:cNvPr id="2" name="Slide Image Placeholder 1">
+            <a:extLst>
+              <a:ext uri="{FF2B5EF4-FFF2-40B4-BE49-F238E27FC236}">
+                <a16:creationId xmlns:a16="http://schemas.microsoft.com/office/drawing/2014/main" id="{B1C41149-DCAF-E8F8-FB78-0B242E221738}"/>
+              </a:ext>
+            </a:extLst>
+          </p:cNvPr>
+          <p:cNvSpPr>
+            <a:spLocks noGrp="1" noRot="1" noChangeAspect="1"/>
+          </p:cNvSpPr>
+          <p:nvPr>
+            <p:ph type="sldImg"/>
+          </p:nvPr>
+        </p:nvSpPr>
+        <p:spPr/>
+      </p:sp>
+      <p:sp>
+        <p:nvSpPr>
+          <p:cNvPr id="3" name="Notes Placeholder 2">
+            <a:extLst>
+              <a:ext uri="{FF2B5EF4-FFF2-40B4-BE49-F238E27FC236}">
+                <a16:creationId xmlns:a16="http://schemas.microsoft.com/office/drawing/2014/main" id="{F4C5329E-ECB5-4CB1-3A33-CFC57176F475}"/>
+              </a:ext>
+            </a:extLst>
+          </p:cNvPr>
+          <p:cNvSpPr>
+            <a:spLocks noGrp="1"/>
+          </p:cNvSpPr>
+          <p:nvPr>
+            <p:ph type="body" idx="1"/>
+          </p:nvPr>
+        </p:nvSpPr>
+        <p:spPr/>
+        <p:txBody>
+          <a:bodyPr/>
+          <a:lstStyle/>
+          <a:p>
+            <a:endParaRPr lang="en-US" dirty="0"/>
+          </a:p>
+        </p:txBody>
+      </p:sp>
+      <p:sp>
+        <p:nvSpPr>
+          <p:cNvPr id="4" name="Slide Number Placeholder 3">
+            <a:extLst>
+              <a:ext uri="{FF2B5EF4-FFF2-40B4-BE49-F238E27FC236}">
+                <a16:creationId xmlns:a16="http://schemas.microsoft.com/office/drawing/2014/main" id="{37AB7C02-5FA9-66E4-2433-F97393A5C0BA}"/>
+              </a:ext>
+            </a:extLst>
+          </p:cNvPr>
+          <p:cNvSpPr>
+            <a:spLocks noGrp="1"/>
+          </p:cNvSpPr>
+          <p:nvPr>
+            <p:ph type="sldNum" sz="quarter" idx="5"/>
+          </p:nvPr>
+        </p:nvSpPr>
+        <p:spPr/>
+        <p:txBody>
+          <a:bodyPr/>
+          <a:lstStyle/>
+          <a:p>
+            <a:fld id="{6FC8D850-966F-45A6-8DE7-15B891E7D40D}" type="slidenum">
+              <a:rPr lang="pt-BR" smtClean="0"/>
+              <a:t>5</a:t>
+            </a:fld>
+            <a:endParaRPr lang="pt-BR"/>
+          </a:p>
+        </p:txBody>
+      </p:sp>
+    </p:spTree>
+    <p:extLst>
+      <p:ext uri="{BB962C8B-B14F-4D97-AF65-F5344CB8AC3E}">
+        <p14:creationId xmlns:p14="http://schemas.microsoft.com/office/powerpoint/2010/main" val="877577173"/>
+      </p:ext>
+    </p:extLst>
+  </p:cSld>
+  <p:clrMapOvr>
+    <a:masterClrMapping/>
+  </p:clrMapOvr>
+</p:notes>
+</file>
+
+<file path=ppt/notesSlides/notesSlide5.xml><?xml version="1.0" encoding="utf-8"?>
+<p:notes xmlns:a="http://schemas.openxmlformats.org/drawingml/2006/main" xmlns:r="http://schemas.openxmlformats.org/officeDocument/2006/relationships" xmlns:p="http://schemas.openxmlformats.org/presentationml/2006/main">
+  <p:cSld>
+    <p:spTree>
+      <p:nvGrpSpPr>
+        <p:cNvPr id="1" name="">
+          <a:extLst>
+            <a:ext uri="{FF2B5EF4-FFF2-40B4-BE49-F238E27FC236}">
+              <a16:creationId xmlns:a16="http://schemas.microsoft.com/office/drawing/2014/main" id="{92F2E69C-0407-4619-FFB1-7502CF033EBA}"/>
+            </a:ext>
+          </a:extLst>
+        </p:cNvPr>
+        <p:cNvGrpSpPr/>
+        <p:nvPr/>
+      </p:nvGrpSpPr>
+      <p:grpSpPr>
+        <a:xfrm>
+          <a:off x="0" y="0"/>
+          <a:ext cx="0" cy="0"/>
+          <a:chOff x="0" y="0"/>
+          <a:chExt cx="0" cy="0"/>
+        </a:xfrm>
+      </p:grpSpPr>
+      <p:sp>
+        <p:nvSpPr>
+          <p:cNvPr id="2" name="Slide Image Placeholder 1">
+            <a:extLst>
+              <a:ext uri="{FF2B5EF4-FFF2-40B4-BE49-F238E27FC236}">
+                <a16:creationId xmlns:a16="http://schemas.microsoft.com/office/drawing/2014/main" id="{E3C6894B-B13E-3C0F-BEC3-8A663E98508F}"/>
+              </a:ext>
+            </a:extLst>
+          </p:cNvPr>
+          <p:cNvSpPr>
+            <a:spLocks noGrp="1" noRot="1" noChangeAspect="1"/>
+          </p:cNvSpPr>
+          <p:nvPr>
+            <p:ph type="sldImg"/>
+          </p:nvPr>
+        </p:nvSpPr>
+        <p:spPr/>
+      </p:sp>
+      <p:sp>
+        <p:nvSpPr>
+          <p:cNvPr id="3" name="Notes Placeholder 2">
+            <a:extLst>
+              <a:ext uri="{FF2B5EF4-FFF2-40B4-BE49-F238E27FC236}">
+                <a16:creationId xmlns:a16="http://schemas.microsoft.com/office/drawing/2014/main" id="{B76A1B01-A242-46E3-F92E-FB0EA28821F9}"/>
+              </a:ext>
+            </a:extLst>
+          </p:cNvPr>
+          <p:cNvSpPr>
+            <a:spLocks noGrp="1"/>
+          </p:cNvSpPr>
+          <p:nvPr>
+            <p:ph type="body" idx="1"/>
+          </p:nvPr>
+        </p:nvSpPr>
+        <p:spPr/>
+        <p:txBody>
+          <a:bodyPr/>
+          <a:lstStyle/>
+          <a:p>
+            <a:endParaRPr lang="en-US" dirty="0"/>
+          </a:p>
+        </p:txBody>
+      </p:sp>
+      <p:sp>
+        <p:nvSpPr>
+          <p:cNvPr id="4" name="Slide Number Placeholder 3">
+            <a:extLst>
+              <a:ext uri="{FF2B5EF4-FFF2-40B4-BE49-F238E27FC236}">
+                <a16:creationId xmlns:a16="http://schemas.microsoft.com/office/drawing/2014/main" id="{4BA915CE-E13E-5840-D0C6-249ACB7C2C1D}"/>
+              </a:ext>
+            </a:extLst>
+          </p:cNvPr>
+          <p:cNvSpPr>
+            <a:spLocks noGrp="1"/>
+          </p:cNvSpPr>
+          <p:nvPr>
+            <p:ph type="sldNum" sz="quarter" idx="5"/>
+          </p:nvPr>
+        </p:nvSpPr>
+        <p:spPr/>
+        <p:txBody>
+          <a:bodyPr/>
+          <a:lstStyle/>
+          <a:p>
+            <a:fld id="{6FC8D850-966F-45A6-8DE7-15B891E7D40D}" type="slidenum">
+              <a:rPr lang="pt-BR" smtClean="0"/>
+              <a:t>6</a:t>
+            </a:fld>
+            <a:endParaRPr lang="pt-BR"/>
+          </a:p>
+        </p:txBody>
+      </p:sp>
+    </p:spTree>
+    <p:extLst>
+      <p:ext uri="{BB962C8B-B14F-4D97-AF65-F5344CB8AC3E}">
+        <p14:creationId xmlns:p14="http://schemas.microsoft.com/office/powerpoint/2010/main" val="5515121"/>
+      </p:ext>
+    </p:extLst>
+  </p:cSld>
+  <p:clrMapOvr>
+    <a:masterClrMapping/>
+  </p:clrMapOvr>
+</p:notes>
+</file>
+
+<file path=ppt/notesSlides/notesSlide6.xml><?xml version="1.0" encoding="utf-8"?>
+<p:notes xmlns:a="http://schemas.openxmlformats.org/drawingml/2006/main" xmlns:r="http://schemas.openxmlformats.org/officeDocument/2006/relationships" xmlns:p="http://schemas.openxmlformats.org/presentationml/2006/main">
+  <p:cSld>
+    <p:spTree>
+      <p:nvGrpSpPr>
+        <p:cNvPr id="1" name=""/>
+        <p:cNvGrpSpPr/>
+        <p:nvPr/>
+      </p:nvGrpSpPr>
+      <p:grpSpPr>
+        <a:xfrm>
+          <a:off x="0" y="0"/>
+          <a:ext cx="0" cy="0"/>
+          <a:chOff x="0" y="0"/>
+          <a:chExt cx="0" cy="0"/>
+        </a:xfrm>
+      </p:grpSpPr>
+      <p:sp>
+        <p:nvSpPr>
+          <p:cNvPr id="2" name="Slide Image Placeholder 1"/>
+          <p:cNvSpPr>
+            <a:spLocks noGrp="1" noRot="1" noChangeAspect="1"/>
+          </p:cNvSpPr>
+          <p:nvPr>
+            <p:ph type="sldImg"/>
+          </p:nvPr>
+        </p:nvSpPr>
+        <p:spPr/>
+      </p:sp>
+      <p:sp>
+        <p:nvSpPr>
+          <p:cNvPr id="3" name="Notes Placeholder 2"/>
+          <p:cNvSpPr>
+            <a:spLocks noGrp="1"/>
+          </p:cNvSpPr>
+          <p:nvPr>
+            <p:ph type="body" idx="1"/>
+          </p:nvPr>
+        </p:nvSpPr>
+        <p:spPr/>
+        <p:txBody>
+          <a:bodyPr/>
+          <a:lstStyle/>
+          <a:p>
+            <a:endParaRPr lang="en-US" dirty="0"/>
+          </a:p>
+        </p:txBody>
+      </p:sp>
+      <p:sp>
+        <p:nvSpPr>
+          <p:cNvPr id="4" name="Slide Number Placeholder 3"/>
+          <p:cNvSpPr>
+            <a:spLocks noGrp="1"/>
+          </p:cNvSpPr>
+          <p:nvPr>
+            <p:ph type="sldNum" sz="quarter" idx="5"/>
+          </p:nvPr>
+        </p:nvSpPr>
+        <p:spPr/>
+        <p:txBody>
+          <a:bodyPr/>
+          <a:lstStyle/>
+          <a:p>
+            <a:fld id="{6FC8D850-966F-45A6-8DE7-15B891E7D40D}" type="slidenum">
+              <a:rPr lang="pt-BR" smtClean="0"/>
+              <a:t>9</a:t>
+            </a:fld>
+            <a:endParaRPr lang="pt-BR"/>
+          </a:p>
+        </p:txBody>
+      </p:sp>
+    </p:spTree>
+    <p:extLst>
+      <p:ext uri="{BB962C8B-B14F-4D97-AF65-F5344CB8AC3E}">
+        <p14:creationId xmlns:p14="http://schemas.microsoft.com/office/powerpoint/2010/main" val="2390445129"/>
+      </p:ext>
+    </p:extLst>
+  </p:cSld>
+  <p:clrMapOvr>
+    <a:masterClrMapping/>
+  </p:clrMapOvr>
+</p:notes>
+</file>
+
+<file path=ppt/notesSlides/notesSlide7.xml><?xml version="1.0" encoding="utf-8"?>
+<p:notes xmlns:a="http://schemas.openxmlformats.org/drawingml/2006/main" xmlns:r="http://schemas.openxmlformats.org/officeDocument/2006/relationships" xmlns:p="http://schemas.openxmlformats.org/presentationml/2006/main">
+  <p:cSld>
+    <p:spTree>
+      <p:nvGrpSpPr>
+        <p:cNvPr id="1" name="">
+          <a:extLst>
+            <a:ext uri="{FF2B5EF4-FFF2-40B4-BE49-F238E27FC236}">
+              <a16:creationId xmlns:a16="http://schemas.microsoft.com/office/drawing/2014/main" id="{D6247C74-AA7B-3F30-CE84-004473E34467}"/>
+            </a:ext>
+          </a:extLst>
+        </p:cNvPr>
+        <p:cNvGrpSpPr/>
+        <p:nvPr/>
+      </p:nvGrpSpPr>
+      <p:grpSpPr>
+        <a:xfrm>
+          <a:off x="0" y="0"/>
+          <a:ext cx="0" cy="0"/>
+          <a:chOff x="0" y="0"/>
+          <a:chExt cx="0" cy="0"/>
+        </a:xfrm>
+      </p:grpSpPr>
+      <p:sp>
+        <p:nvSpPr>
+          <p:cNvPr id="2" name="Slide Image Placeholder 1">
+            <a:extLst>
+              <a:ext uri="{FF2B5EF4-FFF2-40B4-BE49-F238E27FC236}">
+                <a16:creationId xmlns:a16="http://schemas.microsoft.com/office/drawing/2014/main" id="{B1E4C741-B890-FCB5-138A-C67977AAD26B}"/>
+              </a:ext>
+            </a:extLst>
+          </p:cNvPr>
+          <p:cNvSpPr>
+            <a:spLocks noGrp="1" noRot="1" noChangeAspect="1"/>
+          </p:cNvSpPr>
+          <p:nvPr>
+            <p:ph type="sldImg"/>
+          </p:nvPr>
+        </p:nvSpPr>
+        <p:spPr/>
+      </p:sp>
+      <p:sp>
+        <p:nvSpPr>
+          <p:cNvPr id="3" name="Notes Placeholder 2">
+            <a:extLst>
+              <a:ext uri="{FF2B5EF4-FFF2-40B4-BE49-F238E27FC236}">
+                <a16:creationId xmlns:a16="http://schemas.microsoft.com/office/drawing/2014/main" id="{5475266D-73F1-BCB0-265C-192E1290B443}"/>
+              </a:ext>
+            </a:extLst>
+          </p:cNvPr>
+          <p:cNvSpPr>
+            <a:spLocks noGrp="1"/>
+          </p:cNvSpPr>
+          <p:nvPr>
+            <p:ph type="body" idx="1"/>
+          </p:nvPr>
+        </p:nvSpPr>
+        <p:spPr/>
+        <p:txBody>
+          <a:bodyPr/>
+          <a:lstStyle/>
+          <a:p>
+            <a:endParaRPr lang="en-US" dirty="0"/>
+          </a:p>
+        </p:txBody>
+      </p:sp>
+      <p:sp>
+        <p:nvSpPr>
+          <p:cNvPr id="4" name="Slide Number Placeholder 3">
+            <a:extLst>
+              <a:ext uri="{FF2B5EF4-FFF2-40B4-BE49-F238E27FC236}">
+                <a16:creationId xmlns:a16="http://schemas.microsoft.com/office/drawing/2014/main" id="{0D1E374B-17A3-96C1-5271-F06E116DF2A7}"/>
+              </a:ext>
+            </a:extLst>
+          </p:cNvPr>
+          <p:cNvSpPr>
+            <a:spLocks noGrp="1"/>
+          </p:cNvSpPr>
+          <p:nvPr>
+            <p:ph type="sldNum" sz="quarter" idx="5"/>
+          </p:nvPr>
+        </p:nvSpPr>
+        <p:spPr/>
+        <p:txBody>
+          <a:bodyPr/>
+          <a:lstStyle/>
+          <a:p>
+            <a:fld id="{6FC8D850-966F-45A6-8DE7-15B891E7D40D}" type="slidenum">
+              <a:rPr lang="pt-BR" smtClean="0"/>
+              <a:t>10</a:t>
+            </a:fld>
+            <a:endParaRPr lang="pt-BR"/>
+          </a:p>
+        </p:txBody>
+      </p:sp>
+    </p:spTree>
+    <p:extLst>
+      <p:ext uri="{BB962C8B-B14F-4D97-AF65-F5344CB8AC3E}">
+        <p14:creationId xmlns:p14="http://schemas.microsoft.com/office/powerpoint/2010/main" val="2025926453"/>
+      </p:ext>
+    </p:extLst>
+  </p:cSld>
+  <p:clrMapOvr>
+    <a:masterClrMapping/>
+  </p:clrMapOvr>
+</p:notes>
+</file>
+
 <file path=ppt/slideLayouts/slideLayout1.xml><?xml version="1.0" encoding="utf-8"?>
 <p:sldLayout xmlns:a="http://schemas.openxmlformats.org/drawingml/2006/main" xmlns:r="http://schemas.openxmlformats.org/officeDocument/2006/relationships" xmlns:p="http://schemas.openxmlformats.org/presentationml/2006/main" type="title" preserve="1">
   <p:cSld name="Slide de Título">
@@ -948,7 +1555,7 @@
           <a:p>
             <a:fld id="{63289F7E-B80B-496E-81B4-D396C37C9454}" type="datetimeFigureOut">
               <a:rPr lang="pt-BR" smtClean="0"/>
-              <a:t>17/04/2026</a:t>
+              <a:t>22/04/2026</a:t>
             </a:fld>
             <a:endParaRPr lang="pt-BR"/>
           </a:p>
@@ -1146,7 +1753,7 @@
           <a:p>
             <a:fld id="{63289F7E-B80B-496E-81B4-D396C37C9454}" type="datetimeFigureOut">
               <a:rPr lang="pt-BR" smtClean="0"/>
-              <a:t>17/04/2026</a:t>
+              <a:t>22/04/2026</a:t>
             </a:fld>
             <a:endParaRPr lang="pt-BR"/>
           </a:p>
@@ -1354,7 +1961,7 @@
           <a:p>
             <a:fld id="{63289F7E-B80B-496E-81B4-D396C37C9454}" type="datetimeFigureOut">
               <a:rPr lang="pt-BR" smtClean="0"/>
-              <a:t>17/04/2026</a:t>
+              <a:t>22/04/2026</a:t>
             </a:fld>
             <a:endParaRPr lang="pt-BR"/>
           </a:p>
@@ -1552,7 +2159,7 @@
           <a:p>
             <a:fld id="{63289F7E-B80B-496E-81B4-D396C37C9454}" type="datetimeFigureOut">
               <a:rPr lang="pt-BR" smtClean="0"/>
-              <a:t>17/04/2026</a:t>
+              <a:t>22/04/2026</a:t>
             </a:fld>
             <a:endParaRPr lang="pt-BR"/>
           </a:p>
@@ -1827,7 +2434,7 @@
           <a:p>
             <a:fld id="{63289F7E-B80B-496E-81B4-D396C37C9454}" type="datetimeFigureOut">
               <a:rPr lang="pt-BR" smtClean="0"/>
-              <a:t>17/04/2026</a:t>
+              <a:t>22/04/2026</a:t>
             </a:fld>
             <a:endParaRPr lang="pt-BR"/>
           </a:p>
@@ -2092,7 +2699,7 @@
           <a:p>
             <a:fld id="{63289F7E-B80B-496E-81B4-D396C37C9454}" type="datetimeFigureOut">
               <a:rPr lang="pt-BR" smtClean="0"/>
-              <a:t>17/04/2026</a:t>
+              <a:t>22/04/2026</a:t>
             </a:fld>
             <a:endParaRPr lang="pt-BR"/>
           </a:p>
@@ -2504,7 +3111,7 @@
           <a:p>
             <a:fld id="{63289F7E-B80B-496E-81B4-D396C37C9454}" type="datetimeFigureOut">
               <a:rPr lang="pt-BR" smtClean="0"/>
-              <a:t>17/04/2026</a:t>
+              <a:t>22/04/2026</a:t>
             </a:fld>
             <a:endParaRPr lang="pt-BR"/>
           </a:p>
@@ -2645,7 +3252,7 @@
           <a:p>
             <a:fld id="{63289F7E-B80B-496E-81B4-D396C37C9454}" type="datetimeFigureOut">
               <a:rPr lang="pt-BR" smtClean="0"/>
-              <a:t>17/04/2026</a:t>
+              <a:t>22/04/2026</a:t>
             </a:fld>
             <a:endParaRPr lang="pt-BR"/>
           </a:p>
@@ -2758,7 +3365,7 @@
           <a:p>
             <a:fld id="{63289F7E-B80B-496E-81B4-D396C37C9454}" type="datetimeFigureOut">
               <a:rPr lang="pt-BR" smtClean="0"/>
-              <a:t>17/04/2026</a:t>
+              <a:t>22/04/2026</a:t>
             </a:fld>
             <a:endParaRPr lang="pt-BR"/>
           </a:p>
@@ -3069,7 +3676,7 @@
           <a:p>
             <a:fld id="{63289F7E-B80B-496E-81B4-D396C37C9454}" type="datetimeFigureOut">
               <a:rPr lang="pt-BR" smtClean="0"/>
-              <a:t>17/04/2026</a:t>
+              <a:t>22/04/2026</a:t>
             </a:fld>
             <a:endParaRPr lang="pt-BR"/>
           </a:p>
@@ -3357,7 +3964,7 @@
           <a:p>
             <a:fld id="{63289F7E-B80B-496E-81B4-D396C37C9454}" type="datetimeFigureOut">
               <a:rPr lang="pt-BR" smtClean="0"/>
-              <a:t>17/04/2026</a:t>
+              <a:t>22/04/2026</a:t>
             </a:fld>
             <a:endParaRPr lang="pt-BR"/>
           </a:p>
@@ -3598,7 +4205,7 @@
           <a:p>
             <a:fld id="{63289F7E-B80B-496E-81B4-D396C37C9454}" type="datetimeFigureOut">
               <a:rPr lang="pt-BR" smtClean="0"/>
-              <a:t>17/04/2026</a:t>
+              <a:t>22/04/2026</a:t>
             </a:fld>
             <a:endParaRPr lang="pt-BR"/>
           </a:p>
@@ -4210,6 +4817,697 @@
   <p:cSld>
     <p:spTree>
       <p:nvGrpSpPr>
+        <p:cNvPr id="1" name="">
+          <a:extLst>
+            <a:ext uri="{FF2B5EF4-FFF2-40B4-BE49-F238E27FC236}">
+              <a16:creationId xmlns:a16="http://schemas.microsoft.com/office/drawing/2014/main" id="{2B0ADE0A-2709-4969-FA9A-1E03D69961E0}"/>
+            </a:ext>
+          </a:extLst>
+        </p:cNvPr>
+        <p:cNvGrpSpPr/>
+        <p:nvPr/>
+      </p:nvGrpSpPr>
+      <p:grpSpPr>
+        <a:xfrm>
+          <a:off x="0" y="0"/>
+          <a:ext cx="0" cy="0"/>
+          <a:chOff x="0" y="0"/>
+          <a:chExt cx="0" cy="0"/>
+        </a:xfrm>
+      </p:grpSpPr>
+      <p:sp>
+        <p:nvSpPr>
+          <p:cNvPr id="2" name="Title 1">
+            <a:extLst>
+              <a:ext uri="{FF2B5EF4-FFF2-40B4-BE49-F238E27FC236}">
+                <a16:creationId xmlns:a16="http://schemas.microsoft.com/office/drawing/2014/main" id="{8733AE6F-314D-C94A-A767-C6F5519A7496}"/>
+              </a:ext>
+            </a:extLst>
+          </p:cNvPr>
+          <p:cNvSpPr>
+            <a:spLocks noGrp="1"/>
+          </p:cNvSpPr>
+          <p:nvPr>
+            <p:ph type="title"/>
+          </p:nvPr>
+        </p:nvSpPr>
+        <p:spPr/>
+        <p:txBody>
+          <a:bodyPr/>
+          <a:lstStyle/>
+          <a:p>
+            <a:r>
+              <a:rPr lang="en-US" dirty="0" err="1"/>
+              <a:t>Conceitos</a:t>
+            </a:r>
+            <a:r>
+              <a:rPr lang="en-US" dirty="0"/>
+              <a:t> </a:t>
+            </a:r>
+            <a:r>
+              <a:rPr lang="en-US" dirty="0" err="1"/>
+              <a:t>fundamentais</a:t>
+            </a:r>
+            <a:r>
+              <a:rPr lang="en-US" dirty="0"/>
+              <a:t> de RL</a:t>
+            </a:r>
+          </a:p>
+        </p:txBody>
+      </p:sp>
+      <p:sp>
+        <p:nvSpPr>
+          <p:cNvPr id="3" name="Content Placeholder 2">
+            <a:extLst>
+              <a:ext uri="{FF2B5EF4-FFF2-40B4-BE49-F238E27FC236}">
+                <a16:creationId xmlns:a16="http://schemas.microsoft.com/office/drawing/2014/main" id="{C8F7CA75-E443-356F-518F-21B4DDB32C98}"/>
+              </a:ext>
+            </a:extLst>
+          </p:cNvPr>
+          <p:cNvSpPr>
+            <a:spLocks noGrp="1"/>
+          </p:cNvSpPr>
+          <p:nvPr>
+            <p:ph idx="1"/>
+          </p:nvPr>
+        </p:nvSpPr>
+        <p:spPr>
+          <a:xfrm>
+            <a:off x="838200" y="1836510"/>
+            <a:ext cx="11168743" cy="5021489"/>
+          </a:xfrm>
+        </p:spPr>
+        <p:txBody>
+          <a:bodyPr>
+            <a:normAutofit lnSpcReduction="10000"/>
+          </a:bodyPr>
+          <a:lstStyle/>
+          <a:p>
+            <a:r>
+              <a:rPr lang="pt-BR" b="1" dirty="0"/>
+              <a:t>Agente:</a:t>
+            </a:r>
+            <a:r>
+              <a:rPr lang="pt-BR" dirty="0"/>
+              <a:t> O tomador de decisão (</a:t>
+            </a:r>
+            <a:r>
+              <a:rPr lang="pt-BR" dirty="0" err="1"/>
+              <a:t>ex</a:t>
+            </a:r>
+            <a:r>
+              <a:rPr lang="pt-BR" dirty="0"/>
+              <a:t>: um robô, um algoritmo de trading).</a:t>
+            </a:r>
+          </a:p>
+          <a:p>
+            <a:r>
+              <a:rPr lang="pt-BR" b="1" dirty="0"/>
+              <a:t>Ambiente:</a:t>
+            </a:r>
+            <a:r>
+              <a:rPr lang="pt-BR" dirty="0"/>
+              <a:t> O mundo onde o agente opera e com o qual interage.</a:t>
+            </a:r>
+          </a:p>
+          <a:p>
+            <a:r>
+              <a:rPr lang="pt-BR" b="1" dirty="0"/>
+              <a:t>Estado ($s$):</a:t>
+            </a:r>
+            <a:r>
+              <a:rPr lang="pt-BR" dirty="0"/>
+              <a:t> A situação atual do agente no ambiente.</a:t>
+            </a:r>
+          </a:p>
+          <a:p>
+            <a:r>
+              <a:rPr lang="pt-BR" b="1" dirty="0"/>
+              <a:t>Ação ($a$):</a:t>
+            </a:r>
+            <a:r>
+              <a:rPr lang="pt-BR" dirty="0"/>
+              <a:t> O que o agente pode fazer.</a:t>
+            </a:r>
+          </a:p>
+          <a:p>
+            <a:r>
+              <a:rPr lang="pt-BR" b="1" dirty="0"/>
+              <a:t>Recompensa ($r$):</a:t>
+            </a:r>
+            <a:r>
+              <a:rPr lang="pt-BR" dirty="0"/>
+              <a:t> O feedback (positivo ou negativo) recebido após uma ação.</a:t>
+            </a:r>
+          </a:p>
+          <a:p>
+            <a:endParaRPr lang="pt-BR" dirty="0"/>
+          </a:p>
+          <a:p>
+            <a:r>
+              <a:rPr lang="pt-BR" dirty="0"/>
+              <a:t>O agente observa o estado, escolhe uma ação, o ambiente muda, e o agente recebe uma recompensa. O objetivo do agente é maximizar a soma total de recompensas ao longo do tempo, não apenas a recompensa imediata.</a:t>
+            </a:r>
+          </a:p>
+          <a:p>
+            <a:endParaRPr lang="en-US" dirty="0"/>
+          </a:p>
+          <a:p>
+            <a:endParaRPr lang="en-US" dirty="0"/>
+          </a:p>
+        </p:txBody>
+      </p:sp>
+    </p:spTree>
+    <p:extLst>
+      <p:ext uri="{BB962C8B-B14F-4D97-AF65-F5344CB8AC3E}">
+        <p14:creationId xmlns:p14="http://schemas.microsoft.com/office/powerpoint/2010/main" val="1250317349"/>
+      </p:ext>
+    </p:extLst>
+  </p:cSld>
+  <p:clrMapOvr>
+    <a:masterClrMapping/>
+  </p:clrMapOvr>
+</p:sld>
+</file>
+
+<file path=ppt/slides/slide11.xml><?xml version="1.0" encoding="utf-8"?>
+<p:sld xmlns:a="http://schemas.openxmlformats.org/drawingml/2006/main" xmlns:r="http://schemas.openxmlformats.org/officeDocument/2006/relationships" xmlns:p="http://schemas.openxmlformats.org/presentationml/2006/main">
+  <p:cSld>
+    <p:spTree>
+      <p:nvGrpSpPr>
+        <p:cNvPr id="1" name=""/>
+        <p:cNvGrpSpPr/>
+        <p:nvPr/>
+      </p:nvGrpSpPr>
+      <p:grpSpPr>
+        <a:xfrm>
+          <a:off x="0" y="0"/>
+          <a:ext cx="0" cy="0"/>
+          <a:chOff x="0" y="0"/>
+          <a:chExt cx="0" cy="0"/>
+        </a:xfrm>
+      </p:grpSpPr>
+      <p:sp>
+        <p:nvSpPr>
+          <p:cNvPr id="2" name="Título 1">
+            <a:extLst>
+              <a:ext uri="{FF2B5EF4-FFF2-40B4-BE49-F238E27FC236}">
+                <a16:creationId xmlns:a16="http://schemas.microsoft.com/office/drawing/2014/main" id="{083FFF02-0FC8-9F0B-AAB0-565FC99EA70D}"/>
+              </a:ext>
+            </a:extLst>
+          </p:cNvPr>
+          <p:cNvSpPr>
+            <a:spLocks noGrp="1"/>
+          </p:cNvSpPr>
+          <p:nvPr>
+            <p:ph type="title"/>
+          </p:nvPr>
+        </p:nvSpPr>
+        <p:spPr/>
+        <p:txBody>
+          <a:bodyPr/>
+          <a:lstStyle/>
+          <a:p>
+            <a:r>
+              <a:rPr lang="pt-BR" dirty="0"/>
+              <a:t>Arquitetura e funcionamento</a:t>
+            </a:r>
+          </a:p>
+        </p:txBody>
+      </p:sp>
+      <p:sp>
+        <p:nvSpPr>
+          <p:cNvPr id="3" name="Espaço Reservado para Conteúdo 2">
+            <a:extLst>
+              <a:ext uri="{FF2B5EF4-FFF2-40B4-BE49-F238E27FC236}">
+                <a16:creationId xmlns:a16="http://schemas.microsoft.com/office/drawing/2014/main" id="{8C5488AE-34B4-EF1D-F674-507FF2FCD122}"/>
+              </a:ext>
+            </a:extLst>
+          </p:cNvPr>
+          <p:cNvSpPr>
+            <a:spLocks noGrp="1"/>
+          </p:cNvSpPr>
+          <p:nvPr>
+            <p:ph idx="1"/>
+          </p:nvPr>
+        </p:nvSpPr>
+        <p:spPr/>
+        <p:txBody>
+          <a:bodyPr/>
+          <a:lstStyle/>
+          <a:p>
+            <a:endParaRPr lang="pt-BR"/>
+          </a:p>
+        </p:txBody>
+      </p:sp>
+    </p:spTree>
+    <p:extLst>
+      <p:ext uri="{BB962C8B-B14F-4D97-AF65-F5344CB8AC3E}">
+        <p14:creationId xmlns:p14="http://schemas.microsoft.com/office/powerpoint/2010/main" val="1547259554"/>
+      </p:ext>
+    </p:extLst>
+  </p:cSld>
+  <p:clrMapOvr>
+    <a:masterClrMapping/>
+  </p:clrMapOvr>
+</p:sld>
+</file>
+
+<file path=ppt/slides/slide12.xml><?xml version="1.0" encoding="utf-8"?>
+<p:sld xmlns:a="http://schemas.openxmlformats.org/drawingml/2006/main" xmlns:r="http://schemas.openxmlformats.org/officeDocument/2006/relationships" xmlns:p="http://schemas.openxmlformats.org/presentationml/2006/main">
+  <p:cSld>
+    <p:spTree>
+      <p:nvGrpSpPr>
+        <p:cNvPr id="1" name="">
+          <a:extLst>
+            <a:ext uri="{FF2B5EF4-FFF2-40B4-BE49-F238E27FC236}">
+              <a16:creationId xmlns:a16="http://schemas.microsoft.com/office/drawing/2014/main" id="{E1C9F56A-97FC-7CCD-E5BA-3B5E230AD9AB}"/>
+            </a:ext>
+          </a:extLst>
+        </p:cNvPr>
+        <p:cNvGrpSpPr/>
+        <p:nvPr/>
+      </p:nvGrpSpPr>
+      <p:grpSpPr>
+        <a:xfrm>
+          <a:off x="0" y="0"/>
+          <a:ext cx="0" cy="0"/>
+          <a:chOff x="0" y="0"/>
+          <a:chExt cx="0" cy="0"/>
+        </a:xfrm>
+      </p:grpSpPr>
+      <p:sp>
+        <p:nvSpPr>
+          <p:cNvPr id="2" name="Título 1">
+            <a:extLst>
+              <a:ext uri="{FF2B5EF4-FFF2-40B4-BE49-F238E27FC236}">
+                <a16:creationId xmlns:a16="http://schemas.microsoft.com/office/drawing/2014/main" id="{A979DAB9-0612-F0CD-7BB1-AF52B98B3210}"/>
+              </a:ext>
+            </a:extLst>
+          </p:cNvPr>
+          <p:cNvSpPr>
+            <a:spLocks noGrp="1"/>
+          </p:cNvSpPr>
+          <p:nvPr>
+            <p:ph type="title"/>
+          </p:nvPr>
+        </p:nvSpPr>
+        <p:spPr/>
+        <p:txBody>
+          <a:bodyPr/>
+          <a:lstStyle/>
+          <a:p>
+            <a:r>
+              <a:rPr lang="pt-BR" dirty="0"/>
+              <a:t>Treinamento e otimização</a:t>
+            </a:r>
+          </a:p>
+        </p:txBody>
+      </p:sp>
+      <p:sp>
+        <p:nvSpPr>
+          <p:cNvPr id="3" name="Espaço Reservado para Conteúdo 2">
+            <a:extLst>
+              <a:ext uri="{FF2B5EF4-FFF2-40B4-BE49-F238E27FC236}">
+                <a16:creationId xmlns:a16="http://schemas.microsoft.com/office/drawing/2014/main" id="{F22F88A5-87D1-340F-853F-8C2ED8F8C877}"/>
+              </a:ext>
+            </a:extLst>
+          </p:cNvPr>
+          <p:cNvSpPr>
+            <a:spLocks noGrp="1"/>
+          </p:cNvSpPr>
+          <p:nvPr>
+            <p:ph idx="1"/>
+          </p:nvPr>
+        </p:nvSpPr>
+        <p:spPr/>
+        <p:txBody>
+          <a:bodyPr/>
+          <a:lstStyle/>
+          <a:p>
+            <a:endParaRPr lang="pt-BR"/>
+          </a:p>
+        </p:txBody>
+      </p:sp>
+    </p:spTree>
+    <p:extLst>
+      <p:ext uri="{BB962C8B-B14F-4D97-AF65-F5344CB8AC3E}">
+        <p14:creationId xmlns:p14="http://schemas.microsoft.com/office/powerpoint/2010/main" val="3906980817"/>
+      </p:ext>
+    </p:extLst>
+  </p:cSld>
+  <p:clrMapOvr>
+    <a:masterClrMapping/>
+  </p:clrMapOvr>
+</p:sld>
+</file>
+
+<file path=ppt/slides/slide13.xml><?xml version="1.0" encoding="utf-8"?>
+<p:sld xmlns:a="http://schemas.openxmlformats.org/drawingml/2006/main" xmlns:r="http://schemas.openxmlformats.org/officeDocument/2006/relationships" xmlns:p="http://schemas.openxmlformats.org/presentationml/2006/main">
+  <p:cSld>
+    <p:spTree>
+      <p:nvGrpSpPr>
+        <p:cNvPr id="1" name="">
+          <a:extLst>
+            <a:ext uri="{FF2B5EF4-FFF2-40B4-BE49-F238E27FC236}">
+              <a16:creationId xmlns:a16="http://schemas.microsoft.com/office/drawing/2014/main" id="{B28A9759-CA4F-DA4F-85C2-F6E51DCED2D9}"/>
+            </a:ext>
+          </a:extLst>
+        </p:cNvPr>
+        <p:cNvGrpSpPr/>
+        <p:nvPr/>
+      </p:nvGrpSpPr>
+      <p:grpSpPr>
+        <a:xfrm>
+          <a:off x="0" y="0"/>
+          <a:ext cx="0" cy="0"/>
+          <a:chOff x="0" y="0"/>
+          <a:chExt cx="0" cy="0"/>
+        </a:xfrm>
+      </p:grpSpPr>
+      <p:sp>
+        <p:nvSpPr>
+          <p:cNvPr id="2" name="Título 1">
+            <a:extLst>
+              <a:ext uri="{FF2B5EF4-FFF2-40B4-BE49-F238E27FC236}">
+                <a16:creationId xmlns:a16="http://schemas.microsoft.com/office/drawing/2014/main" id="{072F732D-34CE-6153-324F-D7F6821577F0}"/>
+              </a:ext>
+            </a:extLst>
+          </p:cNvPr>
+          <p:cNvSpPr>
+            <a:spLocks noGrp="1"/>
+          </p:cNvSpPr>
+          <p:nvPr>
+            <p:ph type="title"/>
+          </p:nvPr>
+        </p:nvSpPr>
+        <p:spPr/>
+        <p:txBody>
+          <a:bodyPr/>
+          <a:lstStyle/>
+          <a:p>
+            <a:r>
+              <a:rPr lang="pt-BR" dirty="0"/>
+              <a:t>Vantagens e desvantagens</a:t>
+            </a:r>
+          </a:p>
+        </p:txBody>
+      </p:sp>
+      <p:sp>
+        <p:nvSpPr>
+          <p:cNvPr id="3" name="Espaço Reservado para Conteúdo 2">
+            <a:extLst>
+              <a:ext uri="{FF2B5EF4-FFF2-40B4-BE49-F238E27FC236}">
+                <a16:creationId xmlns:a16="http://schemas.microsoft.com/office/drawing/2014/main" id="{62A55622-8E11-E5D7-8EAF-7AE2CCAA3321}"/>
+              </a:ext>
+            </a:extLst>
+          </p:cNvPr>
+          <p:cNvSpPr>
+            <a:spLocks noGrp="1"/>
+          </p:cNvSpPr>
+          <p:nvPr>
+            <p:ph idx="1"/>
+          </p:nvPr>
+        </p:nvSpPr>
+        <p:spPr/>
+        <p:txBody>
+          <a:bodyPr/>
+          <a:lstStyle/>
+          <a:p>
+            <a:endParaRPr lang="pt-BR"/>
+          </a:p>
+        </p:txBody>
+      </p:sp>
+    </p:spTree>
+    <p:extLst>
+      <p:ext uri="{BB962C8B-B14F-4D97-AF65-F5344CB8AC3E}">
+        <p14:creationId xmlns:p14="http://schemas.microsoft.com/office/powerpoint/2010/main" val="1521811257"/>
+      </p:ext>
+    </p:extLst>
+  </p:cSld>
+  <p:clrMapOvr>
+    <a:masterClrMapping/>
+  </p:clrMapOvr>
+</p:sld>
+</file>
+
+<file path=ppt/slides/slide14.xml><?xml version="1.0" encoding="utf-8"?>
+<p:sld xmlns:a="http://schemas.openxmlformats.org/drawingml/2006/main" xmlns:r="http://schemas.openxmlformats.org/officeDocument/2006/relationships" xmlns:p="http://schemas.openxmlformats.org/presentationml/2006/main">
+  <p:cSld>
+    <p:spTree>
+      <p:nvGrpSpPr>
+        <p:cNvPr id="1" name=""/>
+        <p:cNvGrpSpPr/>
+        <p:nvPr/>
+      </p:nvGrpSpPr>
+      <p:grpSpPr>
+        <a:xfrm>
+          <a:off x="0" y="0"/>
+          <a:ext cx="0" cy="0"/>
+          <a:chOff x="0" y="0"/>
+          <a:chExt cx="0" cy="0"/>
+        </a:xfrm>
+      </p:grpSpPr>
+      <p:sp>
+        <p:nvSpPr>
+          <p:cNvPr id="2" name="Título 1">
+            <a:extLst>
+              <a:ext uri="{FF2B5EF4-FFF2-40B4-BE49-F238E27FC236}">
+                <a16:creationId xmlns:a16="http://schemas.microsoft.com/office/drawing/2014/main" id="{B9E502FC-4440-F5DA-F299-69CD15E702AE}"/>
+              </a:ext>
+            </a:extLst>
+          </p:cNvPr>
+          <p:cNvSpPr>
+            <a:spLocks noGrp="1"/>
+          </p:cNvSpPr>
+          <p:nvPr>
+            <p:ph type="title"/>
+          </p:nvPr>
+        </p:nvSpPr>
+        <p:spPr/>
+        <p:txBody>
+          <a:bodyPr/>
+          <a:lstStyle/>
+          <a:p>
+            <a:r>
+              <a:rPr lang="pt-BR" dirty="0"/>
+              <a:t>Exemplo(s) de aplicação</a:t>
+            </a:r>
+          </a:p>
+        </p:txBody>
+      </p:sp>
+      <p:sp>
+        <p:nvSpPr>
+          <p:cNvPr id="3" name="Espaço Reservado para Conteúdo 2">
+            <a:extLst>
+              <a:ext uri="{FF2B5EF4-FFF2-40B4-BE49-F238E27FC236}">
+                <a16:creationId xmlns:a16="http://schemas.microsoft.com/office/drawing/2014/main" id="{69359096-6B47-BEA3-55AD-95F90CDC8489}"/>
+              </a:ext>
+            </a:extLst>
+          </p:cNvPr>
+          <p:cNvSpPr>
+            <a:spLocks noGrp="1"/>
+          </p:cNvSpPr>
+          <p:nvPr>
+            <p:ph idx="1"/>
+          </p:nvPr>
+        </p:nvSpPr>
+        <p:spPr/>
+        <p:txBody>
+          <a:bodyPr/>
+          <a:lstStyle/>
+          <a:p>
+            <a:endParaRPr lang="pt-BR"/>
+          </a:p>
+        </p:txBody>
+      </p:sp>
+    </p:spTree>
+    <p:extLst>
+      <p:ext uri="{BB962C8B-B14F-4D97-AF65-F5344CB8AC3E}">
+        <p14:creationId xmlns:p14="http://schemas.microsoft.com/office/powerpoint/2010/main" val="1532530965"/>
+      </p:ext>
+    </p:extLst>
+  </p:cSld>
+  <p:clrMapOvr>
+    <a:masterClrMapping/>
+  </p:clrMapOvr>
+</p:sld>
+</file>
+
+<file path=ppt/slides/slide15.xml><?xml version="1.0" encoding="utf-8"?>
+<p:sld xmlns:a="http://schemas.openxmlformats.org/drawingml/2006/main" xmlns:r="http://schemas.openxmlformats.org/officeDocument/2006/relationships" xmlns:p="http://schemas.openxmlformats.org/presentationml/2006/main">
+  <p:cSld>
+    <p:spTree>
+      <p:nvGrpSpPr>
+        <p:cNvPr id="1" name=""/>
+        <p:cNvGrpSpPr/>
+        <p:nvPr/>
+      </p:nvGrpSpPr>
+      <p:grpSpPr>
+        <a:xfrm>
+          <a:off x="0" y="0"/>
+          <a:ext cx="0" cy="0"/>
+          <a:chOff x="0" y="0"/>
+          <a:chExt cx="0" cy="0"/>
+        </a:xfrm>
+      </p:grpSpPr>
+      <p:sp>
+        <p:nvSpPr>
+          <p:cNvPr id="2" name="Título 1">
+            <a:extLst>
+              <a:ext uri="{FF2B5EF4-FFF2-40B4-BE49-F238E27FC236}">
+                <a16:creationId xmlns:a16="http://schemas.microsoft.com/office/drawing/2014/main" id="{B7EBC8F7-03EF-338A-A90B-280A41AF9688}"/>
+              </a:ext>
+            </a:extLst>
+          </p:cNvPr>
+          <p:cNvSpPr>
+            <a:spLocks noGrp="1"/>
+          </p:cNvSpPr>
+          <p:nvPr>
+            <p:ph type="title"/>
+          </p:nvPr>
+        </p:nvSpPr>
+        <p:spPr/>
+        <p:txBody>
+          <a:bodyPr/>
+          <a:lstStyle/>
+          <a:p>
+            <a:r>
+              <a:rPr lang="pt-BR" dirty="0"/>
+              <a:t>Comparação com outros algoritmos</a:t>
+            </a:r>
+          </a:p>
+        </p:txBody>
+      </p:sp>
+      <p:sp>
+        <p:nvSpPr>
+          <p:cNvPr id="3" name="Espaço Reservado para Conteúdo 2">
+            <a:extLst>
+              <a:ext uri="{FF2B5EF4-FFF2-40B4-BE49-F238E27FC236}">
+                <a16:creationId xmlns:a16="http://schemas.microsoft.com/office/drawing/2014/main" id="{C525BCE7-C19D-7DDA-016A-E3016C398CBA}"/>
+              </a:ext>
+            </a:extLst>
+          </p:cNvPr>
+          <p:cNvSpPr>
+            <a:spLocks noGrp="1"/>
+          </p:cNvSpPr>
+          <p:nvPr>
+            <p:ph idx="1"/>
+          </p:nvPr>
+        </p:nvSpPr>
+        <p:spPr/>
+        <p:txBody>
+          <a:bodyPr/>
+          <a:lstStyle/>
+          <a:p>
+            <a:endParaRPr lang="pt-BR"/>
+          </a:p>
+        </p:txBody>
+      </p:sp>
+    </p:spTree>
+    <p:extLst>
+      <p:ext uri="{BB962C8B-B14F-4D97-AF65-F5344CB8AC3E}">
+        <p14:creationId xmlns:p14="http://schemas.microsoft.com/office/powerpoint/2010/main" val="3601469261"/>
+      </p:ext>
+    </p:extLst>
+  </p:cSld>
+  <p:clrMapOvr>
+    <a:masterClrMapping/>
+  </p:clrMapOvr>
+</p:sld>
+</file>
+
+<file path=ppt/slides/slide16.xml><?xml version="1.0" encoding="utf-8"?>
+<p:sld xmlns:a="http://schemas.openxmlformats.org/drawingml/2006/main" xmlns:r="http://schemas.openxmlformats.org/officeDocument/2006/relationships" xmlns:p="http://schemas.openxmlformats.org/presentationml/2006/main">
+  <p:cSld>
+    <p:spTree>
+      <p:nvGrpSpPr>
+        <p:cNvPr id="1" name=""/>
+        <p:cNvGrpSpPr/>
+        <p:nvPr/>
+      </p:nvGrpSpPr>
+      <p:grpSpPr>
+        <a:xfrm>
+          <a:off x="0" y="0"/>
+          <a:ext cx="0" cy="0"/>
+          <a:chOff x="0" y="0"/>
+          <a:chExt cx="0" cy="0"/>
+        </a:xfrm>
+      </p:grpSpPr>
+      <p:sp>
+        <p:nvSpPr>
+          <p:cNvPr id="4" name="Título 1">
+            <a:extLst>
+              <a:ext uri="{FF2B5EF4-FFF2-40B4-BE49-F238E27FC236}">
+                <a16:creationId xmlns:a16="http://schemas.microsoft.com/office/drawing/2014/main" id="{32666AC8-2E17-4DB4-B0F5-60C640CCFD2E}"/>
+              </a:ext>
+            </a:extLst>
+          </p:cNvPr>
+          <p:cNvSpPr txBox="1">
+            <a:spLocks/>
+          </p:cNvSpPr>
+          <p:nvPr/>
+        </p:nvSpPr>
+        <p:spPr>
+          <a:xfrm>
+            <a:off x="1431533" y="2720526"/>
+            <a:ext cx="9144000" cy="1029541"/>
+          </a:xfrm>
+          <a:prstGeom prst="rect">
+            <a:avLst/>
+          </a:prstGeom>
+        </p:spPr>
+        <p:txBody>
+          <a:bodyPr vert="horz" lIns="91440" tIns="45720" rIns="91440" bIns="45720" rtlCol="0" anchor="ctr">
+            <a:normAutofit/>
+          </a:bodyPr>
+          <a:lstStyle>
+            <a:lvl1pPr algn="l" defTabSz="914400" rtl="0" eaLnBrk="1" latinLnBrk="0" hangingPunct="1">
+              <a:lnSpc>
+                <a:spcPct val="90000"/>
+              </a:lnSpc>
+              <a:spcBef>
+                <a:spcPct val="0"/>
+              </a:spcBef>
+              <a:buNone/>
+              <a:defRPr sz="4400" kern="1200">
+                <a:solidFill>
+                  <a:schemeClr val="tx1"/>
+                </a:solidFill>
+                <a:latin typeface="+mj-lt"/>
+                <a:ea typeface="+mj-ea"/>
+                <a:cs typeface="+mj-cs"/>
+              </a:defRPr>
+            </a:lvl1pPr>
+          </a:lstStyle>
+          <a:p>
+            <a:pPr algn="ctr"/>
+            <a:r>
+              <a:rPr lang="pt-BR" sz="6600" dirty="0"/>
+              <a:t>Perguntas?</a:t>
+            </a:r>
+            <a:endParaRPr lang="pt-BR" sz="6600" b="1" i="1" dirty="0"/>
+          </a:p>
+        </p:txBody>
+      </p:sp>
+    </p:spTree>
+    <p:extLst>
+      <p:ext uri="{BB962C8B-B14F-4D97-AF65-F5344CB8AC3E}">
+        <p14:creationId xmlns:p14="http://schemas.microsoft.com/office/powerpoint/2010/main" val="3773005660"/>
+      </p:ext>
+    </p:extLst>
+  </p:cSld>
+  <p:clrMapOvr>
+    <a:masterClrMapping/>
+  </p:clrMapOvr>
+</p:sld>
+</file>
+
+<file path=ppt/slides/slide17.xml><?xml version="1.0" encoding="utf-8"?>
+<p:sld xmlns:a="http://schemas.openxmlformats.org/drawingml/2006/main" xmlns:r="http://schemas.openxmlformats.org/officeDocument/2006/relationships" xmlns:p="http://schemas.openxmlformats.org/presentationml/2006/main">
+  <p:cSld>
+    <p:spTree>
+      <p:nvGrpSpPr>
         <p:cNvPr id="1" name=""/>
         <p:cNvGrpSpPr/>
         <p:nvPr/>
@@ -4288,7 +5586,7 @@
 </p:sld>
 </file>
 
-<file path=ppt/slides/slide11.xml><?xml version="1.0" encoding="utf-8"?>
+<file path=ppt/slides/slide18.xml><?xml version="1.0" encoding="utf-8"?>
 <p:sld xmlns:a="http://schemas.openxmlformats.org/drawingml/2006/main" xmlns:r="http://schemas.openxmlformats.org/officeDocument/2006/relationships" xmlns:p="http://schemas.openxmlformats.org/presentationml/2006/main">
   <p:cSld>
     <p:spTree>
@@ -4393,61 +5691,131 @@
       </p:grpSpPr>
       <p:sp>
         <p:nvSpPr>
-          <p:cNvPr id="2" name="Título 1">
-            <a:extLst>
-              <a:ext uri="{FF2B5EF4-FFF2-40B4-BE49-F238E27FC236}">
-                <a16:creationId xmlns:a16="http://schemas.microsoft.com/office/drawing/2014/main" id="{7F5FF925-67DE-CC62-E869-C6E3C1D771E6}"/>
-              </a:ext>
-            </a:extLst>
-          </p:cNvPr>
-          <p:cNvSpPr>
-            <a:spLocks noGrp="1"/>
-          </p:cNvSpPr>
-          <p:nvPr>
-            <p:ph type="title"/>
-          </p:nvPr>
-        </p:nvSpPr>
-        <p:spPr/>
-        <p:txBody>
-          <a:bodyPr/>
+          <p:cNvPr id="3" name="Content Placeholder 2">
+            <a:extLst>
+              <a:ext uri="{FF2B5EF4-FFF2-40B4-BE49-F238E27FC236}">
+                <a16:creationId xmlns:a16="http://schemas.microsoft.com/office/drawing/2014/main" id="{59B6A74E-8855-B416-1D2B-EC3735DC0079}"/>
+              </a:ext>
+            </a:extLst>
+          </p:cNvPr>
+          <p:cNvSpPr>
+            <a:spLocks noGrp="1"/>
+          </p:cNvSpPr>
+          <p:nvPr>
+            <p:ph idx="1"/>
+          </p:nvPr>
+        </p:nvSpPr>
+        <p:spPr>
+          <a:xfrm>
+            <a:off x="6716486" y="1706903"/>
+            <a:ext cx="5323115" cy="3944937"/>
+          </a:xfrm>
+        </p:spPr>
+        <p:txBody>
+          <a:bodyPr>
+            <a:normAutofit/>
+          </a:bodyPr>
           <a:lstStyle/>
           <a:p>
             <a:r>
               <a:rPr lang="pt-BR" dirty="0"/>
-              <a:t>Introdução</a:t>
-            </a:r>
-          </a:p>
-        </p:txBody>
-      </p:sp>
-      <p:sp>
-        <p:nvSpPr>
-          <p:cNvPr id="3" name="Espaço Reservado para Conteúdo 2">
-            <a:extLst>
-              <a:ext uri="{FF2B5EF4-FFF2-40B4-BE49-F238E27FC236}">
-                <a16:creationId xmlns:a16="http://schemas.microsoft.com/office/drawing/2014/main" id="{7DA84068-671A-9D40-4F76-2C57E4F720C2}"/>
-              </a:ext>
-            </a:extLst>
-          </p:cNvPr>
-          <p:cNvSpPr>
-            <a:spLocks noGrp="1"/>
-          </p:cNvSpPr>
-          <p:nvPr>
-            <p:ph idx="1"/>
-          </p:nvPr>
-        </p:nvSpPr>
-        <p:spPr/>
-        <p:txBody>
-          <a:bodyPr/>
-          <a:lstStyle/>
-          <a:p>
-            <a:endParaRPr lang="pt-BR" dirty="0"/>
-          </a:p>
-        </p:txBody>
-      </p:sp>
+              <a:t>As máquinas podem aprender a tomar decisões ótimas sozinhas sem supervisão (</a:t>
+            </a:r>
+            <a:r>
+              <a:rPr lang="pt-BR" i="1" dirty="0"/>
+              <a:t>dataset</a:t>
+            </a:r>
+            <a:r>
+              <a:rPr lang="pt-BR" dirty="0"/>
+              <a:t>), apenas por tentativa e erro.</a:t>
+            </a:r>
+          </a:p>
+          <a:p>
+            <a:r>
+              <a:rPr lang="pt-BR" dirty="0"/>
+              <a:t>Esse é o coração do </a:t>
+            </a:r>
+            <a:r>
+              <a:rPr lang="pt-BR" i="1" dirty="0" err="1"/>
+              <a:t>reinforcement</a:t>
+            </a:r>
+            <a:r>
+              <a:rPr lang="pt-BR" i="1" dirty="0"/>
+              <a:t> learning</a:t>
+            </a:r>
+            <a:r>
+              <a:rPr lang="pt-BR" dirty="0"/>
+              <a:t> (RL). </a:t>
+            </a:r>
+          </a:p>
+          <a:p>
+            <a:r>
+              <a:rPr lang="pt-BR" dirty="0"/>
+              <a:t>Nessa aula, aprenderemos o funcionamento do algoritmo mais clássicos da área: o </a:t>
+            </a:r>
+            <a:r>
+              <a:rPr lang="pt-BR" dirty="0" err="1"/>
+              <a:t>Q-learning</a:t>
+            </a:r>
+            <a:r>
+              <a:rPr lang="pt-BR" dirty="0"/>
+              <a:t>.</a:t>
+            </a:r>
+            <a:endParaRPr lang="en-US" dirty="0"/>
+          </a:p>
+        </p:txBody>
+      </p:sp>
+      <p:pic>
+        <p:nvPicPr>
+          <p:cNvPr id="1026" name="Picture 2" descr="Reinforcement Learning">
+            <a:extLst>
+              <a:ext uri="{FF2B5EF4-FFF2-40B4-BE49-F238E27FC236}">
+                <a16:creationId xmlns:a16="http://schemas.microsoft.com/office/drawing/2014/main" id="{5526EDB3-366A-5FFB-4A2D-BC3494C1E889}"/>
+              </a:ext>
+            </a:extLst>
+          </p:cNvPr>
+          <p:cNvPicPr>
+            <a:picLocks noChangeAspect="1" noChangeArrowheads="1"/>
+          </p:cNvPicPr>
+          <p:nvPr/>
+        </p:nvPicPr>
+        <p:blipFill rotWithShape="1">
+          <a:blip r:embed="rId2">
+            <a:extLst>
+              <a:ext uri="{28A0092B-C50C-407E-A947-70E740481C1C}">
+                <a14:useLocalDpi xmlns:a14="http://schemas.microsoft.com/office/drawing/2010/main" val="0"/>
+              </a:ext>
+            </a:extLst>
+          </a:blip>
+          <a:srcRect l="4086" r="8204"/>
+          <a:stretch>
+            <a:fillRect/>
+          </a:stretch>
+        </p:blipFill>
+        <p:spPr bwMode="auto">
+          <a:xfrm>
+            <a:off x="152399" y="1565389"/>
+            <a:ext cx="6161315" cy="3944937"/>
+          </a:xfrm>
+          <a:prstGeom prst="rect">
+            <a:avLst/>
+          </a:prstGeom>
+          <a:noFill/>
+          <a:extLst>
+            <a:ext uri="{909E8E84-426E-40DD-AFC4-6F175D3DCCD1}">
+              <a14:hiddenFill xmlns:a14="http://schemas.microsoft.com/office/drawing/2010/main">
+                <a:solidFill>
+                  <a:srgbClr val="FFFFFF"/>
+                </a:solidFill>
+              </a14:hiddenFill>
+            </a:ext>
+          </a:extLst>
+        </p:spPr>
+      </p:pic>
     </p:spTree>
     <p:extLst>
       <p:ext uri="{BB962C8B-B14F-4D97-AF65-F5344CB8AC3E}">
-        <p14:creationId xmlns:p14="http://schemas.microsoft.com/office/powerpoint/2010/main" val="364118245"/>
+        <p14:creationId xmlns:p14="http://schemas.microsoft.com/office/powerpoint/2010/main" val="3459651041"/>
       </p:ext>
     </p:extLst>
   </p:cSld>
@@ -4479,7 +5847,7 @@
           <p:cNvPr id="2" name="Título 1">
             <a:extLst>
               <a:ext uri="{FF2B5EF4-FFF2-40B4-BE49-F238E27FC236}">
-                <a16:creationId xmlns:a16="http://schemas.microsoft.com/office/drawing/2014/main" id="{94AB8438-E56E-2412-517C-8456E4CA773C}"/>
+                <a16:creationId xmlns:a16="http://schemas.microsoft.com/office/drawing/2014/main" id="{7F5FF925-67DE-CC62-E869-C6E3C1D771E6}"/>
               </a:ext>
             </a:extLst>
           </p:cNvPr>
@@ -4497,7 +5865,19 @@
           <a:p>
             <a:r>
               <a:rPr lang="pt-BR" dirty="0"/>
-              <a:t>Fundamentação teórica</a:t>
+              <a:t>O que é </a:t>
+            </a:r>
+            <a:r>
+              <a:rPr lang="pt-BR" i="1" dirty="0" err="1"/>
+              <a:t>reinforcement</a:t>
+            </a:r>
+            <a:r>
+              <a:rPr lang="pt-BR" i="1" dirty="0"/>
+              <a:t> learning</a:t>
+            </a:r>
+            <a:r>
+              <a:rPr lang="pt-BR" dirty="0"/>
+              <a:t>?</a:t>
             </a:r>
           </a:p>
         </p:txBody>
@@ -4507,7 +5887,7 @@
           <p:cNvPr id="3" name="Espaço Reservado para Conteúdo 2">
             <a:extLst>
               <a:ext uri="{FF2B5EF4-FFF2-40B4-BE49-F238E27FC236}">
-                <a16:creationId xmlns:a16="http://schemas.microsoft.com/office/drawing/2014/main" id="{F7E2B09C-6D56-4C9F-A364-B904CCE2F1A0}"/>
+                <a16:creationId xmlns:a16="http://schemas.microsoft.com/office/drawing/2014/main" id="{7DA84068-671A-9D40-4F76-2C57E4F720C2}"/>
               </a:ext>
             </a:extLst>
           </p:cNvPr>
@@ -4518,19 +5898,104 @@
             <p:ph idx="1"/>
           </p:nvPr>
         </p:nvSpPr>
-        <p:spPr/>
-        <p:txBody>
-          <a:bodyPr/>
-          <a:lstStyle/>
-          <a:p>
-            <a:endParaRPr lang="pt-BR"/>
-          </a:p>
-        </p:txBody>
-      </p:sp>
+        <p:spPr>
+          <a:xfrm>
+            <a:off x="838201" y="1825624"/>
+            <a:ext cx="11255828" cy="5032375"/>
+          </a:xfrm>
+        </p:spPr>
+        <p:txBody>
+          <a:bodyPr>
+            <a:normAutofit/>
+          </a:bodyPr>
+          <a:lstStyle/>
+          <a:p>
+            <a:r>
+              <a:rPr lang="pt-BR" dirty="0"/>
+              <a:t>É um dos paradigmas de aprendizado de </a:t>
+            </a:r>
+            <a:r>
+              <a:rPr lang="pt-BR" i="1" dirty="0"/>
+              <a:t>machine learning</a:t>
+            </a:r>
+            <a:r>
+              <a:rPr lang="pt-BR" dirty="0"/>
+              <a:t> focado em como tomar </a:t>
+            </a:r>
+            <a:r>
+              <a:rPr lang="pt-BR" i="1" dirty="0"/>
+              <a:t>ações</a:t>
+            </a:r>
+            <a:r>
+              <a:rPr lang="pt-BR" dirty="0"/>
+              <a:t> para maximizar uma </a:t>
+            </a:r>
+            <a:r>
+              <a:rPr lang="pt-BR" i="1" dirty="0"/>
+              <a:t>recompensa</a:t>
+            </a:r>
+            <a:r>
+              <a:rPr lang="pt-BR" dirty="0"/>
+              <a:t> futura.</a:t>
+            </a:r>
+            <a:endParaRPr lang="en-US" dirty="0"/>
+          </a:p>
+          <a:p>
+            <a:endParaRPr lang="pt-BR" dirty="0"/>
+          </a:p>
+        </p:txBody>
+      </p:sp>
+      <p:pic>
+        <p:nvPicPr>
+          <p:cNvPr id="2051" name="Picture 3" descr="Understanding the Pillars of Machine Learning: Supervised, Unsupervised,  and Reinforcement Learning">
+            <a:extLst>
+              <a:ext uri="{FF2B5EF4-FFF2-40B4-BE49-F238E27FC236}">
+                <a16:creationId xmlns:a16="http://schemas.microsoft.com/office/drawing/2014/main" id="{BDF6F402-9EED-6D9D-33D9-227B654D168D}"/>
+              </a:ext>
+            </a:extLst>
+          </p:cNvPr>
+          <p:cNvPicPr>
+            <a:picLocks noChangeAspect="1" noChangeArrowheads="1"/>
+          </p:cNvPicPr>
+          <p:nvPr/>
+        </p:nvPicPr>
+        <p:blipFill rotWithShape="1">
+          <a:blip r:embed="rId3">
+            <a:extLst>
+              <a:ext uri="{28A0092B-C50C-407E-A947-70E740481C1C}">
+                <a14:useLocalDpi xmlns:a14="http://schemas.microsoft.com/office/drawing/2010/main" val="0"/>
+              </a:ext>
+            </a:extLst>
+          </a:blip>
+          <a:srcRect t="5692" b="3060"/>
+          <a:stretch>
+            <a:fillRect/>
+          </a:stretch>
+        </p:blipFill>
+        <p:spPr bwMode="auto">
+          <a:xfrm>
+            <a:off x="2345028" y="2786743"/>
+            <a:ext cx="7501943" cy="3853543"/>
+          </a:xfrm>
+          <a:prstGeom prst="rect">
+            <a:avLst/>
+          </a:prstGeom>
+          <a:noFill/>
+          <a:extLst>
+            <a:ext uri="{909E8E84-426E-40DD-AFC4-6F175D3DCCD1}">
+              <a14:hiddenFill xmlns:a14="http://schemas.microsoft.com/office/drawing/2010/main">
+                <a:solidFill>
+                  <a:srgbClr val="FFFFFF"/>
+                </a:solidFill>
+              </a14:hiddenFill>
+            </a:ext>
+          </a:extLst>
+        </p:spPr>
+      </p:pic>
     </p:spTree>
     <p:extLst>
       <p:ext uri="{BB962C8B-B14F-4D97-AF65-F5344CB8AC3E}">
-        <p14:creationId xmlns:p14="http://schemas.microsoft.com/office/powerpoint/2010/main" val="3187071590"/>
+        <p14:creationId xmlns:p14="http://schemas.microsoft.com/office/powerpoint/2010/main" val="364118245"/>
       </p:ext>
     </p:extLst>
   </p:cSld>
@@ -4545,7 +6010,13 @@
   <p:cSld>
     <p:spTree>
       <p:nvGrpSpPr>
-        <p:cNvPr id="1" name=""/>
+        <p:cNvPr id="1" name="">
+          <a:extLst>
+            <a:ext uri="{FF2B5EF4-FFF2-40B4-BE49-F238E27FC236}">
+              <a16:creationId xmlns:a16="http://schemas.microsoft.com/office/drawing/2014/main" id="{A370B64E-1F58-2FF0-BFB3-B1D955875AD5}"/>
+            </a:ext>
+          </a:extLst>
+        </p:cNvPr>
         <p:cNvGrpSpPr/>
         <p:nvPr/>
       </p:nvGrpSpPr>
@@ -4562,7 +6033,7 @@
           <p:cNvPr id="2" name="Título 1">
             <a:extLst>
               <a:ext uri="{FF2B5EF4-FFF2-40B4-BE49-F238E27FC236}">
-                <a16:creationId xmlns:a16="http://schemas.microsoft.com/office/drawing/2014/main" id="{083FFF02-0FC8-9F0B-AAB0-565FC99EA70D}"/>
+                <a16:creationId xmlns:a16="http://schemas.microsoft.com/office/drawing/2014/main" id="{86CC3BAE-52FC-3697-DB30-5B05B346937E}"/>
               </a:ext>
             </a:extLst>
           </p:cNvPr>
@@ -4580,8 +6051,9 @@
           <a:p>
             <a:r>
               <a:rPr lang="pt-BR" dirty="0"/>
-              <a:t>Arquitetura e funcionamento</a:t>
-            </a:r>
+              <a:t>Diferenças chave entre os paradigmas</a:t>
+            </a:r>
+            <a:endParaRPr lang="pt-BR" i="1" dirty="0"/>
           </a:p>
         </p:txBody>
       </p:sp>
@@ -4590,7 +6062,7 @@
           <p:cNvPr id="3" name="Espaço Reservado para Conteúdo 2">
             <a:extLst>
               <a:ext uri="{FF2B5EF4-FFF2-40B4-BE49-F238E27FC236}">
-                <a16:creationId xmlns:a16="http://schemas.microsoft.com/office/drawing/2014/main" id="{8C5488AE-34B4-EF1D-F674-507FF2FCD122}"/>
+                <a16:creationId xmlns:a16="http://schemas.microsoft.com/office/drawing/2014/main" id="{0A06D34D-8885-14BC-AF7E-F271D7D63333}"/>
               </a:ext>
             </a:extLst>
           </p:cNvPr>
@@ -4601,19 +6073,111 @@
             <p:ph idx="1"/>
           </p:nvPr>
         </p:nvSpPr>
-        <p:spPr/>
-        <p:txBody>
-          <a:bodyPr/>
-          <a:lstStyle/>
-          <a:p>
-            <a:endParaRPr lang="pt-BR"/>
-          </a:p>
-        </p:txBody>
-      </p:sp>
+        <p:spPr>
+          <a:xfrm>
+            <a:off x="4691744" y="1825624"/>
+            <a:ext cx="7391400" cy="5032375"/>
+          </a:xfrm>
+        </p:spPr>
+        <p:txBody>
+          <a:bodyPr>
+            <a:normAutofit/>
+          </a:bodyPr>
+          <a:lstStyle/>
+          <a:p>
+            <a:r>
+              <a:rPr lang="pt-BR" dirty="0"/>
+              <a:t>Ao contrário dos aprendizados supervisionado e não supervisionado, não temos um </a:t>
+            </a:r>
+            <a:r>
+              <a:rPr lang="pt-BR" i="1" dirty="0"/>
+              <a:t>dataset</a:t>
+            </a:r>
+            <a:r>
+              <a:rPr lang="pt-BR" dirty="0"/>
+              <a:t>, seja ele rotulado ou não.</a:t>
+            </a:r>
+          </a:p>
+          <a:p>
+            <a:r>
+              <a:rPr lang="pt-BR" dirty="0"/>
+              <a:t>Não há um </a:t>
+            </a:r>
+            <a:r>
+              <a:rPr lang="pt-BR" i="1" dirty="0"/>
+              <a:t>dataset</a:t>
+            </a:r>
+            <a:r>
+              <a:rPr lang="pt-BR" dirty="0"/>
+              <a:t>: o agente </a:t>
+            </a:r>
+            <a:r>
+              <a:rPr lang="pt-BR" b="1" dirty="0"/>
+              <a:t>gera seus próprios dados</a:t>
+            </a:r>
+            <a:r>
+              <a:rPr lang="pt-BR" dirty="0"/>
+              <a:t> enquanto tenta, erra e aprende.</a:t>
+            </a:r>
+          </a:p>
+          <a:p>
+            <a:pPr lvl="1">
+              <a:buFont typeface="Wingdings" panose="05000000000000000000" pitchFamily="2" charset="2"/>
+              <a:buChar char="§"/>
+            </a:pPr>
+            <a:r>
+              <a:rPr lang="pt-BR" dirty="0"/>
+              <a:t>Nesse contexto, o agente é o algoritmo de aprendizado por reforço.</a:t>
+            </a:r>
+          </a:p>
+          <a:p>
+            <a:r>
+              <a:rPr lang="pt-BR" dirty="0"/>
+              <a:t>O aprendizado ocorre por experiência através de interações com um ambiente.</a:t>
+            </a:r>
+          </a:p>
+        </p:txBody>
+      </p:sp>
+      <p:pic>
+        <p:nvPicPr>
+          <p:cNvPr id="4" name="Imagem 16">
+            <a:extLst>
+              <a:ext uri="{FF2B5EF4-FFF2-40B4-BE49-F238E27FC236}">
+                <a16:creationId xmlns:a16="http://schemas.microsoft.com/office/drawing/2014/main" id="{7937C6EA-BFD8-5278-9EE0-796D1842173C}"/>
+              </a:ext>
+            </a:extLst>
+          </p:cNvPr>
+          <p:cNvPicPr>
+            <a:picLocks noChangeAspect="1"/>
+          </p:cNvPicPr>
+          <p:nvPr/>
+        </p:nvPicPr>
+        <p:blipFill>
+          <a:blip r:embed="rId3" cstate="print">
+            <a:extLst>
+              <a:ext uri="{28A0092B-C50C-407E-A947-70E740481C1C}">
+                <a14:useLocalDpi xmlns:a14="http://schemas.microsoft.com/office/drawing/2010/main" val="0"/>
+              </a:ext>
+            </a:extLst>
+          </a:blip>
+          <a:stretch>
+            <a:fillRect/>
+          </a:stretch>
+        </p:blipFill>
+        <p:spPr>
+          <a:xfrm>
+            <a:off x="1712685" y="1575252"/>
+            <a:ext cx="1657488" cy="5166336"/>
+          </a:xfrm>
+          <a:prstGeom prst="rect">
+            <a:avLst/>
+          </a:prstGeom>
+        </p:spPr>
+      </p:pic>
     </p:spTree>
     <p:extLst>
       <p:ext uri="{BB962C8B-B14F-4D97-AF65-F5344CB8AC3E}">
-        <p14:creationId xmlns:p14="http://schemas.microsoft.com/office/powerpoint/2010/main" val="1547259554"/>
+        <p14:creationId xmlns:p14="http://schemas.microsoft.com/office/powerpoint/2010/main" val="3578172898"/>
       </p:ext>
     </p:extLst>
   </p:cSld>
@@ -4631,7 +6195,7 @@
         <p:cNvPr id="1" name="">
           <a:extLst>
             <a:ext uri="{FF2B5EF4-FFF2-40B4-BE49-F238E27FC236}">
-              <a16:creationId xmlns:a16="http://schemas.microsoft.com/office/drawing/2014/main" id="{E1C9F56A-97FC-7CCD-E5BA-3B5E230AD9AB}"/>
+              <a16:creationId xmlns:a16="http://schemas.microsoft.com/office/drawing/2014/main" id="{D3753AED-FA4F-39DE-91A4-E5C845C0C665}"/>
             </a:ext>
           </a:extLst>
         </p:cNvPr>
@@ -4651,7 +6215,7 @@
           <p:cNvPr id="2" name="Título 1">
             <a:extLst>
               <a:ext uri="{FF2B5EF4-FFF2-40B4-BE49-F238E27FC236}">
-                <a16:creationId xmlns:a16="http://schemas.microsoft.com/office/drawing/2014/main" id="{A979DAB9-0612-F0CD-7BB1-AF52B98B3210}"/>
+                <a16:creationId xmlns:a16="http://schemas.microsoft.com/office/drawing/2014/main" id="{6E88774E-D7D6-D9E6-4449-244D34EE979C}"/>
               </a:ext>
             </a:extLst>
           </p:cNvPr>
@@ -4669,8 +6233,9 @@
           <a:p>
             <a:r>
               <a:rPr lang="pt-BR" dirty="0"/>
-              <a:t>Treinamento e otimização</a:t>
-            </a:r>
+              <a:t>Diferenças chave entre os paradigmas</a:t>
+            </a:r>
+            <a:endParaRPr lang="pt-BR" i="1" dirty="0"/>
           </a:p>
         </p:txBody>
       </p:sp>
@@ -4679,7 +6244,7 @@
           <p:cNvPr id="3" name="Espaço Reservado para Conteúdo 2">
             <a:extLst>
               <a:ext uri="{FF2B5EF4-FFF2-40B4-BE49-F238E27FC236}">
-                <a16:creationId xmlns:a16="http://schemas.microsoft.com/office/drawing/2014/main" id="{F22F88A5-87D1-340F-853F-8C2ED8F8C877}"/>
+                <a16:creationId xmlns:a16="http://schemas.microsoft.com/office/drawing/2014/main" id="{0E79548E-494A-A12A-30F7-F4E225B6C309}"/>
               </a:ext>
             </a:extLst>
           </p:cNvPr>
@@ -4690,19 +6255,105 @@
             <p:ph idx="1"/>
           </p:nvPr>
         </p:nvSpPr>
-        <p:spPr/>
-        <p:txBody>
-          <a:bodyPr/>
-          <a:lstStyle/>
-          <a:p>
-            <a:endParaRPr lang="pt-BR"/>
-          </a:p>
-        </p:txBody>
-      </p:sp>
+        <p:spPr>
+          <a:xfrm>
+            <a:off x="4811485" y="1825624"/>
+            <a:ext cx="7271657" cy="5032375"/>
+          </a:xfrm>
+        </p:spPr>
+        <p:txBody>
+          <a:bodyPr>
+            <a:normAutofit/>
+          </a:bodyPr>
+          <a:lstStyle/>
+          <a:p>
+            <a:r>
+              <a:rPr lang="pt-BR" dirty="0"/>
+              <a:t>A algoritmo aprende na prática, sendo premiado ou penalizado pelo ambiente por ações tomadas até descobrir a melhor estratégia, chamada de política nesse contexto.</a:t>
+            </a:r>
+          </a:p>
+          <a:p>
+            <a:r>
+              <a:rPr lang="pt-BR" dirty="0"/>
+              <a:t>Existe um sinal de </a:t>
+            </a:r>
+            <a:r>
+              <a:rPr lang="pt-BR" b="1" dirty="0"/>
+              <a:t>recompensa ou reforço enviado pelo ambiente.</a:t>
+            </a:r>
+            <a:endParaRPr lang="pt-BR" dirty="0"/>
+          </a:p>
+          <a:p>
+            <a:pPr lvl="1">
+              <a:buFont typeface="Wingdings" panose="05000000000000000000" pitchFamily="2" charset="2"/>
+              <a:buChar char="§"/>
+            </a:pPr>
+            <a:r>
+              <a:rPr lang="pt-BR" dirty="0"/>
+              <a:t>O ambiente diz ao agente: "Isso foi bom (+10)" ou "Isso foi péssimo (-5)".</a:t>
+            </a:r>
+          </a:p>
+          <a:p>
+            <a:r>
+              <a:rPr lang="pt-BR" dirty="0"/>
+              <a:t>É um guia, mas ele não diz </a:t>
+            </a:r>
+            <a:r>
+              <a:rPr lang="pt-BR" i="1" dirty="0"/>
+              <a:t>qual</a:t>
+            </a:r>
+            <a:r>
+              <a:rPr lang="pt-BR" dirty="0"/>
+              <a:t> era a ação certa, apenas se a que foi tomada foi boa ou ruim.</a:t>
+            </a:r>
+            <a:endParaRPr lang="en-US" dirty="0"/>
+          </a:p>
+          <a:p>
+            <a:pPr lvl="1"/>
+            <a:endParaRPr lang="pt-BR" dirty="0"/>
+          </a:p>
+        </p:txBody>
+      </p:sp>
+      <p:pic>
+        <p:nvPicPr>
+          <p:cNvPr id="6" name="Imagem 16">
+            <a:extLst>
+              <a:ext uri="{FF2B5EF4-FFF2-40B4-BE49-F238E27FC236}">
+                <a16:creationId xmlns:a16="http://schemas.microsoft.com/office/drawing/2014/main" id="{C8EB1D57-2EF7-64D2-25BE-6F8A0BE933DB}"/>
+              </a:ext>
+            </a:extLst>
+          </p:cNvPr>
+          <p:cNvPicPr>
+            <a:picLocks noChangeAspect="1"/>
+          </p:cNvPicPr>
+          <p:nvPr/>
+        </p:nvPicPr>
+        <p:blipFill>
+          <a:blip r:embed="rId3" cstate="print">
+            <a:extLst>
+              <a:ext uri="{28A0092B-C50C-407E-A947-70E740481C1C}">
+                <a14:useLocalDpi xmlns:a14="http://schemas.microsoft.com/office/drawing/2010/main" val="0"/>
+              </a:ext>
+            </a:extLst>
+          </a:blip>
+          <a:stretch>
+            <a:fillRect/>
+          </a:stretch>
+        </p:blipFill>
+        <p:spPr>
+          <a:xfrm>
+            <a:off x="1712685" y="1575252"/>
+            <a:ext cx="1657488" cy="5166336"/>
+          </a:xfrm>
+          <a:prstGeom prst="rect">
+            <a:avLst/>
+          </a:prstGeom>
+        </p:spPr>
+      </p:pic>
     </p:spTree>
     <p:extLst>
       <p:ext uri="{BB962C8B-B14F-4D97-AF65-F5344CB8AC3E}">
-        <p14:creationId xmlns:p14="http://schemas.microsoft.com/office/powerpoint/2010/main" val="3906980817"/>
+        <p14:creationId xmlns:p14="http://schemas.microsoft.com/office/powerpoint/2010/main" val="23976846"/>
       </p:ext>
     </p:extLst>
   </p:cSld>
@@ -4720,7 +6371,7 @@
         <p:cNvPr id="1" name="">
           <a:extLst>
             <a:ext uri="{FF2B5EF4-FFF2-40B4-BE49-F238E27FC236}">
-              <a16:creationId xmlns:a16="http://schemas.microsoft.com/office/drawing/2014/main" id="{B28A9759-CA4F-DA4F-85C2-F6E51DCED2D9}"/>
+              <a16:creationId xmlns:a16="http://schemas.microsoft.com/office/drawing/2014/main" id="{D41FFEFA-1EED-2754-CDBD-7CC34D06F8B2}"/>
             </a:ext>
           </a:extLst>
         </p:cNvPr>
@@ -4740,7 +6391,7 @@
           <p:cNvPr id="2" name="Título 1">
             <a:extLst>
               <a:ext uri="{FF2B5EF4-FFF2-40B4-BE49-F238E27FC236}">
-                <a16:creationId xmlns:a16="http://schemas.microsoft.com/office/drawing/2014/main" id="{072F732D-34CE-6153-324F-D7F6821577F0}"/>
+                <a16:creationId xmlns:a16="http://schemas.microsoft.com/office/drawing/2014/main" id="{E4CDBB74-F243-3F53-FEC5-AF11CE256B39}"/>
               </a:ext>
             </a:extLst>
           </p:cNvPr>
@@ -4758,8 +6409,9 @@
           <a:p>
             <a:r>
               <a:rPr lang="pt-BR" dirty="0"/>
-              <a:t>Vantagens e desvantagens</a:t>
-            </a:r>
+              <a:t>Diferenças chave entre os paradigmas</a:t>
+            </a:r>
+            <a:endParaRPr lang="pt-BR" i="1" dirty="0"/>
           </a:p>
         </p:txBody>
       </p:sp>
@@ -4768,7 +6420,7 @@
           <p:cNvPr id="3" name="Espaço Reservado para Conteúdo 2">
             <a:extLst>
               <a:ext uri="{FF2B5EF4-FFF2-40B4-BE49-F238E27FC236}">
-                <a16:creationId xmlns:a16="http://schemas.microsoft.com/office/drawing/2014/main" id="{62A55622-8E11-E5D7-8EAF-7AE2CCAA3321}"/>
+                <a16:creationId xmlns:a16="http://schemas.microsoft.com/office/drawing/2014/main" id="{8A609E9F-E2C8-D6E3-78D1-C44C117B55A3}"/>
               </a:ext>
             </a:extLst>
           </p:cNvPr>
@@ -4779,19 +6431,75 @@
             <p:ph idx="1"/>
           </p:nvPr>
         </p:nvSpPr>
-        <p:spPr/>
-        <p:txBody>
-          <a:bodyPr/>
-          <a:lstStyle/>
-          <a:p>
-            <a:endParaRPr lang="pt-BR"/>
-          </a:p>
-        </p:txBody>
-      </p:sp>
+        <p:spPr>
+          <a:xfrm>
+            <a:off x="5018313" y="1825624"/>
+            <a:ext cx="7064829" cy="5032375"/>
+          </a:xfrm>
+        </p:spPr>
+        <p:txBody>
+          <a:bodyPr>
+            <a:normAutofit/>
+          </a:bodyPr>
+          <a:lstStyle/>
+          <a:p>
+            <a:r>
+              <a:rPr lang="pt-BR" dirty="0"/>
+              <a:t>O aprendizado por reforço foca na tomada de decisão para maximizar recompensas ao longo do tempo.</a:t>
+            </a:r>
+          </a:p>
+          <a:p>
+            <a:r>
+              <a:rPr lang="pt-BR" dirty="0"/>
+              <a:t>Ele responde à pergunta: </a:t>
+            </a:r>
+            <a:r>
+              <a:rPr lang="pt-BR" i="1" dirty="0"/>
+              <a:t>"Qual sequência de ações eu devo tomar para ganhar o prêmio lá na frente?“</a:t>
+            </a:r>
+          </a:p>
+        </p:txBody>
+      </p:sp>
+      <p:pic>
+        <p:nvPicPr>
+          <p:cNvPr id="4" name="Imagem 16">
+            <a:extLst>
+              <a:ext uri="{FF2B5EF4-FFF2-40B4-BE49-F238E27FC236}">
+                <a16:creationId xmlns:a16="http://schemas.microsoft.com/office/drawing/2014/main" id="{DF71A34D-2B36-AF4A-818D-805CF072BD50}"/>
+              </a:ext>
+            </a:extLst>
+          </p:cNvPr>
+          <p:cNvPicPr>
+            <a:picLocks noChangeAspect="1"/>
+          </p:cNvPicPr>
+          <p:nvPr/>
+        </p:nvPicPr>
+        <p:blipFill>
+          <a:blip r:embed="rId3" cstate="print">
+            <a:extLst>
+              <a:ext uri="{28A0092B-C50C-407E-A947-70E740481C1C}">
+                <a14:useLocalDpi xmlns:a14="http://schemas.microsoft.com/office/drawing/2010/main" val="0"/>
+              </a:ext>
+            </a:extLst>
+          </a:blip>
+          <a:stretch>
+            <a:fillRect/>
+          </a:stretch>
+        </p:blipFill>
+        <p:spPr>
+          <a:xfrm>
+            <a:off x="1712685" y="1575252"/>
+            <a:ext cx="1657488" cy="5166336"/>
+          </a:xfrm>
+          <a:prstGeom prst="rect">
+            <a:avLst/>
+          </a:prstGeom>
+        </p:spPr>
+      </p:pic>
     </p:spTree>
     <p:extLst>
       <p:ext uri="{BB962C8B-B14F-4D97-AF65-F5344CB8AC3E}">
-        <p14:creationId xmlns:p14="http://schemas.microsoft.com/office/powerpoint/2010/main" val="1521811257"/>
+        <p14:creationId xmlns:p14="http://schemas.microsoft.com/office/powerpoint/2010/main" val="116294"/>
       </p:ext>
     </p:extLst>
   </p:cSld>
@@ -4820,10 +6528,10 @@
       </p:grpSpPr>
       <p:sp>
         <p:nvSpPr>
-          <p:cNvPr id="2" name="Título 1">
-            <a:extLst>
-              <a:ext uri="{FF2B5EF4-FFF2-40B4-BE49-F238E27FC236}">
-                <a16:creationId xmlns:a16="http://schemas.microsoft.com/office/drawing/2014/main" id="{B9E502FC-4440-F5DA-F299-69CD15E702AE}"/>
+          <p:cNvPr id="2" name="Title 1">
+            <a:extLst>
+              <a:ext uri="{FF2B5EF4-FFF2-40B4-BE49-F238E27FC236}">
+                <a16:creationId xmlns:a16="http://schemas.microsoft.com/office/drawing/2014/main" id="{81E045BB-096B-FD28-B7D5-E94A5FD7C8E5}"/>
               </a:ext>
             </a:extLst>
           </p:cNvPr>
@@ -4841,17 +6549,18 @@
           <a:p>
             <a:r>
               <a:rPr lang="pt-BR" dirty="0"/>
-              <a:t>Exemplo(s) de aplicação</a:t>
-            </a:r>
-          </a:p>
-        </p:txBody>
-      </p:sp>
-      <p:sp>
-        <p:nvSpPr>
-          <p:cNvPr id="3" name="Espaço Reservado para Conteúdo 2">
-            <a:extLst>
-              <a:ext uri="{FF2B5EF4-FFF2-40B4-BE49-F238E27FC236}">
-                <a16:creationId xmlns:a16="http://schemas.microsoft.com/office/drawing/2014/main" id="{69359096-6B47-BEA3-55AD-95F90CDC8489}"/>
+              <a:t>Analogia</a:t>
+            </a:r>
+            <a:endParaRPr lang="en-US" dirty="0"/>
+          </a:p>
+        </p:txBody>
+      </p:sp>
+      <p:sp>
+        <p:nvSpPr>
+          <p:cNvPr id="3" name="Content Placeholder 2">
+            <a:extLst>
+              <a:ext uri="{FF2B5EF4-FFF2-40B4-BE49-F238E27FC236}">
+                <a16:creationId xmlns:a16="http://schemas.microsoft.com/office/drawing/2014/main" id="{DC3C87D0-4294-EB29-295B-08AD144442B5}"/>
               </a:ext>
             </a:extLst>
           </p:cNvPr>
@@ -4862,19 +6571,109 @@
             <p:ph idx="1"/>
           </p:nvPr>
         </p:nvSpPr>
-        <p:spPr/>
-        <p:txBody>
-          <a:bodyPr/>
-          <a:lstStyle/>
-          <a:p>
-            <a:endParaRPr lang="pt-BR"/>
-          </a:p>
-        </p:txBody>
-      </p:sp>
+        <p:spPr>
+          <a:xfrm>
+            <a:off x="5867400" y="1825624"/>
+            <a:ext cx="6324600" cy="5032375"/>
+          </a:xfrm>
+        </p:spPr>
+        <p:txBody>
+          <a:bodyPr>
+            <a:normAutofit/>
+          </a:bodyPr>
+          <a:lstStyle/>
+          <a:p>
+            <a:r>
+              <a:rPr lang="pt-BR" dirty="0"/>
+              <a:t>Aprendizado por reforço é como adestrar um cachorro. </a:t>
+            </a:r>
+          </a:p>
+          <a:p>
+            <a:r>
+              <a:rPr lang="pt-BR" dirty="0"/>
+              <a:t>Você não diz a ele </a:t>
+            </a:r>
+            <a:r>
+              <a:rPr lang="pt-BR" i="1" dirty="0"/>
+              <a:t>como</a:t>
+            </a:r>
+            <a:r>
+              <a:rPr lang="pt-BR" dirty="0"/>
+              <a:t> se sentar ou pegar o graveto.</a:t>
+            </a:r>
+          </a:p>
+          <a:p>
+            <a:pPr lvl="1">
+              <a:buFont typeface="Wingdings" panose="05000000000000000000" pitchFamily="2" charset="2"/>
+              <a:buChar char="§"/>
+            </a:pPr>
+            <a:r>
+              <a:rPr lang="pt-BR" dirty="0"/>
+              <a:t>Não há dados rotulados ensinando os movimentos musculares. </a:t>
+            </a:r>
+          </a:p>
+          <a:p>
+            <a:r>
+              <a:rPr lang="pt-BR" dirty="0"/>
+              <a:t>Você dá um petisco (recompensa) quando ele senta ou pega o graveto, e ele aprende a associar a ação ao resultado positivo.</a:t>
+            </a:r>
+          </a:p>
+          <a:p>
+            <a:endParaRPr lang="en-US" dirty="0"/>
+          </a:p>
+        </p:txBody>
+      </p:sp>
+      <p:pic>
+        <p:nvPicPr>
+          <p:cNvPr id="4" name="Picture 4" descr="A Beginner's Guide to Reinforcement Learning and its Basic Implementation  from Scratch | by Tanvi Penumudy | Analytics Vidhya | Medium">
+            <a:extLst>
+              <a:ext uri="{FF2B5EF4-FFF2-40B4-BE49-F238E27FC236}">
+                <a16:creationId xmlns:a16="http://schemas.microsoft.com/office/drawing/2014/main" id="{A37B35F5-6EF1-B612-B863-263AB00420ED}"/>
+              </a:ext>
+            </a:extLst>
+          </p:cNvPr>
+          <p:cNvPicPr>
+            <a:picLocks noChangeAspect="1" noChangeArrowheads="1"/>
+          </p:cNvPicPr>
+          <p:nvPr/>
+        </p:nvPicPr>
+        <p:blipFill>
+          <a:blip r:embed="rId2">
+            <a:extLst>
+              <a:ext uri="{28A0092B-C50C-407E-A947-70E740481C1C}">
+                <a14:useLocalDpi xmlns:a14="http://schemas.microsoft.com/office/drawing/2010/main" val="0"/>
+              </a:ext>
+            </a:extLst>
+          </a:blip>
+          <a:srcRect/>
+          <a:stretch>
+            <a:fillRect/>
+          </a:stretch>
+        </p:blipFill>
+        <p:spPr bwMode="auto">
+          <a:xfrm>
+            <a:off x="195943" y="2603262"/>
+            <a:ext cx="5344886" cy="2687208"/>
+          </a:xfrm>
+          <a:prstGeom prst="rect">
+            <a:avLst/>
+          </a:prstGeom>
+          <a:noFill/>
+          <a:extLst>
+            <a:ext uri="{909E8E84-426E-40DD-AFC4-6F175D3DCCD1}">
+              <a14:hiddenFill xmlns:a14="http://schemas.microsoft.com/office/drawing/2010/main">
+                <a:solidFill>
+                  <a:srgbClr val="FFFFFF"/>
+                </a:solidFill>
+              </a14:hiddenFill>
+            </a:ext>
+          </a:extLst>
+        </p:spPr>
+      </p:pic>
     </p:spTree>
     <p:extLst>
       <p:ext uri="{BB962C8B-B14F-4D97-AF65-F5344CB8AC3E}">
-        <p14:creationId xmlns:p14="http://schemas.microsoft.com/office/powerpoint/2010/main" val="1532530965"/>
+        <p14:creationId xmlns:p14="http://schemas.microsoft.com/office/powerpoint/2010/main" val="3881548899"/>
       </p:ext>
     </p:extLst>
   </p:cSld>
@@ -4903,10 +6702,10 @@
       </p:grpSpPr>
       <p:sp>
         <p:nvSpPr>
-          <p:cNvPr id="2" name="Título 1">
-            <a:extLst>
-              <a:ext uri="{FF2B5EF4-FFF2-40B4-BE49-F238E27FC236}">
-                <a16:creationId xmlns:a16="http://schemas.microsoft.com/office/drawing/2014/main" id="{B7EBC8F7-03EF-338A-A90B-280A41AF9688}"/>
+          <p:cNvPr id="2" name="Title 1">
+            <a:extLst>
+              <a:ext uri="{FF2B5EF4-FFF2-40B4-BE49-F238E27FC236}">
+                <a16:creationId xmlns:a16="http://schemas.microsoft.com/office/drawing/2014/main" id="{874F2722-DA1E-D930-DC99-59F795E3E8B9}"/>
               </a:ext>
             </a:extLst>
           </p:cNvPr>
@@ -4922,19 +6721,16 @@
           <a:bodyPr/>
           <a:lstStyle/>
           <a:p>
-            <a:r>
-              <a:rPr lang="pt-BR" dirty="0"/>
-              <a:t>Comparação com outros algoritmos</a:t>
-            </a:r>
-          </a:p>
-        </p:txBody>
-      </p:sp>
-      <p:sp>
-        <p:nvSpPr>
-          <p:cNvPr id="3" name="Espaço Reservado para Conteúdo 2">
-            <a:extLst>
-              <a:ext uri="{FF2B5EF4-FFF2-40B4-BE49-F238E27FC236}">
-                <a16:creationId xmlns:a16="http://schemas.microsoft.com/office/drawing/2014/main" id="{C525BCE7-C19D-7DDA-016A-E3016C398CBA}"/>
+            <a:endParaRPr lang="en-US"/>
+          </a:p>
+        </p:txBody>
+      </p:sp>
+      <p:sp>
+        <p:nvSpPr>
+          <p:cNvPr id="3" name="Content Placeholder 2">
+            <a:extLst>
+              <a:ext uri="{FF2B5EF4-FFF2-40B4-BE49-F238E27FC236}">
+                <a16:creationId xmlns:a16="http://schemas.microsoft.com/office/drawing/2014/main" id="{97BD2D05-0E48-B94D-DBC7-FBDCBC17C0A5}"/>
               </a:ext>
             </a:extLst>
           </p:cNvPr>
@@ -4947,17 +6743,31 @@
         </p:nvSpPr>
         <p:spPr/>
         <p:txBody>
-          <a:bodyPr/>
-          <a:lstStyle/>
-          <a:p>
-            <a:endParaRPr lang="pt-BR"/>
+          <a:bodyPr>
+            <a:normAutofit/>
+          </a:bodyPr>
+          <a:lstStyle/>
+          <a:p>
+            <a:r>
+              <a:rPr lang="pt-BR" sz="5400" b="1" dirty="0">
+                <a:solidFill>
+                  <a:srgbClr val="FF0000"/>
+                </a:solidFill>
+              </a:rPr>
+              <a:t>PAREI AQUI!!!!!!!!!!!!</a:t>
+            </a:r>
+            <a:endParaRPr lang="en-US" sz="5400" b="1" dirty="0">
+              <a:solidFill>
+                <a:srgbClr val="FF0000"/>
+              </a:solidFill>
+            </a:endParaRPr>
           </a:p>
         </p:txBody>
       </p:sp>
     </p:spTree>
     <p:extLst>
       <p:ext uri="{BB962C8B-B14F-4D97-AF65-F5344CB8AC3E}">
-        <p14:creationId xmlns:p14="http://schemas.microsoft.com/office/powerpoint/2010/main" val="3601469261"/>
+        <p14:creationId xmlns:p14="http://schemas.microsoft.com/office/powerpoint/2010/main" val="3079050531"/>
       </p:ext>
     </p:extLst>
   </p:cSld>
@@ -4986,64 +6796,791 @@
       </p:grpSpPr>
       <p:sp>
         <p:nvSpPr>
-          <p:cNvPr id="4" name="Título 1">
-            <a:extLst>
-              <a:ext uri="{FF2B5EF4-FFF2-40B4-BE49-F238E27FC236}">
-                <a16:creationId xmlns:a16="http://schemas.microsoft.com/office/drawing/2014/main" id="{32666AC8-2E17-4DB4-B0F5-60C640CCFD2E}"/>
-              </a:ext>
-            </a:extLst>
-          </p:cNvPr>
-          <p:cNvSpPr txBox="1">
-            <a:spLocks/>
-          </p:cNvSpPr>
+          <p:cNvPr id="2" name="Title 1">
+            <a:extLst>
+              <a:ext uri="{FF2B5EF4-FFF2-40B4-BE49-F238E27FC236}">
+                <a16:creationId xmlns:a16="http://schemas.microsoft.com/office/drawing/2014/main" id="{CD479DA3-4A1A-74AE-26DA-FD6E65250CCE}"/>
+              </a:ext>
+            </a:extLst>
+          </p:cNvPr>
+          <p:cNvSpPr>
+            <a:spLocks noGrp="1"/>
+          </p:cNvSpPr>
+          <p:nvPr>
+            <p:ph type="title"/>
+          </p:nvPr>
+        </p:nvSpPr>
+        <p:spPr/>
+        <p:txBody>
+          <a:bodyPr/>
+          <a:lstStyle/>
+          <a:p>
+            <a:r>
+              <a:rPr lang="en-US" dirty="0" err="1"/>
+              <a:t>Conceitos</a:t>
+            </a:r>
+            <a:r>
+              <a:rPr lang="en-US" dirty="0"/>
+              <a:t> </a:t>
+            </a:r>
+            <a:r>
+              <a:rPr lang="en-US" dirty="0" err="1"/>
+              <a:t>fundamentais</a:t>
+            </a:r>
+            <a:r>
+              <a:rPr lang="en-US" dirty="0"/>
+              <a:t> de RL</a:t>
+            </a:r>
+          </a:p>
+        </p:txBody>
+      </p:sp>
+      <mc:AlternateContent xmlns:mc="http://schemas.openxmlformats.org/markup-compatibility/2006">
+        <mc:Choice xmlns:a14="http://schemas.microsoft.com/office/drawing/2010/main" Requires="a14">
+          <p:sp>
+            <p:nvSpPr>
+              <p:cNvPr id="3" name="Content Placeholder 2">
+                <a:extLst>
+                  <a:ext uri="{FF2B5EF4-FFF2-40B4-BE49-F238E27FC236}">
+                    <a16:creationId xmlns:a16="http://schemas.microsoft.com/office/drawing/2014/main" id="{D674119D-90D2-5043-F365-B3EB6F84791A}"/>
+                  </a:ext>
+                </a:extLst>
+              </p:cNvPr>
+              <p:cNvSpPr>
+                <a:spLocks noGrp="1"/>
+              </p:cNvSpPr>
+              <p:nvPr>
+                <p:ph idx="1"/>
+              </p:nvPr>
+            </p:nvSpPr>
+            <p:spPr>
+              <a:xfrm>
+                <a:off x="5627914" y="1836510"/>
+                <a:ext cx="6433457" cy="5021489"/>
+              </a:xfrm>
+            </p:spPr>
+            <p:txBody>
+              <a:bodyPr>
+                <a:normAutofit/>
+              </a:bodyPr>
+              <a:lstStyle/>
+              <a:p>
+                <a:r>
+                  <a:rPr lang="pt-BR" b="1" dirty="0"/>
+                  <a:t>Agente:</a:t>
+                </a:r>
+                <a:r>
+                  <a:rPr lang="pt-BR" dirty="0"/>
+                  <a:t> O tomador de decisões.</a:t>
+                </a:r>
+              </a:p>
+              <a:p>
+                <a:pPr lvl="1">
+                  <a:buFont typeface="Wingdings" panose="05000000000000000000" pitchFamily="2" charset="2"/>
+                  <a:buChar char="§"/>
+                </a:pPr>
+                <a:r>
+                  <a:rPr lang="pt-BR" dirty="0"/>
+                  <a:t>Exemplo: um robô, um algoritmo de trading, carro autônomo.</a:t>
+                </a:r>
+              </a:p>
+              <a:p>
+                <a:r>
+                  <a:rPr lang="pt-BR" b="1" dirty="0"/>
+                  <a:t>Ambiente:</a:t>
+                </a:r>
+                <a:r>
+                  <a:rPr lang="pt-BR" dirty="0"/>
+                  <a:t> O mundo onde o agente opera e com o qual interage.</a:t>
+                </a:r>
+              </a:p>
+              <a:p>
+                <a:r>
+                  <a:rPr lang="pt-BR" b="1" dirty="0"/>
+                  <a:t>Estado</a:t>
+                </a:r>
+                <a:r>
+                  <a:rPr lang="pt-BR" dirty="0"/>
+                  <a:t> (</a:t>
+                </a:r>
+                <a14:m>
+                  <m:oMath xmlns:m="http://schemas.openxmlformats.org/officeDocument/2006/math">
+                    <m:r>
+                      <a:rPr lang="pt-BR" b="0" i="1" smtClean="0">
+                        <a:latin typeface="Cambria Math" panose="02040503050406030204" pitchFamily="18" charset="0"/>
+                      </a:rPr>
+                      <m:t>𝑠</m:t>
+                    </m:r>
+                  </m:oMath>
+                </a14:m>
+                <a:r>
+                  <a:rPr lang="pt-BR" dirty="0"/>
+                  <a:t>): A situação atual do agente no ambiente.</a:t>
+                </a:r>
+              </a:p>
+              <a:p>
+                <a:r>
+                  <a:rPr lang="pt-BR" b="1" dirty="0"/>
+                  <a:t>Ação</a:t>
+                </a:r>
+                <a:r>
+                  <a:rPr lang="pt-BR" dirty="0"/>
+                  <a:t> (</a:t>
+                </a:r>
+                <a14:m>
+                  <m:oMath xmlns:m="http://schemas.openxmlformats.org/officeDocument/2006/math">
+                    <m:r>
+                      <a:rPr lang="pt-BR" b="0" i="1" smtClean="0">
+                        <a:latin typeface="Cambria Math" panose="02040503050406030204" pitchFamily="18" charset="0"/>
+                      </a:rPr>
+                      <m:t>𝑎</m:t>
+                    </m:r>
+                  </m:oMath>
+                </a14:m>
+                <a:r>
+                  <a:rPr lang="pt-BR" dirty="0"/>
+                  <a:t>): O que o agente pode fazer.</a:t>
+                </a:r>
+              </a:p>
+              <a:p>
+                <a:r>
+                  <a:rPr lang="pt-BR" b="1" dirty="0"/>
+                  <a:t>Recompensa</a:t>
+                </a:r>
+                <a:r>
+                  <a:rPr lang="pt-BR" dirty="0"/>
+                  <a:t> (</a:t>
+                </a:r>
+                <a14:m>
+                  <m:oMath xmlns:m="http://schemas.openxmlformats.org/officeDocument/2006/math">
+                    <m:r>
+                      <a:rPr lang="pt-BR" b="0" i="1" smtClean="0">
+                        <a:latin typeface="Cambria Math" panose="02040503050406030204" pitchFamily="18" charset="0"/>
+                      </a:rPr>
+                      <m:t>𝑟</m:t>
+                    </m:r>
+                  </m:oMath>
+                </a14:m>
+                <a:r>
+                  <a:rPr lang="pt-BR" dirty="0"/>
+                  <a:t>): O feedback (positivo ou negativo) recebido após uma ação.</a:t>
+                </a:r>
+                <a:endParaRPr lang="en-US" dirty="0"/>
+              </a:p>
+              <a:p>
+                <a:endParaRPr lang="en-US" dirty="0"/>
+              </a:p>
+            </p:txBody>
+          </p:sp>
+        </mc:Choice>
+        <mc:Fallback>
+          <p:sp>
+            <p:nvSpPr>
+              <p:cNvPr id="3" name="Content Placeholder 2">
+                <a:extLst>
+                  <a:ext uri="{FF2B5EF4-FFF2-40B4-BE49-F238E27FC236}">
+                    <a16:creationId xmlns:a16="http://schemas.microsoft.com/office/drawing/2014/main" id="{D674119D-90D2-5043-F365-B3EB6F84791A}"/>
+                  </a:ext>
+                </a:extLst>
+              </p:cNvPr>
+              <p:cNvSpPr>
+                <a:spLocks noGrp="1" noRot="1" noChangeAspect="1" noMove="1" noResize="1" noEditPoints="1" noAdjustHandles="1" noChangeArrowheads="1" noChangeShapeType="1" noTextEdit="1"/>
+              </p:cNvSpPr>
+              <p:nvPr>
+                <p:ph idx="1"/>
+              </p:nvPr>
+            </p:nvSpPr>
+            <p:spPr>
+              <a:xfrm>
+                <a:off x="5627914" y="1836510"/>
+                <a:ext cx="6433457" cy="5021489"/>
+              </a:xfrm>
+              <a:blipFill>
+                <a:blip r:embed="rId3"/>
+                <a:stretch>
+                  <a:fillRect l="-1705" t="-1942" r="-1894"/>
+                </a:stretch>
+              </a:blipFill>
+            </p:spPr>
+            <p:txBody>
+              <a:bodyPr/>
+              <a:lstStyle/>
+              <a:p>
+                <a:r>
+                  <a:rPr lang="en-US">
+                    <a:noFill/>
+                  </a:rPr>
+                  <a:t> </a:t>
+                </a:r>
+              </a:p>
+            </p:txBody>
+          </p:sp>
+        </mc:Fallback>
+      </mc:AlternateContent>
+      <p:pic>
+        <p:nvPicPr>
+          <p:cNvPr id="7" name="Picture 6">
+            <a:extLst>
+              <a:ext uri="{FF2B5EF4-FFF2-40B4-BE49-F238E27FC236}">
+                <a16:creationId xmlns:a16="http://schemas.microsoft.com/office/drawing/2014/main" id="{9FF40252-D70D-DF89-7A6D-82F50130B108}"/>
+              </a:ext>
+            </a:extLst>
+          </p:cNvPr>
+          <p:cNvPicPr>
+            <a:picLocks noChangeAspect="1"/>
+          </p:cNvPicPr>
           <p:nvPr/>
-        </p:nvSpPr>
+        </p:nvPicPr>
+        <p:blipFill>
+          <a:blip r:embed="rId4">
+            <a:extLst>
+              <a:ext uri="{28A0092B-C50C-407E-A947-70E740481C1C}">
+                <a14:useLocalDpi xmlns:a14="http://schemas.microsoft.com/office/drawing/2010/main" val="0"/>
+              </a:ext>
+            </a:extLst>
+          </a:blip>
+          <a:srcRect l="6126" t="12857" r="9074" b="11905"/>
+          <a:stretch>
+            <a:fillRect/>
+          </a:stretch>
+        </p:blipFill>
         <p:spPr>
           <a:xfrm>
-            <a:off x="1431533" y="2720526"/>
-            <a:ext cx="9144000" cy="1029541"/>
+            <a:off x="-489858" y="590096"/>
+            <a:ext cx="4990915" cy="2492828"/>
           </a:xfrm>
           <a:prstGeom prst="rect">
             <a:avLst/>
           </a:prstGeom>
         </p:spPr>
-        <p:txBody>
-          <a:bodyPr vert="horz" lIns="91440" tIns="45720" rIns="91440" bIns="45720" rtlCol="0" anchor="ctr">
-            <a:normAutofit/>
-          </a:bodyPr>
-          <a:lstStyle>
-            <a:lvl1pPr algn="l" defTabSz="914400" rtl="0" eaLnBrk="1" latinLnBrk="0" hangingPunct="1">
-              <a:lnSpc>
-                <a:spcPct val="90000"/>
-              </a:lnSpc>
-              <a:spcBef>
-                <a:spcPct val="0"/>
-              </a:spcBef>
-              <a:buNone/>
-              <a:defRPr sz="4400" kern="1200">
-                <a:solidFill>
-                  <a:schemeClr val="tx1"/>
-                </a:solidFill>
-                <a:latin typeface="+mj-lt"/>
-                <a:ea typeface="+mj-ea"/>
-                <a:cs typeface="+mj-cs"/>
-              </a:defRPr>
-            </a:lvl1pPr>
-          </a:lstStyle>
+      </p:pic>
+      <p:cxnSp>
+        <p:nvCxnSpPr>
+          <p:cNvPr id="12" name="Connector: Elbow 11">
+            <a:extLst>
+              <a:ext uri="{FF2B5EF4-FFF2-40B4-BE49-F238E27FC236}">
+                <a16:creationId xmlns:a16="http://schemas.microsoft.com/office/drawing/2014/main" id="{0375811A-BC31-5203-21BF-8C1AEDCA810A}"/>
+              </a:ext>
+            </a:extLst>
+          </p:cNvPr>
+          <p:cNvCxnSpPr>
+            <a:cxnSpLocks/>
+            <a:stCxn id="17" idx="3"/>
+            <a:endCxn id="18" idx="3"/>
+          </p:cNvCxnSpPr>
+          <p:nvPr/>
+        </p:nvCxnSpPr>
+        <p:spPr>
+          <a:xfrm>
+            <a:off x="3298371" y="4693670"/>
+            <a:ext cx="12700" cy="1569130"/>
+          </a:xfrm>
+          <a:prstGeom prst="bentConnector3">
+            <a:avLst>
+              <a:gd name="adj1" fmla="val 4542858"/>
+            </a:avLst>
+          </a:prstGeom>
+          <a:ln>
+            <a:tailEnd type="triangle"/>
+          </a:ln>
+        </p:spPr>
+        <p:style>
+          <a:lnRef idx="1">
+            <a:schemeClr val="accent1"/>
+          </a:lnRef>
+          <a:fillRef idx="0">
+            <a:schemeClr val="accent1"/>
+          </a:fillRef>
+          <a:effectRef idx="0">
+            <a:schemeClr val="accent1"/>
+          </a:effectRef>
+          <a:fontRef idx="minor">
+            <a:schemeClr val="tx1"/>
+          </a:fontRef>
+        </p:style>
+      </p:cxnSp>
+      <p:cxnSp>
+        <p:nvCxnSpPr>
+          <p:cNvPr id="15" name="Connector: Elbow 14">
+            <a:extLst>
+              <a:ext uri="{FF2B5EF4-FFF2-40B4-BE49-F238E27FC236}">
+                <a16:creationId xmlns:a16="http://schemas.microsoft.com/office/drawing/2014/main" id="{003D9D79-6AB4-D27E-4481-E60E0856012A}"/>
+              </a:ext>
+            </a:extLst>
+          </p:cNvPr>
+          <p:cNvCxnSpPr>
+            <a:cxnSpLocks/>
+            <a:stCxn id="27" idx="1"/>
+            <a:endCxn id="33" idx="1"/>
+          </p:cNvCxnSpPr>
+          <p:nvPr/>
+        </p:nvCxnSpPr>
+        <p:spPr>
+          <a:xfrm rot="10800000">
+            <a:off x="2090057" y="4807406"/>
+            <a:ext cx="12700" cy="1340354"/>
+          </a:xfrm>
+          <a:prstGeom prst="bentConnector3">
+            <a:avLst>
+              <a:gd name="adj1" fmla="val 1800000"/>
+            </a:avLst>
+          </a:prstGeom>
+          <a:ln>
+            <a:tailEnd type="triangle"/>
+          </a:ln>
+        </p:spPr>
+        <p:style>
+          <a:lnRef idx="1">
+            <a:schemeClr val="accent1"/>
+          </a:lnRef>
+          <a:fillRef idx="0">
+            <a:schemeClr val="accent1"/>
+          </a:fillRef>
+          <a:effectRef idx="0">
+            <a:schemeClr val="accent1"/>
+          </a:effectRef>
+          <a:fontRef idx="minor">
+            <a:schemeClr val="tx1"/>
+          </a:fontRef>
+        </p:style>
+      </p:cxnSp>
+      <p:sp>
+        <p:nvSpPr>
+          <p:cNvPr id="17" name="Rectangle: Rounded Corners 16">
+            <a:extLst>
+              <a:ext uri="{FF2B5EF4-FFF2-40B4-BE49-F238E27FC236}">
+                <a16:creationId xmlns:a16="http://schemas.microsoft.com/office/drawing/2014/main" id="{D957717F-F346-A328-0454-3432762A09F8}"/>
+              </a:ext>
+            </a:extLst>
+          </p:cNvPr>
+          <p:cNvSpPr/>
+          <p:nvPr/>
+        </p:nvSpPr>
+        <p:spPr>
+          <a:xfrm>
+            <a:off x="2090057" y="4347254"/>
+            <a:ext cx="1208314" cy="692832"/>
+          </a:xfrm>
+          <a:prstGeom prst="roundRect">
+            <a:avLst/>
+          </a:prstGeom>
+        </p:spPr>
+        <p:style>
+          <a:lnRef idx="2">
+            <a:schemeClr val="accent1">
+              <a:shade val="15000"/>
+            </a:schemeClr>
+          </a:lnRef>
+          <a:fillRef idx="1">
+            <a:schemeClr val="accent1"/>
+          </a:fillRef>
+          <a:effectRef idx="0">
+            <a:schemeClr val="accent1"/>
+          </a:effectRef>
+          <a:fontRef idx="minor">
+            <a:schemeClr val="lt1"/>
+          </a:fontRef>
+        </p:style>
+        <p:txBody>
+          <a:bodyPr rtlCol="0" anchor="ctr"/>
+          <a:lstStyle/>
           <a:p>
             <a:pPr algn="ctr"/>
             <a:r>
-              <a:rPr lang="pt-BR" sz="6600" dirty="0"/>
-              <a:t>Perguntas?</a:t>
-            </a:r>
-            <a:endParaRPr lang="pt-BR" sz="6600" b="1" i="1" dirty="0"/>
-          </a:p>
-        </p:txBody>
-      </p:sp>
+              <a:rPr lang="pt-BR" dirty="0"/>
+              <a:t>Agente</a:t>
+            </a:r>
+            <a:endParaRPr lang="en-US" dirty="0"/>
+          </a:p>
+        </p:txBody>
+      </p:sp>
+      <p:sp>
+        <p:nvSpPr>
+          <p:cNvPr id="18" name="Rectangle: Rounded Corners 17">
+            <a:extLst>
+              <a:ext uri="{FF2B5EF4-FFF2-40B4-BE49-F238E27FC236}">
+                <a16:creationId xmlns:a16="http://schemas.microsoft.com/office/drawing/2014/main" id="{39EF6FE5-6FBC-BC13-63C8-D6E9E3E272C4}"/>
+              </a:ext>
+            </a:extLst>
+          </p:cNvPr>
+          <p:cNvSpPr/>
+          <p:nvPr/>
+        </p:nvSpPr>
+        <p:spPr>
+          <a:xfrm>
+            <a:off x="2090057" y="5916384"/>
+            <a:ext cx="1208314" cy="692832"/>
+          </a:xfrm>
+          <a:prstGeom prst="roundRect">
+            <a:avLst/>
+          </a:prstGeom>
+        </p:spPr>
+        <p:style>
+          <a:lnRef idx="2">
+            <a:schemeClr val="accent1">
+              <a:shade val="15000"/>
+            </a:schemeClr>
+          </a:lnRef>
+          <a:fillRef idx="1">
+            <a:schemeClr val="accent1"/>
+          </a:fillRef>
+          <a:effectRef idx="0">
+            <a:schemeClr val="accent1"/>
+          </a:effectRef>
+          <a:fontRef idx="minor">
+            <a:schemeClr val="lt1"/>
+          </a:fontRef>
+        </p:style>
+        <p:txBody>
+          <a:bodyPr rtlCol="0" anchor="ctr"/>
+          <a:lstStyle/>
+          <a:p>
+            <a:pPr algn="ctr"/>
+            <a:r>
+              <a:rPr lang="pt-BR" dirty="0"/>
+              <a:t>Ambiente</a:t>
+            </a:r>
+            <a:endParaRPr lang="en-US" dirty="0"/>
+          </a:p>
+        </p:txBody>
+      </p:sp>
+      <p:sp>
+        <p:nvSpPr>
+          <p:cNvPr id="26" name="Rectangle 25">
+            <a:extLst>
+              <a:ext uri="{FF2B5EF4-FFF2-40B4-BE49-F238E27FC236}">
+                <a16:creationId xmlns:a16="http://schemas.microsoft.com/office/drawing/2014/main" id="{A78F414E-0878-E9AC-3349-365D683589EF}"/>
+              </a:ext>
+            </a:extLst>
+          </p:cNvPr>
+          <p:cNvSpPr/>
+          <p:nvPr/>
+        </p:nvSpPr>
+        <p:spPr>
+          <a:xfrm>
+            <a:off x="2090057" y="6262799"/>
+            <a:ext cx="370114" cy="230076"/>
+          </a:xfrm>
+          <a:prstGeom prst="rect">
+            <a:avLst/>
+          </a:prstGeom>
+          <a:ln>
+            <a:noFill/>
+          </a:ln>
+        </p:spPr>
+        <p:style>
+          <a:lnRef idx="2">
+            <a:schemeClr val="accent1">
+              <a:shade val="15000"/>
+            </a:schemeClr>
+          </a:lnRef>
+          <a:fillRef idx="1">
+            <a:schemeClr val="accent1"/>
+          </a:fillRef>
+          <a:effectRef idx="0">
+            <a:schemeClr val="accent1"/>
+          </a:effectRef>
+          <a:fontRef idx="minor">
+            <a:schemeClr val="lt1"/>
+          </a:fontRef>
+        </p:style>
+        <p:txBody>
+          <a:bodyPr rtlCol="0" anchor="ctr"/>
+          <a:lstStyle/>
+          <a:p>
+            <a:pPr algn="ctr"/>
+            <a:endParaRPr lang="en-US"/>
+          </a:p>
+        </p:txBody>
+      </p:sp>
+      <p:sp>
+        <p:nvSpPr>
+          <p:cNvPr id="27" name="Rectangle 26">
+            <a:extLst>
+              <a:ext uri="{FF2B5EF4-FFF2-40B4-BE49-F238E27FC236}">
+                <a16:creationId xmlns:a16="http://schemas.microsoft.com/office/drawing/2014/main" id="{67A2140F-0BEB-DFFC-0173-0DDE81A0BAF4}"/>
+              </a:ext>
+            </a:extLst>
+          </p:cNvPr>
+          <p:cNvSpPr/>
+          <p:nvPr/>
+        </p:nvSpPr>
+        <p:spPr>
+          <a:xfrm>
+            <a:off x="2090057" y="6032722"/>
+            <a:ext cx="370114" cy="230076"/>
+          </a:xfrm>
+          <a:prstGeom prst="rect">
+            <a:avLst/>
+          </a:prstGeom>
+          <a:ln>
+            <a:noFill/>
+          </a:ln>
+        </p:spPr>
+        <p:style>
+          <a:lnRef idx="2">
+            <a:schemeClr val="accent1">
+              <a:shade val="15000"/>
+            </a:schemeClr>
+          </a:lnRef>
+          <a:fillRef idx="1">
+            <a:schemeClr val="accent1"/>
+          </a:fillRef>
+          <a:effectRef idx="0">
+            <a:schemeClr val="accent1"/>
+          </a:effectRef>
+          <a:fontRef idx="minor">
+            <a:schemeClr val="lt1"/>
+          </a:fontRef>
+        </p:style>
+        <p:txBody>
+          <a:bodyPr rtlCol="0" anchor="ctr"/>
+          <a:lstStyle/>
+          <a:p>
+            <a:pPr algn="ctr"/>
+            <a:endParaRPr lang="en-US"/>
+          </a:p>
+        </p:txBody>
+      </p:sp>
+      <p:sp>
+        <p:nvSpPr>
+          <p:cNvPr id="33" name="Rectangle 32">
+            <a:extLst>
+              <a:ext uri="{FF2B5EF4-FFF2-40B4-BE49-F238E27FC236}">
+                <a16:creationId xmlns:a16="http://schemas.microsoft.com/office/drawing/2014/main" id="{C67CE66F-B1C9-97C2-5191-323C447A4039}"/>
+              </a:ext>
+            </a:extLst>
+          </p:cNvPr>
+          <p:cNvSpPr/>
+          <p:nvPr/>
+        </p:nvSpPr>
+        <p:spPr>
+          <a:xfrm>
+            <a:off x="2090057" y="4692368"/>
+            <a:ext cx="370114" cy="230076"/>
+          </a:xfrm>
+          <a:prstGeom prst="rect">
+            <a:avLst/>
+          </a:prstGeom>
+          <a:ln>
+            <a:noFill/>
+          </a:ln>
+        </p:spPr>
+        <p:style>
+          <a:lnRef idx="2">
+            <a:schemeClr val="accent1">
+              <a:shade val="15000"/>
+            </a:schemeClr>
+          </a:lnRef>
+          <a:fillRef idx="1">
+            <a:schemeClr val="accent1"/>
+          </a:fillRef>
+          <a:effectRef idx="0">
+            <a:schemeClr val="accent1"/>
+          </a:effectRef>
+          <a:fontRef idx="minor">
+            <a:schemeClr val="lt1"/>
+          </a:fontRef>
+        </p:style>
+        <p:txBody>
+          <a:bodyPr rtlCol="0" anchor="ctr"/>
+          <a:lstStyle/>
+          <a:p>
+            <a:pPr algn="ctr"/>
+            <a:endParaRPr lang="en-US"/>
+          </a:p>
+        </p:txBody>
+      </p:sp>
+      <p:sp>
+        <p:nvSpPr>
+          <p:cNvPr id="34" name="Rectangle 33">
+            <a:extLst>
+              <a:ext uri="{FF2B5EF4-FFF2-40B4-BE49-F238E27FC236}">
+                <a16:creationId xmlns:a16="http://schemas.microsoft.com/office/drawing/2014/main" id="{44116E33-D3F4-D7FB-DCEF-760C9C024249}"/>
+              </a:ext>
+            </a:extLst>
+          </p:cNvPr>
+          <p:cNvSpPr/>
+          <p:nvPr/>
+        </p:nvSpPr>
+        <p:spPr>
+          <a:xfrm>
+            <a:off x="2090057" y="4462291"/>
+            <a:ext cx="370114" cy="230076"/>
+          </a:xfrm>
+          <a:prstGeom prst="rect">
+            <a:avLst/>
+          </a:prstGeom>
+          <a:ln>
+            <a:noFill/>
+          </a:ln>
+        </p:spPr>
+        <p:style>
+          <a:lnRef idx="2">
+            <a:schemeClr val="accent1">
+              <a:shade val="15000"/>
+            </a:schemeClr>
+          </a:lnRef>
+          <a:fillRef idx="1">
+            <a:schemeClr val="accent1"/>
+          </a:fillRef>
+          <a:effectRef idx="0">
+            <a:schemeClr val="accent1"/>
+          </a:effectRef>
+          <a:fontRef idx="minor">
+            <a:schemeClr val="lt1"/>
+          </a:fontRef>
+        </p:style>
+        <p:txBody>
+          <a:bodyPr rtlCol="0" anchor="ctr"/>
+          <a:lstStyle/>
+          <a:p>
+            <a:pPr algn="ctr"/>
+            <a:endParaRPr lang="en-US"/>
+          </a:p>
+        </p:txBody>
+      </p:sp>
+      <p:cxnSp>
+        <p:nvCxnSpPr>
+          <p:cNvPr id="39" name="Connector: Elbow 38">
+            <a:extLst>
+              <a:ext uri="{FF2B5EF4-FFF2-40B4-BE49-F238E27FC236}">
+                <a16:creationId xmlns:a16="http://schemas.microsoft.com/office/drawing/2014/main" id="{2E464A75-8DCF-FE0C-4988-63A14D19D5CD}"/>
+              </a:ext>
+            </a:extLst>
+          </p:cNvPr>
+          <p:cNvCxnSpPr>
+            <a:stCxn id="26" idx="1"/>
+            <a:endCxn id="34" idx="1"/>
+          </p:cNvCxnSpPr>
+          <p:nvPr/>
+        </p:nvCxnSpPr>
+        <p:spPr>
+          <a:xfrm rot="10800000">
+            <a:off x="2090057" y="4577329"/>
+            <a:ext cx="12700" cy="1800508"/>
+          </a:xfrm>
+          <a:prstGeom prst="bentConnector3">
+            <a:avLst>
+              <a:gd name="adj1" fmla="val 4371425"/>
+            </a:avLst>
+          </a:prstGeom>
+          <a:ln>
+            <a:tailEnd type="triangle"/>
+          </a:ln>
+        </p:spPr>
+        <p:style>
+          <a:lnRef idx="1">
+            <a:schemeClr val="accent1"/>
+          </a:lnRef>
+          <a:fillRef idx="0">
+            <a:schemeClr val="accent1"/>
+          </a:fillRef>
+          <a:effectRef idx="0">
+            <a:schemeClr val="accent1"/>
+          </a:effectRef>
+          <a:fontRef idx="minor">
+            <a:schemeClr val="tx1"/>
+          </a:fontRef>
+        </p:style>
+      </p:cxnSp>
+      <mc:AlternateContent xmlns:mc="http://schemas.openxmlformats.org/markup-compatibility/2006">
+        <mc:Choice xmlns:a14="http://schemas.microsoft.com/office/drawing/2010/main" Requires="a14">
+          <p:sp>
+            <p:nvSpPr>
+              <p:cNvPr id="41" name="TextBox 40">
+                <a:extLst>
+                  <a:ext uri="{FF2B5EF4-FFF2-40B4-BE49-F238E27FC236}">
+                    <a16:creationId xmlns:a16="http://schemas.microsoft.com/office/drawing/2014/main" id="{DEBC8956-45EC-9A9F-7CAD-7A468058ABF1}"/>
+                  </a:ext>
+                </a:extLst>
+              </p:cNvPr>
+              <p:cNvSpPr txBox="1"/>
+              <p:nvPr/>
+            </p:nvSpPr>
+            <p:spPr>
+              <a:xfrm>
+                <a:off x="3864428" y="5292917"/>
+                <a:ext cx="863891" cy="369332"/>
+              </a:xfrm>
+              <a:prstGeom prst="rect">
+                <a:avLst/>
+              </a:prstGeom>
+              <a:noFill/>
+            </p:spPr>
+            <p:txBody>
+              <a:bodyPr wrap="none" rtlCol="0">
+                <a:spAutoFit/>
+              </a:bodyPr>
+              <a:lstStyle/>
+              <a:p>
+                <a:r>
+                  <a:rPr lang="pt-BR" dirty="0"/>
+                  <a:t>ação, </a:t>
+                </a:r>
+                <a14:m>
+                  <m:oMath xmlns:m="http://schemas.openxmlformats.org/officeDocument/2006/math">
+                    <m:r>
+                      <a:rPr lang="pt-BR" b="0" i="1" smtClean="0">
+                        <a:latin typeface="Cambria Math" panose="02040503050406030204" pitchFamily="18" charset="0"/>
+                      </a:rPr>
+                      <m:t>𝑎</m:t>
+                    </m:r>
+                  </m:oMath>
+                </a14:m>
+                <a:endParaRPr lang="en-US" dirty="0"/>
+              </a:p>
+            </p:txBody>
+          </p:sp>
+        </mc:Choice>
+        <mc:Fallback>
+          <p:sp>
+            <p:nvSpPr>
+              <p:cNvPr id="41" name="TextBox 40">
+                <a:extLst>
+                  <a:ext uri="{FF2B5EF4-FFF2-40B4-BE49-F238E27FC236}">
+                    <a16:creationId xmlns:a16="http://schemas.microsoft.com/office/drawing/2014/main" id="{DEBC8956-45EC-9A9F-7CAD-7A468058ABF1}"/>
+                  </a:ext>
+                </a:extLst>
+              </p:cNvPr>
+              <p:cNvSpPr txBox="1">
+                <a:spLocks noRot="1" noChangeAspect="1" noMove="1" noResize="1" noEditPoints="1" noAdjustHandles="1" noChangeArrowheads="1" noChangeShapeType="1" noTextEdit="1"/>
+              </p:cNvSpPr>
+              <p:nvPr/>
+            </p:nvSpPr>
+            <p:spPr>
+              <a:xfrm>
+                <a:off x="3864428" y="5292917"/>
+                <a:ext cx="863891" cy="369332"/>
+              </a:xfrm>
+              <a:prstGeom prst="rect">
+                <a:avLst/>
+              </a:prstGeom>
+              <a:blipFill>
+                <a:blip r:embed="rId5"/>
+                <a:stretch>
+                  <a:fillRect l="-6338" t="-8197" b="-24590"/>
+                </a:stretch>
+              </a:blipFill>
+            </p:spPr>
+            <p:txBody>
+              <a:bodyPr/>
+              <a:lstStyle/>
+              <a:p>
+                <a:r>
+                  <a:rPr lang="en-US">
+                    <a:noFill/>
+                  </a:rPr>
+                  <a:t> </a:t>
+                </a:r>
+              </a:p>
+            </p:txBody>
+          </p:sp>
+        </mc:Fallback>
+      </mc:AlternateContent>
     </p:spTree>
     <p:extLst>
       <p:ext uri="{BB962C8B-B14F-4D97-AF65-F5344CB8AC3E}">
-        <p14:creationId xmlns:p14="http://schemas.microsoft.com/office/powerpoint/2010/main" val="3773005660"/>
+        <p14:creationId xmlns:p14="http://schemas.microsoft.com/office/powerpoint/2010/main" val="2044752096"/>
       </p:ext>
     </p:extLst>
   </p:cSld>

--- a/slides/C24_Q_learning.pptx
+++ b/slides/C24_Q_learning.pptx
@@ -292,7 +292,7 @@
           <a:p>
             <a:fld id="{144F1436-6906-4D93-B7A2-786C327BFA14}" type="datetimeFigureOut">
               <a:rPr lang="nl-BE" smtClean="0"/>
-              <a:t>22/04/2026</a:t>
+              <a:t>23/04/2026</a:t>
             </a:fld>
             <a:endParaRPr lang="nl-BE"/>
           </a:p>
@@ -457,7 +457,7 @@
           <a:p>
             <a:fld id="{AA8CD09E-2914-4F47-B6C1-51B2C31814C9}" type="datetimeFigureOut">
               <a:rPr lang="pt-BR" smtClean="0"/>
-              <a:t>22/04/2026</a:t>
+              <a:t>23/04/2026</a:t>
             </a:fld>
             <a:endParaRPr lang="pt-BR"/>
           </a:p>
@@ -1555,7 +1555,7 @@
           <a:p>
             <a:fld id="{63289F7E-B80B-496E-81B4-D396C37C9454}" type="datetimeFigureOut">
               <a:rPr lang="pt-BR" smtClean="0"/>
-              <a:t>22/04/2026</a:t>
+              <a:t>23/04/2026</a:t>
             </a:fld>
             <a:endParaRPr lang="pt-BR"/>
           </a:p>
@@ -1753,7 +1753,7 @@
           <a:p>
             <a:fld id="{63289F7E-B80B-496E-81B4-D396C37C9454}" type="datetimeFigureOut">
               <a:rPr lang="pt-BR" smtClean="0"/>
-              <a:t>22/04/2026</a:t>
+              <a:t>23/04/2026</a:t>
             </a:fld>
             <a:endParaRPr lang="pt-BR"/>
           </a:p>
@@ -1961,7 +1961,7 @@
           <a:p>
             <a:fld id="{63289F7E-B80B-496E-81B4-D396C37C9454}" type="datetimeFigureOut">
               <a:rPr lang="pt-BR" smtClean="0"/>
-              <a:t>22/04/2026</a:t>
+              <a:t>23/04/2026</a:t>
             </a:fld>
             <a:endParaRPr lang="pt-BR"/>
           </a:p>
@@ -2159,7 +2159,7 @@
           <a:p>
             <a:fld id="{63289F7E-B80B-496E-81B4-D396C37C9454}" type="datetimeFigureOut">
               <a:rPr lang="pt-BR" smtClean="0"/>
-              <a:t>22/04/2026</a:t>
+              <a:t>23/04/2026</a:t>
             </a:fld>
             <a:endParaRPr lang="pt-BR"/>
           </a:p>
@@ -2434,7 +2434,7 @@
           <a:p>
             <a:fld id="{63289F7E-B80B-496E-81B4-D396C37C9454}" type="datetimeFigureOut">
               <a:rPr lang="pt-BR" smtClean="0"/>
-              <a:t>22/04/2026</a:t>
+              <a:t>23/04/2026</a:t>
             </a:fld>
             <a:endParaRPr lang="pt-BR"/>
           </a:p>
@@ -2699,7 +2699,7 @@
           <a:p>
             <a:fld id="{63289F7E-B80B-496E-81B4-D396C37C9454}" type="datetimeFigureOut">
               <a:rPr lang="pt-BR" smtClean="0"/>
-              <a:t>22/04/2026</a:t>
+              <a:t>23/04/2026</a:t>
             </a:fld>
             <a:endParaRPr lang="pt-BR"/>
           </a:p>
@@ -3111,7 +3111,7 @@
           <a:p>
             <a:fld id="{63289F7E-B80B-496E-81B4-D396C37C9454}" type="datetimeFigureOut">
               <a:rPr lang="pt-BR" smtClean="0"/>
-              <a:t>22/04/2026</a:t>
+              <a:t>23/04/2026</a:t>
             </a:fld>
             <a:endParaRPr lang="pt-BR"/>
           </a:p>
@@ -3252,7 +3252,7 @@
           <a:p>
             <a:fld id="{63289F7E-B80B-496E-81B4-D396C37C9454}" type="datetimeFigureOut">
               <a:rPr lang="pt-BR" smtClean="0"/>
-              <a:t>22/04/2026</a:t>
+              <a:t>23/04/2026</a:t>
             </a:fld>
             <a:endParaRPr lang="pt-BR"/>
           </a:p>
@@ -3365,7 +3365,7 @@
           <a:p>
             <a:fld id="{63289F7E-B80B-496E-81B4-D396C37C9454}" type="datetimeFigureOut">
               <a:rPr lang="pt-BR" smtClean="0"/>
-              <a:t>22/04/2026</a:t>
+              <a:t>23/04/2026</a:t>
             </a:fld>
             <a:endParaRPr lang="pt-BR"/>
           </a:p>
@@ -3676,7 +3676,7 @@
           <a:p>
             <a:fld id="{63289F7E-B80B-496E-81B4-D396C37C9454}" type="datetimeFigureOut">
               <a:rPr lang="pt-BR" smtClean="0"/>
-              <a:t>22/04/2026</a:t>
+              <a:t>23/04/2026</a:t>
             </a:fld>
             <a:endParaRPr lang="pt-BR"/>
           </a:p>
@@ -3964,7 +3964,7 @@
           <a:p>
             <a:fld id="{63289F7E-B80B-496E-81B4-D396C37C9454}" type="datetimeFigureOut">
               <a:rPr lang="pt-BR" smtClean="0"/>
-              <a:t>22/04/2026</a:t>
+              <a:t>23/04/2026</a:t>
             </a:fld>
             <a:endParaRPr lang="pt-BR"/>
           </a:p>
@@ -4205,7 +4205,7 @@
           <a:p>
             <a:fld id="{63289F7E-B80B-496E-81B4-D396C37C9454}" type="datetimeFigureOut">
               <a:rPr lang="pt-BR" smtClean="0"/>
-              <a:t>22/04/2026</a:t>
+              <a:t>23/04/2026</a:t>
             </a:fld>
             <a:endParaRPr lang="pt-BR"/>
           </a:p>
@@ -4899,68 +4899,13 @@
         </p:spPr>
         <p:txBody>
           <a:bodyPr>
-            <a:normAutofit lnSpcReduction="10000"/>
+            <a:normAutofit/>
           </a:bodyPr>
           <a:lstStyle/>
           <a:p>
-            <a:r>
-              <a:rPr lang="pt-BR" b="1" dirty="0"/>
-              <a:t>Agente:</a:t>
-            </a:r>
-            <a:r>
-              <a:rPr lang="pt-BR" dirty="0"/>
-              <a:t> O tomador de decisão (</a:t>
-            </a:r>
-            <a:r>
-              <a:rPr lang="pt-BR" dirty="0" err="1"/>
-              <a:t>ex</a:t>
-            </a:r>
-            <a:r>
-              <a:rPr lang="pt-BR" dirty="0"/>
-              <a:t>: um robô, um algoritmo de trading).</a:t>
-            </a:r>
-          </a:p>
-          <a:p>
-            <a:r>
-              <a:rPr lang="pt-BR" b="1" dirty="0"/>
-              <a:t>Ambiente:</a:t>
-            </a:r>
-            <a:r>
-              <a:rPr lang="pt-BR" dirty="0"/>
-              <a:t> O mundo onde o agente opera e com o qual interage.</a:t>
-            </a:r>
-          </a:p>
-          <a:p>
-            <a:r>
-              <a:rPr lang="pt-BR" b="1" dirty="0"/>
-              <a:t>Estado ($s$):</a:t>
-            </a:r>
-            <a:r>
-              <a:rPr lang="pt-BR" dirty="0"/>
-              <a:t> A situação atual do agente no ambiente.</a:t>
-            </a:r>
-          </a:p>
-          <a:p>
-            <a:r>
-              <a:rPr lang="pt-BR" b="1" dirty="0"/>
-              <a:t>Ação ($a$):</a:t>
-            </a:r>
-            <a:r>
-              <a:rPr lang="pt-BR" dirty="0"/>
-              <a:t> O que o agente pode fazer.</a:t>
-            </a:r>
-          </a:p>
-          <a:p>
-            <a:r>
-              <a:rPr lang="pt-BR" b="1" dirty="0"/>
-              <a:t>Recompensa ($r$):</a:t>
-            </a:r>
-            <a:r>
-              <a:rPr lang="pt-BR" dirty="0"/>
-              <a:t> O feedback (positivo ou negativo) recebido após uma ação.</a:t>
-            </a:r>
-          </a:p>
-          <a:p>
+            <a:pPr marL="0" indent="0">
+              <a:buNone/>
+            </a:pPr>
             <a:endParaRPr lang="pt-BR" dirty="0"/>
           </a:p>
           <a:p>
@@ -6834,8 +6779,8 @@
           </a:p>
         </p:txBody>
       </p:sp>
-      <mc:AlternateContent xmlns:mc="http://schemas.openxmlformats.org/markup-compatibility/2006">
-        <mc:Choice xmlns:a14="http://schemas.microsoft.com/office/drawing/2010/main" Requires="a14">
+      <mc:AlternateContent xmlns:mc="http://schemas.openxmlformats.org/markup-compatibility/2006" xmlns:a14="http://schemas.microsoft.com/office/drawing/2010/main">
+        <mc:Choice Requires="a14">
           <p:sp>
             <p:nvSpPr>
               <p:cNvPr id="3" name="Content Placeholder 2">
@@ -6972,7 +6917,7 @@
             </p:txBody>
           </p:sp>
         </mc:Choice>
-        <mc:Fallback>
+        <mc:Fallback xmlns="">
           <p:sp>
             <p:nvSpPr>
               <p:cNvPr id="3" name="Content Placeholder 2">
@@ -7483,8 +7428,8 @@
           </a:fontRef>
         </p:style>
       </p:cxnSp>
-      <mc:AlternateContent xmlns:mc="http://schemas.openxmlformats.org/markup-compatibility/2006">
-        <mc:Choice xmlns:a14="http://schemas.microsoft.com/office/drawing/2010/main" Requires="a14">
+      <mc:AlternateContent xmlns:mc="http://schemas.openxmlformats.org/markup-compatibility/2006" xmlns:a14="http://schemas.microsoft.com/office/drawing/2010/main">
+        <mc:Choice Requires="a14">
           <p:sp>
             <p:nvSpPr>
               <p:cNvPr id="41" name="TextBox 40">
@@ -7532,7 +7477,7 @@
             </p:txBody>
           </p:sp>
         </mc:Choice>
-        <mc:Fallback>
+        <mc:Fallback xmlns="">
           <p:sp>
             <p:nvSpPr>
               <p:cNvPr id="41" name="TextBox 40">

--- a/slides/C24_Q_learning.pptx
+++ b/slides/C24_Q_learning.pptx
@@ -5,10 +5,10 @@
     <p:sldMasterId id="2147483648" r:id="rId1"/>
   </p:sldMasterIdLst>
   <p:notesMasterIdLst>
-    <p:notesMasterId r:id="rId20"/>
+    <p:notesMasterId r:id="rId23"/>
   </p:notesMasterIdLst>
   <p:handoutMasterIdLst>
-    <p:handoutMasterId r:id="rId21"/>
+    <p:handoutMasterId r:id="rId24"/>
   </p:handoutMasterIdLst>
   <p:sldIdLst>
     <p:sldId id="256" r:id="rId2"/>
@@ -20,15 +20,18 @@
     <p:sldId id="318" r:id="rId8"/>
     <p:sldId id="316" r:id="rId9"/>
     <p:sldId id="319" r:id="rId10"/>
-    <p:sldId id="322" r:id="rId11"/>
-    <p:sldId id="309" r:id="rId12"/>
-    <p:sldId id="310" r:id="rId13"/>
-    <p:sldId id="311" r:id="rId14"/>
-    <p:sldId id="312" r:id="rId15"/>
-    <p:sldId id="313" r:id="rId16"/>
-    <p:sldId id="293" r:id="rId17"/>
-    <p:sldId id="314" r:id="rId18"/>
-    <p:sldId id="306" r:id="rId19"/>
+    <p:sldId id="325" r:id="rId11"/>
+    <p:sldId id="322" r:id="rId12"/>
+    <p:sldId id="309" r:id="rId13"/>
+    <p:sldId id="310" r:id="rId14"/>
+    <p:sldId id="311" r:id="rId15"/>
+    <p:sldId id="312" r:id="rId16"/>
+    <p:sldId id="313" r:id="rId17"/>
+    <p:sldId id="293" r:id="rId18"/>
+    <p:sldId id="314" r:id="rId19"/>
+    <p:sldId id="306" r:id="rId20"/>
+    <p:sldId id="324" r:id="rId21"/>
+    <p:sldId id="323" r:id="rId22"/>
   </p:sldIdLst>
   <p:sldSz cx="12192000" cy="6858000"/>
   <p:notesSz cx="7315200" cy="9601200"/>
@@ -1260,6 +1263,26 @@
           <a:bodyPr/>
           <a:lstStyle/>
           <a:p>
+            <a:r>
+              <a:rPr lang="pt-BR" dirty="0"/>
+              <a:t>O processo ocorre em etapas de tempo discretas (</a:t>
+            </a:r>
+            <a:r>
+              <a:rPr lang="pt-BR" sz="1200" kern="1200" dirty="0">
+                <a:solidFill>
+                  <a:schemeClr val="tx1"/>
+                </a:solidFill>
+                <a:effectLst/>
+                <a:latin typeface="+mn-lt"/>
+                <a:ea typeface="+mn-ea"/>
+                <a:cs typeface="+mn-cs"/>
+              </a:rPr>
+              <a:t>$t, t+1, t+2...$</a:t>
+            </a:r>
+            <a:r>
+              <a:rPr lang="pt-BR" dirty="0"/>
+              <a:t>).</a:t>
+            </a:r>
             <a:endParaRPr lang="en-US" dirty="0"/>
           </a:p>
         </p:txBody>
@@ -1301,6 +1324,134 @@
 </file>
 
 <file path=ppt/notesSlides/notesSlide7.xml><?xml version="1.0" encoding="utf-8"?>
+<p:notes xmlns:a="http://schemas.openxmlformats.org/drawingml/2006/main" xmlns:r="http://schemas.openxmlformats.org/officeDocument/2006/relationships" xmlns:p="http://schemas.openxmlformats.org/presentationml/2006/main">
+  <p:cSld>
+    <p:spTree>
+      <p:nvGrpSpPr>
+        <p:cNvPr id="1" name="">
+          <a:extLst>
+            <a:ext uri="{FF2B5EF4-FFF2-40B4-BE49-F238E27FC236}">
+              <a16:creationId xmlns:a16="http://schemas.microsoft.com/office/drawing/2014/main" id="{0D0A5E72-3763-6194-5E85-BE26354035A3}"/>
+            </a:ext>
+          </a:extLst>
+        </p:cNvPr>
+        <p:cNvGrpSpPr/>
+        <p:nvPr/>
+      </p:nvGrpSpPr>
+      <p:grpSpPr>
+        <a:xfrm>
+          <a:off x="0" y="0"/>
+          <a:ext cx="0" cy="0"/>
+          <a:chOff x="0" y="0"/>
+          <a:chExt cx="0" cy="0"/>
+        </a:xfrm>
+      </p:grpSpPr>
+      <p:sp>
+        <p:nvSpPr>
+          <p:cNvPr id="2" name="Slide Image Placeholder 1">
+            <a:extLst>
+              <a:ext uri="{FF2B5EF4-FFF2-40B4-BE49-F238E27FC236}">
+                <a16:creationId xmlns:a16="http://schemas.microsoft.com/office/drawing/2014/main" id="{82466988-6655-8B01-840E-0BE3EDB68F07}"/>
+              </a:ext>
+            </a:extLst>
+          </p:cNvPr>
+          <p:cNvSpPr>
+            <a:spLocks noGrp="1" noRot="1" noChangeAspect="1"/>
+          </p:cNvSpPr>
+          <p:nvPr>
+            <p:ph type="sldImg"/>
+          </p:nvPr>
+        </p:nvSpPr>
+        <p:spPr/>
+      </p:sp>
+      <p:sp>
+        <p:nvSpPr>
+          <p:cNvPr id="3" name="Notes Placeholder 2">
+            <a:extLst>
+              <a:ext uri="{FF2B5EF4-FFF2-40B4-BE49-F238E27FC236}">
+                <a16:creationId xmlns:a16="http://schemas.microsoft.com/office/drawing/2014/main" id="{5E09F3D0-11CA-2E8D-04C5-104C59DCE708}"/>
+              </a:ext>
+            </a:extLst>
+          </p:cNvPr>
+          <p:cNvSpPr>
+            <a:spLocks noGrp="1"/>
+          </p:cNvSpPr>
+          <p:nvPr>
+            <p:ph type="body" idx="1"/>
+          </p:nvPr>
+        </p:nvSpPr>
+        <p:spPr/>
+        <p:txBody>
+          <a:bodyPr/>
+          <a:lstStyle/>
+          <a:p>
+            <a:r>
+              <a:rPr lang="pt-BR" dirty="0"/>
+              <a:t>O processo ocorre em etapas de tempo discretas (</a:t>
+            </a:r>
+            <a:r>
+              <a:rPr lang="pt-BR" sz="1200" kern="1200" dirty="0">
+                <a:solidFill>
+                  <a:schemeClr val="tx1"/>
+                </a:solidFill>
+                <a:effectLst/>
+                <a:latin typeface="+mn-lt"/>
+                <a:ea typeface="+mn-ea"/>
+                <a:cs typeface="+mn-cs"/>
+              </a:rPr>
+              <a:t>$t, t+1, t+2...$</a:t>
+            </a:r>
+            <a:r>
+              <a:rPr lang="pt-BR" dirty="0"/>
+              <a:t>).</a:t>
+            </a:r>
+            <a:endParaRPr lang="en-US" dirty="0"/>
+          </a:p>
+        </p:txBody>
+      </p:sp>
+      <p:sp>
+        <p:nvSpPr>
+          <p:cNvPr id="4" name="Slide Number Placeholder 3">
+            <a:extLst>
+              <a:ext uri="{FF2B5EF4-FFF2-40B4-BE49-F238E27FC236}">
+                <a16:creationId xmlns:a16="http://schemas.microsoft.com/office/drawing/2014/main" id="{68F0BCD7-F825-C67D-D845-8316B4C4B6D6}"/>
+              </a:ext>
+            </a:extLst>
+          </p:cNvPr>
+          <p:cNvSpPr>
+            <a:spLocks noGrp="1"/>
+          </p:cNvSpPr>
+          <p:nvPr>
+            <p:ph type="sldNum" sz="quarter" idx="5"/>
+          </p:nvPr>
+        </p:nvSpPr>
+        <p:spPr/>
+        <p:txBody>
+          <a:bodyPr/>
+          <a:lstStyle/>
+          <a:p>
+            <a:fld id="{6FC8D850-966F-45A6-8DE7-15B891E7D40D}" type="slidenum">
+              <a:rPr lang="pt-BR" smtClean="0"/>
+              <a:t>10</a:t>
+            </a:fld>
+            <a:endParaRPr lang="pt-BR"/>
+          </a:p>
+        </p:txBody>
+      </p:sp>
+    </p:spTree>
+    <p:extLst>
+      <p:ext uri="{BB962C8B-B14F-4D97-AF65-F5344CB8AC3E}">
+        <p14:creationId xmlns:p14="http://schemas.microsoft.com/office/powerpoint/2010/main" val="3921267477"/>
+      </p:ext>
+    </p:extLst>
+  </p:cSld>
+  <p:clrMapOvr>
+    <a:masterClrMapping/>
+  </p:clrMapOvr>
+</p:notes>
+</file>
+
+<file path=ppt/notesSlides/notesSlide8.xml><?xml version="1.0" encoding="utf-8"?>
 <p:notes xmlns:a="http://schemas.openxmlformats.org/drawingml/2006/main" xmlns:r="http://schemas.openxmlformats.org/officeDocument/2006/relationships" xmlns:p="http://schemas.openxmlformats.org/presentationml/2006/main">
   <p:cSld>
     <p:spTree>
@@ -1389,7 +1540,7 @@
           <a:p>
             <a:fld id="{6FC8D850-966F-45A6-8DE7-15B891E7D40D}" type="slidenum">
               <a:rPr lang="pt-BR" smtClean="0"/>
-              <a:t>10</a:t>
+              <a:t>11</a:t>
             </a:fld>
             <a:endParaRPr lang="pt-BR"/>
           </a:p>
@@ -4820,6 +4971,328 @@
         <p:cNvPr id="1" name="">
           <a:extLst>
             <a:ext uri="{FF2B5EF4-FFF2-40B4-BE49-F238E27FC236}">
+              <a16:creationId xmlns:a16="http://schemas.microsoft.com/office/drawing/2014/main" id="{DDB2BBDA-DAF3-B7AC-FB99-7C5B9285F912}"/>
+            </a:ext>
+          </a:extLst>
+        </p:cNvPr>
+        <p:cNvGrpSpPr/>
+        <p:nvPr/>
+      </p:nvGrpSpPr>
+      <p:grpSpPr>
+        <a:xfrm>
+          <a:off x="0" y="0"/>
+          <a:ext cx="0" cy="0"/>
+          <a:chOff x="0" y="0"/>
+          <a:chExt cx="0" cy="0"/>
+        </a:xfrm>
+      </p:grpSpPr>
+      <p:sp>
+        <p:nvSpPr>
+          <p:cNvPr id="2" name="Title 1">
+            <a:extLst>
+              <a:ext uri="{FF2B5EF4-FFF2-40B4-BE49-F238E27FC236}">
+                <a16:creationId xmlns:a16="http://schemas.microsoft.com/office/drawing/2014/main" id="{A98D36C9-8653-8E41-11D8-585B6AC0D03D}"/>
+              </a:ext>
+            </a:extLst>
+          </p:cNvPr>
+          <p:cNvSpPr>
+            <a:spLocks noGrp="1"/>
+          </p:cNvSpPr>
+          <p:nvPr>
+            <p:ph type="title"/>
+          </p:nvPr>
+        </p:nvSpPr>
+        <p:spPr/>
+        <p:txBody>
+          <a:bodyPr/>
+          <a:lstStyle/>
+          <a:p>
+            <a:r>
+              <a:rPr lang="en-US" dirty="0" err="1"/>
+              <a:t>Conceitos</a:t>
+            </a:r>
+            <a:r>
+              <a:rPr lang="en-US" dirty="0"/>
+              <a:t> </a:t>
+            </a:r>
+            <a:r>
+              <a:rPr lang="en-US" dirty="0" err="1"/>
+              <a:t>fundamentais</a:t>
+            </a:r>
+            <a:r>
+              <a:rPr lang="en-US" dirty="0"/>
+              <a:t> de RL</a:t>
+            </a:r>
+          </a:p>
+        </p:txBody>
+      </p:sp>
+      <mc:AlternateContent xmlns:mc="http://schemas.openxmlformats.org/markup-compatibility/2006">
+        <mc:Choice xmlns:a14="http://schemas.microsoft.com/office/drawing/2010/main" Requires="a14">
+          <p:sp>
+            <p:nvSpPr>
+              <p:cNvPr id="3" name="Content Placeholder 2">
+                <a:extLst>
+                  <a:ext uri="{FF2B5EF4-FFF2-40B4-BE49-F238E27FC236}">
+                    <a16:creationId xmlns:a16="http://schemas.microsoft.com/office/drawing/2014/main" id="{981046E0-93D4-BF9F-C552-72A01838A8A3}"/>
+                  </a:ext>
+                </a:extLst>
+              </p:cNvPr>
+              <p:cNvSpPr>
+                <a:spLocks noGrp="1"/>
+              </p:cNvSpPr>
+              <p:nvPr>
+                <p:ph idx="1"/>
+              </p:nvPr>
+            </p:nvSpPr>
+            <p:spPr>
+              <a:xfrm>
+                <a:off x="5303968" y="1836510"/>
+                <a:ext cx="6757404" cy="5021489"/>
+              </a:xfrm>
+            </p:spPr>
+            <p:txBody>
+              <a:bodyPr>
+                <a:normAutofit fontScale="92500"/>
+              </a:bodyPr>
+              <a:lstStyle/>
+              <a:p>
+                <a:r>
+                  <a:rPr lang="pt-BR" dirty="0"/>
+                  <a:t>O agente e o ambiente interagem em etapas de tempo discreto: </a:t>
+                </a:r>
+                <a14:m>
+                  <m:oMath xmlns:m="http://schemas.openxmlformats.org/officeDocument/2006/math">
+                    <m:r>
+                      <a:rPr lang="pt-BR" b="0" i="1" smtClean="0">
+                        <a:latin typeface="Cambria Math" panose="02040503050406030204" pitchFamily="18" charset="0"/>
+                      </a:rPr>
+                      <m:t>𝑡</m:t>
+                    </m:r>
+                    <m:r>
+                      <a:rPr lang="pt-BR" b="0" i="1" smtClean="0">
+                        <a:latin typeface="Cambria Math" panose="02040503050406030204" pitchFamily="18" charset="0"/>
+                      </a:rPr>
+                      <m:t>, </m:t>
+                    </m:r>
+                    <m:r>
+                      <a:rPr lang="pt-BR" b="0" i="1" smtClean="0">
+                        <a:latin typeface="Cambria Math" panose="02040503050406030204" pitchFamily="18" charset="0"/>
+                      </a:rPr>
+                      <m:t>𝑡</m:t>
+                    </m:r>
+                    <m:r>
+                      <a:rPr lang="pt-BR" b="0" i="1" smtClean="0">
+                        <a:latin typeface="Cambria Math" panose="02040503050406030204" pitchFamily="18" charset="0"/>
+                      </a:rPr>
+                      <m:t>+1, </m:t>
+                    </m:r>
+                    <m:r>
+                      <a:rPr lang="pt-BR" b="0" i="1" smtClean="0">
+                        <a:latin typeface="Cambria Math" panose="02040503050406030204" pitchFamily="18" charset="0"/>
+                      </a:rPr>
+                      <m:t>𝑡</m:t>
+                    </m:r>
+                    <m:r>
+                      <a:rPr lang="pt-BR" b="0" i="1" smtClean="0">
+                        <a:latin typeface="Cambria Math" panose="02040503050406030204" pitchFamily="18" charset="0"/>
+                      </a:rPr>
+                      <m:t>+2, …, </m:t>
+                    </m:r>
+                    <m:r>
+                      <a:rPr lang="pt-BR" b="0" i="1" smtClean="0">
+                        <a:latin typeface="Cambria Math" panose="02040503050406030204" pitchFamily="18" charset="0"/>
+                      </a:rPr>
+                      <m:t>𝑇</m:t>
+                    </m:r>
+                  </m:oMath>
+                </a14:m>
+                <a:r>
+                  <a:rPr lang="pt-BR" dirty="0"/>
+                  <a:t>.</a:t>
+                </a:r>
+              </a:p>
+              <a:p>
+                <a:r>
+                  <a:rPr lang="pt-BR" dirty="0"/>
+                  <a:t>A cada instante t, o agente </a:t>
+                </a:r>
+              </a:p>
+              <a:p>
+                <a:pPr lvl="1"/>
+                <a:r>
+                  <a:rPr lang="pt-BR" dirty="0"/>
+                  <a:t>recebe o estado </a:t>
+                </a:r>
+                <a14:m>
+                  <m:oMath xmlns:m="http://schemas.openxmlformats.org/officeDocument/2006/math">
+                    <m:sSub>
+                      <m:sSubPr>
+                        <m:ctrlPr>
+                          <a:rPr lang="pt-BR" i="1" smtClean="0">
+                            <a:latin typeface="Cambria Math" panose="02040503050406030204" pitchFamily="18" charset="0"/>
+                          </a:rPr>
+                        </m:ctrlPr>
+                      </m:sSubPr>
+                      <m:e>
+                        <m:r>
+                          <a:rPr lang="pt-BR" b="0" i="1" smtClean="0">
+                            <a:latin typeface="Cambria Math" panose="02040503050406030204" pitchFamily="18" charset="0"/>
+                          </a:rPr>
+                          <m:t>𝑠</m:t>
+                        </m:r>
+                      </m:e>
+                      <m:sub>
+                        <m:r>
+                          <a:rPr lang="pt-BR" b="0" i="1" smtClean="0">
+                            <a:latin typeface="Cambria Math" panose="02040503050406030204" pitchFamily="18" charset="0"/>
+                          </a:rPr>
+                          <m:t>𝑡</m:t>
+                        </m:r>
+                      </m:sub>
+                    </m:sSub>
+                  </m:oMath>
+                </a14:m>
+                <a:endParaRPr lang="pt-BR" dirty="0"/>
+              </a:p>
+              <a:p>
+                <a:pPr lvl="1"/>
+                <a:endParaRPr lang="pt-BR" dirty="0"/>
+              </a:p>
+              <a:p>
+                <a:pPr lvl="1"/>
+                <a:r>
+                  <a:rPr lang="pt-BR" dirty="0"/>
+                  <a:t>alguma representação do estado do ambiente, </a:t>
+                </a:r>
+                <a:r>
+                  <a:rPr lang="pt-BR" dirty="0" err="1"/>
+                  <a:t>St</a:t>
+                </a:r>
+                <a:r>
+                  <a:rPr lang="pt-BR" dirty="0"/>
+                  <a:t> ∈ S, onde S é o conjunto de estados possíveis, e com base nisso seleciona uma ação, At ∈ A(</a:t>
+                </a:r>
+                <a:r>
+                  <a:rPr lang="pt-BR" dirty="0" err="1"/>
+                  <a:t>St</a:t>
+                </a:r>
+                <a:r>
+                  <a:rPr lang="pt-BR" dirty="0"/>
+                  <a:t>), onde A(</a:t>
+                </a:r>
+                <a:r>
+                  <a:rPr lang="pt-BR" dirty="0" err="1"/>
+                  <a:t>St</a:t>
+                </a:r>
+                <a:r>
+                  <a:rPr lang="pt-BR" dirty="0"/>
+                  <a:t>) é o conjunto de ações disponíveis no estado St. Um instante depois, em parte como consequência de sua ação, o agente recebe uma recompensa numérica, Rt+1 ∈ R ⊂ R, e se encontra em um novo estado, St+1. A Figura 3.1 ilustra a interação agente-ambiente.</a:t>
+                </a:r>
+              </a:p>
+            </p:txBody>
+          </p:sp>
+        </mc:Choice>
+        <mc:Fallback>
+          <p:sp>
+            <p:nvSpPr>
+              <p:cNvPr id="3" name="Content Placeholder 2">
+                <a:extLst>
+                  <a:ext uri="{FF2B5EF4-FFF2-40B4-BE49-F238E27FC236}">
+                    <a16:creationId xmlns:a16="http://schemas.microsoft.com/office/drawing/2014/main" id="{981046E0-93D4-BF9F-C552-72A01838A8A3}"/>
+                  </a:ext>
+                </a:extLst>
+              </p:cNvPr>
+              <p:cNvSpPr>
+                <a:spLocks noGrp="1" noRot="1" noChangeAspect="1" noMove="1" noResize="1" noEditPoints="1" noAdjustHandles="1" noChangeArrowheads="1" noChangeShapeType="1" noTextEdit="1"/>
+              </p:cNvSpPr>
+              <p:nvPr>
+                <p:ph idx="1"/>
+              </p:nvPr>
+            </p:nvSpPr>
+            <p:spPr>
+              <a:xfrm>
+                <a:off x="5303968" y="1836510"/>
+                <a:ext cx="6757404" cy="5021489"/>
+              </a:xfrm>
+              <a:blipFill>
+                <a:blip r:embed="rId3"/>
+                <a:stretch>
+                  <a:fillRect l="-1353" t="-1820" r="-541"/>
+                </a:stretch>
+              </a:blipFill>
+            </p:spPr>
+            <p:txBody>
+              <a:bodyPr/>
+              <a:lstStyle/>
+              <a:p>
+                <a:r>
+                  <a:rPr lang="en-US">
+                    <a:noFill/>
+                  </a:rPr>
+                  <a:t> </a:t>
+                </a:r>
+              </a:p>
+            </p:txBody>
+          </p:sp>
+        </mc:Fallback>
+      </mc:AlternateContent>
+      <p:pic>
+        <p:nvPicPr>
+          <p:cNvPr id="61" name="Picture 60">
+            <a:extLst>
+              <a:ext uri="{FF2B5EF4-FFF2-40B4-BE49-F238E27FC236}">
+                <a16:creationId xmlns:a16="http://schemas.microsoft.com/office/drawing/2014/main" id="{22F895FA-1424-E50C-97F4-4F0BE0413C2F}"/>
+              </a:ext>
+            </a:extLst>
+          </p:cNvPr>
+          <p:cNvPicPr>
+            <a:picLocks noChangeAspect="1"/>
+          </p:cNvPicPr>
+          <p:nvPr/>
+        </p:nvPicPr>
+        <p:blipFill>
+          <a:blip r:embed="rId4">
+            <a:extLst>
+              <a:ext uri="{28A0092B-C50C-407E-A947-70E740481C1C}">
+                <a14:useLocalDpi xmlns:a14="http://schemas.microsoft.com/office/drawing/2010/main" val="0"/>
+              </a:ext>
+            </a:extLst>
+          </a:blip>
+          <a:stretch>
+            <a:fillRect/>
+          </a:stretch>
+        </p:blipFill>
+        <p:spPr>
+          <a:xfrm>
+            <a:off x="130629" y="2859764"/>
+            <a:ext cx="5173338" cy="2335899"/>
+          </a:xfrm>
+          <a:prstGeom prst="rect">
+            <a:avLst/>
+          </a:prstGeom>
+        </p:spPr>
+      </p:pic>
+    </p:spTree>
+    <p:extLst>
+      <p:ext uri="{BB962C8B-B14F-4D97-AF65-F5344CB8AC3E}">
+        <p14:creationId xmlns:p14="http://schemas.microsoft.com/office/powerpoint/2010/main" val="3796655630"/>
+      </p:ext>
+    </p:extLst>
+  </p:cSld>
+  <p:clrMapOvr>
+    <a:masterClrMapping/>
+  </p:clrMapOvr>
+</p:sld>
+</file>
+
+<file path=ppt/slides/slide11.xml><?xml version="1.0" encoding="utf-8"?>
+<p:sld xmlns:a="http://schemas.openxmlformats.org/drawingml/2006/main" xmlns:r="http://schemas.openxmlformats.org/officeDocument/2006/relationships" xmlns:p="http://schemas.openxmlformats.org/presentationml/2006/main">
+  <p:cSld>
+    <p:spTree>
+      <p:nvGrpSpPr>
+        <p:cNvPr id="1" name="">
+          <a:extLst>
+            <a:ext uri="{FF2B5EF4-FFF2-40B4-BE49-F238E27FC236}">
               <a16:creationId xmlns:a16="http://schemas.microsoft.com/office/drawing/2014/main" id="{2B0ADE0A-2709-4969-FA9A-1E03D69961E0}"/>
             </a:ext>
           </a:extLst>
@@ -4935,7 +5408,7 @@
 </p:sld>
 </file>
 
-<file path=ppt/slides/slide11.xml><?xml version="1.0" encoding="utf-8"?>
+<file path=ppt/slides/slide12.xml><?xml version="1.0" encoding="utf-8"?>
 <p:sld xmlns:a="http://schemas.openxmlformats.org/drawingml/2006/main" xmlns:r="http://schemas.openxmlformats.org/officeDocument/2006/relationships" xmlns:p="http://schemas.openxmlformats.org/presentationml/2006/main">
   <p:cSld>
     <p:spTree>
@@ -5018,7 +5491,7 @@
 </p:sld>
 </file>
 
-<file path=ppt/slides/slide12.xml><?xml version="1.0" encoding="utf-8"?>
+<file path=ppt/slides/slide13.xml><?xml version="1.0" encoding="utf-8"?>
 <p:sld xmlns:a="http://schemas.openxmlformats.org/drawingml/2006/main" xmlns:r="http://schemas.openxmlformats.org/officeDocument/2006/relationships" xmlns:p="http://schemas.openxmlformats.org/presentationml/2006/main">
   <p:cSld>
     <p:spTree>
@@ -5107,7 +5580,7 @@
 </p:sld>
 </file>
 
-<file path=ppt/slides/slide13.xml><?xml version="1.0" encoding="utf-8"?>
+<file path=ppt/slides/slide14.xml><?xml version="1.0" encoding="utf-8"?>
 <p:sld xmlns:a="http://schemas.openxmlformats.org/drawingml/2006/main" xmlns:r="http://schemas.openxmlformats.org/officeDocument/2006/relationships" xmlns:p="http://schemas.openxmlformats.org/presentationml/2006/main">
   <p:cSld>
     <p:spTree>
@@ -5187,89 +5660,6 @@
     <p:extLst>
       <p:ext uri="{BB962C8B-B14F-4D97-AF65-F5344CB8AC3E}">
         <p14:creationId xmlns:p14="http://schemas.microsoft.com/office/powerpoint/2010/main" val="1521811257"/>
-      </p:ext>
-    </p:extLst>
-  </p:cSld>
-  <p:clrMapOvr>
-    <a:masterClrMapping/>
-  </p:clrMapOvr>
-</p:sld>
-</file>
-
-<file path=ppt/slides/slide14.xml><?xml version="1.0" encoding="utf-8"?>
-<p:sld xmlns:a="http://schemas.openxmlformats.org/drawingml/2006/main" xmlns:r="http://schemas.openxmlformats.org/officeDocument/2006/relationships" xmlns:p="http://schemas.openxmlformats.org/presentationml/2006/main">
-  <p:cSld>
-    <p:spTree>
-      <p:nvGrpSpPr>
-        <p:cNvPr id="1" name=""/>
-        <p:cNvGrpSpPr/>
-        <p:nvPr/>
-      </p:nvGrpSpPr>
-      <p:grpSpPr>
-        <a:xfrm>
-          <a:off x="0" y="0"/>
-          <a:ext cx="0" cy="0"/>
-          <a:chOff x="0" y="0"/>
-          <a:chExt cx="0" cy="0"/>
-        </a:xfrm>
-      </p:grpSpPr>
-      <p:sp>
-        <p:nvSpPr>
-          <p:cNvPr id="2" name="Título 1">
-            <a:extLst>
-              <a:ext uri="{FF2B5EF4-FFF2-40B4-BE49-F238E27FC236}">
-                <a16:creationId xmlns:a16="http://schemas.microsoft.com/office/drawing/2014/main" id="{B9E502FC-4440-F5DA-F299-69CD15E702AE}"/>
-              </a:ext>
-            </a:extLst>
-          </p:cNvPr>
-          <p:cNvSpPr>
-            <a:spLocks noGrp="1"/>
-          </p:cNvSpPr>
-          <p:nvPr>
-            <p:ph type="title"/>
-          </p:nvPr>
-        </p:nvSpPr>
-        <p:spPr/>
-        <p:txBody>
-          <a:bodyPr/>
-          <a:lstStyle/>
-          <a:p>
-            <a:r>
-              <a:rPr lang="pt-BR" dirty="0"/>
-              <a:t>Exemplo(s) de aplicação</a:t>
-            </a:r>
-          </a:p>
-        </p:txBody>
-      </p:sp>
-      <p:sp>
-        <p:nvSpPr>
-          <p:cNvPr id="3" name="Espaço Reservado para Conteúdo 2">
-            <a:extLst>
-              <a:ext uri="{FF2B5EF4-FFF2-40B4-BE49-F238E27FC236}">
-                <a16:creationId xmlns:a16="http://schemas.microsoft.com/office/drawing/2014/main" id="{69359096-6B47-BEA3-55AD-95F90CDC8489}"/>
-              </a:ext>
-            </a:extLst>
-          </p:cNvPr>
-          <p:cNvSpPr>
-            <a:spLocks noGrp="1"/>
-          </p:cNvSpPr>
-          <p:nvPr>
-            <p:ph idx="1"/>
-          </p:nvPr>
-        </p:nvSpPr>
-        <p:spPr/>
-        <p:txBody>
-          <a:bodyPr/>
-          <a:lstStyle/>
-          <a:p>
-            <a:endParaRPr lang="pt-BR"/>
-          </a:p>
-        </p:txBody>
-      </p:sp>
-    </p:spTree>
-    <p:extLst>
-      <p:ext uri="{BB962C8B-B14F-4D97-AF65-F5344CB8AC3E}">
-        <p14:creationId xmlns:p14="http://schemas.microsoft.com/office/powerpoint/2010/main" val="1532530965"/>
       </p:ext>
     </p:extLst>
   </p:cSld>
@@ -5301,7 +5691,7 @@
           <p:cNvPr id="2" name="Título 1">
             <a:extLst>
               <a:ext uri="{FF2B5EF4-FFF2-40B4-BE49-F238E27FC236}">
-                <a16:creationId xmlns:a16="http://schemas.microsoft.com/office/drawing/2014/main" id="{B7EBC8F7-03EF-338A-A90B-280A41AF9688}"/>
+                <a16:creationId xmlns:a16="http://schemas.microsoft.com/office/drawing/2014/main" id="{B9E502FC-4440-F5DA-F299-69CD15E702AE}"/>
               </a:ext>
             </a:extLst>
           </p:cNvPr>
@@ -5319,7 +5709,7 @@
           <a:p>
             <a:r>
               <a:rPr lang="pt-BR" dirty="0"/>
-              <a:t>Comparação com outros algoritmos</a:t>
+              <a:t>Exemplo(s) de aplicação</a:t>
             </a:r>
           </a:p>
         </p:txBody>
@@ -5329,7 +5719,7 @@
           <p:cNvPr id="3" name="Espaço Reservado para Conteúdo 2">
             <a:extLst>
               <a:ext uri="{FF2B5EF4-FFF2-40B4-BE49-F238E27FC236}">
-                <a16:creationId xmlns:a16="http://schemas.microsoft.com/office/drawing/2014/main" id="{C525BCE7-C19D-7DDA-016A-E3016C398CBA}"/>
+                <a16:creationId xmlns:a16="http://schemas.microsoft.com/office/drawing/2014/main" id="{69359096-6B47-BEA3-55AD-95F90CDC8489}"/>
               </a:ext>
             </a:extLst>
           </p:cNvPr>
@@ -5352,7 +5742,7 @@
     </p:spTree>
     <p:extLst>
       <p:ext uri="{BB962C8B-B14F-4D97-AF65-F5344CB8AC3E}">
-        <p14:creationId xmlns:p14="http://schemas.microsoft.com/office/powerpoint/2010/main" val="3601469261"/>
+        <p14:creationId xmlns:p14="http://schemas.microsoft.com/office/powerpoint/2010/main" val="1532530965"/>
       </p:ext>
     </p:extLst>
   </p:cSld>
@@ -5381,64 +5771,61 @@
       </p:grpSpPr>
       <p:sp>
         <p:nvSpPr>
-          <p:cNvPr id="4" name="Título 1">
-            <a:extLst>
-              <a:ext uri="{FF2B5EF4-FFF2-40B4-BE49-F238E27FC236}">
-                <a16:creationId xmlns:a16="http://schemas.microsoft.com/office/drawing/2014/main" id="{32666AC8-2E17-4DB4-B0F5-60C640CCFD2E}"/>
-              </a:ext>
-            </a:extLst>
-          </p:cNvPr>
-          <p:cNvSpPr txBox="1">
-            <a:spLocks/>
-          </p:cNvSpPr>
-          <p:nvPr/>
-        </p:nvSpPr>
-        <p:spPr>
-          <a:xfrm>
-            <a:off x="1431533" y="2720526"/>
-            <a:ext cx="9144000" cy="1029541"/>
-          </a:xfrm>
-          <a:prstGeom prst="rect">
-            <a:avLst/>
-          </a:prstGeom>
-        </p:spPr>
-        <p:txBody>
-          <a:bodyPr vert="horz" lIns="91440" tIns="45720" rIns="91440" bIns="45720" rtlCol="0" anchor="ctr">
-            <a:normAutofit/>
-          </a:bodyPr>
-          <a:lstStyle>
-            <a:lvl1pPr algn="l" defTabSz="914400" rtl="0" eaLnBrk="1" latinLnBrk="0" hangingPunct="1">
-              <a:lnSpc>
-                <a:spcPct val="90000"/>
-              </a:lnSpc>
-              <a:spcBef>
-                <a:spcPct val="0"/>
-              </a:spcBef>
-              <a:buNone/>
-              <a:defRPr sz="4400" kern="1200">
-                <a:solidFill>
-                  <a:schemeClr val="tx1"/>
-                </a:solidFill>
-                <a:latin typeface="+mj-lt"/>
-                <a:ea typeface="+mj-ea"/>
-                <a:cs typeface="+mj-cs"/>
-              </a:defRPr>
-            </a:lvl1pPr>
-          </a:lstStyle>
-          <a:p>
-            <a:pPr algn="ctr"/>
-            <a:r>
-              <a:rPr lang="pt-BR" sz="6600" dirty="0"/>
-              <a:t>Perguntas?</a:t>
-            </a:r>
-            <a:endParaRPr lang="pt-BR" sz="6600" b="1" i="1" dirty="0"/>
+          <p:cNvPr id="2" name="Título 1">
+            <a:extLst>
+              <a:ext uri="{FF2B5EF4-FFF2-40B4-BE49-F238E27FC236}">
+                <a16:creationId xmlns:a16="http://schemas.microsoft.com/office/drawing/2014/main" id="{B7EBC8F7-03EF-338A-A90B-280A41AF9688}"/>
+              </a:ext>
+            </a:extLst>
+          </p:cNvPr>
+          <p:cNvSpPr>
+            <a:spLocks noGrp="1"/>
+          </p:cNvSpPr>
+          <p:nvPr>
+            <p:ph type="title"/>
+          </p:nvPr>
+        </p:nvSpPr>
+        <p:spPr/>
+        <p:txBody>
+          <a:bodyPr/>
+          <a:lstStyle/>
+          <a:p>
+            <a:r>
+              <a:rPr lang="pt-BR" dirty="0"/>
+              <a:t>Comparação com outros algoritmos</a:t>
+            </a:r>
+          </a:p>
+        </p:txBody>
+      </p:sp>
+      <p:sp>
+        <p:nvSpPr>
+          <p:cNvPr id="3" name="Espaço Reservado para Conteúdo 2">
+            <a:extLst>
+              <a:ext uri="{FF2B5EF4-FFF2-40B4-BE49-F238E27FC236}">
+                <a16:creationId xmlns:a16="http://schemas.microsoft.com/office/drawing/2014/main" id="{C525BCE7-C19D-7DDA-016A-E3016C398CBA}"/>
+              </a:ext>
+            </a:extLst>
+          </p:cNvPr>
+          <p:cNvSpPr>
+            <a:spLocks noGrp="1"/>
+          </p:cNvSpPr>
+          <p:nvPr>
+            <p:ph idx="1"/>
+          </p:nvPr>
+        </p:nvSpPr>
+        <p:spPr/>
+        <p:txBody>
+          <a:bodyPr/>
+          <a:lstStyle/>
+          <a:p>
+            <a:endParaRPr lang="pt-BR"/>
           </a:p>
         </p:txBody>
       </p:sp>
     </p:spTree>
     <p:extLst>
       <p:ext uri="{BB962C8B-B14F-4D97-AF65-F5344CB8AC3E}">
-        <p14:creationId xmlns:p14="http://schemas.microsoft.com/office/powerpoint/2010/main" val="3773005660"/>
+        <p14:creationId xmlns:p14="http://schemas.microsoft.com/office/powerpoint/2010/main" val="3601469261"/>
       </p:ext>
     </p:extLst>
   </p:cSld>
@@ -5467,6 +5854,92 @@
       </p:grpSpPr>
       <p:sp>
         <p:nvSpPr>
+          <p:cNvPr id="4" name="Título 1">
+            <a:extLst>
+              <a:ext uri="{FF2B5EF4-FFF2-40B4-BE49-F238E27FC236}">
+                <a16:creationId xmlns:a16="http://schemas.microsoft.com/office/drawing/2014/main" id="{32666AC8-2E17-4DB4-B0F5-60C640CCFD2E}"/>
+              </a:ext>
+            </a:extLst>
+          </p:cNvPr>
+          <p:cNvSpPr txBox="1">
+            <a:spLocks/>
+          </p:cNvSpPr>
+          <p:nvPr/>
+        </p:nvSpPr>
+        <p:spPr>
+          <a:xfrm>
+            <a:off x="1431533" y="2720526"/>
+            <a:ext cx="9144000" cy="1029541"/>
+          </a:xfrm>
+          <a:prstGeom prst="rect">
+            <a:avLst/>
+          </a:prstGeom>
+        </p:spPr>
+        <p:txBody>
+          <a:bodyPr vert="horz" lIns="91440" tIns="45720" rIns="91440" bIns="45720" rtlCol="0" anchor="ctr">
+            <a:normAutofit/>
+          </a:bodyPr>
+          <a:lstStyle>
+            <a:lvl1pPr algn="l" defTabSz="914400" rtl="0" eaLnBrk="1" latinLnBrk="0" hangingPunct="1">
+              <a:lnSpc>
+                <a:spcPct val="90000"/>
+              </a:lnSpc>
+              <a:spcBef>
+                <a:spcPct val="0"/>
+              </a:spcBef>
+              <a:buNone/>
+              <a:defRPr sz="4400" kern="1200">
+                <a:solidFill>
+                  <a:schemeClr val="tx1"/>
+                </a:solidFill>
+                <a:latin typeface="+mj-lt"/>
+                <a:ea typeface="+mj-ea"/>
+                <a:cs typeface="+mj-cs"/>
+              </a:defRPr>
+            </a:lvl1pPr>
+          </a:lstStyle>
+          <a:p>
+            <a:pPr algn="ctr"/>
+            <a:r>
+              <a:rPr lang="pt-BR" sz="6600" dirty="0"/>
+              <a:t>Perguntas?</a:t>
+            </a:r>
+            <a:endParaRPr lang="pt-BR" sz="6600" b="1" i="1" dirty="0"/>
+          </a:p>
+        </p:txBody>
+      </p:sp>
+    </p:spTree>
+    <p:extLst>
+      <p:ext uri="{BB962C8B-B14F-4D97-AF65-F5344CB8AC3E}">
+        <p14:creationId xmlns:p14="http://schemas.microsoft.com/office/powerpoint/2010/main" val="3773005660"/>
+      </p:ext>
+    </p:extLst>
+  </p:cSld>
+  <p:clrMapOvr>
+    <a:masterClrMapping/>
+  </p:clrMapOvr>
+</p:sld>
+</file>
+
+<file path=ppt/slides/slide18.xml><?xml version="1.0" encoding="utf-8"?>
+<p:sld xmlns:a="http://schemas.openxmlformats.org/drawingml/2006/main" xmlns:r="http://schemas.openxmlformats.org/officeDocument/2006/relationships" xmlns:p="http://schemas.openxmlformats.org/presentationml/2006/main">
+  <p:cSld>
+    <p:spTree>
+      <p:nvGrpSpPr>
+        <p:cNvPr id="1" name=""/>
+        <p:cNvGrpSpPr/>
+        <p:nvPr/>
+      </p:nvGrpSpPr>
+      <p:grpSpPr>
+        <a:xfrm>
+          <a:off x="0" y="0"/>
+          <a:ext cx="0" cy="0"/>
+          <a:chOff x="0" y="0"/>
+          <a:chExt cx="0" cy="0"/>
+        </a:xfrm>
+      </p:grpSpPr>
+      <p:sp>
+        <p:nvSpPr>
           <p:cNvPr id="2" name="Título 1">
             <a:extLst>
               <a:ext uri="{FF2B5EF4-FFF2-40B4-BE49-F238E27FC236}">
@@ -5531,7 +6004,7 @@
 </p:sld>
 </file>
 
-<file path=ppt/slides/slide18.xml><?xml version="1.0" encoding="utf-8"?>
+<file path=ppt/slides/slide19.xml><?xml version="1.0" encoding="utf-8"?>
 <p:sld xmlns:a="http://schemas.openxmlformats.org/drawingml/2006/main" xmlns:r="http://schemas.openxmlformats.org/officeDocument/2006/relationships" xmlns:p="http://schemas.openxmlformats.org/presentationml/2006/main">
   <p:cSld>
     <p:spTree>
@@ -5761,6 +6234,1461 @@
     <p:extLst>
       <p:ext uri="{BB962C8B-B14F-4D97-AF65-F5344CB8AC3E}">
         <p14:creationId xmlns:p14="http://schemas.microsoft.com/office/powerpoint/2010/main" val="3459651041"/>
+      </p:ext>
+    </p:extLst>
+  </p:cSld>
+  <p:clrMapOvr>
+    <a:masterClrMapping/>
+  </p:clrMapOvr>
+</p:sld>
+</file>
+
+<file path=ppt/slides/slide20.xml><?xml version="1.0" encoding="utf-8"?>
+<p:sld xmlns:a="http://schemas.openxmlformats.org/drawingml/2006/main" xmlns:r="http://schemas.openxmlformats.org/officeDocument/2006/relationships" xmlns:p="http://schemas.openxmlformats.org/presentationml/2006/main">
+  <p:cSld>
+    <p:spTree>
+      <p:nvGrpSpPr>
+        <p:cNvPr id="1" name="">
+          <a:extLst>
+            <a:ext uri="{FF2B5EF4-FFF2-40B4-BE49-F238E27FC236}">
+              <a16:creationId xmlns:a16="http://schemas.microsoft.com/office/drawing/2014/main" id="{83DFB381-AAB9-2788-1601-EB1230F302AA}"/>
+            </a:ext>
+          </a:extLst>
+        </p:cNvPr>
+        <p:cNvGrpSpPr/>
+        <p:nvPr/>
+      </p:nvGrpSpPr>
+      <p:grpSpPr>
+        <a:xfrm>
+          <a:off x="0" y="0"/>
+          <a:ext cx="0" cy="0"/>
+          <a:chOff x="0" y="0"/>
+          <a:chExt cx="0" cy="0"/>
+        </a:xfrm>
+      </p:grpSpPr>
+      <p:sp>
+        <p:nvSpPr>
+          <p:cNvPr id="4" name="Título 1">
+            <a:extLst>
+              <a:ext uri="{FF2B5EF4-FFF2-40B4-BE49-F238E27FC236}">
+                <a16:creationId xmlns:a16="http://schemas.microsoft.com/office/drawing/2014/main" id="{4AF40FF5-E3E4-99F0-8C87-687EB32C12F9}"/>
+              </a:ext>
+            </a:extLst>
+          </p:cNvPr>
+          <p:cNvSpPr txBox="1">
+            <a:spLocks/>
+          </p:cNvSpPr>
+          <p:nvPr/>
+        </p:nvSpPr>
+        <p:spPr>
+          <a:xfrm>
+            <a:off x="1431533" y="2720526"/>
+            <a:ext cx="9144000" cy="1029541"/>
+          </a:xfrm>
+          <a:prstGeom prst="rect">
+            <a:avLst/>
+          </a:prstGeom>
+        </p:spPr>
+        <p:txBody>
+          <a:bodyPr vert="horz" lIns="91440" tIns="45720" rIns="91440" bIns="45720" rtlCol="0" anchor="ctr">
+            <a:normAutofit/>
+          </a:bodyPr>
+          <a:lstStyle>
+            <a:lvl1pPr algn="l" defTabSz="914400" rtl="0" eaLnBrk="1" latinLnBrk="0" hangingPunct="1">
+              <a:lnSpc>
+                <a:spcPct val="90000"/>
+              </a:lnSpc>
+              <a:spcBef>
+                <a:spcPct val="0"/>
+              </a:spcBef>
+              <a:buNone/>
+              <a:defRPr sz="4400" kern="1200">
+                <a:solidFill>
+                  <a:schemeClr val="tx1"/>
+                </a:solidFill>
+                <a:latin typeface="+mj-lt"/>
+                <a:ea typeface="+mj-ea"/>
+                <a:cs typeface="+mj-cs"/>
+              </a:defRPr>
+            </a:lvl1pPr>
+          </a:lstStyle>
+          <a:p>
+            <a:pPr algn="ctr"/>
+            <a:r>
+              <a:rPr lang="pt-BR" sz="6600" dirty="0"/>
+              <a:t>Figuras</a:t>
+            </a:r>
+            <a:endParaRPr lang="pt-BR" sz="6600" b="1" i="1" dirty="0"/>
+          </a:p>
+        </p:txBody>
+      </p:sp>
+    </p:spTree>
+    <p:extLst>
+      <p:ext uri="{BB962C8B-B14F-4D97-AF65-F5344CB8AC3E}">
+        <p14:creationId xmlns:p14="http://schemas.microsoft.com/office/powerpoint/2010/main" val="1690066477"/>
+      </p:ext>
+    </p:extLst>
+  </p:cSld>
+  <p:clrMapOvr>
+    <a:masterClrMapping/>
+  </p:clrMapOvr>
+</p:sld>
+</file>
+
+<file path=ppt/slides/slide21.xml><?xml version="1.0" encoding="utf-8"?>
+<p:sld xmlns:a="http://schemas.openxmlformats.org/drawingml/2006/main" xmlns:r="http://schemas.openxmlformats.org/officeDocument/2006/relationships" xmlns:p="http://schemas.openxmlformats.org/presentationml/2006/main">
+  <p:cSld>
+    <p:spTree>
+      <p:nvGrpSpPr>
+        <p:cNvPr id="1" name=""/>
+        <p:cNvGrpSpPr/>
+        <p:nvPr/>
+      </p:nvGrpSpPr>
+      <p:grpSpPr>
+        <a:xfrm>
+          <a:off x="0" y="0"/>
+          <a:ext cx="0" cy="0"/>
+          <a:chOff x="0" y="0"/>
+          <a:chExt cx="0" cy="0"/>
+        </a:xfrm>
+      </p:grpSpPr>
+      <p:grpSp>
+        <p:nvGrpSpPr>
+          <p:cNvPr id="59" name="Group 58">
+            <a:extLst>
+              <a:ext uri="{FF2B5EF4-FFF2-40B4-BE49-F238E27FC236}">
+                <a16:creationId xmlns:a16="http://schemas.microsoft.com/office/drawing/2014/main" id="{BB54A8AF-5D7A-DF48-6B51-A97D3BA5AE2B}"/>
+              </a:ext>
+            </a:extLst>
+          </p:cNvPr>
+          <p:cNvGrpSpPr/>
+          <p:nvPr/>
+        </p:nvGrpSpPr>
+        <p:grpSpPr>
+          <a:xfrm>
+            <a:off x="2902132" y="2387826"/>
+            <a:ext cx="5141381" cy="2330287"/>
+            <a:chOff x="-330925" y="4347254"/>
+            <a:chExt cx="5141381" cy="2330287"/>
+          </a:xfrm>
+        </p:grpSpPr>
+        <p:sp>
+          <p:nvSpPr>
+            <p:cNvPr id="26" name="Rectangle 25">
+              <a:extLst>
+                <a:ext uri="{FF2B5EF4-FFF2-40B4-BE49-F238E27FC236}">
+                  <a16:creationId xmlns:a16="http://schemas.microsoft.com/office/drawing/2014/main" id="{A78F414E-0878-E9AC-3349-365D683589EF}"/>
+                </a:ext>
+              </a:extLst>
+            </p:cNvPr>
+            <p:cNvSpPr/>
+            <p:nvPr/>
+          </p:nvSpPr>
+          <p:spPr>
+            <a:xfrm>
+              <a:off x="2090057" y="6262799"/>
+              <a:ext cx="370114" cy="230076"/>
+            </a:xfrm>
+            <a:prstGeom prst="rect">
+              <a:avLst/>
+            </a:prstGeom>
+            <a:ln>
+              <a:noFill/>
+            </a:ln>
+          </p:spPr>
+          <p:style>
+            <a:lnRef idx="2">
+              <a:schemeClr val="accent1">
+                <a:shade val="15000"/>
+              </a:schemeClr>
+            </a:lnRef>
+            <a:fillRef idx="1">
+              <a:schemeClr val="accent1"/>
+            </a:fillRef>
+            <a:effectRef idx="0">
+              <a:schemeClr val="accent1"/>
+            </a:effectRef>
+            <a:fontRef idx="minor">
+              <a:schemeClr val="lt1"/>
+            </a:fontRef>
+          </p:style>
+          <p:txBody>
+            <a:bodyPr rtlCol="0" anchor="ctr"/>
+            <a:lstStyle/>
+            <a:p>
+              <a:pPr algn="ctr"/>
+              <a:endParaRPr lang="en-US"/>
+            </a:p>
+          </p:txBody>
+        </p:sp>
+        <p:sp>
+          <p:nvSpPr>
+            <p:cNvPr id="27" name="Rectangle 26">
+              <a:extLst>
+                <a:ext uri="{FF2B5EF4-FFF2-40B4-BE49-F238E27FC236}">
+                  <a16:creationId xmlns:a16="http://schemas.microsoft.com/office/drawing/2014/main" id="{67A2140F-0BEB-DFFC-0173-0DDE81A0BAF4}"/>
+                </a:ext>
+              </a:extLst>
+            </p:cNvPr>
+            <p:cNvSpPr/>
+            <p:nvPr/>
+          </p:nvSpPr>
+          <p:spPr>
+            <a:xfrm>
+              <a:off x="2090057" y="6032722"/>
+              <a:ext cx="370114" cy="230076"/>
+            </a:xfrm>
+            <a:prstGeom prst="rect">
+              <a:avLst/>
+            </a:prstGeom>
+            <a:ln>
+              <a:noFill/>
+            </a:ln>
+          </p:spPr>
+          <p:style>
+            <a:lnRef idx="2">
+              <a:schemeClr val="accent1">
+                <a:shade val="15000"/>
+              </a:schemeClr>
+            </a:lnRef>
+            <a:fillRef idx="1">
+              <a:schemeClr val="accent1"/>
+            </a:fillRef>
+            <a:effectRef idx="0">
+              <a:schemeClr val="accent1"/>
+            </a:effectRef>
+            <a:fontRef idx="minor">
+              <a:schemeClr val="lt1"/>
+            </a:fontRef>
+          </p:style>
+          <p:txBody>
+            <a:bodyPr rtlCol="0" anchor="ctr"/>
+            <a:lstStyle/>
+            <a:p>
+              <a:pPr algn="ctr"/>
+              <a:endParaRPr lang="en-US"/>
+            </a:p>
+          </p:txBody>
+        </p:sp>
+        <p:sp>
+          <p:nvSpPr>
+            <p:cNvPr id="33" name="Rectangle 32">
+              <a:extLst>
+                <a:ext uri="{FF2B5EF4-FFF2-40B4-BE49-F238E27FC236}">
+                  <a16:creationId xmlns:a16="http://schemas.microsoft.com/office/drawing/2014/main" id="{C67CE66F-B1C9-97C2-5191-323C447A4039}"/>
+                </a:ext>
+              </a:extLst>
+            </p:cNvPr>
+            <p:cNvSpPr/>
+            <p:nvPr/>
+          </p:nvSpPr>
+          <p:spPr>
+            <a:xfrm>
+              <a:off x="2090057" y="4692368"/>
+              <a:ext cx="370114" cy="230076"/>
+            </a:xfrm>
+            <a:prstGeom prst="rect">
+              <a:avLst/>
+            </a:prstGeom>
+            <a:ln>
+              <a:noFill/>
+            </a:ln>
+          </p:spPr>
+          <p:style>
+            <a:lnRef idx="2">
+              <a:schemeClr val="accent1">
+                <a:shade val="15000"/>
+              </a:schemeClr>
+            </a:lnRef>
+            <a:fillRef idx="1">
+              <a:schemeClr val="accent1"/>
+            </a:fillRef>
+            <a:effectRef idx="0">
+              <a:schemeClr val="accent1"/>
+            </a:effectRef>
+            <a:fontRef idx="minor">
+              <a:schemeClr val="lt1"/>
+            </a:fontRef>
+          </p:style>
+          <p:txBody>
+            <a:bodyPr rtlCol="0" anchor="ctr"/>
+            <a:lstStyle/>
+            <a:p>
+              <a:pPr algn="ctr"/>
+              <a:endParaRPr lang="en-US"/>
+            </a:p>
+          </p:txBody>
+        </p:sp>
+        <p:sp>
+          <p:nvSpPr>
+            <p:cNvPr id="34" name="Rectangle 33">
+              <a:extLst>
+                <a:ext uri="{FF2B5EF4-FFF2-40B4-BE49-F238E27FC236}">
+                  <a16:creationId xmlns:a16="http://schemas.microsoft.com/office/drawing/2014/main" id="{44116E33-D3F4-D7FB-DCEF-760C9C024249}"/>
+                </a:ext>
+              </a:extLst>
+            </p:cNvPr>
+            <p:cNvSpPr/>
+            <p:nvPr/>
+          </p:nvSpPr>
+          <p:spPr>
+            <a:xfrm>
+              <a:off x="2090057" y="4462291"/>
+              <a:ext cx="370114" cy="230076"/>
+            </a:xfrm>
+            <a:prstGeom prst="rect">
+              <a:avLst/>
+            </a:prstGeom>
+            <a:ln>
+              <a:noFill/>
+            </a:ln>
+          </p:spPr>
+          <p:style>
+            <a:lnRef idx="2">
+              <a:schemeClr val="accent1">
+                <a:shade val="15000"/>
+              </a:schemeClr>
+            </a:lnRef>
+            <a:fillRef idx="1">
+              <a:schemeClr val="accent1"/>
+            </a:fillRef>
+            <a:effectRef idx="0">
+              <a:schemeClr val="accent1"/>
+            </a:effectRef>
+            <a:fontRef idx="minor">
+              <a:schemeClr val="lt1"/>
+            </a:fontRef>
+          </p:style>
+          <p:txBody>
+            <a:bodyPr rtlCol="0" anchor="ctr"/>
+            <a:lstStyle/>
+            <a:p>
+              <a:pPr algn="ctr"/>
+              <a:endParaRPr lang="en-US"/>
+            </a:p>
+          </p:txBody>
+        </p:sp>
+        <p:cxnSp>
+          <p:nvCxnSpPr>
+            <p:cNvPr id="12" name="Connector: Elbow 11">
+              <a:extLst>
+                <a:ext uri="{FF2B5EF4-FFF2-40B4-BE49-F238E27FC236}">
+                  <a16:creationId xmlns:a16="http://schemas.microsoft.com/office/drawing/2014/main" id="{0375811A-BC31-5203-21BF-8C1AEDCA810A}"/>
+                </a:ext>
+              </a:extLst>
+            </p:cNvPr>
+            <p:cNvCxnSpPr>
+              <a:cxnSpLocks/>
+              <a:stCxn id="17" idx="3"/>
+              <a:endCxn id="18" idx="3"/>
+            </p:cNvCxnSpPr>
+            <p:nvPr/>
+          </p:nvCxnSpPr>
+          <p:spPr>
+            <a:xfrm>
+              <a:off x="3298371" y="4693670"/>
+              <a:ext cx="12700" cy="1569130"/>
+            </a:xfrm>
+            <a:prstGeom prst="bentConnector3">
+              <a:avLst>
+                <a:gd name="adj1" fmla="val 4542858"/>
+              </a:avLst>
+            </a:prstGeom>
+            <a:ln>
+              <a:tailEnd type="triangle"/>
+            </a:ln>
+          </p:spPr>
+          <p:style>
+            <a:lnRef idx="1">
+              <a:schemeClr val="accent1"/>
+            </a:lnRef>
+            <a:fillRef idx="0">
+              <a:schemeClr val="accent1"/>
+            </a:fillRef>
+            <a:effectRef idx="0">
+              <a:schemeClr val="accent1"/>
+            </a:effectRef>
+            <a:fontRef idx="minor">
+              <a:schemeClr val="tx1"/>
+            </a:fontRef>
+          </p:style>
+        </p:cxnSp>
+        <p:sp>
+          <p:nvSpPr>
+            <p:cNvPr id="17" name="Rectangle: Rounded Corners 16">
+              <a:extLst>
+                <a:ext uri="{FF2B5EF4-FFF2-40B4-BE49-F238E27FC236}">
+                  <a16:creationId xmlns:a16="http://schemas.microsoft.com/office/drawing/2014/main" id="{D957717F-F346-A328-0454-3432762A09F8}"/>
+                </a:ext>
+              </a:extLst>
+            </p:cNvPr>
+            <p:cNvSpPr/>
+            <p:nvPr/>
+          </p:nvSpPr>
+          <p:spPr>
+            <a:xfrm>
+              <a:off x="2090057" y="4347254"/>
+              <a:ext cx="1208314" cy="692832"/>
+            </a:xfrm>
+            <a:prstGeom prst="roundRect">
+              <a:avLst/>
+            </a:prstGeom>
+          </p:spPr>
+          <p:style>
+            <a:lnRef idx="2">
+              <a:schemeClr val="accent1">
+                <a:shade val="15000"/>
+              </a:schemeClr>
+            </a:lnRef>
+            <a:fillRef idx="1">
+              <a:schemeClr val="accent1"/>
+            </a:fillRef>
+            <a:effectRef idx="0">
+              <a:schemeClr val="accent1"/>
+            </a:effectRef>
+            <a:fontRef idx="minor">
+              <a:schemeClr val="lt1"/>
+            </a:fontRef>
+          </p:style>
+          <p:txBody>
+            <a:bodyPr rtlCol="0" anchor="ctr"/>
+            <a:lstStyle/>
+            <a:p>
+              <a:pPr algn="ctr"/>
+              <a:r>
+                <a:rPr lang="pt-BR" dirty="0"/>
+                <a:t>Agente</a:t>
+              </a:r>
+              <a:endParaRPr lang="en-US" dirty="0"/>
+            </a:p>
+          </p:txBody>
+        </p:sp>
+        <p:sp>
+          <p:nvSpPr>
+            <p:cNvPr id="18" name="Rectangle: Rounded Corners 17">
+              <a:extLst>
+                <a:ext uri="{FF2B5EF4-FFF2-40B4-BE49-F238E27FC236}">
+                  <a16:creationId xmlns:a16="http://schemas.microsoft.com/office/drawing/2014/main" id="{39EF6FE5-6FBC-BC13-63C8-D6E9E3E272C4}"/>
+                </a:ext>
+              </a:extLst>
+            </p:cNvPr>
+            <p:cNvSpPr/>
+            <p:nvPr/>
+          </p:nvSpPr>
+          <p:spPr>
+            <a:xfrm>
+              <a:off x="2090057" y="5916384"/>
+              <a:ext cx="1208314" cy="692832"/>
+            </a:xfrm>
+            <a:prstGeom prst="roundRect">
+              <a:avLst/>
+            </a:prstGeom>
+          </p:spPr>
+          <p:style>
+            <a:lnRef idx="2">
+              <a:schemeClr val="accent1">
+                <a:shade val="15000"/>
+              </a:schemeClr>
+            </a:lnRef>
+            <a:fillRef idx="1">
+              <a:schemeClr val="accent1"/>
+            </a:fillRef>
+            <a:effectRef idx="0">
+              <a:schemeClr val="accent1"/>
+            </a:effectRef>
+            <a:fontRef idx="minor">
+              <a:schemeClr val="lt1"/>
+            </a:fontRef>
+          </p:style>
+          <p:txBody>
+            <a:bodyPr rtlCol="0" anchor="ctr"/>
+            <a:lstStyle/>
+            <a:p>
+              <a:pPr algn="ctr"/>
+              <a:r>
+                <a:rPr lang="pt-BR" dirty="0"/>
+                <a:t>Ambiente</a:t>
+              </a:r>
+              <a:endParaRPr lang="en-US" dirty="0"/>
+            </a:p>
+          </p:txBody>
+        </p:sp>
+        <mc:AlternateContent xmlns:mc="http://schemas.openxmlformats.org/markup-compatibility/2006">
+          <mc:Choice xmlns:a14="http://schemas.microsoft.com/office/drawing/2010/main" Requires="a14">
+            <p:sp>
+              <p:nvSpPr>
+                <p:cNvPr id="41" name="TextBox 40">
+                  <a:extLst>
+                    <a:ext uri="{FF2B5EF4-FFF2-40B4-BE49-F238E27FC236}">
+                      <a16:creationId xmlns:a16="http://schemas.microsoft.com/office/drawing/2014/main" id="{DEBC8956-45EC-9A9F-7CAD-7A468058ABF1}"/>
+                    </a:ext>
+                  </a:extLst>
+                </p:cNvPr>
+                <p:cNvSpPr txBox="1"/>
+                <p:nvPr/>
+              </p:nvSpPr>
+              <p:spPr>
+                <a:xfrm>
+                  <a:off x="3863340" y="5292917"/>
+                  <a:ext cx="947116" cy="338554"/>
+                </a:xfrm>
+                <a:prstGeom prst="rect">
+                  <a:avLst/>
+                </a:prstGeom>
+                <a:noFill/>
+              </p:spPr>
+              <p:txBody>
+                <a:bodyPr wrap="square" rtlCol="0">
+                  <a:spAutoFit/>
+                </a:bodyPr>
+                <a:lstStyle/>
+                <a:p>
+                  <a:r>
+                    <a:rPr lang="pt-BR" sz="1600" dirty="0"/>
+                    <a:t>ação, </a:t>
+                  </a:r>
+                  <a14:m>
+                    <m:oMath xmlns:m="http://schemas.openxmlformats.org/officeDocument/2006/math">
+                      <m:sSub>
+                        <m:sSubPr>
+                          <m:ctrlPr>
+                            <a:rPr lang="pt-BR" sz="1600" i="1" smtClean="0">
+                              <a:latin typeface="Cambria Math" panose="02040503050406030204" pitchFamily="18" charset="0"/>
+                            </a:rPr>
+                          </m:ctrlPr>
+                        </m:sSubPr>
+                        <m:e>
+                          <m:r>
+                            <a:rPr lang="pt-BR" sz="1600" b="0" i="1" smtClean="0">
+                              <a:latin typeface="Cambria Math" panose="02040503050406030204" pitchFamily="18" charset="0"/>
+                            </a:rPr>
+                            <m:t>𝑎</m:t>
+                          </m:r>
+                        </m:e>
+                        <m:sub>
+                          <m:r>
+                            <a:rPr lang="pt-BR" sz="1600" b="0" i="1" smtClean="0">
+                              <a:latin typeface="Cambria Math" panose="02040503050406030204" pitchFamily="18" charset="0"/>
+                            </a:rPr>
+                            <m:t>𝑡</m:t>
+                          </m:r>
+                        </m:sub>
+                      </m:sSub>
+                    </m:oMath>
+                  </a14:m>
+                  <a:endParaRPr lang="en-US" sz="1600" dirty="0"/>
+                </a:p>
+              </p:txBody>
+            </p:sp>
+          </mc:Choice>
+          <mc:Fallback>
+            <p:sp>
+              <p:nvSpPr>
+                <p:cNvPr id="41" name="TextBox 40">
+                  <a:extLst>
+                    <a:ext uri="{FF2B5EF4-FFF2-40B4-BE49-F238E27FC236}">
+                      <a16:creationId xmlns:a16="http://schemas.microsoft.com/office/drawing/2014/main" id="{DEBC8956-45EC-9A9F-7CAD-7A468058ABF1}"/>
+                    </a:ext>
+                  </a:extLst>
+                </p:cNvPr>
+                <p:cNvSpPr txBox="1">
+                  <a:spLocks noRot="1" noChangeAspect="1" noMove="1" noResize="1" noEditPoints="1" noAdjustHandles="1" noChangeArrowheads="1" noChangeShapeType="1" noTextEdit="1"/>
+                </p:cNvSpPr>
+                <p:nvPr/>
+              </p:nvSpPr>
+              <p:spPr>
+                <a:xfrm>
+                  <a:off x="3863340" y="5292917"/>
+                  <a:ext cx="947116" cy="338554"/>
+                </a:xfrm>
+                <a:prstGeom prst="rect">
+                  <a:avLst/>
+                </a:prstGeom>
+                <a:blipFill>
+                  <a:blip r:embed="rId2"/>
+                  <a:stretch>
+                    <a:fillRect l="-3226" t="-5455" b="-23636"/>
+                  </a:stretch>
+                </a:blipFill>
+              </p:spPr>
+              <p:txBody>
+                <a:bodyPr/>
+                <a:lstStyle/>
+                <a:p>
+                  <a:r>
+                    <a:rPr lang="en-US">
+                      <a:noFill/>
+                    </a:rPr>
+                    <a:t> </a:t>
+                  </a:r>
+                </a:p>
+              </p:txBody>
+            </p:sp>
+          </mc:Fallback>
+        </mc:AlternateContent>
+        <mc:AlternateContent xmlns:mc="http://schemas.openxmlformats.org/markup-compatibility/2006">
+          <mc:Choice xmlns:a14="http://schemas.microsoft.com/office/drawing/2010/main" Requires="a14">
+            <p:sp>
+              <p:nvSpPr>
+                <p:cNvPr id="10" name="TextBox 9">
+                  <a:extLst>
+                    <a:ext uri="{FF2B5EF4-FFF2-40B4-BE49-F238E27FC236}">
+                      <a16:creationId xmlns:a16="http://schemas.microsoft.com/office/drawing/2014/main" id="{6B8DF4A4-00E2-9B10-CC12-B0D274CCB842}"/>
+                    </a:ext>
+                  </a:extLst>
+                </p:cNvPr>
+                <p:cNvSpPr txBox="1"/>
+                <p:nvPr/>
+              </p:nvSpPr>
+              <p:spPr>
+                <a:xfrm>
+                  <a:off x="1563188" y="5778428"/>
+                  <a:ext cx="526868" cy="369332"/>
+                </a:xfrm>
+                <a:prstGeom prst="rect">
+                  <a:avLst/>
+                </a:prstGeom>
+                <a:noFill/>
+              </p:spPr>
+              <p:txBody>
+                <a:bodyPr wrap="square" rtlCol="0">
+                  <a:spAutoFit/>
+                </a:bodyPr>
+                <a:lstStyle/>
+                <a:p>
+                  <a14:m>
+                    <m:oMathPara xmlns:m="http://schemas.openxmlformats.org/officeDocument/2006/math">
+                      <m:oMathParaPr>
+                        <m:jc m:val="centerGroup"/>
+                      </m:oMathParaPr>
+                      <m:oMath xmlns:m="http://schemas.openxmlformats.org/officeDocument/2006/math">
+                        <m:sSub>
+                          <m:sSubPr>
+                            <m:ctrlPr>
+                              <a:rPr lang="pt-BR" i="1" smtClean="0">
+                                <a:latin typeface="Cambria Math" panose="02040503050406030204" pitchFamily="18" charset="0"/>
+                              </a:rPr>
+                            </m:ctrlPr>
+                          </m:sSubPr>
+                          <m:e>
+                            <m:r>
+                              <a:rPr lang="pt-BR" b="0" i="1" smtClean="0">
+                                <a:latin typeface="Cambria Math" panose="02040503050406030204" pitchFamily="18" charset="0"/>
+                              </a:rPr>
+                              <m:t>𝑟</m:t>
+                            </m:r>
+                          </m:e>
+                          <m:sub>
+                            <m:r>
+                              <a:rPr lang="pt-BR" b="0" i="1" smtClean="0">
+                                <a:latin typeface="Cambria Math" panose="02040503050406030204" pitchFamily="18" charset="0"/>
+                              </a:rPr>
+                              <m:t>𝑡</m:t>
+                            </m:r>
+                            <m:r>
+                              <a:rPr lang="pt-BR" b="0" i="1" smtClean="0">
+                                <a:latin typeface="Cambria Math" panose="02040503050406030204" pitchFamily="18" charset="0"/>
+                              </a:rPr>
+                              <m:t>+1</m:t>
+                            </m:r>
+                          </m:sub>
+                        </m:sSub>
+                      </m:oMath>
+                    </m:oMathPara>
+                  </a14:m>
+                  <a:endParaRPr lang="en-US" dirty="0"/>
+                </a:p>
+              </p:txBody>
+            </p:sp>
+          </mc:Choice>
+          <mc:Fallback>
+            <p:sp>
+              <p:nvSpPr>
+                <p:cNvPr id="10" name="TextBox 9">
+                  <a:extLst>
+                    <a:ext uri="{FF2B5EF4-FFF2-40B4-BE49-F238E27FC236}">
+                      <a16:creationId xmlns:a16="http://schemas.microsoft.com/office/drawing/2014/main" id="{6B8DF4A4-00E2-9B10-CC12-B0D274CCB842}"/>
+                    </a:ext>
+                  </a:extLst>
+                </p:cNvPr>
+                <p:cNvSpPr txBox="1">
+                  <a:spLocks noRot="1" noChangeAspect="1" noMove="1" noResize="1" noEditPoints="1" noAdjustHandles="1" noChangeArrowheads="1" noChangeShapeType="1" noTextEdit="1"/>
+                </p:cNvSpPr>
+                <p:nvPr/>
+              </p:nvSpPr>
+              <p:spPr>
+                <a:xfrm>
+                  <a:off x="1563188" y="5778428"/>
+                  <a:ext cx="526868" cy="369332"/>
+                </a:xfrm>
+                <a:prstGeom prst="rect">
+                  <a:avLst/>
+                </a:prstGeom>
+                <a:blipFill>
+                  <a:blip r:embed="rId3"/>
+                  <a:stretch>
+                    <a:fillRect/>
+                  </a:stretch>
+                </a:blipFill>
+              </p:spPr>
+              <p:txBody>
+                <a:bodyPr/>
+                <a:lstStyle/>
+                <a:p>
+                  <a:r>
+                    <a:rPr lang="en-US">
+                      <a:noFill/>
+                    </a:rPr>
+                    <a:t> </a:t>
+                  </a:r>
+                </a:p>
+              </p:txBody>
+            </p:sp>
+          </mc:Fallback>
+        </mc:AlternateContent>
+        <mc:AlternateContent xmlns:mc="http://schemas.openxmlformats.org/markup-compatibility/2006">
+          <mc:Choice xmlns:a14="http://schemas.microsoft.com/office/drawing/2010/main" Requires="a14">
+            <p:sp>
+              <p:nvSpPr>
+                <p:cNvPr id="14" name="TextBox 13">
+                  <a:extLst>
+                    <a:ext uri="{FF2B5EF4-FFF2-40B4-BE49-F238E27FC236}">
+                      <a16:creationId xmlns:a16="http://schemas.microsoft.com/office/drawing/2014/main" id="{376B01EB-53C8-C2B2-1104-8A2BC1DE4624}"/>
+                    </a:ext>
+                  </a:extLst>
+                </p:cNvPr>
+                <p:cNvSpPr txBox="1"/>
+                <p:nvPr/>
+              </p:nvSpPr>
+              <p:spPr>
+                <a:xfrm>
+                  <a:off x="1537788" y="6308209"/>
+                  <a:ext cx="526868" cy="369332"/>
+                </a:xfrm>
+                <a:prstGeom prst="rect">
+                  <a:avLst/>
+                </a:prstGeom>
+                <a:noFill/>
+              </p:spPr>
+              <p:txBody>
+                <a:bodyPr wrap="square" rtlCol="0">
+                  <a:spAutoFit/>
+                </a:bodyPr>
+                <a:lstStyle/>
+                <a:p>
+                  <a14:m>
+                    <m:oMathPara xmlns:m="http://schemas.openxmlformats.org/officeDocument/2006/math">
+                      <m:oMathParaPr>
+                        <m:jc m:val="centerGroup"/>
+                      </m:oMathParaPr>
+                      <m:oMath xmlns:m="http://schemas.openxmlformats.org/officeDocument/2006/math">
+                        <m:sSub>
+                          <m:sSubPr>
+                            <m:ctrlPr>
+                              <a:rPr lang="pt-BR" i="1" smtClean="0">
+                                <a:latin typeface="Cambria Math" panose="02040503050406030204" pitchFamily="18" charset="0"/>
+                              </a:rPr>
+                            </m:ctrlPr>
+                          </m:sSubPr>
+                          <m:e>
+                            <m:r>
+                              <a:rPr lang="pt-BR" b="0" i="1" smtClean="0">
+                                <a:latin typeface="Cambria Math" panose="02040503050406030204" pitchFamily="18" charset="0"/>
+                              </a:rPr>
+                              <m:t>𝑠</m:t>
+                            </m:r>
+                          </m:e>
+                          <m:sub>
+                            <m:r>
+                              <a:rPr lang="pt-BR" b="0" i="1" smtClean="0">
+                                <a:latin typeface="Cambria Math" panose="02040503050406030204" pitchFamily="18" charset="0"/>
+                              </a:rPr>
+                              <m:t>𝑡</m:t>
+                            </m:r>
+                            <m:r>
+                              <a:rPr lang="pt-BR" b="0" i="1" smtClean="0">
+                                <a:latin typeface="Cambria Math" panose="02040503050406030204" pitchFamily="18" charset="0"/>
+                              </a:rPr>
+                              <m:t>+1</m:t>
+                            </m:r>
+                          </m:sub>
+                        </m:sSub>
+                      </m:oMath>
+                    </m:oMathPara>
+                  </a14:m>
+                  <a:endParaRPr lang="en-US" dirty="0"/>
+                </a:p>
+              </p:txBody>
+            </p:sp>
+          </mc:Choice>
+          <mc:Fallback>
+            <p:sp>
+              <p:nvSpPr>
+                <p:cNvPr id="14" name="TextBox 13">
+                  <a:extLst>
+                    <a:ext uri="{FF2B5EF4-FFF2-40B4-BE49-F238E27FC236}">
+                      <a16:creationId xmlns:a16="http://schemas.microsoft.com/office/drawing/2014/main" id="{376B01EB-53C8-C2B2-1104-8A2BC1DE4624}"/>
+                    </a:ext>
+                  </a:extLst>
+                </p:cNvPr>
+                <p:cNvSpPr txBox="1">
+                  <a:spLocks noRot="1" noChangeAspect="1" noMove="1" noResize="1" noEditPoints="1" noAdjustHandles="1" noChangeArrowheads="1" noChangeShapeType="1" noTextEdit="1"/>
+                </p:cNvSpPr>
+                <p:nvPr/>
+              </p:nvSpPr>
+              <p:spPr>
+                <a:xfrm>
+                  <a:off x="1537788" y="6308209"/>
+                  <a:ext cx="526868" cy="369332"/>
+                </a:xfrm>
+                <a:prstGeom prst="rect">
+                  <a:avLst/>
+                </a:prstGeom>
+                <a:blipFill>
+                  <a:blip r:embed="rId4"/>
+                  <a:stretch>
+                    <a:fillRect r="-3488"/>
+                  </a:stretch>
+                </a:blipFill>
+              </p:spPr>
+              <p:txBody>
+                <a:bodyPr/>
+                <a:lstStyle/>
+                <a:p>
+                  <a:r>
+                    <a:rPr lang="en-US">
+                      <a:noFill/>
+                    </a:rPr>
+                    <a:t> </a:t>
+                  </a:r>
+                </a:p>
+              </p:txBody>
+            </p:sp>
+          </mc:Fallback>
+        </mc:AlternateContent>
+        <p:sp>
+          <p:nvSpPr>
+            <p:cNvPr id="20" name="Rectangle 19">
+              <a:extLst>
+                <a:ext uri="{FF2B5EF4-FFF2-40B4-BE49-F238E27FC236}">
+                  <a16:creationId xmlns:a16="http://schemas.microsoft.com/office/drawing/2014/main" id="{8B0A48D5-77C9-C29A-8EF5-BED0E6E38CD2}"/>
+                </a:ext>
+              </a:extLst>
+            </p:cNvPr>
+            <p:cNvSpPr/>
+            <p:nvPr/>
+          </p:nvSpPr>
+          <p:spPr>
+            <a:xfrm>
+              <a:off x="1175657" y="6032722"/>
+              <a:ext cx="370114" cy="230076"/>
+            </a:xfrm>
+            <a:prstGeom prst="rect">
+              <a:avLst/>
+            </a:prstGeom>
+            <a:noFill/>
+            <a:ln>
+              <a:noFill/>
+            </a:ln>
+          </p:spPr>
+          <p:style>
+            <a:lnRef idx="2">
+              <a:schemeClr val="accent1">
+                <a:shade val="15000"/>
+              </a:schemeClr>
+            </a:lnRef>
+            <a:fillRef idx="1">
+              <a:schemeClr val="accent1"/>
+            </a:fillRef>
+            <a:effectRef idx="0">
+              <a:schemeClr val="accent1"/>
+            </a:effectRef>
+            <a:fontRef idx="minor">
+              <a:schemeClr val="lt1"/>
+            </a:fontRef>
+          </p:style>
+          <p:txBody>
+            <a:bodyPr rtlCol="0" anchor="ctr"/>
+            <a:lstStyle/>
+            <a:p>
+              <a:pPr algn="ctr"/>
+              <a:endParaRPr lang="en-US"/>
+            </a:p>
+          </p:txBody>
+        </p:sp>
+        <p:sp>
+          <p:nvSpPr>
+            <p:cNvPr id="21" name="Rectangle 20">
+              <a:extLst>
+                <a:ext uri="{FF2B5EF4-FFF2-40B4-BE49-F238E27FC236}">
+                  <a16:creationId xmlns:a16="http://schemas.microsoft.com/office/drawing/2014/main" id="{48728DA3-DA01-CAB9-540E-37EADA51BE57}"/>
+                </a:ext>
+              </a:extLst>
+            </p:cNvPr>
+            <p:cNvSpPr/>
+            <p:nvPr/>
+          </p:nvSpPr>
+          <p:spPr>
+            <a:xfrm>
+              <a:off x="1175656" y="6262798"/>
+              <a:ext cx="370114" cy="230076"/>
+            </a:xfrm>
+            <a:prstGeom prst="rect">
+              <a:avLst/>
+            </a:prstGeom>
+            <a:noFill/>
+            <a:ln>
+              <a:noFill/>
+            </a:ln>
+          </p:spPr>
+          <p:style>
+            <a:lnRef idx="2">
+              <a:schemeClr val="accent1">
+                <a:shade val="15000"/>
+              </a:schemeClr>
+            </a:lnRef>
+            <a:fillRef idx="1">
+              <a:schemeClr val="accent1"/>
+            </a:fillRef>
+            <a:effectRef idx="0">
+              <a:schemeClr val="accent1"/>
+            </a:effectRef>
+            <a:fontRef idx="minor">
+              <a:schemeClr val="lt1"/>
+            </a:fontRef>
+          </p:style>
+          <p:txBody>
+            <a:bodyPr rtlCol="0" anchor="ctr"/>
+            <a:lstStyle/>
+            <a:p>
+              <a:pPr algn="ctr"/>
+              <a:endParaRPr lang="en-US" dirty="0"/>
+            </a:p>
+          </p:txBody>
+        </p:sp>
+        <p:cxnSp>
+          <p:nvCxnSpPr>
+            <p:cNvPr id="25" name="Connector: Elbow 24">
+              <a:extLst>
+                <a:ext uri="{FF2B5EF4-FFF2-40B4-BE49-F238E27FC236}">
+                  <a16:creationId xmlns:a16="http://schemas.microsoft.com/office/drawing/2014/main" id="{20E553C2-F044-7C77-F846-B80760291225}"/>
+                </a:ext>
+              </a:extLst>
+            </p:cNvPr>
+            <p:cNvCxnSpPr>
+              <a:cxnSpLocks/>
+              <a:stCxn id="20" idx="1"/>
+              <a:endCxn id="33" idx="1"/>
+            </p:cNvCxnSpPr>
+            <p:nvPr/>
+          </p:nvCxnSpPr>
+          <p:spPr>
+            <a:xfrm rot="10800000" flipH="1">
+              <a:off x="1175657" y="4807406"/>
+              <a:ext cx="914400" cy="1340354"/>
+            </a:xfrm>
+            <a:prstGeom prst="bentConnector3">
+              <a:avLst>
+                <a:gd name="adj1" fmla="val -16667"/>
+              </a:avLst>
+            </a:prstGeom>
+          </p:spPr>
+          <p:style>
+            <a:lnRef idx="1">
+              <a:schemeClr val="accent1"/>
+            </a:lnRef>
+            <a:fillRef idx="0">
+              <a:schemeClr val="accent1"/>
+            </a:fillRef>
+            <a:effectRef idx="0">
+              <a:schemeClr val="accent1"/>
+            </a:effectRef>
+            <a:fontRef idx="minor">
+              <a:schemeClr val="tx1"/>
+            </a:fontRef>
+          </p:style>
+        </p:cxnSp>
+        <p:cxnSp>
+          <p:nvCxnSpPr>
+            <p:cNvPr id="31" name="Straight Arrow Connector 30">
+              <a:extLst>
+                <a:ext uri="{FF2B5EF4-FFF2-40B4-BE49-F238E27FC236}">
+                  <a16:creationId xmlns:a16="http://schemas.microsoft.com/office/drawing/2014/main" id="{6AEFECE4-5D15-A8B3-453D-610BA5638D05}"/>
+                </a:ext>
+              </a:extLst>
+            </p:cNvPr>
+            <p:cNvCxnSpPr>
+              <a:stCxn id="27" idx="1"/>
+              <a:endCxn id="20" idx="3"/>
+            </p:cNvCxnSpPr>
+            <p:nvPr/>
+          </p:nvCxnSpPr>
+          <p:spPr>
+            <a:xfrm flipH="1">
+              <a:off x="1545771" y="6147760"/>
+              <a:ext cx="544286" cy="0"/>
+            </a:xfrm>
+            <a:prstGeom prst="straightConnector1">
+              <a:avLst/>
+            </a:prstGeom>
+            <a:ln>
+              <a:tailEnd type="triangle"/>
+            </a:ln>
+          </p:spPr>
+          <p:style>
+            <a:lnRef idx="1">
+              <a:schemeClr val="accent1"/>
+            </a:lnRef>
+            <a:fillRef idx="0">
+              <a:schemeClr val="accent1"/>
+            </a:fillRef>
+            <a:effectRef idx="0">
+              <a:schemeClr val="accent1"/>
+            </a:effectRef>
+            <a:fontRef idx="minor">
+              <a:schemeClr val="tx1"/>
+            </a:fontRef>
+          </p:style>
+        </p:cxnSp>
+        <p:cxnSp>
+          <p:nvCxnSpPr>
+            <p:cNvPr id="35" name="Straight Arrow Connector 34">
+              <a:extLst>
+                <a:ext uri="{FF2B5EF4-FFF2-40B4-BE49-F238E27FC236}">
+                  <a16:creationId xmlns:a16="http://schemas.microsoft.com/office/drawing/2014/main" id="{B6FFE6A0-55AE-62C1-3F6E-5291D436B5AB}"/>
+                </a:ext>
+              </a:extLst>
+            </p:cNvPr>
+            <p:cNvCxnSpPr>
+              <a:cxnSpLocks/>
+              <a:stCxn id="26" idx="1"/>
+              <a:endCxn id="21" idx="3"/>
+            </p:cNvCxnSpPr>
+            <p:nvPr/>
+          </p:nvCxnSpPr>
+          <p:spPr>
+            <a:xfrm flipH="1" flipV="1">
+              <a:off x="1545770" y="6377836"/>
+              <a:ext cx="544287" cy="1"/>
+            </a:xfrm>
+            <a:prstGeom prst="straightConnector1">
+              <a:avLst/>
+            </a:prstGeom>
+            <a:ln>
+              <a:tailEnd type="triangle"/>
+            </a:ln>
+          </p:spPr>
+          <p:style>
+            <a:lnRef idx="1">
+              <a:schemeClr val="accent1"/>
+            </a:lnRef>
+            <a:fillRef idx="0">
+              <a:schemeClr val="accent1"/>
+            </a:fillRef>
+            <a:effectRef idx="0">
+              <a:schemeClr val="accent1"/>
+            </a:effectRef>
+            <a:fontRef idx="minor">
+              <a:schemeClr val="tx1"/>
+            </a:fontRef>
+          </p:style>
+        </p:cxnSp>
+        <p:cxnSp>
+          <p:nvCxnSpPr>
+            <p:cNvPr id="40" name="Connector: Elbow 39">
+              <a:extLst>
+                <a:ext uri="{FF2B5EF4-FFF2-40B4-BE49-F238E27FC236}">
+                  <a16:creationId xmlns:a16="http://schemas.microsoft.com/office/drawing/2014/main" id="{73307ED6-2342-7662-DD14-B12FEDB6983C}"/>
+                </a:ext>
+              </a:extLst>
+            </p:cNvPr>
+            <p:cNvCxnSpPr>
+              <a:stCxn id="21" idx="1"/>
+              <a:endCxn id="34" idx="1"/>
+            </p:cNvCxnSpPr>
+            <p:nvPr/>
+          </p:nvCxnSpPr>
+          <p:spPr>
+            <a:xfrm rot="10800000" flipH="1">
+              <a:off x="1175655" y="4577330"/>
+              <a:ext cx="914401" cy="1800507"/>
+            </a:xfrm>
+            <a:prstGeom prst="bentConnector3">
+              <a:avLst>
+                <a:gd name="adj1" fmla="val -54167"/>
+              </a:avLst>
+            </a:prstGeom>
+            <a:ln>
+              <a:tailEnd type="triangle"/>
+            </a:ln>
+          </p:spPr>
+          <p:style>
+            <a:lnRef idx="1">
+              <a:schemeClr val="accent1"/>
+            </a:lnRef>
+            <a:fillRef idx="0">
+              <a:schemeClr val="accent1"/>
+            </a:fillRef>
+            <a:effectRef idx="0">
+              <a:schemeClr val="accent1"/>
+            </a:effectRef>
+            <a:fontRef idx="minor">
+              <a:schemeClr val="tx1"/>
+            </a:fontRef>
+          </p:style>
+        </p:cxnSp>
+        <p:cxnSp>
+          <p:nvCxnSpPr>
+            <p:cNvPr id="44" name="Straight Connector 43">
+              <a:extLst>
+                <a:ext uri="{FF2B5EF4-FFF2-40B4-BE49-F238E27FC236}">
+                  <a16:creationId xmlns:a16="http://schemas.microsoft.com/office/drawing/2014/main" id="{6B737731-0DAB-FB54-8D60-66210A48E60A}"/>
+                </a:ext>
+              </a:extLst>
+            </p:cNvPr>
+            <p:cNvCxnSpPr>
+              <a:cxnSpLocks/>
+              <a:stCxn id="20" idx="1"/>
+              <a:endCxn id="20" idx="3"/>
+            </p:cNvCxnSpPr>
+            <p:nvPr/>
+          </p:nvCxnSpPr>
+          <p:spPr>
+            <a:xfrm>
+              <a:off x="1175657" y="6147760"/>
+              <a:ext cx="370114" cy="0"/>
+            </a:xfrm>
+            <a:prstGeom prst="line">
+              <a:avLst/>
+            </a:prstGeom>
+          </p:spPr>
+          <p:style>
+            <a:lnRef idx="1">
+              <a:schemeClr val="accent1"/>
+            </a:lnRef>
+            <a:fillRef idx="0">
+              <a:schemeClr val="accent1"/>
+            </a:fillRef>
+            <a:effectRef idx="0">
+              <a:schemeClr val="accent1"/>
+            </a:effectRef>
+            <a:fontRef idx="minor">
+              <a:schemeClr val="tx1"/>
+            </a:fontRef>
+          </p:style>
+        </p:cxnSp>
+        <p:cxnSp>
+          <p:nvCxnSpPr>
+            <p:cNvPr id="46" name="Straight Connector 45">
+              <a:extLst>
+                <a:ext uri="{FF2B5EF4-FFF2-40B4-BE49-F238E27FC236}">
+                  <a16:creationId xmlns:a16="http://schemas.microsoft.com/office/drawing/2014/main" id="{7AED5B7A-243B-6FAD-C904-A72171DA10E4}"/>
+                </a:ext>
+              </a:extLst>
+            </p:cNvPr>
+            <p:cNvCxnSpPr>
+              <a:cxnSpLocks/>
+              <a:stCxn id="21" idx="1"/>
+              <a:endCxn id="21" idx="3"/>
+            </p:cNvCxnSpPr>
+            <p:nvPr/>
+          </p:nvCxnSpPr>
+          <p:spPr>
+            <a:xfrm>
+              <a:off x="1175656" y="6377836"/>
+              <a:ext cx="370114" cy="0"/>
+            </a:xfrm>
+            <a:prstGeom prst="line">
+              <a:avLst/>
+            </a:prstGeom>
+          </p:spPr>
+          <p:style>
+            <a:lnRef idx="1">
+              <a:schemeClr val="accent1"/>
+            </a:lnRef>
+            <a:fillRef idx="0">
+              <a:schemeClr val="accent1"/>
+            </a:fillRef>
+            <a:effectRef idx="0">
+              <a:schemeClr val="accent1"/>
+            </a:effectRef>
+            <a:fontRef idx="minor">
+              <a:schemeClr val="tx1"/>
+            </a:fontRef>
+          </p:style>
+        </p:cxnSp>
+        <mc:AlternateContent xmlns:mc="http://schemas.openxmlformats.org/markup-compatibility/2006">
+          <mc:Choice xmlns:a14="http://schemas.microsoft.com/office/drawing/2010/main" Requires="a14">
+            <p:sp>
+              <p:nvSpPr>
+                <p:cNvPr id="55" name="TextBox 54">
+                  <a:extLst>
+                    <a:ext uri="{FF2B5EF4-FFF2-40B4-BE49-F238E27FC236}">
+                      <a16:creationId xmlns:a16="http://schemas.microsoft.com/office/drawing/2014/main" id="{C98BB9BE-FF5B-BD53-700F-EF25882F8757}"/>
+                    </a:ext>
+                  </a:extLst>
+                </p:cNvPr>
+                <p:cNvSpPr txBox="1"/>
+                <p:nvPr/>
+              </p:nvSpPr>
+              <p:spPr>
+                <a:xfrm>
+                  <a:off x="1001213" y="5260489"/>
+                  <a:ext cx="1106260" cy="338554"/>
+                </a:xfrm>
+                <a:prstGeom prst="rect">
+                  <a:avLst/>
+                </a:prstGeom>
+                <a:noFill/>
+              </p:spPr>
+              <p:txBody>
+                <a:bodyPr wrap="square" rtlCol="0">
+                  <a:spAutoFit/>
+                </a:bodyPr>
+                <a:lstStyle/>
+                <a:p>
+                  <a:r>
+                    <a:rPr lang="pt-BR" sz="1600" dirty="0"/>
+                    <a:t>reforço, </a:t>
+                  </a:r>
+                  <a14:m>
+                    <m:oMath xmlns:m="http://schemas.openxmlformats.org/officeDocument/2006/math">
+                      <m:sSub>
+                        <m:sSubPr>
+                          <m:ctrlPr>
+                            <a:rPr lang="pt-BR" sz="1600" i="1" smtClean="0">
+                              <a:latin typeface="Cambria Math" panose="02040503050406030204" pitchFamily="18" charset="0"/>
+                            </a:rPr>
+                          </m:ctrlPr>
+                        </m:sSubPr>
+                        <m:e>
+                          <m:r>
+                            <a:rPr lang="pt-BR" sz="1600" b="0" i="1" smtClean="0">
+                              <a:latin typeface="Cambria Math" panose="02040503050406030204" pitchFamily="18" charset="0"/>
+                            </a:rPr>
+                            <m:t>𝑟</m:t>
+                          </m:r>
+                        </m:e>
+                        <m:sub>
+                          <m:r>
+                            <a:rPr lang="pt-BR" sz="1600" b="0" i="1" smtClean="0">
+                              <a:latin typeface="Cambria Math" panose="02040503050406030204" pitchFamily="18" charset="0"/>
+                            </a:rPr>
+                            <m:t>𝑡</m:t>
+                          </m:r>
+                        </m:sub>
+                      </m:sSub>
+                    </m:oMath>
+                  </a14:m>
+                  <a:endParaRPr lang="en-US" sz="1600" dirty="0"/>
+                </a:p>
+              </p:txBody>
+            </p:sp>
+          </mc:Choice>
+          <mc:Fallback>
+            <p:sp>
+              <p:nvSpPr>
+                <p:cNvPr id="55" name="TextBox 54">
+                  <a:extLst>
+                    <a:ext uri="{FF2B5EF4-FFF2-40B4-BE49-F238E27FC236}">
+                      <a16:creationId xmlns:a16="http://schemas.microsoft.com/office/drawing/2014/main" id="{C98BB9BE-FF5B-BD53-700F-EF25882F8757}"/>
+                    </a:ext>
+                  </a:extLst>
+                </p:cNvPr>
+                <p:cNvSpPr txBox="1">
+                  <a:spLocks noRot="1" noChangeAspect="1" noMove="1" noResize="1" noEditPoints="1" noAdjustHandles="1" noChangeArrowheads="1" noChangeShapeType="1" noTextEdit="1"/>
+                </p:cNvSpPr>
+                <p:nvPr/>
+              </p:nvSpPr>
+              <p:spPr>
+                <a:xfrm>
+                  <a:off x="1001213" y="5260489"/>
+                  <a:ext cx="1106260" cy="338554"/>
+                </a:xfrm>
+                <a:prstGeom prst="rect">
+                  <a:avLst/>
+                </a:prstGeom>
+                <a:blipFill>
+                  <a:blip r:embed="rId5"/>
+                  <a:stretch>
+                    <a:fillRect l="-3315" t="-5455" b="-23636"/>
+                  </a:stretch>
+                </a:blipFill>
+              </p:spPr>
+              <p:txBody>
+                <a:bodyPr/>
+                <a:lstStyle/>
+                <a:p>
+                  <a:r>
+                    <a:rPr lang="en-US">
+                      <a:noFill/>
+                    </a:rPr>
+                    <a:t> </a:t>
+                  </a:r>
+                </a:p>
+              </p:txBody>
+            </p:sp>
+          </mc:Fallback>
+        </mc:AlternateContent>
+        <mc:AlternateContent xmlns:mc="http://schemas.openxmlformats.org/markup-compatibility/2006">
+          <mc:Choice xmlns:a14="http://schemas.microsoft.com/office/drawing/2010/main" Requires="a14">
+            <p:sp>
+              <p:nvSpPr>
+                <p:cNvPr id="56" name="TextBox 55">
+                  <a:extLst>
+                    <a:ext uri="{FF2B5EF4-FFF2-40B4-BE49-F238E27FC236}">
+                      <a16:creationId xmlns:a16="http://schemas.microsoft.com/office/drawing/2014/main" id="{033C1F87-4FD6-565B-5CE1-B94FB9D5F703}"/>
+                    </a:ext>
+                  </a:extLst>
+                </p:cNvPr>
+                <p:cNvSpPr txBox="1"/>
+                <p:nvPr/>
+              </p:nvSpPr>
+              <p:spPr>
+                <a:xfrm>
+                  <a:off x="-330925" y="5260489"/>
+                  <a:ext cx="1004386" cy="338554"/>
+                </a:xfrm>
+                <a:prstGeom prst="rect">
+                  <a:avLst/>
+                </a:prstGeom>
+                <a:noFill/>
+              </p:spPr>
+              <p:txBody>
+                <a:bodyPr wrap="square" rtlCol="0">
+                  <a:spAutoFit/>
+                </a:bodyPr>
+                <a:lstStyle/>
+                <a:p>
+                  <a:r>
+                    <a:rPr lang="pt-BR" sz="1600" dirty="0"/>
+                    <a:t>estado, </a:t>
+                  </a:r>
+                  <a14:m>
+                    <m:oMath xmlns:m="http://schemas.openxmlformats.org/officeDocument/2006/math">
+                      <m:sSub>
+                        <m:sSubPr>
+                          <m:ctrlPr>
+                            <a:rPr lang="pt-BR" sz="1600" i="1" smtClean="0">
+                              <a:latin typeface="Cambria Math" panose="02040503050406030204" pitchFamily="18" charset="0"/>
+                            </a:rPr>
+                          </m:ctrlPr>
+                        </m:sSubPr>
+                        <m:e>
+                          <m:r>
+                            <a:rPr lang="pt-BR" sz="1600" b="0" i="1" smtClean="0">
+                              <a:latin typeface="Cambria Math" panose="02040503050406030204" pitchFamily="18" charset="0"/>
+                            </a:rPr>
+                            <m:t>𝑠</m:t>
+                          </m:r>
+                        </m:e>
+                        <m:sub>
+                          <m:r>
+                            <a:rPr lang="pt-BR" sz="1600" b="0" i="1" smtClean="0">
+                              <a:latin typeface="Cambria Math" panose="02040503050406030204" pitchFamily="18" charset="0"/>
+                            </a:rPr>
+                            <m:t>𝑡</m:t>
+                          </m:r>
+                        </m:sub>
+                      </m:sSub>
+                    </m:oMath>
+                  </a14:m>
+                  <a:endParaRPr lang="en-US" sz="1600" dirty="0"/>
+                </a:p>
+              </p:txBody>
+            </p:sp>
+          </mc:Choice>
+          <mc:Fallback>
+            <p:sp>
+              <p:nvSpPr>
+                <p:cNvPr id="56" name="TextBox 55">
+                  <a:extLst>
+                    <a:ext uri="{FF2B5EF4-FFF2-40B4-BE49-F238E27FC236}">
+                      <a16:creationId xmlns:a16="http://schemas.microsoft.com/office/drawing/2014/main" id="{033C1F87-4FD6-565B-5CE1-B94FB9D5F703}"/>
+                    </a:ext>
+                  </a:extLst>
+                </p:cNvPr>
+                <p:cNvSpPr txBox="1">
+                  <a:spLocks noRot="1" noChangeAspect="1" noMove="1" noResize="1" noEditPoints="1" noAdjustHandles="1" noChangeArrowheads="1" noChangeShapeType="1" noTextEdit="1"/>
+                </p:cNvSpPr>
+                <p:nvPr/>
+              </p:nvSpPr>
+              <p:spPr>
+                <a:xfrm>
+                  <a:off x="-330925" y="5260489"/>
+                  <a:ext cx="1004386" cy="338554"/>
+                </a:xfrm>
+                <a:prstGeom prst="rect">
+                  <a:avLst/>
+                </a:prstGeom>
+                <a:blipFill>
+                  <a:blip r:embed="rId6"/>
+                  <a:stretch>
+                    <a:fillRect l="-3030" t="-5455" b="-23636"/>
+                  </a:stretch>
+                </a:blipFill>
+              </p:spPr>
+              <p:txBody>
+                <a:bodyPr/>
+                <a:lstStyle/>
+                <a:p>
+                  <a:r>
+                    <a:rPr lang="en-US">
+                      <a:noFill/>
+                    </a:rPr>
+                    <a:t> </a:t>
+                  </a:r>
+                </a:p>
+              </p:txBody>
+            </p:sp>
+          </mc:Fallback>
+        </mc:AlternateContent>
+        <p:cxnSp>
+          <p:nvCxnSpPr>
+            <p:cNvPr id="58" name="Straight Connector 57">
+              <a:extLst>
+                <a:ext uri="{FF2B5EF4-FFF2-40B4-BE49-F238E27FC236}">
+                  <a16:creationId xmlns:a16="http://schemas.microsoft.com/office/drawing/2014/main" id="{1A8E8F72-A082-BAC3-6C41-D1C1204F72D8}"/>
+                </a:ext>
+              </a:extLst>
+            </p:cNvPr>
+            <p:cNvCxnSpPr>
+              <a:cxnSpLocks/>
+            </p:cNvCxnSpPr>
+            <p:nvPr/>
+          </p:nvCxnSpPr>
+          <p:spPr>
+            <a:xfrm flipH="1">
+              <a:off x="1552119" y="6028070"/>
+              <a:ext cx="1" cy="460152"/>
+            </a:xfrm>
+            <a:prstGeom prst="line">
+              <a:avLst/>
+            </a:prstGeom>
+            <a:ln>
+              <a:prstDash val="dash"/>
+            </a:ln>
+          </p:spPr>
+          <p:style>
+            <a:lnRef idx="1">
+              <a:schemeClr val="accent1"/>
+            </a:lnRef>
+            <a:fillRef idx="0">
+              <a:schemeClr val="accent1"/>
+            </a:fillRef>
+            <a:effectRef idx="0">
+              <a:schemeClr val="accent1"/>
+            </a:effectRef>
+            <a:fontRef idx="minor">
+              <a:schemeClr val="tx1"/>
+            </a:fontRef>
+          </p:style>
+        </p:cxnSp>
+      </p:grpSp>
+    </p:spTree>
+    <p:extLst>
+      <p:ext uri="{BB962C8B-B14F-4D97-AF65-F5344CB8AC3E}">
+        <p14:creationId xmlns:p14="http://schemas.microsoft.com/office/powerpoint/2010/main" val="698848651"/>
       </p:ext>
     </p:extLst>
   </p:cSld>
@@ -6779,8 +8707,8 @@
           </a:p>
         </p:txBody>
       </p:sp>
-      <mc:AlternateContent xmlns:mc="http://schemas.openxmlformats.org/markup-compatibility/2006" xmlns:a14="http://schemas.microsoft.com/office/drawing/2010/main">
-        <mc:Choice Requires="a14">
+      <mc:AlternateContent xmlns:mc="http://schemas.openxmlformats.org/markup-compatibility/2006">
+        <mc:Choice xmlns:a14="http://schemas.microsoft.com/office/drawing/2010/main" Requires="a14">
           <p:sp>
             <p:nvSpPr>
               <p:cNvPr id="3" name="Content Placeholder 2">
@@ -6799,8 +8727,8 @@
             </p:nvSpPr>
             <p:spPr>
               <a:xfrm>
-                <a:off x="5627914" y="1836510"/>
-                <a:ext cx="6433457" cy="5021489"/>
+                <a:off x="5540830" y="1836510"/>
+                <a:ext cx="6520542" cy="5021489"/>
               </a:xfrm>
             </p:spPr>
             <p:txBody>
@@ -6909,15 +8837,11 @@
                   <a:rPr lang="pt-BR" dirty="0"/>
                   <a:t>): O feedback (positivo ou negativo) recebido após uma ação.</a:t>
                 </a:r>
-                <a:endParaRPr lang="en-US" dirty="0"/>
-              </a:p>
-              <a:p>
-                <a:endParaRPr lang="en-US" dirty="0"/>
               </a:p>
             </p:txBody>
           </p:sp>
         </mc:Choice>
-        <mc:Fallback xmlns="">
+        <mc:Fallback>
           <p:sp>
             <p:nvSpPr>
               <p:cNvPr id="3" name="Content Placeholder 2">
@@ -6936,13 +8860,13 @@
             </p:nvSpPr>
             <p:spPr>
               <a:xfrm>
-                <a:off x="5627914" y="1836510"/>
-                <a:ext cx="6433457" cy="5021489"/>
+                <a:off x="5540830" y="1836510"/>
+                <a:ext cx="6520542" cy="5021489"/>
               </a:xfrm>
               <a:blipFill>
                 <a:blip r:embed="rId3"/>
                 <a:stretch>
-                  <a:fillRect l="-1705" t="-1942" r="-1894"/>
+                  <a:fillRect l="-1682" t="-1942" r="-2243"/>
                 </a:stretch>
               </a:blipFill>
             </p:spPr>
@@ -6963,10 +8887,10 @@
       </mc:AlternateContent>
       <p:pic>
         <p:nvPicPr>
-          <p:cNvPr id="7" name="Picture 6">
-            <a:extLst>
-              <a:ext uri="{FF2B5EF4-FFF2-40B4-BE49-F238E27FC236}">
-                <a16:creationId xmlns:a16="http://schemas.microsoft.com/office/drawing/2014/main" id="{9FF40252-D70D-DF89-7A6D-82F50130B108}"/>
+          <p:cNvPr id="61" name="Picture 60">
+            <a:extLst>
+              <a:ext uri="{FF2B5EF4-FFF2-40B4-BE49-F238E27FC236}">
+                <a16:creationId xmlns:a16="http://schemas.microsoft.com/office/drawing/2014/main" id="{C4C7DDB8-3D9F-2576-E984-51ED03206A3F}"/>
               </a:ext>
             </a:extLst>
           </p:cNvPr>
@@ -6983,545 +8907,20 @@
               </a:ext>
             </a:extLst>
           </a:blip>
-          <a:srcRect l="6126" t="12857" r="9074" b="11905"/>
           <a:stretch>
             <a:fillRect/>
           </a:stretch>
         </p:blipFill>
         <p:spPr>
           <a:xfrm>
-            <a:off x="-489858" y="590096"/>
-            <a:ext cx="4990915" cy="2492828"/>
+            <a:off x="130629" y="2859764"/>
+            <a:ext cx="5173338" cy="2335899"/>
           </a:xfrm>
           <a:prstGeom prst="rect">
             <a:avLst/>
           </a:prstGeom>
         </p:spPr>
       </p:pic>
-      <p:cxnSp>
-        <p:nvCxnSpPr>
-          <p:cNvPr id="12" name="Connector: Elbow 11">
-            <a:extLst>
-              <a:ext uri="{FF2B5EF4-FFF2-40B4-BE49-F238E27FC236}">
-                <a16:creationId xmlns:a16="http://schemas.microsoft.com/office/drawing/2014/main" id="{0375811A-BC31-5203-21BF-8C1AEDCA810A}"/>
-              </a:ext>
-            </a:extLst>
-          </p:cNvPr>
-          <p:cNvCxnSpPr>
-            <a:cxnSpLocks/>
-            <a:stCxn id="17" idx="3"/>
-            <a:endCxn id="18" idx="3"/>
-          </p:cNvCxnSpPr>
-          <p:nvPr/>
-        </p:nvCxnSpPr>
-        <p:spPr>
-          <a:xfrm>
-            <a:off x="3298371" y="4693670"/>
-            <a:ext cx="12700" cy="1569130"/>
-          </a:xfrm>
-          <a:prstGeom prst="bentConnector3">
-            <a:avLst>
-              <a:gd name="adj1" fmla="val 4542858"/>
-            </a:avLst>
-          </a:prstGeom>
-          <a:ln>
-            <a:tailEnd type="triangle"/>
-          </a:ln>
-        </p:spPr>
-        <p:style>
-          <a:lnRef idx="1">
-            <a:schemeClr val="accent1"/>
-          </a:lnRef>
-          <a:fillRef idx="0">
-            <a:schemeClr val="accent1"/>
-          </a:fillRef>
-          <a:effectRef idx="0">
-            <a:schemeClr val="accent1"/>
-          </a:effectRef>
-          <a:fontRef idx="minor">
-            <a:schemeClr val="tx1"/>
-          </a:fontRef>
-        </p:style>
-      </p:cxnSp>
-      <p:cxnSp>
-        <p:nvCxnSpPr>
-          <p:cNvPr id="15" name="Connector: Elbow 14">
-            <a:extLst>
-              <a:ext uri="{FF2B5EF4-FFF2-40B4-BE49-F238E27FC236}">
-                <a16:creationId xmlns:a16="http://schemas.microsoft.com/office/drawing/2014/main" id="{003D9D79-6AB4-D27E-4481-E60E0856012A}"/>
-              </a:ext>
-            </a:extLst>
-          </p:cNvPr>
-          <p:cNvCxnSpPr>
-            <a:cxnSpLocks/>
-            <a:stCxn id="27" idx="1"/>
-            <a:endCxn id="33" idx="1"/>
-          </p:cNvCxnSpPr>
-          <p:nvPr/>
-        </p:nvCxnSpPr>
-        <p:spPr>
-          <a:xfrm rot="10800000">
-            <a:off x="2090057" y="4807406"/>
-            <a:ext cx="12700" cy="1340354"/>
-          </a:xfrm>
-          <a:prstGeom prst="bentConnector3">
-            <a:avLst>
-              <a:gd name="adj1" fmla="val 1800000"/>
-            </a:avLst>
-          </a:prstGeom>
-          <a:ln>
-            <a:tailEnd type="triangle"/>
-          </a:ln>
-        </p:spPr>
-        <p:style>
-          <a:lnRef idx="1">
-            <a:schemeClr val="accent1"/>
-          </a:lnRef>
-          <a:fillRef idx="0">
-            <a:schemeClr val="accent1"/>
-          </a:fillRef>
-          <a:effectRef idx="0">
-            <a:schemeClr val="accent1"/>
-          </a:effectRef>
-          <a:fontRef idx="minor">
-            <a:schemeClr val="tx1"/>
-          </a:fontRef>
-        </p:style>
-      </p:cxnSp>
-      <p:sp>
-        <p:nvSpPr>
-          <p:cNvPr id="17" name="Rectangle: Rounded Corners 16">
-            <a:extLst>
-              <a:ext uri="{FF2B5EF4-FFF2-40B4-BE49-F238E27FC236}">
-                <a16:creationId xmlns:a16="http://schemas.microsoft.com/office/drawing/2014/main" id="{D957717F-F346-A328-0454-3432762A09F8}"/>
-              </a:ext>
-            </a:extLst>
-          </p:cNvPr>
-          <p:cNvSpPr/>
-          <p:nvPr/>
-        </p:nvSpPr>
-        <p:spPr>
-          <a:xfrm>
-            <a:off x="2090057" y="4347254"/>
-            <a:ext cx="1208314" cy="692832"/>
-          </a:xfrm>
-          <a:prstGeom prst="roundRect">
-            <a:avLst/>
-          </a:prstGeom>
-        </p:spPr>
-        <p:style>
-          <a:lnRef idx="2">
-            <a:schemeClr val="accent1">
-              <a:shade val="15000"/>
-            </a:schemeClr>
-          </a:lnRef>
-          <a:fillRef idx="1">
-            <a:schemeClr val="accent1"/>
-          </a:fillRef>
-          <a:effectRef idx="0">
-            <a:schemeClr val="accent1"/>
-          </a:effectRef>
-          <a:fontRef idx="minor">
-            <a:schemeClr val="lt1"/>
-          </a:fontRef>
-        </p:style>
-        <p:txBody>
-          <a:bodyPr rtlCol="0" anchor="ctr"/>
-          <a:lstStyle/>
-          <a:p>
-            <a:pPr algn="ctr"/>
-            <a:r>
-              <a:rPr lang="pt-BR" dirty="0"/>
-              <a:t>Agente</a:t>
-            </a:r>
-            <a:endParaRPr lang="en-US" dirty="0"/>
-          </a:p>
-        </p:txBody>
-      </p:sp>
-      <p:sp>
-        <p:nvSpPr>
-          <p:cNvPr id="18" name="Rectangle: Rounded Corners 17">
-            <a:extLst>
-              <a:ext uri="{FF2B5EF4-FFF2-40B4-BE49-F238E27FC236}">
-                <a16:creationId xmlns:a16="http://schemas.microsoft.com/office/drawing/2014/main" id="{39EF6FE5-6FBC-BC13-63C8-D6E9E3E272C4}"/>
-              </a:ext>
-            </a:extLst>
-          </p:cNvPr>
-          <p:cNvSpPr/>
-          <p:nvPr/>
-        </p:nvSpPr>
-        <p:spPr>
-          <a:xfrm>
-            <a:off x="2090057" y="5916384"/>
-            <a:ext cx="1208314" cy="692832"/>
-          </a:xfrm>
-          <a:prstGeom prst="roundRect">
-            <a:avLst/>
-          </a:prstGeom>
-        </p:spPr>
-        <p:style>
-          <a:lnRef idx="2">
-            <a:schemeClr val="accent1">
-              <a:shade val="15000"/>
-            </a:schemeClr>
-          </a:lnRef>
-          <a:fillRef idx="1">
-            <a:schemeClr val="accent1"/>
-          </a:fillRef>
-          <a:effectRef idx="0">
-            <a:schemeClr val="accent1"/>
-          </a:effectRef>
-          <a:fontRef idx="minor">
-            <a:schemeClr val="lt1"/>
-          </a:fontRef>
-        </p:style>
-        <p:txBody>
-          <a:bodyPr rtlCol="0" anchor="ctr"/>
-          <a:lstStyle/>
-          <a:p>
-            <a:pPr algn="ctr"/>
-            <a:r>
-              <a:rPr lang="pt-BR" dirty="0"/>
-              <a:t>Ambiente</a:t>
-            </a:r>
-            <a:endParaRPr lang="en-US" dirty="0"/>
-          </a:p>
-        </p:txBody>
-      </p:sp>
-      <p:sp>
-        <p:nvSpPr>
-          <p:cNvPr id="26" name="Rectangle 25">
-            <a:extLst>
-              <a:ext uri="{FF2B5EF4-FFF2-40B4-BE49-F238E27FC236}">
-                <a16:creationId xmlns:a16="http://schemas.microsoft.com/office/drawing/2014/main" id="{A78F414E-0878-E9AC-3349-365D683589EF}"/>
-              </a:ext>
-            </a:extLst>
-          </p:cNvPr>
-          <p:cNvSpPr/>
-          <p:nvPr/>
-        </p:nvSpPr>
-        <p:spPr>
-          <a:xfrm>
-            <a:off x="2090057" y="6262799"/>
-            <a:ext cx="370114" cy="230076"/>
-          </a:xfrm>
-          <a:prstGeom prst="rect">
-            <a:avLst/>
-          </a:prstGeom>
-          <a:ln>
-            <a:noFill/>
-          </a:ln>
-        </p:spPr>
-        <p:style>
-          <a:lnRef idx="2">
-            <a:schemeClr val="accent1">
-              <a:shade val="15000"/>
-            </a:schemeClr>
-          </a:lnRef>
-          <a:fillRef idx="1">
-            <a:schemeClr val="accent1"/>
-          </a:fillRef>
-          <a:effectRef idx="0">
-            <a:schemeClr val="accent1"/>
-          </a:effectRef>
-          <a:fontRef idx="minor">
-            <a:schemeClr val="lt1"/>
-          </a:fontRef>
-        </p:style>
-        <p:txBody>
-          <a:bodyPr rtlCol="0" anchor="ctr"/>
-          <a:lstStyle/>
-          <a:p>
-            <a:pPr algn="ctr"/>
-            <a:endParaRPr lang="en-US"/>
-          </a:p>
-        </p:txBody>
-      </p:sp>
-      <p:sp>
-        <p:nvSpPr>
-          <p:cNvPr id="27" name="Rectangle 26">
-            <a:extLst>
-              <a:ext uri="{FF2B5EF4-FFF2-40B4-BE49-F238E27FC236}">
-                <a16:creationId xmlns:a16="http://schemas.microsoft.com/office/drawing/2014/main" id="{67A2140F-0BEB-DFFC-0173-0DDE81A0BAF4}"/>
-              </a:ext>
-            </a:extLst>
-          </p:cNvPr>
-          <p:cNvSpPr/>
-          <p:nvPr/>
-        </p:nvSpPr>
-        <p:spPr>
-          <a:xfrm>
-            <a:off x="2090057" y="6032722"/>
-            <a:ext cx="370114" cy="230076"/>
-          </a:xfrm>
-          <a:prstGeom prst="rect">
-            <a:avLst/>
-          </a:prstGeom>
-          <a:ln>
-            <a:noFill/>
-          </a:ln>
-        </p:spPr>
-        <p:style>
-          <a:lnRef idx="2">
-            <a:schemeClr val="accent1">
-              <a:shade val="15000"/>
-            </a:schemeClr>
-          </a:lnRef>
-          <a:fillRef idx="1">
-            <a:schemeClr val="accent1"/>
-          </a:fillRef>
-          <a:effectRef idx="0">
-            <a:schemeClr val="accent1"/>
-          </a:effectRef>
-          <a:fontRef idx="minor">
-            <a:schemeClr val="lt1"/>
-          </a:fontRef>
-        </p:style>
-        <p:txBody>
-          <a:bodyPr rtlCol="0" anchor="ctr"/>
-          <a:lstStyle/>
-          <a:p>
-            <a:pPr algn="ctr"/>
-            <a:endParaRPr lang="en-US"/>
-          </a:p>
-        </p:txBody>
-      </p:sp>
-      <p:sp>
-        <p:nvSpPr>
-          <p:cNvPr id="33" name="Rectangle 32">
-            <a:extLst>
-              <a:ext uri="{FF2B5EF4-FFF2-40B4-BE49-F238E27FC236}">
-                <a16:creationId xmlns:a16="http://schemas.microsoft.com/office/drawing/2014/main" id="{C67CE66F-B1C9-97C2-5191-323C447A4039}"/>
-              </a:ext>
-            </a:extLst>
-          </p:cNvPr>
-          <p:cNvSpPr/>
-          <p:nvPr/>
-        </p:nvSpPr>
-        <p:spPr>
-          <a:xfrm>
-            <a:off x="2090057" y="4692368"/>
-            <a:ext cx="370114" cy="230076"/>
-          </a:xfrm>
-          <a:prstGeom prst="rect">
-            <a:avLst/>
-          </a:prstGeom>
-          <a:ln>
-            <a:noFill/>
-          </a:ln>
-        </p:spPr>
-        <p:style>
-          <a:lnRef idx="2">
-            <a:schemeClr val="accent1">
-              <a:shade val="15000"/>
-            </a:schemeClr>
-          </a:lnRef>
-          <a:fillRef idx="1">
-            <a:schemeClr val="accent1"/>
-          </a:fillRef>
-          <a:effectRef idx="0">
-            <a:schemeClr val="accent1"/>
-          </a:effectRef>
-          <a:fontRef idx="minor">
-            <a:schemeClr val="lt1"/>
-          </a:fontRef>
-        </p:style>
-        <p:txBody>
-          <a:bodyPr rtlCol="0" anchor="ctr"/>
-          <a:lstStyle/>
-          <a:p>
-            <a:pPr algn="ctr"/>
-            <a:endParaRPr lang="en-US"/>
-          </a:p>
-        </p:txBody>
-      </p:sp>
-      <p:sp>
-        <p:nvSpPr>
-          <p:cNvPr id="34" name="Rectangle 33">
-            <a:extLst>
-              <a:ext uri="{FF2B5EF4-FFF2-40B4-BE49-F238E27FC236}">
-                <a16:creationId xmlns:a16="http://schemas.microsoft.com/office/drawing/2014/main" id="{44116E33-D3F4-D7FB-DCEF-760C9C024249}"/>
-              </a:ext>
-            </a:extLst>
-          </p:cNvPr>
-          <p:cNvSpPr/>
-          <p:nvPr/>
-        </p:nvSpPr>
-        <p:spPr>
-          <a:xfrm>
-            <a:off x="2090057" y="4462291"/>
-            <a:ext cx="370114" cy="230076"/>
-          </a:xfrm>
-          <a:prstGeom prst="rect">
-            <a:avLst/>
-          </a:prstGeom>
-          <a:ln>
-            <a:noFill/>
-          </a:ln>
-        </p:spPr>
-        <p:style>
-          <a:lnRef idx="2">
-            <a:schemeClr val="accent1">
-              <a:shade val="15000"/>
-            </a:schemeClr>
-          </a:lnRef>
-          <a:fillRef idx="1">
-            <a:schemeClr val="accent1"/>
-          </a:fillRef>
-          <a:effectRef idx="0">
-            <a:schemeClr val="accent1"/>
-          </a:effectRef>
-          <a:fontRef idx="minor">
-            <a:schemeClr val="lt1"/>
-          </a:fontRef>
-        </p:style>
-        <p:txBody>
-          <a:bodyPr rtlCol="0" anchor="ctr"/>
-          <a:lstStyle/>
-          <a:p>
-            <a:pPr algn="ctr"/>
-            <a:endParaRPr lang="en-US"/>
-          </a:p>
-        </p:txBody>
-      </p:sp>
-      <p:cxnSp>
-        <p:nvCxnSpPr>
-          <p:cNvPr id="39" name="Connector: Elbow 38">
-            <a:extLst>
-              <a:ext uri="{FF2B5EF4-FFF2-40B4-BE49-F238E27FC236}">
-                <a16:creationId xmlns:a16="http://schemas.microsoft.com/office/drawing/2014/main" id="{2E464A75-8DCF-FE0C-4988-63A14D19D5CD}"/>
-              </a:ext>
-            </a:extLst>
-          </p:cNvPr>
-          <p:cNvCxnSpPr>
-            <a:stCxn id="26" idx="1"/>
-            <a:endCxn id="34" idx="1"/>
-          </p:cNvCxnSpPr>
-          <p:nvPr/>
-        </p:nvCxnSpPr>
-        <p:spPr>
-          <a:xfrm rot="10800000">
-            <a:off x="2090057" y="4577329"/>
-            <a:ext cx="12700" cy="1800508"/>
-          </a:xfrm>
-          <a:prstGeom prst="bentConnector3">
-            <a:avLst>
-              <a:gd name="adj1" fmla="val 4371425"/>
-            </a:avLst>
-          </a:prstGeom>
-          <a:ln>
-            <a:tailEnd type="triangle"/>
-          </a:ln>
-        </p:spPr>
-        <p:style>
-          <a:lnRef idx="1">
-            <a:schemeClr val="accent1"/>
-          </a:lnRef>
-          <a:fillRef idx="0">
-            <a:schemeClr val="accent1"/>
-          </a:fillRef>
-          <a:effectRef idx="0">
-            <a:schemeClr val="accent1"/>
-          </a:effectRef>
-          <a:fontRef idx="minor">
-            <a:schemeClr val="tx1"/>
-          </a:fontRef>
-        </p:style>
-      </p:cxnSp>
-      <mc:AlternateContent xmlns:mc="http://schemas.openxmlformats.org/markup-compatibility/2006" xmlns:a14="http://schemas.microsoft.com/office/drawing/2010/main">
-        <mc:Choice Requires="a14">
-          <p:sp>
-            <p:nvSpPr>
-              <p:cNvPr id="41" name="TextBox 40">
-                <a:extLst>
-                  <a:ext uri="{FF2B5EF4-FFF2-40B4-BE49-F238E27FC236}">
-                    <a16:creationId xmlns:a16="http://schemas.microsoft.com/office/drawing/2014/main" id="{DEBC8956-45EC-9A9F-7CAD-7A468058ABF1}"/>
-                  </a:ext>
-                </a:extLst>
-              </p:cNvPr>
-              <p:cNvSpPr txBox="1"/>
-              <p:nvPr/>
-            </p:nvSpPr>
-            <p:spPr>
-              <a:xfrm>
-                <a:off x="3864428" y="5292917"/>
-                <a:ext cx="863891" cy="369332"/>
-              </a:xfrm>
-              <a:prstGeom prst="rect">
-                <a:avLst/>
-              </a:prstGeom>
-              <a:noFill/>
-            </p:spPr>
-            <p:txBody>
-              <a:bodyPr wrap="none" rtlCol="0">
-                <a:spAutoFit/>
-              </a:bodyPr>
-              <a:lstStyle/>
-              <a:p>
-                <a:r>
-                  <a:rPr lang="pt-BR" dirty="0"/>
-                  <a:t>ação, </a:t>
-                </a:r>
-                <a14:m>
-                  <m:oMath xmlns:m="http://schemas.openxmlformats.org/officeDocument/2006/math">
-                    <m:r>
-                      <a:rPr lang="pt-BR" b="0" i="1" smtClean="0">
-                        <a:latin typeface="Cambria Math" panose="02040503050406030204" pitchFamily="18" charset="0"/>
-                      </a:rPr>
-                      <m:t>𝑎</m:t>
-                    </m:r>
-                  </m:oMath>
-                </a14:m>
-                <a:endParaRPr lang="en-US" dirty="0"/>
-              </a:p>
-            </p:txBody>
-          </p:sp>
-        </mc:Choice>
-        <mc:Fallback xmlns="">
-          <p:sp>
-            <p:nvSpPr>
-              <p:cNvPr id="41" name="TextBox 40">
-                <a:extLst>
-                  <a:ext uri="{FF2B5EF4-FFF2-40B4-BE49-F238E27FC236}">
-                    <a16:creationId xmlns:a16="http://schemas.microsoft.com/office/drawing/2014/main" id="{DEBC8956-45EC-9A9F-7CAD-7A468058ABF1}"/>
-                  </a:ext>
-                </a:extLst>
-              </p:cNvPr>
-              <p:cNvSpPr txBox="1">
-                <a:spLocks noRot="1" noChangeAspect="1" noMove="1" noResize="1" noEditPoints="1" noAdjustHandles="1" noChangeArrowheads="1" noChangeShapeType="1" noTextEdit="1"/>
-              </p:cNvSpPr>
-              <p:nvPr/>
-            </p:nvSpPr>
-            <p:spPr>
-              <a:xfrm>
-                <a:off x="3864428" y="5292917"/>
-                <a:ext cx="863891" cy="369332"/>
-              </a:xfrm>
-              <a:prstGeom prst="rect">
-                <a:avLst/>
-              </a:prstGeom>
-              <a:blipFill>
-                <a:blip r:embed="rId5"/>
-                <a:stretch>
-                  <a:fillRect l="-6338" t="-8197" b="-24590"/>
-                </a:stretch>
-              </a:blipFill>
-            </p:spPr>
-            <p:txBody>
-              <a:bodyPr/>
-              <a:lstStyle/>
-              <a:p>
-                <a:r>
-                  <a:rPr lang="en-US">
-                    <a:noFill/>
-                  </a:rPr>
-                  <a:t> </a:t>
-                </a:r>
-              </a:p>
-            </p:txBody>
-          </p:sp>
-        </mc:Fallback>
-      </mc:AlternateContent>
     </p:spTree>
     <p:extLst>
       <p:ext uri="{BB962C8B-B14F-4D97-AF65-F5344CB8AC3E}">

--- a/slides/C24_Q_learning.pptx
+++ b/slides/C24_Q_learning.pptx
@@ -18,10 +18,10 @@
     <p:sldId id="320" r:id="rId6"/>
     <p:sldId id="321" r:id="rId7"/>
     <p:sldId id="318" r:id="rId8"/>
-    <p:sldId id="316" r:id="rId9"/>
-    <p:sldId id="319" r:id="rId10"/>
-    <p:sldId id="325" r:id="rId11"/>
-    <p:sldId id="322" r:id="rId12"/>
+    <p:sldId id="319" r:id="rId9"/>
+    <p:sldId id="325" r:id="rId10"/>
+    <p:sldId id="326" r:id="rId11"/>
+    <p:sldId id="316" r:id="rId12"/>
     <p:sldId id="309" r:id="rId13"/>
     <p:sldId id="310" r:id="rId14"/>
     <p:sldId id="311" r:id="rId15"/>
@@ -361,7 +361,7 @@
           <a:p>
             <a:fld id="{F7E56D9B-79AD-444A-AFED-DEC23408F8B4}" type="slidenum">
               <a:rPr lang="nl-BE" smtClean="0"/>
-              <a:t>‹#›</a:t>
+              <a:t>‹nº›</a:t>
             </a:fld>
             <a:endParaRPr lang="nl-BE"/>
           </a:p>
@@ -618,7 +618,7 @@
           <a:p>
             <a:fld id="{6FC8D850-966F-45A6-8DE7-15B891E7D40D}" type="slidenum">
               <a:rPr lang="pt-BR" smtClean="0"/>
-              <a:t>‹#›</a:t>
+              <a:t>‹nº›</a:t>
             </a:fld>
             <a:endParaRPr lang="pt-BR"/>
           </a:p>
@@ -903,7 +903,7 @@
         <p:cNvPr id="1" name="">
           <a:extLst>
             <a:ext uri="{FF2B5EF4-FFF2-40B4-BE49-F238E27FC236}">
-              <a16:creationId xmlns:a16="http://schemas.microsoft.com/office/drawing/2014/main" id="{5B4C3711-83BC-221A-A341-2BE62BCF89DC}"/>
+              <a16:creationId xmlns:a16="http://schemas.microsoft.com/office/drawing/2014/main" xmlns="" id="{5B4C3711-83BC-221A-A341-2BE62BCF89DC}"/>
             </a:ext>
           </a:extLst>
         </p:cNvPr>
@@ -923,7 +923,7 @@
           <p:cNvPr id="2" name="Slide Image Placeholder 1">
             <a:extLst>
               <a:ext uri="{FF2B5EF4-FFF2-40B4-BE49-F238E27FC236}">
-                <a16:creationId xmlns:a16="http://schemas.microsoft.com/office/drawing/2014/main" id="{5957728F-CFA3-D0A6-7780-F800EBAC1F6E}"/>
+                <a16:creationId xmlns:a16="http://schemas.microsoft.com/office/drawing/2014/main" xmlns="" id="{5957728F-CFA3-D0A6-7780-F800EBAC1F6E}"/>
               </a:ext>
             </a:extLst>
           </p:cNvPr>
@@ -941,7 +941,7 @@
           <p:cNvPr id="3" name="Notes Placeholder 2">
             <a:extLst>
               <a:ext uri="{FF2B5EF4-FFF2-40B4-BE49-F238E27FC236}">
-                <a16:creationId xmlns:a16="http://schemas.microsoft.com/office/drawing/2014/main" id="{4AD3E5CB-A8B8-7F4B-200F-94D044C81C3D}"/>
+                <a16:creationId xmlns:a16="http://schemas.microsoft.com/office/drawing/2014/main" xmlns="" id="{4AD3E5CB-A8B8-7F4B-200F-94D044C81C3D}"/>
               </a:ext>
             </a:extLst>
           </p:cNvPr>
@@ -966,7 +966,7 @@
           <p:cNvPr id="4" name="Slide Number Placeholder 3">
             <a:extLst>
               <a:ext uri="{FF2B5EF4-FFF2-40B4-BE49-F238E27FC236}">
-                <a16:creationId xmlns:a16="http://schemas.microsoft.com/office/drawing/2014/main" id="{3F9D8EC2-522A-3A24-97FD-162C1CF3C132}"/>
+                <a16:creationId xmlns:a16="http://schemas.microsoft.com/office/drawing/2014/main" xmlns="" id="{3F9D8EC2-522A-3A24-97FD-162C1CF3C132}"/>
               </a:ext>
             </a:extLst>
           </p:cNvPr>
@@ -1011,7 +1011,7 @@
         <p:cNvPr id="1" name="">
           <a:extLst>
             <a:ext uri="{FF2B5EF4-FFF2-40B4-BE49-F238E27FC236}">
-              <a16:creationId xmlns:a16="http://schemas.microsoft.com/office/drawing/2014/main" id="{478600EE-A6A2-2235-BCC6-6DE0C5D8DE78}"/>
+              <a16:creationId xmlns:a16="http://schemas.microsoft.com/office/drawing/2014/main" xmlns="" id="{478600EE-A6A2-2235-BCC6-6DE0C5D8DE78}"/>
             </a:ext>
           </a:extLst>
         </p:cNvPr>
@@ -1031,7 +1031,7 @@
           <p:cNvPr id="2" name="Slide Image Placeholder 1">
             <a:extLst>
               <a:ext uri="{FF2B5EF4-FFF2-40B4-BE49-F238E27FC236}">
-                <a16:creationId xmlns:a16="http://schemas.microsoft.com/office/drawing/2014/main" id="{B1C41149-DCAF-E8F8-FB78-0B242E221738}"/>
+                <a16:creationId xmlns:a16="http://schemas.microsoft.com/office/drawing/2014/main" xmlns="" id="{B1C41149-DCAF-E8F8-FB78-0B242E221738}"/>
               </a:ext>
             </a:extLst>
           </p:cNvPr>
@@ -1049,7 +1049,7 @@
           <p:cNvPr id="3" name="Notes Placeholder 2">
             <a:extLst>
               <a:ext uri="{FF2B5EF4-FFF2-40B4-BE49-F238E27FC236}">
-                <a16:creationId xmlns:a16="http://schemas.microsoft.com/office/drawing/2014/main" id="{F4C5329E-ECB5-4CB1-3A33-CFC57176F475}"/>
+                <a16:creationId xmlns:a16="http://schemas.microsoft.com/office/drawing/2014/main" xmlns="" id="{F4C5329E-ECB5-4CB1-3A33-CFC57176F475}"/>
               </a:ext>
             </a:extLst>
           </p:cNvPr>
@@ -1074,7 +1074,7 @@
           <p:cNvPr id="4" name="Slide Number Placeholder 3">
             <a:extLst>
               <a:ext uri="{FF2B5EF4-FFF2-40B4-BE49-F238E27FC236}">
-                <a16:creationId xmlns:a16="http://schemas.microsoft.com/office/drawing/2014/main" id="{37AB7C02-5FA9-66E4-2433-F97393A5C0BA}"/>
+                <a16:creationId xmlns:a16="http://schemas.microsoft.com/office/drawing/2014/main" xmlns="" id="{37AB7C02-5FA9-66E4-2433-F97393A5C0BA}"/>
               </a:ext>
             </a:extLst>
           </p:cNvPr>
@@ -1119,7 +1119,7 @@
         <p:cNvPr id="1" name="">
           <a:extLst>
             <a:ext uri="{FF2B5EF4-FFF2-40B4-BE49-F238E27FC236}">
-              <a16:creationId xmlns:a16="http://schemas.microsoft.com/office/drawing/2014/main" id="{92F2E69C-0407-4619-FFB1-7502CF033EBA}"/>
+              <a16:creationId xmlns:a16="http://schemas.microsoft.com/office/drawing/2014/main" xmlns="" id="{92F2E69C-0407-4619-FFB1-7502CF033EBA}"/>
             </a:ext>
           </a:extLst>
         </p:cNvPr>
@@ -1139,7 +1139,7 @@
           <p:cNvPr id="2" name="Slide Image Placeholder 1">
             <a:extLst>
               <a:ext uri="{FF2B5EF4-FFF2-40B4-BE49-F238E27FC236}">
-                <a16:creationId xmlns:a16="http://schemas.microsoft.com/office/drawing/2014/main" id="{E3C6894B-B13E-3C0F-BEC3-8A663E98508F}"/>
+                <a16:creationId xmlns:a16="http://schemas.microsoft.com/office/drawing/2014/main" xmlns="" id="{E3C6894B-B13E-3C0F-BEC3-8A663E98508F}"/>
               </a:ext>
             </a:extLst>
           </p:cNvPr>
@@ -1157,7 +1157,7 @@
           <p:cNvPr id="3" name="Notes Placeholder 2">
             <a:extLst>
               <a:ext uri="{FF2B5EF4-FFF2-40B4-BE49-F238E27FC236}">
-                <a16:creationId xmlns:a16="http://schemas.microsoft.com/office/drawing/2014/main" id="{B76A1B01-A242-46E3-F92E-FB0EA28821F9}"/>
+                <a16:creationId xmlns:a16="http://schemas.microsoft.com/office/drawing/2014/main" xmlns="" id="{B76A1B01-A242-46E3-F92E-FB0EA28821F9}"/>
               </a:ext>
             </a:extLst>
           </p:cNvPr>
@@ -1182,7 +1182,7 @@
           <p:cNvPr id="4" name="Slide Number Placeholder 3">
             <a:extLst>
               <a:ext uri="{FF2B5EF4-FFF2-40B4-BE49-F238E27FC236}">
-                <a16:creationId xmlns:a16="http://schemas.microsoft.com/office/drawing/2014/main" id="{4BA915CE-E13E-5840-D0C6-249ACB7C2C1D}"/>
+                <a16:creationId xmlns:a16="http://schemas.microsoft.com/office/drawing/2014/main" xmlns="" id="{4BA915CE-E13E-5840-D0C6-249ACB7C2C1D}"/>
               </a:ext>
             </a:extLst>
           </p:cNvPr>
@@ -1304,7 +1304,7 @@
           <a:p>
             <a:fld id="{6FC8D850-966F-45A6-8DE7-15B891E7D40D}" type="slidenum">
               <a:rPr lang="pt-BR" smtClean="0"/>
-              <a:t>9</a:t>
+              <a:t>8</a:t>
             </a:fld>
             <a:endParaRPr lang="pt-BR"/>
           </a:p>
@@ -1331,7 +1331,7 @@
         <p:cNvPr id="1" name="">
           <a:extLst>
             <a:ext uri="{FF2B5EF4-FFF2-40B4-BE49-F238E27FC236}">
-              <a16:creationId xmlns:a16="http://schemas.microsoft.com/office/drawing/2014/main" id="{0D0A5E72-3763-6194-5E85-BE26354035A3}"/>
+              <a16:creationId xmlns:a16="http://schemas.microsoft.com/office/drawing/2014/main" xmlns="" id="{0D0A5E72-3763-6194-5E85-BE26354035A3}"/>
             </a:ext>
           </a:extLst>
         </p:cNvPr>
@@ -1351,7 +1351,7 @@
           <p:cNvPr id="2" name="Slide Image Placeholder 1">
             <a:extLst>
               <a:ext uri="{FF2B5EF4-FFF2-40B4-BE49-F238E27FC236}">
-                <a16:creationId xmlns:a16="http://schemas.microsoft.com/office/drawing/2014/main" id="{82466988-6655-8B01-840E-0BE3EDB68F07}"/>
+                <a16:creationId xmlns:a16="http://schemas.microsoft.com/office/drawing/2014/main" xmlns="" id="{82466988-6655-8B01-840E-0BE3EDB68F07}"/>
               </a:ext>
             </a:extLst>
           </p:cNvPr>
@@ -1369,7 +1369,7 @@
           <p:cNvPr id="3" name="Notes Placeholder 2">
             <a:extLst>
               <a:ext uri="{FF2B5EF4-FFF2-40B4-BE49-F238E27FC236}">
-                <a16:creationId xmlns:a16="http://schemas.microsoft.com/office/drawing/2014/main" id="{5E09F3D0-11CA-2E8D-04C5-104C59DCE708}"/>
+                <a16:creationId xmlns:a16="http://schemas.microsoft.com/office/drawing/2014/main" xmlns="" id="{5E09F3D0-11CA-2E8D-04C5-104C59DCE708}"/>
               </a:ext>
             </a:extLst>
           </p:cNvPr>
@@ -1414,7 +1414,7 @@
           <p:cNvPr id="4" name="Slide Number Placeholder 3">
             <a:extLst>
               <a:ext uri="{FF2B5EF4-FFF2-40B4-BE49-F238E27FC236}">
-                <a16:creationId xmlns:a16="http://schemas.microsoft.com/office/drawing/2014/main" id="{68F0BCD7-F825-C67D-D845-8316B4C4B6D6}"/>
+                <a16:creationId xmlns:a16="http://schemas.microsoft.com/office/drawing/2014/main" xmlns="" id="{68F0BCD7-F825-C67D-D845-8316B4C4B6D6}"/>
               </a:ext>
             </a:extLst>
           </p:cNvPr>
@@ -1432,7 +1432,7 @@
           <a:p>
             <a:fld id="{6FC8D850-966F-45A6-8DE7-15B891E7D40D}" type="slidenum">
               <a:rPr lang="pt-BR" smtClean="0"/>
-              <a:t>10</a:t>
+              <a:t>9</a:t>
             </a:fld>
             <a:endParaRPr lang="pt-BR"/>
           </a:p>
@@ -1459,7 +1459,7 @@
         <p:cNvPr id="1" name="">
           <a:extLst>
             <a:ext uri="{FF2B5EF4-FFF2-40B4-BE49-F238E27FC236}">
-              <a16:creationId xmlns:a16="http://schemas.microsoft.com/office/drawing/2014/main" id="{D6247C74-AA7B-3F30-CE84-004473E34467}"/>
+              <a16:creationId xmlns:a16="http://schemas.microsoft.com/office/drawing/2014/main" xmlns="" id="{0D0A5E72-3763-6194-5E85-BE26354035A3}"/>
             </a:ext>
           </a:extLst>
         </p:cNvPr>
@@ -1479,7 +1479,7 @@
           <p:cNvPr id="2" name="Slide Image Placeholder 1">
             <a:extLst>
               <a:ext uri="{FF2B5EF4-FFF2-40B4-BE49-F238E27FC236}">
-                <a16:creationId xmlns:a16="http://schemas.microsoft.com/office/drawing/2014/main" id="{B1E4C741-B890-FCB5-138A-C67977AAD26B}"/>
+                <a16:creationId xmlns:a16="http://schemas.microsoft.com/office/drawing/2014/main" xmlns="" id="{82466988-6655-8B01-840E-0BE3EDB68F07}"/>
               </a:ext>
             </a:extLst>
           </p:cNvPr>
@@ -1497,7 +1497,7 @@
           <p:cNvPr id="3" name="Notes Placeholder 2">
             <a:extLst>
               <a:ext uri="{FF2B5EF4-FFF2-40B4-BE49-F238E27FC236}">
-                <a16:creationId xmlns:a16="http://schemas.microsoft.com/office/drawing/2014/main" id="{5475266D-73F1-BCB0-265C-192E1290B443}"/>
+                <a16:creationId xmlns:a16="http://schemas.microsoft.com/office/drawing/2014/main" xmlns="" id="{5E09F3D0-11CA-2E8D-04C5-104C59DCE708}"/>
               </a:ext>
             </a:extLst>
           </p:cNvPr>
@@ -1513,6 +1513,26 @@
           <a:bodyPr/>
           <a:lstStyle/>
           <a:p>
+            <a:r>
+              <a:rPr lang="pt-BR" dirty="0"/>
+              <a:t>O processo ocorre em etapas de tempo discretas (</a:t>
+            </a:r>
+            <a:r>
+              <a:rPr lang="pt-BR" sz="1200" kern="1200" dirty="0">
+                <a:solidFill>
+                  <a:schemeClr val="tx1"/>
+                </a:solidFill>
+                <a:effectLst/>
+                <a:latin typeface="+mn-lt"/>
+                <a:ea typeface="+mn-ea"/>
+                <a:cs typeface="+mn-cs"/>
+              </a:rPr>
+              <a:t>$t, t+1, t+2...$</a:t>
+            </a:r>
+            <a:r>
+              <a:rPr lang="pt-BR" dirty="0"/>
+              <a:t>).</a:t>
+            </a:r>
             <a:endParaRPr lang="en-US" dirty="0"/>
           </a:p>
         </p:txBody>
@@ -1522,7 +1542,7 @@
           <p:cNvPr id="4" name="Slide Number Placeholder 3">
             <a:extLst>
               <a:ext uri="{FF2B5EF4-FFF2-40B4-BE49-F238E27FC236}">
-                <a16:creationId xmlns:a16="http://schemas.microsoft.com/office/drawing/2014/main" id="{0D1E374B-17A3-96C1-5271-F06E116DF2A7}"/>
+                <a16:creationId xmlns:a16="http://schemas.microsoft.com/office/drawing/2014/main" xmlns="" id="{68F0BCD7-F825-C67D-D845-8316B4C4B6D6}"/>
               </a:ext>
             </a:extLst>
           </p:cNvPr>
@@ -1540,7 +1560,7 @@
           <a:p>
             <a:fld id="{6FC8D850-966F-45A6-8DE7-15B891E7D40D}" type="slidenum">
               <a:rPr lang="pt-BR" smtClean="0"/>
-              <a:t>11</a:t>
+              <a:t>10</a:t>
             </a:fld>
             <a:endParaRPr lang="pt-BR"/>
           </a:p>
@@ -1549,7 +1569,7 @@
     </p:spTree>
     <p:extLst>
       <p:ext uri="{BB962C8B-B14F-4D97-AF65-F5344CB8AC3E}">
-        <p14:creationId xmlns:p14="http://schemas.microsoft.com/office/powerpoint/2010/main" val="2025926453"/>
+        <p14:creationId xmlns:p14="http://schemas.microsoft.com/office/powerpoint/2010/main" val="3778172451"/>
       </p:ext>
     </p:extLst>
   </p:cSld>
@@ -1581,7 +1601,7 @@
           <p:cNvPr id="2" name="Título 1">
             <a:extLst>
               <a:ext uri="{FF2B5EF4-FFF2-40B4-BE49-F238E27FC236}">
-                <a16:creationId xmlns:a16="http://schemas.microsoft.com/office/drawing/2014/main" id="{1DB9B4FF-B06E-403C-A326-BDC64D8FF94E}"/>
+                <a16:creationId xmlns:a16="http://schemas.microsoft.com/office/drawing/2014/main" xmlns="" id="{1DB9B4FF-B06E-403C-A326-BDC64D8FF94E}"/>
               </a:ext>
             </a:extLst>
           </p:cNvPr>
@@ -1618,7 +1638,7 @@
           <p:cNvPr id="3" name="Subtítulo 2">
             <a:extLst>
               <a:ext uri="{FF2B5EF4-FFF2-40B4-BE49-F238E27FC236}">
-                <a16:creationId xmlns:a16="http://schemas.microsoft.com/office/drawing/2014/main" id="{247BDFCE-746E-45BF-A319-4733D58D1632}"/>
+                <a16:creationId xmlns:a16="http://schemas.microsoft.com/office/drawing/2014/main" xmlns="" id="{247BDFCE-746E-45BF-A319-4733D58D1632}"/>
               </a:ext>
             </a:extLst>
           </p:cNvPr>
@@ -1688,7 +1708,7 @@
           <p:cNvPr id="4" name="Espaço Reservado para Data 3">
             <a:extLst>
               <a:ext uri="{FF2B5EF4-FFF2-40B4-BE49-F238E27FC236}">
-                <a16:creationId xmlns:a16="http://schemas.microsoft.com/office/drawing/2014/main" id="{9EDE2778-5372-4104-B96D-968184DA8288}"/>
+                <a16:creationId xmlns:a16="http://schemas.microsoft.com/office/drawing/2014/main" xmlns="" id="{9EDE2778-5372-4104-B96D-968184DA8288}"/>
               </a:ext>
             </a:extLst>
           </p:cNvPr>
@@ -1717,7 +1737,7 @@
           <p:cNvPr id="5" name="Espaço Reservado para Rodapé 4">
             <a:extLst>
               <a:ext uri="{FF2B5EF4-FFF2-40B4-BE49-F238E27FC236}">
-                <a16:creationId xmlns:a16="http://schemas.microsoft.com/office/drawing/2014/main" id="{C1DD0F41-C861-4051-988D-3024A37A4B93}"/>
+                <a16:creationId xmlns:a16="http://schemas.microsoft.com/office/drawing/2014/main" xmlns="" id="{C1DD0F41-C861-4051-988D-3024A37A4B93}"/>
               </a:ext>
             </a:extLst>
           </p:cNvPr>
@@ -1742,7 +1762,7 @@
           <p:cNvPr id="6" name="Espaço Reservado para Número de Slide 5">
             <a:extLst>
               <a:ext uri="{FF2B5EF4-FFF2-40B4-BE49-F238E27FC236}">
-                <a16:creationId xmlns:a16="http://schemas.microsoft.com/office/drawing/2014/main" id="{07E5967E-D980-431A-A5DB-3F0C5030A81E}"/>
+                <a16:creationId xmlns:a16="http://schemas.microsoft.com/office/drawing/2014/main" xmlns="" id="{07E5967E-D980-431A-A5DB-3F0C5030A81E}"/>
               </a:ext>
             </a:extLst>
           </p:cNvPr>
@@ -1760,7 +1780,7 @@
           <a:p>
             <a:fld id="{1A7E88B7-70CE-4035-AE73-13FA6FB985D4}" type="slidenum">
               <a:rPr lang="pt-BR" smtClean="0"/>
-              <a:t>‹#›</a:t>
+              <a:t>‹nº›</a:t>
             </a:fld>
             <a:endParaRPr lang="pt-BR"/>
           </a:p>
@@ -1801,7 +1821,7 @@
           <p:cNvPr id="2" name="Título 1">
             <a:extLst>
               <a:ext uri="{FF2B5EF4-FFF2-40B4-BE49-F238E27FC236}">
-                <a16:creationId xmlns:a16="http://schemas.microsoft.com/office/drawing/2014/main" id="{9036C49F-3E68-4175-81BA-3C3FEE44308A}"/>
+                <a16:creationId xmlns:a16="http://schemas.microsoft.com/office/drawing/2014/main" xmlns="" id="{9036C49F-3E68-4175-81BA-3C3FEE44308A}"/>
               </a:ext>
             </a:extLst>
           </p:cNvPr>
@@ -1829,7 +1849,7 @@
           <p:cNvPr id="3" name="Espaço Reservado para Texto Vertical 2">
             <a:extLst>
               <a:ext uri="{FF2B5EF4-FFF2-40B4-BE49-F238E27FC236}">
-                <a16:creationId xmlns:a16="http://schemas.microsoft.com/office/drawing/2014/main" id="{426FA736-3DD3-4D4E-B57B-BBE1D8F7D424}"/>
+                <a16:creationId xmlns:a16="http://schemas.microsoft.com/office/drawing/2014/main" xmlns="" id="{426FA736-3DD3-4D4E-B57B-BBE1D8F7D424}"/>
               </a:ext>
             </a:extLst>
           </p:cNvPr>
@@ -1886,7 +1906,7 @@
           <p:cNvPr id="4" name="Espaço Reservado para Data 3">
             <a:extLst>
               <a:ext uri="{FF2B5EF4-FFF2-40B4-BE49-F238E27FC236}">
-                <a16:creationId xmlns:a16="http://schemas.microsoft.com/office/drawing/2014/main" id="{99E8855C-D8FD-48F6-B14E-861E0DE4D915}"/>
+                <a16:creationId xmlns:a16="http://schemas.microsoft.com/office/drawing/2014/main" xmlns="" id="{99E8855C-D8FD-48F6-B14E-861E0DE4D915}"/>
               </a:ext>
             </a:extLst>
           </p:cNvPr>
@@ -1915,7 +1935,7 @@
           <p:cNvPr id="5" name="Espaço Reservado para Rodapé 4">
             <a:extLst>
               <a:ext uri="{FF2B5EF4-FFF2-40B4-BE49-F238E27FC236}">
-                <a16:creationId xmlns:a16="http://schemas.microsoft.com/office/drawing/2014/main" id="{97C0BB88-2F21-42A5-ACFF-83DA47F2D340}"/>
+                <a16:creationId xmlns:a16="http://schemas.microsoft.com/office/drawing/2014/main" xmlns="" id="{97C0BB88-2F21-42A5-ACFF-83DA47F2D340}"/>
               </a:ext>
             </a:extLst>
           </p:cNvPr>
@@ -1940,7 +1960,7 @@
           <p:cNvPr id="6" name="Espaço Reservado para Número de Slide 5">
             <a:extLst>
               <a:ext uri="{FF2B5EF4-FFF2-40B4-BE49-F238E27FC236}">
-                <a16:creationId xmlns:a16="http://schemas.microsoft.com/office/drawing/2014/main" id="{6CB462B3-1F22-4C05-B4B8-7A279FB7D5E9}"/>
+                <a16:creationId xmlns:a16="http://schemas.microsoft.com/office/drawing/2014/main" xmlns="" id="{6CB462B3-1F22-4C05-B4B8-7A279FB7D5E9}"/>
               </a:ext>
             </a:extLst>
           </p:cNvPr>
@@ -1958,7 +1978,7 @@
           <a:p>
             <a:fld id="{1A7E88B7-70CE-4035-AE73-13FA6FB985D4}" type="slidenum">
               <a:rPr lang="pt-BR" smtClean="0"/>
-              <a:t>‹#›</a:t>
+              <a:t>‹nº›</a:t>
             </a:fld>
             <a:endParaRPr lang="pt-BR"/>
           </a:p>
@@ -1999,7 +2019,7 @@
           <p:cNvPr id="2" name="Título Vertical 1">
             <a:extLst>
               <a:ext uri="{FF2B5EF4-FFF2-40B4-BE49-F238E27FC236}">
-                <a16:creationId xmlns:a16="http://schemas.microsoft.com/office/drawing/2014/main" id="{EAEAB728-701C-4207-A9D5-23FF45C60502}"/>
+                <a16:creationId xmlns:a16="http://schemas.microsoft.com/office/drawing/2014/main" xmlns="" id="{EAEAB728-701C-4207-A9D5-23FF45C60502}"/>
               </a:ext>
             </a:extLst>
           </p:cNvPr>
@@ -2032,7 +2052,7 @@
           <p:cNvPr id="3" name="Espaço Reservado para Texto Vertical 2">
             <a:extLst>
               <a:ext uri="{FF2B5EF4-FFF2-40B4-BE49-F238E27FC236}">
-                <a16:creationId xmlns:a16="http://schemas.microsoft.com/office/drawing/2014/main" id="{BA8C8CCF-7823-480A-9A19-0F664DD17E3B}"/>
+                <a16:creationId xmlns:a16="http://schemas.microsoft.com/office/drawing/2014/main" xmlns="" id="{BA8C8CCF-7823-480A-9A19-0F664DD17E3B}"/>
               </a:ext>
             </a:extLst>
           </p:cNvPr>
@@ -2094,7 +2114,7 @@
           <p:cNvPr id="4" name="Espaço Reservado para Data 3">
             <a:extLst>
               <a:ext uri="{FF2B5EF4-FFF2-40B4-BE49-F238E27FC236}">
-                <a16:creationId xmlns:a16="http://schemas.microsoft.com/office/drawing/2014/main" id="{721D5734-7B1F-425D-942F-6EB73344027C}"/>
+                <a16:creationId xmlns:a16="http://schemas.microsoft.com/office/drawing/2014/main" xmlns="" id="{721D5734-7B1F-425D-942F-6EB73344027C}"/>
               </a:ext>
             </a:extLst>
           </p:cNvPr>
@@ -2123,7 +2143,7 @@
           <p:cNvPr id="5" name="Espaço Reservado para Rodapé 4">
             <a:extLst>
               <a:ext uri="{FF2B5EF4-FFF2-40B4-BE49-F238E27FC236}">
-                <a16:creationId xmlns:a16="http://schemas.microsoft.com/office/drawing/2014/main" id="{1E1AAEAC-F08D-45FE-89EC-B1B349A868C9}"/>
+                <a16:creationId xmlns:a16="http://schemas.microsoft.com/office/drawing/2014/main" xmlns="" id="{1E1AAEAC-F08D-45FE-89EC-B1B349A868C9}"/>
               </a:ext>
             </a:extLst>
           </p:cNvPr>
@@ -2148,7 +2168,7 @@
           <p:cNvPr id="6" name="Espaço Reservado para Número de Slide 5">
             <a:extLst>
               <a:ext uri="{FF2B5EF4-FFF2-40B4-BE49-F238E27FC236}">
-                <a16:creationId xmlns:a16="http://schemas.microsoft.com/office/drawing/2014/main" id="{BAA44493-9911-47B2-87A6-C2141A972BC8}"/>
+                <a16:creationId xmlns:a16="http://schemas.microsoft.com/office/drawing/2014/main" xmlns="" id="{BAA44493-9911-47B2-87A6-C2141A972BC8}"/>
               </a:ext>
             </a:extLst>
           </p:cNvPr>
@@ -2166,7 +2186,7 @@
           <a:p>
             <a:fld id="{1A7E88B7-70CE-4035-AE73-13FA6FB985D4}" type="slidenum">
               <a:rPr lang="pt-BR" smtClean="0"/>
-              <a:t>‹#›</a:t>
+              <a:t>‹nº›</a:t>
             </a:fld>
             <a:endParaRPr lang="pt-BR"/>
           </a:p>
@@ -2207,7 +2227,7 @@
           <p:cNvPr id="2" name="Título 1">
             <a:extLst>
               <a:ext uri="{FF2B5EF4-FFF2-40B4-BE49-F238E27FC236}">
-                <a16:creationId xmlns:a16="http://schemas.microsoft.com/office/drawing/2014/main" id="{71BD44A5-8F21-4626-A01D-48A1C874B1D5}"/>
+                <a16:creationId xmlns:a16="http://schemas.microsoft.com/office/drawing/2014/main" xmlns="" id="{71BD44A5-8F21-4626-A01D-48A1C874B1D5}"/>
               </a:ext>
             </a:extLst>
           </p:cNvPr>
@@ -2235,7 +2255,7 @@
           <p:cNvPr id="3" name="Espaço Reservado para Conteúdo 2">
             <a:extLst>
               <a:ext uri="{FF2B5EF4-FFF2-40B4-BE49-F238E27FC236}">
-                <a16:creationId xmlns:a16="http://schemas.microsoft.com/office/drawing/2014/main" id="{B79E8085-65A9-48AA-951D-71D978BFF4ED}"/>
+                <a16:creationId xmlns:a16="http://schemas.microsoft.com/office/drawing/2014/main" xmlns="" id="{B79E8085-65A9-48AA-951D-71D978BFF4ED}"/>
               </a:ext>
             </a:extLst>
           </p:cNvPr>
@@ -2292,7 +2312,7 @@
           <p:cNvPr id="4" name="Espaço Reservado para Data 3">
             <a:extLst>
               <a:ext uri="{FF2B5EF4-FFF2-40B4-BE49-F238E27FC236}">
-                <a16:creationId xmlns:a16="http://schemas.microsoft.com/office/drawing/2014/main" id="{F05BE1AF-51EA-425D-B188-DE7BD675009F}"/>
+                <a16:creationId xmlns:a16="http://schemas.microsoft.com/office/drawing/2014/main" xmlns="" id="{F05BE1AF-51EA-425D-B188-DE7BD675009F}"/>
               </a:ext>
             </a:extLst>
           </p:cNvPr>
@@ -2321,7 +2341,7 @@
           <p:cNvPr id="5" name="Espaço Reservado para Rodapé 4">
             <a:extLst>
               <a:ext uri="{FF2B5EF4-FFF2-40B4-BE49-F238E27FC236}">
-                <a16:creationId xmlns:a16="http://schemas.microsoft.com/office/drawing/2014/main" id="{121BE632-29CF-4CB9-B365-C9EF38F89BE6}"/>
+                <a16:creationId xmlns:a16="http://schemas.microsoft.com/office/drawing/2014/main" xmlns="" id="{121BE632-29CF-4CB9-B365-C9EF38F89BE6}"/>
               </a:ext>
             </a:extLst>
           </p:cNvPr>
@@ -2346,7 +2366,7 @@
           <p:cNvPr id="6" name="Espaço Reservado para Número de Slide 5">
             <a:extLst>
               <a:ext uri="{FF2B5EF4-FFF2-40B4-BE49-F238E27FC236}">
-                <a16:creationId xmlns:a16="http://schemas.microsoft.com/office/drawing/2014/main" id="{60CF3DD1-9AEC-4A57-B461-4E4DD86FAC18}"/>
+                <a16:creationId xmlns:a16="http://schemas.microsoft.com/office/drawing/2014/main" xmlns="" id="{60CF3DD1-9AEC-4A57-B461-4E4DD86FAC18}"/>
               </a:ext>
             </a:extLst>
           </p:cNvPr>
@@ -2364,7 +2384,7 @@
           <a:p>
             <a:fld id="{1A7E88B7-70CE-4035-AE73-13FA6FB985D4}" type="slidenum">
               <a:rPr lang="pt-BR" smtClean="0"/>
-              <a:t>‹#›</a:t>
+              <a:t>‹nº›</a:t>
             </a:fld>
             <a:endParaRPr lang="pt-BR"/>
           </a:p>
@@ -2405,7 +2425,7 @@
           <p:cNvPr id="2" name="Título 1">
             <a:extLst>
               <a:ext uri="{FF2B5EF4-FFF2-40B4-BE49-F238E27FC236}">
-                <a16:creationId xmlns:a16="http://schemas.microsoft.com/office/drawing/2014/main" id="{34AB2FF0-A4D7-4E28-991D-FF26140D5988}"/>
+                <a16:creationId xmlns:a16="http://schemas.microsoft.com/office/drawing/2014/main" xmlns="" id="{34AB2FF0-A4D7-4E28-991D-FF26140D5988}"/>
               </a:ext>
             </a:extLst>
           </p:cNvPr>
@@ -2442,7 +2462,7 @@
           <p:cNvPr id="3" name="Espaço Reservado para Texto 2">
             <a:extLst>
               <a:ext uri="{FF2B5EF4-FFF2-40B4-BE49-F238E27FC236}">
-                <a16:creationId xmlns:a16="http://schemas.microsoft.com/office/drawing/2014/main" id="{E2AC45B0-4145-40DB-8E61-105461170604}"/>
+                <a16:creationId xmlns:a16="http://schemas.microsoft.com/office/drawing/2014/main" xmlns="" id="{E2AC45B0-4145-40DB-8E61-105461170604}"/>
               </a:ext>
             </a:extLst>
           </p:cNvPr>
@@ -2567,7 +2587,7 @@
           <p:cNvPr id="4" name="Espaço Reservado para Data 3">
             <a:extLst>
               <a:ext uri="{FF2B5EF4-FFF2-40B4-BE49-F238E27FC236}">
-                <a16:creationId xmlns:a16="http://schemas.microsoft.com/office/drawing/2014/main" id="{50F1D3FB-740A-4EBA-A309-2CE71D12ECFB}"/>
+                <a16:creationId xmlns:a16="http://schemas.microsoft.com/office/drawing/2014/main" xmlns="" id="{50F1D3FB-740A-4EBA-A309-2CE71D12ECFB}"/>
               </a:ext>
             </a:extLst>
           </p:cNvPr>
@@ -2596,7 +2616,7 @@
           <p:cNvPr id="5" name="Espaço Reservado para Rodapé 4">
             <a:extLst>
               <a:ext uri="{FF2B5EF4-FFF2-40B4-BE49-F238E27FC236}">
-                <a16:creationId xmlns:a16="http://schemas.microsoft.com/office/drawing/2014/main" id="{BDCAB18F-8715-4465-A940-F9C193A2ACE9}"/>
+                <a16:creationId xmlns:a16="http://schemas.microsoft.com/office/drawing/2014/main" xmlns="" id="{BDCAB18F-8715-4465-A940-F9C193A2ACE9}"/>
               </a:ext>
             </a:extLst>
           </p:cNvPr>
@@ -2621,7 +2641,7 @@
           <p:cNvPr id="6" name="Espaço Reservado para Número de Slide 5">
             <a:extLst>
               <a:ext uri="{FF2B5EF4-FFF2-40B4-BE49-F238E27FC236}">
-                <a16:creationId xmlns:a16="http://schemas.microsoft.com/office/drawing/2014/main" id="{353466C6-8248-429F-8056-FF040BF509EB}"/>
+                <a16:creationId xmlns:a16="http://schemas.microsoft.com/office/drawing/2014/main" xmlns="" id="{353466C6-8248-429F-8056-FF040BF509EB}"/>
               </a:ext>
             </a:extLst>
           </p:cNvPr>
@@ -2639,7 +2659,7 @@
           <a:p>
             <a:fld id="{1A7E88B7-70CE-4035-AE73-13FA6FB985D4}" type="slidenum">
               <a:rPr lang="pt-BR" smtClean="0"/>
-              <a:t>‹#›</a:t>
+              <a:t>‹nº›</a:t>
             </a:fld>
             <a:endParaRPr lang="pt-BR"/>
           </a:p>
@@ -2680,7 +2700,7 @@
           <p:cNvPr id="2" name="Título 1">
             <a:extLst>
               <a:ext uri="{FF2B5EF4-FFF2-40B4-BE49-F238E27FC236}">
-                <a16:creationId xmlns:a16="http://schemas.microsoft.com/office/drawing/2014/main" id="{BC7BB9F0-F14B-4A91-B2B7-35BC47FE4DE7}"/>
+                <a16:creationId xmlns:a16="http://schemas.microsoft.com/office/drawing/2014/main" xmlns="" id="{BC7BB9F0-F14B-4A91-B2B7-35BC47FE4DE7}"/>
               </a:ext>
             </a:extLst>
           </p:cNvPr>
@@ -2708,7 +2728,7 @@
           <p:cNvPr id="3" name="Espaço Reservado para Conteúdo 2">
             <a:extLst>
               <a:ext uri="{FF2B5EF4-FFF2-40B4-BE49-F238E27FC236}">
-                <a16:creationId xmlns:a16="http://schemas.microsoft.com/office/drawing/2014/main" id="{EC1FC1C4-73DA-47A6-8496-B0B457F7D39A}"/>
+                <a16:creationId xmlns:a16="http://schemas.microsoft.com/office/drawing/2014/main" xmlns="" id="{EC1FC1C4-73DA-47A6-8496-B0B457F7D39A}"/>
               </a:ext>
             </a:extLst>
           </p:cNvPr>
@@ -2770,7 +2790,7 @@
           <p:cNvPr id="4" name="Espaço Reservado para Conteúdo 3">
             <a:extLst>
               <a:ext uri="{FF2B5EF4-FFF2-40B4-BE49-F238E27FC236}">
-                <a16:creationId xmlns:a16="http://schemas.microsoft.com/office/drawing/2014/main" id="{E92F06A8-A449-4D92-9912-76873E529B38}"/>
+                <a16:creationId xmlns:a16="http://schemas.microsoft.com/office/drawing/2014/main" xmlns="" id="{E92F06A8-A449-4D92-9912-76873E529B38}"/>
               </a:ext>
             </a:extLst>
           </p:cNvPr>
@@ -2832,7 +2852,7 @@
           <p:cNvPr id="5" name="Espaço Reservado para Data 4">
             <a:extLst>
               <a:ext uri="{FF2B5EF4-FFF2-40B4-BE49-F238E27FC236}">
-                <a16:creationId xmlns:a16="http://schemas.microsoft.com/office/drawing/2014/main" id="{938070A4-BC2F-4D55-BD8D-DEAF11BB9EE9}"/>
+                <a16:creationId xmlns:a16="http://schemas.microsoft.com/office/drawing/2014/main" xmlns="" id="{938070A4-BC2F-4D55-BD8D-DEAF11BB9EE9}"/>
               </a:ext>
             </a:extLst>
           </p:cNvPr>
@@ -2861,7 +2881,7 @@
           <p:cNvPr id="6" name="Espaço Reservado para Rodapé 5">
             <a:extLst>
               <a:ext uri="{FF2B5EF4-FFF2-40B4-BE49-F238E27FC236}">
-                <a16:creationId xmlns:a16="http://schemas.microsoft.com/office/drawing/2014/main" id="{45CC2DB8-844A-465F-BA9A-7734C80C7F43}"/>
+                <a16:creationId xmlns:a16="http://schemas.microsoft.com/office/drawing/2014/main" xmlns="" id="{45CC2DB8-844A-465F-BA9A-7734C80C7F43}"/>
               </a:ext>
             </a:extLst>
           </p:cNvPr>
@@ -2886,7 +2906,7 @@
           <p:cNvPr id="7" name="Espaço Reservado para Número de Slide 6">
             <a:extLst>
               <a:ext uri="{FF2B5EF4-FFF2-40B4-BE49-F238E27FC236}">
-                <a16:creationId xmlns:a16="http://schemas.microsoft.com/office/drawing/2014/main" id="{4CC606A8-097B-4040-94E0-CD8C88280D8F}"/>
+                <a16:creationId xmlns:a16="http://schemas.microsoft.com/office/drawing/2014/main" xmlns="" id="{4CC606A8-097B-4040-94E0-CD8C88280D8F}"/>
               </a:ext>
             </a:extLst>
           </p:cNvPr>
@@ -2904,7 +2924,7 @@
           <a:p>
             <a:fld id="{1A7E88B7-70CE-4035-AE73-13FA6FB985D4}" type="slidenum">
               <a:rPr lang="pt-BR" smtClean="0"/>
-              <a:t>‹#›</a:t>
+              <a:t>‹nº›</a:t>
             </a:fld>
             <a:endParaRPr lang="pt-BR"/>
           </a:p>
@@ -2945,7 +2965,7 @@
           <p:cNvPr id="2" name="Título 1">
             <a:extLst>
               <a:ext uri="{FF2B5EF4-FFF2-40B4-BE49-F238E27FC236}">
-                <a16:creationId xmlns:a16="http://schemas.microsoft.com/office/drawing/2014/main" id="{76D66686-0143-4CB6-8C09-BA326F1E7ACA}"/>
+                <a16:creationId xmlns:a16="http://schemas.microsoft.com/office/drawing/2014/main" xmlns="" id="{76D66686-0143-4CB6-8C09-BA326F1E7ACA}"/>
               </a:ext>
             </a:extLst>
           </p:cNvPr>
@@ -2978,7 +2998,7 @@
           <p:cNvPr id="3" name="Espaço Reservado para Texto 2">
             <a:extLst>
               <a:ext uri="{FF2B5EF4-FFF2-40B4-BE49-F238E27FC236}">
-                <a16:creationId xmlns:a16="http://schemas.microsoft.com/office/drawing/2014/main" id="{0227AB85-F59E-4BCE-B846-4FA0992C2F23}"/>
+                <a16:creationId xmlns:a16="http://schemas.microsoft.com/office/drawing/2014/main" xmlns="" id="{0227AB85-F59E-4BCE-B846-4FA0992C2F23}"/>
               </a:ext>
             </a:extLst>
           </p:cNvPr>
@@ -3049,7 +3069,7 @@
           <p:cNvPr id="4" name="Espaço Reservado para Conteúdo 3">
             <a:extLst>
               <a:ext uri="{FF2B5EF4-FFF2-40B4-BE49-F238E27FC236}">
-                <a16:creationId xmlns:a16="http://schemas.microsoft.com/office/drawing/2014/main" id="{3373456C-7319-4D0A-827D-D29F6B083F5D}"/>
+                <a16:creationId xmlns:a16="http://schemas.microsoft.com/office/drawing/2014/main" xmlns="" id="{3373456C-7319-4D0A-827D-D29F6B083F5D}"/>
               </a:ext>
             </a:extLst>
           </p:cNvPr>
@@ -3111,7 +3131,7 @@
           <p:cNvPr id="5" name="Espaço Reservado para Texto 4">
             <a:extLst>
               <a:ext uri="{FF2B5EF4-FFF2-40B4-BE49-F238E27FC236}">
-                <a16:creationId xmlns:a16="http://schemas.microsoft.com/office/drawing/2014/main" id="{4CD109D0-2E83-4262-8029-A871CEC47406}"/>
+                <a16:creationId xmlns:a16="http://schemas.microsoft.com/office/drawing/2014/main" xmlns="" id="{4CD109D0-2E83-4262-8029-A871CEC47406}"/>
               </a:ext>
             </a:extLst>
           </p:cNvPr>
@@ -3182,7 +3202,7 @@
           <p:cNvPr id="6" name="Espaço Reservado para Conteúdo 5">
             <a:extLst>
               <a:ext uri="{FF2B5EF4-FFF2-40B4-BE49-F238E27FC236}">
-                <a16:creationId xmlns:a16="http://schemas.microsoft.com/office/drawing/2014/main" id="{AD706E3A-CFBB-4A6C-A65F-D0360A9E74FE}"/>
+                <a16:creationId xmlns:a16="http://schemas.microsoft.com/office/drawing/2014/main" xmlns="" id="{AD706E3A-CFBB-4A6C-A65F-D0360A9E74FE}"/>
               </a:ext>
             </a:extLst>
           </p:cNvPr>
@@ -3244,7 +3264,7 @@
           <p:cNvPr id="7" name="Espaço Reservado para Data 6">
             <a:extLst>
               <a:ext uri="{FF2B5EF4-FFF2-40B4-BE49-F238E27FC236}">
-                <a16:creationId xmlns:a16="http://schemas.microsoft.com/office/drawing/2014/main" id="{4172C0E5-5AF0-4805-BB51-443733CD2BD5}"/>
+                <a16:creationId xmlns:a16="http://schemas.microsoft.com/office/drawing/2014/main" xmlns="" id="{4172C0E5-5AF0-4805-BB51-443733CD2BD5}"/>
               </a:ext>
             </a:extLst>
           </p:cNvPr>
@@ -3273,7 +3293,7 @@
           <p:cNvPr id="8" name="Espaço Reservado para Rodapé 7">
             <a:extLst>
               <a:ext uri="{FF2B5EF4-FFF2-40B4-BE49-F238E27FC236}">
-                <a16:creationId xmlns:a16="http://schemas.microsoft.com/office/drawing/2014/main" id="{0E801648-156F-497E-99CF-797DF48051E1}"/>
+                <a16:creationId xmlns:a16="http://schemas.microsoft.com/office/drawing/2014/main" xmlns="" id="{0E801648-156F-497E-99CF-797DF48051E1}"/>
               </a:ext>
             </a:extLst>
           </p:cNvPr>
@@ -3298,7 +3318,7 @@
           <p:cNvPr id="9" name="Espaço Reservado para Número de Slide 8">
             <a:extLst>
               <a:ext uri="{FF2B5EF4-FFF2-40B4-BE49-F238E27FC236}">
-                <a16:creationId xmlns:a16="http://schemas.microsoft.com/office/drawing/2014/main" id="{EEE23D32-80E7-4796-A137-66BF842E4B53}"/>
+                <a16:creationId xmlns:a16="http://schemas.microsoft.com/office/drawing/2014/main" xmlns="" id="{EEE23D32-80E7-4796-A137-66BF842E4B53}"/>
               </a:ext>
             </a:extLst>
           </p:cNvPr>
@@ -3316,7 +3336,7 @@
           <a:p>
             <a:fld id="{1A7E88B7-70CE-4035-AE73-13FA6FB985D4}" type="slidenum">
               <a:rPr lang="pt-BR" smtClean="0"/>
-              <a:t>‹#›</a:t>
+              <a:t>‹nº›</a:t>
             </a:fld>
             <a:endParaRPr lang="pt-BR"/>
           </a:p>
@@ -3357,7 +3377,7 @@
           <p:cNvPr id="2" name="Título 1">
             <a:extLst>
               <a:ext uri="{FF2B5EF4-FFF2-40B4-BE49-F238E27FC236}">
-                <a16:creationId xmlns:a16="http://schemas.microsoft.com/office/drawing/2014/main" id="{2BCE2379-C78F-47E1-8CFC-B846E7AF148D}"/>
+                <a16:creationId xmlns:a16="http://schemas.microsoft.com/office/drawing/2014/main" xmlns="" id="{2BCE2379-C78F-47E1-8CFC-B846E7AF148D}"/>
               </a:ext>
             </a:extLst>
           </p:cNvPr>
@@ -3385,7 +3405,7 @@
           <p:cNvPr id="3" name="Espaço Reservado para Data 2">
             <a:extLst>
               <a:ext uri="{FF2B5EF4-FFF2-40B4-BE49-F238E27FC236}">
-                <a16:creationId xmlns:a16="http://schemas.microsoft.com/office/drawing/2014/main" id="{342600A9-7F92-4E22-9D94-E4717252A817}"/>
+                <a16:creationId xmlns:a16="http://schemas.microsoft.com/office/drawing/2014/main" xmlns="" id="{342600A9-7F92-4E22-9D94-E4717252A817}"/>
               </a:ext>
             </a:extLst>
           </p:cNvPr>
@@ -3414,7 +3434,7 @@
           <p:cNvPr id="4" name="Espaço Reservado para Rodapé 3">
             <a:extLst>
               <a:ext uri="{FF2B5EF4-FFF2-40B4-BE49-F238E27FC236}">
-                <a16:creationId xmlns:a16="http://schemas.microsoft.com/office/drawing/2014/main" id="{192E6BED-F546-40CC-A2DF-99CBA853654E}"/>
+                <a16:creationId xmlns:a16="http://schemas.microsoft.com/office/drawing/2014/main" xmlns="" id="{192E6BED-F546-40CC-A2DF-99CBA853654E}"/>
               </a:ext>
             </a:extLst>
           </p:cNvPr>
@@ -3439,7 +3459,7 @@
           <p:cNvPr id="5" name="Espaço Reservado para Número de Slide 4">
             <a:extLst>
               <a:ext uri="{FF2B5EF4-FFF2-40B4-BE49-F238E27FC236}">
-                <a16:creationId xmlns:a16="http://schemas.microsoft.com/office/drawing/2014/main" id="{6091CC40-A8C4-4063-80EB-CC5099621678}"/>
+                <a16:creationId xmlns:a16="http://schemas.microsoft.com/office/drawing/2014/main" xmlns="" id="{6091CC40-A8C4-4063-80EB-CC5099621678}"/>
               </a:ext>
             </a:extLst>
           </p:cNvPr>
@@ -3457,7 +3477,7 @@
           <a:p>
             <a:fld id="{1A7E88B7-70CE-4035-AE73-13FA6FB985D4}" type="slidenum">
               <a:rPr lang="pt-BR" smtClean="0"/>
-              <a:t>‹#›</a:t>
+              <a:t>‹nº›</a:t>
             </a:fld>
             <a:endParaRPr lang="pt-BR"/>
           </a:p>
@@ -3498,7 +3518,7 @@
           <p:cNvPr id="2" name="Espaço Reservado para Data 1">
             <a:extLst>
               <a:ext uri="{FF2B5EF4-FFF2-40B4-BE49-F238E27FC236}">
-                <a16:creationId xmlns:a16="http://schemas.microsoft.com/office/drawing/2014/main" id="{DD19515C-212C-4EAE-84A3-8FF4BC844F1B}"/>
+                <a16:creationId xmlns:a16="http://schemas.microsoft.com/office/drawing/2014/main" xmlns="" id="{DD19515C-212C-4EAE-84A3-8FF4BC844F1B}"/>
               </a:ext>
             </a:extLst>
           </p:cNvPr>
@@ -3527,7 +3547,7 @@
           <p:cNvPr id="3" name="Espaço Reservado para Rodapé 2">
             <a:extLst>
               <a:ext uri="{FF2B5EF4-FFF2-40B4-BE49-F238E27FC236}">
-                <a16:creationId xmlns:a16="http://schemas.microsoft.com/office/drawing/2014/main" id="{94D3D120-B3E8-4C96-861D-7A4F12F49B3A}"/>
+                <a16:creationId xmlns:a16="http://schemas.microsoft.com/office/drawing/2014/main" xmlns="" id="{94D3D120-B3E8-4C96-861D-7A4F12F49B3A}"/>
               </a:ext>
             </a:extLst>
           </p:cNvPr>
@@ -3552,7 +3572,7 @@
           <p:cNvPr id="4" name="Espaço Reservado para Número de Slide 3">
             <a:extLst>
               <a:ext uri="{FF2B5EF4-FFF2-40B4-BE49-F238E27FC236}">
-                <a16:creationId xmlns:a16="http://schemas.microsoft.com/office/drawing/2014/main" id="{42E49B68-FA1B-468B-9F17-D5C09243D454}"/>
+                <a16:creationId xmlns:a16="http://schemas.microsoft.com/office/drawing/2014/main" xmlns="" id="{42E49B68-FA1B-468B-9F17-D5C09243D454}"/>
               </a:ext>
             </a:extLst>
           </p:cNvPr>
@@ -3570,7 +3590,7 @@
           <a:p>
             <a:fld id="{1A7E88B7-70CE-4035-AE73-13FA6FB985D4}" type="slidenum">
               <a:rPr lang="pt-BR" smtClean="0"/>
-              <a:t>‹#›</a:t>
+              <a:t>‹nº›</a:t>
             </a:fld>
             <a:endParaRPr lang="pt-BR"/>
           </a:p>
@@ -3611,7 +3631,7 @@
           <p:cNvPr id="2" name="Título 1">
             <a:extLst>
               <a:ext uri="{FF2B5EF4-FFF2-40B4-BE49-F238E27FC236}">
-                <a16:creationId xmlns:a16="http://schemas.microsoft.com/office/drawing/2014/main" id="{1C17BCBE-A897-4319-85EC-D87909C24980}"/>
+                <a16:creationId xmlns:a16="http://schemas.microsoft.com/office/drawing/2014/main" xmlns="" id="{1C17BCBE-A897-4319-85EC-D87909C24980}"/>
               </a:ext>
             </a:extLst>
           </p:cNvPr>
@@ -3648,7 +3668,7 @@
           <p:cNvPr id="3" name="Espaço Reservado para Conteúdo 2">
             <a:extLst>
               <a:ext uri="{FF2B5EF4-FFF2-40B4-BE49-F238E27FC236}">
-                <a16:creationId xmlns:a16="http://schemas.microsoft.com/office/drawing/2014/main" id="{4226F885-0204-4913-868B-4B8B82576F17}"/>
+                <a16:creationId xmlns:a16="http://schemas.microsoft.com/office/drawing/2014/main" xmlns="" id="{4226F885-0204-4913-868B-4B8B82576F17}"/>
               </a:ext>
             </a:extLst>
           </p:cNvPr>
@@ -3738,7 +3758,7 @@
           <p:cNvPr id="4" name="Espaço Reservado para Texto 3">
             <a:extLst>
               <a:ext uri="{FF2B5EF4-FFF2-40B4-BE49-F238E27FC236}">
-                <a16:creationId xmlns:a16="http://schemas.microsoft.com/office/drawing/2014/main" id="{00F9F784-A858-441B-8AB5-697098141751}"/>
+                <a16:creationId xmlns:a16="http://schemas.microsoft.com/office/drawing/2014/main" xmlns="" id="{00F9F784-A858-441B-8AB5-697098141751}"/>
               </a:ext>
             </a:extLst>
           </p:cNvPr>
@@ -3809,7 +3829,7 @@
           <p:cNvPr id="5" name="Espaço Reservado para Data 4">
             <a:extLst>
               <a:ext uri="{FF2B5EF4-FFF2-40B4-BE49-F238E27FC236}">
-                <a16:creationId xmlns:a16="http://schemas.microsoft.com/office/drawing/2014/main" id="{A4DC363A-5000-472E-8B17-02E7DCB8840A}"/>
+                <a16:creationId xmlns:a16="http://schemas.microsoft.com/office/drawing/2014/main" xmlns="" id="{A4DC363A-5000-472E-8B17-02E7DCB8840A}"/>
               </a:ext>
             </a:extLst>
           </p:cNvPr>
@@ -3838,7 +3858,7 @@
           <p:cNvPr id="6" name="Espaço Reservado para Rodapé 5">
             <a:extLst>
               <a:ext uri="{FF2B5EF4-FFF2-40B4-BE49-F238E27FC236}">
-                <a16:creationId xmlns:a16="http://schemas.microsoft.com/office/drawing/2014/main" id="{5548425D-2C21-4C56-BAD4-662978775C28}"/>
+                <a16:creationId xmlns:a16="http://schemas.microsoft.com/office/drawing/2014/main" xmlns="" id="{5548425D-2C21-4C56-BAD4-662978775C28}"/>
               </a:ext>
             </a:extLst>
           </p:cNvPr>
@@ -3863,7 +3883,7 @@
           <p:cNvPr id="7" name="Espaço Reservado para Número de Slide 6">
             <a:extLst>
               <a:ext uri="{FF2B5EF4-FFF2-40B4-BE49-F238E27FC236}">
-                <a16:creationId xmlns:a16="http://schemas.microsoft.com/office/drawing/2014/main" id="{C63E9726-E64C-42B2-AE8A-8C235A956B48}"/>
+                <a16:creationId xmlns:a16="http://schemas.microsoft.com/office/drawing/2014/main" xmlns="" id="{C63E9726-E64C-42B2-AE8A-8C235A956B48}"/>
               </a:ext>
             </a:extLst>
           </p:cNvPr>
@@ -3881,7 +3901,7 @@
           <a:p>
             <a:fld id="{1A7E88B7-70CE-4035-AE73-13FA6FB985D4}" type="slidenum">
               <a:rPr lang="pt-BR" smtClean="0"/>
-              <a:t>‹#›</a:t>
+              <a:t>‹nº›</a:t>
             </a:fld>
             <a:endParaRPr lang="pt-BR"/>
           </a:p>
@@ -3922,7 +3942,7 @@
           <p:cNvPr id="2" name="Título 1">
             <a:extLst>
               <a:ext uri="{FF2B5EF4-FFF2-40B4-BE49-F238E27FC236}">
-                <a16:creationId xmlns:a16="http://schemas.microsoft.com/office/drawing/2014/main" id="{11086A78-3E74-450C-96A6-CA8AC37AF772}"/>
+                <a16:creationId xmlns:a16="http://schemas.microsoft.com/office/drawing/2014/main" xmlns="" id="{11086A78-3E74-450C-96A6-CA8AC37AF772}"/>
               </a:ext>
             </a:extLst>
           </p:cNvPr>
@@ -3959,7 +3979,7 @@
           <p:cNvPr id="3" name="Espaço Reservado para Imagem 2">
             <a:extLst>
               <a:ext uri="{FF2B5EF4-FFF2-40B4-BE49-F238E27FC236}">
-                <a16:creationId xmlns:a16="http://schemas.microsoft.com/office/drawing/2014/main" id="{5F5B7312-975A-4DBC-9B2F-3652ADA006FD}"/>
+                <a16:creationId xmlns:a16="http://schemas.microsoft.com/office/drawing/2014/main" xmlns="" id="{5F5B7312-975A-4DBC-9B2F-3652ADA006FD}"/>
               </a:ext>
             </a:extLst>
           </p:cNvPr>
@@ -4026,7 +4046,7 @@
           <p:cNvPr id="4" name="Espaço Reservado para Texto 3">
             <a:extLst>
               <a:ext uri="{FF2B5EF4-FFF2-40B4-BE49-F238E27FC236}">
-                <a16:creationId xmlns:a16="http://schemas.microsoft.com/office/drawing/2014/main" id="{AAF805F5-1DFF-41C6-944C-7D79FE0D0963}"/>
+                <a16:creationId xmlns:a16="http://schemas.microsoft.com/office/drawing/2014/main" xmlns="" id="{AAF805F5-1DFF-41C6-944C-7D79FE0D0963}"/>
               </a:ext>
             </a:extLst>
           </p:cNvPr>
@@ -4097,7 +4117,7 @@
           <p:cNvPr id="5" name="Espaço Reservado para Data 4">
             <a:extLst>
               <a:ext uri="{FF2B5EF4-FFF2-40B4-BE49-F238E27FC236}">
-                <a16:creationId xmlns:a16="http://schemas.microsoft.com/office/drawing/2014/main" id="{02113D81-8665-4516-BD81-C6A1F254EECD}"/>
+                <a16:creationId xmlns:a16="http://schemas.microsoft.com/office/drawing/2014/main" xmlns="" id="{02113D81-8665-4516-BD81-C6A1F254EECD}"/>
               </a:ext>
             </a:extLst>
           </p:cNvPr>
@@ -4126,7 +4146,7 @@
           <p:cNvPr id="6" name="Espaço Reservado para Rodapé 5">
             <a:extLst>
               <a:ext uri="{FF2B5EF4-FFF2-40B4-BE49-F238E27FC236}">
-                <a16:creationId xmlns:a16="http://schemas.microsoft.com/office/drawing/2014/main" id="{2B00C88B-FF32-40AA-A187-727D96FD7862}"/>
+                <a16:creationId xmlns:a16="http://schemas.microsoft.com/office/drawing/2014/main" xmlns="" id="{2B00C88B-FF32-40AA-A187-727D96FD7862}"/>
               </a:ext>
             </a:extLst>
           </p:cNvPr>
@@ -4151,7 +4171,7 @@
           <p:cNvPr id="7" name="Espaço Reservado para Número de Slide 6">
             <a:extLst>
               <a:ext uri="{FF2B5EF4-FFF2-40B4-BE49-F238E27FC236}">
-                <a16:creationId xmlns:a16="http://schemas.microsoft.com/office/drawing/2014/main" id="{A04D1A2D-69F7-4B8F-A730-BC26DC340BA6}"/>
+                <a16:creationId xmlns:a16="http://schemas.microsoft.com/office/drawing/2014/main" xmlns="" id="{A04D1A2D-69F7-4B8F-A730-BC26DC340BA6}"/>
               </a:ext>
             </a:extLst>
           </p:cNvPr>
@@ -4169,7 +4189,7 @@
           <a:p>
             <a:fld id="{1A7E88B7-70CE-4035-AE73-13FA6FB985D4}" type="slidenum">
               <a:rPr lang="pt-BR" smtClean="0"/>
-              <a:t>‹#›</a:t>
+              <a:t>‹nº›</a:t>
             </a:fld>
             <a:endParaRPr lang="pt-BR"/>
           </a:p>
@@ -4215,7 +4235,7 @@
           <p:cNvPr id="2" name="Espaço Reservado para Título 1">
             <a:extLst>
               <a:ext uri="{FF2B5EF4-FFF2-40B4-BE49-F238E27FC236}">
-                <a16:creationId xmlns:a16="http://schemas.microsoft.com/office/drawing/2014/main" id="{E69A0273-1966-4A1B-9370-4C1CE5036371}"/>
+                <a16:creationId xmlns:a16="http://schemas.microsoft.com/office/drawing/2014/main" xmlns="" id="{E69A0273-1966-4A1B-9370-4C1CE5036371}"/>
               </a:ext>
             </a:extLst>
           </p:cNvPr>
@@ -4253,7 +4273,7 @@
           <p:cNvPr id="3" name="Espaço Reservado para Texto 2">
             <a:extLst>
               <a:ext uri="{FF2B5EF4-FFF2-40B4-BE49-F238E27FC236}">
-                <a16:creationId xmlns:a16="http://schemas.microsoft.com/office/drawing/2014/main" id="{3B9CF87A-0448-49A7-AB25-EBC1D56A40EF}"/>
+                <a16:creationId xmlns:a16="http://schemas.microsoft.com/office/drawing/2014/main" xmlns="" id="{3B9CF87A-0448-49A7-AB25-EBC1D56A40EF}"/>
               </a:ext>
             </a:extLst>
           </p:cNvPr>
@@ -4320,7 +4340,7 @@
           <p:cNvPr id="4" name="Espaço Reservado para Data 3">
             <a:extLst>
               <a:ext uri="{FF2B5EF4-FFF2-40B4-BE49-F238E27FC236}">
-                <a16:creationId xmlns:a16="http://schemas.microsoft.com/office/drawing/2014/main" id="{2EF7B1F2-BB5A-44D0-816D-16AD2C71430E}"/>
+                <a16:creationId xmlns:a16="http://schemas.microsoft.com/office/drawing/2014/main" xmlns="" id="{2EF7B1F2-BB5A-44D0-816D-16AD2C71430E}"/>
               </a:ext>
             </a:extLst>
           </p:cNvPr>
@@ -4367,7 +4387,7 @@
           <p:cNvPr id="5" name="Espaço Reservado para Rodapé 4">
             <a:extLst>
               <a:ext uri="{FF2B5EF4-FFF2-40B4-BE49-F238E27FC236}">
-                <a16:creationId xmlns:a16="http://schemas.microsoft.com/office/drawing/2014/main" id="{C703F94C-2CC8-4DAA-BC35-14FC3E841DCD}"/>
+                <a16:creationId xmlns:a16="http://schemas.microsoft.com/office/drawing/2014/main" xmlns="" id="{C703F94C-2CC8-4DAA-BC35-14FC3E841DCD}"/>
               </a:ext>
             </a:extLst>
           </p:cNvPr>
@@ -4410,7 +4430,7 @@
           <p:cNvPr id="6" name="Espaço Reservado para Número de Slide 5">
             <a:extLst>
               <a:ext uri="{FF2B5EF4-FFF2-40B4-BE49-F238E27FC236}">
-                <a16:creationId xmlns:a16="http://schemas.microsoft.com/office/drawing/2014/main" id="{64051336-7048-457A-8B61-D94291D71648}"/>
+                <a16:creationId xmlns:a16="http://schemas.microsoft.com/office/drawing/2014/main" xmlns="" id="{64051336-7048-457A-8B61-D94291D71648}"/>
               </a:ext>
             </a:extLst>
           </p:cNvPr>
@@ -4446,7 +4466,7 @@
           <a:p>
             <a:fld id="{1A7E88B7-70CE-4035-AE73-13FA6FB985D4}" type="slidenum">
               <a:rPr lang="pt-BR" smtClean="0"/>
-              <a:t>‹#›</a:t>
+              <a:t>‹nº›</a:t>
             </a:fld>
             <a:endParaRPr lang="pt-BR"/>
           </a:p>
@@ -4778,7 +4798,7 @@
           <p:cNvPr id="4" name="CaixaDeTexto 3">
             <a:extLst>
               <a:ext uri="{FF2B5EF4-FFF2-40B4-BE49-F238E27FC236}">
-                <a16:creationId xmlns:a16="http://schemas.microsoft.com/office/drawing/2014/main" id="{430EB894-B7D4-434C-9D1A-A14094D9BEEC}"/>
+                <a16:creationId xmlns:a16="http://schemas.microsoft.com/office/drawing/2014/main" xmlns="" id="{430EB894-B7D4-434C-9D1A-A14094D9BEEC}"/>
               </a:ext>
             </a:extLst>
           </p:cNvPr>
@@ -4822,7 +4842,7 @@
           <p:cNvPr id="1026" name="Picture 2" descr="Logo">
             <a:extLst>
               <a:ext uri="{FF2B5EF4-FFF2-40B4-BE49-F238E27FC236}">
-                <a16:creationId xmlns:a16="http://schemas.microsoft.com/office/drawing/2014/main" id="{3F2642E0-4F6A-4196-8F58-E77D36E9A33F}"/>
+                <a16:creationId xmlns:a16="http://schemas.microsoft.com/office/drawing/2014/main" xmlns="" id="{3F2642E0-4F6A-4196-8F58-E77D36E9A33F}"/>
               </a:ext>
             </a:extLst>
           </p:cNvPr>
@@ -4867,7 +4887,7 @@
           <p:cNvPr id="5122" name="Picture 2" descr="Image result for machine learning">
             <a:extLst>
               <a:ext uri="{FF2B5EF4-FFF2-40B4-BE49-F238E27FC236}">
-                <a16:creationId xmlns:a16="http://schemas.microsoft.com/office/drawing/2014/main" id="{810CE0A2-4102-44A6-A370-175E7896CDCB}"/>
+                <a16:creationId xmlns:a16="http://schemas.microsoft.com/office/drawing/2014/main" xmlns="" id="{810CE0A2-4102-44A6-A370-175E7896CDCB}"/>
               </a:ext>
             </a:extLst>
           </p:cNvPr>
@@ -4912,7 +4932,7 @@
           <p:cNvPr id="7" name="Título 1">
             <a:extLst>
               <a:ext uri="{FF2B5EF4-FFF2-40B4-BE49-F238E27FC236}">
-                <a16:creationId xmlns:a16="http://schemas.microsoft.com/office/drawing/2014/main" id="{32666AC8-2E17-4DB4-B0F5-60C640CCFD2E}"/>
+                <a16:creationId xmlns:a16="http://schemas.microsoft.com/office/drawing/2014/main" xmlns="" id="{32666AC8-2E17-4DB4-B0F5-60C640CCFD2E}"/>
               </a:ext>
             </a:extLst>
           </p:cNvPr>
@@ -4938,6 +4958,10 @@
             <a:r>
               <a:rPr lang="pt-BR" sz="6600" dirty="0"/>
               <a:t>C24 – Inteligência Artificial:</a:t>
+            </a:r>
+            <a:r>
+              <a:rPr lang="pt-BR" sz="7200" dirty="0"/>
+              <a:t/>
             </a:r>
             <a:br>
               <a:rPr lang="pt-BR" sz="7200" dirty="0"/>
@@ -4971,7 +4995,7 @@
         <p:cNvPr id="1" name="">
           <a:extLst>
             <a:ext uri="{FF2B5EF4-FFF2-40B4-BE49-F238E27FC236}">
-              <a16:creationId xmlns:a16="http://schemas.microsoft.com/office/drawing/2014/main" id="{DDB2BBDA-DAF3-B7AC-FB99-7C5B9285F912}"/>
+              <a16:creationId xmlns:a16="http://schemas.microsoft.com/office/drawing/2014/main" xmlns="" id="{DDB2BBDA-DAF3-B7AC-FB99-7C5B9285F912}"/>
             </a:ext>
           </a:extLst>
         </p:cNvPr>
@@ -4991,7 +5015,7 @@
           <p:cNvPr id="2" name="Title 1">
             <a:extLst>
               <a:ext uri="{FF2B5EF4-FFF2-40B4-BE49-F238E27FC236}">
-                <a16:creationId xmlns:a16="http://schemas.microsoft.com/office/drawing/2014/main" id="{A98D36C9-8653-8E41-11D8-585B6AC0D03D}"/>
+                <a16:creationId xmlns:a16="http://schemas.microsoft.com/office/drawing/2014/main" xmlns="" id="{A98D36C9-8653-8E41-11D8-585B6AC0D03D}"/>
               </a:ext>
             </a:extLst>
           </p:cNvPr>
@@ -5026,222 +5050,48 @@
           </a:p>
         </p:txBody>
       </p:sp>
-      <mc:AlternateContent xmlns:mc="http://schemas.openxmlformats.org/markup-compatibility/2006">
-        <mc:Choice xmlns:a14="http://schemas.microsoft.com/office/drawing/2010/main" Requires="a14">
-          <p:sp>
-            <p:nvSpPr>
-              <p:cNvPr id="3" name="Content Placeholder 2">
-                <a:extLst>
-                  <a:ext uri="{FF2B5EF4-FFF2-40B4-BE49-F238E27FC236}">
-                    <a16:creationId xmlns:a16="http://schemas.microsoft.com/office/drawing/2014/main" id="{981046E0-93D4-BF9F-C552-72A01838A8A3}"/>
-                  </a:ext>
-                </a:extLst>
-              </p:cNvPr>
-              <p:cNvSpPr>
-                <a:spLocks noGrp="1"/>
-              </p:cNvSpPr>
-              <p:nvPr>
-                <p:ph idx="1"/>
-              </p:nvPr>
-            </p:nvSpPr>
-            <p:spPr>
-              <a:xfrm>
-                <a:off x="5303968" y="1836510"/>
-                <a:ext cx="6757404" cy="5021489"/>
-              </a:xfrm>
-            </p:spPr>
-            <p:txBody>
-              <a:bodyPr>
-                <a:normAutofit fontScale="92500"/>
-              </a:bodyPr>
-              <a:lstStyle/>
-              <a:p>
-                <a:r>
-                  <a:rPr lang="pt-BR" dirty="0"/>
-                  <a:t>O agente e o ambiente interagem em etapas de tempo discreto: </a:t>
-                </a:r>
-                <a14:m>
-                  <m:oMath xmlns:m="http://schemas.openxmlformats.org/officeDocument/2006/math">
-                    <m:r>
-                      <a:rPr lang="pt-BR" b="0" i="1" smtClean="0">
-                        <a:latin typeface="Cambria Math" panose="02040503050406030204" pitchFamily="18" charset="0"/>
-                      </a:rPr>
-                      <m:t>𝑡</m:t>
-                    </m:r>
-                    <m:r>
-                      <a:rPr lang="pt-BR" b="0" i="1" smtClean="0">
-                        <a:latin typeface="Cambria Math" panose="02040503050406030204" pitchFamily="18" charset="0"/>
-                      </a:rPr>
-                      <m:t>, </m:t>
-                    </m:r>
-                    <m:r>
-                      <a:rPr lang="pt-BR" b="0" i="1" smtClean="0">
-                        <a:latin typeface="Cambria Math" panose="02040503050406030204" pitchFamily="18" charset="0"/>
-                      </a:rPr>
-                      <m:t>𝑡</m:t>
-                    </m:r>
-                    <m:r>
-                      <a:rPr lang="pt-BR" b="0" i="1" smtClean="0">
-                        <a:latin typeface="Cambria Math" panose="02040503050406030204" pitchFamily="18" charset="0"/>
-                      </a:rPr>
-                      <m:t>+1, </m:t>
-                    </m:r>
-                    <m:r>
-                      <a:rPr lang="pt-BR" b="0" i="1" smtClean="0">
-                        <a:latin typeface="Cambria Math" panose="02040503050406030204" pitchFamily="18" charset="0"/>
-                      </a:rPr>
-                      <m:t>𝑡</m:t>
-                    </m:r>
-                    <m:r>
-                      <a:rPr lang="pt-BR" b="0" i="1" smtClean="0">
-                        <a:latin typeface="Cambria Math" panose="02040503050406030204" pitchFamily="18" charset="0"/>
-                      </a:rPr>
-                      <m:t>+2, …, </m:t>
-                    </m:r>
-                    <m:r>
-                      <a:rPr lang="pt-BR" b="0" i="1" smtClean="0">
-                        <a:latin typeface="Cambria Math" panose="02040503050406030204" pitchFamily="18" charset="0"/>
-                      </a:rPr>
-                      <m:t>𝑇</m:t>
-                    </m:r>
-                  </m:oMath>
-                </a14:m>
-                <a:r>
-                  <a:rPr lang="pt-BR" dirty="0"/>
-                  <a:t>.</a:t>
-                </a:r>
-              </a:p>
-              <a:p>
-                <a:r>
-                  <a:rPr lang="pt-BR" dirty="0"/>
-                  <a:t>A cada instante t, o agente </a:t>
-                </a:r>
-              </a:p>
-              <a:p>
-                <a:pPr lvl="1"/>
-                <a:r>
-                  <a:rPr lang="pt-BR" dirty="0"/>
-                  <a:t>recebe o estado </a:t>
-                </a:r>
-                <a14:m>
-                  <m:oMath xmlns:m="http://schemas.openxmlformats.org/officeDocument/2006/math">
-                    <m:sSub>
-                      <m:sSubPr>
-                        <m:ctrlPr>
-                          <a:rPr lang="pt-BR" i="1" smtClean="0">
-                            <a:latin typeface="Cambria Math" panose="02040503050406030204" pitchFamily="18" charset="0"/>
-                          </a:rPr>
-                        </m:ctrlPr>
-                      </m:sSubPr>
-                      <m:e>
-                        <m:r>
-                          <a:rPr lang="pt-BR" b="0" i="1" smtClean="0">
-                            <a:latin typeface="Cambria Math" panose="02040503050406030204" pitchFamily="18" charset="0"/>
-                          </a:rPr>
-                          <m:t>𝑠</m:t>
-                        </m:r>
-                      </m:e>
-                      <m:sub>
-                        <m:r>
-                          <a:rPr lang="pt-BR" b="0" i="1" smtClean="0">
-                            <a:latin typeface="Cambria Math" panose="02040503050406030204" pitchFamily="18" charset="0"/>
-                          </a:rPr>
-                          <m:t>𝑡</m:t>
-                        </m:r>
-                      </m:sub>
-                    </m:sSub>
-                  </m:oMath>
-                </a14:m>
-                <a:endParaRPr lang="pt-BR" dirty="0"/>
-              </a:p>
-              <a:p>
-                <a:pPr lvl="1"/>
-                <a:endParaRPr lang="pt-BR" dirty="0"/>
-              </a:p>
-              <a:p>
-                <a:pPr lvl="1"/>
-                <a:r>
-                  <a:rPr lang="pt-BR" dirty="0"/>
-                  <a:t>alguma representação do estado do ambiente, </a:t>
-                </a:r>
-                <a:r>
-                  <a:rPr lang="pt-BR" dirty="0" err="1"/>
-                  <a:t>St</a:t>
-                </a:r>
-                <a:r>
-                  <a:rPr lang="pt-BR" dirty="0"/>
-                  <a:t> ∈ S, onde S é o conjunto de estados possíveis, e com base nisso seleciona uma ação, At ∈ A(</a:t>
-                </a:r>
-                <a:r>
-                  <a:rPr lang="pt-BR" dirty="0" err="1"/>
-                  <a:t>St</a:t>
-                </a:r>
-                <a:r>
-                  <a:rPr lang="pt-BR" dirty="0"/>
-                  <a:t>), onde A(</a:t>
-                </a:r>
-                <a:r>
-                  <a:rPr lang="pt-BR" dirty="0" err="1"/>
-                  <a:t>St</a:t>
-                </a:r>
-                <a:r>
-                  <a:rPr lang="pt-BR" dirty="0"/>
-                  <a:t>) é o conjunto de ações disponíveis no estado St. Um instante depois, em parte como consequência de sua ação, o agente recebe uma recompensa numérica, Rt+1 ∈ R ⊂ R, e se encontra em um novo estado, St+1. A Figura 3.1 ilustra a interação agente-ambiente.</a:t>
-                </a:r>
-              </a:p>
-            </p:txBody>
-          </p:sp>
-        </mc:Choice>
-        <mc:Fallback>
-          <p:sp>
-            <p:nvSpPr>
-              <p:cNvPr id="3" name="Content Placeholder 2">
-                <a:extLst>
-                  <a:ext uri="{FF2B5EF4-FFF2-40B4-BE49-F238E27FC236}">
-                    <a16:creationId xmlns:a16="http://schemas.microsoft.com/office/drawing/2014/main" id="{981046E0-93D4-BF9F-C552-72A01838A8A3}"/>
-                  </a:ext>
-                </a:extLst>
-              </p:cNvPr>
-              <p:cNvSpPr>
-                <a:spLocks noGrp="1" noRot="1" noChangeAspect="1" noMove="1" noResize="1" noEditPoints="1" noAdjustHandles="1" noChangeArrowheads="1" noChangeShapeType="1" noTextEdit="1"/>
-              </p:cNvSpPr>
-              <p:nvPr>
-                <p:ph idx="1"/>
-              </p:nvPr>
-            </p:nvSpPr>
-            <p:spPr>
-              <a:xfrm>
-                <a:off x="5303968" y="1836510"/>
-                <a:ext cx="6757404" cy="5021489"/>
-              </a:xfrm>
-              <a:blipFill>
-                <a:blip r:embed="rId3"/>
-                <a:stretch>
-                  <a:fillRect l="-1353" t="-1820" r="-541"/>
-                </a:stretch>
-              </a:blipFill>
-            </p:spPr>
-            <p:txBody>
-              <a:bodyPr/>
-              <a:lstStyle/>
-              <a:p>
-                <a:r>
-                  <a:rPr lang="en-US">
-                    <a:noFill/>
-                  </a:rPr>
-                  <a:t> </a:t>
-                </a:r>
-              </a:p>
-            </p:txBody>
-          </p:sp>
-        </mc:Fallback>
-      </mc:AlternateContent>
+      <p:sp>
+        <p:nvSpPr>
+          <p:cNvPr id="3" name="Content Placeholder 2">
+            <a:extLst>
+              <a:ext uri="{FF2B5EF4-FFF2-40B4-BE49-F238E27FC236}">
+                <a16:creationId xmlns:a16="http://schemas.microsoft.com/office/drawing/2014/main" xmlns:a14="http://schemas.microsoft.com/office/drawing/2010/main" xmlns:mc="http://schemas.openxmlformats.org/markup-compatibility/2006" xmlns="" id="{981046E0-93D4-BF9F-C552-72A01838A8A3}"/>
+              </a:ext>
+            </a:extLst>
+          </p:cNvPr>
+          <p:cNvSpPr>
+            <a:spLocks noGrp="1"/>
+          </p:cNvSpPr>
+          <p:nvPr>
+            <p:ph idx="1"/>
+          </p:nvPr>
+        </p:nvSpPr>
+        <p:spPr>
+          <a:xfrm>
+            <a:off x="838200" y="1836510"/>
+            <a:ext cx="11353800" cy="5021489"/>
+          </a:xfrm>
+        </p:spPr>
+        <p:txBody>
+          <a:bodyPr>
+            <a:normAutofit/>
+          </a:bodyPr>
+          <a:lstStyle/>
+          <a:p>
+            <a:r>
+              <a:rPr lang="pt-BR" dirty="0"/>
+              <a:t> O objetivo do agente é maximizar a soma total de recompensas ao longo do tempo, não apenas a recompensa imediata.</a:t>
+            </a:r>
+            <a:endParaRPr lang="pt-BR" dirty="0"/>
+          </a:p>
+        </p:txBody>
+      </p:sp>
       <p:pic>
         <p:nvPicPr>
           <p:cNvPr id="61" name="Picture 60">
             <a:extLst>
               <a:ext uri="{FF2B5EF4-FFF2-40B4-BE49-F238E27FC236}">
-                <a16:creationId xmlns:a16="http://schemas.microsoft.com/office/drawing/2014/main" id="{22F895FA-1424-E50C-97F4-4F0BE0413C2F}"/>
+                <a16:creationId xmlns:a16="http://schemas.microsoft.com/office/drawing/2014/main" xmlns="" id="{22F895FA-1424-E50C-97F4-4F0BE0413C2F}"/>
               </a:ext>
             </a:extLst>
           </p:cNvPr>
@@ -5251,7 +5101,7 @@
           <p:nvPr/>
         </p:nvPicPr>
         <p:blipFill>
-          <a:blip r:embed="rId4">
+          <a:blip r:embed="rId3" cstate="print">
             <a:extLst>
               <a:ext uri="{28A0092B-C50C-407E-A947-70E740481C1C}">
                 <a14:useLocalDpi xmlns:a14="http://schemas.microsoft.com/office/drawing/2010/main" val="0"/>
@@ -5264,8 +5114,8 @@
         </p:blipFill>
         <p:spPr>
           <a:xfrm>
-            <a:off x="130629" y="2859764"/>
-            <a:ext cx="5173338" cy="2335899"/>
+            <a:off x="3012071" y="3270663"/>
+            <a:ext cx="6167857" cy="2784950"/>
           </a:xfrm>
           <a:prstGeom prst="rect">
             <a:avLst/>
@@ -5275,7 +5125,7 @@
     </p:spTree>
     <p:extLst>
       <p:ext uri="{BB962C8B-B14F-4D97-AF65-F5344CB8AC3E}">
-        <p14:creationId xmlns:p14="http://schemas.microsoft.com/office/powerpoint/2010/main" val="3796655630"/>
+        <p14:creationId xmlns:p14="http://schemas.microsoft.com/office/powerpoint/2010/main" val="395703782"/>
       </p:ext>
     </p:extLst>
   </p:cSld>
@@ -5290,13 +5140,7 @@
   <p:cSld>
     <p:spTree>
       <p:nvGrpSpPr>
-        <p:cNvPr id="1" name="">
-          <a:extLst>
-            <a:ext uri="{FF2B5EF4-FFF2-40B4-BE49-F238E27FC236}">
-              <a16:creationId xmlns:a16="http://schemas.microsoft.com/office/drawing/2014/main" id="{2B0ADE0A-2709-4969-FA9A-1E03D69961E0}"/>
-            </a:ext>
-          </a:extLst>
-        </p:cNvPr>
+        <p:cNvPr id="1" name=""/>
         <p:cNvGrpSpPr/>
         <p:nvPr/>
       </p:nvGrpSpPr>
@@ -5313,7 +5157,7 @@
           <p:cNvPr id="2" name="Title 1">
             <a:extLst>
               <a:ext uri="{FF2B5EF4-FFF2-40B4-BE49-F238E27FC236}">
-                <a16:creationId xmlns:a16="http://schemas.microsoft.com/office/drawing/2014/main" id="{8733AE6F-314D-C94A-A767-C6F5519A7496}"/>
+                <a16:creationId xmlns:a16="http://schemas.microsoft.com/office/drawing/2014/main" xmlns="" id="{874F2722-DA1E-D930-DC99-59F795E3E8B9}"/>
               </a:ext>
             </a:extLst>
           </p:cNvPr>
@@ -5329,22 +5173,7 @@
           <a:bodyPr/>
           <a:lstStyle/>
           <a:p>
-            <a:r>
-              <a:rPr lang="en-US" dirty="0" err="1"/>
-              <a:t>Conceitos</a:t>
-            </a:r>
-            <a:r>
-              <a:rPr lang="en-US" dirty="0"/>
-              <a:t> </a:t>
-            </a:r>
-            <a:r>
-              <a:rPr lang="en-US" dirty="0" err="1"/>
-              <a:t>fundamentais</a:t>
-            </a:r>
-            <a:r>
-              <a:rPr lang="en-US" dirty="0"/>
-              <a:t> de RL</a:t>
-            </a:r>
+            <a:endParaRPr lang="en-US"/>
           </a:p>
         </p:txBody>
       </p:sp>
@@ -5353,7 +5182,7 @@
           <p:cNvPr id="3" name="Content Placeholder 2">
             <a:extLst>
               <a:ext uri="{FF2B5EF4-FFF2-40B4-BE49-F238E27FC236}">
-                <a16:creationId xmlns:a16="http://schemas.microsoft.com/office/drawing/2014/main" id="{C8F7CA75-E443-356F-518F-21B4DDB32C98}"/>
+                <a16:creationId xmlns:a16="http://schemas.microsoft.com/office/drawing/2014/main" xmlns="" id="{97BD2D05-0E48-B94D-DBC7-FBDCBC17C0A5}"/>
               </a:ext>
             </a:extLst>
           </p:cNvPr>
@@ -5364,41 +5193,33 @@
             <p:ph idx="1"/>
           </p:nvPr>
         </p:nvSpPr>
-        <p:spPr>
-          <a:xfrm>
-            <a:off x="838200" y="1836510"/>
-            <a:ext cx="11168743" cy="5021489"/>
-          </a:xfrm>
-        </p:spPr>
+        <p:spPr/>
         <p:txBody>
           <a:bodyPr>
             <a:normAutofit/>
           </a:bodyPr>
           <a:lstStyle/>
           <a:p>
-            <a:pPr marL="0" indent="0">
-              <a:buNone/>
-            </a:pPr>
-            <a:endParaRPr lang="pt-BR" dirty="0"/>
-          </a:p>
-          <a:p>
-            <a:r>
-              <a:rPr lang="pt-BR" dirty="0"/>
-              <a:t>O agente observa o estado, escolhe uma ação, o ambiente muda, e o agente recebe uma recompensa. O objetivo do agente é maximizar a soma total de recompensas ao longo do tempo, não apenas a recompensa imediata.</a:t>
-            </a:r>
-          </a:p>
-          <a:p>
-            <a:endParaRPr lang="en-US" dirty="0"/>
-          </a:p>
-          <a:p>
-            <a:endParaRPr lang="en-US" dirty="0"/>
+            <a:r>
+              <a:rPr lang="pt-BR" sz="5400" b="1" dirty="0">
+                <a:solidFill>
+                  <a:srgbClr val="FF0000"/>
+                </a:solidFill>
+              </a:rPr>
+              <a:t>PAREI AQUI!!!!!!!!!!!!</a:t>
+            </a:r>
+            <a:endParaRPr lang="en-US" sz="5400" b="1" dirty="0">
+              <a:solidFill>
+                <a:srgbClr val="FF0000"/>
+              </a:solidFill>
+            </a:endParaRPr>
           </a:p>
         </p:txBody>
       </p:sp>
     </p:spTree>
     <p:extLst>
       <p:ext uri="{BB962C8B-B14F-4D97-AF65-F5344CB8AC3E}">
-        <p14:creationId xmlns:p14="http://schemas.microsoft.com/office/powerpoint/2010/main" val="1250317349"/>
+        <p14:creationId xmlns:p14="http://schemas.microsoft.com/office/powerpoint/2010/main" val="3079050531"/>
       </p:ext>
     </p:extLst>
   </p:cSld>
@@ -5430,7 +5251,7 @@
           <p:cNvPr id="2" name="Título 1">
             <a:extLst>
               <a:ext uri="{FF2B5EF4-FFF2-40B4-BE49-F238E27FC236}">
-                <a16:creationId xmlns:a16="http://schemas.microsoft.com/office/drawing/2014/main" id="{083FFF02-0FC8-9F0B-AAB0-565FC99EA70D}"/>
+                <a16:creationId xmlns:a16="http://schemas.microsoft.com/office/drawing/2014/main" xmlns="" id="{083FFF02-0FC8-9F0B-AAB0-565FC99EA70D}"/>
               </a:ext>
             </a:extLst>
           </p:cNvPr>
@@ -5458,7 +5279,7 @@
           <p:cNvPr id="3" name="Espaço Reservado para Conteúdo 2">
             <a:extLst>
               <a:ext uri="{FF2B5EF4-FFF2-40B4-BE49-F238E27FC236}">
-                <a16:creationId xmlns:a16="http://schemas.microsoft.com/office/drawing/2014/main" id="{8C5488AE-34B4-EF1D-F674-507FF2FCD122}"/>
+                <a16:creationId xmlns:a16="http://schemas.microsoft.com/office/drawing/2014/main" xmlns="" id="{8C5488AE-34B4-EF1D-F674-507FF2FCD122}"/>
               </a:ext>
             </a:extLst>
           </p:cNvPr>
@@ -5499,7 +5320,7 @@
         <p:cNvPr id="1" name="">
           <a:extLst>
             <a:ext uri="{FF2B5EF4-FFF2-40B4-BE49-F238E27FC236}">
-              <a16:creationId xmlns:a16="http://schemas.microsoft.com/office/drawing/2014/main" id="{E1C9F56A-97FC-7CCD-E5BA-3B5E230AD9AB}"/>
+              <a16:creationId xmlns:a16="http://schemas.microsoft.com/office/drawing/2014/main" xmlns="" id="{E1C9F56A-97FC-7CCD-E5BA-3B5E230AD9AB}"/>
             </a:ext>
           </a:extLst>
         </p:cNvPr>
@@ -5519,7 +5340,7 @@
           <p:cNvPr id="2" name="Título 1">
             <a:extLst>
               <a:ext uri="{FF2B5EF4-FFF2-40B4-BE49-F238E27FC236}">
-                <a16:creationId xmlns:a16="http://schemas.microsoft.com/office/drawing/2014/main" id="{A979DAB9-0612-F0CD-7BB1-AF52B98B3210}"/>
+                <a16:creationId xmlns:a16="http://schemas.microsoft.com/office/drawing/2014/main" xmlns="" id="{A979DAB9-0612-F0CD-7BB1-AF52B98B3210}"/>
               </a:ext>
             </a:extLst>
           </p:cNvPr>
@@ -5547,7 +5368,7 @@
           <p:cNvPr id="3" name="Espaço Reservado para Conteúdo 2">
             <a:extLst>
               <a:ext uri="{FF2B5EF4-FFF2-40B4-BE49-F238E27FC236}">
-                <a16:creationId xmlns:a16="http://schemas.microsoft.com/office/drawing/2014/main" id="{F22F88A5-87D1-340F-853F-8C2ED8F8C877}"/>
+                <a16:creationId xmlns:a16="http://schemas.microsoft.com/office/drawing/2014/main" xmlns="" id="{F22F88A5-87D1-340F-853F-8C2ED8F8C877}"/>
               </a:ext>
             </a:extLst>
           </p:cNvPr>
@@ -5588,7 +5409,7 @@
         <p:cNvPr id="1" name="">
           <a:extLst>
             <a:ext uri="{FF2B5EF4-FFF2-40B4-BE49-F238E27FC236}">
-              <a16:creationId xmlns:a16="http://schemas.microsoft.com/office/drawing/2014/main" id="{B28A9759-CA4F-DA4F-85C2-F6E51DCED2D9}"/>
+              <a16:creationId xmlns:a16="http://schemas.microsoft.com/office/drawing/2014/main" xmlns="" id="{B28A9759-CA4F-DA4F-85C2-F6E51DCED2D9}"/>
             </a:ext>
           </a:extLst>
         </p:cNvPr>
@@ -5608,7 +5429,7 @@
           <p:cNvPr id="2" name="Título 1">
             <a:extLst>
               <a:ext uri="{FF2B5EF4-FFF2-40B4-BE49-F238E27FC236}">
-                <a16:creationId xmlns:a16="http://schemas.microsoft.com/office/drawing/2014/main" id="{072F732D-34CE-6153-324F-D7F6821577F0}"/>
+                <a16:creationId xmlns:a16="http://schemas.microsoft.com/office/drawing/2014/main" xmlns="" id="{072F732D-34CE-6153-324F-D7F6821577F0}"/>
               </a:ext>
             </a:extLst>
           </p:cNvPr>
@@ -5636,7 +5457,7 @@
           <p:cNvPr id="3" name="Espaço Reservado para Conteúdo 2">
             <a:extLst>
               <a:ext uri="{FF2B5EF4-FFF2-40B4-BE49-F238E27FC236}">
-                <a16:creationId xmlns:a16="http://schemas.microsoft.com/office/drawing/2014/main" id="{62A55622-8E11-E5D7-8EAF-7AE2CCAA3321}"/>
+                <a16:creationId xmlns:a16="http://schemas.microsoft.com/office/drawing/2014/main" xmlns="" id="{62A55622-8E11-E5D7-8EAF-7AE2CCAA3321}"/>
               </a:ext>
             </a:extLst>
           </p:cNvPr>
@@ -5691,7 +5512,7 @@
           <p:cNvPr id="2" name="Título 1">
             <a:extLst>
               <a:ext uri="{FF2B5EF4-FFF2-40B4-BE49-F238E27FC236}">
-                <a16:creationId xmlns:a16="http://schemas.microsoft.com/office/drawing/2014/main" id="{B9E502FC-4440-F5DA-F299-69CD15E702AE}"/>
+                <a16:creationId xmlns:a16="http://schemas.microsoft.com/office/drawing/2014/main" xmlns="" id="{B9E502FC-4440-F5DA-F299-69CD15E702AE}"/>
               </a:ext>
             </a:extLst>
           </p:cNvPr>
@@ -5719,7 +5540,7 @@
           <p:cNvPr id="3" name="Espaço Reservado para Conteúdo 2">
             <a:extLst>
               <a:ext uri="{FF2B5EF4-FFF2-40B4-BE49-F238E27FC236}">
-                <a16:creationId xmlns:a16="http://schemas.microsoft.com/office/drawing/2014/main" id="{69359096-6B47-BEA3-55AD-95F90CDC8489}"/>
+                <a16:creationId xmlns:a16="http://schemas.microsoft.com/office/drawing/2014/main" xmlns="" id="{69359096-6B47-BEA3-55AD-95F90CDC8489}"/>
               </a:ext>
             </a:extLst>
           </p:cNvPr>
@@ -5774,7 +5595,7 @@
           <p:cNvPr id="2" name="Título 1">
             <a:extLst>
               <a:ext uri="{FF2B5EF4-FFF2-40B4-BE49-F238E27FC236}">
-                <a16:creationId xmlns:a16="http://schemas.microsoft.com/office/drawing/2014/main" id="{B7EBC8F7-03EF-338A-A90B-280A41AF9688}"/>
+                <a16:creationId xmlns:a16="http://schemas.microsoft.com/office/drawing/2014/main" xmlns="" id="{B7EBC8F7-03EF-338A-A90B-280A41AF9688}"/>
               </a:ext>
             </a:extLst>
           </p:cNvPr>
@@ -5802,7 +5623,7 @@
           <p:cNvPr id="3" name="Espaço Reservado para Conteúdo 2">
             <a:extLst>
               <a:ext uri="{FF2B5EF4-FFF2-40B4-BE49-F238E27FC236}">
-                <a16:creationId xmlns:a16="http://schemas.microsoft.com/office/drawing/2014/main" id="{C525BCE7-C19D-7DDA-016A-E3016C398CBA}"/>
+                <a16:creationId xmlns:a16="http://schemas.microsoft.com/office/drawing/2014/main" xmlns="" id="{C525BCE7-C19D-7DDA-016A-E3016C398CBA}"/>
               </a:ext>
             </a:extLst>
           </p:cNvPr>
@@ -5857,7 +5678,7 @@
           <p:cNvPr id="4" name="Título 1">
             <a:extLst>
               <a:ext uri="{FF2B5EF4-FFF2-40B4-BE49-F238E27FC236}">
-                <a16:creationId xmlns:a16="http://schemas.microsoft.com/office/drawing/2014/main" id="{32666AC8-2E17-4DB4-B0F5-60C640CCFD2E}"/>
+                <a16:creationId xmlns:a16="http://schemas.microsoft.com/office/drawing/2014/main" xmlns="" id="{32666AC8-2E17-4DB4-B0F5-60C640CCFD2E}"/>
               </a:ext>
             </a:extLst>
           </p:cNvPr>
@@ -5943,7 +5764,7 @@
           <p:cNvPr id="2" name="Título 1">
             <a:extLst>
               <a:ext uri="{FF2B5EF4-FFF2-40B4-BE49-F238E27FC236}">
-                <a16:creationId xmlns:a16="http://schemas.microsoft.com/office/drawing/2014/main" id="{3CA32550-8C76-B013-2EC7-989D8C3B19BE}"/>
+                <a16:creationId xmlns:a16="http://schemas.microsoft.com/office/drawing/2014/main" xmlns="" id="{3CA32550-8C76-B013-2EC7-989D8C3B19BE}"/>
               </a:ext>
             </a:extLst>
           </p:cNvPr>
@@ -5971,7 +5792,7 @@
           <p:cNvPr id="3" name="Espaço Reservado para Conteúdo 2">
             <a:extLst>
               <a:ext uri="{FF2B5EF4-FFF2-40B4-BE49-F238E27FC236}">
-                <a16:creationId xmlns:a16="http://schemas.microsoft.com/office/drawing/2014/main" id="{EF043237-7757-7557-B63E-D4EB5152D44B}"/>
+                <a16:creationId xmlns:a16="http://schemas.microsoft.com/office/drawing/2014/main" xmlns="" id="{EF043237-7757-7557-B63E-D4EB5152D44B}"/>
               </a:ext>
             </a:extLst>
           </p:cNvPr>
@@ -6026,7 +5847,7 @@
           <p:cNvPr id="4" name="Título 1">
             <a:extLst>
               <a:ext uri="{FF2B5EF4-FFF2-40B4-BE49-F238E27FC236}">
-                <a16:creationId xmlns:a16="http://schemas.microsoft.com/office/drawing/2014/main" id="{32666AC8-2E17-4DB4-B0F5-60C640CCFD2E}"/>
+                <a16:creationId xmlns:a16="http://schemas.microsoft.com/office/drawing/2014/main" xmlns="" id="{32666AC8-2E17-4DB4-B0F5-60C640CCFD2E}"/>
               </a:ext>
             </a:extLst>
           </p:cNvPr>
@@ -6112,7 +5933,7 @@
           <p:cNvPr id="3" name="Content Placeholder 2">
             <a:extLst>
               <a:ext uri="{FF2B5EF4-FFF2-40B4-BE49-F238E27FC236}">
-                <a16:creationId xmlns:a16="http://schemas.microsoft.com/office/drawing/2014/main" id="{59B6A74E-8855-B416-1D2B-EC3735DC0079}"/>
+                <a16:creationId xmlns:a16="http://schemas.microsoft.com/office/drawing/2014/main" xmlns="" id="{59B6A74E-8855-B416-1D2B-EC3735DC0079}"/>
               </a:ext>
             </a:extLst>
           </p:cNvPr>
@@ -6188,7 +6009,7 @@
           <p:cNvPr id="1026" name="Picture 2" descr="Reinforcement Learning">
             <a:extLst>
               <a:ext uri="{FF2B5EF4-FFF2-40B4-BE49-F238E27FC236}">
-                <a16:creationId xmlns:a16="http://schemas.microsoft.com/office/drawing/2014/main" id="{5526EDB3-366A-5FFB-4A2D-BC3494C1E889}"/>
+                <a16:creationId xmlns:a16="http://schemas.microsoft.com/office/drawing/2014/main" xmlns="" id="{5526EDB3-366A-5FFB-4A2D-BC3494C1E889}"/>
               </a:ext>
             </a:extLst>
           </p:cNvPr>
@@ -6251,7 +6072,7 @@
         <p:cNvPr id="1" name="">
           <a:extLst>
             <a:ext uri="{FF2B5EF4-FFF2-40B4-BE49-F238E27FC236}">
-              <a16:creationId xmlns:a16="http://schemas.microsoft.com/office/drawing/2014/main" id="{83DFB381-AAB9-2788-1601-EB1230F302AA}"/>
+              <a16:creationId xmlns:a16="http://schemas.microsoft.com/office/drawing/2014/main" xmlns="" id="{83DFB381-AAB9-2788-1601-EB1230F302AA}"/>
             </a:ext>
           </a:extLst>
         </p:cNvPr>
@@ -6271,7 +6092,7 @@
           <p:cNvPr id="4" name="Título 1">
             <a:extLst>
               <a:ext uri="{FF2B5EF4-FFF2-40B4-BE49-F238E27FC236}">
-                <a16:creationId xmlns:a16="http://schemas.microsoft.com/office/drawing/2014/main" id="{4AF40FF5-E3E4-99F0-8C87-687EB32C12F9}"/>
+                <a16:creationId xmlns:a16="http://schemas.microsoft.com/office/drawing/2014/main" xmlns="" id="{4AF40FF5-E3E4-99F0-8C87-687EB32C12F9}"/>
               </a:ext>
             </a:extLst>
           </p:cNvPr>
@@ -6357,7 +6178,7 @@
           <p:cNvPr id="59" name="Group 58">
             <a:extLst>
               <a:ext uri="{FF2B5EF4-FFF2-40B4-BE49-F238E27FC236}">
-                <a16:creationId xmlns:a16="http://schemas.microsoft.com/office/drawing/2014/main" id="{BB54A8AF-5D7A-DF48-6B51-A97D3BA5AE2B}"/>
+                <a16:creationId xmlns:a16="http://schemas.microsoft.com/office/drawing/2014/main" xmlns="" id="{BB54A8AF-5D7A-DF48-6B51-A97D3BA5AE2B}"/>
               </a:ext>
             </a:extLst>
           </p:cNvPr>
@@ -6377,7 +6198,7 @@
             <p:cNvPr id="26" name="Rectangle 25">
               <a:extLst>
                 <a:ext uri="{FF2B5EF4-FFF2-40B4-BE49-F238E27FC236}">
-                  <a16:creationId xmlns:a16="http://schemas.microsoft.com/office/drawing/2014/main" id="{A78F414E-0878-E9AC-3349-365D683589EF}"/>
+                  <a16:creationId xmlns:a16="http://schemas.microsoft.com/office/drawing/2014/main" xmlns="" id="{A78F414E-0878-E9AC-3349-365D683589EF}"/>
                 </a:ext>
               </a:extLst>
             </p:cNvPr>
@@ -6426,7 +6247,7 @@
             <p:cNvPr id="27" name="Rectangle 26">
               <a:extLst>
                 <a:ext uri="{FF2B5EF4-FFF2-40B4-BE49-F238E27FC236}">
-                  <a16:creationId xmlns:a16="http://schemas.microsoft.com/office/drawing/2014/main" id="{67A2140F-0BEB-DFFC-0173-0DDE81A0BAF4}"/>
+                  <a16:creationId xmlns:a16="http://schemas.microsoft.com/office/drawing/2014/main" xmlns="" id="{67A2140F-0BEB-DFFC-0173-0DDE81A0BAF4}"/>
                 </a:ext>
               </a:extLst>
             </p:cNvPr>
@@ -6475,7 +6296,7 @@
             <p:cNvPr id="33" name="Rectangle 32">
               <a:extLst>
                 <a:ext uri="{FF2B5EF4-FFF2-40B4-BE49-F238E27FC236}">
-                  <a16:creationId xmlns:a16="http://schemas.microsoft.com/office/drawing/2014/main" id="{C67CE66F-B1C9-97C2-5191-323C447A4039}"/>
+                  <a16:creationId xmlns:a16="http://schemas.microsoft.com/office/drawing/2014/main" xmlns="" id="{C67CE66F-B1C9-97C2-5191-323C447A4039}"/>
                 </a:ext>
               </a:extLst>
             </p:cNvPr>
@@ -6524,7 +6345,7 @@
             <p:cNvPr id="34" name="Rectangle 33">
               <a:extLst>
                 <a:ext uri="{FF2B5EF4-FFF2-40B4-BE49-F238E27FC236}">
-                  <a16:creationId xmlns:a16="http://schemas.microsoft.com/office/drawing/2014/main" id="{44116E33-D3F4-D7FB-DCEF-760C9C024249}"/>
+                  <a16:creationId xmlns:a16="http://schemas.microsoft.com/office/drawing/2014/main" xmlns="" id="{44116E33-D3F4-D7FB-DCEF-760C9C024249}"/>
                 </a:ext>
               </a:extLst>
             </p:cNvPr>
@@ -6573,7 +6394,7 @@
             <p:cNvPr id="12" name="Connector: Elbow 11">
               <a:extLst>
                 <a:ext uri="{FF2B5EF4-FFF2-40B4-BE49-F238E27FC236}">
-                  <a16:creationId xmlns:a16="http://schemas.microsoft.com/office/drawing/2014/main" id="{0375811A-BC31-5203-21BF-8C1AEDCA810A}"/>
+                  <a16:creationId xmlns:a16="http://schemas.microsoft.com/office/drawing/2014/main" xmlns="" id="{0375811A-BC31-5203-21BF-8C1AEDCA810A}"/>
                 </a:ext>
               </a:extLst>
             </p:cNvPr>
@@ -6618,7 +6439,7 @@
             <p:cNvPr id="17" name="Rectangle: Rounded Corners 16">
               <a:extLst>
                 <a:ext uri="{FF2B5EF4-FFF2-40B4-BE49-F238E27FC236}">
-                  <a16:creationId xmlns:a16="http://schemas.microsoft.com/office/drawing/2014/main" id="{D957717F-F346-A328-0454-3432762A09F8}"/>
+                  <a16:creationId xmlns:a16="http://schemas.microsoft.com/office/drawing/2014/main" xmlns="" id="{D957717F-F346-A328-0454-3432762A09F8}"/>
                 </a:ext>
               </a:extLst>
             </p:cNvPr>
@@ -6668,7 +6489,7 @@
             <p:cNvPr id="18" name="Rectangle: Rounded Corners 17">
               <a:extLst>
                 <a:ext uri="{FF2B5EF4-FFF2-40B4-BE49-F238E27FC236}">
-                  <a16:creationId xmlns:a16="http://schemas.microsoft.com/office/drawing/2014/main" id="{39EF6FE5-6FBC-BC13-63C8-D6E9E3E272C4}"/>
+                  <a16:creationId xmlns:a16="http://schemas.microsoft.com/office/drawing/2014/main" xmlns="" id="{39EF6FE5-6FBC-BC13-63C8-D6E9E3E272C4}"/>
                 </a:ext>
               </a:extLst>
             </p:cNvPr>
@@ -6713,14 +6534,14 @@
             </a:p>
           </p:txBody>
         </p:sp>
-        <mc:AlternateContent xmlns:mc="http://schemas.openxmlformats.org/markup-compatibility/2006">
-          <mc:Choice xmlns:a14="http://schemas.microsoft.com/office/drawing/2010/main" Requires="a14">
+        <mc:AlternateContent xmlns:mc="http://schemas.openxmlformats.org/markup-compatibility/2006" xmlns:a14="http://schemas.microsoft.com/office/drawing/2010/main">
+          <mc:Choice Requires="a14">
             <p:sp>
               <p:nvSpPr>
                 <p:cNvPr id="41" name="TextBox 40">
                   <a:extLst>
                     <a:ext uri="{FF2B5EF4-FFF2-40B4-BE49-F238E27FC236}">
-                      <a16:creationId xmlns:a16="http://schemas.microsoft.com/office/drawing/2014/main" id="{DEBC8956-45EC-9A9F-7CAD-7A468058ABF1}"/>
+                      <a16:creationId xmlns:a16="http://schemas.microsoft.com/office/drawing/2014/main" xmlns="" id="{DEBC8956-45EC-9A9F-7CAD-7A468058ABF1}"/>
                     </a:ext>
                   </a:extLst>
                 </p:cNvPr>
@@ -6781,7 +6602,7 @@
               </p:txBody>
             </p:sp>
           </mc:Choice>
-          <mc:Fallback>
+          <mc:Fallback xmlns="">
             <p:sp>
               <p:nvSpPr>
                 <p:cNvPr id="41" name="TextBox 40">
@@ -6826,14 +6647,14 @@
             </p:sp>
           </mc:Fallback>
         </mc:AlternateContent>
-        <mc:AlternateContent xmlns:mc="http://schemas.openxmlformats.org/markup-compatibility/2006">
-          <mc:Choice xmlns:a14="http://schemas.microsoft.com/office/drawing/2010/main" Requires="a14">
+        <mc:AlternateContent xmlns:mc="http://schemas.openxmlformats.org/markup-compatibility/2006" xmlns:a14="http://schemas.microsoft.com/office/drawing/2010/main">
+          <mc:Choice Requires="a14">
             <p:sp>
               <p:nvSpPr>
                 <p:cNvPr id="10" name="TextBox 9">
                   <a:extLst>
                     <a:ext uri="{FF2B5EF4-FFF2-40B4-BE49-F238E27FC236}">
-                      <a16:creationId xmlns:a16="http://schemas.microsoft.com/office/drawing/2014/main" id="{6B8DF4A4-00E2-9B10-CC12-B0D274CCB842}"/>
+                      <a16:creationId xmlns:a16="http://schemas.microsoft.com/office/drawing/2014/main" xmlns="" id="{6B8DF4A4-00E2-9B10-CC12-B0D274CCB842}"/>
                     </a:ext>
                   </a:extLst>
                 </p:cNvPr>
@@ -6856,6 +6677,7 @@
                 </a:bodyPr>
                 <a:lstStyle/>
                 <a:p>
+                  <a:pPr/>
                   <a14:m>
                     <m:oMathPara xmlns:m="http://schemas.openxmlformats.org/officeDocument/2006/math">
                       <m:oMathParaPr>
@@ -6901,7 +6723,7 @@
               </p:txBody>
             </p:sp>
           </mc:Choice>
-          <mc:Fallback>
+          <mc:Fallback xmlns="">
             <p:sp>
               <p:nvSpPr>
                 <p:cNvPr id="10" name="TextBox 9">
@@ -6946,14 +6768,14 @@
             </p:sp>
           </mc:Fallback>
         </mc:AlternateContent>
-        <mc:AlternateContent xmlns:mc="http://schemas.openxmlformats.org/markup-compatibility/2006">
-          <mc:Choice xmlns:a14="http://schemas.microsoft.com/office/drawing/2010/main" Requires="a14">
+        <mc:AlternateContent xmlns:mc="http://schemas.openxmlformats.org/markup-compatibility/2006" xmlns:a14="http://schemas.microsoft.com/office/drawing/2010/main">
+          <mc:Choice Requires="a14">
             <p:sp>
               <p:nvSpPr>
                 <p:cNvPr id="14" name="TextBox 13">
                   <a:extLst>
                     <a:ext uri="{FF2B5EF4-FFF2-40B4-BE49-F238E27FC236}">
-                      <a16:creationId xmlns:a16="http://schemas.microsoft.com/office/drawing/2014/main" id="{376B01EB-53C8-C2B2-1104-8A2BC1DE4624}"/>
+                      <a16:creationId xmlns:a16="http://schemas.microsoft.com/office/drawing/2014/main" xmlns="" id="{376B01EB-53C8-C2B2-1104-8A2BC1DE4624}"/>
                     </a:ext>
                   </a:extLst>
                 </p:cNvPr>
@@ -6976,6 +6798,7 @@
                 </a:bodyPr>
                 <a:lstStyle/>
                 <a:p>
+                  <a:pPr/>
                   <a14:m>
                     <m:oMathPara xmlns:m="http://schemas.openxmlformats.org/officeDocument/2006/math">
                       <m:oMathParaPr>
@@ -7021,7 +6844,7 @@
               </p:txBody>
             </p:sp>
           </mc:Choice>
-          <mc:Fallback>
+          <mc:Fallback xmlns="">
             <p:sp>
               <p:nvSpPr>
                 <p:cNvPr id="14" name="TextBox 13">
@@ -7071,7 +6894,7 @@
             <p:cNvPr id="20" name="Rectangle 19">
               <a:extLst>
                 <a:ext uri="{FF2B5EF4-FFF2-40B4-BE49-F238E27FC236}">
-                  <a16:creationId xmlns:a16="http://schemas.microsoft.com/office/drawing/2014/main" id="{8B0A48D5-77C9-C29A-8EF5-BED0E6E38CD2}"/>
+                  <a16:creationId xmlns:a16="http://schemas.microsoft.com/office/drawing/2014/main" xmlns="" id="{8B0A48D5-77C9-C29A-8EF5-BED0E6E38CD2}"/>
                 </a:ext>
               </a:extLst>
             </p:cNvPr>
@@ -7121,7 +6944,7 @@
             <p:cNvPr id="21" name="Rectangle 20">
               <a:extLst>
                 <a:ext uri="{FF2B5EF4-FFF2-40B4-BE49-F238E27FC236}">
-                  <a16:creationId xmlns:a16="http://schemas.microsoft.com/office/drawing/2014/main" id="{48728DA3-DA01-CAB9-540E-37EADA51BE57}"/>
+                  <a16:creationId xmlns:a16="http://schemas.microsoft.com/office/drawing/2014/main" xmlns="" id="{48728DA3-DA01-CAB9-540E-37EADA51BE57}"/>
                 </a:ext>
               </a:extLst>
             </p:cNvPr>
@@ -7171,7 +6994,7 @@
             <p:cNvPr id="25" name="Connector: Elbow 24">
               <a:extLst>
                 <a:ext uri="{FF2B5EF4-FFF2-40B4-BE49-F238E27FC236}">
-                  <a16:creationId xmlns:a16="http://schemas.microsoft.com/office/drawing/2014/main" id="{20E553C2-F044-7C77-F846-B80760291225}"/>
+                  <a16:creationId xmlns:a16="http://schemas.microsoft.com/office/drawing/2014/main" xmlns="" id="{20E553C2-F044-7C77-F846-B80760291225}"/>
                 </a:ext>
               </a:extLst>
             </p:cNvPr>
@@ -7213,7 +7036,7 @@
             <p:cNvPr id="31" name="Straight Arrow Connector 30">
               <a:extLst>
                 <a:ext uri="{FF2B5EF4-FFF2-40B4-BE49-F238E27FC236}">
-                  <a16:creationId xmlns:a16="http://schemas.microsoft.com/office/drawing/2014/main" id="{6AEFECE4-5D15-A8B3-453D-610BA5638D05}"/>
+                  <a16:creationId xmlns:a16="http://schemas.microsoft.com/office/drawing/2014/main" xmlns="" id="{6AEFECE4-5D15-A8B3-453D-610BA5638D05}"/>
                 </a:ext>
               </a:extLst>
             </p:cNvPr>
@@ -7255,7 +7078,7 @@
             <p:cNvPr id="35" name="Straight Arrow Connector 34">
               <a:extLst>
                 <a:ext uri="{FF2B5EF4-FFF2-40B4-BE49-F238E27FC236}">
-                  <a16:creationId xmlns:a16="http://schemas.microsoft.com/office/drawing/2014/main" id="{B6FFE6A0-55AE-62C1-3F6E-5291D436B5AB}"/>
+                  <a16:creationId xmlns:a16="http://schemas.microsoft.com/office/drawing/2014/main" xmlns="" id="{B6FFE6A0-55AE-62C1-3F6E-5291D436B5AB}"/>
                 </a:ext>
               </a:extLst>
             </p:cNvPr>
@@ -7298,7 +7121,7 @@
             <p:cNvPr id="40" name="Connector: Elbow 39">
               <a:extLst>
                 <a:ext uri="{FF2B5EF4-FFF2-40B4-BE49-F238E27FC236}">
-                  <a16:creationId xmlns:a16="http://schemas.microsoft.com/office/drawing/2014/main" id="{73307ED6-2342-7662-DD14-B12FEDB6983C}"/>
+                  <a16:creationId xmlns:a16="http://schemas.microsoft.com/office/drawing/2014/main" xmlns="" id="{73307ED6-2342-7662-DD14-B12FEDB6983C}"/>
                 </a:ext>
               </a:extLst>
             </p:cNvPr>
@@ -7342,7 +7165,7 @@
             <p:cNvPr id="44" name="Straight Connector 43">
               <a:extLst>
                 <a:ext uri="{FF2B5EF4-FFF2-40B4-BE49-F238E27FC236}">
-                  <a16:creationId xmlns:a16="http://schemas.microsoft.com/office/drawing/2014/main" id="{6B737731-0DAB-FB54-8D60-66210A48E60A}"/>
+                  <a16:creationId xmlns:a16="http://schemas.microsoft.com/office/drawing/2014/main" xmlns="" id="{6B737731-0DAB-FB54-8D60-66210A48E60A}"/>
                 </a:ext>
               </a:extLst>
             </p:cNvPr>
@@ -7382,7 +7205,7 @@
             <p:cNvPr id="46" name="Straight Connector 45">
               <a:extLst>
                 <a:ext uri="{FF2B5EF4-FFF2-40B4-BE49-F238E27FC236}">
-                  <a16:creationId xmlns:a16="http://schemas.microsoft.com/office/drawing/2014/main" id="{7AED5B7A-243B-6FAD-C904-A72171DA10E4}"/>
+                  <a16:creationId xmlns:a16="http://schemas.microsoft.com/office/drawing/2014/main" xmlns="" id="{7AED5B7A-243B-6FAD-C904-A72171DA10E4}"/>
                 </a:ext>
               </a:extLst>
             </p:cNvPr>
@@ -7417,14 +7240,14 @@
             </a:fontRef>
           </p:style>
         </p:cxnSp>
-        <mc:AlternateContent xmlns:mc="http://schemas.openxmlformats.org/markup-compatibility/2006">
-          <mc:Choice xmlns:a14="http://schemas.microsoft.com/office/drawing/2010/main" Requires="a14">
+        <mc:AlternateContent xmlns:mc="http://schemas.openxmlformats.org/markup-compatibility/2006" xmlns:a14="http://schemas.microsoft.com/office/drawing/2010/main">
+          <mc:Choice Requires="a14">
             <p:sp>
               <p:nvSpPr>
                 <p:cNvPr id="55" name="TextBox 54">
                   <a:extLst>
                     <a:ext uri="{FF2B5EF4-FFF2-40B4-BE49-F238E27FC236}">
-                      <a16:creationId xmlns:a16="http://schemas.microsoft.com/office/drawing/2014/main" id="{C98BB9BE-FF5B-BD53-700F-EF25882F8757}"/>
+                      <a16:creationId xmlns:a16="http://schemas.microsoft.com/office/drawing/2014/main" xmlns="" id="{C98BB9BE-FF5B-BD53-700F-EF25882F8757}"/>
                     </a:ext>
                   </a:extLst>
                 </p:cNvPr>
@@ -7485,7 +7308,7 @@
               </p:txBody>
             </p:sp>
           </mc:Choice>
-          <mc:Fallback>
+          <mc:Fallback xmlns="">
             <p:sp>
               <p:nvSpPr>
                 <p:cNvPr id="55" name="TextBox 54">
@@ -7530,14 +7353,14 @@
             </p:sp>
           </mc:Fallback>
         </mc:AlternateContent>
-        <mc:AlternateContent xmlns:mc="http://schemas.openxmlformats.org/markup-compatibility/2006">
-          <mc:Choice xmlns:a14="http://schemas.microsoft.com/office/drawing/2010/main" Requires="a14">
+        <mc:AlternateContent xmlns:mc="http://schemas.openxmlformats.org/markup-compatibility/2006" xmlns:a14="http://schemas.microsoft.com/office/drawing/2010/main">
+          <mc:Choice Requires="a14">
             <p:sp>
               <p:nvSpPr>
                 <p:cNvPr id="56" name="TextBox 55">
                   <a:extLst>
                     <a:ext uri="{FF2B5EF4-FFF2-40B4-BE49-F238E27FC236}">
-                      <a16:creationId xmlns:a16="http://schemas.microsoft.com/office/drawing/2014/main" id="{033C1F87-4FD6-565B-5CE1-B94FB9D5F703}"/>
+                      <a16:creationId xmlns:a16="http://schemas.microsoft.com/office/drawing/2014/main" xmlns="" id="{033C1F87-4FD6-565B-5CE1-B94FB9D5F703}"/>
                     </a:ext>
                   </a:extLst>
                 </p:cNvPr>
@@ -7598,7 +7421,7 @@
               </p:txBody>
             </p:sp>
           </mc:Choice>
-          <mc:Fallback>
+          <mc:Fallback xmlns="">
             <p:sp>
               <p:nvSpPr>
                 <p:cNvPr id="56" name="TextBox 55">
@@ -7648,7 +7471,7 @@
             <p:cNvPr id="58" name="Straight Connector 57">
               <a:extLst>
                 <a:ext uri="{FF2B5EF4-FFF2-40B4-BE49-F238E27FC236}">
-                  <a16:creationId xmlns:a16="http://schemas.microsoft.com/office/drawing/2014/main" id="{1A8E8F72-A082-BAC3-6C41-D1C1204F72D8}"/>
+                  <a16:creationId xmlns:a16="http://schemas.microsoft.com/office/drawing/2014/main" xmlns="" id="{1A8E8F72-A082-BAC3-6C41-D1C1204F72D8}"/>
                 </a:ext>
               </a:extLst>
             </p:cNvPr>
@@ -7720,7 +7543,7 @@
           <p:cNvPr id="2" name="Título 1">
             <a:extLst>
               <a:ext uri="{FF2B5EF4-FFF2-40B4-BE49-F238E27FC236}">
-                <a16:creationId xmlns:a16="http://schemas.microsoft.com/office/drawing/2014/main" id="{7F5FF925-67DE-CC62-E869-C6E3C1D771E6}"/>
+                <a16:creationId xmlns:a16="http://schemas.microsoft.com/office/drawing/2014/main" xmlns="" id="{7F5FF925-67DE-CC62-E869-C6E3C1D771E6}"/>
               </a:ext>
             </a:extLst>
           </p:cNvPr>
@@ -7760,7 +7583,7 @@
           <p:cNvPr id="3" name="Espaço Reservado para Conteúdo 2">
             <a:extLst>
               <a:ext uri="{FF2B5EF4-FFF2-40B4-BE49-F238E27FC236}">
-                <a16:creationId xmlns:a16="http://schemas.microsoft.com/office/drawing/2014/main" id="{7DA84068-671A-9D40-4F76-2C57E4F720C2}"/>
+                <a16:creationId xmlns:a16="http://schemas.microsoft.com/office/drawing/2014/main" xmlns="" id="{7DA84068-671A-9D40-4F76-2C57E4F720C2}"/>
               </a:ext>
             </a:extLst>
           </p:cNvPr>
@@ -7823,7 +7646,7 @@
           <p:cNvPr id="2051" name="Picture 3" descr="Understanding the Pillars of Machine Learning: Supervised, Unsupervised,  and Reinforcement Learning">
             <a:extLst>
               <a:ext uri="{FF2B5EF4-FFF2-40B4-BE49-F238E27FC236}">
-                <a16:creationId xmlns:a16="http://schemas.microsoft.com/office/drawing/2014/main" id="{BDF6F402-9EED-6D9D-33D9-227B654D168D}"/>
+                <a16:creationId xmlns:a16="http://schemas.microsoft.com/office/drawing/2014/main" xmlns="" id="{BDF6F402-9EED-6D9D-33D9-227B654D168D}"/>
               </a:ext>
             </a:extLst>
           </p:cNvPr>
@@ -7886,7 +7709,7 @@
         <p:cNvPr id="1" name="">
           <a:extLst>
             <a:ext uri="{FF2B5EF4-FFF2-40B4-BE49-F238E27FC236}">
-              <a16:creationId xmlns:a16="http://schemas.microsoft.com/office/drawing/2014/main" id="{A370B64E-1F58-2FF0-BFB3-B1D955875AD5}"/>
+              <a16:creationId xmlns:a16="http://schemas.microsoft.com/office/drawing/2014/main" xmlns="" id="{A370B64E-1F58-2FF0-BFB3-B1D955875AD5}"/>
             </a:ext>
           </a:extLst>
         </p:cNvPr>
@@ -7906,7 +7729,7 @@
           <p:cNvPr id="2" name="Título 1">
             <a:extLst>
               <a:ext uri="{FF2B5EF4-FFF2-40B4-BE49-F238E27FC236}">
-                <a16:creationId xmlns:a16="http://schemas.microsoft.com/office/drawing/2014/main" id="{86CC3BAE-52FC-3697-DB30-5B05B346937E}"/>
+                <a16:creationId xmlns:a16="http://schemas.microsoft.com/office/drawing/2014/main" xmlns="" id="{86CC3BAE-52FC-3697-DB30-5B05B346937E}"/>
               </a:ext>
             </a:extLst>
           </p:cNvPr>
@@ -7935,7 +7758,7 @@
           <p:cNvPr id="3" name="Espaço Reservado para Conteúdo 2">
             <a:extLst>
               <a:ext uri="{FF2B5EF4-FFF2-40B4-BE49-F238E27FC236}">
-                <a16:creationId xmlns:a16="http://schemas.microsoft.com/office/drawing/2014/main" id="{0A06D34D-8885-14BC-AF7E-F271D7D63333}"/>
+                <a16:creationId xmlns:a16="http://schemas.microsoft.com/office/drawing/2014/main" xmlns="" id="{0A06D34D-8885-14BC-AF7E-F271D7D63333}"/>
               </a:ext>
             </a:extLst>
           </p:cNvPr>
@@ -8016,7 +7839,7 @@
           <p:cNvPr id="4" name="Imagem 16">
             <a:extLst>
               <a:ext uri="{FF2B5EF4-FFF2-40B4-BE49-F238E27FC236}">
-                <a16:creationId xmlns:a16="http://schemas.microsoft.com/office/drawing/2014/main" id="{7937C6EA-BFD8-5278-9EE0-796D1842173C}"/>
+                <a16:creationId xmlns:a16="http://schemas.microsoft.com/office/drawing/2014/main" xmlns="" id="{7937C6EA-BFD8-5278-9EE0-796D1842173C}"/>
               </a:ext>
             </a:extLst>
           </p:cNvPr>
@@ -8068,7 +7891,7 @@
         <p:cNvPr id="1" name="">
           <a:extLst>
             <a:ext uri="{FF2B5EF4-FFF2-40B4-BE49-F238E27FC236}">
-              <a16:creationId xmlns:a16="http://schemas.microsoft.com/office/drawing/2014/main" id="{D3753AED-FA4F-39DE-91A4-E5C845C0C665}"/>
+              <a16:creationId xmlns:a16="http://schemas.microsoft.com/office/drawing/2014/main" xmlns="" id="{D3753AED-FA4F-39DE-91A4-E5C845C0C665}"/>
             </a:ext>
           </a:extLst>
         </p:cNvPr>
@@ -8088,7 +7911,7 @@
           <p:cNvPr id="2" name="Título 1">
             <a:extLst>
               <a:ext uri="{FF2B5EF4-FFF2-40B4-BE49-F238E27FC236}">
-                <a16:creationId xmlns:a16="http://schemas.microsoft.com/office/drawing/2014/main" id="{6E88774E-D7D6-D9E6-4449-244D34EE979C}"/>
+                <a16:creationId xmlns:a16="http://schemas.microsoft.com/office/drawing/2014/main" xmlns="" id="{6E88774E-D7D6-D9E6-4449-244D34EE979C}"/>
               </a:ext>
             </a:extLst>
           </p:cNvPr>
@@ -8117,7 +7940,7 @@
           <p:cNvPr id="3" name="Espaço Reservado para Conteúdo 2">
             <a:extLst>
               <a:ext uri="{FF2B5EF4-FFF2-40B4-BE49-F238E27FC236}">
-                <a16:creationId xmlns:a16="http://schemas.microsoft.com/office/drawing/2014/main" id="{0E79548E-494A-A12A-30F7-F4E225B6C309}"/>
+                <a16:creationId xmlns:a16="http://schemas.microsoft.com/office/drawing/2014/main" xmlns="" id="{0E79548E-494A-A12A-30F7-F4E225B6C309}"/>
               </a:ext>
             </a:extLst>
           </p:cNvPr>
@@ -8192,7 +8015,7 @@
           <p:cNvPr id="6" name="Imagem 16">
             <a:extLst>
               <a:ext uri="{FF2B5EF4-FFF2-40B4-BE49-F238E27FC236}">
-                <a16:creationId xmlns:a16="http://schemas.microsoft.com/office/drawing/2014/main" id="{C8EB1D57-2EF7-64D2-25BE-6F8A0BE933DB}"/>
+                <a16:creationId xmlns:a16="http://schemas.microsoft.com/office/drawing/2014/main" xmlns="" id="{C8EB1D57-2EF7-64D2-25BE-6F8A0BE933DB}"/>
               </a:ext>
             </a:extLst>
           </p:cNvPr>
@@ -8244,7 +8067,7 @@
         <p:cNvPr id="1" name="">
           <a:extLst>
             <a:ext uri="{FF2B5EF4-FFF2-40B4-BE49-F238E27FC236}">
-              <a16:creationId xmlns:a16="http://schemas.microsoft.com/office/drawing/2014/main" id="{D41FFEFA-1EED-2754-CDBD-7CC34D06F8B2}"/>
+              <a16:creationId xmlns:a16="http://schemas.microsoft.com/office/drawing/2014/main" xmlns="" id="{D41FFEFA-1EED-2754-CDBD-7CC34D06F8B2}"/>
             </a:ext>
           </a:extLst>
         </p:cNvPr>
@@ -8264,7 +8087,7 @@
           <p:cNvPr id="2" name="Título 1">
             <a:extLst>
               <a:ext uri="{FF2B5EF4-FFF2-40B4-BE49-F238E27FC236}">
-                <a16:creationId xmlns:a16="http://schemas.microsoft.com/office/drawing/2014/main" id="{E4CDBB74-F243-3F53-FEC5-AF11CE256B39}"/>
+                <a16:creationId xmlns:a16="http://schemas.microsoft.com/office/drawing/2014/main" xmlns="" id="{E4CDBB74-F243-3F53-FEC5-AF11CE256B39}"/>
               </a:ext>
             </a:extLst>
           </p:cNvPr>
@@ -8293,7 +8116,7 @@
           <p:cNvPr id="3" name="Espaço Reservado para Conteúdo 2">
             <a:extLst>
               <a:ext uri="{FF2B5EF4-FFF2-40B4-BE49-F238E27FC236}">
-                <a16:creationId xmlns:a16="http://schemas.microsoft.com/office/drawing/2014/main" id="{8A609E9F-E2C8-D6E3-78D1-C44C117B55A3}"/>
+                <a16:creationId xmlns:a16="http://schemas.microsoft.com/office/drawing/2014/main" xmlns="" id="{8A609E9F-E2C8-D6E3-78D1-C44C117B55A3}"/>
               </a:ext>
             </a:extLst>
           </p:cNvPr>
@@ -8338,7 +8161,7 @@
           <p:cNvPr id="4" name="Imagem 16">
             <a:extLst>
               <a:ext uri="{FF2B5EF4-FFF2-40B4-BE49-F238E27FC236}">
-                <a16:creationId xmlns:a16="http://schemas.microsoft.com/office/drawing/2014/main" id="{DF71A34D-2B36-AF4A-818D-805CF072BD50}"/>
+                <a16:creationId xmlns:a16="http://schemas.microsoft.com/office/drawing/2014/main" xmlns="" id="{DF71A34D-2B36-AF4A-818D-805CF072BD50}"/>
               </a:ext>
             </a:extLst>
           </p:cNvPr>
@@ -8404,7 +8227,7 @@
           <p:cNvPr id="2" name="Title 1">
             <a:extLst>
               <a:ext uri="{FF2B5EF4-FFF2-40B4-BE49-F238E27FC236}">
-                <a16:creationId xmlns:a16="http://schemas.microsoft.com/office/drawing/2014/main" id="{81E045BB-096B-FD28-B7D5-E94A5FD7C8E5}"/>
+                <a16:creationId xmlns:a16="http://schemas.microsoft.com/office/drawing/2014/main" xmlns="" id="{81E045BB-096B-FD28-B7D5-E94A5FD7C8E5}"/>
               </a:ext>
             </a:extLst>
           </p:cNvPr>
@@ -8433,7 +8256,7 @@
           <p:cNvPr id="3" name="Content Placeholder 2">
             <a:extLst>
               <a:ext uri="{FF2B5EF4-FFF2-40B4-BE49-F238E27FC236}">
-                <a16:creationId xmlns:a16="http://schemas.microsoft.com/office/drawing/2014/main" id="{DC3C87D0-4294-EB29-295B-08AD144442B5}"/>
+                <a16:creationId xmlns:a16="http://schemas.microsoft.com/office/drawing/2014/main" xmlns="" id="{DC3C87D0-4294-EB29-295B-08AD144442B5}"/>
               </a:ext>
             </a:extLst>
           </p:cNvPr>
@@ -8501,7 +8324,7 @@
           <p:cNvPr id="4" name="Picture 4" descr="A Beginner's Guide to Reinforcement Learning and its Basic Implementation  from Scratch | by Tanvi Penumudy | Analytics Vidhya | Medium">
             <a:extLst>
               <a:ext uri="{FF2B5EF4-FFF2-40B4-BE49-F238E27FC236}">
-                <a16:creationId xmlns:a16="http://schemas.microsoft.com/office/drawing/2014/main" id="{A37B35F5-6EF1-B612-B863-263AB00420ED}"/>
+                <a16:creationId xmlns:a16="http://schemas.microsoft.com/office/drawing/2014/main" xmlns="" id="{A37B35F5-6EF1-B612-B863-263AB00420ED}"/>
               </a:ext>
             </a:extLst>
           </p:cNvPr>
@@ -8578,101 +8401,7 @@
           <p:cNvPr id="2" name="Title 1">
             <a:extLst>
               <a:ext uri="{FF2B5EF4-FFF2-40B4-BE49-F238E27FC236}">
-                <a16:creationId xmlns:a16="http://schemas.microsoft.com/office/drawing/2014/main" id="{874F2722-DA1E-D930-DC99-59F795E3E8B9}"/>
-              </a:ext>
-            </a:extLst>
-          </p:cNvPr>
-          <p:cNvSpPr>
-            <a:spLocks noGrp="1"/>
-          </p:cNvSpPr>
-          <p:nvPr>
-            <p:ph type="title"/>
-          </p:nvPr>
-        </p:nvSpPr>
-        <p:spPr/>
-        <p:txBody>
-          <a:bodyPr/>
-          <a:lstStyle/>
-          <a:p>
-            <a:endParaRPr lang="en-US"/>
-          </a:p>
-        </p:txBody>
-      </p:sp>
-      <p:sp>
-        <p:nvSpPr>
-          <p:cNvPr id="3" name="Content Placeholder 2">
-            <a:extLst>
-              <a:ext uri="{FF2B5EF4-FFF2-40B4-BE49-F238E27FC236}">
-                <a16:creationId xmlns:a16="http://schemas.microsoft.com/office/drawing/2014/main" id="{97BD2D05-0E48-B94D-DBC7-FBDCBC17C0A5}"/>
-              </a:ext>
-            </a:extLst>
-          </p:cNvPr>
-          <p:cNvSpPr>
-            <a:spLocks noGrp="1"/>
-          </p:cNvSpPr>
-          <p:nvPr>
-            <p:ph idx="1"/>
-          </p:nvPr>
-        </p:nvSpPr>
-        <p:spPr/>
-        <p:txBody>
-          <a:bodyPr>
-            <a:normAutofit/>
-          </a:bodyPr>
-          <a:lstStyle/>
-          <a:p>
-            <a:r>
-              <a:rPr lang="pt-BR" sz="5400" b="1" dirty="0">
-                <a:solidFill>
-                  <a:srgbClr val="FF0000"/>
-                </a:solidFill>
-              </a:rPr>
-              <a:t>PAREI AQUI!!!!!!!!!!!!</a:t>
-            </a:r>
-            <a:endParaRPr lang="en-US" sz="5400" b="1" dirty="0">
-              <a:solidFill>
-                <a:srgbClr val="FF0000"/>
-              </a:solidFill>
-            </a:endParaRPr>
-          </a:p>
-        </p:txBody>
-      </p:sp>
-    </p:spTree>
-    <p:extLst>
-      <p:ext uri="{BB962C8B-B14F-4D97-AF65-F5344CB8AC3E}">
-        <p14:creationId xmlns:p14="http://schemas.microsoft.com/office/powerpoint/2010/main" val="3079050531"/>
-      </p:ext>
-    </p:extLst>
-  </p:cSld>
-  <p:clrMapOvr>
-    <a:masterClrMapping/>
-  </p:clrMapOvr>
-</p:sld>
-</file>
-
-<file path=ppt/slides/slide9.xml><?xml version="1.0" encoding="utf-8"?>
-<p:sld xmlns:a="http://schemas.openxmlformats.org/drawingml/2006/main" xmlns:r="http://schemas.openxmlformats.org/officeDocument/2006/relationships" xmlns:p="http://schemas.openxmlformats.org/presentationml/2006/main">
-  <p:cSld>
-    <p:spTree>
-      <p:nvGrpSpPr>
-        <p:cNvPr id="1" name=""/>
-        <p:cNvGrpSpPr/>
-        <p:nvPr/>
-      </p:nvGrpSpPr>
-      <p:grpSpPr>
-        <a:xfrm>
-          <a:off x="0" y="0"/>
-          <a:ext cx="0" cy="0"/>
-          <a:chOff x="0" y="0"/>
-          <a:chExt cx="0" cy="0"/>
-        </a:xfrm>
-      </p:grpSpPr>
-      <p:sp>
-        <p:nvSpPr>
-          <p:cNvPr id="2" name="Title 1">
-            <a:extLst>
-              <a:ext uri="{FF2B5EF4-FFF2-40B4-BE49-F238E27FC236}">
-                <a16:creationId xmlns:a16="http://schemas.microsoft.com/office/drawing/2014/main" id="{CD479DA3-4A1A-74AE-26DA-FD6E65250CCE}"/>
+                <a16:creationId xmlns:a16="http://schemas.microsoft.com/office/drawing/2014/main" xmlns="" id="{CD479DA3-4A1A-74AE-26DA-FD6E65250CCE}"/>
               </a:ext>
             </a:extLst>
           </p:cNvPr>
@@ -8714,7 +8443,7 @@
               <p:cNvPr id="3" name="Content Placeholder 2">
                 <a:extLst>
                   <a:ext uri="{FF2B5EF4-FFF2-40B4-BE49-F238E27FC236}">
-                    <a16:creationId xmlns:a16="http://schemas.microsoft.com/office/drawing/2014/main" id="{D674119D-90D2-5043-F365-B3EB6F84791A}"/>
+                    <a16:creationId xmlns:a16="http://schemas.microsoft.com/office/drawing/2014/main" xmlns="" id="{D674119D-90D2-5043-F365-B3EB6F84791A}"/>
                   </a:ext>
                 </a:extLst>
               </p:cNvPr>
@@ -8727,8 +8456,8 @@
             </p:nvSpPr>
             <p:spPr>
               <a:xfrm>
-                <a:off x="5540830" y="1836510"/>
-                <a:ext cx="6520542" cy="5021489"/>
+                <a:off x="838201" y="1836510"/>
+                <a:ext cx="11353800" cy="5021489"/>
               </a:xfrm>
             </p:spPr>
             <p:txBody>
@@ -8753,7 +8482,15 @@
                 </a:pPr>
                 <a:r>
                   <a:rPr lang="pt-BR" dirty="0"/>
-                  <a:t>Exemplo: um robô, um algoritmo de trading, carro autônomo.</a:t>
+                  <a:t>Exemplo: um robô, </a:t>
+                </a:r>
+                <a:r>
+                  <a:rPr lang="pt-BR" dirty="0" smtClean="0"/>
+                  <a:t>um </a:t>
+                </a:r>
+                <a:r>
+                  <a:rPr lang="pt-BR" dirty="0"/>
+                  <a:t>carro autônomo.</a:t>
                 </a:r>
               </a:p>
               <a:p>
@@ -8763,8 +8500,23 @@
                 </a:r>
                 <a:r>
                   <a:rPr lang="pt-BR" dirty="0"/>
-                  <a:t> O mundo onde o agente opera e com o qual interage.</a:t>
+                  <a:t> O mundo </a:t>
                 </a:r>
+                <a:r>
+                  <a:rPr lang="pt-BR" dirty="0" smtClean="0"/>
+                  <a:t>com o qual o agente interage.</a:t>
+                </a:r>
+              </a:p>
+              <a:p>
+                <a:pPr lvl="1">
+                  <a:buFont typeface="Wingdings" panose="05000000000000000000" pitchFamily="2" charset="2"/>
+                  <a:buChar char="§"/>
+                </a:pPr>
+                <a:r>
+                  <a:rPr lang="pt-BR" dirty="0" smtClean="0"/>
+                  <a:t>Exemplo: um galpão, uma cidade, um tabuleiro de jogo.</a:t>
+                </a:r>
+                <a:endParaRPr lang="pt-BR" dirty="0"/>
               </a:p>
               <a:p>
                 <a:r>
@@ -8787,8 +8539,23 @@
                 </a14:m>
                 <a:r>
                   <a:rPr lang="pt-BR" dirty="0"/>
-                  <a:t>): A situação atual do agente no ambiente.</a:t>
+                  <a:t>): A situação atual do agente no ambiente</a:t>
                 </a:r>
+                <a:r>
+                  <a:rPr lang="pt-BR" dirty="0" smtClean="0"/>
+                  <a:t>.</a:t>
+                </a:r>
+              </a:p>
+              <a:p>
+                <a:pPr lvl="1">
+                  <a:buFont typeface="Wingdings" panose="05000000000000000000" pitchFamily="2" charset="2"/>
+                  <a:buChar char="§"/>
+                </a:pPr>
+                <a:r>
+                  <a:rPr lang="pt-BR" dirty="0" smtClean="0"/>
+                  <a:t>Exemplo: A posição do agente e dos objetos/obstáculos no galpão, cidade ou jogo.</a:t>
+                </a:r>
+                <a:endParaRPr lang="pt-BR" dirty="0"/>
               </a:p>
               <a:p>
                 <a:r>
@@ -8811,8 +8578,23 @@
                 </a14:m>
                 <a:r>
                   <a:rPr lang="pt-BR" dirty="0"/>
-                  <a:t>): O que o agente pode fazer.</a:t>
+                  <a:t>): O que o agente pode fazer</a:t>
                 </a:r>
+                <a:r>
+                  <a:rPr lang="pt-BR" dirty="0" smtClean="0"/>
+                  <a:t>.</a:t>
+                </a:r>
+              </a:p>
+              <a:p>
+                <a:pPr lvl="1">
+                  <a:buFont typeface="Wingdings" panose="05000000000000000000" pitchFamily="2" charset="2"/>
+                  <a:buChar char="§"/>
+                </a:pPr>
+                <a:r>
+                  <a:rPr lang="pt-BR" dirty="0" smtClean="0"/>
+                  <a:t>Exemplo: movimentos (esquerda, direita, para cima/baixo), acelerar, frear.</a:t>
+                </a:r>
+                <a:endParaRPr lang="pt-BR" dirty="0"/>
               </a:p>
               <a:p>
                 <a:r>
@@ -8835,7 +8617,15 @@
                 </a14:m>
                 <a:r>
                   <a:rPr lang="pt-BR" dirty="0"/>
-                  <a:t>): O feedback (positivo ou negativo) recebido após uma ação.</a:t>
+                  <a:t>): O </a:t>
+                </a:r>
+                <a:r>
+                  <a:rPr lang="pt-BR" i="1" dirty="0"/>
+                  <a:t>feedback</a:t>
+                </a:r>
+                <a:r>
+                  <a:rPr lang="pt-BR" dirty="0"/>
+                  <a:t> (positivo ou negativo) recebido após uma ação.</a:t>
                 </a:r>
               </a:p>
             </p:txBody>
@@ -8847,7 +8637,7 @@
               <p:cNvPr id="3" name="Content Placeholder 2">
                 <a:extLst>
                   <a:ext uri="{FF2B5EF4-FFF2-40B4-BE49-F238E27FC236}">
-                    <a16:creationId xmlns:a16="http://schemas.microsoft.com/office/drawing/2014/main" id="{D674119D-90D2-5043-F365-B3EB6F84791A}"/>
+                    <a16:creationId xmlns:a16="http://schemas.microsoft.com/office/drawing/2014/main" xmlns:a14="http://schemas.microsoft.com/office/drawing/2010/main" xmlns="" id="{D674119D-90D2-5043-F365-B3EB6F84791A}"/>
                   </a:ext>
                 </a:extLst>
               </p:cNvPr>
@@ -8860,13 +8650,13 @@
             </p:nvSpPr>
             <p:spPr>
               <a:xfrm>
-                <a:off x="5540830" y="1836510"/>
-                <a:ext cx="6520542" cy="5021489"/>
+                <a:off x="838201" y="1836510"/>
+                <a:ext cx="11353800" cy="5021489"/>
               </a:xfrm>
-              <a:blipFill>
+              <a:blipFill rotWithShape="0">
                 <a:blip r:embed="rId3"/>
                 <a:stretch>
-                  <a:fillRect l="-1682" t="-1942" r="-2243"/>
+                  <a:fillRect l="-967" t="-1942"/>
                 </a:stretch>
               </a:blipFill>
             </p:spPr>
@@ -8875,7 +8665,526 @@
               <a:lstStyle/>
               <a:p>
                 <a:r>
-                  <a:rPr lang="en-US">
+                  <a:rPr lang="pt-BR">
+                    <a:noFill/>
+                  </a:rPr>
+                  <a:t> </a:t>
+                </a:r>
+              </a:p>
+            </p:txBody>
+          </p:sp>
+        </mc:Fallback>
+      </mc:AlternateContent>
+    </p:spTree>
+    <p:extLst>
+      <p:ext uri="{BB962C8B-B14F-4D97-AF65-F5344CB8AC3E}">
+        <p14:creationId xmlns:p14="http://schemas.microsoft.com/office/powerpoint/2010/main" val="2044752096"/>
+      </p:ext>
+    </p:extLst>
+  </p:cSld>
+  <p:clrMapOvr>
+    <a:masterClrMapping/>
+  </p:clrMapOvr>
+</p:sld>
+</file>
+
+<file path=ppt/slides/slide9.xml><?xml version="1.0" encoding="utf-8"?>
+<p:sld xmlns:a="http://schemas.openxmlformats.org/drawingml/2006/main" xmlns:r="http://schemas.openxmlformats.org/officeDocument/2006/relationships" xmlns:p="http://schemas.openxmlformats.org/presentationml/2006/main">
+  <p:cSld>
+    <p:spTree>
+      <p:nvGrpSpPr>
+        <p:cNvPr id="1" name="">
+          <a:extLst>
+            <a:ext uri="{FF2B5EF4-FFF2-40B4-BE49-F238E27FC236}">
+              <a16:creationId xmlns:a16="http://schemas.microsoft.com/office/drawing/2014/main" xmlns="" id="{DDB2BBDA-DAF3-B7AC-FB99-7C5B9285F912}"/>
+            </a:ext>
+          </a:extLst>
+        </p:cNvPr>
+        <p:cNvGrpSpPr/>
+        <p:nvPr/>
+      </p:nvGrpSpPr>
+      <p:grpSpPr>
+        <a:xfrm>
+          <a:off x="0" y="0"/>
+          <a:ext cx="0" cy="0"/>
+          <a:chOff x="0" y="0"/>
+          <a:chExt cx="0" cy="0"/>
+        </a:xfrm>
+      </p:grpSpPr>
+      <p:sp>
+        <p:nvSpPr>
+          <p:cNvPr id="2" name="Title 1">
+            <a:extLst>
+              <a:ext uri="{FF2B5EF4-FFF2-40B4-BE49-F238E27FC236}">
+                <a16:creationId xmlns:a16="http://schemas.microsoft.com/office/drawing/2014/main" xmlns="" id="{A98D36C9-8653-8E41-11D8-585B6AC0D03D}"/>
+              </a:ext>
+            </a:extLst>
+          </p:cNvPr>
+          <p:cNvSpPr>
+            <a:spLocks noGrp="1"/>
+          </p:cNvSpPr>
+          <p:nvPr>
+            <p:ph type="title"/>
+          </p:nvPr>
+        </p:nvSpPr>
+        <p:spPr/>
+        <p:txBody>
+          <a:bodyPr/>
+          <a:lstStyle/>
+          <a:p>
+            <a:r>
+              <a:rPr lang="en-US" dirty="0" err="1"/>
+              <a:t>Conceitos</a:t>
+            </a:r>
+            <a:r>
+              <a:rPr lang="en-US" dirty="0"/>
+              <a:t> </a:t>
+            </a:r>
+            <a:r>
+              <a:rPr lang="en-US" dirty="0" err="1"/>
+              <a:t>fundamentais</a:t>
+            </a:r>
+            <a:r>
+              <a:rPr lang="en-US" dirty="0"/>
+              <a:t> de RL</a:t>
+            </a:r>
+          </a:p>
+        </p:txBody>
+      </p:sp>
+      <mc:AlternateContent xmlns:mc="http://schemas.openxmlformats.org/markup-compatibility/2006">
+        <mc:Choice xmlns:a14="http://schemas.microsoft.com/office/drawing/2010/main" Requires="a14">
+          <p:sp>
+            <p:nvSpPr>
+              <p:cNvPr id="3" name="Content Placeholder 2">
+                <a:extLst>
+                  <a:ext uri="{FF2B5EF4-FFF2-40B4-BE49-F238E27FC236}">
+                    <a16:creationId xmlns:a16="http://schemas.microsoft.com/office/drawing/2014/main" xmlns="" id="{981046E0-93D4-BF9F-C552-72A01838A8A3}"/>
+                  </a:ext>
+                </a:extLst>
+              </p:cNvPr>
+              <p:cNvSpPr>
+                <a:spLocks noGrp="1"/>
+              </p:cNvSpPr>
+              <p:nvPr>
+                <p:ph idx="1"/>
+              </p:nvPr>
+            </p:nvSpPr>
+            <p:spPr>
+              <a:xfrm>
+                <a:off x="5370022" y="1836510"/>
+                <a:ext cx="6821978" cy="5021489"/>
+              </a:xfrm>
+            </p:spPr>
+            <p:txBody>
+              <a:bodyPr>
+                <a:normAutofit/>
+              </a:bodyPr>
+              <a:lstStyle/>
+              <a:p>
+                <a:r>
+                  <a:rPr lang="pt-BR" dirty="0" smtClean="0"/>
+                  <a:t>O agente e o ambiente interagem em etapas de tempo discreto: </a:t>
+                </a:r>
+                <a14:m>
+                  <m:oMath xmlns:m="http://schemas.openxmlformats.org/officeDocument/2006/math">
+                    <m:r>
+                      <a:rPr lang="pt-BR" b="0" i="1" smtClean="0">
+                        <a:latin typeface="Cambria Math" panose="02040503050406030204" pitchFamily="18" charset="0"/>
+                      </a:rPr>
+                      <m:t>𝑡</m:t>
+                    </m:r>
+                    <m:r>
+                      <a:rPr lang="pt-BR" b="0" i="1" smtClean="0">
+                        <a:latin typeface="Cambria Math" panose="02040503050406030204" pitchFamily="18" charset="0"/>
+                      </a:rPr>
+                      <m:t>, </m:t>
+                    </m:r>
+                    <m:r>
+                      <a:rPr lang="pt-BR" b="0" i="1" smtClean="0">
+                        <a:latin typeface="Cambria Math" panose="02040503050406030204" pitchFamily="18" charset="0"/>
+                      </a:rPr>
+                      <m:t>𝑡</m:t>
+                    </m:r>
+                    <m:r>
+                      <a:rPr lang="pt-BR" b="0" i="1" smtClean="0">
+                        <a:latin typeface="Cambria Math" panose="02040503050406030204" pitchFamily="18" charset="0"/>
+                      </a:rPr>
+                      <m:t>+1, </m:t>
+                    </m:r>
+                    <m:r>
+                      <a:rPr lang="pt-BR" b="0" i="1" smtClean="0">
+                        <a:latin typeface="Cambria Math" panose="02040503050406030204" pitchFamily="18" charset="0"/>
+                      </a:rPr>
+                      <m:t>𝑡</m:t>
+                    </m:r>
+                    <m:r>
+                      <a:rPr lang="pt-BR" b="0" i="1" smtClean="0">
+                        <a:latin typeface="Cambria Math" panose="02040503050406030204" pitchFamily="18" charset="0"/>
+                      </a:rPr>
+                      <m:t>+2, …, </m:t>
+                    </m:r>
+                    <m:r>
+                      <a:rPr lang="pt-BR" b="0" i="1" smtClean="0">
+                        <a:latin typeface="Cambria Math" panose="02040503050406030204" pitchFamily="18" charset="0"/>
+                      </a:rPr>
+                      <m:t>𝑇</m:t>
+                    </m:r>
+                  </m:oMath>
+                </a14:m>
+                <a:r>
+                  <a:rPr lang="pt-BR" dirty="0"/>
+                  <a:t>.</a:t>
+                </a:r>
+              </a:p>
+              <a:p>
+                <a:r>
+                  <a:rPr lang="pt-BR" dirty="0"/>
+                  <a:t>A cada instante t, o agente </a:t>
+                </a:r>
+              </a:p>
+              <a:p>
+                <a:pPr lvl="1">
+                  <a:buFont typeface="Wingdings" panose="05000000000000000000" pitchFamily="2" charset="2"/>
+                  <a:buChar char="§"/>
+                </a:pPr>
+                <a:r>
+                  <a:rPr lang="pt-BR" dirty="0"/>
+                  <a:t>o</a:t>
+                </a:r>
+                <a:r>
+                  <a:rPr lang="pt-BR" dirty="0" smtClean="0"/>
+                  <a:t>bserva o </a:t>
+                </a:r>
+                <a:r>
+                  <a:rPr lang="pt-BR" dirty="0"/>
+                  <a:t>estado </a:t>
+                </a:r>
+                <a14:m>
+                  <m:oMath xmlns:m="http://schemas.openxmlformats.org/officeDocument/2006/math">
+                    <m:sSub>
+                      <m:sSubPr>
+                        <m:ctrlPr>
+                          <a:rPr lang="pt-BR" i="1" smtClean="0">
+                            <a:latin typeface="Cambria Math" panose="02040503050406030204" pitchFamily="18" charset="0"/>
+                          </a:rPr>
+                        </m:ctrlPr>
+                      </m:sSubPr>
+                      <m:e>
+                        <m:r>
+                          <a:rPr lang="pt-BR" b="0" i="1" smtClean="0">
+                            <a:latin typeface="Cambria Math" panose="02040503050406030204" pitchFamily="18" charset="0"/>
+                          </a:rPr>
+                          <m:t>𝑠</m:t>
+                        </m:r>
+                      </m:e>
+                      <m:sub>
+                        <m:r>
+                          <a:rPr lang="pt-BR" b="0" i="1" smtClean="0">
+                            <a:latin typeface="Cambria Math" panose="02040503050406030204" pitchFamily="18" charset="0"/>
+                          </a:rPr>
+                          <m:t>𝑡</m:t>
+                        </m:r>
+                      </m:sub>
+                    </m:sSub>
+                    <m:r>
+                      <a:rPr lang="pt-BR" b="0" i="1" smtClean="0">
+                        <a:latin typeface="Cambria Math" panose="02040503050406030204" pitchFamily="18" charset="0"/>
+                        <a:ea typeface="Cambria Math" panose="02040503050406030204" pitchFamily="18" charset="0"/>
+                      </a:rPr>
+                      <m:t>∈</m:t>
+                    </m:r>
+                    <m:r>
+                      <a:rPr lang="pt-BR" b="0" i="1" smtClean="0">
+                        <a:latin typeface="Cambria Math" panose="02040503050406030204" pitchFamily="18" charset="0"/>
+                        <a:ea typeface="Cambria Math" panose="02040503050406030204" pitchFamily="18" charset="0"/>
+                      </a:rPr>
+                      <m:t>𝑆</m:t>
+                    </m:r>
+                  </m:oMath>
+                </a14:m>
+                <a:r>
+                  <a:rPr lang="pt-BR" dirty="0"/>
+                  <a:t> (conjunto de estados </a:t>
+                </a:r>
+                <a:r>
+                  <a:rPr lang="pt-BR" dirty="0" smtClean="0"/>
+                  <a:t>possíveis).</a:t>
+                </a:r>
+                <a:endParaRPr lang="pt-BR" dirty="0"/>
+              </a:p>
+              <a:p>
+                <a:pPr lvl="1">
+                  <a:buFont typeface="Wingdings" panose="05000000000000000000" pitchFamily="2" charset="2"/>
+                  <a:buChar char="§"/>
+                </a:pPr>
+                <a:r>
+                  <a:rPr lang="pt-BR" dirty="0"/>
+                  <a:t>c</a:t>
+                </a:r>
+                <a:r>
+                  <a:rPr lang="pt-BR" dirty="0" smtClean="0"/>
+                  <a:t>om base em </a:t>
+                </a:r>
+                <a14:m>
+                  <m:oMath xmlns:m="http://schemas.openxmlformats.org/officeDocument/2006/math">
+                    <m:sSub>
+                      <m:sSubPr>
+                        <m:ctrlPr>
+                          <a:rPr lang="pt-BR" i="1">
+                            <a:latin typeface="Cambria Math" panose="02040503050406030204" pitchFamily="18" charset="0"/>
+                          </a:rPr>
+                        </m:ctrlPr>
+                      </m:sSubPr>
+                      <m:e>
+                        <m:r>
+                          <a:rPr lang="pt-BR" i="1">
+                            <a:latin typeface="Cambria Math" panose="02040503050406030204" pitchFamily="18" charset="0"/>
+                          </a:rPr>
+                          <m:t>𝑠</m:t>
+                        </m:r>
+                      </m:e>
+                      <m:sub>
+                        <m:r>
+                          <a:rPr lang="pt-BR" i="1">
+                            <a:latin typeface="Cambria Math" panose="02040503050406030204" pitchFamily="18" charset="0"/>
+                          </a:rPr>
+                          <m:t>𝑡</m:t>
+                        </m:r>
+                      </m:sub>
+                    </m:sSub>
+                  </m:oMath>
+                </a14:m>
+                <a:r>
+                  <a:rPr lang="pt-BR" dirty="0" smtClean="0"/>
+                  <a:t>, ele seleciona uma ação </a:t>
+                </a:r>
+                <a14:m>
+                  <m:oMath xmlns:m="http://schemas.openxmlformats.org/officeDocument/2006/math">
+                    <m:sSub>
+                      <m:sSubPr>
+                        <m:ctrlPr>
+                          <a:rPr lang="pt-BR" i="1">
+                            <a:latin typeface="Cambria Math" panose="02040503050406030204" pitchFamily="18" charset="0"/>
+                          </a:rPr>
+                        </m:ctrlPr>
+                      </m:sSubPr>
+                      <m:e>
+                        <m:r>
+                          <a:rPr lang="pt-BR" b="0" i="1" smtClean="0">
+                            <a:latin typeface="Cambria Math" panose="02040503050406030204" pitchFamily="18" charset="0"/>
+                          </a:rPr>
+                          <m:t>𝑎</m:t>
+                        </m:r>
+                      </m:e>
+                      <m:sub>
+                        <m:r>
+                          <a:rPr lang="pt-BR" i="1">
+                            <a:latin typeface="Cambria Math" panose="02040503050406030204" pitchFamily="18" charset="0"/>
+                          </a:rPr>
+                          <m:t>𝑡</m:t>
+                        </m:r>
+                      </m:sub>
+                    </m:sSub>
+                    <m:r>
+                      <a:rPr lang="pt-BR" i="1">
+                        <a:latin typeface="Cambria Math" panose="02040503050406030204" pitchFamily="18" charset="0"/>
+                        <a:ea typeface="Cambria Math" panose="02040503050406030204" pitchFamily="18" charset="0"/>
+                      </a:rPr>
+                      <m:t>∈</m:t>
+                    </m:r>
+                    <m:r>
+                      <a:rPr lang="pt-BR" b="0" i="1" smtClean="0">
+                        <a:latin typeface="Cambria Math" panose="02040503050406030204" pitchFamily="18" charset="0"/>
+                        <a:ea typeface="Cambria Math" panose="02040503050406030204" pitchFamily="18" charset="0"/>
+                      </a:rPr>
+                      <m:t>𝐴</m:t>
+                    </m:r>
+                  </m:oMath>
+                </a14:m>
+                <a:r>
+                  <a:rPr lang="pt-BR" dirty="0"/>
+                  <a:t> (conjunto de ações </a:t>
+                </a:r>
+                <a:r>
+                  <a:rPr lang="pt-BR" dirty="0" smtClean="0"/>
+                  <a:t>disponíveis).</a:t>
+                </a:r>
+                <a:endParaRPr lang="pt-BR" dirty="0"/>
+              </a:p>
+              <a:p>
+                <a:pPr lvl="1">
+                  <a:buFont typeface="Wingdings" panose="05000000000000000000" pitchFamily="2" charset="2"/>
+                  <a:buChar char="§"/>
+                </a:pPr>
+                <a:r>
+                  <a:rPr lang="pt-BR" dirty="0"/>
+                  <a:t>u</a:t>
+                </a:r>
+                <a:r>
+                  <a:rPr lang="pt-BR" dirty="0" smtClean="0"/>
+                  <a:t>m </a:t>
+                </a:r>
+                <a:r>
+                  <a:rPr lang="pt-BR" dirty="0"/>
+                  <a:t>instante depois, </a:t>
+                </a:r>
+                <a:r>
+                  <a:rPr lang="pt-BR" dirty="0" smtClean="0"/>
+                  <a:t>como </a:t>
+                </a:r>
+                <a:r>
+                  <a:rPr lang="pt-BR" dirty="0"/>
+                  <a:t>consequência de sua ação, o agente recebe uma </a:t>
+                </a:r>
+                <a:r>
+                  <a:rPr lang="pt-BR" dirty="0" smtClean="0"/>
+                  <a:t>recompensa, </a:t>
+                </a:r>
+                <a14:m>
+                  <m:oMath xmlns:m="http://schemas.openxmlformats.org/officeDocument/2006/math">
+                    <m:sSub>
+                      <m:sSubPr>
+                        <m:ctrlPr>
+                          <a:rPr lang="pt-BR" i="1">
+                            <a:latin typeface="Cambria Math" panose="02040503050406030204" pitchFamily="18" charset="0"/>
+                          </a:rPr>
+                        </m:ctrlPr>
+                      </m:sSubPr>
+                      <m:e>
+                        <m:r>
+                          <a:rPr lang="pt-BR" b="0" i="1" smtClean="0">
+                            <a:latin typeface="Cambria Math" panose="02040503050406030204" pitchFamily="18" charset="0"/>
+                          </a:rPr>
+                          <m:t>𝑟</m:t>
+                        </m:r>
+                      </m:e>
+                      <m:sub>
+                        <m:r>
+                          <a:rPr lang="pt-BR" i="1">
+                            <a:latin typeface="Cambria Math" panose="02040503050406030204" pitchFamily="18" charset="0"/>
+                          </a:rPr>
+                          <m:t>𝑡</m:t>
+                        </m:r>
+                        <m:r>
+                          <a:rPr lang="pt-BR" b="0" i="1" smtClean="0">
+                            <a:latin typeface="Cambria Math" panose="02040503050406030204" pitchFamily="18" charset="0"/>
+                          </a:rPr>
+                          <m:t>+1</m:t>
+                        </m:r>
+                      </m:sub>
+                    </m:sSub>
+                    <m:r>
+                      <a:rPr lang="pt-BR" i="1">
+                        <a:latin typeface="Cambria Math" panose="02040503050406030204" pitchFamily="18" charset="0"/>
+                        <a:ea typeface="Cambria Math" panose="02040503050406030204" pitchFamily="18" charset="0"/>
+                      </a:rPr>
+                      <m:t>∈</m:t>
+                    </m:r>
+                    <m:r>
+                      <a:rPr lang="pt-BR" b="0" i="1" smtClean="0">
+                        <a:latin typeface="Cambria Math" panose="02040503050406030204" pitchFamily="18" charset="0"/>
+                        <a:ea typeface="Cambria Math" panose="02040503050406030204" pitchFamily="18" charset="0"/>
+                      </a:rPr>
+                      <m:t>𝑅</m:t>
+                    </m:r>
+                  </m:oMath>
+                </a14:m>
+                <a:r>
+                  <a:rPr lang="pt-BR" dirty="0" smtClean="0"/>
+                  <a:t> (conjunto de todas as possíveis recompensas).</a:t>
+                </a:r>
+              </a:p>
+              <a:p>
+                <a:pPr lvl="1">
+                  <a:buFont typeface="Wingdings" panose="05000000000000000000" pitchFamily="2" charset="2"/>
+                  <a:buChar char="§"/>
+                </a:pPr>
+                <a:r>
+                  <a:rPr lang="pt-BR" dirty="0" smtClean="0"/>
+                  <a:t>e </a:t>
+                </a:r>
+                <a:r>
+                  <a:rPr lang="pt-BR" dirty="0"/>
+                  <a:t>se encontra em um novo estado, </a:t>
+                </a:r>
+                <a14:m>
+                  <m:oMath xmlns:m="http://schemas.openxmlformats.org/officeDocument/2006/math">
+                    <m:sSub>
+                      <m:sSubPr>
+                        <m:ctrlPr>
+                          <a:rPr lang="pt-BR" i="1">
+                            <a:latin typeface="Cambria Math" panose="02040503050406030204" pitchFamily="18" charset="0"/>
+                          </a:rPr>
+                        </m:ctrlPr>
+                      </m:sSubPr>
+                      <m:e>
+                        <m:r>
+                          <a:rPr lang="pt-BR" i="1">
+                            <a:latin typeface="Cambria Math" panose="02040503050406030204" pitchFamily="18" charset="0"/>
+                          </a:rPr>
+                          <m:t>𝑠</m:t>
+                        </m:r>
+                      </m:e>
+                      <m:sub>
+                        <m:r>
+                          <a:rPr lang="pt-BR" i="1">
+                            <a:latin typeface="Cambria Math" panose="02040503050406030204" pitchFamily="18" charset="0"/>
+                          </a:rPr>
+                          <m:t>𝑡</m:t>
+                        </m:r>
+                        <m:r>
+                          <a:rPr lang="pt-BR" b="0" i="1" smtClean="0">
+                            <a:latin typeface="Cambria Math" panose="02040503050406030204" pitchFamily="18" charset="0"/>
+                          </a:rPr>
+                          <m:t>+1</m:t>
+                        </m:r>
+                      </m:sub>
+                    </m:sSub>
+                  </m:oMath>
+                </a14:m>
+                <a:r>
+                  <a:rPr lang="pt-BR" dirty="0" smtClean="0"/>
+                  <a:t>.</a:t>
+                </a:r>
+              </a:p>
+            </p:txBody>
+          </p:sp>
+        </mc:Choice>
+        <mc:Fallback>
+          <p:sp>
+            <p:nvSpPr>
+              <p:cNvPr id="3" name="Content Placeholder 2">
+                <a:extLst>
+                  <a:ext uri="{FF2B5EF4-FFF2-40B4-BE49-F238E27FC236}">
+                    <a16:creationId xmlns:a16="http://schemas.microsoft.com/office/drawing/2014/main" xmlns:a14="http://schemas.microsoft.com/office/drawing/2010/main" xmlns="" id="{981046E0-93D4-BF9F-C552-72A01838A8A3}"/>
+                  </a:ext>
+                </a:extLst>
+              </p:cNvPr>
+              <p:cNvSpPr>
+                <a:spLocks noGrp="1" noRot="1" noChangeAspect="1" noMove="1" noResize="1" noEditPoints="1" noAdjustHandles="1" noChangeArrowheads="1" noChangeShapeType="1" noTextEdit="1"/>
+              </p:cNvSpPr>
+              <p:nvPr>
+                <p:ph idx="1"/>
+              </p:nvPr>
+            </p:nvSpPr>
+            <p:spPr>
+              <a:xfrm>
+                <a:off x="5370022" y="1836510"/>
+                <a:ext cx="6821978" cy="5021489"/>
+              </a:xfrm>
+              <a:blipFill rotWithShape="0">
+                <a:blip r:embed="rId3"/>
+                <a:stretch>
+                  <a:fillRect l="-1609" t="-1942" r="-2949"/>
+                </a:stretch>
+              </a:blipFill>
+            </p:spPr>
+            <p:txBody>
+              <a:bodyPr/>
+              <a:lstStyle/>
+              <a:p>
+                <a:r>
+                  <a:rPr lang="pt-BR">
                     <a:noFill/>
                   </a:rPr>
                   <a:t> </a:t>
@@ -8890,7 +9199,7 @@
           <p:cNvPr id="61" name="Picture 60">
             <a:extLst>
               <a:ext uri="{FF2B5EF4-FFF2-40B4-BE49-F238E27FC236}">
-                <a16:creationId xmlns:a16="http://schemas.microsoft.com/office/drawing/2014/main" id="{C4C7DDB8-3D9F-2576-E984-51ED03206A3F}"/>
+                <a16:creationId xmlns:a16="http://schemas.microsoft.com/office/drawing/2014/main" xmlns="" id="{22F895FA-1424-E50C-97F4-4F0BE0413C2F}"/>
               </a:ext>
             </a:extLst>
           </p:cNvPr>
@@ -8900,7 +9209,7 @@
           <p:nvPr/>
         </p:nvPicPr>
         <p:blipFill>
-          <a:blip r:embed="rId4">
+          <a:blip r:embed="rId4" cstate="print">
             <a:extLst>
               <a:ext uri="{28A0092B-C50C-407E-A947-70E740481C1C}">
                 <a14:useLocalDpi xmlns:a14="http://schemas.microsoft.com/office/drawing/2010/main" val="0"/>
@@ -8913,8 +9222,8 @@
         </p:blipFill>
         <p:spPr>
           <a:xfrm>
-            <a:off x="130629" y="2859764"/>
-            <a:ext cx="5173338" cy="2335899"/>
+            <a:off x="196684" y="2934833"/>
+            <a:ext cx="5007083" cy="2260830"/>
           </a:xfrm>
           <a:prstGeom prst="rect">
             <a:avLst/>
@@ -8924,7 +9233,7 @@
     </p:spTree>
     <p:extLst>
       <p:ext uri="{BB962C8B-B14F-4D97-AF65-F5344CB8AC3E}">
-        <p14:creationId xmlns:p14="http://schemas.microsoft.com/office/powerpoint/2010/main" val="2044752096"/>
+        <p14:creationId xmlns:p14="http://schemas.microsoft.com/office/powerpoint/2010/main" val="3796655630"/>
       </p:ext>
     </p:extLst>
   </p:cSld>

--- a/slides/C24_Q_learning.pptx
+++ b/slides/C24_Q_learning.pptx
@@ -5,10 +5,10 @@
     <p:sldMasterId id="2147483648" r:id="rId1"/>
   </p:sldMasterIdLst>
   <p:notesMasterIdLst>
-    <p:notesMasterId r:id="rId23"/>
+    <p:notesMasterId r:id="rId25"/>
   </p:notesMasterIdLst>
   <p:handoutMasterIdLst>
-    <p:handoutMasterId r:id="rId24"/>
+    <p:handoutMasterId r:id="rId26"/>
   </p:handoutMasterIdLst>
   <p:sldIdLst>
     <p:sldId id="256" r:id="rId2"/>
@@ -21,17 +21,19 @@
     <p:sldId id="319" r:id="rId9"/>
     <p:sldId id="325" r:id="rId10"/>
     <p:sldId id="326" r:id="rId11"/>
-    <p:sldId id="316" r:id="rId12"/>
-    <p:sldId id="309" r:id="rId13"/>
-    <p:sldId id="310" r:id="rId14"/>
-    <p:sldId id="311" r:id="rId15"/>
-    <p:sldId id="312" r:id="rId16"/>
-    <p:sldId id="313" r:id="rId17"/>
-    <p:sldId id="293" r:id="rId18"/>
-    <p:sldId id="314" r:id="rId19"/>
-    <p:sldId id="306" r:id="rId20"/>
-    <p:sldId id="324" r:id="rId21"/>
-    <p:sldId id="323" r:id="rId22"/>
+    <p:sldId id="327" r:id="rId12"/>
+    <p:sldId id="328" r:id="rId13"/>
+    <p:sldId id="330" r:id="rId14"/>
+    <p:sldId id="316" r:id="rId15"/>
+    <p:sldId id="333" r:id="rId16"/>
+    <p:sldId id="332" r:id="rId17"/>
+    <p:sldId id="329" r:id="rId18"/>
+    <p:sldId id="331" r:id="rId19"/>
+    <p:sldId id="293" r:id="rId20"/>
+    <p:sldId id="314" r:id="rId21"/>
+    <p:sldId id="306" r:id="rId22"/>
+    <p:sldId id="324" r:id="rId23"/>
+    <p:sldId id="323" r:id="rId24"/>
   </p:sldIdLst>
   <p:sldSz cx="12192000" cy="6858000"/>
   <p:notesSz cx="7315200" cy="9601200"/>
@@ -295,7 +297,7 @@
           <a:p>
             <a:fld id="{144F1436-6906-4D93-B7A2-786C327BFA14}" type="datetimeFigureOut">
               <a:rPr lang="nl-BE" smtClean="0"/>
-              <a:t>23/04/2026</a:t>
+              <a:t>24/04/2026</a:t>
             </a:fld>
             <a:endParaRPr lang="nl-BE"/>
           </a:p>
@@ -361,7 +363,7 @@
           <a:p>
             <a:fld id="{F7E56D9B-79AD-444A-AFED-DEC23408F8B4}" type="slidenum">
               <a:rPr lang="nl-BE" smtClean="0"/>
-              <a:t>‹nº›</a:t>
+              <a:t>‹#›</a:t>
             </a:fld>
             <a:endParaRPr lang="nl-BE"/>
           </a:p>
@@ -460,7 +462,7 @@
           <a:p>
             <a:fld id="{AA8CD09E-2914-4F47-B6C1-51B2C31814C9}" type="datetimeFigureOut">
               <a:rPr lang="pt-BR" smtClean="0"/>
-              <a:t>23/04/2026</a:t>
+              <a:t>24/04/2026</a:t>
             </a:fld>
             <a:endParaRPr lang="pt-BR"/>
           </a:p>
@@ -618,7 +620,7 @@
           <a:p>
             <a:fld id="{6FC8D850-966F-45A6-8DE7-15B891E7D40D}" type="slidenum">
               <a:rPr lang="pt-BR" smtClean="0"/>
-              <a:t>‹nº›</a:t>
+              <a:t>‹#›</a:t>
             </a:fld>
             <a:endParaRPr lang="pt-BR"/>
           </a:p>
@@ -811,6 +813,370 @@
 </p:notes>
 </file>
 
+<file path=ppt/notesSlides/notesSlide10.xml><?xml version="1.0" encoding="utf-8"?>
+<p:notes xmlns:a="http://schemas.openxmlformats.org/drawingml/2006/main" xmlns:r="http://schemas.openxmlformats.org/officeDocument/2006/relationships" xmlns:p="http://schemas.openxmlformats.org/presentationml/2006/main">
+  <p:cSld>
+    <p:spTree>
+      <p:nvGrpSpPr>
+        <p:cNvPr id="1" name=""/>
+        <p:cNvGrpSpPr/>
+        <p:nvPr/>
+      </p:nvGrpSpPr>
+      <p:grpSpPr>
+        <a:xfrm>
+          <a:off x="0" y="0"/>
+          <a:ext cx="0" cy="0"/>
+          <a:chOff x="0" y="0"/>
+          <a:chExt cx="0" cy="0"/>
+        </a:xfrm>
+      </p:grpSpPr>
+      <p:sp>
+        <p:nvSpPr>
+          <p:cNvPr id="2" name="Slide Image Placeholder 1"/>
+          <p:cNvSpPr>
+            <a:spLocks noGrp="1" noRot="1" noChangeAspect="1"/>
+          </p:cNvSpPr>
+          <p:nvPr>
+            <p:ph type="sldImg"/>
+          </p:nvPr>
+        </p:nvSpPr>
+        <p:spPr/>
+      </p:sp>
+      <p:sp>
+        <p:nvSpPr>
+          <p:cNvPr id="3" name="Notes Placeholder 2"/>
+          <p:cNvSpPr>
+            <a:spLocks noGrp="1"/>
+          </p:cNvSpPr>
+          <p:nvPr>
+            <p:ph type="body" idx="1"/>
+          </p:nvPr>
+        </p:nvSpPr>
+        <p:spPr/>
+        <p:txBody>
+          <a:bodyPr/>
+          <a:lstStyle/>
+          <a:p>
+            <a:r>
+              <a:rPr lang="pt-BR" dirty="0"/>
+              <a:t>Um algoritmo </a:t>
+            </a:r>
+            <a:r>
+              <a:rPr lang="pt-BR" b="1" i="1" dirty="0"/>
+              <a:t>model-</a:t>
+            </a:r>
+            <a:r>
+              <a:rPr lang="pt-BR" b="1" i="1" dirty="0" err="1"/>
+              <a:t>based</a:t>
+            </a:r>
+            <a:r>
+              <a:rPr lang="pt-BR" dirty="0"/>
+              <a:t> é como alguém que estuda o mapa (regras do ambiente) de uma cidade antes de sair de casa. </a:t>
+            </a:r>
+          </a:p>
+          <a:p>
+            <a:r>
+              <a:rPr lang="pt-BR" dirty="0"/>
+              <a:t>O </a:t>
+            </a:r>
+            <a:r>
+              <a:rPr lang="pt-BR" b="1" dirty="0" err="1"/>
+              <a:t>Q-</a:t>
+            </a:r>
+            <a:r>
+              <a:rPr lang="pt-BR" b="1" i="1" dirty="0" err="1"/>
+              <a:t>learning</a:t>
+            </a:r>
+            <a:r>
+              <a:rPr lang="pt-BR" b="1" dirty="0"/>
+              <a:t> </a:t>
+            </a:r>
+            <a:r>
+              <a:rPr lang="pt-BR" dirty="0"/>
+              <a:t>é a pessoa que sai andando sem mapa, errando até decorar o caminho.</a:t>
+            </a:r>
+          </a:p>
+          <a:p>
+            <a:endParaRPr lang="en-US" dirty="0"/>
+          </a:p>
+        </p:txBody>
+      </p:sp>
+      <p:sp>
+        <p:nvSpPr>
+          <p:cNvPr id="4" name="Slide Number Placeholder 3"/>
+          <p:cNvSpPr>
+            <a:spLocks noGrp="1"/>
+          </p:cNvSpPr>
+          <p:nvPr>
+            <p:ph type="sldNum" sz="quarter" idx="5"/>
+          </p:nvPr>
+        </p:nvSpPr>
+        <p:spPr/>
+        <p:txBody>
+          <a:bodyPr/>
+          <a:lstStyle/>
+          <a:p>
+            <a:fld id="{6FC8D850-966F-45A6-8DE7-15B891E7D40D}" type="slidenum">
+              <a:rPr lang="pt-BR" smtClean="0"/>
+              <a:t>12</a:t>
+            </a:fld>
+            <a:endParaRPr lang="pt-BR"/>
+          </a:p>
+        </p:txBody>
+      </p:sp>
+    </p:spTree>
+    <p:extLst>
+      <p:ext uri="{BB962C8B-B14F-4D97-AF65-F5344CB8AC3E}">
+        <p14:creationId xmlns:p14="http://schemas.microsoft.com/office/powerpoint/2010/main" val="2816586721"/>
+      </p:ext>
+    </p:extLst>
+  </p:cSld>
+  <p:clrMapOvr>
+    <a:masterClrMapping/>
+  </p:clrMapOvr>
+</p:notes>
+</file>
+
+<file path=ppt/notesSlides/notesSlide11.xml><?xml version="1.0" encoding="utf-8"?>
+<p:notes xmlns:a="http://schemas.openxmlformats.org/drawingml/2006/main" xmlns:r="http://schemas.openxmlformats.org/officeDocument/2006/relationships" xmlns:p="http://schemas.openxmlformats.org/presentationml/2006/main">
+  <p:cSld>
+    <p:spTree>
+      <p:nvGrpSpPr>
+        <p:cNvPr id="1" name="">
+          <a:extLst>
+            <a:ext uri="{FF2B5EF4-FFF2-40B4-BE49-F238E27FC236}">
+              <a16:creationId xmlns:a16="http://schemas.microsoft.com/office/drawing/2014/main" id="{255DD39D-8438-4F45-71B4-9F8747421DFC}"/>
+            </a:ext>
+          </a:extLst>
+        </p:cNvPr>
+        <p:cNvGrpSpPr/>
+        <p:nvPr/>
+      </p:nvGrpSpPr>
+      <p:grpSpPr>
+        <a:xfrm>
+          <a:off x="0" y="0"/>
+          <a:ext cx="0" cy="0"/>
+          <a:chOff x="0" y="0"/>
+          <a:chExt cx="0" cy="0"/>
+        </a:xfrm>
+      </p:grpSpPr>
+      <p:sp>
+        <p:nvSpPr>
+          <p:cNvPr id="2" name="Slide Image Placeholder 1">
+            <a:extLst>
+              <a:ext uri="{FF2B5EF4-FFF2-40B4-BE49-F238E27FC236}">
+                <a16:creationId xmlns:a16="http://schemas.microsoft.com/office/drawing/2014/main" id="{6C322D5B-AD1C-1DB1-53A1-6978329C3FD0}"/>
+              </a:ext>
+            </a:extLst>
+          </p:cNvPr>
+          <p:cNvSpPr>
+            <a:spLocks noGrp="1" noRot="1" noChangeAspect="1"/>
+          </p:cNvSpPr>
+          <p:nvPr>
+            <p:ph type="sldImg"/>
+          </p:nvPr>
+        </p:nvSpPr>
+        <p:spPr/>
+      </p:sp>
+      <p:sp>
+        <p:nvSpPr>
+          <p:cNvPr id="3" name="Notes Placeholder 2">
+            <a:extLst>
+              <a:ext uri="{FF2B5EF4-FFF2-40B4-BE49-F238E27FC236}">
+                <a16:creationId xmlns:a16="http://schemas.microsoft.com/office/drawing/2014/main" id="{F5D7455F-337E-5D6B-A02A-380397063D2D}"/>
+              </a:ext>
+            </a:extLst>
+          </p:cNvPr>
+          <p:cNvSpPr>
+            <a:spLocks noGrp="1"/>
+          </p:cNvSpPr>
+          <p:nvPr>
+            <p:ph type="body" idx="1"/>
+          </p:nvPr>
+        </p:nvSpPr>
+        <p:spPr/>
+        <p:txBody>
+          <a:bodyPr/>
+          <a:lstStyle/>
+          <a:p>
+            <a:r>
+              <a:rPr lang="pt-BR" sz="1200" b="1" kern="1200" dirty="0">
+                <a:solidFill>
+                  <a:schemeClr val="tx1"/>
+                </a:solidFill>
+                <a:effectLst/>
+                <a:latin typeface="+mn-lt"/>
+                <a:ea typeface="+mn-ea"/>
+                <a:cs typeface="+mn-cs"/>
+              </a:rPr>
+              <a:t>A Função $Q(s, a)$:</a:t>
+            </a:r>
+            <a:r>
+              <a:rPr lang="pt-BR" dirty="0"/>
+              <a:t> É o retorno esperado (soma das recompensas futuras) se o agente estiver no estado </a:t>
+            </a:r>
+            <a:r>
+              <a:rPr lang="pt-BR" sz="1200" kern="1200" dirty="0">
+                <a:solidFill>
+                  <a:schemeClr val="tx1"/>
+                </a:solidFill>
+                <a:effectLst/>
+                <a:latin typeface="+mn-lt"/>
+                <a:ea typeface="+mn-ea"/>
+                <a:cs typeface="+mn-cs"/>
+              </a:rPr>
+              <a:t>$s$</a:t>
+            </a:r>
+            <a:r>
+              <a:rPr lang="pt-BR" dirty="0"/>
+              <a:t>, escolher a ação </a:t>
+            </a:r>
+            <a:r>
+              <a:rPr lang="pt-BR" sz="1200" kern="1200" dirty="0">
+                <a:solidFill>
+                  <a:schemeClr val="tx1"/>
+                </a:solidFill>
+                <a:effectLst/>
+                <a:latin typeface="+mn-lt"/>
+                <a:ea typeface="+mn-ea"/>
+                <a:cs typeface="+mn-cs"/>
+              </a:rPr>
+              <a:t>$a$</a:t>
+            </a:r>
+            <a:r>
+              <a:rPr lang="pt-BR" dirty="0"/>
+              <a:t> e, a partir daí, agir de forma otimizada.</a:t>
+            </a:r>
+            <a:endParaRPr lang="en-US" dirty="0"/>
+          </a:p>
+        </p:txBody>
+      </p:sp>
+      <p:sp>
+        <p:nvSpPr>
+          <p:cNvPr id="4" name="Slide Number Placeholder 3">
+            <a:extLst>
+              <a:ext uri="{FF2B5EF4-FFF2-40B4-BE49-F238E27FC236}">
+                <a16:creationId xmlns:a16="http://schemas.microsoft.com/office/drawing/2014/main" id="{B5124413-04E6-A99E-E6BA-F56674216BC5}"/>
+              </a:ext>
+            </a:extLst>
+          </p:cNvPr>
+          <p:cNvSpPr>
+            <a:spLocks noGrp="1"/>
+          </p:cNvSpPr>
+          <p:nvPr>
+            <p:ph type="sldNum" sz="quarter" idx="5"/>
+          </p:nvPr>
+        </p:nvSpPr>
+        <p:spPr/>
+        <p:txBody>
+          <a:bodyPr/>
+          <a:lstStyle/>
+          <a:p>
+            <a:fld id="{6FC8D850-966F-45A6-8DE7-15B891E7D40D}" type="slidenum">
+              <a:rPr lang="pt-BR" smtClean="0"/>
+              <a:t>13</a:t>
+            </a:fld>
+            <a:endParaRPr lang="pt-BR"/>
+          </a:p>
+        </p:txBody>
+      </p:sp>
+    </p:spTree>
+    <p:extLst>
+      <p:ext uri="{BB962C8B-B14F-4D97-AF65-F5344CB8AC3E}">
+        <p14:creationId xmlns:p14="http://schemas.microsoft.com/office/powerpoint/2010/main" val="1935245844"/>
+      </p:ext>
+    </p:extLst>
+  </p:cSld>
+  <p:clrMapOvr>
+    <a:masterClrMapping/>
+  </p:clrMapOvr>
+</p:notes>
+</file>
+
+<file path=ppt/notesSlides/notesSlide12.xml><?xml version="1.0" encoding="utf-8"?>
+<p:notes xmlns:a="http://schemas.openxmlformats.org/drawingml/2006/main" xmlns:r="http://schemas.openxmlformats.org/officeDocument/2006/relationships" xmlns:p="http://schemas.openxmlformats.org/presentationml/2006/main">
+  <p:cSld>
+    <p:spTree>
+      <p:nvGrpSpPr>
+        <p:cNvPr id="1" name=""/>
+        <p:cNvGrpSpPr/>
+        <p:nvPr/>
+      </p:nvGrpSpPr>
+      <p:grpSpPr>
+        <a:xfrm>
+          <a:off x="0" y="0"/>
+          <a:ext cx="0" cy="0"/>
+          <a:chOff x="0" y="0"/>
+          <a:chExt cx="0" cy="0"/>
+        </a:xfrm>
+      </p:grpSpPr>
+      <p:sp>
+        <p:nvSpPr>
+          <p:cNvPr id="2" name="Slide Image Placeholder 1"/>
+          <p:cNvSpPr>
+            <a:spLocks noGrp="1" noRot="1" noChangeAspect="1"/>
+          </p:cNvSpPr>
+          <p:nvPr>
+            <p:ph type="sldImg"/>
+          </p:nvPr>
+        </p:nvSpPr>
+        <p:spPr/>
+      </p:sp>
+      <p:sp>
+        <p:nvSpPr>
+          <p:cNvPr id="3" name="Notes Placeholder 2"/>
+          <p:cNvSpPr>
+            <a:spLocks noGrp="1"/>
+          </p:cNvSpPr>
+          <p:nvPr>
+            <p:ph type="body" idx="1"/>
+          </p:nvPr>
+        </p:nvSpPr>
+        <p:spPr/>
+        <p:txBody>
+          <a:bodyPr/>
+          <a:lstStyle/>
+          <a:p>
+            <a:endParaRPr lang="en-US" dirty="0"/>
+          </a:p>
+        </p:txBody>
+      </p:sp>
+      <p:sp>
+        <p:nvSpPr>
+          <p:cNvPr id="4" name="Slide Number Placeholder 3"/>
+          <p:cNvSpPr>
+            <a:spLocks noGrp="1"/>
+          </p:cNvSpPr>
+          <p:nvPr>
+            <p:ph type="sldNum" sz="quarter" idx="5"/>
+          </p:nvPr>
+        </p:nvSpPr>
+        <p:spPr/>
+        <p:txBody>
+          <a:bodyPr/>
+          <a:lstStyle/>
+          <a:p>
+            <a:fld id="{6FC8D850-966F-45A6-8DE7-15B891E7D40D}" type="slidenum">
+              <a:rPr lang="pt-BR" smtClean="0"/>
+              <a:t>17</a:t>
+            </a:fld>
+            <a:endParaRPr lang="pt-BR"/>
+          </a:p>
+        </p:txBody>
+      </p:sp>
+    </p:spTree>
+    <p:extLst>
+      <p:ext uri="{BB962C8B-B14F-4D97-AF65-F5344CB8AC3E}">
+        <p14:creationId xmlns:p14="http://schemas.microsoft.com/office/powerpoint/2010/main" val="2647390871"/>
+      </p:ext>
+    </p:extLst>
+  </p:cSld>
+  <p:clrMapOvr>
+    <a:masterClrMapping/>
+  </p:clrMapOvr>
+</p:notes>
+</file>
+
 <file path=ppt/notesSlides/notesSlide2.xml><?xml version="1.0" encoding="utf-8"?>
 <p:notes xmlns:a="http://schemas.openxmlformats.org/drawingml/2006/main" xmlns:r="http://schemas.openxmlformats.org/officeDocument/2006/relationships" xmlns:p="http://schemas.openxmlformats.org/presentationml/2006/main">
   <p:cSld>
@@ -903,7 +1269,7 @@
         <p:cNvPr id="1" name="">
           <a:extLst>
             <a:ext uri="{FF2B5EF4-FFF2-40B4-BE49-F238E27FC236}">
-              <a16:creationId xmlns:a16="http://schemas.microsoft.com/office/drawing/2014/main" xmlns="" id="{5B4C3711-83BC-221A-A341-2BE62BCF89DC}"/>
+              <a16:creationId xmlns:a16="http://schemas.microsoft.com/office/drawing/2014/main" id="{5B4C3711-83BC-221A-A341-2BE62BCF89DC}"/>
             </a:ext>
           </a:extLst>
         </p:cNvPr>
@@ -923,7 +1289,7 @@
           <p:cNvPr id="2" name="Slide Image Placeholder 1">
             <a:extLst>
               <a:ext uri="{FF2B5EF4-FFF2-40B4-BE49-F238E27FC236}">
-                <a16:creationId xmlns:a16="http://schemas.microsoft.com/office/drawing/2014/main" xmlns="" id="{5957728F-CFA3-D0A6-7780-F800EBAC1F6E}"/>
+                <a16:creationId xmlns:a16="http://schemas.microsoft.com/office/drawing/2014/main" id="{5957728F-CFA3-D0A6-7780-F800EBAC1F6E}"/>
               </a:ext>
             </a:extLst>
           </p:cNvPr>
@@ -941,7 +1307,7 @@
           <p:cNvPr id="3" name="Notes Placeholder 2">
             <a:extLst>
               <a:ext uri="{FF2B5EF4-FFF2-40B4-BE49-F238E27FC236}">
-                <a16:creationId xmlns:a16="http://schemas.microsoft.com/office/drawing/2014/main" xmlns="" id="{4AD3E5CB-A8B8-7F4B-200F-94D044C81C3D}"/>
+                <a16:creationId xmlns:a16="http://schemas.microsoft.com/office/drawing/2014/main" id="{4AD3E5CB-A8B8-7F4B-200F-94D044C81C3D}"/>
               </a:ext>
             </a:extLst>
           </p:cNvPr>
@@ -966,7 +1332,7 @@
           <p:cNvPr id="4" name="Slide Number Placeholder 3">
             <a:extLst>
               <a:ext uri="{FF2B5EF4-FFF2-40B4-BE49-F238E27FC236}">
-                <a16:creationId xmlns:a16="http://schemas.microsoft.com/office/drawing/2014/main" xmlns="" id="{3F9D8EC2-522A-3A24-97FD-162C1CF3C132}"/>
+                <a16:creationId xmlns:a16="http://schemas.microsoft.com/office/drawing/2014/main" id="{3F9D8EC2-522A-3A24-97FD-162C1CF3C132}"/>
               </a:ext>
             </a:extLst>
           </p:cNvPr>
@@ -1011,7 +1377,7 @@
         <p:cNvPr id="1" name="">
           <a:extLst>
             <a:ext uri="{FF2B5EF4-FFF2-40B4-BE49-F238E27FC236}">
-              <a16:creationId xmlns:a16="http://schemas.microsoft.com/office/drawing/2014/main" xmlns="" id="{478600EE-A6A2-2235-BCC6-6DE0C5D8DE78}"/>
+              <a16:creationId xmlns:a16="http://schemas.microsoft.com/office/drawing/2014/main" id="{478600EE-A6A2-2235-BCC6-6DE0C5D8DE78}"/>
             </a:ext>
           </a:extLst>
         </p:cNvPr>
@@ -1031,7 +1397,7 @@
           <p:cNvPr id="2" name="Slide Image Placeholder 1">
             <a:extLst>
               <a:ext uri="{FF2B5EF4-FFF2-40B4-BE49-F238E27FC236}">
-                <a16:creationId xmlns:a16="http://schemas.microsoft.com/office/drawing/2014/main" xmlns="" id="{B1C41149-DCAF-E8F8-FB78-0B242E221738}"/>
+                <a16:creationId xmlns:a16="http://schemas.microsoft.com/office/drawing/2014/main" id="{B1C41149-DCAF-E8F8-FB78-0B242E221738}"/>
               </a:ext>
             </a:extLst>
           </p:cNvPr>
@@ -1049,7 +1415,7 @@
           <p:cNvPr id="3" name="Notes Placeholder 2">
             <a:extLst>
               <a:ext uri="{FF2B5EF4-FFF2-40B4-BE49-F238E27FC236}">
-                <a16:creationId xmlns:a16="http://schemas.microsoft.com/office/drawing/2014/main" xmlns="" id="{F4C5329E-ECB5-4CB1-3A33-CFC57176F475}"/>
+                <a16:creationId xmlns:a16="http://schemas.microsoft.com/office/drawing/2014/main" id="{F4C5329E-ECB5-4CB1-3A33-CFC57176F475}"/>
               </a:ext>
             </a:extLst>
           </p:cNvPr>
@@ -1074,7 +1440,7 @@
           <p:cNvPr id="4" name="Slide Number Placeholder 3">
             <a:extLst>
               <a:ext uri="{FF2B5EF4-FFF2-40B4-BE49-F238E27FC236}">
-                <a16:creationId xmlns:a16="http://schemas.microsoft.com/office/drawing/2014/main" xmlns="" id="{37AB7C02-5FA9-66E4-2433-F97393A5C0BA}"/>
+                <a16:creationId xmlns:a16="http://schemas.microsoft.com/office/drawing/2014/main" id="{37AB7C02-5FA9-66E4-2433-F97393A5C0BA}"/>
               </a:ext>
             </a:extLst>
           </p:cNvPr>
@@ -1119,7 +1485,7 @@
         <p:cNvPr id="1" name="">
           <a:extLst>
             <a:ext uri="{FF2B5EF4-FFF2-40B4-BE49-F238E27FC236}">
-              <a16:creationId xmlns:a16="http://schemas.microsoft.com/office/drawing/2014/main" xmlns="" id="{92F2E69C-0407-4619-FFB1-7502CF033EBA}"/>
+              <a16:creationId xmlns:a16="http://schemas.microsoft.com/office/drawing/2014/main" id="{92F2E69C-0407-4619-FFB1-7502CF033EBA}"/>
             </a:ext>
           </a:extLst>
         </p:cNvPr>
@@ -1139,7 +1505,7 @@
           <p:cNvPr id="2" name="Slide Image Placeholder 1">
             <a:extLst>
               <a:ext uri="{FF2B5EF4-FFF2-40B4-BE49-F238E27FC236}">
-                <a16:creationId xmlns:a16="http://schemas.microsoft.com/office/drawing/2014/main" xmlns="" id="{E3C6894B-B13E-3C0F-BEC3-8A663E98508F}"/>
+                <a16:creationId xmlns:a16="http://schemas.microsoft.com/office/drawing/2014/main" id="{E3C6894B-B13E-3C0F-BEC3-8A663E98508F}"/>
               </a:ext>
             </a:extLst>
           </p:cNvPr>
@@ -1157,7 +1523,7 @@
           <p:cNvPr id="3" name="Notes Placeholder 2">
             <a:extLst>
               <a:ext uri="{FF2B5EF4-FFF2-40B4-BE49-F238E27FC236}">
-                <a16:creationId xmlns:a16="http://schemas.microsoft.com/office/drawing/2014/main" xmlns="" id="{B76A1B01-A242-46E3-F92E-FB0EA28821F9}"/>
+                <a16:creationId xmlns:a16="http://schemas.microsoft.com/office/drawing/2014/main" id="{B76A1B01-A242-46E3-F92E-FB0EA28821F9}"/>
               </a:ext>
             </a:extLst>
           </p:cNvPr>
@@ -1182,7 +1548,7 @@
           <p:cNvPr id="4" name="Slide Number Placeholder 3">
             <a:extLst>
               <a:ext uri="{FF2B5EF4-FFF2-40B4-BE49-F238E27FC236}">
-                <a16:creationId xmlns:a16="http://schemas.microsoft.com/office/drawing/2014/main" xmlns="" id="{4BA915CE-E13E-5840-D0C6-249ACB7C2C1D}"/>
+                <a16:creationId xmlns:a16="http://schemas.microsoft.com/office/drawing/2014/main" id="{4BA915CE-E13E-5840-D0C6-249ACB7C2C1D}"/>
               </a:ext>
             </a:extLst>
           </p:cNvPr>
@@ -1331,7 +1697,7 @@
         <p:cNvPr id="1" name="">
           <a:extLst>
             <a:ext uri="{FF2B5EF4-FFF2-40B4-BE49-F238E27FC236}">
-              <a16:creationId xmlns:a16="http://schemas.microsoft.com/office/drawing/2014/main" xmlns="" id="{0D0A5E72-3763-6194-5E85-BE26354035A3}"/>
+              <a16:creationId xmlns:a16="http://schemas.microsoft.com/office/drawing/2014/main" id="{0D0A5E72-3763-6194-5E85-BE26354035A3}"/>
             </a:ext>
           </a:extLst>
         </p:cNvPr>
@@ -1351,7 +1717,7 @@
           <p:cNvPr id="2" name="Slide Image Placeholder 1">
             <a:extLst>
               <a:ext uri="{FF2B5EF4-FFF2-40B4-BE49-F238E27FC236}">
-                <a16:creationId xmlns:a16="http://schemas.microsoft.com/office/drawing/2014/main" xmlns="" id="{82466988-6655-8B01-840E-0BE3EDB68F07}"/>
+                <a16:creationId xmlns:a16="http://schemas.microsoft.com/office/drawing/2014/main" id="{82466988-6655-8B01-840E-0BE3EDB68F07}"/>
               </a:ext>
             </a:extLst>
           </p:cNvPr>
@@ -1369,7 +1735,7 @@
           <p:cNvPr id="3" name="Notes Placeholder 2">
             <a:extLst>
               <a:ext uri="{FF2B5EF4-FFF2-40B4-BE49-F238E27FC236}">
-                <a16:creationId xmlns:a16="http://schemas.microsoft.com/office/drawing/2014/main" xmlns="" id="{5E09F3D0-11CA-2E8D-04C5-104C59DCE708}"/>
+                <a16:creationId xmlns:a16="http://schemas.microsoft.com/office/drawing/2014/main" id="{5E09F3D0-11CA-2E8D-04C5-104C59DCE708}"/>
               </a:ext>
             </a:extLst>
           </p:cNvPr>
@@ -1414,7 +1780,7 @@
           <p:cNvPr id="4" name="Slide Number Placeholder 3">
             <a:extLst>
               <a:ext uri="{FF2B5EF4-FFF2-40B4-BE49-F238E27FC236}">
-                <a16:creationId xmlns:a16="http://schemas.microsoft.com/office/drawing/2014/main" xmlns="" id="{68F0BCD7-F825-C67D-D845-8316B4C4B6D6}"/>
+                <a16:creationId xmlns:a16="http://schemas.microsoft.com/office/drawing/2014/main" id="{68F0BCD7-F825-C67D-D845-8316B4C4B6D6}"/>
               </a:ext>
             </a:extLst>
           </p:cNvPr>
@@ -1459,7 +1825,7 @@
         <p:cNvPr id="1" name="">
           <a:extLst>
             <a:ext uri="{FF2B5EF4-FFF2-40B4-BE49-F238E27FC236}">
-              <a16:creationId xmlns:a16="http://schemas.microsoft.com/office/drawing/2014/main" xmlns="" id="{0D0A5E72-3763-6194-5E85-BE26354035A3}"/>
+              <a16:creationId xmlns:a16="http://schemas.microsoft.com/office/drawing/2014/main" id="{0D0A5E72-3763-6194-5E85-BE26354035A3}"/>
             </a:ext>
           </a:extLst>
         </p:cNvPr>
@@ -1479,7 +1845,7 @@
           <p:cNvPr id="2" name="Slide Image Placeholder 1">
             <a:extLst>
               <a:ext uri="{FF2B5EF4-FFF2-40B4-BE49-F238E27FC236}">
-                <a16:creationId xmlns:a16="http://schemas.microsoft.com/office/drawing/2014/main" xmlns="" id="{82466988-6655-8B01-840E-0BE3EDB68F07}"/>
+                <a16:creationId xmlns:a16="http://schemas.microsoft.com/office/drawing/2014/main" id="{82466988-6655-8B01-840E-0BE3EDB68F07}"/>
               </a:ext>
             </a:extLst>
           </p:cNvPr>
@@ -1497,7 +1863,7 @@
           <p:cNvPr id="3" name="Notes Placeholder 2">
             <a:extLst>
               <a:ext uri="{FF2B5EF4-FFF2-40B4-BE49-F238E27FC236}">
-                <a16:creationId xmlns:a16="http://schemas.microsoft.com/office/drawing/2014/main" xmlns="" id="{5E09F3D0-11CA-2E8D-04C5-104C59DCE708}"/>
+                <a16:creationId xmlns:a16="http://schemas.microsoft.com/office/drawing/2014/main" id="{5E09F3D0-11CA-2E8D-04C5-104C59DCE708}"/>
               </a:ext>
             </a:extLst>
           </p:cNvPr>
@@ -1542,7 +1908,7 @@
           <p:cNvPr id="4" name="Slide Number Placeholder 3">
             <a:extLst>
               <a:ext uri="{FF2B5EF4-FFF2-40B4-BE49-F238E27FC236}">
-                <a16:creationId xmlns:a16="http://schemas.microsoft.com/office/drawing/2014/main" xmlns="" id="{68F0BCD7-F825-C67D-D845-8316B4C4B6D6}"/>
+                <a16:creationId xmlns:a16="http://schemas.microsoft.com/office/drawing/2014/main" id="{68F0BCD7-F825-C67D-D845-8316B4C4B6D6}"/>
               </a:ext>
             </a:extLst>
           </p:cNvPr>
@@ -1570,6 +1936,130 @@
     <p:extLst>
       <p:ext uri="{BB962C8B-B14F-4D97-AF65-F5344CB8AC3E}">
         <p14:creationId xmlns:p14="http://schemas.microsoft.com/office/powerpoint/2010/main" val="3778172451"/>
+      </p:ext>
+    </p:extLst>
+  </p:cSld>
+  <p:clrMapOvr>
+    <a:masterClrMapping/>
+  </p:clrMapOvr>
+</p:notes>
+</file>
+
+<file path=ppt/notesSlides/notesSlide9.xml><?xml version="1.0" encoding="utf-8"?>
+<p:notes xmlns:a="http://schemas.openxmlformats.org/drawingml/2006/main" xmlns:r="http://schemas.openxmlformats.org/officeDocument/2006/relationships" xmlns:p="http://schemas.openxmlformats.org/presentationml/2006/main">
+  <p:cSld>
+    <p:spTree>
+      <p:nvGrpSpPr>
+        <p:cNvPr id="1" name=""/>
+        <p:cNvGrpSpPr/>
+        <p:nvPr/>
+      </p:nvGrpSpPr>
+      <p:grpSpPr>
+        <a:xfrm>
+          <a:off x="0" y="0"/>
+          <a:ext cx="0" cy="0"/>
+          <a:chOff x="0" y="0"/>
+          <a:chExt cx="0" cy="0"/>
+        </a:xfrm>
+      </p:grpSpPr>
+      <p:sp>
+        <p:nvSpPr>
+          <p:cNvPr id="2" name="Slide Image Placeholder 1"/>
+          <p:cNvSpPr>
+            <a:spLocks noGrp="1" noRot="1" noChangeAspect="1"/>
+          </p:cNvSpPr>
+          <p:nvPr>
+            <p:ph type="sldImg"/>
+          </p:nvPr>
+        </p:nvSpPr>
+        <p:spPr/>
+      </p:sp>
+      <p:sp>
+        <p:nvSpPr>
+          <p:cNvPr id="3" name="Notes Placeholder 2"/>
+          <p:cNvSpPr>
+            <a:spLocks noGrp="1"/>
+          </p:cNvSpPr>
+          <p:nvPr>
+            <p:ph type="body" idx="1"/>
+          </p:nvPr>
+        </p:nvSpPr>
+        <p:spPr/>
+        <p:txBody>
+          <a:bodyPr/>
+          <a:lstStyle/>
+          <a:p>
+            <a:r>
+              <a:rPr lang="pt-BR" b="1" dirty="0"/>
+              <a:t>• PPO (Proximal </a:t>
+            </a:r>
+            <a:r>
+              <a:rPr lang="pt-BR" b="1" dirty="0" err="1"/>
+              <a:t>Policy</a:t>
+            </a:r>
+            <a:r>
+              <a:rPr lang="pt-BR" b="1" dirty="0"/>
+              <a:t> </a:t>
+            </a:r>
+            <a:r>
+              <a:rPr lang="pt-BR" b="1" dirty="0" err="1"/>
+              <a:t>Optimization</a:t>
+            </a:r>
+            <a:r>
+              <a:rPr lang="pt-BR" b="1" dirty="0"/>
+              <a:t>)</a:t>
+            </a:r>
+          </a:p>
+          <a:p>
+            <a:r>
+              <a:rPr lang="pt-BR" dirty="0"/>
+              <a:t>Um dos mais usados hoje. </a:t>
+            </a:r>
+          </a:p>
+          <a:p>
+            <a:r>
+              <a:rPr lang="pt-BR" dirty="0"/>
+              <a:t>Estável e relativamente simples. </a:t>
+            </a:r>
+          </a:p>
+          <a:p>
+            <a:r>
+              <a:rPr lang="pt-BR" dirty="0"/>
+              <a:t>Muito popular em aplicações práticas.</a:t>
+            </a:r>
+          </a:p>
+          <a:p>
+            <a:endParaRPr lang="en-US" dirty="0"/>
+          </a:p>
+        </p:txBody>
+      </p:sp>
+      <p:sp>
+        <p:nvSpPr>
+          <p:cNvPr id="4" name="Slide Number Placeholder 3"/>
+          <p:cNvSpPr>
+            <a:spLocks noGrp="1"/>
+          </p:cNvSpPr>
+          <p:nvPr>
+            <p:ph type="sldNum" sz="quarter" idx="5"/>
+          </p:nvPr>
+        </p:nvSpPr>
+        <p:spPr/>
+        <p:txBody>
+          <a:bodyPr/>
+          <a:lstStyle/>
+          <a:p>
+            <a:fld id="{6FC8D850-966F-45A6-8DE7-15B891E7D40D}" type="slidenum">
+              <a:rPr lang="pt-BR" smtClean="0"/>
+              <a:t>11</a:t>
+            </a:fld>
+            <a:endParaRPr lang="pt-BR"/>
+          </a:p>
+        </p:txBody>
+      </p:sp>
+    </p:spTree>
+    <p:extLst>
+      <p:ext uri="{BB962C8B-B14F-4D97-AF65-F5344CB8AC3E}">
+        <p14:creationId xmlns:p14="http://schemas.microsoft.com/office/powerpoint/2010/main" val="3660457592"/>
       </p:ext>
     </p:extLst>
   </p:cSld>
@@ -1601,7 +2091,7 @@
           <p:cNvPr id="2" name="Título 1">
             <a:extLst>
               <a:ext uri="{FF2B5EF4-FFF2-40B4-BE49-F238E27FC236}">
-                <a16:creationId xmlns:a16="http://schemas.microsoft.com/office/drawing/2014/main" xmlns="" id="{1DB9B4FF-B06E-403C-A326-BDC64D8FF94E}"/>
+                <a16:creationId xmlns:a16="http://schemas.microsoft.com/office/drawing/2014/main" id="{1DB9B4FF-B06E-403C-A326-BDC64D8FF94E}"/>
               </a:ext>
             </a:extLst>
           </p:cNvPr>
@@ -1638,7 +2128,7 @@
           <p:cNvPr id="3" name="Subtítulo 2">
             <a:extLst>
               <a:ext uri="{FF2B5EF4-FFF2-40B4-BE49-F238E27FC236}">
-                <a16:creationId xmlns:a16="http://schemas.microsoft.com/office/drawing/2014/main" xmlns="" id="{247BDFCE-746E-45BF-A319-4733D58D1632}"/>
+                <a16:creationId xmlns:a16="http://schemas.microsoft.com/office/drawing/2014/main" id="{247BDFCE-746E-45BF-A319-4733D58D1632}"/>
               </a:ext>
             </a:extLst>
           </p:cNvPr>
@@ -1708,7 +2198,7 @@
           <p:cNvPr id="4" name="Espaço Reservado para Data 3">
             <a:extLst>
               <a:ext uri="{FF2B5EF4-FFF2-40B4-BE49-F238E27FC236}">
-                <a16:creationId xmlns:a16="http://schemas.microsoft.com/office/drawing/2014/main" xmlns="" id="{9EDE2778-5372-4104-B96D-968184DA8288}"/>
+                <a16:creationId xmlns:a16="http://schemas.microsoft.com/office/drawing/2014/main" id="{9EDE2778-5372-4104-B96D-968184DA8288}"/>
               </a:ext>
             </a:extLst>
           </p:cNvPr>
@@ -1726,7 +2216,7 @@
           <a:p>
             <a:fld id="{63289F7E-B80B-496E-81B4-D396C37C9454}" type="datetimeFigureOut">
               <a:rPr lang="pt-BR" smtClean="0"/>
-              <a:t>23/04/2026</a:t>
+              <a:t>24/04/2026</a:t>
             </a:fld>
             <a:endParaRPr lang="pt-BR"/>
           </a:p>
@@ -1737,7 +2227,7 @@
           <p:cNvPr id="5" name="Espaço Reservado para Rodapé 4">
             <a:extLst>
               <a:ext uri="{FF2B5EF4-FFF2-40B4-BE49-F238E27FC236}">
-                <a16:creationId xmlns:a16="http://schemas.microsoft.com/office/drawing/2014/main" xmlns="" id="{C1DD0F41-C861-4051-988D-3024A37A4B93}"/>
+                <a16:creationId xmlns:a16="http://schemas.microsoft.com/office/drawing/2014/main" id="{C1DD0F41-C861-4051-988D-3024A37A4B93}"/>
               </a:ext>
             </a:extLst>
           </p:cNvPr>
@@ -1762,7 +2252,7 @@
           <p:cNvPr id="6" name="Espaço Reservado para Número de Slide 5">
             <a:extLst>
               <a:ext uri="{FF2B5EF4-FFF2-40B4-BE49-F238E27FC236}">
-                <a16:creationId xmlns:a16="http://schemas.microsoft.com/office/drawing/2014/main" xmlns="" id="{07E5967E-D980-431A-A5DB-3F0C5030A81E}"/>
+                <a16:creationId xmlns:a16="http://schemas.microsoft.com/office/drawing/2014/main" id="{07E5967E-D980-431A-A5DB-3F0C5030A81E}"/>
               </a:ext>
             </a:extLst>
           </p:cNvPr>
@@ -1780,7 +2270,7 @@
           <a:p>
             <a:fld id="{1A7E88B7-70CE-4035-AE73-13FA6FB985D4}" type="slidenum">
               <a:rPr lang="pt-BR" smtClean="0"/>
-              <a:t>‹nº›</a:t>
+              <a:t>‹#›</a:t>
             </a:fld>
             <a:endParaRPr lang="pt-BR"/>
           </a:p>
@@ -1821,7 +2311,7 @@
           <p:cNvPr id="2" name="Título 1">
             <a:extLst>
               <a:ext uri="{FF2B5EF4-FFF2-40B4-BE49-F238E27FC236}">
-                <a16:creationId xmlns:a16="http://schemas.microsoft.com/office/drawing/2014/main" xmlns="" id="{9036C49F-3E68-4175-81BA-3C3FEE44308A}"/>
+                <a16:creationId xmlns:a16="http://schemas.microsoft.com/office/drawing/2014/main" id="{9036C49F-3E68-4175-81BA-3C3FEE44308A}"/>
               </a:ext>
             </a:extLst>
           </p:cNvPr>
@@ -1849,7 +2339,7 @@
           <p:cNvPr id="3" name="Espaço Reservado para Texto Vertical 2">
             <a:extLst>
               <a:ext uri="{FF2B5EF4-FFF2-40B4-BE49-F238E27FC236}">
-                <a16:creationId xmlns:a16="http://schemas.microsoft.com/office/drawing/2014/main" xmlns="" id="{426FA736-3DD3-4D4E-B57B-BBE1D8F7D424}"/>
+                <a16:creationId xmlns:a16="http://schemas.microsoft.com/office/drawing/2014/main" id="{426FA736-3DD3-4D4E-B57B-BBE1D8F7D424}"/>
               </a:ext>
             </a:extLst>
           </p:cNvPr>
@@ -1906,7 +2396,7 @@
           <p:cNvPr id="4" name="Espaço Reservado para Data 3">
             <a:extLst>
               <a:ext uri="{FF2B5EF4-FFF2-40B4-BE49-F238E27FC236}">
-                <a16:creationId xmlns:a16="http://schemas.microsoft.com/office/drawing/2014/main" xmlns="" id="{99E8855C-D8FD-48F6-B14E-861E0DE4D915}"/>
+                <a16:creationId xmlns:a16="http://schemas.microsoft.com/office/drawing/2014/main" id="{99E8855C-D8FD-48F6-B14E-861E0DE4D915}"/>
               </a:ext>
             </a:extLst>
           </p:cNvPr>
@@ -1924,7 +2414,7 @@
           <a:p>
             <a:fld id="{63289F7E-B80B-496E-81B4-D396C37C9454}" type="datetimeFigureOut">
               <a:rPr lang="pt-BR" smtClean="0"/>
-              <a:t>23/04/2026</a:t>
+              <a:t>24/04/2026</a:t>
             </a:fld>
             <a:endParaRPr lang="pt-BR"/>
           </a:p>
@@ -1935,7 +2425,7 @@
           <p:cNvPr id="5" name="Espaço Reservado para Rodapé 4">
             <a:extLst>
               <a:ext uri="{FF2B5EF4-FFF2-40B4-BE49-F238E27FC236}">
-                <a16:creationId xmlns:a16="http://schemas.microsoft.com/office/drawing/2014/main" xmlns="" id="{97C0BB88-2F21-42A5-ACFF-83DA47F2D340}"/>
+                <a16:creationId xmlns:a16="http://schemas.microsoft.com/office/drawing/2014/main" id="{97C0BB88-2F21-42A5-ACFF-83DA47F2D340}"/>
               </a:ext>
             </a:extLst>
           </p:cNvPr>
@@ -1960,7 +2450,7 @@
           <p:cNvPr id="6" name="Espaço Reservado para Número de Slide 5">
             <a:extLst>
               <a:ext uri="{FF2B5EF4-FFF2-40B4-BE49-F238E27FC236}">
-                <a16:creationId xmlns:a16="http://schemas.microsoft.com/office/drawing/2014/main" xmlns="" id="{6CB462B3-1F22-4C05-B4B8-7A279FB7D5E9}"/>
+                <a16:creationId xmlns:a16="http://schemas.microsoft.com/office/drawing/2014/main" id="{6CB462B3-1F22-4C05-B4B8-7A279FB7D5E9}"/>
               </a:ext>
             </a:extLst>
           </p:cNvPr>
@@ -1978,7 +2468,7 @@
           <a:p>
             <a:fld id="{1A7E88B7-70CE-4035-AE73-13FA6FB985D4}" type="slidenum">
               <a:rPr lang="pt-BR" smtClean="0"/>
-              <a:t>‹nº›</a:t>
+              <a:t>‹#›</a:t>
             </a:fld>
             <a:endParaRPr lang="pt-BR"/>
           </a:p>
@@ -2019,7 +2509,7 @@
           <p:cNvPr id="2" name="Título Vertical 1">
             <a:extLst>
               <a:ext uri="{FF2B5EF4-FFF2-40B4-BE49-F238E27FC236}">
-                <a16:creationId xmlns:a16="http://schemas.microsoft.com/office/drawing/2014/main" xmlns="" id="{EAEAB728-701C-4207-A9D5-23FF45C60502}"/>
+                <a16:creationId xmlns:a16="http://schemas.microsoft.com/office/drawing/2014/main" id="{EAEAB728-701C-4207-A9D5-23FF45C60502}"/>
               </a:ext>
             </a:extLst>
           </p:cNvPr>
@@ -2052,7 +2542,7 @@
           <p:cNvPr id="3" name="Espaço Reservado para Texto Vertical 2">
             <a:extLst>
               <a:ext uri="{FF2B5EF4-FFF2-40B4-BE49-F238E27FC236}">
-                <a16:creationId xmlns:a16="http://schemas.microsoft.com/office/drawing/2014/main" xmlns="" id="{BA8C8CCF-7823-480A-9A19-0F664DD17E3B}"/>
+                <a16:creationId xmlns:a16="http://schemas.microsoft.com/office/drawing/2014/main" id="{BA8C8CCF-7823-480A-9A19-0F664DD17E3B}"/>
               </a:ext>
             </a:extLst>
           </p:cNvPr>
@@ -2114,7 +2604,7 @@
           <p:cNvPr id="4" name="Espaço Reservado para Data 3">
             <a:extLst>
               <a:ext uri="{FF2B5EF4-FFF2-40B4-BE49-F238E27FC236}">
-                <a16:creationId xmlns:a16="http://schemas.microsoft.com/office/drawing/2014/main" xmlns="" id="{721D5734-7B1F-425D-942F-6EB73344027C}"/>
+                <a16:creationId xmlns:a16="http://schemas.microsoft.com/office/drawing/2014/main" id="{721D5734-7B1F-425D-942F-6EB73344027C}"/>
               </a:ext>
             </a:extLst>
           </p:cNvPr>
@@ -2132,7 +2622,7 @@
           <a:p>
             <a:fld id="{63289F7E-B80B-496E-81B4-D396C37C9454}" type="datetimeFigureOut">
               <a:rPr lang="pt-BR" smtClean="0"/>
-              <a:t>23/04/2026</a:t>
+              <a:t>24/04/2026</a:t>
             </a:fld>
             <a:endParaRPr lang="pt-BR"/>
           </a:p>
@@ -2143,7 +2633,7 @@
           <p:cNvPr id="5" name="Espaço Reservado para Rodapé 4">
             <a:extLst>
               <a:ext uri="{FF2B5EF4-FFF2-40B4-BE49-F238E27FC236}">
-                <a16:creationId xmlns:a16="http://schemas.microsoft.com/office/drawing/2014/main" xmlns="" id="{1E1AAEAC-F08D-45FE-89EC-B1B349A868C9}"/>
+                <a16:creationId xmlns:a16="http://schemas.microsoft.com/office/drawing/2014/main" id="{1E1AAEAC-F08D-45FE-89EC-B1B349A868C9}"/>
               </a:ext>
             </a:extLst>
           </p:cNvPr>
@@ -2168,7 +2658,7 @@
           <p:cNvPr id="6" name="Espaço Reservado para Número de Slide 5">
             <a:extLst>
               <a:ext uri="{FF2B5EF4-FFF2-40B4-BE49-F238E27FC236}">
-                <a16:creationId xmlns:a16="http://schemas.microsoft.com/office/drawing/2014/main" xmlns="" id="{BAA44493-9911-47B2-87A6-C2141A972BC8}"/>
+                <a16:creationId xmlns:a16="http://schemas.microsoft.com/office/drawing/2014/main" id="{BAA44493-9911-47B2-87A6-C2141A972BC8}"/>
               </a:ext>
             </a:extLst>
           </p:cNvPr>
@@ -2186,7 +2676,7 @@
           <a:p>
             <a:fld id="{1A7E88B7-70CE-4035-AE73-13FA6FB985D4}" type="slidenum">
               <a:rPr lang="pt-BR" smtClean="0"/>
-              <a:t>‹nº›</a:t>
+              <a:t>‹#›</a:t>
             </a:fld>
             <a:endParaRPr lang="pt-BR"/>
           </a:p>
@@ -2227,7 +2717,7 @@
           <p:cNvPr id="2" name="Título 1">
             <a:extLst>
               <a:ext uri="{FF2B5EF4-FFF2-40B4-BE49-F238E27FC236}">
-                <a16:creationId xmlns:a16="http://schemas.microsoft.com/office/drawing/2014/main" xmlns="" id="{71BD44A5-8F21-4626-A01D-48A1C874B1D5}"/>
+                <a16:creationId xmlns:a16="http://schemas.microsoft.com/office/drawing/2014/main" id="{71BD44A5-8F21-4626-A01D-48A1C874B1D5}"/>
               </a:ext>
             </a:extLst>
           </p:cNvPr>
@@ -2255,7 +2745,7 @@
           <p:cNvPr id="3" name="Espaço Reservado para Conteúdo 2">
             <a:extLst>
               <a:ext uri="{FF2B5EF4-FFF2-40B4-BE49-F238E27FC236}">
-                <a16:creationId xmlns:a16="http://schemas.microsoft.com/office/drawing/2014/main" xmlns="" id="{B79E8085-65A9-48AA-951D-71D978BFF4ED}"/>
+                <a16:creationId xmlns:a16="http://schemas.microsoft.com/office/drawing/2014/main" id="{B79E8085-65A9-48AA-951D-71D978BFF4ED}"/>
               </a:ext>
             </a:extLst>
           </p:cNvPr>
@@ -2312,7 +2802,7 @@
           <p:cNvPr id="4" name="Espaço Reservado para Data 3">
             <a:extLst>
               <a:ext uri="{FF2B5EF4-FFF2-40B4-BE49-F238E27FC236}">
-                <a16:creationId xmlns:a16="http://schemas.microsoft.com/office/drawing/2014/main" xmlns="" id="{F05BE1AF-51EA-425D-B188-DE7BD675009F}"/>
+                <a16:creationId xmlns:a16="http://schemas.microsoft.com/office/drawing/2014/main" id="{F05BE1AF-51EA-425D-B188-DE7BD675009F}"/>
               </a:ext>
             </a:extLst>
           </p:cNvPr>
@@ -2330,7 +2820,7 @@
           <a:p>
             <a:fld id="{63289F7E-B80B-496E-81B4-D396C37C9454}" type="datetimeFigureOut">
               <a:rPr lang="pt-BR" smtClean="0"/>
-              <a:t>23/04/2026</a:t>
+              <a:t>24/04/2026</a:t>
             </a:fld>
             <a:endParaRPr lang="pt-BR"/>
           </a:p>
@@ -2341,7 +2831,7 @@
           <p:cNvPr id="5" name="Espaço Reservado para Rodapé 4">
             <a:extLst>
               <a:ext uri="{FF2B5EF4-FFF2-40B4-BE49-F238E27FC236}">
-                <a16:creationId xmlns:a16="http://schemas.microsoft.com/office/drawing/2014/main" xmlns="" id="{121BE632-29CF-4CB9-B365-C9EF38F89BE6}"/>
+                <a16:creationId xmlns:a16="http://schemas.microsoft.com/office/drawing/2014/main" id="{121BE632-29CF-4CB9-B365-C9EF38F89BE6}"/>
               </a:ext>
             </a:extLst>
           </p:cNvPr>
@@ -2366,7 +2856,7 @@
           <p:cNvPr id="6" name="Espaço Reservado para Número de Slide 5">
             <a:extLst>
               <a:ext uri="{FF2B5EF4-FFF2-40B4-BE49-F238E27FC236}">
-                <a16:creationId xmlns:a16="http://schemas.microsoft.com/office/drawing/2014/main" xmlns="" id="{60CF3DD1-9AEC-4A57-B461-4E4DD86FAC18}"/>
+                <a16:creationId xmlns:a16="http://schemas.microsoft.com/office/drawing/2014/main" id="{60CF3DD1-9AEC-4A57-B461-4E4DD86FAC18}"/>
               </a:ext>
             </a:extLst>
           </p:cNvPr>
@@ -2384,7 +2874,7 @@
           <a:p>
             <a:fld id="{1A7E88B7-70CE-4035-AE73-13FA6FB985D4}" type="slidenum">
               <a:rPr lang="pt-BR" smtClean="0"/>
-              <a:t>‹nº›</a:t>
+              <a:t>‹#›</a:t>
             </a:fld>
             <a:endParaRPr lang="pt-BR"/>
           </a:p>
@@ -2425,7 +2915,7 @@
           <p:cNvPr id="2" name="Título 1">
             <a:extLst>
               <a:ext uri="{FF2B5EF4-FFF2-40B4-BE49-F238E27FC236}">
-                <a16:creationId xmlns:a16="http://schemas.microsoft.com/office/drawing/2014/main" xmlns="" id="{34AB2FF0-A4D7-4E28-991D-FF26140D5988}"/>
+                <a16:creationId xmlns:a16="http://schemas.microsoft.com/office/drawing/2014/main" id="{34AB2FF0-A4D7-4E28-991D-FF26140D5988}"/>
               </a:ext>
             </a:extLst>
           </p:cNvPr>
@@ -2462,7 +2952,7 @@
           <p:cNvPr id="3" name="Espaço Reservado para Texto 2">
             <a:extLst>
               <a:ext uri="{FF2B5EF4-FFF2-40B4-BE49-F238E27FC236}">
-                <a16:creationId xmlns:a16="http://schemas.microsoft.com/office/drawing/2014/main" xmlns="" id="{E2AC45B0-4145-40DB-8E61-105461170604}"/>
+                <a16:creationId xmlns:a16="http://schemas.microsoft.com/office/drawing/2014/main" id="{E2AC45B0-4145-40DB-8E61-105461170604}"/>
               </a:ext>
             </a:extLst>
           </p:cNvPr>
@@ -2587,7 +3077,7 @@
           <p:cNvPr id="4" name="Espaço Reservado para Data 3">
             <a:extLst>
               <a:ext uri="{FF2B5EF4-FFF2-40B4-BE49-F238E27FC236}">
-                <a16:creationId xmlns:a16="http://schemas.microsoft.com/office/drawing/2014/main" xmlns="" id="{50F1D3FB-740A-4EBA-A309-2CE71D12ECFB}"/>
+                <a16:creationId xmlns:a16="http://schemas.microsoft.com/office/drawing/2014/main" id="{50F1D3FB-740A-4EBA-A309-2CE71D12ECFB}"/>
               </a:ext>
             </a:extLst>
           </p:cNvPr>
@@ -2605,7 +3095,7 @@
           <a:p>
             <a:fld id="{63289F7E-B80B-496E-81B4-D396C37C9454}" type="datetimeFigureOut">
               <a:rPr lang="pt-BR" smtClean="0"/>
-              <a:t>23/04/2026</a:t>
+              <a:t>24/04/2026</a:t>
             </a:fld>
             <a:endParaRPr lang="pt-BR"/>
           </a:p>
@@ -2616,7 +3106,7 @@
           <p:cNvPr id="5" name="Espaço Reservado para Rodapé 4">
             <a:extLst>
               <a:ext uri="{FF2B5EF4-FFF2-40B4-BE49-F238E27FC236}">
-                <a16:creationId xmlns:a16="http://schemas.microsoft.com/office/drawing/2014/main" xmlns="" id="{BDCAB18F-8715-4465-A940-F9C193A2ACE9}"/>
+                <a16:creationId xmlns:a16="http://schemas.microsoft.com/office/drawing/2014/main" id="{BDCAB18F-8715-4465-A940-F9C193A2ACE9}"/>
               </a:ext>
             </a:extLst>
           </p:cNvPr>
@@ -2641,7 +3131,7 @@
           <p:cNvPr id="6" name="Espaço Reservado para Número de Slide 5">
             <a:extLst>
               <a:ext uri="{FF2B5EF4-FFF2-40B4-BE49-F238E27FC236}">
-                <a16:creationId xmlns:a16="http://schemas.microsoft.com/office/drawing/2014/main" xmlns="" id="{353466C6-8248-429F-8056-FF040BF509EB}"/>
+                <a16:creationId xmlns:a16="http://schemas.microsoft.com/office/drawing/2014/main" id="{353466C6-8248-429F-8056-FF040BF509EB}"/>
               </a:ext>
             </a:extLst>
           </p:cNvPr>
@@ -2659,7 +3149,7 @@
           <a:p>
             <a:fld id="{1A7E88B7-70CE-4035-AE73-13FA6FB985D4}" type="slidenum">
               <a:rPr lang="pt-BR" smtClean="0"/>
-              <a:t>‹nº›</a:t>
+              <a:t>‹#›</a:t>
             </a:fld>
             <a:endParaRPr lang="pt-BR"/>
           </a:p>
@@ -2700,7 +3190,7 @@
           <p:cNvPr id="2" name="Título 1">
             <a:extLst>
               <a:ext uri="{FF2B5EF4-FFF2-40B4-BE49-F238E27FC236}">
-                <a16:creationId xmlns:a16="http://schemas.microsoft.com/office/drawing/2014/main" xmlns="" id="{BC7BB9F0-F14B-4A91-B2B7-35BC47FE4DE7}"/>
+                <a16:creationId xmlns:a16="http://schemas.microsoft.com/office/drawing/2014/main" id="{BC7BB9F0-F14B-4A91-B2B7-35BC47FE4DE7}"/>
               </a:ext>
             </a:extLst>
           </p:cNvPr>
@@ -2728,7 +3218,7 @@
           <p:cNvPr id="3" name="Espaço Reservado para Conteúdo 2">
             <a:extLst>
               <a:ext uri="{FF2B5EF4-FFF2-40B4-BE49-F238E27FC236}">
-                <a16:creationId xmlns:a16="http://schemas.microsoft.com/office/drawing/2014/main" xmlns="" id="{EC1FC1C4-73DA-47A6-8496-B0B457F7D39A}"/>
+                <a16:creationId xmlns:a16="http://schemas.microsoft.com/office/drawing/2014/main" id="{EC1FC1C4-73DA-47A6-8496-B0B457F7D39A}"/>
               </a:ext>
             </a:extLst>
           </p:cNvPr>
@@ -2790,7 +3280,7 @@
           <p:cNvPr id="4" name="Espaço Reservado para Conteúdo 3">
             <a:extLst>
               <a:ext uri="{FF2B5EF4-FFF2-40B4-BE49-F238E27FC236}">
-                <a16:creationId xmlns:a16="http://schemas.microsoft.com/office/drawing/2014/main" xmlns="" id="{E92F06A8-A449-4D92-9912-76873E529B38}"/>
+                <a16:creationId xmlns:a16="http://schemas.microsoft.com/office/drawing/2014/main" id="{E92F06A8-A449-4D92-9912-76873E529B38}"/>
               </a:ext>
             </a:extLst>
           </p:cNvPr>
@@ -2852,7 +3342,7 @@
           <p:cNvPr id="5" name="Espaço Reservado para Data 4">
             <a:extLst>
               <a:ext uri="{FF2B5EF4-FFF2-40B4-BE49-F238E27FC236}">
-                <a16:creationId xmlns:a16="http://schemas.microsoft.com/office/drawing/2014/main" xmlns="" id="{938070A4-BC2F-4D55-BD8D-DEAF11BB9EE9}"/>
+                <a16:creationId xmlns:a16="http://schemas.microsoft.com/office/drawing/2014/main" id="{938070A4-BC2F-4D55-BD8D-DEAF11BB9EE9}"/>
               </a:ext>
             </a:extLst>
           </p:cNvPr>
@@ -2870,7 +3360,7 @@
           <a:p>
             <a:fld id="{63289F7E-B80B-496E-81B4-D396C37C9454}" type="datetimeFigureOut">
               <a:rPr lang="pt-BR" smtClean="0"/>
-              <a:t>23/04/2026</a:t>
+              <a:t>24/04/2026</a:t>
             </a:fld>
             <a:endParaRPr lang="pt-BR"/>
           </a:p>
@@ -2881,7 +3371,7 @@
           <p:cNvPr id="6" name="Espaço Reservado para Rodapé 5">
             <a:extLst>
               <a:ext uri="{FF2B5EF4-FFF2-40B4-BE49-F238E27FC236}">
-                <a16:creationId xmlns:a16="http://schemas.microsoft.com/office/drawing/2014/main" xmlns="" id="{45CC2DB8-844A-465F-BA9A-7734C80C7F43}"/>
+                <a16:creationId xmlns:a16="http://schemas.microsoft.com/office/drawing/2014/main" id="{45CC2DB8-844A-465F-BA9A-7734C80C7F43}"/>
               </a:ext>
             </a:extLst>
           </p:cNvPr>
@@ -2906,7 +3396,7 @@
           <p:cNvPr id="7" name="Espaço Reservado para Número de Slide 6">
             <a:extLst>
               <a:ext uri="{FF2B5EF4-FFF2-40B4-BE49-F238E27FC236}">
-                <a16:creationId xmlns:a16="http://schemas.microsoft.com/office/drawing/2014/main" xmlns="" id="{4CC606A8-097B-4040-94E0-CD8C88280D8F}"/>
+                <a16:creationId xmlns:a16="http://schemas.microsoft.com/office/drawing/2014/main" id="{4CC606A8-097B-4040-94E0-CD8C88280D8F}"/>
               </a:ext>
             </a:extLst>
           </p:cNvPr>
@@ -2924,7 +3414,7 @@
           <a:p>
             <a:fld id="{1A7E88B7-70CE-4035-AE73-13FA6FB985D4}" type="slidenum">
               <a:rPr lang="pt-BR" smtClean="0"/>
-              <a:t>‹nº›</a:t>
+              <a:t>‹#›</a:t>
             </a:fld>
             <a:endParaRPr lang="pt-BR"/>
           </a:p>
@@ -2965,7 +3455,7 @@
           <p:cNvPr id="2" name="Título 1">
             <a:extLst>
               <a:ext uri="{FF2B5EF4-FFF2-40B4-BE49-F238E27FC236}">
-                <a16:creationId xmlns:a16="http://schemas.microsoft.com/office/drawing/2014/main" xmlns="" id="{76D66686-0143-4CB6-8C09-BA326F1E7ACA}"/>
+                <a16:creationId xmlns:a16="http://schemas.microsoft.com/office/drawing/2014/main" id="{76D66686-0143-4CB6-8C09-BA326F1E7ACA}"/>
               </a:ext>
             </a:extLst>
           </p:cNvPr>
@@ -2998,7 +3488,7 @@
           <p:cNvPr id="3" name="Espaço Reservado para Texto 2">
             <a:extLst>
               <a:ext uri="{FF2B5EF4-FFF2-40B4-BE49-F238E27FC236}">
-                <a16:creationId xmlns:a16="http://schemas.microsoft.com/office/drawing/2014/main" xmlns="" id="{0227AB85-F59E-4BCE-B846-4FA0992C2F23}"/>
+                <a16:creationId xmlns:a16="http://schemas.microsoft.com/office/drawing/2014/main" id="{0227AB85-F59E-4BCE-B846-4FA0992C2F23}"/>
               </a:ext>
             </a:extLst>
           </p:cNvPr>
@@ -3069,7 +3559,7 @@
           <p:cNvPr id="4" name="Espaço Reservado para Conteúdo 3">
             <a:extLst>
               <a:ext uri="{FF2B5EF4-FFF2-40B4-BE49-F238E27FC236}">
-                <a16:creationId xmlns:a16="http://schemas.microsoft.com/office/drawing/2014/main" xmlns="" id="{3373456C-7319-4D0A-827D-D29F6B083F5D}"/>
+                <a16:creationId xmlns:a16="http://schemas.microsoft.com/office/drawing/2014/main" id="{3373456C-7319-4D0A-827D-D29F6B083F5D}"/>
               </a:ext>
             </a:extLst>
           </p:cNvPr>
@@ -3131,7 +3621,7 @@
           <p:cNvPr id="5" name="Espaço Reservado para Texto 4">
             <a:extLst>
               <a:ext uri="{FF2B5EF4-FFF2-40B4-BE49-F238E27FC236}">
-                <a16:creationId xmlns:a16="http://schemas.microsoft.com/office/drawing/2014/main" xmlns="" id="{4CD109D0-2E83-4262-8029-A871CEC47406}"/>
+                <a16:creationId xmlns:a16="http://schemas.microsoft.com/office/drawing/2014/main" id="{4CD109D0-2E83-4262-8029-A871CEC47406}"/>
               </a:ext>
             </a:extLst>
           </p:cNvPr>
@@ -3202,7 +3692,7 @@
           <p:cNvPr id="6" name="Espaço Reservado para Conteúdo 5">
             <a:extLst>
               <a:ext uri="{FF2B5EF4-FFF2-40B4-BE49-F238E27FC236}">
-                <a16:creationId xmlns:a16="http://schemas.microsoft.com/office/drawing/2014/main" xmlns="" id="{AD706E3A-CFBB-4A6C-A65F-D0360A9E74FE}"/>
+                <a16:creationId xmlns:a16="http://schemas.microsoft.com/office/drawing/2014/main" id="{AD706E3A-CFBB-4A6C-A65F-D0360A9E74FE}"/>
               </a:ext>
             </a:extLst>
           </p:cNvPr>
@@ -3264,7 +3754,7 @@
           <p:cNvPr id="7" name="Espaço Reservado para Data 6">
             <a:extLst>
               <a:ext uri="{FF2B5EF4-FFF2-40B4-BE49-F238E27FC236}">
-                <a16:creationId xmlns:a16="http://schemas.microsoft.com/office/drawing/2014/main" xmlns="" id="{4172C0E5-5AF0-4805-BB51-443733CD2BD5}"/>
+                <a16:creationId xmlns:a16="http://schemas.microsoft.com/office/drawing/2014/main" id="{4172C0E5-5AF0-4805-BB51-443733CD2BD5}"/>
               </a:ext>
             </a:extLst>
           </p:cNvPr>
@@ -3282,7 +3772,7 @@
           <a:p>
             <a:fld id="{63289F7E-B80B-496E-81B4-D396C37C9454}" type="datetimeFigureOut">
               <a:rPr lang="pt-BR" smtClean="0"/>
-              <a:t>23/04/2026</a:t>
+              <a:t>24/04/2026</a:t>
             </a:fld>
             <a:endParaRPr lang="pt-BR"/>
           </a:p>
@@ -3293,7 +3783,7 @@
           <p:cNvPr id="8" name="Espaço Reservado para Rodapé 7">
             <a:extLst>
               <a:ext uri="{FF2B5EF4-FFF2-40B4-BE49-F238E27FC236}">
-                <a16:creationId xmlns:a16="http://schemas.microsoft.com/office/drawing/2014/main" xmlns="" id="{0E801648-156F-497E-99CF-797DF48051E1}"/>
+                <a16:creationId xmlns:a16="http://schemas.microsoft.com/office/drawing/2014/main" id="{0E801648-156F-497E-99CF-797DF48051E1}"/>
               </a:ext>
             </a:extLst>
           </p:cNvPr>
@@ -3318,7 +3808,7 @@
           <p:cNvPr id="9" name="Espaço Reservado para Número de Slide 8">
             <a:extLst>
               <a:ext uri="{FF2B5EF4-FFF2-40B4-BE49-F238E27FC236}">
-                <a16:creationId xmlns:a16="http://schemas.microsoft.com/office/drawing/2014/main" xmlns="" id="{EEE23D32-80E7-4796-A137-66BF842E4B53}"/>
+                <a16:creationId xmlns:a16="http://schemas.microsoft.com/office/drawing/2014/main" id="{EEE23D32-80E7-4796-A137-66BF842E4B53}"/>
               </a:ext>
             </a:extLst>
           </p:cNvPr>
@@ -3336,7 +3826,7 @@
           <a:p>
             <a:fld id="{1A7E88B7-70CE-4035-AE73-13FA6FB985D4}" type="slidenum">
               <a:rPr lang="pt-BR" smtClean="0"/>
-              <a:t>‹nº›</a:t>
+              <a:t>‹#›</a:t>
             </a:fld>
             <a:endParaRPr lang="pt-BR"/>
           </a:p>
@@ -3377,7 +3867,7 @@
           <p:cNvPr id="2" name="Título 1">
             <a:extLst>
               <a:ext uri="{FF2B5EF4-FFF2-40B4-BE49-F238E27FC236}">
-                <a16:creationId xmlns:a16="http://schemas.microsoft.com/office/drawing/2014/main" xmlns="" id="{2BCE2379-C78F-47E1-8CFC-B846E7AF148D}"/>
+                <a16:creationId xmlns:a16="http://schemas.microsoft.com/office/drawing/2014/main" id="{2BCE2379-C78F-47E1-8CFC-B846E7AF148D}"/>
               </a:ext>
             </a:extLst>
           </p:cNvPr>
@@ -3405,7 +3895,7 @@
           <p:cNvPr id="3" name="Espaço Reservado para Data 2">
             <a:extLst>
               <a:ext uri="{FF2B5EF4-FFF2-40B4-BE49-F238E27FC236}">
-                <a16:creationId xmlns:a16="http://schemas.microsoft.com/office/drawing/2014/main" xmlns="" id="{342600A9-7F92-4E22-9D94-E4717252A817}"/>
+                <a16:creationId xmlns:a16="http://schemas.microsoft.com/office/drawing/2014/main" id="{342600A9-7F92-4E22-9D94-E4717252A817}"/>
               </a:ext>
             </a:extLst>
           </p:cNvPr>
@@ -3423,7 +3913,7 @@
           <a:p>
             <a:fld id="{63289F7E-B80B-496E-81B4-D396C37C9454}" type="datetimeFigureOut">
               <a:rPr lang="pt-BR" smtClean="0"/>
-              <a:t>23/04/2026</a:t>
+              <a:t>24/04/2026</a:t>
             </a:fld>
             <a:endParaRPr lang="pt-BR"/>
           </a:p>
@@ -3434,7 +3924,7 @@
           <p:cNvPr id="4" name="Espaço Reservado para Rodapé 3">
             <a:extLst>
               <a:ext uri="{FF2B5EF4-FFF2-40B4-BE49-F238E27FC236}">
-                <a16:creationId xmlns:a16="http://schemas.microsoft.com/office/drawing/2014/main" xmlns="" id="{192E6BED-F546-40CC-A2DF-99CBA853654E}"/>
+                <a16:creationId xmlns:a16="http://schemas.microsoft.com/office/drawing/2014/main" id="{192E6BED-F546-40CC-A2DF-99CBA853654E}"/>
               </a:ext>
             </a:extLst>
           </p:cNvPr>
@@ -3459,7 +3949,7 @@
           <p:cNvPr id="5" name="Espaço Reservado para Número de Slide 4">
             <a:extLst>
               <a:ext uri="{FF2B5EF4-FFF2-40B4-BE49-F238E27FC236}">
-                <a16:creationId xmlns:a16="http://schemas.microsoft.com/office/drawing/2014/main" xmlns="" id="{6091CC40-A8C4-4063-80EB-CC5099621678}"/>
+                <a16:creationId xmlns:a16="http://schemas.microsoft.com/office/drawing/2014/main" id="{6091CC40-A8C4-4063-80EB-CC5099621678}"/>
               </a:ext>
             </a:extLst>
           </p:cNvPr>
@@ -3477,7 +3967,7 @@
           <a:p>
             <a:fld id="{1A7E88B7-70CE-4035-AE73-13FA6FB985D4}" type="slidenum">
               <a:rPr lang="pt-BR" smtClean="0"/>
-              <a:t>‹nº›</a:t>
+              <a:t>‹#›</a:t>
             </a:fld>
             <a:endParaRPr lang="pt-BR"/>
           </a:p>
@@ -3518,7 +4008,7 @@
           <p:cNvPr id="2" name="Espaço Reservado para Data 1">
             <a:extLst>
               <a:ext uri="{FF2B5EF4-FFF2-40B4-BE49-F238E27FC236}">
-                <a16:creationId xmlns:a16="http://schemas.microsoft.com/office/drawing/2014/main" xmlns="" id="{DD19515C-212C-4EAE-84A3-8FF4BC844F1B}"/>
+                <a16:creationId xmlns:a16="http://schemas.microsoft.com/office/drawing/2014/main" id="{DD19515C-212C-4EAE-84A3-8FF4BC844F1B}"/>
               </a:ext>
             </a:extLst>
           </p:cNvPr>
@@ -3536,7 +4026,7 @@
           <a:p>
             <a:fld id="{63289F7E-B80B-496E-81B4-D396C37C9454}" type="datetimeFigureOut">
               <a:rPr lang="pt-BR" smtClean="0"/>
-              <a:t>23/04/2026</a:t>
+              <a:t>24/04/2026</a:t>
             </a:fld>
             <a:endParaRPr lang="pt-BR"/>
           </a:p>
@@ -3547,7 +4037,7 @@
           <p:cNvPr id="3" name="Espaço Reservado para Rodapé 2">
             <a:extLst>
               <a:ext uri="{FF2B5EF4-FFF2-40B4-BE49-F238E27FC236}">
-                <a16:creationId xmlns:a16="http://schemas.microsoft.com/office/drawing/2014/main" xmlns="" id="{94D3D120-B3E8-4C96-861D-7A4F12F49B3A}"/>
+                <a16:creationId xmlns:a16="http://schemas.microsoft.com/office/drawing/2014/main" id="{94D3D120-B3E8-4C96-861D-7A4F12F49B3A}"/>
               </a:ext>
             </a:extLst>
           </p:cNvPr>
@@ -3572,7 +4062,7 @@
           <p:cNvPr id="4" name="Espaço Reservado para Número de Slide 3">
             <a:extLst>
               <a:ext uri="{FF2B5EF4-FFF2-40B4-BE49-F238E27FC236}">
-                <a16:creationId xmlns:a16="http://schemas.microsoft.com/office/drawing/2014/main" xmlns="" id="{42E49B68-FA1B-468B-9F17-D5C09243D454}"/>
+                <a16:creationId xmlns:a16="http://schemas.microsoft.com/office/drawing/2014/main" id="{42E49B68-FA1B-468B-9F17-D5C09243D454}"/>
               </a:ext>
             </a:extLst>
           </p:cNvPr>
@@ -3590,7 +4080,7 @@
           <a:p>
             <a:fld id="{1A7E88B7-70CE-4035-AE73-13FA6FB985D4}" type="slidenum">
               <a:rPr lang="pt-BR" smtClean="0"/>
-              <a:t>‹nº›</a:t>
+              <a:t>‹#›</a:t>
             </a:fld>
             <a:endParaRPr lang="pt-BR"/>
           </a:p>
@@ -3631,7 +4121,7 @@
           <p:cNvPr id="2" name="Título 1">
             <a:extLst>
               <a:ext uri="{FF2B5EF4-FFF2-40B4-BE49-F238E27FC236}">
-                <a16:creationId xmlns:a16="http://schemas.microsoft.com/office/drawing/2014/main" xmlns="" id="{1C17BCBE-A897-4319-85EC-D87909C24980}"/>
+                <a16:creationId xmlns:a16="http://schemas.microsoft.com/office/drawing/2014/main" id="{1C17BCBE-A897-4319-85EC-D87909C24980}"/>
               </a:ext>
             </a:extLst>
           </p:cNvPr>
@@ -3668,7 +4158,7 @@
           <p:cNvPr id="3" name="Espaço Reservado para Conteúdo 2">
             <a:extLst>
               <a:ext uri="{FF2B5EF4-FFF2-40B4-BE49-F238E27FC236}">
-                <a16:creationId xmlns:a16="http://schemas.microsoft.com/office/drawing/2014/main" xmlns="" id="{4226F885-0204-4913-868B-4B8B82576F17}"/>
+                <a16:creationId xmlns:a16="http://schemas.microsoft.com/office/drawing/2014/main" id="{4226F885-0204-4913-868B-4B8B82576F17}"/>
               </a:ext>
             </a:extLst>
           </p:cNvPr>
@@ -3758,7 +4248,7 @@
           <p:cNvPr id="4" name="Espaço Reservado para Texto 3">
             <a:extLst>
               <a:ext uri="{FF2B5EF4-FFF2-40B4-BE49-F238E27FC236}">
-                <a16:creationId xmlns:a16="http://schemas.microsoft.com/office/drawing/2014/main" xmlns="" id="{00F9F784-A858-441B-8AB5-697098141751}"/>
+                <a16:creationId xmlns:a16="http://schemas.microsoft.com/office/drawing/2014/main" id="{00F9F784-A858-441B-8AB5-697098141751}"/>
               </a:ext>
             </a:extLst>
           </p:cNvPr>
@@ -3829,7 +4319,7 @@
           <p:cNvPr id="5" name="Espaço Reservado para Data 4">
             <a:extLst>
               <a:ext uri="{FF2B5EF4-FFF2-40B4-BE49-F238E27FC236}">
-                <a16:creationId xmlns:a16="http://schemas.microsoft.com/office/drawing/2014/main" xmlns="" id="{A4DC363A-5000-472E-8B17-02E7DCB8840A}"/>
+                <a16:creationId xmlns:a16="http://schemas.microsoft.com/office/drawing/2014/main" id="{A4DC363A-5000-472E-8B17-02E7DCB8840A}"/>
               </a:ext>
             </a:extLst>
           </p:cNvPr>
@@ -3847,7 +4337,7 @@
           <a:p>
             <a:fld id="{63289F7E-B80B-496E-81B4-D396C37C9454}" type="datetimeFigureOut">
               <a:rPr lang="pt-BR" smtClean="0"/>
-              <a:t>23/04/2026</a:t>
+              <a:t>24/04/2026</a:t>
             </a:fld>
             <a:endParaRPr lang="pt-BR"/>
           </a:p>
@@ -3858,7 +4348,7 @@
           <p:cNvPr id="6" name="Espaço Reservado para Rodapé 5">
             <a:extLst>
               <a:ext uri="{FF2B5EF4-FFF2-40B4-BE49-F238E27FC236}">
-                <a16:creationId xmlns:a16="http://schemas.microsoft.com/office/drawing/2014/main" xmlns="" id="{5548425D-2C21-4C56-BAD4-662978775C28}"/>
+                <a16:creationId xmlns:a16="http://schemas.microsoft.com/office/drawing/2014/main" id="{5548425D-2C21-4C56-BAD4-662978775C28}"/>
               </a:ext>
             </a:extLst>
           </p:cNvPr>
@@ -3883,7 +4373,7 @@
           <p:cNvPr id="7" name="Espaço Reservado para Número de Slide 6">
             <a:extLst>
               <a:ext uri="{FF2B5EF4-FFF2-40B4-BE49-F238E27FC236}">
-                <a16:creationId xmlns:a16="http://schemas.microsoft.com/office/drawing/2014/main" xmlns="" id="{C63E9726-E64C-42B2-AE8A-8C235A956B48}"/>
+                <a16:creationId xmlns:a16="http://schemas.microsoft.com/office/drawing/2014/main" id="{C63E9726-E64C-42B2-AE8A-8C235A956B48}"/>
               </a:ext>
             </a:extLst>
           </p:cNvPr>
@@ -3901,7 +4391,7 @@
           <a:p>
             <a:fld id="{1A7E88B7-70CE-4035-AE73-13FA6FB985D4}" type="slidenum">
               <a:rPr lang="pt-BR" smtClean="0"/>
-              <a:t>‹nº›</a:t>
+              <a:t>‹#›</a:t>
             </a:fld>
             <a:endParaRPr lang="pt-BR"/>
           </a:p>
@@ -3942,7 +4432,7 @@
           <p:cNvPr id="2" name="Título 1">
             <a:extLst>
               <a:ext uri="{FF2B5EF4-FFF2-40B4-BE49-F238E27FC236}">
-                <a16:creationId xmlns:a16="http://schemas.microsoft.com/office/drawing/2014/main" xmlns="" id="{11086A78-3E74-450C-96A6-CA8AC37AF772}"/>
+                <a16:creationId xmlns:a16="http://schemas.microsoft.com/office/drawing/2014/main" id="{11086A78-3E74-450C-96A6-CA8AC37AF772}"/>
               </a:ext>
             </a:extLst>
           </p:cNvPr>
@@ -3979,7 +4469,7 @@
           <p:cNvPr id="3" name="Espaço Reservado para Imagem 2">
             <a:extLst>
               <a:ext uri="{FF2B5EF4-FFF2-40B4-BE49-F238E27FC236}">
-                <a16:creationId xmlns:a16="http://schemas.microsoft.com/office/drawing/2014/main" xmlns="" id="{5F5B7312-975A-4DBC-9B2F-3652ADA006FD}"/>
+                <a16:creationId xmlns:a16="http://schemas.microsoft.com/office/drawing/2014/main" id="{5F5B7312-975A-4DBC-9B2F-3652ADA006FD}"/>
               </a:ext>
             </a:extLst>
           </p:cNvPr>
@@ -4046,7 +4536,7 @@
           <p:cNvPr id="4" name="Espaço Reservado para Texto 3">
             <a:extLst>
               <a:ext uri="{FF2B5EF4-FFF2-40B4-BE49-F238E27FC236}">
-                <a16:creationId xmlns:a16="http://schemas.microsoft.com/office/drawing/2014/main" xmlns="" id="{AAF805F5-1DFF-41C6-944C-7D79FE0D0963}"/>
+                <a16:creationId xmlns:a16="http://schemas.microsoft.com/office/drawing/2014/main" id="{AAF805F5-1DFF-41C6-944C-7D79FE0D0963}"/>
               </a:ext>
             </a:extLst>
           </p:cNvPr>
@@ -4117,7 +4607,7 @@
           <p:cNvPr id="5" name="Espaço Reservado para Data 4">
             <a:extLst>
               <a:ext uri="{FF2B5EF4-FFF2-40B4-BE49-F238E27FC236}">
-                <a16:creationId xmlns:a16="http://schemas.microsoft.com/office/drawing/2014/main" xmlns="" id="{02113D81-8665-4516-BD81-C6A1F254EECD}"/>
+                <a16:creationId xmlns:a16="http://schemas.microsoft.com/office/drawing/2014/main" id="{02113D81-8665-4516-BD81-C6A1F254EECD}"/>
               </a:ext>
             </a:extLst>
           </p:cNvPr>
@@ -4135,7 +4625,7 @@
           <a:p>
             <a:fld id="{63289F7E-B80B-496E-81B4-D396C37C9454}" type="datetimeFigureOut">
               <a:rPr lang="pt-BR" smtClean="0"/>
-              <a:t>23/04/2026</a:t>
+              <a:t>24/04/2026</a:t>
             </a:fld>
             <a:endParaRPr lang="pt-BR"/>
           </a:p>
@@ -4146,7 +4636,7 @@
           <p:cNvPr id="6" name="Espaço Reservado para Rodapé 5">
             <a:extLst>
               <a:ext uri="{FF2B5EF4-FFF2-40B4-BE49-F238E27FC236}">
-                <a16:creationId xmlns:a16="http://schemas.microsoft.com/office/drawing/2014/main" xmlns="" id="{2B00C88B-FF32-40AA-A187-727D96FD7862}"/>
+                <a16:creationId xmlns:a16="http://schemas.microsoft.com/office/drawing/2014/main" id="{2B00C88B-FF32-40AA-A187-727D96FD7862}"/>
               </a:ext>
             </a:extLst>
           </p:cNvPr>
@@ -4171,7 +4661,7 @@
           <p:cNvPr id="7" name="Espaço Reservado para Número de Slide 6">
             <a:extLst>
               <a:ext uri="{FF2B5EF4-FFF2-40B4-BE49-F238E27FC236}">
-                <a16:creationId xmlns:a16="http://schemas.microsoft.com/office/drawing/2014/main" xmlns="" id="{A04D1A2D-69F7-4B8F-A730-BC26DC340BA6}"/>
+                <a16:creationId xmlns:a16="http://schemas.microsoft.com/office/drawing/2014/main" id="{A04D1A2D-69F7-4B8F-A730-BC26DC340BA6}"/>
               </a:ext>
             </a:extLst>
           </p:cNvPr>
@@ -4189,7 +4679,7 @@
           <a:p>
             <a:fld id="{1A7E88B7-70CE-4035-AE73-13FA6FB985D4}" type="slidenum">
               <a:rPr lang="pt-BR" smtClean="0"/>
-              <a:t>‹nº›</a:t>
+              <a:t>‹#›</a:t>
             </a:fld>
             <a:endParaRPr lang="pt-BR"/>
           </a:p>
@@ -4235,7 +4725,7 @@
           <p:cNvPr id="2" name="Espaço Reservado para Título 1">
             <a:extLst>
               <a:ext uri="{FF2B5EF4-FFF2-40B4-BE49-F238E27FC236}">
-                <a16:creationId xmlns:a16="http://schemas.microsoft.com/office/drawing/2014/main" xmlns="" id="{E69A0273-1966-4A1B-9370-4C1CE5036371}"/>
+                <a16:creationId xmlns:a16="http://schemas.microsoft.com/office/drawing/2014/main" id="{E69A0273-1966-4A1B-9370-4C1CE5036371}"/>
               </a:ext>
             </a:extLst>
           </p:cNvPr>
@@ -4273,7 +4763,7 @@
           <p:cNvPr id="3" name="Espaço Reservado para Texto 2">
             <a:extLst>
               <a:ext uri="{FF2B5EF4-FFF2-40B4-BE49-F238E27FC236}">
-                <a16:creationId xmlns:a16="http://schemas.microsoft.com/office/drawing/2014/main" xmlns="" id="{3B9CF87A-0448-49A7-AB25-EBC1D56A40EF}"/>
+                <a16:creationId xmlns:a16="http://schemas.microsoft.com/office/drawing/2014/main" id="{3B9CF87A-0448-49A7-AB25-EBC1D56A40EF}"/>
               </a:ext>
             </a:extLst>
           </p:cNvPr>
@@ -4340,7 +4830,7 @@
           <p:cNvPr id="4" name="Espaço Reservado para Data 3">
             <a:extLst>
               <a:ext uri="{FF2B5EF4-FFF2-40B4-BE49-F238E27FC236}">
-                <a16:creationId xmlns:a16="http://schemas.microsoft.com/office/drawing/2014/main" xmlns="" id="{2EF7B1F2-BB5A-44D0-816D-16AD2C71430E}"/>
+                <a16:creationId xmlns:a16="http://schemas.microsoft.com/office/drawing/2014/main" id="{2EF7B1F2-BB5A-44D0-816D-16AD2C71430E}"/>
               </a:ext>
             </a:extLst>
           </p:cNvPr>
@@ -4376,7 +4866,7 @@
           <a:p>
             <a:fld id="{63289F7E-B80B-496E-81B4-D396C37C9454}" type="datetimeFigureOut">
               <a:rPr lang="pt-BR" smtClean="0"/>
-              <a:t>23/04/2026</a:t>
+              <a:t>24/04/2026</a:t>
             </a:fld>
             <a:endParaRPr lang="pt-BR"/>
           </a:p>
@@ -4387,7 +4877,7 @@
           <p:cNvPr id="5" name="Espaço Reservado para Rodapé 4">
             <a:extLst>
               <a:ext uri="{FF2B5EF4-FFF2-40B4-BE49-F238E27FC236}">
-                <a16:creationId xmlns:a16="http://schemas.microsoft.com/office/drawing/2014/main" xmlns="" id="{C703F94C-2CC8-4DAA-BC35-14FC3E841DCD}"/>
+                <a16:creationId xmlns:a16="http://schemas.microsoft.com/office/drawing/2014/main" id="{C703F94C-2CC8-4DAA-BC35-14FC3E841DCD}"/>
               </a:ext>
             </a:extLst>
           </p:cNvPr>
@@ -4430,7 +4920,7 @@
           <p:cNvPr id="6" name="Espaço Reservado para Número de Slide 5">
             <a:extLst>
               <a:ext uri="{FF2B5EF4-FFF2-40B4-BE49-F238E27FC236}">
-                <a16:creationId xmlns:a16="http://schemas.microsoft.com/office/drawing/2014/main" xmlns="" id="{64051336-7048-457A-8B61-D94291D71648}"/>
+                <a16:creationId xmlns:a16="http://schemas.microsoft.com/office/drawing/2014/main" id="{64051336-7048-457A-8B61-D94291D71648}"/>
               </a:ext>
             </a:extLst>
           </p:cNvPr>
@@ -4466,7 +4956,7 @@
           <a:p>
             <a:fld id="{1A7E88B7-70CE-4035-AE73-13FA6FB985D4}" type="slidenum">
               <a:rPr lang="pt-BR" smtClean="0"/>
-              <a:t>‹nº›</a:t>
+              <a:t>‹#›</a:t>
             </a:fld>
             <a:endParaRPr lang="pt-BR"/>
           </a:p>
@@ -4798,7 +5288,7 @@
           <p:cNvPr id="4" name="CaixaDeTexto 3">
             <a:extLst>
               <a:ext uri="{FF2B5EF4-FFF2-40B4-BE49-F238E27FC236}">
-                <a16:creationId xmlns:a16="http://schemas.microsoft.com/office/drawing/2014/main" xmlns="" id="{430EB894-B7D4-434C-9D1A-A14094D9BEEC}"/>
+                <a16:creationId xmlns:a16="http://schemas.microsoft.com/office/drawing/2014/main" id="{430EB894-B7D4-434C-9D1A-A14094D9BEEC}"/>
               </a:ext>
             </a:extLst>
           </p:cNvPr>
@@ -4842,7 +5332,7 @@
           <p:cNvPr id="1026" name="Picture 2" descr="Logo">
             <a:extLst>
               <a:ext uri="{FF2B5EF4-FFF2-40B4-BE49-F238E27FC236}">
-                <a16:creationId xmlns:a16="http://schemas.microsoft.com/office/drawing/2014/main" xmlns="" id="{3F2642E0-4F6A-4196-8F58-E77D36E9A33F}"/>
+                <a16:creationId xmlns:a16="http://schemas.microsoft.com/office/drawing/2014/main" id="{3F2642E0-4F6A-4196-8F58-E77D36E9A33F}"/>
               </a:ext>
             </a:extLst>
           </p:cNvPr>
@@ -4887,7 +5377,7 @@
           <p:cNvPr id="5122" name="Picture 2" descr="Image result for machine learning">
             <a:extLst>
               <a:ext uri="{FF2B5EF4-FFF2-40B4-BE49-F238E27FC236}">
-                <a16:creationId xmlns:a16="http://schemas.microsoft.com/office/drawing/2014/main" xmlns="" id="{810CE0A2-4102-44A6-A370-175E7896CDCB}"/>
+                <a16:creationId xmlns:a16="http://schemas.microsoft.com/office/drawing/2014/main" id="{810CE0A2-4102-44A6-A370-175E7896CDCB}"/>
               </a:ext>
             </a:extLst>
           </p:cNvPr>
@@ -4932,7 +5422,7 @@
           <p:cNvPr id="7" name="Título 1">
             <a:extLst>
               <a:ext uri="{FF2B5EF4-FFF2-40B4-BE49-F238E27FC236}">
-                <a16:creationId xmlns:a16="http://schemas.microsoft.com/office/drawing/2014/main" xmlns="" id="{32666AC8-2E17-4DB4-B0F5-60C640CCFD2E}"/>
+                <a16:creationId xmlns:a16="http://schemas.microsoft.com/office/drawing/2014/main" id="{32666AC8-2E17-4DB4-B0F5-60C640CCFD2E}"/>
               </a:ext>
             </a:extLst>
           </p:cNvPr>
@@ -4958,10 +5448,6 @@
             <a:r>
               <a:rPr lang="pt-BR" sz="6600" dirty="0"/>
               <a:t>C24 – Inteligência Artificial:</a:t>
-            </a:r>
-            <a:r>
-              <a:rPr lang="pt-BR" sz="7200" dirty="0"/>
-              <a:t/>
             </a:r>
             <a:br>
               <a:rPr lang="pt-BR" sz="7200" dirty="0"/>
@@ -4995,7 +5481,7 @@
         <p:cNvPr id="1" name="">
           <a:extLst>
             <a:ext uri="{FF2B5EF4-FFF2-40B4-BE49-F238E27FC236}">
-              <a16:creationId xmlns:a16="http://schemas.microsoft.com/office/drawing/2014/main" xmlns="" id="{DDB2BBDA-DAF3-B7AC-FB99-7C5B9285F912}"/>
+              <a16:creationId xmlns:a16="http://schemas.microsoft.com/office/drawing/2014/main" id="{DDB2BBDA-DAF3-B7AC-FB99-7C5B9285F912}"/>
             </a:ext>
           </a:extLst>
         </p:cNvPr>
@@ -5015,7 +5501,7 @@
           <p:cNvPr id="2" name="Title 1">
             <a:extLst>
               <a:ext uri="{FF2B5EF4-FFF2-40B4-BE49-F238E27FC236}">
-                <a16:creationId xmlns:a16="http://schemas.microsoft.com/office/drawing/2014/main" xmlns="" id="{A98D36C9-8653-8E41-11D8-585B6AC0D03D}"/>
+                <a16:creationId xmlns:a16="http://schemas.microsoft.com/office/drawing/2014/main" id="{A98D36C9-8653-8E41-11D8-585B6AC0D03D}"/>
               </a:ext>
             </a:extLst>
           </p:cNvPr>
@@ -5055,7 +5541,7 @@
           <p:cNvPr id="3" name="Content Placeholder 2">
             <a:extLst>
               <a:ext uri="{FF2B5EF4-FFF2-40B4-BE49-F238E27FC236}">
-                <a16:creationId xmlns:a16="http://schemas.microsoft.com/office/drawing/2014/main" xmlns:a14="http://schemas.microsoft.com/office/drawing/2010/main" xmlns:mc="http://schemas.openxmlformats.org/markup-compatibility/2006" xmlns="" id="{981046E0-93D4-BF9F-C552-72A01838A8A3}"/>
+                <a16:creationId xmlns:a16="http://schemas.microsoft.com/office/drawing/2014/main" id="{981046E0-93D4-BF9F-C552-72A01838A8A3}"/>
               </a:ext>
             </a:extLst>
           </p:cNvPr>
@@ -5082,7 +5568,6 @@
               <a:rPr lang="pt-BR" dirty="0"/>
               <a:t> O objetivo do agente é maximizar a soma total de recompensas ao longo do tempo, não apenas a recompensa imediata.</a:t>
             </a:r>
-            <a:endParaRPr lang="pt-BR" dirty="0"/>
           </a:p>
         </p:txBody>
       </p:sp>
@@ -5091,7 +5576,7 @@
           <p:cNvPr id="61" name="Picture 60">
             <a:extLst>
               <a:ext uri="{FF2B5EF4-FFF2-40B4-BE49-F238E27FC236}">
-                <a16:creationId xmlns:a16="http://schemas.microsoft.com/office/drawing/2014/main" xmlns="" id="{22F895FA-1424-E50C-97F4-4F0BE0413C2F}"/>
+                <a16:creationId xmlns:a16="http://schemas.microsoft.com/office/drawing/2014/main" id="{22F895FA-1424-E50C-97F4-4F0BE0413C2F}"/>
               </a:ext>
             </a:extLst>
           </p:cNvPr>
@@ -5114,7 +5599,7 @@
         </p:blipFill>
         <p:spPr>
           <a:xfrm>
-            <a:off x="3012071" y="3270663"/>
+            <a:off x="3012071" y="3283382"/>
             <a:ext cx="6167857" cy="2784950"/>
           </a:xfrm>
           <a:prstGeom prst="rect">
@@ -5157,7 +5642,7 @@
           <p:cNvPr id="2" name="Title 1">
             <a:extLst>
               <a:ext uri="{FF2B5EF4-FFF2-40B4-BE49-F238E27FC236}">
-                <a16:creationId xmlns:a16="http://schemas.microsoft.com/office/drawing/2014/main" xmlns="" id="{874F2722-DA1E-D930-DC99-59F795E3E8B9}"/>
+                <a16:creationId xmlns:a16="http://schemas.microsoft.com/office/drawing/2014/main" id="{6212CAF6-B58D-36CC-E75E-B9EBC01B5494}"/>
               </a:ext>
             </a:extLst>
           </p:cNvPr>
@@ -5173,7 +5658,11 @@
           <a:bodyPr/>
           <a:lstStyle/>
           <a:p>
-            <a:endParaRPr lang="en-US"/>
+            <a:r>
+              <a:rPr lang="pt-BR" dirty="0"/>
+              <a:t>Algoritmos de RL</a:t>
+            </a:r>
+            <a:endParaRPr lang="en-US" dirty="0"/>
           </a:p>
         </p:txBody>
       </p:sp>
@@ -5182,7 +5671,7 @@
           <p:cNvPr id="3" name="Content Placeholder 2">
             <a:extLst>
               <a:ext uri="{FF2B5EF4-FFF2-40B4-BE49-F238E27FC236}">
-                <a16:creationId xmlns:a16="http://schemas.microsoft.com/office/drawing/2014/main" xmlns="" id="{97BD2D05-0E48-B94D-DBC7-FBDCBC17C0A5}"/>
+                <a16:creationId xmlns:a16="http://schemas.microsoft.com/office/drawing/2014/main" id="{5516FA30-D5F7-2E83-352E-3527EE589DED}"/>
               </a:ext>
             </a:extLst>
           </p:cNvPr>
@@ -5193,7 +5682,12 @@
             <p:ph idx="1"/>
           </p:nvPr>
         </p:nvSpPr>
-        <p:spPr/>
+        <p:spPr>
+          <a:xfrm>
+            <a:off x="838199" y="1825624"/>
+            <a:ext cx="11353801" cy="5032375"/>
+          </a:xfrm>
+        </p:spPr>
         <p:txBody>
           <a:bodyPr>
             <a:normAutofit/>
@@ -5201,25 +5695,222 @@
           <a:lstStyle/>
           <a:p>
             <a:r>
-              <a:rPr lang="pt-BR" sz="5400" b="1" dirty="0">
-                <a:solidFill>
-                  <a:srgbClr val="FF0000"/>
-                </a:solidFill>
-              </a:rPr>
-              <a:t>PAREI AQUI!!!!!!!!!!!!</a:t>
-            </a:r>
-            <a:endParaRPr lang="en-US" sz="5400" b="1" dirty="0">
-              <a:solidFill>
-                <a:srgbClr val="FF0000"/>
-              </a:solidFill>
-            </a:endParaRPr>
+              <a:rPr lang="pt-BR" dirty="0"/>
+              <a:t>Alguns dos algoritmos de RL mais conhecidos e importantes são:</a:t>
+            </a:r>
+          </a:p>
+          <a:p>
+            <a:pPr lvl="1">
+              <a:buFont typeface="Wingdings" panose="05000000000000000000" pitchFamily="2" charset="2"/>
+              <a:buChar char="§"/>
+            </a:pPr>
+            <a:r>
+              <a:rPr lang="pt-BR" b="1" dirty="0" err="1"/>
+              <a:t>Q-Learning</a:t>
+            </a:r>
+            <a:endParaRPr lang="pt-BR" b="1" dirty="0"/>
+          </a:p>
+          <a:p>
+            <a:pPr lvl="2">
+              <a:buFont typeface="Courier New" panose="02070309020205020404" pitchFamily="49" charset="0"/>
+              <a:buChar char="o"/>
+            </a:pPr>
+            <a:r>
+              <a:rPr lang="pt-BR" dirty="0"/>
+              <a:t>Um dos algoritmos mais clássicos.</a:t>
+            </a:r>
+          </a:p>
+          <a:p>
+            <a:pPr lvl="2">
+              <a:buFont typeface="Courier New" panose="02070309020205020404" pitchFamily="49" charset="0"/>
+              <a:buChar char="o"/>
+            </a:pPr>
+            <a:r>
+              <a:rPr lang="pt-BR" dirty="0"/>
+              <a:t>Espaços de ações e estados discretos</a:t>
+            </a:r>
+          </a:p>
+          <a:p>
+            <a:pPr lvl="2">
+              <a:buFont typeface="Courier New" panose="02070309020205020404" pitchFamily="49" charset="0"/>
+              <a:buChar char="o"/>
+            </a:pPr>
+            <a:r>
+              <a:rPr lang="pt-BR" dirty="0"/>
+              <a:t>Base de muitos métodos modernos.</a:t>
+            </a:r>
+          </a:p>
+          <a:p>
+            <a:pPr lvl="1">
+              <a:buFont typeface="Wingdings" panose="05000000000000000000" pitchFamily="2" charset="2"/>
+              <a:buChar char="§"/>
+            </a:pPr>
+            <a:r>
+              <a:rPr lang="en-US" b="1" dirty="0"/>
+              <a:t>Deep Q-Network (DQN)</a:t>
+            </a:r>
+          </a:p>
+          <a:p>
+            <a:pPr lvl="2">
+              <a:buFont typeface="Courier New" panose="02070309020205020404" pitchFamily="49" charset="0"/>
+              <a:buChar char="o"/>
+            </a:pPr>
+            <a:r>
+              <a:rPr lang="en-US" dirty="0" err="1"/>
+              <a:t>Combina</a:t>
+            </a:r>
+            <a:r>
+              <a:rPr lang="en-US" dirty="0"/>
+              <a:t> Q-learning com redes </a:t>
+            </a:r>
+            <a:r>
+              <a:rPr lang="en-US" dirty="0" err="1"/>
+              <a:t>neurais</a:t>
+            </a:r>
+            <a:r>
+              <a:rPr lang="en-US" dirty="0"/>
+              <a:t> </a:t>
+            </a:r>
+            <a:r>
+              <a:rPr lang="en-US" dirty="0" err="1"/>
+              <a:t>profundas</a:t>
+            </a:r>
+            <a:r>
+              <a:rPr lang="en-US" dirty="0"/>
+              <a:t>.</a:t>
+            </a:r>
+          </a:p>
+          <a:p>
+            <a:pPr lvl="2">
+              <a:buFont typeface="Courier New" panose="02070309020205020404" pitchFamily="49" charset="0"/>
+              <a:buChar char="o"/>
+            </a:pPr>
+            <a:r>
+              <a:rPr lang="en-US" dirty="0" err="1"/>
+              <a:t>Espaço</a:t>
+            </a:r>
+            <a:r>
+              <a:rPr lang="en-US" dirty="0"/>
+              <a:t> de </a:t>
+            </a:r>
+            <a:r>
+              <a:rPr lang="en-US" dirty="0" err="1"/>
+              <a:t>ações</a:t>
+            </a:r>
+            <a:r>
+              <a:rPr lang="en-US" dirty="0"/>
+              <a:t> </a:t>
+            </a:r>
+            <a:r>
+              <a:rPr lang="en-US" dirty="0" err="1"/>
+              <a:t>discreto</a:t>
+            </a:r>
+            <a:r>
+              <a:rPr lang="en-US" dirty="0"/>
+              <a:t> e </a:t>
+            </a:r>
+            <a:r>
+              <a:rPr lang="en-US" dirty="0" err="1"/>
+              <a:t>espaço</a:t>
+            </a:r>
+            <a:r>
+              <a:rPr lang="en-US" dirty="0"/>
+              <a:t> de </a:t>
+            </a:r>
+            <a:r>
+              <a:rPr lang="en-US" dirty="0" err="1"/>
+              <a:t>estados</a:t>
+            </a:r>
+            <a:r>
+              <a:rPr lang="en-US" dirty="0"/>
+              <a:t> </a:t>
+            </a:r>
+            <a:r>
+              <a:rPr lang="en-US" dirty="0" err="1"/>
+              <a:t>contínuo</a:t>
+            </a:r>
+            <a:r>
+              <a:rPr lang="en-US" dirty="0"/>
+              <a:t>.</a:t>
+            </a:r>
+          </a:p>
+          <a:p>
+            <a:pPr lvl="1">
+              <a:buFont typeface="Wingdings" panose="05000000000000000000" pitchFamily="2" charset="2"/>
+              <a:buChar char="§"/>
+            </a:pPr>
+            <a:r>
+              <a:rPr lang="pt-BR" b="1" dirty="0"/>
+              <a:t>DDPG (</a:t>
+            </a:r>
+            <a:r>
+              <a:rPr lang="pt-BR" b="1" dirty="0" err="1"/>
+              <a:t>Deep</a:t>
+            </a:r>
+            <a:r>
+              <a:rPr lang="pt-BR" b="1" dirty="0"/>
+              <a:t> </a:t>
+            </a:r>
+            <a:r>
+              <a:rPr lang="pt-BR" b="1" dirty="0" err="1"/>
+              <a:t>Deterministic</a:t>
+            </a:r>
+            <a:r>
+              <a:rPr lang="pt-BR" b="1" dirty="0"/>
+              <a:t> </a:t>
+            </a:r>
+            <a:r>
+              <a:rPr lang="pt-BR" b="1" dirty="0" err="1"/>
+              <a:t>Policy</a:t>
+            </a:r>
+            <a:r>
+              <a:rPr lang="pt-BR" b="1" dirty="0"/>
+              <a:t> </a:t>
+            </a:r>
+            <a:r>
+              <a:rPr lang="pt-BR" b="1" dirty="0" err="1"/>
+              <a:t>Gradient</a:t>
+            </a:r>
+            <a:r>
+              <a:rPr lang="pt-BR" b="1" dirty="0"/>
+              <a:t>)</a:t>
+            </a:r>
+          </a:p>
+          <a:p>
+            <a:pPr lvl="2">
+              <a:buFont typeface="Courier New" panose="02070309020205020404" pitchFamily="49" charset="0"/>
+              <a:buChar char="o"/>
+            </a:pPr>
+            <a:r>
+              <a:rPr lang="pt-BR" dirty="0"/>
+              <a:t>Extensão do DQN para espaços de ações e estados contínuos.</a:t>
+            </a:r>
+          </a:p>
+          <a:p>
+            <a:r>
+              <a:rPr lang="pt-BR" dirty="0"/>
+              <a:t>Devido a sua simplicidade e por introduzir de forma clara os conceitos fundamentais de aprendizado por reforço, focaremos no </a:t>
+            </a:r>
+            <a:r>
+              <a:rPr lang="pt-BR" b="1" dirty="0" err="1"/>
+              <a:t>Q-</a:t>
+            </a:r>
+            <a:r>
+              <a:rPr lang="pt-BR" b="1" i="1" dirty="0" err="1"/>
+              <a:t>learning</a:t>
+            </a:r>
+            <a:r>
+              <a:rPr lang="pt-BR" dirty="0"/>
+              <a:t>, proposto por Christopher Watkins em 1989. </a:t>
+            </a:r>
+            <a:endParaRPr lang="en-US" dirty="0"/>
           </a:p>
         </p:txBody>
       </p:sp>
     </p:spTree>
     <p:extLst>
       <p:ext uri="{BB962C8B-B14F-4D97-AF65-F5344CB8AC3E}">
-        <p14:creationId xmlns:p14="http://schemas.microsoft.com/office/powerpoint/2010/main" val="3079050531"/>
+        <p14:creationId xmlns:p14="http://schemas.microsoft.com/office/powerpoint/2010/main" val="477789235"/>
       </p:ext>
     </p:extLst>
   </p:cSld>
@@ -5248,10 +5939,10 @@
       </p:grpSpPr>
       <p:sp>
         <p:nvSpPr>
-          <p:cNvPr id="2" name="Título 1">
-            <a:extLst>
-              <a:ext uri="{FF2B5EF4-FFF2-40B4-BE49-F238E27FC236}">
-                <a16:creationId xmlns:a16="http://schemas.microsoft.com/office/drawing/2014/main" xmlns="" id="{083FFF02-0FC8-9F0B-AAB0-565FC99EA70D}"/>
+          <p:cNvPr id="2" name="Title 1">
+            <a:extLst>
+              <a:ext uri="{FF2B5EF4-FFF2-40B4-BE49-F238E27FC236}">
+                <a16:creationId xmlns:a16="http://schemas.microsoft.com/office/drawing/2014/main" id="{8C8E92F5-0D3A-0F43-282A-3A7C0603923D}"/>
               </a:ext>
             </a:extLst>
           </p:cNvPr>
@@ -5269,17 +5960,30 @@
           <a:p>
             <a:r>
               <a:rPr lang="pt-BR" dirty="0"/>
-              <a:t>Arquitetura e funcionamento</a:t>
-            </a:r>
-          </a:p>
-        </p:txBody>
-      </p:sp>
-      <p:sp>
-        <p:nvSpPr>
-          <p:cNvPr id="3" name="Espaço Reservado para Conteúdo 2">
-            <a:extLst>
-              <a:ext uri="{FF2B5EF4-FFF2-40B4-BE49-F238E27FC236}">
-                <a16:creationId xmlns:a16="http://schemas.microsoft.com/office/drawing/2014/main" xmlns="" id="{8C5488AE-34B4-EF1D-F674-507FF2FCD122}"/>
+              <a:t>O que é </a:t>
+            </a:r>
+            <a:r>
+              <a:rPr lang="pt-BR" dirty="0" err="1"/>
+              <a:t>Q-</a:t>
+            </a:r>
+            <a:r>
+              <a:rPr lang="pt-BR" i="1" dirty="0" err="1"/>
+              <a:t>learning</a:t>
+            </a:r>
+            <a:r>
+              <a:rPr lang="pt-BR" dirty="0"/>
+              <a:t>?</a:t>
+            </a:r>
+            <a:endParaRPr lang="en-US" i="1" dirty="0"/>
+          </a:p>
+        </p:txBody>
+      </p:sp>
+      <p:sp>
+        <p:nvSpPr>
+          <p:cNvPr id="3" name="Content Placeholder 2">
+            <a:extLst>
+              <a:ext uri="{FF2B5EF4-FFF2-40B4-BE49-F238E27FC236}">
+                <a16:creationId xmlns:a16="http://schemas.microsoft.com/office/drawing/2014/main" id="{9AB6A6C9-67EC-449F-0095-BDC7619374B2}"/>
               </a:ext>
             </a:extLst>
           </p:cNvPr>
@@ -5290,19 +5994,131 @@
             <p:ph idx="1"/>
           </p:nvPr>
         </p:nvSpPr>
-        <p:spPr/>
+        <p:spPr>
+          <a:xfrm>
+            <a:off x="838200" y="1825625"/>
+            <a:ext cx="11277600" cy="5032375"/>
+          </a:xfrm>
+        </p:spPr>
         <p:txBody>
           <a:bodyPr/>
           <a:lstStyle/>
           <a:p>
-            <a:endParaRPr lang="pt-BR"/>
+            <a:r>
+              <a:rPr lang="pt-BR" dirty="0" err="1"/>
+              <a:t>Q-</a:t>
+            </a:r>
+            <a:r>
+              <a:rPr lang="pt-BR" i="1" dirty="0" err="1"/>
+              <a:t>learning</a:t>
+            </a:r>
+            <a:r>
+              <a:rPr lang="pt-BR" dirty="0"/>
+              <a:t> é um algoritmo </a:t>
+            </a:r>
+            <a:r>
+              <a:rPr lang="pt-BR" b="1" i="1" dirty="0"/>
+              <a:t>model-</a:t>
+            </a:r>
+            <a:r>
+              <a:rPr lang="pt-BR" b="1" i="1" dirty="0" err="1"/>
+              <a:t>free</a:t>
+            </a:r>
+            <a:r>
+              <a:rPr lang="pt-BR" dirty="0"/>
+              <a:t>.</a:t>
+            </a:r>
+          </a:p>
+          <a:p>
+            <a:r>
+              <a:rPr lang="pt-BR" dirty="0"/>
+              <a:t>Ele não conhece as regras do ambiente. </a:t>
+            </a:r>
+          </a:p>
+          <a:p>
+            <a:r>
+              <a:rPr lang="pt-BR" dirty="0"/>
+              <a:t>Em RL, o </a:t>
+            </a:r>
+            <a:r>
+              <a:rPr lang="pt-BR" b="1" dirty="0"/>
+              <a:t>"modelo"</a:t>
+            </a:r>
+            <a:r>
+              <a:rPr lang="pt-BR" dirty="0"/>
+              <a:t> é o conhecimento das regras do ambiente.</a:t>
+            </a:r>
+          </a:p>
+          <a:p>
+            <a:r>
+              <a:rPr lang="pt-BR" dirty="0"/>
+              <a:t>Ele aprende pela experiência.</a:t>
+            </a:r>
+          </a:p>
+          <a:p>
+            <a:r>
+              <a:rPr lang="en-US" dirty="0"/>
+              <a:t>Ele </a:t>
+            </a:r>
+            <a:r>
+              <a:rPr lang="en-US" dirty="0" err="1"/>
+              <a:t>começa</a:t>
+            </a:r>
+            <a:r>
+              <a:rPr lang="en-US" dirty="0"/>
+              <a:t> “</a:t>
+            </a:r>
+            <a:r>
+              <a:rPr lang="en-US" dirty="0" err="1"/>
+              <a:t>cego</a:t>
+            </a:r>
+            <a:r>
+              <a:rPr lang="en-US" dirty="0"/>
+              <a:t>” e </a:t>
+            </a:r>
+            <a:r>
+              <a:rPr lang="en-US" dirty="0" err="1"/>
+              <a:t>por</a:t>
+            </a:r>
+            <a:r>
+              <a:rPr lang="en-US" dirty="0"/>
+              <a:t> </a:t>
+            </a:r>
+            <a:r>
+              <a:rPr lang="pt-BR" dirty="0"/>
+              <a:t>tentativa e erro vai aprendendo.</a:t>
+            </a:r>
+          </a:p>
+          <a:p>
+            <a:r>
+              <a:rPr lang="pt-BR" dirty="0"/>
+              <a:t>Se temos um modelo, sabemos exatamente o que vai acontecer antes de agir. </a:t>
+            </a:r>
+          </a:p>
+          <a:p>
+            <a:r>
+              <a:rPr lang="pt-BR" dirty="0"/>
+              <a:t>Por exemplo em um jogo de tabuleiro: </a:t>
+            </a:r>
+            <a:r>
+              <a:rPr lang="pt-BR" i="1" dirty="0"/>
+              <a:t>"Se eu estou na casa A e for para a direita, eu TENHO 100% de chance de cair na casa B e ganhar 5 pontos"</a:t>
+            </a:r>
+            <a:r>
+              <a:rPr lang="pt-BR" dirty="0"/>
+              <a:t>.</a:t>
+            </a:r>
+          </a:p>
+          <a:p>
+            <a:pPr lvl="1"/>
+            <a:endParaRPr lang="pt-BR" dirty="0"/>
           </a:p>
         </p:txBody>
       </p:sp>
     </p:spTree>
     <p:extLst>
       <p:ext uri="{BB962C8B-B14F-4D97-AF65-F5344CB8AC3E}">
-        <p14:creationId xmlns:p14="http://schemas.microsoft.com/office/powerpoint/2010/main" val="1547259554"/>
+        <p14:creationId xmlns:p14="http://schemas.microsoft.com/office/powerpoint/2010/main" val="2605339937"/>
       </p:ext>
     </p:extLst>
   </p:cSld>
@@ -5320,7 +6136,7 @@
         <p:cNvPr id="1" name="">
           <a:extLst>
             <a:ext uri="{FF2B5EF4-FFF2-40B4-BE49-F238E27FC236}">
-              <a16:creationId xmlns:a16="http://schemas.microsoft.com/office/drawing/2014/main" xmlns="" id="{E1C9F56A-97FC-7CCD-E5BA-3B5E230AD9AB}"/>
+              <a16:creationId xmlns:a16="http://schemas.microsoft.com/office/drawing/2014/main" id="{74614044-1D84-E441-8AC3-FB3FD9221416}"/>
             </a:ext>
           </a:extLst>
         </p:cNvPr>
@@ -5337,10 +6153,10 @@
       </p:grpSpPr>
       <p:sp>
         <p:nvSpPr>
-          <p:cNvPr id="2" name="Título 1">
-            <a:extLst>
-              <a:ext uri="{FF2B5EF4-FFF2-40B4-BE49-F238E27FC236}">
-                <a16:creationId xmlns:a16="http://schemas.microsoft.com/office/drawing/2014/main" xmlns="" id="{A979DAB9-0612-F0CD-7BB1-AF52B98B3210}"/>
+          <p:cNvPr id="2" name="Title 1">
+            <a:extLst>
+              <a:ext uri="{FF2B5EF4-FFF2-40B4-BE49-F238E27FC236}">
+                <a16:creationId xmlns:a16="http://schemas.microsoft.com/office/drawing/2014/main" id="{C6E93585-9339-7002-7C62-27331F24C140}"/>
               </a:ext>
             </a:extLst>
           </p:cNvPr>
@@ -5358,40 +6174,384 @@
           <a:p>
             <a:r>
               <a:rPr lang="pt-BR" dirty="0"/>
-              <a:t>Treinamento e otimização</a:t>
-            </a:r>
-          </a:p>
-        </p:txBody>
-      </p:sp>
-      <p:sp>
-        <p:nvSpPr>
-          <p:cNvPr id="3" name="Espaço Reservado para Conteúdo 2">
-            <a:extLst>
-              <a:ext uri="{FF2B5EF4-FFF2-40B4-BE49-F238E27FC236}">
-                <a16:creationId xmlns:a16="http://schemas.microsoft.com/office/drawing/2014/main" xmlns="" id="{F22F88A5-87D1-340F-853F-8C2ED8F8C877}"/>
-              </a:ext>
-            </a:extLst>
-          </p:cNvPr>
-          <p:cNvSpPr>
-            <a:spLocks noGrp="1"/>
-          </p:cNvSpPr>
-          <p:nvPr>
-            <p:ph idx="1"/>
-          </p:nvPr>
-        </p:nvSpPr>
-        <p:spPr/>
-        <p:txBody>
-          <a:bodyPr/>
-          <a:lstStyle/>
-          <a:p>
-            <a:endParaRPr lang="pt-BR"/>
-          </a:p>
-        </p:txBody>
-      </p:sp>
+              <a:t>O que significa o "Q"? </a:t>
+            </a:r>
+          </a:p>
+        </p:txBody>
+      </p:sp>
+      <mc:AlternateContent xmlns:mc="http://schemas.openxmlformats.org/markup-compatibility/2006">
+        <mc:Choice xmlns:a14="http://schemas.microsoft.com/office/drawing/2010/main" Requires="a14">
+          <p:sp>
+            <p:nvSpPr>
+              <p:cNvPr id="3" name="Content Placeholder 2">
+                <a:extLst>
+                  <a:ext uri="{FF2B5EF4-FFF2-40B4-BE49-F238E27FC236}">
+                    <a16:creationId xmlns:a16="http://schemas.microsoft.com/office/drawing/2014/main" id="{A1483011-729D-F9ED-5FD6-580E6A4020EF}"/>
+                  </a:ext>
+                </a:extLst>
+              </p:cNvPr>
+              <p:cNvSpPr>
+                <a:spLocks noGrp="1"/>
+              </p:cNvSpPr>
+              <p:nvPr>
+                <p:ph idx="1"/>
+              </p:nvPr>
+            </p:nvSpPr>
+            <p:spPr>
+              <a:xfrm>
+                <a:off x="838200" y="1825625"/>
+                <a:ext cx="11255829" cy="5032375"/>
+              </a:xfrm>
+            </p:spPr>
+            <p:txBody>
+              <a:bodyPr>
+                <a:normAutofit fontScale="92500" lnSpcReduction="20000"/>
+              </a:bodyPr>
+              <a:lstStyle/>
+              <a:p>
+                <a:r>
+                  <a:rPr lang="pt-BR" dirty="0"/>
+                  <a:t>Significa </a:t>
+                </a:r>
+                <a:r>
+                  <a:rPr lang="pt-BR" b="1" dirty="0"/>
+                  <a:t>qualidade</a:t>
+                </a:r>
+                <a:r>
+                  <a:rPr lang="pt-BR" dirty="0"/>
+                  <a:t>. </a:t>
+                </a:r>
+              </a:p>
+              <a:p>
+                <a:r>
+                  <a:rPr lang="pt-BR" dirty="0"/>
+                  <a:t>Representa o quão boa é uma determinada ação em um estado específico.</a:t>
+                </a:r>
+              </a:p>
+              <a:p>
+                <a:r>
+                  <a:rPr lang="pt-BR" dirty="0"/>
+                  <a:t>Quem informa a </a:t>
+                </a:r>
+                <a:r>
+                  <a:rPr lang="pt-BR" b="1" dirty="0"/>
+                  <a:t>qualidade</a:t>
+                </a:r>
+                <a:r>
+                  <a:rPr lang="pt-BR" dirty="0"/>
+                  <a:t> é a </a:t>
+                </a:r>
+                <a:r>
+                  <a:rPr lang="pt-BR" b="1" dirty="0"/>
+                  <a:t>função </a:t>
+                </a:r>
+                <a:r>
+                  <a:rPr lang="pt-BR" b="1" dirty="0" err="1"/>
+                  <a:t>valor-ação</a:t>
+                </a:r>
+                <a:r>
+                  <a:rPr lang="pt-BR" dirty="0"/>
+                  <a:t>, </a:t>
+                </a:r>
+                <a14:m>
+                  <m:oMath xmlns:m="http://schemas.openxmlformats.org/officeDocument/2006/math">
+                    <m:r>
+                      <a:rPr lang="pt-BR" i="1">
+                        <a:latin typeface="Cambria Math" panose="02040503050406030204" pitchFamily="18" charset="0"/>
+                      </a:rPr>
+                      <m:t>𝑄</m:t>
+                    </m:r>
+                    <m:r>
+                      <a:rPr lang="pt-BR" i="1">
+                        <a:latin typeface="Cambria Math" panose="02040503050406030204" pitchFamily="18" charset="0"/>
+                      </a:rPr>
+                      <m:t>(</m:t>
+                    </m:r>
+                    <m:r>
+                      <a:rPr lang="pt-BR" i="1">
+                        <a:latin typeface="Cambria Math" panose="02040503050406030204" pitchFamily="18" charset="0"/>
+                      </a:rPr>
+                      <m:t>𝑠</m:t>
+                    </m:r>
+                    <m:r>
+                      <a:rPr lang="pt-BR" i="1">
+                        <a:latin typeface="Cambria Math" panose="02040503050406030204" pitchFamily="18" charset="0"/>
+                      </a:rPr>
+                      <m:t>,</m:t>
+                    </m:r>
+                    <m:r>
+                      <a:rPr lang="pt-BR" i="1">
+                        <a:latin typeface="Cambria Math" panose="02040503050406030204" pitchFamily="18" charset="0"/>
+                      </a:rPr>
+                      <m:t>𝑎</m:t>
+                    </m:r>
+                    <m:r>
+                      <a:rPr lang="pt-BR" i="1">
+                        <a:latin typeface="Cambria Math" panose="02040503050406030204" pitchFamily="18" charset="0"/>
+                      </a:rPr>
+                      <m:t>)</m:t>
+                    </m:r>
+                  </m:oMath>
+                </a14:m>
+                <a:r>
+                  <a:rPr lang="pt-BR" dirty="0"/>
+                  <a:t>, que mede o retorno (qualidade) esperado ao executar a ação </a:t>
+                </a:r>
+                <a14:m>
+                  <m:oMath xmlns:m="http://schemas.openxmlformats.org/officeDocument/2006/math">
+                    <m:r>
+                      <a:rPr lang="pt-BR" i="1">
+                        <a:latin typeface="Cambria Math" panose="02040503050406030204" pitchFamily="18" charset="0"/>
+                      </a:rPr>
+                      <m:t>𝑎</m:t>
+                    </m:r>
+                  </m:oMath>
+                </a14:m>
+                <a:r>
+                  <a:rPr lang="pt-BR" dirty="0"/>
+                  <a:t> no estado </a:t>
+                </a:r>
+                <a14:m>
+                  <m:oMath xmlns:m="http://schemas.openxmlformats.org/officeDocument/2006/math">
+                    <m:r>
+                      <a:rPr lang="pt-BR" i="1">
+                        <a:latin typeface="Cambria Math" panose="02040503050406030204" pitchFamily="18" charset="0"/>
+                      </a:rPr>
+                      <m:t>𝑠</m:t>
+                    </m:r>
+                  </m:oMath>
+                </a14:m>
+                <a:r>
+                  <a:rPr lang="pt-BR" dirty="0"/>
+                  <a:t>.</a:t>
+                </a:r>
+              </a:p>
+              <a:p>
+                <a:endParaRPr lang="pt-BR" dirty="0"/>
+              </a:p>
+              <a:p>
+                <a:endParaRPr lang="pt-BR" dirty="0"/>
+              </a:p>
+              <a:p>
+                <a:r>
+                  <a:rPr lang="pt-BR" dirty="0">
+                    <a:solidFill>
+                      <a:srgbClr val="FF0000"/>
+                    </a:solidFill>
+                  </a:rPr>
+                  <a:t>A </a:t>
+                </a:r>
+                <a:r>
+                  <a:rPr lang="pt-BR" b="1" dirty="0">
+                    <a:solidFill>
+                      <a:srgbClr val="FF0000"/>
+                    </a:solidFill>
+                  </a:rPr>
+                  <a:t>tabela-Q</a:t>
+                </a:r>
+                <a:r>
+                  <a:rPr lang="pt-BR" dirty="0">
+                    <a:solidFill>
+                      <a:srgbClr val="FF0000"/>
+                    </a:solidFill>
+                  </a:rPr>
+                  <a:t> é literalmente uma tabela (ou matriz) onde as linhas são os estados e as colunas são as ações. </a:t>
+                </a:r>
+              </a:p>
+              <a:p>
+                <a:r>
+                  <a:rPr lang="pt-BR" dirty="0">
+                    <a:solidFill>
+                      <a:srgbClr val="FF0000"/>
+                    </a:solidFill>
+                  </a:rPr>
+                  <a:t>A </a:t>
+                </a:r>
+                <a:r>
+                  <a:rPr lang="pt-BR" b="1" dirty="0">
+                    <a:solidFill>
+                      <a:srgbClr val="FF0000"/>
+                    </a:solidFill>
+                  </a:rPr>
+                  <a:t>tabela-Q</a:t>
+                </a:r>
+                <a:r>
+                  <a:rPr lang="pt-BR" dirty="0">
+                    <a:solidFill>
+                      <a:srgbClr val="FF0000"/>
+                    </a:solidFill>
+                  </a:rPr>
+                  <a:t> é uma representação discreta da </a:t>
+                </a:r>
+                <a:r>
+                  <a:rPr lang="pt-BR" b="1" dirty="0">
+                    <a:solidFill>
+                      <a:srgbClr val="FF0000"/>
+                    </a:solidFill>
+                  </a:rPr>
+                  <a:t>função </a:t>
+                </a:r>
+                <a:r>
+                  <a:rPr lang="en-US" b="1" dirty="0">
+                    <a:solidFill>
+                      <a:srgbClr val="FF0000"/>
+                    </a:solidFill>
+                  </a:rPr>
+                  <a:t>valor-</a:t>
+                </a:r>
+                <a:r>
+                  <a:rPr lang="en-US" b="1" dirty="0" err="1">
+                    <a:solidFill>
+                      <a:srgbClr val="FF0000"/>
+                    </a:solidFill>
+                  </a:rPr>
+                  <a:t>ação</a:t>
+                </a:r>
+                <a:r>
+                  <a:rPr lang="pt-BR" dirty="0">
+                    <a:solidFill>
+                      <a:srgbClr val="FF0000"/>
+                    </a:solidFill>
+                  </a:rPr>
+                  <a:t> onde cada entrada armazena um valor para um par estado–ação.</a:t>
+                </a:r>
+              </a:p>
+              <a:p>
+                <a:endParaRPr lang="pt-BR" dirty="0">
+                  <a:solidFill>
+                    <a:srgbClr val="FF0000"/>
+                  </a:solidFill>
+                </a:endParaRPr>
+              </a:p>
+              <a:p>
+                <a:r>
+                  <a:rPr lang="pt-BR" dirty="0">
+                    <a:solidFill>
+                      <a:srgbClr val="FF0000"/>
+                    </a:solidFill>
+                  </a:rPr>
+                  <a:t>O objetivo do algoritmo é preencher esta tabela com os melhores valores possíveis para servir como uma "cola" (</a:t>
+                </a:r>
+                <a:r>
+                  <a:rPr lang="pt-BR" i="1" dirty="0" err="1">
+                    <a:solidFill>
+                      <a:srgbClr val="FF0000"/>
+                    </a:solidFill>
+                  </a:rPr>
+                  <a:t>cheat</a:t>
+                </a:r>
+                <a:r>
+                  <a:rPr lang="pt-BR" i="1" dirty="0">
+                    <a:solidFill>
+                      <a:srgbClr val="FF0000"/>
+                    </a:solidFill>
+                  </a:rPr>
+                  <a:t> </a:t>
+                </a:r>
+                <a:r>
+                  <a:rPr lang="pt-BR" i="1" dirty="0" err="1">
+                    <a:solidFill>
+                      <a:srgbClr val="FF0000"/>
+                    </a:solidFill>
+                  </a:rPr>
+                  <a:t>sheet</a:t>
+                </a:r>
+                <a:r>
+                  <a:rPr lang="pt-BR" dirty="0">
+                    <a:solidFill>
+                      <a:srgbClr val="FF0000"/>
+                    </a:solidFill>
+                  </a:rPr>
+                  <a:t>) para o agente, guiando-se para a </a:t>
+                </a:r>
+                <a:r>
+                  <a:rPr lang="en-US" altLang="en-US" dirty="0" err="1">
+                    <a:solidFill>
+                      <a:srgbClr val="FF0000"/>
+                    </a:solidFill>
+                    <a:latin typeface="Google Sans Text"/>
+                  </a:rPr>
+                  <a:t>melhor</a:t>
+                </a:r>
+                <a:r>
+                  <a:rPr lang="en-US" altLang="en-US" dirty="0">
+                    <a:solidFill>
+                      <a:srgbClr val="FF0000"/>
+                    </a:solidFill>
+                    <a:latin typeface="Google Sans Text"/>
+                  </a:rPr>
+                  <a:t> </a:t>
+                </a:r>
+                <a:r>
+                  <a:rPr lang="en-US" altLang="en-US" dirty="0" err="1">
+                    <a:solidFill>
+                      <a:srgbClr val="FF0000"/>
+                    </a:solidFill>
+                    <a:latin typeface="Google Sans Text"/>
+                  </a:rPr>
+                  <a:t>decisão</a:t>
+                </a:r>
+                <a:r>
+                  <a:rPr lang="en-US" altLang="en-US" dirty="0">
+                    <a:solidFill>
+                      <a:srgbClr val="FF0000"/>
+                    </a:solidFill>
+                    <a:latin typeface="Google Sans Text"/>
+                  </a:rPr>
+                  <a:t> sempre.</a:t>
+                </a:r>
+              </a:p>
+            </p:txBody>
+          </p:sp>
+        </mc:Choice>
+        <mc:Fallback>
+          <p:sp>
+            <p:nvSpPr>
+              <p:cNvPr id="3" name="Content Placeholder 2">
+                <a:extLst>
+                  <a:ext uri="{FF2B5EF4-FFF2-40B4-BE49-F238E27FC236}">
+                    <a16:creationId xmlns:a16="http://schemas.microsoft.com/office/drawing/2014/main" id="{A1483011-729D-F9ED-5FD6-580E6A4020EF}"/>
+                  </a:ext>
+                </a:extLst>
+              </p:cNvPr>
+              <p:cNvSpPr>
+                <a:spLocks noGrp="1" noRot="1" noChangeAspect="1" noMove="1" noResize="1" noEditPoints="1" noAdjustHandles="1" noChangeArrowheads="1" noChangeShapeType="1" noTextEdit="1"/>
+              </p:cNvSpPr>
+              <p:nvPr>
+                <p:ph idx="1"/>
+              </p:nvPr>
+            </p:nvSpPr>
+            <p:spPr>
+              <a:xfrm>
+                <a:off x="838200" y="1825625"/>
+                <a:ext cx="11255829" cy="5032375"/>
+              </a:xfrm>
+              <a:blipFill>
+                <a:blip r:embed="rId3"/>
+                <a:stretch>
+                  <a:fillRect l="-867" t="-3027" r="-1029" b="-2663"/>
+                </a:stretch>
+              </a:blipFill>
+            </p:spPr>
+            <p:txBody>
+              <a:bodyPr/>
+              <a:lstStyle/>
+              <a:p>
+                <a:r>
+                  <a:rPr lang="en-US">
+                    <a:noFill/>
+                  </a:rPr>
+                  <a:t> </a:t>
+                </a:r>
+              </a:p>
+            </p:txBody>
+          </p:sp>
+        </mc:Fallback>
+      </mc:AlternateContent>
     </p:spTree>
     <p:extLst>
       <p:ext uri="{BB962C8B-B14F-4D97-AF65-F5344CB8AC3E}">
-        <p14:creationId xmlns:p14="http://schemas.microsoft.com/office/powerpoint/2010/main" val="3906980817"/>
+        <p14:creationId xmlns:p14="http://schemas.microsoft.com/office/powerpoint/2010/main" val="765987793"/>
       </p:ext>
     </p:extLst>
   </p:cSld>
@@ -5406,13 +6566,7 @@
   <p:cSld>
     <p:spTree>
       <p:nvGrpSpPr>
-        <p:cNvPr id="1" name="">
-          <a:extLst>
-            <a:ext uri="{FF2B5EF4-FFF2-40B4-BE49-F238E27FC236}">
-              <a16:creationId xmlns:a16="http://schemas.microsoft.com/office/drawing/2014/main" xmlns="" id="{B28A9759-CA4F-DA4F-85C2-F6E51DCED2D9}"/>
-            </a:ext>
-          </a:extLst>
-        </p:cNvPr>
+        <p:cNvPr id="1" name=""/>
         <p:cNvGrpSpPr/>
         <p:nvPr/>
       </p:nvGrpSpPr>
@@ -5426,10 +6580,10 @@
       </p:grpSpPr>
       <p:sp>
         <p:nvSpPr>
-          <p:cNvPr id="2" name="Título 1">
-            <a:extLst>
-              <a:ext uri="{FF2B5EF4-FFF2-40B4-BE49-F238E27FC236}">
-                <a16:creationId xmlns:a16="http://schemas.microsoft.com/office/drawing/2014/main" xmlns="" id="{072F732D-34CE-6153-324F-D7F6821577F0}"/>
+          <p:cNvPr id="2" name="Title 1">
+            <a:extLst>
+              <a:ext uri="{FF2B5EF4-FFF2-40B4-BE49-F238E27FC236}">
+                <a16:creationId xmlns:a16="http://schemas.microsoft.com/office/drawing/2014/main" id="{874F2722-DA1E-D930-DC99-59F795E3E8B9}"/>
               </a:ext>
             </a:extLst>
           </p:cNvPr>
@@ -5445,19 +6599,16 @@
           <a:bodyPr/>
           <a:lstStyle/>
           <a:p>
-            <a:r>
-              <a:rPr lang="pt-BR" dirty="0"/>
-              <a:t>Vantagens e desvantagens</a:t>
-            </a:r>
-          </a:p>
-        </p:txBody>
-      </p:sp>
-      <p:sp>
-        <p:nvSpPr>
-          <p:cNvPr id="3" name="Espaço Reservado para Conteúdo 2">
-            <a:extLst>
-              <a:ext uri="{FF2B5EF4-FFF2-40B4-BE49-F238E27FC236}">
-                <a16:creationId xmlns:a16="http://schemas.microsoft.com/office/drawing/2014/main" xmlns="" id="{62A55622-8E11-E5D7-8EAF-7AE2CCAA3321}"/>
+            <a:endParaRPr lang="en-US"/>
+          </a:p>
+        </p:txBody>
+      </p:sp>
+      <p:sp>
+        <p:nvSpPr>
+          <p:cNvPr id="3" name="Content Placeholder 2">
+            <a:extLst>
+              <a:ext uri="{FF2B5EF4-FFF2-40B4-BE49-F238E27FC236}">
+                <a16:creationId xmlns:a16="http://schemas.microsoft.com/office/drawing/2014/main" id="{97BD2D05-0E48-B94D-DBC7-FBDCBC17C0A5}"/>
               </a:ext>
             </a:extLst>
           </p:cNvPr>
@@ -5470,17 +6621,31 @@
         </p:nvSpPr>
         <p:spPr/>
         <p:txBody>
-          <a:bodyPr/>
+          <a:bodyPr>
+            <a:normAutofit/>
+          </a:bodyPr>
           <a:lstStyle/>
           <a:p>
-            <a:endParaRPr lang="pt-BR"/>
+            <a:r>
+              <a:rPr lang="pt-BR" sz="5400" b="1" dirty="0">
+                <a:solidFill>
+                  <a:srgbClr val="FF0000"/>
+                </a:solidFill>
+              </a:rPr>
+              <a:t>PAREI AQUI!!!!!!!!!!!!</a:t>
+            </a:r>
+            <a:endParaRPr lang="en-US" sz="5400" b="1" dirty="0">
+              <a:solidFill>
+                <a:srgbClr val="FF0000"/>
+              </a:solidFill>
+            </a:endParaRPr>
           </a:p>
         </p:txBody>
       </p:sp>
     </p:spTree>
     <p:extLst>
       <p:ext uri="{BB962C8B-B14F-4D97-AF65-F5344CB8AC3E}">
-        <p14:creationId xmlns:p14="http://schemas.microsoft.com/office/powerpoint/2010/main" val="1521811257"/>
+        <p14:creationId xmlns:p14="http://schemas.microsoft.com/office/powerpoint/2010/main" val="3079050531"/>
       </p:ext>
     </p:extLst>
   </p:cSld>
@@ -5509,10 +6674,10 @@
       </p:grpSpPr>
       <p:sp>
         <p:nvSpPr>
-          <p:cNvPr id="2" name="Título 1">
-            <a:extLst>
-              <a:ext uri="{FF2B5EF4-FFF2-40B4-BE49-F238E27FC236}">
-                <a16:creationId xmlns:a16="http://schemas.microsoft.com/office/drawing/2014/main" xmlns="" id="{B9E502FC-4440-F5DA-F299-69CD15E702AE}"/>
+          <p:cNvPr id="2" name="Title 1">
+            <a:extLst>
+              <a:ext uri="{FF2B5EF4-FFF2-40B4-BE49-F238E27FC236}">
+                <a16:creationId xmlns:a16="http://schemas.microsoft.com/office/drawing/2014/main" id="{7091E349-E10B-155D-AA4C-5C644F1CA204}"/>
               </a:ext>
             </a:extLst>
           </p:cNvPr>
@@ -5528,19 +6693,16 @@
           <a:bodyPr/>
           <a:lstStyle/>
           <a:p>
-            <a:r>
-              <a:rPr lang="pt-BR" dirty="0"/>
-              <a:t>Exemplo(s) de aplicação</a:t>
-            </a:r>
-          </a:p>
-        </p:txBody>
-      </p:sp>
-      <p:sp>
-        <p:nvSpPr>
-          <p:cNvPr id="3" name="Espaço Reservado para Conteúdo 2">
-            <a:extLst>
-              <a:ext uri="{FF2B5EF4-FFF2-40B4-BE49-F238E27FC236}">
-                <a16:creationId xmlns:a16="http://schemas.microsoft.com/office/drawing/2014/main" xmlns="" id="{69359096-6B47-BEA3-55AD-95F90CDC8489}"/>
+            <a:endParaRPr lang="en-US"/>
+          </a:p>
+        </p:txBody>
+      </p:sp>
+      <p:sp>
+        <p:nvSpPr>
+          <p:cNvPr id="3" name="Content Placeholder 2">
+            <a:extLst>
+              <a:ext uri="{FF2B5EF4-FFF2-40B4-BE49-F238E27FC236}">
+                <a16:creationId xmlns:a16="http://schemas.microsoft.com/office/drawing/2014/main" id="{A98E7639-2B44-D877-80E8-CB165DA3670E}"/>
               </a:ext>
             </a:extLst>
           </p:cNvPr>
@@ -5556,14 +6718,14 @@
           <a:bodyPr/>
           <a:lstStyle/>
           <a:p>
-            <a:endParaRPr lang="pt-BR"/>
+            <a:endParaRPr lang="en-US"/>
           </a:p>
         </p:txBody>
       </p:sp>
     </p:spTree>
     <p:extLst>
       <p:ext uri="{BB962C8B-B14F-4D97-AF65-F5344CB8AC3E}">
-        <p14:creationId xmlns:p14="http://schemas.microsoft.com/office/powerpoint/2010/main" val="1532530965"/>
+        <p14:creationId xmlns:p14="http://schemas.microsoft.com/office/powerpoint/2010/main" val="2527015132"/>
       </p:ext>
     </p:extLst>
   </p:cSld>
@@ -5592,10 +6754,10 @@
       </p:grpSpPr>
       <p:sp>
         <p:nvSpPr>
-          <p:cNvPr id="2" name="Título 1">
-            <a:extLst>
-              <a:ext uri="{FF2B5EF4-FFF2-40B4-BE49-F238E27FC236}">
-                <a16:creationId xmlns:a16="http://schemas.microsoft.com/office/drawing/2014/main" xmlns="" id="{B7EBC8F7-03EF-338A-A90B-280A41AF9688}"/>
+          <p:cNvPr id="2" name="Title 1">
+            <a:extLst>
+              <a:ext uri="{FF2B5EF4-FFF2-40B4-BE49-F238E27FC236}">
+                <a16:creationId xmlns:a16="http://schemas.microsoft.com/office/drawing/2014/main" id="{4E821798-FD00-A004-B931-C70303D79D4A}"/>
               </a:ext>
             </a:extLst>
           </p:cNvPr>
@@ -5611,19 +6773,16 @@
           <a:bodyPr/>
           <a:lstStyle/>
           <a:p>
-            <a:r>
-              <a:rPr lang="pt-BR" dirty="0"/>
-              <a:t>Comparação com outros algoritmos</a:t>
-            </a:r>
-          </a:p>
-        </p:txBody>
-      </p:sp>
-      <p:sp>
-        <p:nvSpPr>
-          <p:cNvPr id="3" name="Espaço Reservado para Conteúdo 2">
-            <a:extLst>
-              <a:ext uri="{FF2B5EF4-FFF2-40B4-BE49-F238E27FC236}">
-                <a16:creationId xmlns:a16="http://schemas.microsoft.com/office/drawing/2014/main" xmlns="" id="{C525BCE7-C19D-7DDA-016A-E3016C398CBA}"/>
+            <a:endParaRPr lang="en-US"/>
+          </a:p>
+        </p:txBody>
+      </p:sp>
+      <p:sp>
+        <p:nvSpPr>
+          <p:cNvPr id="3" name="Content Placeholder 2">
+            <a:extLst>
+              <a:ext uri="{FF2B5EF4-FFF2-40B4-BE49-F238E27FC236}">
+                <a16:creationId xmlns:a16="http://schemas.microsoft.com/office/drawing/2014/main" id="{82794FEF-22E1-5F51-3E57-B993C6FCF088}"/>
               </a:ext>
             </a:extLst>
           </p:cNvPr>
@@ -5636,17 +6795,1033 @@
         </p:nvSpPr>
         <p:spPr/>
         <p:txBody>
-          <a:bodyPr/>
+          <a:bodyPr>
+            <a:normAutofit fontScale="77500" lnSpcReduction="20000"/>
+          </a:bodyPr>
           <a:lstStyle/>
           <a:p>
-            <a:endParaRPr lang="pt-BR"/>
+            <a:pPr marL="0" lvl="0" indent="0" eaLnBrk="0" fontAlgn="base" hangingPunct="0">
+              <a:lnSpc>
+                <a:spcPct val="100000"/>
+              </a:lnSpc>
+              <a:spcBef>
+                <a:spcPct val="0"/>
+              </a:spcBef>
+              <a:spcAft>
+                <a:spcPct val="0"/>
+              </a:spcAft>
+              <a:buFontTx/>
+              <a:buChar char="•"/>
+            </a:pPr>
+            <a:r>
+              <a:rPr lang="en-US" altLang="en-US" b="1" dirty="0" err="1">
+                <a:latin typeface="Google Sans Text"/>
+              </a:rPr>
+              <a:t>Título</a:t>
+            </a:r>
+            <a:r>
+              <a:rPr lang="en-US" altLang="en-US" b="1" dirty="0">
+                <a:latin typeface="Google Sans Text"/>
+              </a:rPr>
+              <a:t>:</a:t>
+            </a:r>
+            <a:r>
+              <a:rPr lang="en-US" altLang="en-US" dirty="0">
+                <a:latin typeface="Google Sans Text"/>
+              </a:rPr>
+              <a:t> O </a:t>
+            </a:r>
+            <a:r>
+              <a:rPr lang="en-US" altLang="en-US" dirty="0" err="1">
+                <a:latin typeface="Google Sans Text"/>
+              </a:rPr>
+              <a:t>que</a:t>
+            </a:r>
+            <a:r>
+              <a:rPr lang="en-US" altLang="en-US" dirty="0">
+                <a:latin typeface="Google Sans Text"/>
+              </a:rPr>
+              <a:t> </a:t>
+            </a:r>
+            <a:r>
+              <a:rPr lang="en-US" altLang="en-US" dirty="0" err="1">
+                <a:latin typeface="Google Sans Text"/>
+              </a:rPr>
+              <a:t>significa</a:t>
+            </a:r>
+            <a:r>
+              <a:rPr lang="en-US" altLang="en-US" dirty="0">
+                <a:latin typeface="Google Sans Text"/>
+              </a:rPr>
+              <a:t> o "Q"?</a:t>
+            </a:r>
+          </a:p>
+          <a:p>
+            <a:pPr marL="0" lvl="0" indent="0" eaLnBrk="0" fontAlgn="base" hangingPunct="0">
+              <a:lnSpc>
+                <a:spcPct val="100000"/>
+              </a:lnSpc>
+              <a:spcBef>
+                <a:spcPct val="0"/>
+              </a:spcBef>
+              <a:spcAft>
+                <a:spcPct val="0"/>
+              </a:spcAft>
+              <a:buFontTx/>
+              <a:buChar char="•"/>
+            </a:pPr>
+            <a:r>
+              <a:rPr lang="en-US" altLang="en-US" b="1" dirty="0" err="1">
+                <a:latin typeface="Google Sans Text"/>
+              </a:rPr>
+              <a:t>Conteúdo</a:t>
+            </a:r>
+            <a:r>
+              <a:rPr lang="en-US" altLang="en-US" b="1" dirty="0">
+                <a:latin typeface="Google Sans Text"/>
+              </a:rPr>
+              <a:t>:</a:t>
+            </a:r>
+            <a:endParaRPr lang="en-US" altLang="en-US" dirty="0">
+              <a:latin typeface="Google Sans Text"/>
+            </a:endParaRPr>
+          </a:p>
+          <a:p>
+            <a:pPr marL="0" lvl="0" indent="0" eaLnBrk="0" fontAlgn="base" hangingPunct="0">
+              <a:lnSpc>
+                <a:spcPct val="100000"/>
+              </a:lnSpc>
+              <a:spcBef>
+                <a:spcPct val="0"/>
+              </a:spcBef>
+              <a:spcAft>
+                <a:spcPct val="0"/>
+              </a:spcAft>
+              <a:buFontTx/>
+              <a:buChar char="•"/>
+            </a:pPr>
+            <a:r>
+              <a:rPr lang="en-US" altLang="en-US" b="1" dirty="0">
+                <a:latin typeface="Google Sans Text"/>
+              </a:rPr>
+              <a:t>Q = Quality (</a:t>
+            </a:r>
+            <a:r>
+              <a:rPr lang="en-US" altLang="en-US" b="1" dirty="0" err="1">
+                <a:latin typeface="Google Sans Text"/>
+              </a:rPr>
+              <a:t>Qualidade</a:t>
+            </a:r>
+            <a:r>
+              <a:rPr lang="en-US" altLang="en-US" b="1" dirty="0">
+                <a:latin typeface="Google Sans Text"/>
+              </a:rPr>
+              <a:t>):</a:t>
+            </a:r>
+            <a:r>
+              <a:rPr lang="en-US" altLang="en-US" dirty="0">
+                <a:latin typeface="Google Sans Text"/>
+              </a:rPr>
+              <a:t> </a:t>
+            </a:r>
+            <a:r>
+              <a:rPr lang="en-US" altLang="en-US" dirty="0" err="1">
+                <a:latin typeface="Google Sans Text"/>
+              </a:rPr>
+              <a:t>Representa</a:t>
+            </a:r>
+            <a:r>
+              <a:rPr lang="en-US" altLang="en-US" dirty="0">
+                <a:latin typeface="Google Sans Text"/>
+              </a:rPr>
+              <a:t> o </a:t>
+            </a:r>
+            <a:r>
+              <a:rPr lang="en-US" altLang="en-US" dirty="0" err="1">
+                <a:latin typeface="Google Sans Text"/>
+              </a:rPr>
+              <a:t>quão</a:t>
+            </a:r>
+            <a:r>
+              <a:rPr lang="en-US" altLang="en-US" dirty="0">
+                <a:latin typeface="Google Sans Text"/>
+              </a:rPr>
+              <a:t> boa é </a:t>
+            </a:r>
+            <a:r>
+              <a:rPr lang="en-US" altLang="en-US" dirty="0" err="1">
+                <a:latin typeface="Google Sans Text"/>
+              </a:rPr>
+              <a:t>uma</a:t>
+            </a:r>
+            <a:r>
+              <a:rPr lang="en-US" altLang="en-US" dirty="0">
+                <a:latin typeface="Google Sans Text"/>
+              </a:rPr>
+              <a:t> </a:t>
+            </a:r>
+            <a:r>
+              <a:rPr lang="en-US" altLang="en-US" dirty="0" err="1">
+                <a:latin typeface="Google Sans Text"/>
+              </a:rPr>
+              <a:t>determinada</a:t>
+            </a:r>
+            <a:r>
+              <a:rPr lang="en-US" altLang="en-US" dirty="0">
+                <a:latin typeface="Google Sans Text"/>
+              </a:rPr>
+              <a:t> </a:t>
+            </a:r>
+            <a:r>
+              <a:rPr lang="en-US" altLang="en-US" dirty="0" err="1">
+                <a:latin typeface="Google Sans Text"/>
+              </a:rPr>
+              <a:t>ação</a:t>
+            </a:r>
+            <a:r>
+              <a:rPr lang="en-US" altLang="en-US" dirty="0">
+                <a:latin typeface="Google Sans Text"/>
+              </a:rPr>
+              <a:t> </a:t>
+            </a:r>
+            <a:r>
+              <a:rPr lang="en-US" altLang="en-US" dirty="0" err="1">
+                <a:latin typeface="Google Sans Text"/>
+              </a:rPr>
+              <a:t>em</a:t>
+            </a:r>
+            <a:r>
+              <a:rPr lang="en-US" altLang="en-US" dirty="0">
+                <a:latin typeface="Google Sans Text"/>
+              </a:rPr>
+              <a:t> um </a:t>
+            </a:r>
+            <a:r>
+              <a:rPr lang="en-US" altLang="en-US" dirty="0" err="1">
+                <a:latin typeface="Google Sans Text"/>
+              </a:rPr>
+              <a:t>estado</a:t>
+            </a:r>
+            <a:r>
+              <a:rPr lang="en-US" altLang="en-US" dirty="0">
+                <a:latin typeface="Google Sans Text"/>
+              </a:rPr>
+              <a:t> </a:t>
+            </a:r>
+            <a:r>
+              <a:rPr lang="en-US" altLang="en-US" dirty="0" err="1">
+                <a:latin typeface="Google Sans Text"/>
+              </a:rPr>
+              <a:t>específico</a:t>
+            </a:r>
+            <a:r>
+              <a:rPr lang="en-US" altLang="en-US" dirty="0">
+                <a:latin typeface="Google Sans Text"/>
+              </a:rPr>
+              <a:t>.</a:t>
+            </a:r>
+          </a:p>
+          <a:p>
+            <a:pPr marL="0" lvl="0" indent="0" eaLnBrk="0" fontAlgn="base" hangingPunct="0">
+              <a:lnSpc>
+                <a:spcPct val="100000"/>
+              </a:lnSpc>
+              <a:spcBef>
+                <a:spcPct val="0"/>
+              </a:spcBef>
+              <a:spcAft>
+                <a:spcPct val="0"/>
+              </a:spcAft>
+              <a:buFontTx/>
+              <a:buChar char="•"/>
+            </a:pPr>
+            <a:r>
+              <a:rPr lang="en-US" altLang="en-US" b="1" dirty="0">
+                <a:latin typeface="Google Sans Text"/>
+              </a:rPr>
+              <a:t>A </a:t>
+            </a:r>
+            <a:r>
+              <a:rPr lang="en-US" altLang="en-US" b="1" dirty="0" err="1">
+                <a:latin typeface="Google Sans Text"/>
+              </a:rPr>
+              <a:t>Função</a:t>
+            </a:r>
+            <a:r>
+              <a:rPr lang="en-US" altLang="en-US" b="1" dirty="0">
+                <a:latin typeface="Google Sans Text"/>
+              </a:rPr>
+              <a:t> $Q(s, a)$:</a:t>
+            </a:r>
+            <a:r>
+              <a:rPr lang="en-US" altLang="en-US" dirty="0">
+                <a:latin typeface="Google Sans Text"/>
+              </a:rPr>
+              <a:t> É o </a:t>
+            </a:r>
+            <a:r>
+              <a:rPr lang="en-US" altLang="en-US" dirty="0" err="1">
+                <a:latin typeface="Google Sans Text"/>
+              </a:rPr>
+              <a:t>retorno</a:t>
+            </a:r>
+            <a:r>
+              <a:rPr lang="en-US" altLang="en-US" dirty="0">
+                <a:latin typeface="Google Sans Text"/>
+              </a:rPr>
+              <a:t> </a:t>
+            </a:r>
+            <a:r>
+              <a:rPr lang="en-US" altLang="en-US" dirty="0" err="1">
+                <a:latin typeface="Google Sans Text"/>
+              </a:rPr>
+              <a:t>esperado</a:t>
+            </a:r>
+            <a:r>
+              <a:rPr lang="en-US" altLang="en-US" dirty="0">
+                <a:latin typeface="Google Sans Text"/>
+              </a:rPr>
+              <a:t> (soma das </a:t>
+            </a:r>
+            <a:r>
+              <a:rPr lang="en-US" altLang="en-US" dirty="0" err="1">
+                <a:latin typeface="Google Sans Text"/>
+              </a:rPr>
+              <a:t>recompensas</a:t>
+            </a:r>
+            <a:r>
+              <a:rPr lang="en-US" altLang="en-US" dirty="0">
+                <a:latin typeface="Google Sans Text"/>
+              </a:rPr>
+              <a:t> </a:t>
+            </a:r>
+            <a:r>
+              <a:rPr lang="en-US" altLang="en-US" dirty="0" err="1">
+                <a:latin typeface="Google Sans Text"/>
+              </a:rPr>
+              <a:t>futuras</a:t>
+            </a:r>
+            <a:r>
+              <a:rPr lang="en-US" altLang="en-US" dirty="0">
+                <a:latin typeface="Google Sans Text"/>
+              </a:rPr>
+              <a:t>) se o </a:t>
+            </a:r>
+            <a:r>
+              <a:rPr lang="en-US" altLang="en-US" dirty="0" err="1">
+                <a:latin typeface="Google Sans Text"/>
+              </a:rPr>
+              <a:t>agente</a:t>
+            </a:r>
+            <a:r>
+              <a:rPr lang="en-US" altLang="en-US" dirty="0">
+                <a:latin typeface="Google Sans Text"/>
+              </a:rPr>
+              <a:t> </a:t>
+            </a:r>
+            <a:r>
+              <a:rPr lang="en-US" altLang="en-US" dirty="0" err="1">
+                <a:latin typeface="Google Sans Text"/>
+              </a:rPr>
+              <a:t>estiver</a:t>
+            </a:r>
+            <a:r>
+              <a:rPr lang="en-US" altLang="en-US" dirty="0">
+                <a:latin typeface="Google Sans Text"/>
+              </a:rPr>
+              <a:t> no </a:t>
+            </a:r>
+            <a:r>
+              <a:rPr lang="en-US" altLang="en-US" dirty="0" err="1">
+                <a:latin typeface="Google Sans Text"/>
+              </a:rPr>
+              <a:t>estado</a:t>
+            </a:r>
+            <a:r>
+              <a:rPr lang="en-US" altLang="en-US" dirty="0">
+                <a:latin typeface="Google Sans Text"/>
+              </a:rPr>
+              <a:t> $s$, </a:t>
+            </a:r>
+            <a:r>
+              <a:rPr lang="en-US" altLang="en-US" dirty="0" err="1">
+                <a:latin typeface="Google Sans Text"/>
+              </a:rPr>
+              <a:t>escolher</a:t>
+            </a:r>
+            <a:r>
+              <a:rPr lang="en-US" altLang="en-US" dirty="0">
+                <a:latin typeface="Google Sans Text"/>
+              </a:rPr>
+              <a:t> a </a:t>
+            </a:r>
+            <a:r>
+              <a:rPr lang="en-US" altLang="en-US" dirty="0" err="1">
+                <a:latin typeface="Google Sans Text"/>
+              </a:rPr>
+              <a:t>ação</a:t>
+            </a:r>
+            <a:r>
+              <a:rPr lang="en-US" altLang="en-US" dirty="0">
+                <a:latin typeface="Google Sans Text"/>
+              </a:rPr>
+              <a:t> $a$ e, a </a:t>
+            </a:r>
+            <a:r>
+              <a:rPr lang="en-US" altLang="en-US" dirty="0" err="1">
+                <a:latin typeface="Google Sans Text"/>
+              </a:rPr>
+              <a:t>partir</a:t>
+            </a:r>
+            <a:r>
+              <a:rPr lang="en-US" altLang="en-US" dirty="0">
+                <a:latin typeface="Google Sans Text"/>
+              </a:rPr>
+              <a:t> </a:t>
+            </a:r>
+            <a:r>
+              <a:rPr lang="en-US" altLang="en-US" dirty="0" err="1">
+                <a:latin typeface="Google Sans Text"/>
+              </a:rPr>
+              <a:t>daí</a:t>
+            </a:r>
+            <a:r>
+              <a:rPr lang="en-US" altLang="en-US" dirty="0">
+                <a:latin typeface="Google Sans Text"/>
+              </a:rPr>
+              <a:t>, </a:t>
+            </a:r>
+            <a:r>
+              <a:rPr lang="en-US" altLang="en-US" dirty="0" err="1">
+                <a:latin typeface="Google Sans Text"/>
+              </a:rPr>
+              <a:t>agir</a:t>
+            </a:r>
+            <a:r>
+              <a:rPr lang="en-US" altLang="en-US" dirty="0">
+                <a:latin typeface="Google Sans Text"/>
+              </a:rPr>
+              <a:t> de forma </a:t>
+            </a:r>
+            <a:r>
+              <a:rPr lang="en-US" altLang="en-US" dirty="0" err="1">
+                <a:latin typeface="Google Sans Text"/>
+              </a:rPr>
+              <a:t>otimizada</a:t>
+            </a:r>
+            <a:r>
+              <a:rPr lang="en-US" altLang="en-US" dirty="0">
+                <a:latin typeface="Google Sans Text"/>
+              </a:rPr>
+              <a:t>.</a:t>
+            </a:r>
+          </a:p>
+          <a:p>
+            <a:pPr marL="0" lvl="0" indent="0" eaLnBrk="0" fontAlgn="base" hangingPunct="0">
+              <a:lnSpc>
+                <a:spcPct val="100000"/>
+              </a:lnSpc>
+              <a:spcBef>
+                <a:spcPct val="0"/>
+              </a:spcBef>
+              <a:spcAft>
+                <a:spcPct val="0"/>
+              </a:spcAft>
+              <a:buFontTx/>
+              <a:buChar char="•"/>
+            </a:pPr>
+            <a:r>
+              <a:rPr lang="en-US" altLang="en-US" b="1" dirty="0" err="1">
+                <a:latin typeface="Google Sans Text"/>
+              </a:rPr>
+              <a:t>Objetivo</a:t>
+            </a:r>
+            <a:r>
+              <a:rPr lang="en-US" altLang="en-US" b="1" dirty="0">
+                <a:latin typeface="Google Sans Text"/>
+              </a:rPr>
+              <a:t>:</a:t>
+            </a:r>
+            <a:r>
+              <a:rPr lang="en-US" altLang="en-US" dirty="0">
+                <a:latin typeface="Google Sans Text"/>
+              </a:rPr>
+              <a:t> </a:t>
+            </a:r>
+            <a:r>
+              <a:rPr lang="en-US" altLang="en-US" dirty="0" err="1">
+                <a:latin typeface="Google Sans Text"/>
+              </a:rPr>
+              <a:t>Encontrar</a:t>
+            </a:r>
+            <a:r>
+              <a:rPr lang="en-US" altLang="en-US" dirty="0">
+                <a:latin typeface="Google Sans Text"/>
+              </a:rPr>
+              <a:t> a </a:t>
+            </a:r>
+            <a:r>
+              <a:rPr lang="en-US" altLang="en-US" dirty="0" err="1">
+                <a:latin typeface="Google Sans Text"/>
+              </a:rPr>
+              <a:t>função</a:t>
+            </a:r>
+            <a:r>
+              <a:rPr lang="en-US" altLang="en-US" dirty="0">
+                <a:latin typeface="Google Sans Text"/>
+              </a:rPr>
+              <a:t> Q ideal </a:t>
+            </a:r>
+            <a:r>
+              <a:rPr lang="en-US" altLang="en-US" dirty="0" err="1">
+                <a:latin typeface="Google Sans Text"/>
+              </a:rPr>
+              <a:t>que</a:t>
+            </a:r>
+            <a:r>
+              <a:rPr lang="en-US" altLang="en-US" dirty="0">
+                <a:latin typeface="Google Sans Text"/>
+              </a:rPr>
+              <a:t> </a:t>
+            </a:r>
+            <a:r>
+              <a:rPr lang="en-US" altLang="en-US" dirty="0" err="1">
+                <a:latin typeface="Google Sans Text"/>
+              </a:rPr>
+              <a:t>guie</a:t>
+            </a:r>
+            <a:r>
+              <a:rPr lang="en-US" altLang="en-US" dirty="0">
+                <a:latin typeface="Google Sans Text"/>
+              </a:rPr>
+              <a:t> o </a:t>
+            </a:r>
+            <a:r>
+              <a:rPr lang="en-US" altLang="en-US" dirty="0" err="1">
+                <a:latin typeface="Google Sans Text"/>
+              </a:rPr>
+              <a:t>agente</a:t>
+            </a:r>
+            <a:r>
+              <a:rPr lang="en-US" altLang="en-US" dirty="0">
+                <a:latin typeface="Google Sans Text"/>
+              </a:rPr>
+              <a:t> para a </a:t>
+            </a:r>
+            <a:r>
+              <a:rPr lang="en-US" altLang="en-US" dirty="0" err="1">
+                <a:latin typeface="Google Sans Text"/>
+              </a:rPr>
+              <a:t>melhor</a:t>
+            </a:r>
+            <a:r>
+              <a:rPr lang="en-US" altLang="en-US" dirty="0">
+                <a:latin typeface="Google Sans Text"/>
+              </a:rPr>
+              <a:t> </a:t>
+            </a:r>
+            <a:r>
+              <a:rPr lang="en-US" altLang="en-US" dirty="0" err="1">
+                <a:latin typeface="Google Sans Text"/>
+              </a:rPr>
+              <a:t>decisão</a:t>
+            </a:r>
+            <a:r>
+              <a:rPr lang="en-US" altLang="en-US" dirty="0">
+                <a:latin typeface="Google Sans Text"/>
+              </a:rPr>
+              <a:t> sempre.</a:t>
+            </a:r>
+          </a:p>
+          <a:p>
+            <a:pPr marL="0" lvl="0" indent="0" eaLnBrk="0" fontAlgn="base" hangingPunct="0">
+              <a:lnSpc>
+                <a:spcPct val="100000"/>
+              </a:lnSpc>
+              <a:spcBef>
+                <a:spcPct val="0"/>
+              </a:spcBef>
+              <a:spcAft>
+                <a:spcPct val="0"/>
+              </a:spcAft>
+              <a:buFontTx/>
+              <a:buChar char="•"/>
+            </a:pPr>
+            <a:r>
+              <a:rPr lang="en-US" altLang="en-US" b="1" dirty="0" err="1">
+                <a:latin typeface="Google Sans Text"/>
+              </a:rPr>
+              <a:t>Sugestão</a:t>
+            </a:r>
+            <a:r>
+              <a:rPr lang="en-US" altLang="en-US" b="1" dirty="0">
+                <a:latin typeface="Google Sans Text"/>
+              </a:rPr>
+              <a:t> de </a:t>
+            </a:r>
+            <a:r>
+              <a:rPr lang="en-US" altLang="en-US" b="1" dirty="0" err="1">
+                <a:latin typeface="Google Sans Text"/>
+              </a:rPr>
+              <a:t>Figura</a:t>
+            </a:r>
+            <a:r>
+              <a:rPr lang="en-US" altLang="en-US" b="1" dirty="0">
+                <a:latin typeface="Google Sans Text"/>
+              </a:rPr>
+              <a:t>:</a:t>
+            </a:r>
+            <a:r>
+              <a:rPr lang="en-US" altLang="en-US" dirty="0">
+                <a:latin typeface="Google Sans Text"/>
+              </a:rPr>
+              <a:t> Uma </a:t>
+            </a:r>
+            <a:r>
+              <a:rPr lang="en-US" altLang="en-US" dirty="0" err="1">
+                <a:latin typeface="Google Sans Text"/>
+              </a:rPr>
+              <a:t>balança</a:t>
+            </a:r>
+            <a:r>
+              <a:rPr lang="en-US" altLang="en-US" dirty="0">
+                <a:latin typeface="Google Sans Text"/>
+              </a:rPr>
+              <a:t> </a:t>
+            </a:r>
+            <a:r>
+              <a:rPr lang="en-US" altLang="en-US" dirty="0" err="1">
+                <a:latin typeface="Google Sans Text"/>
+              </a:rPr>
+              <a:t>imaginária</a:t>
+            </a:r>
+            <a:r>
+              <a:rPr lang="en-US" altLang="en-US" dirty="0">
+                <a:latin typeface="Google Sans Text"/>
+              </a:rPr>
+              <a:t> </a:t>
+            </a:r>
+            <a:r>
+              <a:rPr lang="en-US" altLang="en-US" dirty="0" err="1">
+                <a:latin typeface="Google Sans Text"/>
+              </a:rPr>
+              <a:t>pesando</a:t>
+            </a:r>
+            <a:r>
+              <a:rPr lang="en-US" altLang="en-US" dirty="0">
+                <a:latin typeface="Google Sans Text"/>
+              </a:rPr>
+              <a:t> </a:t>
+            </a:r>
+            <a:r>
+              <a:rPr lang="en-US" altLang="en-US" dirty="0" err="1">
+                <a:latin typeface="Google Sans Text"/>
+              </a:rPr>
+              <a:t>diferentes</a:t>
+            </a:r>
+            <a:r>
+              <a:rPr lang="en-US" altLang="en-US" dirty="0">
+                <a:latin typeface="Google Sans Text"/>
+              </a:rPr>
+              <a:t> </a:t>
+            </a:r>
+            <a:r>
+              <a:rPr lang="en-US" altLang="en-US" dirty="0" err="1">
+                <a:latin typeface="Google Sans Text"/>
+              </a:rPr>
+              <a:t>ações</a:t>
+            </a:r>
+            <a:r>
+              <a:rPr lang="en-US" altLang="en-US" dirty="0">
+                <a:latin typeface="Google Sans Text"/>
+              </a:rPr>
+              <a:t>, </a:t>
+            </a:r>
+            <a:r>
+              <a:rPr lang="en-US" altLang="en-US" dirty="0" err="1">
+                <a:latin typeface="Google Sans Text"/>
+              </a:rPr>
+              <a:t>onde</a:t>
+            </a:r>
+            <a:r>
+              <a:rPr lang="en-US" altLang="en-US" dirty="0">
+                <a:latin typeface="Google Sans Text"/>
+              </a:rPr>
+              <a:t> a </a:t>
+            </a:r>
+            <a:r>
+              <a:rPr lang="en-US" altLang="en-US" dirty="0" err="1">
+                <a:latin typeface="Google Sans Text"/>
+              </a:rPr>
+              <a:t>ação</a:t>
+            </a:r>
+            <a:r>
+              <a:rPr lang="en-US" altLang="en-US" dirty="0">
+                <a:latin typeface="Google Sans Text"/>
+              </a:rPr>
+              <a:t> com o </a:t>
+            </a:r>
+            <a:r>
+              <a:rPr lang="en-US" altLang="en-US" dirty="0" err="1">
+                <a:latin typeface="Google Sans Text"/>
+              </a:rPr>
+              <a:t>maior</a:t>
+            </a:r>
+            <a:r>
+              <a:rPr lang="en-US" altLang="en-US" dirty="0">
+                <a:latin typeface="Google Sans Text"/>
+              </a:rPr>
+              <a:t> "Q" </a:t>
+            </a:r>
+            <a:r>
+              <a:rPr lang="en-US" altLang="en-US" dirty="0" err="1">
+                <a:latin typeface="Google Sans Text"/>
+              </a:rPr>
+              <a:t>brilha</a:t>
+            </a:r>
+            <a:r>
+              <a:rPr lang="en-US" altLang="en-US" dirty="0">
+                <a:latin typeface="Google Sans Text"/>
+              </a:rPr>
+              <a:t> </a:t>
+            </a:r>
+            <a:r>
+              <a:rPr lang="en-US" altLang="en-US" dirty="0" err="1">
+                <a:latin typeface="Google Sans Text"/>
+              </a:rPr>
+              <a:t>em</a:t>
+            </a:r>
+            <a:r>
+              <a:rPr lang="en-US" altLang="en-US" dirty="0">
+                <a:latin typeface="Google Sans Text"/>
+              </a:rPr>
+              <a:t> </a:t>
+            </a:r>
+            <a:r>
+              <a:rPr lang="en-US" altLang="en-US" dirty="0" err="1">
+                <a:latin typeface="Google Sans Text"/>
+              </a:rPr>
+              <a:t>destaque</a:t>
+            </a:r>
+            <a:r>
+              <a:rPr lang="en-US" altLang="en-US" dirty="0">
+                <a:latin typeface="Google Sans Text"/>
+              </a:rPr>
+              <a:t>.</a:t>
+            </a:r>
+          </a:p>
+          <a:p>
+            <a:pPr marL="0" lvl="0" indent="0" eaLnBrk="0" fontAlgn="base" hangingPunct="0">
+              <a:lnSpc>
+                <a:spcPct val="100000"/>
+              </a:lnSpc>
+              <a:spcBef>
+                <a:spcPct val="0"/>
+              </a:spcBef>
+              <a:spcAft>
+                <a:spcPct val="0"/>
+              </a:spcAft>
+              <a:buFontTx/>
+              <a:buChar char="•"/>
+            </a:pPr>
+            <a:r>
+              <a:rPr lang="en-US" altLang="en-US" b="1" dirty="0" err="1">
+                <a:latin typeface="Google Sans Text"/>
+              </a:rPr>
+              <a:t>Notas</a:t>
+            </a:r>
+            <a:r>
+              <a:rPr lang="en-US" altLang="en-US" b="1" dirty="0">
+                <a:latin typeface="Google Sans Text"/>
+              </a:rPr>
+              <a:t> do Professor:</a:t>
+            </a:r>
+            <a:r>
+              <a:rPr lang="en-US" altLang="en-US" dirty="0">
+                <a:latin typeface="Google Sans Text"/>
+              </a:rPr>
+              <a:t> "Segundo o DASCIN, a </a:t>
+            </a:r>
+            <a:r>
+              <a:rPr lang="en-US" altLang="en-US" dirty="0" err="1">
+                <a:latin typeface="Google Sans Text"/>
+              </a:rPr>
+              <a:t>beleza</a:t>
+            </a:r>
+            <a:r>
+              <a:rPr lang="en-US" altLang="en-US" dirty="0">
+                <a:latin typeface="Google Sans Text"/>
+              </a:rPr>
+              <a:t> do Q-learning é </a:t>
+            </a:r>
+            <a:r>
+              <a:rPr lang="en-US" altLang="en-US" dirty="0" err="1">
+                <a:latin typeface="Google Sans Text"/>
+              </a:rPr>
+              <a:t>mapear</a:t>
+            </a:r>
+            <a:r>
+              <a:rPr lang="en-US" altLang="en-US" dirty="0">
+                <a:latin typeface="Google Sans Text"/>
+              </a:rPr>
+              <a:t> pares </a:t>
+            </a:r>
+            <a:r>
+              <a:rPr lang="en-US" altLang="en-US" dirty="0" err="1">
+                <a:latin typeface="Google Sans Text"/>
+              </a:rPr>
+              <a:t>estado-ação</a:t>
+            </a:r>
+            <a:r>
+              <a:rPr lang="en-US" altLang="en-US" dirty="0">
+                <a:latin typeface="Google Sans Text"/>
+              </a:rPr>
+              <a:t> para um valor </a:t>
+            </a:r>
+            <a:r>
+              <a:rPr lang="en-US" altLang="en-US" dirty="0" err="1">
+                <a:latin typeface="Google Sans Text"/>
+              </a:rPr>
+              <a:t>numérico</a:t>
+            </a:r>
+            <a:r>
+              <a:rPr lang="en-US" altLang="en-US" dirty="0">
+                <a:latin typeface="Google Sans Text"/>
+              </a:rPr>
+              <a:t>. Se o </a:t>
+            </a:r>
+            <a:r>
+              <a:rPr lang="en-US" altLang="en-US" dirty="0" err="1">
+                <a:latin typeface="Google Sans Text"/>
+              </a:rPr>
+              <a:t>seu</a:t>
+            </a:r>
+            <a:r>
+              <a:rPr lang="en-US" altLang="en-US" dirty="0">
+                <a:latin typeface="Google Sans Text"/>
+              </a:rPr>
+              <a:t> </a:t>
+            </a:r>
+            <a:r>
+              <a:rPr lang="en-US" altLang="en-US" dirty="0" err="1">
+                <a:latin typeface="Google Sans Text"/>
+              </a:rPr>
+              <a:t>algoritmo</a:t>
+            </a:r>
+            <a:r>
+              <a:rPr lang="en-US" altLang="en-US" dirty="0">
+                <a:latin typeface="Google Sans Text"/>
+              </a:rPr>
+              <a:t> sabe qual </a:t>
+            </a:r>
+            <a:r>
+              <a:rPr lang="en-US" altLang="en-US" dirty="0" err="1">
+                <a:latin typeface="Google Sans Text"/>
+              </a:rPr>
+              <a:t>ação</a:t>
+            </a:r>
+            <a:r>
+              <a:rPr lang="en-US" altLang="en-US" dirty="0">
+                <a:latin typeface="Google Sans Text"/>
+              </a:rPr>
+              <a:t> </a:t>
+            </a:r>
+            <a:r>
+              <a:rPr lang="en-US" altLang="en-US" dirty="0" err="1">
+                <a:latin typeface="Google Sans Text"/>
+              </a:rPr>
+              <a:t>tem</a:t>
+            </a:r>
+            <a:r>
+              <a:rPr lang="en-US" altLang="en-US" dirty="0">
+                <a:latin typeface="Google Sans Text"/>
+              </a:rPr>
+              <a:t> a </a:t>
+            </a:r>
+            <a:r>
+              <a:rPr lang="en-US" altLang="en-US" dirty="0" err="1">
+                <a:latin typeface="Google Sans Text"/>
+              </a:rPr>
+              <a:t>maior</a:t>
+            </a:r>
+            <a:r>
+              <a:rPr lang="en-US" altLang="en-US" dirty="0">
+                <a:latin typeface="Google Sans Text"/>
+              </a:rPr>
+              <a:t> '</a:t>
+            </a:r>
+            <a:r>
+              <a:rPr lang="en-US" altLang="en-US" dirty="0" err="1">
+                <a:latin typeface="Google Sans Text"/>
+              </a:rPr>
+              <a:t>Qualidade</a:t>
+            </a:r>
+            <a:r>
+              <a:rPr lang="en-US" altLang="en-US" dirty="0">
+                <a:latin typeface="Google Sans Text"/>
+              </a:rPr>
+              <a:t>' para o </a:t>
+            </a:r>
+            <a:r>
+              <a:rPr lang="en-US" altLang="en-US" dirty="0" err="1">
+                <a:latin typeface="Google Sans Text"/>
+              </a:rPr>
+              <a:t>estado</a:t>
+            </a:r>
+            <a:r>
+              <a:rPr lang="en-US" altLang="en-US" dirty="0">
+                <a:latin typeface="Google Sans Text"/>
+              </a:rPr>
+              <a:t> </a:t>
+            </a:r>
+            <a:r>
+              <a:rPr lang="en-US" altLang="en-US" dirty="0" err="1">
+                <a:latin typeface="Google Sans Text"/>
+              </a:rPr>
+              <a:t>em</a:t>
+            </a:r>
+            <a:r>
+              <a:rPr lang="en-US" altLang="en-US" dirty="0">
+                <a:latin typeface="Google Sans Text"/>
+              </a:rPr>
+              <a:t> </a:t>
+            </a:r>
+            <a:r>
+              <a:rPr lang="en-US" altLang="en-US" dirty="0" err="1">
+                <a:latin typeface="Google Sans Text"/>
+              </a:rPr>
+              <a:t>que</a:t>
+            </a:r>
+            <a:r>
+              <a:rPr lang="en-US" altLang="en-US" dirty="0">
+                <a:latin typeface="Google Sans Text"/>
+              </a:rPr>
+              <a:t> </a:t>
+            </a:r>
+            <a:r>
+              <a:rPr lang="en-US" altLang="en-US" dirty="0" err="1">
+                <a:latin typeface="Google Sans Text"/>
+              </a:rPr>
+              <a:t>ele</a:t>
+            </a:r>
+            <a:r>
+              <a:rPr lang="en-US" altLang="en-US" dirty="0">
+                <a:latin typeface="Google Sans Text"/>
+              </a:rPr>
+              <a:t> se </a:t>
+            </a:r>
+            <a:r>
+              <a:rPr lang="en-US" altLang="en-US" dirty="0" err="1">
+                <a:latin typeface="Google Sans Text"/>
+              </a:rPr>
+              <a:t>encontra</a:t>
+            </a:r>
+            <a:r>
+              <a:rPr lang="en-US" altLang="en-US" dirty="0">
+                <a:latin typeface="Google Sans Text"/>
+              </a:rPr>
+              <a:t>, o </a:t>
+            </a:r>
+            <a:r>
+              <a:rPr lang="en-US" altLang="en-US" dirty="0" err="1">
+                <a:latin typeface="Google Sans Text"/>
+              </a:rPr>
+              <a:t>problema</a:t>
+            </a:r>
+            <a:r>
+              <a:rPr lang="en-US" altLang="en-US" dirty="0">
+                <a:latin typeface="Google Sans Text"/>
+              </a:rPr>
+              <a:t> de </a:t>
+            </a:r>
+            <a:r>
+              <a:rPr lang="en-US" altLang="en-US" dirty="0" err="1">
+                <a:latin typeface="Google Sans Text"/>
+              </a:rPr>
+              <a:t>controle</a:t>
+            </a:r>
+            <a:r>
+              <a:rPr lang="en-US" altLang="en-US" dirty="0">
+                <a:latin typeface="Google Sans Text"/>
+              </a:rPr>
+              <a:t> </a:t>
+            </a:r>
+            <a:r>
+              <a:rPr lang="en-US" altLang="en-US" dirty="0" err="1">
+                <a:latin typeface="Google Sans Text"/>
+              </a:rPr>
+              <a:t>está</a:t>
+            </a:r>
+            <a:r>
+              <a:rPr lang="en-US" altLang="en-US" dirty="0">
+                <a:latin typeface="Google Sans Text"/>
+              </a:rPr>
+              <a:t> </a:t>
+            </a:r>
+            <a:r>
+              <a:rPr lang="en-US" altLang="en-US" dirty="0" err="1">
+                <a:latin typeface="Google Sans Text"/>
+              </a:rPr>
+              <a:t>resolvido</a:t>
+            </a:r>
+            <a:r>
+              <a:rPr lang="en-US" altLang="en-US" dirty="0">
+                <a:latin typeface="Google Sans Text"/>
+              </a:rPr>
+              <a:t>: basta </a:t>
+            </a:r>
+            <a:r>
+              <a:rPr lang="en-US" altLang="en-US" dirty="0" err="1">
+                <a:latin typeface="Google Sans Text"/>
+              </a:rPr>
+              <a:t>escolher</a:t>
+            </a:r>
+            <a:r>
+              <a:rPr lang="en-US" altLang="en-US" dirty="0">
+                <a:latin typeface="Google Sans Text"/>
+              </a:rPr>
+              <a:t> a </a:t>
+            </a:r>
+            <a:r>
+              <a:rPr lang="en-US" altLang="en-US" dirty="0" err="1">
+                <a:latin typeface="Google Sans Text"/>
+              </a:rPr>
+              <a:t>ação</a:t>
+            </a:r>
+            <a:r>
+              <a:rPr lang="en-US" altLang="en-US" dirty="0">
+                <a:latin typeface="Google Sans Text"/>
+              </a:rPr>
+              <a:t> com o </a:t>
+            </a:r>
+            <a:r>
+              <a:rPr lang="en-US" altLang="en-US" dirty="0" err="1">
+                <a:latin typeface="Google Sans Text"/>
+              </a:rPr>
+              <a:t>maior</a:t>
+            </a:r>
+            <a:r>
+              <a:rPr lang="en-US" altLang="en-US" dirty="0">
+                <a:latin typeface="Google Sans Text"/>
+              </a:rPr>
+              <a:t> Q."</a:t>
+            </a:r>
+            <a:endParaRPr lang="en-US" altLang="en-US" dirty="0">
+              <a:latin typeface="Arial" panose="020B0604020202020204" pitchFamily="34" charset="0"/>
+            </a:endParaRPr>
+          </a:p>
+          <a:p>
+            <a:endParaRPr lang="en-US" dirty="0"/>
+          </a:p>
+          <a:p>
+            <a:endParaRPr lang="en-US" dirty="0"/>
           </a:p>
         </p:txBody>
       </p:sp>
     </p:spTree>
     <p:extLst>
       <p:ext uri="{BB962C8B-B14F-4D97-AF65-F5344CB8AC3E}">
-        <p14:creationId xmlns:p14="http://schemas.microsoft.com/office/powerpoint/2010/main" val="3601469261"/>
+        <p14:creationId xmlns:p14="http://schemas.microsoft.com/office/powerpoint/2010/main" val="1733207672"/>
       </p:ext>
     </p:extLst>
   </p:cSld>
@@ -5675,64 +7850,129 @@
       </p:grpSpPr>
       <p:sp>
         <p:nvSpPr>
-          <p:cNvPr id="4" name="Título 1">
-            <a:extLst>
-              <a:ext uri="{FF2B5EF4-FFF2-40B4-BE49-F238E27FC236}">
-                <a16:creationId xmlns:a16="http://schemas.microsoft.com/office/drawing/2014/main" xmlns="" id="{32666AC8-2E17-4DB4-B0F5-60C640CCFD2E}"/>
-              </a:ext>
-            </a:extLst>
-          </p:cNvPr>
-          <p:cNvSpPr txBox="1">
-            <a:spLocks/>
-          </p:cNvSpPr>
-          <p:nvPr/>
-        </p:nvSpPr>
-        <p:spPr>
+          <p:cNvPr id="2" name="Title 1">
+            <a:extLst>
+              <a:ext uri="{FF2B5EF4-FFF2-40B4-BE49-F238E27FC236}">
+                <a16:creationId xmlns:a16="http://schemas.microsoft.com/office/drawing/2014/main" id="{E14B07B2-D2A5-6A39-907B-E2794AA9F073}"/>
+              </a:ext>
+            </a:extLst>
+          </p:cNvPr>
+          <p:cNvSpPr>
+            <a:spLocks noGrp="1"/>
+          </p:cNvSpPr>
+          <p:nvPr>
+            <p:ph type="title"/>
+          </p:nvPr>
+        </p:nvSpPr>
+        <p:spPr/>
+        <p:txBody>
+          <a:bodyPr/>
+          <a:lstStyle/>
+          <a:p>
+            <a:endParaRPr lang="en-US"/>
+          </a:p>
+        </p:txBody>
+      </p:sp>
+      <p:sp>
+        <p:nvSpPr>
+          <p:cNvPr id="4" name="Rectangle 1">
+            <a:extLst>
+              <a:ext uri="{FF2B5EF4-FFF2-40B4-BE49-F238E27FC236}">
+                <a16:creationId xmlns:a16="http://schemas.microsoft.com/office/drawing/2014/main" id="{9491F0A8-A92C-A246-1499-9F21D5DCABF7}"/>
+              </a:ext>
+            </a:extLst>
+          </p:cNvPr>
+          <p:cNvSpPr>
+            <a:spLocks noGrp="1" noChangeArrowheads="1"/>
+          </p:cNvSpPr>
+          <p:nvPr>
+            <p:ph idx="1"/>
+          </p:nvPr>
+        </p:nvSpPr>
+        <p:spPr bwMode="auto">
           <a:xfrm>
-            <a:off x="1431533" y="2720526"/>
-            <a:ext cx="9144000" cy="1029541"/>
+            <a:off x="838200" y="3839711"/>
+            <a:ext cx="264816" cy="323165"/>
           </a:xfrm>
           <a:prstGeom prst="rect">
             <a:avLst/>
           </a:prstGeom>
+          <a:noFill/>
+          <a:ln>
+            <a:noFill/>
+          </a:ln>
+          <a:effectLst/>
+          <a:extLst>
+            <a:ext uri="{909E8E84-426E-40DD-AFC4-6F175D3DCCD1}">
+              <a14:hiddenFill xmlns:a14="http://schemas.microsoft.com/office/drawing/2010/main">
+                <a:solidFill>
+                  <a:schemeClr val="accent1"/>
+                </a:solidFill>
+              </a14:hiddenFill>
+            </a:ext>
+            <a:ext uri="{91240B29-F687-4F45-9708-019B960494DF}">
+              <a14:hiddenLine xmlns:a14="http://schemas.microsoft.com/office/drawing/2010/main" w="9525">
+                <a:solidFill>
+                  <a:schemeClr val="tx1"/>
+                </a:solidFill>
+                <a:miter lim="800000"/>
+                <a:headEnd/>
+                <a:tailEnd/>
+              </a14:hiddenLine>
+            </a:ext>
+            <a:ext uri="{AF507438-7753-43E0-B8FC-AC1667EBCBE1}">
+              <a14:hiddenEffects xmlns:a14="http://schemas.microsoft.com/office/drawing/2010/main">
+                <a:effectLst>
+                  <a:outerShdw dist="35921" dir="2700000" algn="ctr" rotWithShape="0">
+                    <a:schemeClr val="bg2"/>
+                  </a:outerShdw>
+                </a:effectLst>
+              </a14:hiddenEffects>
+            </a:ext>
+          </a:extLst>
         </p:spPr>
         <p:txBody>
-          <a:bodyPr vert="horz" lIns="91440" tIns="45720" rIns="91440" bIns="45720" rtlCol="0" anchor="ctr">
-            <a:normAutofit/>
+          <a:bodyPr vert="horz" wrap="none" lIns="91440" tIns="0" rIns="91440" bIns="45720" numCol="1" anchor="ctr" anchorCtr="0" compatLnSpc="1">
+            <a:prstTxWarp prst="textNoShape">
+              <a:avLst/>
+            </a:prstTxWarp>
+            <a:spAutoFit/>
           </a:bodyPr>
-          <a:lstStyle>
-            <a:lvl1pPr algn="l" defTabSz="914400" rtl="0" eaLnBrk="1" latinLnBrk="0" hangingPunct="1">
+          <a:lstStyle/>
+          <a:p>
+            <a:pPr marL="0" marR="0" lvl="0" indent="0" algn="l" defTabSz="914400" rtl="0" eaLnBrk="0" fontAlgn="base" latinLnBrk="0" hangingPunct="0">
               <a:lnSpc>
-                <a:spcPct val="90000"/>
+                <a:spcPct val="100000"/>
               </a:lnSpc>
               <a:spcBef>
                 <a:spcPct val="0"/>
               </a:spcBef>
-              <a:buNone/>
-              <a:defRPr sz="4400" kern="1200">
-                <a:solidFill>
-                  <a:schemeClr val="tx1"/>
-                </a:solidFill>
-                <a:latin typeface="+mj-lt"/>
-                <a:ea typeface="+mj-ea"/>
-                <a:cs typeface="+mj-cs"/>
-              </a:defRPr>
-            </a:lvl1pPr>
-          </a:lstStyle>
-          <a:p>
-            <a:pPr algn="ctr"/>
-            <a:r>
-              <a:rPr lang="pt-BR" sz="6600" dirty="0"/>
-              <a:t>Perguntas?</a:t>
-            </a:r>
-            <a:endParaRPr lang="pt-BR" sz="6600" b="1" i="1" dirty="0"/>
+              <a:spcAft>
+                <a:spcPct val="0"/>
+              </a:spcAft>
+              <a:buClrTx/>
+              <a:buSzTx/>
+              <a:buFontTx/>
+              <a:buChar char="•"/>
+              <a:tabLst/>
+            </a:pPr>
+            <a:endParaRPr kumimoji="0" lang="en-US" altLang="en-US" sz="1800" b="0" i="0" u="none" strike="noStrike" cap="none" normalizeH="0" baseline="0" dirty="0">
+              <a:ln>
+                <a:noFill/>
+              </a:ln>
+              <a:solidFill>
+                <a:schemeClr val="tx1"/>
+              </a:solidFill>
+              <a:effectLst/>
+              <a:latin typeface="Arial" panose="020B0604020202020204" pitchFamily="34" charset="0"/>
+            </a:endParaRPr>
           </a:p>
         </p:txBody>
       </p:sp>
     </p:spTree>
     <p:extLst>
       <p:ext uri="{BB962C8B-B14F-4D97-AF65-F5344CB8AC3E}">
-        <p14:creationId xmlns:p14="http://schemas.microsoft.com/office/powerpoint/2010/main" val="3773005660"/>
+        <p14:creationId xmlns:p14="http://schemas.microsoft.com/office/powerpoint/2010/main" val="76712355"/>
       </p:ext>
     </p:extLst>
   </p:cSld>
@@ -5761,10 +8001,10 @@
       </p:grpSpPr>
       <p:sp>
         <p:nvSpPr>
-          <p:cNvPr id="2" name="Título 1">
-            <a:extLst>
-              <a:ext uri="{FF2B5EF4-FFF2-40B4-BE49-F238E27FC236}">
-                <a16:creationId xmlns:a16="http://schemas.microsoft.com/office/drawing/2014/main" xmlns="" id="{3CA32550-8C76-B013-2EC7-989D8C3B19BE}"/>
+          <p:cNvPr id="2" name="Title 1">
+            <a:extLst>
+              <a:ext uri="{FF2B5EF4-FFF2-40B4-BE49-F238E27FC236}">
+                <a16:creationId xmlns:a16="http://schemas.microsoft.com/office/drawing/2014/main" id="{1E5D343F-1952-C012-31AC-0443BF9C1BA8}"/>
               </a:ext>
             </a:extLst>
           </p:cNvPr>
@@ -5780,42 +8020,61 @@
           <a:bodyPr/>
           <a:lstStyle/>
           <a:p>
-            <a:r>
-              <a:rPr lang="pt-BR" dirty="0"/>
-              <a:t>Referências</a:t>
-            </a:r>
-          </a:p>
-        </p:txBody>
-      </p:sp>
-      <p:sp>
-        <p:nvSpPr>
-          <p:cNvPr id="3" name="Espaço Reservado para Conteúdo 2">
-            <a:extLst>
-              <a:ext uri="{FF2B5EF4-FFF2-40B4-BE49-F238E27FC236}">
-                <a16:creationId xmlns:a16="http://schemas.microsoft.com/office/drawing/2014/main" xmlns="" id="{EF043237-7757-7557-B63E-D4EB5152D44B}"/>
-              </a:ext>
-            </a:extLst>
-          </p:cNvPr>
-          <p:cNvSpPr>
-            <a:spLocks noGrp="1"/>
-          </p:cNvSpPr>
-          <p:nvPr>
-            <p:ph idx="1"/>
-          </p:nvPr>
-        </p:nvSpPr>
-        <p:spPr/>
-        <p:txBody>
-          <a:bodyPr/>
-          <a:lstStyle/>
-          <a:p>
-            <a:endParaRPr lang="pt-BR"/>
-          </a:p>
-        </p:txBody>
-      </p:sp>
+            <a:endParaRPr lang="en-US"/>
+          </a:p>
+        </p:txBody>
+      </p:sp>
+      <p:pic>
+        <p:nvPicPr>
+          <p:cNvPr id="3074" name="Picture 2" descr="Reinforcement Learning In Real Life. Simple Explanation With Funny Cats">
+            <a:extLst>
+              <a:ext uri="{FF2B5EF4-FFF2-40B4-BE49-F238E27FC236}">
+                <a16:creationId xmlns:a16="http://schemas.microsoft.com/office/drawing/2014/main" id="{BF6473FC-0F5F-F021-4950-C2C526AE66A2}"/>
+              </a:ext>
+            </a:extLst>
+          </p:cNvPr>
+          <p:cNvPicPr>
+            <a:picLocks noChangeAspect="1" noChangeArrowheads="1"/>
+          </p:cNvPicPr>
+          <p:nvPr/>
+        </p:nvPicPr>
+        <p:blipFill>
+          <a:blip r:embed="rId2">
+            <a:extLst>
+              <a:ext uri="{28A0092B-C50C-407E-A947-70E740481C1C}">
+                <a14:useLocalDpi xmlns:a14="http://schemas.microsoft.com/office/drawing/2010/main" val="0"/>
+              </a:ext>
+            </a:extLst>
+          </a:blip>
+          <a:srcRect/>
+          <a:stretch>
+            <a:fillRect/>
+          </a:stretch>
+        </p:blipFill>
+        <p:spPr bwMode="auto">
+          <a:xfrm>
+            <a:off x="2732314" y="2392136"/>
+            <a:ext cx="6487886" cy="3649436"/>
+          </a:xfrm>
+          <a:prstGeom prst="rect">
+            <a:avLst/>
+          </a:prstGeom>
+          <a:noFill/>
+          <a:extLst>
+            <a:ext uri="{909E8E84-426E-40DD-AFC4-6F175D3DCCD1}">
+              <a14:hiddenFill xmlns:a14="http://schemas.microsoft.com/office/drawing/2010/main">
+                <a:solidFill>
+                  <a:srgbClr val="FFFFFF"/>
+                </a:solidFill>
+              </a14:hiddenFill>
+            </a:ext>
+          </a:extLst>
+        </p:spPr>
+      </p:pic>
     </p:spTree>
     <p:extLst>
       <p:ext uri="{BB962C8B-B14F-4D97-AF65-F5344CB8AC3E}">
-        <p14:creationId xmlns:p14="http://schemas.microsoft.com/office/powerpoint/2010/main" val="1787264919"/>
+        <p14:creationId xmlns:p14="http://schemas.microsoft.com/office/powerpoint/2010/main" val="3053794492"/>
       </p:ext>
     </p:extLst>
   </p:cSld>
@@ -5847,7 +8106,7 @@
           <p:cNvPr id="4" name="Título 1">
             <a:extLst>
               <a:ext uri="{FF2B5EF4-FFF2-40B4-BE49-F238E27FC236}">
-                <a16:creationId xmlns:a16="http://schemas.microsoft.com/office/drawing/2014/main" xmlns="" id="{32666AC8-2E17-4DB4-B0F5-60C640CCFD2E}"/>
+                <a16:creationId xmlns:a16="http://schemas.microsoft.com/office/drawing/2014/main" id="{32666AC8-2E17-4DB4-B0F5-60C640CCFD2E}"/>
               </a:ext>
             </a:extLst>
           </p:cNvPr>
@@ -5892,7 +8151,7 @@
             <a:pPr algn="ctr"/>
             <a:r>
               <a:rPr lang="pt-BR" sz="6600" dirty="0"/>
-              <a:t>Obrigado!</a:t>
+              <a:t>Perguntas?</a:t>
             </a:r>
             <a:endParaRPr lang="pt-BR" sz="6600" b="1" i="1" dirty="0"/>
           </a:p>
@@ -5901,7 +8160,7 @@
     </p:spTree>
     <p:extLst>
       <p:ext uri="{BB962C8B-B14F-4D97-AF65-F5344CB8AC3E}">
-        <p14:creationId xmlns:p14="http://schemas.microsoft.com/office/powerpoint/2010/main" val="2655704619"/>
+        <p14:creationId xmlns:p14="http://schemas.microsoft.com/office/powerpoint/2010/main" val="3773005660"/>
       </p:ext>
     </p:extLst>
   </p:cSld>
@@ -5933,7 +8192,7 @@
           <p:cNvPr id="3" name="Content Placeholder 2">
             <a:extLst>
               <a:ext uri="{FF2B5EF4-FFF2-40B4-BE49-F238E27FC236}">
-                <a16:creationId xmlns:a16="http://schemas.microsoft.com/office/drawing/2014/main" xmlns="" id="{59B6A74E-8855-B416-1D2B-EC3735DC0079}"/>
+                <a16:creationId xmlns:a16="http://schemas.microsoft.com/office/drawing/2014/main" id="{59B6A74E-8855-B416-1D2B-EC3735DC0079}"/>
               </a:ext>
             </a:extLst>
           </p:cNvPr>
@@ -6009,7 +8268,7 @@
           <p:cNvPr id="1026" name="Picture 2" descr="Reinforcement Learning">
             <a:extLst>
               <a:ext uri="{FF2B5EF4-FFF2-40B4-BE49-F238E27FC236}">
-                <a16:creationId xmlns:a16="http://schemas.microsoft.com/office/drawing/2014/main" xmlns="" id="{5526EDB3-366A-5FFB-4A2D-BC3494C1E889}"/>
+                <a16:creationId xmlns:a16="http://schemas.microsoft.com/office/drawing/2014/main" id="{5526EDB3-366A-5FFB-4A2D-BC3494C1E889}"/>
               </a:ext>
             </a:extLst>
           </p:cNvPr>
@@ -6069,13 +8328,7 @@
   <p:cSld>
     <p:spTree>
       <p:nvGrpSpPr>
-        <p:cNvPr id="1" name="">
-          <a:extLst>
-            <a:ext uri="{FF2B5EF4-FFF2-40B4-BE49-F238E27FC236}">
-              <a16:creationId xmlns:a16="http://schemas.microsoft.com/office/drawing/2014/main" xmlns="" id="{83DFB381-AAB9-2788-1601-EB1230F302AA}"/>
-            </a:ext>
-          </a:extLst>
-        </p:cNvPr>
+        <p:cNvPr id="1" name=""/>
         <p:cNvGrpSpPr/>
         <p:nvPr/>
       </p:nvGrpSpPr>
@@ -6089,64 +8342,61 @@
       </p:grpSpPr>
       <p:sp>
         <p:nvSpPr>
-          <p:cNvPr id="4" name="Título 1">
-            <a:extLst>
-              <a:ext uri="{FF2B5EF4-FFF2-40B4-BE49-F238E27FC236}">
-                <a16:creationId xmlns:a16="http://schemas.microsoft.com/office/drawing/2014/main" xmlns="" id="{4AF40FF5-E3E4-99F0-8C87-687EB32C12F9}"/>
-              </a:ext>
-            </a:extLst>
-          </p:cNvPr>
-          <p:cNvSpPr txBox="1">
-            <a:spLocks/>
-          </p:cNvSpPr>
-          <p:nvPr/>
-        </p:nvSpPr>
-        <p:spPr>
-          <a:xfrm>
-            <a:off x="1431533" y="2720526"/>
-            <a:ext cx="9144000" cy="1029541"/>
-          </a:xfrm>
-          <a:prstGeom prst="rect">
-            <a:avLst/>
-          </a:prstGeom>
-        </p:spPr>
-        <p:txBody>
-          <a:bodyPr vert="horz" lIns="91440" tIns="45720" rIns="91440" bIns="45720" rtlCol="0" anchor="ctr">
-            <a:normAutofit/>
-          </a:bodyPr>
-          <a:lstStyle>
-            <a:lvl1pPr algn="l" defTabSz="914400" rtl="0" eaLnBrk="1" latinLnBrk="0" hangingPunct="1">
-              <a:lnSpc>
-                <a:spcPct val="90000"/>
-              </a:lnSpc>
-              <a:spcBef>
-                <a:spcPct val="0"/>
-              </a:spcBef>
-              <a:buNone/>
-              <a:defRPr sz="4400" kern="1200">
-                <a:solidFill>
-                  <a:schemeClr val="tx1"/>
-                </a:solidFill>
-                <a:latin typeface="+mj-lt"/>
-                <a:ea typeface="+mj-ea"/>
-                <a:cs typeface="+mj-cs"/>
-              </a:defRPr>
-            </a:lvl1pPr>
-          </a:lstStyle>
-          <a:p>
-            <a:pPr algn="ctr"/>
-            <a:r>
-              <a:rPr lang="pt-BR" sz="6600" dirty="0"/>
-              <a:t>Figuras</a:t>
-            </a:r>
-            <a:endParaRPr lang="pt-BR" sz="6600" b="1" i="1" dirty="0"/>
+          <p:cNvPr id="2" name="Título 1">
+            <a:extLst>
+              <a:ext uri="{FF2B5EF4-FFF2-40B4-BE49-F238E27FC236}">
+                <a16:creationId xmlns:a16="http://schemas.microsoft.com/office/drawing/2014/main" id="{3CA32550-8C76-B013-2EC7-989D8C3B19BE}"/>
+              </a:ext>
+            </a:extLst>
+          </p:cNvPr>
+          <p:cNvSpPr>
+            <a:spLocks noGrp="1"/>
+          </p:cNvSpPr>
+          <p:nvPr>
+            <p:ph type="title"/>
+          </p:nvPr>
+        </p:nvSpPr>
+        <p:spPr/>
+        <p:txBody>
+          <a:bodyPr/>
+          <a:lstStyle/>
+          <a:p>
+            <a:r>
+              <a:rPr lang="pt-BR" dirty="0"/>
+              <a:t>Referências</a:t>
+            </a:r>
+          </a:p>
+        </p:txBody>
+      </p:sp>
+      <p:sp>
+        <p:nvSpPr>
+          <p:cNvPr id="3" name="Espaço Reservado para Conteúdo 2">
+            <a:extLst>
+              <a:ext uri="{FF2B5EF4-FFF2-40B4-BE49-F238E27FC236}">
+                <a16:creationId xmlns:a16="http://schemas.microsoft.com/office/drawing/2014/main" id="{EF043237-7757-7557-B63E-D4EB5152D44B}"/>
+              </a:ext>
+            </a:extLst>
+          </p:cNvPr>
+          <p:cNvSpPr>
+            <a:spLocks noGrp="1"/>
+          </p:cNvSpPr>
+          <p:nvPr>
+            <p:ph idx="1"/>
+          </p:nvPr>
+        </p:nvSpPr>
+        <p:spPr/>
+        <p:txBody>
+          <a:bodyPr/>
+          <a:lstStyle/>
+          <a:p>
+            <a:endParaRPr lang="pt-BR"/>
           </a:p>
         </p:txBody>
       </p:sp>
     </p:spTree>
     <p:extLst>
       <p:ext uri="{BB962C8B-B14F-4D97-AF65-F5344CB8AC3E}">
-        <p14:creationId xmlns:p14="http://schemas.microsoft.com/office/powerpoint/2010/main" val="1690066477"/>
+        <p14:creationId xmlns:p14="http://schemas.microsoft.com/office/powerpoint/2010/main" val="1787264919"/>
       </p:ext>
     </p:extLst>
   </p:cSld>
@@ -6173,12 +8423,190 @@
           <a:chExt cx="0" cy="0"/>
         </a:xfrm>
       </p:grpSpPr>
+      <p:sp>
+        <p:nvSpPr>
+          <p:cNvPr id="4" name="Título 1">
+            <a:extLst>
+              <a:ext uri="{FF2B5EF4-FFF2-40B4-BE49-F238E27FC236}">
+                <a16:creationId xmlns:a16="http://schemas.microsoft.com/office/drawing/2014/main" id="{32666AC8-2E17-4DB4-B0F5-60C640CCFD2E}"/>
+              </a:ext>
+            </a:extLst>
+          </p:cNvPr>
+          <p:cNvSpPr txBox="1">
+            <a:spLocks/>
+          </p:cNvSpPr>
+          <p:nvPr/>
+        </p:nvSpPr>
+        <p:spPr>
+          <a:xfrm>
+            <a:off x="1431533" y="2720526"/>
+            <a:ext cx="9144000" cy="1029541"/>
+          </a:xfrm>
+          <a:prstGeom prst="rect">
+            <a:avLst/>
+          </a:prstGeom>
+        </p:spPr>
+        <p:txBody>
+          <a:bodyPr vert="horz" lIns="91440" tIns="45720" rIns="91440" bIns="45720" rtlCol="0" anchor="ctr">
+            <a:normAutofit/>
+          </a:bodyPr>
+          <a:lstStyle>
+            <a:lvl1pPr algn="l" defTabSz="914400" rtl="0" eaLnBrk="1" latinLnBrk="0" hangingPunct="1">
+              <a:lnSpc>
+                <a:spcPct val="90000"/>
+              </a:lnSpc>
+              <a:spcBef>
+                <a:spcPct val="0"/>
+              </a:spcBef>
+              <a:buNone/>
+              <a:defRPr sz="4400" kern="1200">
+                <a:solidFill>
+                  <a:schemeClr val="tx1"/>
+                </a:solidFill>
+                <a:latin typeface="+mj-lt"/>
+                <a:ea typeface="+mj-ea"/>
+                <a:cs typeface="+mj-cs"/>
+              </a:defRPr>
+            </a:lvl1pPr>
+          </a:lstStyle>
+          <a:p>
+            <a:pPr algn="ctr"/>
+            <a:r>
+              <a:rPr lang="pt-BR" sz="6600" dirty="0"/>
+              <a:t>Obrigado!</a:t>
+            </a:r>
+            <a:endParaRPr lang="pt-BR" sz="6600" b="1" i="1" dirty="0"/>
+          </a:p>
+        </p:txBody>
+      </p:sp>
+    </p:spTree>
+    <p:extLst>
+      <p:ext uri="{BB962C8B-B14F-4D97-AF65-F5344CB8AC3E}">
+        <p14:creationId xmlns:p14="http://schemas.microsoft.com/office/powerpoint/2010/main" val="2655704619"/>
+      </p:ext>
+    </p:extLst>
+  </p:cSld>
+  <p:clrMapOvr>
+    <a:masterClrMapping/>
+  </p:clrMapOvr>
+</p:sld>
+</file>
+
+<file path=ppt/slides/slide22.xml><?xml version="1.0" encoding="utf-8"?>
+<p:sld xmlns:a="http://schemas.openxmlformats.org/drawingml/2006/main" xmlns:r="http://schemas.openxmlformats.org/officeDocument/2006/relationships" xmlns:p="http://schemas.openxmlformats.org/presentationml/2006/main">
+  <p:cSld>
+    <p:spTree>
+      <p:nvGrpSpPr>
+        <p:cNvPr id="1" name="">
+          <a:extLst>
+            <a:ext uri="{FF2B5EF4-FFF2-40B4-BE49-F238E27FC236}">
+              <a16:creationId xmlns:a16="http://schemas.microsoft.com/office/drawing/2014/main" id="{83DFB381-AAB9-2788-1601-EB1230F302AA}"/>
+            </a:ext>
+          </a:extLst>
+        </p:cNvPr>
+        <p:cNvGrpSpPr/>
+        <p:nvPr/>
+      </p:nvGrpSpPr>
+      <p:grpSpPr>
+        <a:xfrm>
+          <a:off x="0" y="0"/>
+          <a:ext cx="0" cy="0"/>
+          <a:chOff x="0" y="0"/>
+          <a:chExt cx="0" cy="0"/>
+        </a:xfrm>
+      </p:grpSpPr>
+      <p:sp>
+        <p:nvSpPr>
+          <p:cNvPr id="4" name="Título 1">
+            <a:extLst>
+              <a:ext uri="{FF2B5EF4-FFF2-40B4-BE49-F238E27FC236}">
+                <a16:creationId xmlns:a16="http://schemas.microsoft.com/office/drawing/2014/main" id="{4AF40FF5-E3E4-99F0-8C87-687EB32C12F9}"/>
+              </a:ext>
+            </a:extLst>
+          </p:cNvPr>
+          <p:cNvSpPr txBox="1">
+            <a:spLocks/>
+          </p:cNvSpPr>
+          <p:nvPr/>
+        </p:nvSpPr>
+        <p:spPr>
+          <a:xfrm>
+            <a:off x="1431533" y="2720526"/>
+            <a:ext cx="9144000" cy="1029541"/>
+          </a:xfrm>
+          <a:prstGeom prst="rect">
+            <a:avLst/>
+          </a:prstGeom>
+        </p:spPr>
+        <p:txBody>
+          <a:bodyPr vert="horz" lIns="91440" tIns="45720" rIns="91440" bIns="45720" rtlCol="0" anchor="ctr">
+            <a:normAutofit/>
+          </a:bodyPr>
+          <a:lstStyle>
+            <a:lvl1pPr algn="l" defTabSz="914400" rtl="0" eaLnBrk="1" latinLnBrk="0" hangingPunct="1">
+              <a:lnSpc>
+                <a:spcPct val="90000"/>
+              </a:lnSpc>
+              <a:spcBef>
+                <a:spcPct val="0"/>
+              </a:spcBef>
+              <a:buNone/>
+              <a:defRPr sz="4400" kern="1200">
+                <a:solidFill>
+                  <a:schemeClr val="tx1"/>
+                </a:solidFill>
+                <a:latin typeface="+mj-lt"/>
+                <a:ea typeface="+mj-ea"/>
+                <a:cs typeface="+mj-cs"/>
+              </a:defRPr>
+            </a:lvl1pPr>
+          </a:lstStyle>
+          <a:p>
+            <a:pPr algn="ctr"/>
+            <a:r>
+              <a:rPr lang="pt-BR" sz="6600" dirty="0"/>
+              <a:t>Figuras</a:t>
+            </a:r>
+            <a:endParaRPr lang="pt-BR" sz="6600" b="1" i="1" dirty="0"/>
+          </a:p>
+        </p:txBody>
+      </p:sp>
+    </p:spTree>
+    <p:extLst>
+      <p:ext uri="{BB962C8B-B14F-4D97-AF65-F5344CB8AC3E}">
+        <p14:creationId xmlns:p14="http://schemas.microsoft.com/office/powerpoint/2010/main" val="1690066477"/>
+      </p:ext>
+    </p:extLst>
+  </p:cSld>
+  <p:clrMapOvr>
+    <a:masterClrMapping/>
+  </p:clrMapOvr>
+</p:sld>
+</file>
+
+<file path=ppt/slides/slide23.xml><?xml version="1.0" encoding="utf-8"?>
+<p:sld xmlns:a="http://schemas.openxmlformats.org/drawingml/2006/main" xmlns:r="http://schemas.openxmlformats.org/officeDocument/2006/relationships" xmlns:p="http://schemas.openxmlformats.org/presentationml/2006/main">
+  <p:cSld>
+    <p:spTree>
+      <p:nvGrpSpPr>
+        <p:cNvPr id="1" name=""/>
+        <p:cNvGrpSpPr/>
+        <p:nvPr/>
+      </p:nvGrpSpPr>
+      <p:grpSpPr>
+        <a:xfrm>
+          <a:off x="0" y="0"/>
+          <a:ext cx="0" cy="0"/>
+          <a:chOff x="0" y="0"/>
+          <a:chExt cx="0" cy="0"/>
+        </a:xfrm>
+      </p:grpSpPr>
       <p:grpSp>
         <p:nvGrpSpPr>
           <p:cNvPr id="59" name="Group 58">
             <a:extLst>
               <a:ext uri="{FF2B5EF4-FFF2-40B4-BE49-F238E27FC236}">
-                <a16:creationId xmlns:a16="http://schemas.microsoft.com/office/drawing/2014/main" xmlns="" id="{BB54A8AF-5D7A-DF48-6B51-A97D3BA5AE2B}"/>
+                <a16:creationId xmlns:a16="http://schemas.microsoft.com/office/drawing/2014/main" id="{BB54A8AF-5D7A-DF48-6B51-A97D3BA5AE2B}"/>
               </a:ext>
             </a:extLst>
           </p:cNvPr>
@@ -6198,7 +8626,7 @@
             <p:cNvPr id="26" name="Rectangle 25">
               <a:extLst>
                 <a:ext uri="{FF2B5EF4-FFF2-40B4-BE49-F238E27FC236}">
-                  <a16:creationId xmlns:a16="http://schemas.microsoft.com/office/drawing/2014/main" xmlns="" id="{A78F414E-0878-E9AC-3349-365D683589EF}"/>
+                  <a16:creationId xmlns:a16="http://schemas.microsoft.com/office/drawing/2014/main" id="{A78F414E-0878-E9AC-3349-365D683589EF}"/>
                 </a:ext>
               </a:extLst>
             </p:cNvPr>
@@ -6247,7 +8675,7 @@
             <p:cNvPr id="27" name="Rectangle 26">
               <a:extLst>
                 <a:ext uri="{FF2B5EF4-FFF2-40B4-BE49-F238E27FC236}">
-                  <a16:creationId xmlns:a16="http://schemas.microsoft.com/office/drawing/2014/main" xmlns="" id="{67A2140F-0BEB-DFFC-0173-0DDE81A0BAF4}"/>
+                  <a16:creationId xmlns:a16="http://schemas.microsoft.com/office/drawing/2014/main" id="{67A2140F-0BEB-DFFC-0173-0DDE81A0BAF4}"/>
                 </a:ext>
               </a:extLst>
             </p:cNvPr>
@@ -6296,7 +8724,7 @@
             <p:cNvPr id="33" name="Rectangle 32">
               <a:extLst>
                 <a:ext uri="{FF2B5EF4-FFF2-40B4-BE49-F238E27FC236}">
-                  <a16:creationId xmlns:a16="http://schemas.microsoft.com/office/drawing/2014/main" xmlns="" id="{C67CE66F-B1C9-97C2-5191-323C447A4039}"/>
+                  <a16:creationId xmlns:a16="http://schemas.microsoft.com/office/drawing/2014/main" id="{C67CE66F-B1C9-97C2-5191-323C447A4039}"/>
                 </a:ext>
               </a:extLst>
             </p:cNvPr>
@@ -6345,7 +8773,7 @@
             <p:cNvPr id="34" name="Rectangle 33">
               <a:extLst>
                 <a:ext uri="{FF2B5EF4-FFF2-40B4-BE49-F238E27FC236}">
-                  <a16:creationId xmlns:a16="http://schemas.microsoft.com/office/drawing/2014/main" xmlns="" id="{44116E33-D3F4-D7FB-DCEF-760C9C024249}"/>
+                  <a16:creationId xmlns:a16="http://schemas.microsoft.com/office/drawing/2014/main" id="{44116E33-D3F4-D7FB-DCEF-760C9C024249}"/>
                 </a:ext>
               </a:extLst>
             </p:cNvPr>
@@ -6394,7 +8822,7 @@
             <p:cNvPr id="12" name="Connector: Elbow 11">
               <a:extLst>
                 <a:ext uri="{FF2B5EF4-FFF2-40B4-BE49-F238E27FC236}">
-                  <a16:creationId xmlns:a16="http://schemas.microsoft.com/office/drawing/2014/main" xmlns="" id="{0375811A-BC31-5203-21BF-8C1AEDCA810A}"/>
+                  <a16:creationId xmlns:a16="http://schemas.microsoft.com/office/drawing/2014/main" id="{0375811A-BC31-5203-21BF-8C1AEDCA810A}"/>
                 </a:ext>
               </a:extLst>
             </p:cNvPr>
@@ -6439,7 +8867,7 @@
             <p:cNvPr id="17" name="Rectangle: Rounded Corners 16">
               <a:extLst>
                 <a:ext uri="{FF2B5EF4-FFF2-40B4-BE49-F238E27FC236}">
-                  <a16:creationId xmlns:a16="http://schemas.microsoft.com/office/drawing/2014/main" xmlns="" id="{D957717F-F346-A328-0454-3432762A09F8}"/>
+                  <a16:creationId xmlns:a16="http://schemas.microsoft.com/office/drawing/2014/main" id="{D957717F-F346-A328-0454-3432762A09F8}"/>
                 </a:ext>
               </a:extLst>
             </p:cNvPr>
@@ -6489,7 +8917,7 @@
             <p:cNvPr id="18" name="Rectangle: Rounded Corners 17">
               <a:extLst>
                 <a:ext uri="{FF2B5EF4-FFF2-40B4-BE49-F238E27FC236}">
-                  <a16:creationId xmlns:a16="http://schemas.microsoft.com/office/drawing/2014/main" xmlns="" id="{39EF6FE5-6FBC-BC13-63C8-D6E9E3E272C4}"/>
+                  <a16:creationId xmlns:a16="http://schemas.microsoft.com/office/drawing/2014/main" id="{39EF6FE5-6FBC-BC13-63C8-D6E9E3E272C4}"/>
                 </a:ext>
               </a:extLst>
             </p:cNvPr>
@@ -6541,7 +8969,7 @@
                 <p:cNvPr id="41" name="TextBox 40">
                   <a:extLst>
                     <a:ext uri="{FF2B5EF4-FFF2-40B4-BE49-F238E27FC236}">
-                      <a16:creationId xmlns:a16="http://schemas.microsoft.com/office/drawing/2014/main" xmlns="" id="{DEBC8956-45EC-9A9F-7CAD-7A468058ABF1}"/>
+                      <a16:creationId xmlns:a16="http://schemas.microsoft.com/office/drawing/2014/main" id="{DEBC8956-45EC-9A9F-7CAD-7A468058ABF1}"/>
                     </a:ext>
                   </a:extLst>
                 </p:cNvPr>
@@ -6654,7 +9082,7 @@
                 <p:cNvPr id="10" name="TextBox 9">
                   <a:extLst>
                     <a:ext uri="{FF2B5EF4-FFF2-40B4-BE49-F238E27FC236}">
-                      <a16:creationId xmlns:a16="http://schemas.microsoft.com/office/drawing/2014/main" xmlns="" id="{6B8DF4A4-00E2-9B10-CC12-B0D274CCB842}"/>
+                      <a16:creationId xmlns:a16="http://schemas.microsoft.com/office/drawing/2014/main" id="{6B8DF4A4-00E2-9B10-CC12-B0D274CCB842}"/>
                     </a:ext>
                   </a:extLst>
                 </p:cNvPr>
@@ -6775,7 +9203,7 @@
                 <p:cNvPr id="14" name="TextBox 13">
                   <a:extLst>
                     <a:ext uri="{FF2B5EF4-FFF2-40B4-BE49-F238E27FC236}">
-                      <a16:creationId xmlns:a16="http://schemas.microsoft.com/office/drawing/2014/main" xmlns="" id="{376B01EB-53C8-C2B2-1104-8A2BC1DE4624}"/>
+                      <a16:creationId xmlns:a16="http://schemas.microsoft.com/office/drawing/2014/main" id="{376B01EB-53C8-C2B2-1104-8A2BC1DE4624}"/>
                     </a:ext>
                   </a:extLst>
                 </p:cNvPr>
@@ -6894,7 +9322,7 @@
             <p:cNvPr id="20" name="Rectangle 19">
               <a:extLst>
                 <a:ext uri="{FF2B5EF4-FFF2-40B4-BE49-F238E27FC236}">
-                  <a16:creationId xmlns:a16="http://schemas.microsoft.com/office/drawing/2014/main" xmlns="" id="{8B0A48D5-77C9-C29A-8EF5-BED0E6E38CD2}"/>
+                  <a16:creationId xmlns:a16="http://schemas.microsoft.com/office/drawing/2014/main" id="{8B0A48D5-77C9-C29A-8EF5-BED0E6E38CD2}"/>
                 </a:ext>
               </a:extLst>
             </p:cNvPr>
@@ -6944,7 +9372,7 @@
             <p:cNvPr id="21" name="Rectangle 20">
               <a:extLst>
                 <a:ext uri="{FF2B5EF4-FFF2-40B4-BE49-F238E27FC236}">
-                  <a16:creationId xmlns:a16="http://schemas.microsoft.com/office/drawing/2014/main" xmlns="" id="{48728DA3-DA01-CAB9-540E-37EADA51BE57}"/>
+                  <a16:creationId xmlns:a16="http://schemas.microsoft.com/office/drawing/2014/main" id="{48728DA3-DA01-CAB9-540E-37EADA51BE57}"/>
                 </a:ext>
               </a:extLst>
             </p:cNvPr>
@@ -6994,7 +9422,7 @@
             <p:cNvPr id="25" name="Connector: Elbow 24">
               <a:extLst>
                 <a:ext uri="{FF2B5EF4-FFF2-40B4-BE49-F238E27FC236}">
-                  <a16:creationId xmlns:a16="http://schemas.microsoft.com/office/drawing/2014/main" xmlns="" id="{20E553C2-F044-7C77-F846-B80760291225}"/>
+                  <a16:creationId xmlns:a16="http://schemas.microsoft.com/office/drawing/2014/main" id="{20E553C2-F044-7C77-F846-B80760291225}"/>
                 </a:ext>
               </a:extLst>
             </p:cNvPr>
@@ -7036,7 +9464,7 @@
             <p:cNvPr id="31" name="Straight Arrow Connector 30">
               <a:extLst>
                 <a:ext uri="{FF2B5EF4-FFF2-40B4-BE49-F238E27FC236}">
-                  <a16:creationId xmlns:a16="http://schemas.microsoft.com/office/drawing/2014/main" xmlns="" id="{6AEFECE4-5D15-A8B3-453D-610BA5638D05}"/>
+                  <a16:creationId xmlns:a16="http://schemas.microsoft.com/office/drawing/2014/main" id="{6AEFECE4-5D15-A8B3-453D-610BA5638D05}"/>
                 </a:ext>
               </a:extLst>
             </p:cNvPr>
@@ -7078,7 +9506,7 @@
             <p:cNvPr id="35" name="Straight Arrow Connector 34">
               <a:extLst>
                 <a:ext uri="{FF2B5EF4-FFF2-40B4-BE49-F238E27FC236}">
-                  <a16:creationId xmlns:a16="http://schemas.microsoft.com/office/drawing/2014/main" xmlns="" id="{B6FFE6A0-55AE-62C1-3F6E-5291D436B5AB}"/>
+                  <a16:creationId xmlns:a16="http://schemas.microsoft.com/office/drawing/2014/main" id="{B6FFE6A0-55AE-62C1-3F6E-5291D436B5AB}"/>
                 </a:ext>
               </a:extLst>
             </p:cNvPr>
@@ -7121,7 +9549,7 @@
             <p:cNvPr id="40" name="Connector: Elbow 39">
               <a:extLst>
                 <a:ext uri="{FF2B5EF4-FFF2-40B4-BE49-F238E27FC236}">
-                  <a16:creationId xmlns:a16="http://schemas.microsoft.com/office/drawing/2014/main" xmlns="" id="{73307ED6-2342-7662-DD14-B12FEDB6983C}"/>
+                  <a16:creationId xmlns:a16="http://schemas.microsoft.com/office/drawing/2014/main" id="{73307ED6-2342-7662-DD14-B12FEDB6983C}"/>
                 </a:ext>
               </a:extLst>
             </p:cNvPr>
@@ -7165,7 +9593,7 @@
             <p:cNvPr id="44" name="Straight Connector 43">
               <a:extLst>
                 <a:ext uri="{FF2B5EF4-FFF2-40B4-BE49-F238E27FC236}">
-                  <a16:creationId xmlns:a16="http://schemas.microsoft.com/office/drawing/2014/main" xmlns="" id="{6B737731-0DAB-FB54-8D60-66210A48E60A}"/>
+                  <a16:creationId xmlns:a16="http://schemas.microsoft.com/office/drawing/2014/main" id="{6B737731-0DAB-FB54-8D60-66210A48E60A}"/>
                 </a:ext>
               </a:extLst>
             </p:cNvPr>
@@ -7205,7 +9633,7 @@
             <p:cNvPr id="46" name="Straight Connector 45">
               <a:extLst>
                 <a:ext uri="{FF2B5EF4-FFF2-40B4-BE49-F238E27FC236}">
-                  <a16:creationId xmlns:a16="http://schemas.microsoft.com/office/drawing/2014/main" xmlns="" id="{7AED5B7A-243B-6FAD-C904-A72171DA10E4}"/>
+                  <a16:creationId xmlns:a16="http://schemas.microsoft.com/office/drawing/2014/main" id="{7AED5B7A-243B-6FAD-C904-A72171DA10E4}"/>
                 </a:ext>
               </a:extLst>
             </p:cNvPr>
@@ -7247,7 +9675,7 @@
                 <p:cNvPr id="55" name="TextBox 54">
                   <a:extLst>
                     <a:ext uri="{FF2B5EF4-FFF2-40B4-BE49-F238E27FC236}">
-                      <a16:creationId xmlns:a16="http://schemas.microsoft.com/office/drawing/2014/main" xmlns="" id="{C98BB9BE-FF5B-BD53-700F-EF25882F8757}"/>
+                      <a16:creationId xmlns:a16="http://schemas.microsoft.com/office/drawing/2014/main" id="{C98BB9BE-FF5B-BD53-700F-EF25882F8757}"/>
                     </a:ext>
                   </a:extLst>
                 </p:cNvPr>
@@ -7360,7 +9788,7 @@
                 <p:cNvPr id="56" name="TextBox 55">
                   <a:extLst>
                     <a:ext uri="{FF2B5EF4-FFF2-40B4-BE49-F238E27FC236}">
-                      <a16:creationId xmlns:a16="http://schemas.microsoft.com/office/drawing/2014/main" xmlns="" id="{033C1F87-4FD6-565B-5CE1-B94FB9D5F703}"/>
+                      <a16:creationId xmlns:a16="http://schemas.microsoft.com/office/drawing/2014/main" id="{033C1F87-4FD6-565B-5CE1-B94FB9D5F703}"/>
                     </a:ext>
                   </a:extLst>
                 </p:cNvPr>
@@ -7471,7 +9899,7 @@
             <p:cNvPr id="58" name="Straight Connector 57">
               <a:extLst>
                 <a:ext uri="{FF2B5EF4-FFF2-40B4-BE49-F238E27FC236}">
-                  <a16:creationId xmlns:a16="http://schemas.microsoft.com/office/drawing/2014/main" xmlns="" id="{1A8E8F72-A082-BAC3-6C41-D1C1204F72D8}"/>
+                  <a16:creationId xmlns:a16="http://schemas.microsoft.com/office/drawing/2014/main" id="{1A8E8F72-A082-BAC3-6C41-D1C1204F72D8}"/>
                 </a:ext>
               </a:extLst>
             </p:cNvPr>
@@ -7543,7 +9971,7 @@
           <p:cNvPr id="2" name="Título 1">
             <a:extLst>
               <a:ext uri="{FF2B5EF4-FFF2-40B4-BE49-F238E27FC236}">
-                <a16:creationId xmlns:a16="http://schemas.microsoft.com/office/drawing/2014/main" xmlns="" id="{7F5FF925-67DE-CC62-E869-C6E3C1D771E6}"/>
+                <a16:creationId xmlns:a16="http://schemas.microsoft.com/office/drawing/2014/main" id="{7F5FF925-67DE-CC62-E869-C6E3C1D771E6}"/>
               </a:ext>
             </a:extLst>
           </p:cNvPr>
@@ -7583,7 +10011,7 @@
           <p:cNvPr id="3" name="Espaço Reservado para Conteúdo 2">
             <a:extLst>
               <a:ext uri="{FF2B5EF4-FFF2-40B4-BE49-F238E27FC236}">
-                <a16:creationId xmlns:a16="http://schemas.microsoft.com/office/drawing/2014/main" xmlns="" id="{7DA84068-671A-9D40-4F76-2C57E4F720C2}"/>
+                <a16:creationId xmlns:a16="http://schemas.microsoft.com/office/drawing/2014/main" id="{7DA84068-671A-9D40-4F76-2C57E4F720C2}"/>
               </a:ext>
             </a:extLst>
           </p:cNvPr>
@@ -7646,7 +10074,7 @@
           <p:cNvPr id="2051" name="Picture 3" descr="Understanding the Pillars of Machine Learning: Supervised, Unsupervised,  and Reinforcement Learning">
             <a:extLst>
               <a:ext uri="{FF2B5EF4-FFF2-40B4-BE49-F238E27FC236}">
-                <a16:creationId xmlns:a16="http://schemas.microsoft.com/office/drawing/2014/main" xmlns="" id="{BDF6F402-9EED-6D9D-33D9-227B654D168D}"/>
+                <a16:creationId xmlns:a16="http://schemas.microsoft.com/office/drawing/2014/main" id="{BDF6F402-9EED-6D9D-33D9-227B654D168D}"/>
               </a:ext>
             </a:extLst>
           </p:cNvPr>
@@ -7709,7 +10137,7 @@
         <p:cNvPr id="1" name="">
           <a:extLst>
             <a:ext uri="{FF2B5EF4-FFF2-40B4-BE49-F238E27FC236}">
-              <a16:creationId xmlns:a16="http://schemas.microsoft.com/office/drawing/2014/main" xmlns="" id="{A370B64E-1F58-2FF0-BFB3-B1D955875AD5}"/>
+              <a16:creationId xmlns:a16="http://schemas.microsoft.com/office/drawing/2014/main" id="{A370B64E-1F58-2FF0-BFB3-B1D955875AD5}"/>
             </a:ext>
           </a:extLst>
         </p:cNvPr>
@@ -7729,7 +10157,7 @@
           <p:cNvPr id="2" name="Título 1">
             <a:extLst>
               <a:ext uri="{FF2B5EF4-FFF2-40B4-BE49-F238E27FC236}">
-                <a16:creationId xmlns:a16="http://schemas.microsoft.com/office/drawing/2014/main" xmlns="" id="{86CC3BAE-52FC-3697-DB30-5B05B346937E}"/>
+                <a16:creationId xmlns:a16="http://schemas.microsoft.com/office/drawing/2014/main" id="{86CC3BAE-52FC-3697-DB30-5B05B346937E}"/>
               </a:ext>
             </a:extLst>
           </p:cNvPr>
@@ -7758,7 +10186,7 @@
           <p:cNvPr id="3" name="Espaço Reservado para Conteúdo 2">
             <a:extLst>
               <a:ext uri="{FF2B5EF4-FFF2-40B4-BE49-F238E27FC236}">
-                <a16:creationId xmlns:a16="http://schemas.microsoft.com/office/drawing/2014/main" xmlns="" id="{0A06D34D-8885-14BC-AF7E-F271D7D63333}"/>
+                <a16:creationId xmlns:a16="http://schemas.microsoft.com/office/drawing/2014/main" id="{0A06D34D-8885-14BC-AF7E-F271D7D63333}"/>
               </a:ext>
             </a:extLst>
           </p:cNvPr>
@@ -7839,7 +10267,7 @@
           <p:cNvPr id="4" name="Imagem 16">
             <a:extLst>
               <a:ext uri="{FF2B5EF4-FFF2-40B4-BE49-F238E27FC236}">
-                <a16:creationId xmlns:a16="http://schemas.microsoft.com/office/drawing/2014/main" xmlns="" id="{7937C6EA-BFD8-5278-9EE0-796D1842173C}"/>
+                <a16:creationId xmlns:a16="http://schemas.microsoft.com/office/drawing/2014/main" id="{7937C6EA-BFD8-5278-9EE0-796D1842173C}"/>
               </a:ext>
             </a:extLst>
           </p:cNvPr>
@@ -7891,7 +10319,7 @@
         <p:cNvPr id="1" name="">
           <a:extLst>
             <a:ext uri="{FF2B5EF4-FFF2-40B4-BE49-F238E27FC236}">
-              <a16:creationId xmlns:a16="http://schemas.microsoft.com/office/drawing/2014/main" xmlns="" id="{D3753AED-FA4F-39DE-91A4-E5C845C0C665}"/>
+              <a16:creationId xmlns:a16="http://schemas.microsoft.com/office/drawing/2014/main" id="{D3753AED-FA4F-39DE-91A4-E5C845C0C665}"/>
             </a:ext>
           </a:extLst>
         </p:cNvPr>
@@ -7911,7 +10339,7 @@
           <p:cNvPr id="2" name="Título 1">
             <a:extLst>
               <a:ext uri="{FF2B5EF4-FFF2-40B4-BE49-F238E27FC236}">
-                <a16:creationId xmlns:a16="http://schemas.microsoft.com/office/drawing/2014/main" xmlns="" id="{6E88774E-D7D6-D9E6-4449-244D34EE979C}"/>
+                <a16:creationId xmlns:a16="http://schemas.microsoft.com/office/drawing/2014/main" id="{6E88774E-D7D6-D9E6-4449-244D34EE979C}"/>
               </a:ext>
             </a:extLst>
           </p:cNvPr>
@@ -7940,7 +10368,7 @@
           <p:cNvPr id="3" name="Espaço Reservado para Conteúdo 2">
             <a:extLst>
               <a:ext uri="{FF2B5EF4-FFF2-40B4-BE49-F238E27FC236}">
-                <a16:creationId xmlns:a16="http://schemas.microsoft.com/office/drawing/2014/main" xmlns="" id="{0E79548E-494A-A12A-30F7-F4E225B6C309}"/>
+                <a16:creationId xmlns:a16="http://schemas.microsoft.com/office/drawing/2014/main" id="{0E79548E-494A-A12A-30F7-F4E225B6C309}"/>
               </a:ext>
             </a:extLst>
           </p:cNvPr>
@@ -8015,7 +10443,7 @@
           <p:cNvPr id="6" name="Imagem 16">
             <a:extLst>
               <a:ext uri="{FF2B5EF4-FFF2-40B4-BE49-F238E27FC236}">
-                <a16:creationId xmlns:a16="http://schemas.microsoft.com/office/drawing/2014/main" xmlns="" id="{C8EB1D57-2EF7-64D2-25BE-6F8A0BE933DB}"/>
+                <a16:creationId xmlns:a16="http://schemas.microsoft.com/office/drawing/2014/main" id="{C8EB1D57-2EF7-64D2-25BE-6F8A0BE933DB}"/>
               </a:ext>
             </a:extLst>
           </p:cNvPr>
@@ -8067,7 +10495,7 @@
         <p:cNvPr id="1" name="">
           <a:extLst>
             <a:ext uri="{FF2B5EF4-FFF2-40B4-BE49-F238E27FC236}">
-              <a16:creationId xmlns:a16="http://schemas.microsoft.com/office/drawing/2014/main" xmlns="" id="{D41FFEFA-1EED-2754-CDBD-7CC34D06F8B2}"/>
+              <a16:creationId xmlns:a16="http://schemas.microsoft.com/office/drawing/2014/main" id="{D41FFEFA-1EED-2754-CDBD-7CC34D06F8B2}"/>
             </a:ext>
           </a:extLst>
         </p:cNvPr>
@@ -8087,7 +10515,7 @@
           <p:cNvPr id="2" name="Título 1">
             <a:extLst>
               <a:ext uri="{FF2B5EF4-FFF2-40B4-BE49-F238E27FC236}">
-                <a16:creationId xmlns:a16="http://schemas.microsoft.com/office/drawing/2014/main" xmlns="" id="{E4CDBB74-F243-3F53-FEC5-AF11CE256B39}"/>
+                <a16:creationId xmlns:a16="http://schemas.microsoft.com/office/drawing/2014/main" id="{E4CDBB74-F243-3F53-FEC5-AF11CE256B39}"/>
               </a:ext>
             </a:extLst>
           </p:cNvPr>
@@ -8116,7 +10544,7 @@
           <p:cNvPr id="3" name="Espaço Reservado para Conteúdo 2">
             <a:extLst>
               <a:ext uri="{FF2B5EF4-FFF2-40B4-BE49-F238E27FC236}">
-                <a16:creationId xmlns:a16="http://schemas.microsoft.com/office/drawing/2014/main" xmlns="" id="{8A609E9F-E2C8-D6E3-78D1-C44C117B55A3}"/>
+                <a16:creationId xmlns:a16="http://schemas.microsoft.com/office/drawing/2014/main" id="{8A609E9F-E2C8-D6E3-78D1-C44C117B55A3}"/>
               </a:ext>
             </a:extLst>
           </p:cNvPr>
@@ -8161,7 +10589,7 @@
           <p:cNvPr id="4" name="Imagem 16">
             <a:extLst>
               <a:ext uri="{FF2B5EF4-FFF2-40B4-BE49-F238E27FC236}">
-                <a16:creationId xmlns:a16="http://schemas.microsoft.com/office/drawing/2014/main" xmlns="" id="{DF71A34D-2B36-AF4A-818D-805CF072BD50}"/>
+                <a16:creationId xmlns:a16="http://schemas.microsoft.com/office/drawing/2014/main" id="{DF71A34D-2B36-AF4A-818D-805CF072BD50}"/>
               </a:ext>
             </a:extLst>
           </p:cNvPr>
@@ -8227,7 +10655,7 @@
           <p:cNvPr id="2" name="Title 1">
             <a:extLst>
               <a:ext uri="{FF2B5EF4-FFF2-40B4-BE49-F238E27FC236}">
-                <a16:creationId xmlns:a16="http://schemas.microsoft.com/office/drawing/2014/main" xmlns="" id="{81E045BB-096B-FD28-B7D5-E94A5FD7C8E5}"/>
+                <a16:creationId xmlns:a16="http://schemas.microsoft.com/office/drawing/2014/main" id="{81E045BB-096B-FD28-B7D5-E94A5FD7C8E5}"/>
               </a:ext>
             </a:extLst>
           </p:cNvPr>
@@ -8256,7 +10684,7 @@
           <p:cNvPr id="3" name="Content Placeholder 2">
             <a:extLst>
               <a:ext uri="{FF2B5EF4-FFF2-40B4-BE49-F238E27FC236}">
-                <a16:creationId xmlns:a16="http://schemas.microsoft.com/office/drawing/2014/main" xmlns="" id="{DC3C87D0-4294-EB29-295B-08AD144442B5}"/>
+                <a16:creationId xmlns:a16="http://schemas.microsoft.com/office/drawing/2014/main" id="{DC3C87D0-4294-EB29-295B-08AD144442B5}"/>
               </a:ext>
             </a:extLst>
           </p:cNvPr>
@@ -8324,7 +10752,7 @@
           <p:cNvPr id="4" name="Picture 4" descr="A Beginner's Guide to Reinforcement Learning and its Basic Implementation  from Scratch | by Tanvi Penumudy | Analytics Vidhya | Medium">
             <a:extLst>
               <a:ext uri="{FF2B5EF4-FFF2-40B4-BE49-F238E27FC236}">
-                <a16:creationId xmlns:a16="http://schemas.microsoft.com/office/drawing/2014/main" xmlns="" id="{A37B35F5-6EF1-B612-B863-263AB00420ED}"/>
+                <a16:creationId xmlns:a16="http://schemas.microsoft.com/office/drawing/2014/main" id="{A37B35F5-6EF1-B612-B863-263AB00420ED}"/>
               </a:ext>
             </a:extLst>
           </p:cNvPr>
@@ -8401,7 +10829,7 @@
           <p:cNvPr id="2" name="Title 1">
             <a:extLst>
               <a:ext uri="{FF2B5EF4-FFF2-40B4-BE49-F238E27FC236}">
-                <a16:creationId xmlns:a16="http://schemas.microsoft.com/office/drawing/2014/main" xmlns="" id="{CD479DA3-4A1A-74AE-26DA-FD6E65250CCE}"/>
+                <a16:creationId xmlns:a16="http://schemas.microsoft.com/office/drawing/2014/main" id="{CD479DA3-4A1A-74AE-26DA-FD6E65250CCE}"/>
               </a:ext>
             </a:extLst>
           </p:cNvPr>
@@ -8436,14 +10864,14 @@
           </a:p>
         </p:txBody>
       </p:sp>
-      <mc:AlternateContent xmlns:mc="http://schemas.openxmlformats.org/markup-compatibility/2006">
-        <mc:Choice xmlns:a14="http://schemas.microsoft.com/office/drawing/2010/main" Requires="a14">
+      <mc:AlternateContent xmlns:mc="http://schemas.openxmlformats.org/markup-compatibility/2006" xmlns:a14="http://schemas.microsoft.com/office/drawing/2010/main">
+        <mc:Choice Requires="a14">
           <p:sp>
             <p:nvSpPr>
               <p:cNvPr id="3" name="Content Placeholder 2">
                 <a:extLst>
                   <a:ext uri="{FF2B5EF4-FFF2-40B4-BE49-F238E27FC236}">
-                    <a16:creationId xmlns:a16="http://schemas.microsoft.com/office/drawing/2014/main" xmlns="" id="{D674119D-90D2-5043-F365-B3EB6F84791A}"/>
+                    <a16:creationId xmlns:a16="http://schemas.microsoft.com/office/drawing/2014/main" id="{D674119D-90D2-5043-F365-B3EB6F84791A}"/>
                   </a:ext>
                 </a:extLst>
               </p:cNvPr>
@@ -8482,15 +10910,7 @@
                 </a:pPr>
                 <a:r>
                   <a:rPr lang="pt-BR" dirty="0"/>
-                  <a:t>Exemplo: um robô, </a:t>
-                </a:r>
-                <a:r>
-                  <a:rPr lang="pt-BR" dirty="0" smtClean="0"/>
-                  <a:t>um </a:t>
-                </a:r>
-                <a:r>
-                  <a:rPr lang="pt-BR" dirty="0"/>
-                  <a:t>carro autônomo.</a:t>
+                  <a:t>Exemplo: um robô, um carro autônomo.</a:t>
                 </a:r>
               </a:p>
               <a:p>
@@ -8500,11 +10920,7 @@
                 </a:r>
                 <a:r>
                   <a:rPr lang="pt-BR" dirty="0"/>
-                  <a:t> O mundo </a:t>
-                </a:r>
-                <a:r>
-                  <a:rPr lang="pt-BR" dirty="0" smtClean="0"/>
-                  <a:t>com o qual o agente interage.</a:t>
+                  <a:t> O mundo com o qual o agente interage.</a:t>
                 </a:r>
               </a:p>
               <a:p>
@@ -8513,10 +10929,9 @@
                   <a:buChar char="§"/>
                 </a:pPr>
                 <a:r>
-                  <a:rPr lang="pt-BR" dirty="0" smtClean="0"/>
+                  <a:rPr lang="pt-BR" dirty="0"/>
                   <a:t>Exemplo: um galpão, uma cidade, um tabuleiro de jogo.</a:t>
                 </a:r>
-                <a:endParaRPr lang="pt-BR" dirty="0"/>
               </a:p>
               <a:p>
                 <a:r>
@@ -8539,11 +10954,7 @@
                 </a14:m>
                 <a:r>
                   <a:rPr lang="pt-BR" dirty="0"/>
-                  <a:t>): A situação atual do agente no ambiente</a:t>
-                </a:r>
-                <a:r>
-                  <a:rPr lang="pt-BR" dirty="0" smtClean="0"/>
-                  <a:t>.</a:t>
+                  <a:t>): A situação atual do agente no ambiente.</a:t>
                 </a:r>
               </a:p>
               <a:p>
@@ -8552,10 +10963,9 @@
                   <a:buChar char="§"/>
                 </a:pPr>
                 <a:r>
-                  <a:rPr lang="pt-BR" dirty="0" smtClean="0"/>
+                  <a:rPr lang="pt-BR" dirty="0"/>
                   <a:t>Exemplo: A posição do agente e dos objetos/obstáculos no galpão, cidade ou jogo.</a:t>
                 </a:r>
-                <a:endParaRPr lang="pt-BR" dirty="0"/>
               </a:p>
               <a:p>
                 <a:r>
@@ -8578,11 +10988,7 @@
                 </a14:m>
                 <a:r>
                   <a:rPr lang="pt-BR" dirty="0"/>
-                  <a:t>): O que o agente pode fazer</a:t>
-                </a:r>
-                <a:r>
-                  <a:rPr lang="pt-BR" dirty="0" smtClean="0"/>
-                  <a:t>.</a:t>
+                  <a:t>): O que o agente pode fazer.</a:t>
                 </a:r>
               </a:p>
               <a:p>
@@ -8591,10 +10997,9 @@
                   <a:buChar char="§"/>
                 </a:pPr>
                 <a:r>
-                  <a:rPr lang="pt-BR" dirty="0" smtClean="0"/>
+                  <a:rPr lang="pt-BR" dirty="0"/>
                   <a:t>Exemplo: movimentos (esquerda, direita, para cima/baixo), acelerar, frear.</a:t>
                 </a:r>
-                <a:endParaRPr lang="pt-BR" dirty="0"/>
               </a:p>
               <a:p>
                 <a:r>
@@ -8631,7 +11036,7 @@
             </p:txBody>
           </p:sp>
         </mc:Choice>
-        <mc:Fallback>
+        <mc:Fallback xmlns="">
           <p:sp>
             <p:nvSpPr>
               <p:cNvPr id="3" name="Content Placeholder 2">
@@ -8696,7 +11101,7 @@
         <p:cNvPr id="1" name="">
           <a:extLst>
             <a:ext uri="{FF2B5EF4-FFF2-40B4-BE49-F238E27FC236}">
-              <a16:creationId xmlns:a16="http://schemas.microsoft.com/office/drawing/2014/main" xmlns="" id="{DDB2BBDA-DAF3-B7AC-FB99-7C5B9285F912}"/>
+              <a16:creationId xmlns:a16="http://schemas.microsoft.com/office/drawing/2014/main" id="{DDB2BBDA-DAF3-B7AC-FB99-7C5B9285F912}"/>
             </a:ext>
           </a:extLst>
         </p:cNvPr>
@@ -8716,7 +11121,7 @@
           <p:cNvPr id="2" name="Title 1">
             <a:extLst>
               <a:ext uri="{FF2B5EF4-FFF2-40B4-BE49-F238E27FC236}">
-                <a16:creationId xmlns:a16="http://schemas.microsoft.com/office/drawing/2014/main" xmlns="" id="{A98D36C9-8653-8E41-11D8-585B6AC0D03D}"/>
+                <a16:creationId xmlns:a16="http://schemas.microsoft.com/office/drawing/2014/main" id="{A98D36C9-8653-8E41-11D8-585B6AC0D03D}"/>
               </a:ext>
             </a:extLst>
           </p:cNvPr>
@@ -8751,14 +11156,14 @@
           </a:p>
         </p:txBody>
       </p:sp>
-      <mc:AlternateContent xmlns:mc="http://schemas.openxmlformats.org/markup-compatibility/2006">
-        <mc:Choice xmlns:a14="http://schemas.microsoft.com/office/drawing/2010/main" Requires="a14">
+      <mc:AlternateContent xmlns:mc="http://schemas.openxmlformats.org/markup-compatibility/2006" xmlns:a14="http://schemas.microsoft.com/office/drawing/2010/main">
+        <mc:Choice Requires="a14">
           <p:sp>
             <p:nvSpPr>
               <p:cNvPr id="3" name="Content Placeholder 2">
                 <a:extLst>
                   <a:ext uri="{FF2B5EF4-FFF2-40B4-BE49-F238E27FC236}">
-                    <a16:creationId xmlns:a16="http://schemas.microsoft.com/office/drawing/2014/main" xmlns="" id="{981046E0-93D4-BF9F-C552-72A01838A8A3}"/>
+                    <a16:creationId xmlns:a16="http://schemas.microsoft.com/office/drawing/2014/main" id="{981046E0-93D4-BF9F-C552-72A01838A8A3}"/>
                   </a:ext>
                 </a:extLst>
               </p:cNvPr>
@@ -8782,7 +11187,7 @@
               <a:lstStyle/>
               <a:p>
                 <a:r>
-                  <a:rPr lang="pt-BR" dirty="0" smtClean="0"/>
+                  <a:rPr lang="pt-BR" dirty="0"/>
                   <a:t>O agente e o ambiente interagem em etapas de tempo discreto: </a:t>
                 </a:r>
                 <a14:m>
@@ -8849,15 +11254,7 @@
                 </a:pPr>
                 <a:r>
                   <a:rPr lang="pt-BR" dirty="0"/>
-                  <a:t>o</a:t>
-                </a:r>
-                <a:r>
-                  <a:rPr lang="pt-BR" dirty="0" smtClean="0"/>
-                  <a:t>bserva o </a:t>
-                </a:r>
-                <a:r>
-                  <a:rPr lang="pt-BR" dirty="0"/>
-                  <a:t>estado </a:t>
+                  <a:t>observa o estado </a:t>
                 </a:r>
                 <a14:m>
                   <m:oMath xmlns:m="http://schemas.openxmlformats.org/officeDocument/2006/math">
@@ -8904,13 +11301,8 @@
                 </a14:m>
                 <a:r>
                   <a:rPr lang="pt-BR" dirty="0"/>
-                  <a:t> (conjunto de estados </a:t>
+                  <a:t> (conjunto de estados possíveis).</a:t>
                 </a:r>
-                <a:r>
-                  <a:rPr lang="pt-BR" dirty="0" smtClean="0"/>
-                  <a:t>possíveis).</a:t>
-                </a:r>
-                <a:endParaRPr lang="pt-BR" dirty="0"/>
               </a:p>
               <a:p>
                 <a:pPr lvl="1">
@@ -8919,11 +11311,7 @@
                 </a:pPr>
                 <a:r>
                   <a:rPr lang="pt-BR" dirty="0"/>
-                  <a:t>c</a:t>
-                </a:r>
-                <a:r>
-                  <a:rPr lang="pt-BR" dirty="0" smtClean="0"/>
-                  <a:t>om base em </a:t>
+                  <a:t>com base em </a:t>
                 </a:r>
                 <a14:m>
                   <m:oMath xmlns:m="http://schemas.openxmlformats.org/officeDocument/2006/math">
@@ -8955,7 +11343,7 @@
                   </m:oMath>
                 </a14:m>
                 <a:r>
-                  <a:rPr lang="pt-BR" dirty="0" smtClean="0"/>
+                  <a:rPr lang="pt-BR" dirty="0"/>
                   <a:t>, ele seleciona uma ação </a:t>
                 </a:r>
                 <a14:m>
@@ -9003,13 +11391,8 @@
                 </a14:m>
                 <a:r>
                   <a:rPr lang="pt-BR" dirty="0"/>
-                  <a:t> (conjunto de ações </a:t>
+                  <a:t> (conjunto de ações disponíveis).</a:t>
                 </a:r>
-                <a:r>
-                  <a:rPr lang="pt-BR" dirty="0" smtClean="0"/>
-                  <a:t>disponíveis).</a:t>
-                </a:r>
-                <a:endParaRPr lang="pt-BR" dirty="0"/>
               </a:p>
               <a:p>
                 <a:pPr lvl="1">
@@ -9018,27 +11401,7 @@
                 </a:pPr>
                 <a:r>
                   <a:rPr lang="pt-BR" dirty="0"/>
-                  <a:t>u</a:t>
-                </a:r>
-                <a:r>
-                  <a:rPr lang="pt-BR" dirty="0" smtClean="0"/>
-                  <a:t>m </a:t>
-                </a:r>
-                <a:r>
-                  <a:rPr lang="pt-BR" dirty="0"/>
-                  <a:t>instante depois, </a:t>
-                </a:r>
-                <a:r>
-                  <a:rPr lang="pt-BR" dirty="0" smtClean="0"/>
-                  <a:t>como </a:t>
-                </a:r>
-                <a:r>
-                  <a:rPr lang="pt-BR" dirty="0"/>
-                  <a:t>consequência de sua ação, o agente recebe uma </a:t>
-                </a:r>
-                <a:r>
-                  <a:rPr lang="pt-BR" dirty="0" smtClean="0"/>
-                  <a:t>recompensa, </a:t>
+                  <a:t>um instante depois, como consequência de sua ação, o agente recebe uma recompensa, </a:t>
                 </a:r>
                 <a14:m>
                   <m:oMath xmlns:m="http://schemas.openxmlformats.org/officeDocument/2006/math">
@@ -9090,7 +11453,7 @@
                   </m:oMath>
                 </a14:m>
                 <a:r>
-                  <a:rPr lang="pt-BR" dirty="0" smtClean="0"/>
+                  <a:rPr lang="pt-BR" dirty="0"/>
                   <a:t> (conjunto de todas as possíveis recompensas).</a:t>
                 </a:r>
               </a:p>
@@ -9100,12 +11463,8 @@
                   <a:buChar char="§"/>
                 </a:pPr>
                 <a:r>
-                  <a:rPr lang="pt-BR" dirty="0" smtClean="0"/>
-                  <a:t>e </a:t>
-                </a:r>
-                <a:r>
                   <a:rPr lang="pt-BR" dirty="0"/>
-                  <a:t>se encontra em um novo estado, </a:t>
+                  <a:t>e se encontra em um novo estado, </a:t>
                 </a:r>
                 <a14:m>
                   <m:oMath xmlns:m="http://schemas.openxmlformats.org/officeDocument/2006/math">
@@ -9143,14 +11502,14 @@
                   </m:oMath>
                 </a14:m>
                 <a:r>
-                  <a:rPr lang="pt-BR" dirty="0" smtClean="0"/>
+                  <a:rPr lang="pt-BR" dirty="0"/>
                   <a:t>.</a:t>
                 </a:r>
               </a:p>
             </p:txBody>
           </p:sp>
         </mc:Choice>
-        <mc:Fallback>
+        <mc:Fallback xmlns="">
           <p:sp>
             <p:nvSpPr>
               <p:cNvPr id="3" name="Content Placeholder 2">
@@ -9199,7 +11558,7 @@
           <p:cNvPr id="61" name="Picture 60">
             <a:extLst>
               <a:ext uri="{FF2B5EF4-FFF2-40B4-BE49-F238E27FC236}">
-                <a16:creationId xmlns:a16="http://schemas.microsoft.com/office/drawing/2014/main" xmlns="" id="{22F895FA-1424-E50C-97F4-4F0BE0413C2F}"/>
+                <a16:creationId xmlns:a16="http://schemas.microsoft.com/office/drawing/2014/main" id="{22F895FA-1424-E50C-97F4-4F0BE0413C2F}"/>
               </a:ext>
             </a:extLst>
           </p:cNvPr>

--- a/slides/C24_Q_learning.pptx
+++ b/slides/C24_Q_learning.pptx
@@ -24,9 +24,9 @@
     <p:sldId id="327" r:id="rId12"/>
     <p:sldId id="328" r:id="rId13"/>
     <p:sldId id="330" r:id="rId14"/>
-    <p:sldId id="316" r:id="rId15"/>
-    <p:sldId id="333" r:id="rId16"/>
-    <p:sldId id="332" r:id="rId17"/>
+    <p:sldId id="334" r:id="rId15"/>
+    <p:sldId id="316" r:id="rId16"/>
+    <p:sldId id="333" r:id="rId17"/>
     <p:sldId id="329" r:id="rId18"/>
     <p:sldId id="331" r:id="rId19"/>
     <p:sldId id="293" r:id="rId20"/>
@@ -1000,54 +1000,9 @@
           <a:lstStyle/>
           <a:p>
             <a:r>
-              <a:rPr lang="pt-BR" sz="1200" b="1" kern="1200" dirty="0">
-                <a:solidFill>
-                  <a:schemeClr val="tx1"/>
-                </a:solidFill>
-                <a:effectLst/>
-                <a:latin typeface="+mn-lt"/>
-                <a:ea typeface="+mn-ea"/>
-                <a:cs typeface="+mn-cs"/>
-              </a:rPr>
-              <a:t>A Função $Q(s, a)$:</a:t>
-            </a:r>
-            <a:r>
               <a:rPr lang="pt-BR" dirty="0"/>
-              <a:t> É o retorno esperado (soma das recompensas futuras) se o agente estiver no estado </a:t>
-            </a:r>
-            <a:r>
-              <a:rPr lang="pt-BR" sz="1200" kern="1200" dirty="0">
-                <a:solidFill>
-                  <a:schemeClr val="tx1"/>
-                </a:solidFill>
-                <a:effectLst/>
-                <a:latin typeface="+mn-lt"/>
-                <a:ea typeface="+mn-ea"/>
-                <a:cs typeface="+mn-cs"/>
-              </a:rPr>
-              <a:t>$s$</a:t>
-            </a:r>
-            <a:r>
-              <a:rPr lang="pt-BR" dirty="0"/>
-              <a:t>, escolher a ação </a:t>
-            </a:r>
-            <a:r>
-              <a:rPr lang="pt-BR" sz="1200" kern="1200" dirty="0">
-                <a:solidFill>
-                  <a:schemeClr val="tx1"/>
-                </a:solidFill>
-                <a:effectLst/>
-                <a:latin typeface="+mn-lt"/>
-                <a:ea typeface="+mn-ea"/>
-                <a:cs typeface="+mn-cs"/>
-              </a:rPr>
-              <a:t>$a$</a:t>
-            </a:r>
-            <a:r>
-              <a:rPr lang="pt-BR" dirty="0"/>
-              <a:t> e, a partir daí, agir de forma otimizada.</a:t>
-            </a:r>
-            <a:endParaRPr lang="en-US" dirty="0"/>
+              <a:t>Encontrar a função Q ideal que guie o agente para a melhor decisão sempre.</a:t>
+            </a:r>
           </a:p>
         </p:txBody>
       </p:sp>
@@ -1094,6 +1049,117 @@
 </file>
 
 <file path=ppt/notesSlides/notesSlide12.xml><?xml version="1.0" encoding="utf-8"?>
+<p:notes xmlns:a="http://schemas.openxmlformats.org/drawingml/2006/main" xmlns:r="http://schemas.openxmlformats.org/officeDocument/2006/relationships" xmlns:p="http://schemas.openxmlformats.org/presentationml/2006/main">
+  <p:cSld>
+    <p:spTree>
+      <p:nvGrpSpPr>
+        <p:cNvPr id="1" name="">
+          <a:extLst>
+            <a:ext uri="{FF2B5EF4-FFF2-40B4-BE49-F238E27FC236}">
+              <a16:creationId xmlns:a16="http://schemas.microsoft.com/office/drawing/2014/main" id="{83CD62A6-7D00-3C53-05CF-A6197A8362EA}"/>
+            </a:ext>
+          </a:extLst>
+        </p:cNvPr>
+        <p:cNvGrpSpPr/>
+        <p:nvPr/>
+      </p:nvGrpSpPr>
+      <p:grpSpPr>
+        <a:xfrm>
+          <a:off x="0" y="0"/>
+          <a:ext cx="0" cy="0"/>
+          <a:chOff x="0" y="0"/>
+          <a:chExt cx="0" cy="0"/>
+        </a:xfrm>
+      </p:grpSpPr>
+      <p:sp>
+        <p:nvSpPr>
+          <p:cNvPr id="2" name="Slide Image Placeholder 1">
+            <a:extLst>
+              <a:ext uri="{FF2B5EF4-FFF2-40B4-BE49-F238E27FC236}">
+                <a16:creationId xmlns:a16="http://schemas.microsoft.com/office/drawing/2014/main" id="{6DFDE321-184D-9B7D-CEA2-205606B85A43}"/>
+              </a:ext>
+            </a:extLst>
+          </p:cNvPr>
+          <p:cNvSpPr>
+            <a:spLocks noGrp="1" noRot="1" noChangeAspect="1"/>
+          </p:cNvSpPr>
+          <p:nvPr>
+            <p:ph type="sldImg"/>
+          </p:nvPr>
+        </p:nvSpPr>
+        <p:spPr/>
+      </p:sp>
+      <p:sp>
+        <p:nvSpPr>
+          <p:cNvPr id="3" name="Notes Placeholder 2">
+            <a:extLst>
+              <a:ext uri="{FF2B5EF4-FFF2-40B4-BE49-F238E27FC236}">
+                <a16:creationId xmlns:a16="http://schemas.microsoft.com/office/drawing/2014/main" id="{6DA764DC-3F53-958D-91A3-DB06BD4A39DA}"/>
+              </a:ext>
+            </a:extLst>
+          </p:cNvPr>
+          <p:cNvSpPr>
+            <a:spLocks noGrp="1"/>
+          </p:cNvSpPr>
+          <p:nvPr>
+            <p:ph type="body" idx="1"/>
+          </p:nvPr>
+        </p:nvSpPr>
+        <p:spPr/>
+        <p:txBody>
+          <a:bodyPr/>
+          <a:lstStyle/>
+          <a:p>
+            <a:r>
+              <a:rPr lang="pt-BR" dirty="0"/>
+              <a:t>Encontrar a função Q ideal que guie o agente para a melhor decisão sempre.</a:t>
+            </a:r>
+          </a:p>
+        </p:txBody>
+      </p:sp>
+      <p:sp>
+        <p:nvSpPr>
+          <p:cNvPr id="4" name="Slide Number Placeholder 3">
+            <a:extLst>
+              <a:ext uri="{FF2B5EF4-FFF2-40B4-BE49-F238E27FC236}">
+                <a16:creationId xmlns:a16="http://schemas.microsoft.com/office/drawing/2014/main" id="{6BC07E3E-C02F-977B-3C72-FEF303694F11}"/>
+              </a:ext>
+            </a:extLst>
+          </p:cNvPr>
+          <p:cNvSpPr>
+            <a:spLocks noGrp="1"/>
+          </p:cNvSpPr>
+          <p:nvPr>
+            <p:ph type="sldNum" sz="quarter" idx="5"/>
+          </p:nvPr>
+        </p:nvSpPr>
+        <p:spPr/>
+        <p:txBody>
+          <a:bodyPr/>
+          <a:lstStyle/>
+          <a:p>
+            <a:fld id="{6FC8D850-966F-45A6-8DE7-15B891E7D40D}" type="slidenum">
+              <a:rPr lang="pt-BR" smtClean="0"/>
+              <a:t>14</a:t>
+            </a:fld>
+            <a:endParaRPr lang="pt-BR"/>
+          </a:p>
+        </p:txBody>
+      </p:sp>
+    </p:spTree>
+    <p:extLst>
+      <p:ext uri="{BB962C8B-B14F-4D97-AF65-F5344CB8AC3E}">
+        <p14:creationId xmlns:p14="http://schemas.microsoft.com/office/powerpoint/2010/main" val="3642699218"/>
+      </p:ext>
+    </p:extLst>
+  </p:cSld>
+  <p:clrMapOvr>
+    <a:masterClrMapping/>
+  </p:clrMapOvr>
+</p:notes>
+</file>
+
+<file path=ppt/notesSlides/notesSlide13.xml><?xml version="1.0" encoding="utf-8"?>
 <p:notes xmlns:a="http://schemas.openxmlformats.org/drawingml/2006/main" xmlns:r="http://schemas.openxmlformats.org/officeDocument/2006/relationships" xmlns:p="http://schemas.openxmlformats.org/presentationml/2006/main">
   <p:cSld>
     <p:spTree>
@@ -6200,12 +6266,12 @@
             <p:spPr>
               <a:xfrm>
                 <a:off x="838200" y="1825625"/>
-                <a:ext cx="11255829" cy="5032375"/>
+                <a:ext cx="11277600" cy="5032375"/>
               </a:xfrm>
             </p:spPr>
             <p:txBody>
               <a:bodyPr>
-                <a:normAutofit fontScale="92500" lnSpcReduction="20000"/>
+                <a:normAutofit/>
               </a:bodyPr>
               <a:lstStyle/>
               <a:p>
@@ -6239,11 +6305,19 @@
                 </a:r>
                 <a:r>
                   <a:rPr lang="pt-BR" dirty="0"/>
-                  <a:t> é a </a:t>
+                  <a:t> é uma função chamada</a:t>
                 </a:r>
                 <a:r>
                   <a:rPr lang="pt-BR" b="1" dirty="0"/>
-                  <a:t>função </a:t>
+                  <a:t> </a:t>
+                </a:r>
+                <a:r>
+                  <a:rPr lang="pt-BR" dirty="0"/>
+                  <a:t>de</a:t>
+                </a:r>
+                <a:r>
+                  <a:rPr lang="pt-BR" b="1" dirty="0"/>
+                  <a:t> </a:t>
                 </a:r>
                 <a:r>
                   <a:rPr lang="pt-BR" b="1" dirty="0" err="1"/>
@@ -6327,178 +6401,43 @@
                 </a:r>
               </a:p>
               <a:p>
-                <a:endParaRPr lang="pt-BR" dirty="0"/>
-              </a:p>
-              <a:p>
-                <a:endParaRPr lang="pt-BR" dirty="0"/>
-              </a:p>
-              <a:p>
                 <a:r>
-                  <a:rPr lang="pt-BR" dirty="0">
-                    <a:solidFill>
-                      <a:srgbClr val="FF0000"/>
-                    </a:solidFill>
-                  </a:rPr>
-                  <a:t>A </a:t>
+                  <a:rPr lang="pt-BR" dirty="0"/>
+                  <a:t>No </a:t>
                 </a:r>
                 <a:r>
-                  <a:rPr lang="pt-BR" b="1" dirty="0">
-                    <a:solidFill>
-                      <a:srgbClr val="FF0000"/>
-                    </a:solidFill>
-                  </a:rPr>
+                  <a:rPr lang="pt-BR" dirty="0" err="1"/>
+                  <a:t>Q-</a:t>
+                </a:r>
+                <a:r>
+                  <a:rPr lang="pt-BR" i="1" dirty="0" err="1"/>
+                  <a:t>learning</a:t>
+                </a:r>
+                <a:r>
+                  <a:rPr lang="pt-BR" dirty="0"/>
+                  <a:t>, ela é definida de forma </a:t>
+                </a:r>
+                <a:r>
+                  <a:rPr lang="pt-BR" b="1" dirty="0"/>
+                  <a:t>discreta</a:t>
+                </a:r>
+                <a:r>
+                  <a:rPr lang="pt-BR" dirty="0"/>
+                  <a:t> (estados e ações) por uma tabela (ou matriz), chamada de </a:t>
+                </a:r>
+                <a:r>
+                  <a:rPr lang="pt-BR" b="1" dirty="0"/>
                   <a:t>tabela-Q</a:t>
                 </a:r>
                 <a:r>
-                  <a:rPr lang="pt-BR" dirty="0">
-                    <a:solidFill>
-                      <a:srgbClr val="FF0000"/>
-                    </a:solidFill>
-                  </a:rPr>
-                  <a:t> é literalmente uma tabela (ou matriz) onde as linhas são os estados e as colunas são as ações. </a:t>
+                  <a:rPr lang="pt-BR" dirty="0"/>
+                  <a:t>.</a:t>
                 </a:r>
               </a:p>
               <a:p>
                 <a:r>
-                  <a:rPr lang="pt-BR" dirty="0">
-                    <a:solidFill>
-                      <a:srgbClr val="FF0000"/>
-                    </a:solidFill>
-                  </a:rPr>
-                  <a:t>A </a:t>
-                </a:r>
-                <a:r>
-                  <a:rPr lang="pt-BR" b="1" dirty="0">
-                    <a:solidFill>
-                      <a:srgbClr val="FF0000"/>
-                    </a:solidFill>
-                  </a:rPr>
-                  <a:t>tabela-Q</a:t>
-                </a:r>
-                <a:r>
-                  <a:rPr lang="pt-BR" dirty="0">
-                    <a:solidFill>
-                      <a:srgbClr val="FF0000"/>
-                    </a:solidFill>
-                  </a:rPr>
-                  <a:t> é uma representação discreta da </a:t>
-                </a:r>
-                <a:r>
-                  <a:rPr lang="pt-BR" b="1" dirty="0">
-                    <a:solidFill>
-                      <a:srgbClr val="FF0000"/>
-                    </a:solidFill>
-                  </a:rPr>
-                  <a:t>função </a:t>
-                </a:r>
-                <a:r>
-                  <a:rPr lang="en-US" b="1" dirty="0">
-                    <a:solidFill>
-                      <a:srgbClr val="FF0000"/>
-                    </a:solidFill>
-                  </a:rPr>
-                  <a:t>valor-</a:t>
-                </a:r>
-                <a:r>
-                  <a:rPr lang="en-US" b="1" dirty="0" err="1">
-                    <a:solidFill>
-                      <a:srgbClr val="FF0000"/>
-                    </a:solidFill>
-                  </a:rPr>
-                  <a:t>ação</a:t>
-                </a:r>
-                <a:r>
-                  <a:rPr lang="pt-BR" dirty="0">
-                    <a:solidFill>
-                      <a:srgbClr val="FF0000"/>
-                    </a:solidFill>
-                  </a:rPr>
-                  <a:t> onde cada entrada armazena um valor para um par estado–ação.</a:t>
-                </a:r>
-              </a:p>
-              <a:p>
-                <a:endParaRPr lang="pt-BR" dirty="0">
-                  <a:solidFill>
-                    <a:srgbClr val="FF0000"/>
-                  </a:solidFill>
-                </a:endParaRPr>
-              </a:p>
-              <a:p>
-                <a:r>
-                  <a:rPr lang="pt-BR" dirty="0">
-                    <a:solidFill>
-                      <a:srgbClr val="FF0000"/>
-                    </a:solidFill>
-                  </a:rPr>
-                  <a:t>O objetivo do algoritmo é preencher esta tabela com os melhores valores possíveis para servir como uma "cola" (</a:t>
-                </a:r>
-                <a:r>
-                  <a:rPr lang="pt-BR" i="1" dirty="0" err="1">
-                    <a:solidFill>
-                      <a:srgbClr val="FF0000"/>
-                    </a:solidFill>
-                  </a:rPr>
-                  <a:t>cheat</a:t>
-                </a:r>
-                <a:r>
-                  <a:rPr lang="pt-BR" i="1" dirty="0">
-                    <a:solidFill>
-                      <a:srgbClr val="FF0000"/>
-                    </a:solidFill>
-                  </a:rPr>
-                  <a:t> </a:t>
-                </a:r>
-                <a:r>
-                  <a:rPr lang="pt-BR" i="1" dirty="0" err="1">
-                    <a:solidFill>
-                      <a:srgbClr val="FF0000"/>
-                    </a:solidFill>
-                  </a:rPr>
-                  <a:t>sheet</a:t>
-                </a:r>
-                <a:r>
-                  <a:rPr lang="pt-BR" dirty="0">
-                    <a:solidFill>
-                      <a:srgbClr val="FF0000"/>
-                    </a:solidFill>
-                  </a:rPr>
-                  <a:t>) para o agente, guiando-se para a </a:t>
-                </a:r>
-                <a:r>
-                  <a:rPr lang="en-US" altLang="en-US" dirty="0" err="1">
-                    <a:solidFill>
-                      <a:srgbClr val="FF0000"/>
-                    </a:solidFill>
-                    <a:latin typeface="Google Sans Text"/>
-                  </a:rPr>
-                  <a:t>melhor</a:t>
-                </a:r>
-                <a:r>
-                  <a:rPr lang="en-US" altLang="en-US" dirty="0">
-                    <a:solidFill>
-                      <a:srgbClr val="FF0000"/>
-                    </a:solidFill>
-                    <a:latin typeface="Google Sans Text"/>
-                  </a:rPr>
-                  <a:t> </a:t>
-                </a:r>
-                <a:r>
-                  <a:rPr lang="en-US" altLang="en-US" dirty="0" err="1">
-                    <a:solidFill>
-                      <a:srgbClr val="FF0000"/>
-                    </a:solidFill>
-                    <a:latin typeface="Google Sans Text"/>
-                  </a:rPr>
-                  <a:t>decisão</a:t>
-                </a:r>
-                <a:r>
-                  <a:rPr lang="en-US" altLang="en-US" dirty="0">
-                    <a:solidFill>
-                      <a:srgbClr val="FF0000"/>
-                    </a:solidFill>
-                    <a:latin typeface="Google Sans Text"/>
-                  </a:rPr>
-                  <a:t> sempre.</a:t>
+                  <a:rPr lang="pt-BR" dirty="0"/>
+                  <a:t>As linhas são os estados e as colunas são as ações.</a:t>
                 </a:r>
               </a:p>
             </p:txBody>
@@ -6524,12 +6463,12 @@
             <p:spPr>
               <a:xfrm>
                 <a:off x="838200" y="1825625"/>
-                <a:ext cx="11255829" cy="5032375"/>
+                <a:ext cx="11277600" cy="5032375"/>
               </a:xfrm>
               <a:blipFill>
                 <a:blip r:embed="rId3"/>
                 <a:stretch>
-                  <a:fillRect l="-867" t="-3027" r="-1029" b="-2663"/>
+                  <a:fillRect l="-973" t="-1937" r="-649"/>
                 </a:stretch>
               </a:blipFill>
             </p:spPr>
@@ -6566,7 +6505,13 @@
   <p:cSld>
     <p:spTree>
       <p:nvGrpSpPr>
-        <p:cNvPr id="1" name=""/>
+        <p:cNvPr id="1" name="">
+          <a:extLst>
+            <a:ext uri="{FF2B5EF4-FFF2-40B4-BE49-F238E27FC236}">
+              <a16:creationId xmlns:a16="http://schemas.microsoft.com/office/drawing/2014/main" id="{E22219F2-045D-7C64-9A87-54D2232BDD3E}"/>
+            </a:ext>
+          </a:extLst>
+        </p:cNvPr>
         <p:cNvGrpSpPr/>
         <p:nvPr/>
       </p:nvGrpSpPr>
@@ -6583,7 +6528,7 @@
           <p:cNvPr id="2" name="Title 1">
             <a:extLst>
               <a:ext uri="{FF2B5EF4-FFF2-40B4-BE49-F238E27FC236}">
-                <a16:creationId xmlns:a16="http://schemas.microsoft.com/office/drawing/2014/main" id="{874F2722-DA1E-D930-DC99-59F795E3E8B9}"/>
+                <a16:creationId xmlns:a16="http://schemas.microsoft.com/office/drawing/2014/main" id="{C7EA5E16-B19C-BA31-7BEC-009E02E41E13}"/>
               </a:ext>
             </a:extLst>
           </p:cNvPr>
@@ -6599,7 +6544,10 @@
           <a:bodyPr/>
           <a:lstStyle/>
           <a:p>
-            <a:endParaRPr lang="en-US"/>
+            <a:r>
+              <a:rPr lang="pt-BR" dirty="0"/>
+              <a:t>O que significa o "Q"? </a:t>
+            </a:r>
           </a:p>
         </p:txBody>
       </p:sp>
@@ -6608,7 +6556,7 @@
           <p:cNvPr id="3" name="Content Placeholder 2">
             <a:extLst>
               <a:ext uri="{FF2B5EF4-FFF2-40B4-BE49-F238E27FC236}">
-                <a16:creationId xmlns:a16="http://schemas.microsoft.com/office/drawing/2014/main" id="{97BD2D05-0E48-B94D-DBC7-FBDCBC17C0A5}"/>
+                <a16:creationId xmlns:a16="http://schemas.microsoft.com/office/drawing/2014/main" id="{2D34463B-65B5-66E6-8A30-437FFFA8DEFA}"/>
               </a:ext>
             </a:extLst>
           </p:cNvPr>
@@ -6619,7 +6567,12 @@
             <p:ph idx="1"/>
           </p:nvPr>
         </p:nvSpPr>
-        <p:spPr/>
+        <p:spPr>
+          <a:xfrm>
+            <a:off x="838200" y="1825625"/>
+            <a:ext cx="11255829" cy="5032375"/>
+          </a:xfrm>
+        </p:spPr>
         <p:txBody>
           <a:bodyPr>
             <a:normAutofit/>
@@ -6627,25 +6580,74 @@
           <a:lstStyle/>
           <a:p>
             <a:r>
-              <a:rPr lang="pt-BR" sz="5400" b="1" dirty="0">
-                <a:solidFill>
-                  <a:srgbClr val="FF0000"/>
-                </a:solidFill>
-              </a:rPr>
-              <a:t>PAREI AQUI!!!!!!!!!!!!</a:t>
-            </a:r>
-            <a:endParaRPr lang="en-US" sz="5400" b="1" dirty="0">
+              <a:rPr lang="pt-BR" dirty="0"/>
+              <a:t>Cada entrada da tabela armazena um valor de qualidade para um par estado-ação.</a:t>
+            </a:r>
+            <a:endParaRPr lang="pt-BR" dirty="0">
               <a:solidFill>
                 <a:srgbClr val="FF0000"/>
               </a:solidFill>
             </a:endParaRPr>
           </a:p>
-        </p:txBody>
-      </p:sp>
+          <a:p>
+            <a:r>
+              <a:rPr lang="pt-BR" dirty="0"/>
+              <a:t>O objetivo do algoritmo é preencher a tabela com os valores que façam o agente escolher a melhor ação sempre.</a:t>
+            </a:r>
+          </a:p>
+        </p:txBody>
+      </p:sp>
+      <p:pic>
+        <p:nvPicPr>
+          <p:cNvPr id="2050" name="Picture 2" descr="Q-Learning vs. Deep Q-Learning vs. Deep Q-Network | Baeldung on Computer  Science">
+            <a:extLst>
+              <a:ext uri="{FF2B5EF4-FFF2-40B4-BE49-F238E27FC236}">
+                <a16:creationId xmlns:a16="http://schemas.microsoft.com/office/drawing/2014/main" id="{271A5777-6004-9B57-95BB-06526F57C817}"/>
+              </a:ext>
+            </a:extLst>
+          </p:cNvPr>
+          <p:cNvPicPr>
+            <a:picLocks noChangeAspect="1" noChangeArrowheads="1"/>
+          </p:cNvPicPr>
+          <p:nvPr/>
+        </p:nvPicPr>
+        <p:blipFill>
+          <a:blip r:embed="rId3">
+            <a:extLst>
+              <a:ext uri="{28A0092B-C50C-407E-A947-70E740481C1C}">
+                <a14:useLocalDpi xmlns:a14="http://schemas.microsoft.com/office/drawing/2010/main" val="0"/>
+              </a:ext>
+            </a:extLst>
+          </a:blip>
+          <a:srcRect/>
+          <a:stretch>
+            <a:fillRect/>
+          </a:stretch>
+        </p:blipFill>
+        <p:spPr bwMode="auto">
+          <a:xfrm>
+            <a:off x="2950508" y="3581401"/>
+            <a:ext cx="6290983" cy="3200400"/>
+          </a:xfrm>
+          <a:prstGeom prst="rect">
+            <a:avLst/>
+          </a:prstGeom>
+          <a:noFill/>
+          <a:extLst>
+            <a:ext uri="{909E8E84-426E-40DD-AFC4-6F175D3DCCD1}">
+              <a14:hiddenFill xmlns:a14="http://schemas.microsoft.com/office/drawing/2010/main">
+                <a:solidFill>
+                  <a:srgbClr val="FFFFFF"/>
+                </a:solidFill>
+              </a14:hiddenFill>
+            </a:ext>
+          </a:extLst>
+        </p:spPr>
+      </p:pic>
     </p:spTree>
     <p:extLst>
       <p:ext uri="{BB962C8B-B14F-4D97-AF65-F5344CB8AC3E}">
-        <p14:creationId xmlns:p14="http://schemas.microsoft.com/office/powerpoint/2010/main" val="3079050531"/>
+        <p14:creationId xmlns:p14="http://schemas.microsoft.com/office/powerpoint/2010/main" val="2805824212"/>
       </p:ext>
     </p:extLst>
   </p:cSld>
@@ -6677,7 +6679,7 @@
           <p:cNvPr id="2" name="Title 1">
             <a:extLst>
               <a:ext uri="{FF2B5EF4-FFF2-40B4-BE49-F238E27FC236}">
-                <a16:creationId xmlns:a16="http://schemas.microsoft.com/office/drawing/2014/main" id="{7091E349-E10B-155D-AA4C-5C644F1CA204}"/>
+                <a16:creationId xmlns:a16="http://schemas.microsoft.com/office/drawing/2014/main" id="{874F2722-DA1E-D930-DC99-59F795E3E8B9}"/>
               </a:ext>
             </a:extLst>
           </p:cNvPr>
@@ -6702,7 +6704,7 @@
           <p:cNvPr id="3" name="Content Placeholder 2">
             <a:extLst>
               <a:ext uri="{FF2B5EF4-FFF2-40B4-BE49-F238E27FC236}">
-                <a16:creationId xmlns:a16="http://schemas.microsoft.com/office/drawing/2014/main" id="{A98E7639-2B44-D877-80E8-CB165DA3670E}"/>
+                <a16:creationId xmlns:a16="http://schemas.microsoft.com/office/drawing/2014/main" id="{97BD2D05-0E48-B94D-DBC7-FBDCBC17C0A5}"/>
               </a:ext>
             </a:extLst>
           </p:cNvPr>
@@ -6715,17 +6717,31 @@
         </p:nvSpPr>
         <p:spPr/>
         <p:txBody>
-          <a:bodyPr/>
+          <a:bodyPr>
+            <a:normAutofit/>
+          </a:bodyPr>
           <a:lstStyle/>
           <a:p>
-            <a:endParaRPr lang="en-US"/>
+            <a:r>
+              <a:rPr lang="pt-BR" sz="5400" b="1" dirty="0">
+                <a:solidFill>
+                  <a:srgbClr val="FF0000"/>
+                </a:solidFill>
+              </a:rPr>
+              <a:t>PAREI AQUI!!!!!!!!!!!!</a:t>
+            </a:r>
+            <a:endParaRPr lang="en-US" sz="5400" b="1" dirty="0">
+              <a:solidFill>
+                <a:srgbClr val="FF0000"/>
+              </a:solidFill>
+            </a:endParaRPr>
           </a:p>
         </p:txBody>
       </p:sp>
     </p:spTree>
     <p:extLst>
       <p:ext uri="{BB962C8B-B14F-4D97-AF65-F5344CB8AC3E}">
-        <p14:creationId xmlns:p14="http://schemas.microsoft.com/office/powerpoint/2010/main" val="2527015132"/>
+        <p14:creationId xmlns:p14="http://schemas.microsoft.com/office/powerpoint/2010/main" val="3079050531"/>
       </p:ext>
     </p:extLst>
   </p:cSld>
@@ -6757,7 +6773,7 @@
           <p:cNvPr id="2" name="Title 1">
             <a:extLst>
               <a:ext uri="{FF2B5EF4-FFF2-40B4-BE49-F238E27FC236}">
-                <a16:creationId xmlns:a16="http://schemas.microsoft.com/office/drawing/2014/main" id="{4E821798-FD00-A004-B931-C70303D79D4A}"/>
+                <a16:creationId xmlns:a16="http://schemas.microsoft.com/office/drawing/2014/main" id="{7091E349-E10B-155D-AA4C-5C644F1CA204}"/>
               </a:ext>
             </a:extLst>
           </p:cNvPr>
@@ -6782,7 +6798,7 @@
           <p:cNvPr id="3" name="Content Placeholder 2">
             <a:extLst>
               <a:ext uri="{FF2B5EF4-FFF2-40B4-BE49-F238E27FC236}">
-                <a16:creationId xmlns:a16="http://schemas.microsoft.com/office/drawing/2014/main" id="{82794FEF-22E1-5F51-3E57-B993C6FCF088}"/>
+                <a16:creationId xmlns:a16="http://schemas.microsoft.com/office/drawing/2014/main" id="{A98E7639-2B44-D877-80E8-CB165DA3670E}"/>
               </a:ext>
             </a:extLst>
           </p:cNvPr>
@@ -6793,1027 +6809,20 @@
             <p:ph idx="1"/>
           </p:nvPr>
         </p:nvSpPr>
-        <p:spPr/>
-        <p:txBody>
-          <a:bodyPr>
-            <a:normAutofit fontScale="77500" lnSpcReduction="20000"/>
-          </a:bodyPr>
+        <p:spPr>
+          <a:xfrm>
+            <a:off x="6096000" y="1825625"/>
+            <a:ext cx="5257800" cy="4351338"/>
+          </a:xfrm>
+        </p:spPr>
+        <p:txBody>
+          <a:bodyPr/>
           <a:lstStyle/>
           <a:p>
-            <a:pPr marL="0" lvl="0" indent="0" eaLnBrk="0" fontAlgn="base" hangingPunct="0">
-              <a:lnSpc>
-                <a:spcPct val="100000"/>
-              </a:lnSpc>
-              <a:spcBef>
-                <a:spcPct val="0"/>
-              </a:spcBef>
-              <a:spcAft>
-                <a:spcPct val="0"/>
-              </a:spcAft>
-              <a:buFontTx/>
-              <a:buChar char="•"/>
-            </a:pPr>
-            <a:r>
-              <a:rPr lang="en-US" altLang="en-US" b="1" dirty="0" err="1">
-                <a:latin typeface="Google Sans Text"/>
-              </a:rPr>
-              <a:t>Título</a:t>
-            </a:r>
-            <a:r>
-              <a:rPr lang="en-US" altLang="en-US" b="1" dirty="0">
-                <a:latin typeface="Google Sans Text"/>
-              </a:rPr>
-              <a:t>:</a:t>
-            </a:r>
-            <a:r>
-              <a:rPr lang="en-US" altLang="en-US" dirty="0">
-                <a:latin typeface="Google Sans Text"/>
-              </a:rPr>
-              <a:t> O </a:t>
-            </a:r>
-            <a:r>
-              <a:rPr lang="en-US" altLang="en-US" dirty="0" err="1">
-                <a:latin typeface="Google Sans Text"/>
-              </a:rPr>
-              <a:t>que</a:t>
-            </a:r>
-            <a:r>
-              <a:rPr lang="en-US" altLang="en-US" dirty="0">
-                <a:latin typeface="Google Sans Text"/>
-              </a:rPr>
-              <a:t> </a:t>
-            </a:r>
-            <a:r>
-              <a:rPr lang="en-US" altLang="en-US" dirty="0" err="1">
-                <a:latin typeface="Google Sans Text"/>
-              </a:rPr>
-              <a:t>significa</a:t>
-            </a:r>
-            <a:r>
-              <a:rPr lang="en-US" altLang="en-US" dirty="0">
-                <a:latin typeface="Google Sans Text"/>
-              </a:rPr>
-              <a:t> o "Q"?</a:t>
-            </a:r>
-          </a:p>
-          <a:p>
-            <a:pPr marL="0" lvl="0" indent="0" eaLnBrk="0" fontAlgn="base" hangingPunct="0">
-              <a:lnSpc>
-                <a:spcPct val="100000"/>
-              </a:lnSpc>
-              <a:spcBef>
-                <a:spcPct val="0"/>
-              </a:spcBef>
-              <a:spcAft>
-                <a:spcPct val="0"/>
-              </a:spcAft>
-              <a:buFontTx/>
-              <a:buChar char="•"/>
-            </a:pPr>
-            <a:r>
-              <a:rPr lang="en-US" altLang="en-US" b="1" dirty="0" err="1">
-                <a:latin typeface="Google Sans Text"/>
-              </a:rPr>
-              <a:t>Conteúdo</a:t>
-            </a:r>
-            <a:r>
-              <a:rPr lang="en-US" altLang="en-US" b="1" dirty="0">
-                <a:latin typeface="Google Sans Text"/>
-              </a:rPr>
-              <a:t>:</a:t>
-            </a:r>
-            <a:endParaRPr lang="en-US" altLang="en-US" dirty="0">
-              <a:latin typeface="Google Sans Text"/>
-            </a:endParaRPr>
-          </a:p>
-          <a:p>
-            <a:pPr marL="0" lvl="0" indent="0" eaLnBrk="0" fontAlgn="base" hangingPunct="0">
-              <a:lnSpc>
-                <a:spcPct val="100000"/>
-              </a:lnSpc>
-              <a:spcBef>
-                <a:spcPct val="0"/>
-              </a:spcBef>
-              <a:spcAft>
-                <a:spcPct val="0"/>
-              </a:spcAft>
-              <a:buFontTx/>
-              <a:buChar char="•"/>
-            </a:pPr>
-            <a:r>
-              <a:rPr lang="en-US" altLang="en-US" b="1" dirty="0">
-                <a:latin typeface="Google Sans Text"/>
-              </a:rPr>
-              <a:t>Q = Quality (</a:t>
-            </a:r>
-            <a:r>
-              <a:rPr lang="en-US" altLang="en-US" b="1" dirty="0" err="1">
-                <a:latin typeface="Google Sans Text"/>
-              </a:rPr>
-              <a:t>Qualidade</a:t>
-            </a:r>
-            <a:r>
-              <a:rPr lang="en-US" altLang="en-US" b="1" dirty="0">
-                <a:latin typeface="Google Sans Text"/>
-              </a:rPr>
-              <a:t>):</a:t>
-            </a:r>
-            <a:r>
-              <a:rPr lang="en-US" altLang="en-US" dirty="0">
-                <a:latin typeface="Google Sans Text"/>
-              </a:rPr>
-              <a:t> </a:t>
-            </a:r>
-            <a:r>
-              <a:rPr lang="en-US" altLang="en-US" dirty="0" err="1">
-                <a:latin typeface="Google Sans Text"/>
-              </a:rPr>
-              <a:t>Representa</a:t>
-            </a:r>
-            <a:r>
-              <a:rPr lang="en-US" altLang="en-US" dirty="0">
-                <a:latin typeface="Google Sans Text"/>
-              </a:rPr>
-              <a:t> o </a:t>
-            </a:r>
-            <a:r>
-              <a:rPr lang="en-US" altLang="en-US" dirty="0" err="1">
-                <a:latin typeface="Google Sans Text"/>
-              </a:rPr>
-              <a:t>quão</a:t>
-            </a:r>
-            <a:r>
-              <a:rPr lang="en-US" altLang="en-US" dirty="0">
-                <a:latin typeface="Google Sans Text"/>
-              </a:rPr>
-              <a:t> boa é </a:t>
-            </a:r>
-            <a:r>
-              <a:rPr lang="en-US" altLang="en-US" dirty="0" err="1">
-                <a:latin typeface="Google Sans Text"/>
-              </a:rPr>
-              <a:t>uma</a:t>
-            </a:r>
-            <a:r>
-              <a:rPr lang="en-US" altLang="en-US" dirty="0">
-                <a:latin typeface="Google Sans Text"/>
-              </a:rPr>
-              <a:t> </a:t>
-            </a:r>
-            <a:r>
-              <a:rPr lang="en-US" altLang="en-US" dirty="0" err="1">
-                <a:latin typeface="Google Sans Text"/>
-              </a:rPr>
-              <a:t>determinada</a:t>
-            </a:r>
-            <a:r>
-              <a:rPr lang="en-US" altLang="en-US" dirty="0">
-                <a:latin typeface="Google Sans Text"/>
-              </a:rPr>
-              <a:t> </a:t>
-            </a:r>
-            <a:r>
-              <a:rPr lang="en-US" altLang="en-US" dirty="0" err="1">
-                <a:latin typeface="Google Sans Text"/>
-              </a:rPr>
-              <a:t>ação</a:t>
-            </a:r>
-            <a:r>
-              <a:rPr lang="en-US" altLang="en-US" dirty="0">
-                <a:latin typeface="Google Sans Text"/>
-              </a:rPr>
-              <a:t> </a:t>
-            </a:r>
-            <a:r>
-              <a:rPr lang="en-US" altLang="en-US" dirty="0" err="1">
-                <a:latin typeface="Google Sans Text"/>
-              </a:rPr>
-              <a:t>em</a:t>
-            </a:r>
-            <a:r>
-              <a:rPr lang="en-US" altLang="en-US" dirty="0">
-                <a:latin typeface="Google Sans Text"/>
-              </a:rPr>
-              <a:t> um </a:t>
-            </a:r>
-            <a:r>
-              <a:rPr lang="en-US" altLang="en-US" dirty="0" err="1">
-                <a:latin typeface="Google Sans Text"/>
-              </a:rPr>
-              <a:t>estado</a:t>
-            </a:r>
-            <a:r>
-              <a:rPr lang="en-US" altLang="en-US" dirty="0">
-                <a:latin typeface="Google Sans Text"/>
-              </a:rPr>
-              <a:t> </a:t>
-            </a:r>
-            <a:r>
-              <a:rPr lang="en-US" altLang="en-US" dirty="0" err="1">
-                <a:latin typeface="Google Sans Text"/>
-              </a:rPr>
-              <a:t>específico</a:t>
-            </a:r>
-            <a:r>
-              <a:rPr lang="en-US" altLang="en-US" dirty="0">
-                <a:latin typeface="Google Sans Text"/>
-              </a:rPr>
-              <a:t>.</a:t>
-            </a:r>
-          </a:p>
-          <a:p>
-            <a:pPr marL="0" lvl="0" indent="0" eaLnBrk="0" fontAlgn="base" hangingPunct="0">
-              <a:lnSpc>
-                <a:spcPct val="100000"/>
-              </a:lnSpc>
-              <a:spcBef>
-                <a:spcPct val="0"/>
-              </a:spcBef>
-              <a:spcAft>
-                <a:spcPct val="0"/>
-              </a:spcAft>
-              <a:buFontTx/>
-              <a:buChar char="•"/>
-            </a:pPr>
-            <a:r>
-              <a:rPr lang="en-US" altLang="en-US" b="1" dirty="0">
-                <a:latin typeface="Google Sans Text"/>
-              </a:rPr>
-              <a:t>A </a:t>
-            </a:r>
-            <a:r>
-              <a:rPr lang="en-US" altLang="en-US" b="1" dirty="0" err="1">
-                <a:latin typeface="Google Sans Text"/>
-              </a:rPr>
-              <a:t>Função</a:t>
-            </a:r>
-            <a:r>
-              <a:rPr lang="en-US" altLang="en-US" b="1" dirty="0">
-                <a:latin typeface="Google Sans Text"/>
-              </a:rPr>
-              <a:t> $Q(s, a)$:</a:t>
-            </a:r>
-            <a:r>
-              <a:rPr lang="en-US" altLang="en-US" dirty="0">
-                <a:latin typeface="Google Sans Text"/>
-              </a:rPr>
-              <a:t> É o </a:t>
-            </a:r>
-            <a:r>
-              <a:rPr lang="en-US" altLang="en-US" dirty="0" err="1">
-                <a:latin typeface="Google Sans Text"/>
-              </a:rPr>
-              <a:t>retorno</a:t>
-            </a:r>
-            <a:r>
-              <a:rPr lang="en-US" altLang="en-US" dirty="0">
-                <a:latin typeface="Google Sans Text"/>
-              </a:rPr>
-              <a:t> </a:t>
-            </a:r>
-            <a:r>
-              <a:rPr lang="en-US" altLang="en-US" dirty="0" err="1">
-                <a:latin typeface="Google Sans Text"/>
-              </a:rPr>
-              <a:t>esperado</a:t>
-            </a:r>
-            <a:r>
-              <a:rPr lang="en-US" altLang="en-US" dirty="0">
-                <a:latin typeface="Google Sans Text"/>
-              </a:rPr>
-              <a:t> (soma das </a:t>
-            </a:r>
-            <a:r>
-              <a:rPr lang="en-US" altLang="en-US" dirty="0" err="1">
-                <a:latin typeface="Google Sans Text"/>
-              </a:rPr>
-              <a:t>recompensas</a:t>
-            </a:r>
-            <a:r>
-              <a:rPr lang="en-US" altLang="en-US" dirty="0">
-                <a:latin typeface="Google Sans Text"/>
-              </a:rPr>
-              <a:t> </a:t>
-            </a:r>
-            <a:r>
-              <a:rPr lang="en-US" altLang="en-US" dirty="0" err="1">
-                <a:latin typeface="Google Sans Text"/>
-              </a:rPr>
-              <a:t>futuras</a:t>
-            </a:r>
-            <a:r>
-              <a:rPr lang="en-US" altLang="en-US" dirty="0">
-                <a:latin typeface="Google Sans Text"/>
-              </a:rPr>
-              <a:t>) se o </a:t>
-            </a:r>
-            <a:r>
-              <a:rPr lang="en-US" altLang="en-US" dirty="0" err="1">
-                <a:latin typeface="Google Sans Text"/>
-              </a:rPr>
-              <a:t>agente</a:t>
-            </a:r>
-            <a:r>
-              <a:rPr lang="en-US" altLang="en-US" dirty="0">
-                <a:latin typeface="Google Sans Text"/>
-              </a:rPr>
-              <a:t> </a:t>
-            </a:r>
-            <a:r>
-              <a:rPr lang="en-US" altLang="en-US" dirty="0" err="1">
-                <a:latin typeface="Google Sans Text"/>
-              </a:rPr>
-              <a:t>estiver</a:t>
-            </a:r>
-            <a:r>
-              <a:rPr lang="en-US" altLang="en-US" dirty="0">
-                <a:latin typeface="Google Sans Text"/>
-              </a:rPr>
-              <a:t> no </a:t>
-            </a:r>
-            <a:r>
-              <a:rPr lang="en-US" altLang="en-US" dirty="0" err="1">
-                <a:latin typeface="Google Sans Text"/>
-              </a:rPr>
-              <a:t>estado</a:t>
-            </a:r>
-            <a:r>
-              <a:rPr lang="en-US" altLang="en-US" dirty="0">
-                <a:latin typeface="Google Sans Text"/>
-              </a:rPr>
-              <a:t> $s$, </a:t>
-            </a:r>
-            <a:r>
-              <a:rPr lang="en-US" altLang="en-US" dirty="0" err="1">
-                <a:latin typeface="Google Sans Text"/>
-              </a:rPr>
-              <a:t>escolher</a:t>
-            </a:r>
-            <a:r>
-              <a:rPr lang="en-US" altLang="en-US" dirty="0">
-                <a:latin typeface="Google Sans Text"/>
-              </a:rPr>
-              <a:t> a </a:t>
-            </a:r>
-            <a:r>
-              <a:rPr lang="en-US" altLang="en-US" dirty="0" err="1">
-                <a:latin typeface="Google Sans Text"/>
-              </a:rPr>
-              <a:t>ação</a:t>
-            </a:r>
-            <a:r>
-              <a:rPr lang="en-US" altLang="en-US" dirty="0">
-                <a:latin typeface="Google Sans Text"/>
-              </a:rPr>
-              <a:t> $a$ e, a </a:t>
-            </a:r>
-            <a:r>
-              <a:rPr lang="en-US" altLang="en-US" dirty="0" err="1">
-                <a:latin typeface="Google Sans Text"/>
-              </a:rPr>
-              <a:t>partir</a:t>
-            </a:r>
-            <a:r>
-              <a:rPr lang="en-US" altLang="en-US" dirty="0">
-                <a:latin typeface="Google Sans Text"/>
-              </a:rPr>
-              <a:t> </a:t>
-            </a:r>
-            <a:r>
-              <a:rPr lang="en-US" altLang="en-US" dirty="0" err="1">
-                <a:latin typeface="Google Sans Text"/>
-              </a:rPr>
-              <a:t>daí</a:t>
-            </a:r>
-            <a:r>
-              <a:rPr lang="en-US" altLang="en-US" dirty="0">
-                <a:latin typeface="Google Sans Text"/>
-              </a:rPr>
-              <a:t>, </a:t>
-            </a:r>
-            <a:r>
-              <a:rPr lang="en-US" altLang="en-US" dirty="0" err="1">
-                <a:latin typeface="Google Sans Text"/>
-              </a:rPr>
-              <a:t>agir</a:t>
-            </a:r>
-            <a:r>
-              <a:rPr lang="en-US" altLang="en-US" dirty="0">
-                <a:latin typeface="Google Sans Text"/>
-              </a:rPr>
-              <a:t> de forma </a:t>
-            </a:r>
-            <a:r>
-              <a:rPr lang="en-US" altLang="en-US" dirty="0" err="1">
-                <a:latin typeface="Google Sans Text"/>
-              </a:rPr>
-              <a:t>otimizada</a:t>
-            </a:r>
-            <a:r>
-              <a:rPr lang="en-US" altLang="en-US" dirty="0">
-                <a:latin typeface="Google Sans Text"/>
-              </a:rPr>
-              <a:t>.</a:t>
-            </a:r>
-          </a:p>
-          <a:p>
-            <a:pPr marL="0" lvl="0" indent="0" eaLnBrk="0" fontAlgn="base" hangingPunct="0">
-              <a:lnSpc>
-                <a:spcPct val="100000"/>
-              </a:lnSpc>
-              <a:spcBef>
-                <a:spcPct val="0"/>
-              </a:spcBef>
-              <a:spcAft>
-                <a:spcPct val="0"/>
-              </a:spcAft>
-              <a:buFontTx/>
-              <a:buChar char="•"/>
-            </a:pPr>
-            <a:r>
-              <a:rPr lang="en-US" altLang="en-US" b="1" dirty="0" err="1">
-                <a:latin typeface="Google Sans Text"/>
-              </a:rPr>
-              <a:t>Objetivo</a:t>
-            </a:r>
-            <a:r>
-              <a:rPr lang="en-US" altLang="en-US" b="1" dirty="0">
-                <a:latin typeface="Google Sans Text"/>
-              </a:rPr>
-              <a:t>:</a:t>
-            </a:r>
-            <a:r>
-              <a:rPr lang="en-US" altLang="en-US" dirty="0">
-                <a:latin typeface="Google Sans Text"/>
-              </a:rPr>
-              <a:t> </a:t>
-            </a:r>
-            <a:r>
-              <a:rPr lang="en-US" altLang="en-US" dirty="0" err="1">
-                <a:latin typeface="Google Sans Text"/>
-              </a:rPr>
-              <a:t>Encontrar</a:t>
-            </a:r>
-            <a:r>
-              <a:rPr lang="en-US" altLang="en-US" dirty="0">
-                <a:latin typeface="Google Sans Text"/>
-              </a:rPr>
-              <a:t> a </a:t>
-            </a:r>
-            <a:r>
-              <a:rPr lang="en-US" altLang="en-US" dirty="0" err="1">
-                <a:latin typeface="Google Sans Text"/>
-              </a:rPr>
-              <a:t>função</a:t>
-            </a:r>
-            <a:r>
-              <a:rPr lang="en-US" altLang="en-US" dirty="0">
-                <a:latin typeface="Google Sans Text"/>
-              </a:rPr>
-              <a:t> Q ideal </a:t>
-            </a:r>
-            <a:r>
-              <a:rPr lang="en-US" altLang="en-US" dirty="0" err="1">
-                <a:latin typeface="Google Sans Text"/>
-              </a:rPr>
-              <a:t>que</a:t>
-            </a:r>
-            <a:r>
-              <a:rPr lang="en-US" altLang="en-US" dirty="0">
-                <a:latin typeface="Google Sans Text"/>
-              </a:rPr>
-              <a:t> </a:t>
-            </a:r>
-            <a:r>
-              <a:rPr lang="en-US" altLang="en-US" dirty="0" err="1">
-                <a:latin typeface="Google Sans Text"/>
-              </a:rPr>
-              <a:t>guie</a:t>
-            </a:r>
-            <a:r>
-              <a:rPr lang="en-US" altLang="en-US" dirty="0">
-                <a:latin typeface="Google Sans Text"/>
-              </a:rPr>
-              <a:t> o </a:t>
-            </a:r>
-            <a:r>
-              <a:rPr lang="en-US" altLang="en-US" dirty="0" err="1">
-                <a:latin typeface="Google Sans Text"/>
-              </a:rPr>
-              <a:t>agente</a:t>
-            </a:r>
-            <a:r>
-              <a:rPr lang="en-US" altLang="en-US" dirty="0">
-                <a:latin typeface="Google Sans Text"/>
-              </a:rPr>
-              <a:t> para a </a:t>
-            </a:r>
-            <a:r>
-              <a:rPr lang="en-US" altLang="en-US" dirty="0" err="1">
-                <a:latin typeface="Google Sans Text"/>
-              </a:rPr>
-              <a:t>melhor</a:t>
-            </a:r>
-            <a:r>
-              <a:rPr lang="en-US" altLang="en-US" dirty="0">
-                <a:latin typeface="Google Sans Text"/>
-              </a:rPr>
-              <a:t> </a:t>
-            </a:r>
-            <a:r>
-              <a:rPr lang="en-US" altLang="en-US" dirty="0" err="1">
-                <a:latin typeface="Google Sans Text"/>
-              </a:rPr>
-              <a:t>decisão</a:t>
-            </a:r>
-            <a:r>
-              <a:rPr lang="en-US" altLang="en-US" dirty="0">
-                <a:latin typeface="Google Sans Text"/>
-              </a:rPr>
-              <a:t> sempre.</a:t>
-            </a:r>
-          </a:p>
-          <a:p>
-            <a:pPr marL="0" lvl="0" indent="0" eaLnBrk="0" fontAlgn="base" hangingPunct="0">
-              <a:lnSpc>
-                <a:spcPct val="100000"/>
-              </a:lnSpc>
-              <a:spcBef>
-                <a:spcPct val="0"/>
-              </a:spcBef>
-              <a:spcAft>
-                <a:spcPct val="0"/>
-              </a:spcAft>
-              <a:buFontTx/>
-              <a:buChar char="•"/>
-            </a:pPr>
-            <a:r>
-              <a:rPr lang="en-US" altLang="en-US" b="1" dirty="0" err="1">
-                <a:latin typeface="Google Sans Text"/>
-              </a:rPr>
-              <a:t>Sugestão</a:t>
-            </a:r>
-            <a:r>
-              <a:rPr lang="en-US" altLang="en-US" b="1" dirty="0">
-                <a:latin typeface="Google Sans Text"/>
-              </a:rPr>
-              <a:t> de </a:t>
-            </a:r>
-            <a:r>
-              <a:rPr lang="en-US" altLang="en-US" b="1" dirty="0" err="1">
-                <a:latin typeface="Google Sans Text"/>
-              </a:rPr>
-              <a:t>Figura</a:t>
-            </a:r>
-            <a:r>
-              <a:rPr lang="en-US" altLang="en-US" b="1" dirty="0">
-                <a:latin typeface="Google Sans Text"/>
-              </a:rPr>
-              <a:t>:</a:t>
-            </a:r>
-            <a:r>
-              <a:rPr lang="en-US" altLang="en-US" dirty="0">
-                <a:latin typeface="Google Sans Text"/>
-              </a:rPr>
-              <a:t> Uma </a:t>
-            </a:r>
-            <a:r>
-              <a:rPr lang="en-US" altLang="en-US" dirty="0" err="1">
-                <a:latin typeface="Google Sans Text"/>
-              </a:rPr>
-              <a:t>balança</a:t>
-            </a:r>
-            <a:r>
-              <a:rPr lang="en-US" altLang="en-US" dirty="0">
-                <a:latin typeface="Google Sans Text"/>
-              </a:rPr>
-              <a:t> </a:t>
-            </a:r>
-            <a:r>
-              <a:rPr lang="en-US" altLang="en-US" dirty="0" err="1">
-                <a:latin typeface="Google Sans Text"/>
-              </a:rPr>
-              <a:t>imaginária</a:t>
-            </a:r>
-            <a:r>
-              <a:rPr lang="en-US" altLang="en-US" dirty="0">
-                <a:latin typeface="Google Sans Text"/>
-              </a:rPr>
-              <a:t> </a:t>
-            </a:r>
-            <a:r>
-              <a:rPr lang="en-US" altLang="en-US" dirty="0" err="1">
-                <a:latin typeface="Google Sans Text"/>
-              </a:rPr>
-              <a:t>pesando</a:t>
-            </a:r>
-            <a:r>
-              <a:rPr lang="en-US" altLang="en-US" dirty="0">
-                <a:latin typeface="Google Sans Text"/>
-              </a:rPr>
-              <a:t> </a:t>
-            </a:r>
-            <a:r>
-              <a:rPr lang="en-US" altLang="en-US" dirty="0" err="1">
-                <a:latin typeface="Google Sans Text"/>
-              </a:rPr>
-              <a:t>diferentes</a:t>
-            </a:r>
-            <a:r>
-              <a:rPr lang="en-US" altLang="en-US" dirty="0">
-                <a:latin typeface="Google Sans Text"/>
-              </a:rPr>
-              <a:t> </a:t>
-            </a:r>
-            <a:r>
-              <a:rPr lang="en-US" altLang="en-US" dirty="0" err="1">
-                <a:latin typeface="Google Sans Text"/>
-              </a:rPr>
-              <a:t>ações</a:t>
-            </a:r>
-            <a:r>
-              <a:rPr lang="en-US" altLang="en-US" dirty="0">
-                <a:latin typeface="Google Sans Text"/>
-              </a:rPr>
-              <a:t>, </a:t>
-            </a:r>
-            <a:r>
-              <a:rPr lang="en-US" altLang="en-US" dirty="0" err="1">
-                <a:latin typeface="Google Sans Text"/>
-              </a:rPr>
-              <a:t>onde</a:t>
-            </a:r>
-            <a:r>
-              <a:rPr lang="en-US" altLang="en-US" dirty="0">
-                <a:latin typeface="Google Sans Text"/>
-              </a:rPr>
-              <a:t> a </a:t>
-            </a:r>
-            <a:r>
-              <a:rPr lang="en-US" altLang="en-US" dirty="0" err="1">
-                <a:latin typeface="Google Sans Text"/>
-              </a:rPr>
-              <a:t>ação</a:t>
-            </a:r>
-            <a:r>
-              <a:rPr lang="en-US" altLang="en-US" dirty="0">
-                <a:latin typeface="Google Sans Text"/>
-              </a:rPr>
-              <a:t> com o </a:t>
-            </a:r>
-            <a:r>
-              <a:rPr lang="en-US" altLang="en-US" dirty="0" err="1">
-                <a:latin typeface="Google Sans Text"/>
-              </a:rPr>
-              <a:t>maior</a:t>
-            </a:r>
-            <a:r>
-              <a:rPr lang="en-US" altLang="en-US" dirty="0">
-                <a:latin typeface="Google Sans Text"/>
-              </a:rPr>
-              <a:t> "Q" </a:t>
-            </a:r>
-            <a:r>
-              <a:rPr lang="en-US" altLang="en-US" dirty="0" err="1">
-                <a:latin typeface="Google Sans Text"/>
-              </a:rPr>
-              <a:t>brilha</a:t>
-            </a:r>
-            <a:r>
-              <a:rPr lang="en-US" altLang="en-US" dirty="0">
-                <a:latin typeface="Google Sans Text"/>
-              </a:rPr>
-              <a:t> </a:t>
-            </a:r>
-            <a:r>
-              <a:rPr lang="en-US" altLang="en-US" dirty="0" err="1">
-                <a:latin typeface="Google Sans Text"/>
-              </a:rPr>
-              <a:t>em</a:t>
-            </a:r>
-            <a:r>
-              <a:rPr lang="en-US" altLang="en-US" dirty="0">
-                <a:latin typeface="Google Sans Text"/>
-              </a:rPr>
-              <a:t> </a:t>
-            </a:r>
-            <a:r>
-              <a:rPr lang="en-US" altLang="en-US" dirty="0" err="1">
-                <a:latin typeface="Google Sans Text"/>
-              </a:rPr>
-              <a:t>destaque</a:t>
-            </a:r>
-            <a:r>
-              <a:rPr lang="en-US" altLang="en-US" dirty="0">
-                <a:latin typeface="Google Sans Text"/>
-              </a:rPr>
-              <a:t>.</a:t>
-            </a:r>
-          </a:p>
-          <a:p>
-            <a:pPr marL="0" lvl="0" indent="0" eaLnBrk="0" fontAlgn="base" hangingPunct="0">
-              <a:lnSpc>
-                <a:spcPct val="100000"/>
-              </a:lnSpc>
-              <a:spcBef>
-                <a:spcPct val="0"/>
-              </a:spcBef>
-              <a:spcAft>
-                <a:spcPct val="0"/>
-              </a:spcAft>
-              <a:buFontTx/>
-              <a:buChar char="•"/>
-            </a:pPr>
-            <a:r>
-              <a:rPr lang="en-US" altLang="en-US" b="1" dirty="0" err="1">
-                <a:latin typeface="Google Sans Text"/>
-              </a:rPr>
-              <a:t>Notas</a:t>
-            </a:r>
-            <a:r>
-              <a:rPr lang="en-US" altLang="en-US" b="1" dirty="0">
-                <a:latin typeface="Google Sans Text"/>
-              </a:rPr>
-              <a:t> do Professor:</a:t>
-            </a:r>
-            <a:r>
-              <a:rPr lang="en-US" altLang="en-US" dirty="0">
-                <a:latin typeface="Google Sans Text"/>
-              </a:rPr>
-              <a:t> "Segundo o DASCIN, a </a:t>
-            </a:r>
-            <a:r>
-              <a:rPr lang="en-US" altLang="en-US" dirty="0" err="1">
-                <a:latin typeface="Google Sans Text"/>
-              </a:rPr>
-              <a:t>beleza</a:t>
-            </a:r>
-            <a:r>
-              <a:rPr lang="en-US" altLang="en-US" dirty="0">
-                <a:latin typeface="Google Sans Text"/>
-              </a:rPr>
-              <a:t> do Q-learning é </a:t>
-            </a:r>
-            <a:r>
-              <a:rPr lang="en-US" altLang="en-US" dirty="0" err="1">
-                <a:latin typeface="Google Sans Text"/>
-              </a:rPr>
-              <a:t>mapear</a:t>
-            </a:r>
-            <a:r>
-              <a:rPr lang="en-US" altLang="en-US" dirty="0">
-                <a:latin typeface="Google Sans Text"/>
-              </a:rPr>
-              <a:t> pares </a:t>
-            </a:r>
-            <a:r>
-              <a:rPr lang="en-US" altLang="en-US" dirty="0" err="1">
-                <a:latin typeface="Google Sans Text"/>
-              </a:rPr>
-              <a:t>estado-ação</a:t>
-            </a:r>
-            <a:r>
-              <a:rPr lang="en-US" altLang="en-US" dirty="0">
-                <a:latin typeface="Google Sans Text"/>
-              </a:rPr>
-              <a:t> para um valor </a:t>
-            </a:r>
-            <a:r>
-              <a:rPr lang="en-US" altLang="en-US" dirty="0" err="1">
-                <a:latin typeface="Google Sans Text"/>
-              </a:rPr>
-              <a:t>numérico</a:t>
-            </a:r>
-            <a:r>
-              <a:rPr lang="en-US" altLang="en-US" dirty="0">
-                <a:latin typeface="Google Sans Text"/>
-              </a:rPr>
-              <a:t>. Se o </a:t>
-            </a:r>
-            <a:r>
-              <a:rPr lang="en-US" altLang="en-US" dirty="0" err="1">
-                <a:latin typeface="Google Sans Text"/>
-              </a:rPr>
-              <a:t>seu</a:t>
-            </a:r>
-            <a:r>
-              <a:rPr lang="en-US" altLang="en-US" dirty="0">
-                <a:latin typeface="Google Sans Text"/>
-              </a:rPr>
-              <a:t> </a:t>
-            </a:r>
-            <a:r>
-              <a:rPr lang="en-US" altLang="en-US" dirty="0" err="1">
-                <a:latin typeface="Google Sans Text"/>
-              </a:rPr>
-              <a:t>algoritmo</a:t>
-            </a:r>
-            <a:r>
-              <a:rPr lang="en-US" altLang="en-US" dirty="0">
-                <a:latin typeface="Google Sans Text"/>
-              </a:rPr>
-              <a:t> sabe qual </a:t>
-            </a:r>
-            <a:r>
-              <a:rPr lang="en-US" altLang="en-US" dirty="0" err="1">
-                <a:latin typeface="Google Sans Text"/>
-              </a:rPr>
-              <a:t>ação</a:t>
-            </a:r>
-            <a:r>
-              <a:rPr lang="en-US" altLang="en-US" dirty="0">
-                <a:latin typeface="Google Sans Text"/>
-              </a:rPr>
-              <a:t> </a:t>
-            </a:r>
-            <a:r>
-              <a:rPr lang="en-US" altLang="en-US" dirty="0" err="1">
-                <a:latin typeface="Google Sans Text"/>
-              </a:rPr>
-              <a:t>tem</a:t>
-            </a:r>
-            <a:r>
-              <a:rPr lang="en-US" altLang="en-US" dirty="0">
-                <a:latin typeface="Google Sans Text"/>
-              </a:rPr>
-              <a:t> a </a:t>
-            </a:r>
-            <a:r>
-              <a:rPr lang="en-US" altLang="en-US" dirty="0" err="1">
-                <a:latin typeface="Google Sans Text"/>
-              </a:rPr>
-              <a:t>maior</a:t>
-            </a:r>
-            <a:r>
-              <a:rPr lang="en-US" altLang="en-US" dirty="0">
-                <a:latin typeface="Google Sans Text"/>
-              </a:rPr>
-              <a:t> '</a:t>
-            </a:r>
-            <a:r>
-              <a:rPr lang="en-US" altLang="en-US" dirty="0" err="1">
-                <a:latin typeface="Google Sans Text"/>
-              </a:rPr>
-              <a:t>Qualidade</a:t>
-            </a:r>
-            <a:r>
-              <a:rPr lang="en-US" altLang="en-US" dirty="0">
-                <a:latin typeface="Google Sans Text"/>
-              </a:rPr>
-              <a:t>' para o </a:t>
-            </a:r>
-            <a:r>
-              <a:rPr lang="en-US" altLang="en-US" dirty="0" err="1">
-                <a:latin typeface="Google Sans Text"/>
-              </a:rPr>
-              <a:t>estado</a:t>
-            </a:r>
-            <a:r>
-              <a:rPr lang="en-US" altLang="en-US" dirty="0">
-                <a:latin typeface="Google Sans Text"/>
-              </a:rPr>
-              <a:t> </a:t>
-            </a:r>
-            <a:r>
-              <a:rPr lang="en-US" altLang="en-US" dirty="0" err="1">
-                <a:latin typeface="Google Sans Text"/>
-              </a:rPr>
-              <a:t>em</a:t>
-            </a:r>
-            <a:r>
-              <a:rPr lang="en-US" altLang="en-US" dirty="0">
-                <a:latin typeface="Google Sans Text"/>
-              </a:rPr>
-              <a:t> </a:t>
-            </a:r>
-            <a:r>
-              <a:rPr lang="en-US" altLang="en-US" dirty="0" err="1">
-                <a:latin typeface="Google Sans Text"/>
-              </a:rPr>
-              <a:t>que</a:t>
-            </a:r>
-            <a:r>
-              <a:rPr lang="en-US" altLang="en-US" dirty="0">
-                <a:latin typeface="Google Sans Text"/>
-              </a:rPr>
-              <a:t> </a:t>
-            </a:r>
-            <a:r>
-              <a:rPr lang="en-US" altLang="en-US" dirty="0" err="1">
-                <a:latin typeface="Google Sans Text"/>
-              </a:rPr>
-              <a:t>ele</a:t>
-            </a:r>
-            <a:r>
-              <a:rPr lang="en-US" altLang="en-US" dirty="0">
-                <a:latin typeface="Google Sans Text"/>
-              </a:rPr>
-              <a:t> se </a:t>
-            </a:r>
-            <a:r>
-              <a:rPr lang="en-US" altLang="en-US" dirty="0" err="1">
-                <a:latin typeface="Google Sans Text"/>
-              </a:rPr>
-              <a:t>encontra</a:t>
-            </a:r>
-            <a:r>
-              <a:rPr lang="en-US" altLang="en-US" dirty="0">
-                <a:latin typeface="Google Sans Text"/>
-              </a:rPr>
-              <a:t>, o </a:t>
-            </a:r>
-            <a:r>
-              <a:rPr lang="en-US" altLang="en-US" dirty="0" err="1">
-                <a:latin typeface="Google Sans Text"/>
-              </a:rPr>
-              <a:t>problema</a:t>
-            </a:r>
-            <a:r>
-              <a:rPr lang="en-US" altLang="en-US" dirty="0">
-                <a:latin typeface="Google Sans Text"/>
-              </a:rPr>
-              <a:t> de </a:t>
-            </a:r>
-            <a:r>
-              <a:rPr lang="en-US" altLang="en-US" dirty="0" err="1">
-                <a:latin typeface="Google Sans Text"/>
-              </a:rPr>
-              <a:t>controle</a:t>
-            </a:r>
-            <a:r>
-              <a:rPr lang="en-US" altLang="en-US" dirty="0">
-                <a:latin typeface="Google Sans Text"/>
-              </a:rPr>
-              <a:t> </a:t>
-            </a:r>
-            <a:r>
-              <a:rPr lang="en-US" altLang="en-US" dirty="0" err="1">
-                <a:latin typeface="Google Sans Text"/>
-              </a:rPr>
-              <a:t>está</a:t>
-            </a:r>
-            <a:r>
-              <a:rPr lang="en-US" altLang="en-US" dirty="0">
-                <a:latin typeface="Google Sans Text"/>
-              </a:rPr>
-              <a:t> </a:t>
-            </a:r>
-            <a:r>
-              <a:rPr lang="en-US" altLang="en-US" dirty="0" err="1">
-                <a:latin typeface="Google Sans Text"/>
-              </a:rPr>
-              <a:t>resolvido</a:t>
-            </a:r>
-            <a:r>
-              <a:rPr lang="en-US" altLang="en-US" dirty="0">
-                <a:latin typeface="Google Sans Text"/>
-              </a:rPr>
-              <a:t>: basta </a:t>
-            </a:r>
-            <a:r>
-              <a:rPr lang="en-US" altLang="en-US" dirty="0" err="1">
-                <a:latin typeface="Google Sans Text"/>
-              </a:rPr>
-              <a:t>escolher</a:t>
-            </a:r>
-            <a:r>
-              <a:rPr lang="en-US" altLang="en-US" dirty="0">
-                <a:latin typeface="Google Sans Text"/>
-              </a:rPr>
-              <a:t> a </a:t>
-            </a:r>
-            <a:r>
-              <a:rPr lang="en-US" altLang="en-US" dirty="0" err="1">
-                <a:latin typeface="Google Sans Text"/>
-              </a:rPr>
-              <a:t>ação</a:t>
-            </a:r>
-            <a:r>
-              <a:rPr lang="en-US" altLang="en-US" dirty="0">
-                <a:latin typeface="Google Sans Text"/>
-              </a:rPr>
-              <a:t> com o </a:t>
-            </a:r>
-            <a:r>
-              <a:rPr lang="en-US" altLang="en-US" dirty="0" err="1">
-                <a:latin typeface="Google Sans Text"/>
-              </a:rPr>
-              <a:t>maior</a:t>
-            </a:r>
-            <a:r>
-              <a:rPr lang="en-US" altLang="en-US" dirty="0">
-                <a:latin typeface="Google Sans Text"/>
-              </a:rPr>
-              <a:t> Q."</a:t>
-            </a:r>
-            <a:endParaRPr lang="en-US" altLang="en-US" dirty="0">
-              <a:latin typeface="Arial" panose="020B0604020202020204" pitchFamily="34" charset="0"/>
-            </a:endParaRPr>
-          </a:p>
-          <a:p>
-            <a:endParaRPr lang="en-US" dirty="0"/>
-          </a:p>
-          <a:p>
+            <a:r>
+              <a:rPr lang="pt-BR" dirty="0"/>
+              <a:t>aa</a:t>
+            </a:r>
             <a:endParaRPr lang="en-US" dirty="0"/>
           </a:p>
         </p:txBody>
@@ -7821,7 +6830,7 @@
     </p:spTree>
     <p:extLst>
       <p:ext uri="{BB962C8B-B14F-4D97-AF65-F5344CB8AC3E}">
-        <p14:creationId xmlns:p14="http://schemas.microsoft.com/office/powerpoint/2010/main" val="1733207672"/>
+        <p14:creationId xmlns:p14="http://schemas.microsoft.com/office/powerpoint/2010/main" val="2527015132"/>
       </p:ext>
     </p:extLst>
   </p:cSld>
@@ -8053,8 +7062,102 @@
         </p:blipFill>
         <p:spPr bwMode="auto">
           <a:xfrm>
-            <a:off x="2732314" y="2392136"/>
+            <a:off x="-468086" y="2326822"/>
             <a:ext cx="6487886" cy="3649436"/>
+          </a:xfrm>
+          <a:prstGeom prst="rect">
+            <a:avLst/>
+          </a:prstGeom>
+          <a:noFill/>
+          <a:extLst>
+            <a:ext uri="{909E8E84-426E-40DD-AFC4-6F175D3DCCD1}">
+              <a14:hiddenFill xmlns:a14="http://schemas.microsoft.com/office/drawing/2010/main">
+                <a:solidFill>
+                  <a:srgbClr val="FFFFFF"/>
+                </a:solidFill>
+              </a14:hiddenFill>
+            </a:ext>
+          </a:extLst>
+        </p:spPr>
+      </p:pic>
+      <p:pic>
+        <p:nvPicPr>
+          <p:cNvPr id="1026" name="Picture 2" descr="Evaluating a Hybrid LLM Q-Learning/DQN Framework for Adaptive Obstacle  Avoidance in Embedded Robotics">
+            <a:extLst>
+              <a:ext uri="{FF2B5EF4-FFF2-40B4-BE49-F238E27FC236}">
+                <a16:creationId xmlns:a16="http://schemas.microsoft.com/office/drawing/2014/main" id="{BA833512-3FC7-011C-B55D-9BC5E88B4C29}"/>
+              </a:ext>
+            </a:extLst>
+          </p:cNvPr>
+          <p:cNvPicPr>
+            <a:picLocks noChangeAspect="1" noChangeArrowheads="1"/>
+          </p:cNvPicPr>
+          <p:nvPr/>
+        </p:nvPicPr>
+        <p:blipFill>
+          <a:blip r:embed="rId3">
+            <a:extLst>
+              <a:ext uri="{28A0092B-C50C-407E-A947-70E740481C1C}">
+                <a14:useLocalDpi xmlns:a14="http://schemas.microsoft.com/office/drawing/2010/main" val="0"/>
+              </a:ext>
+            </a:extLst>
+          </a:blip>
+          <a:srcRect/>
+          <a:stretch>
+            <a:fillRect/>
+          </a:stretch>
+        </p:blipFill>
+        <p:spPr bwMode="auto">
+          <a:xfrm>
+            <a:off x="6789965" y="1885951"/>
+            <a:ext cx="5238750" cy="1809750"/>
+          </a:xfrm>
+          <a:prstGeom prst="rect">
+            <a:avLst/>
+          </a:prstGeom>
+          <a:noFill/>
+          <a:extLst>
+            <a:ext uri="{909E8E84-426E-40DD-AFC4-6F175D3DCCD1}">
+              <a14:hiddenFill xmlns:a14="http://schemas.microsoft.com/office/drawing/2010/main">
+                <a:solidFill>
+                  <a:srgbClr val="FFFFFF"/>
+                </a:solidFill>
+              </a14:hiddenFill>
+            </a:ext>
+          </a:extLst>
+        </p:spPr>
+      </p:pic>
+      <p:pic>
+        <p:nvPicPr>
+          <p:cNvPr id="1028" name="Picture 4" descr="Cracking the Spell of Q* - A New Method in Problem Solving | Benny's Mind  Hack">
+            <a:extLst>
+              <a:ext uri="{FF2B5EF4-FFF2-40B4-BE49-F238E27FC236}">
+                <a16:creationId xmlns:a16="http://schemas.microsoft.com/office/drawing/2014/main" id="{2FAF9048-FD7A-0345-D833-A8A15BE69361}"/>
+              </a:ext>
+            </a:extLst>
+          </p:cNvPr>
+          <p:cNvPicPr>
+            <a:picLocks noChangeAspect="1" noChangeArrowheads="1"/>
+          </p:cNvPicPr>
+          <p:nvPr/>
+        </p:nvPicPr>
+        <p:blipFill>
+          <a:blip r:embed="rId4">
+            <a:extLst>
+              <a:ext uri="{28A0092B-C50C-407E-A947-70E740481C1C}">
+                <a14:useLocalDpi xmlns:a14="http://schemas.microsoft.com/office/drawing/2010/main" val="0"/>
+              </a:ext>
+            </a:extLst>
+          </a:blip>
+          <a:srcRect/>
+          <a:stretch>
+            <a:fillRect/>
+          </a:stretch>
+        </p:blipFill>
+        <p:spPr bwMode="auto">
+          <a:xfrm>
+            <a:off x="6670221" y="3429000"/>
+            <a:ext cx="6667500" cy="4381500"/>
           </a:xfrm>
           <a:prstGeom prst="rect">
             <a:avLst/>

--- a/slides/C24_Q_learning.pptx
+++ b/slides/C24_Q_learning.pptx
@@ -5,10 +5,10 @@
     <p:sldMasterId id="2147483648" r:id="rId1"/>
   </p:sldMasterIdLst>
   <p:notesMasterIdLst>
-    <p:notesMasterId r:id="rId25"/>
+    <p:notesMasterId r:id="rId34"/>
   </p:notesMasterIdLst>
   <p:handoutMasterIdLst>
-    <p:handoutMasterId r:id="rId26"/>
+    <p:handoutMasterId r:id="rId35"/>
   </p:handoutMasterIdLst>
   <p:sldIdLst>
     <p:sldId id="256" r:id="rId2"/>
@@ -25,15 +25,24 @@
     <p:sldId id="328" r:id="rId13"/>
     <p:sldId id="330" r:id="rId14"/>
     <p:sldId id="334" r:id="rId15"/>
-    <p:sldId id="316" r:id="rId16"/>
-    <p:sldId id="333" r:id="rId17"/>
-    <p:sldId id="329" r:id="rId18"/>
-    <p:sldId id="331" r:id="rId19"/>
-    <p:sldId id="293" r:id="rId20"/>
-    <p:sldId id="314" r:id="rId21"/>
-    <p:sldId id="306" r:id="rId22"/>
-    <p:sldId id="324" r:id="rId23"/>
-    <p:sldId id="323" r:id="rId24"/>
+    <p:sldId id="333" r:id="rId16"/>
+    <p:sldId id="335" r:id="rId17"/>
+    <p:sldId id="338" r:id="rId18"/>
+    <p:sldId id="336" r:id="rId19"/>
+    <p:sldId id="339" r:id="rId20"/>
+    <p:sldId id="337" r:id="rId21"/>
+    <p:sldId id="316" r:id="rId22"/>
+    <p:sldId id="340" r:id="rId23"/>
+    <p:sldId id="345" r:id="rId24"/>
+    <p:sldId id="341" r:id="rId25"/>
+    <p:sldId id="342" r:id="rId26"/>
+    <p:sldId id="343" r:id="rId27"/>
+    <p:sldId id="344" r:id="rId28"/>
+    <p:sldId id="331" r:id="rId29"/>
+    <p:sldId id="293" r:id="rId30"/>
+    <p:sldId id="306" r:id="rId31"/>
+    <p:sldId id="324" r:id="rId32"/>
+    <p:sldId id="323" r:id="rId33"/>
   </p:sldIdLst>
   <p:sldSz cx="12192000" cy="6858000"/>
   <p:notesSz cx="7315200" cy="9601200"/>
@@ -297,7 +306,7 @@
           <a:p>
             <a:fld id="{144F1436-6906-4D93-B7A2-786C327BFA14}" type="datetimeFigureOut">
               <a:rPr lang="nl-BE" smtClean="0"/>
-              <a:t>24/04/2026</a:t>
+              <a:t>26/04/2026</a:t>
             </a:fld>
             <a:endParaRPr lang="nl-BE"/>
           </a:p>
@@ -462,7 +471,7 @@
           <a:p>
             <a:fld id="{AA8CD09E-2914-4F47-B6C1-51B2C31814C9}" type="datetimeFigureOut">
               <a:rPr lang="pt-BR" smtClean="0"/>
-              <a:t>24/04/2026</a:t>
+              <a:t>26/04/2026</a:t>
             </a:fld>
             <a:endParaRPr lang="pt-BR"/>
           </a:p>
@@ -1188,14 +1197,100 @@
         </p:nvSpPr>
         <p:spPr/>
       </p:sp>
-      <p:sp>
-        <p:nvSpPr>
-          <p:cNvPr id="3" name="Notes Placeholder 2"/>
+      <mc:AlternateContent xmlns:mc="http://schemas.openxmlformats.org/markup-compatibility/2006">
+        <mc:Choice xmlns:a14="http://schemas.microsoft.com/office/drawing/2010/main" Requires="a14">
+          <p:sp>
+            <p:nvSpPr>
+              <p:cNvPr id="3" name="Notes Placeholder 2"/>
+              <p:cNvSpPr>
+                <a:spLocks noGrp="1"/>
+              </p:cNvSpPr>
+              <p:nvPr>
+                <p:ph type="body" idx="1"/>
+              </p:nvPr>
+            </p:nvSpPr>
+            <p:spPr/>
+            <p:txBody>
+              <a:bodyPr/>
+              <a:lstStyle/>
+              <a:p>
+                <a:r>
+                  <a:rPr lang="pt-BR" sz="1200" b="1" dirty="0"/>
+                  <a:t>épsilon (</a:t>
+                </a:r>
+                <a14:m>
+                  <m:oMath xmlns:m="http://schemas.openxmlformats.org/officeDocument/2006/math">
+                    <m:r>
+                      <a:rPr lang="pt-BR" sz="1200" b="1" i="1" smtClean="0">
+                        <a:latin typeface="Cambria Math" panose="02040503050406030204" pitchFamily="18" charset="0"/>
+                        <a:ea typeface="Cambria Math" panose="02040503050406030204" pitchFamily="18" charset="0"/>
+                      </a:rPr>
+                      <m:t>𝜺</m:t>
+                    </m:r>
+                  </m:oMath>
+                </a14:m>
+                <a:r>
+                  <a:rPr lang="pt-BR" sz="1200" b="1" dirty="0"/>
+                  <a:t>)-</a:t>
+                </a:r>
+                <a:r>
+                  <a:rPr lang="pt-BR" sz="1200" b="1" dirty="0" err="1"/>
+                  <a:t>greedy</a:t>
+                </a:r>
+                <a:endParaRPr lang="en-US" dirty="0"/>
+              </a:p>
+            </p:txBody>
+          </p:sp>
+        </mc:Choice>
+        <mc:Fallback>
+          <p:sp>
+            <p:nvSpPr>
+              <p:cNvPr id="3" name="Notes Placeholder 2"/>
+              <p:cNvSpPr>
+                <a:spLocks noGrp="1"/>
+              </p:cNvSpPr>
+              <p:nvPr>
+                <p:ph type="body" idx="1"/>
+              </p:nvPr>
+            </p:nvSpPr>
+            <p:spPr/>
+            <p:txBody>
+              <a:bodyPr/>
+              <a:lstStyle/>
+              <a:p>
+                <a:r>
+                  <a:rPr lang="pt-BR" sz="1200" b="1" dirty="0"/>
+                  <a:t>épsilon (</a:t>
+                </a:r>
+                <a:r>
+                  <a:rPr lang="pt-BR" sz="1200" b="1" i="0">
+                    <a:latin typeface="Cambria Math" panose="02040503050406030204" pitchFamily="18" charset="0"/>
+                    <a:ea typeface="Cambria Math" panose="02040503050406030204" pitchFamily="18" charset="0"/>
+                  </a:rPr>
+                  <a:t>𝜺</a:t>
+                </a:r>
+                <a:r>
+                  <a:rPr lang="pt-BR" sz="1200" b="1" dirty="0"/>
+                  <a:t>)-</a:t>
+                </a:r>
+                <a:r>
+                  <a:rPr lang="pt-BR" sz="1200" b="1" dirty="0" err="1"/>
+                  <a:t>greedy</a:t>
+                </a:r>
+                <a:endParaRPr lang="en-US" dirty="0"/>
+              </a:p>
+            </p:txBody>
+          </p:sp>
+        </mc:Fallback>
+      </mc:AlternateContent>
+      <p:sp>
+        <p:nvSpPr>
+          <p:cNvPr id="4" name="Slide Number Placeholder 3"/>
           <p:cNvSpPr>
             <a:spLocks noGrp="1"/>
           </p:cNvSpPr>
           <p:nvPr>
-            <p:ph type="body" idx="1"/>
+            <p:ph type="sldNum" sz="quarter" idx="5"/>
           </p:nvPr>
         </p:nvSpPr>
         <p:spPr/>
@@ -1203,18 +1298,64 @@
           <a:bodyPr/>
           <a:lstStyle/>
           <a:p>
-            <a:endParaRPr lang="en-US" dirty="0"/>
+            <a:fld id="{6FC8D850-966F-45A6-8DE7-15B891E7D40D}" type="slidenum">
+              <a:rPr lang="pt-BR" smtClean="0"/>
+              <a:t>15</a:t>
+            </a:fld>
+            <a:endParaRPr lang="pt-BR"/>
           </a:p>
         </p:txBody>
       </p:sp>
-      <p:sp>
-        <p:nvSpPr>
-          <p:cNvPr id="4" name="Slide Number Placeholder 3"/>
+    </p:spTree>
+    <p:extLst>
+      <p:ext uri="{BB962C8B-B14F-4D97-AF65-F5344CB8AC3E}">
+        <p14:creationId xmlns:p14="http://schemas.microsoft.com/office/powerpoint/2010/main" val="2918120953"/>
+      </p:ext>
+    </p:extLst>
+  </p:cSld>
+  <p:clrMapOvr>
+    <a:masterClrMapping/>
+  </p:clrMapOvr>
+</p:notes>
+</file>
+
+<file path=ppt/notesSlides/notesSlide14.xml><?xml version="1.0" encoding="utf-8"?>
+<p:notes xmlns:a="http://schemas.openxmlformats.org/drawingml/2006/main" xmlns:r="http://schemas.openxmlformats.org/officeDocument/2006/relationships" xmlns:p="http://schemas.openxmlformats.org/presentationml/2006/main">
+  <p:cSld>
+    <p:spTree>
+      <p:nvGrpSpPr>
+        <p:cNvPr id="1" name=""/>
+        <p:cNvGrpSpPr/>
+        <p:nvPr/>
+      </p:nvGrpSpPr>
+      <p:grpSpPr>
+        <a:xfrm>
+          <a:off x="0" y="0"/>
+          <a:ext cx="0" cy="0"/>
+          <a:chOff x="0" y="0"/>
+          <a:chExt cx="0" cy="0"/>
+        </a:xfrm>
+      </p:grpSpPr>
+      <p:sp>
+        <p:nvSpPr>
+          <p:cNvPr id="2" name="Slide Image Placeholder 1"/>
+          <p:cNvSpPr>
+            <a:spLocks noGrp="1" noRot="1" noChangeAspect="1"/>
+          </p:cNvSpPr>
+          <p:nvPr>
+            <p:ph type="sldImg"/>
+          </p:nvPr>
+        </p:nvSpPr>
+        <p:spPr/>
+      </p:sp>
+      <p:sp>
+        <p:nvSpPr>
+          <p:cNvPr id="3" name="Notes Placeholder 2"/>
           <p:cNvSpPr>
             <a:spLocks noGrp="1"/>
           </p:cNvSpPr>
           <p:nvPr>
-            <p:ph type="sldNum" sz="quarter" idx="5"/>
+            <p:ph type="body" idx="1"/>
           </p:nvPr>
         </p:nvSpPr>
         <p:spPr/>
@@ -1222,9 +1363,37 @@
           <a:bodyPr/>
           <a:lstStyle/>
           <a:p>
+            <a:r>
+              <a:rPr lang="pt-BR" dirty="0"/>
+              <a:t>Uma pessoa de frente para dois restaurantes: um que ela sempre vai e ama (Explotação) e um restaurante novo recém-inaugurado (Exploração).</a:t>
+            </a:r>
+          </a:p>
+          <a:p>
+            <a:endParaRPr lang="pt-BR" dirty="0"/>
+          </a:p>
+          <a:p>
+            <a:endParaRPr lang="en-US" dirty="0"/>
+          </a:p>
+        </p:txBody>
+      </p:sp>
+      <p:sp>
+        <p:nvSpPr>
+          <p:cNvPr id="4" name="Slide Number Placeholder 3"/>
+          <p:cNvSpPr>
+            <a:spLocks noGrp="1"/>
+          </p:cNvSpPr>
+          <p:nvPr>
+            <p:ph type="sldNum" sz="quarter" idx="5"/>
+          </p:nvPr>
+        </p:nvSpPr>
+        <p:spPr/>
+        <p:txBody>
+          <a:bodyPr/>
+          <a:lstStyle/>
+          <a:p>
             <a:fld id="{6FC8D850-966F-45A6-8DE7-15B891E7D40D}" type="slidenum">
               <a:rPr lang="pt-BR" smtClean="0"/>
-              <a:t>17</a:t>
+              <a:t>18</a:t>
             </a:fld>
             <a:endParaRPr lang="pt-BR"/>
           </a:p>
@@ -1233,7 +1402,435 @@
     </p:spTree>
     <p:extLst>
       <p:ext uri="{BB962C8B-B14F-4D97-AF65-F5344CB8AC3E}">
-        <p14:creationId xmlns:p14="http://schemas.microsoft.com/office/powerpoint/2010/main" val="2647390871"/>
+        <p14:creationId xmlns:p14="http://schemas.microsoft.com/office/powerpoint/2010/main" val="3820503987"/>
+      </p:ext>
+    </p:extLst>
+  </p:cSld>
+  <p:clrMapOvr>
+    <a:masterClrMapping/>
+  </p:clrMapOvr>
+</p:notes>
+</file>
+
+<file path=ppt/notesSlides/notesSlide15.xml><?xml version="1.0" encoding="utf-8"?>
+<p:notes xmlns:a="http://schemas.openxmlformats.org/drawingml/2006/main" xmlns:r="http://schemas.openxmlformats.org/officeDocument/2006/relationships" xmlns:p="http://schemas.openxmlformats.org/presentationml/2006/main">
+  <p:cSld>
+    <p:spTree>
+      <p:nvGrpSpPr>
+        <p:cNvPr id="1" name=""/>
+        <p:cNvGrpSpPr/>
+        <p:nvPr/>
+      </p:nvGrpSpPr>
+      <p:grpSpPr>
+        <a:xfrm>
+          <a:off x="0" y="0"/>
+          <a:ext cx="0" cy="0"/>
+          <a:chOff x="0" y="0"/>
+          <a:chExt cx="0" cy="0"/>
+        </a:xfrm>
+      </p:grpSpPr>
+      <p:sp>
+        <p:nvSpPr>
+          <p:cNvPr id="2" name="Slide Image Placeholder 1"/>
+          <p:cNvSpPr>
+            <a:spLocks noGrp="1" noRot="1" noChangeAspect="1"/>
+          </p:cNvSpPr>
+          <p:nvPr>
+            <p:ph type="sldImg"/>
+          </p:nvPr>
+        </p:nvSpPr>
+        <p:spPr/>
+      </p:sp>
+      <p:sp>
+        <p:nvSpPr>
+          <p:cNvPr id="3" name="Notes Placeholder 2"/>
+          <p:cNvSpPr>
+            <a:spLocks noGrp="1"/>
+          </p:cNvSpPr>
+          <p:nvPr>
+            <p:ph type="body" idx="1"/>
+          </p:nvPr>
+        </p:nvSpPr>
+        <p:spPr/>
+        <p:txBody>
+          <a:bodyPr/>
+          <a:lstStyle/>
+          <a:p>
+            <a:endParaRPr lang="pt-BR" sz="1200" kern="1200" dirty="0">
+              <a:solidFill>
+                <a:schemeClr val="tx1"/>
+              </a:solidFill>
+              <a:effectLst/>
+              <a:latin typeface="+mn-lt"/>
+              <a:ea typeface="+mn-ea"/>
+              <a:cs typeface="+mn-cs"/>
+            </a:endParaRPr>
+          </a:p>
+        </p:txBody>
+      </p:sp>
+      <p:sp>
+        <p:nvSpPr>
+          <p:cNvPr id="4" name="Slide Number Placeholder 3"/>
+          <p:cNvSpPr>
+            <a:spLocks noGrp="1"/>
+          </p:cNvSpPr>
+          <p:nvPr>
+            <p:ph type="sldNum" sz="quarter" idx="5"/>
+          </p:nvPr>
+        </p:nvSpPr>
+        <p:spPr/>
+        <p:txBody>
+          <a:bodyPr/>
+          <a:lstStyle/>
+          <a:p>
+            <a:fld id="{6FC8D850-966F-45A6-8DE7-15B891E7D40D}" type="slidenum">
+              <a:rPr lang="pt-BR" smtClean="0"/>
+              <a:t>20</a:t>
+            </a:fld>
+            <a:endParaRPr lang="pt-BR"/>
+          </a:p>
+        </p:txBody>
+      </p:sp>
+    </p:spTree>
+    <p:extLst>
+      <p:ext uri="{BB962C8B-B14F-4D97-AF65-F5344CB8AC3E}">
+        <p14:creationId xmlns:p14="http://schemas.microsoft.com/office/powerpoint/2010/main" val="596767558"/>
+      </p:ext>
+    </p:extLst>
+  </p:cSld>
+  <p:clrMapOvr>
+    <a:masterClrMapping/>
+  </p:clrMapOvr>
+</p:notes>
+</file>
+
+<file path=ppt/notesSlides/notesSlide16.xml><?xml version="1.0" encoding="utf-8"?>
+<p:notes xmlns:a="http://schemas.openxmlformats.org/drawingml/2006/main" xmlns:r="http://schemas.openxmlformats.org/officeDocument/2006/relationships" xmlns:p="http://schemas.openxmlformats.org/presentationml/2006/main">
+  <p:cSld>
+    <p:spTree>
+      <p:nvGrpSpPr>
+        <p:cNvPr id="1" name=""/>
+        <p:cNvGrpSpPr/>
+        <p:nvPr/>
+      </p:nvGrpSpPr>
+      <p:grpSpPr>
+        <a:xfrm>
+          <a:off x="0" y="0"/>
+          <a:ext cx="0" cy="0"/>
+          <a:chOff x="0" y="0"/>
+          <a:chExt cx="0" cy="0"/>
+        </a:xfrm>
+      </p:grpSpPr>
+      <p:sp>
+        <p:nvSpPr>
+          <p:cNvPr id="2" name="Slide Image Placeholder 1"/>
+          <p:cNvSpPr>
+            <a:spLocks noGrp="1" noRot="1" noChangeAspect="1"/>
+          </p:cNvSpPr>
+          <p:nvPr>
+            <p:ph type="sldImg"/>
+          </p:nvPr>
+        </p:nvSpPr>
+        <p:spPr/>
+      </p:sp>
+      <p:sp>
+        <p:nvSpPr>
+          <p:cNvPr id="3" name="Notes Placeholder 2"/>
+          <p:cNvSpPr>
+            <a:spLocks noGrp="1"/>
+          </p:cNvSpPr>
+          <p:nvPr>
+            <p:ph type="body" idx="1"/>
+          </p:nvPr>
+        </p:nvSpPr>
+        <p:spPr/>
+        <p:txBody>
+          <a:bodyPr/>
+          <a:lstStyle/>
+          <a:p>
+            <a:endParaRPr lang="en-US" dirty="0"/>
+          </a:p>
+        </p:txBody>
+      </p:sp>
+      <p:sp>
+        <p:nvSpPr>
+          <p:cNvPr id="4" name="Slide Number Placeholder 3"/>
+          <p:cNvSpPr>
+            <a:spLocks noGrp="1"/>
+          </p:cNvSpPr>
+          <p:nvPr>
+            <p:ph type="sldNum" sz="quarter" idx="5"/>
+          </p:nvPr>
+        </p:nvSpPr>
+        <p:spPr/>
+        <p:txBody>
+          <a:bodyPr/>
+          <a:lstStyle/>
+          <a:p>
+            <a:fld id="{6FC8D850-966F-45A6-8DE7-15B891E7D40D}" type="slidenum">
+              <a:rPr lang="pt-BR" smtClean="0"/>
+              <a:t>22</a:t>
+            </a:fld>
+            <a:endParaRPr lang="pt-BR"/>
+          </a:p>
+        </p:txBody>
+      </p:sp>
+    </p:spTree>
+    <p:extLst>
+      <p:ext uri="{BB962C8B-B14F-4D97-AF65-F5344CB8AC3E}">
+        <p14:creationId xmlns:p14="http://schemas.microsoft.com/office/powerpoint/2010/main" val="2462809402"/>
+      </p:ext>
+    </p:extLst>
+  </p:cSld>
+  <p:clrMapOvr>
+    <a:masterClrMapping/>
+  </p:clrMapOvr>
+</p:notes>
+</file>
+
+<file path=ppt/notesSlides/notesSlide17.xml><?xml version="1.0" encoding="utf-8"?>
+<p:notes xmlns:a="http://schemas.openxmlformats.org/drawingml/2006/main" xmlns:r="http://schemas.openxmlformats.org/officeDocument/2006/relationships" xmlns:p="http://schemas.openxmlformats.org/presentationml/2006/main">
+  <p:cSld>
+    <p:spTree>
+      <p:nvGrpSpPr>
+        <p:cNvPr id="1" name=""/>
+        <p:cNvGrpSpPr/>
+        <p:nvPr/>
+      </p:nvGrpSpPr>
+      <p:grpSpPr>
+        <a:xfrm>
+          <a:off x="0" y="0"/>
+          <a:ext cx="0" cy="0"/>
+          <a:chOff x="0" y="0"/>
+          <a:chExt cx="0" cy="0"/>
+        </a:xfrm>
+      </p:grpSpPr>
+      <p:sp>
+        <p:nvSpPr>
+          <p:cNvPr id="2" name="Slide Image Placeholder 1"/>
+          <p:cNvSpPr>
+            <a:spLocks noGrp="1" noRot="1" noChangeAspect="1"/>
+          </p:cNvSpPr>
+          <p:nvPr>
+            <p:ph type="sldImg"/>
+          </p:nvPr>
+        </p:nvSpPr>
+        <p:spPr/>
+      </p:sp>
+      <p:sp>
+        <p:nvSpPr>
+          <p:cNvPr id="3" name="Notes Placeholder 2"/>
+          <p:cNvSpPr>
+            <a:spLocks noGrp="1"/>
+          </p:cNvSpPr>
+          <p:nvPr>
+            <p:ph type="body" idx="1"/>
+          </p:nvPr>
+        </p:nvSpPr>
+        <p:spPr/>
+        <p:txBody>
+          <a:bodyPr/>
+          <a:lstStyle/>
+          <a:p>
+            <a:endParaRPr lang="en-US" dirty="0"/>
+          </a:p>
+        </p:txBody>
+      </p:sp>
+      <p:sp>
+        <p:nvSpPr>
+          <p:cNvPr id="4" name="Slide Number Placeholder 3"/>
+          <p:cNvSpPr>
+            <a:spLocks noGrp="1"/>
+          </p:cNvSpPr>
+          <p:nvPr>
+            <p:ph type="sldNum" sz="quarter" idx="5"/>
+          </p:nvPr>
+        </p:nvSpPr>
+        <p:spPr/>
+        <p:txBody>
+          <a:bodyPr/>
+          <a:lstStyle/>
+          <a:p>
+            <a:fld id="{6FC8D850-966F-45A6-8DE7-15B891E7D40D}" type="slidenum">
+              <a:rPr lang="pt-BR" smtClean="0"/>
+              <a:t>24</a:t>
+            </a:fld>
+            <a:endParaRPr lang="pt-BR"/>
+          </a:p>
+        </p:txBody>
+      </p:sp>
+    </p:spTree>
+    <p:extLst>
+      <p:ext uri="{BB962C8B-B14F-4D97-AF65-F5344CB8AC3E}">
+        <p14:creationId xmlns:p14="http://schemas.microsoft.com/office/powerpoint/2010/main" val="3365976238"/>
+      </p:ext>
+    </p:extLst>
+  </p:cSld>
+  <p:clrMapOvr>
+    <a:masterClrMapping/>
+  </p:clrMapOvr>
+</p:notes>
+</file>
+
+<file path=ppt/notesSlides/notesSlide18.xml><?xml version="1.0" encoding="utf-8"?>
+<p:notes xmlns:a="http://schemas.openxmlformats.org/drawingml/2006/main" xmlns:r="http://schemas.openxmlformats.org/officeDocument/2006/relationships" xmlns:p="http://schemas.openxmlformats.org/presentationml/2006/main">
+  <p:cSld>
+    <p:spTree>
+      <p:nvGrpSpPr>
+        <p:cNvPr id="1" name=""/>
+        <p:cNvGrpSpPr/>
+        <p:nvPr/>
+      </p:nvGrpSpPr>
+      <p:grpSpPr>
+        <a:xfrm>
+          <a:off x="0" y="0"/>
+          <a:ext cx="0" cy="0"/>
+          <a:chOff x="0" y="0"/>
+          <a:chExt cx="0" cy="0"/>
+        </a:xfrm>
+      </p:grpSpPr>
+      <p:sp>
+        <p:nvSpPr>
+          <p:cNvPr id="2" name="Slide Image Placeholder 1"/>
+          <p:cNvSpPr>
+            <a:spLocks noGrp="1" noRot="1" noChangeAspect="1"/>
+          </p:cNvSpPr>
+          <p:nvPr>
+            <p:ph type="sldImg"/>
+          </p:nvPr>
+        </p:nvSpPr>
+        <p:spPr/>
+      </p:sp>
+      <p:sp>
+        <p:nvSpPr>
+          <p:cNvPr id="3" name="Notes Placeholder 2"/>
+          <p:cNvSpPr>
+            <a:spLocks noGrp="1"/>
+          </p:cNvSpPr>
+          <p:nvPr>
+            <p:ph type="body" idx="1"/>
+          </p:nvPr>
+        </p:nvSpPr>
+        <p:spPr/>
+        <p:txBody>
+          <a:bodyPr/>
+          <a:lstStyle/>
+          <a:p>
+            <a:endParaRPr lang="en-US" dirty="0"/>
+          </a:p>
+        </p:txBody>
+      </p:sp>
+      <p:sp>
+        <p:nvSpPr>
+          <p:cNvPr id="4" name="Slide Number Placeholder 3"/>
+          <p:cNvSpPr>
+            <a:spLocks noGrp="1"/>
+          </p:cNvSpPr>
+          <p:nvPr>
+            <p:ph type="sldNum" sz="quarter" idx="5"/>
+          </p:nvPr>
+        </p:nvSpPr>
+        <p:spPr/>
+        <p:txBody>
+          <a:bodyPr/>
+          <a:lstStyle/>
+          <a:p>
+            <a:fld id="{6FC8D850-966F-45A6-8DE7-15B891E7D40D}" type="slidenum">
+              <a:rPr lang="pt-BR" smtClean="0"/>
+              <a:t>25</a:t>
+            </a:fld>
+            <a:endParaRPr lang="pt-BR"/>
+          </a:p>
+        </p:txBody>
+      </p:sp>
+    </p:spTree>
+    <p:extLst>
+      <p:ext uri="{BB962C8B-B14F-4D97-AF65-F5344CB8AC3E}">
+        <p14:creationId xmlns:p14="http://schemas.microsoft.com/office/powerpoint/2010/main" val="3240064613"/>
+      </p:ext>
+    </p:extLst>
+  </p:cSld>
+  <p:clrMapOvr>
+    <a:masterClrMapping/>
+  </p:clrMapOvr>
+</p:notes>
+</file>
+
+<file path=ppt/notesSlides/notesSlide19.xml><?xml version="1.0" encoding="utf-8"?>
+<p:notes xmlns:a="http://schemas.openxmlformats.org/drawingml/2006/main" xmlns:r="http://schemas.openxmlformats.org/officeDocument/2006/relationships" xmlns:p="http://schemas.openxmlformats.org/presentationml/2006/main">
+  <p:cSld>
+    <p:spTree>
+      <p:nvGrpSpPr>
+        <p:cNvPr id="1" name=""/>
+        <p:cNvGrpSpPr/>
+        <p:nvPr/>
+      </p:nvGrpSpPr>
+      <p:grpSpPr>
+        <a:xfrm>
+          <a:off x="0" y="0"/>
+          <a:ext cx="0" cy="0"/>
+          <a:chOff x="0" y="0"/>
+          <a:chExt cx="0" cy="0"/>
+        </a:xfrm>
+      </p:grpSpPr>
+      <p:sp>
+        <p:nvSpPr>
+          <p:cNvPr id="2" name="Slide Image Placeholder 1"/>
+          <p:cNvSpPr>
+            <a:spLocks noGrp="1" noRot="1" noChangeAspect="1"/>
+          </p:cNvSpPr>
+          <p:nvPr>
+            <p:ph type="sldImg"/>
+          </p:nvPr>
+        </p:nvSpPr>
+        <p:spPr/>
+      </p:sp>
+      <p:sp>
+        <p:nvSpPr>
+          <p:cNvPr id="3" name="Notes Placeholder 2"/>
+          <p:cNvSpPr>
+            <a:spLocks noGrp="1"/>
+          </p:cNvSpPr>
+          <p:nvPr>
+            <p:ph type="body" idx="1"/>
+          </p:nvPr>
+        </p:nvSpPr>
+        <p:spPr/>
+        <p:txBody>
+          <a:bodyPr/>
+          <a:lstStyle/>
+          <a:p>
+            <a:endParaRPr lang="en-US" dirty="0"/>
+          </a:p>
+        </p:txBody>
+      </p:sp>
+      <p:sp>
+        <p:nvSpPr>
+          <p:cNvPr id="4" name="Slide Number Placeholder 3"/>
+          <p:cNvSpPr>
+            <a:spLocks noGrp="1"/>
+          </p:cNvSpPr>
+          <p:nvPr>
+            <p:ph type="sldNum" sz="quarter" idx="5"/>
+          </p:nvPr>
+        </p:nvSpPr>
+        <p:spPr/>
+        <p:txBody>
+          <a:bodyPr/>
+          <a:lstStyle/>
+          <a:p>
+            <a:fld id="{6FC8D850-966F-45A6-8DE7-15B891E7D40D}" type="slidenum">
+              <a:rPr lang="pt-BR" smtClean="0"/>
+              <a:t>26</a:t>
+            </a:fld>
+            <a:endParaRPr lang="pt-BR"/>
+          </a:p>
+        </p:txBody>
+      </p:sp>
+    </p:spTree>
+    <p:extLst>
+      <p:ext uri="{BB962C8B-B14F-4D97-AF65-F5344CB8AC3E}">
+        <p14:creationId xmlns:p14="http://schemas.microsoft.com/office/powerpoint/2010/main" val="1000199276"/>
       </p:ext>
     </p:extLst>
   </p:cSld>
@@ -1318,6 +1915,90 @@
     <p:extLst>
       <p:ext uri="{BB962C8B-B14F-4D97-AF65-F5344CB8AC3E}">
         <p14:creationId xmlns:p14="http://schemas.microsoft.com/office/powerpoint/2010/main" val="3286691423"/>
+      </p:ext>
+    </p:extLst>
+  </p:cSld>
+  <p:clrMapOvr>
+    <a:masterClrMapping/>
+  </p:clrMapOvr>
+</p:notes>
+</file>
+
+<file path=ppt/notesSlides/notesSlide20.xml><?xml version="1.0" encoding="utf-8"?>
+<p:notes xmlns:a="http://schemas.openxmlformats.org/drawingml/2006/main" xmlns:r="http://schemas.openxmlformats.org/officeDocument/2006/relationships" xmlns:p="http://schemas.openxmlformats.org/presentationml/2006/main">
+  <p:cSld>
+    <p:spTree>
+      <p:nvGrpSpPr>
+        <p:cNvPr id="1" name=""/>
+        <p:cNvGrpSpPr/>
+        <p:nvPr/>
+      </p:nvGrpSpPr>
+      <p:grpSpPr>
+        <a:xfrm>
+          <a:off x="0" y="0"/>
+          <a:ext cx="0" cy="0"/>
+          <a:chOff x="0" y="0"/>
+          <a:chExt cx="0" cy="0"/>
+        </a:xfrm>
+      </p:grpSpPr>
+      <p:sp>
+        <p:nvSpPr>
+          <p:cNvPr id="2" name="Slide Image Placeholder 1"/>
+          <p:cNvSpPr>
+            <a:spLocks noGrp="1" noRot="1" noChangeAspect="1"/>
+          </p:cNvSpPr>
+          <p:nvPr>
+            <p:ph type="sldImg"/>
+          </p:nvPr>
+        </p:nvSpPr>
+        <p:spPr/>
+      </p:sp>
+      <p:sp>
+        <p:nvSpPr>
+          <p:cNvPr id="3" name="Notes Placeholder 2"/>
+          <p:cNvSpPr>
+            <a:spLocks noGrp="1"/>
+          </p:cNvSpPr>
+          <p:nvPr>
+            <p:ph type="body" idx="1"/>
+          </p:nvPr>
+        </p:nvSpPr>
+        <p:spPr/>
+        <p:txBody>
+          <a:bodyPr/>
+          <a:lstStyle/>
+          <a:p>
+            <a:endParaRPr lang="en-US" dirty="0"/>
+          </a:p>
+        </p:txBody>
+      </p:sp>
+      <p:sp>
+        <p:nvSpPr>
+          <p:cNvPr id="4" name="Slide Number Placeholder 3"/>
+          <p:cNvSpPr>
+            <a:spLocks noGrp="1"/>
+          </p:cNvSpPr>
+          <p:nvPr>
+            <p:ph type="sldNum" sz="quarter" idx="5"/>
+          </p:nvPr>
+        </p:nvSpPr>
+        <p:spPr/>
+        <p:txBody>
+          <a:bodyPr/>
+          <a:lstStyle/>
+          <a:p>
+            <a:fld id="{6FC8D850-966F-45A6-8DE7-15B891E7D40D}" type="slidenum">
+              <a:rPr lang="pt-BR" smtClean="0"/>
+              <a:t>27</a:t>
+            </a:fld>
+            <a:endParaRPr lang="pt-BR"/>
+          </a:p>
+        </p:txBody>
+      </p:sp>
+    </p:spTree>
+    <p:extLst>
+      <p:ext uri="{BB962C8B-B14F-4D97-AF65-F5344CB8AC3E}">
+        <p14:creationId xmlns:p14="http://schemas.microsoft.com/office/powerpoint/2010/main" val="230184113"/>
       </p:ext>
     </p:extLst>
   </p:cSld>
@@ -2282,7 +2963,7 @@
           <a:p>
             <a:fld id="{63289F7E-B80B-496E-81B4-D396C37C9454}" type="datetimeFigureOut">
               <a:rPr lang="pt-BR" smtClean="0"/>
-              <a:t>24/04/2026</a:t>
+              <a:t>26/04/2026</a:t>
             </a:fld>
             <a:endParaRPr lang="pt-BR"/>
           </a:p>
@@ -2480,7 +3161,7 @@
           <a:p>
             <a:fld id="{63289F7E-B80B-496E-81B4-D396C37C9454}" type="datetimeFigureOut">
               <a:rPr lang="pt-BR" smtClean="0"/>
-              <a:t>24/04/2026</a:t>
+              <a:t>26/04/2026</a:t>
             </a:fld>
             <a:endParaRPr lang="pt-BR"/>
           </a:p>
@@ -2688,7 +3369,7 @@
           <a:p>
             <a:fld id="{63289F7E-B80B-496E-81B4-D396C37C9454}" type="datetimeFigureOut">
               <a:rPr lang="pt-BR" smtClean="0"/>
-              <a:t>24/04/2026</a:t>
+              <a:t>26/04/2026</a:t>
             </a:fld>
             <a:endParaRPr lang="pt-BR"/>
           </a:p>
@@ -2886,7 +3567,7 @@
           <a:p>
             <a:fld id="{63289F7E-B80B-496E-81B4-D396C37C9454}" type="datetimeFigureOut">
               <a:rPr lang="pt-BR" smtClean="0"/>
-              <a:t>24/04/2026</a:t>
+              <a:t>26/04/2026</a:t>
             </a:fld>
             <a:endParaRPr lang="pt-BR"/>
           </a:p>
@@ -3161,7 +3842,7 @@
           <a:p>
             <a:fld id="{63289F7E-B80B-496E-81B4-D396C37C9454}" type="datetimeFigureOut">
               <a:rPr lang="pt-BR" smtClean="0"/>
-              <a:t>24/04/2026</a:t>
+              <a:t>26/04/2026</a:t>
             </a:fld>
             <a:endParaRPr lang="pt-BR"/>
           </a:p>
@@ -3426,7 +4107,7 @@
           <a:p>
             <a:fld id="{63289F7E-B80B-496E-81B4-D396C37C9454}" type="datetimeFigureOut">
               <a:rPr lang="pt-BR" smtClean="0"/>
-              <a:t>24/04/2026</a:t>
+              <a:t>26/04/2026</a:t>
             </a:fld>
             <a:endParaRPr lang="pt-BR"/>
           </a:p>
@@ -3838,7 +4519,7 @@
           <a:p>
             <a:fld id="{63289F7E-B80B-496E-81B4-D396C37C9454}" type="datetimeFigureOut">
               <a:rPr lang="pt-BR" smtClean="0"/>
-              <a:t>24/04/2026</a:t>
+              <a:t>26/04/2026</a:t>
             </a:fld>
             <a:endParaRPr lang="pt-BR"/>
           </a:p>
@@ -3979,7 +4660,7 @@
           <a:p>
             <a:fld id="{63289F7E-B80B-496E-81B4-D396C37C9454}" type="datetimeFigureOut">
               <a:rPr lang="pt-BR" smtClean="0"/>
-              <a:t>24/04/2026</a:t>
+              <a:t>26/04/2026</a:t>
             </a:fld>
             <a:endParaRPr lang="pt-BR"/>
           </a:p>
@@ -4092,7 +4773,7 @@
           <a:p>
             <a:fld id="{63289F7E-B80B-496E-81B4-D396C37C9454}" type="datetimeFigureOut">
               <a:rPr lang="pt-BR" smtClean="0"/>
-              <a:t>24/04/2026</a:t>
+              <a:t>26/04/2026</a:t>
             </a:fld>
             <a:endParaRPr lang="pt-BR"/>
           </a:p>
@@ -4403,7 +5084,7 @@
           <a:p>
             <a:fld id="{63289F7E-B80B-496E-81B4-D396C37C9454}" type="datetimeFigureOut">
               <a:rPr lang="pt-BR" smtClean="0"/>
-              <a:t>24/04/2026</a:t>
+              <a:t>26/04/2026</a:t>
             </a:fld>
             <a:endParaRPr lang="pt-BR"/>
           </a:p>
@@ -4691,7 +5372,7 @@
           <a:p>
             <a:fld id="{63289F7E-B80B-496E-81B4-D396C37C9454}" type="datetimeFigureOut">
               <a:rPr lang="pt-BR" smtClean="0"/>
-              <a:t>24/04/2026</a:t>
+              <a:t>26/04/2026</a:t>
             </a:fld>
             <a:endParaRPr lang="pt-BR"/>
           </a:p>
@@ -4932,7 +5613,7 @@
           <a:p>
             <a:fld id="{63289F7E-B80B-496E-81B4-D396C37C9454}" type="datetimeFigureOut">
               <a:rPr lang="pt-BR" smtClean="0"/>
-              <a:t>24/04/2026</a:t>
+              <a:t>26/04/2026</a:t>
             </a:fld>
             <a:endParaRPr lang="pt-BR"/>
           </a:p>
@@ -6265,8 +6946,8 @@
             </p:nvSpPr>
             <p:spPr>
               <a:xfrm>
-                <a:off x="838200" y="1825625"/>
-                <a:ext cx="11277600" cy="5032375"/>
+                <a:off x="4299856" y="1825625"/>
+                <a:ext cx="7892143" cy="5032375"/>
               </a:xfrm>
             </p:spPr>
             <p:txBody>
@@ -6462,13 +7143,13 @@
             </p:nvSpPr>
             <p:spPr>
               <a:xfrm>
-                <a:off x="838200" y="1825625"/>
-                <a:ext cx="11277600" cy="5032375"/>
+                <a:off x="4299856" y="1825625"/>
+                <a:ext cx="7892143" cy="5032375"/>
               </a:xfrm>
               <a:blipFill>
                 <a:blip r:embed="rId3"/>
                 <a:stretch>
-                  <a:fillRect l="-973" t="-1937" r="-649"/>
+                  <a:fillRect l="-1390" t="-1937"/>
                 </a:stretch>
               </a:blipFill>
             </p:spPr>
@@ -6487,6 +7168,871 @@
           </p:sp>
         </mc:Fallback>
       </mc:AlternateContent>
+      <p:graphicFrame>
+        <p:nvGraphicFramePr>
+          <p:cNvPr id="4" name="Table 3">
+            <a:extLst>
+              <a:ext uri="{FF2B5EF4-FFF2-40B4-BE49-F238E27FC236}">
+                <a16:creationId xmlns:a16="http://schemas.microsoft.com/office/drawing/2014/main" id="{A14A3494-F972-A92A-0152-CCA1FC8882F5}"/>
+              </a:ext>
+            </a:extLst>
+          </p:cNvPr>
+          <p:cNvGraphicFramePr>
+            <a:graphicFrameLocks noGrp="1"/>
+          </p:cNvGraphicFramePr>
+          <p:nvPr>
+            <p:extLst>
+              <p:ext uri="{D42A27DB-BD31-4B8C-83A1-F6EECF244321}">
+                <p14:modId xmlns:p14="http://schemas.microsoft.com/office/powerpoint/2010/main" val="1516847051"/>
+              </p:ext>
+            </p:extLst>
+          </p:nvPr>
+        </p:nvGraphicFramePr>
+        <p:xfrm>
+          <a:off x="1594365" y="3429000"/>
+          <a:ext cx="1756228" cy="1112520"/>
+        </p:xfrm>
+        <a:graphic>
+          <a:graphicData uri="http://schemas.openxmlformats.org/drawingml/2006/table">
+            <a:tbl>
+              <a:tblPr firstRow="1" bandRow="1">
+                <a:tableStyleId>{2D5ABB26-0587-4C30-8999-92F81FD0307C}</a:tableStyleId>
+              </a:tblPr>
+              <a:tblGrid>
+                <a:gridCol w="439057">
+                  <a:extLst>
+                    <a:ext uri="{9D8B030D-6E8A-4147-A177-3AD203B41FA5}">
+                      <a16:colId xmlns:a16="http://schemas.microsoft.com/office/drawing/2014/main" val="4237906138"/>
+                    </a:ext>
+                  </a:extLst>
+                </a:gridCol>
+                <a:gridCol w="439057">
+                  <a:extLst>
+                    <a:ext uri="{9D8B030D-6E8A-4147-A177-3AD203B41FA5}">
+                      <a16:colId xmlns:a16="http://schemas.microsoft.com/office/drawing/2014/main" val="3865218800"/>
+                    </a:ext>
+                  </a:extLst>
+                </a:gridCol>
+                <a:gridCol w="439057">
+                  <a:extLst>
+                    <a:ext uri="{9D8B030D-6E8A-4147-A177-3AD203B41FA5}">
+                      <a16:colId xmlns:a16="http://schemas.microsoft.com/office/drawing/2014/main" val="2205689395"/>
+                    </a:ext>
+                  </a:extLst>
+                </a:gridCol>
+                <a:gridCol w="439057">
+                  <a:extLst>
+                    <a:ext uri="{9D8B030D-6E8A-4147-A177-3AD203B41FA5}">
+                      <a16:colId xmlns:a16="http://schemas.microsoft.com/office/drawing/2014/main" val="3536600299"/>
+                    </a:ext>
+                  </a:extLst>
+                </a:gridCol>
+              </a:tblGrid>
+              <a:tr h="370840">
+                <a:tc>
+                  <a:txBody>
+                    <a:bodyPr/>
+                    <a:lstStyle/>
+                    <a:p>
+                      <a:r>
+                        <a:rPr lang="pt-BR" dirty="0"/>
+                        <a:t>10</a:t>
+                      </a:r>
+                      <a:endParaRPr lang="en-US" dirty="0"/>
+                    </a:p>
+                  </a:txBody>
+                  <a:tcPr>
+                    <a:lnL w="12700" cap="flat" cmpd="sng" algn="ctr">
+                      <a:solidFill>
+                        <a:schemeClr val="tx1"/>
+                      </a:solidFill>
+                      <a:prstDash val="solid"/>
+                      <a:round/>
+                      <a:headEnd type="none" w="med" len="med"/>
+                      <a:tailEnd type="none" w="med" len="med"/>
+                    </a:lnL>
+                    <a:lnR w="12700" cap="flat" cmpd="sng" algn="ctr">
+                      <a:solidFill>
+                        <a:schemeClr val="tx1"/>
+                      </a:solidFill>
+                      <a:prstDash val="solid"/>
+                      <a:round/>
+                      <a:headEnd type="none" w="med" len="med"/>
+                      <a:tailEnd type="none" w="med" len="med"/>
+                    </a:lnR>
+                    <a:lnT w="12700" cap="flat" cmpd="sng" algn="ctr">
+                      <a:solidFill>
+                        <a:schemeClr val="tx1"/>
+                      </a:solidFill>
+                      <a:prstDash val="solid"/>
+                      <a:round/>
+                      <a:headEnd type="none" w="med" len="med"/>
+                      <a:tailEnd type="none" w="med" len="med"/>
+                    </a:lnT>
+                    <a:lnB w="12700" cap="flat" cmpd="sng" algn="ctr">
+                      <a:solidFill>
+                        <a:schemeClr val="tx1"/>
+                      </a:solidFill>
+                      <a:prstDash val="solid"/>
+                      <a:round/>
+                      <a:headEnd type="none" w="med" len="med"/>
+                      <a:tailEnd type="none" w="med" len="med"/>
+                    </a:lnB>
+                    <a:lnTlToBr w="12700" cmpd="sng">
+                      <a:noFill/>
+                      <a:prstDash val="solid"/>
+                    </a:lnTlToBr>
+                    <a:lnBlToTr w="12700" cmpd="sng">
+                      <a:noFill/>
+                      <a:prstDash val="solid"/>
+                    </a:lnBlToTr>
+                  </a:tcPr>
+                </a:tc>
+                <a:tc>
+                  <a:txBody>
+                    <a:bodyPr/>
+                    <a:lstStyle/>
+                    <a:p>
+                      <a:r>
+                        <a:rPr lang="pt-BR" dirty="0"/>
+                        <a:t>2</a:t>
+                      </a:r>
+                      <a:endParaRPr lang="en-US" dirty="0"/>
+                    </a:p>
+                  </a:txBody>
+                  <a:tcPr>
+                    <a:lnL w="12700" cap="flat" cmpd="sng" algn="ctr">
+                      <a:solidFill>
+                        <a:schemeClr val="tx1"/>
+                      </a:solidFill>
+                      <a:prstDash val="solid"/>
+                      <a:round/>
+                      <a:headEnd type="none" w="med" len="med"/>
+                      <a:tailEnd type="none" w="med" len="med"/>
+                    </a:lnL>
+                    <a:lnR w="12700" cap="flat" cmpd="sng" algn="ctr">
+                      <a:solidFill>
+                        <a:schemeClr val="tx1"/>
+                      </a:solidFill>
+                      <a:prstDash val="solid"/>
+                      <a:round/>
+                      <a:headEnd type="none" w="med" len="med"/>
+                      <a:tailEnd type="none" w="med" len="med"/>
+                    </a:lnR>
+                    <a:lnT w="12700" cap="flat" cmpd="sng" algn="ctr">
+                      <a:solidFill>
+                        <a:schemeClr val="tx1"/>
+                      </a:solidFill>
+                      <a:prstDash val="solid"/>
+                      <a:round/>
+                      <a:headEnd type="none" w="med" len="med"/>
+                      <a:tailEnd type="none" w="med" len="med"/>
+                    </a:lnT>
+                    <a:lnB w="12700" cap="flat" cmpd="sng" algn="ctr">
+                      <a:solidFill>
+                        <a:schemeClr val="tx1"/>
+                      </a:solidFill>
+                      <a:prstDash val="solid"/>
+                      <a:round/>
+                      <a:headEnd type="none" w="med" len="med"/>
+                      <a:tailEnd type="none" w="med" len="med"/>
+                    </a:lnB>
+                    <a:lnTlToBr w="12700" cmpd="sng">
+                      <a:noFill/>
+                      <a:prstDash val="solid"/>
+                    </a:lnTlToBr>
+                    <a:lnBlToTr w="12700" cmpd="sng">
+                      <a:noFill/>
+                      <a:prstDash val="solid"/>
+                    </a:lnBlToTr>
+                  </a:tcPr>
+                </a:tc>
+                <a:tc>
+                  <a:txBody>
+                    <a:bodyPr/>
+                    <a:lstStyle/>
+                    <a:p>
+                      <a:r>
+                        <a:rPr lang="pt-BR" dirty="0"/>
+                        <a:t>6</a:t>
+                      </a:r>
+                      <a:endParaRPr lang="en-US" dirty="0"/>
+                    </a:p>
+                  </a:txBody>
+                  <a:tcPr>
+                    <a:lnL w="12700" cap="flat" cmpd="sng" algn="ctr">
+                      <a:solidFill>
+                        <a:schemeClr val="tx1"/>
+                      </a:solidFill>
+                      <a:prstDash val="solid"/>
+                      <a:round/>
+                      <a:headEnd type="none" w="med" len="med"/>
+                      <a:tailEnd type="none" w="med" len="med"/>
+                    </a:lnL>
+                    <a:lnR w="12700" cap="flat" cmpd="sng" algn="ctr">
+                      <a:solidFill>
+                        <a:schemeClr val="tx1"/>
+                      </a:solidFill>
+                      <a:prstDash val="solid"/>
+                      <a:round/>
+                      <a:headEnd type="none" w="med" len="med"/>
+                      <a:tailEnd type="none" w="med" len="med"/>
+                    </a:lnR>
+                    <a:lnT w="12700" cap="flat" cmpd="sng" algn="ctr">
+                      <a:solidFill>
+                        <a:schemeClr val="tx1"/>
+                      </a:solidFill>
+                      <a:prstDash val="solid"/>
+                      <a:round/>
+                      <a:headEnd type="none" w="med" len="med"/>
+                      <a:tailEnd type="none" w="med" len="med"/>
+                    </a:lnT>
+                    <a:lnB w="12700" cap="flat" cmpd="sng" algn="ctr">
+                      <a:solidFill>
+                        <a:schemeClr val="tx1"/>
+                      </a:solidFill>
+                      <a:prstDash val="solid"/>
+                      <a:round/>
+                      <a:headEnd type="none" w="med" len="med"/>
+                      <a:tailEnd type="none" w="med" len="med"/>
+                    </a:lnB>
+                    <a:lnTlToBr w="12700" cmpd="sng">
+                      <a:noFill/>
+                      <a:prstDash val="solid"/>
+                    </a:lnTlToBr>
+                    <a:lnBlToTr w="12700" cmpd="sng">
+                      <a:noFill/>
+                      <a:prstDash val="solid"/>
+                    </a:lnBlToTr>
+                  </a:tcPr>
+                </a:tc>
+                <a:tc>
+                  <a:txBody>
+                    <a:bodyPr/>
+                    <a:lstStyle/>
+                    <a:p>
+                      <a:r>
+                        <a:rPr lang="pt-BR" dirty="0"/>
+                        <a:t>8</a:t>
+                      </a:r>
+                      <a:endParaRPr lang="en-US" dirty="0"/>
+                    </a:p>
+                  </a:txBody>
+                  <a:tcPr>
+                    <a:lnL w="12700" cap="flat" cmpd="sng" algn="ctr">
+                      <a:solidFill>
+                        <a:schemeClr val="tx1"/>
+                      </a:solidFill>
+                      <a:prstDash val="solid"/>
+                      <a:round/>
+                      <a:headEnd type="none" w="med" len="med"/>
+                      <a:tailEnd type="none" w="med" len="med"/>
+                    </a:lnL>
+                    <a:lnR w="12700" cap="flat" cmpd="sng" algn="ctr">
+                      <a:solidFill>
+                        <a:schemeClr val="tx1"/>
+                      </a:solidFill>
+                      <a:prstDash val="solid"/>
+                      <a:round/>
+                      <a:headEnd type="none" w="med" len="med"/>
+                      <a:tailEnd type="none" w="med" len="med"/>
+                    </a:lnR>
+                    <a:lnT w="12700" cap="flat" cmpd="sng" algn="ctr">
+                      <a:solidFill>
+                        <a:schemeClr val="tx1"/>
+                      </a:solidFill>
+                      <a:prstDash val="solid"/>
+                      <a:round/>
+                      <a:headEnd type="none" w="med" len="med"/>
+                      <a:tailEnd type="none" w="med" len="med"/>
+                    </a:lnT>
+                    <a:lnB w="12700" cap="flat" cmpd="sng" algn="ctr">
+                      <a:solidFill>
+                        <a:schemeClr val="tx1"/>
+                      </a:solidFill>
+                      <a:prstDash val="solid"/>
+                      <a:round/>
+                      <a:headEnd type="none" w="med" len="med"/>
+                      <a:tailEnd type="none" w="med" len="med"/>
+                    </a:lnB>
+                    <a:lnTlToBr w="12700" cmpd="sng">
+                      <a:noFill/>
+                      <a:prstDash val="solid"/>
+                    </a:lnTlToBr>
+                    <a:lnBlToTr w="12700" cmpd="sng">
+                      <a:noFill/>
+                      <a:prstDash val="solid"/>
+                    </a:lnBlToTr>
+                  </a:tcPr>
+                </a:tc>
+                <a:extLst>
+                  <a:ext uri="{0D108BD9-81ED-4DB2-BD59-A6C34878D82A}">
+                    <a16:rowId xmlns:a16="http://schemas.microsoft.com/office/drawing/2014/main" val="654488680"/>
+                  </a:ext>
+                </a:extLst>
+              </a:tr>
+              <a:tr h="370840">
+                <a:tc>
+                  <a:txBody>
+                    <a:bodyPr/>
+                    <a:lstStyle/>
+                    <a:p>
+                      <a:r>
+                        <a:rPr lang="pt-BR" dirty="0"/>
+                        <a:t>1</a:t>
+                      </a:r>
+                      <a:endParaRPr lang="en-US" dirty="0"/>
+                    </a:p>
+                  </a:txBody>
+                  <a:tcPr>
+                    <a:lnL w="12700" cap="flat" cmpd="sng" algn="ctr">
+                      <a:solidFill>
+                        <a:schemeClr val="tx1"/>
+                      </a:solidFill>
+                      <a:prstDash val="solid"/>
+                      <a:round/>
+                      <a:headEnd type="none" w="med" len="med"/>
+                      <a:tailEnd type="none" w="med" len="med"/>
+                    </a:lnL>
+                    <a:lnR w="12700" cap="flat" cmpd="sng" algn="ctr">
+                      <a:solidFill>
+                        <a:schemeClr val="tx1"/>
+                      </a:solidFill>
+                      <a:prstDash val="solid"/>
+                      <a:round/>
+                      <a:headEnd type="none" w="med" len="med"/>
+                      <a:tailEnd type="none" w="med" len="med"/>
+                    </a:lnR>
+                    <a:lnT w="12700" cap="flat" cmpd="sng" algn="ctr">
+                      <a:solidFill>
+                        <a:schemeClr val="tx1"/>
+                      </a:solidFill>
+                      <a:prstDash val="solid"/>
+                      <a:round/>
+                      <a:headEnd type="none" w="med" len="med"/>
+                      <a:tailEnd type="none" w="med" len="med"/>
+                    </a:lnT>
+                    <a:lnB w="12700" cap="flat" cmpd="sng" algn="ctr">
+                      <a:solidFill>
+                        <a:schemeClr val="tx1"/>
+                      </a:solidFill>
+                      <a:prstDash val="solid"/>
+                      <a:round/>
+                      <a:headEnd type="none" w="med" len="med"/>
+                      <a:tailEnd type="none" w="med" len="med"/>
+                    </a:lnB>
+                    <a:lnTlToBr w="12700" cmpd="sng">
+                      <a:noFill/>
+                      <a:prstDash val="solid"/>
+                    </a:lnTlToBr>
+                    <a:lnBlToTr w="12700" cmpd="sng">
+                      <a:noFill/>
+                      <a:prstDash val="solid"/>
+                    </a:lnBlToTr>
+                  </a:tcPr>
+                </a:tc>
+                <a:tc>
+                  <a:txBody>
+                    <a:bodyPr/>
+                    <a:lstStyle/>
+                    <a:p>
+                      <a:r>
+                        <a:rPr lang="pt-BR" dirty="0"/>
+                        <a:t>9</a:t>
+                      </a:r>
+                      <a:endParaRPr lang="en-US" dirty="0"/>
+                    </a:p>
+                  </a:txBody>
+                  <a:tcPr>
+                    <a:lnL w="12700" cap="flat" cmpd="sng" algn="ctr">
+                      <a:solidFill>
+                        <a:schemeClr val="tx1"/>
+                      </a:solidFill>
+                      <a:prstDash val="solid"/>
+                      <a:round/>
+                      <a:headEnd type="none" w="med" len="med"/>
+                      <a:tailEnd type="none" w="med" len="med"/>
+                    </a:lnL>
+                    <a:lnR w="12700" cap="flat" cmpd="sng" algn="ctr">
+                      <a:solidFill>
+                        <a:schemeClr val="tx1"/>
+                      </a:solidFill>
+                      <a:prstDash val="solid"/>
+                      <a:round/>
+                      <a:headEnd type="none" w="med" len="med"/>
+                      <a:tailEnd type="none" w="med" len="med"/>
+                    </a:lnR>
+                    <a:lnT w="12700" cap="flat" cmpd="sng" algn="ctr">
+                      <a:solidFill>
+                        <a:schemeClr val="tx1"/>
+                      </a:solidFill>
+                      <a:prstDash val="solid"/>
+                      <a:round/>
+                      <a:headEnd type="none" w="med" len="med"/>
+                      <a:tailEnd type="none" w="med" len="med"/>
+                    </a:lnT>
+                    <a:lnB w="12700" cap="flat" cmpd="sng" algn="ctr">
+                      <a:solidFill>
+                        <a:schemeClr val="tx1"/>
+                      </a:solidFill>
+                      <a:prstDash val="solid"/>
+                      <a:round/>
+                      <a:headEnd type="none" w="med" len="med"/>
+                      <a:tailEnd type="none" w="med" len="med"/>
+                    </a:lnB>
+                    <a:lnTlToBr w="12700" cmpd="sng">
+                      <a:noFill/>
+                      <a:prstDash val="solid"/>
+                    </a:lnTlToBr>
+                    <a:lnBlToTr w="12700" cmpd="sng">
+                      <a:noFill/>
+                      <a:prstDash val="solid"/>
+                    </a:lnBlToTr>
+                  </a:tcPr>
+                </a:tc>
+                <a:tc>
+                  <a:txBody>
+                    <a:bodyPr/>
+                    <a:lstStyle/>
+                    <a:p>
+                      <a:r>
+                        <a:rPr lang="pt-BR" dirty="0"/>
+                        <a:t>5</a:t>
+                      </a:r>
+                      <a:endParaRPr lang="en-US" dirty="0"/>
+                    </a:p>
+                  </a:txBody>
+                  <a:tcPr>
+                    <a:lnL w="12700" cap="flat" cmpd="sng" algn="ctr">
+                      <a:solidFill>
+                        <a:schemeClr val="tx1"/>
+                      </a:solidFill>
+                      <a:prstDash val="solid"/>
+                      <a:round/>
+                      <a:headEnd type="none" w="med" len="med"/>
+                      <a:tailEnd type="none" w="med" len="med"/>
+                    </a:lnL>
+                    <a:lnR w="12700" cap="flat" cmpd="sng" algn="ctr">
+                      <a:solidFill>
+                        <a:schemeClr val="tx1"/>
+                      </a:solidFill>
+                      <a:prstDash val="solid"/>
+                      <a:round/>
+                      <a:headEnd type="none" w="med" len="med"/>
+                      <a:tailEnd type="none" w="med" len="med"/>
+                    </a:lnR>
+                    <a:lnT w="12700" cap="flat" cmpd="sng" algn="ctr">
+                      <a:solidFill>
+                        <a:schemeClr val="tx1"/>
+                      </a:solidFill>
+                      <a:prstDash val="solid"/>
+                      <a:round/>
+                      <a:headEnd type="none" w="med" len="med"/>
+                      <a:tailEnd type="none" w="med" len="med"/>
+                    </a:lnT>
+                    <a:lnB w="12700" cap="flat" cmpd="sng" algn="ctr">
+                      <a:solidFill>
+                        <a:schemeClr val="tx1"/>
+                      </a:solidFill>
+                      <a:prstDash val="solid"/>
+                      <a:round/>
+                      <a:headEnd type="none" w="med" len="med"/>
+                      <a:tailEnd type="none" w="med" len="med"/>
+                    </a:lnB>
+                    <a:lnTlToBr w="12700" cmpd="sng">
+                      <a:noFill/>
+                      <a:prstDash val="solid"/>
+                    </a:lnTlToBr>
+                    <a:lnBlToTr w="12700" cmpd="sng">
+                      <a:noFill/>
+                      <a:prstDash val="solid"/>
+                    </a:lnBlToTr>
+                  </a:tcPr>
+                </a:tc>
+                <a:tc>
+                  <a:txBody>
+                    <a:bodyPr/>
+                    <a:lstStyle/>
+                    <a:p>
+                      <a:r>
+                        <a:rPr lang="pt-BR" dirty="0"/>
+                        <a:t>2</a:t>
+                      </a:r>
+                      <a:endParaRPr lang="en-US" dirty="0"/>
+                    </a:p>
+                  </a:txBody>
+                  <a:tcPr>
+                    <a:lnL w="12700" cap="flat" cmpd="sng" algn="ctr">
+                      <a:solidFill>
+                        <a:schemeClr val="tx1"/>
+                      </a:solidFill>
+                      <a:prstDash val="solid"/>
+                      <a:round/>
+                      <a:headEnd type="none" w="med" len="med"/>
+                      <a:tailEnd type="none" w="med" len="med"/>
+                    </a:lnL>
+                    <a:lnR w="12700" cap="flat" cmpd="sng" algn="ctr">
+                      <a:solidFill>
+                        <a:schemeClr val="tx1"/>
+                      </a:solidFill>
+                      <a:prstDash val="solid"/>
+                      <a:round/>
+                      <a:headEnd type="none" w="med" len="med"/>
+                      <a:tailEnd type="none" w="med" len="med"/>
+                    </a:lnR>
+                    <a:lnT w="12700" cap="flat" cmpd="sng" algn="ctr">
+                      <a:solidFill>
+                        <a:schemeClr val="tx1"/>
+                      </a:solidFill>
+                      <a:prstDash val="solid"/>
+                      <a:round/>
+                      <a:headEnd type="none" w="med" len="med"/>
+                      <a:tailEnd type="none" w="med" len="med"/>
+                    </a:lnT>
+                    <a:lnB w="12700" cap="flat" cmpd="sng" algn="ctr">
+                      <a:solidFill>
+                        <a:schemeClr val="tx1"/>
+                      </a:solidFill>
+                      <a:prstDash val="solid"/>
+                      <a:round/>
+                      <a:headEnd type="none" w="med" len="med"/>
+                      <a:tailEnd type="none" w="med" len="med"/>
+                    </a:lnB>
+                    <a:lnTlToBr w="12700" cmpd="sng">
+                      <a:noFill/>
+                      <a:prstDash val="solid"/>
+                    </a:lnTlToBr>
+                    <a:lnBlToTr w="12700" cmpd="sng">
+                      <a:noFill/>
+                      <a:prstDash val="solid"/>
+                    </a:lnBlToTr>
+                  </a:tcPr>
+                </a:tc>
+                <a:extLst>
+                  <a:ext uri="{0D108BD9-81ED-4DB2-BD59-A6C34878D82A}">
+                    <a16:rowId xmlns:a16="http://schemas.microsoft.com/office/drawing/2014/main" val="652569694"/>
+                  </a:ext>
+                </a:extLst>
+              </a:tr>
+              <a:tr h="370840">
+                <a:tc>
+                  <a:txBody>
+                    <a:bodyPr/>
+                    <a:lstStyle/>
+                    <a:p>
+                      <a:r>
+                        <a:rPr lang="pt-BR" dirty="0"/>
+                        <a:t>3</a:t>
+                      </a:r>
+                      <a:endParaRPr lang="en-US" dirty="0"/>
+                    </a:p>
+                  </a:txBody>
+                  <a:tcPr>
+                    <a:lnL w="12700" cap="flat" cmpd="sng" algn="ctr">
+                      <a:solidFill>
+                        <a:schemeClr val="tx1"/>
+                      </a:solidFill>
+                      <a:prstDash val="solid"/>
+                      <a:round/>
+                      <a:headEnd type="none" w="med" len="med"/>
+                      <a:tailEnd type="none" w="med" len="med"/>
+                    </a:lnL>
+                    <a:lnR w="12700" cap="flat" cmpd="sng" algn="ctr">
+                      <a:solidFill>
+                        <a:schemeClr val="tx1"/>
+                      </a:solidFill>
+                      <a:prstDash val="solid"/>
+                      <a:round/>
+                      <a:headEnd type="none" w="med" len="med"/>
+                      <a:tailEnd type="none" w="med" len="med"/>
+                    </a:lnR>
+                    <a:lnT w="12700" cap="flat" cmpd="sng" algn="ctr">
+                      <a:solidFill>
+                        <a:schemeClr val="tx1"/>
+                      </a:solidFill>
+                      <a:prstDash val="solid"/>
+                      <a:round/>
+                      <a:headEnd type="none" w="med" len="med"/>
+                      <a:tailEnd type="none" w="med" len="med"/>
+                    </a:lnT>
+                    <a:lnB w="12700" cap="flat" cmpd="sng" algn="ctr">
+                      <a:solidFill>
+                        <a:schemeClr val="tx1"/>
+                      </a:solidFill>
+                      <a:prstDash val="solid"/>
+                      <a:round/>
+                      <a:headEnd type="none" w="med" len="med"/>
+                      <a:tailEnd type="none" w="med" len="med"/>
+                    </a:lnB>
+                    <a:lnTlToBr w="12700" cmpd="sng">
+                      <a:noFill/>
+                      <a:prstDash val="solid"/>
+                    </a:lnTlToBr>
+                    <a:lnBlToTr w="12700" cmpd="sng">
+                      <a:noFill/>
+                      <a:prstDash val="solid"/>
+                    </a:lnBlToTr>
+                  </a:tcPr>
+                </a:tc>
+                <a:tc>
+                  <a:txBody>
+                    <a:bodyPr/>
+                    <a:lstStyle/>
+                    <a:p>
+                      <a:r>
+                        <a:rPr lang="pt-BR" dirty="0"/>
+                        <a:t>6</a:t>
+                      </a:r>
+                      <a:endParaRPr lang="en-US" dirty="0"/>
+                    </a:p>
+                  </a:txBody>
+                  <a:tcPr>
+                    <a:lnL w="12700" cap="flat" cmpd="sng" algn="ctr">
+                      <a:solidFill>
+                        <a:schemeClr val="tx1"/>
+                      </a:solidFill>
+                      <a:prstDash val="solid"/>
+                      <a:round/>
+                      <a:headEnd type="none" w="med" len="med"/>
+                      <a:tailEnd type="none" w="med" len="med"/>
+                    </a:lnL>
+                    <a:lnR w="12700" cap="flat" cmpd="sng" algn="ctr">
+                      <a:solidFill>
+                        <a:schemeClr val="tx1"/>
+                      </a:solidFill>
+                      <a:prstDash val="solid"/>
+                      <a:round/>
+                      <a:headEnd type="none" w="med" len="med"/>
+                      <a:tailEnd type="none" w="med" len="med"/>
+                    </a:lnR>
+                    <a:lnT w="12700" cap="flat" cmpd="sng" algn="ctr">
+                      <a:solidFill>
+                        <a:schemeClr val="tx1"/>
+                      </a:solidFill>
+                      <a:prstDash val="solid"/>
+                      <a:round/>
+                      <a:headEnd type="none" w="med" len="med"/>
+                      <a:tailEnd type="none" w="med" len="med"/>
+                    </a:lnT>
+                    <a:lnB w="12700" cap="flat" cmpd="sng" algn="ctr">
+                      <a:solidFill>
+                        <a:schemeClr val="tx1"/>
+                      </a:solidFill>
+                      <a:prstDash val="solid"/>
+                      <a:round/>
+                      <a:headEnd type="none" w="med" len="med"/>
+                      <a:tailEnd type="none" w="med" len="med"/>
+                    </a:lnB>
+                    <a:lnTlToBr w="12700" cmpd="sng">
+                      <a:noFill/>
+                      <a:prstDash val="solid"/>
+                    </a:lnTlToBr>
+                    <a:lnBlToTr w="12700" cmpd="sng">
+                      <a:noFill/>
+                      <a:prstDash val="solid"/>
+                    </a:lnBlToTr>
+                  </a:tcPr>
+                </a:tc>
+                <a:tc>
+                  <a:txBody>
+                    <a:bodyPr/>
+                    <a:lstStyle/>
+                    <a:p>
+                      <a:r>
+                        <a:rPr lang="pt-BR" dirty="0"/>
+                        <a:t>1</a:t>
+                      </a:r>
+                      <a:endParaRPr lang="en-US" dirty="0"/>
+                    </a:p>
+                  </a:txBody>
+                  <a:tcPr>
+                    <a:lnL w="12700" cap="flat" cmpd="sng" algn="ctr">
+                      <a:solidFill>
+                        <a:schemeClr val="tx1"/>
+                      </a:solidFill>
+                      <a:prstDash val="solid"/>
+                      <a:round/>
+                      <a:headEnd type="none" w="med" len="med"/>
+                      <a:tailEnd type="none" w="med" len="med"/>
+                    </a:lnL>
+                    <a:lnR w="12700" cap="flat" cmpd="sng" algn="ctr">
+                      <a:solidFill>
+                        <a:schemeClr val="tx1"/>
+                      </a:solidFill>
+                      <a:prstDash val="solid"/>
+                      <a:round/>
+                      <a:headEnd type="none" w="med" len="med"/>
+                      <a:tailEnd type="none" w="med" len="med"/>
+                    </a:lnR>
+                    <a:lnT w="12700" cap="flat" cmpd="sng" algn="ctr">
+                      <a:solidFill>
+                        <a:schemeClr val="tx1"/>
+                      </a:solidFill>
+                      <a:prstDash val="solid"/>
+                      <a:round/>
+                      <a:headEnd type="none" w="med" len="med"/>
+                      <a:tailEnd type="none" w="med" len="med"/>
+                    </a:lnT>
+                    <a:lnB w="12700" cap="flat" cmpd="sng" algn="ctr">
+                      <a:solidFill>
+                        <a:schemeClr val="tx1"/>
+                      </a:solidFill>
+                      <a:prstDash val="solid"/>
+                      <a:round/>
+                      <a:headEnd type="none" w="med" len="med"/>
+                      <a:tailEnd type="none" w="med" len="med"/>
+                    </a:lnB>
+                    <a:lnTlToBr w="12700" cmpd="sng">
+                      <a:noFill/>
+                      <a:prstDash val="solid"/>
+                    </a:lnTlToBr>
+                    <a:lnBlToTr w="12700" cmpd="sng">
+                      <a:noFill/>
+                      <a:prstDash val="solid"/>
+                    </a:lnBlToTr>
+                  </a:tcPr>
+                </a:tc>
+                <a:tc>
+                  <a:txBody>
+                    <a:bodyPr/>
+                    <a:lstStyle/>
+                    <a:p>
+                      <a:r>
+                        <a:rPr lang="pt-BR" dirty="0"/>
+                        <a:t>8</a:t>
+                      </a:r>
+                      <a:endParaRPr lang="en-US" dirty="0"/>
+                    </a:p>
+                  </a:txBody>
+                  <a:tcPr>
+                    <a:lnL w="12700" cap="flat" cmpd="sng" algn="ctr">
+                      <a:solidFill>
+                        <a:schemeClr val="tx1"/>
+                      </a:solidFill>
+                      <a:prstDash val="solid"/>
+                      <a:round/>
+                      <a:headEnd type="none" w="med" len="med"/>
+                      <a:tailEnd type="none" w="med" len="med"/>
+                    </a:lnL>
+                    <a:lnR w="12700" cap="flat" cmpd="sng" algn="ctr">
+                      <a:solidFill>
+                        <a:schemeClr val="tx1"/>
+                      </a:solidFill>
+                      <a:prstDash val="solid"/>
+                      <a:round/>
+                      <a:headEnd type="none" w="med" len="med"/>
+                      <a:tailEnd type="none" w="med" len="med"/>
+                    </a:lnR>
+                    <a:lnT w="12700" cap="flat" cmpd="sng" algn="ctr">
+                      <a:solidFill>
+                        <a:schemeClr val="tx1"/>
+                      </a:solidFill>
+                      <a:prstDash val="solid"/>
+                      <a:round/>
+                      <a:headEnd type="none" w="med" len="med"/>
+                      <a:tailEnd type="none" w="med" len="med"/>
+                    </a:lnT>
+                    <a:lnB w="12700" cap="flat" cmpd="sng" algn="ctr">
+                      <a:solidFill>
+                        <a:schemeClr val="tx1"/>
+                      </a:solidFill>
+                      <a:prstDash val="solid"/>
+                      <a:round/>
+                      <a:headEnd type="none" w="med" len="med"/>
+                      <a:tailEnd type="none" w="med" len="med"/>
+                    </a:lnB>
+                    <a:lnTlToBr w="12700" cmpd="sng">
+                      <a:noFill/>
+                      <a:prstDash val="solid"/>
+                    </a:lnTlToBr>
+                    <a:lnBlToTr w="12700" cmpd="sng">
+                      <a:noFill/>
+                      <a:prstDash val="solid"/>
+                    </a:lnBlToTr>
+                  </a:tcPr>
+                </a:tc>
+                <a:extLst>
+                  <a:ext uri="{0D108BD9-81ED-4DB2-BD59-A6C34878D82A}">
+                    <a16:rowId xmlns:a16="http://schemas.microsoft.com/office/drawing/2014/main" val="200740461"/>
+                  </a:ext>
+                </a:extLst>
+              </a:tr>
+            </a:tbl>
+          </a:graphicData>
+        </a:graphic>
+      </p:graphicFrame>
+      <p:sp>
+        <p:nvSpPr>
+          <p:cNvPr id="5" name="TextBox 4">
+            <a:extLst>
+              <a:ext uri="{FF2B5EF4-FFF2-40B4-BE49-F238E27FC236}">
+                <a16:creationId xmlns:a16="http://schemas.microsoft.com/office/drawing/2014/main" id="{C8ED1C15-0942-089C-7805-CB510EC72FB1}"/>
+              </a:ext>
+            </a:extLst>
+          </p:cNvPr>
+          <p:cNvSpPr txBox="1"/>
+          <p:nvPr/>
+        </p:nvSpPr>
+        <p:spPr>
+          <a:xfrm rot="16200000">
+            <a:off x="571748" y="3800593"/>
+            <a:ext cx="902235" cy="369332"/>
+          </a:xfrm>
+          <a:prstGeom prst="rect">
+            <a:avLst/>
+          </a:prstGeom>
+          <a:noFill/>
+        </p:spPr>
+        <p:txBody>
+          <a:bodyPr wrap="none" rtlCol="0">
+            <a:spAutoFit/>
+          </a:bodyPr>
+          <a:lstStyle/>
+          <a:p>
+            <a:r>
+              <a:rPr lang="pt-BR" dirty="0"/>
+              <a:t>Estados</a:t>
+            </a:r>
+            <a:endParaRPr lang="en-US" dirty="0"/>
+          </a:p>
+        </p:txBody>
+      </p:sp>
+      <p:sp>
+        <p:nvSpPr>
+          <p:cNvPr id="6" name="TextBox 5">
+            <a:extLst>
+              <a:ext uri="{FF2B5EF4-FFF2-40B4-BE49-F238E27FC236}">
+                <a16:creationId xmlns:a16="http://schemas.microsoft.com/office/drawing/2014/main" id="{35E39535-416D-18D0-A4E0-B8FD0EF37FF9}"/>
+              </a:ext>
+            </a:extLst>
+          </p:cNvPr>
+          <p:cNvSpPr txBox="1"/>
+          <p:nvPr/>
+        </p:nvSpPr>
+        <p:spPr>
+          <a:xfrm>
+            <a:off x="2102185" y="2745693"/>
+            <a:ext cx="740587" cy="369332"/>
+          </a:xfrm>
+          <a:prstGeom prst="rect">
+            <a:avLst/>
+          </a:prstGeom>
+          <a:noFill/>
+        </p:spPr>
+        <p:txBody>
+          <a:bodyPr wrap="none" rtlCol="0">
+            <a:spAutoFit/>
+          </a:bodyPr>
+          <a:lstStyle/>
+          <a:p>
+            <a:r>
+              <a:rPr lang="pt-BR" dirty="0"/>
+              <a:t>Ações</a:t>
+            </a:r>
+            <a:endParaRPr lang="en-US" dirty="0"/>
+          </a:p>
+        </p:txBody>
+      </p:sp>
     </p:spTree>
     <p:extLst>
       <p:ext uri="{BB962C8B-B14F-4D97-AF65-F5344CB8AC3E}">
@@ -6599,15 +8145,15 @@
       </p:sp>
       <p:pic>
         <p:nvPicPr>
-          <p:cNvPr id="2050" name="Picture 2" descr="Q-Learning vs. Deep Q-Learning vs. Deep Q-Network | Baeldung on Computer  Science">
+          <p:cNvPr id="5" name="Picture 4">
             <a:extLst>
               <a:ext uri="{FF2B5EF4-FFF2-40B4-BE49-F238E27FC236}">
-                <a16:creationId xmlns:a16="http://schemas.microsoft.com/office/drawing/2014/main" id="{271A5777-6004-9B57-95BB-06526F57C817}"/>
+                <a16:creationId xmlns:a16="http://schemas.microsoft.com/office/drawing/2014/main" id="{22635AC4-CE1D-B8AF-A040-2F87EF1759CD}"/>
               </a:ext>
             </a:extLst>
           </p:cNvPr>
           <p:cNvPicPr>
-            <a:picLocks noChangeAspect="1" noChangeArrowheads="1"/>
+            <a:picLocks noChangeAspect="1"/>
           </p:cNvPicPr>
           <p:nvPr/>
         </p:nvPicPr>
@@ -6619,29 +8165,18 @@
               </a:ext>
             </a:extLst>
           </a:blip>
-          <a:srcRect/>
           <a:stretch>
             <a:fillRect/>
           </a:stretch>
         </p:blipFill>
-        <p:spPr bwMode="auto">
+        <p:spPr>
           <a:xfrm>
-            <a:off x="2950508" y="3581401"/>
-            <a:ext cx="6290983" cy="3200400"/>
+            <a:off x="2982685" y="3599123"/>
+            <a:ext cx="6226629" cy="3171789"/>
           </a:xfrm>
           <a:prstGeom prst="rect">
             <a:avLst/>
           </a:prstGeom>
-          <a:noFill/>
-          <a:extLst>
-            <a:ext uri="{909E8E84-426E-40DD-AFC4-6F175D3DCCD1}">
-              <a14:hiddenFill xmlns:a14="http://schemas.microsoft.com/office/drawing/2010/main">
-                <a:solidFill>
-                  <a:srgbClr val="FFFFFF"/>
-                </a:solidFill>
-              </a14:hiddenFill>
-            </a:ext>
-          </a:extLst>
         </p:spPr>
       </p:pic>
     </p:spTree>
@@ -6679,7 +8214,7 @@
           <p:cNvPr id="2" name="Title 1">
             <a:extLst>
               <a:ext uri="{FF2B5EF4-FFF2-40B4-BE49-F238E27FC236}">
-                <a16:creationId xmlns:a16="http://schemas.microsoft.com/office/drawing/2014/main" id="{874F2722-DA1E-D930-DC99-59F795E3E8B9}"/>
+                <a16:creationId xmlns:a16="http://schemas.microsoft.com/office/drawing/2014/main" id="{7091E349-E10B-155D-AA4C-5C644F1CA204}"/>
               </a:ext>
             </a:extLst>
           </p:cNvPr>
@@ -6695,53 +8230,439 @@
           <a:bodyPr/>
           <a:lstStyle/>
           <a:p>
-            <a:endParaRPr lang="en-US"/>
+            <a:r>
+              <a:rPr lang="pt-BR" dirty="0"/>
+              <a:t>Como o </a:t>
+            </a:r>
+            <a:r>
+              <a:rPr lang="pt-BR" dirty="0" err="1"/>
+              <a:t>Q-</a:t>
+            </a:r>
+            <a:r>
+              <a:rPr lang="pt-BR" i="1" dirty="0" err="1"/>
+              <a:t>learning</a:t>
+            </a:r>
+            <a:r>
+              <a:rPr lang="pt-BR" dirty="0"/>
+              <a:t> aprende?</a:t>
+            </a:r>
+            <a:endParaRPr lang="en-US" dirty="0"/>
           </a:p>
         </p:txBody>
       </p:sp>
-      <p:sp>
-        <p:nvSpPr>
-          <p:cNvPr id="3" name="Content Placeholder 2">
+      <mc:AlternateContent xmlns:mc="http://schemas.openxmlformats.org/markup-compatibility/2006">
+        <mc:Choice xmlns:a14="http://schemas.microsoft.com/office/drawing/2010/main" Requires="a14">
+          <p:sp>
+            <p:nvSpPr>
+              <p:cNvPr id="5" name="TextBox 4">
+                <a:extLst>
+                  <a:ext uri="{FF2B5EF4-FFF2-40B4-BE49-F238E27FC236}">
+                    <a16:creationId xmlns:a16="http://schemas.microsoft.com/office/drawing/2014/main" id="{9A332D99-C136-4CA9-0B03-FA3FA5195ED6}"/>
+                  </a:ext>
+                </a:extLst>
+              </p:cNvPr>
+              <p:cNvSpPr txBox="1"/>
+              <p:nvPr/>
+            </p:nvSpPr>
+            <p:spPr>
+              <a:xfrm>
+                <a:off x="1099021" y="1874728"/>
+                <a:ext cx="9993956" cy="3108543"/>
+              </a:xfrm>
+              <a:prstGeom prst="rect">
+                <a:avLst/>
+              </a:prstGeom>
+              <a:noFill/>
+              <a:ln>
+                <a:solidFill>
+                  <a:schemeClr val="tx1"/>
+                </a:solidFill>
+              </a:ln>
+            </p:spPr>
+            <p:txBody>
+              <a:bodyPr wrap="square" rtlCol="0">
+                <a:spAutoFit/>
+              </a:bodyPr>
+              <a:lstStyle/>
+              <a:p>
+                <a:pPr marL="228600" indent="-228600">
+                  <a:buFont typeface="+mj-lt"/>
+                  <a:buAutoNum type="arabicPeriod"/>
+                </a:pPr>
+                <a:r>
+                  <a:rPr lang="pt-BR" sz="2800" dirty="0"/>
+                  <a:t> Inicialize a tabela-Q com zeros.</a:t>
+                </a:r>
+              </a:p>
+              <a:p>
+                <a:pPr marL="228600" indent="-228600">
+                  <a:buFont typeface="+mj-lt"/>
+                  <a:buAutoNum type="arabicPeriod"/>
+                </a:pPr>
+                <a:r>
+                  <a:rPr lang="pt-BR" sz="2800" dirty="0"/>
+                  <a:t> Observe o estado inicial (atual) </a:t>
+                </a:r>
+                <a14:m>
+                  <m:oMath xmlns:m="http://schemas.openxmlformats.org/officeDocument/2006/math">
+                    <m:r>
+                      <a:rPr lang="pt-BR" sz="2800" b="0" i="1" smtClean="0">
+                        <a:latin typeface="Cambria Math" panose="02040503050406030204" pitchFamily="18" charset="0"/>
+                      </a:rPr>
+                      <m:t>𝑠</m:t>
+                    </m:r>
+                  </m:oMath>
+                </a14:m>
+                <a:r>
+                  <a:rPr lang="pt-BR" sz="2800" dirty="0"/>
+                  <a:t>.</a:t>
+                </a:r>
+              </a:p>
+              <a:p>
+                <a:pPr marL="228600" indent="-228600">
+                  <a:buFont typeface="+mj-lt"/>
+                  <a:buAutoNum type="arabicPeriod"/>
+                </a:pPr>
+                <a:r>
+                  <a:rPr lang="pt-BR" sz="2800" dirty="0"/>
+                  <a:t> Repita até o fim do </a:t>
+                </a:r>
+                <a:r>
+                  <a:rPr lang="pt-BR" sz="2800" b="1" dirty="0"/>
+                  <a:t>episódio</a:t>
+                </a:r>
+                <a:r>
+                  <a:rPr lang="pt-BR" sz="2800" dirty="0"/>
+                  <a:t>:</a:t>
+                </a:r>
+              </a:p>
+              <a:p>
+                <a:pPr marL="628650" lvl="1" indent="-171450">
+                  <a:buFont typeface="Courier New" panose="02070309020205020404" pitchFamily="49" charset="0"/>
+                  <a:buChar char="o"/>
+                </a:pPr>
+                <a:r>
+                  <a:rPr lang="pt-BR" sz="2800" dirty="0"/>
+                  <a:t> Escolha uma ação </a:t>
+                </a:r>
+                <a14:m>
+                  <m:oMath xmlns:m="http://schemas.openxmlformats.org/officeDocument/2006/math">
+                    <m:r>
+                      <a:rPr lang="pt-BR" sz="2800" b="0" i="1" smtClean="0">
+                        <a:latin typeface="Cambria Math" panose="02040503050406030204" pitchFamily="18" charset="0"/>
+                      </a:rPr>
+                      <m:t>𝑎</m:t>
+                    </m:r>
+                  </m:oMath>
+                </a14:m>
+                <a:r>
+                  <a:rPr lang="pt-BR" sz="2800" dirty="0"/>
+                  <a:t> usando a </a:t>
+                </a:r>
+                <a:r>
+                  <a:rPr lang="pt-BR" sz="2800" b="1" dirty="0"/>
+                  <a:t>política </a:t>
+                </a:r>
+                <a14:m>
+                  <m:oMath xmlns:m="http://schemas.openxmlformats.org/officeDocument/2006/math">
+                    <m:r>
+                      <a:rPr lang="pt-BR" sz="2800" b="1" i="1" smtClean="0">
+                        <a:latin typeface="Cambria Math" panose="02040503050406030204" pitchFamily="18" charset="0"/>
+                        <a:ea typeface="Cambria Math" panose="02040503050406030204" pitchFamily="18" charset="0"/>
+                      </a:rPr>
+                      <m:t>𝜺</m:t>
+                    </m:r>
+                  </m:oMath>
+                </a14:m>
+                <a:r>
+                  <a:rPr lang="pt-BR" sz="2800" b="1" dirty="0"/>
+                  <a:t>-</a:t>
+                </a:r>
+                <a:r>
+                  <a:rPr lang="pt-BR" sz="2800" b="1" i="1" dirty="0" err="1"/>
+                  <a:t>greedy</a:t>
+                </a:r>
+                <a:r>
+                  <a:rPr lang="pt-BR" sz="2800" dirty="0"/>
+                  <a:t>.</a:t>
+                </a:r>
+              </a:p>
+              <a:p>
+                <a:pPr marL="628650" lvl="1" indent="-171450">
+                  <a:buFont typeface="Courier New" panose="02070309020205020404" pitchFamily="49" charset="0"/>
+                  <a:buChar char="o"/>
+                </a:pPr>
+                <a:r>
+                  <a:rPr lang="pt-BR" sz="2800" dirty="0"/>
+                  <a:t> Execute a ação </a:t>
+                </a:r>
+                <a14:m>
+                  <m:oMath xmlns:m="http://schemas.openxmlformats.org/officeDocument/2006/math">
+                    <m:r>
+                      <a:rPr lang="pt-BR" sz="2800" i="1">
+                        <a:latin typeface="Cambria Math" panose="02040503050406030204" pitchFamily="18" charset="0"/>
+                      </a:rPr>
+                      <m:t>𝑎</m:t>
+                    </m:r>
+                  </m:oMath>
+                </a14:m>
+                <a:r>
+                  <a:rPr lang="pt-BR" sz="2800" dirty="0"/>
+                  <a:t>, observe o novo estado </a:t>
+                </a:r>
+                <a14:m>
+                  <m:oMath xmlns:m="http://schemas.openxmlformats.org/officeDocument/2006/math">
+                    <m:sSup>
+                      <m:sSupPr>
+                        <m:ctrlPr>
+                          <a:rPr lang="pt-BR" sz="2800" i="1" smtClean="0">
+                            <a:latin typeface="Cambria Math" panose="02040503050406030204" pitchFamily="18" charset="0"/>
+                          </a:rPr>
+                        </m:ctrlPr>
+                      </m:sSupPr>
+                      <m:e>
+                        <m:r>
+                          <a:rPr lang="pt-BR" sz="2800" b="0" i="1" smtClean="0">
+                            <a:latin typeface="Cambria Math" panose="02040503050406030204" pitchFamily="18" charset="0"/>
+                          </a:rPr>
+                          <m:t>𝑠</m:t>
+                        </m:r>
+                      </m:e>
+                      <m:sup>
+                        <m:r>
+                          <a:rPr lang="pt-BR" sz="2800" b="0" i="1" smtClean="0">
+                            <a:latin typeface="Cambria Math" panose="02040503050406030204" pitchFamily="18" charset="0"/>
+                          </a:rPr>
+                          <m:t>′</m:t>
+                        </m:r>
+                      </m:sup>
+                    </m:sSup>
+                  </m:oMath>
+                </a14:m>
+                <a:r>
+                  <a:rPr lang="pt-BR" sz="2800" dirty="0"/>
+                  <a:t> e a recompensa </a:t>
+                </a:r>
+                <a14:m>
+                  <m:oMath xmlns:m="http://schemas.openxmlformats.org/officeDocument/2006/math">
+                    <m:r>
+                      <a:rPr lang="pt-BR" sz="2800" b="0" i="1" smtClean="0">
+                        <a:latin typeface="Cambria Math" panose="02040503050406030204" pitchFamily="18" charset="0"/>
+                      </a:rPr>
+                      <m:t>𝑟</m:t>
+                    </m:r>
+                  </m:oMath>
+                </a14:m>
+                <a:r>
+                  <a:rPr lang="pt-BR" sz="2800" dirty="0"/>
+                  <a:t>.</a:t>
+                </a:r>
+              </a:p>
+              <a:p>
+                <a:pPr marL="628650" lvl="1" indent="-171450">
+                  <a:buFont typeface="Courier New" panose="02070309020205020404" pitchFamily="49" charset="0"/>
+                  <a:buChar char="o"/>
+                </a:pPr>
+                <a:r>
+                  <a:rPr lang="pt-BR" sz="2800" b="1" dirty="0"/>
+                  <a:t> Atualize o valor </a:t>
+                </a:r>
+                <a14:m>
+                  <m:oMath xmlns:m="http://schemas.openxmlformats.org/officeDocument/2006/math">
+                    <m:r>
+                      <a:rPr lang="pt-BR" sz="2800" i="1">
+                        <a:latin typeface="Cambria Math" panose="02040503050406030204" pitchFamily="18" charset="0"/>
+                      </a:rPr>
+                      <m:t>𝑄</m:t>
+                    </m:r>
+                    <m:r>
+                      <a:rPr lang="pt-BR" sz="2800" i="1">
+                        <a:latin typeface="Cambria Math" panose="02040503050406030204" pitchFamily="18" charset="0"/>
+                      </a:rPr>
+                      <m:t>(</m:t>
+                    </m:r>
+                    <m:r>
+                      <a:rPr lang="pt-BR" sz="2800" i="1">
+                        <a:latin typeface="Cambria Math" panose="02040503050406030204" pitchFamily="18" charset="0"/>
+                      </a:rPr>
+                      <m:t>𝑠</m:t>
+                    </m:r>
+                    <m:r>
+                      <a:rPr lang="pt-BR" sz="2800" i="1">
+                        <a:latin typeface="Cambria Math" panose="02040503050406030204" pitchFamily="18" charset="0"/>
+                      </a:rPr>
+                      <m:t>,</m:t>
+                    </m:r>
+                    <m:r>
+                      <a:rPr lang="pt-BR" sz="2800" i="1">
+                        <a:latin typeface="Cambria Math" panose="02040503050406030204" pitchFamily="18" charset="0"/>
+                      </a:rPr>
+                      <m:t>𝑎</m:t>
+                    </m:r>
+                    <m:r>
+                      <a:rPr lang="pt-BR" sz="2800" i="1">
+                        <a:latin typeface="Cambria Math" panose="02040503050406030204" pitchFamily="18" charset="0"/>
+                      </a:rPr>
+                      <m:t>)</m:t>
+                    </m:r>
+                  </m:oMath>
+                </a14:m>
+                <a:r>
+                  <a:rPr lang="pt-BR" sz="2800" b="1" dirty="0"/>
+                  <a:t> na tabela-Q.</a:t>
+                </a:r>
+                <a:endParaRPr lang="pt-BR" sz="2800" dirty="0"/>
+              </a:p>
+              <a:p>
+                <a:pPr marL="628650" lvl="1" indent="-171450">
+                  <a:buFont typeface="Courier New" panose="02070309020205020404" pitchFamily="49" charset="0"/>
+                  <a:buChar char="o"/>
+                </a:pPr>
+                <a:r>
+                  <a:rPr lang="pt-BR" sz="2800" dirty="0"/>
+                  <a:t> Atualize o estado atual: </a:t>
+                </a:r>
+                <a14:m>
+                  <m:oMath xmlns:m="http://schemas.openxmlformats.org/officeDocument/2006/math">
+                    <m:sSup>
+                      <m:sSupPr>
+                        <m:ctrlPr>
+                          <a:rPr lang="pt-BR" sz="2800" i="1">
+                            <a:latin typeface="Cambria Math" panose="02040503050406030204" pitchFamily="18" charset="0"/>
+                          </a:rPr>
+                        </m:ctrlPr>
+                      </m:sSupPr>
+                      <m:e>
+                        <m:r>
+                          <a:rPr lang="pt-BR" sz="2800" i="1">
+                            <a:latin typeface="Cambria Math" panose="02040503050406030204" pitchFamily="18" charset="0"/>
+                          </a:rPr>
+                          <m:t>𝑠</m:t>
+                        </m:r>
+                        <m:r>
+                          <a:rPr lang="pt-BR" sz="2800" i="1" smtClean="0">
+                            <a:latin typeface="Cambria Math" panose="02040503050406030204" pitchFamily="18" charset="0"/>
+                            <a:ea typeface="Cambria Math" panose="02040503050406030204" pitchFamily="18" charset="0"/>
+                          </a:rPr>
+                          <m:t>←</m:t>
+                        </m:r>
+                        <m:r>
+                          <a:rPr lang="pt-BR" sz="2800" i="1">
+                            <a:latin typeface="Cambria Math" panose="02040503050406030204" pitchFamily="18" charset="0"/>
+                          </a:rPr>
+                          <m:t>𝑠</m:t>
+                        </m:r>
+                      </m:e>
+                      <m:sup>
+                        <m:r>
+                          <a:rPr lang="pt-BR" sz="2800" i="1">
+                            <a:latin typeface="Cambria Math" panose="02040503050406030204" pitchFamily="18" charset="0"/>
+                          </a:rPr>
+                          <m:t>′</m:t>
+                        </m:r>
+                      </m:sup>
+                    </m:sSup>
+                  </m:oMath>
+                </a14:m>
+                <a:r>
+                  <a:rPr lang="pt-BR" sz="2800" dirty="0"/>
+                  <a:t>.</a:t>
+                </a:r>
+              </a:p>
+            </p:txBody>
+          </p:sp>
+        </mc:Choice>
+        <mc:Fallback>
+          <p:sp>
+            <p:nvSpPr>
+              <p:cNvPr id="5" name="TextBox 4">
+                <a:extLst>
+                  <a:ext uri="{FF2B5EF4-FFF2-40B4-BE49-F238E27FC236}">
+                    <a16:creationId xmlns:a16="http://schemas.microsoft.com/office/drawing/2014/main" id="{9A332D99-C136-4CA9-0B03-FA3FA5195ED6}"/>
+                  </a:ext>
+                </a:extLst>
+              </p:cNvPr>
+              <p:cNvSpPr txBox="1">
+                <a:spLocks noRot="1" noChangeAspect="1" noMove="1" noResize="1" noEditPoints="1" noAdjustHandles="1" noChangeArrowheads="1" noChangeShapeType="1" noTextEdit="1"/>
+              </p:cNvSpPr>
+              <p:nvPr/>
+            </p:nvSpPr>
+            <p:spPr>
+              <a:xfrm>
+                <a:off x="1099021" y="1874728"/>
+                <a:ext cx="9993956" cy="3108543"/>
+              </a:xfrm>
+              <a:prstGeom prst="rect">
+                <a:avLst/>
+              </a:prstGeom>
+              <a:blipFill>
+                <a:blip r:embed="rId3"/>
+                <a:stretch>
+                  <a:fillRect l="-1218" t="-1957" b="-4697"/>
+                </a:stretch>
+              </a:blipFill>
+              <a:ln>
+                <a:solidFill>
+                  <a:schemeClr val="tx1"/>
+                </a:solidFill>
+              </a:ln>
+            </p:spPr>
+            <p:txBody>
+              <a:bodyPr/>
+              <a:lstStyle/>
+              <a:p>
+                <a:r>
+                  <a:rPr lang="en-US">
+                    <a:noFill/>
+                  </a:rPr>
+                  <a:t> </a:t>
+                </a:r>
+              </a:p>
+            </p:txBody>
+          </p:sp>
+        </mc:Fallback>
+      </mc:AlternateContent>
+      <p:sp>
+        <p:nvSpPr>
+          <p:cNvPr id="9" name="TextBox 8">
             <a:extLst>
               <a:ext uri="{FF2B5EF4-FFF2-40B4-BE49-F238E27FC236}">
-                <a16:creationId xmlns:a16="http://schemas.microsoft.com/office/drawing/2014/main" id="{97BD2D05-0E48-B94D-DBC7-FBDCBC17C0A5}"/>
+                <a16:creationId xmlns:a16="http://schemas.microsoft.com/office/drawing/2014/main" id="{5C7A4183-CC79-97FF-3245-59A711D4BDF1}"/>
               </a:ext>
             </a:extLst>
           </p:cNvPr>
-          <p:cNvSpPr>
-            <a:spLocks noGrp="1"/>
-          </p:cNvSpPr>
-          <p:nvPr>
-            <p:ph idx="1"/>
-          </p:nvPr>
-        </p:nvSpPr>
-        <p:spPr/>
+          <p:cNvSpPr txBox="1"/>
+          <p:nvPr/>
+        </p:nvSpPr>
+        <p:spPr>
+          <a:xfrm>
+            <a:off x="1099021" y="5631320"/>
+            <a:ext cx="9993957" cy="954107"/>
+          </a:xfrm>
+          <a:prstGeom prst="rect">
+            <a:avLst/>
+          </a:prstGeom>
+          <a:noFill/>
+        </p:spPr>
         <p:txBody>
-          <a:bodyPr>
-            <a:normAutofit/>
+          <a:bodyPr wrap="square">
+            <a:spAutoFit/>
           </a:bodyPr>
           <a:lstStyle/>
           <a:p>
-            <a:r>
-              <a:rPr lang="pt-BR" sz="5400" b="1" dirty="0">
-                <a:solidFill>
-                  <a:srgbClr val="FF0000"/>
-                </a:solidFill>
-              </a:rPr>
-              <a:t>PAREI AQUI!!!!!!!!!!!!</a:t>
-            </a:r>
-            <a:endParaRPr lang="en-US" sz="5400" b="1" dirty="0">
-              <a:solidFill>
-                <a:srgbClr val="FF0000"/>
-              </a:solidFill>
-            </a:endParaRPr>
+            <a:pPr algn="ctr"/>
+            <a:r>
+              <a:rPr lang="pt-BR" sz="2800" dirty="0"/>
+              <a:t>O 'aprender' acontece na etapa de atualização, que veremos a seguir.</a:t>
+            </a:r>
+            <a:endParaRPr lang="en-US" sz="2800" dirty="0"/>
           </a:p>
         </p:txBody>
       </p:sp>
     </p:spTree>
     <p:extLst>
       <p:ext uri="{BB962C8B-B14F-4D97-AF65-F5344CB8AC3E}">
-        <p14:creationId xmlns:p14="http://schemas.microsoft.com/office/powerpoint/2010/main" val="3079050531"/>
+        <p14:creationId xmlns:p14="http://schemas.microsoft.com/office/powerpoint/2010/main" val="2527015132"/>
       </p:ext>
     </p:extLst>
   </p:cSld>
@@ -6773,7 +8694,7 @@
           <p:cNvPr id="2" name="Title 1">
             <a:extLst>
               <a:ext uri="{FF2B5EF4-FFF2-40B4-BE49-F238E27FC236}">
-                <a16:creationId xmlns:a16="http://schemas.microsoft.com/office/drawing/2014/main" id="{7091E349-E10B-155D-AA4C-5C644F1CA204}"/>
+                <a16:creationId xmlns:a16="http://schemas.microsoft.com/office/drawing/2014/main" id="{8B40FE1F-C1FB-195D-22B9-96044B5DA2CF}"/>
               </a:ext>
             </a:extLst>
           </p:cNvPr>
@@ -6789,7 +8710,11 @@
           <a:bodyPr/>
           <a:lstStyle/>
           <a:p>
-            <a:endParaRPr lang="en-US"/>
+            <a:r>
+              <a:rPr lang="pt-BR" dirty="0"/>
+              <a:t>O que é um episódio?</a:t>
+            </a:r>
+            <a:endParaRPr lang="en-US" dirty="0"/>
           </a:p>
         </p:txBody>
       </p:sp>
@@ -6798,7 +8723,7 @@
           <p:cNvPr id="3" name="Content Placeholder 2">
             <a:extLst>
               <a:ext uri="{FF2B5EF4-FFF2-40B4-BE49-F238E27FC236}">
-                <a16:creationId xmlns:a16="http://schemas.microsoft.com/office/drawing/2014/main" id="{A98E7639-2B44-D877-80E8-CB165DA3670E}"/>
+                <a16:creationId xmlns:a16="http://schemas.microsoft.com/office/drawing/2014/main" id="{EAC332DA-1674-3813-EFF7-0720AB3234B3}"/>
               </a:ext>
             </a:extLst>
           </p:cNvPr>
@@ -6811,26 +8736,151 @@
         </p:nvSpPr>
         <p:spPr>
           <a:xfrm>
-            <a:off x="6096000" y="1825625"/>
-            <a:ext cx="5257800" cy="4351338"/>
+            <a:off x="838201" y="1825624"/>
+            <a:ext cx="11136085" cy="5032375"/>
           </a:xfrm>
         </p:spPr>
         <p:txBody>
-          <a:bodyPr/>
+          <a:bodyPr>
+            <a:normAutofit/>
+          </a:bodyPr>
           <a:lstStyle/>
           <a:p>
             <a:r>
               <a:rPr lang="pt-BR" dirty="0"/>
-              <a:t>aa</a:t>
-            </a:r>
-            <a:endParaRPr lang="en-US" dirty="0"/>
+              <a:t>É uma sequência </a:t>
+            </a:r>
+            <a:r>
+              <a:rPr lang="pt-BR" b="1" dirty="0"/>
+              <a:t>completa</a:t>
+            </a:r>
+            <a:r>
+              <a:rPr lang="pt-BR" dirty="0"/>
+              <a:t> de interações entre o agente e o ambiente, que começa num </a:t>
+            </a:r>
+            <a:r>
+              <a:rPr lang="pt-BR" b="1" dirty="0"/>
+              <a:t>estado inicial</a:t>
+            </a:r>
+            <a:r>
+              <a:rPr lang="pt-BR" dirty="0"/>
+              <a:t> e termina quando um </a:t>
+            </a:r>
+            <a:r>
+              <a:rPr lang="pt-BR" b="1" dirty="0"/>
+              <a:t>estado terminal</a:t>
+            </a:r>
+            <a:r>
+              <a:rPr lang="pt-BR" dirty="0"/>
+              <a:t> é alcançado.</a:t>
+            </a:r>
+          </a:p>
+          <a:p>
+            <a:r>
+              <a:rPr lang="pt-BR" dirty="0"/>
+              <a:t>O episódio é como uma "partida" ou uma "tentativa":</a:t>
+            </a:r>
+          </a:p>
+          <a:p>
+            <a:pPr marL="971550" lvl="1" indent="-514350">
+              <a:buFont typeface="+mj-lt"/>
+              <a:buAutoNum type="arabicPeriod"/>
+            </a:pPr>
+            <a:r>
+              <a:rPr lang="pt-BR" b="1" dirty="0"/>
+              <a:t>Início:</a:t>
+            </a:r>
+            <a:r>
+              <a:rPr lang="pt-BR" dirty="0"/>
+              <a:t> O ambiente é resetado para uma posição inicial (e.g., o rato aparece no início do mapa).</a:t>
+            </a:r>
+          </a:p>
+          <a:p>
+            <a:pPr marL="971550" lvl="1" indent="-514350">
+              <a:buAutoNum type="arabicPeriod"/>
+            </a:pPr>
+            <a:r>
+              <a:rPr lang="pt-BR" b="1" dirty="0"/>
+              <a:t>Ciclo:</a:t>
+            </a:r>
+            <a:r>
+              <a:rPr lang="pt-BR" dirty="0"/>
+              <a:t> O agente toma ações, recebe recompensas e o ambiente muda de estado sucessivamente.</a:t>
+            </a:r>
+          </a:p>
+          <a:p>
+            <a:pPr marL="971550" lvl="1" indent="-514350">
+              <a:buAutoNum type="arabicPeriod"/>
+            </a:pPr>
+            <a:r>
+              <a:rPr lang="pt-BR" b="1" dirty="0"/>
+              <a:t>Fim:</a:t>
+            </a:r>
+            <a:r>
+              <a:rPr lang="pt-BR" dirty="0"/>
+              <a:t> O episódio se encerra quando um critério é atingido, como:</a:t>
+            </a:r>
+          </a:p>
+          <a:p>
+            <a:pPr lvl="2">
+              <a:buFont typeface="Wingdings" panose="05000000000000000000" pitchFamily="2" charset="2"/>
+              <a:buChar char="§"/>
+            </a:pPr>
+            <a:r>
+              <a:rPr lang="pt-BR" dirty="0"/>
+              <a:t>O agente atinge o </a:t>
+            </a:r>
+            <a:r>
+              <a:rPr lang="pt-BR" b="1" dirty="0"/>
+              <a:t>objetivo</a:t>
+            </a:r>
+            <a:r>
+              <a:rPr lang="pt-BR" dirty="0"/>
+              <a:t> (e.g., rato chegar ao queijo).</a:t>
+            </a:r>
+          </a:p>
+          <a:p>
+            <a:pPr lvl="2">
+              <a:buFont typeface="Wingdings" panose="05000000000000000000" pitchFamily="2" charset="2"/>
+              <a:buChar char="§"/>
+            </a:pPr>
+            <a:r>
+              <a:rPr lang="pt-BR" dirty="0"/>
+              <a:t>O agente comete um </a:t>
+            </a:r>
+            <a:r>
+              <a:rPr lang="pt-BR" b="1" dirty="0"/>
+              <a:t>erro fatal</a:t>
+            </a:r>
+            <a:r>
+              <a:rPr lang="pt-BR" dirty="0"/>
+              <a:t> (e.g., rato encontrar uma bomba).</a:t>
+            </a:r>
+          </a:p>
+          <a:p>
+            <a:pPr lvl="2">
+              <a:buFont typeface="Wingdings" panose="05000000000000000000" pitchFamily="2" charset="2"/>
+              <a:buChar char="§"/>
+            </a:pPr>
+            <a:r>
+              <a:rPr lang="pt-BR" dirty="0"/>
+              <a:t>O tempo ou o </a:t>
+            </a:r>
+            <a:r>
+              <a:rPr lang="pt-BR" b="1" dirty="0"/>
+              <a:t>limite de passos</a:t>
+            </a:r>
+            <a:r>
+              <a:rPr lang="pt-BR" dirty="0"/>
+              <a:t> esgota-se.</a:t>
+            </a:r>
           </a:p>
         </p:txBody>
       </p:sp>
     </p:spTree>
     <p:extLst>
       <p:ext uri="{BB962C8B-B14F-4D97-AF65-F5344CB8AC3E}">
-        <p14:creationId xmlns:p14="http://schemas.microsoft.com/office/powerpoint/2010/main" val="2527015132"/>
+        <p14:creationId xmlns:p14="http://schemas.microsoft.com/office/powerpoint/2010/main" val="596584239"/>
       </p:ext>
     </p:extLst>
   </p:cSld>
@@ -6845,7 +8895,13 @@
   <p:cSld>
     <p:spTree>
       <p:nvGrpSpPr>
-        <p:cNvPr id="1" name=""/>
+        <p:cNvPr id="1" name="">
+          <a:extLst>
+            <a:ext uri="{FF2B5EF4-FFF2-40B4-BE49-F238E27FC236}">
+              <a16:creationId xmlns:a16="http://schemas.microsoft.com/office/drawing/2014/main" id="{2F8A4587-A984-EA93-857E-8D1DC320AFE6}"/>
+            </a:ext>
+          </a:extLst>
+        </p:cNvPr>
         <p:cNvGrpSpPr/>
         <p:nvPr/>
       </p:nvGrpSpPr>
@@ -6862,7 +8918,7 @@
           <p:cNvPr id="2" name="Title 1">
             <a:extLst>
               <a:ext uri="{FF2B5EF4-FFF2-40B4-BE49-F238E27FC236}">
-                <a16:creationId xmlns:a16="http://schemas.microsoft.com/office/drawing/2014/main" id="{E14B07B2-D2A5-6A39-907B-E2794AA9F073}"/>
+                <a16:creationId xmlns:a16="http://schemas.microsoft.com/office/drawing/2014/main" id="{0D07A575-E745-E7EC-954B-2D561DB0ADE2}"/>
               </a:ext>
             </a:extLst>
           </p:cNvPr>
@@ -6878,110 +8934,108 @@
           <a:bodyPr/>
           <a:lstStyle/>
           <a:p>
-            <a:endParaRPr lang="en-US"/>
+            <a:r>
+              <a:rPr lang="pt-BR" dirty="0"/>
+              <a:t>O que é um episódio?</a:t>
+            </a:r>
+            <a:endParaRPr lang="en-US" dirty="0"/>
           </a:p>
         </p:txBody>
       </p:sp>
       <p:sp>
         <p:nvSpPr>
-          <p:cNvPr id="4" name="Rectangle 1">
+          <p:cNvPr id="3" name="Content Placeholder 2">
             <a:extLst>
               <a:ext uri="{FF2B5EF4-FFF2-40B4-BE49-F238E27FC236}">
-                <a16:creationId xmlns:a16="http://schemas.microsoft.com/office/drawing/2014/main" id="{9491F0A8-A92C-A246-1499-9F21D5DCABF7}"/>
+                <a16:creationId xmlns:a16="http://schemas.microsoft.com/office/drawing/2014/main" id="{8FDE82B6-892B-61F8-DE72-D88190E83F1C}"/>
               </a:ext>
             </a:extLst>
           </p:cNvPr>
           <p:cNvSpPr>
-            <a:spLocks noGrp="1" noChangeArrowheads="1"/>
+            <a:spLocks noGrp="1"/>
           </p:cNvSpPr>
           <p:nvPr>
             <p:ph idx="1"/>
           </p:nvPr>
         </p:nvSpPr>
-        <p:spPr bwMode="auto">
+        <p:spPr>
           <a:xfrm>
-            <a:off x="838200" y="3839711"/>
-            <a:ext cx="264816" cy="323165"/>
+            <a:off x="838200" y="1825624"/>
+            <a:ext cx="11157857" cy="5032375"/>
           </a:xfrm>
-          <a:prstGeom prst="rect">
-            <a:avLst/>
-          </a:prstGeom>
-          <a:noFill/>
-          <a:ln>
-            <a:noFill/>
-          </a:ln>
-          <a:effectLst/>
-          <a:extLst>
-            <a:ext uri="{909E8E84-426E-40DD-AFC4-6F175D3DCCD1}">
-              <a14:hiddenFill xmlns:a14="http://schemas.microsoft.com/office/drawing/2010/main">
-                <a:solidFill>
-                  <a:schemeClr val="accent1"/>
-                </a:solidFill>
-              </a14:hiddenFill>
-            </a:ext>
-            <a:ext uri="{91240B29-F687-4F45-9708-019B960494DF}">
-              <a14:hiddenLine xmlns:a14="http://schemas.microsoft.com/office/drawing/2010/main" w="9525">
-                <a:solidFill>
-                  <a:schemeClr val="tx1"/>
-                </a:solidFill>
-                <a:miter lim="800000"/>
-                <a:headEnd/>
-                <a:tailEnd/>
-              </a14:hiddenLine>
-            </a:ext>
-            <a:ext uri="{AF507438-7753-43E0-B8FC-AC1667EBCBE1}">
-              <a14:hiddenEffects xmlns:a14="http://schemas.microsoft.com/office/drawing/2010/main">
-                <a:effectLst>
-                  <a:outerShdw dist="35921" dir="2700000" algn="ctr" rotWithShape="0">
-                    <a:schemeClr val="bg2"/>
-                  </a:outerShdw>
-                </a:effectLst>
-              </a14:hiddenEffects>
-            </a:ext>
-          </a:extLst>
         </p:spPr>
         <p:txBody>
-          <a:bodyPr vert="horz" wrap="none" lIns="91440" tIns="0" rIns="91440" bIns="45720" numCol="1" anchor="ctr" anchorCtr="0" compatLnSpc="1">
-            <a:prstTxWarp prst="textNoShape">
-              <a:avLst/>
-            </a:prstTxWarp>
-            <a:spAutoFit/>
+          <a:bodyPr>
+            <a:normAutofit/>
           </a:bodyPr>
           <a:lstStyle/>
           <a:p>
-            <a:pPr marL="0" marR="0" lvl="0" indent="0" algn="l" defTabSz="914400" rtl="0" eaLnBrk="0" fontAlgn="base" latinLnBrk="0" hangingPunct="0">
-              <a:lnSpc>
-                <a:spcPct val="100000"/>
-              </a:lnSpc>
-              <a:spcBef>
-                <a:spcPct val="0"/>
-              </a:spcBef>
-              <a:spcAft>
-                <a:spcPct val="0"/>
-              </a:spcAft>
-              <a:buClrTx/>
-              <a:buSzTx/>
-              <a:buFontTx/>
-              <a:buChar char="•"/>
-              <a:tabLst/>
+            <a:r>
+              <a:rPr lang="pt-BR" dirty="0"/>
+              <a:t>O treino do </a:t>
+            </a:r>
+            <a:r>
+              <a:rPr lang="pt-BR" dirty="0" err="1"/>
+              <a:t>Q-</a:t>
+            </a:r>
+            <a:r>
+              <a:rPr lang="pt-BR" i="1" dirty="0" err="1"/>
+              <a:t>learning</a:t>
+            </a:r>
+            <a:r>
+              <a:rPr lang="pt-BR" dirty="0"/>
+              <a:t> é feito ao longo de muitos episódios. </a:t>
+            </a:r>
+          </a:p>
+          <a:p>
+            <a:r>
+              <a:rPr lang="pt-BR" dirty="0"/>
+              <a:t>Em cada novo episódio, o agente utiliza o que aprendeu nos anteriores (os valores na tabela-Q) para tentar obter uma recompensa total maior do que na tentativa passada.</a:t>
+            </a:r>
+          </a:p>
+          <a:p>
+            <a:r>
+              <a:rPr lang="pt-BR" dirty="0"/>
+              <a:t>O treinamento encerra-se quando </a:t>
+            </a:r>
+          </a:p>
+          <a:p>
+            <a:pPr lvl="1">
+              <a:buFont typeface="Wingdings" panose="05000000000000000000" pitchFamily="2" charset="2"/>
+              <a:buChar char="§"/>
             </a:pPr>
-            <a:endParaRPr kumimoji="0" lang="en-US" altLang="en-US" sz="1800" b="0" i="0" u="none" strike="noStrike" cap="none" normalizeH="0" baseline="0" dirty="0">
-              <a:ln>
-                <a:noFill/>
-              </a:ln>
-              <a:solidFill>
-                <a:schemeClr val="tx1"/>
-              </a:solidFill>
-              <a:effectLst/>
-              <a:latin typeface="Arial" panose="020B0604020202020204" pitchFamily="34" charset="0"/>
-            </a:endParaRPr>
+            <a:r>
+              <a:rPr lang="pt-BR" dirty="0"/>
+              <a:t>a soma das recompensas obtidas ao longo do episódio para de subir e "estaciona" em um valor alto por muitos episódios seguidos.</a:t>
+            </a:r>
+          </a:p>
+          <a:p>
+            <a:pPr lvl="2">
+              <a:buFont typeface="Courier New" panose="02070309020205020404" pitchFamily="49" charset="0"/>
+              <a:buChar char="o"/>
+            </a:pPr>
+            <a:r>
+              <a:rPr lang="pt-BR" dirty="0"/>
+              <a:t>Isso significa que o agente já explorou o suficiente e encontrou o caminho ótimo.</a:t>
+            </a:r>
+          </a:p>
+          <a:p>
+            <a:pPr lvl="1">
+              <a:buFont typeface="Wingdings" panose="05000000000000000000" pitchFamily="2" charset="2"/>
+              <a:buChar char="§"/>
+            </a:pPr>
+            <a:r>
+              <a:rPr lang="pt-BR" dirty="0"/>
+              <a:t>ou pela ausência de mudanças significativas nos valores da tabela-Q.</a:t>
+            </a:r>
+            <a:endParaRPr lang="en-US" dirty="0"/>
           </a:p>
         </p:txBody>
       </p:sp>
     </p:spTree>
     <p:extLst>
       <p:ext uri="{BB962C8B-B14F-4D97-AF65-F5344CB8AC3E}">
-        <p14:creationId xmlns:p14="http://schemas.microsoft.com/office/powerpoint/2010/main" val="76712355"/>
+        <p14:creationId xmlns:p14="http://schemas.microsoft.com/office/powerpoint/2010/main" val="3077389606"/>
       </p:ext>
     </p:extLst>
   </p:cSld>
@@ -7008,12 +9062,418 @@
           <a:chExt cx="0" cy="0"/>
         </a:xfrm>
       </p:grpSpPr>
-      <p:sp>
-        <p:nvSpPr>
-          <p:cNvPr id="2" name="Title 1">
+      <mc:AlternateContent xmlns:mc="http://schemas.openxmlformats.org/markup-compatibility/2006">
+        <mc:Choice xmlns:a14="http://schemas.microsoft.com/office/drawing/2010/main" Requires="a14">
+          <p:sp>
+            <p:nvSpPr>
+              <p:cNvPr id="2" name="Title 1">
+                <a:extLst>
+                  <a:ext uri="{FF2B5EF4-FFF2-40B4-BE49-F238E27FC236}">
+                    <a16:creationId xmlns:a16="http://schemas.microsoft.com/office/drawing/2014/main" id="{7BB2B1C3-607B-4033-88D5-A1CF66C9D6F3}"/>
+                  </a:ext>
+                </a:extLst>
+              </p:cNvPr>
+              <p:cNvSpPr>
+                <a:spLocks noGrp="1"/>
+              </p:cNvSpPr>
+              <p:nvPr>
+                <p:ph type="title"/>
+              </p:nvPr>
+            </p:nvSpPr>
+            <p:spPr/>
+            <p:txBody>
+              <a:bodyPr/>
+              <a:lstStyle/>
+              <a:p>
+                <a:r>
+                  <a:rPr lang="pt-BR" dirty="0"/>
+                  <a:t>Exploração vs. Explotação (</a:t>
+                </a:r>
+                <a14:m>
+                  <m:oMath xmlns:m="http://schemas.openxmlformats.org/officeDocument/2006/math">
+                    <m:r>
+                      <a:rPr lang="pt-BR" b="0" i="1">
+                        <a:latin typeface="Cambria Math" panose="02040503050406030204" pitchFamily="18" charset="0"/>
+                        <a:ea typeface="Cambria Math" panose="02040503050406030204" pitchFamily="18" charset="0"/>
+                      </a:rPr>
+                      <m:t>𝜀</m:t>
+                    </m:r>
+                  </m:oMath>
+                </a14:m>
+                <a:r>
+                  <a:rPr lang="pt-BR" dirty="0"/>
+                  <a:t>-</a:t>
+                </a:r>
+                <a:r>
+                  <a:rPr lang="pt-BR" i="1" dirty="0" err="1"/>
+                  <a:t>greedy</a:t>
+                </a:r>
+                <a:r>
+                  <a:rPr lang="pt-BR" dirty="0"/>
+                  <a:t>) </a:t>
+                </a:r>
+                <a:endParaRPr lang="en-US" dirty="0"/>
+              </a:p>
+            </p:txBody>
+          </p:sp>
+        </mc:Choice>
+        <mc:Fallback>
+          <p:sp>
+            <p:nvSpPr>
+              <p:cNvPr id="2" name="Title 1">
+                <a:extLst>
+                  <a:ext uri="{FF2B5EF4-FFF2-40B4-BE49-F238E27FC236}">
+                    <a16:creationId xmlns:a16="http://schemas.microsoft.com/office/drawing/2014/main" id="{7BB2B1C3-607B-4033-88D5-A1CF66C9D6F3}"/>
+                  </a:ext>
+                </a:extLst>
+              </p:cNvPr>
+              <p:cNvSpPr>
+                <a:spLocks noGrp="1" noRot="1" noChangeAspect="1" noMove="1" noResize="1" noEditPoints="1" noAdjustHandles="1" noChangeArrowheads="1" noChangeShapeType="1" noTextEdit="1"/>
+              </p:cNvSpPr>
+              <p:nvPr>
+                <p:ph type="title"/>
+              </p:nvPr>
+            </p:nvSpPr>
+            <p:spPr>
+              <a:blipFill>
+                <a:blip r:embed="rId3"/>
+                <a:stretch>
+                  <a:fillRect l="-2377"/>
+                </a:stretch>
+              </a:blipFill>
+            </p:spPr>
+            <p:txBody>
+              <a:bodyPr/>
+              <a:lstStyle/>
+              <a:p>
+                <a:r>
+                  <a:rPr lang="en-US">
+                    <a:noFill/>
+                  </a:rPr>
+                  <a:t> </a:t>
+                </a:r>
+              </a:p>
+            </p:txBody>
+          </p:sp>
+        </mc:Fallback>
+      </mc:AlternateContent>
+      <mc:AlternateContent xmlns:mc="http://schemas.openxmlformats.org/markup-compatibility/2006">
+        <mc:Choice xmlns:a14="http://schemas.microsoft.com/office/drawing/2010/main" Requires="a14">
+          <p:sp>
+            <p:nvSpPr>
+              <p:cNvPr id="3" name="Content Placeholder 2">
+                <a:extLst>
+                  <a:ext uri="{FF2B5EF4-FFF2-40B4-BE49-F238E27FC236}">
+                    <a16:creationId xmlns:a16="http://schemas.microsoft.com/office/drawing/2014/main" id="{5D80C21A-F4FC-B1BE-7D36-8D93DC02776E}"/>
+                  </a:ext>
+                </a:extLst>
+              </p:cNvPr>
+              <p:cNvSpPr>
+                <a:spLocks noGrp="1"/>
+              </p:cNvSpPr>
+              <p:nvPr>
+                <p:ph idx="1"/>
+              </p:nvPr>
+            </p:nvSpPr>
+            <p:spPr>
+              <a:xfrm>
+                <a:off x="838199" y="1825624"/>
+                <a:ext cx="11168743" cy="5032375"/>
+              </a:xfrm>
+            </p:spPr>
+            <p:txBody>
+              <a:bodyPr>
+                <a:normAutofit/>
+              </a:bodyPr>
+              <a:lstStyle/>
+              <a:p>
+                <a:r>
+                  <a:rPr lang="pt-BR" b="1" dirty="0"/>
+                  <a:t>Exploração:</a:t>
+                </a:r>
+                <a:r>
+                  <a:rPr lang="pt-BR" dirty="0"/>
+                  <a:t> Tentar ações aleatórias para descobrir novas recompensas.</a:t>
+                </a:r>
+              </a:p>
+              <a:p>
+                <a:pPr lvl="1">
+                  <a:buFont typeface="Wingdings" panose="05000000000000000000" pitchFamily="2" charset="2"/>
+                  <a:buChar char="§"/>
+                </a:pPr>
+                <a:r>
+                  <a:rPr lang="pt-BR" dirty="0"/>
+                  <a:t>Riscos altos, mas possíveis ganhos altos a longo prazo.</a:t>
+                </a:r>
+              </a:p>
+              <a:p>
+                <a:r>
+                  <a:rPr lang="pt-BR" b="1" dirty="0"/>
+                  <a:t>Explotação:</a:t>
+                </a:r>
+                <a:r>
+                  <a:rPr lang="pt-BR" dirty="0"/>
+                  <a:t> Escolher a melhor ação conhecida usando a tabela-Q atual.</a:t>
+                </a:r>
+              </a:p>
+              <a:p>
+                <a:pPr lvl="1">
+                  <a:buFont typeface="Wingdings" panose="05000000000000000000" pitchFamily="2" charset="2"/>
+                  <a:buChar char="§"/>
+                </a:pPr>
+                <a:r>
+                  <a:rPr lang="pt-BR" dirty="0"/>
+                  <a:t>Garantia de recompensa conhecida.</a:t>
+                </a:r>
+              </a:p>
+              <a:p>
+                <a:r>
+                  <a:rPr lang="pt-BR" b="1" dirty="0"/>
+                  <a:t>A estratégia </a:t>
+                </a:r>
+                <a:r>
+                  <a:rPr lang="pt-BR" b="1" dirty="0" err="1"/>
+                  <a:t>Epsilon-Greedy</a:t>
+                </a:r>
+                <a:r>
+                  <a:rPr lang="pt-BR" b="1" dirty="0"/>
+                  <a:t> (</a:t>
+                </a:r>
+                <a14:m>
+                  <m:oMath xmlns:m="http://schemas.openxmlformats.org/officeDocument/2006/math">
+                    <m:r>
+                      <a:rPr lang="pt-BR" b="1" i="1">
+                        <a:latin typeface="Cambria Math" panose="02040503050406030204" pitchFamily="18" charset="0"/>
+                        <a:ea typeface="Cambria Math" panose="02040503050406030204" pitchFamily="18" charset="0"/>
+                      </a:rPr>
+                      <m:t>𝜺</m:t>
+                    </m:r>
+                  </m:oMath>
+                </a14:m>
+                <a:r>
+                  <a:rPr lang="pt-BR" b="1" dirty="0"/>
+                  <a:t>-</a:t>
+                </a:r>
+                <a:r>
+                  <a:rPr lang="pt-BR" b="1" i="1" dirty="0" err="1"/>
+                  <a:t>greedy</a:t>
+                </a:r>
+                <a:r>
+                  <a:rPr lang="pt-BR" b="1" dirty="0"/>
+                  <a:t>):</a:t>
+                </a:r>
+                <a:endParaRPr lang="pt-BR" dirty="0"/>
+              </a:p>
+              <a:p>
+                <a:pPr lvl="1">
+                  <a:buFont typeface="Wingdings" panose="05000000000000000000" pitchFamily="2" charset="2"/>
+                  <a:buChar char="§"/>
+                </a:pPr>
+                <a:r>
+                  <a:rPr lang="pt-BR" dirty="0"/>
+                  <a:t>Com probabilidade </a:t>
+                </a:r>
+                <a14:m>
+                  <m:oMath xmlns:m="http://schemas.openxmlformats.org/officeDocument/2006/math">
+                    <m:r>
+                      <a:rPr lang="pt-BR" b="0" i="1">
+                        <a:latin typeface="Cambria Math" panose="02040503050406030204" pitchFamily="18" charset="0"/>
+                        <a:ea typeface="Cambria Math" panose="02040503050406030204" pitchFamily="18" charset="0"/>
+                      </a:rPr>
+                      <m:t>𝜀</m:t>
+                    </m:r>
+                  </m:oMath>
+                </a14:m>
+                <a:r>
+                  <a:rPr lang="pt-BR" dirty="0"/>
+                  <a:t> (e.g., 10%), o agente </a:t>
+                </a:r>
+                <a:r>
+                  <a:rPr lang="pt-BR" b="1" dirty="0"/>
+                  <a:t>explora</a:t>
+                </a:r>
+                <a:r>
+                  <a:rPr lang="pt-BR" dirty="0"/>
+                  <a:t> (ação aleatória).</a:t>
+                </a:r>
+              </a:p>
+              <a:p>
+                <a:pPr lvl="1">
+                  <a:buFont typeface="Wingdings" panose="05000000000000000000" pitchFamily="2" charset="2"/>
+                  <a:buChar char="§"/>
+                </a:pPr>
+                <a:r>
+                  <a:rPr lang="pt-BR" dirty="0"/>
+                  <a:t>Com probabilidade 1 - </a:t>
+                </a:r>
+                <a14:m>
+                  <m:oMath xmlns:m="http://schemas.openxmlformats.org/officeDocument/2006/math">
+                    <m:r>
+                      <a:rPr lang="pt-BR" i="1">
+                        <a:latin typeface="Cambria Math" panose="02040503050406030204" pitchFamily="18" charset="0"/>
+                        <a:ea typeface="Cambria Math" panose="02040503050406030204" pitchFamily="18" charset="0"/>
+                      </a:rPr>
+                      <m:t>𝜀</m:t>
+                    </m:r>
+                  </m:oMath>
+                </a14:m>
+                <a:r>
+                  <a:rPr lang="pt-BR" dirty="0"/>
+                  <a:t> (e.g., 90%), o agente </a:t>
+                </a:r>
+                <a:r>
+                  <a:rPr lang="pt-BR" b="1" dirty="0"/>
+                  <a:t>explota</a:t>
+                </a:r>
+                <a:r>
+                  <a:rPr lang="pt-BR" dirty="0"/>
+                  <a:t> (escolhe o </a:t>
+                </a:r>
+                <a:r>
+                  <a:rPr lang="pt-BR" dirty="0" err="1"/>
+                  <a:t>max</a:t>
+                </a:r>
+                <a:r>
+                  <a:rPr lang="pt-BR" dirty="0"/>
+                  <a:t> de Q para </a:t>
+                </a:r>
+                <a14:m>
+                  <m:oMath xmlns:m="http://schemas.openxmlformats.org/officeDocument/2006/math">
+                    <m:r>
+                      <a:rPr lang="pt-BR" b="0" i="1" smtClean="0">
+                        <a:latin typeface="Cambria Math" panose="02040503050406030204" pitchFamily="18" charset="0"/>
+                      </a:rPr>
+                      <m:t>𝑠</m:t>
+                    </m:r>
+                  </m:oMath>
+                </a14:m>
+                <a:r>
+                  <a:rPr lang="pt-BR" dirty="0"/>
+                  <a:t>).</a:t>
+                </a:r>
+              </a:p>
+              <a:p>
+                <a:r>
+                  <a:rPr lang="pt-BR" dirty="0"/>
+                  <a:t>Se o agente não explorar no começo, ele pode encontrar um caminho medíocre e ficar preso nele para sempre. </a:t>
+                </a:r>
+              </a:p>
+              <a:p>
+                <a:r>
+                  <a:rPr lang="pt-BR" dirty="0"/>
+                  <a:t>O </a:t>
+                </a:r>
+                <a14:m>
+                  <m:oMath xmlns:m="http://schemas.openxmlformats.org/officeDocument/2006/math">
+                    <m:r>
+                      <a:rPr lang="pt-BR" i="1">
+                        <a:latin typeface="Cambria Math" panose="02040503050406030204" pitchFamily="18" charset="0"/>
+                        <a:ea typeface="Cambria Math" panose="02040503050406030204" pitchFamily="18" charset="0"/>
+                      </a:rPr>
+                      <m:t>𝜀</m:t>
+                    </m:r>
+                  </m:oMath>
+                </a14:m>
+                <a:r>
+                  <a:rPr lang="pt-BR" dirty="0"/>
+                  <a:t> costuma começar em 1.0 (100% de exploração) e decair gradualmente à medida que o agente aprende (</a:t>
+                </a:r>
+                <a:r>
+                  <a:rPr lang="pt-BR" i="1" dirty="0" err="1"/>
+                  <a:t>decay</a:t>
+                </a:r>
+                <a:r>
+                  <a:rPr lang="pt-BR" i="1" dirty="0"/>
+                  <a:t> rate</a:t>
+                </a:r>
+                <a:r>
+                  <a:rPr lang="pt-BR" dirty="0"/>
+                  <a:t>).</a:t>
+                </a:r>
+              </a:p>
+            </p:txBody>
+          </p:sp>
+        </mc:Choice>
+        <mc:Fallback>
+          <p:sp>
+            <p:nvSpPr>
+              <p:cNvPr id="3" name="Content Placeholder 2">
+                <a:extLst>
+                  <a:ext uri="{FF2B5EF4-FFF2-40B4-BE49-F238E27FC236}">
+                    <a16:creationId xmlns:a16="http://schemas.microsoft.com/office/drawing/2014/main" id="{5D80C21A-F4FC-B1BE-7D36-8D93DC02776E}"/>
+                  </a:ext>
+                </a:extLst>
+              </p:cNvPr>
+              <p:cNvSpPr>
+                <a:spLocks noGrp="1" noRot="1" noChangeAspect="1" noMove="1" noResize="1" noEditPoints="1" noAdjustHandles="1" noChangeArrowheads="1" noChangeShapeType="1" noTextEdit="1"/>
+              </p:cNvSpPr>
+              <p:nvPr>
+                <p:ph idx="1"/>
+              </p:nvPr>
+            </p:nvSpPr>
+            <p:spPr>
+              <a:xfrm>
+                <a:off x="838199" y="1825624"/>
+                <a:ext cx="11168743" cy="5032375"/>
+              </a:xfrm>
+              <a:blipFill>
+                <a:blip r:embed="rId4"/>
+                <a:stretch>
+                  <a:fillRect l="-927" t="-1937" r="-1364"/>
+                </a:stretch>
+              </a:blipFill>
+            </p:spPr>
+            <p:txBody>
+              <a:bodyPr/>
+              <a:lstStyle/>
+              <a:p>
+                <a:r>
+                  <a:rPr lang="en-US">
+                    <a:noFill/>
+                  </a:rPr>
+                  <a:t> </a:t>
+                </a:r>
+              </a:p>
+            </p:txBody>
+          </p:sp>
+        </mc:Fallback>
+      </mc:AlternateContent>
+    </p:spTree>
+    <p:extLst>
+      <p:ext uri="{BB962C8B-B14F-4D97-AF65-F5344CB8AC3E}">
+        <p14:creationId xmlns:p14="http://schemas.microsoft.com/office/powerpoint/2010/main" val="2624478387"/>
+      </p:ext>
+    </p:extLst>
+  </p:cSld>
+  <p:clrMapOvr>
+    <a:masterClrMapping/>
+  </p:clrMapOvr>
+</p:sld>
+</file>
+
+<file path=ppt/slides/slide19.xml><?xml version="1.0" encoding="utf-8"?>
+<p:sld xmlns:a="http://schemas.openxmlformats.org/drawingml/2006/main" xmlns:r="http://schemas.openxmlformats.org/officeDocument/2006/relationships" xmlns:p="http://schemas.openxmlformats.org/presentationml/2006/main">
+  <p:cSld>
+    <p:spTree>
+      <p:nvGrpSpPr>
+        <p:cNvPr id="1" name=""/>
+        <p:cNvGrpSpPr/>
+        <p:nvPr/>
+      </p:nvGrpSpPr>
+      <p:grpSpPr>
+        <a:xfrm>
+          <a:off x="0" y="0"/>
+          <a:ext cx="0" cy="0"/>
+          <a:chOff x="0" y="0"/>
+          <a:chExt cx="0" cy="0"/>
+        </a:xfrm>
+      </p:grpSpPr>
+      <p:sp>
+        <p:nvSpPr>
+          <p:cNvPr id="3" name="Content Placeholder 2">
             <a:extLst>
               <a:ext uri="{FF2B5EF4-FFF2-40B4-BE49-F238E27FC236}">
-                <a16:creationId xmlns:a16="http://schemas.microsoft.com/office/drawing/2014/main" id="{1E5D343F-1952-C012-31AC-0443BF9C1BA8}"/>
+                <a16:creationId xmlns:a16="http://schemas.microsoft.com/office/drawing/2014/main" id="{407A6B7C-8AE2-0626-7031-C9A0D36E6CE3}"/>
               </a:ext>
             </a:extLst>
           </p:cNvPr>
@@ -7021,15 +9481,44 @@
             <a:spLocks noGrp="1"/>
           </p:cNvSpPr>
           <p:nvPr>
-            <p:ph type="title"/>
-          </p:nvPr>
-        </p:nvSpPr>
-        <p:spPr/>
+            <p:ph idx="1"/>
+          </p:nvPr>
+        </p:nvSpPr>
+        <p:spPr>
+          <a:xfrm>
+            <a:off x="7946573" y="1823299"/>
+            <a:ext cx="3962400" cy="3371964"/>
+          </a:xfrm>
+        </p:spPr>
         <p:txBody>
-          <a:bodyPr/>
+          <a:bodyPr>
+            <a:normAutofit/>
+          </a:bodyPr>
           <a:lstStyle/>
           <a:p>
-            <a:endParaRPr lang="en-US"/>
+            <a:pPr marL="0" indent="0" algn="ctr">
+              <a:buNone/>
+            </a:pPr>
+            <a:r>
+              <a:rPr lang="pt-BR" sz="3600" dirty="0"/>
+              <a:t>Como o agente aprende?</a:t>
+            </a:r>
+          </a:p>
+          <a:p>
+            <a:pPr marL="0" indent="0" algn="ctr">
+              <a:buNone/>
+            </a:pPr>
+            <a:endParaRPr lang="pt-BR" sz="3600" dirty="0"/>
+          </a:p>
+          <a:p>
+            <a:pPr marL="0" indent="0" algn="ctr">
+              <a:buNone/>
+            </a:pPr>
+            <a:r>
+              <a:rPr lang="pt-BR" sz="3600" dirty="0"/>
+              <a:t>Ou seja, como a tabela-Q é atualizada?</a:t>
+            </a:r>
+            <a:endParaRPr lang="en-US" sz="3600" dirty="0"/>
           </a:p>
         </p:txBody>
       </p:sp>
@@ -7062,102 +9551,8 @@
         </p:blipFill>
         <p:spPr bwMode="auto">
           <a:xfrm>
-            <a:off x="-468086" y="2326822"/>
-            <a:ext cx="6487886" cy="3649436"/>
-          </a:xfrm>
-          <a:prstGeom prst="rect">
-            <a:avLst/>
-          </a:prstGeom>
-          <a:noFill/>
-          <a:extLst>
-            <a:ext uri="{909E8E84-426E-40DD-AFC4-6F175D3DCCD1}">
-              <a14:hiddenFill xmlns:a14="http://schemas.microsoft.com/office/drawing/2010/main">
-                <a:solidFill>
-                  <a:srgbClr val="FFFFFF"/>
-                </a:solidFill>
-              </a14:hiddenFill>
-            </a:ext>
-          </a:extLst>
-        </p:spPr>
-      </p:pic>
-      <p:pic>
-        <p:nvPicPr>
-          <p:cNvPr id="1026" name="Picture 2" descr="Evaluating a Hybrid LLM Q-Learning/DQN Framework for Adaptive Obstacle  Avoidance in Embedded Robotics">
-            <a:extLst>
-              <a:ext uri="{FF2B5EF4-FFF2-40B4-BE49-F238E27FC236}">
-                <a16:creationId xmlns:a16="http://schemas.microsoft.com/office/drawing/2014/main" id="{BA833512-3FC7-011C-B55D-9BC5E88B4C29}"/>
-              </a:ext>
-            </a:extLst>
-          </p:cNvPr>
-          <p:cNvPicPr>
-            <a:picLocks noChangeAspect="1" noChangeArrowheads="1"/>
-          </p:cNvPicPr>
-          <p:nvPr/>
-        </p:nvPicPr>
-        <p:blipFill>
-          <a:blip r:embed="rId3">
-            <a:extLst>
-              <a:ext uri="{28A0092B-C50C-407E-A947-70E740481C1C}">
-                <a14:useLocalDpi xmlns:a14="http://schemas.microsoft.com/office/drawing/2010/main" val="0"/>
-              </a:ext>
-            </a:extLst>
-          </a:blip>
-          <a:srcRect/>
-          <a:stretch>
-            <a:fillRect/>
-          </a:stretch>
-        </p:blipFill>
-        <p:spPr bwMode="auto">
-          <a:xfrm>
-            <a:off x="6789965" y="1885951"/>
-            <a:ext cx="5238750" cy="1809750"/>
-          </a:xfrm>
-          <a:prstGeom prst="rect">
-            <a:avLst/>
-          </a:prstGeom>
-          <a:noFill/>
-          <a:extLst>
-            <a:ext uri="{909E8E84-426E-40DD-AFC4-6F175D3DCCD1}">
-              <a14:hiddenFill xmlns:a14="http://schemas.microsoft.com/office/drawing/2010/main">
-                <a:solidFill>
-                  <a:srgbClr val="FFFFFF"/>
-                </a:solidFill>
-              </a14:hiddenFill>
-            </a:ext>
-          </a:extLst>
-        </p:spPr>
-      </p:pic>
-      <p:pic>
-        <p:nvPicPr>
-          <p:cNvPr id="1028" name="Picture 4" descr="Cracking the Spell of Q* - A New Method in Problem Solving | Benny's Mind  Hack">
-            <a:extLst>
-              <a:ext uri="{FF2B5EF4-FFF2-40B4-BE49-F238E27FC236}">
-                <a16:creationId xmlns:a16="http://schemas.microsoft.com/office/drawing/2014/main" id="{2FAF9048-FD7A-0345-D833-A8A15BE69361}"/>
-              </a:ext>
-            </a:extLst>
-          </p:cNvPr>
-          <p:cNvPicPr>
-            <a:picLocks noChangeAspect="1" noChangeArrowheads="1"/>
-          </p:cNvPicPr>
-          <p:nvPr/>
-        </p:nvPicPr>
-        <p:blipFill>
-          <a:blip r:embed="rId4">
-            <a:extLst>
-              <a:ext uri="{28A0092B-C50C-407E-A947-70E740481C1C}">
-                <a14:useLocalDpi xmlns:a14="http://schemas.microsoft.com/office/drawing/2010/main" val="0"/>
-              </a:ext>
-            </a:extLst>
-          </a:blip>
-          <a:srcRect/>
-          <a:stretch>
-            <a:fillRect/>
-          </a:stretch>
-        </p:blipFill>
-        <p:spPr bwMode="auto">
-          <a:xfrm>
-            <a:off x="6670221" y="3429000"/>
-            <a:ext cx="6667500" cy="4381500"/>
+            <a:off x="362858" y="1423306"/>
+            <a:ext cx="7416800" cy="4171950"/>
           </a:xfrm>
           <a:prstGeom prst="rect">
             <a:avLst/>
@@ -7177,93 +9572,7 @@
     </p:spTree>
     <p:extLst>
       <p:ext uri="{BB962C8B-B14F-4D97-AF65-F5344CB8AC3E}">
-        <p14:creationId xmlns:p14="http://schemas.microsoft.com/office/powerpoint/2010/main" val="3053794492"/>
-      </p:ext>
-    </p:extLst>
-  </p:cSld>
-  <p:clrMapOvr>
-    <a:masterClrMapping/>
-  </p:clrMapOvr>
-</p:sld>
-</file>
-
-<file path=ppt/slides/slide19.xml><?xml version="1.0" encoding="utf-8"?>
-<p:sld xmlns:a="http://schemas.openxmlformats.org/drawingml/2006/main" xmlns:r="http://schemas.openxmlformats.org/officeDocument/2006/relationships" xmlns:p="http://schemas.openxmlformats.org/presentationml/2006/main">
-  <p:cSld>
-    <p:spTree>
-      <p:nvGrpSpPr>
-        <p:cNvPr id="1" name=""/>
-        <p:cNvGrpSpPr/>
-        <p:nvPr/>
-      </p:nvGrpSpPr>
-      <p:grpSpPr>
-        <a:xfrm>
-          <a:off x="0" y="0"/>
-          <a:ext cx="0" cy="0"/>
-          <a:chOff x="0" y="0"/>
-          <a:chExt cx="0" cy="0"/>
-        </a:xfrm>
-      </p:grpSpPr>
-      <p:sp>
-        <p:nvSpPr>
-          <p:cNvPr id="4" name="Título 1">
-            <a:extLst>
-              <a:ext uri="{FF2B5EF4-FFF2-40B4-BE49-F238E27FC236}">
-                <a16:creationId xmlns:a16="http://schemas.microsoft.com/office/drawing/2014/main" id="{32666AC8-2E17-4DB4-B0F5-60C640CCFD2E}"/>
-              </a:ext>
-            </a:extLst>
-          </p:cNvPr>
-          <p:cNvSpPr txBox="1">
-            <a:spLocks/>
-          </p:cNvSpPr>
-          <p:nvPr/>
-        </p:nvSpPr>
-        <p:spPr>
-          <a:xfrm>
-            <a:off x="1431533" y="2720526"/>
-            <a:ext cx="9144000" cy="1029541"/>
-          </a:xfrm>
-          <a:prstGeom prst="rect">
-            <a:avLst/>
-          </a:prstGeom>
-        </p:spPr>
-        <p:txBody>
-          <a:bodyPr vert="horz" lIns="91440" tIns="45720" rIns="91440" bIns="45720" rtlCol="0" anchor="ctr">
-            <a:normAutofit/>
-          </a:bodyPr>
-          <a:lstStyle>
-            <a:lvl1pPr algn="l" defTabSz="914400" rtl="0" eaLnBrk="1" latinLnBrk="0" hangingPunct="1">
-              <a:lnSpc>
-                <a:spcPct val="90000"/>
-              </a:lnSpc>
-              <a:spcBef>
-                <a:spcPct val="0"/>
-              </a:spcBef>
-              <a:buNone/>
-              <a:defRPr sz="4400" kern="1200">
-                <a:solidFill>
-                  <a:schemeClr val="tx1"/>
-                </a:solidFill>
-                <a:latin typeface="+mj-lt"/>
-                <a:ea typeface="+mj-ea"/>
-                <a:cs typeface="+mj-cs"/>
-              </a:defRPr>
-            </a:lvl1pPr>
-          </a:lstStyle>
-          <a:p>
-            <a:pPr algn="ctr"/>
-            <a:r>
-              <a:rPr lang="pt-BR" sz="6600" dirty="0"/>
-              <a:t>Perguntas?</a:t>
-            </a:r>
-            <a:endParaRPr lang="pt-BR" sz="6600" b="1" i="1" dirty="0"/>
-          </a:p>
-        </p:txBody>
-      </p:sp>
-    </p:spTree>
-    <p:extLst>
-      <p:ext uri="{BB962C8B-B14F-4D97-AF65-F5344CB8AC3E}">
-        <p14:creationId xmlns:p14="http://schemas.microsoft.com/office/powerpoint/2010/main" val="3773005660"/>
+        <p14:creationId xmlns:p14="http://schemas.microsoft.com/office/powerpoint/2010/main" val="362123597"/>
       </p:ext>
     </p:extLst>
   </p:cSld>
@@ -7445,10 +9754,10 @@
       </p:grpSpPr>
       <p:sp>
         <p:nvSpPr>
-          <p:cNvPr id="2" name="Título 1">
+          <p:cNvPr id="2" name="Title 1">
             <a:extLst>
               <a:ext uri="{FF2B5EF4-FFF2-40B4-BE49-F238E27FC236}">
-                <a16:creationId xmlns:a16="http://schemas.microsoft.com/office/drawing/2014/main" id="{3CA32550-8C76-B013-2EC7-989D8C3B19BE}"/>
+                <a16:creationId xmlns:a16="http://schemas.microsoft.com/office/drawing/2014/main" id="{93D78643-03C9-A92E-0919-E944BBC48702}"/>
               </a:ext>
             </a:extLst>
           </p:cNvPr>
@@ -7459,47 +9768,755 @@
             <p:ph type="title"/>
           </p:nvPr>
         </p:nvSpPr>
-        <p:spPr/>
+        <p:spPr>
+          <a:xfrm>
+            <a:off x="838200" y="365125"/>
+            <a:ext cx="10755086" cy="1325563"/>
+          </a:xfrm>
+        </p:spPr>
         <p:txBody>
           <a:bodyPr/>
           <a:lstStyle/>
           <a:p>
             <a:r>
               <a:rPr lang="pt-BR" dirty="0"/>
-              <a:t>Referências</a:t>
+              <a:t>Atualização da tabela-Q: </a:t>
+            </a:r>
+            <a:r>
+              <a:rPr lang="en-US" dirty="0"/>
+              <a:t>a </a:t>
+            </a:r>
+            <a:r>
+              <a:rPr lang="en-US" dirty="0" err="1"/>
+              <a:t>equação</a:t>
+            </a:r>
+            <a:r>
+              <a:rPr lang="en-US" dirty="0"/>
+              <a:t> de Bellman</a:t>
             </a:r>
           </a:p>
         </p:txBody>
       </p:sp>
-      <p:sp>
-        <p:nvSpPr>
-          <p:cNvPr id="3" name="Espaço Reservado para Conteúdo 2">
-            <a:extLst>
-              <a:ext uri="{FF2B5EF4-FFF2-40B4-BE49-F238E27FC236}">
-                <a16:creationId xmlns:a16="http://schemas.microsoft.com/office/drawing/2014/main" id="{EF043237-7757-7557-B63E-D4EB5152D44B}"/>
-              </a:ext>
-            </a:extLst>
-          </p:cNvPr>
-          <p:cNvSpPr>
-            <a:spLocks noGrp="1"/>
-          </p:cNvSpPr>
-          <p:nvPr>
-            <p:ph idx="1"/>
-          </p:nvPr>
-        </p:nvSpPr>
-        <p:spPr/>
-        <p:txBody>
-          <a:bodyPr/>
-          <a:lstStyle/>
-          <a:p>
-            <a:endParaRPr lang="pt-BR"/>
-          </a:p>
-        </p:txBody>
-      </p:sp>
+      <mc:AlternateContent xmlns:mc="http://schemas.openxmlformats.org/markup-compatibility/2006">
+        <mc:Choice xmlns:a14="http://schemas.microsoft.com/office/drawing/2010/main" Requires="a14">
+          <p:sp>
+            <p:nvSpPr>
+              <p:cNvPr id="3" name="Content Placeholder 2">
+                <a:extLst>
+                  <a:ext uri="{FF2B5EF4-FFF2-40B4-BE49-F238E27FC236}">
+                    <a16:creationId xmlns:a16="http://schemas.microsoft.com/office/drawing/2014/main" id="{9E56A20D-5587-73F0-6A77-76736D8C972A}"/>
+                  </a:ext>
+                </a:extLst>
+              </p:cNvPr>
+              <p:cNvSpPr>
+                <a:spLocks noGrp="1"/>
+              </p:cNvSpPr>
+              <p:nvPr>
+                <p:ph idx="1"/>
+              </p:nvPr>
+            </p:nvSpPr>
+            <p:spPr>
+              <a:xfrm>
+                <a:off x="838199" y="1825624"/>
+                <a:ext cx="11353801" cy="5032375"/>
+              </a:xfrm>
+            </p:spPr>
+            <p:txBody>
+              <a:bodyPr>
+                <a:normAutofit lnSpcReduction="10000"/>
+              </a:bodyPr>
+              <a:lstStyle/>
+              <a:p>
+                <a:r>
+                  <a:rPr lang="pt-BR" dirty="0"/>
+                  <a:t>A tabela-Q é atualizada usando-se a equação derivada por Richard </a:t>
+                </a:r>
+                <a:r>
+                  <a:rPr lang="pt-BR" dirty="0" err="1"/>
+                  <a:t>Bellman</a:t>
+                </a:r>
+                <a:r>
+                  <a:rPr lang="pt-BR" dirty="0"/>
+                  <a:t>:</a:t>
+                </a:r>
+              </a:p>
+              <a:p>
+                <a:pPr marL="0" indent="0">
+                  <a:buNone/>
+                </a:pPr>
+                <a:endParaRPr lang="pt-BR" sz="100" dirty="0"/>
+              </a:p>
+              <a:p>
+                <a:pPr marL="0" indent="0" algn="ctr">
+                  <a:buNone/>
+                </a:pPr>
+                <a14:m>
+                  <m:oMathPara xmlns:m="http://schemas.openxmlformats.org/officeDocument/2006/math">
+                    <m:oMathParaPr>
+                      <m:jc m:val="centerGroup"/>
+                    </m:oMathParaPr>
+                    <m:oMath xmlns:m="http://schemas.openxmlformats.org/officeDocument/2006/math">
+                      <m:r>
+                        <a:rPr lang="pt-BR" b="0" i="1" smtClean="0">
+                          <a:latin typeface="Cambria Math" panose="02040503050406030204" pitchFamily="18" charset="0"/>
+                        </a:rPr>
+                        <m:t>𝑄</m:t>
+                      </m:r>
+                      <m:d>
+                        <m:dPr>
+                          <m:ctrlPr>
+                            <a:rPr lang="pt-BR" b="0" i="1" smtClean="0">
+                              <a:latin typeface="Cambria Math" panose="02040503050406030204" pitchFamily="18" charset="0"/>
+                            </a:rPr>
+                          </m:ctrlPr>
+                        </m:dPr>
+                        <m:e>
+                          <m:r>
+                            <a:rPr lang="pt-BR" b="0" i="1" smtClean="0">
+                              <a:latin typeface="Cambria Math" panose="02040503050406030204" pitchFamily="18" charset="0"/>
+                            </a:rPr>
+                            <m:t>𝑠</m:t>
+                          </m:r>
+                          <m:r>
+                            <a:rPr lang="pt-BR" b="0" i="1" smtClean="0">
+                              <a:latin typeface="Cambria Math" panose="02040503050406030204" pitchFamily="18" charset="0"/>
+                            </a:rPr>
+                            <m:t>,</m:t>
+                          </m:r>
+                          <m:r>
+                            <a:rPr lang="pt-BR" b="0" i="1" smtClean="0">
+                              <a:latin typeface="Cambria Math" panose="02040503050406030204" pitchFamily="18" charset="0"/>
+                            </a:rPr>
+                            <m:t>𝑎</m:t>
+                          </m:r>
+                        </m:e>
+                      </m:d>
+                      <m:r>
+                        <a:rPr lang="pt-BR" b="0" i="1" smtClean="0">
+                          <a:latin typeface="Cambria Math" panose="02040503050406030204" pitchFamily="18" charset="0"/>
+                          <a:ea typeface="Cambria Math" panose="02040503050406030204" pitchFamily="18" charset="0"/>
+                        </a:rPr>
+                        <m:t>←</m:t>
+                      </m:r>
+                      <m:r>
+                        <a:rPr lang="pt-BR" b="0" i="1" smtClean="0">
+                          <a:latin typeface="Cambria Math" panose="02040503050406030204" pitchFamily="18" charset="0"/>
+                          <a:ea typeface="Cambria Math" panose="02040503050406030204" pitchFamily="18" charset="0"/>
+                        </a:rPr>
+                        <m:t>𝑄</m:t>
+                      </m:r>
+                      <m:d>
+                        <m:dPr>
+                          <m:ctrlPr>
+                            <a:rPr lang="pt-BR" b="0" i="1" smtClean="0">
+                              <a:latin typeface="Cambria Math" panose="02040503050406030204" pitchFamily="18" charset="0"/>
+                              <a:ea typeface="Cambria Math" panose="02040503050406030204" pitchFamily="18" charset="0"/>
+                            </a:rPr>
+                          </m:ctrlPr>
+                        </m:dPr>
+                        <m:e>
+                          <m:r>
+                            <a:rPr lang="pt-BR" b="0" i="1" smtClean="0">
+                              <a:latin typeface="Cambria Math" panose="02040503050406030204" pitchFamily="18" charset="0"/>
+                              <a:ea typeface="Cambria Math" panose="02040503050406030204" pitchFamily="18" charset="0"/>
+                            </a:rPr>
+                            <m:t>𝑠</m:t>
+                          </m:r>
+                          <m:r>
+                            <a:rPr lang="pt-BR" b="0" i="1" smtClean="0">
+                              <a:latin typeface="Cambria Math" panose="02040503050406030204" pitchFamily="18" charset="0"/>
+                              <a:ea typeface="Cambria Math" panose="02040503050406030204" pitchFamily="18" charset="0"/>
+                            </a:rPr>
+                            <m:t>,</m:t>
+                          </m:r>
+                          <m:r>
+                            <a:rPr lang="pt-BR" b="0" i="1" smtClean="0">
+                              <a:latin typeface="Cambria Math" panose="02040503050406030204" pitchFamily="18" charset="0"/>
+                              <a:ea typeface="Cambria Math" panose="02040503050406030204" pitchFamily="18" charset="0"/>
+                            </a:rPr>
+                            <m:t>𝑎</m:t>
+                          </m:r>
+                        </m:e>
+                      </m:d>
+                      <m:r>
+                        <a:rPr lang="pt-BR" b="0" i="1" smtClean="0">
+                          <a:latin typeface="Cambria Math" panose="02040503050406030204" pitchFamily="18" charset="0"/>
+                          <a:ea typeface="Cambria Math" panose="02040503050406030204" pitchFamily="18" charset="0"/>
+                        </a:rPr>
+                        <m:t>+</m:t>
+                      </m:r>
+                      <m:r>
+                        <a:rPr lang="pt-BR" b="0" i="1" smtClean="0">
+                          <a:latin typeface="Cambria Math" panose="02040503050406030204" pitchFamily="18" charset="0"/>
+                          <a:ea typeface="Cambria Math" panose="02040503050406030204" pitchFamily="18" charset="0"/>
+                        </a:rPr>
+                        <m:t>𝛼</m:t>
+                      </m:r>
+                      <m:d>
+                        <m:dPr>
+                          <m:begChr m:val="["/>
+                          <m:endChr m:val="]"/>
+                          <m:ctrlPr>
+                            <a:rPr lang="pt-BR" b="0" i="1" smtClean="0">
+                              <a:latin typeface="Cambria Math" panose="02040503050406030204" pitchFamily="18" charset="0"/>
+                              <a:ea typeface="Cambria Math" panose="02040503050406030204" pitchFamily="18" charset="0"/>
+                            </a:rPr>
+                          </m:ctrlPr>
+                        </m:dPr>
+                        <m:e>
+                          <m:r>
+                            <a:rPr lang="pt-BR" b="0" i="1" smtClean="0">
+                              <a:latin typeface="Cambria Math" panose="02040503050406030204" pitchFamily="18" charset="0"/>
+                              <a:ea typeface="Cambria Math" panose="02040503050406030204" pitchFamily="18" charset="0"/>
+                            </a:rPr>
+                            <m:t>𝑟</m:t>
+                          </m:r>
+                          <m:r>
+                            <a:rPr lang="pt-BR" b="0" i="1" smtClean="0">
+                              <a:latin typeface="Cambria Math" panose="02040503050406030204" pitchFamily="18" charset="0"/>
+                              <a:ea typeface="Cambria Math" panose="02040503050406030204" pitchFamily="18" charset="0"/>
+                            </a:rPr>
+                            <m:t>+</m:t>
+                          </m:r>
+                          <m:func>
+                            <m:funcPr>
+                              <m:ctrlPr>
+                                <a:rPr lang="pt-BR" i="1">
+                                  <a:latin typeface="Cambria Math" panose="02040503050406030204" pitchFamily="18" charset="0"/>
+                                  <a:ea typeface="Cambria Math" panose="02040503050406030204" pitchFamily="18" charset="0"/>
+                                </a:rPr>
+                              </m:ctrlPr>
+                            </m:funcPr>
+                            <m:fName>
+                              <m:limLow>
+                                <m:limLowPr>
+                                  <m:ctrlPr>
+                                    <a:rPr lang="pt-BR" i="1">
+                                      <a:latin typeface="Cambria Math" panose="02040503050406030204" pitchFamily="18" charset="0"/>
+                                      <a:ea typeface="Cambria Math" panose="02040503050406030204" pitchFamily="18" charset="0"/>
+                                    </a:rPr>
+                                  </m:ctrlPr>
+                                </m:limLowPr>
+                                <m:e>
+                                  <m:r>
+                                    <m:rPr>
+                                      <m:sty m:val="p"/>
+                                    </m:rPr>
+                                    <a:rPr lang="el-GR" i="1" smtClean="0">
+                                      <a:latin typeface="Cambria Math" panose="02040503050406030204" pitchFamily="18" charset="0"/>
+                                      <a:ea typeface="Cambria Math" panose="02040503050406030204" pitchFamily="18" charset="0"/>
+                                    </a:rPr>
+                                    <m:t>γ</m:t>
+                                  </m:r>
+                                  <m:r>
+                                    <m:rPr>
+                                      <m:sty m:val="p"/>
+                                    </m:rPr>
+                                    <a:rPr lang="pt-BR">
+                                      <a:latin typeface="Cambria Math" panose="02040503050406030204" pitchFamily="18" charset="0"/>
+                                      <a:ea typeface="Cambria Math" panose="02040503050406030204" pitchFamily="18" charset="0"/>
+                                    </a:rPr>
+                                    <m:t>max</m:t>
+                                  </m:r>
+                                </m:e>
+                                <m:lim>
+                                  <m:sSup>
+                                    <m:sSupPr>
+                                      <m:ctrlPr>
+                                        <a:rPr lang="pt-BR" i="1">
+                                          <a:latin typeface="Cambria Math" panose="02040503050406030204" pitchFamily="18" charset="0"/>
+                                          <a:ea typeface="Cambria Math" panose="02040503050406030204" pitchFamily="18" charset="0"/>
+                                        </a:rPr>
+                                      </m:ctrlPr>
+                                    </m:sSupPr>
+                                    <m:e>
+                                      <m:r>
+                                        <a:rPr lang="pt-BR" i="1">
+                                          <a:latin typeface="Cambria Math" panose="02040503050406030204" pitchFamily="18" charset="0"/>
+                                          <a:ea typeface="Cambria Math" panose="02040503050406030204" pitchFamily="18" charset="0"/>
+                                        </a:rPr>
+                                        <m:t>𝑎</m:t>
+                                      </m:r>
+                                    </m:e>
+                                    <m:sup>
+                                      <m:r>
+                                        <a:rPr lang="pt-BR" i="1">
+                                          <a:latin typeface="Cambria Math" panose="02040503050406030204" pitchFamily="18" charset="0"/>
+                                          <a:ea typeface="Cambria Math" panose="02040503050406030204" pitchFamily="18" charset="0"/>
+                                        </a:rPr>
+                                        <m:t>′</m:t>
+                                      </m:r>
+                                    </m:sup>
+                                  </m:sSup>
+                                </m:lim>
+                              </m:limLow>
+                            </m:fName>
+                            <m:e>
+                              <m:r>
+                                <a:rPr lang="pt-BR" i="1">
+                                  <a:latin typeface="Cambria Math" panose="02040503050406030204" pitchFamily="18" charset="0"/>
+                                  <a:ea typeface="Cambria Math" panose="02040503050406030204" pitchFamily="18" charset="0"/>
+                                </a:rPr>
+                                <m:t>𝑄</m:t>
+                              </m:r>
+                              <m:d>
+                                <m:dPr>
+                                  <m:ctrlPr>
+                                    <a:rPr lang="pt-BR" i="1">
+                                      <a:latin typeface="Cambria Math" panose="02040503050406030204" pitchFamily="18" charset="0"/>
+                                      <a:ea typeface="Cambria Math" panose="02040503050406030204" pitchFamily="18" charset="0"/>
+                                    </a:rPr>
+                                  </m:ctrlPr>
+                                </m:dPr>
+                                <m:e>
+                                  <m:sSup>
+                                    <m:sSupPr>
+                                      <m:ctrlPr>
+                                        <a:rPr lang="pt-BR" i="1">
+                                          <a:latin typeface="Cambria Math" panose="02040503050406030204" pitchFamily="18" charset="0"/>
+                                          <a:ea typeface="Cambria Math" panose="02040503050406030204" pitchFamily="18" charset="0"/>
+                                        </a:rPr>
+                                      </m:ctrlPr>
+                                    </m:sSupPr>
+                                    <m:e>
+                                      <m:r>
+                                        <a:rPr lang="pt-BR" i="1">
+                                          <a:latin typeface="Cambria Math" panose="02040503050406030204" pitchFamily="18" charset="0"/>
+                                          <a:ea typeface="Cambria Math" panose="02040503050406030204" pitchFamily="18" charset="0"/>
+                                        </a:rPr>
+                                        <m:t>𝑠</m:t>
+                                      </m:r>
+                                    </m:e>
+                                    <m:sup>
+                                      <m:r>
+                                        <a:rPr lang="pt-BR" i="1">
+                                          <a:latin typeface="Cambria Math" panose="02040503050406030204" pitchFamily="18" charset="0"/>
+                                          <a:ea typeface="Cambria Math" panose="02040503050406030204" pitchFamily="18" charset="0"/>
+                                        </a:rPr>
+                                        <m:t>′</m:t>
+                                      </m:r>
+                                    </m:sup>
+                                  </m:sSup>
+                                  <m:r>
+                                    <a:rPr lang="pt-BR" i="1">
+                                      <a:latin typeface="Cambria Math" panose="02040503050406030204" pitchFamily="18" charset="0"/>
+                                      <a:ea typeface="Cambria Math" panose="02040503050406030204" pitchFamily="18" charset="0"/>
+                                    </a:rPr>
+                                    <m:t>,</m:t>
+                                  </m:r>
+                                  <m:sSup>
+                                    <m:sSupPr>
+                                      <m:ctrlPr>
+                                        <a:rPr lang="pt-BR" i="1">
+                                          <a:latin typeface="Cambria Math" panose="02040503050406030204" pitchFamily="18" charset="0"/>
+                                          <a:ea typeface="Cambria Math" panose="02040503050406030204" pitchFamily="18" charset="0"/>
+                                        </a:rPr>
+                                      </m:ctrlPr>
+                                    </m:sSupPr>
+                                    <m:e>
+                                      <m:r>
+                                        <a:rPr lang="pt-BR" i="1">
+                                          <a:latin typeface="Cambria Math" panose="02040503050406030204" pitchFamily="18" charset="0"/>
+                                          <a:ea typeface="Cambria Math" panose="02040503050406030204" pitchFamily="18" charset="0"/>
+                                        </a:rPr>
+                                        <m:t>𝑎</m:t>
+                                      </m:r>
+                                    </m:e>
+                                    <m:sup>
+                                      <m:r>
+                                        <a:rPr lang="pt-BR" i="1">
+                                          <a:latin typeface="Cambria Math" panose="02040503050406030204" pitchFamily="18" charset="0"/>
+                                          <a:ea typeface="Cambria Math" panose="02040503050406030204" pitchFamily="18" charset="0"/>
+                                        </a:rPr>
+                                        <m:t>′</m:t>
+                                      </m:r>
+                                    </m:sup>
+                                  </m:sSup>
+                                </m:e>
+                              </m:d>
+                            </m:e>
+                          </m:func>
+                          <m:r>
+                            <a:rPr lang="pt-BR" i="1">
+                              <a:latin typeface="Cambria Math" panose="02040503050406030204" pitchFamily="18" charset="0"/>
+                              <a:ea typeface="Cambria Math" panose="02040503050406030204" pitchFamily="18" charset="0"/>
+                            </a:rPr>
+                            <m:t>−</m:t>
+                          </m:r>
+                          <m:r>
+                            <a:rPr lang="pt-BR" i="1">
+                              <a:latin typeface="Cambria Math" panose="02040503050406030204" pitchFamily="18" charset="0"/>
+                              <a:ea typeface="Cambria Math" panose="02040503050406030204" pitchFamily="18" charset="0"/>
+                            </a:rPr>
+                            <m:t>𝑄</m:t>
+                          </m:r>
+                          <m:d>
+                            <m:dPr>
+                              <m:ctrlPr>
+                                <a:rPr lang="pt-BR" i="1">
+                                  <a:latin typeface="Cambria Math" panose="02040503050406030204" pitchFamily="18" charset="0"/>
+                                  <a:ea typeface="Cambria Math" panose="02040503050406030204" pitchFamily="18" charset="0"/>
+                                </a:rPr>
+                              </m:ctrlPr>
+                            </m:dPr>
+                            <m:e>
+                              <m:r>
+                                <a:rPr lang="pt-BR" i="1">
+                                  <a:latin typeface="Cambria Math" panose="02040503050406030204" pitchFamily="18" charset="0"/>
+                                  <a:ea typeface="Cambria Math" panose="02040503050406030204" pitchFamily="18" charset="0"/>
+                                </a:rPr>
+                                <m:t>𝑠</m:t>
+                              </m:r>
+                              <m:r>
+                                <a:rPr lang="pt-BR" i="1">
+                                  <a:latin typeface="Cambria Math" panose="02040503050406030204" pitchFamily="18" charset="0"/>
+                                  <a:ea typeface="Cambria Math" panose="02040503050406030204" pitchFamily="18" charset="0"/>
+                                </a:rPr>
+                                <m:t>,</m:t>
+                              </m:r>
+                              <m:r>
+                                <a:rPr lang="pt-BR" i="1">
+                                  <a:latin typeface="Cambria Math" panose="02040503050406030204" pitchFamily="18" charset="0"/>
+                                  <a:ea typeface="Cambria Math" panose="02040503050406030204" pitchFamily="18" charset="0"/>
+                                </a:rPr>
+                                <m:t>𝑎</m:t>
+                              </m:r>
+                            </m:e>
+                          </m:d>
+                        </m:e>
+                      </m:d>
+                      <m:r>
+                        <a:rPr lang="pt-BR" b="0" i="0" smtClean="0">
+                          <a:latin typeface="Cambria Math" panose="02040503050406030204" pitchFamily="18" charset="0"/>
+                          <a:ea typeface="Cambria Math" panose="02040503050406030204" pitchFamily="18" charset="0"/>
+                        </a:rPr>
+                        <m:t>,</m:t>
+                      </m:r>
+                    </m:oMath>
+                  </m:oMathPara>
+                </a14:m>
+                <a:endParaRPr lang="en-US" dirty="0"/>
+              </a:p>
+              <a:p>
+                <a:pPr marL="0" indent="0">
+                  <a:buNone/>
+                </a:pPr>
+                <a:r>
+                  <a:rPr lang="en-US" dirty="0" err="1"/>
+                  <a:t>onde</a:t>
+                </a:r>
+                <a:endParaRPr lang="en-US" dirty="0"/>
+              </a:p>
+              <a:p>
+                <a14:m>
+                  <m:oMath xmlns:m="http://schemas.openxmlformats.org/officeDocument/2006/math">
+                    <m:r>
+                      <a:rPr lang="pt-BR" b="0" i="1">
+                        <a:latin typeface="Cambria Math" panose="02040503050406030204" pitchFamily="18" charset="0"/>
+                        <a:ea typeface="Cambria Math" panose="02040503050406030204" pitchFamily="18" charset="0"/>
+                      </a:rPr>
+                      <m:t>𝛼</m:t>
+                    </m:r>
+                  </m:oMath>
+                </a14:m>
+                <a:r>
+                  <a:rPr lang="pt-BR" dirty="0"/>
+                  <a:t>: é a </a:t>
+                </a:r>
+                <a:r>
+                  <a:rPr lang="pt-BR" b="1" dirty="0"/>
+                  <a:t>taxa de aprendizado</a:t>
+                </a:r>
+                <a:r>
+                  <a:rPr lang="pt-BR" dirty="0"/>
+                  <a:t>. Valor entre 0 e 1. Determina o peso da nova informação em relação à velha.</a:t>
+                </a:r>
+              </a:p>
+              <a:p>
+                <a14:m>
+                  <m:oMath xmlns:m="http://schemas.openxmlformats.org/officeDocument/2006/math">
+                    <m:r>
+                      <a:rPr lang="pt-BR" i="1">
+                        <a:latin typeface="Cambria Math" panose="02040503050406030204" pitchFamily="18" charset="0"/>
+                        <a:ea typeface="Cambria Math" panose="02040503050406030204" pitchFamily="18" charset="0"/>
+                      </a:rPr>
+                      <m:t>𝑟</m:t>
+                    </m:r>
+                  </m:oMath>
+                </a14:m>
+                <a:r>
+                  <a:rPr lang="pt-BR" dirty="0"/>
+                  <a:t>: é </a:t>
+                </a:r>
+                <a:r>
+                  <a:rPr lang="pt-BR" b="1" dirty="0"/>
+                  <a:t>recompensa</a:t>
+                </a:r>
+                <a:r>
+                  <a:rPr lang="pt-BR" dirty="0"/>
+                  <a:t>. O que ele acabou de ganhar por tomar a ação </a:t>
+                </a:r>
+                <a14:m>
+                  <m:oMath xmlns:m="http://schemas.openxmlformats.org/officeDocument/2006/math">
+                    <m:r>
+                      <a:rPr lang="pt-BR" i="1">
+                        <a:latin typeface="Cambria Math" panose="02040503050406030204" pitchFamily="18" charset="0"/>
+                        <a:ea typeface="Cambria Math" panose="02040503050406030204" pitchFamily="18" charset="0"/>
+                      </a:rPr>
+                      <m:t>𝑎</m:t>
+                    </m:r>
+                  </m:oMath>
+                </a14:m>
+                <a:r>
+                  <a:rPr lang="pt-BR" dirty="0"/>
+                  <a:t>.</a:t>
+                </a:r>
+              </a:p>
+              <a:p>
+                <a14:m>
+                  <m:oMath xmlns:m="http://schemas.openxmlformats.org/officeDocument/2006/math">
+                    <m:r>
+                      <m:rPr>
+                        <m:sty m:val="p"/>
+                      </m:rPr>
+                      <a:rPr lang="el-GR" i="1" smtClean="0">
+                        <a:latin typeface="Cambria Math" panose="02040503050406030204" pitchFamily="18" charset="0"/>
+                        <a:ea typeface="Cambria Math" panose="02040503050406030204" pitchFamily="18" charset="0"/>
+                      </a:rPr>
+                      <m:t>γ</m:t>
+                    </m:r>
+                  </m:oMath>
+                </a14:m>
+                <a:r>
+                  <a:rPr lang="pt-BR" dirty="0"/>
+                  <a:t>: é o </a:t>
+                </a:r>
+                <a:r>
+                  <a:rPr lang="pt-BR" b="1" dirty="0"/>
+                  <a:t>fator de desconto</a:t>
+                </a:r>
+                <a:r>
+                  <a:rPr lang="pt-BR" dirty="0"/>
+                  <a:t>. Entre 0 e 1. Determina a importância das recompensas futuras.</a:t>
+                </a:r>
+              </a:p>
+              <a:p>
+                <a14:m>
+                  <m:oMath xmlns:m="http://schemas.openxmlformats.org/officeDocument/2006/math">
+                    <m:func>
+                      <m:funcPr>
+                        <m:ctrlPr>
+                          <a:rPr lang="pt-BR" i="1">
+                            <a:latin typeface="Cambria Math" panose="02040503050406030204" pitchFamily="18" charset="0"/>
+                            <a:ea typeface="Cambria Math" panose="02040503050406030204" pitchFamily="18" charset="0"/>
+                          </a:rPr>
+                        </m:ctrlPr>
+                      </m:funcPr>
+                      <m:fName>
+                        <m:limLow>
+                          <m:limLowPr>
+                            <m:ctrlPr>
+                              <a:rPr lang="pt-BR" i="1">
+                                <a:latin typeface="Cambria Math" panose="02040503050406030204" pitchFamily="18" charset="0"/>
+                                <a:ea typeface="Cambria Math" panose="02040503050406030204" pitchFamily="18" charset="0"/>
+                              </a:rPr>
+                            </m:ctrlPr>
+                          </m:limLowPr>
+                          <m:e>
+                            <m:r>
+                              <m:rPr>
+                                <m:sty m:val="p"/>
+                              </m:rPr>
+                              <a:rPr lang="pt-BR">
+                                <a:latin typeface="Cambria Math" panose="02040503050406030204" pitchFamily="18" charset="0"/>
+                                <a:ea typeface="Cambria Math" panose="02040503050406030204" pitchFamily="18" charset="0"/>
+                              </a:rPr>
+                              <m:t>max</m:t>
+                            </m:r>
+                          </m:e>
+                          <m:lim>
+                            <m:sSup>
+                              <m:sSupPr>
+                                <m:ctrlPr>
+                                  <a:rPr lang="pt-BR" i="1">
+                                    <a:latin typeface="Cambria Math" panose="02040503050406030204" pitchFamily="18" charset="0"/>
+                                    <a:ea typeface="Cambria Math" panose="02040503050406030204" pitchFamily="18" charset="0"/>
+                                  </a:rPr>
+                                </m:ctrlPr>
+                              </m:sSupPr>
+                              <m:e>
+                                <m:r>
+                                  <a:rPr lang="pt-BR" i="1">
+                                    <a:latin typeface="Cambria Math" panose="02040503050406030204" pitchFamily="18" charset="0"/>
+                                    <a:ea typeface="Cambria Math" panose="02040503050406030204" pitchFamily="18" charset="0"/>
+                                  </a:rPr>
+                                  <m:t>𝑎</m:t>
+                                </m:r>
+                              </m:e>
+                              <m:sup>
+                                <m:r>
+                                  <a:rPr lang="pt-BR" i="1">
+                                    <a:latin typeface="Cambria Math" panose="02040503050406030204" pitchFamily="18" charset="0"/>
+                                    <a:ea typeface="Cambria Math" panose="02040503050406030204" pitchFamily="18" charset="0"/>
+                                  </a:rPr>
+                                  <m:t>′</m:t>
+                                </m:r>
+                              </m:sup>
+                            </m:sSup>
+                          </m:lim>
+                        </m:limLow>
+                      </m:fName>
+                      <m:e>
+                        <m:r>
+                          <a:rPr lang="pt-BR" i="1">
+                            <a:latin typeface="Cambria Math" panose="02040503050406030204" pitchFamily="18" charset="0"/>
+                            <a:ea typeface="Cambria Math" panose="02040503050406030204" pitchFamily="18" charset="0"/>
+                          </a:rPr>
+                          <m:t>𝑄</m:t>
+                        </m:r>
+                        <m:d>
+                          <m:dPr>
+                            <m:ctrlPr>
+                              <a:rPr lang="pt-BR" i="1">
+                                <a:latin typeface="Cambria Math" panose="02040503050406030204" pitchFamily="18" charset="0"/>
+                                <a:ea typeface="Cambria Math" panose="02040503050406030204" pitchFamily="18" charset="0"/>
+                              </a:rPr>
+                            </m:ctrlPr>
+                          </m:dPr>
+                          <m:e>
+                            <m:sSup>
+                              <m:sSupPr>
+                                <m:ctrlPr>
+                                  <a:rPr lang="pt-BR" i="1">
+                                    <a:latin typeface="Cambria Math" panose="02040503050406030204" pitchFamily="18" charset="0"/>
+                                    <a:ea typeface="Cambria Math" panose="02040503050406030204" pitchFamily="18" charset="0"/>
+                                  </a:rPr>
+                                </m:ctrlPr>
+                              </m:sSupPr>
+                              <m:e>
+                                <m:r>
+                                  <a:rPr lang="pt-BR" i="1">
+                                    <a:latin typeface="Cambria Math" panose="02040503050406030204" pitchFamily="18" charset="0"/>
+                                    <a:ea typeface="Cambria Math" panose="02040503050406030204" pitchFamily="18" charset="0"/>
+                                  </a:rPr>
+                                  <m:t>𝑠</m:t>
+                                </m:r>
+                              </m:e>
+                              <m:sup>
+                                <m:r>
+                                  <a:rPr lang="pt-BR" i="1">
+                                    <a:latin typeface="Cambria Math" panose="02040503050406030204" pitchFamily="18" charset="0"/>
+                                    <a:ea typeface="Cambria Math" panose="02040503050406030204" pitchFamily="18" charset="0"/>
+                                  </a:rPr>
+                                  <m:t>′</m:t>
+                                </m:r>
+                              </m:sup>
+                            </m:sSup>
+                            <m:r>
+                              <a:rPr lang="pt-BR" i="1">
+                                <a:latin typeface="Cambria Math" panose="02040503050406030204" pitchFamily="18" charset="0"/>
+                                <a:ea typeface="Cambria Math" panose="02040503050406030204" pitchFamily="18" charset="0"/>
+                              </a:rPr>
+                              <m:t>,</m:t>
+                            </m:r>
+                            <m:sSup>
+                              <m:sSupPr>
+                                <m:ctrlPr>
+                                  <a:rPr lang="pt-BR" i="1">
+                                    <a:latin typeface="Cambria Math" panose="02040503050406030204" pitchFamily="18" charset="0"/>
+                                    <a:ea typeface="Cambria Math" panose="02040503050406030204" pitchFamily="18" charset="0"/>
+                                  </a:rPr>
+                                </m:ctrlPr>
+                              </m:sSupPr>
+                              <m:e>
+                                <m:r>
+                                  <a:rPr lang="pt-BR" i="1">
+                                    <a:latin typeface="Cambria Math" panose="02040503050406030204" pitchFamily="18" charset="0"/>
+                                    <a:ea typeface="Cambria Math" panose="02040503050406030204" pitchFamily="18" charset="0"/>
+                                  </a:rPr>
+                                  <m:t>𝑎</m:t>
+                                </m:r>
+                              </m:e>
+                              <m:sup>
+                                <m:r>
+                                  <a:rPr lang="pt-BR" i="1">
+                                    <a:latin typeface="Cambria Math" panose="02040503050406030204" pitchFamily="18" charset="0"/>
+                                    <a:ea typeface="Cambria Math" panose="02040503050406030204" pitchFamily="18" charset="0"/>
+                                  </a:rPr>
+                                  <m:t>′</m:t>
+                                </m:r>
+                              </m:sup>
+                            </m:sSup>
+                          </m:e>
+                        </m:d>
+                      </m:e>
+                    </m:func>
+                  </m:oMath>
+                </a14:m>
+                <a:r>
+                  <a:rPr lang="pt-BR" dirty="0"/>
+                  <a:t>: é o </a:t>
+                </a:r>
+                <a:r>
+                  <a:rPr lang="pt-BR" b="1" dirty="0"/>
+                  <a:t>melhor valor Q possível no próximo estado</a:t>
+                </a:r>
+                <a:r>
+                  <a:rPr lang="pt-BR" dirty="0"/>
+                  <a:t>. É a estimativa do futuro.</a:t>
+                </a:r>
+              </a:p>
+            </p:txBody>
+          </p:sp>
+        </mc:Choice>
+        <mc:Fallback>
+          <p:sp>
+            <p:nvSpPr>
+              <p:cNvPr id="3" name="Content Placeholder 2">
+                <a:extLst>
+                  <a:ext uri="{FF2B5EF4-FFF2-40B4-BE49-F238E27FC236}">
+                    <a16:creationId xmlns:a16="http://schemas.microsoft.com/office/drawing/2014/main" id="{9E56A20D-5587-73F0-6A77-76736D8C972A}"/>
+                  </a:ext>
+                </a:extLst>
+              </p:cNvPr>
+              <p:cNvSpPr>
+                <a:spLocks noGrp="1" noRot="1" noChangeAspect="1" noMove="1" noResize="1" noEditPoints="1" noAdjustHandles="1" noChangeArrowheads="1" noChangeShapeType="1" noTextEdit="1"/>
+              </p:cNvSpPr>
+              <p:nvPr>
+                <p:ph idx="1"/>
+              </p:nvPr>
+            </p:nvSpPr>
+            <p:spPr>
+              <a:xfrm>
+                <a:off x="838199" y="1825624"/>
+                <a:ext cx="11353801" cy="5032375"/>
+              </a:xfrm>
+              <a:blipFill>
+                <a:blip r:embed="rId3"/>
+                <a:stretch>
+                  <a:fillRect l="-1074" t="-2663" r="-644"/>
+                </a:stretch>
+              </a:blipFill>
+            </p:spPr>
+            <p:txBody>
+              <a:bodyPr/>
+              <a:lstStyle/>
+              <a:p>
+                <a:r>
+                  <a:rPr lang="en-US">
+                    <a:noFill/>
+                  </a:rPr>
+                  <a:t> </a:t>
+                </a:r>
+              </a:p>
+            </p:txBody>
+          </p:sp>
+        </mc:Fallback>
+      </mc:AlternateContent>
     </p:spTree>
     <p:extLst>
       <p:ext uri="{BB962C8B-B14F-4D97-AF65-F5344CB8AC3E}">
-        <p14:creationId xmlns:p14="http://schemas.microsoft.com/office/powerpoint/2010/main" val="1787264919"/>
+        <p14:creationId xmlns:p14="http://schemas.microsoft.com/office/powerpoint/2010/main" val="750194977"/>
       </p:ext>
     </p:extLst>
   </p:cSld>
@@ -7510,6 +10527,1935 @@
 </file>
 
 <file path=ppt/slides/slide21.xml><?xml version="1.0" encoding="utf-8"?>
+<p:sld xmlns:a="http://schemas.openxmlformats.org/drawingml/2006/main" xmlns:r="http://schemas.openxmlformats.org/officeDocument/2006/relationships" xmlns:p="http://schemas.openxmlformats.org/presentationml/2006/main">
+  <p:cSld>
+    <p:spTree>
+      <p:nvGrpSpPr>
+        <p:cNvPr id="1" name=""/>
+        <p:cNvGrpSpPr/>
+        <p:nvPr/>
+      </p:nvGrpSpPr>
+      <p:grpSpPr>
+        <a:xfrm>
+          <a:off x="0" y="0"/>
+          <a:ext cx="0" cy="0"/>
+          <a:chOff x="0" y="0"/>
+          <a:chExt cx="0" cy="0"/>
+        </a:xfrm>
+      </p:grpSpPr>
+      <p:sp>
+        <p:nvSpPr>
+          <p:cNvPr id="2" name="Title 1">
+            <a:extLst>
+              <a:ext uri="{FF2B5EF4-FFF2-40B4-BE49-F238E27FC236}">
+                <a16:creationId xmlns:a16="http://schemas.microsoft.com/office/drawing/2014/main" id="{874F2722-DA1E-D930-DC99-59F795E3E8B9}"/>
+              </a:ext>
+            </a:extLst>
+          </p:cNvPr>
+          <p:cNvSpPr>
+            <a:spLocks noGrp="1"/>
+          </p:cNvSpPr>
+          <p:nvPr>
+            <p:ph type="title"/>
+          </p:nvPr>
+        </p:nvSpPr>
+        <p:spPr/>
+        <p:txBody>
+          <a:bodyPr/>
+          <a:lstStyle/>
+          <a:p>
+            <a:endParaRPr lang="en-US"/>
+          </a:p>
+        </p:txBody>
+      </p:sp>
+      <p:sp>
+        <p:nvSpPr>
+          <p:cNvPr id="3" name="Content Placeholder 2">
+            <a:extLst>
+              <a:ext uri="{FF2B5EF4-FFF2-40B4-BE49-F238E27FC236}">
+                <a16:creationId xmlns:a16="http://schemas.microsoft.com/office/drawing/2014/main" id="{97BD2D05-0E48-B94D-DBC7-FBDCBC17C0A5}"/>
+              </a:ext>
+            </a:extLst>
+          </p:cNvPr>
+          <p:cNvSpPr>
+            <a:spLocks noGrp="1"/>
+          </p:cNvSpPr>
+          <p:nvPr>
+            <p:ph idx="1"/>
+          </p:nvPr>
+        </p:nvSpPr>
+        <p:spPr/>
+        <p:txBody>
+          <a:bodyPr>
+            <a:normAutofit/>
+          </a:bodyPr>
+          <a:lstStyle/>
+          <a:p>
+            <a:r>
+              <a:rPr lang="pt-BR" sz="5400" b="1" dirty="0">
+                <a:solidFill>
+                  <a:srgbClr val="FF0000"/>
+                </a:solidFill>
+              </a:rPr>
+              <a:t>PAREI AQUI!!!!!!!!!!!!</a:t>
+            </a:r>
+            <a:endParaRPr lang="en-US" sz="5400" b="1" dirty="0">
+              <a:solidFill>
+                <a:srgbClr val="FF0000"/>
+              </a:solidFill>
+            </a:endParaRPr>
+          </a:p>
+        </p:txBody>
+      </p:sp>
+    </p:spTree>
+    <p:extLst>
+      <p:ext uri="{BB962C8B-B14F-4D97-AF65-F5344CB8AC3E}">
+        <p14:creationId xmlns:p14="http://schemas.microsoft.com/office/powerpoint/2010/main" val="3079050531"/>
+      </p:ext>
+    </p:extLst>
+  </p:cSld>
+  <p:clrMapOvr>
+    <a:masterClrMapping/>
+  </p:clrMapOvr>
+</p:sld>
+</file>
+
+<file path=ppt/slides/slide22.xml><?xml version="1.0" encoding="utf-8"?>
+<p:sld xmlns:a="http://schemas.openxmlformats.org/drawingml/2006/main" xmlns:r="http://schemas.openxmlformats.org/officeDocument/2006/relationships" xmlns:p="http://schemas.openxmlformats.org/presentationml/2006/main">
+  <p:cSld>
+    <p:spTree>
+      <p:nvGrpSpPr>
+        <p:cNvPr id="1" name=""/>
+        <p:cNvGrpSpPr/>
+        <p:nvPr/>
+      </p:nvGrpSpPr>
+      <p:grpSpPr>
+        <a:xfrm>
+          <a:off x="0" y="0"/>
+          <a:ext cx="0" cy="0"/>
+          <a:chOff x="0" y="0"/>
+          <a:chExt cx="0" cy="0"/>
+        </a:xfrm>
+      </p:grpSpPr>
+      <p:sp>
+        <p:nvSpPr>
+          <p:cNvPr id="2" name="Title 1">
+            <a:extLst>
+              <a:ext uri="{FF2B5EF4-FFF2-40B4-BE49-F238E27FC236}">
+                <a16:creationId xmlns:a16="http://schemas.microsoft.com/office/drawing/2014/main" id="{52C5A6D8-ECD1-B38D-0188-C905A6EDF96B}"/>
+              </a:ext>
+            </a:extLst>
+          </p:cNvPr>
+          <p:cNvSpPr>
+            <a:spLocks noGrp="1"/>
+          </p:cNvSpPr>
+          <p:nvPr>
+            <p:ph type="title"/>
+          </p:nvPr>
+        </p:nvSpPr>
+        <p:spPr/>
+        <p:txBody>
+          <a:bodyPr/>
+          <a:lstStyle/>
+          <a:p>
+            <a:r>
+              <a:rPr lang="pt-BR" dirty="0"/>
+              <a:t>A </a:t>
+            </a:r>
+            <a:r>
+              <a:rPr lang="en-US" dirty="0" err="1"/>
+              <a:t>equação</a:t>
+            </a:r>
+            <a:r>
+              <a:rPr lang="en-US" dirty="0"/>
+              <a:t> de Bellman</a:t>
+            </a:r>
+          </a:p>
+        </p:txBody>
+      </p:sp>
+      <mc:AlternateContent xmlns:mc="http://schemas.openxmlformats.org/markup-compatibility/2006">
+        <mc:Choice xmlns:a14="http://schemas.microsoft.com/office/drawing/2010/main" Requires="a14">
+          <p:sp>
+            <p:nvSpPr>
+              <p:cNvPr id="3" name="Content Placeholder 2">
+                <a:extLst>
+                  <a:ext uri="{FF2B5EF4-FFF2-40B4-BE49-F238E27FC236}">
+                    <a16:creationId xmlns:a16="http://schemas.microsoft.com/office/drawing/2014/main" id="{9E788D2D-1B58-788D-B9CB-AA2B58DAC90E}"/>
+                  </a:ext>
+                </a:extLst>
+              </p:cNvPr>
+              <p:cNvSpPr>
+                <a:spLocks noGrp="1"/>
+              </p:cNvSpPr>
+              <p:nvPr>
+                <p:ph idx="1"/>
+              </p:nvPr>
+            </p:nvSpPr>
+            <p:spPr>
+              <a:xfrm>
+                <a:off x="838199" y="1825625"/>
+                <a:ext cx="11234057" cy="4351338"/>
+              </a:xfrm>
+            </p:spPr>
+            <p:txBody>
+              <a:bodyPr/>
+              <a:lstStyle/>
+              <a:p>
+                <a:pPr marL="0" indent="0">
+                  <a:buNone/>
+                </a:pPr>
+                <a14:m>
+                  <m:oMathPara xmlns:m="http://schemas.openxmlformats.org/officeDocument/2006/math">
+                    <m:oMathParaPr>
+                      <m:jc m:val="centerGroup"/>
+                    </m:oMathParaPr>
+                    <m:oMath xmlns:m="http://schemas.openxmlformats.org/officeDocument/2006/math">
+                      <m:r>
+                        <a:rPr lang="pt-BR" i="1">
+                          <a:latin typeface="Cambria Math" panose="02040503050406030204" pitchFamily="18" charset="0"/>
+                        </a:rPr>
+                        <m:t>𝑄</m:t>
+                      </m:r>
+                      <m:d>
+                        <m:dPr>
+                          <m:ctrlPr>
+                            <a:rPr lang="pt-BR" i="1">
+                              <a:latin typeface="Cambria Math" panose="02040503050406030204" pitchFamily="18" charset="0"/>
+                            </a:rPr>
+                          </m:ctrlPr>
+                        </m:dPr>
+                        <m:e>
+                          <m:r>
+                            <a:rPr lang="pt-BR" i="1">
+                              <a:latin typeface="Cambria Math" panose="02040503050406030204" pitchFamily="18" charset="0"/>
+                            </a:rPr>
+                            <m:t>𝑠</m:t>
+                          </m:r>
+                          <m:r>
+                            <a:rPr lang="pt-BR" i="1">
+                              <a:latin typeface="Cambria Math" panose="02040503050406030204" pitchFamily="18" charset="0"/>
+                            </a:rPr>
+                            <m:t>,</m:t>
+                          </m:r>
+                          <m:r>
+                            <a:rPr lang="pt-BR" i="1">
+                              <a:latin typeface="Cambria Math" panose="02040503050406030204" pitchFamily="18" charset="0"/>
+                            </a:rPr>
+                            <m:t>𝑎</m:t>
+                          </m:r>
+                        </m:e>
+                      </m:d>
+                      <m:r>
+                        <a:rPr lang="pt-BR" i="1">
+                          <a:latin typeface="Cambria Math" panose="02040503050406030204" pitchFamily="18" charset="0"/>
+                          <a:ea typeface="Cambria Math" panose="02040503050406030204" pitchFamily="18" charset="0"/>
+                        </a:rPr>
+                        <m:t>←</m:t>
+                      </m:r>
+                      <m:r>
+                        <a:rPr lang="pt-BR" i="1">
+                          <a:latin typeface="Cambria Math" panose="02040503050406030204" pitchFamily="18" charset="0"/>
+                          <a:ea typeface="Cambria Math" panose="02040503050406030204" pitchFamily="18" charset="0"/>
+                        </a:rPr>
+                        <m:t>𝑄</m:t>
+                      </m:r>
+                      <m:d>
+                        <m:dPr>
+                          <m:ctrlPr>
+                            <a:rPr lang="pt-BR" i="1">
+                              <a:latin typeface="Cambria Math" panose="02040503050406030204" pitchFamily="18" charset="0"/>
+                              <a:ea typeface="Cambria Math" panose="02040503050406030204" pitchFamily="18" charset="0"/>
+                            </a:rPr>
+                          </m:ctrlPr>
+                        </m:dPr>
+                        <m:e>
+                          <m:r>
+                            <a:rPr lang="pt-BR" i="1">
+                              <a:latin typeface="Cambria Math" panose="02040503050406030204" pitchFamily="18" charset="0"/>
+                              <a:ea typeface="Cambria Math" panose="02040503050406030204" pitchFamily="18" charset="0"/>
+                            </a:rPr>
+                            <m:t>𝑠</m:t>
+                          </m:r>
+                          <m:r>
+                            <a:rPr lang="pt-BR" i="1">
+                              <a:latin typeface="Cambria Math" panose="02040503050406030204" pitchFamily="18" charset="0"/>
+                              <a:ea typeface="Cambria Math" panose="02040503050406030204" pitchFamily="18" charset="0"/>
+                            </a:rPr>
+                            <m:t>,</m:t>
+                          </m:r>
+                          <m:r>
+                            <a:rPr lang="pt-BR" i="1">
+                              <a:latin typeface="Cambria Math" panose="02040503050406030204" pitchFamily="18" charset="0"/>
+                              <a:ea typeface="Cambria Math" panose="02040503050406030204" pitchFamily="18" charset="0"/>
+                            </a:rPr>
+                            <m:t>𝑎</m:t>
+                          </m:r>
+                        </m:e>
+                      </m:d>
+                      <m:r>
+                        <a:rPr lang="pt-BR" i="1">
+                          <a:latin typeface="Cambria Math" panose="02040503050406030204" pitchFamily="18" charset="0"/>
+                          <a:ea typeface="Cambria Math" panose="02040503050406030204" pitchFamily="18" charset="0"/>
+                        </a:rPr>
+                        <m:t>+</m:t>
+                      </m:r>
+                      <m:r>
+                        <a:rPr lang="pt-BR" i="1">
+                          <a:latin typeface="Cambria Math" panose="02040503050406030204" pitchFamily="18" charset="0"/>
+                          <a:ea typeface="Cambria Math" panose="02040503050406030204" pitchFamily="18" charset="0"/>
+                        </a:rPr>
+                        <m:t>𝛼</m:t>
+                      </m:r>
+                      <m:d>
+                        <m:dPr>
+                          <m:begChr m:val="["/>
+                          <m:endChr m:val="]"/>
+                          <m:ctrlPr>
+                            <a:rPr lang="pt-BR" i="1">
+                              <a:latin typeface="Cambria Math" panose="02040503050406030204" pitchFamily="18" charset="0"/>
+                              <a:ea typeface="Cambria Math" panose="02040503050406030204" pitchFamily="18" charset="0"/>
+                            </a:rPr>
+                          </m:ctrlPr>
+                        </m:dPr>
+                        <m:e>
+                          <m:r>
+                            <a:rPr lang="pt-BR" i="1">
+                              <a:latin typeface="Cambria Math" panose="02040503050406030204" pitchFamily="18" charset="0"/>
+                              <a:ea typeface="Cambria Math" panose="02040503050406030204" pitchFamily="18" charset="0"/>
+                            </a:rPr>
+                            <m:t>𝑟</m:t>
+                          </m:r>
+                          <m:r>
+                            <a:rPr lang="pt-BR" i="1">
+                              <a:latin typeface="Cambria Math" panose="02040503050406030204" pitchFamily="18" charset="0"/>
+                              <a:ea typeface="Cambria Math" panose="02040503050406030204" pitchFamily="18" charset="0"/>
+                            </a:rPr>
+                            <m:t>+</m:t>
+                          </m:r>
+                          <m:func>
+                            <m:funcPr>
+                              <m:ctrlPr>
+                                <a:rPr lang="pt-BR" i="1">
+                                  <a:latin typeface="Cambria Math" panose="02040503050406030204" pitchFamily="18" charset="0"/>
+                                  <a:ea typeface="Cambria Math" panose="02040503050406030204" pitchFamily="18" charset="0"/>
+                                </a:rPr>
+                              </m:ctrlPr>
+                            </m:funcPr>
+                            <m:fName>
+                              <m:limLow>
+                                <m:limLowPr>
+                                  <m:ctrlPr>
+                                    <a:rPr lang="pt-BR" i="1">
+                                      <a:latin typeface="Cambria Math" panose="02040503050406030204" pitchFamily="18" charset="0"/>
+                                      <a:ea typeface="Cambria Math" panose="02040503050406030204" pitchFamily="18" charset="0"/>
+                                    </a:rPr>
+                                  </m:ctrlPr>
+                                </m:limLowPr>
+                                <m:e>
+                                  <m:r>
+                                    <m:rPr>
+                                      <m:sty m:val="p"/>
+                                    </m:rPr>
+                                    <a:rPr lang="el-GR" i="1">
+                                      <a:latin typeface="Cambria Math" panose="02040503050406030204" pitchFamily="18" charset="0"/>
+                                      <a:ea typeface="Cambria Math" panose="02040503050406030204" pitchFamily="18" charset="0"/>
+                                    </a:rPr>
+                                    <m:t>γ</m:t>
+                                  </m:r>
+                                  <m:r>
+                                    <m:rPr>
+                                      <m:sty m:val="p"/>
+                                    </m:rPr>
+                                    <a:rPr lang="pt-BR">
+                                      <a:latin typeface="Cambria Math" panose="02040503050406030204" pitchFamily="18" charset="0"/>
+                                      <a:ea typeface="Cambria Math" panose="02040503050406030204" pitchFamily="18" charset="0"/>
+                                    </a:rPr>
+                                    <m:t>max</m:t>
+                                  </m:r>
+                                </m:e>
+                                <m:lim>
+                                  <m:sSup>
+                                    <m:sSupPr>
+                                      <m:ctrlPr>
+                                        <a:rPr lang="pt-BR" i="1">
+                                          <a:latin typeface="Cambria Math" panose="02040503050406030204" pitchFamily="18" charset="0"/>
+                                          <a:ea typeface="Cambria Math" panose="02040503050406030204" pitchFamily="18" charset="0"/>
+                                        </a:rPr>
+                                      </m:ctrlPr>
+                                    </m:sSupPr>
+                                    <m:e>
+                                      <m:r>
+                                        <a:rPr lang="pt-BR" i="1">
+                                          <a:latin typeface="Cambria Math" panose="02040503050406030204" pitchFamily="18" charset="0"/>
+                                          <a:ea typeface="Cambria Math" panose="02040503050406030204" pitchFamily="18" charset="0"/>
+                                        </a:rPr>
+                                        <m:t>𝑎</m:t>
+                                      </m:r>
+                                    </m:e>
+                                    <m:sup>
+                                      <m:r>
+                                        <a:rPr lang="pt-BR" i="1">
+                                          <a:latin typeface="Cambria Math" panose="02040503050406030204" pitchFamily="18" charset="0"/>
+                                          <a:ea typeface="Cambria Math" panose="02040503050406030204" pitchFamily="18" charset="0"/>
+                                        </a:rPr>
+                                        <m:t>′</m:t>
+                                      </m:r>
+                                    </m:sup>
+                                  </m:sSup>
+                                </m:lim>
+                              </m:limLow>
+                            </m:fName>
+                            <m:e>
+                              <m:r>
+                                <a:rPr lang="pt-BR" i="1">
+                                  <a:latin typeface="Cambria Math" panose="02040503050406030204" pitchFamily="18" charset="0"/>
+                                  <a:ea typeface="Cambria Math" panose="02040503050406030204" pitchFamily="18" charset="0"/>
+                                </a:rPr>
+                                <m:t>𝑄</m:t>
+                              </m:r>
+                              <m:d>
+                                <m:dPr>
+                                  <m:ctrlPr>
+                                    <a:rPr lang="pt-BR" i="1">
+                                      <a:latin typeface="Cambria Math" panose="02040503050406030204" pitchFamily="18" charset="0"/>
+                                      <a:ea typeface="Cambria Math" panose="02040503050406030204" pitchFamily="18" charset="0"/>
+                                    </a:rPr>
+                                  </m:ctrlPr>
+                                </m:dPr>
+                                <m:e>
+                                  <m:sSup>
+                                    <m:sSupPr>
+                                      <m:ctrlPr>
+                                        <a:rPr lang="pt-BR" i="1">
+                                          <a:latin typeface="Cambria Math" panose="02040503050406030204" pitchFamily="18" charset="0"/>
+                                          <a:ea typeface="Cambria Math" panose="02040503050406030204" pitchFamily="18" charset="0"/>
+                                        </a:rPr>
+                                      </m:ctrlPr>
+                                    </m:sSupPr>
+                                    <m:e>
+                                      <m:r>
+                                        <a:rPr lang="pt-BR" i="1">
+                                          <a:latin typeface="Cambria Math" panose="02040503050406030204" pitchFamily="18" charset="0"/>
+                                          <a:ea typeface="Cambria Math" panose="02040503050406030204" pitchFamily="18" charset="0"/>
+                                        </a:rPr>
+                                        <m:t>𝑠</m:t>
+                                      </m:r>
+                                    </m:e>
+                                    <m:sup>
+                                      <m:r>
+                                        <a:rPr lang="pt-BR" i="1">
+                                          <a:latin typeface="Cambria Math" panose="02040503050406030204" pitchFamily="18" charset="0"/>
+                                          <a:ea typeface="Cambria Math" panose="02040503050406030204" pitchFamily="18" charset="0"/>
+                                        </a:rPr>
+                                        <m:t>′</m:t>
+                                      </m:r>
+                                    </m:sup>
+                                  </m:sSup>
+                                  <m:r>
+                                    <a:rPr lang="pt-BR" i="1">
+                                      <a:latin typeface="Cambria Math" panose="02040503050406030204" pitchFamily="18" charset="0"/>
+                                      <a:ea typeface="Cambria Math" panose="02040503050406030204" pitchFamily="18" charset="0"/>
+                                    </a:rPr>
+                                    <m:t>,</m:t>
+                                  </m:r>
+                                  <m:sSup>
+                                    <m:sSupPr>
+                                      <m:ctrlPr>
+                                        <a:rPr lang="pt-BR" i="1">
+                                          <a:latin typeface="Cambria Math" panose="02040503050406030204" pitchFamily="18" charset="0"/>
+                                          <a:ea typeface="Cambria Math" panose="02040503050406030204" pitchFamily="18" charset="0"/>
+                                        </a:rPr>
+                                      </m:ctrlPr>
+                                    </m:sSupPr>
+                                    <m:e>
+                                      <m:r>
+                                        <a:rPr lang="pt-BR" i="1">
+                                          <a:latin typeface="Cambria Math" panose="02040503050406030204" pitchFamily="18" charset="0"/>
+                                          <a:ea typeface="Cambria Math" panose="02040503050406030204" pitchFamily="18" charset="0"/>
+                                        </a:rPr>
+                                        <m:t>𝑎</m:t>
+                                      </m:r>
+                                    </m:e>
+                                    <m:sup>
+                                      <m:r>
+                                        <a:rPr lang="pt-BR" i="1">
+                                          <a:latin typeface="Cambria Math" panose="02040503050406030204" pitchFamily="18" charset="0"/>
+                                          <a:ea typeface="Cambria Math" panose="02040503050406030204" pitchFamily="18" charset="0"/>
+                                        </a:rPr>
+                                        <m:t>′</m:t>
+                                      </m:r>
+                                    </m:sup>
+                                  </m:sSup>
+                                </m:e>
+                              </m:d>
+                            </m:e>
+                          </m:func>
+                          <m:r>
+                            <a:rPr lang="pt-BR" i="1">
+                              <a:latin typeface="Cambria Math" panose="02040503050406030204" pitchFamily="18" charset="0"/>
+                              <a:ea typeface="Cambria Math" panose="02040503050406030204" pitchFamily="18" charset="0"/>
+                            </a:rPr>
+                            <m:t>−</m:t>
+                          </m:r>
+                          <m:r>
+                            <a:rPr lang="pt-BR" i="1">
+                              <a:latin typeface="Cambria Math" panose="02040503050406030204" pitchFamily="18" charset="0"/>
+                              <a:ea typeface="Cambria Math" panose="02040503050406030204" pitchFamily="18" charset="0"/>
+                            </a:rPr>
+                            <m:t>𝑄</m:t>
+                          </m:r>
+                          <m:d>
+                            <m:dPr>
+                              <m:ctrlPr>
+                                <a:rPr lang="pt-BR" i="1">
+                                  <a:latin typeface="Cambria Math" panose="02040503050406030204" pitchFamily="18" charset="0"/>
+                                  <a:ea typeface="Cambria Math" panose="02040503050406030204" pitchFamily="18" charset="0"/>
+                                </a:rPr>
+                              </m:ctrlPr>
+                            </m:dPr>
+                            <m:e>
+                              <m:r>
+                                <a:rPr lang="pt-BR" i="1">
+                                  <a:latin typeface="Cambria Math" panose="02040503050406030204" pitchFamily="18" charset="0"/>
+                                  <a:ea typeface="Cambria Math" panose="02040503050406030204" pitchFamily="18" charset="0"/>
+                                </a:rPr>
+                                <m:t>𝑠</m:t>
+                              </m:r>
+                              <m:r>
+                                <a:rPr lang="pt-BR" i="1">
+                                  <a:latin typeface="Cambria Math" panose="02040503050406030204" pitchFamily="18" charset="0"/>
+                                  <a:ea typeface="Cambria Math" panose="02040503050406030204" pitchFamily="18" charset="0"/>
+                                </a:rPr>
+                                <m:t>,</m:t>
+                              </m:r>
+                              <m:r>
+                                <a:rPr lang="pt-BR" i="1">
+                                  <a:latin typeface="Cambria Math" panose="02040503050406030204" pitchFamily="18" charset="0"/>
+                                  <a:ea typeface="Cambria Math" panose="02040503050406030204" pitchFamily="18" charset="0"/>
+                                </a:rPr>
+                                <m:t>𝑎</m:t>
+                              </m:r>
+                            </m:e>
+                          </m:d>
+                        </m:e>
+                      </m:d>
+                    </m:oMath>
+                  </m:oMathPara>
+                </a14:m>
+                <a:endParaRPr lang="pt-BR" dirty="0"/>
+              </a:p>
+              <a:p>
+                <a:r>
+                  <a:rPr lang="pt-BR" dirty="0"/>
+                  <a:t>O termo dentro dos colchetes é chamado de 'Erro de Diferença Temporal'. </a:t>
+                </a:r>
+              </a:p>
+              <a:p>
+                <a:r>
+                  <a:rPr lang="pt-BR" dirty="0"/>
+                  <a:t>É a diferença entre o que acabamos de descobrir (</a:t>
+                </a:r>
+                <a14:m>
+                  <m:oMath xmlns:m="http://schemas.openxmlformats.org/officeDocument/2006/math">
+                    <m:r>
+                      <a:rPr lang="pt-BR" i="1">
+                        <a:latin typeface="Cambria Math" panose="02040503050406030204" pitchFamily="18" charset="0"/>
+                        <a:ea typeface="Cambria Math" panose="02040503050406030204" pitchFamily="18" charset="0"/>
+                      </a:rPr>
+                      <m:t>𝑟</m:t>
+                    </m:r>
+                    <m:r>
+                      <a:rPr lang="pt-BR" i="1">
+                        <a:latin typeface="Cambria Math" panose="02040503050406030204" pitchFamily="18" charset="0"/>
+                        <a:ea typeface="Cambria Math" panose="02040503050406030204" pitchFamily="18" charset="0"/>
+                      </a:rPr>
+                      <m:t>+</m:t>
+                    </m:r>
+                    <m:func>
+                      <m:funcPr>
+                        <m:ctrlPr>
+                          <a:rPr lang="pt-BR" i="1">
+                            <a:latin typeface="Cambria Math" panose="02040503050406030204" pitchFamily="18" charset="0"/>
+                            <a:ea typeface="Cambria Math" panose="02040503050406030204" pitchFamily="18" charset="0"/>
+                          </a:rPr>
+                        </m:ctrlPr>
+                      </m:funcPr>
+                      <m:fName>
+                        <m:limLow>
+                          <m:limLowPr>
+                            <m:ctrlPr>
+                              <a:rPr lang="pt-BR" i="1">
+                                <a:latin typeface="Cambria Math" panose="02040503050406030204" pitchFamily="18" charset="0"/>
+                                <a:ea typeface="Cambria Math" panose="02040503050406030204" pitchFamily="18" charset="0"/>
+                              </a:rPr>
+                            </m:ctrlPr>
+                          </m:limLowPr>
+                          <m:e>
+                            <m:r>
+                              <m:rPr>
+                                <m:sty m:val="p"/>
+                              </m:rPr>
+                              <a:rPr lang="el-GR" i="1">
+                                <a:latin typeface="Cambria Math" panose="02040503050406030204" pitchFamily="18" charset="0"/>
+                                <a:ea typeface="Cambria Math" panose="02040503050406030204" pitchFamily="18" charset="0"/>
+                              </a:rPr>
+                              <m:t>γ</m:t>
+                            </m:r>
+                            <m:r>
+                              <m:rPr>
+                                <m:sty m:val="p"/>
+                              </m:rPr>
+                              <a:rPr lang="pt-BR">
+                                <a:latin typeface="Cambria Math" panose="02040503050406030204" pitchFamily="18" charset="0"/>
+                                <a:ea typeface="Cambria Math" panose="02040503050406030204" pitchFamily="18" charset="0"/>
+                              </a:rPr>
+                              <m:t>max</m:t>
+                            </m:r>
+                          </m:e>
+                          <m:lim>
+                            <m:sSup>
+                              <m:sSupPr>
+                                <m:ctrlPr>
+                                  <a:rPr lang="pt-BR" i="1">
+                                    <a:latin typeface="Cambria Math" panose="02040503050406030204" pitchFamily="18" charset="0"/>
+                                    <a:ea typeface="Cambria Math" panose="02040503050406030204" pitchFamily="18" charset="0"/>
+                                  </a:rPr>
+                                </m:ctrlPr>
+                              </m:sSupPr>
+                              <m:e>
+                                <m:r>
+                                  <a:rPr lang="pt-BR" i="1">
+                                    <a:latin typeface="Cambria Math" panose="02040503050406030204" pitchFamily="18" charset="0"/>
+                                    <a:ea typeface="Cambria Math" panose="02040503050406030204" pitchFamily="18" charset="0"/>
+                                  </a:rPr>
+                                  <m:t>𝑎</m:t>
+                                </m:r>
+                              </m:e>
+                              <m:sup>
+                                <m:r>
+                                  <a:rPr lang="pt-BR" i="1">
+                                    <a:latin typeface="Cambria Math" panose="02040503050406030204" pitchFamily="18" charset="0"/>
+                                    <a:ea typeface="Cambria Math" panose="02040503050406030204" pitchFamily="18" charset="0"/>
+                                  </a:rPr>
+                                  <m:t>′</m:t>
+                                </m:r>
+                              </m:sup>
+                            </m:sSup>
+                          </m:lim>
+                        </m:limLow>
+                      </m:fName>
+                      <m:e>
+                        <m:r>
+                          <a:rPr lang="pt-BR" i="1">
+                            <a:latin typeface="Cambria Math" panose="02040503050406030204" pitchFamily="18" charset="0"/>
+                            <a:ea typeface="Cambria Math" panose="02040503050406030204" pitchFamily="18" charset="0"/>
+                          </a:rPr>
+                          <m:t>𝑄</m:t>
+                        </m:r>
+                        <m:d>
+                          <m:dPr>
+                            <m:ctrlPr>
+                              <a:rPr lang="pt-BR" i="1">
+                                <a:latin typeface="Cambria Math" panose="02040503050406030204" pitchFamily="18" charset="0"/>
+                                <a:ea typeface="Cambria Math" panose="02040503050406030204" pitchFamily="18" charset="0"/>
+                              </a:rPr>
+                            </m:ctrlPr>
+                          </m:dPr>
+                          <m:e>
+                            <m:sSup>
+                              <m:sSupPr>
+                                <m:ctrlPr>
+                                  <a:rPr lang="pt-BR" i="1">
+                                    <a:latin typeface="Cambria Math" panose="02040503050406030204" pitchFamily="18" charset="0"/>
+                                    <a:ea typeface="Cambria Math" panose="02040503050406030204" pitchFamily="18" charset="0"/>
+                                  </a:rPr>
+                                </m:ctrlPr>
+                              </m:sSupPr>
+                              <m:e>
+                                <m:r>
+                                  <a:rPr lang="pt-BR" i="1">
+                                    <a:latin typeface="Cambria Math" panose="02040503050406030204" pitchFamily="18" charset="0"/>
+                                    <a:ea typeface="Cambria Math" panose="02040503050406030204" pitchFamily="18" charset="0"/>
+                                  </a:rPr>
+                                  <m:t>𝑠</m:t>
+                                </m:r>
+                              </m:e>
+                              <m:sup>
+                                <m:r>
+                                  <a:rPr lang="pt-BR" i="1">
+                                    <a:latin typeface="Cambria Math" panose="02040503050406030204" pitchFamily="18" charset="0"/>
+                                    <a:ea typeface="Cambria Math" panose="02040503050406030204" pitchFamily="18" charset="0"/>
+                                  </a:rPr>
+                                  <m:t>′</m:t>
+                                </m:r>
+                              </m:sup>
+                            </m:sSup>
+                            <m:r>
+                              <a:rPr lang="pt-BR" i="1">
+                                <a:latin typeface="Cambria Math" panose="02040503050406030204" pitchFamily="18" charset="0"/>
+                                <a:ea typeface="Cambria Math" panose="02040503050406030204" pitchFamily="18" charset="0"/>
+                              </a:rPr>
+                              <m:t>,</m:t>
+                            </m:r>
+                            <m:sSup>
+                              <m:sSupPr>
+                                <m:ctrlPr>
+                                  <a:rPr lang="pt-BR" i="1">
+                                    <a:latin typeface="Cambria Math" panose="02040503050406030204" pitchFamily="18" charset="0"/>
+                                    <a:ea typeface="Cambria Math" panose="02040503050406030204" pitchFamily="18" charset="0"/>
+                                  </a:rPr>
+                                </m:ctrlPr>
+                              </m:sSupPr>
+                              <m:e>
+                                <m:r>
+                                  <a:rPr lang="pt-BR" i="1">
+                                    <a:latin typeface="Cambria Math" panose="02040503050406030204" pitchFamily="18" charset="0"/>
+                                    <a:ea typeface="Cambria Math" panose="02040503050406030204" pitchFamily="18" charset="0"/>
+                                  </a:rPr>
+                                  <m:t>𝑎</m:t>
+                                </m:r>
+                              </m:e>
+                              <m:sup>
+                                <m:r>
+                                  <a:rPr lang="pt-BR" i="1">
+                                    <a:latin typeface="Cambria Math" panose="02040503050406030204" pitchFamily="18" charset="0"/>
+                                    <a:ea typeface="Cambria Math" panose="02040503050406030204" pitchFamily="18" charset="0"/>
+                                  </a:rPr>
+                                  <m:t>′</m:t>
+                                </m:r>
+                              </m:sup>
+                            </m:sSup>
+                          </m:e>
+                        </m:d>
+                      </m:e>
+                    </m:func>
+                  </m:oMath>
+                </a14:m>
+                <a:r>
+                  <a:rPr lang="pt-BR" dirty="0"/>
+                  <a:t>) e o que achávamos que sabíamos (</a:t>
+                </a:r>
+                <a14:m>
+                  <m:oMath xmlns:m="http://schemas.openxmlformats.org/officeDocument/2006/math">
+                    <m:r>
+                      <a:rPr lang="pt-BR" i="1">
+                        <a:latin typeface="Cambria Math" panose="02040503050406030204" pitchFamily="18" charset="0"/>
+                        <a:ea typeface="Cambria Math" panose="02040503050406030204" pitchFamily="18" charset="0"/>
+                      </a:rPr>
+                      <m:t>𝑄</m:t>
+                    </m:r>
+                    <m:d>
+                      <m:dPr>
+                        <m:ctrlPr>
+                          <a:rPr lang="pt-BR" i="1">
+                            <a:latin typeface="Cambria Math" panose="02040503050406030204" pitchFamily="18" charset="0"/>
+                            <a:ea typeface="Cambria Math" panose="02040503050406030204" pitchFamily="18" charset="0"/>
+                          </a:rPr>
+                        </m:ctrlPr>
+                      </m:dPr>
+                      <m:e>
+                        <m:r>
+                          <a:rPr lang="pt-BR" i="1">
+                            <a:latin typeface="Cambria Math" panose="02040503050406030204" pitchFamily="18" charset="0"/>
+                            <a:ea typeface="Cambria Math" panose="02040503050406030204" pitchFamily="18" charset="0"/>
+                          </a:rPr>
+                          <m:t>𝑠</m:t>
+                        </m:r>
+                        <m:r>
+                          <a:rPr lang="pt-BR" i="1">
+                            <a:latin typeface="Cambria Math" panose="02040503050406030204" pitchFamily="18" charset="0"/>
+                            <a:ea typeface="Cambria Math" panose="02040503050406030204" pitchFamily="18" charset="0"/>
+                          </a:rPr>
+                          <m:t>,</m:t>
+                        </m:r>
+                        <m:r>
+                          <a:rPr lang="pt-BR" i="1">
+                            <a:latin typeface="Cambria Math" panose="02040503050406030204" pitchFamily="18" charset="0"/>
+                            <a:ea typeface="Cambria Math" panose="02040503050406030204" pitchFamily="18" charset="0"/>
+                          </a:rPr>
+                          <m:t>𝑎</m:t>
+                        </m:r>
+                      </m:e>
+                    </m:d>
+                  </m:oMath>
+                </a14:m>
+                <a:r>
+                  <a:rPr lang="pt-BR" dirty="0"/>
+                  <a:t>). </a:t>
+                </a:r>
+              </a:p>
+              <a:p>
+                <a:r>
+                  <a:rPr lang="pt-BR" dirty="0"/>
+                  <a:t>Nós multiplicamos esse erro pelo nosso </a:t>
+                </a:r>
+                <a14:m>
+                  <m:oMath xmlns:m="http://schemas.openxmlformats.org/officeDocument/2006/math">
+                    <m:r>
+                      <a:rPr lang="pt-BR" i="1">
+                        <a:latin typeface="Cambria Math" panose="02040503050406030204" pitchFamily="18" charset="0"/>
+                        <a:ea typeface="Cambria Math" panose="02040503050406030204" pitchFamily="18" charset="0"/>
+                      </a:rPr>
+                      <m:t>𝛼</m:t>
+                    </m:r>
+                  </m:oMath>
+                </a14:m>
+                <a:r>
+                  <a:rPr lang="pt-BR" dirty="0"/>
+                  <a:t> para corrigir nossa crença passo a passo.</a:t>
+                </a:r>
+                <a:endParaRPr lang="en-US" dirty="0"/>
+              </a:p>
+            </p:txBody>
+          </p:sp>
+        </mc:Choice>
+        <mc:Fallback>
+          <p:sp>
+            <p:nvSpPr>
+              <p:cNvPr id="3" name="Content Placeholder 2">
+                <a:extLst>
+                  <a:ext uri="{FF2B5EF4-FFF2-40B4-BE49-F238E27FC236}">
+                    <a16:creationId xmlns:a16="http://schemas.microsoft.com/office/drawing/2014/main" id="{9E788D2D-1B58-788D-B9CB-AA2B58DAC90E}"/>
+                  </a:ext>
+                </a:extLst>
+              </p:cNvPr>
+              <p:cNvSpPr>
+                <a:spLocks noGrp="1" noRot="1" noChangeAspect="1" noMove="1" noResize="1" noEditPoints="1" noAdjustHandles="1" noChangeArrowheads="1" noChangeShapeType="1" noTextEdit="1"/>
+              </p:cNvSpPr>
+              <p:nvPr>
+                <p:ph idx="1"/>
+              </p:nvPr>
+            </p:nvSpPr>
+            <p:spPr>
+              <a:xfrm>
+                <a:off x="838199" y="1825625"/>
+                <a:ext cx="11234057" cy="4351338"/>
+              </a:xfrm>
+              <a:blipFill>
+                <a:blip r:embed="rId3"/>
+                <a:stretch>
+                  <a:fillRect l="-922" r="-705"/>
+                </a:stretch>
+              </a:blipFill>
+            </p:spPr>
+            <p:txBody>
+              <a:bodyPr/>
+              <a:lstStyle/>
+              <a:p>
+                <a:r>
+                  <a:rPr lang="en-US">
+                    <a:noFill/>
+                  </a:rPr>
+                  <a:t> </a:t>
+                </a:r>
+              </a:p>
+            </p:txBody>
+          </p:sp>
+        </mc:Fallback>
+      </mc:AlternateContent>
+    </p:spTree>
+    <p:extLst>
+      <p:ext uri="{BB962C8B-B14F-4D97-AF65-F5344CB8AC3E}">
+        <p14:creationId xmlns:p14="http://schemas.microsoft.com/office/powerpoint/2010/main" val="3885795955"/>
+      </p:ext>
+    </p:extLst>
+  </p:cSld>
+  <p:clrMapOvr>
+    <a:masterClrMapping/>
+  </p:clrMapOvr>
+</p:sld>
+</file>
+
+<file path=ppt/slides/slide23.xml><?xml version="1.0" encoding="utf-8"?>
+<p:sld xmlns:a="http://schemas.openxmlformats.org/drawingml/2006/main" xmlns:r="http://schemas.openxmlformats.org/officeDocument/2006/relationships" xmlns:p="http://schemas.openxmlformats.org/presentationml/2006/main">
+  <p:cSld>
+    <p:spTree>
+      <p:nvGrpSpPr>
+        <p:cNvPr id="1" name=""/>
+        <p:cNvGrpSpPr/>
+        <p:nvPr/>
+      </p:nvGrpSpPr>
+      <p:grpSpPr>
+        <a:xfrm>
+          <a:off x="0" y="0"/>
+          <a:ext cx="0" cy="0"/>
+          <a:chOff x="0" y="0"/>
+          <a:chExt cx="0" cy="0"/>
+        </a:xfrm>
+      </p:grpSpPr>
+      <p:sp>
+        <p:nvSpPr>
+          <p:cNvPr id="2" name="Title 1">
+            <a:extLst>
+              <a:ext uri="{FF2B5EF4-FFF2-40B4-BE49-F238E27FC236}">
+                <a16:creationId xmlns:a16="http://schemas.microsoft.com/office/drawing/2014/main" id="{936F8D36-63A1-F427-6A4F-01E854EEB57B}"/>
+              </a:ext>
+            </a:extLst>
+          </p:cNvPr>
+          <p:cNvSpPr>
+            <a:spLocks noGrp="1"/>
+          </p:cNvSpPr>
+          <p:nvPr>
+            <p:ph type="title"/>
+          </p:nvPr>
+        </p:nvSpPr>
+        <p:spPr/>
+        <p:txBody>
+          <a:bodyPr/>
+          <a:lstStyle/>
+          <a:p>
+            <a:r>
+              <a:rPr lang="pt-BR" dirty="0"/>
+              <a:t>Exemplo numérico</a:t>
+            </a:r>
+            <a:endParaRPr lang="en-US" dirty="0"/>
+          </a:p>
+        </p:txBody>
+      </p:sp>
+      <p:sp>
+        <p:nvSpPr>
+          <p:cNvPr id="3" name="Content Placeholder 2">
+            <a:extLst>
+              <a:ext uri="{FF2B5EF4-FFF2-40B4-BE49-F238E27FC236}">
+                <a16:creationId xmlns:a16="http://schemas.microsoft.com/office/drawing/2014/main" id="{EB894157-32A4-5B45-5642-D7607A5096CE}"/>
+              </a:ext>
+            </a:extLst>
+          </p:cNvPr>
+          <p:cNvSpPr>
+            <a:spLocks noGrp="1"/>
+          </p:cNvSpPr>
+          <p:nvPr>
+            <p:ph idx="1"/>
+          </p:nvPr>
+        </p:nvSpPr>
+        <p:spPr/>
+        <p:txBody>
+          <a:bodyPr/>
+          <a:lstStyle/>
+          <a:p>
+            <a:endParaRPr lang="en-US"/>
+          </a:p>
+        </p:txBody>
+      </p:sp>
+    </p:spTree>
+    <p:extLst>
+      <p:ext uri="{BB962C8B-B14F-4D97-AF65-F5344CB8AC3E}">
+        <p14:creationId xmlns:p14="http://schemas.microsoft.com/office/powerpoint/2010/main" val="1454990387"/>
+      </p:ext>
+    </p:extLst>
+  </p:cSld>
+  <p:clrMapOvr>
+    <a:masterClrMapping/>
+  </p:clrMapOvr>
+</p:sld>
+</file>
+
+<file path=ppt/slides/slide24.xml><?xml version="1.0" encoding="utf-8"?>
+<p:sld xmlns:a="http://schemas.openxmlformats.org/drawingml/2006/main" xmlns:r="http://schemas.openxmlformats.org/officeDocument/2006/relationships" xmlns:p="http://schemas.openxmlformats.org/presentationml/2006/main">
+  <p:cSld>
+    <p:spTree>
+      <p:nvGrpSpPr>
+        <p:cNvPr id="1" name=""/>
+        <p:cNvGrpSpPr/>
+        <p:nvPr/>
+      </p:nvGrpSpPr>
+      <p:grpSpPr>
+        <a:xfrm>
+          <a:off x="0" y="0"/>
+          <a:ext cx="0" cy="0"/>
+          <a:chOff x="0" y="0"/>
+          <a:chExt cx="0" cy="0"/>
+        </a:xfrm>
+      </p:grpSpPr>
+      <p:sp>
+        <p:nvSpPr>
+          <p:cNvPr id="2" name="Title 1">
+            <a:extLst>
+              <a:ext uri="{FF2B5EF4-FFF2-40B4-BE49-F238E27FC236}">
+                <a16:creationId xmlns:a16="http://schemas.microsoft.com/office/drawing/2014/main" id="{8EB01B62-8582-E09F-DA69-E77F3F495399}"/>
+              </a:ext>
+            </a:extLst>
+          </p:cNvPr>
+          <p:cNvSpPr>
+            <a:spLocks noGrp="1"/>
+          </p:cNvSpPr>
+          <p:nvPr>
+            <p:ph type="title"/>
+          </p:nvPr>
+        </p:nvSpPr>
+        <p:spPr/>
+        <p:txBody>
+          <a:bodyPr/>
+          <a:lstStyle/>
+          <a:p>
+            <a:r>
+              <a:rPr lang="en-US" dirty="0"/>
+              <a:t>A </a:t>
+            </a:r>
+            <a:r>
+              <a:rPr lang="en-US" dirty="0" err="1"/>
+              <a:t>maldição</a:t>
+            </a:r>
+            <a:r>
+              <a:rPr lang="en-US" dirty="0"/>
+              <a:t> da </a:t>
+            </a:r>
+            <a:r>
+              <a:rPr lang="en-US" dirty="0" err="1"/>
+              <a:t>dimensionalidade</a:t>
+            </a:r>
+            <a:endParaRPr lang="en-US" dirty="0"/>
+          </a:p>
+        </p:txBody>
+      </p:sp>
+      <mc:AlternateContent xmlns:mc="http://schemas.openxmlformats.org/markup-compatibility/2006">
+        <mc:Choice xmlns:a14="http://schemas.microsoft.com/office/drawing/2010/main" Requires="a14">
+          <p:sp>
+            <p:nvSpPr>
+              <p:cNvPr id="3" name="Content Placeholder 2">
+                <a:extLst>
+                  <a:ext uri="{FF2B5EF4-FFF2-40B4-BE49-F238E27FC236}">
+                    <a16:creationId xmlns:a16="http://schemas.microsoft.com/office/drawing/2014/main" id="{0DB47E26-1487-F7F1-F157-E71A864B453D}"/>
+                  </a:ext>
+                </a:extLst>
+              </p:cNvPr>
+              <p:cNvSpPr>
+                <a:spLocks noGrp="1"/>
+              </p:cNvSpPr>
+              <p:nvPr>
+                <p:ph idx="1"/>
+              </p:nvPr>
+            </p:nvSpPr>
+            <p:spPr>
+              <a:xfrm>
+                <a:off x="838200" y="1825624"/>
+                <a:ext cx="11201400" cy="5032375"/>
+              </a:xfrm>
+            </p:spPr>
+            <p:txBody>
+              <a:bodyPr>
+                <a:normAutofit/>
+              </a:bodyPr>
+              <a:lstStyle/>
+              <a:p>
+                <a:r>
+                  <a:rPr lang="pt-BR" dirty="0"/>
+                  <a:t>O </a:t>
+                </a:r>
+                <a:r>
+                  <a:rPr lang="pt-BR" dirty="0" err="1"/>
+                  <a:t>Q-</a:t>
+                </a:r>
+                <a:r>
+                  <a:rPr lang="pt-BR" i="1" dirty="0" err="1"/>
+                  <a:t>learning</a:t>
+                </a:r>
+                <a:r>
+                  <a:rPr lang="pt-BR" dirty="0"/>
+                  <a:t> tem uma limitação conhecida como o </a:t>
+                </a:r>
+                <a:r>
+                  <a:rPr lang="pt-BR" i="1" dirty="0"/>
+                  <a:t>problema do espaço de estados</a:t>
+                </a:r>
+                <a:r>
+                  <a:rPr lang="pt-BR" dirty="0"/>
+                  <a:t>.</a:t>
+                </a:r>
+              </a:p>
+              <a:p>
+                <a:r>
+                  <a:rPr lang="pt-BR" dirty="0"/>
+                  <a:t>O </a:t>
+                </a:r>
+                <a:r>
+                  <a:rPr lang="pt-BR" dirty="0" err="1"/>
+                  <a:t>Q-</a:t>
+                </a:r>
+                <a:r>
+                  <a:rPr lang="pt-BR" i="1" dirty="0" err="1"/>
+                  <a:t>learning</a:t>
+                </a:r>
+                <a:r>
+                  <a:rPr lang="pt-BR" dirty="0"/>
+                  <a:t> tradicional requer que todos os estados estejam em uma tabela.</a:t>
+                </a:r>
+              </a:p>
+              <a:p>
+                <a:r>
+                  <a:rPr lang="pt-BR" dirty="0"/>
+                  <a:t>Porém, e se queremos treiná-lo para jogar Xadrez? </a:t>
+                </a:r>
+              </a:p>
+              <a:p>
+                <a:pPr lvl="1">
+                  <a:buFont typeface="Wingdings" panose="05000000000000000000" pitchFamily="2" charset="2"/>
+                  <a:buChar char="§"/>
+                </a:pPr>
+                <a:r>
+                  <a:rPr lang="pt-BR" dirty="0"/>
+                  <a:t>São aproximadamente </a:t>
+                </a:r>
+                <a14:m>
+                  <m:oMath xmlns:m="http://schemas.openxmlformats.org/officeDocument/2006/math">
+                    <m:sSup>
+                      <m:sSupPr>
+                        <m:ctrlPr>
+                          <a:rPr lang="pt-BR" i="1" smtClean="0">
+                            <a:latin typeface="Cambria Math" panose="02040503050406030204" pitchFamily="18" charset="0"/>
+                          </a:rPr>
+                        </m:ctrlPr>
+                      </m:sSupPr>
+                      <m:e>
+                        <m:r>
+                          <a:rPr lang="pt-BR" b="0" i="1" smtClean="0">
+                            <a:latin typeface="Cambria Math" panose="02040503050406030204" pitchFamily="18" charset="0"/>
+                          </a:rPr>
+                          <m:t>10</m:t>
+                        </m:r>
+                      </m:e>
+                      <m:sup>
+                        <m:r>
+                          <a:rPr lang="pt-BR" b="0" i="1" smtClean="0">
+                            <a:latin typeface="Cambria Math" panose="02040503050406030204" pitchFamily="18" charset="0"/>
+                          </a:rPr>
+                          <m:t>40</m:t>
+                        </m:r>
+                      </m:sup>
+                    </m:sSup>
+                  </m:oMath>
+                </a14:m>
+                <a:r>
+                  <a:rPr lang="pt-BR" dirty="0"/>
+                  <a:t> estados.</a:t>
+                </a:r>
+              </a:p>
+              <a:p>
+                <a:r>
+                  <a:rPr lang="pt-BR" dirty="0"/>
+                  <a:t>E se queremos treiná-lo para dirigir um carro autônomo usando uma câmara para observar o ambiente?</a:t>
+                </a:r>
+              </a:p>
+              <a:p>
+                <a:pPr lvl="1">
+                  <a:buFont typeface="Wingdings" panose="05000000000000000000" pitchFamily="2" charset="2"/>
+                  <a:buChar char="§"/>
+                </a:pPr>
+                <a:r>
+                  <a:rPr lang="pt-BR" dirty="0"/>
+                  <a:t>Milhões de pixels gerando bilhões de estados contínuos.</a:t>
+                </a:r>
+              </a:p>
+              <a:p>
+                <a:r>
+                  <a:rPr lang="pt-BR" dirty="0"/>
+                  <a:t>A tabela se torna gigantesca: a memória se esgota, e o treinamento se torna impossível.</a:t>
+                </a:r>
+              </a:p>
+              <a:p>
+                <a:endParaRPr lang="en-US" dirty="0"/>
+              </a:p>
+              <a:p>
+                <a:endParaRPr lang="en-US" dirty="0"/>
+              </a:p>
+            </p:txBody>
+          </p:sp>
+        </mc:Choice>
+        <mc:Fallback>
+          <p:sp>
+            <p:nvSpPr>
+              <p:cNvPr id="3" name="Content Placeholder 2">
+                <a:extLst>
+                  <a:ext uri="{FF2B5EF4-FFF2-40B4-BE49-F238E27FC236}">
+                    <a16:creationId xmlns:a16="http://schemas.microsoft.com/office/drawing/2014/main" id="{0DB47E26-1487-F7F1-F157-E71A864B453D}"/>
+                  </a:ext>
+                </a:extLst>
+              </p:cNvPr>
+              <p:cNvSpPr>
+                <a:spLocks noGrp="1" noRot="1" noChangeAspect="1" noMove="1" noResize="1" noEditPoints="1" noAdjustHandles="1" noChangeArrowheads="1" noChangeShapeType="1" noTextEdit="1"/>
+              </p:cNvSpPr>
+              <p:nvPr>
+                <p:ph idx="1"/>
+              </p:nvPr>
+            </p:nvSpPr>
+            <p:spPr>
+              <a:xfrm>
+                <a:off x="838200" y="1825624"/>
+                <a:ext cx="11201400" cy="5032375"/>
+              </a:xfrm>
+              <a:blipFill>
+                <a:blip r:embed="rId3"/>
+                <a:stretch>
+                  <a:fillRect l="-980" t="-1937" r="-1633"/>
+                </a:stretch>
+              </a:blipFill>
+            </p:spPr>
+            <p:txBody>
+              <a:bodyPr/>
+              <a:lstStyle/>
+              <a:p>
+                <a:r>
+                  <a:rPr lang="en-US">
+                    <a:noFill/>
+                  </a:rPr>
+                  <a:t> </a:t>
+                </a:r>
+              </a:p>
+            </p:txBody>
+          </p:sp>
+        </mc:Fallback>
+      </mc:AlternateContent>
+    </p:spTree>
+    <p:extLst>
+      <p:ext uri="{BB962C8B-B14F-4D97-AF65-F5344CB8AC3E}">
+        <p14:creationId xmlns:p14="http://schemas.microsoft.com/office/powerpoint/2010/main" val="1000293524"/>
+      </p:ext>
+    </p:extLst>
+  </p:cSld>
+  <p:clrMapOvr>
+    <a:masterClrMapping/>
+  </p:clrMapOvr>
+</p:sld>
+</file>
+
+<file path=ppt/slides/slide25.xml><?xml version="1.0" encoding="utf-8"?>
+<p:sld xmlns:a="http://schemas.openxmlformats.org/drawingml/2006/main" xmlns:r="http://schemas.openxmlformats.org/officeDocument/2006/relationships" xmlns:p="http://schemas.openxmlformats.org/presentationml/2006/main">
+  <p:cSld>
+    <p:spTree>
+      <p:nvGrpSpPr>
+        <p:cNvPr id="1" name=""/>
+        <p:cNvGrpSpPr/>
+        <p:nvPr/>
+      </p:nvGrpSpPr>
+      <p:grpSpPr>
+        <a:xfrm>
+          <a:off x="0" y="0"/>
+          <a:ext cx="0" cy="0"/>
+          <a:chOff x="0" y="0"/>
+          <a:chExt cx="0" cy="0"/>
+        </a:xfrm>
+      </p:grpSpPr>
+      <p:sp>
+        <p:nvSpPr>
+          <p:cNvPr id="2" name="Title 1">
+            <a:extLst>
+              <a:ext uri="{FF2B5EF4-FFF2-40B4-BE49-F238E27FC236}">
+                <a16:creationId xmlns:a16="http://schemas.microsoft.com/office/drawing/2014/main" id="{BC71F0FE-EA94-74C4-913C-E1B2789B6121}"/>
+              </a:ext>
+            </a:extLst>
+          </p:cNvPr>
+          <p:cNvSpPr>
+            <a:spLocks noGrp="1"/>
+          </p:cNvSpPr>
+          <p:nvPr>
+            <p:ph type="title"/>
+          </p:nvPr>
+        </p:nvSpPr>
+        <p:spPr/>
+        <p:txBody>
+          <a:bodyPr/>
+          <a:lstStyle/>
+          <a:p>
+            <a:r>
+              <a:rPr lang="en-US" dirty="0"/>
+              <a:t>A </a:t>
+            </a:r>
+            <a:r>
+              <a:rPr lang="en-US" dirty="0" err="1"/>
+              <a:t>maldição</a:t>
+            </a:r>
+            <a:r>
+              <a:rPr lang="en-US" dirty="0"/>
+              <a:t> da </a:t>
+            </a:r>
+            <a:r>
+              <a:rPr lang="en-US" dirty="0" err="1"/>
+              <a:t>dimensionalidade</a:t>
+            </a:r>
+            <a:endParaRPr lang="en-US" dirty="0"/>
+          </a:p>
+        </p:txBody>
+      </p:sp>
+      <p:sp>
+        <p:nvSpPr>
+          <p:cNvPr id="3" name="Content Placeholder 2">
+            <a:extLst>
+              <a:ext uri="{FF2B5EF4-FFF2-40B4-BE49-F238E27FC236}">
+                <a16:creationId xmlns:a16="http://schemas.microsoft.com/office/drawing/2014/main" id="{387116BB-1259-5A42-97B8-F5F027BBE6D6}"/>
+              </a:ext>
+            </a:extLst>
+          </p:cNvPr>
+          <p:cNvSpPr>
+            <a:spLocks noGrp="1"/>
+          </p:cNvSpPr>
+          <p:nvPr>
+            <p:ph idx="1"/>
+          </p:nvPr>
+        </p:nvSpPr>
+        <p:spPr>
+          <a:xfrm>
+            <a:off x="838200" y="1825625"/>
+            <a:ext cx="10896600" cy="4351338"/>
+          </a:xfrm>
+        </p:spPr>
+        <p:txBody>
+          <a:bodyPr/>
+          <a:lstStyle/>
+          <a:p>
+            <a:r>
+              <a:rPr lang="pt-BR" dirty="0"/>
+              <a:t>Para problemas com poucas ações e estados, a tabela é ótima. </a:t>
+            </a:r>
+          </a:p>
+          <a:p>
+            <a:r>
+              <a:rPr lang="pt-BR" dirty="0"/>
+              <a:t>Mas, por exemplo, em engenharia robótica, os estados são contínuos: </a:t>
+            </a:r>
+          </a:p>
+          <a:p>
+            <a:pPr lvl="1">
+              <a:buFont typeface="Wingdings" panose="05000000000000000000" pitchFamily="2" charset="2"/>
+              <a:buChar char="§"/>
+            </a:pPr>
+            <a:r>
+              <a:rPr lang="pt-BR" dirty="0"/>
+              <a:t>Por exemplo, velocidade, ângulo da articulação. </a:t>
+            </a:r>
+          </a:p>
+          <a:p>
+            <a:r>
+              <a:rPr lang="pt-BR" dirty="0"/>
+              <a:t>Não podemos ter uma linha na tabela-Q para um ângulo de 45,1 graus e outra para 45,2 graus. </a:t>
+            </a:r>
+          </a:p>
+          <a:p>
+            <a:r>
+              <a:rPr lang="pt-BR" dirty="0"/>
+              <a:t>Precisamos de </a:t>
+            </a:r>
+            <a:r>
+              <a:rPr lang="pt-BR" b="1" dirty="0"/>
+              <a:t>generalização</a:t>
+            </a:r>
+            <a:r>
+              <a:rPr lang="pt-BR" dirty="0"/>
+              <a:t>.</a:t>
+            </a:r>
+            <a:endParaRPr lang="en-US" dirty="0"/>
+          </a:p>
+          <a:p>
+            <a:endParaRPr lang="en-US" dirty="0"/>
+          </a:p>
+        </p:txBody>
+      </p:sp>
+    </p:spTree>
+    <p:extLst>
+      <p:ext uri="{BB962C8B-B14F-4D97-AF65-F5344CB8AC3E}">
+        <p14:creationId xmlns:p14="http://schemas.microsoft.com/office/powerpoint/2010/main" val="182445256"/>
+      </p:ext>
+    </p:extLst>
+  </p:cSld>
+  <p:clrMapOvr>
+    <a:masterClrMapping/>
+  </p:clrMapOvr>
+</p:sld>
+</file>
+
+<file path=ppt/slides/slide26.xml><?xml version="1.0" encoding="utf-8"?>
+<p:sld xmlns:a="http://schemas.openxmlformats.org/drawingml/2006/main" xmlns:r="http://schemas.openxmlformats.org/officeDocument/2006/relationships" xmlns:p="http://schemas.openxmlformats.org/presentationml/2006/main">
+  <p:cSld>
+    <p:spTree>
+      <p:nvGrpSpPr>
+        <p:cNvPr id="1" name=""/>
+        <p:cNvGrpSpPr/>
+        <p:nvPr/>
+      </p:nvGrpSpPr>
+      <p:grpSpPr>
+        <a:xfrm>
+          <a:off x="0" y="0"/>
+          <a:ext cx="0" cy="0"/>
+          <a:chOff x="0" y="0"/>
+          <a:chExt cx="0" cy="0"/>
+        </a:xfrm>
+      </p:grpSpPr>
+      <p:sp>
+        <p:nvSpPr>
+          <p:cNvPr id="2" name="Title 1">
+            <a:extLst>
+              <a:ext uri="{FF2B5EF4-FFF2-40B4-BE49-F238E27FC236}">
+                <a16:creationId xmlns:a16="http://schemas.microsoft.com/office/drawing/2014/main" id="{0FD9EB4A-BCBE-6A0F-12D6-6770FC41F962}"/>
+              </a:ext>
+            </a:extLst>
+          </p:cNvPr>
+          <p:cNvSpPr>
+            <a:spLocks noGrp="1"/>
+          </p:cNvSpPr>
+          <p:nvPr>
+            <p:ph type="title"/>
+          </p:nvPr>
+        </p:nvSpPr>
+        <p:spPr/>
+        <p:txBody>
+          <a:bodyPr/>
+          <a:lstStyle/>
+          <a:p>
+            <a:r>
+              <a:rPr lang="pt-BR" dirty="0"/>
+              <a:t>Trocando a tabela-Q por redes neurais</a:t>
+            </a:r>
+            <a:endParaRPr lang="en-US" dirty="0"/>
+          </a:p>
+        </p:txBody>
+      </p:sp>
+      <mc:AlternateContent xmlns:mc="http://schemas.openxmlformats.org/markup-compatibility/2006">
+        <mc:Choice xmlns:a14="http://schemas.microsoft.com/office/drawing/2010/main" Requires="a14">
+          <p:sp>
+            <p:nvSpPr>
+              <p:cNvPr id="3" name="Content Placeholder 2">
+                <a:extLst>
+                  <a:ext uri="{FF2B5EF4-FFF2-40B4-BE49-F238E27FC236}">
+                    <a16:creationId xmlns:a16="http://schemas.microsoft.com/office/drawing/2014/main" id="{9B1F2B59-589E-C89D-B023-E847F3DC922F}"/>
+                  </a:ext>
+                </a:extLst>
+              </p:cNvPr>
+              <p:cNvSpPr>
+                <a:spLocks noGrp="1"/>
+              </p:cNvSpPr>
+              <p:nvPr>
+                <p:ph idx="1"/>
+              </p:nvPr>
+            </p:nvSpPr>
+            <p:spPr>
+              <a:xfrm>
+                <a:off x="5747658" y="1825624"/>
+                <a:ext cx="6444342" cy="5032375"/>
+              </a:xfrm>
+            </p:spPr>
+            <p:txBody>
+              <a:bodyPr>
+                <a:normAutofit lnSpcReduction="10000"/>
+              </a:bodyPr>
+              <a:lstStyle/>
+              <a:p>
+                <a:r>
+                  <a:rPr lang="pt-BR" b="1" dirty="0"/>
+                  <a:t>A solução:</a:t>
+                </a:r>
+                <a:r>
+                  <a:rPr lang="pt-BR" dirty="0"/>
+                  <a:t> Em vez de usar uma matriz para buscar </a:t>
+                </a:r>
+                <a14:m>
+                  <m:oMath xmlns:m="http://schemas.openxmlformats.org/officeDocument/2006/math">
+                    <m:r>
+                      <a:rPr lang="pt-BR" b="0" i="1" smtClean="0">
+                        <a:latin typeface="Cambria Math" panose="02040503050406030204" pitchFamily="18" charset="0"/>
+                      </a:rPr>
+                      <m:t>𝑄</m:t>
+                    </m:r>
+                    <m:r>
+                      <a:rPr lang="pt-BR" b="0" i="1" smtClean="0">
+                        <a:latin typeface="Cambria Math" panose="02040503050406030204" pitchFamily="18" charset="0"/>
+                      </a:rPr>
+                      <m:t>(</m:t>
+                    </m:r>
+                    <m:r>
+                      <a:rPr lang="pt-BR" b="0" i="1" smtClean="0">
+                        <a:latin typeface="Cambria Math" panose="02040503050406030204" pitchFamily="18" charset="0"/>
+                      </a:rPr>
+                      <m:t>𝑠</m:t>
+                    </m:r>
+                    <m:r>
+                      <a:rPr lang="pt-BR" b="0" i="1" smtClean="0">
+                        <a:latin typeface="Cambria Math" panose="02040503050406030204" pitchFamily="18" charset="0"/>
+                      </a:rPr>
+                      <m:t>,</m:t>
+                    </m:r>
+                    <m:r>
+                      <a:rPr lang="pt-BR" b="0" i="1" smtClean="0">
+                        <a:latin typeface="Cambria Math" panose="02040503050406030204" pitchFamily="18" charset="0"/>
+                      </a:rPr>
+                      <m:t>𝑎</m:t>
+                    </m:r>
+                    <m:r>
+                      <a:rPr lang="pt-BR" b="0" i="1" smtClean="0">
+                        <a:latin typeface="Cambria Math" panose="02040503050406030204" pitchFamily="18" charset="0"/>
+                      </a:rPr>
+                      <m:t>)</m:t>
+                    </m:r>
+                  </m:oMath>
+                </a14:m>
+                <a:r>
+                  <a:rPr lang="pt-BR" dirty="0"/>
+                  <a:t>, usamos uma </a:t>
+                </a:r>
+                <a:r>
+                  <a:rPr lang="pt-BR" b="1" dirty="0"/>
+                  <a:t>rede neural</a:t>
+                </a:r>
+                <a:r>
+                  <a:rPr lang="pt-BR" dirty="0"/>
+                  <a:t> para </a:t>
+                </a:r>
+                <a:r>
+                  <a:rPr lang="pt-BR" i="1" dirty="0"/>
+                  <a:t>aproximar</a:t>
+                </a:r>
+                <a:r>
+                  <a:rPr lang="pt-BR" dirty="0"/>
+                  <a:t> a função </a:t>
+                </a:r>
+                <a14:m>
+                  <m:oMath xmlns:m="http://schemas.openxmlformats.org/officeDocument/2006/math">
+                    <m:r>
+                      <a:rPr lang="pt-BR" b="0" i="1" smtClean="0">
+                        <a:latin typeface="Cambria Math" panose="02040503050406030204" pitchFamily="18" charset="0"/>
+                      </a:rPr>
+                      <m:t>𝑄</m:t>
+                    </m:r>
+                  </m:oMath>
+                </a14:m>
+                <a:r>
+                  <a:rPr lang="pt-BR" dirty="0"/>
+                  <a:t>.</a:t>
+                </a:r>
+              </a:p>
+              <a:p>
+                <a:r>
+                  <a:rPr lang="pt-BR" dirty="0"/>
+                  <a:t>A rede aprender a generalizar estados: o agente não precisa visitar todos os estados.</a:t>
+                </a:r>
+              </a:p>
+              <a:p>
+                <a:r>
+                  <a:rPr lang="pt-BR" b="1" dirty="0"/>
+                  <a:t>Entrada:</a:t>
+                </a:r>
+                <a:r>
+                  <a:rPr lang="pt-BR" dirty="0"/>
+                  <a:t> O estado (e.g., a imagem da câmera).</a:t>
+                </a:r>
+              </a:p>
+              <a:p>
+                <a:pPr lvl="1">
+                  <a:buFont typeface="Wingdings" panose="05000000000000000000" pitchFamily="2" charset="2"/>
+                  <a:buChar char="§"/>
+                </a:pPr>
+                <a:r>
+                  <a:rPr lang="pt-BR" dirty="0"/>
+                  <a:t>Agora, o estado pode ser composto por valores contínuos.</a:t>
+                </a:r>
+              </a:p>
+              <a:p>
+                <a:r>
+                  <a:rPr lang="pt-BR" b="1" dirty="0"/>
+                  <a:t>Saída:</a:t>
+                </a:r>
+                <a:r>
+                  <a:rPr lang="pt-BR" dirty="0"/>
+                  <a:t> Os valores </a:t>
+                </a:r>
+                <a14:m>
+                  <m:oMath xmlns:m="http://schemas.openxmlformats.org/officeDocument/2006/math">
+                    <m:r>
+                      <a:rPr lang="pt-BR" i="1">
+                        <a:latin typeface="Cambria Math" panose="02040503050406030204" pitchFamily="18" charset="0"/>
+                      </a:rPr>
+                      <m:t>𝑄</m:t>
+                    </m:r>
+                  </m:oMath>
+                </a14:m>
+                <a:r>
+                  <a:rPr lang="pt-BR" dirty="0"/>
+                  <a:t> para todas as ações possíveis naquele estado.</a:t>
+                </a:r>
+              </a:p>
+            </p:txBody>
+          </p:sp>
+        </mc:Choice>
+        <mc:Fallback>
+          <p:sp>
+            <p:nvSpPr>
+              <p:cNvPr id="3" name="Content Placeholder 2">
+                <a:extLst>
+                  <a:ext uri="{FF2B5EF4-FFF2-40B4-BE49-F238E27FC236}">
+                    <a16:creationId xmlns:a16="http://schemas.microsoft.com/office/drawing/2014/main" id="{9B1F2B59-589E-C89D-B023-E847F3DC922F}"/>
+                  </a:ext>
+                </a:extLst>
+              </p:cNvPr>
+              <p:cNvSpPr>
+                <a:spLocks noGrp="1" noRot="1" noChangeAspect="1" noMove="1" noResize="1" noEditPoints="1" noAdjustHandles="1" noChangeArrowheads="1" noChangeShapeType="1" noTextEdit="1"/>
+              </p:cNvSpPr>
+              <p:nvPr>
+                <p:ph idx="1"/>
+              </p:nvPr>
+            </p:nvSpPr>
+            <p:spPr>
+              <a:xfrm>
+                <a:off x="5747658" y="1825624"/>
+                <a:ext cx="6444342" cy="5032375"/>
+              </a:xfrm>
+              <a:blipFill>
+                <a:blip r:embed="rId3"/>
+                <a:stretch>
+                  <a:fillRect l="-1703" t="-2663"/>
+                </a:stretch>
+              </a:blipFill>
+            </p:spPr>
+            <p:txBody>
+              <a:bodyPr/>
+              <a:lstStyle/>
+              <a:p>
+                <a:r>
+                  <a:rPr lang="en-US">
+                    <a:noFill/>
+                  </a:rPr>
+                  <a:t> </a:t>
+                </a:r>
+              </a:p>
+            </p:txBody>
+          </p:sp>
+        </mc:Fallback>
+      </mc:AlternateContent>
+      <p:pic>
+        <p:nvPicPr>
+          <p:cNvPr id="1028" name="Picture 4" descr="Cracking the Spell of Q* - A New Method in Problem Solving | Benny's Mind  Hack">
+            <a:extLst>
+              <a:ext uri="{FF2B5EF4-FFF2-40B4-BE49-F238E27FC236}">
+                <a16:creationId xmlns:a16="http://schemas.microsoft.com/office/drawing/2014/main" id="{2FAF9048-FD7A-0345-D833-A8A15BE69361}"/>
+              </a:ext>
+            </a:extLst>
+          </p:cNvPr>
+          <p:cNvPicPr>
+            <a:picLocks noChangeAspect="1" noChangeArrowheads="1"/>
+          </p:cNvPicPr>
+          <p:nvPr/>
+        </p:nvPicPr>
+        <p:blipFill>
+          <a:blip r:embed="rId4">
+            <a:extLst>
+              <a:ext uri="{28A0092B-C50C-407E-A947-70E740481C1C}">
+                <a14:useLocalDpi xmlns:a14="http://schemas.microsoft.com/office/drawing/2010/main" val="0"/>
+              </a:ext>
+            </a:extLst>
+          </a:blip>
+          <a:srcRect/>
+          <a:stretch>
+            <a:fillRect/>
+          </a:stretch>
+        </p:blipFill>
+        <p:spPr bwMode="auto">
+          <a:xfrm>
+            <a:off x="95250" y="2242457"/>
+            <a:ext cx="5172489" cy="3399064"/>
+          </a:xfrm>
+          <a:prstGeom prst="rect">
+            <a:avLst/>
+          </a:prstGeom>
+          <a:noFill/>
+          <a:extLst>
+            <a:ext uri="{909E8E84-426E-40DD-AFC4-6F175D3DCCD1}">
+              <a14:hiddenFill xmlns:a14="http://schemas.microsoft.com/office/drawing/2010/main">
+                <a:solidFill>
+                  <a:srgbClr val="FFFFFF"/>
+                </a:solidFill>
+              </a14:hiddenFill>
+            </a:ext>
+          </a:extLst>
+        </p:spPr>
+      </p:pic>
+    </p:spTree>
+    <p:extLst>
+      <p:ext uri="{BB962C8B-B14F-4D97-AF65-F5344CB8AC3E}">
+        <p14:creationId xmlns:p14="http://schemas.microsoft.com/office/powerpoint/2010/main" val="2875250819"/>
+      </p:ext>
+    </p:extLst>
+  </p:cSld>
+  <p:clrMapOvr>
+    <a:masterClrMapping/>
+  </p:clrMapOvr>
+</p:sld>
+</file>
+
+<file path=ppt/slides/slide27.xml><?xml version="1.0" encoding="utf-8"?>
+<p:sld xmlns:a="http://schemas.openxmlformats.org/drawingml/2006/main" xmlns:r="http://schemas.openxmlformats.org/officeDocument/2006/relationships" xmlns:p="http://schemas.openxmlformats.org/presentationml/2006/main">
+  <p:cSld>
+    <p:spTree>
+      <p:nvGrpSpPr>
+        <p:cNvPr id="1" name=""/>
+        <p:cNvGrpSpPr/>
+        <p:nvPr/>
+      </p:nvGrpSpPr>
+      <p:grpSpPr>
+        <a:xfrm>
+          <a:off x="0" y="0"/>
+          <a:ext cx="0" cy="0"/>
+          <a:chOff x="0" y="0"/>
+          <a:chExt cx="0" cy="0"/>
+        </a:xfrm>
+      </p:grpSpPr>
+      <p:sp>
+        <p:nvSpPr>
+          <p:cNvPr id="2" name="Title 1">
+            <a:extLst>
+              <a:ext uri="{FF2B5EF4-FFF2-40B4-BE49-F238E27FC236}">
+                <a16:creationId xmlns:a16="http://schemas.microsoft.com/office/drawing/2014/main" id="{48EDEA96-2DFF-1829-9984-096F6593BEEE}"/>
+              </a:ext>
+            </a:extLst>
+          </p:cNvPr>
+          <p:cNvSpPr>
+            <a:spLocks noGrp="1"/>
+          </p:cNvSpPr>
+          <p:nvPr>
+            <p:ph type="title"/>
+          </p:nvPr>
+        </p:nvSpPr>
+        <p:spPr/>
+        <p:txBody>
+          <a:bodyPr/>
+          <a:lstStyle/>
+          <a:p>
+            <a:r>
+              <a:rPr lang="en-US" dirty="0"/>
+              <a:t>Onde RL é </a:t>
+            </a:r>
+            <a:r>
+              <a:rPr lang="en-US" dirty="0" err="1"/>
+              <a:t>usado</a:t>
+            </a:r>
+            <a:r>
+              <a:rPr lang="en-US" dirty="0"/>
+              <a:t>?</a:t>
+            </a:r>
+          </a:p>
+        </p:txBody>
+      </p:sp>
+      <p:sp>
+        <p:nvSpPr>
+          <p:cNvPr id="3" name="Content Placeholder 2">
+            <a:extLst>
+              <a:ext uri="{FF2B5EF4-FFF2-40B4-BE49-F238E27FC236}">
+                <a16:creationId xmlns:a16="http://schemas.microsoft.com/office/drawing/2014/main" id="{0160E88F-503C-2590-9D5D-B2BDD50D2767}"/>
+              </a:ext>
+            </a:extLst>
+          </p:cNvPr>
+          <p:cNvSpPr>
+            <a:spLocks noGrp="1"/>
+          </p:cNvSpPr>
+          <p:nvPr>
+            <p:ph idx="1"/>
+          </p:nvPr>
+        </p:nvSpPr>
+        <p:spPr>
+          <a:xfrm>
+            <a:off x="5061856" y="1825624"/>
+            <a:ext cx="6999513" cy="5032375"/>
+          </a:xfrm>
+        </p:spPr>
+        <p:txBody>
+          <a:bodyPr/>
+          <a:lstStyle/>
+          <a:p>
+            <a:r>
+              <a:rPr lang="pt-BR" b="1" dirty="0"/>
+              <a:t>Robótica e manufatura:</a:t>
+            </a:r>
+            <a:r>
+              <a:rPr lang="pt-BR" dirty="0"/>
+              <a:t> Braços robóticos que aprendem a agarrar objetos.</a:t>
+            </a:r>
+          </a:p>
+          <a:p>
+            <a:r>
+              <a:rPr lang="pt-BR" b="1" dirty="0"/>
+              <a:t>Otimização de redes e sistemas:</a:t>
+            </a:r>
+            <a:r>
+              <a:rPr lang="pt-BR" dirty="0"/>
+              <a:t> Roteamento de pacotes dinâmico para evitar gargalos na rede.</a:t>
+            </a:r>
+          </a:p>
+          <a:p>
+            <a:r>
+              <a:rPr lang="pt-BR" b="1" dirty="0"/>
+              <a:t>Sistemas de recomendação:</a:t>
+            </a:r>
+            <a:r>
+              <a:rPr lang="pt-BR" dirty="0"/>
+              <a:t> Customização de conteúdo onde a recompensa é o "clique" ou "tempo de retenção" do usuário.</a:t>
+            </a:r>
+          </a:p>
+          <a:p>
+            <a:r>
+              <a:rPr lang="pt-BR" b="1" dirty="0"/>
+              <a:t>Controle industrial:</a:t>
+            </a:r>
+            <a:r>
+              <a:rPr lang="pt-BR" dirty="0"/>
+              <a:t> Ajuste fino de caldeiras e refrigeração em data centers para reduzir consumo de energia.</a:t>
+            </a:r>
+          </a:p>
+          <a:p>
+            <a:endParaRPr lang="en-US" dirty="0"/>
+          </a:p>
+          <a:p>
+            <a:endParaRPr lang="en-US" dirty="0"/>
+          </a:p>
+        </p:txBody>
+      </p:sp>
+      <p:pic>
+        <p:nvPicPr>
+          <p:cNvPr id="6" name="Picture 5">
+            <a:extLst>
+              <a:ext uri="{FF2B5EF4-FFF2-40B4-BE49-F238E27FC236}">
+                <a16:creationId xmlns:a16="http://schemas.microsoft.com/office/drawing/2014/main" id="{265EF8FE-70EB-D556-D43F-F69593E54B8C}"/>
+              </a:ext>
+            </a:extLst>
+          </p:cNvPr>
+          <p:cNvPicPr>
+            <a:picLocks noChangeAspect="1"/>
+          </p:cNvPicPr>
+          <p:nvPr/>
+        </p:nvPicPr>
+        <p:blipFill>
+          <a:blip r:embed="rId3">
+            <a:extLst>
+              <a:ext uri="{28A0092B-C50C-407E-A947-70E740481C1C}">
+                <a14:useLocalDpi xmlns:a14="http://schemas.microsoft.com/office/drawing/2010/main" val="0"/>
+              </a:ext>
+            </a:extLst>
+          </a:blip>
+          <a:stretch>
+            <a:fillRect/>
+          </a:stretch>
+        </p:blipFill>
+        <p:spPr>
+          <a:xfrm>
+            <a:off x="293917" y="2416629"/>
+            <a:ext cx="4604655" cy="3069770"/>
+          </a:xfrm>
+          <a:prstGeom prst="rect">
+            <a:avLst/>
+          </a:prstGeom>
+        </p:spPr>
+      </p:pic>
+    </p:spTree>
+    <p:extLst>
+      <p:ext uri="{BB962C8B-B14F-4D97-AF65-F5344CB8AC3E}">
+        <p14:creationId xmlns:p14="http://schemas.microsoft.com/office/powerpoint/2010/main" val="2981192540"/>
+      </p:ext>
+    </p:extLst>
+  </p:cSld>
+  <p:clrMapOvr>
+    <a:masterClrMapping/>
+  </p:clrMapOvr>
+</p:sld>
+</file>
+
+<file path=ppt/slides/slide28.xml><?xml version="1.0" encoding="utf-8"?>
+<p:sld xmlns:a="http://schemas.openxmlformats.org/drawingml/2006/main" xmlns:r="http://schemas.openxmlformats.org/officeDocument/2006/relationships" xmlns:p="http://schemas.openxmlformats.org/presentationml/2006/main">
+  <p:cSld>
+    <p:spTree>
+      <p:nvGrpSpPr>
+        <p:cNvPr id="1" name=""/>
+        <p:cNvGrpSpPr/>
+        <p:nvPr/>
+      </p:nvGrpSpPr>
+      <p:grpSpPr>
+        <a:xfrm>
+          <a:off x="0" y="0"/>
+          <a:ext cx="0" cy="0"/>
+          <a:chOff x="0" y="0"/>
+          <a:chExt cx="0" cy="0"/>
+        </a:xfrm>
+      </p:grpSpPr>
+      <p:sp>
+        <p:nvSpPr>
+          <p:cNvPr id="2" name="Title 1">
+            <a:extLst>
+              <a:ext uri="{FF2B5EF4-FFF2-40B4-BE49-F238E27FC236}">
+                <a16:creationId xmlns:a16="http://schemas.microsoft.com/office/drawing/2014/main" id="{1E5D343F-1952-C012-31AC-0443BF9C1BA8}"/>
+              </a:ext>
+            </a:extLst>
+          </p:cNvPr>
+          <p:cNvSpPr>
+            <a:spLocks noGrp="1"/>
+          </p:cNvSpPr>
+          <p:nvPr>
+            <p:ph type="title"/>
+          </p:nvPr>
+        </p:nvSpPr>
+        <p:spPr/>
+        <p:txBody>
+          <a:bodyPr/>
+          <a:lstStyle/>
+          <a:p>
+            <a:endParaRPr lang="en-US"/>
+          </a:p>
+        </p:txBody>
+      </p:sp>
+      <p:pic>
+        <p:nvPicPr>
+          <p:cNvPr id="1026" name="Picture 2" descr="Evaluating a Hybrid LLM Q-Learning/DQN Framework for Adaptive Obstacle  Avoidance in Embedded Robotics">
+            <a:extLst>
+              <a:ext uri="{FF2B5EF4-FFF2-40B4-BE49-F238E27FC236}">
+                <a16:creationId xmlns:a16="http://schemas.microsoft.com/office/drawing/2014/main" id="{BA833512-3FC7-011C-B55D-9BC5E88B4C29}"/>
+              </a:ext>
+            </a:extLst>
+          </p:cNvPr>
+          <p:cNvPicPr>
+            <a:picLocks noChangeAspect="1" noChangeArrowheads="1"/>
+          </p:cNvPicPr>
+          <p:nvPr/>
+        </p:nvPicPr>
+        <p:blipFill>
+          <a:blip r:embed="rId2">
+            <a:extLst>
+              <a:ext uri="{28A0092B-C50C-407E-A947-70E740481C1C}">
+                <a14:useLocalDpi xmlns:a14="http://schemas.microsoft.com/office/drawing/2010/main" val="0"/>
+              </a:ext>
+            </a:extLst>
+          </a:blip>
+          <a:srcRect/>
+          <a:stretch>
+            <a:fillRect/>
+          </a:stretch>
+        </p:blipFill>
+        <p:spPr bwMode="auto">
+          <a:xfrm>
+            <a:off x="0" y="1951265"/>
+            <a:ext cx="5238750" cy="1809750"/>
+          </a:xfrm>
+          <a:prstGeom prst="rect">
+            <a:avLst/>
+          </a:prstGeom>
+          <a:noFill/>
+          <a:extLst>
+            <a:ext uri="{909E8E84-426E-40DD-AFC4-6F175D3DCCD1}">
+              <a14:hiddenFill xmlns:a14="http://schemas.microsoft.com/office/drawing/2010/main">
+                <a:solidFill>
+                  <a:srgbClr val="FFFFFF"/>
+                </a:solidFill>
+              </a14:hiddenFill>
+            </a:ext>
+          </a:extLst>
+        </p:spPr>
+      </p:pic>
+    </p:spTree>
+    <p:extLst>
+      <p:ext uri="{BB962C8B-B14F-4D97-AF65-F5344CB8AC3E}">
+        <p14:creationId xmlns:p14="http://schemas.microsoft.com/office/powerpoint/2010/main" val="3053794492"/>
+      </p:ext>
+    </p:extLst>
+  </p:cSld>
+  <p:clrMapOvr>
+    <a:masterClrMapping/>
+  </p:clrMapOvr>
+</p:sld>
+</file>
+
+<file path=ppt/slides/slide29.xml><?xml version="1.0" encoding="utf-8"?>
 <p:sld xmlns:a="http://schemas.openxmlformats.org/drawingml/2006/main" xmlns:r="http://schemas.openxmlformats.org/officeDocument/2006/relationships" xmlns:p="http://schemas.openxmlformats.org/presentationml/2006/main">
   <p:cSld>
     <p:spTree>
@@ -7576,7 +12522,7 @@
             <a:pPr algn="ctr"/>
             <a:r>
               <a:rPr lang="pt-BR" sz="6600" dirty="0"/>
-              <a:t>Obrigado!</a:t>
+              <a:t>Perguntas?</a:t>
             </a:r>
             <a:endParaRPr lang="pt-BR" sz="6600" b="1" i="1" dirty="0"/>
           </a:p>
@@ -7585,7 +12531,7 @@
     </p:spTree>
     <p:extLst>
       <p:ext uri="{BB962C8B-B14F-4D97-AF65-F5344CB8AC3E}">
-        <p14:creationId xmlns:p14="http://schemas.microsoft.com/office/powerpoint/2010/main" val="2655704619"/>
+        <p14:creationId xmlns:p14="http://schemas.microsoft.com/office/powerpoint/2010/main" val="3773005660"/>
       </p:ext>
     </p:extLst>
   </p:cSld>
@@ -7595,18 +12541,12 @@
 </p:sld>
 </file>
 
-<file path=ppt/slides/slide22.xml><?xml version="1.0" encoding="utf-8"?>
+<file path=ppt/slides/slide3.xml><?xml version="1.0" encoding="utf-8"?>
 <p:sld xmlns:a="http://schemas.openxmlformats.org/drawingml/2006/main" xmlns:r="http://schemas.openxmlformats.org/officeDocument/2006/relationships" xmlns:p="http://schemas.openxmlformats.org/presentationml/2006/main">
   <p:cSld>
     <p:spTree>
       <p:nvGrpSpPr>
-        <p:cNvPr id="1" name="">
-          <a:extLst>
-            <a:ext uri="{FF2B5EF4-FFF2-40B4-BE49-F238E27FC236}">
-              <a16:creationId xmlns:a16="http://schemas.microsoft.com/office/drawing/2014/main" id="{83DFB381-AAB9-2788-1601-EB1230F302AA}"/>
-            </a:ext>
-          </a:extLst>
-        </p:cNvPr>
+        <p:cNvPr id="1" name=""/>
         <p:cNvGrpSpPr/>
         <p:nvPr/>
       </p:nvGrpSpPr>
@@ -7620,10 +12560,190 @@
       </p:grpSpPr>
       <p:sp>
         <p:nvSpPr>
+          <p:cNvPr id="2" name="Título 1">
+            <a:extLst>
+              <a:ext uri="{FF2B5EF4-FFF2-40B4-BE49-F238E27FC236}">
+                <a16:creationId xmlns:a16="http://schemas.microsoft.com/office/drawing/2014/main" id="{7F5FF925-67DE-CC62-E869-C6E3C1D771E6}"/>
+              </a:ext>
+            </a:extLst>
+          </p:cNvPr>
+          <p:cNvSpPr>
+            <a:spLocks noGrp="1"/>
+          </p:cNvSpPr>
+          <p:nvPr>
+            <p:ph type="title"/>
+          </p:nvPr>
+        </p:nvSpPr>
+        <p:spPr/>
+        <p:txBody>
+          <a:bodyPr/>
+          <a:lstStyle/>
+          <a:p>
+            <a:r>
+              <a:rPr lang="pt-BR" dirty="0"/>
+              <a:t>O que é </a:t>
+            </a:r>
+            <a:r>
+              <a:rPr lang="pt-BR" i="1" dirty="0" err="1"/>
+              <a:t>reinforcement</a:t>
+            </a:r>
+            <a:r>
+              <a:rPr lang="pt-BR" i="1" dirty="0"/>
+              <a:t> learning</a:t>
+            </a:r>
+            <a:r>
+              <a:rPr lang="pt-BR" dirty="0"/>
+              <a:t>?</a:t>
+            </a:r>
+          </a:p>
+        </p:txBody>
+      </p:sp>
+      <p:sp>
+        <p:nvSpPr>
+          <p:cNvPr id="3" name="Espaço Reservado para Conteúdo 2">
+            <a:extLst>
+              <a:ext uri="{FF2B5EF4-FFF2-40B4-BE49-F238E27FC236}">
+                <a16:creationId xmlns:a16="http://schemas.microsoft.com/office/drawing/2014/main" id="{7DA84068-671A-9D40-4F76-2C57E4F720C2}"/>
+              </a:ext>
+            </a:extLst>
+          </p:cNvPr>
+          <p:cNvSpPr>
+            <a:spLocks noGrp="1"/>
+          </p:cNvSpPr>
+          <p:nvPr>
+            <p:ph idx="1"/>
+          </p:nvPr>
+        </p:nvSpPr>
+        <p:spPr>
+          <a:xfrm>
+            <a:off x="838201" y="1825624"/>
+            <a:ext cx="11255828" cy="5032375"/>
+          </a:xfrm>
+        </p:spPr>
+        <p:txBody>
+          <a:bodyPr>
+            <a:normAutofit/>
+          </a:bodyPr>
+          <a:lstStyle/>
+          <a:p>
+            <a:r>
+              <a:rPr lang="pt-BR" dirty="0"/>
+              <a:t>É um dos paradigmas de aprendizado de </a:t>
+            </a:r>
+            <a:r>
+              <a:rPr lang="pt-BR" i="1" dirty="0"/>
+              <a:t>machine learning</a:t>
+            </a:r>
+            <a:r>
+              <a:rPr lang="pt-BR" dirty="0"/>
+              <a:t> focado em como tomar </a:t>
+            </a:r>
+            <a:r>
+              <a:rPr lang="pt-BR" i="1" dirty="0"/>
+              <a:t>ações</a:t>
+            </a:r>
+            <a:r>
+              <a:rPr lang="pt-BR" dirty="0"/>
+              <a:t> para maximizar uma </a:t>
+            </a:r>
+            <a:r>
+              <a:rPr lang="pt-BR" i="1" dirty="0"/>
+              <a:t>recompensa</a:t>
+            </a:r>
+            <a:r>
+              <a:rPr lang="pt-BR" dirty="0"/>
+              <a:t> futura.</a:t>
+            </a:r>
+            <a:endParaRPr lang="en-US" dirty="0"/>
+          </a:p>
+          <a:p>
+            <a:endParaRPr lang="pt-BR" dirty="0"/>
+          </a:p>
+        </p:txBody>
+      </p:sp>
+      <p:pic>
+        <p:nvPicPr>
+          <p:cNvPr id="2051" name="Picture 3" descr="Understanding the Pillars of Machine Learning: Supervised, Unsupervised,  and Reinforcement Learning">
+            <a:extLst>
+              <a:ext uri="{FF2B5EF4-FFF2-40B4-BE49-F238E27FC236}">
+                <a16:creationId xmlns:a16="http://schemas.microsoft.com/office/drawing/2014/main" id="{BDF6F402-9EED-6D9D-33D9-227B654D168D}"/>
+              </a:ext>
+            </a:extLst>
+          </p:cNvPr>
+          <p:cNvPicPr>
+            <a:picLocks noChangeAspect="1" noChangeArrowheads="1"/>
+          </p:cNvPicPr>
+          <p:nvPr/>
+        </p:nvPicPr>
+        <p:blipFill rotWithShape="1">
+          <a:blip r:embed="rId3">
+            <a:extLst>
+              <a:ext uri="{28A0092B-C50C-407E-A947-70E740481C1C}">
+                <a14:useLocalDpi xmlns:a14="http://schemas.microsoft.com/office/drawing/2010/main" val="0"/>
+              </a:ext>
+            </a:extLst>
+          </a:blip>
+          <a:srcRect t="5692" b="3060"/>
+          <a:stretch>
+            <a:fillRect/>
+          </a:stretch>
+        </p:blipFill>
+        <p:spPr bwMode="auto">
+          <a:xfrm>
+            <a:off x="2345028" y="2786743"/>
+            <a:ext cx="7501943" cy="3853543"/>
+          </a:xfrm>
+          <a:prstGeom prst="rect">
+            <a:avLst/>
+          </a:prstGeom>
+          <a:noFill/>
+          <a:extLst>
+            <a:ext uri="{909E8E84-426E-40DD-AFC4-6F175D3DCCD1}">
+              <a14:hiddenFill xmlns:a14="http://schemas.microsoft.com/office/drawing/2010/main">
+                <a:solidFill>
+                  <a:srgbClr val="FFFFFF"/>
+                </a:solidFill>
+              </a14:hiddenFill>
+            </a:ext>
+          </a:extLst>
+        </p:spPr>
+      </p:pic>
+    </p:spTree>
+    <p:extLst>
+      <p:ext uri="{BB962C8B-B14F-4D97-AF65-F5344CB8AC3E}">
+        <p14:creationId xmlns:p14="http://schemas.microsoft.com/office/powerpoint/2010/main" val="364118245"/>
+      </p:ext>
+    </p:extLst>
+  </p:cSld>
+  <p:clrMapOvr>
+    <a:masterClrMapping/>
+  </p:clrMapOvr>
+</p:sld>
+</file>
+
+<file path=ppt/slides/slide30.xml><?xml version="1.0" encoding="utf-8"?>
+<p:sld xmlns:a="http://schemas.openxmlformats.org/drawingml/2006/main" xmlns:r="http://schemas.openxmlformats.org/officeDocument/2006/relationships" xmlns:p="http://schemas.openxmlformats.org/presentationml/2006/main">
+  <p:cSld>
+    <p:spTree>
+      <p:nvGrpSpPr>
+        <p:cNvPr id="1" name=""/>
+        <p:cNvGrpSpPr/>
+        <p:nvPr/>
+      </p:nvGrpSpPr>
+      <p:grpSpPr>
+        <a:xfrm>
+          <a:off x="0" y="0"/>
+          <a:ext cx="0" cy="0"/>
+          <a:chOff x="0" y="0"/>
+          <a:chExt cx="0" cy="0"/>
+        </a:xfrm>
+      </p:grpSpPr>
+      <p:sp>
+        <p:nvSpPr>
           <p:cNvPr id="4" name="Título 1">
             <a:extLst>
               <a:ext uri="{FF2B5EF4-FFF2-40B4-BE49-F238E27FC236}">
-                <a16:creationId xmlns:a16="http://schemas.microsoft.com/office/drawing/2014/main" id="{4AF40FF5-E3E4-99F0-8C87-687EB32C12F9}"/>
+                <a16:creationId xmlns:a16="http://schemas.microsoft.com/office/drawing/2014/main" id="{32666AC8-2E17-4DB4-B0F5-60C640CCFD2E}"/>
               </a:ext>
             </a:extLst>
           </p:cNvPr>
@@ -7668,6 +12788,98 @@
             <a:pPr algn="ctr"/>
             <a:r>
               <a:rPr lang="pt-BR" sz="6600" dirty="0"/>
+              <a:t>Obrigado!</a:t>
+            </a:r>
+            <a:endParaRPr lang="pt-BR" sz="6600" b="1" i="1" dirty="0"/>
+          </a:p>
+        </p:txBody>
+      </p:sp>
+    </p:spTree>
+    <p:extLst>
+      <p:ext uri="{BB962C8B-B14F-4D97-AF65-F5344CB8AC3E}">
+        <p14:creationId xmlns:p14="http://schemas.microsoft.com/office/powerpoint/2010/main" val="2655704619"/>
+      </p:ext>
+    </p:extLst>
+  </p:cSld>
+  <p:clrMapOvr>
+    <a:masterClrMapping/>
+  </p:clrMapOvr>
+</p:sld>
+</file>
+
+<file path=ppt/slides/slide31.xml><?xml version="1.0" encoding="utf-8"?>
+<p:sld xmlns:a="http://schemas.openxmlformats.org/drawingml/2006/main" xmlns:r="http://schemas.openxmlformats.org/officeDocument/2006/relationships" xmlns:p="http://schemas.openxmlformats.org/presentationml/2006/main">
+  <p:cSld>
+    <p:spTree>
+      <p:nvGrpSpPr>
+        <p:cNvPr id="1" name="">
+          <a:extLst>
+            <a:ext uri="{FF2B5EF4-FFF2-40B4-BE49-F238E27FC236}">
+              <a16:creationId xmlns:a16="http://schemas.microsoft.com/office/drawing/2014/main" id="{83DFB381-AAB9-2788-1601-EB1230F302AA}"/>
+            </a:ext>
+          </a:extLst>
+        </p:cNvPr>
+        <p:cNvGrpSpPr/>
+        <p:nvPr/>
+      </p:nvGrpSpPr>
+      <p:grpSpPr>
+        <a:xfrm>
+          <a:off x="0" y="0"/>
+          <a:ext cx="0" cy="0"/>
+          <a:chOff x="0" y="0"/>
+          <a:chExt cx="0" cy="0"/>
+        </a:xfrm>
+      </p:grpSpPr>
+      <p:sp>
+        <p:nvSpPr>
+          <p:cNvPr id="4" name="Título 1">
+            <a:extLst>
+              <a:ext uri="{FF2B5EF4-FFF2-40B4-BE49-F238E27FC236}">
+                <a16:creationId xmlns:a16="http://schemas.microsoft.com/office/drawing/2014/main" id="{4AF40FF5-E3E4-99F0-8C87-687EB32C12F9}"/>
+              </a:ext>
+            </a:extLst>
+          </p:cNvPr>
+          <p:cNvSpPr txBox="1">
+            <a:spLocks/>
+          </p:cNvSpPr>
+          <p:nvPr/>
+        </p:nvSpPr>
+        <p:spPr>
+          <a:xfrm>
+            <a:off x="1431533" y="2720526"/>
+            <a:ext cx="9144000" cy="1029541"/>
+          </a:xfrm>
+          <a:prstGeom prst="rect">
+            <a:avLst/>
+          </a:prstGeom>
+        </p:spPr>
+        <p:txBody>
+          <a:bodyPr vert="horz" lIns="91440" tIns="45720" rIns="91440" bIns="45720" rtlCol="0" anchor="ctr">
+            <a:normAutofit/>
+          </a:bodyPr>
+          <a:lstStyle>
+            <a:lvl1pPr algn="l" defTabSz="914400" rtl="0" eaLnBrk="1" latinLnBrk="0" hangingPunct="1">
+              <a:lnSpc>
+                <a:spcPct val="90000"/>
+              </a:lnSpc>
+              <a:spcBef>
+                <a:spcPct val="0"/>
+              </a:spcBef>
+              <a:buNone/>
+              <a:defRPr sz="4400" kern="1200">
+                <a:solidFill>
+                  <a:schemeClr val="tx1"/>
+                </a:solidFill>
+                <a:latin typeface="+mj-lt"/>
+                <a:ea typeface="+mj-ea"/>
+                <a:cs typeface="+mj-cs"/>
+              </a:defRPr>
+            </a:lvl1pPr>
+          </a:lstStyle>
+          <a:p>
+            <a:pPr algn="ctr"/>
+            <a:r>
+              <a:rPr lang="pt-BR" sz="6600" dirty="0"/>
               <a:t>Figuras</a:t>
             </a:r>
             <a:endParaRPr lang="pt-BR" sz="6600" b="1" i="1" dirty="0"/>
@@ -7687,7 +12899,7 @@
 </p:sld>
 </file>
 
-<file path=ppt/slides/slide23.xml><?xml version="1.0" encoding="utf-8"?>
+<file path=ppt/slides/slide32.xml><?xml version="1.0" encoding="utf-8"?>
 <p:sld xmlns:a="http://schemas.openxmlformats.org/drawingml/2006/main" xmlns:r="http://schemas.openxmlformats.org/officeDocument/2006/relationships" xmlns:p="http://schemas.openxmlformats.org/presentationml/2006/main">
   <p:cSld>
     <p:spTree>
@@ -9052,186 +14264,6 @@
 </p:sld>
 </file>
 
-<file path=ppt/slides/slide3.xml><?xml version="1.0" encoding="utf-8"?>
-<p:sld xmlns:a="http://schemas.openxmlformats.org/drawingml/2006/main" xmlns:r="http://schemas.openxmlformats.org/officeDocument/2006/relationships" xmlns:p="http://schemas.openxmlformats.org/presentationml/2006/main">
-  <p:cSld>
-    <p:spTree>
-      <p:nvGrpSpPr>
-        <p:cNvPr id="1" name=""/>
-        <p:cNvGrpSpPr/>
-        <p:nvPr/>
-      </p:nvGrpSpPr>
-      <p:grpSpPr>
-        <a:xfrm>
-          <a:off x="0" y="0"/>
-          <a:ext cx="0" cy="0"/>
-          <a:chOff x="0" y="0"/>
-          <a:chExt cx="0" cy="0"/>
-        </a:xfrm>
-      </p:grpSpPr>
-      <p:sp>
-        <p:nvSpPr>
-          <p:cNvPr id="2" name="Título 1">
-            <a:extLst>
-              <a:ext uri="{FF2B5EF4-FFF2-40B4-BE49-F238E27FC236}">
-                <a16:creationId xmlns:a16="http://schemas.microsoft.com/office/drawing/2014/main" id="{7F5FF925-67DE-CC62-E869-C6E3C1D771E6}"/>
-              </a:ext>
-            </a:extLst>
-          </p:cNvPr>
-          <p:cNvSpPr>
-            <a:spLocks noGrp="1"/>
-          </p:cNvSpPr>
-          <p:nvPr>
-            <p:ph type="title"/>
-          </p:nvPr>
-        </p:nvSpPr>
-        <p:spPr/>
-        <p:txBody>
-          <a:bodyPr/>
-          <a:lstStyle/>
-          <a:p>
-            <a:r>
-              <a:rPr lang="pt-BR" dirty="0"/>
-              <a:t>O que é </a:t>
-            </a:r>
-            <a:r>
-              <a:rPr lang="pt-BR" i="1" dirty="0" err="1"/>
-              <a:t>reinforcement</a:t>
-            </a:r>
-            <a:r>
-              <a:rPr lang="pt-BR" i="1" dirty="0"/>
-              <a:t> learning</a:t>
-            </a:r>
-            <a:r>
-              <a:rPr lang="pt-BR" dirty="0"/>
-              <a:t>?</a:t>
-            </a:r>
-          </a:p>
-        </p:txBody>
-      </p:sp>
-      <p:sp>
-        <p:nvSpPr>
-          <p:cNvPr id="3" name="Espaço Reservado para Conteúdo 2">
-            <a:extLst>
-              <a:ext uri="{FF2B5EF4-FFF2-40B4-BE49-F238E27FC236}">
-                <a16:creationId xmlns:a16="http://schemas.microsoft.com/office/drawing/2014/main" id="{7DA84068-671A-9D40-4F76-2C57E4F720C2}"/>
-              </a:ext>
-            </a:extLst>
-          </p:cNvPr>
-          <p:cNvSpPr>
-            <a:spLocks noGrp="1"/>
-          </p:cNvSpPr>
-          <p:nvPr>
-            <p:ph idx="1"/>
-          </p:nvPr>
-        </p:nvSpPr>
-        <p:spPr>
-          <a:xfrm>
-            <a:off x="838201" y="1825624"/>
-            <a:ext cx="11255828" cy="5032375"/>
-          </a:xfrm>
-        </p:spPr>
-        <p:txBody>
-          <a:bodyPr>
-            <a:normAutofit/>
-          </a:bodyPr>
-          <a:lstStyle/>
-          <a:p>
-            <a:r>
-              <a:rPr lang="pt-BR" dirty="0"/>
-              <a:t>É um dos paradigmas de aprendizado de </a:t>
-            </a:r>
-            <a:r>
-              <a:rPr lang="pt-BR" i="1" dirty="0"/>
-              <a:t>machine learning</a:t>
-            </a:r>
-            <a:r>
-              <a:rPr lang="pt-BR" dirty="0"/>
-              <a:t> focado em como tomar </a:t>
-            </a:r>
-            <a:r>
-              <a:rPr lang="pt-BR" i="1" dirty="0"/>
-              <a:t>ações</a:t>
-            </a:r>
-            <a:r>
-              <a:rPr lang="pt-BR" dirty="0"/>
-              <a:t> para maximizar uma </a:t>
-            </a:r>
-            <a:r>
-              <a:rPr lang="pt-BR" i="1" dirty="0"/>
-              <a:t>recompensa</a:t>
-            </a:r>
-            <a:r>
-              <a:rPr lang="pt-BR" dirty="0"/>
-              <a:t> futura.</a:t>
-            </a:r>
-            <a:endParaRPr lang="en-US" dirty="0"/>
-          </a:p>
-          <a:p>
-            <a:endParaRPr lang="pt-BR" dirty="0"/>
-          </a:p>
-        </p:txBody>
-      </p:sp>
-      <p:pic>
-        <p:nvPicPr>
-          <p:cNvPr id="2051" name="Picture 3" descr="Understanding the Pillars of Machine Learning: Supervised, Unsupervised,  and Reinforcement Learning">
-            <a:extLst>
-              <a:ext uri="{FF2B5EF4-FFF2-40B4-BE49-F238E27FC236}">
-                <a16:creationId xmlns:a16="http://schemas.microsoft.com/office/drawing/2014/main" id="{BDF6F402-9EED-6D9D-33D9-227B654D168D}"/>
-              </a:ext>
-            </a:extLst>
-          </p:cNvPr>
-          <p:cNvPicPr>
-            <a:picLocks noChangeAspect="1" noChangeArrowheads="1"/>
-          </p:cNvPicPr>
-          <p:nvPr/>
-        </p:nvPicPr>
-        <p:blipFill rotWithShape="1">
-          <a:blip r:embed="rId3">
-            <a:extLst>
-              <a:ext uri="{28A0092B-C50C-407E-A947-70E740481C1C}">
-                <a14:useLocalDpi xmlns:a14="http://schemas.microsoft.com/office/drawing/2010/main" val="0"/>
-              </a:ext>
-            </a:extLst>
-          </a:blip>
-          <a:srcRect t="5692" b="3060"/>
-          <a:stretch>
-            <a:fillRect/>
-          </a:stretch>
-        </p:blipFill>
-        <p:spPr bwMode="auto">
-          <a:xfrm>
-            <a:off x="2345028" y="2786743"/>
-            <a:ext cx="7501943" cy="3853543"/>
-          </a:xfrm>
-          <a:prstGeom prst="rect">
-            <a:avLst/>
-          </a:prstGeom>
-          <a:noFill/>
-          <a:extLst>
-            <a:ext uri="{909E8E84-426E-40DD-AFC4-6F175D3DCCD1}">
-              <a14:hiddenFill xmlns:a14="http://schemas.microsoft.com/office/drawing/2010/main">
-                <a:solidFill>
-                  <a:srgbClr val="FFFFFF"/>
-                </a:solidFill>
-              </a14:hiddenFill>
-            </a:ext>
-          </a:extLst>
-        </p:spPr>
-      </p:pic>
-    </p:spTree>
-    <p:extLst>
-      <p:ext uri="{BB962C8B-B14F-4D97-AF65-F5344CB8AC3E}">
-        <p14:creationId xmlns:p14="http://schemas.microsoft.com/office/powerpoint/2010/main" val="364118245"/>
-      </p:ext>
-    </p:extLst>
-  </p:cSld>
-  <p:clrMapOvr>
-    <a:masterClrMapping/>
-  </p:clrMapOvr>
-</p:sld>
-</file>
-
 <file path=ppt/slides/slide4.xml><?xml version="1.0" encoding="utf-8"?>
 <p:sld xmlns:a="http://schemas.openxmlformats.org/drawingml/2006/main" xmlns:r="http://schemas.openxmlformats.org/officeDocument/2006/relationships" xmlns:p="http://schemas.openxmlformats.org/presentationml/2006/main">
   <p:cSld>

--- a/slides/C24_Q_learning.pptx
+++ b/slides/C24_Q_learning.pptx
@@ -5,10 +5,10 @@
     <p:sldMasterId id="2147483648" r:id="rId1"/>
   </p:sldMasterIdLst>
   <p:notesMasterIdLst>
-    <p:notesMasterId r:id="rId34"/>
+    <p:notesMasterId r:id="rId35"/>
   </p:notesMasterIdLst>
   <p:handoutMasterIdLst>
-    <p:handoutMasterId r:id="rId35"/>
+    <p:handoutMasterId r:id="rId36"/>
   </p:handoutMasterIdLst>
   <p:sldIdLst>
     <p:sldId id="256" r:id="rId2"/>
@@ -38,11 +38,12 @@
     <p:sldId id="342" r:id="rId26"/>
     <p:sldId id="343" r:id="rId27"/>
     <p:sldId id="344" r:id="rId28"/>
-    <p:sldId id="331" r:id="rId29"/>
-    <p:sldId id="293" r:id="rId30"/>
-    <p:sldId id="306" r:id="rId31"/>
-    <p:sldId id="324" r:id="rId32"/>
-    <p:sldId id="323" r:id="rId33"/>
+    <p:sldId id="346" r:id="rId29"/>
+    <p:sldId id="347" r:id="rId30"/>
+    <p:sldId id="293" r:id="rId31"/>
+    <p:sldId id="306" r:id="rId32"/>
+    <p:sldId id="324" r:id="rId33"/>
+    <p:sldId id="323" r:id="rId34"/>
   </p:sldIdLst>
   <p:sldSz cx="12192000" cy="6858000"/>
   <p:notesSz cx="7315200" cy="9601200"/>
@@ -372,7 +373,7 @@
           <a:p>
             <a:fld id="{F7E56D9B-79AD-444A-AFED-DEC23408F8B4}" type="slidenum">
               <a:rPr lang="nl-BE" smtClean="0"/>
-              <a:t>‹#›</a:t>
+              <a:t>‹nº›</a:t>
             </a:fld>
             <a:endParaRPr lang="nl-BE"/>
           </a:p>
@@ -629,7 +630,7 @@
           <a:p>
             <a:fld id="{6FC8D850-966F-45A6-8DE7-15B891E7D40D}" type="slidenum">
               <a:rPr lang="pt-BR" smtClean="0"/>
-              <a:t>‹#›</a:t>
+              <a:t>‹nº›</a:t>
             </a:fld>
             <a:endParaRPr lang="pt-BR"/>
           </a:p>
@@ -954,7 +955,7 @@
         <p:cNvPr id="1" name="">
           <a:extLst>
             <a:ext uri="{FF2B5EF4-FFF2-40B4-BE49-F238E27FC236}">
-              <a16:creationId xmlns:a16="http://schemas.microsoft.com/office/drawing/2014/main" id="{255DD39D-8438-4F45-71B4-9F8747421DFC}"/>
+              <a16:creationId xmlns:a16="http://schemas.microsoft.com/office/drawing/2014/main" xmlns="" id="{255DD39D-8438-4F45-71B4-9F8747421DFC}"/>
             </a:ext>
           </a:extLst>
         </p:cNvPr>
@@ -974,7 +975,7 @@
           <p:cNvPr id="2" name="Slide Image Placeholder 1">
             <a:extLst>
               <a:ext uri="{FF2B5EF4-FFF2-40B4-BE49-F238E27FC236}">
-                <a16:creationId xmlns:a16="http://schemas.microsoft.com/office/drawing/2014/main" id="{6C322D5B-AD1C-1DB1-53A1-6978329C3FD0}"/>
+                <a16:creationId xmlns:a16="http://schemas.microsoft.com/office/drawing/2014/main" xmlns="" id="{6C322D5B-AD1C-1DB1-53A1-6978329C3FD0}"/>
               </a:ext>
             </a:extLst>
           </p:cNvPr>
@@ -992,7 +993,7 @@
           <p:cNvPr id="3" name="Notes Placeholder 2">
             <a:extLst>
               <a:ext uri="{FF2B5EF4-FFF2-40B4-BE49-F238E27FC236}">
-                <a16:creationId xmlns:a16="http://schemas.microsoft.com/office/drawing/2014/main" id="{F5D7455F-337E-5D6B-A02A-380397063D2D}"/>
+                <a16:creationId xmlns:a16="http://schemas.microsoft.com/office/drawing/2014/main" xmlns="" id="{F5D7455F-337E-5D6B-A02A-380397063D2D}"/>
               </a:ext>
             </a:extLst>
           </p:cNvPr>
@@ -1020,7 +1021,7 @@
           <p:cNvPr id="4" name="Slide Number Placeholder 3">
             <a:extLst>
               <a:ext uri="{FF2B5EF4-FFF2-40B4-BE49-F238E27FC236}">
-                <a16:creationId xmlns:a16="http://schemas.microsoft.com/office/drawing/2014/main" id="{B5124413-04E6-A99E-E6BA-F56674216BC5}"/>
+                <a16:creationId xmlns:a16="http://schemas.microsoft.com/office/drawing/2014/main" xmlns="" id="{B5124413-04E6-A99E-E6BA-F56674216BC5}"/>
               </a:ext>
             </a:extLst>
           </p:cNvPr>
@@ -1065,7 +1066,7 @@
         <p:cNvPr id="1" name="">
           <a:extLst>
             <a:ext uri="{FF2B5EF4-FFF2-40B4-BE49-F238E27FC236}">
-              <a16:creationId xmlns:a16="http://schemas.microsoft.com/office/drawing/2014/main" id="{83CD62A6-7D00-3C53-05CF-A6197A8362EA}"/>
+              <a16:creationId xmlns:a16="http://schemas.microsoft.com/office/drawing/2014/main" xmlns="" id="{83CD62A6-7D00-3C53-05CF-A6197A8362EA}"/>
             </a:ext>
           </a:extLst>
         </p:cNvPr>
@@ -1085,7 +1086,7 @@
           <p:cNvPr id="2" name="Slide Image Placeholder 1">
             <a:extLst>
               <a:ext uri="{FF2B5EF4-FFF2-40B4-BE49-F238E27FC236}">
-                <a16:creationId xmlns:a16="http://schemas.microsoft.com/office/drawing/2014/main" id="{6DFDE321-184D-9B7D-CEA2-205606B85A43}"/>
+                <a16:creationId xmlns:a16="http://schemas.microsoft.com/office/drawing/2014/main" xmlns="" id="{6DFDE321-184D-9B7D-CEA2-205606B85A43}"/>
               </a:ext>
             </a:extLst>
           </p:cNvPr>
@@ -1103,7 +1104,7 @@
           <p:cNvPr id="3" name="Notes Placeholder 2">
             <a:extLst>
               <a:ext uri="{FF2B5EF4-FFF2-40B4-BE49-F238E27FC236}">
-                <a16:creationId xmlns:a16="http://schemas.microsoft.com/office/drawing/2014/main" id="{6DA764DC-3F53-958D-91A3-DB06BD4A39DA}"/>
+                <a16:creationId xmlns:a16="http://schemas.microsoft.com/office/drawing/2014/main" xmlns="" id="{6DA764DC-3F53-958D-91A3-DB06BD4A39DA}"/>
               </a:ext>
             </a:extLst>
           </p:cNvPr>
@@ -1131,7 +1132,7 @@
           <p:cNvPr id="4" name="Slide Number Placeholder 3">
             <a:extLst>
               <a:ext uri="{FF2B5EF4-FFF2-40B4-BE49-F238E27FC236}">
-                <a16:creationId xmlns:a16="http://schemas.microsoft.com/office/drawing/2014/main" id="{6BC07E3E-C02F-977B-3C72-FEF303694F11}"/>
+                <a16:creationId xmlns:a16="http://schemas.microsoft.com/office/drawing/2014/main" xmlns="" id="{6BC07E3E-C02F-977B-3C72-FEF303694F11}"/>
               </a:ext>
             </a:extLst>
           </p:cNvPr>
@@ -1197,8 +1198,8 @@
         </p:nvSpPr>
         <p:spPr/>
       </p:sp>
-      <mc:AlternateContent xmlns:mc="http://schemas.openxmlformats.org/markup-compatibility/2006">
-        <mc:Choice xmlns:a14="http://schemas.microsoft.com/office/drawing/2010/main" Requires="a14">
+      <mc:AlternateContent xmlns:mc="http://schemas.openxmlformats.org/markup-compatibility/2006" xmlns:a14="http://schemas.microsoft.com/office/drawing/2010/main">
+        <mc:Choice Requires="a14">
           <p:sp>
             <p:nvSpPr>
               <p:cNvPr id="3" name="Notes Placeholder 2"/>
@@ -1242,7 +1243,7 @@
             </p:txBody>
           </p:sp>
         </mc:Choice>
-        <mc:Fallback>
+        <mc:Fallback xmlns="">
           <p:sp>
             <p:nvSpPr>
               <p:cNvPr id="3" name="Notes Placeholder 2"/>
@@ -1533,25 +1534,729 @@
         </p:nvSpPr>
         <p:spPr/>
       </p:sp>
-      <p:sp>
-        <p:nvSpPr>
-          <p:cNvPr id="3" name="Notes Placeholder 2"/>
-          <p:cNvSpPr>
-            <a:spLocks noGrp="1"/>
-          </p:cNvSpPr>
-          <p:nvPr>
-            <p:ph type="body" idx="1"/>
-          </p:nvPr>
-        </p:nvSpPr>
-        <p:spPr/>
-        <p:txBody>
-          <a:bodyPr/>
-          <a:lstStyle/>
-          <a:p>
-            <a:endParaRPr lang="en-US" dirty="0"/>
-          </a:p>
-        </p:txBody>
-      </p:sp>
+      <mc:AlternateContent xmlns:mc="http://schemas.openxmlformats.org/markup-compatibility/2006">
+        <mc:Choice xmlns:a14="http://schemas.microsoft.com/office/drawing/2010/main" Requires="a14">
+          <p:sp>
+            <p:nvSpPr>
+              <p:cNvPr id="3" name="Notes Placeholder 2"/>
+              <p:cNvSpPr>
+                <a:spLocks noGrp="1"/>
+              </p:cNvSpPr>
+              <p:nvPr>
+                <p:ph type="body" idx="1"/>
+              </p:nvPr>
+            </p:nvSpPr>
+            <p:spPr/>
+            <p:txBody>
+              <a:bodyPr/>
+              <a:lstStyle/>
+              <a:p>
+                <a:r>
+                  <a:rPr lang="pt-BR" noProof="0" dirty="0" smtClean="0"/>
+                  <a:t>Se a</a:t>
+                </a:r>
+                <a:r>
+                  <a:rPr lang="pt-BR" baseline="0" noProof="0" dirty="0" smtClean="0"/>
+                  <a:t> recompensa atual mais a estimativa da recompensa futura (TD error = </a:t>
+                </a:r>
+                <a14:m>
+                  <m:oMath xmlns:m="http://schemas.openxmlformats.org/officeDocument/2006/math">
+                    <m:r>
+                      <a:rPr lang="pt-BR" i="1" smtClean="0">
+                        <a:latin typeface="Cambria Math" panose="02040503050406030204" pitchFamily="18" charset="0"/>
+                        <a:ea typeface="Cambria Math" panose="02040503050406030204" pitchFamily="18" charset="0"/>
+                      </a:rPr>
+                      <m:t>𝑟</m:t>
+                    </m:r>
+                    <m:r>
+                      <a:rPr lang="pt-BR" i="1" smtClean="0">
+                        <a:latin typeface="Cambria Math" panose="02040503050406030204" pitchFamily="18" charset="0"/>
+                        <a:ea typeface="Cambria Math" panose="02040503050406030204" pitchFamily="18" charset="0"/>
+                      </a:rPr>
+                      <m:t>+</m:t>
+                    </m:r>
+                    <m:func>
+                      <m:funcPr>
+                        <m:ctrlPr>
+                          <a:rPr lang="pt-BR" i="1">
+                            <a:latin typeface="Cambria Math" panose="02040503050406030204" pitchFamily="18" charset="0"/>
+                            <a:ea typeface="Cambria Math" panose="02040503050406030204" pitchFamily="18" charset="0"/>
+                          </a:rPr>
+                        </m:ctrlPr>
+                      </m:funcPr>
+                      <m:fName>
+                        <m:limLow>
+                          <m:limLowPr>
+                            <m:ctrlPr>
+                              <a:rPr lang="pt-BR" i="1">
+                                <a:latin typeface="Cambria Math" panose="02040503050406030204" pitchFamily="18" charset="0"/>
+                                <a:ea typeface="Cambria Math" panose="02040503050406030204" pitchFamily="18" charset="0"/>
+                              </a:rPr>
+                            </m:ctrlPr>
+                          </m:limLowPr>
+                          <m:e>
+                            <m:r>
+                              <m:rPr>
+                                <m:sty m:val="p"/>
+                              </m:rPr>
+                              <a:rPr lang="el-GR" i="1">
+                                <a:latin typeface="Cambria Math" panose="02040503050406030204" pitchFamily="18" charset="0"/>
+                                <a:ea typeface="Cambria Math" panose="02040503050406030204" pitchFamily="18" charset="0"/>
+                              </a:rPr>
+                              <m:t>γ</m:t>
+                            </m:r>
+                            <m:r>
+                              <m:rPr>
+                                <m:sty m:val="p"/>
+                              </m:rPr>
+                              <a:rPr lang="pt-BR">
+                                <a:latin typeface="Cambria Math" panose="02040503050406030204" pitchFamily="18" charset="0"/>
+                                <a:ea typeface="Cambria Math" panose="02040503050406030204" pitchFamily="18" charset="0"/>
+                              </a:rPr>
+                              <m:t>max</m:t>
+                            </m:r>
+                          </m:e>
+                          <m:lim>
+                            <m:sSup>
+                              <m:sSupPr>
+                                <m:ctrlPr>
+                                  <a:rPr lang="pt-BR" i="1">
+                                    <a:latin typeface="Cambria Math" panose="02040503050406030204" pitchFamily="18" charset="0"/>
+                                    <a:ea typeface="Cambria Math" panose="02040503050406030204" pitchFamily="18" charset="0"/>
+                                  </a:rPr>
+                                </m:ctrlPr>
+                              </m:sSupPr>
+                              <m:e>
+                                <m:r>
+                                  <a:rPr lang="pt-BR" i="1">
+                                    <a:latin typeface="Cambria Math" panose="02040503050406030204" pitchFamily="18" charset="0"/>
+                                    <a:ea typeface="Cambria Math" panose="02040503050406030204" pitchFamily="18" charset="0"/>
+                                  </a:rPr>
+                                  <m:t>𝑎</m:t>
+                                </m:r>
+                              </m:e>
+                              <m:sup>
+                                <m:r>
+                                  <a:rPr lang="pt-BR" i="1">
+                                    <a:latin typeface="Cambria Math" panose="02040503050406030204" pitchFamily="18" charset="0"/>
+                                    <a:ea typeface="Cambria Math" panose="02040503050406030204" pitchFamily="18" charset="0"/>
+                                  </a:rPr>
+                                  <m:t>′</m:t>
+                                </m:r>
+                              </m:sup>
+                            </m:sSup>
+                          </m:lim>
+                        </m:limLow>
+                      </m:fName>
+                      <m:e>
+                        <m:r>
+                          <a:rPr lang="pt-BR" i="1">
+                            <a:latin typeface="Cambria Math" panose="02040503050406030204" pitchFamily="18" charset="0"/>
+                            <a:ea typeface="Cambria Math" panose="02040503050406030204" pitchFamily="18" charset="0"/>
+                          </a:rPr>
+                          <m:t>𝑄</m:t>
+                        </m:r>
+                        <m:d>
+                          <m:dPr>
+                            <m:ctrlPr>
+                              <a:rPr lang="pt-BR" i="1">
+                                <a:latin typeface="Cambria Math" panose="02040503050406030204" pitchFamily="18" charset="0"/>
+                                <a:ea typeface="Cambria Math" panose="02040503050406030204" pitchFamily="18" charset="0"/>
+                              </a:rPr>
+                            </m:ctrlPr>
+                          </m:dPr>
+                          <m:e>
+                            <m:sSup>
+                              <m:sSupPr>
+                                <m:ctrlPr>
+                                  <a:rPr lang="pt-BR" i="1">
+                                    <a:latin typeface="Cambria Math" panose="02040503050406030204" pitchFamily="18" charset="0"/>
+                                    <a:ea typeface="Cambria Math" panose="02040503050406030204" pitchFamily="18" charset="0"/>
+                                  </a:rPr>
+                                </m:ctrlPr>
+                              </m:sSupPr>
+                              <m:e>
+                                <m:r>
+                                  <a:rPr lang="pt-BR" i="1">
+                                    <a:latin typeface="Cambria Math" panose="02040503050406030204" pitchFamily="18" charset="0"/>
+                                    <a:ea typeface="Cambria Math" panose="02040503050406030204" pitchFamily="18" charset="0"/>
+                                  </a:rPr>
+                                  <m:t>𝑠</m:t>
+                                </m:r>
+                              </m:e>
+                              <m:sup>
+                                <m:r>
+                                  <a:rPr lang="pt-BR" i="1">
+                                    <a:latin typeface="Cambria Math" panose="02040503050406030204" pitchFamily="18" charset="0"/>
+                                    <a:ea typeface="Cambria Math" panose="02040503050406030204" pitchFamily="18" charset="0"/>
+                                  </a:rPr>
+                                  <m:t>′</m:t>
+                                </m:r>
+                              </m:sup>
+                            </m:sSup>
+                            <m:r>
+                              <a:rPr lang="pt-BR" i="1">
+                                <a:latin typeface="Cambria Math" panose="02040503050406030204" pitchFamily="18" charset="0"/>
+                                <a:ea typeface="Cambria Math" panose="02040503050406030204" pitchFamily="18" charset="0"/>
+                              </a:rPr>
+                              <m:t>,</m:t>
+                            </m:r>
+                            <m:sSup>
+                              <m:sSupPr>
+                                <m:ctrlPr>
+                                  <a:rPr lang="pt-BR" i="1">
+                                    <a:latin typeface="Cambria Math" panose="02040503050406030204" pitchFamily="18" charset="0"/>
+                                    <a:ea typeface="Cambria Math" panose="02040503050406030204" pitchFamily="18" charset="0"/>
+                                  </a:rPr>
+                                </m:ctrlPr>
+                              </m:sSupPr>
+                              <m:e>
+                                <m:r>
+                                  <a:rPr lang="pt-BR" i="1">
+                                    <a:latin typeface="Cambria Math" panose="02040503050406030204" pitchFamily="18" charset="0"/>
+                                    <a:ea typeface="Cambria Math" panose="02040503050406030204" pitchFamily="18" charset="0"/>
+                                  </a:rPr>
+                                  <m:t>𝑎</m:t>
+                                </m:r>
+                              </m:e>
+                              <m:sup>
+                                <m:r>
+                                  <a:rPr lang="pt-BR" i="1">
+                                    <a:latin typeface="Cambria Math" panose="02040503050406030204" pitchFamily="18" charset="0"/>
+                                    <a:ea typeface="Cambria Math" panose="02040503050406030204" pitchFamily="18" charset="0"/>
+                                  </a:rPr>
+                                  <m:t>′</m:t>
+                                </m:r>
+                              </m:sup>
+                            </m:sSup>
+                          </m:e>
+                        </m:d>
+                      </m:e>
+                    </m:func>
+                  </m:oMath>
+                </a14:m>
+                <a:r>
+                  <a:rPr lang="pt-BR" baseline="0" noProof="0" dirty="0" smtClean="0"/>
+                  <a:t>) for baixa, a diferença TD </a:t>
+                </a:r>
+                <a:r>
+                  <a:rPr lang="pt-BR" baseline="0" noProof="0" dirty="0" err="1" smtClean="0"/>
+                  <a:t>error</a:t>
+                </a:r>
+                <a:r>
+                  <a:rPr lang="pt-BR" baseline="0" noProof="0" dirty="0" smtClean="0"/>
+                  <a:t> e </a:t>
+                </a:r>
+                <a14:m>
+                  <m:oMath xmlns:m="http://schemas.openxmlformats.org/officeDocument/2006/math">
+                    <m:r>
+                      <a:rPr lang="pt-BR" i="1" smtClean="0">
+                        <a:latin typeface="Cambria Math" panose="02040503050406030204" pitchFamily="18" charset="0"/>
+                        <a:ea typeface="Cambria Math" panose="02040503050406030204" pitchFamily="18" charset="0"/>
+                      </a:rPr>
+                      <m:t>𝑄</m:t>
+                    </m:r>
+                    <m:d>
+                      <m:dPr>
+                        <m:ctrlPr>
+                          <a:rPr lang="pt-BR" i="1">
+                            <a:latin typeface="Cambria Math" panose="02040503050406030204" pitchFamily="18" charset="0"/>
+                            <a:ea typeface="Cambria Math" panose="02040503050406030204" pitchFamily="18" charset="0"/>
+                          </a:rPr>
+                        </m:ctrlPr>
+                      </m:dPr>
+                      <m:e>
+                        <m:r>
+                          <a:rPr lang="pt-BR" i="1">
+                            <a:latin typeface="Cambria Math" panose="02040503050406030204" pitchFamily="18" charset="0"/>
+                            <a:ea typeface="Cambria Math" panose="02040503050406030204" pitchFamily="18" charset="0"/>
+                          </a:rPr>
+                          <m:t>𝑠</m:t>
+                        </m:r>
+                        <m:r>
+                          <a:rPr lang="pt-BR" i="1">
+                            <a:latin typeface="Cambria Math" panose="02040503050406030204" pitchFamily="18" charset="0"/>
+                            <a:ea typeface="Cambria Math" panose="02040503050406030204" pitchFamily="18" charset="0"/>
+                          </a:rPr>
+                          <m:t>,</m:t>
+                        </m:r>
+                        <m:r>
+                          <a:rPr lang="pt-BR" i="1">
+                            <a:latin typeface="Cambria Math" panose="02040503050406030204" pitchFamily="18" charset="0"/>
+                            <a:ea typeface="Cambria Math" panose="02040503050406030204" pitchFamily="18" charset="0"/>
+                          </a:rPr>
+                          <m:t>𝑎</m:t>
+                        </m:r>
+                      </m:e>
+                    </m:d>
+                  </m:oMath>
+                </a14:m>
+                <a:r>
+                  <a:rPr lang="pt-BR" noProof="0" dirty="0" smtClean="0"/>
+                  <a:t> poderá ser negativa, diminuindo a qualidade da</a:t>
+                </a:r>
+                <a:r>
+                  <a:rPr lang="pt-BR" baseline="0" noProof="0" dirty="0" smtClean="0"/>
+                  <a:t> ação a no estado s.</a:t>
+                </a:r>
+              </a:p>
+              <a:p>
+                <a:r>
+                  <a:rPr lang="pt-BR" baseline="0" noProof="0" dirty="0" smtClean="0"/>
+                  <a:t>TD error = </a:t>
+                </a:r>
+                <a14:m>
+                  <m:oMath xmlns:m="http://schemas.openxmlformats.org/officeDocument/2006/math">
+                    <m:r>
+                      <a:rPr lang="pt-BR" i="1" smtClean="0">
+                        <a:latin typeface="Cambria Math" panose="02040503050406030204" pitchFamily="18" charset="0"/>
+                        <a:ea typeface="Cambria Math" panose="02040503050406030204" pitchFamily="18" charset="0"/>
+                      </a:rPr>
+                      <m:t>𝑟</m:t>
+                    </m:r>
+                    <m:r>
+                      <a:rPr lang="pt-BR" i="1" smtClean="0">
+                        <a:latin typeface="Cambria Math" panose="02040503050406030204" pitchFamily="18" charset="0"/>
+                        <a:ea typeface="Cambria Math" panose="02040503050406030204" pitchFamily="18" charset="0"/>
+                      </a:rPr>
+                      <m:t>+</m:t>
+                    </m:r>
+                    <m:func>
+                      <m:funcPr>
+                        <m:ctrlPr>
+                          <a:rPr lang="pt-BR" i="1">
+                            <a:latin typeface="Cambria Math" panose="02040503050406030204" pitchFamily="18" charset="0"/>
+                            <a:ea typeface="Cambria Math" panose="02040503050406030204" pitchFamily="18" charset="0"/>
+                          </a:rPr>
+                        </m:ctrlPr>
+                      </m:funcPr>
+                      <m:fName>
+                        <m:limLow>
+                          <m:limLowPr>
+                            <m:ctrlPr>
+                              <a:rPr lang="pt-BR" i="1">
+                                <a:latin typeface="Cambria Math" panose="02040503050406030204" pitchFamily="18" charset="0"/>
+                                <a:ea typeface="Cambria Math" panose="02040503050406030204" pitchFamily="18" charset="0"/>
+                              </a:rPr>
+                            </m:ctrlPr>
+                          </m:limLowPr>
+                          <m:e>
+                            <m:r>
+                              <m:rPr>
+                                <m:sty m:val="p"/>
+                              </m:rPr>
+                              <a:rPr lang="el-GR" i="1">
+                                <a:latin typeface="Cambria Math" panose="02040503050406030204" pitchFamily="18" charset="0"/>
+                                <a:ea typeface="Cambria Math" panose="02040503050406030204" pitchFamily="18" charset="0"/>
+                              </a:rPr>
+                              <m:t>γ</m:t>
+                            </m:r>
+                            <m:r>
+                              <m:rPr>
+                                <m:sty m:val="p"/>
+                              </m:rPr>
+                              <a:rPr lang="pt-BR">
+                                <a:latin typeface="Cambria Math" panose="02040503050406030204" pitchFamily="18" charset="0"/>
+                                <a:ea typeface="Cambria Math" panose="02040503050406030204" pitchFamily="18" charset="0"/>
+                              </a:rPr>
+                              <m:t>max</m:t>
+                            </m:r>
+                          </m:e>
+                          <m:lim>
+                            <m:sSup>
+                              <m:sSupPr>
+                                <m:ctrlPr>
+                                  <a:rPr lang="pt-BR" i="1">
+                                    <a:latin typeface="Cambria Math" panose="02040503050406030204" pitchFamily="18" charset="0"/>
+                                    <a:ea typeface="Cambria Math" panose="02040503050406030204" pitchFamily="18" charset="0"/>
+                                  </a:rPr>
+                                </m:ctrlPr>
+                              </m:sSupPr>
+                              <m:e>
+                                <m:r>
+                                  <a:rPr lang="pt-BR" i="1">
+                                    <a:latin typeface="Cambria Math" panose="02040503050406030204" pitchFamily="18" charset="0"/>
+                                    <a:ea typeface="Cambria Math" panose="02040503050406030204" pitchFamily="18" charset="0"/>
+                                  </a:rPr>
+                                  <m:t>𝑎</m:t>
+                                </m:r>
+                              </m:e>
+                              <m:sup>
+                                <m:r>
+                                  <a:rPr lang="pt-BR" i="1">
+                                    <a:latin typeface="Cambria Math" panose="02040503050406030204" pitchFamily="18" charset="0"/>
+                                    <a:ea typeface="Cambria Math" panose="02040503050406030204" pitchFamily="18" charset="0"/>
+                                  </a:rPr>
+                                  <m:t>′</m:t>
+                                </m:r>
+                              </m:sup>
+                            </m:sSup>
+                          </m:lim>
+                        </m:limLow>
+                      </m:fName>
+                      <m:e>
+                        <m:r>
+                          <a:rPr lang="pt-BR" i="1">
+                            <a:latin typeface="Cambria Math" panose="02040503050406030204" pitchFamily="18" charset="0"/>
+                            <a:ea typeface="Cambria Math" panose="02040503050406030204" pitchFamily="18" charset="0"/>
+                          </a:rPr>
+                          <m:t>𝑄</m:t>
+                        </m:r>
+                        <m:d>
+                          <m:dPr>
+                            <m:ctrlPr>
+                              <a:rPr lang="pt-BR" i="1">
+                                <a:latin typeface="Cambria Math" panose="02040503050406030204" pitchFamily="18" charset="0"/>
+                                <a:ea typeface="Cambria Math" panose="02040503050406030204" pitchFamily="18" charset="0"/>
+                              </a:rPr>
+                            </m:ctrlPr>
+                          </m:dPr>
+                          <m:e>
+                            <m:sSup>
+                              <m:sSupPr>
+                                <m:ctrlPr>
+                                  <a:rPr lang="pt-BR" i="1">
+                                    <a:latin typeface="Cambria Math" panose="02040503050406030204" pitchFamily="18" charset="0"/>
+                                    <a:ea typeface="Cambria Math" panose="02040503050406030204" pitchFamily="18" charset="0"/>
+                                  </a:rPr>
+                                </m:ctrlPr>
+                              </m:sSupPr>
+                              <m:e>
+                                <m:r>
+                                  <a:rPr lang="pt-BR" i="1">
+                                    <a:latin typeface="Cambria Math" panose="02040503050406030204" pitchFamily="18" charset="0"/>
+                                    <a:ea typeface="Cambria Math" panose="02040503050406030204" pitchFamily="18" charset="0"/>
+                                  </a:rPr>
+                                  <m:t>𝑠</m:t>
+                                </m:r>
+                              </m:e>
+                              <m:sup>
+                                <m:r>
+                                  <a:rPr lang="pt-BR" i="1">
+                                    <a:latin typeface="Cambria Math" panose="02040503050406030204" pitchFamily="18" charset="0"/>
+                                    <a:ea typeface="Cambria Math" panose="02040503050406030204" pitchFamily="18" charset="0"/>
+                                  </a:rPr>
+                                  <m:t>′</m:t>
+                                </m:r>
+                              </m:sup>
+                            </m:sSup>
+                            <m:r>
+                              <a:rPr lang="pt-BR" i="1">
+                                <a:latin typeface="Cambria Math" panose="02040503050406030204" pitchFamily="18" charset="0"/>
+                                <a:ea typeface="Cambria Math" panose="02040503050406030204" pitchFamily="18" charset="0"/>
+                              </a:rPr>
+                              <m:t>,</m:t>
+                            </m:r>
+                            <m:sSup>
+                              <m:sSupPr>
+                                <m:ctrlPr>
+                                  <a:rPr lang="pt-BR" i="1">
+                                    <a:latin typeface="Cambria Math" panose="02040503050406030204" pitchFamily="18" charset="0"/>
+                                    <a:ea typeface="Cambria Math" panose="02040503050406030204" pitchFamily="18" charset="0"/>
+                                  </a:rPr>
+                                </m:ctrlPr>
+                              </m:sSupPr>
+                              <m:e>
+                                <m:r>
+                                  <a:rPr lang="pt-BR" i="1">
+                                    <a:latin typeface="Cambria Math" panose="02040503050406030204" pitchFamily="18" charset="0"/>
+                                    <a:ea typeface="Cambria Math" panose="02040503050406030204" pitchFamily="18" charset="0"/>
+                                  </a:rPr>
+                                  <m:t>𝑎</m:t>
+                                </m:r>
+                              </m:e>
+                              <m:sup>
+                                <m:r>
+                                  <a:rPr lang="pt-BR" i="1">
+                                    <a:latin typeface="Cambria Math" panose="02040503050406030204" pitchFamily="18" charset="0"/>
+                                    <a:ea typeface="Cambria Math" panose="02040503050406030204" pitchFamily="18" charset="0"/>
+                                  </a:rPr>
+                                  <m:t>′</m:t>
+                                </m:r>
+                              </m:sup>
+                            </m:sSup>
+                          </m:e>
+                        </m:d>
+                      </m:e>
+                    </m:func>
+                  </m:oMath>
+                </a14:m>
+                <a:r>
+                  <a:rPr lang="pt-BR" noProof="0" dirty="0" smtClean="0"/>
+                  <a:t> é chamado de alvo, ou seja, queremos que </a:t>
+                </a:r>
+                <a14:m>
+                  <m:oMath xmlns:m="http://schemas.openxmlformats.org/officeDocument/2006/math">
+                    <m:r>
+                      <a:rPr lang="pt-BR" i="1" smtClean="0">
+                        <a:latin typeface="Cambria Math" panose="02040503050406030204" pitchFamily="18" charset="0"/>
+                      </a:rPr>
+                      <m:t>𝑄</m:t>
+                    </m:r>
+                    <m:d>
+                      <m:dPr>
+                        <m:ctrlPr>
+                          <a:rPr lang="pt-BR" i="1">
+                            <a:latin typeface="Cambria Math" panose="02040503050406030204" pitchFamily="18" charset="0"/>
+                          </a:rPr>
+                        </m:ctrlPr>
+                      </m:dPr>
+                      <m:e>
+                        <m:r>
+                          <a:rPr lang="pt-BR" i="1">
+                            <a:latin typeface="Cambria Math" panose="02040503050406030204" pitchFamily="18" charset="0"/>
+                          </a:rPr>
+                          <m:t>𝑠</m:t>
+                        </m:r>
+                        <m:r>
+                          <a:rPr lang="pt-BR" i="1">
+                            <a:latin typeface="Cambria Math" panose="02040503050406030204" pitchFamily="18" charset="0"/>
+                          </a:rPr>
+                          <m:t>,</m:t>
+                        </m:r>
+                        <m:r>
+                          <a:rPr lang="pt-BR" i="1">
+                            <a:latin typeface="Cambria Math" panose="02040503050406030204" pitchFamily="18" charset="0"/>
+                          </a:rPr>
+                          <m:t>𝑎</m:t>
+                        </m:r>
+                      </m:e>
+                    </m:d>
+                  </m:oMath>
+                </a14:m>
+                <a:r>
+                  <a:rPr lang="pt-BR" noProof="0" dirty="0" smtClean="0"/>
+                  <a:t> se aproxime dele ao longo do tempo iterativamente.</a:t>
+                </a:r>
+              </a:p>
+              <a:p>
+                <a:r>
+                  <a:rPr lang="pt-BR" dirty="0" smtClean="0"/>
+                  <a:t>O aprendizado busca ajustar </a:t>
+                </a:r>
+                <a14:m>
+                  <m:oMath xmlns:m="http://schemas.openxmlformats.org/officeDocument/2006/math">
+                    <m:r>
+                      <a:rPr lang="pt-BR" i="1" smtClean="0">
+                        <a:latin typeface="Cambria Math" panose="02040503050406030204" pitchFamily="18" charset="0"/>
+                        <a:ea typeface="Cambria Math" panose="02040503050406030204" pitchFamily="18" charset="0"/>
+                      </a:rPr>
+                      <m:t>𝑄</m:t>
+                    </m:r>
+                    <m:d>
+                      <m:dPr>
+                        <m:ctrlPr>
+                          <a:rPr lang="pt-BR" i="1">
+                            <a:latin typeface="Cambria Math" panose="02040503050406030204" pitchFamily="18" charset="0"/>
+                            <a:ea typeface="Cambria Math" panose="02040503050406030204" pitchFamily="18" charset="0"/>
+                          </a:rPr>
+                        </m:ctrlPr>
+                      </m:dPr>
+                      <m:e>
+                        <m:r>
+                          <a:rPr lang="pt-BR" i="1">
+                            <a:latin typeface="Cambria Math" panose="02040503050406030204" pitchFamily="18" charset="0"/>
+                            <a:ea typeface="Cambria Math" panose="02040503050406030204" pitchFamily="18" charset="0"/>
+                          </a:rPr>
+                          <m:t>𝑠</m:t>
+                        </m:r>
+                        <m:r>
+                          <a:rPr lang="pt-BR" i="1">
+                            <a:latin typeface="Cambria Math" panose="02040503050406030204" pitchFamily="18" charset="0"/>
+                            <a:ea typeface="Cambria Math" panose="02040503050406030204" pitchFamily="18" charset="0"/>
+                          </a:rPr>
+                          <m:t>,</m:t>
+                        </m:r>
+                        <m:r>
+                          <a:rPr lang="pt-BR" i="1">
+                            <a:latin typeface="Cambria Math" panose="02040503050406030204" pitchFamily="18" charset="0"/>
+                            <a:ea typeface="Cambria Math" panose="02040503050406030204" pitchFamily="18" charset="0"/>
+                          </a:rPr>
+                          <m:t>𝑎</m:t>
+                        </m:r>
+                      </m:e>
+                    </m:d>
+                  </m:oMath>
+                </a14:m>
+                <a:r>
+                  <a:rPr lang="pt-BR" dirty="0" smtClean="0"/>
+                  <a:t> na direção do alvo</a:t>
+                </a:r>
+                <a:endParaRPr lang="pt-BR" noProof="0" dirty="0"/>
+              </a:p>
+            </p:txBody>
+          </p:sp>
+        </mc:Choice>
+        <mc:Fallback>
+          <p:sp>
+            <p:nvSpPr>
+              <p:cNvPr id="3" name="Notes Placeholder 2"/>
+              <p:cNvSpPr>
+                <a:spLocks noGrp="1"/>
+              </p:cNvSpPr>
+              <p:nvPr>
+                <p:ph type="body" idx="1"/>
+              </p:nvPr>
+            </p:nvSpPr>
+            <p:spPr/>
+            <p:txBody>
+              <a:bodyPr/>
+              <a:lstStyle/>
+              <a:p>
+                <a:r>
+                  <a:rPr lang="pt-BR" noProof="0" dirty="0" smtClean="0"/>
+                  <a:t>Se a</a:t>
+                </a:r>
+                <a:r>
+                  <a:rPr lang="pt-BR" baseline="0" noProof="0" dirty="0" smtClean="0"/>
+                  <a:t> recompensa atual mais a estimativa da recompensa futura (TD error = </a:t>
+                </a:r>
+                <a:r>
+                  <a:rPr lang="pt-BR" i="0" smtClean="0">
+                    <a:latin typeface="Cambria Math" panose="02040503050406030204" pitchFamily="18" charset="0"/>
+                    <a:ea typeface="Cambria Math" panose="02040503050406030204" pitchFamily="18" charset="0"/>
+                  </a:rPr>
+                  <a:t>𝑟+</a:t>
+                </a:r>
+                <a:r>
+                  <a:rPr lang="pt-BR" i="0">
+                    <a:latin typeface="Cambria Math" panose="02040503050406030204" pitchFamily="18" charset="0"/>
+                    <a:ea typeface="Cambria Math" panose="02040503050406030204" pitchFamily="18" charset="0"/>
+                  </a:rPr>
+                  <a:t>(</a:t>
+                </a:r>
+                <a:r>
+                  <a:rPr lang="el-GR" i="0">
+                    <a:latin typeface="Cambria Math" panose="02040503050406030204" pitchFamily="18" charset="0"/>
+                    <a:ea typeface="Cambria Math" panose="02040503050406030204" pitchFamily="18" charset="0"/>
+                  </a:rPr>
+                  <a:t>γ</a:t>
+                </a:r>
+                <a:r>
+                  <a:rPr lang="pt-BR" i="0">
+                    <a:latin typeface="Cambria Math" panose="02040503050406030204" pitchFamily="18" charset="0"/>
+                    <a:ea typeface="Cambria Math" panose="02040503050406030204" pitchFamily="18" charset="0"/>
+                  </a:rPr>
+                  <a:t>max)┬(𝑎^′ )⁡𝑄(𝑠^′,𝑎^′ )</a:t>
+                </a:r>
+                <a:r>
+                  <a:rPr lang="pt-BR" baseline="0" noProof="0" dirty="0" smtClean="0"/>
+                  <a:t>) for baixa, a diferença TD </a:t>
+                </a:r>
+                <a:r>
+                  <a:rPr lang="pt-BR" baseline="0" noProof="0" dirty="0" err="1" smtClean="0"/>
+                  <a:t>error</a:t>
+                </a:r>
+                <a:r>
+                  <a:rPr lang="pt-BR" baseline="0" noProof="0" dirty="0" smtClean="0"/>
+                  <a:t> e </a:t>
+                </a:r>
+                <a:r>
+                  <a:rPr lang="pt-BR" i="0" smtClean="0">
+                    <a:latin typeface="Cambria Math" panose="02040503050406030204" pitchFamily="18" charset="0"/>
+                    <a:ea typeface="Cambria Math" panose="02040503050406030204" pitchFamily="18" charset="0"/>
+                  </a:rPr>
+                  <a:t>𝑄</a:t>
+                </a:r>
+                <a:r>
+                  <a:rPr lang="pt-BR" i="0">
+                    <a:latin typeface="Cambria Math" panose="02040503050406030204" pitchFamily="18" charset="0"/>
+                    <a:ea typeface="Cambria Math" panose="02040503050406030204" pitchFamily="18" charset="0"/>
+                  </a:rPr>
+                  <a:t>(𝑠,𝑎)</a:t>
+                </a:r>
+                <a:r>
+                  <a:rPr lang="pt-BR" noProof="0" dirty="0" smtClean="0"/>
+                  <a:t> poderá ser negativa, diminuindo a qualidade da</a:t>
+                </a:r>
+                <a:r>
+                  <a:rPr lang="pt-BR" baseline="0" noProof="0" dirty="0" smtClean="0"/>
+                  <a:t> ação a no estado s.</a:t>
+                </a:r>
+              </a:p>
+              <a:p>
+                <a:r>
+                  <a:rPr lang="pt-BR" baseline="0" noProof="0" dirty="0" smtClean="0"/>
+                  <a:t>TD error = </a:t>
+                </a:r>
+                <a:r>
+                  <a:rPr lang="pt-BR" i="0" smtClean="0">
+                    <a:latin typeface="Cambria Math" panose="02040503050406030204" pitchFamily="18" charset="0"/>
+                    <a:ea typeface="Cambria Math" panose="02040503050406030204" pitchFamily="18" charset="0"/>
+                  </a:rPr>
+                  <a:t>𝑟+</a:t>
+                </a:r>
+                <a:r>
+                  <a:rPr lang="pt-BR" i="0">
+                    <a:latin typeface="Cambria Math" panose="02040503050406030204" pitchFamily="18" charset="0"/>
+                    <a:ea typeface="Cambria Math" panose="02040503050406030204" pitchFamily="18" charset="0"/>
+                  </a:rPr>
+                  <a:t>(</a:t>
+                </a:r>
+                <a:r>
+                  <a:rPr lang="el-GR" i="0">
+                    <a:latin typeface="Cambria Math" panose="02040503050406030204" pitchFamily="18" charset="0"/>
+                    <a:ea typeface="Cambria Math" panose="02040503050406030204" pitchFamily="18" charset="0"/>
+                  </a:rPr>
+                  <a:t>γ</a:t>
+                </a:r>
+                <a:r>
+                  <a:rPr lang="pt-BR" i="0">
+                    <a:latin typeface="Cambria Math" panose="02040503050406030204" pitchFamily="18" charset="0"/>
+                    <a:ea typeface="Cambria Math" panose="02040503050406030204" pitchFamily="18" charset="0"/>
+                  </a:rPr>
+                  <a:t>max)┬(𝑎^′ )⁡𝑄(𝑠^′,𝑎^′ )</a:t>
+                </a:r>
+                <a:r>
+                  <a:rPr lang="pt-BR" noProof="0" dirty="0" smtClean="0"/>
+                  <a:t> é chamado de alvo, ou seja, queremos que </a:t>
+                </a:r>
+                <a:r>
+                  <a:rPr lang="pt-BR" i="0" smtClean="0">
+                    <a:latin typeface="Cambria Math" panose="02040503050406030204" pitchFamily="18" charset="0"/>
+                  </a:rPr>
+                  <a:t>𝑄</a:t>
+                </a:r>
+                <a:r>
+                  <a:rPr lang="pt-BR" i="0">
+                    <a:latin typeface="Cambria Math" panose="02040503050406030204" pitchFamily="18" charset="0"/>
+                  </a:rPr>
+                  <a:t>(𝑠,𝑎)</a:t>
+                </a:r>
+                <a:r>
+                  <a:rPr lang="pt-BR" noProof="0" dirty="0" smtClean="0"/>
+                  <a:t> se aproxime dele ao longo do tempo iterativamente.</a:t>
+                </a:r>
+              </a:p>
+              <a:p>
+                <a:r>
+                  <a:rPr lang="pt-BR" dirty="0" smtClean="0"/>
+                  <a:t>O aprendizado busca ajustar </a:t>
+                </a:r>
+                <a:r>
+                  <a:rPr lang="pt-BR" i="0" smtClean="0">
+                    <a:latin typeface="Cambria Math" panose="02040503050406030204" pitchFamily="18" charset="0"/>
+                    <a:ea typeface="Cambria Math" panose="02040503050406030204" pitchFamily="18" charset="0"/>
+                  </a:rPr>
+                  <a:t>𝑄</a:t>
+                </a:r>
+                <a:r>
+                  <a:rPr lang="pt-BR" i="0">
+                    <a:latin typeface="Cambria Math" panose="02040503050406030204" pitchFamily="18" charset="0"/>
+                    <a:ea typeface="Cambria Math" panose="02040503050406030204" pitchFamily="18" charset="0"/>
+                  </a:rPr>
+                  <a:t>(𝑠,𝑎)</a:t>
+                </a:r>
+                <a:r>
+                  <a:rPr lang="pt-BR" dirty="0" smtClean="0"/>
+                  <a:t> na direção do alvo</a:t>
+                </a:r>
+                <a:endParaRPr lang="pt-BR" noProof="0" dirty="0"/>
+              </a:p>
+            </p:txBody>
+          </p:sp>
+        </mc:Fallback>
+      </mc:AlternateContent>
       <p:sp>
         <p:nvSpPr>
           <p:cNvPr id="4" name="Slide Number Placeholder 3"/>
@@ -1968,6 +2673,14 @@
           <a:bodyPr/>
           <a:lstStyle/>
           <a:p>
+            <a:r>
+              <a:rPr lang="pt-BR" b="1" dirty="0" smtClean="0"/>
+              <a:t>Finanças:</a:t>
+            </a:r>
+            <a:r>
+              <a:rPr lang="pt-BR" dirty="0" smtClean="0"/>
+              <a:t> Algoritmos de trading que aprendem a comprar e vender ações maximizando o lucro ao longo de meses.</a:t>
+            </a:r>
             <a:endParaRPr lang="en-US" dirty="0"/>
           </a:p>
         </p:txBody>
@@ -1999,6 +2712,197 @@
     <p:extLst>
       <p:ext uri="{BB962C8B-B14F-4D97-AF65-F5344CB8AC3E}">
         <p14:creationId xmlns:p14="http://schemas.microsoft.com/office/powerpoint/2010/main" val="230184113"/>
+      </p:ext>
+    </p:extLst>
+  </p:cSld>
+  <p:clrMapOvr>
+    <a:masterClrMapping/>
+  </p:clrMapOvr>
+</p:notes>
+</file>
+
+<file path=ppt/notesSlides/notesSlide21.xml><?xml version="1.0" encoding="utf-8"?>
+<p:notes xmlns:a="http://schemas.openxmlformats.org/drawingml/2006/main" xmlns:r="http://schemas.openxmlformats.org/officeDocument/2006/relationships" xmlns:p="http://schemas.openxmlformats.org/presentationml/2006/main">
+  <p:cSld>
+    <p:spTree>
+      <p:nvGrpSpPr>
+        <p:cNvPr id="1" name=""/>
+        <p:cNvGrpSpPr/>
+        <p:nvPr/>
+      </p:nvGrpSpPr>
+      <p:grpSpPr>
+        <a:xfrm>
+          <a:off x="0" y="0"/>
+          <a:ext cx="0" cy="0"/>
+          <a:chOff x="0" y="0"/>
+          <a:chExt cx="0" cy="0"/>
+        </a:xfrm>
+      </p:grpSpPr>
+      <p:sp>
+        <p:nvSpPr>
+          <p:cNvPr id="2" name="Slide Image Placeholder 1"/>
+          <p:cNvSpPr>
+            <a:spLocks noGrp="1" noRot="1" noChangeAspect="1"/>
+          </p:cNvSpPr>
+          <p:nvPr>
+            <p:ph type="sldImg"/>
+          </p:nvPr>
+        </p:nvSpPr>
+        <p:spPr/>
+      </p:sp>
+      <p:sp>
+        <p:nvSpPr>
+          <p:cNvPr id="3" name="Notes Placeholder 2"/>
+          <p:cNvSpPr>
+            <a:spLocks noGrp="1"/>
+          </p:cNvSpPr>
+          <p:nvPr>
+            <p:ph type="body" idx="1"/>
+          </p:nvPr>
+        </p:nvSpPr>
+        <p:spPr/>
+        <p:txBody>
+          <a:bodyPr/>
+          <a:lstStyle/>
+          <a:p>
+            <a:pPr marL="0" marR="0" lvl="0" indent="0" algn="l" defTabSz="914400" rtl="0" eaLnBrk="1" fontAlgn="auto" latinLnBrk="0" hangingPunct="1">
+              <a:lnSpc>
+                <a:spcPct val="100000"/>
+              </a:lnSpc>
+              <a:spcBef>
+                <a:spcPts val="0"/>
+              </a:spcBef>
+              <a:spcAft>
+                <a:spcPts val="0"/>
+              </a:spcAft>
+              <a:buClrTx/>
+              <a:buSzTx/>
+              <a:buFontTx/>
+              <a:buNone/>
+              <a:tabLst/>
+              <a:defRPr/>
+            </a:pPr>
+            <a:r>
+              <a:rPr lang="en-US"/>
+              <a:t>https://colab.research.google.com/github/zz4fap/c24_inteligencia_artificial/blob/master/notebooks/mlp.ipynb</a:t>
+            </a:r>
+          </a:p>
+          <a:p>
+            <a:endParaRPr lang="en-US" dirty="0"/>
+          </a:p>
+        </p:txBody>
+      </p:sp>
+      <p:sp>
+        <p:nvSpPr>
+          <p:cNvPr id="4" name="Slide Number Placeholder 3"/>
+          <p:cNvSpPr>
+            <a:spLocks noGrp="1"/>
+          </p:cNvSpPr>
+          <p:nvPr>
+            <p:ph type="sldNum" sz="quarter" idx="5"/>
+          </p:nvPr>
+        </p:nvSpPr>
+        <p:spPr/>
+        <p:txBody>
+          <a:bodyPr/>
+          <a:lstStyle/>
+          <a:p>
+            <a:fld id="{6FC8D850-966F-45A6-8DE7-15B891E7D40D}" type="slidenum">
+              <a:rPr lang="pt-BR" smtClean="0"/>
+              <a:t>28</a:t>
+            </a:fld>
+            <a:endParaRPr lang="pt-BR"/>
+          </a:p>
+        </p:txBody>
+      </p:sp>
+    </p:spTree>
+    <p:extLst>
+      <p:ext uri="{BB962C8B-B14F-4D97-AF65-F5344CB8AC3E}">
+        <p14:creationId xmlns:p14="http://schemas.microsoft.com/office/powerpoint/2010/main" val="477841902"/>
+      </p:ext>
+    </p:extLst>
+  </p:cSld>
+  <p:clrMapOvr>
+    <a:masterClrMapping/>
+  </p:clrMapOvr>
+</p:notes>
+</file>
+
+<file path=ppt/notesSlides/notesSlide22.xml><?xml version="1.0" encoding="utf-8"?>
+<p:notes xmlns:a="http://schemas.openxmlformats.org/drawingml/2006/main" xmlns:r="http://schemas.openxmlformats.org/officeDocument/2006/relationships" xmlns:p="http://schemas.openxmlformats.org/presentationml/2006/main">
+  <p:cSld>
+    <p:spTree>
+      <p:nvGrpSpPr>
+        <p:cNvPr id="1" name=""/>
+        <p:cNvGrpSpPr/>
+        <p:nvPr/>
+      </p:nvGrpSpPr>
+      <p:grpSpPr>
+        <a:xfrm>
+          <a:off x="0" y="0"/>
+          <a:ext cx="0" cy="0"/>
+          <a:chOff x="0" y="0"/>
+          <a:chExt cx="0" cy="0"/>
+        </a:xfrm>
+      </p:grpSpPr>
+      <p:sp>
+        <p:nvSpPr>
+          <p:cNvPr id="2" name="Slide Image Placeholder 1"/>
+          <p:cNvSpPr>
+            <a:spLocks noGrp="1" noRot="1" noChangeAspect="1"/>
+          </p:cNvSpPr>
+          <p:nvPr>
+            <p:ph type="sldImg"/>
+          </p:nvPr>
+        </p:nvSpPr>
+        <p:spPr/>
+      </p:sp>
+      <p:sp>
+        <p:nvSpPr>
+          <p:cNvPr id="3" name="Notes Placeholder 2"/>
+          <p:cNvSpPr>
+            <a:spLocks noGrp="1"/>
+          </p:cNvSpPr>
+          <p:nvPr>
+            <p:ph type="body" idx="1"/>
+          </p:nvPr>
+        </p:nvSpPr>
+        <p:spPr/>
+        <p:txBody>
+          <a:bodyPr/>
+          <a:lstStyle/>
+          <a:p>
+            <a:endParaRPr lang="en-US" dirty="0"/>
+          </a:p>
+        </p:txBody>
+      </p:sp>
+      <p:sp>
+        <p:nvSpPr>
+          <p:cNvPr id="4" name="Slide Number Placeholder 3"/>
+          <p:cNvSpPr>
+            <a:spLocks noGrp="1"/>
+          </p:cNvSpPr>
+          <p:nvPr>
+            <p:ph type="sldNum" sz="quarter" idx="5"/>
+          </p:nvPr>
+        </p:nvSpPr>
+        <p:spPr/>
+        <p:txBody>
+          <a:bodyPr/>
+          <a:lstStyle/>
+          <a:p>
+            <a:fld id="{6FC8D850-966F-45A6-8DE7-15B891E7D40D}" type="slidenum">
+              <a:rPr lang="pt-BR" smtClean="0"/>
+              <a:t>29</a:t>
+            </a:fld>
+            <a:endParaRPr lang="pt-BR"/>
+          </a:p>
+        </p:txBody>
+      </p:sp>
+    </p:spTree>
+    <p:extLst>
+      <p:ext uri="{BB962C8B-B14F-4D97-AF65-F5344CB8AC3E}">
+        <p14:creationId xmlns:p14="http://schemas.microsoft.com/office/powerpoint/2010/main" val="1121654450"/>
       </p:ext>
     </p:extLst>
   </p:cSld>
@@ -2016,7 +2920,7 @@
         <p:cNvPr id="1" name="">
           <a:extLst>
             <a:ext uri="{FF2B5EF4-FFF2-40B4-BE49-F238E27FC236}">
-              <a16:creationId xmlns:a16="http://schemas.microsoft.com/office/drawing/2014/main" id="{5B4C3711-83BC-221A-A341-2BE62BCF89DC}"/>
+              <a16:creationId xmlns:a16="http://schemas.microsoft.com/office/drawing/2014/main" xmlns="" id="{5B4C3711-83BC-221A-A341-2BE62BCF89DC}"/>
             </a:ext>
           </a:extLst>
         </p:cNvPr>
@@ -2036,7 +2940,7 @@
           <p:cNvPr id="2" name="Slide Image Placeholder 1">
             <a:extLst>
               <a:ext uri="{FF2B5EF4-FFF2-40B4-BE49-F238E27FC236}">
-                <a16:creationId xmlns:a16="http://schemas.microsoft.com/office/drawing/2014/main" id="{5957728F-CFA3-D0A6-7780-F800EBAC1F6E}"/>
+                <a16:creationId xmlns:a16="http://schemas.microsoft.com/office/drawing/2014/main" xmlns="" id="{5957728F-CFA3-D0A6-7780-F800EBAC1F6E}"/>
               </a:ext>
             </a:extLst>
           </p:cNvPr>
@@ -2054,7 +2958,7 @@
           <p:cNvPr id="3" name="Notes Placeholder 2">
             <a:extLst>
               <a:ext uri="{FF2B5EF4-FFF2-40B4-BE49-F238E27FC236}">
-                <a16:creationId xmlns:a16="http://schemas.microsoft.com/office/drawing/2014/main" id="{4AD3E5CB-A8B8-7F4B-200F-94D044C81C3D}"/>
+                <a16:creationId xmlns:a16="http://schemas.microsoft.com/office/drawing/2014/main" xmlns="" id="{4AD3E5CB-A8B8-7F4B-200F-94D044C81C3D}"/>
               </a:ext>
             </a:extLst>
           </p:cNvPr>
@@ -2079,7 +2983,7 @@
           <p:cNvPr id="4" name="Slide Number Placeholder 3">
             <a:extLst>
               <a:ext uri="{FF2B5EF4-FFF2-40B4-BE49-F238E27FC236}">
-                <a16:creationId xmlns:a16="http://schemas.microsoft.com/office/drawing/2014/main" id="{3F9D8EC2-522A-3A24-97FD-162C1CF3C132}"/>
+                <a16:creationId xmlns:a16="http://schemas.microsoft.com/office/drawing/2014/main" xmlns="" id="{3F9D8EC2-522A-3A24-97FD-162C1CF3C132}"/>
               </a:ext>
             </a:extLst>
           </p:cNvPr>
@@ -2124,7 +3028,7 @@
         <p:cNvPr id="1" name="">
           <a:extLst>
             <a:ext uri="{FF2B5EF4-FFF2-40B4-BE49-F238E27FC236}">
-              <a16:creationId xmlns:a16="http://schemas.microsoft.com/office/drawing/2014/main" id="{478600EE-A6A2-2235-BCC6-6DE0C5D8DE78}"/>
+              <a16:creationId xmlns:a16="http://schemas.microsoft.com/office/drawing/2014/main" xmlns="" id="{478600EE-A6A2-2235-BCC6-6DE0C5D8DE78}"/>
             </a:ext>
           </a:extLst>
         </p:cNvPr>
@@ -2144,7 +3048,7 @@
           <p:cNvPr id="2" name="Slide Image Placeholder 1">
             <a:extLst>
               <a:ext uri="{FF2B5EF4-FFF2-40B4-BE49-F238E27FC236}">
-                <a16:creationId xmlns:a16="http://schemas.microsoft.com/office/drawing/2014/main" id="{B1C41149-DCAF-E8F8-FB78-0B242E221738}"/>
+                <a16:creationId xmlns:a16="http://schemas.microsoft.com/office/drawing/2014/main" xmlns="" id="{B1C41149-DCAF-E8F8-FB78-0B242E221738}"/>
               </a:ext>
             </a:extLst>
           </p:cNvPr>
@@ -2162,7 +3066,7 @@
           <p:cNvPr id="3" name="Notes Placeholder 2">
             <a:extLst>
               <a:ext uri="{FF2B5EF4-FFF2-40B4-BE49-F238E27FC236}">
-                <a16:creationId xmlns:a16="http://schemas.microsoft.com/office/drawing/2014/main" id="{F4C5329E-ECB5-4CB1-3A33-CFC57176F475}"/>
+                <a16:creationId xmlns:a16="http://schemas.microsoft.com/office/drawing/2014/main" xmlns="" id="{F4C5329E-ECB5-4CB1-3A33-CFC57176F475}"/>
               </a:ext>
             </a:extLst>
           </p:cNvPr>
@@ -2187,7 +3091,7 @@
           <p:cNvPr id="4" name="Slide Number Placeholder 3">
             <a:extLst>
               <a:ext uri="{FF2B5EF4-FFF2-40B4-BE49-F238E27FC236}">
-                <a16:creationId xmlns:a16="http://schemas.microsoft.com/office/drawing/2014/main" id="{37AB7C02-5FA9-66E4-2433-F97393A5C0BA}"/>
+                <a16:creationId xmlns:a16="http://schemas.microsoft.com/office/drawing/2014/main" xmlns="" id="{37AB7C02-5FA9-66E4-2433-F97393A5C0BA}"/>
               </a:ext>
             </a:extLst>
           </p:cNvPr>
@@ -2232,7 +3136,7 @@
         <p:cNvPr id="1" name="">
           <a:extLst>
             <a:ext uri="{FF2B5EF4-FFF2-40B4-BE49-F238E27FC236}">
-              <a16:creationId xmlns:a16="http://schemas.microsoft.com/office/drawing/2014/main" id="{92F2E69C-0407-4619-FFB1-7502CF033EBA}"/>
+              <a16:creationId xmlns:a16="http://schemas.microsoft.com/office/drawing/2014/main" xmlns="" id="{92F2E69C-0407-4619-FFB1-7502CF033EBA}"/>
             </a:ext>
           </a:extLst>
         </p:cNvPr>
@@ -2252,7 +3156,7 @@
           <p:cNvPr id="2" name="Slide Image Placeholder 1">
             <a:extLst>
               <a:ext uri="{FF2B5EF4-FFF2-40B4-BE49-F238E27FC236}">
-                <a16:creationId xmlns:a16="http://schemas.microsoft.com/office/drawing/2014/main" id="{E3C6894B-B13E-3C0F-BEC3-8A663E98508F}"/>
+                <a16:creationId xmlns:a16="http://schemas.microsoft.com/office/drawing/2014/main" xmlns="" id="{E3C6894B-B13E-3C0F-BEC3-8A663E98508F}"/>
               </a:ext>
             </a:extLst>
           </p:cNvPr>
@@ -2270,7 +3174,7 @@
           <p:cNvPr id="3" name="Notes Placeholder 2">
             <a:extLst>
               <a:ext uri="{FF2B5EF4-FFF2-40B4-BE49-F238E27FC236}">
-                <a16:creationId xmlns:a16="http://schemas.microsoft.com/office/drawing/2014/main" id="{B76A1B01-A242-46E3-F92E-FB0EA28821F9}"/>
+                <a16:creationId xmlns:a16="http://schemas.microsoft.com/office/drawing/2014/main" xmlns="" id="{B76A1B01-A242-46E3-F92E-FB0EA28821F9}"/>
               </a:ext>
             </a:extLst>
           </p:cNvPr>
@@ -2295,7 +3199,7 @@
           <p:cNvPr id="4" name="Slide Number Placeholder 3">
             <a:extLst>
               <a:ext uri="{FF2B5EF4-FFF2-40B4-BE49-F238E27FC236}">
-                <a16:creationId xmlns:a16="http://schemas.microsoft.com/office/drawing/2014/main" id="{4BA915CE-E13E-5840-D0C6-249ACB7C2C1D}"/>
+                <a16:creationId xmlns:a16="http://schemas.microsoft.com/office/drawing/2014/main" xmlns="" id="{4BA915CE-E13E-5840-D0C6-249ACB7C2C1D}"/>
               </a:ext>
             </a:extLst>
           </p:cNvPr>
@@ -2444,7 +3348,7 @@
         <p:cNvPr id="1" name="">
           <a:extLst>
             <a:ext uri="{FF2B5EF4-FFF2-40B4-BE49-F238E27FC236}">
-              <a16:creationId xmlns:a16="http://schemas.microsoft.com/office/drawing/2014/main" id="{0D0A5E72-3763-6194-5E85-BE26354035A3}"/>
+              <a16:creationId xmlns:a16="http://schemas.microsoft.com/office/drawing/2014/main" xmlns="" id="{0D0A5E72-3763-6194-5E85-BE26354035A3}"/>
             </a:ext>
           </a:extLst>
         </p:cNvPr>
@@ -2464,7 +3368,7 @@
           <p:cNvPr id="2" name="Slide Image Placeholder 1">
             <a:extLst>
               <a:ext uri="{FF2B5EF4-FFF2-40B4-BE49-F238E27FC236}">
-                <a16:creationId xmlns:a16="http://schemas.microsoft.com/office/drawing/2014/main" id="{82466988-6655-8B01-840E-0BE3EDB68F07}"/>
+                <a16:creationId xmlns:a16="http://schemas.microsoft.com/office/drawing/2014/main" xmlns="" id="{82466988-6655-8B01-840E-0BE3EDB68F07}"/>
               </a:ext>
             </a:extLst>
           </p:cNvPr>
@@ -2482,7 +3386,7 @@
           <p:cNvPr id="3" name="Notes Placeholder 2">
             <a:extLst>
               <a:ext uri="{FF2B5EF4-FFF2-40B4-BE49-F238E27FC236}">
-                <a16:creationId xmlns:a16="http://schemas.microsoft.com/office/drawing/2014/main" id="{5E09F3D0-11CA-2E8D-04C5-104C59DCE708}"/>
+                <a16:creationId xmlns:a16="http://schemas.microsoft.com/office/drawing/2014/main" xmlns="" id="{5E09F3D0-11CA-2E8D-04C5-104C59DCE708}"/>
               </a:ext>
             </a:extLst>
           </p:cNvPr>
@@ -2527,7 +3431,7 @@
           <p:cNvPr id="4" name="Slide Number Placeholder 3">
             <a:extLst>
               <a:ext uri="{FF2B5EF4-FFF2-40B4-BE49-F238E27FC236}">
-                <a16:creationId xmlns:a16="http://schemas.microsoft.com/office/drawing/2014/main" id="{68F0BCD7-F825-C67D-D845-8316B4C4B6D6}"/>
+                <a16:creationId xmlns:a16="http://schemas.microsoft.com/office/drawing/2014/main" xmlns="" id="{68F0BCD7-F825-C67D-D845-8316B4C4B6D6}"/>
               </a:ext>
             </a:extLst>
           </p:cNvPr>
@@ -2572,7 +3476,7 @@
         <p:cNvPr id="1" name="">
           <a:extLst>
             <a:ext uri="{FF2B5EF4-FFF2-40B4-BE49-F238E27FC236}">
-              <a16:creationId xmlns:a16="http://schemas.microsoft.com/office/drawing/2014/main" id="{0D0A5E72-3763-6194-5E85-BE26354035A3}"/>
+              <a16:creationId xmlns:a16="http://schemas.microsoft.com/office/drawing/2014/main" xmlns="" id="{0D0A5E72-3763-6194-5E85-BE26354035A3}"/>
             </a:ext>
           </a:extLst>
         </p:cNvPr>
@@ -2592,7 +3496,7 @@
           <p:cNvPr id="2" name="Slide Image Placeholder 1">
             <a:extLst>
               <a:ext uri="{FF2B5EF4-FFF2-40B4-BE49-F238E27FC236}">
-                <a16:creationId xmlns:a16="http://schemas.microsoft.com/office/drawing/2014/main" id="{82466988-6655-8B01-840E-0BE3EDB68F07}"/>
+                <a16:creationId xmlns:a16="http://schemas.microsoft.com/office/drawing/2014/main" xmlns="" id="{82466988-6655-8B01-840E-0BE3EDB68F07}"/>
               </a:ext>
             </a:extLst>
           </p:cNvPr>
@@ -2610,7 +3514,7 @@
           <p:cNvPr id="3" name="Notes Placeholder 2">
             <a:extLst>
               <a:ext uri="{FF2B5EF4-FFF2-40B4-BE49-F238E27FC236}">
-                <a16:creationId xmlns:a16="http://schemas.microsoft.com/office/drawing/2014/main" id="{5E09F3D0-11CA-2E8D-04C5-104C59DCE708}"/>
+                <a16:creationId xmlns:a16="http://schemas.microsoft.com/office/drawing/2014/main" xmlns="" id="{5E09F3D0-11CA-2E8D-04C5-104C59DCE708}"/>
               </a:ext>
             </a:extLst>
           </p:cNvPr>
@@ -2655,7 +3559,7 @@
           <p:cNvPr id="4" name="Slide Number Placeholder 3">
             <a:extLst>
               <a:ext uri="{FF2B5EF4-FFF2-40B4-BE49-F238E27FC236}">
-                <a16:creationId xmlns:a16="http://schemas.microsoft.com/office/drawing/2014/main" id="{68F0BCD7-F825-C67D-D845-8316B4C4B6D6}"/>
+                <a16:creationId xmlns:a16="http://schemas.microsoft.com/office/drawing/2014/main" xmlns="" id="{68F0BCD7-F825-C67D-D845-8316B4C4B6D6}"/>
               </a:ext>
             </a:extLst>
           </p:cNvPr>
@@ -2838,7 +3742,7 @@
           <p:cNvPr id="2" name="Título 1">
             <a:extLst>
               <a:ext uri="{FF2B5EF4-FFF2-40B4-BE49-F238E27FC236}">
-                <a16:creationId xmlns:a16="http://schemas.microsoft.com/office/drawing/2014/main" id="{1DB9B4FF-B06E-403C-A326-BDC64D8FF94E}"/>
+                <a16:creationId xmlns:a16="http://schemas.microsoft.com/office/drawing/2014/main" xmlns="" id="{1DB9B4FF-B06E-403C-A326-BDC64D8FF94E}"/>
               </a:ext>
             </a:extLst>
           </p:cNvPr>
@@ -2875,7 +3779,7 @@
           <p:cNvPr id="3" name="Subtítulo 2">
             <a:extLst>
               <a:ext uri="{FF2B5EF4-FFF2-40B4-BE49-F238E27FC236}">
-                <a16:creationId xmlns:a16="http://schemas.microsoft.com/office/drawing/2014/main" id="{247BDFCE-746E-45BF-A319-4733D58D1632}"/>
+                <a16:creationId xmlns:a16="http://schemas.microsoft.com/office/drawing/2014/main" xmlns="" id="{247BDFCE-746E-45BF-A319-4733D58D1632}"/>
               </a:ext>
             </a:extLst>
           </p:cNvPr>
@@ -2945,7 +3849,7 @@
           <p:cNvPr id="4" name="Espaço Reservado para Data 3">
             <a:extLst>
               <a:ext uri="{FF2B5EF4-FFF2-40B4-BE49-F238E27FC236}">
-                <a16:creationId xmlns:a16="http://schemas.microsoft.com/office/drawing/2014/main" id="{9EDE2778-5372-4104-B96D-968184DA8288}"/>
+                <a16:creationId xmlns:a16="http://schemas.microsoft.com/office/drawing/2014/main" xmlns="" id="{9EDE2778-5372-4104-B96D-968184DA8288}"/>
               </a:ext>
             </a:extLst>
           </p:cNvPr>
@@ -2974,7 +3878,7 @@
           <p:cNvPr id="5" name="Espaço Reservado para Rodapé 4">
             <a:extLst>
               <a:ext uri="{FF2B5EF4-FFF2-40B4-BE49-F238E27FC236}">
-                <a16:creationId xmlns:a16="http://schemas.microsoft.com/office/drawing/2014/main" id="{C1DD0F41-C861-4051-988D-3024A37A4B93}"/>
+                <a16:creationId xmlns:a16="http://schemas.microsoft.com/office/drawing/2014/main" xmlns="" id="{C1DD0F41-C861-4051-988D-3024A37A4B93}"/>
               </a:ext>
             </a:extLst>
           </p:cNvPr>
@@ -2999,7 +3903,7 @@
           <p:cNvPr id="6" name="Espaço Reservado para Número de Slide 5">
             <a:extLst>
               <a:ext uri="{FF2B5EF4-FFF2-40B4-BE49-F238E27FC236}">
-                <a16:creationId xmlns:a16="http://schemas.microsoft.com/office/drawing/2014/main" id="{07E5967E-D980-431A-A5DB-3F0C5030A81E}"/>
+                <a16:creationId xmlns:a16="http://schemas.microsoft.com/office/drawing/2014/main" xmlns="" id="{07E5967E-D980-431A-A5DB-3F0C5030A81E}"/>
               </a:ext>
             </a:extLst>
           </p:cNvPr>
@@ -3017,7 +3921,7 @@
           <a:p>
             <a:fld id="{1A7E88B7-70CE-4035-AE73-13FA6FB985D4}" type="slidenum">
               <a:rPr lang="pt-BR" smtClean="0"/>
-              <a:t>‹#›</a:t>
+              <a:t>‹nº›</a:t>
             </a:fld>
             <a:endParaRPr lang="pt-BR"/>
           </a:p>
@@ -3058,7 +3962,7 @@
           <p:cNvPr id="2" name="Título 1">
             <a:extLst>
               <a:ext uri="{FF2B5EF4-FFF2-40B4-BE49-F238E27FC236}">
-                <a16:creationId xmlns:a16="http://schemas.microsoft.com/office/drawing/2014/main" id="{9036C49F-3E68-4175-81BA-3C3FEE44308A}"/>
+                <a16:creationId xmlns:a16="http://schemas.microsoft.com/office/drawing/2014/main" xmlns="" id="{9036C49F-3E68-4175-81BA-3C3FEE44308A}"/>
               </a:ext>
             </a:extLst>
           </p:cNvPr>
@@ -3086,7 +3990,7 @@
           <p:cNvPr id="3" name="Espaço Reservado para Texto Vertical 2">
             <a:extLst>
               <a:ext uri="{FF2B5EF4-FFF2-40B4-BE49-F238E27FC236}">
-                <a16:creationId xmlns:a16="http://schemas.microsoft.com/office/drawing/2014/main" id="{426FA736-3DD3-4D4E-B57B-BBE1D8F7D424}"/>
+                <a16:creationId xmlns:a16="http://schemas.microsoft.com/office/drawing/2014/main" xmlns="" id="{426FA736-3DD3-4D4E-B57B-BBE1D8F7D424}"/>
               </a:ext>
             </a:extLst>
           </p:cNvPr>
@@ -3143,7 +4047,7 @@
           <p:cNvPr id="4" name="Espaço Reservado para Data 3">
             <a:extLst>
               <a:ext uri="{FF2B5EF4-FFF2-40B4-BE49-F238E27FC236}">
-                <a16:creationId xmlns:a16="http://schemas.microsoft.com/office/drawing/2014/main" id="{99E8855C-D8FD-48F6-B14E-861E0DE4D915}"/>
+                <a16:creationId xmlns:a16="http://schemas.microsoft.com/office/drawing/2014/main" xmlns="" id="{99E8855C-D8FD-48F6-B14E-861E0DE4D915}"/>
               </a:ext>
             </a:extLst>
           </p:cNvPr>
@@ -3172,7 +4076,7 @@
           <p:cNvPr id="5" name="Espaço Reservado para Rodapé 4">
             <a:extLst>
               <a:ext uri="{FF2B5EF4-FFF2-40B4-BE49-F238E27FC236}">
-                <a16:creationId xmlns:a16="http://schemas.microsoft.com/office/drawing/2014/main" id="{97C0BB88-2F21-42A5-ACFF-83DA47F2D340}"/>
+                <a16:creationId xmlns:a16="http://schemas.microsoft.com/office/drawing/2014/main" xmlns="" id="{97C0BB88-2F21-42A5-ACFF-83DA47F2D340}"/>
               </a:ext>
             </a:extLst>
           </p:cNvPr>
@@ -3197,7 +4101,7 @@
           <p:cNvPr id="6" name="Espaço Reservado para Número de Slide 5">
             <a:extLst>
               <a:ext uri="{FF2B5EF4-FFF2-40B4-BE49-F238E27FC236}">
-                <a16:creationId xmlns:a16="http://schemas.microsoft.com/office/drawing/2014/main" id="{6CB462B3-1F22-4C05-B4B8-7A279FB7D5E9}"/>
+                <a16:creationId xmlns:a16="http://schemas.microsoft.com/office/drawing/2014/main" xmlns="" id="{6CB462B3-1F22-4C05-B4B8-7A279FB7D5E9}"/>
               </a:ext>
             </a:extLst>
           </p:cNvPr>
@@ -3215,7 +4119,7 @@
           <a:p>
             <a:fld id="{1A7E88B7-70CE-4035-AE73-13FA6FB985D4}" type="slidenum">
               <a:rPr lang="pt-BR" smtClean="0"/>
-              <a:t>‹#›</a:t>
+              <a:t>‹nº›</a:t>
             </a:fld>
             <a:endParaRPr lang="pt-BR"/>
           </a:p>
@@ -3256,7 +4160,7 @@
           <p:cNvPr id="2" name="Título Vertical 1">
             <a:extLst>
               <a:ext uri="{FF2B5EF4-FFF2-40B4-BE49-F238E27FC236}">
-                <a16:creationId xmlns:a16="http://schemas.microsoft.com/office/drawing/2014/main" id="{EAEAB728-701C-4207-A9D5-23FF45C60502}"/>
+                <a16:creationId xmlns:a16="http://schemas.microsoft.com/office/drawing/2014/main" xmlns="" id="{EAEAB728-701C-4207-A9D5-23FF45C60502}"/>
               </a:ext>
             </a:extLst>
           </p:cNvPr>
@@ -3289,7 +4193,7 @@
           <p:cNvPr id="3" name="Espaço Reservado para Texto Vertical 2">
             <a:extLst>
               <a:ext uri="{FF2B5EF4-FFF2-40B4-BE49-F238E27FC236}">
-                <a16:creationId xmlns:a16="http://schemas.microsoft.com/office/drawing/2014/main" id="{BA8C8CCF-7823-480A-9A19-0F664DD17E3B}"/>
+                <a16:creationId xmlns:a16="http://schemas.microsoft.com/office/drawing/2014/main" xmlns="" id="{BA8C8CCF-7823-480A-9A19-0F664DD17E3B}"/>
               </a:ext>
             </a:extLst>
           </p:cNvPr>
@@ -3351,7 +4255,7 @@
           <p:cNvPr id="4" name="Espaço Reservado para Data 3">
             <a:extLst>
               <a:ext uri="{FF2B5EF4-FFF2-40B4-BE49-F238E27FC236}">
-                <a16:creationId xmlns:a16="http://schemas.microsoft.com/office/drawing/2014/main" id="{721D5734-7B1F-425D-942F-6EB73344027C}"/>
+                <a16:creationId xmlns:a16="http://schemas.microsoft.com/office/drawing/2014/main" xmlns="" id="{721D5734-7B1F-425D-942F-6EB73344027C}"/>
               </a:ext>
             </a:extLst>
           </p:cNvPr>
@@ -3380,7 +4284,7 @@
           <p:cNvPr id="5" name="Espaço Reservado para Rodapé 4">
             <a:extLst>
               <a:ext uri="{FF2B5EF4-FFF2-40B4-BE49-F238E27FC236}">
-                <a16:creationId xmlns:a16="http://schemas.microsoft.com/office/drawing/2014/main" id="{1E1AAEAC-F08D-45FE-89EC-B1B349A868C9}"/>
+                <a16:creationId xmlns:a16="http://schemas.microsoft.com/office/drawing/2014/main" xmlns="" id="{1E1AAEAC-F08D-45FE-89EC-B1B349A868C9}"/>
               </a:ext>
             </a:extLst>
           </p:cNvPr>
@@ -3405,7 +4309,7 @@
           <p:cNvPr id="6" name="Espaço Reservado para Número de Slide 5">
             <a:extLst>
               <a:ext uri="{FF2B5EF4-FFF2-40B4-BE49-F238E27FC236}">
-                <a16:creationId xmlns:a16="http://schemas.microsoft.com/office/drawing/2014/main" id="{BAA44493-9911-47B2-87A6-C2141A972BC8}"/>
+                <a16:creationId xmlns:a16="http://schemas.microsoft.com/office/drawing/2014/main" xmlns="" id="{BAA44493-9911-47B2-87A6-C2141A972BC8}"/>
               </a:ext>
             </a:extLst>
           </p:cNvPr>
@@ -3423,7 +4327,7 @@
           <a:p>
             <a:fld id="{1A7E88B7-70CE-4035-AE73-13FA6FB985D4}" type="slidenum">
               <a:rPr lang="pt-BR" smtClean="0"/>
-              <a:t>‹#›</a:t>
+              <a:t>‹nº›</a:t>
             </a:fld>
             <a:endParaRPr lang="pt-BR"/>
           </a:p>
@@ -3464,7 +4368,7 @@
           <p:cNvPr id="2" name="Título 1">
             <a:extLst>
               <a:ext uri="{FF2B5EF4-FFF2-40B4-BE49-F238E27FC236}">
-                <a16:creationId xmlns:a16="http://schemas.microsoft.com/office/drawing/2014/main" id="{71BD44A5-8F21-4626-A01D-48A1C874B1D5}"/>
+                <a16:creationId xmlns:a16="http://schemas.microsoft.com/office/drawing/2014/main" xmlns="" id="{71BD44A5-8F21-4626-A01D-48A1C874B1D5}"/>
               </a:ext>
             </a:extLst>
           </p:cNvPr>
@@ -3492,7 +4396,7 @@
           <p:cNvPr id="3" name="Espaço Reservado para Conteúdo 2">
             <a:extLst>
               <a:ext uri="{FF2B5EF4-FFF2-40B4-BE49-F238E27FC236}">
-                <a16:creationId xmlns:a16="http://schemas.microsoft.com/office/drawing/2014/main" id="{B79E8085-65A9-48AA-951D-71D978BFF4ED}"/>
+                <a16:creationId xmlns:a16="http://schemas.microsoft.com/office/drawing/2014/main" xmlns="" id="{B79E8085-65A9-48AA-951D-71D978BFF4ED}"/>
               </a:ext>
             </a:extLst>
           </p:cNvPr>
@@ -3549,7 +4453,7 @@
           <p:cNvPr id="4" name="Espaço Reservado para Data 3">
             <a:extLst>
               <a:ext uri="{FF2B5EF4-FFF2-40B4-BE49-F238E27FC236}">
-                <a16:creationId xmlns:a16="http://schemas.microsoft.com/office/drawing/2014/main" id="{F05BE1AF-51EA-425D-B188-DE7BD675009F}"/>
+                <a16:creationId xmlns:a16="http://schemas.microsoft.com/office/drawing/2014/main" xmlns="" id="{F05BE1AF-51EA-425D-B188-DE7BD675009F}"/>
               </a:ext>
             </a:extLst>
           </p:cNvPr>
@@ -3578,7 +4482,7 @@
           <p:cNvPr id="5" name="Espaço Reservado para Rodapé 4">
             <a:extLst>
               <a:ext uri="{FF2B5EF4-FFF2-40B4-BE49-F238E27FC236}">
-                <a16:creationId xmlns:a16="http://schemas.microsoft.com/office/drawing/2014/main" id="{121BE632-29CF-4CB9-B365-C9EF38F89BE6}"/>
+                <a16:creationId xmlns:a16="http://schemas.microsoft.com/office/drawing/2014/main" xmlns="" id="{121BE632-29CF-4CB9-B365-C9EF38F89BE6}"/>
               </a:ext>
             </a:extLst>
           </p:cNvPr>
@@ -3603,7 +4507,7 @@
           <p:cNvPr id="6" name="Espaço Reservado para Número de Slide 5">
             <a:extLst>
               <a:ext uri="{FF2B5EF4-FFF2-40B4-BE49-F238E27FC236}">
-                <a16:creationId xmlns:a16="http://schemas.microsoft.com/office/drawing/2014/main" id="{60CF3DD1-9AEC-4A57-B461-4E4DD86FAC18}"/>
+                <a16:creationId xmlns:a16="http://schemas.microsoft.com/office/drawing/2014/main" xmlns="" id="{60CF3DD1-9AEC-4A57-B461-4E4DD86FAC18}"/>
               </a:ext>
             </a:extLst>
           </p:cNvPr>
@@ -3621,7 +4525,7 @@
           <a:p>
             <a:fld id="{1A7E88B7-70CE-4035-AE73-13FA6FB985D4}" type="slidenum">
               <a:rPr lang="pt-BR" smtClean="0"/>
-              <a:t>‹#›</a:t>
+              <a:t>‹nº›</a:t>
             </a:fld>
             <a:endParaRPr lang="pt-BR"/>
           </a:p>
@@ -3662,7 +4566,7 @@
           <p:cNvPr id="2" name="Título 1">
             <a:extLst>
               <a:ext uri="{FF2B5EF4-FFF2-40B4-BE49-F238E27FC236}">
-                <a16:creationId xmlns:a16="http://schemas.microsoft.com/office/drawing/2014/main" id="{34AB2FF0-A4D7-4E28-991D-FF26140D5988}"/>
+                <a16:creationId xmlns:a16="http://schemas.microsoft.com/office/drawing/2014/main" xmlns="" id="{34AB2FF0-A4D7-4E28-991D-FF26140D5988}"/>
               </a:ext>
             </a:extLst>
           </p:cNvPr>
@@ -3699,7 +4603,7 @@
           <p:cNvPr id="3" name="Espaço Reservado para Texto 2">
             <a:extLst>
               <a:ext uri="{FF2B5EF4-FFF2-40B4-BE49-F238E27FC236}">
-                <a16:creationId xmlns:a16="http://schemas.microsoft.com/office/drawing/2014/main" id="{E2AC45B0-4145-40DB-8E61-105461170604}"/>
+                <a16:creationId xmlns:a16="http://schemas.microsoft.com/office/drawing/2014/main" xmlns="" id="{E2AC45B0-4145-40DB-8E61-105461170604}"/>
               </a:ext>
             </a:extLst>
           </p:cNvPr>
@@ -3824,7 +4728,7 @@
           <p:cNvPr id="4" name="Espaço Reservado para Data 3">
             <a:extLst>
               <a:ext uri="{FF2B5EF4-FFF2-40B4-BE49-F238E27FC236}">
-                <a16:creationId xmlns:a16="http://schemas.microsoft.com/office/drawing/2014/main" id="{50F1D3FB-740A-4EBA-A309-2CE71D12ECFB}"/>
+                <a16:creationId xmlns:a16="http://schemas.microsoft.com/office/drawing/2014/main" xmlns="" id="{50F1D3FB-740A-4EBA-A309-2CE71D12ECFB}"/>
               </a:ext>
             </a:extLst>
           </p:cNvPr>
@@ -3853,7 +4757,7 @@
           <p:cNvPr id="5" name="Espaço Reservado para Rodapé 4">
             <a:extLst>
               <a:ext uri="{FF2B5EF4-FFF2-40B4-BE49-F238E27FC236}">
-                <a16:creationId xmlns:a16="http://schemas.microsoft.com/office/drawing/2014/main" id="{BDCAB18F-8715-4465-A940-F9C193A2ACE9}"/>
+                <a16:creationId xmlns:a16="http://schemas.microsoft.com/office/drawing/2014/main" xmlns="" id="{BDCAB18F-8715-4465-A940-F9C193A2ACE9}"/>
               </a:ext>
             </a:extLst>
           </p:cNvPr>
@@ -3878,7 +4782,7 @@
           <p:cNvPr id="6" name="Espaço Reservado para Número de Slide 5">
             <a:extLst>
               <a:ext uri="{FF2B5EF4-FFF2-40B4-BE49-F238E27FC236}">
-                <a16:creationId xmlns:a16="http://schemas.microsoft.com/office/drawing/2014/main" id="{353466C6-8248-429F-8056-FF040BF509EB}"/>
+                <a16:creationId xmlns:a16="http://schemas.microsoft.com/office/drawing/2014/main" xmlns="" id="{353466C6-8248-429F-8056-FF040BF509EB}"/>
               </a:ext>
             </a:extLst>
           </p:cNvPr>
@@ -3896,7 +4800,7 @@
           <a:p>
             <a:fld id="{1A7E88B7-70CE-4035-AE73-13FA6FB985D4}" type="slidenum">
               <a:rPr lang="pt-BR" smtClean="0"/>
-              <a:t>‹#›</a:t>
+              <a:t>‹nº›</a:t>
             </a:fld>
             <a:endParaRPr lang="pt-BR"/>
           </a:p>
@@ -3937,7 +4841,7 @@
           <p:cNvPr id="2" name="Título 1">
             <a:extLst>
               <a:ext uri="{FF2B5EF4-FFF2-40B4-BE49-F238E27FC236}">
-                <a16:creationId xmlns:a16="http://schemas.microsoft.com/office/drawing/2014/main" id="{BC7BB9F0-F14B-4A91-B2B7-35BC47FE4DE7}"/>
+                <a16:creationId xmlns:a16="http://schemas.microsoft.com/office/drawing/2014/main" xmlns="" id="{BC7BB9F0-F14B-4A91-B2B7-35BC47FE4DE7}"/>
               </a:ext>
             </a:extLst>
           </p:cNvPr>
@@ -3965,7 +4869,7 @@
           <p:cNvPr id="3" name="Espaço Reservado para Conteúdo 2">
             <a:extLst>
               <a:ext uri="{FF2B5EF4-FFF2-40B4-BE49-F238E27FC236}">
-                <a16:creationId xmlns:a16="http://schemas.microsoft.com/office/drawing/2014/main" id="{EC1FC1C4-73DA-47A6-8496-B0B457F7D39A}"/>
+                <a16:creationId xmlns:a16="http://schemas.microsoft.com/office/drawing/2014/main" xmlns="" id="{EC1FC1C4-73DA-47A6-8496-B0B457F7D39A}"/>
               </a:ext>
             </a:extLst>
           </p:cNvPr>
@@ -4027,7 +4931,7 @@
           <p:cNvPr id="4" name="Espaço Reservado para Conteúdo 3">
             <a:extLst>
               <a:ext uri="{FF2B5EF4-FFF2-40B4-BE49-F238E27FC236}">
-                <a16:creationId xmlns:a16="http://schemas.microsoft.com/office/drawing/2014/main" id="{E92F06A8-A449-4D92-9912-76873E529B38}"/>
+                <a16:creationId xmlns:a16="http://schemas.microsoft.com/office/drawing/2014/main" xmlns="" id="{E92F06A8-A449-4D92-9912-76873E529B38}"/>
               </a:ext>
             </a:extLst>
           </p:cNvPr>
@@ -4089,7 +4993,7 @@
           <p:cNvPr id="5" name="Espaço Reservado para Data 4">
             <a:extLst>
               <a:ext uri="{FF2B5EF4-FFF2-40B4-BE49-F238E27FC236}">
-                <a16:creationId xmlns:a16="http://schemas.microsoft.com/office/drawing/2014/main" id="{938070A4-BC2F-4D55-BD8D-DEAF11BB9EE9}"/>
+                <a16:creationId xmlns:a16="http://schemas.microsoft.com/office/drawing/2014/main" xmlns="" id="{938070A4-BC2F-4D55-BD8D-DEAF11BB9EE9}"/>
               </a:ext>
             </a:extLst>
           </p:cNvPr>
@@ -4118,7 +5022,7 @@
           <p:cNvPr id="6" name="Espaço Reservado para Rodapé 5">
             <a:extLst>
               <a:ext uri="{FF2B5EF4-FFF2-40B4-BE49-F238E27FC236}">
-                <a16:creationId xmlns:a16="http://schemas.microsoft.com/office/drawing/2014/main" id="{45CC2DB8-844A-465F-BA9A-7734C80C7F43}"/>
+                <a16:creationId xmlns:a16="http://schemas.microsoft.com/office/drawing/2014/main" xmlns="" id="{45CC2DB8-844A-465F-BA9A-7734C80C7F43}"/>
               </a:ext>
             </a:extLst>
           </p:cNvPr>
@@ -4143,7 +5047,7 @@
           <p:cNvPr id="7" name="Espaço Reservado para Número de Slide 6">
             <a:extLst>
               <a:ext uri="{FF2B5EF4-FFF2-40B4-BE49-F238E27FC236}">
-                <a16:creationId xmlns:a16="http://schemas.microsoft.com/office/drawing/2014/main" id="{4CC606A8-097B-4040-94E0-CD8C88280D8F}"/>
+                <a16:creationId xmlns:a16="http://schemas.microsoft.com/office/drawing/2014/main" xmlns="" id="{4CC606A8-097B-4040-94E0-CD8C88280D8F}"/>
               </a:ext>
             </a:extLst>
           </p:cNvPr>
@@ -4161,7 +5065,7 @@
           <a:p>
             <a:fld id="{1A7E88B7-70CE-4035-AE73-13FA6FB985D4}" type="slidenum">
               <a:rPr lang="pt-BR" smtClean="0"/>
-              <a:t>‹#›</a:t>
+              <a:t>‹nº›</a:t>
             </a:fld>
             <a:endParaRPr lang="pt-BR"/>
           </a:p>
@@ -4202,7 +5106,7 @@
           <p:cNvPr id="2" name="Título 1">
             <a:extLst>
               <a:ext uri="{FF2B5EF4-FFF2-40B4-BE49-F238E27FC236}">
-                <a16:creationId xmlns:a16="http://schemas.microsoft.com/office/drawing/2014/main" id="{76D66686-0143-4CB6-8C09-BA326F1E7ACA}"/>
+                <a16:creationId xmlns:a16="http://schemas.microsoft.com/office/drawing/2014/main" xmlns="" id="{76D66686-0143-4CB6-8C09-BA326F1E7ACA}"/>
               </a:ext>
             </a:extLst>
           </p:cNvPr>
@@ -4235,7 +5139,7 @@
           <p:cNvPr id="3" name="Espaço Reservado para Texto 2">
             <a:extLst>
               <a:ext uri="{FF2B5EF4-FFF2-40B4-BE49-F238E27FC236}">
-                <a16:creationId xmlns:a16="http://schemas.microsoft.com/office/drawing/2014/main" id="{0227AB85-F59E-4BCE-B846-4FA0992C2F23}"/>
+                <a16:creationId xmlns:a16="http://schemas.microsoft.com/office/drawing/2014/main" xmlns="" id="{0227AB85-F59E-4BCE-B846-4FA0992C2F23}"/>
               </a:ext>
             </a:extLst>
           </p:cNvPr>
@@ -4306,7 +5210,7 @@
           <p:cNvPr id="4" name="Espaço Reservado para Conteúdo 3">
             <a:extLst>
               <a:ext uri="{FF2B5EF4-FFF2-40B4-BE49-F238E27FC236}">
-                <a16:creationId xmlns:a16="http://schemas.microsoft.com/office/drawing/2014/main" id="{3373456C-7319-4D0A-827D-D29F6B083F5D}"/>
+                <a16:creationId xmlns:a16="http://schemas.microsoft.com/office/drawing/2014/main" xmlns="" id="{3373456C-7319-4D0A-827D-D29F6B083F5D}"/>
               </a:ext>
             </a:extLst>
           </p:cNvPr>
@@ -4368,7 +5272,7 @@
           <p:cNvPr id="5" name="Espaço Reservado para Texto 4">
             <a:extLst>
               <a:ext uri="{FF2B5EF4-FFF2-40B4-BE49-F238E27FC236}">
-                <a16:creationId xmlns:a16="http://schemas.microsoft.com/office/drawing/2014/main" id="{4CD109D0-2E83-4262-8029-A871CEC47406}"/>
+                <a16:creationId xmlns:a16="http://schemas.microsoft.com/office/drawing/2014/main" xmlns="" id="{4CD109D0-2E83-4262-8029-A871CEC47406}"/>
               </a:ext>
             </a:extLst>
           </p:cNvPr>
@@ -4439,7 +5343,7 @@
           <p:cNvPr id="6" name="Espaço Reservado para Conteúdo 5">
             <a:extLst>
               <a:ext uri="{FF2B5EF4-FFF2-40B4-BE49-F238E27FC236}">
-                <a16:creationId xmlns:a16="http://schemas.microsoft.com/office/drawing/2014/main" id="{AD706E3A-CFBB-4A6C-A65F-D0360A9E74FE}"/>
+                <a16:creationId xmlns:a16="http://schemas.microsoft.com/office/drawing/2014/main" xmlns="" id="{AD706E3A-CFBB-4A6C-A65F-D0360A9E74FE}"/>
               </a:ext>
             </a:extLst>
           </p:cNvPr>
@@ -4501,7 +5405,7 @@
           <p:cNvPr id="7" name="Espaço Reservado para Data 6">
             <a:extLst>
               <a:ext uri="{FF2B5EF4-FFF2-40B4-BE49-F238E27FC236}">
-                <a16:creationId xmlns:a16="http://schemas.microsoft.com/office/drawing/2014/main" id="{4172C0E5-5AF0-4805-BB51-443733CD2BD5}"/>
+                <a16:creationId xmlns:a16="http://schemas.microsoft.com/office/drawing/2014/main" xmlns="" id="{4172C0E5-5AF0-4805-BB51-443733CD2BD5}"/>
               </a:ext>
             </a:extLst>
           </p:cNvPr>
@@ -4530,7 +5434,7 @@
           <p:cNvPr id="8" name="Espaço Reservado para Rodapé 7">
             <a:extLst>
               <a:ext uri="{FF2B5EF4-FFF2-40B4-BE49-F238E27FC236}">
-                <a16:creationId xmlns:a16="http://schemas.microsoft.com/office/drawing/2014/main" id="{0E801648-156F-497E-99CF-797DF48051E1}"/>
+                <a16:creationId xmlns:a16="http://schemas.microsoft.com/office/drawing/2014/main" xmlns="" id="{0E801648-156F-497E-99CF-797DF48051E1}"/>
               </a:ext>
             </a:extLst>
           </p:cNvPr>
@@ -4555,7 +5459,7 @@
           <p:cNvPr id="9" name="Espaço Reservado para Número de Slide 8">
             <a:extLst>
               <a:ext uri="{FF2B5EF4-FFF2-40B4-BE49-F238E27FC236}">
-                <a16:creationId xmlns:a16="http://schemas.microsoft.com/office/drawing/2014/main" id="{EEE23D32-80E7-4796-A137-66BF842E4B53}"/>
+                <a16:creationId xmlns:a16="http://schemas.microsoft.com/office/drawing/2014/main" xmlns="" id="{EEE23D32-80E7-4796-A137-66BF842E4B53}"/>
               </a:ext>
             </a:extLst>
           </p:cNvPr>
@@ -4573,7 +5477,7 @@
           <a:p>
             <a:fld id="{1A7E88B7-70CE-4035-AE73-13FA6FB985D4}" type="slidenum">
               <a:rPr lang="pt-BR" smtClean="0"/>
-              <a:t>‹#›</a:t>
+              <a:t>‹nº›</a:t>
             </a:fld>
             <a:endParaRPr lang="pt-BR"/>
           </a:p>
@@ -4614,7 +5518,7 @@
           <p:cNvPr id="2" name="Título 1">
             <a:extLst>
               <a:ext uri="{FF2B5EF4-FFF2-40B4-BE49-F238E27FC236}">
-                <a16:creationId xmlns:a16="http://schemas.microsoft.com/office/drawing/2014/main" id="{2BCE2379-C78F-47E1-8CFC-B846E7AF148D}"/>
+                <a16:creationId xmlns:a16="http://schemas.microsoft.com/office/drawing/2014/main" xmlns="" id="{2BCE2379-C78F-47E1-8CFC-B846E7AF148D}"/>
               </a:ext>
             </a:extLst>
           </p:cNvPr>
@@ -4642,7 +5546,7 @@
           <p:cNvPr id="3" name="Espaço Reservado para Data 2">
             <a:extLst>
               <a:ext uri="{FF2B5EF4-FFF2-40B4-BE49-F238E27FC236}">
-                <a16:creationId xmlns:a16="http://schemas.microsoft.com/office/drawing/2014/main" id="{342600A9-7F92-4E22-9D94-E4717252A817}"/>
+                <a16:creationId xmlns:a16="http://schemas.microsoft.com/office/drawing/2014/main" xmlns="" id="{342600A9-7F92-4E22-9D94-E4717252A817}"/>
               </a:ext>
             </a:extLst>
           </p:cNvPr>
@@ -4671,7 +5575,7 @@
           <p:cNvPr id="4" name="Espaço Reservado para Rodapé 3">
             <a:extLst>
               <a:ext uri="{FF2B5EF4-FFF2-40B4-BE49-F238E27FC236}">
-                <a16:creationId xmlns:a16="http://schemas.microsoft.com/office/drawing/2014/main" id="{192E6BED-F546-40CC-A2DF-99CBA853654E}"/>
+                <a16:creationId xmlns:a16="http://schemas.microsoft.com/office/drawing/2014/main" xmlns="" id="{192E6BED-F546-40CC-A2DF-99CBA853654E}"/>
               </a:ext>
             </a:extLst>
           </p:cNvPr>
@@ -4696,7 +5600,7 @@
           <p:cNvPr id="5" name="Espaço Reservado para Número de Slide 4">
             <a:extLst>
               <a:ext uri="{FF2B5EF4-FFF2-40B4-BE49-F238E27FC236}">
-                <a16:creationId xmlns:a16="http://schemas.microsoft.com/office/drawing/2014/main" id="{6091CC40-A8C4-4063-80EB-CC5099621678}"/>
+                <a16:creationId xmlns:a16="http://schemas.microsoft.com/office/drawing/2014/main" xmlns="" id="{6091CC40-A8C4-4063-80EB-CC5099621678}"/>
               </a:ext>
             </a:extLst>
           </p:cNvPr>
@@ -4714,7 +5618,7 @@
           <a:p>
             <a:fld id="{1A7E88B7-70CE-4035-AE73-13FA6FB985D4}" type="slidenum">
               <a:rPr lang="pt-BR" smtClean="0"/>
-              <a:t>‹#›</a:t>
+              <a:t>‹nº›</a:t>
             </a:fld>
             <a:endParaRPr lang="pt-BR"/>
           </a:p>
@@ -4755,7 +5659,7 @@
           <p:cNvPr id="2" name="Espaço Reservado para Data 1">
             <a:extLst>
               <a:ext uri="{FF2B5EF4-FFF2-40B4-BE49-F238E27FC236}">
-                <a16:creationId xmlns:a16="http://schemas.microsoft.com/office/drawing/2014/main" id="{DD19515C-212C-4EAE-84A3-8FF4BC844F1B}"/>
+                <a16:creationId xmlns:a16="http://schemas.microsoft.com/office/drawing/2014/main" xmlns="" id="{DD19515C-212C-4EAE-84A3-8FF4BC844F1B}"/>
               </a:ext>
             </a:extLst>
           </p:cNvPr>
@@ -4784,7 +5688,7 @@
           <p:cNvPr id="3" name="Espaço Reservado para Rodapé 2">
             <a:extLst>
               <a:ext uri="{FF2B5EF4-FFF2-40B4-BE49-F238E27FC236}">
-                <a16:creationId xmlns:a16="http://schemas.microsoft.com/office/drawing/2014/main" id="{94D3D120-B3E8-4C96-861D-7A4F12F49B3A}"/>
+                <a16:creationId xmlns:a16="http://schemas.microsoft.com/office/drawing/2014/main" xmlns="" id="{94D3D120-B3E8-4C96-861D-7A4F12F49B3A}"/>
               </a:ext>
             </a:extLst>
           </p:cNvPr>
@@ -4809,7 +5713,7 @@
           <p:cNvPr id="4" name="Espaço Reservado para Número de Slide 3">
             <a:extLst>
               <a:ext uri="{FF2B5EF4-FFF2-40B4-BE49-F238E27FC236}">
-                <a16:creationId xmlns:a16="http://schemas.microsoft.com/office/drawing/2014/main" id="{42E49B68-FA1B-468B-9F17-D5C09243D454}"/>
+                <a16:creationId xmlns:a16="http://schemas.microsoft.com/office/drawing/2014/main" xmlns="" id="{42E49B68-FA1B-468B-9F17-D5C09243D454}"/>
               </a:ext>
             </a:extLst>
           </p:cNvPr>
@@ -4827,7 +5731,7 @@
           <a:p>
             <a:fld id="{1A7E88B7-70CE-4035-AE73-13FA6FB985D4}" type="slidenum">
               <a:rPr lang="pt-BR" smtClean="0"/>
-              <a:t>‹#›</a:t>
+              <a:t>‹nº›</a:t>
             </a:fld>
             <a:endParaRPr lang="pt-BR"/>
           </a:p>
@@ -4868,7 +5772,7 @@
           <p:cNvPr id="2" name="Título 1">
             <a:extLst>
               <a:ext uri="{FF2B5EF4-FFF2-40B4-BE49-F238E27FC236}">
-                <a16:creationId xmlns:a16="http://schemas.microsoft.com/office/drawing/2014/main" id="{1C17BCBE-A897-4319-85EC-D87909C24980}"/>
+                <a16:creationId xmlns:a16="http://schemas.microsoft.com/office/drawing/2014/main" xmlns="" id="{1C17BCBE-A897-4319-85EC-D87909C24980}"/>
               </a:ext>
             </a:extLst>
           </p:cNvPr>
@@ -4905,7 +5809,7 @@
           <p:cNvPr id="3" name="Espaço Reservado para Conteúdo 2">
             <a:extLst>
               <a:ext uri="{FF2B5EF4-FFF2-40B4-BE49-F238E27FC236}">
-                <a16:creationId xmlns:a16="http://schemas.microsoft.com/office/drawing/2014/main" id="{4226F885-0204-4913-868B-4B8B82576F17}"/>
+                <a16:creationId xmlns:a16="http://schemas.microsoft.com/office/drawing/2014/main" xmlns="" id="{4226F885-0204-4913-868B-4B8B82576F17}"/>
               </a:ext>
             </a:extLst>
           </p:cNvPr>
@@ -4995,7 +5899,7 @@
           <p:cNvPr id="4" name="Espaço Reservado para Texto 3">
             <a:extLst>
               <a:ext uri="{FF2B5EF4-FFF2-40B4-BE49-F238E27FC236}">
-                <a16:creationId xmlns:a16="http://schemas.microsoft.com/office/drawing/2014/main" id="{00F9F784-A858-441B-8AB5-697098141751}"/>
+                <a16:creationId xmlns:a16="http://schemas.microsoft.com/office/drawing/2014/main" xmlns="" id="{00F9F784-A858-441B-8AB5-697098141751}"/>
               </a:ext>
             </a:extLst>
           </p:cNvPr>
@@ -5066,7 +5970,7 @@
           <p:cNvPr id="5" name="Espaço Reservado para Data 4">
             <a:extLst>
               <a:ext uri="{FF2B5EF4-FFF2-40B4-BE49-F238E27FC236}">
-                <a16:creationId xmlns:a16="http://schemas.microsoft.com/office/drawing/2014/main" id="{A4DC363A-5000-472E-8B17-02E7DCB8840A}"/>
+                <a16:creationId xmlns:a16="http://schemas.microsoft.com/office/drawing/2014/main" xmlns="" id="{A4DC363A-5000-472E-8B17-02E7DCB8840A}"/>
               </a:ext>
             </a:extLst>
           </p:cNvPr>
@@ -5095,7 +5999,7 @@
           <p:cNvPr id="6" name="Espaço Reservado para Rodapé 5">
             <a:extLst>
               <a:ext uri="{FF2B5EF4-FFF2-40B4-BE49-F238E27FC236}">
-                <a16:creationId xmlns:a16="http://schemas.microsoft.com/office/drawing/2014/main" id="{5548425D-2C21-4C56-BAD4-662978775C28}"/>
+                <a16:creationId xmlns:a16="http://schemas.microsoft.com/office/drawing/2014/main" xmlns="" id="{5548425D-2C21-4C56-BAD4-662978775C28}"/>
               </a:ext>
             </a:extLst>
           </p:cNvPr>
@@ -5120,7 +6024,7 @@
           <p:cNvPr id="7" name="Espaço Reservado para Número de Slide 6">
             <a:extLst>
               <a:ext uri="{FF2B5EF4-FFF2-40B4-BE49-F238E27FC236}">
-                <a16:creationId xmlns:a16="http://schemas.microsoft.com/office/drawing/2014/main" id="{C63E9726-E64C-42B2-AE8A-8C235A956B48}"/>
+                <a16:creationId xmlns:a16="http://schemas.microsoft.com/office/drawing/2014/main" xmlns="" id="{C63E9726-E64C-42B2-AE8A-8C235A956B48}"/>
               </a:ext>
             </a:extLst>
           </p:cNvPr>
@@ -5138,7 +6042,7 @@
           <a:p>
             <a:fld id="{1A7E88B7-70CE-4035-AE73-13FA6FB985D4}" type="slidenum">
               <a:rPr lang="pt-BR" smtClean="0"/>
-              <a:t>‹#›</a:t>
+              <a:t>‹nº›</a:t>
             </a:fld>
             <a:endParaRPr lang="pt-BR"/>
           </a:p>
@@ -5179,7 +6083,7 @@
           <p:cNvPr id="2" name="Título 1">
             <a:extLst>
               <a:ext uri="{FF2B5EF4-FFF2-40B4-BE49-F238E27FC236}">
-                <a16:creationId xmlns:a16="http://schemas.microsoft.com/office/drawing/2014/main" id="{11086A78-3E74-450C-96A6-CA8AC37AF772}"/>
+                <a16:creationId xmlns:a16="http://schemas.microsoft.com/office/drawing/2014/main" xmlns="" id="{11086A78-3E74-450C-96A6-CA8AC37AF772}"/>
               </a:ext>
             </a:extLst>
           </p:cNvPr>
@@ -5216,7 +6120,7 @@
           <p:cNvPr id="3" name="Espaço Reservado para Imagem 2">
             <a:extLst>
               <a:ext uri="{FF2B5EF4-FFF2-40B4-BE49-F238E27FC236}">
-                <a16:creationId xmlns:a16="http://schemas.microsoft.com/office/drawing/2014/main" id="{5F5B7312-975A-4DBC-9B2F-3652ADA006FD}"/>
+                <a16:creationId xmlns:a16="http://schemas.microsoft.com/office/drawing/2014/main" xmlns="" id="{5F5B7312-975A-4DBC-9B2F-3652ADA006FD}"/>
               </a:ext>
             </a:extLst>
           </p:cNvPr>
@@ -5283,7 +6187,7 @@
           <p:cNvPr id="4" name="Espaço Reservado para Texto 3">
             <a:extLst>
               <a:ext uri="{FF2B5EF4-FFF2-40B4-BE49-F238E27FC236}">
-                <a16:creationId xmlns:a16="http://schemas.microsoft.com/office/drawing/2014/main" id="{AAF805F5-1DFF-41C6-944C-7D79FE0D0963}"/>
+                <a16:creationId xmlns:a16="http://schemas.microsoft.com/office/drawing/2014/main" xmlns="" id="{AAF805F5-1DFF-41C6-944C-7D79FE0D0963}"/>
               </a:ext>
             </a:extLst>
           </p:cNvPr>
@@ -5354,7 +6258,7 @@
           <p:cNvPr id="5" name="Espaço Reservado para Data 4">
             <a:extLst>
               <a:ext uri="{FF2B5EF4-FFF2-40B4-BE49-F238E27FC236}">
-                <a16:creationId xmlns:a16="http://schemas.microsoft.com/office/drawing/2014/main" id="{02113D81-8665-4516-BD81-C6A1F254EECD}"/>
+                <a16:creationId xmlns:a16="http://schemas.microsoft.com/office/drawing/2014/main" xmlns="" id="{02113D81-8665-4516-BD81-C6A1F254EECD}"/>
               </a:ext>
             </a:extLst>
           </p:cNvPr>
@@ -5383,7 +6287,7 @@
           <p:cNvPr id="6" name="Espaço Reservado para Rodapé 5">
             <a:extLst>
               <a:ext uri="{FF2B5EF4-FFF2-40B4-BE49-F238E27FC236}">
-                <a16:creationId xmlns:a16="http://schemas.microsoft.com/office/drawing/2014/main" id="{2B00C88B-FF32-40AA-A187-727D96FD7862}"/>
+                <a16:creationId xmlns:a16="http://schemas.microsoft.com/office/drawing/2014/main" xmlns="" id="{2B00C88B-FF32-40AA-A187-727D96FD7862}"/>
               </a:ext>
             </a:extLst>
           </p:cNvPr>
@@ -5408,7 +6312,7 @@
           <p:cNvPr id="7" name="Espaço Reservado para Número de Slide 6">
             <a:extLst>
               <a:ext uri="{FF2B5EF4-FFF2-40B4-BE49-F238E27FC236}">
-                <a16:creationId xmlns:a16="http://schemas.microsoft.com/office/drawing/2014/main" id="{A04D1A2D-69F7-4B8F-A730-BC26DC340BA6}"/>
+                <a16:creationId xmlns:a16="http://schemas.microsoft.com/office/drawing/2014/main" xmlns="" id="{A04D1A2D-69F7-4B8F-A730-BC26DC340BA6}"/>
               </a:ext>
             </a:extLst>
           </p:cNvPr>
@@ -5426,7 +6330,7 @@
           <a:p>
             <a:fld id="{1A7E88B7-70CE-4035-AE73-13FA6FB985D4}" type="slidenum">
               <a:rPr lang="pt-BR" smtClean="0"/>
-              <a:t>‹#›</a:t>
+              <a:t>‹nº›</a:t>
             </a:fld>
             <a:endParaRPr lang="pt-BR"/>
           </a:p>
@@ -5472,7 +6376,7 @@
           <p:cNvPr id="2" name="Espaço Reservado para Título 1">
             <a:extLst>
               <a:ext uri="{FF2B5EF4-FFF2-40B4-BE49-F238E27FC236}">
-                <a16:creationId xmlns:a16="http://schemas.microsoft.com/office/drawing/2014/main" id="{E69A0273-1966-4A1B-9370-4C1CE5036371}"/>
+                <a16:creationId xmlns:a16="http://schemas.microsoft.com/office/drawing/2014/main" xmlns="" id="{E69A0273-1966-4A1B-9370-4C1CE5036371}"/>
               </a:ext>
             </a:extLst>
           </p:cNvPr>
@@ -5510,7 +6414,7 @@
           <p:cNvPr id="3" name="Espaço Reservado para Texto 2">
             <a:extLst>
               <a:ext uri="{FF2B5EF4-FFF2-40B4-BE49-F238E27FC236}">
-                <a16:creationId xmlns:a16="http://schemas.microsoft.com/office/drawing/2014/main" id="{3B9CF87A-0448-49A7-AB25-EBC1D56A40EF}"/>
+                <a16:creationId xmlns:a16="http://schemas.microsoft.com/office/drawing/2014/main" xmlns="" id="{3B9CF87A-0448-49A7-AB25-EBC1D56A40EF}"/>
               </a:ext>
             </a:extLst>
           </p:cNvPr>
@@ -5577,7 +6481,7 @@
           <p:cNvPr id="4" name="Espaço Reservado para Data 3">
             <a:extLst>
               <a:ext uri="{FF2B5EF4-FFF2-40B4-BE49-F238E27FC236}">
-                <a16:creationId xmlns:a16="http://schemas.microsoft.com/office/drawing/2014/main" id="{2EF7B1F2-BB5A-44D0-816D-16AD2C71430E}"/>
+                <a16:creationId xmlns:a16="http://schemas.microsoft.com/office/drawing/2014/main" xmlns="" id="{2EF7B1F2-BB5A-44D0-816D-16AD2C71430E}"/>
               </a:ext>
             </a:extLst>
           </p:cNvPr>
@@ -5624,7 +6528,7 @@
           <p:cNvPr id="5" name="Espaço Reservado para Rodapé 4">
             <a:extLst>
               <a:ext uri="{FF2B5EF4-FFF2-40B4-BE49-F238E27FC236}">
-                <a16:creationId xmlns:a16="http://schemas.microsoft.com/office/drawing/2014/main" id="{C703F94C-2CC8-4DAA-BC35-14FC3E841DCD}"/>
+                <a16:creationId xmlns:a16="http://schemas.microsoft.com/office/drawing/2014/main" xmlns="" id="{C703F94C-2CC8-4DAA-BC35-14FC3E841DCD}"/>
               </a:ext>
             </a:extLst>
           </p:cNvPr>
@@ -5667,7 +6571,7 @@
           <p:cNvPr id="6" name="Espaço Reservado para Número de Slide 5">
             <a:extLst>
               <a:ext uri="{FF2B5EF4-FFF2-40B4-BE49-F238E27FC236}">
-                <a16:creationId xmlns:a16="http://schemas.microsoft.com/office/drawing/2014/main" id="{64051336-7048-457A-8B61-D94291D71648}"/>
+                <a16:creationId xmlns:a16="http://schemas.microsoft.com/office/drawing/2014/main" xmlns="" id="{64051336-7048-457A-8B61-D94291D71648}"/>
               </a:ext>
             </a:extLst>
           </p:cNvPr>
@@ -5703,7 +6607,7 @@
           <a:p>
             <a:fld id="{1A7E88B7-70CE-4035-AE73-13FA6FB985D4}" type="slidenum">
               <a:rPr lang="pt-BR" smtClean="0"/>
-              <a:t>‹#›</a:t>
+              <a:t>‹nº›</a:t>
             </a:fld>
             <a:endParaRPr lang="pt-BR"/>
           </a:p>
@@ -6035,7 +6939,7 @@
           <p:cNvPr id="4" name="CaixaDeTexto 3">
             <a:extLst>
               <a:ext uri="{FF2B5EF4-FFF2-40B4-BE49-F238E27FC236}">
-                <a16:creationId xmlns:a16="http://schemas.microsoft.com/office/drawing/2014/main" id="{430EB894-B7D4-434C-9D1A-A14094D9BEEC}"/>
+                <a16:creationId xmlns:a16="http://schemas.microsoft.com/office/drawing/2014/main" xmlns="" id="{430EB894-B7D4-434C-9D1A-A14094D9BEEC}"/>
               </a:ext>
             </a:extLst>
           </p:cNvPr>
@@ -6079,7 +6983,7 @@
           <p:cNvPr id="1026" name="Picture 2" descr="Logo">
             <a:extLst>
               <a:ext uri="{FF2B5EF4-FFF2-40B4-BE49-F238E27FC236}">
-                <a16:creationId xmlns:a16="http://schemas.microsoft.com/office/drawing/2014/main" id="{3F2642E0-4F6A-4196-8F58-E77D36E9A33F}"/>
+                <a16:creationId xmlns:a16="http://schemas.microsoft.com/office/drawing/2014/main" xmlns="" id="{3F2642E0-4F6A-4196-8F58-E77D36E9A33F}"/>
               </a:ext>
             </a:extLst>
           </p:cNvPr>
@@ -6124,7 +7028,7 @@
           <p:cNvPr id="5122" name="Picture 2" descr="Image result for machine learning">
             <a:extLst>
               <a:ext uri="{FF2B5EF4-FFF2-40B4-BE49-F238E27FC236}">
-                <a16:creationId xmlns:a16="http://schemas.microsoft.com/office/drawing/2014/main" id="{810CE0A2-4102-44A6-A370-175E7896CDCB}"/>
+                <a16:creationId xmlns:a16="http://schemas.microsoft.com/office/drawing/2014/main" xmlns="" id="{810CE0A2-4102-44A6-A370-175E7896CDCB}"/>
               </a:ext>
             </a:extLst>
           </p:cNvPr>
@@ -6169,7 +7073,7 @@
           <p:cNvPr id="7" name="Título 1">
             <a:extLst>
               <a:ext uri="{FF2B5EF4-FFF2-40B4-BE49-F238E27FC236}">
-                <a16:creationId xmlns:a16="http://schemas.microsoft.com/office/drawing/2014/main" id="{32666AC8-2E17-4DB4-B0F5-60C640CCFD2E}"/>
+                <a16:creationId xmlns:a16="http://schemas.microsoft.com/office/drawing/2014/main" xmlns="" id="{32666AC8-2E17-4DB4-B0F5-60C640CCFD2E}"/>
               </a:ext>
             </a:extLst>
           </p:cNvPr>
@@ -6195,6 +7099,10 @@
             <a:r>
               <a:rPr lang="pt-BR" sz="6600" dirty="0"/>
               <a:t>C24 – Inteligência Artificial:</a:t>
+            </a:r>
+            <a:r>
+              <a:rPr lang="pt-BR" sz="7200" dirty="0"/>
+              <a:t/>
             </a:r>
             <a:br>
               <a:rPr lang="pt-BR" sz="7200" dirty="0"/>
@@ -6228,7 +7136,7 @@
         <p:cNvPr id="1" name="">
           <a:extLst>
             <a:ext uri="{FF2B5EF4-FFF2-40B4-BE49-F238E27FC236}">
-              <a16:creationId xmlns:a16="http://schemas.microsoft.com/office/drawing/2014/main" id="{DDB2BBDA-DAF3-B7AC-FB99-7C5B9285F912}"/>
+              <a16:creationId xmlns:a16="http://schemas.microsoft.com/office/drawing/2014/main" xmlns="" id="{DDB2BBDA-DAF3-B7AC-FB99-7C5B9285F912}"/>
             </a:ext>
           </a:extLst>
         </p:cNvPr>
@@ -6248,7 +7156,7 @@
           <p:cNvPr id="2" name="Title 1">
             <a:extLst>
               <a:ext uri="{FF2B5EF4-FFF2-40B4-BE49-F238E27FC236}">
-                <a16:creationId xmlns:a16="http://schemas.microsoft.com/office/drawing/2014/main" id="{A98D36C9-8653-8E41-11D8-585B6AC0D03D}"/>
+                <a16:creationId xmlns:a16="http://schemas.microsoft.com/office/drawing/2014/main" xmlns="" id="{A98D36C9-8653-8E41-11D8-585B6AC0D03D}"/>
               </a:ext>
             </a:extLst>
           </p:cNvPr>
@@ -6288,7 +7196,7 @@
           <p:cNvPr id="3" name="Content Placeholder 2">
             <a:extLst>
               <a:ext uri="{FF2B5EF4-FFF2-40B4-BE49-F238E27FC236}">
-                <a16:creationId xmlns:a16="http://schemas.microsoft.com/office/drawing/2014/main" id="{981046E0-93D4-BF9F-C552-72A01838A8A3}"/>
+                <a16:creationId xmlns:a16="http://schemas.microsoft.com/office/drawing/2014/main" xmlns="" id="{981046E0-93D4-BF9F-C552-72A01838A8A3}"/>
               </a:ext>
             </a:extLst>
           </p:cNvPr>
@@ -6323,7 +7231,7 @@
           <p:cNvPr id="61" name="Picture 60">
             <a:extLst>
               <a:ext uri="{FF2B5EF4-FFF2-40B4-BE49-F238E27FC236}">
-                <a16:creationId xmlns:a16="http://schemas.microsoft.com/office/drawing/2014/main" id="{22F895FA-1424-E50C-97F4-4F0BE0413C2F}"/>
+                <a16:creationId xmlns:a16="http://schemas.microsoft.com/office/drawing/2014/main" xmlns="" id="{22F895FA-1424-E50C-97F4-4F0BE0413C2F}"/>
               </a:ext>
             </a:extLst>
           </p:cNvPr>
@@ -6389,7 +7297,7 @@
           <p:cNvPr id="2" name="Title 1">
             <a:extLst>
               <a:ext uri="{FF2B5EF4-FFF2-40B4-BE49-F238E27FC236}">
-                <a16:creationId xmlns:a16="http://schemas.microsoft.com/office/drawing/2014/main" id="{6212CAF6-B58D-36CC-E75E-B9EBC01B5494}"/>
+                <a16:creationId xmlns:a16="http://schemas.microsoft.com/office/drawing/2014/main" xmlns="" id="{6212CAF6-B58D-36CC-E75E-B9EBC01B5494}"/>
               </a:ext>
             </a:extLst>
           </p:cNvPr>
@@ -6418,7 +7326,7 @@
           <p:cNvPr id="3" name="Content Placeholder 2">
             <a:extLst>
               <a:ext uri="{FF2B5EF4-FFF2-40B4-BE49-F238E27FC236}">
-                <a16:creationId xmlns:a16="http://schemas.microsoft.com/office/drawing/2014/main" id="{5516FA30-D5F7-2E83-352E-3527EE589DED}"/>
+                <a16:creationId xmlns:a16="http://schemas.microsoft.com/office/drawing/2014/main" xmlns="" id="{5516FA30-D5F7-2E83-352E-3527EE589DED}"/>
               </a:ext>
             </a:extLst>
           </p:cNvPr>
@@ -6689,7 +7597,7 @@
           <p:cNvPr id="2" name="Title 1">
             <a:extLst>
               <a:ext uri="{FF2B5EF4-FFF2-40B4-BE49-F238E27FC236}">
-                <a16:creationId xmlns:a16="http://schemas.microsoft.com/office/drawing/2014/main" id="{8C8E92F5-0D3A-0F43-282A-3A7C0603923D}"/>
+                <a16:creationId xmlns:a16="http://schemas.microsoft.com/office/drawing/2014/main" xmlns="" id="{8C8E92F5-0D3A-0F43-282A-3A7C0603923D}"/>
               </a:ext>
             </a:extLst>
           </p:cNvPr>
@@ -6730,7 +7638,7 @@
           <p:cNvPr id="3" name="Content Placeholder 2">
             <a:extLst>
               <a:ext uri="{FF2B5EF4-FFF2-40B4-BE49-F238E27FC236}">
-                <a16:creationId xmlns:a16="http://schemas.microsoft.com/office/drawing/2014/main" id="{9AB6A6C9-67EC-449F-0095-BDC7619374B2}"/>
+                <a16:creationId xmlns:a16="http://schemas.microsoft.com/office/drawing/2014/main" xmlns="" id="{9AB6A6C9-67EC-449F-0095-BDC7619374B2}"/>
               </a:ext>
             </a:extLst>
           </p:cNvPr>
@@ -6883,7 +7791,7 @@
         <p:cNvPr id="1" name="">
           <a:extLst>
             <a:ext uri="{FF2B5EF4-FFF2-40B4-BE49-F238E27FC236}">
-              <a16:creationId xmlns:a16="http://schemas.microsoft.com/office/drawing/2014/main" id="{74614044-1D84-E441-8AC3-FB3FD9221416}"/>
+              <a16:creationId xmlns:a16="http://schemas.microsoft.com/office/drawing/2014/main" xmlns="" id="{74614044-1D84-E441-8AC3-FB3FD9221416}"/>
             </a:ext>
           </a:extLst>
         </p:cNvPr>
@@ -6903,7 +7811,7 @@
           <p:cNvPr id="2" name="Title 1">
             <a:extLst>
               <a:ext uri="{FF2B5EF4-FFF2-40B4-BE49-F238E27FC236}">
-                <a16:creationId xmlns:a16="http://schemas.microsoft.com/office/drawing/2014/main" id="{C6E93585-9339-7002-7C62-27331F24C140}"/>
+                <a16:creationId xmlns:a16="http://schemas.microsoft.com/office/drawing/2014/main" xmlns="" id="{C6E93585-9339-7002-7C62-27331F24C140}"/>
               </a:ext>
             </a:extLst>
           </p:cNvPr>
@@ -6926,14 +7834,14 @@
           </a:p>
         </p:txBody>
       </p:sp>
-      <mc:AlternateContent xmlns:mc="http://schemas.openxmlformats.org/markup-compatibility/2006">
-        <mc:Choice xmlns:a14="http://schemas.microsoft.com/office/drawing/2010/main" Requires="a14">
+      <mc:AlternateContent xmlns:mc="http://schemas.openxmlformats.org/markup-compatibility/2006" xmlns:a14="http://schemas.microsoft.com/office/drawing/2010/main">
+        <mc:Choice Requires="a14">
           <p:sp>
             <p:nvSpPr>
               <p:cNvPr id="3" name="Content Placeholder 2">
                 <a:extLst>
                   <a:ext uri="{FF2B5EF4-FFF2-40B4-BE49-F238E27FC236}">
-                    <a16:creationId xmlns:a16="http://schemas.microsoft.com/office/drawing/2014/main" id="{A1483011-729D-F9ED-5FD6-580E6A4020EF}"/>
+                    <a16:creationId xmlns:a16="http://schemas.microsoft.com/office/drawing/2014/main" xmlns="" id="{A1483011-729D-F9ED-5FD6-580E6A4020EF}"/>
                   </a:ext>
                 </a:extLst>
               </p:cNvPr>
@@ -7124,7 +8032,7 @@
             </p:txBody>
           </p:sp>
         </mc:Choice>
-        <mc:Fallback>
+        <mc:Fallback xmlns="">
           <p:sp>
             <p:nvSpPr>
               <p:cNvPr id="3" name="Content Placeholder 2">
@@ -7173,7 +8081,7 @@
           <p:cNvPr id="4" name="Table 3">
             <a:extLst>
               <a:ext uri="{FF2B5EF4-FFF2-40B4-BE49-F238E27FC236}">
-                <a16:creationId xmlns:a16="http://schemas.microsoft.com/office/drawing/2014/main" id="{A14A3494-F972-A92A-0152-CCA1FC8882F5}"/>
+                <a16:creationId xmlns:a16="http://schemas.microsoft.com/office/drawing/2014/main" xmlns="" id="{A14A3494-F972-A92A-0152-CCA1FC8882F5}"/>
               </a:ext>
             </a:extLst>
           </p:cNvPr>
@@ -7202,28 +8110,28 @@
                 <a:gridCol w="439057">
                   <a:extLst>
                     <a:ext uri="{9D8B030D-6E8A-4147-A177-3AD203B41FA5}">
-                      <a16:colId xmlns:a16="http://schemas.microsoft.com/office/drawing/2014/main" val="4237906138"/>
+                      <a16:colId xmlns:a16="http://schemas.microsoft.com/office/drawing/2014/main" xmlns="" val="4237906138"/>
                     </a:ext>
                   </a:extLst>
                 </a:gridCol>
                 <a:gridCol w="439057">
                   <a:extLst>
                     <a:ext uri="{9D8B030D-6E8A-4147-A177-3AD203B41FA5}">
-                      <a16:colId xmlns:a16="http://schemas.microsoft.com/office/drawing/2014/main" val="3865218800"/>
+                      <a16:colId xmlns:a16="http://schemas.microsoft.com/office/drawing/2014/main" xmlns="" val="3865218800"/>
                     </a:ext>
                   </a:extLst>
                 </a:gridCol>
                 <a:gridCol w="439057">
                   <a:extLst>
                     <a:ext uri="{9D8B030D-6E8A-4147-A177-3AD203B41FA5}">
-                      <a16:colId xmlns:a16="http://schemas.microsoft.com/office/drawing/2014/main" val="2205689395"/>
+                      <a16:colId xmlns:a16="http://schemas.microsoft.com/office/drawing/2014/main" xmlns="" val="2205689395"/>
                     </a:ext>
                   </a:extLst>
                 </a:gridCol>
                 <a:gridCol w="439057">
                   <a:extLst>
                     <a:ext uri="{9D8B030D-6E8A-4147-A177-3AD203B41FA5}">
-                      <a16:colId xmlns:a16="http://schemas.microsoft.com/office/drawing/2014/main" val="3536600299"/>
+                      <a16:colId xmlns:a16="http://schemas.microsoft.com/office/drawing/2014/main" xmlns="" val="3536600299"/>
                     </a:ext>
                   </a:extLst>
                 </a:gridCol>
@@ -7467,7 +8375,7 @@
                 </a:tc>
                 <a:extLst>
                   <a:ext uri="{0D108BD9-81ED-4DB2-BD59-A6C34878D82A}">
-                    <a16:rowId xmlns:a16="http://schemas.microsoft.com/office/drawing/2014/main" val="654488680"/>
+                    <a16:rowId xmlns:a16="http://schemas.microsoft.com/office/drawing/2014/main" xmlns="" val="654488680"/>
                   </a:ext>
                 </a:extLst>
               </a:tr>
@@ -7710,7 +8618,7 @@
                 </a:tc>
                 <a:extLst>
                   <a:ext uri="{0D108BD9-81ED-4DB2-BD59-A6C34878D82A}">
-                    <a16:rowId xmlns:a16="http://schemas.microsoft.com/office/drawing/2014/main" val="652569694"/>
+                    <a16:rowId xmlns:a16="http://schemas.microsoft.com/office/drawing/2014/main" xmlns="" val="652569694"/>
                   </a:ext>
                 </a:extLst>
               </a:tr>
@@ -7953,7 +8861,7 @@
                 </a:tc>
                 <a:extLst>
                   <a:ext uri="{0D108BD9-81ED-4DB2-BD59-A6C34878D82A}">
-                    <a16:rowId xmlns:a16="http://schemas.microsoft.com/office/drawing/2014/main" val="200740461"/>
+                    <a16:rowId xmlns:a16="http://schemas.microsoft.com/office/drawing/2014/main" xmlns="" val="200740461"/>
                   </a:ext>
                 </a:extLst>
               </a:tr>
@@ -7966,7 +8874,7 @@
           <p:cNvPr id="5" name="TextBox 4">
             <a:extLst>
               <a:ext uri="{FF2B5EF4-FFF2-40B4-BE49-F238E27FC236}">
-                <a16:creationId xmlns:a16="http://schemas.microsoft.com/office/drawing/2014/main" id="{C8ED1C15-0942-089C-7805-CB510EC72FB1}"/>
+                <a16:creationId xmlns:a16="http://schemas.microsoft.com/office/drawing/2014/main" xmlns="" id="{C8ED1C15-0942-089C-7805-CB510EC72FB1}"/>
               </a:ext>
             </a:extLst>
           </p:cNvPr>
@@ -8002,7 +8910,7 @@
           <p:cNvPr id="6" name="TextBox 5">
             <a:extLst>
               <a:ext uri="{FF2B5EF4-FFF2-40B4-BE49-F238E27FC236}">
-                <a16:creationId xmlns:a16="http://schemas.microsoft.com/office/drawing/2014/main" id="{35E39535-416D-18D0-A4E0-B8FD0EF37FF9}"/>
+                <a16:creationId xmlns:a16="http://schemas.microsoft.com/office/drawing/2014/main" xmlns="" id="{35E39535-416D-18D0-A4E0-B8FD0EF37FF9}"/>
               </a:ext>
             </a:extLst>
           </p:cNvPr>
@@ -8054,7 +8962,7 @@
         <p:cNvPr id="1" name="">
           <a:extLst>
             <a:ext uri="{FF2B5EF4-FFF2-40B4-BE49-F238E27FC236}">
-              <a16:creationId xmlns:a16="http://schemas.microsoft.com/office/drawing/2014/main" id="{E22219F2-045D-7C64-9A87-54D2232BDD3E}"/>
+              <a16:creationId xmlns:a16="http://schemas.microsoft.com/office/drawing/2014/main" xmlns="" id="{E22219F2-045D-7C64-9A87-54D2232BDD3E}"/>
             </a:ext>
           </a:extLst>
         </p:cNvPr>
@@ -8074,7 +8982,7 @@
           <p:cNvPr id="2" name="Title 1">
             <a:extLst>
               <a:ext uri="{FF2B5EF4-FFF2-40B4-BE49-F238E27FC236}">
-                <a16:creationId xmlns:a16="http://schemas.microsoft.com/office/drawing/2014/main" id="{C7EA5E16-B19C-BA31-7BEC-009E02E41E13}"/>
+                <a16:creationId xmlns:a16="http://schemas.microsoft.com/office/drawing/2014/main" xmlns="" id="{C7EA5E16-B19C-BA31-7BEC-009E02E41E13}"/>
               </a:ext>
             </a:extLst>
           </p:cNvPr>
@@ -8102,7 +9010,7 @@
           <p:cNvPr id="3" name="Content Placeholder 2">
             <a:extLst>
               <a:ext uri="{FF2B5EF4-FFF2-40B4-BE49-F238E27FC236}">
-                <a16:creationId xmlns:a16="http://schemas.microsoft.com/office/drawing/2014/main" id="{2D34463B-65B5-66E6-8A30-437FFFA8DEFA}"/>
+                <a16:creationId xmlns:a16="http://schemas.microsoft.com/office/drawing/2014/main" xmlns="" id="{2D34463B-65B5-66E6-8A30-437FFFA8DEFA}"/>
               </a:ext>
             </a:extLst>
           </p:cNvPr>
@@ -8148,7 +9056,7 @@
           <p:cNvPr id="5" name="Picture 4">
             <a:extLst>
               <a:ext uri="{FF2B5EF4-FFF2-40B4-BE49-F238E27FC236}">
-                <a16:creationId xmlns:a16="http://schemas.microsoft.com/office/drawing/2014/main" id="{22635AC4-CE1D-B8AF-A040-2F87EF1759CD}"/>
+                <a16:creationId xmlns:a16="http://schemas.microsoft.com/office/drawing/2014/main" xmlns="" id="{22635AC4-CE1D-B8AF-A040-2F87EF1759CD}"/>
               </a:ext>
             </a:extLst>
           </p:cNvPr>
@@ -8158,7 +9066,7 @@
           <p:nvPr/>
         </p:nvPicPr>
         <p:blipFill>
-          <a:blip r:embed="rId3">
+          <a:blip r:embed="rId3" cstate="print">
             <a:extLst>
               <a:ext uri="{28A0092B-C50C-407E-A947-70E740481C1C}">
                 <a14:useLocalDpi xmlns:a14="http://schemas.microsoft.com/office/drawing/2010/main" val="0"/>
@@ -8214,7 +9122,7 @@
           <p:cNvPr id="2" name="Title 1">
             <a:extLst>
               <a:ext uri="{FF2B5EF4-FFF2-40B4-BE49-F238E27FC236}">
-                <a16:creationId xmlns:a16="http://schemas.microsoft.com/office/drawing/2014/main" id="{7091E349-E10B-155D-AA4C-5C644F1CA204}"/>
+                <a16:creationId xmlns:a16="http://schemas.microsoft.com/office/drawing/2014/main" xmlns="" id="{7091E349-E10B-155D-AA4C-5C644F1CA204}"/>
               </a:ext>
             </a:extLst>
           </p:cNvPr>
@@ -8257,7 +9165,7 @@
               <p:cNvPr id="5" name="TextBox 4">
                 <a:extLst>
                   <a:ext uri="{FF2B5EF4-FFF2-40B4-BE49-F238E27FC236}">
-                    <a16:creationId xmlns:a16="http://schemas.microsoft.com/office/drawing/2014/main" id="{9A332D99-C136-4CA9-0B03-FA3FA5195ED6}"/>
+                    <a16:creationId xmlns:a16="http://schemas.microsoft.com/office/drawing/2014/main" xmlns="" id="{9A332D99-C136-4CA9-0B03-FA3FA5195ED6}"/>
                   </a:ext>
                 </a:extLst>
               </p:cNvPr>
@@ -8301,7 +9209,11 @@
                 </a:pPr>
                 <a:r>
                   <a:rPr lang="pt-BR" sz="2800" dirty="0"/>
-                  <a:t> Observe o estado inicial (atual) </a:t>
+                  <a:t> Observe o estado </a:t>
+                </a:r>
+                <a:r>
+                  <a:rPr lang="pt-BR" sz="2800" dirty="0" smtClean="0"/>
+                  <a:t>atual </a:t>
                 </a:r>
                 <a14:m>
                   <m:oMath xmlns:m="http://schemas.openxmlformats.org/officeDocument/2006/math">
@@ -8578,7 +9490,7 @@
               <p:cNvPr id="5" name="TextBox 4">
                 <a:extLst>
                   <a:ext uri="{FF2B5EF4-FFF2-40B4-BE49-F238E27FC236}">
-                    <a16:creationId xmlns:a16="http://schemas.microsoft.com/office/drawing/2014/main" id="{9A332D99-C136-4CA9-0B03-FA3FA5195ED6}"/>
+                    <a16:creationId xmlns:a16="http://schemas.microsoft.com/office/drawing/2014/main" xmlns:a14="http://schemas.microsoft.com/office/drawing/2010/main" xmlns="" id="{9A332D99-C136-4CA9-0B03-FA3FA5195ED6}"/>
                   </a:ext>
                 </a:extLst>
               </p:cNvPr>
@@ -8595,7 +9507,7 @@
               <a:prstGeom prst="rect">
                 <a:avLst/>
               </a:prstGeom>
-              <a:blipFill>
+              <a:blipFill rotWithShape="0">
                 <a:blip r:embed="rId3"/>
                 <a:stretch>
                   <a:fillRect l="-1218" t="-1957" b="-4697"/>
@@ -8612,7 +9524,7 @@
               <a:lstStyle/>
               <a:p>
                 <a:r>
-                  <a:rPr lang="en-US">
+                  <a:rPr lang="pt-BR">
                     <a:noFill/>
                   </a:rPr>
                   <a:t> </a:t>
@@ -8627,7 +9539,7 @@
           <p:cNvPr id="9" name="TextBox 8">
             <a:extLst>
               <a:ext uri="{FF2B5EF4-FFF2-40B4-BE49-F238E27FC236}">
-                <a16:creationId xmlns:a16="http://schemas.microsoft.com/office/drawing/2014/main" id="{5C7A4183-CC79-97FF-3245-59A711D4BDF1}"/>
+                <a16:creationId xmlns:a16="http://schemas.microsoft.com/office/drawing/2014/main" xmlns="" id="{5C7A4183-CC79-97FF-3245-59A711D4BDF1}"/>
               </a:ext>
             </a:extLst>
           </p:cNvPr>
@@ -8694,7 +9606,7 @@
           <p:cNvPr id="2" name="Title 1">
             <a:extLst>
               <a:ext uri="{FF2B5EF4-FFF2-40B4-BE49-F238E27FC236}">
-                <a16:creationId xmlns:a16="http://schemas.microsoft.com/office/drawing/2014/main" id="{8B40FE1F-C1FB-195D-22B9-96044B5DA2CF}"/>
+                <a16:creationId xmlns:a16="http://schemas.microsoft.com/office/drawing/2014/main" xmlns="" id="{8B40FE1F-C1FB-195D-22B9-96044B5DA2CF}"/>
               </a:ext>
             </a:extLst>
           </p:cNvPr>
@@ -8723,7 +9635,7 @@
           <p:cNvPr id="3" name="Content Placeholder 2">
             <a:extLst>
               <a:ext uri="{FF2B5EF4-FFF2-40B4-BE49-F238E27FC236}">
-                <a16:creationId xmlns:a16="http://schemas.microsoft.com/office/drawing/2014/main" id="{EAC332DA-1674-3813-EFF7-0720AB3234B3}"/>
+                <a16:creationId xmlns:a16="http://schemas.microsoft.com/office/drawing/2014/main" xmlns="" id="{EAC332DA-1674-3813-EFF7-0720AB3234B3}"/>
               </a:ext>
             </a:extLst>
           </p:cNvPr>
@@ -8898,7 +9810,7 @@
         <p:cNvPr id="1" name="">
           <a:extLst>
             <a:ext uri="{FF2B5EF4-FFF2-40B4-BE49-F238E27FC236}">
-              <a16:creationId xmlns:a16="http://schemas.microsoft.com/office/drawing/2014/main" id="{2F8A4587-A984-EA93-857E-8D1DC320AFE6}"/>
+              <a16:creationId xmlns:a16="http://schemas.microsoft.com/office/drawing/2014/main" xmlns="" id="{2F8A4587-A984-EA93-857E-8D1DC320AFE6}"/>
             </a:ext>
           </a:extLst>
         </p:cNvPr>
@@ -8918,7 +9830,7 @@
           <p:cNvPr id="2" name="Title 1">
             <a:extLst>
               <a:ext uri="{FF2B5EF4-FFF2-40B4-BE49-F238E27FC236}">
-                <a16:creationId xmlns:a16="http://schemas.microsoft.com/office/drawing/2014/main" id="{0D07A575-E745-E7EC-954B-2D561DB0ADE2}"/>
+                <a16:creationId xmlns:a16="http://schemas.microsoft.com/office/drawing/2014/main" xmlns="" id="{0D07A575-E745-E7EC-954B-2D561DB0ADE2}"/>
               </a:ext>
             </a:extLst>
           </p:cNvPr>
@@ -8947,7 +9859,7 @@
           <p:cNvPr id="3" name="Content Placeholder 2">
             <a:extLst>
               <a:ext uri="{FF2B5EF4-FFF2-40B4-BE49-F238E27FC236}">
-                <a16:creationId xmlns:a16="http://schemas.microsoft.com/office/drawing/2014/main" id="{8FDE82B6-892B-61F8-DE72-D88190E83F1C}"/>
+                <a16:creationId xmlns:a16="http://schemas.microsoft.com/office/drawing/2014/main" xmlns="" id="{8FDE82B6-892B-61F8-DE72-D88190E83F1C}"/>
               </a:ext>
             </a:extLst>
           </p:cNvPr>
@@ -9062,14 +9974,14 @@
           <a:chExt cx="0" cy="0"/>
         </a:xfrm>
       </p:grpSpPr>
-      <mc:AlternateContent xmlns:mc="http://schemas.openxmlformats.org/markup-compatibility/2006">
-        <mc:Choice xmlns:a14="http://schemas.microsoft.com/office/drawing/2010/main" Requires="a14">
+      <mc:AlternateContent xmlns:mc="http://schemas.openxmlformats.org/markup-compatibility/2006" xmlns:a14="http://schemas.microsoft.com/office/drawing/2010/main">
+        <mc:Choice Requires="a14">
           <p:sp>
             <p:nvSpPr>
               <p:cNvPr id="2" name="Title 1">
                 <a:extLst>
                   <a:ext uri="{FF2B5EF4-FFF2-40B4-BE49-F238E27FC236}">
-                    <a16:creationId xmlns:a16="http://schemas.microsoft.com/office/drawing/2014/main" id="{7BB2B1C3-607B-4033-88D5-A1CF66C9D6F3}"/>
+                    <a16:creationId xmlns:a16="http://schemas.microsoft.com/office/drawing/2014/main" xmlns="" id="{7BB2B1C3-607B-4033-88D5-A1CF66C9D6F3}"/>
                   </a:ext>
                 </a:extLst>
               </p:cNvPr>
@@ -9117,7 +10029,7 @@
             </p:txBody>
           </p:sp>
         </mc:Choice>
-        <mc:Fallback>
+        <mc:Fallback xmlns="">
           <p:sp>
             <p:nvSpPr>
               <p:cNvPr id="2" name="Title 1">
@@ -9157,14 +10069,14 @@
           </p:sp>
         </mc:Fallback>
       </mc:AlternateContent>
-      <mc:AlternateContent xmlns:mc="http://schemas.openxmlformats.org/markup-compatibility/2006">
-        <mc:Choice xmlns:a14="http://schemas.microsoft.com/office/drawing/2010/main" Requires="a14">
+      <mc:AlternateContent xmlns:mc="http://schemas.openxmlformats.org/markup-compatibility/2006" xmlns:a14="http://schemas.microsoft.com/office/drawing/2010/main">
+        <mc:Choice Requires="a14">
           <p:sp>
             <p:nvSpPr>
               <p:cNvPr id="3" name="Content Placeholder 2">
                 <a:extLst>
                   <a:ext uri="{FF2B5EF4-FFF2-40B4-BE49-F238E27FC236}">
-                    <a16:creationId xmlns:a16="http://schemas.microsoft.com/office/drawing/2014/main" id="{5D80C21A-F4FC-B1BE-7D36-8D93DC02776E}"/>
+                    <a16:creationId xmlns:a16="http://schemas.microsoft.com/office/drawing/2014/main" xmlns="" id="{5D80C21A-F4FC-B1BE-7D36-8D93DC02776E}"/>
                   </a:ext>
                 </a:extLst>
               </p:cNvPr>
@@ -9394,7 +10306,7 @@
             </p:txBody>
           </p:sp>
         </mc:Choice>
-        <mc:Fallback>
+        <mc:Fallback xmlns="">
           <p:sp>
             <p:nvSpPr>
               <p:cNvPr id="3" name="Content Placeholder 2">
@@ -9473,7 +10385,7 @@
           <p:cNvPr id="3" name="Content Placeholder 2">
             <a:extLst>
               <a:ext uri="{FF2B5EF4-FFF2-40B4-BE49-F238E27FC236}">
-                <a16:creationId xmlns:a16="http://schemas.microsoft.com/office/drawing/2014/main" id="{407A6B7C-8AE2-0626-7031-C9A0D36E6CE3}"/>
+                <a16:creationId xmlns:a16="http://schemas.microsoft.com/office/drawing/2014/main" xmlns="" id="{407A6B7C-8AE2-0626-7031-C9A0D36E6CE3}"/>
               </a:ext>
             </a:extLst>
           </p:cNvPr>
@@ -9527,7 +10439,7 @@
           <p:cNvPr id="3074" name="Picture 2" descr="Reinforcement Learning In Real Life. Simple Explanation With Funny Cats">
             <a:extLst>
               <a:ext uri="{FF2B5EF4-FFF2-40B4-BE49-F238E27FC236}">
-                <a16:creationId xmlns:a16="http://schemas.microsoft.com/office/drawing/2014/main" id="{BF6473FC-0F5F-F021-4950-C2C526AE66A2}"/>
+                <a16:creationId xmlns:a16="http://schemas.microsoft.com/office/drawing/2014/main" xmlns="" id="{BF6473FC-0F5F-F021-4950-C2C526AE66A2}"/>
               </a:ext>
             </a:extLst>
           </p:cNvPr>
@@ -9604,7 +10516,7 @@
           <p:cNvPr id="3" name="Content Placeholder 2">
             <a:extLst>
               <a:ext uri="{FF2B5EF4-FFF2-40B4-BE49-F238E27FC236}">
-                <a16:creationId xmlns:a16="http://schemas.microsoft.com/office/drawing/2014/main" id="{59B6A74E-8855-B416-1D2B-EC3735DC0079}"/>
+                <a16:creationId xmlns:a16="http://schemas.microsoft.com/office/drawing/2014/main" xmlns="" id="{59B6A74E-8855-B416-1D2B-EC3735DC0079}"/>
               </a:ext>
             </a:extLst>
           </p:cNvPr>
@@ -9680,7 +10592,7 @@
           <p:cNvPr id="1026" name="Picture 2" descr="Reinforcement Learning">
             <a:extLst>
               <a:ext uri="{FF2B5EF4-FFF2-40B4-BE49-F238E27FC236}">
-                <a16:creationId xmlns:a16="http://schemas.microsoft.com/office/drawing/2014/main" id="{5526EDB3-366A-5FFB-4A2D-BC3494C1E889}"/>
+                <a16:creationId xmlns:a16="http://schemas.microsoft.com/office/drawing/2014/main" xmlns="" id="{5526EDB3-366A-5FFB-4A2D-BC3494C1E889}"/>
               </a:ext>
             </a:extLst>
           </p:cNvPr>
@@ -9757,7 +10669,7 @@
           <p:cNvPr id="2" name="Title 1">
             <a:extLst>
               <a:ext uri="{FF2B5EF4-FFF2-40B4-BE49-F238E27FC236}">
-                <a16:creationId xmlns:a16="http://schemas.microsoft.com/office/drawing/2014/main" id="{93D78643-03C9-A92E-0919-E944BBC48702}"/>
+                <a16:creationId xmlns:a16="http://schemas.microsoft.com/office/drawing/2014/main" xmlns="" id="{93D78643-03C9-A92E-0919-E944BBC48702}"/>
               </a:ext>
             </a:extLst>
           </p:cNvPr>
@@ -9804,7 +10716,7 @@
               <p:cNvPr id="3" name="Content Placeholder 2">
                 <a:extLst>
                   <a:ext uri="{FF2B5EF4-FFF2-40B4-BE49-F238E27FC236}">
-                    <a16:creationId xmlns:a16="http://schemas.microsoft.com/office/drawing/2014/main" id="{9E56A20D-5587-73F0-6A77-76736D8C972A}"/>
+                    <a16:creationId xmlns:a16="http://schemas.microsoft.com/office/drawing/2014/main" xmlns="" id="{9E56A20D-5587-73F0-6A77-76736D8C972A}"/>
                   </a:ext>
                 </a:extLst>
               </p:cNvPr>
@@ -9817,18 +10729,18 @@
             </p:nvSpPr>
             <p:spPr>
               <a:xfrm>
-                <a:off x="838199" y="1825624"/>
+                <a:off x="838199" y="1825625"/>
                 <a:ext cx="11353801" cy="5032375"/>
               </a:xfrm>
             </p:spPr>
             <p:txBody>
               <a:bodyPr>
-                <a:normAutofit lnSpcReduction="10000"/>
+                <a:normAutofit fontScale="92500" lnSpcReduction="10000"/>
               </a:bodyPr>
               <a:lstStyle/>
               <a:p>
                 <a:r>
-                  <a:rPr lang="pt-BR" dirty="0"/>
+                  <a:rPr lang="pt-BR" dirty="0" smtClean="0"/>
                   <a:t>A tabela-Q é atualizada usando-se a equação derivada por Richard </a:t>
                 </a:r>
                 <a:r>
@@ -10185,25 +11097,63 @@
                           </m:d>
                         </m:e>
                       </m:d>
-                      <m:r>
-                        <a:rPr lang="pt-BR" b="0" i="0" smtClean="0">
-                          <a:latin typeface="Cambria Math" panose="02040503050406030204" pitchFamily="18" charset="0"/>
-                          <a:ea typeface="Cambria Math" panose="02040503050406030204" pitchFamily="18" charset="0"/>
-                        </a:rPr>
-                        <m:t>,</m:t>
-                      </m:r>
                     </m:oMath>
                   </m:oMathPara>
                 </a14:m>
-                <a:endParaRPr lang="en-US" dirty="0"/>
+                <a:endParaRPr lang="en-US" dirty="0" smtClean="0"/>
               </a:p>
               <a:p>
-                <a:pPr marL="0" indent="0">
-                  <a:buNone/>
-                </a:pPr>
-                <a:r>
-                  <a:rPr lang="en-US" dirty="0" err="1"/>
-                  <a:t>onde</a:t>
+                <a14:m>
+                  <m:oMath xmlns:m="http://schemas.openxmlformats.org/officeDocument/2006/math">
+                    <m:r>
+                      <a:rPr lang="pt-BR" i="1">
+                        <a:latin typeface="Cambria Math" panose="02040503050406030204" pitchFamily="18" charset="0"/>
+                        <a:ea typeface="Cambria Math" panose="02040503050406030204" pitchFamily="18" charset="0"/>
+                      </a:rPr>
+                      <m:t>𝑄</m:t>
+                    </m:r>
+                    <m:d>
+                      <m:dPr>
+                        <m:ctrlPr>
+                          <a:rPr lang="pt-BR" i="1">
+                            <a:latin typeface="Cambria Math" panose="02040503050406030204" pitchFamily="18" charset="0"/>
+                            <a:ea typeface="Cambria Math" panose="02040503050406030204" pitchFamily="18" charset="0"/>
+                          </a:rPr>
+                        </m:ctrlPr>
+                      </m:dPr>
+                      <m:e>
+                        <m:r>
+                          <a:rPr lang="pt-BR" i="1">
+                            <a:latin typeface="Cambria Math" panose="02040503050406030204" pitchFamily="18" charset="0"/>
+                            <a:ea typeface="Cambria Math" panose="02040503050406030204" pitchFamily="18" charset="0"/>
+                          </a:rPr>
+                          <m:t>𝑠</m:t>
+                        </m:r>
+                        <m:r>
+                          <a:rPr lang="pt-BR" i="1">
+                            <a:latin typeface="Cambria Math" panose="02040503050406030204" pitchFamily="18" charset="0"/>
+                            <a:ea typeface="Cambria Math" panose="02040503050406030204" pitchFamily="18" charset="0"/>
+                          </a:rPr>
+                          <m:t>,</m:t>
+                        </m:r>
+                        <m:r>
+                          <a:rPr lang="pt-BR" i="1">
+                            <a:latin typeface="Cambria Math" panose="02040503050406030204" pitchFamily="18" charset="0"/>
+                            <a:ea typeface="Cambria Math" panose="02040503050406030204" pitchFamily="18" charset="0"/>
+                          </a:rPr>
+                          <m:t>𝑎</m:t>
+                        </m:r>
+                      </m:e>
+                    </m:d>
+                  </m:oMath>
+                </a14:m>
+                <a:r>
+                  <a:rPr lang="pt-BR" dirty="0" smtClean="0"/>
+                  <a:t>: é o </a:t>
+                </a:r>
+                <a:r>
+                  <a:rPr lang="pt-BR" dirty="0"/>
+                  <a:t>valor atual na tabela para o estado e ação.</a:t>
                 </a:r>
                 <a:endParaRPr lang="en-US" dirty="0"/>
               </a:p>
@@ -10220,17 +11170,38 @@
                   </m:oMath>
                 </a14:m>
                 <a:r>
+                  <a:rPr lang="pt-BR" dirty="0" smtClean="0"/>
+                  <a:t>: </a:t>
+                </a:r>
+                <a:r>
+                  <a:rPr lang="pt-BR" b="1" dirty="0"/>
+                  <a:t>taxa de </a:t>
+                </a:r>
+                <a:r>
+                  <a:rPr lang="pt-BR" b="1" dirty="0" smtClean="0"/>
+                  <a:t>aprendizado [0, 1]</a:t>
+                </a:r>
+                <a:r>
+                  <a:rPr lang="pt-BR" dirty="0" smtClean="0"/>
+                  <a:t>. </a:t>
+                </a:r>
+                <a:r>
+                  <a:rPr lang="pt-BR" dirty="0" smtClean="0"/>
+                  <a:t>Define </a:t>
+                </a:r>
+                <a:r>
                   <a:rPr lang="pt-BR" dirty="0"/>
-                  <a:t>: é a </a:t>
-                </a:r>
-                <a:r>
-                  <a:rPr lang="pt-BR" b="1" dirty="0"/>
-                  <a:t>taxa de aprendizado</a:t>
+                  <a:t>o quanto a nova informação substitui a </a:t>
+                </a:r>
+                <a:r>
+                  <a:rPr lang="pt-BR" dirty="0" smtClean="0"/>
+                  <a:t>antiga.</a:t>
                 </a:r>
                 <a:r>
                   <a:rPr lang="pt-BR" dirty="0"/>
-                  <a:t>. Valor entre 0 e 1. Determina o peso da nova informação em relação à velha.</a:t>
-                </a:r>
+                  <a:t> Valor entre 0 e 1. </a:t>
+                </a:r>
+                <a:endParaRPr lang="pt-BR" dirty="0"/>
               </a:p>
               <a:p>
                 <a14:m>
@@ -10246,10 +11217,10 @@
                 </a14:m>
                 <a:r>
                   <a:rPr lang="pt-BR" dirty="0"/>
-                  <a:t>: é </a:t>
-                </a:r>
-                <a:r>
-                  <a:rPr lang="pt-BR" b="1" dirty="0"/>
+                  <a:t>: </a:t>
+                </a:r>
+                <a:r>
+                  <a:rPr lang="pt-BR" b="1" dirty="0" smtClean="0"/>
                   <a:t>recompensa</a:t>
                 </a:r>
                 <a:r>
@@ -10289,15 +11260,114 @@
                 </a14:m>
                 <a:r>
                   <a:rPr lang="pt-BR" dirty="0"/>
-                  <a:t>: é o </a:t>
+                  <a:t>: </a:t>
+                </a:r>
+                <a:r>
+                  <a:rPr lang="pt-BR" b="1" dirty="0" smtClean="0"/>
+                  <a:t>fator </a:t>
                 </a:r>
                 <a:r>
                   <a:rPr lang="pt-BR" b="1" dirty="0"/>
-                  <a:t>fator de desconto</a:t>
+                  <a:t>de </a:t>
+                </a:r>
+                <a:r>
+                  <a:rPr lang="pt-BR" b="1" dirty="0" smtClean="0"/>
+                  <a:t>desconto [0, 1]</a:t>
+                </a:r>
+                <a:r>
+                  <a:rPr lang="pt-BR" dirty="0" smtClean="0"/>
+                  <a:t>. Determina </a:t>
                 </a:r>
                 <a:r>
                   <a:rPr lang="pt-BR" dirty="0"/>
-                  <a:t>. Entre 0 e 1. Determina a importância das recompensas futuras.</a:t>
+                  <a:t>a importância das recompensas </a:t>
+                </a:r>
+                <a:r>
+                  <a:rPr lang="pt-BR" dirty="0" smtClean="0"/>
+                  <a:t>futuras</a:t>
+                </a:r>
+                <a:r>
+                  <a:rPr lang="pt-BR" dirty="0" smtClean="0"/>
+                  <a:t>.</a:t>
+                </a:r>
+                <a:endParaRPr lang="pt-BR" dirty="0" smtClean="0"/>
+              </a:p>
+              <a:p>
+                <a:pPr lvl="1">
+                  <a:buFont typeface="Wingdings" panose="05000000000000000000" pitchFamily="2" charset="2"/>
+                  <a:buChar char="§"/>
+                </a:pPr>
+                <a14:m>
+                  <m:oMath xmlns:m="http://schemas.openxmlformats.org/officeDocument/2006/math">
+                    <m:r>
+                      <m:rPr>
+                        <m:sty m:val="p"/>
+                      </m:rPr>
+                      <a:rPr lang="el-GR" i="1">
+                        <a:latin typeface="Cambria Math" panose="02040503050406030204" pitchFamily="18" charset="0"/>
+                        <a:ea typeface="Cambria Math" panose="02040503050406030204" pitchFamily="18" charset="0"/>
+                      </a:rPr>
+                      <m:t>γ</m:t>
+                    </m:r>
+                    <m:r>
+                      <a:rPr lang="pt-BR" b="0" i="1" smtClean="0">
+                        <a:latin typeface="Cambria Math" panose="02040503050406030204" pitchFamily="18" charset="0"/>
+                        <a:ea typeface="Cambria Math" panose="02040503050406030204" pitchFamily="18" charset="0"/>
+                      </a:rPr>
+                      <m:t>=0</m:t>
+                    </m:r>
+                  </m:oMath>
+                </a14:m>
+                <a:r>
+                  <a:rPr lang="pt-BR" dirty="0" smtClean="0"/>
+                  <a:t>: o </a:t>
+                </a:r>
+                <a:r>
+                  <a:rPr lang="pt-BR" dirty="0"/>
+                  <a:t>agente só liga para recompensas imediatas. </a:t>
+                </a:r>
+                <a:endParaRPr lang="pt-BR" dirty="0" smtClean="0"/>
+              </a:p>
+              <a:p>
+                <a:pPr lvl="1">
+                  <a:buFont typeface="Wingdings" panose="05000000000000000000" pitchFamily="2" charset="2"/>
+                  <a:buChar char="§"/>
+                </a:pPr>
+                <a14:m>
+                  <m:oMath xmlns:m="http://schemas.openxmlformats.org/officeDocument/2006/math">
+                    <m:r>
+                      <m:rPr>
+                        <m:sty m:val="p"/>
+                      </m:rPr>
+                      <a:rPr lang="el-GR" i="1">
+                        <a:latin typeface="Cambria Math" panose="02040503050406030204" pitchFamily="18" charset="0"/>
+                        <a:ea typeface="Cambria Math" panose="02040503050406030204" pitchFamily="18" charset="0"/>
+                      </a:rPr>
+                      <m:t>γ</m:t>
+                    </m:r>
+                    <m:r>
+                      <a:rPr lang="el-GR" i="1" smtClean="0">
+                        <a:latin typeface="Cambria Math" panose="02040503050406030204" pitchFamily="18" charset="0"/>
+                        <a:ea typeface="Cambria Math" panose="02040503050406030204" pitchFamily="18" charset="0"/>
+                      </a:rPr>
+                      <m:t>→</m:t>
+                    </m:r>
+                    <m:r>
+                      <a:rPr lang="pt-BR" b="0" i="1" smtClean="0">
+                        <a:latin typeface="Cambria Math" panose="02040503050406030204" pitchFamily="18" charset="0"/>
+                        <a:ea typeface="Cambria Math" panose="02040503050406030204" pitchFamily="18" charset="0"/>
+                      </a:rPr>
+                      <m:t>1</m:t>
+                    </m:r>
+                  </m:oMath>
+                </a14:m>
+                <a:r>
+                  <a:rPr lang="pt-BR" dirty="0" smtClean="0"/>
+                  <a:t>: o agente </a:t>
+                </a:r>
+                <a:r>
+                  <a:rPr lang="pt-BR" dirty="0"/>
+                  <a:t>busca recompensas a longo prazo.</a:t>
                 </a:r>
               </a:p>
               <a:p>
@@ -10459,12 +11529,39 @@
                 </a:r>
                 <a:r>
                   <a:rPr lang="pt-BR" b="1" dirty="0"/>
-                  <a:t>melhor valor Q possível no próximo estado</a:t>
+                  <a:t>melhor valor </a:t>
+                </a:r>
+                <a14:m>
+                  <m:oMath xmlns:m="http://schemas.openxmlformats.org/officeDocument/2006/math">
+                    <m:r>
+                      <a:rPr lang="pt-BR" b="1" i="1" smtClean="0">
+                        <a:latin typeface="Cambria Math" panose="02040503050406030204" pitchFamily="18" charset="0"/>
+                      </a:rPr>
+                      <m:t>𝑸</m:t>
+                    </m:r>
+                  </m:oMath>
+                </a14:m>
+                <a:r>
+                  <a:rPr lang="pt-BR" b="1" dirty="0" smtClean="0"/>
+                  <a:t> </a:t>
+                </a:r>
+                <a:r>
+                  <a:rPr lang="pt-BR" b="1" dirty="0"/>
+                  <a:t>possível no próximo estado</a:t>
                 </a:r>
                 <a:r>
                   <a:rPr lang="pt-BR" dirty="0"/>
-                  <a:t>. É a estimativa do futuro.</a:t>
-                </a:r>
+                  <a:t>. É a </a:t>
+                </a:r>
+                <a:r>
+                  <a:rPr lang="pt-BR" dirty="0" smtClean="0"/>
+                  <a:t>estimativa da </a:t>
+                </a:r>
+                <a:r>
+                  <a:rPr lang="pt-BR" dirty="0" smtClean="0"/>
+                  <a:t>recompensa futura.</a:t>
+                </a:r>
+                <a:endParaRPr lang="pt-BR" dirty="0"/>
               </a:p>
             </p:txBody>
           </p:sp>
@@ -10475,7 +11572,7 @@
               <p:cNvPr id="3" name="Content Placeholder 2">
                 <a:extLst>
                   <a:ext uri="{FF2B5EF4-FFF2-40B4-BE49-F238E27FC236}">
-                    <a16:creationId xmlns:a16="http://schemas.microsoft.com/office/drawing/2014/main" id="{9E56A20D-5587-73F0-6A77-76736D8C972A}"/>
+                    <a16:creationId xmlns:a16="http://schemas.microsoft.com/office/drawing/2014/main" xmlns:a14="http://schemas.microsoft.com/office/drawing/2010/main" xmlns="" id="{9E56A20D-5587-73F0-6A77-76736D8C972A}"/>
                   </a:ext>
                 </a:extLst>
               </p:cNvPr>
@@ -10488,13 +11585,13 @@
             </p:nvSpPr>
             <p:spPr>
               <a:xfrm>
-                <a:off x="838199" y="1825624"/>
+                <a:off x="838199" y="1825625"/>
                 <a:ext cx="11353801" cy="5032375"/>
               </a:xfrm>
-              <a:blipFill>
+              <a:blipFill rotWithShape="0">
                 <a:blip r:embed="rId3"/>
                 <a:stretch>
-                  <a:fillRect l="-1074" t="-2663" r="-644"/>
+                  <a:fillRect l="-805" t="-2421" r="-429"/>
                 </a:stretch>
               </a:blipFill>
             </p:spPr>
@@ -10503,7 +11600,7 @@
               <a:lstStyle/>
               <a:p>
                 <a:r>
-                  <a:rPr lang="en-US">
+                  <a:rPr lang="pt-BR">
                     <a:noFill/>
                   </a:rPr>
                   <a:t> </a:t>
@@ -10548,7 +11645,7 @@
           <p:cNvPr id="2" name="Title 1">
             <a:extLst>
               <a:ext uri="{FF2B5EF4-FFF2-40B4-BE49-F238E27FC236}">
-                <a16:creationId xmlns:a16="http://schemas.microsoft.com/office/drawing/2014/main" id="{874F2722-DA1E-D930-DC99-59F795E3E8B9}"/>
+                <a16:creationId xmlns:a16="http://schemas.microsoft.com/office/drawing/2014/main" xmlns="" id="{874F2722-DA1E-D930-DC99-59F795E3E8B9}"/>
               </a:ext>
             </a:extLst>
           </p:cNvPr>
@@ -10573,7 +11670,7 @@
           <p:cNvPr id="3" name="Content Placeholder 2">
             <a:extLst>
               <a:ext uri="{FF2B5EF4-FFF2-40B4-BE49-F238E27FC236}">
-                <a16:creationId xmlns:a16="http://schemas.microsoft.com/office/drawing/2014/main" id="{97BD2D05-0E48-B94D-DBC7-FBDCBC17C0A5}"/>
+                <a16:creationId xmlns:a16="http://schemas.microsoft.com/office/drawing/2014/main" xmlns="" id="{97BD2D05-0E48-B94D-DBC7-FBDCBC17C0A5}"/>
               </a:ext>
             </a:extLst>
           </p:cNvPr>
@@ -10642,7 +11739,7 @@
           <p:cNvPr id="2" name="Title 1">
             <a:extLst>
               <a:ext uri="{FF2B5EF4-FFF2-40B4-BE49-F238E27FC236}">
-                <a16:creationId xmlns:a16="http://schemas.microsoft.com/office/drawing/2014/main" id="{52C5A6D8-ECD1-B38D-0188-C905A6EDF96B}"/>
+                <a16:creationId xmlns:a16="http://schemas.microsoft.com/office/drawing/2014/main" xmlns="" id="{52C5A6D8-ECD1-B38D-0188-C905A6EDF96B}"/>
               </a:ext>
             </a:extLst>
           </p:cNvPr>
@@ -10680,7 +11777,7 @@
               <p:cNvPr id="3" name="Content Placeholder 2">
                 <a:extLst>
                   <a:ext uri="{FF2B5EF4-FFF2-40B4-BE49-F238E27FC236}">
-                    <a16:creationId xmlns:a16="http://schemas.microsoft.com/office/drawing/2014/main" id="{9E788D2D-1B58-788D-B9CB-AA2B58DAC90E}"/>
+                    <a16:creationId xmlns:a16="http://schemas.microsoft.com/office/drawing/2014/main" xmlns="" id="{9E788D2D-1B58-788D-B9CB-AA2B58DAC90E}"/>
                   </a:ext>
                 </a:extLst>
               </p:cNvPr>
@@ -10693,8 +11790,8 @@
             </p:nvSpPr>
             <p:spPr>
               <a:xfrm>
-                <a:off x="838199" y="1825625"/>
-                <a:ext cx="11234057" cy="4351338"/>
+                <a:off x="838199" y="1825624"/>
+                <a:ext cx="11234057" cy="5032375"/>
               </a:xfrm>
             </p:spPr>
             <p:txBody>
@@ -10711,7 +11808,7 @@
                     </m:oMathParaPr>
                     <m:oMath xmlns:m="http://schemas.openxmlformats.org/officeDocument/2006/math">
                       <m:r>
-                        <a:rPr lang="pt-BR" i="1">
+                        <a:rPr lang="pt-BR" i="1" smtClean="0">
                           <a:latin typeface="Cambria Math" panose="02040503050406030204" pitchFamily="18" charset="0"/>
                         </a:rPr>
                         <m:t>𝑄</m:t>
@@ -11287,7 +12384,11 @@
               <a:p>
                 <a:r>
                   <a:rPr lang="pt-BR" dirty="0"/>
-                  <a:t>Nós multiplicamos esse erro pelo nosso </a:t>
+                  <a:t>Nós multiplicamos esse erro p</a:t>
+                </a:r>
+                <a:r>
+                  <a:rPr lang="pt-BR" dirty="0" smtClean="0"/>
+                  <a:t>or </a:t>
                 </a:r>
                 <a14:m>
                   <m:oMath xmlns:m="http://schemas.openxmlformats.org/officeDocument/2006/math">
@@ -11302,7 +12403,265 @@
                 </a14:m>
                 <a:r>
                   <a:rPr lang="pt-BR" dirty="0"/>
-                  <a:t> para corrigir nossa crença passo a passo.</a:t>
+                  <a:t> para corrigir nossa crença passo a passo</a:t>
+                </a:r>
+                <a:r>
+                  <a:rPr lang="pt-BR" dirty="0" smtClean="0"/>
+                  <a:t>.</a:t>
+                </a:r>
+              </a:p>
+              <a:p>
+                <a:r>
+                  <a:rPr lang="pt-BR" dirty="0" smtClean="0"/>
+                  <a:t>A </a:t>
+                </a:r>
+                <a:r>
+                  <a:rPr lang="pt-BR" dirty="0"/>
+                  <a:t>cada transição, </a:t>
+                </a:r>
+                <a14:m>
+                  <m:oMath xmlns:m="http://schemas.openxmlformats.org/officeDocument/2006/math">
+                    <m:r>
+                      <a:rPr lang="pt-BR" i="1">
+                        <a:latin typeface="Cambria Math" panose="02040503050406030204" pitchFamily="18" charset="0"/>
+                        <a:ea typeface="Cambria Math" panose="02040503050406030204" pitchFamily="18" charset="0"/>
+                      </a:rPr>
+                      <m:t>𝑄</m:t>
+                    </m:r>
+                    <m:d>
+                      <m:dPr>
+                        <m:ctrlPr>
+                          <a:rPr lang="pt-BR" i="1">
+                            <a:latin typeface="Cambria Math" panose="02040503050406030204" pitchFamily="18" charset="0"/>
+                            <a:ea typeface="Cambria Math" panose="02040503050406030204" pitchFamily="18" charset="0"/>
+                          </a:rPr>
+                        </m:ctrlPr>
+                      </m:dPr>
+                      <m:e>
+                        <m:r>
+                          <a:rPr lang="pt-BR" i="1">
+                            <a:latin typeface="Cambria Math" panose="02040503050406030204" pitchFamily="18" charset="0"/>
+                            <a:ea typeface="Cambria Math" panose="02040503050406030204" pitchFamily="18" charset="0"/>
+                          </a:rPr>
+                          <m:t>𝑠</m:t>
+                        </m:r>
+                        <m:r>
+                          <a:rPr lang="pt-BR" i="1">
+                            <a:latin typeface="Cambria Math" panose="02040503050406030204" pitchFamily="18" charset="0"/>
+                            <a:ea typeface="Cambria Math" panose="02040503050406030204" pitchFamily="18" charset="0"/>
+                          </a:rPr>
+                          <m:t>,</m:t>
+                        </m:r>
+                        <m:r>
+                          <a:rPr lang="pt-BR" i="1">
+                            <a:latin typeface="Cambria Math" panose="02040503050406030204" pitchFamily="18" charset="0"/>
+                            <a:ea typeface="Cambria Math" panose="02040503050406030204" pitchFamily="18" charset="0"/>
+                          </a:rPr>
+                          <m:t>𝑎</m:t>
+                        </m:r>
+                      </m:e>
+                    </m:d>
+                  </m:oMath>
+                </a14:m>
+                <a:r>
+                  <a:rPr lang="pt-BR" dirty="0" smtClean="0"/>
+                  <a:t> se aproxima da </a:t>
+                </a:r>
+                <a:r>
+                  <a:rPr lang="pt-BR" dirty="0"/>
+                  <a:t>recompensa </a:t>
+                </a:r>
+                <a:r>
+                  <a:rPr lang="pt-BR" dirty="0" smtClean="0"/>
+                  <a:t>imediata </a:t>
+                </a:r>
+                <a14:m>
+                  <m:oMath xmlns:m="http://schemas.openxmlformats.org/officeDocument/2006/math">
+                    <m:r>
+                      <a:rPr lang="pt-BR" b="0" i="1" smtClean="0">
+                        <a:latin typeface="Cambria Math" panose="02040503050406030204" pitchFamily="18" charset="0"/>
+                      </a:rPr>
+                      <m:t>𝑟</m:t>
+                    </m:r>
+                  </m:oMath>
+                </a14:m>
+                <a:r>
+                  <a:rPr lang="pt-BR" dirty="0" smtClean="0"/>
+                  <a:t> </a:t>
+                </a:r>
+                <a:r>
+                  <a:rPr lang="pt-BR" dirty="0"/>
+                  <a:t>mais o valor futuro </a:t>
+                </a:r>
+                <a:r>
+                  <a:rPr lang="pt-BR" dirty="0" smtClean="0"/>
+                  <a:t>ótimo descontado (</a:t>
+                </a:r>
+                <a14:m>
+                  <m:oMath xmlns:m="http://schemas.openxmlformats.org/officeDocument/2006/math">
+                    <m:func>
+                      <m:funcPr>
+                        <m:ctrlPr>
+                          <a:rPr lang="pt-BR" i="1">
+                            <a:latin typeface="Cambria Math" panose="02040503050406030204" pitchFamily="18" charset="0"/>
+                            <a:ea typeface="Cambria Math" panose="02040503050406030204" pitchFamily="18" charset="0"/>
+                          </a:rPr>
+                        </m:ctrlPr>
+                      </m:funcPr>
+                      <m:fName>
+                        <m:limLow>
+                          <m:limLowPr>
+                            <m:ctrlPr>
+                              <a:rPr lang="pt-BR" i="1">
+                                <a:latin typeface="Cambria Math" panose="02040503050406030204" pitchFamily="18" charset="0"/>
+                                <a:ea typeface="Cambria Math" panose="02040503050406030204" pitchFamily="18" charset="0"/>
+                              </a:rPr>
+                            </m:ctrlPr>
+                          </m:limLowPr>
+                          <m:e>
+                            <m:r>
+                              <m:rPr>
+                                <m:sty m:val="p"/>
+                              </m:rPr>
+                              <a:rPr lang="el-GR" i="1">
+                                <a:latin typeface="Cambria Math" panose="02040503050406030204" pitchFamily="18" charset="0"/>
+                                <a:ea typeface="Cambria Math" panose="02040503050406030204" pitchFamily="18" charset="0"/>
+                              </a:rPr>
+                              <m:t>γ</m:t>
+                            </m:r>
+                            <m:r>
+                              <m:rPr>
+                                <m:sty m:val="p"/>
+                              </m:rPr>
+                              <a:rPr lang="pt-BR">
+                                <a:latin typeface="Cambria Math" panose="02040503050406030204" pitchFamily="18" charset="0"/>
+                                <a:ea typeface="Cambria Math" panose="02040503050406030204" pitchFamily="18" charset="0"/>
+                              </a:rPr>
+                              <m:t>max</m:t>
+                            </m:r>
+                          </m:e>
+                          <m:lim>
+                            <m:sSup>
+                              <m:sSupPr>
+                                <m:ctrlPr>
+                                  <a:rPr lang="pt-BR" i="1">
+                                    <a:latin typeface="Cambria Math" panose="02040503050406030204" pitchFamily="18" charset="0"/>
+                                    <a:ea typeface="Cambria Math" panose="02040503050406030204" pitchFamily="18" charset="0"/>
+                                  </a:rPr>
+                                </m:ctrlPr>
+                              </m:sSupPr>
+                              <m:e>
+                                <m:r>
+                                  <a:rPr lang="pt-BR" i="1">
+                                    <a:latin typeface="Cambria Math" panose="02040503050406030204" pitchFamily="18" charset="0"/>
+                                    <a:ea typeface="Cambria Math" panose="02040503050406030204" pitchFamily="18" charset="0"/>
+                                  </a:rPr>
+                                  <m:t>𝑎</m:t>
+                                </m:r>
+                              </m:e>
+                              <m:sup>
+                                <m:r>
+                                  <a:rPr lang="pt-BR" i="1">
+                                    <a:latin typeface="Cambria Math" panose="02040503050406030204" pitchFamily="18" charset="0"/>
+                                    <a:ea typeface="Cambria Math" panose="02040503050406030204" pitchFamily="18" charset="0"/>
+                                  </a:rPr>
+                                  <m:t>′</m:t>
+                                </m:r>
+                              </m:sup>
+                            </m:sSup>
+                          </m:lim>
+                        </m:limLow>
+                      </m:fName>
+                      <m:e>
+                        <m:r>
+                          <a:rPr lang="pt-BR" i="1">
+                            <a:latin typeface="Cambria Math" panose="02040503050406030204" pitchFamily="18" charset="0"/>
+                            <a:ea typeface="Cambria Math" panose="02040503050406030204" pitchFamily="18" charset="0"/>
+                          </a:rPr>
+                          <m:t>𝑄</m:t>
+                        </m:r>
+                        <m:d>
+                          <m:dPr>
+                            <m:ctrlPr>
+                              <a:rPr lang="pt-BR" i="1">
+                                <a:latin typeface="Cambria Math" panose="02040503050406030204" pitchFamily="18" charset="0"/>
+                                <a:ea typeface="Cambria Math" panose="02040503050406030204" pitchFamily="18" charset="0"/>
+                              </a:rPr>
+                            </m:ctrlPr>
+                          </m:dPr>
+                          <m:e>
+                            <m:sSup>
+                              <m:sSupPr>
+                                <m:ctrlPr>
+                                  <a:rPr lang="pt-BR" i="1">
+                                    <a:latin typeface="Cambria Math" panose="02040503050406030204" pitchFamily="18" charset="0"/>
+                                    <a:ea typeface="Cambria Math" panose="02040503050406030204" pitchFamily="18" charset="0"/>
+                                  </a:rPr>
+                                </m:ctrlPr>
+                              </m:sSupPr>
+                              <m:e>
+                                <m:r>
+                                  <a:rPr lang="pt-BR" i="1">
+                                    <a:latin typeface="Cambria Math" panose="02040503050406030204" pitchFamily="18" charset="0"/>
+                                    <a:ea typeface="Cambria Math" panose="02040503050406030204" pitchFamily="18" charset="0"/>
+                                  </a:rPr>
+                                  <m:t>𝑠</m:t>
+                                </m:r>
+                              </m:e>
+                              <m:sup>
+                                <m:r>
+                                  <a:rPr lang="pt-BR" i="1">
+                                    <a:latin typeface="Cambria Math" panose="02040503050406030204" pitchFamily="18" charset="0"/>
+                                    <a:ea typeface="Cambria Math" panose="02040503050406030204" pitchFamily="18" charset="0"/>
+                                  </a:rPr>
+                                  <m:t>′</m:t>
+                                </m:r>
+                              </m:sup>
+                            </m:sSup>
+                            <m:r>
+                              <a:rPr lang="pt-BR" i="1">
+                                <a:latin typeface="Cambria Math" panose="02040503050406030204" pitchFamily="18" charset="0"/>
+                                <a:ea typeface="Cambria Math" panose="02040503050406030204" pitchFamily="18" charset="0"/>
+                              </a:rPr>
+                              <m:t>,</m:t>
+                            </m:r>
+                            <m:sSup>
+                              <m:sSupPr>
+                                <m:ctrlPr>
+                                  <a:rPr lang="pt-BR" i="1">
+                                    <a:latin typeface="Cambria Math" panose="02040503050406030204" pitchFamily="18" charset="0"/>
+                                    <a:ea typeface="Cambria Math" panose="02040503050406030204" pitchFamily="18" charset="0"/>
+                                  </a:rPr>
+                                </m:ctrlPr>
+                              </m:sSupPr>
+                              <m:e>
+                                <m:r>
+                                  <a:rPr lang="pt-BR" i="1">
+                                    <a:latin typeface="Cambria Math" panose="02040503050406030204" pitchFamily="18" charset="0"/>
+                                    <a:ea typeface="Cambria Math" panose="02040503050406030204" pitchFamily="18" charset="0"/>
+                                  </a:rPr>
+                                  <m:t>𝑎</m:t>
+                                </m:r>
+                              </m:e>
+                              <m:sup>
+                                <m:r>
+                                  <a:rPr lang="pt-BR" i="1">
+                                    <a:latin typeface="Cambria Math" panose="02040503050406030204" pitchFamily="18" charset="0"/>
+                                    <a:ea typeface="Cambria Math" panose="02040503050406030204" pitchFamily="18" charset="0"/>
+                                  </a:rPr>
+                                  <m:t>′</m:t>
+                                </m:r>
+                              </m:sup>
+                            </m:sSup>
+                          </m:e>
+                        </m:d>
+                      </m:e>
+                    </m:func>
+                  </m:oMath>
+                </a14:m>
+                <a:r>
+                  <a:rPr lang="pt-BR" dirty="0" smtClean="0"/>
+                  <a:t>).</a:t>
                 </a:r>
                 <a:endParaRPr lang="en-US" dirty="0"/>
               </a:p>
@@ -11315,7 +12674,7 @@
               <p:cNvPr id="3" name="Content Placeholder 2">
                 <a:extLst>
                   <a:ext uri="{FF2B5EF4-FFF2-40B4-BE49-F238E27FC236}">
-                    <a16:creationId xmlns:a16="http://schemas.microsoft.com/office/drawing/2014/main" id="{9E788D2D-1B58-788D-B9CB-AA2B58DAC90E}"/>
+                    <a16:creationId xmlns:a16="http://schemas.microsoft.com/office/drawing/2014/main" xmlns:a14="http://schemas.microsoft.com/office/drawing/2010/main" xmlns="" id="{9E788D2D-1B58-788D-B9CB-AA2B58DAC90E}"/>
                   </a:ext>
                 </a:extLst>
               </p:cNvPr>
@@ -11328,13 +12687,13 @@
             </p:nvSpPr>
             <p:spPr>
               <a:xfrm>
-                <a:off x="838199" y="1825625"/>
-                <a:ext cx="11234057" cy="4351338"/>
+                <a:off x="838199" y="1825624"/>
+                <a:ext cx="11234057" cy="5032375"/>
               </a:xfrm>
-              <a:blipFill>
+              <a:blipFill rotWithShape="0">
                 <a:blip r:embed="rId3"/>
                 <a:stretch>
-                  <a:fillRect l="-922" r="-705"/>
+                  <a:fillRect l="-922" r="-488"/>
                 </a:stretch>
               </a:blipFill>
             </p:spPr>
@@ -11343,7 +12702,7 @@
               <a:lstStyle/>
               <a:p>
                 <a:r>
-                  <a:rPr lang="en-US">
+                  <a:rPr lang="pt-BR">
                     <a:noFill/>
                   </a:rPr>
                   <a:t> </a:t>
@@ -11388,7 +12747,7 @@
           <p:cNvPr id="2" name="Title 1">
             <a:extLst>
               <a:ext uri="{FF2B5EF4-FFF2-40B4-BE49-F238E27FC236}">
-                <a16:creationId xmlns:a16="http://schemas.microsoft.com/office/drawing/2014/main" id="{936F8D36-63A1-F427-6A4F-01E854EEB57B}"/>
+                <a16:creationId xmlns:a16="http://schemas.microsoft.com/office/drawing/2014/main" xmlns="" id="{936F8D36-63A1-F427-6A4F-01E854EEB57B}"/>
               </a:ext>
             </a:extLst>
           </p:cNvPr>
@@ -11417,7 +12776,7 @@
           <p:cNvPr id="3" name="Content Placeholder 2">
             <a:extLst>
               <a:ext uri="{FF2B5EF4-FFF2-40B4-BE49-F238E27FC236}">
-                <a16:creationId xmlns:a16="http://schemas.microsoft.com/office/drawing/2014/main" id="{EB894157-32A4-5B45-5642-D7607A5096CE}"/>
+                <a16:creationId xmlns:a16="http://schemas.microsoft.com/office/drawing/2014/main" xmlns="" id="{EB894157-32A4-5B45-5642-D7607A5096CE}"/>
               </a:ext>
             </a:extLst>
           </p:cNvPr>
@@ -11472,7 +12831,7 @@
           <p:cNvPr id="2" name="Title 1">
             <a:extLst>
               <a:ext uri="{FF2B5EF4-FFF2-40B4-BE49-F238E27FC236}">
-                <a16:creationId xmlns:a16="http://schemas.microsoft.com/office/drawing/2014/main" id="{8EB01B62-8582-E09F-DA69-E77F3F495399}"/>
+                <a16:creationId xmlns:a16="http://schemas.microsoft.com/office/drawing/2014/main" xmlns="" id="{8EB01B62-8582-E09F-DA69-E77F3F495399}"/>
               </a:ext>
             </a:extLst>
           </p:cNvPr>
@@ -11515,7 +12874,7 @@
               <p:cNvPr id="3" name="Content Placeholder 2">
                 <a:extLst>
                   <a:ext uri="{FF2B5EF4-FFF2-40B4-BE49-F238E27FC236}">
-                    <a16:creationId xmlns:a16="http://schemas.microsoft.com/office/drawing/2014/main" id="{0DB47E26-1487-F7F1-F157-E71A864B453D}"/>
+                    <a16:creationId xmlns:a16="http://schemas.microsoft.com/office/drawing/2014/main" xmlns="" id="{0DB47E26-1487-F7F1-F157-E71A864B453D}"/>
                   </a:ext>
                 </a:extLst>
               </p:cNvPr>
@@ -11565,26 +12924,26 @@
               </a:p>
               <a:p>
                 <a:r>
+                  <a:rPr lang="pt-BR" dirty="0" smtClean="0"/>
+                  <a:t>Ele requer </a:t>
+                </a:r>
+                <a:r>
                   <a:rPr lang="pt-BR" dirty="0"/>
-                  <a:t>O </a:t>
-                </a:r>
-                <a:r>
-                  <a:rPr lang="pt-BR" dirty="0" err="1"/>
-                  <a:t>Q-</a:t>
-                </a:r>
-                <a:r>
-                  <a:rPr lang="pt-BR" i="1" dirty="0" err="1"/>
-                  <a:t>learning</a:t>
-                </a:r>
-                <a:r>
-                  <a:rPr lang="pt-BR" dirty="0"/>
-                  <a:t> tradicional requer que todos os estados estejam em uma tabela.</a:t>
+                  <a:t>que todos os estados estejam em uma tabela.</a:t>
                 </a:r>
               </a:p>
               <a:p>
                 <a:r>
                   <a:rPr lang="pt-BR" dirty="0"/>
-                  <a:t>Porém, e se queremos treiná-lo para jogar Xadrez? </a:t>
+                  <a:t>Porém, e se </a:t>
+                </a:r>
+                <a:r>
+                  <a:rPr lang="pt-BR" dirty="0" smtClean="0"/>
+                  <a:t>quisermos </a:t>
+                </a:r>
+                <a:r>
+                  <a:rPr lang="pt-BR" dirty="0"/>
+                  <a:t>treiná-lo para jogar Xadrez? </a:t>
                 </a:r>
               </a:p>
               <a:p>
@@ -11633,7 +12992,15 @@
               <a:p>
                 <a:r>
                   <a:rPr lang="pt-BR" dirty="0"/>
-                  <a:t>E se queremos treiná-lo para dirigir um carro autônomo usando uma câmara para observar o ambiente?</a:t>
+                  <a:t>E se </a:t>
+                </a:r>
+                <a:r>
+                  <a:rPr lang="pt-BR" dirty="0" smtClean="0"/>
+                  <a:t>quisermos </a:t>
+                </a:r>
+                <a:r>
+                  <a:rPr lang="pt-BR" dirty="0"/>
+                  <a:t>treiná-lo para dirigir um carro autônomo usando uma câmara para observar o ambiente?</a:t>
                 </a:r>
               </a:p>
               <a:p>
@@ -11648,9 +13015,34 @@
               </a:p>
               <a:p>
                 <a:r>
+                  <a:rPr lang="pt-BR" dirty="0" smtClean="0"/>
+                  <a:t>É </a:t>
+                </a:r>
+                <a:r>
                   <a:rPr lang="pt-BR" dirty="0"/>
-                  <a:t>A tabela se torna gigantesca: a memória se esgota, e o treinamento se torna impossível.</a:t>
-                </a:r>
+                  <a:t>impossível armazenar </a:t>
+                </a:r>
+                <a:r>
+                  <a:rPr lang="pt-BR" dirty="0" smtClean="0"/>
+                  <a:t>a tabela-Q </a:t>
+                </a:r>
+                <a:r>
+                  <a:rPr lang="pt-BR" dirty="0"/>
+                  <a:t>na memória </a:t>
+                </a:r>
+                <a:r>
+                  <a:rPr lang="pt-BR" dirty="0" smtClean="0"/>
+                  <a:t>do </a:t>
+                </a:r>
+                <a:r>
+                  <a:rPr lang="pt-BR" dirty="0"/>
+                  <a:t>computador ou percorrê-la a tempo de tomar uma </a:t>
+                </a:r>
+                <a:r>
+                  <a:rPr lang="pt-BR" dirty="0" smtClean="0"/>
+                  <a:t>decisão, tornando o treinamento impossível.</a:t>
+                </a:r>
+                <a:endParaRPr lang="pt-BR" dirty="0"/>
               </a:p>
               <a:p>
                 <a:endParaRPr lang="en-US" dirty="0"/>
@@ -11667,7 +13059,7 @@
               <p:cNvPr id="3" name="Content Placeholder 2">
                 <a:extLst>
                   <a:ext uri="{FF2B5EF4-FFF2-40B4-BE49-F238E27FC236}">
-                    <a16:creationId xmlns:a16="http://schemas.microsoft.com/office/drawing/2014/main" id="{0DB47E26-1487-F7F1-F157-E71A864B453D}"/>
+                    <a16:creationId xmlns:a16="http://schemas.microsoft.com/office/drawing/2014/main" xmlns:a14="http://schemas.microsoft.com/office/drawing/2010/main" xmlns="" id="{0DB47E26-1487-F7F1-F157-E71A864B453D}"/>
                   </a:ext>
                 </a:extLst>
               </p:cNvPr>
@@ -11683,7 +13075,7 @@
                 <a:off x="838200" y="1825624"/>
                 <a:ext cx="11201400" cy="5032375"/>
               </a:xfrm>
-              <a:blipFill>
+              <a:blipFill rotWithShape="0">
                 <a:blip r:embed="rId3"/>
                 <a:stretch>
                   <a:fillRect l="-980" t="-1937" r="-1633"/>
@@ -11695,7 +13087,7 @@
               <a:lstStyle/>
               <a:p>
                 <a:r>
-                  <a:rPr lang="en-US">
+                  <a:rPr lang="pt-BR">
                     <a:noFill/>
                   </a:rPr>
                   <a:t> </a:t>
@@ -11740,7 +13132,7 @@
           <p:cNvPr id="2" name="Title 1">
             <a:extLst>
               <a:ext uri="{FF2B5EF4-FFF2-40B4-BE49-F238E27FC236}">
-                <a16:creationId xmlns:a16="http://schemas.microsoft.com/office/drawing/2014/main" id="{BC71F0FE-EA94-74C4-913C-E1B2789B6121}"/>
+                <a16:creationId xmlns:a16="http://schemas.microsoft.com/office/drawing/2014/main" xmlns="" id="{BC71F0FE-EA94-74C4-913C-E1B2789B6121}"/>
               </a:ext>
             </a:extLst>
           </p:cNvPr>
@@ -11781,7 +13173,7 @@
           <p:cNvPr id="3" name="Content Placeholder 2">
             <a:extLst>
               <a:ext uri="{FF2B5EF4-FFF2-40B4-BE49-F238E27FC236}">
-                <a16:creationId xmlns:a16="http://schemas.microsoft.com/office/drawing/2014/main" id="{387116BB-1259-5A42-97B8-F5F027BBE6D6}"/>
+                <a16:creationId xmlns:a16="http://schemas.microsoft.com/office/drawing/2014/main" xmlns="" id="{387116BB-1259-5A42-97B8-F5F027BBE6D6}"/>
               </a:ext>
             </a:extLst>
           </p:cNvPr>
@@ -11884,7 +13276,7 @@
           <p:cNvPr id="2" name="Title 1">
             <a:extLst>
               <a:ext uri="{FF2B5EF4-FFF2-40B4-BE49-F238E27FC236}">
-                <a16:creationId xmlns:a16="http://schemas.microsoft.com/office/drawing/2014/main" id="{0FD9EB4A-BCBE-6A0F-12D6-6770FC41F962}"/>
+                <a16:creationId xmlns:a16="http://schemas.microsoft.com/office/drawing/2014/main" xmlns="" id="{0FD9EB4A-BCBE-6A0F-12D6-6770FC41F962}"/>
               </a:ext>
             </a:extLst>
           </p:cNvPr>
@@ -11908,14 +13300,14 @@
           </a:p>
         </p:txBody>
       </p:sp>
-      <mc:AlternateContent xmlns:mc="http://schemas.openxmlformats.org/markup-compatibility/2006">
-        <mc:Choice xmlns:a14="http://schemas.microsoft.com/office/drawing/2010/main" Requires="a14">
+      <mc:AlternateContent xmlns:mc="http://schemas.openxmlformats.org/markup-compatibility/2006" xmlns:a14="http://schemas.microsoft.com/office/drawing/2010/main">
+        <mc:Choice Requires="a14">
           <p:sp>
             <p:nvSpPr>
               <p:cNvPr id="3" name="Content Placeholder 2">
                 <a:extLst>
                   <a:ext uri="{FF2B5EF4-FFF2-40B4-BE49-F238E27FC236}">
-                    <a16:creationId xmlns:a16="http://schemas.microsoft.com/office/drawing/2014/main" id="{9B1F2B59-589E-C89D-B023-E847F3DC922F}"/>
+                    <a16:creationId xmlns:a16="http://schemas.microsoft.com/office/drawing/2014/main" xmlns="" id="{9B1F2B59-589E-C89D-B023-E847F3DC922F}"/>
                   </a:ext>
                 </a:extLst>
               </p:cNvPr>
@@ -12074,7 +13466,7 @@
             </p:txBody>
           </p:sp>
         </mc:Choice>
-        <mc:Fallback>
+        <mc:Fallback xmlns="">
           <p:sp>
             <p:nvSpPr>
               <p:cNvPr id="3" name="Content Placeholder 2">
@@ -12123,7 +13515,7 @@
           <p:cNvPr id="1028" name="Picture 4" descr="Cracking the Spell of Q* - A New Method in Problem Solving | Benny's Mind  Hack">
             <a:extLst>
               <a:ext uri="{FF2B5EF4-FFF2-40B4-BE49-F238E27FC236}">
-                <a16:creationId xmlns:a16="http://schemas.microsoft.com/office/drawing/2014/main" id="{2FAF9048-FD7A-0345-D833-A8A15BE69361}"/>
+                <a16:creationId xmlns:a16="http://schemas.microsoft.com/office/drawing/2014/main" xmlns="" id="{2FAF9048-FD7A-0345-D833-A8A15BE69361}"/>
               </a:ext>
             </a:extLst>
           </p:cNvPr>
@@ -12200,7 +13592,7 @@
           <p:cNvPr id="2" name="Title 1">
             <a:extLst>
               <a:ext uri="{FF2B5EF4-FFF2-40B4-BE49-F238E27FC236}">
-                <a16:creationId xmlns:a16="http://schemas.microsoft.com/office/drawing/2014/main" id="{48EDEA96-2DFF-1829-9984-096F6593BEEE}"/>
+                <a16:creationId xmlns:a16="http://schemas.microsoft.com/office/drawing/2014/main" xmlns="" id="{48EDEA96-2DFF-1829-9984-096F6593BEEE}"/>
               </a:ext>
             </a:extLst>
           </p:cNvPr>
@@ -12236,7 +13628,7 @@
           <p:cNvPr id="3" name="Content Placeholder 2">
             <a:extLst>
               <a:ext uri="{FF2B5EF4-FFF2-40B4-BE49-F238E27FC236}">
-                <a16:creationId xmlns:a16="http://schemas.microsoft.com/office/drawing/2014/main" id="{0160E88F-503C-2590-9D5D-B2BDD50D2767}"/>
+                <a16:creationId xmlns:a16="http://schemas.microsoft.com/office/drawing/2014/main" xmlns="" id="{0160E88F-503C-2590-9D5D-B2BDD50D2767}"/>
               </a:ext>
             </a:extLst>
           </p:cNvPr>
@@ -12250,21 +13642,36 @@
         <p:spPr>
           <a:xfrm>
             <a:off x="5061856" y="1825624"/>
-            <a:ext cx="6999513" cy="5032375"/>
+            <a:ext cx="7130144" cy="5032375"/>
           </a:xfrm>
         </p:spPr>
         <p:txBody>
-          <a:bodyPr/>
+          <a:bodyPr>
+            <a:normAutofit lnSpcReduction="10000"/>
+          </a:bodyPr>
           <a:lstStyle/>
           <a:p>
             <a:r>
               <a:rPr lang="pt-BR" b="1" dirty="0"/>
-              <a:t>Robótica e manufatura:</a:t>
+              <a:t>Robótica e </a:t>
+            </a:r>
+            <a:r>
+              <a:rPr lang="pt-BR" b="1" dirty="0" smtClean="0"/>
+              <a:t>manufatura: </a:t>
+            </a:r>
+            <a:r>
+              <a:rPr lang="pt-BR" dirty="0" smtClean="0"/>
+              <a:t>Ensinar </a:t>
             </a:r>
             <a:r>
               <a:rPr lang="pt-BR" dirty="0"/>
-              <a:t> Braços robóticos que aprendem a agarrar objetos.</a:t>
-            </a:r>
+              <a:t>robôs a andar, agarrar objetos ou equilibrar cargas</a:t>
+            </a:r>
+            <a:r>
+              <a:rPr lang="pt-BR" dirty="0" smtClean="0"/>
+              <a:t>.</a:t>
+            </a:r>
+            <a:endParaRPr lang="pt-BR" dirty="0"/>
           </a:p>
           <a:p>
             <a:r>
@@ -12279,12 +13686,17 @@
           <a:p>
             <a:r>
               <a:rPr lang="pt-BR" b="1" dirty="0"/>
-              <a:t>Sistemas de recomendação:</a:t>
+              <a:t>Sistemas de recomendação</a:t>
+            </a:r>
+            <a:r>
+              <a:rPr lang="pt-BR" b="1" dirty="0" smtClean="0"/>
+              <a:t>: </a:t>
             </a:r>
             <a:r>
               <a:rPr lang="pt-BR" dirty="0"/>
-              <a:t> Customização de conteúdo onde a recompensa é o "clique" ou "tempo de retenção" do usuário.</a:t>
-            </a:r>
+              <a:t>Otimizar qual vídeo ou anúncio mostrar para você na internet com base no engajamento a longo prazo.</a:t>
+            </a:r>
+            <a:endParaRPr lang="pt-BR" dirty="0"/>
           </a:p>
           <a:p>
             <a:r>
@@ -12293,14 +13705,13 @@
             </a:r>
             <a:r>
               <a:rPr lang="pt-BR" dirty="0"/>
-              <a:t> Ajuste fino de caldeiras e refrigeração em data centers para reduzir consumo de energia.</a:t>
-            </a:r>
-          </a:p>
-          <a:p>
-            <a:endParaRPr lang="en-US" dirty="0"/>
-          </a:p>
-          <a:p>
-            <a:endParaRPr lang="en-US" dirty="0"/>
+              <a:t> Ajuste fino de caldeiras e refrigeração em data centers para reduzir consumo de energia</a:t>
+            </a:r>
+            <a:r>
+              <a:rPr lang="pt-BR" dirty="0" smtClean="0"/>
+              <a:t>.</a:t>
+            </a:r>
+            <a:endParaRPr lang="pt-BR" dirty="0"/>
           </a:p>
         </p:txBody>
       </p:sp>
@@ -12309,7 +13720,7 @@
           <p:cNvPr id="6" name="Picture 5">
             <a:extLst>
               <a:ext uri="{FF2B5EF4-FFF2-40B4-BE49-F238E27FC236}">
-                <a16:creationId xmlns:a16="http://schemas.microsoft.com/office/drawing/2014/main" id="{265EF8FE-70EB-D556-D43F-F69593E54B8C}"/>
+                <a16:creationId xmlns:a16="http://schemas.microsoft.com/office/drawing/2014/main" xmlns="" id="{265EF8FE-70EB-D556-D43F-F69593E54B8C}"/>
               </a:ext>
             </a:extLst>
           </p:cNvPr>
@@ -12319,7 +13730,7 @@
           <p:nvPr/>
         </p:nvPicPr>
         <p:blipFill>
-          <a:blip r:embed="rId3">
+          <a:blip r:embed="rId3" cstate="print">
             <a:extLst>
               <a:ext uri="{28A0092B-C50C-407E-A947-70E740481C1C}">
                 <a14:useLocalDpi xmlns:a14="http://schemas.microsoft.com/office/drawing/2010/main" val="0"/>
@@ -12372,10 +13783,10 @@
       </p:grpSpPr>
       <p:sp>
         <p:nvSpPr>
-          <p:cNvPr id="2" name="Title 1">
+          <p:cNvPr id="2" name="Título 1">
             <a:extLst>
               <a:ext uri="{FF2B5EF4-FFF2-40B4-BE49-F238E27FC236}">
-                <a16:creationId xmlns:a16="http://schemas.microsoft.com/office/drawing/2014/main" id="{1E5D343F-1952-C012-31AC-0443BF9C1BA8}"/>
+                <a16:creationId xmlns:a16="http://schemas.microsoft.com/office/drawing/2014/main" xmlns="" id="{94AB8438-E56E-2412-517C-8456E4CA773C}"/>
               </a:ext>
             </a:extLst>
           </p:cNvPr>
@@ -12391,61 +13802,318 @@
           <a:bodyPr/>
           <a:lstStyle/>
           <a:p>
-            <a:endParaRPr lang="en-US"/>
+            <a:r>
+              <a:rPr lang="pt-BR" dirty="0"/>
+              <a:t>Exemplo</a:t>
+            </a:r>
           </a:p>
         </p:txBody>
       </p:sp>
-      <p:pic>
-        <p:nvPicPr>
-          <p:cNvPr id="1026" name="Picture 2" descr="Evaluating a Hybrid LLM Q-Learning/DQN Framework for Adaptive Obstacle  Avoidance in Embedded Robotics">
+      <p:sp>
+        <p:nvSpPr>
+          <p:cNvPr id="3" name="Espaço Reservado para Conteúdo 2">
             <a:extLst>
               <a:ext uri="{FF2B5EF4-FFF2-40B4-BE49-F238E27FC236}">
-                <a16:creationId xmlns:a16="http://schemas.microsoft.com/office/drawing/2014/main" id="{BA833512-3FC7-011C-B55D-9BC5E88B4C29}"/>
+                <a16:creationId xmlns:a16="http://schemas.microsoft.com/office/drawing/2014/main" xmlns="" id="{F7E2B09C-6D56-4C9F-A364-B904CCE2F1A0}"/>
               </a:ext>
             </a:extLst>
           </p:cNvPr>
-          <p:cNvPicPr>
-            <a:picLocks noChangeAspect="1" noChangeArrowheads="1"/>
-          </p:cNvPicPr>
-          <p:nvPr/>
-        </p:nvPicPr>
-        <p:blipFill>
-          <a:blip r:embed="rId2">
+          <p:cNvSpPr>
+            <a:spLocks noGrp="1"/>
+          </p:cNvSpPr>
+          <p:nvPr>
+            <p:ph idx="1"/>
+          </p:nvPr>
+        </p:nvSpPr>
+        <p:spPr/>
+        <p:txBody>
+          <a:bodyPr/>
+          <a:lstStyle/>
+          <a:p>
+            <a:r>
+              <a:rPr lang="pt-BR" dirty="0"/>
+              <a:t>Exemplo: </a:t>
+            </a:r>
+            <a:r>
+              <a:rPr lang="pt-BR" dirty="0" smtClean="0"/>
+              <a:t>q-</a:t>
+            </a:r>
+            <a:r>
+              <a:rPr lang="pt-BR" dirty="0" err="1" smtClean="0"/>
+              <a:t>learning</a:t>
+            </a:r>
+            <a:r>
+              <a:rPr lang="pt-BR" dirty="0" err="1" smtClean="0"/>
+              <a:t>.ipynb</a:t>
+            </a:r>
+            <a:endParaRPr lang="en-US" dirty="0"/>
+          </a:p>
+          <a:p>
+            <a:pPr marL="0" indent="0">
+              <a:buNone/>
+            </a:pPr>
+            <a:endParaRPr lang="pt-BR" dirty="0"/>
+          </a:p>
+        </p:txBody>
+      </p:sp>
+      <p:grpSp>
+        <p:nvGrpSpPr>
+          <p:cNvPr id="18" name="Group 17">
             <a:extLst>
-              <a:ext uri="{28A0092B-C50C-407E-A947-70E740481C1C}">
-                <a14:useLocalDpi xmlns:a14="http://schemas.microsoft.com/office/drawing/2010/main" val="0"/>
+              <a:ext uri="{FF2B5EF4-FFF2-40B4-BE49-F238E27FC236}">
+                <a16:creationId xmlns:a16="http://schemas.microsoft.com/office/drawing/2014/main" xmlns="" id="{627C64FD-88E0-EC8E-2A34-0D5737B4C854}"/>
               </a:ext>
             </a:extLst>
-          </a:blip>
-          <a:srcRect/>
-          <a:stretch>
-            <a:fillRect/>
-          </a:stretch>
-        </p:blipFill>
-        <p:spPr bwMode="auto">
+          </p:cNvPr>
+          <p:cNvGrpSpPr/>
+          <p:nvPr/>
+        </p:nvGrpSpPr>
+        <p:grpSpPr>
           <a:xfrm>
-            <a:off x="0" y="1951265"/>
-            <a:ext cx="5238750" cy="1809750"/>
+            <a:off x="1752685" y="2681262"/>
+            <a:ext cx="8371070" cy="2659743"/>
+            <a:chOff x="1752685" y="2681262"/>
+            <a:chExt cx="8371070" cy="2659743"/>
           </a:xfrm>
-          <a:prstGeom prst="rect">
-            <a:avLst/>
-          </a:prstGeom>
-          <a:noFill/>
-          <a:extLst>
-            <a:ext uri="{909E8E84-426E-40DD-AFC4-6F175D3DCCD1}">
-              <a14:hiddenFill xmlns:a14="http://schemas.microsoft.com/office/drawing/2010/main">
-                <a:solidFill>
-                  <a:srgbClr val="FFFFFF"/>
-                </a:solidFill>
-              </a14:hiddenFill>
-            </a:ext>
-          </a:extLst>
-        </p:spPr>
-      </p:pic>
+        </p:grpSpPr>
+        <p:pic>
+          <p:nvPicPr>
+            <p:cNvPr id="12" name="Picture 4" descr="Project Jupyter | Try Jupyter">
+              <a:extLst>
+                <a:ext uri="{FF2B5EF4-FFF2-40B4-BE49-F238E27FC236}">
+                  <a16:creationId xmlns:a16="http://schemas.microsoft.com/office/drawing/2014/main" xmlns="" id="{FF92EA36-91E7-292B-D7A0-2D4D83A10F98}"/>
+                </a:ext>
+              </a:extLst>
+            </p:cNvPr>
+            <p:cNvPicPr>
+              <a:picLocks noChangeAspect="1" noChangeArrowheads="1"/>
+            </p:cNvPicPr>
+            <p:nvPr/>
+          </p:nvPicPr>
+          <p:blipFill>
+            <a:blip r:embed="rId3" cstate="print">
+              <a:extLst>
+                <a:ext uri="{28A0092B-C50C-407E-A947-70E740481C1C}">
+                  <a14:useLocalDpi xmlns:a14="http://schemas.microsoft.com/office/drawing/2010/main" val="0"/>
+                </a:ext>
+              </a:extLst>
+            </a:blip>
+            <a:srcRect/>
+            <a:stretch>
+              <a:fillRect/>
+            </a:stretch>
+          </p:blipFill>
+          <p:spPr bwMode="auto">
+            <a:xfrm>
+              <a:off x="3331027" y="3102450"/>
+              <a:ext cx="3461657" cy="1817370"/>
+            </a:xfrm>
+            <a:prstGeom prst="rect">
+              <a:avLst/>
+            </a:prstGeom>
+            <a:noFill/>
+            <a:extLst>
+              <a:ext uri="{909E8E84-426E-40DD-AFC4-6F175D3DCCD1}">
+                <a14:hiddenFill xmlns:a14="http://schemas.microsoft.com/office/drawing/2010/main">
+                  <a:solidFill>
+                    <a:srgbClr val="FFFFFF"/>
+                  </a:solidFill>
+                </a14:hiddenFill>
+              </a:ext>
+            </a:extLst>
+          </p:spPr>
+        </p:pic>
+        <p:pic>
+          <p:nvPicPr>
+            <p:cNvPr id="13" name="Picture 8" descr="Google Colaboratory Colab - Guía Completa Español - Marketing Branding">
+              <a:extLst>
+                <a:ext uri="{FF2B5EF4-FFF2-40B4-BE49-F238E27FC236}">
+                  <a16:creationId xmlns:a16="http://schemas.microsoft.com/office/drawing/2014/main" xmlns="" id="{46F1718A-89E6-9E63-E40B-2B19852D6AA0}"/>
+                </a:ext>
+              </a:extLst>
+            </p:cNvPr>
+            <p:cNvPicPr>
+              <a:picLocks noChangeAspect="1" noChangeArrowheads="1"/>
+            </p:cNvPicPr>
+            <p:nvPr/>
+          </p:nvPicPr>
+          <p:blipFill rotWithShape="1">
+            <a:blip r:embed="rId4" cstate="print">
+              <a:extLst>
+                <a:ext uri="{28A0092B-C50C-407E-A947-70E740481C1C}">
+                  <a14:useLocalDpi xmlns:a14="http://schemas.microsoft.com/office/drawing/2010/main" val="0"/>
+                </a:ext>
+              </a:extLst>
+            </a:blip>
+            <a:srcRect l="5865" r="10641"/>
+            <a:stretch/>
+          </p:blipFill>
+          <p:spPr bwMode="auto">
+            <a:xfrm>
+              <a:off x="6792684" y="2681262"/>
+              <a:ext cx="3331071" cy="2659743"/>
+            </a:xfrm>
+            <a:prstGeom prst="rect">
+              <a:avLst/>
+            </a:prstGeom>
+            <a:noFill/>
+            <a:extLst>
+              <a:ext uri="{909E8E84-426E-40DD-AFC4-6F175D3DCCD1}">
+                <a14:hiddenFill xmlns:a14="http://schemas.microsoft.com/office/drawing/2010/main">
+                  <a:solidFill>
+                    <a:srgbClr val="FFFFFF"/>
+                  </a:solidFill>
+                </a14:hiddenFill>
+              </a:ext>
+            </a:extLst>
+          </p:spPr>
+        </p:pic>
+        <p:pic>
+          <p:nvPicPr>
+            <p:cNvPr id="14" name="Picture 10" descr="IT12A01: FUNDAMENTALS OF PYTHON PROGRAMMING (SF) (SYNCHRONOUS E-LEARNING) -  NTUC LearningHub">
+              <a:extLst>
+                <a:ext uri="{FF2B5EF4-FFF2-40B4-BE49-F238E27FC236}">
+                  <a16:creationId xmlns:a16="http://schemas.microsoft.com/office/drawing/2014/main" xmlns="" id="{33F6B1B4-9B79-D634-3E35-33F24609C848}"/>
+                </a:ext>
+              </a:extLst>
+            </p:cNvPr>
+            <p:cNvPicPr>
+              <a:picLocks noChangeAspect="1" noChangeArrowheads="1"/>
+            </p:cNvPicPr>
+            <p:nvPr/>
+          </p:nvPicPr>
+          <p:blipFill rotWithShape="1">
+            <a:blip r:embed="rId5">
+              <a:extLst>
+                <a:ext uri="{28A0092B-C50C-407E-A947-70E740481C1C}">
+                  <a14:useLocalDpi xmlns:a14="http://schemas.microsoft.com/office/drawing/2010/main" val="0"/>
+                </a:ext>
+              </a:extLst>
+            </a:blip>
+            <a:srcRect l="23319" r="20198"/>
+            <a:stretch/>
+          </p:blipFill>
+          <p:spPr bwMode="auto">
+            <a:xfrm>
+              <a:off x="1752685" y="3176833"/>
+              <a:ext cx="1894114" cy="1877924"/>
+            </a:xfrm>
+            <a:prstGeom prst="rect">
+              <a:avLst/>
+            </a:prstGeom>
+            <a:noFill/>
+            <a:extLst>
+              <a:ext uri="{909E8E84-426E-40DD-AFC4-6F175D3DCCD1}">
+                <a14:hiddenFill xmlns:a14="http://schemas.microsoft.com/office/drawing/2010/main">
+                  <a:solidFill>
+                    <a:srgbClr val="FFFFFF"/>
+                  </a:solidFill>
+                </a14:hiddenFill>
+              </a:ext>
+            </a:extLst>
+          </p:spPr>
+        </p:pic>
+        <p:sp>
+          <p:nvSpPr>
+            <p:cNvPr id="15" name="Sinal de Adição 7">
+              <a:extLst>
+                <a:ext uri="{FF2B5EF4-FFF2-40B4-BE49-F238E27FC236}">
+                  <a16:creationId xmlns:a16="http://schemas.microsoft.com/office/drawing/2014/main" xmlns="" id="{6959EE6C-DCDB-E78B-5C50-EBD3FF3049E2}"/>
+                </a:ext>
+              </a:extLst>
+            </p:cNvPr>
+            <p:cNvSpPr>
+              <a:spLocks noChangeAspect="1"/>
+            </p:cNvSpPr>
+            <p:nvPr/>
+          </p:nvSpPr>
+          <p:spPr>
+            <a:xfrm>
+              <a:off x="3646799" y="3545037"/>
+              <a:ext cx="468000" cy="468000"/>
+            </a:xfrm>
+            <a:prstGeom prst="mathPlus">
+              <a:avLst/>
+            </a:prstGeom>
+          </p:spPr>
+          <p:style>
+            <a:lnRef idx="2">
+              <a:schemeClr val="accent1">
+                <a:shade val="15000"/>
+              </a:schemeClr>
+            </a:lnRef>
+            <a:fillRef idx="1">
+              <a:schemeClr val="accent1"/>
+            </a:fillRef>
+            <a:effectRef idx="0">
+              <a:schemeClr val="accent1"/>
+            </a:effectRef>
+            <a:fontRef idx="minor">
+              <a:schemeClr val="lt1"/>
+            </a:fontRef>
+          </p:style>
+          <p:txBody>
+            <a:bodyPr rtlCol="0" anchor="ctr"/>
+            <a:lstStyle/>
+            <a:p>
+              <a:pPr algn="ctr"/>
+              <a:endParaRPr lang="pt-BR"/>
+            </a:p>
+          </p:txBody>
+        </p:sp>
+        <p:sp>
+          <p:nvSpPr>
+            <p:cNvPr id="17" name="Sinal de Adição 10">
+              <a:extLst>
+                <a:ext uri="{FF2B5EF4-FFF2-40B4-BE49-F238E27FC236}">
+                  <a16:creationId xmlns:a16="http://schemas.microsoft.com/office/drawing/2014/main" xmlns="" id="{30A21FDB-ABA6-9FD5-49EF-7762414AEF0C}"/>
+                </a:ext>
+              </a:extLst>
+            </p:cNvPr>
+            <p:cNvSpPr>
+              <a:spLocks noChangeAspect="1"/>
+            </p:cNvSpPr>
+            <p:nvPr/>
+          </p:nvSpPr>
+          <p:spPr>
+            <a:xfrm>
+              <a:off x="6096043" y="3467980"/>
+              <a:ext cx="468000" cy="468000"/>
+            </a:xfrm>
+            <a:prstGeom prst="mathPlus">
+              <a:avLst/>
+            </a:prstGeom>
+          </p:spPr>
+          <p:style>
+            <a:lnRef idx="2">
+              <a:schemeClr val="accent1">
+                <a:shade val="15000"/>
+              </a:schemeClr>
+            </a:lnRef>
+            <a:fillRef idx="1">
+              <a:schemeClr val="accent1"/>
+            </a:fillRef>
+            <a:effectRef idx="0">
+              <a:schemeClr val="accent1"/>
+            </a:effectRef>
+            <a:fontRef idx="minor">
+              <a:schemeClr val="lt1"/>
+            </a:fontRef>
+          </p:style>
+          <p:txBody>
+            <a:bodyPr rtlCol="0" anchor="ctr"/>
+            <a:lstStyle/>
+            <a:p>
+              <a:pPr algn="ctr"/>
+              <a:endParaRPr lang="pt-BR"/>
+            </a:p>
+          </p:txBody>
+        </p:sp>
+      </p:grpSp>
     </p:spTree>
     <p:extLst>
       <p:ext uri="{BB962C8B-B14F-4D97-AF65-F5344CB8AC3E}">
-        <p14:creationId xmlns:p14="http://schemas.microsoft.com/office/powerpoint/2010/main" val="3053794492"/>
+        <p14:creationId xmlns:p14="http://schemas.microsoft.com/office/powerpoint/2010/main" val="763717033"/>
       </p:ext>
     </p:extLst>
   </p:cSld>
@@ -12474,64 +14142,77 @@
       </p:grpSpPr>
       <p:sp>
         <p:nvSpPr>
-          <p:cNvPr id="4" name="Título 1">
+          <p:cNvPr id="2" name="Title 1">
             <a:extLst>
               <a:ext uri="{FF2B5EF4-FFF2-40B4-BE49-F238E27FC236}">
-                <a16:creationId xmlns:a16="http://schemas.microsoft.com/office/drawing/2014/main" id="{32666AC8-2E17-4DB4-B0F5-60C640CCFD2E}"/>
+                <a16:creationId xmlns:a16="http://schemas.microsoft.com/office/drawing/2014/main" xmlns="" id="{E8FD0E11-3B37-4336-5BF0-C8C033354AF6}"/>
               </a:ext>
             </a:extLst>
           </p:cNvPr>
-          <p:cNvSpPr txBox="1">
-            <a:spLocks/>
-          </p:cNvSpPr>
-          <p:nvPr/>
-        </p:nvSpPr>
-        <p:spPr>
-          <a:xfrm>
-            <a:off x="1431533" y="2720526"/>
-            <a:ext cx="9144000" cy="1029541"/>
-          </a:xfrm>
-          <a:prstGeom prst="rect">
-            <a:avLst/>
-          </a:prstGeom>
-        </p:spPr>
+          <p:cNvSpPr>
+            <a:spLocks noGrp="1"/>
+          </p:cNvSpPr>
+          <p:nvPr>
+            <p:ph type="title"/>
+          </p:nvPr>
+        </p:nvSpPr>
+        <p:spPr/>
         <p:txBody>
-          <a:bodyPr vert="horz" lIns="91440" tIns="45720" rIns="91440" bIns="45720" rtlCol="0" anchor="ctr">
-            <a:normAutofit/>
-          </a:bodyPr>
-          <a:lstStyle>
-            <a:lvl1pPr algn="l" defTabSz="914400" rtl="0" eaLnBrk="1" latinLnBrk="0" hangingPunct="1">
-              <a:lnSpc>
-                <a:spcPct val="90000"/>
-              </a:lnSpc>
-              <a:spcBef>
-                <a:spcPct val="0"/>
-              </a:spcBef>
+          <a:bodyPr/>
+          <a:lstStyle/>
+          <a:p>
+            <a:r>
+              <a:rPr lang="pt-BR" dirty="0"/>
+              <a:t>Lista de exercícios</a:t>
+            </a:r>
+            <a:endParaRPr lang="en-US" dirty="0"/>
+          </a:p>
+        </p:txBody>
+      </p:sp>
+      <p:sp>
+        <p:nvSpPr>
+          <p:cNvPr id="3" name="Content Placeholder 2">
+            <a:extLst>
+              <a:ext uri="{FF2B5EF4-FFF2-40B4-BE49-F238E27FC236}">
+                <a16:creationId xmlns:a16="http://schemas.microsoft.com/office/drawing/2014/main" xmlns="" id="{32CB14AB-72E4-05EB-962C-F8B4618D0574}"/>
+              </a:ext>
+            </a:extLst>
+          </p:cNvPr>
+          <p:cNvSpPr>
+            <a:spLocks noGrp="1"/>
+          </p:cNvSpPr>
+          <p:nvPr>
+            <p:ph idx="1"/>
+          </p:nvPr>
+        </p:nvSpPr>
+        <p:spPr/>
+        <p:txBody>
+          <a:bodyPr/>
+          <a:lstStyle/>
+          <a:p>
+            <a:pPr marL="0" indent="0">
               <a:buNone/>
-              <a:defRPr sz="4400" kern="1200">
-                <a:solidFill>
-                  <a:schemeClr val="tx1"/>
-                </a:solidFill>
-                <a:latin typeface="+mj-lt"/>
-                <a:ea typeface="+mj-ea"/>
-                <a:cs typeface="+mj-cs"/>
-              </a:defRPr>
-            </a:lvl1pPr>
-          </a:lstStyle>
-          <a:p>
-            <a:pPr algn="ctr"/>
-            <a:r>
-              <a:rPr lang="pt-BR" sz="6600" dirty="0"/>
-              <a:t>Perguntas?</a:t>
-            </a:r>
-            <a:endParaRPr lang="pt-BR" sz="6600" b="1" i="1" dirty="0"/>
+            </a:pPr>
+            <a:r>
+              <a:rPr lang="pt-BR" dirty="0"/>
+              <a:t>Lista </a:t>
+            </a:r>
+            <a:r>
+              <a:rPr lang="pt-BR" dirty="0" smtClean="0"/>
+              <a:t>#14 – Q-</a:t>
+            </a:r>
+            <a:r>
+              <a:rPr lang="pt-BR" dirty="0" err="1" smtClean="0"/>
+              <a:t>learning</a:t>
+            </a:r>
+            <a:endParaRPr lang="en-US" dirty="0"/>
           </a:p>
         </p:txBody>
       </p:sp>
     </p:spTree>
     <p:extLst>
       <p:ext uri="{BB962C8B-B14F-4D97-AF65-F5344CB8AC3E}">
-        <p14:creationId xmlns:p14="http://schemas.microsoft.com/office/powerpoint/2010/main" val="3773005660"/>
+        <p14:creationId xmlns:p14="http://schemas.microsoft.com/office/powerpoint/2010/main" val="3294531366"/>
       </p:ext>
     </p:extLst>
   </p:cSld>
@@ -12563,7 +14244,7 @@
           <p:cNvPr id="2" name="Título 1">
             <a:extLst>
               <a:ext uri="{FF2B5EF4-FFF2-40B4-BE49-F238E27FC236}">
-                <a16:creationId xmlns:a16="http://schemas.microsoft.com/office/drawing/2014/main" id="{7F5FF925-67DE-CC62-E869-C6E3C1D771E6}"/>
+                <a16:creationId xmlns:a16="http://schemas.microsoft.com/office/drawing/2014/main" xmlns="" id="{7F5FF925-67DE-CC62-E869-C6E3C1D771E6}"/>
               </a:ext>
             </a:extLst>
           </p:cNvPr>
@@ -12603,7 +14284,7 @@
           <p:cNvPr id="3" name="Espaço Reservado para Conteúdo 2">
             <a:extLst>
               <a:ext uri="{FF2B5EF4-FFF2-40B4-BE49-F238E27FC236}">
-                <a16:creationId xmlns:a16="http://schemas.microsoft.com/office/drawing/2014/main" id="{7DA84068-671A-9D40-4F76-2C57E4F720C2}"/>
+                <a16:creationId xmlns:a16="http://schemas.microsoft.com/office/drawing/2014/main" xmlns="" id="{7DA84068-671A-9D40-4F76-2C57E4F720C2}"/>
               </a:ext>
             </a:extLst>
           </p:cNvPr>
@@ -12666,7 +14347,7 @@
           <p:cNvPr id="2051" name="Picture 3" descr="Understanding the Pillars of Machine Learning: Supervised, Unsupervised,  and Reinforcement Learning">
             <a:extLst>
               <a:ext uri="{FF2B5EF4-FFF2-40B4-BE49-F238E27FC236}">
-                <a16:creationId xmlns:a16="http://schemas.microsoft.com/office/drawing/2014/main" id="{BDF6F402-9EED-6D9D-33D9-227B654D168D}"/>
+                <a16:creationId xmlns:a16="http://schemas.microsoft.com/office/drawing/2014/main" xmlns="" id="{BDF6F402-9EED-6D9D-33D9-227B654D168D}"/>
               </a:ext>
             </a:extLst>
           </p:cNvPr>
@@ -12743,7 +14424,7 @@
           <p:cNvPr id="4" name="Título 1">
             <a:extLst>
               <a:ext uri="{FF2B5EF4-FFF2-40B4-BE49-F238E27FC236}">
-                <a16:creationId xmlns:a16="http://schemas.microsoft.com/office/drawing/2014/main" id="{32666AC8-2E17-4DB4-B0F5-60C640CCFD2E}"/>
+                <a16:creationId xmlns:a16="http://schemas.microsoft.com/office/drawing/2014/main" xmlns="" id="{32666AC8-2E17-4DB4-B0F5-60C640CCFD2E}"/>
               </a:ext>
             </a:extLst>
           </p:cNvPr>
@@ -12788,7 +14469,7 @@
             <a:pPr algn="ctr"/>
             <a:r>
               <a:rPr lang="pt-BR" sz="6600" dirty="0"/>
-              <a:t>Obrigado!</a:t>
+              <a:t>Perguntas?</a:t>
             </a:r>
             <a:endParaRPr lang="pt-BR" sz="6600" b="1" i="1" dirty="0"/>
           </a:p>
@@ -12797,7 +14478,7 @@
     </p:spTree>
     <p:extLst>
       <p:ext uri="{BB962C8B-B14F-4D97-AF65-F5344CB8AC3E}">
-        <p14:creationId xmlns:p14="http://schemas.microsoft.com/office/powerpoint/2010/main" val="2655704619"/>
+        <p14:creationId xmlns:p14="http://schemas.microsoft.com/office/powerpoint/2010/main" val="3773005660"/>
       </p:ext>
     </p:extLst>
   </p:cSld>
@@ -12812,13 +14493,7 @@
   <p:cSld>
     <p:spTree>
       <p:nvGrpSpPr>
-        <p:cNvPr id="1" name="">
-          <a:extLst>
-            <a:ext uri="{FF2B5EF4-FFF2-40B4-BE49-F238E27FC236}">
-              <a16:creationId xmlns:a16="http://schemas.microsoft.com/office/drawing/2014/main" id="{83DFB381-AAB9-2788-1601-EB1230F302AA}"/>
-            </a:ext>
-          </a:extLst>
-        </p:cNvPr>
+        <p:cNvPr id="1" name=""/>
         <p:cNvGrpSpPr/>
         <p:nvPr/>
       </p:nvGrpSpPr>
@@ -12835,7 +14510,7 @@
           <p:cNvPr id="4" name="Título 1">
             <a:extLst>
               <a:ext uri="{FF2B5EF4-FFF2-40B4-BE49-F238E27FC236}">
-                <a16:creationId xmlns:a16="http://schemas.microsoft.com/office/drawing/2014/main" id="{4AF40FF5-E3E4-99F0-8C87-687EB32C12F9}"/>
+                <a16:creationId xmlns:a16="http://schemas.microsoft.com/office/drawing/2014/main" xmlns="" id="{32666AC8-2E17-4DB4-B0F5-60C640CCFD2E}"/>
               </a:ext>
             </a:extLst>
           </p:cNvPr>
@@ -12880,6 +14555,98 @@
             <a:pPr algn="ctr"/>
             <a:r>
               <a:rPr lang="pt-BR" sz="6600" dirty="0"/>
+              <a:t>Obrigado!</a:t>
+            </a:r>
+            <a:endParaRPr lang="pt-BR" sz="6600" b="1" i="1" dirty="0"/>
+          </a:p>
+        </p:txBody>
+      </p:sp>
+    </p:spTree>
+    <p:extLst>
+      <p:ext uri="{BB962C8B-B14F-4D97-AF65-F5344CB8AC3E}">
+        <p14:creationId xmlns:p14="http://schemas.microsoft.com/office/powerpoint/2010/main" val="2655704619"/>
+      </p:ext>
+    </p:extLst>
+  </p:cSld>
+  <p:clrMapOvr>
+    <a:masterClrMapping/>
+  </p:clrMapOvr>
+</p:sld>
+</file>
+
+<file path=ppt/slides/slide32.xml><?xml version="1.0" encoding="utf-8"?>
+<p:sld xmlns:a="http://schemas.openxmlformats.org/drawingml/2006/main" xmlns:r="http://schemas.openxmlformats.org/officeDocument/2006/relationships" xmlns:p="http://schemas.openxmlformats.org/presentationml/2006/main">
+  <p:cSld>
+    <p:spTree>
+      <p:nvGrpSpPr>
+        <p:cNvPr id="1" name="">
+          <a:extLst>
+            <a:ext uri="{FF2B5EF4-FFF2-40B4-BE49-F238E27FC236}">
+              <a16:creationId xmlns:a16="http://schemas.microsoft.com/office/drawing/2014/main" xmlns="" id="{83DFB381-AAB9-2788-1601-EB1230F302AA}"/>
+            </a:ext>
+          </a:extLst>
+        </p:cNvPr>
+        <p:cNvGrpSpPr/>
+        <p:nvPr/>
+      </p:nvGrpSpPr>
+      <p:grpSpPr>
+        <a:xfrm>
+          <a:off x="0" y="0"/>
+          <a:ext cx="0" cy="0"/>
+          <a:chOff x="0" y="0"/>
+          <a:chExt cx="0" cy="0"/>
+        </a:xfrm>
+      </p:grpSpPr>
+      <p:sp>
+        <p:nvSpPr>
+          <p:cNvPr id="4" name="Título 1">
+            <a:extLst>
+              <a:ext uri="{FF2B5EF4-FFF2-40B4-BE49-F238E27FC236}">
+                <a16:creationId xmlns:a16="http://schemas.microsoft.com/office/drawing/2014/main" xmlns="" id="{4AF40FF5-E3E4-99F0-8C87-687EB32C12F9}"/>
+              </a:ext>
+            </a:extLst>
+          </p:cNvPr>
+          <p:cNvSpPr txBox="1">
+            <a:spLocks/>
+          </p:cNvSpPr>
+          <p:nvPr/>
+        </p:nvSpPr>
+        <p:spPr>
+          <a:xfrm>
+            <a:off x="1431533" y="2720526"/>
+            <a:ext cx="9144000" cy="1029541"/>
+          </a:xfrm>
+          <a:prstGeom prst="rect">
+            <a:avLst/>
+          </a:prstGeom>
+        </p:spPr>
+        <p:txBody>
+          <a:bodyPr vert="horz" lIns="91440" tIns="45720" rIns="91440" bIns="45720" rtlCol="0" anchor="ctr">
+            <a:normAutofit/>
+          </a:bodyPr>
+          <a:lstStyle>
+            <a:lvl1pPr algn="l" defTabSz="914400" rtl="0" eaLnBrk="1" latinLnBrk="0" hangingPunct="1">
+              <a:lnSpc>
+                <a:spcPct val="90000"/>
+              </a:lnSpc>
+              <a:spcBef>
+                <a:spcPct val="0"/>
+              </a:spcBef>
+              <a:buNone/>
+              <a:defRPr sz="4400" kern="1200">
+                <a:solidFill>
+                  <a:schemeClr val="tx1"/>
+                </a:solidFill>
+                <a:latin typeface="+mj-lt"/>
+                <a:ea typeface="+mj-ea"/>
+                <a:cs typeface="+mj-cs"/>
+              </a:defRPr>
+            </a:lvl1pPr>
+          </a:lstStyle>
+          <a:p>
+            <a:pPr algn="ctr"/>
+            <a:r>
+              <a:rPr lang="pt-BR" sz="6600" dirty="0"/>
               <a:t>Figuras</a:t>
             </a:r>
             <a:endParaRPr lang="pt-BR" sz="6600" b="1" i="1" dirty="0"/>
@@ -12899,7 +14666,7 @@
 </p:sld>
 </file>
 
-<file path=ppt/slides/slide32.xml><?xml version="1.0" encoding="utf-8"?>
+<file path=ppt/slides/slide33.xml><?xml version="1.0" encoding="utf-8"?>
 <p:sld xmlns:a="http://schemas.openxmlformats.org/drawingml/2006/main" xmlns:r="http://schemas.openxmlformats.org/officeDocument/2006/relationships" xmlns:p="http://schemas.openxmlformats.org/presentationml/2006/main">
   <p:cSld>
     <p:spTree>
@@ -12921,7 +14688,7 @@
           <p:cNvPr id="59" name="Group 58">
             <a:extLst>
               <a:ext uri="{FF2B5EF4-FFF2-40B4-BE49-F238E27FC236}">
-                <a16:creationId xmlns:a16="http://schemas.microsoft.com/office/drawing/2014/main" id="{BB54A8AF-5D7A-DF48-6B51-A97D3BA5AE2B}"/>
+                <a16:creationId xmlns:a16="http://schemas.microsoft.com/office/drawing/2014/main" xmlns="" id="{BB54A8AF-5D7A-DF48-6B51-A97D3BA5AE2B}"/>
               </a:ext>
             </a:extLst>
           </p:cNvPr>
@@ -12941,7 +14708,7 @@
             <p:cNvPr id="26" name="Rectangle 25">
               <a:extLst>
                 <a:ext uri="{FF2B5EF4-FFF2-40B4-BE49-F238E27FC236}">
-                  <a16:creationId xmlns:a16="http://schemas.microsoft.com/office/drawing/2014/main" id="{A78F414E-0878-E9AC-3349-365D683589EF}"/>
+                  <a16:creationId xmlns:a16="http://schemas.microsoft.com/office/drawing/2014/main" xmlns="" id="{A78F414E-0878-E9AC-3349-365D683589EF}"/>
                 </a:ext>
               </a:extLst>
             </p:cNvPr>
@@ -12990,7 +14757,7 @@
             <p:cNvPr id="27" name="Rectangle 26">
               <a:extLst>
                 <a:ext uri="{FF2B5EF4-FFF2-40B4-BE49-F238E27FC236}">
-                  <a16:creationId xmlns:a16="http://schemas.microsoft.com/office/drawing/2014/main" id="{67A2140F-0BEB-DFFC-0173-0DDE81A0BAF4}"/>
+                  <a16:creationId xmlns:a16="http://schemas.microsoft.com/office/drawing/2014/main" xmlns="" id="{67A2140F-0BEB-DFFC-0173-0DDE81A0BAF4}"/>
                 </a:ext>
               </a:extLst>
             </p:cNvPr>
@@ -13039,7 +14806,7 @@
             <p:cNvPr id="33" name="Rectangle 32">
               <a:extLst>
                 <a:ext uri="{FF2B5EF4-FFF2-40B4-BE49-F238E27FC236}">
-                  <a16:creationId xmlns:a16="http://schemas.microsoft.com/office/drawing/2014/main" id="{C67CE66F-B1C9-97C2-5191-323C447A4039}"/>
+                  <a16:creationId xmlns:a16="http://schemas.microsoft.com/office/drawing/2014/main" xmlns="" id="{C67CE66F-B1C9-97C2-5191-323C447A4039}"/>
                 </a:ext>
               </a:extLst>
             </p:cNvPr>
@@ -13088,7 +14855,7 @@
             <p:cNvPr id="34" name="Rectangle 33">
               <a:extLst>
                 <a:ext uri="{FF2B5EF4-FFF2-40B4-BE49-F238E27FC236}">
-                  <a16:creationId xmlns:a16="http://schemas.microsoft.com/office/drawing/2014/main" id="{44116E33-D3F4-D7FB-DCEF-760C9C024249}"/>
+                  <a16:creationId xmlns:a16="http://schemas.microsoft.com/office/drawing/2014/main" xmlns="" id="{44116E33-D3F4-D7FB-DCEF-760C9C024249}"/>
                 </a:ext>
               </a:extLst>
             </p:cNvPr>
@@ -13137,7 +14904,7 @@
             <p:cNvPr id="12" name="Connector: Elbow 11">
               <a:extLst>
                 <a:ext uri="{FF2B5EF4-FFF2-40B4-BE49-F238E27FC236}">
-                  <a16:creationId xmlns:a16="http://schemas.microsoft.com/office/drawing/2014/main" id="{0375811A-BC31-5203-21BF-8C1AEDCA810A}"/>
+                  <a16:creationId xmlns:a16="http://schemas.microsoft.com/office/drawing/2014/main" xmlns="" id="{0375811A-BC31-5203-21BF-8C1AEDCA810A}"/>
                 </a:ext>
               </a:extLst>
             </p:cNvPr>
@@ -13182,7 +14949,7 @@
             <p:cNvPr id="17" name="Rectangle: Rounded Corners 16">
               <a:extLst>
                 <a:ext uri="{FF2B5EF4-FFF2-40B4-BE49-F238E27FC236}">
-                  <a16:creationId xmlns:a16="http://schemas.microsoft.com/office/drawing/2014/main" id="{D957717F-F346-A328-0454-3432762A09F8}"/>
+                  <a16:creationId xmlns:a16="http://schemas.microsoft.com/office/drawing/2014/main" xmlns="" id="{D957717F-F346-A328-0454-3432762A09F8}"/>
                 </a:ext>
               </a:extLst>
             </p:cNvPr>
@@ -13232,7 +14999,7 @@
             <p:cNvPr id="18" name="Rectangle: Rounded Corners 17">
               <a:extLst>
                 <a:ext uri="{FF2B5EF4-FFF2-40B4-BE49-F238E27FC236}">
-                  <a16:creationId xmlns:a16="http://schemas.microsoft.com/office/drawing/2014/main" id="{39EF6FE5-6FBC-BC13-63C8-D6E9E3E272C4}"/>
+                  <a16:creationId xmlns:a16="http://schemas.microsoft.com/office/drawing/2014/main" xmlns="" id="{39EF6FE5-6FBC-BC13-63C8-D6E9E3E272C4}"/>
                 </a:ext>
               </a:extLst>
             </p:cNvPr>
@@ -13284,7 +15051,7 @@
                 <p:cNvPr id="41" name="TextBox 40">
                   <a:extLst>
                     <a:ext uri="{FF2B5EF4-FFF2-40B4-BE49-F238E27FC236}">
-                      <a16:creationId xmlns:a16="http://schemas.microsoft.com/office/drawing/2014/main" id="{DEBC8956-45EC-9A9F-7CAD-7A468058ABF1}"/>
+                      <a16:creationId xmlns:a16="http://schemas.microsoft.com/office/drawing/2014/main" xmlns="" id="{DEBC8956-45EC-9A9F-7CAD-7A468058ABF1}"/>
                     </a:ext>
                   </a:extLst>
                 </p:cNvPr>
@@ -13397,7 +15164,7 @@
                 <p:cNvPr id="10" name="TextBox 9">
                   <a:extLst>
                     <a:ext uri="{FF2B5EF4-FFF2-40B4-BE49-F238E27FC236}">
-                      <a16:creationId xmlns:a16="http://schemas.microsoft.com/office/drawing/2014/main" id="{6B8DF4A4-00E2-9B10-CC12-B0D274CCB842}"/>
+                      <a16:creationId xmlns:a16="http://schemas.microsoft.com/office/drawing/2014/main" xmlns="" id="{6B8DF4A4-00E2-9B10-CC12-B0D274CCB842}"/>
                     </a:ext>
                   </a:extLst>
                 </p:cNvPr>
@@ -13518,7 +15285,7 @@
                 <p:cNvPr id="14" name="TextBox 13">
                   <a:extLst>
                     <a:ext uri="{FF2B5EF4-FFF2-40B4-BE49-F238E27FC236}">
-                      <a16:creationId xmlns:a16="http://schemas.microsoft.com/office/drawing/2014/main" id="{376B01EB-53C8-C2B2-1104-8A2BC1DE4624}"/>
+                      <a16:creationId xmlns:a16="http://schemas.microsoft.com/office/drawing/2014/main" xmlns="" id="{376B01EB-53C8-C2B2-1104-8A2BC1DE4624}"/>
                     </a:ext>
                   </a:extLst>
                 </p:cNvPr>
@@ -13637,7 +15404,7 @@
             <p:cNvPr id="20" name="Rectangle 19">
               <a:extLst>
                 <a:ext uri="{FF2B5EF4-FFF2-40B4-BE49-F238E27FC236}">
-                  <a16:creationId xmlns:a16="http://schemas.microsoft.com/office/drawing/2014/main" id="{8B0A48D5-77C9-C29A-8EF5-BED0E6E38CD2}"/>
+                  <a16:creationId xmlns:a16="http://schemas.microsoft.com/office/drawing/2014/main" xmlns="" id="{8B0A48D5-77C9-C29A-8EF5-BED0E6E38CD2}"/>
                 </a:ext>
               </a:extLst>
             </p:cNvPr>
@@ -13687,7 +15454,7 @@
             <p:cNvPr id="21" name="Rectangle 20">
               <a:extLst>
                 <a:ext uri="{FF2B5EF4-FFF2-40B4-BE49-F238E27FC236}">
-                  <a16:creationId xmlns:a16="http://schemas.microsoft.com/office/drawing/2014/main" id="{48728DA3-DA01-CAB9-540E-37EADA51BE57}"/>
+                  <a16:creationId xmlns:a16="http://schemas.microsoft.com/office/drawing/2014/main" xmlns="" id="{48728DA3-DA01-CAB9-540E-37EADA51BE57}"/>
                 </a:ext>
               </a:extLst>
             </p:cNvPr>
@@ -13737,7 +15504,7 @@
             <p:cNvPr id="25" name="Connector: Elbow 24">
               <a:extLst>
                 <a:ext uri="{FF2B5EF4-FFF2-40B4-BE49-F238E27FC236}">
-                  <a16:creationId xmlns:a16="http://schemas.microsoft.com/office/drawing/2014/main" id="{20E553C2-F044-7C77-F846-B80760291225}"/>
+                  <a16:creationId xmlns:a16="http://schemas.microsoft.com/office/drawing/2014/main" xmlns="" id="{20E553C2-F044-7C77-F846-B80760291225}"/>
                 </a:ext>
               </a:extLst>
             </p:cNvPr>
@@ -13779,7 +15546,7 @@
             <p:cNvPr id="31" name="Straight Arrow Connector 30">
               <a:extLst>
                 <a:ext uri="{FF2B5EF4-FFF2-40B4-BE49-F238E27FC236}">
-                  <a16:creationId xmlns:a16="http://schemas.microsoft.com/office/drawing/2014/main" id="{6AEFECE4-5D15-A8B3-453D-610BA5638D05}"/>
+                  <a16:creationId xmlns:a16="http://schemas.microsoft.com/office/drawing/2014/main" xmlns="" id="{6AEFECE4-5D15-A8B3-453D-610BA5638D05}"/>
                 </a:ext>
               </a:extLst>
             </p:cNvPr>
@@ -13821,7 +15588,7 @@
             <p:cNvPr id="35" name="Straight Arrow Connector 34">
               <a:extLst>
                 <a:ext uri="{FF2B5EF4-FFF2-40B4-BE49-F238E27FC236}">
-                  <a16:creationId xmlns:a16="http://schemas.microsoft.com/office/drawing/2014/main" id="{B6FFE6A0-55AE-62C1-3F6E-5291D436B5AB}"/>
+                  <a16:creationId xmlns:a16="http://schemas.microsoft.com/office/drawing/2014/main" xmlns="" id="{B6FFE6A0-55AE-62C1-3F6E-5291D436B5AB}"/>
                 </a:ext>
               </a:extLst>
             </p:cNvPr>
@@ -13864,7 +15631,7 @@
             <p:cNvPr id="40" name="Connector: Elbow 39">
               <a:extLst>
                 <a:ext uri="{FF2B5EF4-FFF2-40B4-BE49-F238E27FC236}">
-                  <a16:creationId xmlns:a16="http://schemas.microsoft.com/office/drawing/2014/main" id="{73307ED6-2342-7662-DD14-B12FEDB6983C}"/>
+                  <a16:creationId xmlns:a16="http://schemas.microsoft.com/office/drawing/2014/main" xmlns="" id="{73307ED6-2342-7662-DD14-B12FEDB6983C}"/>
                 </a:ext>
               </a:extLst>
             </p:cNvPr>
@@ -13908,7 +15675,7 @@
             <p:cNvPr id="44" name="Straight Connector 43">
               <a:extLst>
                 <a:ext uri="{FF2B5EF4-FFF2-40B4-BE49-F238E27FC236}">
-                  <a16:creationId xmlns:a16="http://schemas.microsoft.com/office/drawing/2014/main" id="{6B737731-0DAB-FB54-8D60-66210A48E60A}"/>
+                  <a16:creationId xmlns:a16="http://schemas.microsoft.com/office/drawing/2014/main" xmlns="" id="{6B737731-0DAB-FB54-8D60-66210A48E60A}"/>
                 </a:ext>
               </a:extLst>
             </p:cNvPr>
@@ -13948,7 +15715,7 @@
             <p:cNvPr id="46" name="Straight Connector 45">
               <a:extLst>
                 <a:ext uri="{FF2B5EF4-FFF2-40B4-BE49-F238E27FC236}">
-                  <a16:creationId xmlns:a16="http://schemas.microsoft.com/office/drawing/2014/main" id="{7AED5B7A-243B-6FAD-C904-A72171DA10E4}"/>
+                  <a16:creationId xmlns:a16="http://schemas.microsoft.com/office/drawing/2014/main" xmlns="" id="{7AED5B7A-243B-6FAD-C904-A72171DA10E4}"/>
                 </a:ext>
               </a:extLst>
             </p:cNvPr>
@@ -13990,7 +15757,7 @@
                 <p:cNvPr id="55" name="TextBox 54">
                   <a:extLst>
                     <a:ext uri="{FF2B5EF4-FFF2-40B4-BE49-F238E27FC236}">
-                      <a16:creationId xmlns:a16="http://schemas.microsoft.com/office/drawing/2014/main" id="{C98BB9BE-FF5B-BD53-700F-EF25882F8757}"/>
+                      <a16:creationId xmlns:a16="http://schemas.microsoft.com/office/drawing/2014/main" xmlns="" id="{C98BB9BE-FF5B-BD53-700F-EF25882F8757}"/>
                     </a:ext>
                   </a:extLst>
                 </p:cNvPr>
@@ -14103,7 +15870,7 @@
                 <p:cNvPr id="56" name="TextBox 55">
                   <a:extLst>
                     <a:ext uri="{FF2B5EF4-FFF2-40B4-BE49-F238E27FC236}">
-                      <a16:creationId xmlns:a16="http://schemas.microsoft.com/office/drawing/2014/main" id="{033C1F87-4FD6-565B-5CE1-B94FB9D5F703}"/>
+                      <a16:creationId xmlns:a16="http://schemas.microsoft.com/office/drawing/2014/main" xmlns="" id="{033C1F87-4FD6-565B-5CE1-B94FB9D5F703}"/>
                     </a:ext>
                   </a:extLst>
                 </p:cNvPr>
@@ -14214,7 +15981,7 @@
             <p:cNvPr id="58" name="Straight Connector 57">
               <a:extLst>
                 <a:ext uri="{FF2B5EF4-FFF2-40B4-BE49-F238E27FC236}">
-                  <a16:creationId xmlns:a16="http://schemas.microsoft.com/office/drawing/2014/main" id="{1A8E8F72-A082-BAC3-6C41-D1C1204F72D8}"/>
+                  <a16:creationId xmlns:a16="http://schemas.microsoft.com/office/drawing/2014/main" xmlns="" id="{1A8E8F72-A082-BAC3-6C41-D1C1204F72D8}"/>
                 </a:ext>
               </a:extLst>
             </p:cNvPr>
@@ -14272,7 +16039,7 @@
         <p:cNvPr id="1" name="">
           <a:extLst>
             <a:ext uri="{FF2B5EF4-FFF2-40B4-BE49-F238E27FC236}">
-              <a16:creationId xmlns:a16="http://schemas.microsoft.com/office/drawing/2014/main" id="{A370B64E-1F58-2FF0-BFB3-B1D955875AD5}"/>
+              <a16:creationId xmlns:a16="http://schemas.microsoft.com/office/drawing/2014/main" xmlns="" id="{A370B64E-1F58-2FF0-BFB3-B1D955875AD5}"/>
             </a:ext>
           </a:extLst>
         </p:cNvPr>
@@ -14292,7 +16059,7 @@
           <p:cNvPr id="2" name="Título 1">
             <a:extLst>
               <a:ext uri="{FF2B5EF4-FFF2-40B4-BE49-F238E27FC236}">
-                <a16:creationId xmlns:a16="http://schemas.microsoft.com/office/drawing/2014/main" id="{86CC3BAE-52FC-3697-DB30-5B05B346937E}"/>
+                <a16:creationId xmlns:a16="http://schemas.microsoft.com/office/drawing/2014/main" xmlns="" id="{86CC3BAE-52FC-3697-DB30-5B05B346937E}"/>
               </a:ext>
             </a:extLst>
           </p:cNvPr>
@@ -14321,7 +16088,7 @@
           <p:cNvPr id="3" name="Espaço Reservado para Conteúdo 2">
             <a:extLst>
               <a:ext uri="{FF2B5EF4-FFF2-40B4-BE49-F238E27FC236}">
-                <a16:creationId xmlns:a16="http://schemas.microsoft.com/office/drawing/2014/main" id="{0A06D34D-8885-14BC-AF7E-F271D7D63333}"/>
+                <a16:creationId xmlns:a16="http://schemas.microsoft.com/office/drawing/2014/main" xmlns="" id="{0A06D34D-8885-14BC-AF7E-F271D7D63333}"/>
               </a:ext>
             </a:extLst>
           </p:cNvPr>
@@ -14402,7 +16169,7 @@
           <p:cNvPr id="4" name="Imagem 16">
             <a:extLst>
               <a:ext uri="{FF2B5EF4-FFF2-40B4-BE49-F238E27FC236}">
-                <a16:creationId xmlns:a16="http://schemas.microsoft.com/office/drawing/2014/main" id="{7937C6EA-BFD8-5278-9EE0-796D1842173C}"/>
+                <a16:creationId xmlns:a16="http://schemas.microsoft.com/office/drawing/2014/main" xmlns="" id="{7937C6EA-BFD8-5278-9EE0-796D1842173C}"/>
               </a:ext>
             </a:extLst>
           </p:cNvPr>
@@ -14454,7 +16221,7 @@
         <p:cNvPr id="1" name="">
           <a:extLst>
             <a:ext uri="{FF2B5EF4-FFF2-40B4-BE49-F238E27FC236}">
-              <a16:creationId xmlns:a16="http://schemas.microsoft.com/office/drawing/2014/main" id="{D3753AED-FA4F-39DE-91A4-E5C845C0C665}"/>
+              <a16:creationId xmlns:a16="http://schemas.microsoft.com/office/drawing/2014/main" xmlns="" id="{D3753AED-FA4F-39DE-91A4-E5C845C0C665}"/>
             </a:ext>
           </a:extLst>
         </p:cNvPr>
@@ -14474,7 +16241,7 @@
           <p:cNvPr id="2" name="Título 1">
             <a:extLst>
               <a:ext uri="{FF2B5EF4-FFF2-40B4-BE49-F238E27FC236}">
-                <a16:creationId xmlns:a16="http://schemas.microsoft.com/office/drawing/2014/main" id="{6E88774E-D7D6-D9E6-4449-244D34EE979C}"/>
+                <a16:creationId xmlns:a16="http://schemas.microsoft.com/office/drawing/2014/main" xmlns="" id="{6E88774E-D7D6-D9E6-4449-244D34EE979C}"/>
               </a:ext>
             </a:extLst>
           </p:cNvPr>
@@ -14503,7 +16270,7 @@
           <p:cNvPr id="3" name="Espaço Reservado para Conteúdo 2">
             <a:extLst>
               <a:ext uri="{FF2B5EF4-FFF2-40B4-BE49-F238E27FC236}">
-                <a16:creationId xmlns:a16="http://schemas.microsoft.com/office/drawing/2014/main" id="{0E79548E-494A-A12A-30F7-F4E225B6C309}"/>
+                <a16:creationId xmlns:a16="http://schemas.microsoft.com/office/drawing/2014/main" xmlns="" id="{0E79548E-494A-A12A-30F7-F4E225B6C309}"/>
               </a:ext>
             </a:extLst>
           </p:cNvPr>
@@ -14578,7 +16345,7 @@
           <p:cNvPr id="6" name="Imagem 16">
             <a:extLst>
               <a:ext uri="{FF2B5EF4-FFF2-40B4-BE49-F238E27FC236}">
-                <a16:creationId xmlns:a16="http://schemas.microsoft.com/office/drawing/2014/main" id="{C8EB1D57-2EF7-64D2-25BE-6F8A0BE933DB}"/>
+                <a16:creationId xmlns:a16="http://schemas.microsoft.com/office/drawing/2014/main" xmlns="" id="{C8EB1D57-2EF7-64D2-25BE-6F8A0BE933DB}"/>
               </a:ext>
             </a:extLst>
           </p:cNvPr>
@@ -14630,7 +16397,7 @@
         <p:cNvPr id="1" name="">
           <a:extLst>
             <a:ext uri="{FF2B5EF4-FFF2-40B4-BE49-F238E27FC236}">
-              <a16:creationId xmlns:a16="http://schemas.microsoft.com/office/drawing/2014/main" id="{D41FFEFA-1EED-2754-CDBD-7CC34D06F8B2}"/>
+              <a16:creationId xmlns:a16="http://schemas.microsoft.com/office/drawing/2014/main" xmlns="" id="{D41FFEFA-1EED-2754-CDBD-7CC34D06F8B2}"/>
             </a:ext>
           </a:extLst>
         </p:cNvPr>
@@ -14650,7 +16417,7 @@
           <p:cNvPr id="2" name="Título 1">
             <a:extLst>
               <a:ext uri="{FF2B5EF4-FFF2-40B4-BE49-F238E27FC236}">
-                <a16:creationId xmlns:a16="http://schemas.microsoft.com/office/drawing/2014/main" id="{E4CDBB74-F243-3F53-FEC5-AF11CE256B39}"/>
+                <a16:creationId xmlns:a16="http://schemas.microsoft.com/office/drawing/2014/main" xmlns="" id="{E4CDBB74-F243-3F53-FEC5-AF11CE256B39}"/>
               </a:ext>
             </a:extLst>
           </p:cNvPr>
@@ -14679,7 +16446,7 @@
           <p:cNvPr id="3" name="Espaço Reservado para Conteúdo 2">
             <a:extLst>
               <a:ext uri="{FF2B5EF4-FFF2-40B4-BE49-F238E27FC236}">
-                <a16:creationId xmlns:a16="http://schemas.microsoft.com/office/drawing/2014/main" id="{8A609E9F-E2C8-D6E3-78D1-C44C117B55A3}"/>
+                <a16:creationId xmlns:a16="http://schemas.microsoft.com/office/drawing/2014/main" xmlns="" id="{8A609E9F-E2C8-D6E3-78D1-C44C117B55A3}"/>
               </a:ext>
             </a:extLst>
           </p:cNvPr>
@@ -14724,7 +16491,7 @@
           <p:cNvPr id="4" name="Imagem 16">
             <a:extLst>
               <a:ext uri="{FF2B5EF4-FFF2-40B4-BE49-F238E27FC236}">
-                <a16:creationId xmlns:a16="http://schemas.microsoft.com/office/drawing/2014/main" id="{DF71A34D-2B36-AF4A-818D-805CF072BD50}"/>
+                <a16:creationId xmlns:a16="http://schemas.microsoft.com/office/drawing/2014/main" xmlns="" id="{DF71A34D-2B36-AF4A-818D-805CF072BD50}"/>
               </a:ext>
             </a:extLst>
           </p:cNvPr>
@@ -14790,7 +16557,7 @@
           <p:cNvPr id="2" name="Title 1">
             <a:extLst>
               <a:ext uri="{FF2B5EF4-FFF2-40B4-BE49-F238E27FC236}">
-                <a16:creationId xmlns:a16="http://schemas.microsoft.com/office/drawing/2014/main" id="{81E045BB-096B-FD28-B7D5-E94A5FD7C8E5}"/>
+                <a16:creationId xmlns:a16="http://schemas.microsoft.com/office/drawing/2014/main" xmlns="" id="{81E045BB-096B-FD28-B7D5-E94A5FD7C8E5}"/>
               </a:ext>
             </a:extLst>
           </p:cNvPr>
@@ -14819,7 +16586,7 @@
           <p:cNvPr id="3" name="Content Placeholder 2">
             <a:extLst>
               <a:ext uri="{FF2B5EF4-FFF2-40B4-BE49-F238E27FC236}">
-                <a16:creationId xmlns:a16="http://schemas.microsoft.com/office/drawing/2014/main" id="{DC3C87D0-4294-EB29-295B-08AD144442B5}"/>
+                <a16:creationId xmlns:a16="http://schemas.microsoft.com/office/drawing/2014/main" xmlns="" id="{DC3C87D0-4294-EB29-295B-08AD144442B5}"/>
               </a:ext>
             </a:extLst>
           </p:cNvPr>
@@ -14887,7 +16654,7 @@
           <p:cNvPr id="4" name="Picture 4" descr="A Beginner's Guide to Reinforcement Learning and its Basic Implementation  from Scratch | by Tanvi Penumudy | Analytics Vidhya | Medium">
             <a:extLst>
               <a:ext uri="{FF2B5EF4-FFF2-40B4-BE49-F238E27FC236}">
-                <a16:creationId xmlns:a16="http://schemas.microsoft.com/office/drawing/2014/main" id="{A37B35F5-6EF1-B612-B863-263AB00420ED}"/>
+                <a16:creationId xmlns:a16="http://schemas.microsoft.com/office/drawing/2014/main" xmlns="" id="{A37B35F5-6EF1-B612-B863-263AB00420ED}"/>
               </a:ext>
             </a:extLst>
           </p:cNvPr>
@@ -14964,7 +16731,7 @@
           <p:cNvPr id="2" name="Title 1">
             <a:extLst>
               <a:ext uri="{FF2B5EF4-FFF2-40B4-BE49-F238E27FC236}">
-                <a16:creationId xmlns:a16="http://schemas.microsoft.com/office/drawing/2014/main" id="{CD479DA3-4A1A-74AE-26DA-FD6E65250CCE}"/>
+                <a16:creationId xmlns:a16="http://schemas.microsoft.com/office/drawing/2014/main" xmlns="" id="{CD479DA3-4A1A-74AE-26DA-FD6E65250CCE}"/>
               </a:ext>
             </a:extLst>
           </p:cNvPr>
@@ -15006,7 +16773,7 @@
               <p:cNvPr id="3" name="Content Placeholder 2">
                 <a:extLst>
                   <a:ext uri="{FF2B5EF4-FFF2-40B4-BE49-F238E27FC236}">
-                    <a16:creationId xmlns:a16="http://schemas.microsoft.com/office/drawing/2014/main" id="{D674119D-90D2-5043-F365-B3EB6F84791A}"/>
+                    <a16:creationId xmlns:a16="http://schemas.microsoft.com/office/drawing/2014/main" xmlns="" id="{D674119D-90D2-5043-F365-B3EB6F84791A}"/>
                   </a:ext>
                 </a:extLst>
               </p:cNvPr>
@@ -15236,7 +17003,7 @@
         <p:cNvPr id="1" name="">
           <a:extLst>
             <a:ext uri="{FF2B5EF4-FFF2-40B4-BE49-F238E27FC236}">
-              <a16:creationId xmlns:a16="http://schemas.microsoft.com/office/drawing/2014/main" id="{DDB2BBDA-DAF3-B7AC-FB99-7C5B9285F912}"/>
+              <a16:creationId xmlns:a16="http://schemas.microsoft.com/office/drawing/2014/main" xmlns="" id="{DDB2BBDA-DAF3-B7AC-FB99-7C5B9285F912}"/>
             </a:ext>
           </a:extLst>
         </p:cNvPr>
@@ -15256,7 +17023,7 @@
           <p:cNvPr id="2" name="Title 1">
             <a:extLst>
               <a:ext uri="{FF2B5EF4-FFF2-40B4-BE49-F238E27FC236}">
-                <a16:creationId xmlns:a16="http://schemas.microsoft.com/office/drawing/2014/main" id="{A98D36C9-8653-8E41-11D8-585B6AC0D03D}"/>
+                <a16:creationId xmlns:a16="http://schemas.microsoft.com/office/drawing/2014/main" xmlns="" id="{A98D36C9-8653-8E41-11D8-585B6AC0D03D}"/>
               </a:ext>
             </a:extLst>
           </p:cNvPr>
@@ -15298,7 +17065,7 @@
               <p:cNvPr id="3" name="Content Placeholder 2">
                 <a:extLst>
                   <a:ext uri="{FF2B5EF4-FFF2-40B4-BE49-F238E27FC236}">
-                    <a16:creationId xmlns:a16="http://schemas.microsoft.com/office/drawing/2014/main" id="{981046E0-93D4-BF9F-C552-72A01838A8A3}"/>
+                    <a16:creationId xmlns:a16="http://schemas.microsoft.com/office/drawing/2014/main" xmlns="" id="{981046E0-93D4-BF9F-C552-72A01838A8A3}"/>
                   </a:ext>
                 </a:extLst>
               </p:cNvPr>
@@ -15693,7 +17460,7 @@
           <p:cNvPr id="61" name="Picture 60">
             <a:extLst>
               <a:ext uri="{FF2B5EF4-FFF2-40B4-BE49-F238E27FC236}">
-                <a16:creationId xmlns:a16="http://schemas.microsoft.com/office/drawing/2014/main" id="{22F895FA-1424-E50C-97F4-4F0BE0413C2F}"/>
+                <a16:creationId xmlns:a16="http://schemas.microsoft.com/office/drawing/2014/main" xmlns="" id="{22F895FA-1424-E50C-97F4-4F0BE0413C2F}"/>
               </a:ext>
             </a:extLst>
           </p:cNvPr>

--- a/slides/C24_Q_learning.pptx
+++ b/slides/C24_Q_learning.pptx
@@ -5,10 +5,10 @@
     <p:sldMasterId id="2147483648" r:id="rId1"/>
   </p:sldMasterIdLst>
   <p:notesMasterIdLst>
-    <p:notesMasterId r:id="rId35"/>
+    <p:notesMasterId r:id="rId36"/>
   </p:notesMasterIdLst>
   <p:handoutMasterIdLst>
-    <p:handoutMasterId r:id="rId36"/>
+    <p:handoutMasterId r:id="rId37"/>
   </p:handoutMasterIdLst>
   <p:sldIdLst>
     <p:sldId id="256" r:id="rId2"/>
@@ -29,21 +29,22 @@
     <p:sldId id="335" r:id="rId17"/>
     <p:sldId id="338" r:id="rId18"/>
     <p:sldId id="336" r:id="rId19"/>
-    <p:sldId id="339" r:id="rId20"/>
-    <p:sldId id="337" r:id="rId21"/>
-    <p:sldId id="316" r:id="rId22"/>
-    <p:sldId id="340" r:id="rId23"/>
-    <p:sldId id="345" r:id="rId24"/>
-    <p:sldId id="341" r:id="rId25"/>
-    <p:sldId id="342" r:id="rId26"/>
-    <p:sldId id="343" r:id="rId27"/>
-    <p:sldId id="344" r:id="rId28"/>
-    <p:sldId id="346" r:id="rId29"/>
-    <p:sldId id="347" r:id="rId30"/>
-    <p:sldId id="293" r:id="rId31"/>
-    <p:sldId id="306" r:id="rId32"/>
-    <p:sldId id="324" r:id="rId33"/>
-    <p:sldId id="323" r:id="rId34"/>
+    <p:sldId id="348" r:id="rId20"/>
+    <p:sldId id="339" r:id="rId21"/>
+    <p:sldId id="337" r:id="rId22"/>
+    <p:sldId id="316" r:id="rId23"/>
+    <p:sldId id="340" r:id="rId24"/>
+    <p:sldId id="345" r:id="rId25"/>
+    <p:sldId id="341" r:id="rId26"/>
+    <p:sldId id="342" r:id="rId27"/>
+    <p:sldId id="343" r:id="rId28"/>
+    <p:sldId id="344" r:id="rId29"/>
+    <p:sldId id="346" r:id="rId30"/>
+    <p:sldId id="347" r:id="rId31"/>
+    <p:sldId id="293" r:id="rId32"/>
+    <p:sldId id="306" r:id="rId33"/>
+    <p:sldId id="324" r:id="rId34"/>
+    <p:sldId id="323" r:id="rId35"/>
   </p:sldIdLst>
   <p:sldSz cx="12192000" cy="6858000"/>
   <p:notesSz cx="7315200" cy="9601200"/>
@@ -955,7 +956,7 @@
         <p:cNvPr id="1" name="">
           <a:extLst>
             <a:ext uri="{FF2B5EF4-FFF2-40B4-BE49-F238E27FC236}">
-              <a16:creationId xmlns:a16="http://schemas.microsoft.com/office/drawing/2014/main" xmlns="" id="{255DD39D-8438-4F45-71B4-9F8747421DFC}"/>
+              <a16:creationId xmlns="" xmlns:a16="http://schemas.microsoft.com/office/drawing/2014/main" id="{255DD39D-8438-4F45-71B4-9F8747421DFC}"/>
             </a:ext>
           </a:extLst>
         </p:cNvPr>
@@ -975,7 +976,7 @@
           <p:cNvPr id="2" name="Slide Image Placeholder 1">
             <a:extLst>
               <a:ext uri="{FF2B5EF4-FFF2-40B4-BE49-F238E27FC236}">
-                <a16:creationId xmlns:a16="http://schemas.microsoft.com/office/drawing/2014/main" xmlns="" id="{6C322D5B-AD1C-1DB1-53A1-6978329C3FD0}"/>
+                <a16:creationId xmlns="" xmlns:a16="http://schemas.microsoft.com/office/drawing/2014/main" id="{6C322D5B-AD1C-1DB1-53A1-6978329C3FD0}"/>
               </a:ext>
             </a:extLst>
           </p:cNvPr>
@@ -993,7 +994,7 @@
           <p:cNvPr id="3" name="Notes Placeholder 2">
             <a:extLst>
               <a:ext uri="{FF2B5EF4-FFF2-40B4-BE49-F238E27FC236}">
-                <a16:creationId xmlns:a16="http://schemas.microsoft.com/office/drawing/2014/main" xmlns="" id="{F5D7455F-337E-5D6B-A02A-380397063D2D}"/>
+                <a16:creationId xmlns="" xmlns:a16="http://schemas.microsoft.com/office/drawing/2014/main" id="{F5D7455F-337E-5D6B-A02A-380397063D2D}"/>
               </a:ext>
             </a:extLst>
           </p:cNvPr>
@@ -1021,7 +1022,7 @@
           <p:cNvPr id="4" name="Slide Number Placeholder 3">
             <a:extLst>
               <a:ext uri="{FF2B5EF4-FFF2-40B4-BE49-F238E27FC236}">
-                <a16:creationId xmlns:a16="http://schemas.microsoft.com/office/drawing/2014/main" xmlns="" id="{B5124413-04E6-A99E-E6BA-F56674216BC5}"/>
+                <a16:creationId xmlns="" xmlns:a16="http://schemas.microsoft.com/office/drawing/2014/main" id="{B5124413-04E6-A99E-E6BA-F56674216BC5}"/>
               </a:ext>
             </a:extLst>
           </p:cNvPr>
@@ -1066,7 +1067,7 @@
         <p:cNvPr id="1" name="">
           <a:extLst>
             <a:ext uri="{FF2B5EF4-FFF2-40B4-BE49-F238E27FC236}">
-              <a16:creationId xmlns:a16="http://schemas.microsoft.com/office/drawing/2014/main" xmlns="" id="{83CD62A6-7D00-3C53-05CF-A6197A8362EA}"/>
+              <a16:creationId xmlns="" xmlns:a16="http://schemas.microsoft.com/office/drawing/2014/main" id="{83CD62A6-7D00-3C53-05CF-A6197A8362EA}"/>
             </a:ext>
           </a:extLst>
         </p:cNvPr>
@@ -1086,7 +1087,7 @@
           <p:cNvPr id="2" name="Slide Image Placeholder 1">
             <a:extLst>
               <a:ext uri="{FF2B5EF4-FFF2-40B4-BE49-F238E27FC236}">
-                <a16:creationId xmlns:a16="http://schemas.microsoft.com/office/drawing/2014/main" xmlns="" id="{6DFDE321-184D-9B7D-CEA2-205606B85A43}"/>
+                <a16:creationId xmlns="" xmlns:a16="http://schemas.microsoft.com/office/drawing/2014/main" id="{6DFDE321-184D-9B7D-CEA2-205606B85A43}"/>
               </a:ext>
             </a:extLst>
           </p:cNvPr>
@@ -1104,7 +1105,7 @@
           <p:cNvPr id="3" name="Notes Placeholder 2">
             <a:extLst>
               <a:ext uri="{FF2B5EF4-FFF2-40B4-BE49-F238E27FC236}">
-                <a16:creationId xmlns:a16="http://schemas.microsoft.com/office/drawing/2014/main" xmlns="" id="{6DA764DC-3F53-958D-91A3-DB06BD4A39DA}"/>
+                <a16:creationId xmlns="" xmlns:a16="http://schemas.microsoft.com/office/drawing/2014/main" id="{6DA764DC-3F53-958D-91A3-DB06BD4A39DA}"/>
               </a:ext>
             </a:extLst>
           </p:cNvPr>
@@ -1132,7 +1133,7 @@
           <p:cNvPr id="4" name="Slide Number Placeholder 3">
             <a:extLst>
               <a:ext uri="{FF2B5EF4-FFF2-40B4-BE49-F238E27FC236}">
-                <a16:creationId xmlns:a16="http://schemas.microsoft.com/office/drawing/2014/main" xmlns="" id="{6BC07E3E-C02F-977B-3C72-FEF303694F11}"/>
+                <a16:creationId xmlns="" xmlns:a16="http://schemas.microsoft.com/office/drawing/2014/main" id="{6BC07E3E-C02F-977B-3C72-FEF303694F11}"/>
               </a:ext>
             </a:extLst>
           </p:cNvPr>
@@ -1457,15 +1458,16 @@
           <a:bodyPr/>
           <a:lstStyle/>
           <a:p>
-            <a:endParaRPr lang="pt-BR" sz="1200" kern="1200" dirty="0">
-              <a:solidFill>
-                <a:schemeClr val="tx1"/>
-              </a:solidFill>
-              <a:effectLst/>
-              <a:latin typeface="+mn-lt"/>
-              <a:ea typeface="+mn-ea"/>
-              <a:cs typeface="+mn-cs"/>
-            </a:endParaRPr>
+            <a:r>
+              <a:rPr lang="pt-BR" dirty="0"/>
+              <a:t>Uma pessoa de frente para dois restaurantes: um que ela sempre vai e ama (Explotação) e um restaurante novo recém-inaugurado (Exploração).</a:t>
+            </a:r>
+          </a:p>
+          <a:p>
+            <a:endParaRPr lang="pt-BR" dirty="0"/>
+          </a:p>
+          <a:p>
+            <a:endParaRPr lang="en-US" dirty="0"/>
           </a:p>
         </p:txBody>
       </p:sp>
@@ -1486,7 +1488,7 @@
           <a:p>
             <a:fld id="{6FC8D850-966F-45A6-8DE7-15B891E7D40D}" type="slidenum">
               <a:rPr lang="pt-BR" smtClean="0"/>
-              <a:t>20</a:t>
+              <a:t>19</a:t>
             </a:fld>
             <a:endParaRPr lang="pt-BR"/>
           </a:p>
@@ -1495,7 +1497,7 @@
     </p:spTree>
     <p:extLst>
       <p:ext uri="{BB962C8B-B14F-4D97-AF65-F5344CB8AC3E}">
-        <p14:creationId xmlns:p14="http://schemas.microsoft.com/office/powerpoint/2010/main" val="596767558"/>
+        <p14:creationId xmlns:p14="http://schemas.microsoft.com/office/powerpoint/2010/main" val="2219677365"/>
       </p:ext>
     </p:extLst>
   </p:cSld>
@@ -1534,8 +1536,100 @@
         </p:nvSpPr>
         <p:spPr/>
       </p:sp>
-      <mc:AlternateContent xmlns:mc="http://schemas.openxmlformats.org/markup-compatibility/2006">
-        <mc:Choice xmlns:a14="http://schemas.microsoft.com/office/drawing/2010/main" Requires="a14">
+      <p:sp>
+        <p:nvSpPr>
+          <p:cNvPr id="3" name="Notes Placeholder 2"/>
+          <p:cNvSpPr>
+            <a:spLocks noGrp="1"/>
+          </p:cNvSpPr>
+          <p:nvPr>
+            <p:ph type="body" idx="1"/>
+          </p:nvPr>
+        </p:nvSpPr>
+        <p:spPr/>
+        <p:txBody>
+          <a:bodyPr/>
+          <a:lstStyle/>
+          <a:p>
+            <a:endParaRPr lang="pt-BR" sz="1200" kern="1200" dirty="0">
+              <a:solidFill>
+                <a:schemeClr val="tx1"/>
+              </a:solidFill>
+              <a:effectLst/>
+              <a:latin typeface="+mn-lt"/>
+              <a:ea typeface="+mn-ea"/>
+              <a:cs typeface="+mn-cs"/>
+            </a:endParaRPr>
+          </a:p>
+        </p:txBody>
+      </p:sp>
+      <p:sp>
+        <p:nvSpPr>
+          <p:cNvPr id="4" name="Slide Number Placeholder 3"/>
+          <p:cNvSpPr>
+            <a:spLocks noGrp="1"/>
+          </p:cNvSpPr>
+          <p:nvPr>
+            <p:ph type="sldNum" sz="quarter" idx="5"/>
+          </p:nvPr>
+        </p:nvSpPr>
+        <p:spPr/>
+        <p:txBody>
+          <a:bodyPr/>
+          <a:lstStyle/>
+          <a:p>
+            <a:fld id="{6FC8D850-966F-45A6-8DE7-15B891E7D40D}" type="slidenum">
+              <a:rPr lang="pt-BR" smtClean="0"/>
+              <a:t>21</a:t>
+            </a:fld>
+            <a:endParaRPr lang="pt-BR"/>
+          </a:p>
+        </p:txBody>
+      </p:sp>
+    </p:spTree>
+    <p:extLst>
+      <p:ext uri="{BB962C8B-B14F-4D97-AF65-F5344CB8AC3E}">
+        <p14:creationId xmlns:p14="http://schemas.microsoft.com/office/powerpoint/2010/main" val="596767558"/>
+      </p:ext>
+    </p:extLst>
+  </p:cSld>
+  <p:clrMapOvr>
+    <a:masterClrMapping/>
+  </p:clrMapOvr>
+</p:notes>
+</file>
+
+<file path=ppt/notesSlides/notesSlide17.xml><?xml version="1.0" encoding="utf-8"?>
+<p:notes xmlns:a="http://schemas.openxmlformats.org/drawingml/2006/main" xmlns:r="http://schemas.openxmlformats.org/officeDocument/2006/relationships" xmlns:p="http://schemas.openxmlformats.org/presentationml/2006/main">
+  <p:cSld>
+    <p:spTree>
+      <p:nvGrpSpPr>
+        <p:cNvPr id="1" name=""/>
+        <p:cNvGrpSpPr/>
+        <p:nvPr/>
+      </p:nvGrpSpPr>
+      <p:grpSpPr>
+        <a:xfrm>
+          <a:off x="0" y="0"/>
+          <a:ext cx="0" cy="0"/>
+          <a:chOff x="0" y="0"/>
+          <a:chExt cx="0" cy="0"/>
+        </a:xfrm>
+      </p:grpSpPr>
+      <p:sp>
+        <p:nvSpPr>
+          <p:cNvPr id="2" name="Slide Image Placeholder 1"/>
+          <p:cNvSpPr>
+            <a:spLocks noGrp="1" noRot="1" noChangeAspect="1"/>
+          </p:cNvSpPr>
+          <p:nvPr>
+            <p:ph type="sldImg"/>
+          </p:nvPr>
+        </p:nvSpPr>
+        <p:spPr/>
+      </p:sp>
+      <mc:AlternateContent xmlns:mc="http://schemas.openxmlformats.org/markup-compatibility/2006" xmlns:a14="http://schemas.microsoft.com/office/drawing/2010/main">
+        <mc:Choice Requires="a14">
           <p:sp>
             <p:nvSpPr>
               <p:cNvPr id="3" name="Notes Placeholder 2"/>
@@ -2087,7 +2181,7 @@
             </p:txBody>
           </p:sp>
         </mc:Choice>
-        <mc:Fallback>
+        <mc:Fallback xmlns="">
           <p:sp>
             <p:nvSpPr>
               <p:cNvPr id="3" name="Notes Placeholder 2"/>
@@ -2274,7 +2368,7 @@
           <a:p>
             <a:fld id="{6FC8D850-966F-45A6-8DE7-15B891E7D40D}" type="slidenum">
               <a:rPr lang="pt-BR" smtClean="0"/>
-              <a:t>22</a:t>
+              <a:t>23</a:t>
             </a:fld>
             <a:endParaRPr lang="pt-BR"/>
           </a:p>
@@ -2284,90 +2378,6 @@
     <p:extLst>
       <p:ext uri="{BB962C8B-B14F-4D97-AF65-F5344CB8AC3E}">
         <p14:creationId xmlns:p14="http://schemas.microsoft.com/office/powerpoint/2010/main" val="2462809402"/>
-      </p:ext>
-    </p:extLst>
-  </p:cSld>
-  <p:clrMapOvr>
-    <a:masterClrMapping/>
-  </p:clrMapOvr>
-</p:notes>
-</file>
-
-<file path=ppt/notesSlides/notesSlide17.xml><?xml version="1.0" encoding="utf-8"?>
-<p:notes xmlns:a="http://schemas.openxmlformats.org/drawingml/2006/main" xmlns:r="http://schemas.openxmlformats.org/officeDocument/2006/relationships" xmlns:p="http://schemas.openxmlformats.org/presentationml/2006/main">
-  <p:cSld>
-    <p:spTree>
-      <p:nvGrpSpPr>
-        <p:cNvPr id="1" name=""/>
-        <p:cNvGrpSpPr/>
-        <p:nvPr/>
-      </p:nvGrpSpPr>
-      <p:grpSpPr>
-        <a:xfrm>
-          <a:off x="0" y="0"/>
-          <a:ext cx="0" cy="0"/>
-          <a:chOff x="0" y="0"/>
-          <a:chExt cx="0" cy="0"/>
-        </a:xfrm>
-      </p:grpSpPr>
-      <p:sp>
-        <p:nvSpPr>
-          <p:cNvPr id="2" name="Slide Image Placeholder 1"/>
-          <p:cNvSpPr>
-            <a:spLocks noGrp="1" noRot="1" noChangeAspect="1"/>
-          </p:cNvSpPr>
-          <p:nvPr>
-            <p:ph type="sldImg"/>
-          </p:nvPr>
-        </p:nvSpPr>
-        <p:spPr/>
-      </p:sp>
-      <p:sp>
-        <p:nvSpPr>
-          <p:cNvPr id="3" name="Notes Placeholder 2"/>
-          <p:cNvSpPr>
-            <a:spLocks noGrp="1"/>
-          </p:cNvSpPr>
-          <p:nvPr>
-            <p:ph type="body" idx="1"/>
-          </p:nvPr>
-        </p:nvSpPr>
-        <p:spPr/>
-        <p:txBody>
-          <a:bodyPr/>
-          <a:lstStyle/>
-          <a:p>
-            <a:endParaRPr lang="en-US" dirty="0"/>
-          </a:p>
-        </p:txBody>
-      </p:sp>
-      <p:sp>
-        <p:nvSpPr>
-          <p:cNvPr id="4" name="Slide Number Placeholder 3"/>
-          <p:cNvSpPr>
-            <a:spLocks noGrp="1"/>
-          </p:cNvSpPr>
-          <p:nvPr>
-            <p:ph type="sldNum" sz="quarter" idx="5"/>
-          </p:nvPr>
-        </p:nvSpPr>
-        <p:spPr/>
-        <p:txBody>
-          <a:bodyPr/>
-          <a:lstStyle/>
-          <a:p>
-            <a:fld id="{6FC8D850-966F-45A6-8DE7-15B891E7D40D}" type="slidenum">
-              <a:rPr lang="pt-BR" smtClean="0"/>
-              <a:t>24</a:t>
-            </a:fld>
-            <a:endParaRPr lang="pt-BR"/>
-          </a:p>
-        </p:txBody>
-      </p:sp>
-    </p:spTree>
-    <p:extLst>
-      <p:ext uri="{BB962C8B-B14F-4D97-AF65-F5344CB8AC3E}">
-        <p14:creationId xmlns:p14="http://schemas.microsoft.com/office/powerpoint/2010/main" val="3365976238"/>
       </p:ext>
     </p:extLst>
   </p:cSld>
@@ -2451,7 +2461,7 @@
     </p:spTree>
     <p:extLst>
       <p:ext uri="{BB962C8B-B14F-4D97-AF65-F5344CB8AC3E}">
-        <p14:creationId xmlns:p14="http://schemas.microsoft.com/office/powerpoint/2010/main" val="3240064613"/>
+        <p14:creationId xmlns:p14="http://schemas.microsoft.com/office/powerpoint/2010/main" val="3365976238"/>
       </p:ext>
     </p:extLst>
   </p:cSld>
@@ -2535,7 +2545,7 @@
     </p:spTree>
     <p:extLst>
       <p:ext uri="{BB962C8B-B14F-4D97-AF65-F5344CB8AC3E}">
-        <p14:creationId xmlns:p14="http://schemas.microsoft.com/office/powerpoint/2010/main" val="1000199276"/>
+        <p14:creationId xmlns:p14="http://schemas.microsoft.com/office/powerpoint/2010/main" val="3240064613"/>
       </p:ext>
     </p:extLst>
   </p:cSld>
@@ -2673,14 +2683,6 @@
           <a:bodyPr/>
           <a:lstStyle/>
           <a:p>
-            <a:r>
-              <a:rPr lang="pt-BR" b="1" dirty="0" smtClean="0"/>
-              <a:t>Finanças:</a:t>
-            </a:r>
-            <a:r>
-              <a:rPr lang="pt-BR" dirty="0" smtClean="0"/>
-              <a:t> Algoritmos de trading que aprendem a comprar e vender ações maximizando o lucro ao longo de meses.</a:t>
-            </a:r>
             <a:endParaRPr lang="en-US" dirty="0"/>
           </a:p>
         </p:txBody>
@@ -2711,7 +2713,7 @@
     </p:spTree>
     <p:extLst>
       <p:ext uri="{BB962C8B-B14F-4D97-AF65-F5344CB8AC3E}">
-        <p14:creationId xmlns:p14="http://schemas.microsoft.com/office/powerpoint/2010/main" val="230184113"/>
+        <p14:creationId xmlns:p14="http://schemas.microsoft.com/office/powerpoint/2010/main" val="1000199276"/>
       </p:ext>
     </p:extLst>
   </p:cSld>
@@ -2765,29 +2767,14 @@
           <a:bodyPr/>
           <a:lstStyle/>
           <a:p>
-            <a:pPr marL="0" marR="0" lvl="0" indent="0" algn="l" defTabSz="914400" rtl="0" eaLnBrk="1" fontAlgn="auto" latinLnBrk="0" hangingPunct="1">
-              <a:lnSpc>
-                <a:spcPct val="100000"/>
-              </a:lnSpc>
-              <a:spcBef>
-                <a:spcPts val="0"/>
-              </a:spcBef>
-              <a:spcAft>
-                <a:spcPts val="0"/>
-              </a:spcAft>
-              <a:buClrTx/>
-              <a:buSzTx/>
-              <a:buFontTx/>
-              <a:buNone/>
-              <a:tabLst/>
-              <a:defRPr/>
-            </a:pPr>
-            <a:r>
-              <a:rPr lang="en-US"/>
-              <a:t>https://colab.research.google.com/github/zz4fap/c24_inteligencia_artificial/blob/master/notebooks/mlp.ipynb</a:t>
-            </a:r>
-          </a:p>
-          <a:p>
+            <a:r>
+              <a:rPr lang="pt-BR" b="1" dirty="0" smtClean="0"/>
+              <a:t>Finanças:</a:t>
+            </a:r>
+            <a:r>
+              <a:rPr lang="pt-BR" dirty="0" smtClean="0"/>
+              <a:t> Algoritmos de trading que aprendem a comprar e vender ações maximizando o lucro ao longo de meses.</a:t>
+            </a:r>
             <a:endParaRPr lang="en-US" dirty="0"/>
           </a:p>
         </p:txBody>
@@ -2818,7 +2805,7 @@
     </p:spTree>
     <p:extLst>
       <p:ext uri="{BB962C8B-B14F-4D97-AF65-F5344CB8AC3E}">
-        <p14:creationId xmlns:p14="http://schemas.microsoft.com/office/powerpoint/2010/main" val="477841902"/>
+        <p14:creationId xmlns:p14="http://schemas.microsoft.com/office/powerpoint/2010/main" val="230184113"/>
       </p:ext>
     </p:extLst>
   </p:cSld>
@@ -2872,6 +2859,29 @@
           <a:bodyPr/>
           <a:lstStyle/>
           <a:p>
+            <a:pPr marL="0" marR="0" lvl="0" indent="0" algn="l" defTabSz="914400" rtl="0" eaLnBrk="1" fontAlgn="auto" latinLnBrk="0" hangingPunct="1">
+              <a:lnSpc>
+                <a:spcPct val="100000"/>
+              </a:lnSpc>
+              <a:spcBef>
+                <a:spcPts val="0"/>
+              </a:spcBef>
+              <a:spcAft>
+                <a:spcPts val="0"/>
+              </a:spcAft>
+              <a:buClrTx/>
+              <a:buSzTx/>
+              <a:buFontTx/>
+              <a:buNone/>
+              <a:tabLst/>
+              <a:defRPr/>
+            </a:pPr>
+            <a:r>
+              <a:rPr lang="en-US"/>
+              <a:t>https://colab.research.google.com/github/zz4fap/c24_inteligencia_artificial/blob/master/notebooks/mlp.ipynb</a:t>
+            </a:r>
+          </a:p>
+          <a:p>
             <a:endParaRPr lang="en-US" dirty="0"/>
           </a:p>
         </p:txBody>
@@ -2894,6 +2904,90 @@
             <a:fld id="{6FC8D850-966F-45A6-8DE7-15B891E7D40D}" type="slidenum">
               <a:rPr lang="pt-BR" smtClean="0"/>
               <a:t>29</a:t>
+            </a:fld>
+            <a:endParaRPr lang="pt-BR"/>
+          </a:p>
+        </p:txBody>
+      </p:sp>
+    </p:spTree>
+    <p:extLst>
+      <p:ext uri="{BB962C8B-B14F-4D97-AF65-F5344CB8AC3E}">
+        <p14:creationId xmlns:p14="http://schemas.microsoft.com/office/powerpoint/2010/main" val="477841902"/>
+      </p:ext>
+    </p:extLst>
+  </p:cSld>
+  <p:clrMapOvr>
+    <a:masterClrMapping/>
+  </p:clrMapOvr>
+</p:notes>
+</file>
+
+<file path=ppt/notesSlides/notesSlide23.xml><?xml version="1.0" encoding="utf-8"?>
+<p:notes xmlns:a="http://schemas.openxmlformats.org/drawingml/2006/main" xmlns:r="http://schemas.openxmlformats.org/officeDocument/2006/relationships" xmlns:p="http://schemas.openxmlformats.org/presentationml/2006/main">
+  <p:cSld>
+    <p:spTree>
+      <p:nvGrpSpPr>
+        <p:cNvPr id="1" name=""/>
+        <p:cNvGrpSpPr/>
+        <p:nvPr/>
+      </p:nvGrpSpPr>
+      <p:grpSpPr>
+        <a:xfrm>
+          <a:off x="0" y="0"/>
+          <a:ext cx="0" cy="0"/>
+          <a:chOff x="0" y="0"/>
+          <a:chExt cx="0" cy="0"/>
+        </a:xfrm>
+      </p:grpSpPr>
+      <p:sp>
+        <p:nvSpPr>
+          <p:cNvPr id="2" name="Slide Image Placeholder 1"/>
+          <p:cNvSpPr>
+            <a:spLocks noGrp="1" noRot="1" noChangeAspect="1"/>
+          </p:cNvSpPr>
+          <p:nvPr>
+            <p:ph type="sldImg"/>
+          </p:nvPr>
+        </p:nvSpPr>
+        <p:spPr/>
+      </p:sp>
+      <p:sp>
+        <p:nvSpPr>
+          <p:cNvPr id="3" name="Notes Placeholder 2"/>
+          <p:cNvSpPr>
+            <a:spLocks noGrp="1"/>
+          </p:cNvSpPr>
+          <p:nvPr>
+            <p:ph type="body" idx="1"/>
+          </p:nvPr>
+        </p:nvSpPr>
+        <p:spPr/>
+        <p:txBody>
+          <a:bodyPr/>
+          <a:lstStyle/>
+          <a:p>
+            <a:endParaRPr lang="en-US" dirty="0"/>
+          </a:p>
+        </p:txBody>
+      </p:sp>
+      <p:sp>
+        <p:nvSpPr>
+          <p:cNvPr id="4" name="Slide Number Placeholder 3"/>
+          <p:cNvSpPr>
+            <a:spLocks noGrp="1"/>
+          </p:cNvSpPr>
+          <p:nvPr>
+            <p:ph type="sldNum" sz="quarter" idx="5"/>
+          </p:nvPr>
+        </p:nvSpPr>
+        <p:spPr/>
+        <p:txBody>
+          <a:bodyPr/>
+          <a:lstStyle/>
+          <a:p>
+            <a:fld id="{6FC8D850-966F-45A6-8DE7-15B891E7D40D}" type="slidenum">
+              <a:rPr lang="pt-BR" smtClean="0"/>
+              <a:t>30</a:t>
             </a:fld>
             <a:endParaRPr lang="pt-BR"/>
           </a:p>
@@ -2920,7 +3014,7 @@
         <p:cNvPr id="1" name="">
           <a:extLst>
             <a:ext uri="{FF2B5EF4-FFF2-40B4-BE49-F238E27FC236}">
-              <a16:creationId xmlns:a16="http://schemas.microsoft.com/office/drawing/2014/main" xmlns="" id="{5B4C3711-83BC-221A-A341-2BE62BCF89DC}"/>
+              <a16:creationId xmlns="" xmlns:a16="http://schemas.microsoft.com/office/drawing/2014/main" id="{5B4C3711-83BC-221A-A341-2BE62BCF89DC}"/>
             </a:ext>
           </a:extLst>
         </p:cNvPr>
@@ -2940,7 +3034,7 @@
           <p:cNvPr id="2" name="Slide Image Placeholder 1">
             <a:extLst>
               <a:ext uri="{FF2B5EF4-FFF2-40B4-BE49-F238E27FC236}">
-                <a16:creationId xmlns:a16="http://schemas.microsoft.com/office/drawing/2014/main" xmlns="" id="{5957728F-CFA3-D0A6-7780-F800EBAC1F6E}"/>
+                <a16:creationId xmlns="" xmlns:a16="http://schemas.microsoft.com/office/drawing/2014/main" id="{5957728F-CFA3-D0A6-7780-F800EBAC1F6E}"/>
               </a:ext>
             </a:extLst>
           </p:cNvPr>
@@ -2958,7 +3052,7 @@
           <p:cNvPr id="3" name="Notes Placeholder 2">
             <a:extLst>
               <a:ext uri="{FF2B5EF4-FFF2-40B4-BE49-F238E27FC236}">
-                <a16:creationId xmlns:a16="http://schemas.microsoft.com/office/drawing/2014/main" xmlns="" id="{4AD3E5CB-A8B8-7F4B-200F-94D044C81C3D}"/>
+                <a16:creationId xmlns="" xmlns:a16="http://schemas.microsoft.com/office/drawing/2014/main" id="{4AD3E5CB-A8B8-7F4B-200F-94D044C81C3D}"/>
               </a:ext>
             </a:extLst>
           </p:cNvPr>
@@ -2983,7 +3077,7 @@
           <p:cNvPr id="4" name="Slide Number Placeholder 3">
             <a:extLst>
               <a:ext uri="{FF2B5EF4-FFF2-40B4-BE49-F238E27FC236}">
-                <a16:creationId xmlns:a16="http://schemas.microsoft.com/office/drawing/2014/main" xmlns="" id="{3F9D8EC2-522A-3A24-97FD-162C1CF3C132}"/>
+                <a16:creationId xmlns="" xmlns:a16="http://schemas.microsoft.com/office/drawing/2014/main" id="{3F9D8EC2-522A-3A24-97FD-162C1CF3C132}"/>
               </a:ext>
             </a:extLst>
           </p:cNvPr>
@@ -3028,7 +3122,7 @@
         <p:cNvPr id="1" name="">
           <a:extLst>
             <a:ext uri="{FF2B5EF4-FFF2-40B4-BE49-F238E27FC236}">
-              <a16:creationId xmlns:a16="http://schemas.microsoft.com/office/drawing/2014/main" xmlns="" id="{478600EE-A6A2-2235-BCC6-6DE0C5D8DE78}"/>
+              <a16:creationId xmlns="" xmlns:a16="http://schemas.microsoft.com/office/drawing/2014/main" id="{478600EE-A6A2-2235-BCC6-6DE0C5D8DE78}"/>
             </a:ext>
           </a:extLst>
         </p:cNvPr>
@@ -3048,7 +3142,7 @@
           <p:cNvPr id="2" name="Slide Image Placeholder 1">
             <a:extLst>
               <a:ext uri="{FF2B5EF4-FFF2-40B4-BE49-F238E27FC236}">
-                <a16:creationId xmlns:a16="http://schemas.microsoft.com/office/drawing/2014/main" xmlns="" id="{B1C41149-DCAF-E8F8-FB78-0B242E221738}"/>
+                <a16:creationId xmlns="" xmlns:a16="http://schemas.microsoft.com/office/drawing/2014/main" id="{B1C41149-DCAF-E8F8-FB78-0B242E221738}"/>
               </a:ext>
             </a:extLst>
           </p:cNvPr>
@@ -3066,7 +3160,7 @@
           <p:cNvPr id="3" name="Notes Placeholder 2">
             <a:extLst>
               <a:ext uri="{FF2B5EF4-FFF2-40B4-BE49-F238E27FC236}">
-                <a16:creationId xmlns:a16="http://schemas.microsoft.com/office/drawing/2014/main" xmlns="" id="{F4C5329E-ECB5-4CB1-3A33-CFC57176F475}"/>
+                <a16:creationId xmlns="" xmlns:a16="http://schemas.microsoft.com/office/drawing/2014/main" id="{F4C5329E-ECB5-4CB1-3A33-CFC57176F475}"/>
               </a:ext>
             </a:extLst>
           </p:cNvPr>
@@ -3091,7 +3185,7 @@
           <p:cNvPr id="4" name="Slide Number Placeholder 3">
             <a:extLst>
               <a:ext uri="{FF2B5EF4-FFF2-40B4-BE49-F238E27FC236}">
-                <a16:creationId xmlns:a16="http://schemas.microsoft.com/office/drawing/2014/main" xmlns="" id="{37AB7C02-5FA9-66E4-2433-F97393A5C0BA}"/>
+                <a16:creationId xmlns="" xmlns:a16="http://schemas.microsoft.com/office/drawing/2014/main" id="{37AB7C02-5FA9-66E4-2433-F97393A5C0BA}"/>
               </a:ext>
             </a:extLst>
           </p:cNvPr>
@@ -3136,7 +3230,7 @@
         <p:cNvPr id="1" name="">
           <a:extLst>
             <a:ext uri="{FF2B5EF4-FFF2-40B4-BE49-F238E27FC236}">
-              <a16:creationId xmlns:a16="http://schemas.microsoft.com/office/drawing/2014/main" xmlns="" id="{92F2E69C-0407-4619-FFB1-7502CF033EBA}"/>
+              <a16:creationId xmlns="" xmlns:a16="http://schemas.microsoft.com/office/drawing/2014/main" id="{92F2E69C-0407-4619-FFB1-7502CF033EBA}"/>
             </a:ext>
           </a:extLst>
         </p:cNvPr>
@@ -3156,7 +3250,7 @@
           <p:cNvPr id="2" name="Slide Image Placeholder 1">
             <a:extLst>
               <a:ext uri="{FF2B5EF4-FFF2-40B4-BE49-F238E27FC236}">
-                <a16:creationId xmlns:a16="http://schemas.microsoft.com/office/drawing/2014/main" xmlns="" id="{E3C6894B-B13E-3C0F-BEC3-8A663E98508F}"/>
+                <a16:creationId xmlns="" xmlns:a16="http://schemas.microsoft.com/office/drawing/2014/main" id="{E3C6894B-B13E-3C0F-BEC3-8A663E98508F}"/>
               </a:ext>
             </a:extLst>
           </p:cNvPr>
@@ -3174,7 +3268,7 @@
           <p:cNvPr id="3" name="Notes Placeholder 2">
             <a:extLst>
               <a:ext uri="{FF2B5EF4-FFF2-40B4-BE49-F238E27FC236}">
-                <a16:creationId xmlns:a16="http://schemas.microsoft.com/office/drawing/2014/main" xmlns="" id="{B76A1B01-A242-46E3-F92E-FB0EA28821F9}"/>
+                <a16:creationId xmlns="" xmlns:a16="http://schemas.microsoft.com/office/drawing/2014/main" id="{B76A1B01-A242-46E3-F92E-FB0EA28821F9}"/>
               </a:ext>
             </a:extLst>
           </p:cNvPr>
@@ -3199,7 +3293,7 @@
           <p:cNvPr id="4" name="Slide Number Placeholder 3">
             <a:extLst>
               <a:ext uri="{FF2B5EF4-FFF2-40B4-BE49-F238E27FC236}">
-                <a16:creationId xmlns:a16="http://schemas.microsoft.com/office/drawing/2014/main" xmlns="" id="{4BA915CE-E13E-5840-D0C6-249ACB7C2C1D}"/>
+                <a16:creationId xmlns="" xmlns:a16="http://schemas.microsoft.com/office/drawing/2014/main" id="{4BA915CE-E13E-5840-D0C6-249ACB7C2C1D}"/>
               </a:ext>
             </a:extLst>
           </p:cNvPr>
@@ -3348,7 +3442,7 @@
         <p:cNvPr id="1" name="">
           <a:extLst>
             <a:ext uri="{FF2B5EF4-FFF2-40B4-BE49-F238E27FC236}">
-              <a16:creationId xmlns:a16="http://schemas.microsoft.com/office/drawing/2014/main" xmlns="" id="{0D0A5E72-3763-6194-5E85-BE26354035A3}"/>
+              <a16:creationId xmlns="" xmlns:a16="http://schemas.microsoft.com/office/drawing/2014/main" id="{0D0A5E72-3763-6194-5E85-BE26354035A3}"/>
             </a:ext>
           </a:extLst>
         </p:cNvPr>
@@ -3368,7 +3462,7 @@
           <p:cNvPr id="2" name="Slide Image Placeholder 1">
             <a:extLst>
               <a:ext uri="{FF2B5EF4-FFF2-40B4-BE49-F238E27FC236}">
-                <a16:creationId xmlns:a16="http://schemas.microsoft.com/office/drawing/2014/main" xmlns="" id="{82466988-6655-8B01-840E-0BE3EDB68F07}"/>
+                <a16:creationId xmlns="" xmlns:a16="http://schemas.microsoft.com/office/drawing/2014/main" id="{82466988-6655-8B01-840E-0BE3EDB68F07}"/>
               </a:ext>
             </a:extLst>
           </p:cNvPr>
@@ -3386,7 +3480,7 @@
           <p:cNvPr id="3" name="Notes Placeholder 2">
             <a:extLst>
               <a:ext uri="{FF2B5EF4-FFF2-40B4-BE49-F238E27FC236}">
-                <a16:creationId xmlns:a16="http://schemas.microsoft.com/office/drawing/2014/main" xmlns="" id="{5E09F3D0-11CA-2E8D-04C5-104C59DCE708}"/>
+                <a16:creationId xmlns="" xmlns:a16="http://schemas.microsoft.com/office/drawing/2014/main" id="{5E09F3D0-11CA-2E8D-04C5-104C59DCE708}"/>
               </a:ext>
             </a:extLst>
           </p:cNvPr>
@@ -3431,7 +3525,7 @@
           <p:cNvPr id="4" name="Slide Number Placeholder 3">
             <a:extLst>
               <a:ext uri="{FF2B5EF4-FFF2-40B4-BE49-F238E27FC236}">
-                <a16:creationId xmlns:a16="http://schemas.microsoft.com/office/drawing/2014/main" xmlns="" id="{68F0BCD7-F825-C67D-D845-8316B4C4B6D6}"/>
+                <a16:creationId xmlns="" xmlns:a16="http://schemas.microsoft.com/office/drawing/2014/main" id="{68F0BCD7-F825-C67D-D845-8316B4C4B6D6}"/>
               </a:ext>
             </a:extLst>
           </p:cNvPr>
@@ -3476,7 +3570,7 @@
         <p:cNvPr id="1" name="">
           <a:extLst>
             <a:ext uri="{FF2B5EF4-FFF2-40B4-BE49-F238E27FC236}">
-              <a16:creationId xmlns:a16="http://schemas.microsoft.com/office/drawing/2014/main" xmlns="" id="{0D0A5E72-3763-6194-5E85-BE26354035A3}"/>
+              <a16:creationId xmlns="" xmlns:a16="http://schemas.microsoft.com/office/drawing/2014/main" id="{0D0A5E72-3763-6194-5E85-BE26354035A3}"/>
             </a:ext>
           </a:extLst>
         </p:cNvPr>
@@ -3496,7 +3590,7 @@
           <p:cNvPr id="2" name="Slide Image Placeholder 1">
             <a:extLst>
               <a:ext uri="{FF2B5EF4-FFF2-40B4-BE49-F238E27FC236}">
-                <a16:creationId xmlns:a16="http://schemas.microsoft.com/office/drawing/2014/main" xmlns="" id="{82466988-6655-8B01-840E-0BE3EDB68F07}"/>
+                <a16:creationId xmlns="" xmlns:a16="http://schemas.microsoft.com/office/drawing/2014/main" id="{82466988-6655-8B01-840E-0BE3EDB68F07}"/>
               </a:ext>
             </a:extLst>
           </p:cNvPr>
@@ -3514,7 +3608,7 @@
           <p:cNvPr id="3" name="Notes Placeholder 2">
             <a:extLst>
               <a:ext uri="{FF2B5EF4-FFF2-40B4-BE49-F238E27FC236}">
-                <a16:creationId xmlns:a16="http://schemas.microsoft.com/office/drawing/2014/main" xmlns="" id="{5E09F3D0-11CA-2E8D-04C5-104C59DCE708}"/>
+                <a16:creationId xmlns="" xmlns:a16="http://schemas.microsoft.com/office/drawing/2014/main" id="{5E09F3D0-11CA-2E8D-04C5-104C59DCE708}"/>
               </a:ext>
             </a:extLst>
           </p:cNvPr>
@@ -3559,7 +3653,7 @@
           <p:cNvPr id="4" name="Slide Number Placeholder 3">
             <a:extLst>
               <a:ext uri="{FF2B5EF4-FFF2-40B4-BE49-F238E27FC236}">
-                <a16:creationId xmlns:a16="http://schemas.microsoft.com/office/drawing/2014/main" xmlns="" id="{68F0BCD7-F825-C67D-D845-8316B4C4B6D6}"/>
+                <a16:creationId xmlns="" xmlns:a16="http://schemas.microsoft.com/office/drawing/2014/main" id="{68F0BCD7-F825-C67D-D845-8316B4C4B6D6}"/>
               </a:ext>
             </a:extLst>
           </p:cNvPr>
@@ -3742,7 +3836,7 @@
           <p:cNvPr id="2" name="Título 1">
             <a:extLst>
               <a:ext uri="{FF2B5EF4-FFF2-40B4-BE49-F238E27FC236}">
-                <a16:creationId xmlns:a16="http://schemas.microsoft.com/office/drawing/2014/main" xmlns="" id="{1DB9B4FF-B06E-403C-A326-BDC64D8FF94E}"/>
+                <a16:creationId xmlns="" xmlns:a16="http://schemas.microsoft.com/office/drawing/2014/main" id="{1DB9B4FF-B06E-403C-A326-BDC64D8FF94E}"/>
               </a:ext>
             </a:extLst>
           </p:cNvPr>
@@ -3779,7 +3873,7 @@
           <p:cNvPr id="3" name="Subtítulo 2">
             <a:extLst>
               <a:ext uri="{FF2B5EF4-FFF2-40B4-BE49-F238E27FC236}">
-                <a16:creationId xmlns:a16="http://schemas.microsoft.com/office/drawing/2014/main" xmlns="" id="{247BDFCE-746E-45BF-A319-4733D58D1632}"/>
+                <a16:creationId xmlns="" xmlns:a16="http://schemas.microsoft.com/office/drawing/2014/main" id="{247BDFCE-746E-45BF-A319-4733D58D1632}"/>
               </a:ext>
             </a:extLst>
           </p:cNvPr>
@@ -3849,7 +3943,7 @@
           <p:cNvPr id="4" name="Espaço Reservado para Data 3">
             <a:extLst>
               <a:ext uri="{FF2B5EF4-FFF2-40B4-BE49-F238E27FC236}">
-                <a16:creationId xmlns:a16="http://schemas.microsoft.com/office/drawing/2014/main" xmlns="" id="{9EDE2778-5372-4104-B96D-968184DA8288}"/>
+                <a16:creationId xmlns="" xmlns:a16="http://schemas.microsoft.com/office/drawing/2014/main" id="{9EDE2778-5372-4104-B96D-968184DA8288}"/>
               </a:ext>
             </a:extLst>
           </p:cNvPr>
@@ -3878,7 +3972,7 @@
           <p:cNvPr id="5" name="Espaço Reservado para Rodapé 4">
             <a:extLst>
               <a:ext uri="{FF2B5EF4-FFF2-40B4-BE49-F238E27FC236}">
-                <a16:creationId xmlns:a16="http://schemas.microsoft.com/office/drawing/2014/main" xmlns="" id="{C1DD0F41-C861-4051-988D-3024A37A4B93}"/>
+                <a16:creationId xmlns="" xmlns:a16="http://schemas.microsoft.com/office/drawing/2014/main" id="{C1DD0F41-C861-4051-988D-3024A37A4B93}"/>
               </a:ext>
             </a:extLst>
           </p:cNvPr>
@@ -3903,7 +3997,7 @@
           <p:cNvPr id="6" name="Espaço Reservado para Número de Slide 5">
             <a:extLst>
               <a:ext uri="{FF2B5EF4-FFF2-40B4-BE49-F238E27FC236}">
-                <a16:creationId xmlns:a16="http://schemas.microsoft.com/office/drawing/2014/main" xmlns="" id="{07E5967E-D980-431A-A5DB-3F0C5030A81E}"/>
+                <a16:creationId xmlns="" xmlns:a16="http://schemas.microsoft.com/office/drawing/2014/main" id="{07E5967E-D980-431A-A5DB-3F0C5030A81E}"/>
               </a:ext>
             </a:extLst>
           </p:cNvPr>
@@ -3962,7 +4056,7 @@
           <p:cNvPr id="2" name="Título 1">
             <a:extLst>
               <a:ext uri="{FF2B5EF4-FFF2-40B4-BE49-F238E27FC236}">
-                <a16:creationId xmlns:a16="http://schemas.microsoft.com/office/drawing/2014/main" xmlns="" id="{9036C49F-3E68-4175-81BA-3C3FEE44308A}"/>
+                <a16:creationId xmlns="" xmlns:a16="http://schemas.microsoft.com/office/drawing/2014/main" id="{9036C49F-3E68-4175-81BA-3C3FEE44308A}"/>
               </a:ext>
             </a:extLst>
           </p:cNvPr>
@@ -3990,7 +4084,7 @@
           <p:cNvPr id="3" name="Espaço Reservado para Texto Vertical 2">
             <a:extLst>
               <a:ext uri="{FF2B5EF4-FFF2-40B4-BE49-F238E27FC236}">
-                <a16:creationId xmlns:a16="http://schemas.microsoft.com/office/drawing/2014/main" xmlns="" id="{426FA736-3DD3-4D4E-B57B-BBE1D8F7D424}"/>
+                <a16:creationId xmlns="" xmlns:a16="http://schemas.microsoft.com/office/drawing/2014/main" id="{426FA736-3DD3-4D4E-B57B-BBE1D8F7D424}"/>
               </a:ext>
             </a:extLst>
           </p:cNvPr>
@@ -4047,7 +4141,7 @@
           <p:cNvPr id="4" name="Espaço Reservado para Data 3">
             <a:extLst>
               <a:ext uri="{FF2B5EF4-FFF2-40B4-BE49-F238E27FC236}">
-                <a16:creationId xmlns:a16="http://schemas.microsoft.com/office/drawing/2014/main" xmlns="" id="{99E8855C-D8FD-48F6-B14E-861E0DE4D915}"/>
+                <a16:creationId xmlns="" xmlns:a16="http://schemas.microsoft.com/office/drawing/2014/main" id="{99E8855C-D8FD-48F6-B14E-861E0DE4D915}"/>
               </a:ext>
             </a:extLst>
           </p:cNvPr>
@@ -4076,7 +4170,7 @@
           <p:cNvPr id="5" name="Espaço Reservado para Rodapé 4">
             <a:extLst>
               <a:ext uri="{FF2B5EF4-FFF2-40B4-BE49-F238E27FC236}">
-                <a16:creationId xmlns:a16="http://schemas.microsoft.com/office/drawing/2014/main" xmlns="" id="{97C0BB88-2F21-42A5-ACFF-83DA47F2D340}"/>
+                <a16:creationId xmlns="" xmlns:a16="http://schemas.microsoft.com/office/drawing/2014/main" id="{97C0BB88-2F21-42A5-ACFF-83DA47F2D340}"/>
               </a:ext>
             </a:extLst>
           </p:cNvPr>
@@ -4101,7 +4195,7 @@
           <p:cNvPr id="6" name="Espaço Reservado para Número de Slide 5">
             <a:extLst>
               <a:ext uri="{FF2B5EF4-FFF2-40B4-BE49-F238E27FC236}">
-                <a16:creationId xmlns:a16="http://schemas.microsoft.com/office/drawing/2014/main" xmlns="" id="{6CB462B3-1F22-4C05-B4B8-7A279FB7D5E9}"/>
+                <a16:creationId xmlns="" xmlns:a16="http://schemas.microsoft.com/office/drawing/2014/main" id="{6CB462B3-1F22-4C05-B4B8-7A279FB7D5E9}"/>
               </a:ext>
             </a:extLst>
           </p:cNvPr>
@@ -4160,7 +4254,7 @@
           <p:cNvPr id="2" name="Título Vertical 1">
             <a:extLst>
               <a:ext uri="{FF2B5EF4-FFF2-40B4-BE49-F238E27FC236}">
-                <a16:creationId xmlns:a16="http://schemas.microsoft.com/office/drawing/2014/main" xmlns="" id="{EAEAB728-701C-4207-A9D5-23FF45C60502}"/>
+                <a16:creationId xmlns="" xmlns:a16="http://schemas.microsoft.com/office/drawing/2014/main" id="{EAEAB728-701C-4207-A9D5-23FF45C60502}"/>
               </a:ext>
             </a:extLst>
           </p:cNvPr>
@@ -4193,7 +4287,7 @@
           <p:cNvPr id="3" name="Espaço Reservado para Texto Vertical 2">
             <a:extLst>
               <a:ext uri="{FF2B5EF4-FFF2-40B4-BE49-F238E27FC236}">
-                <a16:creationId xmlns:a16="http://schemas.microsoft.com/office/drawing/2014/main" xmlns="" id="{BA8C8CCF-7823-480A-9A19-0F664DD17E3B}"/>
+                <a16:creationId xmlns="" xmlns:a16="http://schemas.microsoft.com/office/drawing/2014/main" id="{BA8C8CCF-7823-480A-9A19-0F664DD17E3B}"/>
               </a:ext>
             </a:extLst>
           </p:cNvPr>
@@ -4255,7 +4349,7 @@
           <p:cNvPr id="4" name="Espaço Reservado para Data 3">
             <a:extLst>
               <a:ext uri="{FF2B5EF4-FFF2-40B4-BE49-F238E27FC236}">
-                <a16:creationId xmlns:a16="http://schemas.microsoft.com/office/drawing/2014/main" xmlns="" id="{721D5734-7B1F-425D-942F-6EB73344027C}"/>
+                <a16:creationId xmlns="" xmlns:a16="http://schemas.microsoft.com/office/drawing/2014/main" id="{721D5734-7B1F-425D-942F-6EB73344027C}"/>
               </a:ext>
             </a:extLst>
           </p:cNvPr>
@@ -4284,7 +4378,7 @@
           <p:cNvPr id="5" name="Espaço Reservado para Rodapé 4">
             <a:extLst>
               <a:ext uri="{FF2B5EF4-FFF2-40B4-BE49-F238E27FC236}">
-                <a16:creationId xmlns:a16="http://schemas.microsoft.com/office/drawing/2014/main" xmlns="" id="{1E1AAEAC-F08D-45FE-89EC-B1B349A868C9}"/>
+                <a16:creationId xmlns="" xmlns:a16="http://schemas.microsoft.com/office/drawing/2014/main" id="{1E1AAEAC-F08D-45FE-89EC-B1B349A868C9}"/>
               </a:ext>
             </a:extLst>
           </p:cNvPr>
@@ -4309,7 +4403,7 @@
           <p:cNvPr id="6" name="Espaço Reservado para Número de Slide 5">
             <a:extLst>
               <a:ext uri="{FF2B5EF4-FFF2-40B4-BE49-F238E27FC236}">
-                <a16:creationId xmlns:a16="http://schemas.microsoft.com/office/drawing/2014/main" xmlns="" id="{BAA44493-9911-47B2-87A6-C2141A972BC8}"/>
+                <a16:creationId xmlns="" xmlns:a16="http://schemas.microsoft.com/office/drawing/2014/main" id="{BAA44493-9911-47B2-87A6-C2141A972BC8}"/>
               </a:ext>
             </a:extLst>
           </p:cNvPr>
@@ -4368,7 +4462,7 @@
           <p:cNvPr id="2" name="Título 1">
             <a:extLst>
               <a:ext uri="{FF2B5EF4-FFF2-40B4-BE49-F238E27FC236}">
-                <a16:creationId xmlns:a16="http://schemas.microsoft.com/office/drawing/2014/main" xmlns="" id="{71BD44A5-8F21-4626-A01D-48A1C874B1D5}"/>
+                <a16:creationId xmlns="" xmlns:a16="http://schemas.microsoft.com/office/drawing/2014/main" id="{71BD44A5-8F21-4626-A01D-48A1C874B1D5}"/>
               </a:ext>
             </a:extLst>
           </p:cNvPr>
@@ -4396,7 +4490,7 @@
           <p:cNvPr id="3" name="Espaço Reservado para Conteúdo 2">
             <a:extLst>
               <a:ext uri="{FF2B5EF4-FFF2-40B4-BE49-F238E27FC236}">
-                <a16:creationId xmlns:a16="http://schemas.microsoft.com/office/drawing/2014/main" xmlns="" id="{B79E8085-65A9-48AA-951D-71D978BFF4ED}"/>
+                <a16:creationId xmlns="" xmlns:a16="http://schemas.microsoft.com/office/drawing/2014/main" id="{B79E8085-65A9-48AA-951D-71D978BFF4ED}"/>
               </a:ext>
             </a:extLst>
           </p:cNvPr>
@@ -4453,7 +4547,7 @@
           <p:cNvPr id="4" name="Espaço Reservado para Data 3">
             <a:extLst>
               <a:ext uri="{FF2B5EF4-FFF2-40B4-BE49-F238E27FC236}">
-                <a16:creationId xmlns:a16="http://schemas.microsoft.com/office/drawing/2014/main" xmlns="" id="{F05BE1AF-51EA-425D-B188-DE7BD675009F}"/>
+                <a16:creationId xmlns="" xmlns:a16="http://schemas.microsoft.com/office/drawing/2014/main" id="{F05BE1AF-51EA-425D-B188-DE7BD675009F}"/>
               </a:ext>
             </a:extLst>
           </p:cNvPr>
@@ -4482,7 +4576,7 @@
           <p:cNvPr id="5" name="Espaço Reservado para Rodapé 4">
             <a:extLst>
               <a:ext uri="{FF2B5EF4-FFF2-40B4-BE49-F238E27FC236}">
-                <a16:creationId xmlns:a16="http://schemas.microsoft.com/office/drawing/2014/main" xmlns="" id="{121BE632-29CF-4CB9-B365-C9EF38F89BE6}"/>
+                <a16:creationId xmlns="" xmlns:a16="http://schemas.microsoft.com/office/drawing/2014/main" id="{121BE632-29CF-4CB9-B365-C9EF38F89BE6}"/>
               </a:ext>
             </a:extLst>
           </p:cNvPr>
@@ -4507,7 +4601,7 @@
           <p:cNvPr id="6" name="Espaço Reservado para Número de Slide 5">
             <a:extLst>
               <a:ext uri="{FF2B5EF4-FFF2-40B4-BE49-F238E27FC236}">
-                <a16:creationId xmlns:a16="http://schemas.microsoft.com/office/drawing/2014/main" xmlns="" id="{60CF3DD1-9AEC-4A57-B461-4E4DD86FAC18}"/>
+                <a16:creationId xmlns="" xmlns:a16="http://schemas.microsoft.com/office/drawing/2014/main" id="{60CF3DD1-9AEC-4A57-B461-4E4DD86FAC18}"/>
               </a:ext>
             </a:extLst>
           </p:cNvPr>
@@ -4566,7 +4660,7 @@
           <p:cNvPr id="2" name="Título 1">
             <a:extLst>
               <a:ext uri="{FF2B5EF4-FFF2-40B4-BE49-F238E27FC236}">
-                <a16:creationId xmlns:a16="http://schemas.microsoft.com/office/drawing/2014/main" xmlns="" id="{34AB2FF0-A4D7-4E28-991D-FF26140D5988}"/>
+                <a16:creationId xmlns="" xmlns:a16="http://schemas.microsoft.com/office/drawing/2014/main" id="{34AB2FF0-A4D7-4E28-991D-FF26140D5988}"/>
               </a:ext>
             </a:extLst>
           </p:cNvPr>
@@ -4603,7 +4697,7 @@
           <p:cNvPr id="3" name="Espaço Reservado para Texto 2">
             <a:extLst>
               <a:ext uri="{FF2B5EF4-FFF2-40B4-BE49-F238E27FC236}">
-                <a16:creationId xmlns:a16="http://schemas.microsoft.com/office/drawing/2014/main" xmlns="" id="{E2AC45B0-4145-40DB-8E61-105461170604}"/>
+                <a16:creationId xmlns="" xmlns:a16="http://schemas.microsoft.com/office/drawing/2014/main" id="{E2AC45B0-4145-40DB-8E61-105461170604}"/>
               </a:ext>
             </a:extLst>
           </p:cNvPr>
@@ -4728,7 +4822,7 @@
           <p:cNvPr id="4" name="Espaço Reservado para Data 3">
             <a:extLst>
               <a:ext uri="{FF2B5EF4-FFF2-40B4-BE49-F238E27FC236}">
-                <a16:creationId xmlns:a16="http://schemas.microsoft.com/office/drawing/2014/main" xmlns="" id="{50F1D3FB-740A-4EBA-A309-2CE71D12ECFB}"/>
+                <a16:creationId xmlns="" xmlns:a16="http://schemas.microsoft.com/office/drawing/2014/main" id="{50F1D3FB-740A-4EBA-A309-2CE71D12ECFB}"/>
               </a:ext>
             </a:extLst>
           </p:cNvPr>
@@ -4757,7 +4851,7 @@
           <p:cNvPr id="5" name="Espaço Reservado para Rodapé 4">
             <a:extLst>
               <a:ext uri="{FF2B5EF4-FFF2-40B4-BE49-F238E27FC236}">
-                <a16:creationId xmlns:a16="http://schemas.microsoft.com/office/drawing/2014/main" xmlns="" id="{BDCAB18F-8715-4465-A940-F9C193A2ACE9}"/>
+                <a16:creationId xmlns="" xmlns:a16="http://schemas.microsoft.com/office/drawing/2014/main" id="{BDCAB18F-8715-4465-A940-F9C193A2ACE9}"/>
               </a:ext>
             </a:extLst>
           </p:cNvPr>
@@ -4782,7 +4876,7 @@
           <p:cNvPr id="6" name="Espaço Reservado para Número de Slide 5">
             <a:extLst>
               <a:ext uri="{FF2B5EF4-FFF2-40B4-BE49-F238E27FC236}">
-                <a16:creationId xmlns:a16="http://schemas.microsoft.com/office/drawing/2014/main" xmlns="" id="{353466C6-8248-429F-8056-FF040BF509EB}"/>
+                <a16:creationId xmlns="" xmlns:a16="http://schemas.microsoft.com/office/drawing/2014/main" id="{353466C6-8248-429F-8056-FF040BF509EB}"/>
               </a:ext>
             </a:extLst>
           </p:cNvPr>
@@ -4841,7 +4935,7 @@
           <p:cNvPr id="2" name="Título 1">
             <a:extLst>
               <a:ext uri="{FF2B5EF4-FFF2-40B4-BE49-F238E27FC236}">
-                <a16:creationId xmlns:a16="http://schemas.microsoft.com/office/drawing/2014/main" xmlns="" id="{BC7BB9F0-F14B-4A91-B2B7-35BC47FE4DE7}"/>
+                <a16:creationId xmlns="" xmlns:a16="http://schemas.microsoft.com/office/drawing/2014/main" id="{BC7BB9F0-F14B-4A91-B2B7-35BC47FE4DE7}"/>
               </a:ext>
             </a:extLst>
           </p:cNvPr>
@@ -4869,7 +4963,7 @@
           <p:cNvPr id="3" name="Espaço Reservado para Conteúdo 2">
             <a:extLst>
               <a:ext uri="{FF2B5EF4-FFF2-40B4-BE49-F238E27FC236}">
-                <a16:creationId xmlns:a16="http://schemas.microsoft.com/office/drawing/2014/main" xmlns="" id="{EC1FC1C4-73DA-47A6-8496-B0B457F7D39A}"/>
+                <a16:creationId xmlns="" xmlns:a16="http://schemas.microsoft.com/office/drawing/2014/main" id="{EC1FC1C4-73DA-47A6-8496-B0B457F7D39A}"/>
               </a:ext>
             </a:extLst>
           </p:cNvPr>
@@ -4931,7 +5025,7 @@
           <p:cNvPr id="4" name="Espaço Reservado para Conteúdo 3">
             <a:extLst>
               <a:ext uri="{FF2B5EF4-FFF2-40B4-BE49-F238E27FC236}">
-                <a16:creationId xmlns:a16="http://schemas.microsoft.com/office/drawing/2014/main" xmlns="" id="{E92F06A8-A449-4D92-9912-76873E529B38}"/>
+                <a16:creationId xmlns="" xmlns:a16="http://schemas.microsoft.com/office/drawing/2014/main" id="{E92F06A8-A449-4D92-9912-76873E529B38}"/>
               </a:ext>
             </a:extLst>
           </p:cNvPr>
@@ -4993,7 +5087,7 @@
           <p:cNvPr id="5" name="Espaço Reservado para Data 4">
             <a:extLst>
               <a:ext uri="{FF2B5EF4-FFF2-40B4-BE49-F238E27FC236}">
-                <a16:creationId xmlns:a16="http://schemas.microsoft.com/office/drawing/2014/main" xmlns="" id="{938070A4-BC2F-4D55-BD8D-DEAF11BB9EE9}"/>
+                <a16:creationId xmlns="" xmlns:a16="http://schemas.microsoft.com/office/drawing/2014/main" id="{938070A4-BC2F-4D55-BD8D-DEAF11BB9EE9}"/>
               </a:ext>
             </a:extLst>
           </p:cNvPr>
@@ -5022,7 +5116,7 @@
           <p:cNvPr id="6" name="Espaço Reservado para Rodapé 5">
             <a:extLst>
               <a:ext uri="{FF2B5EF4-FFF2-40B4-BE49-F238E27FC236}">
-                <a16:creationId xmlns:a16="http://schemas.microsoft.com/office/drawing/2014/main" xmlns="" id="{45CC2DB8-844A-465F-BA9A-7734C80C7F43}"/>
+                <a16:creationId xmlns="" xmlns:a16="http://schemas.microsoft.com/office/drawing/2014/main" id="{45CC2DB8-844A-465F-BA9A-7734C80C7F43}"/>
               </a:ext>
             </a:extLst>
           </p:cNvPr>
@@ -5047,7 +5141,7 @@
           <p:cNvPr id="7" name="Espaço Reservado para Número de Slide 6">
             <a:extLst>
               <a:ext uri="{FF2B5EF4-FFF2-40B4-BE49-F238E27FC236}">
-                <a16:creationId xmlns:a16="http://schemas.microsoft.com/office/drawing/2014/main" xmlns="" id="{4CC606A8-097B-4040-94E0-CD8C88280D8F}"/>
+                <a16:creationId xmlns="" xmlns:a16="http://schemas.microsoft.com/office/drawing/2014/main" id="{4CC606A8-097B-4040-94E0-CD8C88280D8F}"/>
               </a:ext>
             </a:extLst>
           </p:cNvPr>
@@ -5106,7 +5200,7 @@
           <p:cNvPr id="2" name="Título 1">
             <a:extLst>
               <a:ext uri="{FF2B5EF4-FFF2-40B4-BE49-F238E27FC236}">
-                <a16:creationId xmlns:a16="http://schemas.microsoft.com/office/drawing/2014/main" xmlns="" id="{76D66686-0143-4CB6-8C09-BA326F1E7ACA}"/>
+                <a16:creationId xmlns="" xmlns:a16="http://schemas.microsoft.com/office/drawing/2014/main" id="{76D66686-0143-4CB6-8C09-BA326F1E7ACA}"/>
               </a:ext>
             </a:extLst>
           </p:cNvPr>
@@ -5139,7 +5233,7 @@
           <p:cNvPr id="3" name="Espaço Reservado para Texto 2">
             <a:extLst>
               <a:ext uri="{FF2B5EF4-FFF2-40B4-BE49-F238E27FC236}">
-                <a16:creationId xmlns:a16="http://schemas.microsoft.com/office/drawing/2014/main" xmlns="" id="{0227AB85-F59E-4BCE-B846-4FA0992C2F23}"/>
+                <a16:creationId xmlns="" xmlns:a16="http://schemas.microsoft.com/office/drawing/2014/main" id="{0227AB85-F59E-4BCE-B846-4FA0992C2F23}"/>
               </a:ext>
             </a:extLst>
           </p:cNvPr>
@@ -5210,7 +5304,7 @@
           <p:cNvPr id="4" name="Espaço Reservado para Conteúdo 3">
             <a:extLst>
               <a:ext uri="{FF2B5EF4-FFF2-40B4-BE49-F238E27FC236}">
-                <a16:creationId xmlns:a16="http://schemas.microsoft.com/office/drawing/2014/main" xmlns="" id="{3373456C-7319-4D0A-827D-D29F6B083F5D}"/>
+                <a16:creationId xmlns="" xmlns:a16="http://schemas.microsoft.com/office/drawing/2014/main" id="{3373456C-7319-4D0A-827D-D29F6B083F5D}"/>
               </a:ext>
             </a:extLst>
           </p:cNvPr>
@@ -5272,7 +5366,7 @@
           <p:cNvPr id="5" name="Espaço Reservado para Texto 4">
             <a:extLst>
               <a:ext uri="{FF2B5EF4-FFF2-40B4-BE49-F238E27FC236}">
-                <a16:creationId xmlns:a16="http://schemas.microsoft.com/office/drawing/2014/main" xmlns="" id="{4CD109D0-2E83-4262-8029-A871CEC47406}"/>
+                <a16:creationId xmlns="" xmlns:a16="http://schemas.microsoft.com/office/drawing/2014/main" id="{4CD109D0-2E83-4262-8029-A871CEC47406}"/>
               </a:ext>
             </a:extLst>
           </p:cNvPr>
@@ -5343,7 +5437,7 @@
           <p:cNvPr id="6" name="Espaço Reservado para Conteúdo 5">
             <a:extLst>
               <a:ext uri="{FF2B5EF4-FFF2-40B4-BE49-F238E27FC236}">
-                <a16:creationId xmlns:a16="http://schemas.microsoft.com/office/drawing/2014/main" xmlns="" id="{AD706E3A-CFBB-4A6C-A65F-D0360A9E74FE}"/>
+                <a16:creationId xmlns="" xmlns:a16="http://schemas.microsoft.com/office/drawing/2014/main" id="{AD706E3A-CFBB-4A6C-A65F-D0360A9E74FE}"/>
               </a:ext>
             </a:extLst>
           </p:cNvPr>
@@ -5405,7 +5499,7 @@
           <p:cNvPr id="7" name="Espaço Reservado para Data 6">
             <a:extLst>
               <a:ext uri="{FF2B5EF4-FFF2-40B4-BE49-F238E27FC236}">
-                <a16:creationId xmlns:a16="http://schemas.microsoft.com/office/drawing/2014/main" xmlns="" id="{4172C0E5-5AF0-4805-BB51-443733CD2BD5}"/>
+                <a16:creationId xmlns="" xmlns:a16="http://schemas.microsoft.com/office/drawing/2014/main" id="{4172C0E5-5AF0-4805-BB51-443733CD2BD5}"/>
               </a:ext>
             </a:extLst>
           </p:cNvPr>
@@ -5434,7 +5528,7 @@
           <p:cNvPr id="8" name="Espaço Reservado para Rodapé 7">
             <a:extLst>
               <a:ext uri="{FF2B5EF4-FFF2-40B4-BE49-F238E27FC236}">
-                <a16:creationId xmlns:a16="http://schemas.microsoft.com/office/drawing/2014/main" xmlns="" id="{0E801648-156F-497E-99CF-797DF48051E1}"/>
+                <a16:creationId xmlns="" xmlns:a16="http://schemas.microsoft.com/office/drawing/2014/main" id="{0E801648-156F-497E-99CF-797DF48051E1}"/>
               </a:ext>
             </a:extLst>
           </p:cNvPr>
@@ -5459,7 +5553,7 @@
           <p:cNvPr id="9" name="Espaço Reservado para Número de Slide 8">
             <a:extLst>
               <a:ext uri="{FF2B5EF4-FFF2-40B4-BE49-F238E27FC236}">
-                <a16:creationId xmlns:a16="http://schemas.microsoft.com/office/drawing/2014/main" xmlns="" id="{EEE23D32-80E7-4796-A137-66BF842E4B53}"/>
+                <a16:creationId xmlns="" xmlns:a16="http://schemas.microsoft.com/office/drawing/2014/main" id="{EEE23D32-80E7-4796-A137-66BF842E4B53}"/>
               </a:ext>
             </a:extLst>
           </p:cNvPr>
@@ -5518,7 +5612,7 @@
           <p:cNvPr id="2" name="Título 1">
             <a:extLst>
               <a:ext uri="{FF2B5EF4-FFF2-40B4-BE49-F238E27FC236}">
-                <a16:creationId xmlns:a16="http://schemas.microsoft.com/office/drawing/2014/main" xmlns="" id="{2BCE2379-C78F-47E1-8CFC-B846E7AF148D}"/>
+                <a16:creationId xmlns="" xmlns:a16="http://schemas.microsoft.com/office/drawing/2014/main" id="{2BCE2379-C78F-47E1-8CFC-B846E7AF148D}"/>
               </a:ext>
             </a:extLst>
           </p:cNvPr>
@@ -5546,7 +5640,7 @@
           <p:cNvPr id="3" name="Espaço Reservado para Data 2">
             <a:extLst>
               <a:ext uri="{FF2B5EF4-FFF2-40B4-BE49-F238E27FC236}">
-                <a16:creationId xmlns:a16="http://schemas.microsoft.com/office/drawing/2014/main" xmlns="" id="{342600A9-7F92-4E22-9D94-E4717252A817}"/>
+                <a16:creationId xmlns="" xmlns:a16="http://schemas.microsoft.com/office/drawing/2014/main" id="{342600A9-7F92-4E22-9D94-E4717252A817}"/>
               </a:ext>
             </a:extLst>
           </p:cNvPr>
@@ -5575,7 +5669,7 @@
           <p:cNvPr id="4" name="Espaço Reservado para Rodapé 3">
             <a:extLst>
               <a:ext uri="{FF2B5EF4-FFF2-40B4-BE49-F238E27FC236}">
-                <a16:creationId xmlns:a16="http://schemas.microsoft.com/office/drawing/2014/main" xmlns="" id="{192E6BED-F546-40CC-A2DF-99CBA853654E}"/>
+                <a16:creationId xmlns="" xmlns:a16="http://schemas.microsoft.com/office/drawing/2014/main" id="{192E6BED-F546-40CC-A2DF-99CBA853654E}"/>
               </a:ext>
             </a:extLst>
           </p:cNvPr>
@@ -5600,7 +5694,7 @@
           <p:cNvPr id="5" name="Espaço Reservado para Número de Slide 4">
             <a:extLst>
               <a:ext uri="{FF2B5EF4-FFF2-40B4-BE49-F238E27FC236}">
-                <a16:creationId xmlns:a16="http://schemas.microsoft.com/office/drawing/2014/main" xmlns="" id="{6091CC40-A8C4-4063-80EB-CC5099621678}"/>
+                <a16:creationId xmlns="" xmlns:a16="http://schemas.microsoft.com/office/drawing/2014/main" id="{6091CC40-A8C4-4063-80EB-CC5099621678}"/>
               </a:ext>
             </a:extLst>
           </p:cNvPr>
@@ -5659,7 +5753,7 @@
           <p:cNvPr id="2" name="Espaço Reservado para Data 1">
             <a:extLst>
               <a:ext uri="{FF2B5EF4-FFF2-40B4-BE49-F238E27FC236}">
-                <a16:creationId xmlns:a16="http://schemas.microsoft.com/office/drawing/2014/main" xmlns="" id="{DD19515C-212C-4EAE-84A3-8FF4BC844F1B}"/>
+                <a16:creationId xmlns="" xmlns:a16="http://schemas.microsoft.com/office/drawing/2014/main" id="{DD19515C-212C-4EAE-84A3-8FF4BC844F1B}"/>
               </a:ext>
             </a:extLst>
           </p:cNvPr>
@@ -5688,7 +5782,7 @@
           <p:cNvPr id="3" name="Espaço Reservado para Rodapé 2">
             <a:extLst>
               <a:ext uri="{FF2B5EF4-FFF2-40B4-BE49-F238E27FC236}">
-                <a16:creationId xmlns:a16="http://schemas.microsoft.com/office/drawing/2014/main" xmlns="" id="{94D3D120-B3E8-4C96-861D-7A4F12F49B3A}"/>
+                <a16:creationId xmlns="" xmlns:a16="http://schemas.microsoft.com/office/drawing/2014/main" id="{94D3D120-B3E8-4C96-861D-7A4F12F49B3A}"/>
               </a:ext>
             </a:extLst>
           </p:cNvPr>
@@ -5713,7 +5807,7 @@
           <p:cNvPr id="4" name="Espaço Reservado para Número de Slide 3">
             <a:extLst>
               <a:ext uri="{FF2B5EF4-FFF2-40B4-BE49-F238E27FC236}">
-                <a16:creationId xmlns:a16="http://schemas.microsoft.com/office/drawing/2014/main" xmlns="" id="{42E49B68-FA1B-468B-9F17-D5C09243D454}"/>
+                <a16:creationId xmlns="" xmlns:a16="http://schemas.microsoft.com/office/drawing/2014/main" id="{42E49B68-FA1B-468B-9F17-D5C09243D454}"/>
               </a:ext>
             </a:extLst>
           </p:cNvPr>
@@ -5772,7 +5866,7 @@
           <p:cNvPr id="2" name="Título 1">
             <a:extLst>
               <a:ext uri="{FF2B5EF4-FFF2-40B4-BE49-F238E27FC236}">
-                <a16:creationId xmlns:a16="http://schemas.microsoft.com/office/drawing/2014/main" xmlns="" id="{1C17BCBE-A897-4319-85EC-D87909C24980}"/>
+                <a16:creationId xmlns="" xmlns:a16="http://schemas.microsoft.com/office/drawing/2014/main" id="{1C17BCBE-A897-4319-85EC-D87909C24980}"/>
               </a:ext>
             </a:extLst>
           </p:cNvPr>
@@ -5809,7 +5903,7 @@
           <p:cNvPr id="3" name="Espaço Reservado para Conteúdo 2">
             <a:extLst>
               <a:ext uri="{FF2B5EF4-FFF2-40B4-BE49-F238E27FC236}">
-                <a16:creationId xmlns:a16="http://schemas.microsoft.com/office/drawing/2014/main" xmlns="" id="{4226F885-0204-4913-868B-4B8B82576F17}"/>
+                <a16:creationId xmlns="" xmlns:a16="http://schemas.microsoft.com/office/drawing/2014/main" id="{4226F885-0204-4913-868B-4B8B82576F17}"/>
               </a:ext>
             </a:extLst>
           </p:cNvPr>
@@ -5899,7 +5993,7 @@
           <p:cNvPr id="4" name="Espaço Reservado para Texto 3">
             <a:extLst>
               <a:ext uri="{FF2B5EF4-FFF2-40B4-BE49-F238E27FC236}">
-                <a16:creationId xmlns:a16="http://schemas.microsoft.com/office/drawing/2014/main" xmlns="" id="{00F9F784-A858-441B-8AB5-697098141751}"/>
+                <a16:creationId xmlns="" xmlns:a16="http://schemas.microsoft.com/office/drawing/2014/main" id="{00F9F784-A858-441B-8AB5-697098141751}"/>
               </a:ext>
             </a:extLst>
           </p:cNvPr>
@@ -5970,7 +6064,7 @@
           <p:cNvPr id="5" name="Espaço Reservado para Data 4">
             <a:extLst>
               <a:ext uri="{FF2B5EF4-FFF2-40B4-BE49-F238E27FC236}">
-                <a16:creationId xmlns:a16="http://schemas.microsoft.com/office/drawing/2014/main" xmlns="" id="{A4DC363A-5000-472E-8B17-02E7DCB8840A}"/>
+                <a16:creationId xmlns="" xmlns:a16="http://schemas.microsoft.com/office/drawing/2014/main" id="{A4DC363A-5000-472E-8B17-02E7DCB8840A}"/>
               </a:ext>
             </a:extLst>
           </p:cNvPr>
@@ -5999,7 +6093,7 @@
           <p:cNvPr id="6" name="Espaço Reservado para Rodapé 5">
             <a:extLst>
               <a:ext uri="{FF2B5EF4-FFF2-40B4-BE49-F238E27FC236}">
-                <a16:creationId xmlns:a16="http://schemas.microsoft.com/office/drawing/2014/main" xmlns="" id="{5548425D-2C21-4C56-BAD4-662978775C28}"/>
+                <a16:creationId xmlns="" xmlns:a16="http://schemas.microsoft.com/office/drawing/2014/main" id="{5548425D-2C21-4C56-BAD4-662978775C28}"/>
               </a:ext>
             </a:extLst>
           </p:cNvPr>
@@ -6024,7 +6118,7 @@
           <p:cNvPr id="7" name="Espaço Reservado para Número de Slide 6">
             <a:extLst>
               <a:ext uri="{FF2B5EF4-FFF2-40B4-BE49-F238E27FC236}">
-                <a16:creationId xmlns:a16="http://schemas.microsoft.com/office/drawing/2014/main" xmlns="" id="{C63E9726-E64C-42B2-AE8A-8C235A956B48}"/>
+                <a16:creationId xmlns="" xmlns:a16="http://schemas.microsoft.com/office/drawing/2014/main" id="{C63E9726-E64C-42B2-AE8A-8C235A956B48}"/>
               </a:ext>
             </a:extLst>
           </p:cNvPr>
@@ -6083,7 +6177,7 @@
           <p:cNvPr id="2" name="Título 1">
             <a:extLst>
               <a:ext uri="{FF2B5EF4-FFF2-40B4-BE49-F238E27FC236}">
-                <a16:creationId xmlns:a16="http://schemas.microsoft.com/office/drawing/2014/main" xmlns="" id="{11086A78-3E74-450C-96A6-CA8AC37AF772}"/>
+                <a16:creationId xmlns="" xmlns:a16="http://schemas.microsoft.com/office/drawing/2014/main" id="{11086A78-3E74-450C-96A6-CA8AC37AF772}"/>
               </a:ext>
             </a:extLst>
           </p:cNvPr>
@@ -6120,7 +6214,7 @@
           <p:cNvPr id="3" name="Espaço Reservado para Imagem 2">
             <a:extLst>
               <a:ext uri="{FF2B5EF4-FFF2-40B4-BE49-F238E27FC236}">
-                <a16:creationId xmlns:a16="http://schemas.microsoft.com/office/drawing/2014/main" xmlns="" id="{5F5B7312-975A-4DBC-9B2F-3652ADA006FD}"/>
+                <a16:creationId xmlns="" xmlns:a16="http://schemas.microsoft.com/office/drawing/2014/main" id="{5F5B7312-975A-4DBC-9B2F-3652ADA006FD}"/>
               </a:ext>
             </a:extLst>
           </p:cNvPr>
@@ -6187,7 +6281,7 @@
           <p:cNvPr id="4" name="Espaço Reservado para Texto 3">
             <a:extLst>
               <a:ext uri="{FF2B5EF4-FFF2-40B4-BE49-F238E27FC236}">
-                <a16:creationId xmlns:a16="http://schemas.microsoft.com/office/drawing/2014/main" xmlns="" id="{AAF805F5-1DFF-41C6-944C-7D79FE0D0963}"/>
+                <a16:creationId xmlns="" xmlns:a16="http://schemas.microsoft.com/office/drawing/2014/main" id="{AAF805F5-1DFF-41C6-944C-7D79FE0D0963}"/>
               </a:ext>
             </a:extLst>
           </p:cNvPr>
@@ -6258,7 +6352,7 @@
           <p:cNvPr id="5" name="Espaço Reservado para Data 4">
             <a:extLst>
               <a:ext uri="{FF2B5EF4-FFF2-40B4-BE49-F238E27FC236}">
-                <a16:creationId xmlns:a16="http://schemas.microsoft.com/office/drawing/2014/main" xmlns="" id="{02113D81-8665-4516-BD81-C6A1F254EECD}"/>
+                <a16:creationId xmlns="" xmlns:a16="http://schemas.microsoft.com/office/drawing/2014/main" id="{02113D81-8665-4516-BD81-C6A1F254EECD}"/>
               </a:ext>
             </a:extLst>
           </p:cNvPr>
@@ -6287,7 +6381,7 @@
           <p:cNvPr id="6" name="Espaço Reservado para Rodapé 5">
             <a:extLst>
               <a:ext uri="{FF2B5EF4-FFF2-40B4-BE49-F238E27FC236}">
-                <a16:creationId xmlns:a16="http://schemas.microsoft.com/office/drawing/2014/main" xmlns="" id="{2B00C88B-FF32-40AA-A187-727D96FD7862}"/>
+                <a16:creationId xmlns="" xmlns:a16="http://schemas.microsoft.com/office/drawing/2014/main" id="{2B00C88B-FF32-40AA-A187-727D96FD7862}"/>
               </a:ext>
             </a:extLst>
           </p:cNvPr>
@@ -6312,7 +6406,7 @@
           <p:cNvPr id="7" name="Espaço Reservado para Número de Slide 6">
             <a:extLst>
               <a:ext uri="{FF2B5EF4-FFF2-40B4-BE49-F238E27FC236}">
-                <a16:creationId xmlns:a16="http://schemas.microsoft.com/office/drawing/2014/main" xmlns="" id="{A04D1A2D-69F7-4B8F-A730-BC26DC340BA6}"/>
+                <a16:creationId xmlns="" xmlns:a16="http://schemas.microsoft.com/office/drawing/2014/main" id="{A04D1A2D-69F7-4B8F-A730-BC26DC340BA6}"/>
               </a:ext>
             </a:extLst>
           </p:cNvPr>
@@ -6376,7 +6470,7 @@
           <p:cNvPr id="2" name="Espaço Reservado para Título 1">
             <a:extLst>
               <a:ext uri="{FF2B5EF4-FFF2-40B4-BE49-F238E27FC236}">
-                <a16:creationId xmlns:a16="http://schemas.microsoft.com/office/drawing/2014/main" xmlns="" id="{E69A0273-1966-4A1B-9370-4C1CE5036371}"/>
+                <a16:creationId xmlns="" xmlns:a16="http://schemas.microsoft.com/office/drawing/2014/main" id="{E69A0273-1966-4A1B-9370-4C1CE5036371}"/>
               </a:ext>
             </a:extLst>
           </p:cNvPr>
@@ -6414,7 +6508,7 @@
           <p:cNvPr id="3" name="Espaço Reservado para Texto 2">
             <a:extLst>
               <a:ext uri="{FF2B5EF4-FFF2-40B4-BE49-F238E27FC236}">
-                <a16:creationId xmlns:a16="http://schemas.microsoft.com/office/drawing/2014/main" xmlns="" id="{3B9CF87A-0448-49A7-AB25-EBC1D56A40EF}"/>
+                <a16:creationId xmlns="" xmlns:a16="http://schemas.microsoft.com/office/drawing/2014/main" id="{3B9CF87A-0448-49A7-AB25-EBC1D56A40EF}"/>
               </a:ext>
             </a:extLst>
           </p:cNvPr>
@@ -6481,7 +6575,7 @@
           <p:cNvPr id="4" name="Espaço Reservado para Data 3">
             <a:extLst>
               <a:ext uri="{FF2B5EF4-FFF2-40B4-BE49-F238E27FC236}">
-                <a16:creationId xmlns:a16="http://schemas.microsoft.com/office/drawing/2014/main" xmlns="" id="{2EF7B1F2-BB5A-44D0-816D-16AD2C71430E}"/>
+                <a16:creationId xmlns="" xmlns:a16="http://schemas.microsoft.com/office/drawing/2014/main" id="{2EF7B1F2-BB5A-44D0-816D-16AD2C71430E}"/>
               </a:ext>
             </a:extLst>
           </p:cNvPr>
@@ -6528,7 +6622,7 @@
           <p:cNvPr id="5" name="Espaço Reservado para Rodapé 4">
             <a:extLst>
               <a:ext uri="{FF2B5EF4-FFF2-40B4-BE49-F238E27FC236}">
-                <a16:creationId xmlns:a16="http://schemas.microsoft.com/office/drawing/2014/main" xmlns="" id="{C703F94C-2CC8-4DAA-BC35-14FC3E841DCD}"/>
+                <a16:creationId xmlns="" xmlns:a16="http://schemas.microsoft.com/office/drawing/2014/main" id="{C703F94C-2CC8-4DAA-BC35-14FC3E841DCD}"/>
               </a:ext>
             </a:extLst>
           </p:cNvPr>
@@ -6571,7 +6665,7 @@
           <p:cNvPr id="6" name="Espaço Reservado para Número de Slide 5">
             <a:extLst>
               <a:ext uri="{FF2B5EF4-FFF2-40B4-BE49-F238E27FC236}">
-                <a16:creationId xmlns:a16="http://schemas.microsoft.com/office/drawing/2014/main" xmlns="" id="{64051336-7048-457A-8B61-D94291D71648}"/>
+                <a16:creationId xmlns="" xmlns:a16="http://schemas.microsoft.com/office/drawing/2014/main" id="{64051336-7048-457A-8B61-D94291D71648}"/>
               </a:ext>
             </a:extLst>
           </p:cNvPr>
@@ -6939,7 +7033,7 @@
           <p:cNvPr id="4" name="CaixaDeTexto 3">
             <a:extLst>
               <a:ext uri="{FF2B5EF4-FFF2-40B4-BE49-F238E27FC236}">
-                <a16:creationId xmlns:a16="http://schemas.microsoft.com/office/drawing/2014/main" xmlns="" id="{430EB894-B7D4-434C-9D1A-A14094D9BEEC}"/>
+                <a16:creationId xmlns="" xmlns:a16="http://schemas.microsoft.com/office/drawing/2014/main" id="{430EB894-B7D4-434C-9D1A-A14094D9BEEC}"/>
               </a:ext>
             </a:extLst>
           </p:cNvPr>
@@ -6983,7 +7077,7 @@
           <p:cNvPr id="1026" name="Picture 2" descr="Logo">
             <a:extLst>
               <a:ext uri="{FF2B5EF4-FFF2-40B4-BE49-F238E27FC236}">
-                <a16:creationId xmlns:a16="http://schemas.microsoft.com/office/drawing/2014/main" xmlns="" id="{3F2642E0-4F6A-4196-8F58-E77D36E9A33F}"/>
+                <a16:creationId xmlns="" xmlns:a16="http://schemas.microsoft.com/office/drawing/2014/main" id="{3F2642E0-4F6A-4196-8F58-E77D36E9A33F}"/>
               </a:ext>
             </a:extLst>
           </p:cNvPr>
@@ -7028,7 +7122,7 @@
           <p:cNvPr id="5122" name="Picture 2" descr="Image result for machine learning">
             <a:extLst>
               <a:ext uri="{FF2B5EF4-FFF2-40B4-BE49-F238E27FC236}">
-                <a16:creationId xmlns:a16="http://schemas.microsoft.com/office/drawing/2014/main" xmlns="" id="{810CE0A2-4102-44A6-A370-175E7896CDCB}"/>
+                <a16:creationId xmlns="" xmlns:a16="http://schemas.microsoft.com/office/drawing/2014/main" id="{810CE0A2-4102-44A6-A370-175E7896CDCB}"/>
               </a:ext>
             </a:extLst>
           </p:cNvPr>
@@ -7073,7 +7167,7 @@
           <p:cNvPr id="7" name="Título 1">
             <a:extLst>
               <a:ext uri="{FF2B5EF4-FFF2-40B4-BE49-F238E27FC236}">
-                <a16:creationId xmlns:a16="http://schemas.microsoft.com/office/drawing/2014/main" xmlns="" id="{32666AC8-2E17-4DB4-B0F5-60C640CCFD2E}"/>
+                <a16:creationId xmlns="" xmlns:a16="http://schemas.microsoft.com/office/drawing/2014/main" id="{32666AC8-2E17-4DB4-B0F5-60C640CCFD2E}"/>
               </a:ext>
             </a:extLst>
           </p:cNvPr>
@@ -7136,7 +7230,7 @@
         <p:cNvPr id="1" name="">
           <a:extLst>
             <a:ext uri="{FF2B5EF4-FFF2-40B4-BE49-F238E27FC236}">
-              <a16:creationId xmlns:a16="http://schemas.microsoft.com/office/drawing/2014/main" xmlns="" id="{DDB2BBDA-DAF3-B7AC-FB99-7C5B9285F912}"/>
+              <a16:creationId xmlns="" xmlns:a16="http://schemas.microsoft.com/office/drawing/2014/main" id="{DDB2BBDA-DAF3-B7AC-FB99-7C5B9285F912}"/>
             </a:ext>
           </a:extLst>
         </p:cNvPr>
@@ -7156,7 +7250,7 @@
           <p:cNvPr id="2" name="Title 1">
             <a:extLst>
               <a:ext uri="{FF2B5EF4-FFF2-40B4-BE49-F238E27FC236}">
-                <a16:creationId xmlns:a16="http://schemas.microsoft.com/office/drawing/2014/main" xmlns="" id="{A98D36C9-8653-8E41-11D8-585B6AC0D03D}"/>
+                <a16:creationId xmlns="" xmlns:a16="http://schemas.microsoft.com/office/drawing/2014/main" id="{A98D36C9-8653-8E41-11D8-585B6AC0D03D}"/>
               </a:ext>
             </a:extLst>
           </p:cNvPr>
@@ -7196,7 +7290,7 @@
           <p:cNvPr id="3" name="Content Placeholder 2">
             <a:extLst>
               <a:ext uri="{FF2B5EF4-FFF2-40B4-BE49-F238E27FC236}">
-                <a16:creationId xmlns:a16="http://schemas.microsoft.com/office/drawing/2014/main" xmlns="" id="{981046E0-93D4-BF9F-C552-72A01838A8A3}"/>
+                <a16:creationId xmlns="" xmlns:a16="http://schemas.microsoft.com/office/drawing/2014/main" id="{981046E0-93D4-BF9F-C552-72A01838A8A3}"/>
               </a:ext>
             </a:extLst>
           </p:cNvPr>
@@ -7231,7 +7325,7 @@
           <p:cNvPr id="61" name="Picture 60">
             <a:extLst>
               <a:ext uri="{FF2B5EF4-FFF2-40B4-BE49-F238E27FC236}">
-                <a16:creationId xmlns:a16="http://schemas.microsoft.com/office/drawing/2014/main" xmlns="" id="{22F895FA-1424-E50C-97F4-4F0BE0413C2F}"/>
+                <a16:creationId xmlns="" xmlns:a16="http://schemas.microsoft.com/office/drawing/2014/main" id="{22F895FA-1424-E50C-97F4-4F0BE0413C2F}"/>
               </a:ext>
             </a:extLst>
           </p:cNvPr>
@@ -7297,7 +7391,7 @@
           <p:cNvPr id="2" name="Title 1">
             <a:extLst>
               <a:ext uri="{FF2B5EF4-FFF2-40B4-BE49-F238E27FC236}">
-                <a16:creationId xmlns:a16="http://schemas.microsoft.com/office/drawing/2014/main" xmlns="" id="{6212CAF6-B58D-36CC-E75E-B9EBC01B5494}"/>
+                <a16:creationId xmlns="" xmlns:a16="http://schemas.microsoft.com/office/drawing/2014/main" id="{6212CAF6-B58D-36CC-E75E-B9EBC01B5494}"/>
               </a:ext>
             </a:extLst>
           </p:cNvPr>
@@ -7326,7 +7420,7 @@
           <p:cNvPr id="3" name="Content Placeholder 2">
             <a:extLst>
               <a:ext uri="{FF2B5EF4-FFF2-40B4-BE49-F238E27FC236}">
-                <a16:creationId xmlns:a16="http://schemas.microsoft.com/office/drawing/2014/main" xmlns="" id="{5516FA30-D5F7-2E83-352E-3527EE589DED}"/>
+                <a16:creationId xmlns="" xmlns:a16="http://schemas.microsoft.com/office/drawing/2014/main" id="{5516FA30-D5F7-2E83-352E-3527EE589DED}"/>
               </a:ext>
             </a:extLst>
           </p:cNvPr>
@@ -7597,7 +7691,7 @@
           <p:cNvPr id="2" name="Title 1">
             <a:extLst>
               <a:ext uri="{FF2B5EF4-FFF2-40B4-BE49-F238E27FC236}">
-                <a16:creationId xmlns:a16="http://schemas.microsoft.com/office/drawing/2014/main" xmlns="" id="{8C8E92F5-0D3A-0F43-282A-3A7C0603923D}"/>
+                <a16:creationId xmlns="" xmlns:a16="http://schemas.microsoft.com/office/drawing/2014/main" id="{8C8E92F5-0D3A-0F43-282A-3A7C0603923D}"/>
               </a:ext>
             </a:extLst>
           </p:cNvPr>
@@ -7638,7 +7732,7 @@
           <p:cNvPr id="3" name="Content Placeholder 2">
             <a:extLst>
               <a:ext uri="{FF2B5EF4-FFF2-40B4-BE49-F238E27FC236}">
-                <a16:creationId xmlns:a16="http://schemas.microsoft.com/office/drawing/2014/main" xmlns="" id="{9AB6A6C9-67EC-449F-0095-BDC7619374B2}"/>
+                <a16:creationId xmlns="" xmlns:a16="http://schemas.microsoft.com/office/drawing/2014/main" id="{9AB6A6C9-67EC-449F-0095-BDC7619374B2}"/>
               </a:ext>
             </a:extLst>
           </p:cNvPr>
@@ -7791,7 +7885,7 @@
         <p:cNvPr id="1" name="">
           <a:extLst>
             <a:ext uri="{FF2B5EF4-FFF2-40B4-BE49-F238E27FC236}">
-              <a16:creationId xmlns:a16="http://schemas.microsoft.com/office/drawing/2014/main" xmlns="" id="{74614044-1D84-E441-8AC3-FB3FD9221416}"/>
+              <a16:creationId xmlns="" xmlns:a16="http://schemas.microsoft.com/office/drawing/2014/main" id="{74614044-1D84-E441-8AC3-FB3FD9221416}"/>
             </a:ext>
           </a:extLst>
         </p:cNvPr>
@@ -7811,7 +7905,7 @@
           <p:cNvPr id="2" name="Title 1">
             <a:extLst>
               <a:ext uri="{FF2B5EF4-FFF2-40B4-BE49-F238E27FC236}">
-                <a16:creationId xmlns:a16="http://schemas.microsoft.com/office/drawing/2014/main" xmlns="" id="{C6E93585-9339-7002-7C62-27331F24C140}"/>
+                <a16:creationId xmlns="" xmlns:a16="http://schemas.microsoft.com/office/drawing/2014/main" id="{C6E93585-9339-7002-7C62-27331F24C140}"/>
               </a:ext>
             </a:extLst>
           </p:cNvPr>
@@ -7841,7 +7935,7 @@
               <p:cNvPr id="3" name="Content Placeholder 2">
                 <a:extLst>
                   <a:ext uri="{FF2B5EF4-FFF2-40B4-BE49-F238E27FC236}">
-                    <a16:creationId xmlns:a16="http://schemas.microsoft.com/office/drawing/2014/main" xmlns="" id="{A1483011-729D-F9ED-5FD6-580E6A4020EF}"/>
+                    <a16:creationId xmlns="" xmlns:a16="http://schemas.microsoft.com/office/drawing/2014/main" id="{A1483011-729D-F9ED-5FD6-580E6A4020EF}"/>
                   </a:ext>
                 </a:extLst>
               </p:cNvPr>
@@ -8081,7 +8175,7 @@
           <p:cNvPr id="4" name="Table 3">
             <a:extLst>
               <a:ext uri="{FF2B5EF4-FFF2-40B4-BE49-F238E27FC236}">
-                <a16:creationId xmlns:a16="http://schemas.microsoft.com/office/drawing/2014/main" xmlns="" id="{A14A3494-F972-A92A-0152-CCA1FC8882F5}"/>
+                <a16:creationId xmlns="" xmlns:a16="http://schemas.microsoft.com/office/drawing/2014/main" id="{A14A3494-F972-A92A-0152-CCA1FC8882F5}"/>
               </a:ext>
             </a:extLst>
           </p:cNvPr>
@@ -8110,28 +8204,28 @@
                 <a:gridCol w="439057">
                   <a:extLst>
                     <a:ext uri="{9D8B030D-6E8A-4147-A177-3AD203B41FA5}">
-                      <a16:colId xmlns:a16="http://schemas.microsoft.com/office/drawing/2014/main" xmlns="" val="4237906138"/>
+                      <a16:colId xmlns="" xmlns:a16="http://schemas.microsoft.com/office/drawing/2014/main" val="4237906138"/>
                     </a:ext>
                   </a:extLst>
                 </a:gridCol>
                 <a:gridCol w="439057">
                   <a:extLst>
                     <a:ext uri="{9D8B030D-6E8A-4147-A177-3AD203B41FA5}">
-                      <a16:colId xmlns:a16="http://schemas.microsoft.com/office/drawing/2014/main" xmlns="" val="3865218800"/>
+                      <a16:colId xmlns="" xmlns:a16="http://schemas.microsoft.com/office/drawing/2014/main" val="3865218800"/>
                     </a:ext>
                   </a:extLst>
                 </a:gridCol>
                 <a:gridCol w="439057">
                   <a:extLst>
                     <a:ext uri="{9D8B030D-6E8A-4147-A177-3AD203B41FA5}">
-                      <a16:colId xmlns:a16="http://schemas.microsoft.com/office/drawing/2014/main" xmlns="" val="2205689395"/>
+                      <a16:colId xmlns="" xmlns:a16="http://schemas.microsoft.com/office/drawing/2014/main" val="2205689395"/>
                     </a:ext>
                   </a:extLst>
                 </a:gridCol>
                 <a:gridCol w="439057">
                   <a:extLst>
                     <a:ext uri="{9D8B030D-6E8A-4147-A177-3AD203B41FA5}">
-                      <a16:colId xmlns:a16="http://schemas.microsoft.com/office/drawing/2014/main" xmlns="" val="3536600299"/>
+                      <a16:colId xmlns="" xmlns:a16="http://schemas.microsoft.com/office/drawing/2014/main" val="3536600299"/>
                     </a:ext>
                   </a:extLst>
                 </a:gridCol>
@@ -8375,7 +8469,7 @@
                 </a:tc>
                 <a:extLst>
                   <a:ext uri="{0D108BD9-81ED-4DB2-BD59-A6C34878D82A}">
-                    <a16:rowId xmlns:a16="http://schemas.microsoft.com/office/drawing/2014/main" xmlns="" val="654488680"/>
+                    <a16:rowId xmlns="" xmlns:a16="http://schemas.microsoft.com/office/drawing/2014/main" val="654488680"/>
                   </a:ext>
                 </a:extLst>
               </a:tr>
@@ -8618,7 +8712,7 @@
                 </a:tc>
                 <a:extLst>
                   <a:ext uri="{0D108BD9-81ED-4DB2-BD59-A6C34878D82A}">
-                    <a16:rowId xmlns:a16="http://schemas.microsoft.com/office/drawing/2014/main" xmlns="" val="652569694"/>
+                    <a16:rowId xmlns="" xmlns:a16="http://schemas.microsoft.com/office/drawing/2014/main" val="652569694"/>
                   </a:ext>
                 </a:extLst>
               </a:tr>
@@ -8861,7 +8955,7 @@
                 </a:tc>
                 <a:extLst>
                   <a:ext uri="{0D108BD9-81ED-4DB2-BD59-A6C34878D82A}">
-                    <a16:rowId xmlns:a16="http://schemas.microsoft.com/office/drawing/2014/main" xmlns="" val="200740461"/>
+                    <a16:rowId xmlns="" xmlns:a16="http://schemas.microsoft.com/office/drawing/2014/main" val="200740461"/>
                   </a:ext>
                 </a:extLst>
               </a:tr>
@@ -8874,7 +8968,7 @@
           <p:cNvPr id="5" name="TextBox 4">
             <a:extLst>
               <a:ext uri="{FF2B5EF4-FFF2-40B4-BE49-F238E27FC236}">
-                <a16:creationId xmlns:a16="http://schemas.microsoft.com/office/drawing/2014/main" xmlns="" id="{C8ED1C15-0942-089C-7805-CB510EC72FB1}"/>
+                <a16:creationId xmlns="" xmlns:a16="http://schemas.microsoft.com/office/drawing/2014/main" id="{C8ED1C15-0942-089C-7805-CB510EC72FB1}"/>
               </a:ext>
             </a:extLst>
           </p:cNvPr>
@@ -8910,7 +9004,7 @@
           <p:cNvPr id="6" name="TextBox 5">
             <a:extLst>
               <a:ext uri="{FF2B5EF4-FFF2-40B4-BE49-F238E27FC236}">
-                <a16:creationId xmlns:a16="http://schemas.microsoft.com/office/drawing/2014/main" xmlns="" id="{35E39535-416D-18D0-A4E0-B8FD0EF37FF9}"/>
+                <a16:creationId xmlns="" xmlns:a16="http://schemas.microsoft.com/office/drawing/2014/main" id="{35E39535-416D-18D0-A4E0-B8FD0EF37FF9}"/>
               </a:ext>
             </a:extLst>
           </p:cNvPr>
@@ -8962,7 +9056,7 @@
         <p:cNvPr id="1" name="">
           <a:extLst>
             <a:ext uri="{FF2B5EF4-FFF2-40B4-BE49-F238E27FC236}">
-              <a16:creationId xmlns:a16="http://schemas.microsoft.com/office/drawing/2014/main" xmlns="" id="{E22219F2-045D-7C64-9A87-54D2232BDD3E}"/>
+              <a16:creationId xmlns="" xmlns:a16="http://schemas.microsoft.com/office/drawing/2014/main" id="{E22219F2-045D-7C64-9A87-54D2232BDD3E}"/>
             </a:ext>
           </a:extLst>
         </p:cNvPr>
@@ -8982,7 +9076,7 @@
           <p:cNvPr id="2" name="Title 1">
             <a:extLst>
               <a:ext uri="{FF2B5EF4-FFF2-40B4-BE49-F238E27FC236}">
-                <a16:creationId xmlns:a16="http://schemas.microsoft.com/office/drawing/2014/main" xmlns="" id="{C7EA5E16-B19C-BA31-7BEC-009E02E41E13}"/>
+                <a16:creationId xmlns="" xmlns:a16="http://schemas.microsoft.com/office/drawing/2014/main" id="{C7EA5E16-B19C-BA31-7BEC-009E02E41E13}"/>
               </a:ext>
             </a:extLst>
           </p:cNvPr>
@@ -9010,7 +9104,7 @@
           <p:cNvPr id="3" name="Content Placeholder 2">
             <a:extLst>
               <a:ext uri="{FF2B5EF4-FFF2-40B4-BE49-F238E27FC236}">
-                <a16:creationId xmlns:a16="http://schemas.microsoft.com/office/drawing/2014/main" xmlns="" id="{2D34463B-65B5-66E6-8A30-437FFFA8DEFA}"/>
+                <a16:creationId xmlns="" xmlns:a16="http://schemas.microsoft.com/office/drawing/2014/main" id="{2D34463B-65B5-66E6-8A30-437FFFA8DEFA}"/>
               </a:ext>
             </a:extLst>
           </p:cNvPr>
@@ -9056,7 +9150,7 @@
           <p:cNvPr id="5" name="Picture 4">
             <a:extLst>
               <a:ext uri="{FF2B5EF4-FFF2-40B4-BE49-F238E27FC236}">
-                <a16:creationId xmlns:a16="http://schemas.microsoft.com/office/drawing/2014/main" xmlns="" id="{22635AC4-CE1D-B8AF-A040-2F87EF1759CD}"/>
+                <a16:creationId xmlns="" xmlns:a16="http://schemas.microsoft.com/office/drawing/2014/main" id="{22635AC4-CE1D-B8AF-A040-2F87EF1759CD}"/>
               </a:ext>
             </a:extLst>
           </p:cNvPr>
@@ -9122,7 +9216,7 @@
           <p:cNvPr id="2" name="Title 1">
             <a:extLst>
               <a:ext uri="{FF2B5EF4-FFF2-40B4-BE49-F238E27FC236}">
-                <a16:creationId xmlns:a16="http://schemas.microsoft.com/office/drawing/2014/main" xmlns="" id="{7091E349-E10B-155D-AA4C-5C644F1CA204}"/>
+                <a16:creationId xmlns="" xmlns:a16="http://schemas.microsoft.com/office/drawing/2014/main" id="{7091E349-E10B-155D-AA4C-5C644F1CA204}"/>
               </a:ext>
             </a:extLst>
           </p:cNvPr>
@@ -9158,14 +9252,14 @@
           </a:p>
         </p:txBody>
       </p:sp>
-      <mc:AlternateContent xmlns:mc="http://schemas.openxmlformats.org/markup-compatibility/2006">
-        <mc:Choice xmlns:a14="http://schemas.microsoft.com/office/drawing/2010/main" Requires="a14">
+      <mc:AlternateContent xmlns:mc="http://schemas.openxmlformats.org/markup-compatibility/2006" xmlns:a14="http://schemas.microsoft.com/office/drawing/2010/main">
+        <mc:Choice Requires="a14">
           <p:sp>
             <p:nvSpPr>
               <p:cNvPr id="5" name="TextBox 4">
                 <a:extLst>
                   <a:ext uri="{FF2B5EF4-FFF2-40B4-BE49-F238E27FC236}">
-                    <a16:creationId xmlns:a16="http://schemas.microsoft.com/office/drawing/2014/main" xmlns="" id="{9A332D99-C136-4CA9-0B03-FA3FA5195ED6}"/>
+                    <a16:creationId xmlns="" xmlns:a16="http://schemas.microsoft.com/office/drawing/2014/main" id="{9A332D99-C136-4CA9-0B03-FA3FA5195ED6}"/>
                   </a:ext>
                 </a:extLst>
               </p:cNvPr>
@@ -9484,7 +9578,7 @@
             </p:txBody>
           </p:sp>
         </mc:Choice>
-        <mc:Fallback>
+        <mc:Fallback xmlns="">
           <p:sp>
             <p:nvSpPr>
               <p:cNvPr id="5" name="TextBox 4">
@@ -9539,7 +9633,7 @@
           <p:cNvPr id="9" name="TextBox 8">
             <a:extLst>
               <a:ext uri="{FF2B5EF4-FFF2-40B4-BE49-F238E27FC236}">
-                <a16:creationId xmlns:a16="http://schemas.microsoft.com/office/drawing/2014/main" xmlns="" id="{5C7A4183-CC79-97FF-3245-59A711D4BDF1}"/>
+                <a16:creationId xmlns="" xmlns:a16="http://schemas.microsoft.com/office/drawing/2014/main" id="{5C7A4183-CC79-97FF-3245-59A711D4BDF1}"/>
               </a:ext>
             </a:extLst>
           </p:cNvPr>
@@ -9606,7 +9700,7 @@
           <p:cNvPr id="2" name="Title 1">
             <a:extLst>
               <a:ext uri="{FF2B5EF4-FFF2-40B4-BE49-F238E27FC236}">
-                <a16:creationId xmlns:a16="http://schemas.microsoft.com/office/drawing/2014/main" xmlns="" id="{8B40FE1F-C1FB-195D-22B9-96044B5DA2CF}"/>
+                <a16:creationId xmlns="" xmlns:a16="http://schemas.microsoft.com/office/drawing/2014/main" id="{8B40FE1F-C1FB-195D-22B9-96044B5DA2CF}"/>
               </a:ext>
             </a:extLst>
           </p:cNvPr>
@@ -9635,7 +9729,7 @@
           <p:cNvPr id="3" name="Content Placeholder 2">
             <a:extLst>
               <a:ext uri="{FF2B5EF4-FFF2-40B4-BE49-F238E27FC236}">
-                <a16:creationId xmlns:a16="http://schemas.microsoft.com/office/drawing/2014/main" xmlns="" id="{EAC332DA-1674-3813-EFF7-0720AB3234B3}"/>
+                <a16:creationId xmlns="" xmlns:a16="http://schemas.microsoft.com/office/drawing/2014/main" id="{EAC332DA-1674-3813-EFF7-0720AB3234B3}"/>
               </a:ext>
             </a:extLst>
           </p:cNvPr>
@@ -9810,7 +9904,7 @@
         <p:cNvPr id="1" name="">
           <a:extLst>
             <a:ext uri="{FF2B5EF4-FFF2-40B4-BE49-F238E27FC236}">
-              <a16:creationId xmlns:a16="http://schemas.microsoft.com/office/drawing/2014/main" xmlns="" id="{2F8A4587-A984-EA93-857E-8D1DC320AFE6}"/>
+              <a16:creationId xmlns="" xmlns:a16="http://schemas.microsoft.com/office/drawing/2014/main" id="{2F8A4587-A984-EA93-857E-8D1DC320AFE6}"/>
             </a:ext>
           </a:extLst>
         </p:cNvPr>
@@ -9830,7 +9924,7 @@
           <p:cNvPr id="2" name="Title 1">
             <a:extLst>
               <a:ext uri="{FF2B5EF4-FFF2-40B4-BE49-F238E27FC236}">
-                <a16:creationId xmlns:a16="http://schemas.microsoft.com/office/drawing/2014/main" xmlns="" id="{0D07A575-E745-E7EC-954B-2D561DB0ADE2}"/>
+                <a16:creationId xmlns="" xmlns:a16="http://schemas.microsoft.com/office/drawing/2014/main" id="{0D07A575-E745-E7EC-954B-2D561DB0ADE2}"/>
               </a:ext>
             </a:extLst>
           </p:cNvPr>
@@ -9859,7 +9953,7 @@
           <p:cNvPr id="3" name="Content Placeholder 2">
             <a:extLst>
               <a:ext uri="{FF2B5EF4-FFF2-40B4-BE49-F238E27FC236}">
-                <a16:creationId xmlns:a16="http://schemas.microsoft.com/office/drawing/2014/main" xmlns="" id="{8FDE82B6-892B-61F8-DE72-D88190E83F1C}"/>
+                <a16:creationId xmlns="" xmlns:a16="http://schemas.microsoft.com/office/drawing/2014/main" id="{8FDE82B6-892B-61F8-DE72-D88190E83F1C}"/>
               </a:ext>
             </a:extLst>
           </p:cNvPr>
@@ -9981,7 +10075,7 @@
               <p:cNvPr id="2" name="Title 1">
                 <a:extLst>
                   <a:ext uri="{FF2B5EF4-FFF2-40B4-BE49-F238E27FC236}">
-                    <a16:creationId xmlns:a16="http://schemas.microsoft.com/office/drawing/2014/main" xmlns="" id="{7BB2B1C3-607B-4033-88D5-A1CF66C9D6F3}"/>
+                    <a16:creationId xmlns="" xmlns:a16="http://schemas.microsoft.com/office/drawing/2014/main" id="{7BB2B1C3-607B-4033-88D5-A1CF66C9D6F3}"/>
                   </a:ext>
                 </a:extLst>
               </p:cNvPr>
@@ -10069,14 +10163,14 @@
           </p:sp>
         </mc:Fallback>
       </mc:AlternateContent>
-      <mc:AlternateContent xmlns:mc="http://schemas.openxmlformats.org/markup-compatibility/2006" xmlns:a14="http://schemas.microsoft.com/office/drawing/2010/main">
-        <mc:Choice Requires="a14">
+      <mc:AlternateContent xmlns:mc="http://schemas.openxmlformats.org/markup-compatibility/2006">
+        <mc:Choice xmlns:a14="http://schemas.microsoft.com/office/drawing/2010/main" Requires="a14">
           <p:sp>
             <p:nvSpPr>
               <p:cNvPr id="3" name="Content Placeholder 2">
                 <a:extLst>
                   <a:ext uri="{FF2B5EF4-FFF2-40B4-BE49-F238E27FC236}">
-                    <a16:creationId xmlns:a16="http://schemas.microsoft.com/office/drawing/2014/main" xmlns="" id="{5D80C21A-F4FC-B1BE-7D36-8D93DC02776E}"/>
+                    <a16:creationId xmlns="" xmlns:a16="http://schemas.microsoft.com/office/drawing/2014/main" id="{5D80C21A-F4FC-B1BE-7D36-8D93DC02776E}"/>
                   </a:ext>
                 </a:extLst>
               </p:cNvPr>
@@ -10089,8 +10183,8 @@
             </p:nvSpPr>
             <p:spPr>
               <a:xfrm>
-                <a:off x="838199" y="1825624"/>
-                <a:ext cx="11168743" cy="5032375"/>
+                <a:off x="4887884" y="1825624"/>
+                <a:ext cx="7119058" cy="5032375"/>
               </a:xfrm>
             </p:spPr>
             <p:txBody>
@@ -10260,59 +10354,21 @@
                   </m:oMath>
                 </a14:m>
                 <a:r>
-                  <a:rPr lang="pt-BR" dirty="0"/>
+                  <a:rPr lang="pt-BR" dirty="0" smtClean="0"/>
                   <a:t>).</a:t>
                 </a:r>
-              </a:p>
-              <a:p>
-                <a:r>
-                  <a:rPr lang="pt-BR" dirty="0"/>
-                  <a:t>Se o agente não explorar no começo, ele pode encontrar um caminho medíocre e ficar preso nele para sempre. </a:t>
-                </a:r>
-              </a:p>
-              <a:p>
-                <a:r>
-                  <a:rPr lang="pt-BR" dirty="0"/>
-                  <a:t>O </a:t>
-                </a:r>
-                <a14:m>
-                  <m:oMath xmlns:m="http://schemas.openxmlformats.org/officeDocument/2006/math">
-                    <m:r>
-                      <a:rPr lang="pt-BR" i="1">
-                        <a:latin typeface="Cambria Math" panose="02040503050406030204" pitchFamily="18" charset="0"/>
-                        <a:ea typeface="Cambria Math" panose="02040503050406030204" pitchFamily="18" charset="0"/>
-                      </a:rPr>
-                      <m:t>𝜀</m:t>
-                    </m:r>
-                  </m:oMath>
-                </a14:m>
-                <a:r>
-                  <a:rPr lang="pt-BR" dirty="0"/>
-                  <a:t> costuma começar em 1.0 (100% de exploração) e decair gradualmente à medida que o agente aprende (</a:t>
-                </a:r>
-                <a:r>
-                  <a:rPr lang="pt-BR" i="1" dirty="0" err="1"/>
-                  <a:t>decay</a:t>
-                </a:r>
-                <a:r>
-                  <a:rPr lang="pt-BR" i="1" dirty="0"/>
-                  <a:t> rate</a:t>
-                </a:r>
-                <a:r>
-                  <a:rPr lang="pt-BR" dirty="0"/>
-                  <a:t>).</a:t>
-                </a:r>
+                <a:endParaRPr lang="pt-BR" dirty="0"/>
               </a:p>
             </p:txBody>
           </p:sp>
         </mc:Choice>
-        <mc:Fallback xmlns="">
+        <mc:Fallback>
           <p:sp>
             <p:nvSpPr>
               <p:cNvPr id="3" name="Content Placeholder 2">
                 <a:extLst>
                   <a:ext uri="{FF2B5EF4-FFF2-40B4-BE49-F238E27FC236}">
-                    <a16:creationId xmlns:a16="http://schemas.microsoft.com/office/drawing/2014/main" id="{5D80C21A-F4FC-B1BE-7D36-8D93DC02776E}"/>
+                    <a16:creationId xmlns="" xmlns:a16="http://schemas.microsoft.com/office/drawing/2014/main" xmlns:a14="http://schemas.microsoft.com/office/drawing/2010/main" id="{5D80C21A-F4FC-B1BE-7D36-8D93DC02776E}"/>
                   </a:ext>
                 </a:extLst>
               </p:cNvPr>
@@ -10325,13 +10381,13 @@
             </p:nvSpPr>
             <p:spPr>
               <a:xfrm>
-                <a:off x="838199" y="1825624"/>
-                <a:ext cx="11168743" cy="5032375"/>
+                <a:off x="4887884" y="1825624"/>
+                <a:ext cx="7119058" cy="5032375"/>
               </a:xfrm>
-              <a:blipFill>
+              <a:blipFill rotWithShape="0">
                 <a:blip r:embed="rId4"/>
                 <a:stretch>
-                  <a:fillRect l="-927" t="-1937" r="-1364"/>
+                  <a:fillRect l="-1541" t="-1937" r="-2654"/>
                 </a:stretch>
               </a:blipFill>
             </p:spPr>
@@ -10340,7 +10396,7 @@
               <a:lstStyle/>
               <a:p>
                 <a:r>
-                  <a:rPr lang="en-US">
+                  <a:rPr lang="pt-BR">
                     <a:noFill/>
                   </a:rPr>
                   <a:t> </a:t>
@@ -10350,6 +10406,47 @@
           </p:sp>
         </mc:Fallback>
       </mc:AlternateContent>
+      <p:pic>
+        <p:nvPicPr>
+          <p:cNvPr id="1026" name="Picture 2" descr="Machine learning series - part 5: Exploration vs. Exploitation dilemma in  Reinforcement learning — Steemit"/>
+          <p:cNvPicPr>
+            <a:picLocks noChangeAspect="1" noChangeArrowheads="1"/>
+          </p:cNvPicPr>
+          <p:nvPr/>
+        </p:nvPicPr>
+        <p:blipFill>
+          <a:blip r:embed="rId5">
+            <a:extLst>
+              <a:ext uri="{28A0092B-C50C-407E-A947-70E740481C1C}">
+                <a14:useLocalDpi xmlns:a14="http://schemas.microsoft.com/office/drawing/2010/main" val="0"/>
+              </a:ext>
+            </a:extLst>
+          </a:blip>
+          <a:srcRect/>
+          <a:stretch>
+            <a:fillRect/>
+          </a:stretch>
+        </p:blipFill>
+        <p:spPr bwMode="auto">
+          <a:xfrm>
+            <a:off x="34383" y="2389617"/>
+            <a:ext cx="4853501" cy="3229786"/>
+          </a:xfrm>
+          <a:prstGeom prst="rect">
+            <a:avLst/>
+          </a:prstGeom>
+          <a:noFill/>
+          <a:extLst>
+            <a:ext uri="{909E8E84-426E-40DD-AFC4-6F175D3DCCD1}">
+              <a14:hiddenFill xmlns:a14="http://schemas.microsoft.com/office/drawing/2010/main">
+                <a:solidFill>
+                  <a:srgbClr val="FFFFFF"/>
+                </a:solidFill>
+              </a14:hiddenFill>
+            </a:ext>
+          </a:extLst>
+        </p:spPr>
+      </p:pic>
     </p:spTree>
     <p:extLst>
       <p:ext uri="{BB962C8B-B14F-4D97-AF65-F5344CB8AC3E}">
@@ -10380,76 +10477,280 @@
           <a:chExt cx="0" cy="0"/>
         </a:xfrm>
       </p:grpSpPr>
-      <p:sp>
-        <p:nvSpPr>
-          <p:cNvPr id="3" name="Content Placeholder 2">
-            <a:extLst>
-              <a:ext uri="{FF2B5EF4-FFF2-40B4-BE49-F238E27FC236}">
-                <a16:creationId xmlns:a16="http://schemas.microsoft.com/office/drawing/2014/main" xmlns="" id="{407A6B7C-8AE2-0626-7031-C9A0D36E6CE3}"/>
-              </a:ext>
-            </a:extLst>
-          </p:cNvPr>
-          <p:cNvSpPr>
-            <a:spLocks noGrp="1"/>
-          </p:cNvSpPr>
-          <p:nvPr>
-            <p:ph idx="1"/>
-          </p:nvPr>
-        </p:nvSpPr>
-        <p:spPr>
-          <a:xfrm>
-            <a:off x="7946573" y="1823299"/>
-            <a:ext cx="3962400" cy="3371964"/>
-          </a:xfrm>
-        </p:spPr>
-        <p:txBody>
-          <a:bodyPr>
-            <a:normAutofit/>
-          </a:bodyPr>
-          <a:lstStyle/>
-          <a:p>
-            <a:pPr marL="0" indent="0" algn="ctr">
-              <a:buNone/>
-            </a:pPr>
-            <a:r>
-              <a:rPr lang="pt-BR" sz="3600" dirty="0"/>
-              <a:t>Como o agente aprende?</a:t>
-            </a:r>
-          </a:p>
-          <a:p>
-            <a:pPr marL="0" indent="0" algn="ctr">
-              <a:buNone/>
-            </a:pPr>
-            <a:endParaRPr lang="pt-BR" sz="3600" dirty="0"/>
-          </a:p>
-          <a:p>
-            <a:pPr marL="0" indent="0" algn="ctr">
-              <a:buNone/>
-            </a:pPr>
-            <a:r>
-              <a:rPr lang="pt-BR" sz="3600" dirty="0"/>
-              <a:t>Ou seja, como a tabela-Q é atualizada?</a:t>
-            </a:r>
-            <a:endParaRPr lang="en-US" sz="3600" dirty="0"/>
-          </a:p>
-        </p:txBody>
-      </p:sp>
+      <mc:AlternateContent xmlns:mc="http://schemas.openxmlformats.org/markup-compatibility/2006" xmlns:a14="http://schemas.microsoft.com/office/drawing/2010/main">
+        <mc:Choice Requires="a14">
+          <p:sp>
+            <p:nvSpPr>
+              <p:cNvPr id="2" name="Title 1">
+                <a:extLst>
+                  <a:ext uri="{FF2B5EF4-FFF2-40B4-BE49-F238E27FC236}">
+                    <a16:creationId xmlns="" xmlns:a16="http://schemas.microsoft.com/office/drawing/2014/main" id="{7BB2B1C3-607B-4033-88D5-A1CF66C9D6F3}"/>
+                  </a:ext>
+                </a:extLst>
+              </p:cNvPr>
+              <p:cNvSpPr>
+                <a:spLocks noGrp="1"/>
+              </p:cNvSpPr>
+              <p:nvPr>
+                <p:ph type="title"/>
+              </p:nvPr>
+            </p:nvSpPr>
+            <p:spPr/>
+            <p:txBody>
+              <a:bodyPr/>
+              <a:lstStyle/>
+              <a:p>
+                <a:r>
+                  <a:rPr lang="pt-BR" dirty="0"/>
+                  <a:t>Exploração vs. Explotação (</a:t>
+                </a:r>
+                <a14:m>
+                  <m:oMath xmlns:m="http://schemas.openxmlformats.org/officeDocument/2006/math">
+                    <m:r>
+                      <a:rPr lang="pt-BR" b="0" i="1">
+                        <a:latin typeface="Cambria Math" panose="02040503050406030204" pitchFamily="18" charset="0"/>
+                        <a:ea typeface="Cambria Math" panose="02040503050406030204" pitchFamily="18" charset="0"/>
+                      </a:rPr>
+                      <m:t>𝜀</m:t>
+                    </m:r>
+                  </m:oMath>
+                </a14:m>
+                <a:r>
+                  <a:rPr lang="pt-BR" dirty="0"/>
+                  <a:t>-</a:t>
+                </a:r>
+                <a:r>
+                  <a:rPr lang="pt-BR" i="1" dirty="0" err="1"/>
+                  <a:t>greedy</a:t>
+                </a:r>
+                <a:r>
+                  <a:rPr lang="pt-BR" dirty="0"/>
+                  <a:t>) </a:t>
+                </a:r>
+                <a:endParaRPr lang="en-US" dirty="0"/>
+              </a:p>
+            </p:txBody>
+          </p:sp>
+        </mc:Choice>
+        <mc:Fallback xmlns="">
+          <p:sp>
+            <p:nvSpPr>
+              <p:cNvPr id="2" name="Title 1">
+                <a:extLst>
+                  <a:ext uri="{FF2B5EF4-FFF2-40B4-BE49-F238E27FC236}">
+                    <a16:creationId xmlns:a16="http://schemas.microsoft.com/office/drawing/2014/main" id="{7BB2B1C3-607B-4033-88D5-A1CF66C9D6F3}"/>
+                  </a:ext>
+                </a:extLst>
+              </p:cNvPr>
+              <p:cNvSpPr>
+                <a:spLocks noGrp="1" noRot="1" noChangeAspect="1" noMove="1" noResize="1" noEditPoints="1" noAdjustHandles="1" noChangeArrowheads="1" noChangeShapeType="1" noTextEdit="1"/>
+              </p:cNvSpPr>
+              <p:nvPr>
+                <p:ph type="title"/>
+              </p:nvPr>
+            </p:nvSpPr>
+            <p:spPr>
+              <a:blipFill>
+                <a:blip r:embed="rId3"/>
+                <a:stretch>
+                  <a:fillRect l="-2377"/>
+                </a:stretch>
+              </a:blipFill>
+            </p:spPr>
+            <p:txBody>
+              <a:bodyPr/>
+              <a:lstStyle/>
+              <a:p>
+                <a:r>
+                  <a:rPr lang="en-US">
+                    <a:noFill/>
+                  </a:rPr>
+                  <a:t> </a:t>
+                </a:r>
+              </a:p>
+            </p:txBody>
+          </p:sp>
+        </mc:Fallback>
+      </mc:AlternateContent>
+      <mc:AlternateContent xmlns:mc="http://schemas.openxmlformats.org/markup-compatibility/2006">
+        <mc:Choice xmlns:a14="http://schemas.microsoft.com/office/drawing/2010/main" Requires="a14">
+          <p:sp>
+            <p:nvSpPr>
+              <p:cNvPr id="3" name="Content Placeholder 2">
+                <a:extLst>
+                  <a:ext uri="{FF2B5EF4-FFF2-40B4-BE49-F238E27FC236}">
+                    <a16:creationId xmlns="" xmlns:a16="http://schemas.microsoft.com/office/drawing/2014/main" id="{5D80C21A-F4FC-B1BE-7D36-8D93DC02776E}"/>
+                  </a:ext>
+                </a:extLst>
+              </p:cNvPr>
+              <p:cNvSpPr>
+                <a:spLocks noGrp="1"/>
+              </p:cNvSpPr>
+              <p:nvPr>
+                <p:ph idx="1"/>
+              </p:nvPr>
+            </p:nvSpPr>
+            <p:spPr>
+              <a:xfrm>
+                <a:off x="4405745" y="1825624"/>
+                <a:ext cx="7601197" cy="5032375"/>
+              </a:xfrm>
+            </p:spPr>
+            <p:txBody>
+              <a:bodyPr>
+                <a:normAutofit lnSpcReduction="10000"/>
+              </a:bodyPr>
+              <a:lstStyle/>
+              <a:p>
+                <a:r>
+                  <a:rPr lang="pt-BR" dirty="0" smtClean="0"/>
+                  <a:t>Se </a:t>
+                </a:r>
+                <a:r>
+                  <a:rPr lang="pt-BR" dirty="0"/>
+                  <a:t>o agente não explorar no começo, ele pode encontrar um caminho medíocre e ficar preso nele para sempre. </a:t>
+                </a:r>
+              </a:p>
+              <a:p>
+                <a:r>
+                  <a:rPr lang="pt-BR" dirty="0"/>
+                  <a:t>O </a:t>
+                </a:r>
+                <a14:m>
+                  <m:oMath xmlns:m="http://schemas.openxmlformats.org/officeDocument/2006/math">
+                    <m:r>
+                      <a:rPr lang="pt-BR" i="1">
+                        <a:latin typeface="Cambria Math" panose="02040503050406030204" pitchFamily="18" charset="0"/>
+                        <a:ea typeface="Cambria Math" panose="02040503050406030204" pitchFamily="18" charset="0"/>
+                      </a:rPr>
+                      <m:t>𝜀</m:t>
+                    </m:r>
+                  </m:oMath>
+                </a14:m>
+                <a:r>
+                  <a:rPr lang="pt-BR" dirty="0"/>
+                  <a:t> </a:t>
+                </a:r>
+                <a:r>
+                  <a:rPr lang="pt-BR" dirty="0" smtClean="0"/>
+                  <a:t>costuma</a:t>
+                </a:r>
+              </a:p>
+              <a:p>
+                <a:pPr lvl="1"/>
+                <a:r>
+                  <a:rPr lang="pt-BR" dirty="0" smtClean="0"/>
+                  <a:t>começar </a:t>
+                </a:r>
+                <a:r>
+                  <a:rPr lang="pt-BR" dirty="0"/>
+                  <a:t>em 1.0 (100% de exploração</a:t>
+                </a:r>
+                <a:r>
+                  <a:rPr lang="pt-BR" dirty="0"/>
+                  <a:t>), tomando ações aleatórias para descobrir o </a:t>
+                </a:r>
+                <a:r>
+                  <a:rPr lang="pt-BR" dirty="0" smtClean="0"/>
+                  <a:t>ambiente</a:t>
+                </a:r>
+                <a:endParaRPr lang="pt-BR" dirty="0" smtClean="0"/>
+              </a:p>
+              <a:p>
+                <a:pPr lvl="1"/>
+                <a:r>
+                  <a:rPr lang="pt-BR" dirty="0" smtClean="0"/>
+                  <a:t>e </a:t>
+                </a:r>
+                <a:r>
+                  <a:rPr lang="pt-BR" dirty="0"/>
+                  <a:t>decair gradualmente à medida que o agente aprende (</a:t>
+                </a:r>
+                <a:r>
+                  <a:rPr lang="pt-BR" i="1" dirty="0" err="1"/>
+                  <a:t>decay</a:t>
+                </a:r>
+                <a:r>
+                  <a:rPr lang="pt-BR" i="1" dirty="0"/>
+                  <a:t> rate</a:t>
+                </a:r>
+                <a:r>
+                  <a:rPr lang="pt-BR" dirty="0" smtClean="0"/>
+                  <a:t>).</a:t>
+                </a:r>
+              </a:p>
+              <a:p>
+                <a:r>
+                  <a:rPr lang="pt-BR" dirty="0"/>
+                  <a:t>Com -</a:t>
+                </a:r>
+                <a:r>
+                  <a:rPr lang="pt-BR" dirty="0" err="1"/>
+                  <a:t>greedy</a:t>
+                </a:r>
+                <a:r>
+                  <a:rPr lang="pt-BR" dirty="0"/>
+                  <a:t>, inicia-se com alto (fazendo ações aleatórias para descobrir o ambiente) e diminui-se gradualmente. Isso permite aprender o Q corretamente antes de “explorar demais” o que aparenta já ser ótimo</a:t>
+                </a:r>
+                <a:endParaRPr lang="pt-BR" dirty="0"/>
+              </a:p>
+            </p:txBody>
+          </p:sp>
+        </mc:Choice>
+        <mc:Fallback>
+          <p:sp>
+            <p:nvSpPr>
+              <p:cNvPr id="3" name="Content Placeholder 2">
+                <a:extLst>
+                  <a:ext uri="{FF2B5EF4-FFF2-40B4-BE49-F238E27FC236}">
+                    <a16:creationId xmlns="" xmlns:a16="http://schemas.microsoft.com/office/drawing/2014/main" xmlns:a14="http://schemas.microsoft.com/office/drawing/2010/main" id="{5D80C21A-F4FC-B1BE-7D36-8D93DC02776E}"/>
+                  </a:ext>
+                </a:extLst>
+              </p:cNvPr>
+              <p:cNvSpPr>
+                <a:spLocks noGrp="1" noRot="1" noChangeAspect="1" noMove="1" noResize="1" noEditPoints="1" noAdjustHandles="1" noChangeArrowheads="1" noChangeShapeType="1" noTextEdit="1"/>
+              </p:cNvSpPr>
+              <p:nvPr>
+                <p:ph idx="1"/>
+              </p:nvPr>
+            </p:nvSpPr>
+            <p:spPr>
+              <a:xfrm>
+                <a:off x="4405745" y="1825624"/>
+                <a:ext cx="7601197" cy="5032375"/>
+              </a:xfrm>
+              <a:blipFill rotWithShape="0">
+                <a:blip r:embed="rId4"/>
+                <a:stretch>
+                  <a:fillRect l="-1443" t="-2663"/>
+                </a:stretch>
+              </a:blipFill>
+            </p:spPr>
+            <p:txBody>
+              <a:bodyPr/>
+              <a:lstStyle/>
+              <a:p>
+                <a:r>
+                  <a:rPr lang="pt-BR">
+                    <a:noFill/>
+                  </a:rPr>
+                  <a:t> </a:t>
+                </a:r>
+              </a:p>
+            </p:txBody>
+          </p:sp>
+        </mc:Fallback>
+      </mc:AlternateContent>
       <p:pic>
         <p:nvPicPr>
-          <p:cNvPr id="3074" name="Picture 2" descr="Reinforcement Learning In Real Life. Simple Explanation With Funny Cats">
-            <a:extLst>
-              <a:ext uri="{FF2B5EF4-FFF2-40B4-BE49-F238E27FC236}">
-                <a16:creationId xmlns:a16="http://schemas.microsoft.com/office/drawing/2014/main" xmlns="" id="{BF6473FC-0F5F-F021-4950-C2C526AE66A2}"/>
-              </a:ext>
-            </a:extLst>
-          </p:cNvPr>
+          <p:cNvPr id="2050" name="Picture 2" descr="An Introduction to Q-Learning Part 2/2"/>
           <p:cNvPicPr>
             <a:picLocks noChangeAspect="1" noChangeArrowheads="1"/>
           </p:cNvPicPr>
           <p:nvPr/>
         </p:nvPicPr>
         <p:blipFill>
-          <a:blip r:embed="rId2">
+          <a:blip r:embed="rId5" cstate="print">
             <a:extLst>
               <a:ext uri="{28A0092B-C50C-407E-A947-70E740481C1C}">
                 <a14:useLocalDpi xmlns:a14="http://schemas.microsoft.com/office/drawing/2010/main" val="0"/>
@@ -10463,8 +10764,8 @@
         </p:blipFill>
         <p:spPr bwMode="auto">
           <a:xfrm>
-            <a:off x="362858" y="1423306"/>
-            <a:ext cx="7416800" cy="4171950"/>
+            <a:off x="448887" y="2972739"/>
+            <a:ext cx="3357880" cy="2481911"/>
           </a:xfrm>
           <a:prstGeom prst="rect">
             <a:avLst/>
@@ -10484,7 +10785,7 @@
     </p:spTree>
     <p:extLst>
       <p:ext uri="{BB962C8B-B14F-4D97-AF65-F5344CB8AC3E}">
-        <p14:creationId xmlns:p14="http://schemas.microsoft.com/office/powerpoint/2010/main" val="362123597"/>
+        <p14:creationId xmlns:p14="http://schemas.microsoft.com/office/powerpoint/2010/main" val="1794803981"/>
       </p:ext>
     </p:extLst>
   </p:cSld>
@@ -10516,7 +10817,7 @@
           <p:cNvPr id="3" name="Content Placeholder 2">
             <a:extLst>
               <a:ext uri="{FF2B5EF4-FFF2-40B4-BE49-F238E27FC236}">
-                <a16:creationId xmlns:a16="http://schemas.microsoft.com/office/drawing/2014/main" xmlns="" id="{59B6A74E-8855-B416-1D2B-EC3735DC0079}"/>
+                <a16:creationId xmlns="" xmlns:a16="http://schemas.microsoft.com/office/drawing/2014/main" id="{59B6A74E-8855-B416-1D2B-EC3735DC0079}"/>
               </a:ext>
             </a:extLst>
           </p:cNvPr>
@@ -10592,7 +10893,7 @@
           <p:cNvPr id="1026" name="Picture 2" descr="Reinforcement Learning">
             <a:extLst>
               <a:ext uri="{FF2B5EF4-FFF2-40B4-BE49-F238E27FC236}">
-                <a16:creationId xmlns:a16="http://schemas.microsoft.com/office/drawing/2014/main" xmlns="" id="{5526EDB3-366A-5FFB-4A2D-BC3494C1E889}"/>
+                <a16:creationId xmlns="" xmlns:a16="http://schemas.microsoft.com/office/drawing/2014/main" id="{5526EDB3-366A-5FFB-4A2D-BC3494C1E889}"/>
               </a:ext>
             </a:extLst>
           </p:cNvPr>
@@ -10666,10 +10967,141 @@
       </p:grpSpPr>
       <p:sp>
         <p:nvSpPr>
+          <p:cNvPr id="3" name="Content Placeholder 2">
+            <a:extLst>
+              <a:ext uri="{FF2B5EF4-FFF2-40B4-BE49-F238E27FC236}">
+                <a16:creationId xmlns="" xmlns:a16="http://schemas.microsoft.com/office/drawing/2014/main" id="{407A6B7C-8AE2-0626-7031-C9A0D36E6CE3}"/>
+              </a:ext>
+            </a:extLst>
+          </p:cNvPr>
+          <p:cNvSpPr>
+            <a:spLocks noGrp="1"/>
+          </p:cNvSpPr>
+          <p:nvPr>
+            <p:ph idx="1"/>
+          </p:nvPr>
+        </p:nvSpPr>
+        <p:spPr>
+          <a:xfrm>
+            <a:off x="7946573" y="1823299"/>
+            <a:ext cx="3962400" cy="3371964"/>
+          </a:xfrm>
+        </p:spPr>
+        <p:txBody>
+          <a:bodyPr>
+            <a:normAutofit/>
+          </a:bodyPr>
+          <a:lstStyle/>
+          <a:p>
+            <a:pPr marL="0" indent="0" algn="ctr">
+              <a:buNone/>
+            </a:pPr>
+            <a:r>
+              <a:rPr lang="pt-BR" sz="3600" dirty="0"/>
+              <a:t>Como o agente aprende?</a:t>
+            </a:r>
+          </a:p>
+          <a:p>
+            <a:pPr marL="0" indent="0" algn="ctr">
+              <a:buNone/>
+            </a:pPr>
+            <a:endParaRPr lang="pt-BR" sz="3600" dirty="0"/>
+          </a:p>
+          <a:p>
+            <a:pPr marL="0" indent="0" algn="ctr">
+              <a:buNone/>
+            </a:pPr>
+            <a:r>
+              <a:rPr lang="pt-BR" sz="3600" dirty="0"/>
+              <a:t>Ou seja, como a tabela-Q é atualizada?</a:t>
+            </a:r>
+            <a:endParaRPr lang="en-US" sz="3600" dirty="0"/>
+          </a:p>
+        </p:txBody>
+      </p:sp>
+      <p:pic>
+        <p:nvPicPr>
+          <p:cNvPr id="3074" name="Picture 2" descr="Reinforcement Learning In Real Life. Simple Explanation With Funny Cats">
+            <a:extLst>
+              <a:ext uri="{FF2B5EF4-FFF2-40B4-BE49-F238E27FC236}">
+                <a16:creationId xmlns="" xmlns:a16="http://schemas.microsoft.com/office/drawing/2014/main" id="{BF6473FC-0F5F-F021-4950-C2C526AE66A2}"/>
+              </a:ext>
+            </a:extLst>
+          </p:cNvPr>
+          <p:cNvPicPr>
+            <a:picLocks noChangeAspect="1" noChangeArrowheads="1"/>
+          </p:cNvPicPr>
+          <p:nvPr/>
+        </p:nvPicPr>
+        <p:blipFill>
+          <a:blip r:embed="rId2">
+            <a:extLst>
+              <a:ext uri="{28A0092B-C50C-407E-A947-70E740481C1C}">
+                <a14:useLocalDpi xmlns:a14="http://schemas.microsoft.com/office/drawing/2010/main" val="0"/>
+              </a:ext>
+            </a:extLst>
+          </a:blip>
+          <a:srcRect/>
+          <a:stretch>
+            <a:fillRect/>
+          </a:stretch>
+        </p:blipFill>
+        <p:spPr bwMode="auto">
+          <a:xfrm>
+            <a:off x="362858" y="1423306"/>
+            <a:ext cx="7416800" cy="4171950"/>
+          </a:xfrm>
+          <a:prstGeom prst="rect">
+            <a:avLst/>
+          </a:prstGeom>
+          <a:noFill/>
+          <a:extLst>
+            <a:ext uri="{909E8E84-426E-40DD-AFC4-6F175D3DCCD1}">
+              <a14:hiddenFill xmlns:a14="http://schemas.microsoft.com/office/drawing/2010/main">
+                <a:solidFill>
+                  <a:srgbClr val="FFFFFF"/>
+                </a:solidFill>
+              </a14:hiddenFill>
+            </a:ext>
+          </a:extLst>
+        </p:spPr>
+      </p:pic>
+    </p:spTree>
+    <p:extLst>
+      <p:ext uri="{BB962C8B-B14F-4D97-AF65-F5344CB8AC3E}">
+        <p14:creationId xmlns:p14="http://schemas.microsoft.com/office/powerpoint/2010/main" val="362123597"/>
+      </p:ext>
+    </p:extLst>
+  </p:cSld>
+  <p:clrMapOvr>
+    <a:masterClrMapping/>
+  </p:clrMapOvr>
+</p:sld>
+</file>
+
+<file path=ppt/slides/slide21.xml><?xml version="1.0" encoding="utf-8"?>
+<p:sld xmlns:a="http://schemas.openxmlformats.org/drawingml/2006/main" xmlns:r="http://schemas.openxmlformats.org/officeDocument/2006/relationships" xmlns:p="http://schemas.openxmlformats.org/presentationml/2006/main">
+  <p:cSld>
+    <p:spTree>
+      <p:nvGrpSpPr>
+        <p:cNvPr id="1" name=""/>
+        <p:cNvGrpSpPr/>
+        <p:nvPr/>
+      </p:nvGrpSpPr>
+      <p:grpSpPr>
+        <a:xfrm>
+          <a:off x="0" y="0"/>
+          <a:ext cx="0" cy="0"/>
+          <a:chOff x="0" y="0"/>
+          <a:chExt cx="0" cy="0"/>
+        </a:xfrm>
+      </p:grpSpPr>
+      <p:sp>
+        <p:nvSpPr>
           <p:cNvPr id="2" name="Title 1">
             <a:extLst>
               <a:ext uri="{FF2B5EF4-FFF2-40B4-BE49-F238E27FC236}">
-                <a16:creationId xmlns:a16="http://schemas.microsoft.com/office/drawing/2014/main" xmlns="" id="{93D78643-03C9-A92E-0919-E944BBC48702}"/>
+                <a16:creationId xmlns="" xmlns:a16="http://schemas.microsoft.com/office/drawing/2014/main" id="{93D78643-03C9-A92E-0919-E944BBC48702}"/>
               </a:ext>
             </a:extLst>
           </p:cNvPr>
@@ -10716,7 +11148,7 @@
               <p:cNvPr id="3" name="Content Placeholder 2">
                 <a:extLst>
                   <a:ext uri="{FF2B5EF4-FFF2-40B4-BE49-F238E27FC236}">
-                    <a16:creationId xmlns:a16="http://schemas.microsoft.com/office/drawing/2014/main" xmlns="" id="{9E56A20D-5587-73F0-6A77-76736D8C972A}"/>
+                    <a16:creationId xmlns="" xmlns:a16="http://schemas.microsoft.com/office/drawing/2014/main" id="{9E56A20D-5587-73F0-6A77-76736D8C972A}"/>
                   </a:ext>
                 </a:extLst>
               </p:cNvPr>
@@ -11183,11 +11615,7 @@
                 </a:r>
                 <a:r>
                   <a:rPr lang="pt-BR" dirty="0" smtClean="0"/>
-                  <a:t>. </a:t>
-                </a:r>
-                <a:r>
-                  <a:rPr lang="pt-BR" dirty="0" smtClean="0"/>
-                  <a:t>Define </a:t>
+                  <a:t>. Define </a:t>
                 </a:r>
                 <a:r>
                   <a:rPr lang="pt-BR" dirty="0"/>
@@ -11195,11 +11623,7 @@
                 </a:r>
                 <a:r>
                   <a:rPr lang="pt-BR" dirty="0" smtClean="0"/>
-                  <a:t>antiga.</a:t>
-                </a:r>
-                <a:r>
-                  <a:rPr lang="pt-BR" dirty="0"/>
-                  <a:t> Valor entre 0 e 1. </a:t>
+                  <a:t>antiga. </a:t>
                 </a:r>
                 <a:endParaRPr lang="pt-BR" dirty="0"/>
               </a:p>
@@ -11284,13 +11708,8 @@
                 </a:r>
                 <a:r>
                   <a:rPr lang="pt-BR" dirty="0" smtClean="0"/>
-                  <a:t>futuras</a:t>
-                </a:r>
-                <a:r>
-                  <a:rPr lang="pt-BR" dirty="0" smtClean="0"/>
-                  <a:t>.</a:t>
-                </a:r>
-                <a:endParaRPr lang="pt-BR" dirty="0" smtClean="0"/>
+                  <a:t>futuras.</a:t>
+                </a:r>
               </a:p>
               <a:p>
                 <a:pPr lvl="1">
@@ -11324,7 +11743,11 @@
                 </a:r>
                 <a:r>
                   <a:rPr lang="pt-BR" dirty="0"/>
-                  <a:t>agente só liga para recompensas imediatas. </a:t>
+                  <a:t>agente só liga para recompensas </a:t>
+                </a:r>
+                <a:r>
+                  <a:rPr lang="pt-BR" dirty="0" smtClean="0"/>
+                  <a:t>imediatas (recompensas futuras não importam). </a:t>
                 </a:r>
                 <a:endParaRPr lang="pt-BR" dirty="0" smtClean="0"/>
               </a:p>
@@ -11555,11 +11978,7 @@
                 </a:r>
                 <a:r>
                   <a:rPr lang="pt-BR" dirty="0" smtClean="0"/>
-                  <a:t>estimativa da </a:t>
-                </a:r>
-                <a:r>
-                  <a:rPr lang="pt-BR" dirty="0" smtClean="0"/>
-                  <a:t>recompensa futura.</a:t>
+                  <a:t>estimativa da recompensa futura.</a:t>
                 </a:r>
                 <a:endParaRPr lang="pt-BR" dirty="0"/>
               </a:p>
@@ -11572,7 +11991,7 @@
               <p:cNvPr id="3" name="Content Placeholder 2">
                 <a:extLst>
                   <a:ext uri="{FF2B5EF4-FFF2-40B4-BE49-F238E27FC236}">
-                    <a16:creationId xmlns:a16="http://schemas.microsoft.com/office/drawing/2014/main" xmlns:a14="http://schemas.microsoft.com/office/drawing/2010/main" xmlns="" id="{9E56A20D-5587-73F0-6A77-76736D8C972A}"/>
+                    <a16:creationId xmlns="" xmlns:a16="http://schemas.microsoft.com/office/drawing/2014/main" xmlns:a14="http://schemas.microsoft.com/office/drawing/2010/main" id="{9E56A20D-5587-73F0-6A77-76736D8C972A}"/>
                   </a:ext>
                 </a:extLst>
               </p:cNvPr>
@@ -11623,100 +12042,6 @@
 </p:sld>
 </file>
 
-<file path=ppt/slides/slide21.xml><?xml version="1.0" encoding="utf-8"?>
-<p:sld xmlns:a="http://schemas.openxmlformats.org/drawingml/2006/main" xmlns:r="http://schemas.openxmlformats.org/officeDocument/2006/relationships" xmlns:p="http://schemas.openxmlformats.org/presentationml/2006/main">
-  <p:cSld>
-    <p:spTree>
-      <p:nvGrpSpPr>
-        <p:cNvPr id="1" name=""/>
-        <p:cNvGrpSpPr/>
-        <p:nvPr/>
-      </p:nvGrpSpPr>
-      <p:grpSpPr>
-        <a:xfrm>
-          <a:off x="0" y="0"/>
-          <a:ext cx="0" cy="0"/>
-          <a:chOff x="0" y="0"/>
-          <a:chExt cx="0" cy="0"/>
-        </a:xfrm>
-      </p:grpSpPr>
-      <p:sp>
-        <p:nvSpPr>
-          <p:cNvPr id="2" name="Title 1">
-            <a:extLst>
-              <a:ext uri="{FF2B5EF4-FFF2-40B4-BE49-F238E27FC236}">
-                <a16:creationId xmlns:a16="http://schemas.microsoft.com/office/drawing/2014/main" xmlns="" id="{874F2722-DA1E-D930-DC99-59F795E3E8B9}"/>
-              </a:ext>
-            </a:extLst>
-          </p:cNvPr>
-          <p:cNvSpPr>
-            <a:spLocks noGrp="1"/>
-          </p:cNvSpPr>
-          <p:nvPr>
-            <p:ph type="title"/>
-          </p:nvPr>
-        </p:nvSpPr>
-        <p:spPr/>
-        <p:txBody>
-          <a:bodyPr/>
-          <a:lstStyle/>
-          <a:p>
-            <a:endParaRPr lang="en-US"/>
-          </a:p>
-        </p:txBody>
-      </p:sp>
-      <p:sp>
-        <p:nvSpPr>
-          <p:cNvPr id="3" name="Content Placeholder 2">
-            <a:extLst>
-              <a:ext uri="{FF2B5EF4-FFF2-40B4-BE49-F238E27FC236}">
-                <a16:creationId xmlns:a16="http://schemas.microsoft.com/office/drawing/2014/main" xmlns="" id="{97BD2D05-0E48-B94D-DBC7-FBDCBC17C0A5}"/>
-              </a:ext>
-            </a:extLst>
-          </p:cNvPr>
-          <p:cNvSpPr>
-            <a:spLocks noGrp="1"/>
-          </p:cNvSpPr>
-          <p:nvPr>
-            <p:ph idx="1"/>
-          </p:nvPr>
-        </p:nvSpPr>
-        <p:spPr/>
-        <p:txBody>
-          <a:bodyPr>
-            <a:normAutofit/>
-          </a:bodyPr>
-          <a:lstStyle/>
-          <a:p>
-            <a:r>
-              <a:rPr lang="pt-BR" sz="5400" b="1" dirty="0">
-                <a:solidFill>
-                  <a:srgbClr val="FF0000"/>
-                </a:solidFill>
-              </a:rPr>
-              <a:t>PAREI AQUI!!!!!!!!!!!!</a:t>
-            </a:r>
-            <a:endParaRPr lang="en-US" sz="5400" b="1" dirty="0">
-              <a:solidFill>
-                <a:srgbClr val="FF0000"/>
-              </a:solidFill>
-            </a:endParaRPr>
-          </a:p>
-        </p:txBody>
-      </p:sp>
-    </p:spTree>
-    <p:extLst>
-      <p:ext uri="{BB962C8B-B14F-4D97-AF65-F5344CB8AC3E}">
-        <p14:creationId xmlns:p14="http://schemas.microsoft.com/office/powerpoint/2010/main" val="3079050531"/>
-      </p:ext>
-    </p:extLst>
-  </p:cSld>
-  <p:clrMapOvr>
-    <a:masterClrMapping/>
-  </p:clrMapOvr>
-</p:sld>
-</file>
-
 <file path=ppt/slides/slide22.xml><?xml version="1.0" encoding="utf-8"?>
 <p:sld xmlns:a="http://schemas.openxmlformats.org/drawingml/2006/main" xmlns:r="http://schemas.openxmlformats.org/officeDocument/2006/relationships" xmlns:p="http://schemas.openxmlformats.org/presentationml/2006/main">
   <p:cSld>
@@ -11739,7 +12064,7 @@
           <p:cNvPr id="2" name="Title 1">
             <a:extLst>
               <a:ext uri="{FF2B5EF4-FFF2-40B4-BE49-F238E27FC236}">
-                <a16:creationId xmlns:a16="http://schemas.microsoft.com/office/drawing/2014/main" xmlns="" id="{52C5A6D8-ECD1-B38D-0188-C905A6EDF96B}"/>
+                <a16:creationId xmlns="" xmlns:a16="http://schemas.microsoft.com/office/drawing/2014/main" id="{874F2722-DA1E-D930-DC99-59F795E3E8B9}"/>
               </a:ext>
             </a:extLst>
           </p:cNvPr>
@@ -11755,6 +12080,100 @@
           <a:bodyPr/>
           <a:lstStyle/>
           <a:p>
+            <a:endParaRPr lang="en-US"/>
+          </a:p>
+        </p:txBody>
+      </p:sp>
+      <p:sp>
+        <p:nvSpPr>
+          <p:cNvPr id="3" name="Content Placeholder 2">
+            <a:extLst>
+              <a:ext uri="{FF2B5EF4-FFF2-40B4-BE49-F238E27FC236}">
+                <a16:creationId xmlns="" xmlns:a16="http://schemas.microsoft.com/office/drawing/2014/main" id="{97BD2D05-0E48-B94D-DBC7-FBDCBC17C0A5}"/>
+              </a:ext>
+            </a:extLst>
+          </p:cNvPr>
+          <p:cNvSpPr>
+            <a:spLocks noGrp="1"/>
+          </p:cNvSpPr>
+          <p:nvPr>
+            <p:ph idx="1"/>
+          </p:nvPr>
+        </p:nvSpPr>
+        <p:spPr/>
+        <p:txBody>
+          <a:bodyPr>
+            <a:normAutofit/>
+          </a:bodyPr>
+          <a:lstStyle/>
+          <a:p>
+            <a:r>
+              <a:rPr lang="pt-BR" sz="5400" b="1" dirty="0">
+                <a:solidFill>
+                  <a:srgbClr val="FF0000"/>
+                </a:solidFill>
+              </a:rPr>
+              <a:t>PAREI AQUI!!!!!!!!!!!!</a:t>
+            </a:r>
+            <a:endParaRPr lang="en-US" sz="5400" b="1" dirty="0">
+              <a:solidFill>
+                <a:srgbClr val="FF0000"/>
+              </a:solidFill>
+            </a:endParaRPr>
+          </a:p>
+        </p:txBody>
+      </p:sp>
+    </p:spTree>
+    <p:extLst>
+      <p:ext uri="{BB962C8B-B14F-4D97-AF65-F5344CB8AC3E}">
+        <p14:creationId xmlns:p14="http://schemas.microsoft.com/office/powerpoint/2010/main" val="3079050531"/>
+      </p:ext>
+    </p:extLst>
+  </p:cSld>
+  <p:clrMapOvr>
+    <a:masterClrMapping/>
+  </p:clrMapOvr>
+</p:sld>
+</file>
+
+<file path=ppt/slides/slide23.xml><?xml version="1.0" encoding="utf-8"?>
+<p:sld xmlns:a="http://schemas.openxmlformats.org/drawingml/2006/main" xmlns:r="http://schemas.openxmlformats.org/officeDocument/2006/relationships" xmlns:p="http://schemas.openxmlformats.org/presentationml/2006/main">
+  <p:cSld>
+    <p:spTree>
+      <p:nvGrpSpPr>
+        <p:cNvPr id="1" name=""/>
+        <p:cNvGrpSpPr/>
+        <p:nvPr/>
+      </p:nvGrpSpPr>
+      <p:grpSpPr>
+        <a:xfrm>
+          <a:off x="0" y="0"/>
+          <a:ext cx="0" cy="0"/>
+          <a:chOff x="0" y="0"/>
+          <a:chExt cx="0" cy="0"/>
+        </a:xfrm>
+      </p:grpSpPr>
+      <p:sp>
+        <p:nvSpPr>
+          <p:cNvPr id="2" name="Title 1">
+            <a:extLst>
+              <a:ext uri="{FF2B5EF4-FFF2-40B4-BE49-F238E27FC236}">
+                <a16:creationId xmlns="" xmlns:a16="http://schemas.microsoft.com/office/drawing/2014/main" id="{52C5A6D8-ECD1-B38D-0188-C905A6EDF96B}"/>
+              </a:ext>
+            </a:extLst>
+          </p:cNvPr>
+          <p:cNvSpPr>
+            <a:spLocks noGrp="1"/>
+          </p:cNvSpPr>
+          <p:nvPr>
+            <p:ph type="title"/>
+          </p:nvPr>
+        </p:nvSpPr>
+        <p:spPr/>
+        <p:txBody>
+          <a:bodyPr/>
+          <a:lstStyle/>
+          <a:p>
             <a:r>
               <a:rPr lang="pt-BR" dirty="0"/>
               <a:t>A </a:t>
@@ -11770,14 +12189,14 @@
           </a:p>
         </p:txBody>
       </p:sp>
-      <mc:AlternateContent xmlns:mc="http://schemas.openxmlformats.org/markup-compatibility/2006">
-        <mc:Choice xmlns:a14="http://schemas.microsoft.com/office/drawing/2010/main" Requires="a14">
+      <mc:AlternateContent xmlns:mc="http://schemas.openxmlformats.org/markup-compatibility/2006" xmlns:a14="http://schemas.microsoft.com/office/drawing/2010/main">
+        <mc:Choice Requires="a14">
           <p:sp>
             <p:nvSpPr>
               <p:cNvPr id="3" name="Content Placeholder 2">
                 <a:extLst>
                   <a:ext uri="{FF2B5EF4-FFF2-40B4-BE49-F238E27FC236}">
-                    <a16:creationId xmlns:a16="http://schemas.microsoft.com/office/drawing/2014/main" xmlns="" id="{9E788D2D-1B58-788D-B9CB-AA2B58DAC90E}"/>
+                    <a16:creationId xmlns="" xmlns:a16="http://schemas.microsoft.com/office/drawing/2014/main" id="{9E788D2D-1B58-788D-B9CB-AA2B58DAC90E}"/>
                   </a:ext>
                 </a:extLst>
               </p:cNvPr>
@@ -12668,7 +13087,7 @@
             </p:txBody>
           </p:sp>
         </mc:Choice>
-        <mc:Fallback>
+        <mc:Fallback xmlns="">
           <p:sp>
             <p:nvSpPr>
               <p:cNvPr id="3" name="Content Placeholder 2">
@@ -12725,90 +13144,6 @@
 </p:sld>
 </file>
 
-<file path=ppt/slides/slide23.xml><?xml version="1.0" encoding="utf-8"?>
-<p:sld xmlns:a="http://schemas.openxmlformats.org/drawingml/2006/main" xmlns:r="http://schemas.openxmlformats.org/officeDocument/2006/relationships" xmlns:p="http://schemas.openxmlformats.org/presentationml/2006/main">
-  <p:cSld>
-    <p:spTree>
-      <p:nvGrpSpPr>
-        <p:cNvPr id="1" name=""/>
-        <p:cNvGrpSpPr/>
-        <p:nvPr/>
-      </p:nvGrpSpPr>
-      <p:grpSpPr>
-        <a:xfrm>
-          <a:off x="0" y="0"/>
-          <a:ext cx="0" cy="0"/>
-          <a:chOff x="0" y="0"/>
-          <a:chExt cx="0" cy="0"/>
-        </a:xfrm>
-      </p:grpSpPr>
-      <p:sp>
-        <p:nvSpPr>
-          <p:cNvPr id="2" name="Title 1">
-            <a:extLst>
-              <a:ext uri="{FF2B5EF4-FFF2-40B4-BE49-F238E27FC236}">
-                <a16:creationId xmlns:a16="http://schemas.microsoft.com/office/drawing/2014/main" xmlns="" id="{936F8D36-63A1-F427-6A4F-01E854EEB57B}"/>
-              </a:ext>
-            </a:extLst>
-          </p:cNvPr>
-          <p:cNvSpPr>
-            <a:spLocks noGrp="1"/>
-          </p:cNvSpPr>
-          <p:nvPr>
-            <p:ph type="title"/>
-          </p:nvPr>
-        </p:nvSpPr>
-        <p:spPr/>
-        <p:txBody>
-          <a:bodyPr/>
-          <a:lstStyle/>
-          <a:p>
-            <a:r>
-              <a:rPr lang="pt-BR" dirty="0"/>
-              <a:t>Exemplo numérico</a:t>
-            </a:r>
-            <a:endParaRPr lang="en-US" dirty="0"/>
-          </a:p>
-        </p:txBody>
-      </p:sp>
-      <p:sp>
-        <p:nvSpPr>
-          <p:cNvPr id="3" name="Content Placeholder 2">
-            <a:extLst>
-              <a:ext uri="{FF2B5EF4-FFF2-40B4-BE49-F238E27FC236}">
-                <a16:creationId xmlns:a16="http://schemas.microsoft.com/office/drawing/2014/main" xmlns="" id="{EB894157-32A4-5B45-5642-D7607A5096CE}"/>
-              </a:ext>
-            </a:extLst>
-          </p:cNvPr>
-          <p:cNvSpPr>
-            <a:spLocks noGrp="1"/>
-          </p:cNvSpPr>
-          <p:nvPr>
-            <p:ph idx="1"/>
-          </p:nvPr>
-        </p:nvSpPr>
-        <p:spPr/>
-        <p:txBody>
-          <a:bodyPr/>
-          <a:lstStyle/>
-          <a:p>
-            <a:endParaRPr lang="en-US"/>
-          </a:p>
-        </p:txBody>
-      </p:sp>
-    </p:spTree>
-    <p:extLst>
-      <p:ext uri="{BB962C8B-B14F-4D97-AF65-F5344CB8AC3E}">
-        <p14:creationId xmlns:p14="http://schemas.microsoft.com/office/powerpoint/2010/main" val="1454990387"/>
-      </p:ext>
-    </p:extLst>
-  </p:cSld>
-  <p:clrMapOvr>
-    <a:masterClrMapping/>
-  </p:clrMapOvr>
-</p:sld>
-</file>
-
 <file path=ppt/slides/slide24.xml><?xml version="1.0" encoding="utf-8"?>
 <p:sld xmlns:a="http://schemas.openxmlformats.org/drawingml/2006/main" xmlns:r="http://schemas.openxmlformats.org/officeDocument/2006/relationships" xmlns:p="http://schemas.openxmlformats.org/presentationml/2006/main">
   <p:cSld>
@@ -12831,7 +13166,7 @@
           <p:cNvPr id="2" name="Title 1">
             <a:extLst>
               <a:ext uri="{FF2B5EF4-FFF2-40B4-BE49-F238E27FC236}">
-                <a16:creationId xmlns:a16="http://schemas.microsoft.com/office/drawing/2014/main" xmlns="" id="{8EB01B62-8582-E09F-DA69-E77F3F495399}"/>
+                <a16:creationId xmlns="" xmlns:a16="http://schemas.microsoft.com/office/drawing/2014/main" id="{936F8D36-63A1-F427-6A4F-01E854EEB57B}"/>
               </a:ext>
             </a:extLst>
           </p:cNvPr>
@@ -12848,6 +13183,90 @@
           <a:lstStyle/>
           <a:p>
             <a:r>
+              <a:rPr lang="pt-BR" dirty="0"/>
+              <a:t>Exemplo numérico</a:t>
+            </a:r>
+            <a:endParaRPr lang="en-US" dirty="0"/>
+          </a:p>
+        </p:txBody>
+      </p:sp>
+      <p:sp>
+        <p:nvSpPr>
+          <p:cNvPr id="3" name="Content Placeholder 2">
+            <a:extLst>
+              <a:ext uri="{FF2B5EF4-FFF2-40B4-BE49-F238E27FC236}">
+                <a16:creationId xmlns="" xmlns:a16="http://schemas.microsoft.com/office/drawing/2014/main" id="{EB894157-32A4-5B45-5642-D7607A5096CE}"/>
+              </a:ext>
+            </a:extLst>
+          </p:cNvPr>
+          <p:cNvSpPr>
+            <a:spLocks noGrp="1"/>
+          </p:cNvSpPr>
+          <p:nvPr>
+            <p:ph idx="1"/>
+          </p:nvPr>
+        </p:nvSpPr>
+        <p:spPr/>
+        <p:txBody>
+          <a:bodyPr/>
+          <a:lstStyle/>
+          <a:p>
+            <a:endParaRPr lang="en-US"/>
+          </a:p>
+        </p:txBody>
+      </p:sp>
+    </p:spTree>
+    <p:extLst>
+      <p:ext uri="{BB962C8B-B14F-4D97-AF65-F5344CB8AC3E}">
+        <p14:creationId xmlns:p14="http://schemas.microsoft.com/office/powerpoint/2010/main" val="1454990387"/>
+      </p:ext>
+    </p:extLst>
+  </p:cSld>
+  <p:clrMapOvr>
+    <a:masterClrMapping/>
+  </p:clrMapOvr>
+</p:sld>
+</file>
+
+<file path=ppt/slides/slide25.xml><?xml version="1.0" encoding="utf-8"?>
+<p:sld xmlns:a="http://schemas.openxmlformats.org/drawingml/2006/main" xmlns:r="http://schemas.openxmlformats.org/officeDocument/2006/relationships" xmlns:p="http://schemas.openxmlformats.org/presentationml/2006/main">
+  <p:cSld>
+    <p:spTree>
+      <p:nvGrpSpPr>
+        <p:cNvPr id="1" name=""/>
+        <p:cNvGrpSpPr/>
+        <p:nvPr/>
+      </p:nvGrpSpPr>
+      <p:grpSpPr>
+        <a:xfrm>
+          <a:off x="0" y="0"/>
+          <a:ext cx="0" cy="0"/>
+          <a:chOff x="0" y="0"/>
+          <a:chExt cx="0" cy="0"/>
+        </a:xfrm>
+      </p:grpSpPr>
+      <p:sp>
+        <p:nvSpPr>
+          <p:cNvPr id="2" name="Title 1">
+            <a:extLst>
+              <a:ext uri="{FF2B5EF4-FFF2-40B4-BE49-F238E27FC236}">
+                <a16:creationId xmlns="" xmlns:a16="http://schemas.microsoft.com/office/drawing/2014/main" id="{8EB01B62-8582-E09F-DA69-E77F3F495399}"/>
+              </a:ext>
+            </a:extLst>
+          </p:cNvPr>
+          <p:cNvSpPr>
+            <a:spLocks noGrp="1"/>
+          </p:cNvSpPr>
+          <p:nvPr>
+            <p:ph type="title"/>
+          </p:nvPr>
+        </p:nvSpPr>
+        <p:spPr/>
+        <p:txBody>
+          <a:bodyPr/>
+          <a:lstStyle/>
+          <a:p>
+            <a:r>
               <a:rPr lang="en-US" dirty="0"/>
               <a:t>A </a:t>
             </a:r>
@@ -12867,14 +13286,14 @@
           </a:p>
         </p:txBody>
       </p:sp>
-      <mc:AlternateContent xmlns:mc="http://schemas.openxmlformats.org/markup-compatibility/2006">
-        <mc:Choice xmlns:a14="http://schemas.microsoft.com/office/drawing/2010/main" Requires="a14">
+      <mc:AlternateContent xmlns:mc="http://schemas.openxmlformats.org/markup-compatibility/2006" xmlns:a14="http://schemas.microsoft.com/office/drawing/2010/main">
+        <mc:Choice Requires="a14">
           <p:sp>
             <p:nvSpPr>
               <p:cNvPr id="3" name="Content Placeholder 2">
                 <a:extLst>
                   <a:ext uri="{FF2B5EF4-FFF2-40B4-BE49-F238E27FC236}">
-                    <a16:creationId xmlns:a16="http://schemas.microsoft.com/office/drawing/2014/main" xmlns="" id="{0DB47E26-1487-F7F1-F157-E71A864B453D}"/>
+                    <a16:creationId xmlns="" xmlns:a16="http://schemas.microsoft.com/office/drawing/2014/main" id="{0DB47E26-1487-F7F1-F157-E71A864B453D}"/>
                   </a:ext>
                 </a:extLst>
               </p:cNvPr>
@@ -13053,7 +13472,7 @@
             </p:txBody>
           </p:sp>
         </mc:Choice>
-        <mc:Fallback>
+        <mc:Fallback xmlns="">
           <p:sp>
             <p:nvSpPr>
               <p:cNvPr id="3" name="Content Placeholder 2">
@@ -13110,150 +13529,6 @@
 </p:sld>
 </file>
 
-<file path=ppt/slides/slide25.xml><?xml version="1.0" encoding="utf-8"?>
-<p:sld xmlns:a="http://schemas.openxmlformats.org/drawingml/2006/main" xmlns:r="http://schemas.openxmlformats.org/officeDocument/2006/relationships" xmlns:p="http://schemas.openxmlformats.org/presentationml/2006/main">
-  <p:cSld>
-    <p:spTree>
-      <p:nvGrpSpPr>
-        <p:cNvPr id="1" name=""/>
-        <p:cNvGrpSpPr/>
-        <p:nvPr/>
-      </p:nvGrpSpPr>
-      <p:grpSpPr>
-        <a:xfrm>
-          <a:off x="0" y="0"/>
-          <a:ext cx="0" cy="0"/>
-          <a:chOff x="0" y="0"/>
-          <a:chExt cx="0" cy="0"/>
-        </a:xfrm>
-      </p:grpSpPr>
-      <p:sp>
-        <p:nvSpPr>
-          <p:cNvPr id="2" name="Title 1">
-            <a:extLst>
-              <a:ext uri="{FF2B5EF4-FFF2-40B4-BE49-F238E27FC236}">
-                <a16:creationId xmlns:a16="http://schemas.microsoft.com/office/drawing/2014/main" xmlns="" id="{BC71F0FE-EA94-74C4-913C-E1B2789B6121}"/>
-              </a:ext>
-            </a:extLst>
-          </p:cNvPr>
-          <p:cNvSpPr>
-            <a:spLocks noGrp="1"/>
-          </p:cNvSpPr>
-          <p:nvPr>
-            <p:ph type="title"/>
-          </p:nvPr>
-        </p:nvSpPr>
-        <p:spPr/>
-        <p:txBody>
-          <a:bodyPr/>
-          <a:lstStyle/>
-          <a:p>
-            <a:r>
-              <a:rPr lang="en-US" dirty="0"/>
-              <a:t>A </a:t>
-            </a:r>
-            <a:r>
-              <a:rPr lang="en-US" dirty="0" err="1"/>
-              <a:t>maldição</a:t>
-            </a:r>
-            <a:r>
-              <a:rPr lang="en-US" dirty="0"/>
-              <a:t> da </a:t>
-            </a:r>
-            <a:r>
-              <a:rPr lang="en-US" dirty="0" err="1"/>
-              <a:t>dimensionalidade</a:t>
-            </a:r>
-            <a:endParaRPr lang="en-US" dirty="0"/>
-          </a:p>
-        </p:txBody>
-      </p:sp>
-      <p:sp>
-        <p:nvSpPr>
-          <p:cNvPr id="3" name="Content Placeholder 2">
-            <a:extLst>
-              <a:ext uri="{FF2B5EF4-FFF2-40B4-BE49-F238E27FC236}">
-                <a16:creationId xmlns:a16="http://schemas.microsoft.com/office/drawing/2014/main" xmlns="" id="{387116BB-1259-5A42-97B8-F5F027BBE6D6}"/>
-              </a:ext>
-            </a:extLst>
-          </p:cNvPr>
-          <p:cNvSpPr>
-            <a:spLocks noGrp="1"/>
-          </p:cNvSpPr>
-          <p:nvPr>
-            <p:ph idx="1"/>
-          </p:nvPr>
-        </p:nvSpPr>
-        <p:spPr>
-          <a:xfrm>
-            <a:off x="838200" y="1825625"/>
-            <a:ext cx="10896600" cy="4351338"/>
-          </a:xfrm>
-        </p:spPr>
-        <p:txBody>
-          <a:bodyPr/>
-          <a:lstStyle/>
-          <a:p>
-            <a:r>
-              <a:rPr lang="pt-BR" dirty="0"/>
-              <a:t>Para problemas com poucas ações e estados, a tabela é ótima. </a:t>
-            </a:r>
-          </a:p>
-          <a:p>
-            <a:r>
-              <a:rPr lang="pt-BR" dirty="0"/>
-              <a:t>Mas, por exemplo, em engenharia robótica, os estados são contínuos: </a:t>
-            </a:r>
-          </a:p>
-          <a:p>
-            <a:pPr lvl="1">
-              <a:buFont typeface="Wingdings" panose="05000000000000000000" pitchFamily="2" charset="2"/>
-              <a:buChar char="§"/>
-            </a:pPr>
-            <a:r>
-              <a:rPr lang="pt-BR" dirty="0"/>
-              <a:t>Por exemplo, velocidade, ângulo da articulação. </a:t>
-            </a:r>
-          </a:p>
-          <a:p>
-            <a:r>
-              <a:rPr lang="pt-BR" dirty="0"/>
-              <a:t>Não podemos ter uma linha na tabela-Q para um ângulo de 45,1 graus e outra para 45,2 graus. </a:t>
-            </a:r>
-          </a:p>
-          <a:p>
-            <a:r>
-              <a:rPr lang="pt-BR" dirty="0"/>
-              <a:t>Precisamos de </a:t>
-            </a:r>
-            <a:r>
-              <a:rPr lang="pt-BR" b="1" dirty="0"/>
-              <a:t>generalização</a:t>
-            </a:r>
-            <a:r>
-              <a:rPr lang="pt-BR" dirty="0"/>
-              <a:t>.</a:t>
-            </a:r>
-            <a:endParaRPr lang="en-US" dirty="0"/>
-          </a:p>
-          <a:p>
-            <a:endParaRPr lang="en-US" dirty="0"/>
-          </a:p>
-        </p:txBody>
-      </p:sp>
-    </p:spTree>
-    <p:extLst>
-      <p:ext uri="{BB962C8B-B14F-4D97-AF65-F5344CB8AC3E}">
-        <p14:creationId xmlns:p14="http://schemas.microsoft.com/office/powerpoint/2010/main" val="182445256"/>
-      </p:ext>
-    </p:extLst>
-  </p:cSld>
-  <p:clrMapOvr>
-    <a:masterClrMapping/>
-  </p:clrMapOvr>
-</p:sld>
-</file>
-
 <file path=ppt/slides/slide26.xml><?xml version="1.0" encoding="utf-8"?>
 <p:sld xmlns:a="http://schemas.openxmlformats.org/drawingml/2006/main" xmlns:r="http://schemas.openxmlformats.org/officeDocument/2006/relationships" xmlns:p="http://schemas.openxmlformats.org/presentationml/2006/main">
   <p:cSld>
@@ -13276,7 +13551,7 @@
           <p:cNvPr id="2" name="Title 1">
             <a:extLst>
               <a:ext uri="{FF2B5EF4-FFF2-40B4-BE49-F238E27FC236}">
-                <a16:creationId xmlns:a16="http://schemas.microsoft.com/office/drawing/2014/main" xmlns="" id="{0FD9EB4A-BCBE-6A0F-12D6-6770FC41F962}"/>
+                <a16:creationId xmlns="" xmlns:a16="http://schemas.microsoft.com/office/drawing/2014/main" id="{BC71F0FE-EA94-74C4-913C-E1B2789B6121}"/>
               </a:ext>
             </a:extLst>
           </p:cNvPr>
@@ -13293,6 +13568,150 @@
           <a:lstStyle/>
           <a:p>
             <a:r>
+              <a:rPr lang="en-US" dirty="0"/>
+              <a:t>A </a:t>
+            </a:r>
+            <a:r>
+              <a:rPr lang="en-US" dirty="0" err="1"/>
+              <a:t>maldição</a:t>
+            </a:r>
+            <a:r>
+              <a:rPr lang="en-US" dirty="0"/>
+              <a:t> da </a:t>
+            </a:r>
+            <a:r>
+              <a:rPr lang="en-US" dirty="0" err="1"/>
+              <a:t>dimensionalidade</a:t>
+            </a:r>
+            <a:endParaRPr lang="en-US" dirty="0"/>
+          </a:p>
+        </p:txBody>
+      </p:sp>
+      <p:sp>
+        <p:nvSpPr>
+          <p:cNvPr id="3" name="Content Placeholder 2">
+            <a:extLst>
+              <a:ext uri="{FF2B5EF4-FFF2-40B4-BE49-F238E27FC236}">
+                <a16:creationId xmlns="" xmlns:a16="http://schemas.microsoft.com/office/drawing/2014/main" id="{387116BB-1259-5A42-97B8-F5F027BBE6D6}"/>
+              </a:ext>
+            </a:extLst>
+          </p:cNvPr>
+          <p:cNvSpPr>
+            <a:spLocks noGrp="1"/>
+          </p:cNvSpPr>
+          <p:nvPr>
+            <p:ph idx="1"/>
+          </p:nvPr>
+        </p:nvSpPr>
+        <p:spPr>
+          <a:xfrm>
+            <a:off x="838200" y="1825625"/>
+            <a:ext cx="10896600" cy="4351338"/>
+          </a:xfrm>
+        </p:spPr>
+        <p:txBody>
+          <a:bodyPr/>
+          <a:lstStyle/>
+          <a:p>
+            <a:r>
+              <a:rPr lang="pt-BR" dirty="0"/>
+              <a:t>Para problemas com poucas ações e estados, a tabela é ótima. </a:t>
+            </a:r>
+          </a:p>
+          <a:p>
+            <a:r>
+              <a:rPr lang="pt-BR" dirty="0"/>
+              <a:t>Mas, por exemplo, em engenharia robótica, os estados são contínuos: </a:t>
+            </a:r>
+          </a:p>
+          <a:p>
+            <a:pPr lvl="1">
+              <a:buFont typeface="Wingdings" panose="05000000000000000000" pitchFamily="2" charset="2"/>
+              <a:buChar char="§"/>
+            </a:pPr>
+            <a:r>
+              <a:rPr lang="pt-BR" dirty="0"/>
+              <a:t>Por exemplo, velocidade, ângulo da articulação. </a:t>
+            </a:r>
+          </a:p>
+          <a:p>
+            <a:r>
+              <a:rPr lang="pt-BR" dirty="0"/>
+              <a:t>Não podemos ter uma linha na tabela-Q para um ângulo de 45,1 graus e outra para 45,2 graus. </a:t>
+            </a:r>
+          </a:p>
+          <a:p>
+            <a:r>
+              <a:rPr lang="pt-BR" dirty="0"/>
+              <a:t>Precisamos de </a:t>
+            </a:r>
+            <a:r>
+              <a:rPr lang="pt-BR" b="1" dirty="0"/>
+              <a:t>generalização</a:t>
+            </a:r>
+            <a:r>
+              <a:rPr lang="pt-BR" dirty="0"/>
+              <a:t>.</a:t>
+            </a:r>
+            <a:endParaRPr lang="en-US" dirty="0"/>
+          </a:p>
+          <a:p>
+            <a:endParaRPr lang="en-US" dirty="0"/>
+          </a:p>
+        </p:txBody>
+      </p:sp>
+    </p:spTree>
+    <p:extLst>
+      <p:ext uri="{BB962C8B-B14F-4D97-AF65-F5344CB8AC3E}">
+        <p14:creationId xmlns:p14="http://schemas.microsoft.com/office/powerpoint/2010/main" val="182445256"/>
+      </p:ext>
+    </p:extLst>
+  </p:cSld>
+  <p:clrMapOvr>
+    <a:masterClrMapping/>
+  </p:clrMapOvr>
+</p:sld>
+</file>
+
+<file path=ppt/slides/slide27.xml><?xml version="1.0" encoding="utf-8"?>
+<p:sld xmlns:a="http://schemas.openxmlformats.org/drawingml/2006/main" xmlns:r="http://schemas.openxmlformats.org/officeDocument/2006/relationships" xmlns:p="http://schemas.openxmlformats.org/presentationml/2006/main">
+  <p:cSld>
+    <p:spTree>
+      <p:nvGrpSpPr>
+        <p:cNvPr id="1" name=""/>
+        <p:cNvGrpSpPr/>
+        <p:nvPr/>
+      </p:nvGrpSpPr>
+      <p:grpSpPr>
+        <a:xfrm>
+          <a:off x="0" y="0"/>
+          <a:ext cx="0" cy="0"/>
+          <a:chOff x="0" y="0"/>
+          <a:chExt cx="0" cy="0"/>
+        </a:xfrm>
+      </p:grpSpPr>
+      <p:sp>
+        <p:nvSpPr>
+          <p:cNvPr id="2" name="Title 1">
+            <a:extLst>
+              <a:ext uri="{FF2B5EF4-FFF2-40B4-BE49-F238E27FC236}">
+                <a16:creationId xmlns="" xmlns:a16="http://schemas.microsoft.com/office/drawing/2014/main" id="{0FD9EB4A-BCBE-6A0F-12D6-6770FC41F962}"/>
+              </a:ext>
+            </a:extLst>
+          </p:cNvPr>
+          <p:cNvSpPr>
+            <a:spLocks noGrp="1"/>
+          </p:cNvSpPr>
+          <p:nvPr>
+            <p:ph type="title"/>
+          </p:nvPr>
+        </p:nvSpPr>
+        <p:spPr/>
+        <p:txBody>
+          <a:bodyPr/>
+          <a:lstStyle/>
+          <a:p>
+            <a:r>
               <a:rPr lang="pt-BR" dirty="0"/>
               <a:t>Trocando a tabela-Q por redes neurais</a:t>
             </a:r>
@@ -13307,7 +13726,7 @@
               <p:cNvPr id="3" name="Content Placeholder 2">
                 <a:extLst>
                   <a:ext uri="{FF2B5EF4-FFF2-40B4-BE49-F238E27FC236}">
-                    <a16:creationId xmlns:a16="http://schemas.microsoft.com/office/drawing/2014/main" xmlns="" id="{9B1F2B59-589E-C89D-B023-E847F3DC922F}"/>
+                    <a16:creationId xmlns="" xmlns:a16="http://schemas.microsoft.com/office/drawing/2014/main" id="{9B1F2B59-589E-C89D-B023-E847F3DC922F}"/>
                   </a:ext>
                 </a:extLst>
               </p:cNvPr>
@@ -13515,7 +13934,7 @@
           <p:cNvPr id="1028" name="Picture 4" descr="Cracking the Spell of Q* - A New Method in Problem Solving | Benny's Mind  Hack">
             <a:extLst>
               <a:ext uri="{FF2B5EF4-FFF2-40B4-BE49-F238E27FC236}">
-                <a16:creationId xmlns:a16="http://schemas.microsoft.com/office/drawing/2014/main" xmlns="" id="{2FAF9048-FD7A-0345-D833-A8A15BE69361}"/>
+                <a16:creationId xmlns="" xmlns:a16="http://schemas.microsoft.com/office/drawing/2014/main" id="{2FAF9048-FD7A-0345-D833-A8A15BE69361}"/>
               </a:ext>
             </a:extLst>
           </p:cNvPr>
@@ -13570,7 +13989,7 @@
 </p:sld>
 </file>
 
-<file path=ppt/slides/slide27.xml><?xml version="1.0" encoding="utf-8"?>
+<file path=ppt/slides/slide28.xml><?xml version="1.0" encoding="utf-8"?>
 <p:sld xmlns:a="http://schemas.openxmlformats.org/drawingml/2006/main" xmlns:r="http://schemas.openxmlformats.org/officeDocument/2006/relationships" xmlns:p="http://schemas.openxmlformats.org/presentationml/2006/main">
   <p:cSld>
     <p:spTree>
@@ -13592,7 +14011,7 @@
           <p:cNvPr id="2" name="Title 1">
             <a:extLst>
               <a:ext uri="{FF2B5EF4-FFF2-40B4-BE49-F238E27FC236}">
-                <a16:creationId xmlns:a16="http://schemas.microsoft.com/office/drawing/2014/main" xmlns="" id="{48EDEA96-2DFF-1829-9984-096F6593BEEE}"/>
+                <a16:creationId xmlns="" xmlns:a16="http://schemas.microsoft.com/office/drawing/2014/main" id="{48EDEA96-2DFF-1829-9984-096F6593BEEE}"/>
               </a:ext>
             </a:extLst>
           </p:cNvPr>
@@ -13628,7 +14047,7 @@
           <p:cNvPr id="3" name="Content Placeholder 2">
             <a:extLst>
               <a:ext uri="{FF2B5EF4-FFF2-40B4-BE49-F238E27FC236}">
-                <a16:creationId xmlns:a16="http://schemas.microsoft.com/office/drawing/2014/main" xmlns="" id="{0160E88F-503C-2590-9D5D-B2BDD50D2767}"/>
+                <a16:creationId xmlns="" xmlns:a16="http://schemas.microsoft.com/office/drawing/2014/main" id="{0160E88F-503C-2590-9D5D-B2BDD50D2767}"/>
               </a:ext>
             </a:extLst>
           </p:cNvPr>
@@ -13696,7 +14115,6 @@
               <a:rPr lang="pt-BR" dirty="0"/>
               <a:t>Otimizar qual vídeo ou anúncio mostrar para você na internet com base no engajamento a longo prazo.</a:t>
             </a:r>
-            <a:endParaRPr lang="pt-BR" dirty="0"/>
           </a:p>
           <a:p>
             <a:r>
@@ -13720,7 +14138,7 @@
           <p:cNvPr id="6" name="Picture 5">
             <a:extLst>
               <a:ext uri="{FF2B5EF4-FFF2-40B4-BE49-F238E27FC236}">
-                <a16:creationId xmlns:a16="http://schemas.microsoft.com/office/drawing/2014/main" xmlns="" id="{265EF8FE-70EB-D556-D43F-F69593E54B8C}"/>
+                <a16:creationId xmlns="" xmlns:a16="http://schemas.microsoft.com/office/drawing/2014/main" id="{265EF8FE-70EB-D556-D43F-F69593E54B8C}"/>
               </a:ext>
             </a:extLst>
           </p:cNvPr>
@@ -13764,7 +14182,7 @@
 </p:sld>
 </file>
 
-<file path=ppt/slides/slide28.xml><?xml version="1.0" encoding="utf-8"?>
+<file path=ppt/slides/slide29.xml><?xml version="1.0" encoding="utf-8"?>
 <p:sld xmlns:a="http://schemas.openxmlformats.org/drawingml/2006/main" xmlns:r="http://schemas.openxmlformats.org/officeDocument/2006/relationships" xmlns:p="http://schemas.openxmlformats.org/presentationml/2006/main">
   <p:cSld>
     <p:spTree>
@@ -13786,7 +14204,7 @@
           <p:cNvPr id="2" name="Título 1">
             <a:extLst>
               <a:ext uri="{FF2B5EF4-FFF2-40B4-BE49-F238E27FC236}">
-                <a16:creationId xmlns:a16="http://schemas.microsoft.com/office/drawing/2014/main" xmlns="" id="{94AB8438-E56E-2412-517C-8456E4CA773C}"/>
+                <a16:creationId xmlns="" xmlns:a16="http://schemas.microsoft.com/office/drawing/2014/main" id="{94AB8438-E56E-2412-517C-8456E4CA773C}"/>
               </a:ext>
             </a:extLst>
           </p:cNvPr>
@@ -13814,7 +14232,7 @@
           <p:cNvPr id="3" name="Espaço Reservado para Conteúdo 2">
             <a:extLst>
               <a:ext uri="{FF2B5EF4-FFF2-40B4-BE49-F238E27FC236}">
-                <a16:creationId xmlns:a16="http://schemas.microsoft.com/office/drawing/2014/main" xmlns="" id="{F7E2B09C-6D56-4C9F-A364-B904CCE2F1A0}"/>
+                <a16:creationId xmlns="" xmlns:a16="http://schemas.microsoft.com/office/drawing/2014/main" id="{F7E2B09C-6D56-4C9F-A364-B904CCE2F1A0}"/>
               </a:ext>
             </a:extLst>
           </p:cNvPr>
@@ -13840,11 +14258,7 @@
             </a:r>
             <a:r>
               <a:rPr lang="pt-BR" dirty="0" err="1" smtClean="0"/>
-              <a:t>learning</a:t>
-            </a:r>
-            <a:r>
-              <a:rPr lang="pt-BR" dirty="0" err="1" smtClean="0"/>
-              <a:t>.ipynb</a:t>
+              <a:t>learning.ipynb</a:t>
             </a:r>
             <a:endParaRPr lang="en-US" dirty="0"/>
           </a:p>
@@ -13861,7 +14275,7 @@
           <p:cNvPr id="18" name="Group 17">
             <a:extLst>
               <a:ext uri="{FF2B5EF4-FFF2-40B4-BE49-F238E27FC236}">
-                <a16:creationId xmlns:a16="http://schemas.microsoft.com/office/drawing/2014/main" xmlns="" id="{627C64FD-88E0-EC8E-2A34-0D5737B4C854}"/>
+                <a16:creationId xmlns="" xmlns:a16="http://schemas.microsoft.com/office/drawing/2014/main" id="{627C64FD-88E0-EC8E-2A34-0D5737B4C854}"/>
               </a:ext>
             </a:extLst>
           </p:cNvPr>
@@ -13881,7 +14295,7 @@
             <p:cNvPr id="12" name="Picture 4" descr="Project Jupyter | Try Jupyter">
               <a:extLst>
                 <a:ext uri="{FF2B5EF4-FFF2-40B4-BE49-F238E27FC236}">
-                  <a16:creationId xmlns:a16="http://schemas.microsoft.com/office/drawing/2014/main" xmlns="" id="{FF92EA36-91E7-292B-D7A0-2D4D83A10F98}"/>
+                  <a16:creationId xmlns="" xmlns:a16="http://schemas.microsoft.com/office/drawing/2014/main" id="{FF92EA36-91E7-292B-D7A0-2D4D83A10F98}"/>
                 </a:ext>
               </a:extLst>
             </p:cNvPr>
@@ -13928,7 +14342,7 @@
             <p:cNvPr id="13" name="Picture 8" descr="Google Colaboratory Colab - Guía Completa Español - Marketing Branding">
               <a:extLst>
                 <a:ext uri="{FF2B5EF4-FFF2-40B4-BE49-F238E27FC236}">
-                  <a16:creationId xmlns:a16="http://schemas.microsoft.com/office/drawing/2014/main" xmlns="" id="{46F1718A-89E6-9E63-E40B-2B19852D6AA0}"/>
+                  <a16:creationId xmlns="" xmlns:a16="http://schemas.microsoft.com/office/drawing/2014/main" id="{46F1718A-89E6-9E63-E40B-2B19852D6AA0}"/>
                 </a:ext>
               </a:extLst>
             </p:cNvPr>
@@ -13973,7 +14387,7 @@
             <p:cNvPr id="14" name="Picture 10" descr="IT12A01: FUNDAMENTALS OF PYTHON PROGRAMMING (SF) (SYNCHRONOUS E-LEARNING) -  NTUC LearningHub">
               <a:extLst>
                 <a:ext uri="{FF2B5EF4-FFF2-40B4-BE49-F238E27FC236}">
-                  <a16:creationId xmlns:a16="http://schemas.microsoft.com/office/drawing/2014/main" xmlns="" id="{33F6B1B4-9B79-D634-3E35-33F24609C848}"/>
+                  <a16:creationId xmlns="" xmlns:a16="http://schemas.microsoft.com/office/drawing/2014/main" id="{33F6B1B4-9B79-D634-3E35-33F24609C848}"/>
                 </a:ext>
               </a:extLst>
             </p:cNvPr>
@@ -14018,7 +14432,7 @@
             <p:cNvPr id="15" name="Sinal de Adição 7">
               <a:extLst>
                 <a:ext uri="{FF2B5EF4-FFF2-40B4-BE49-F238E27FC236}">
-                  <a16:creationId xmlns:a16="http://schemas.microsoft.com/office/drawing/2014/main" xmlns="" id="{6959EE6C-DCDB-E78B-5C50-EBD3FF3049E2}"/>
+                  <a16:creationId xmlns="" xmlns:a16="http://schemas.microsoft.com/office/drawing/2014/main" id="{6959EE6C-DCDB-E78B-5C50-EBD3FF3049E2}"/>
                 </a:ext>
               </a:extLst>
             </p:cNvPr>
@@ -14066,7 +14480,7 @@
             <p:cNvPr id="17" name="Sinal de Adição 10">
               <a:extLst>
                 <a:ext uri="{FF2B5EF4-FFF2-40B4-BE49-F238E27FC236}">
-                  <a16:creationId xmlns:a16="http://schemas.microsoft.com/office/drawing/2014/main" xmlns="" id="{30A21FDB-ABA6-9FD5-49EF-7762414AEF0C}"/>
+                  <a16:creationId xmlns="" xmlns:a16="http://schemas.microsoft.com/office/drawing/2014/main" id="{30A21FDB-ABA6-9FD5-49EF-7762414AEF0C}"/>
                 </a:ext>
               </a:extLst>
             </p:cNvPr>
@@ -14123,105 +14537,6 @@
 </p:sld>
 </file>
 
-<file path=ppt/slides/slide29.xml><?xml version="1.0" encoding="utf-8"?>
-<p:sld xmlns:a="http://schemas.openxmlformats.org/drawingml/2006/main" xmlns:r="http://schemas.openxmlformats.org/officeDocument/2006/relationships" xmlns:p="http://schemas.openxmlformats.org/presentationml/2006/main">
-  <p:cSld>
-    <p:spTree>
-      <p:nvGrpSpPr>
-        <p:cNvPr id="1" name=""/>
-        <p:cNvGrpSpPr/>
-        <p:nvPr/>
-      </p:nvGrpSpPr>
-      <p:grpSpPr>
-        <a:xfrm>
-          <a:off x="0" y="0"/>
-          <a:ext cx="0" cy="0"/>
-          <a:chOff x="0" y="0"/>
-          <a:chExt cx="0" cy="0"/>
-        </a:xfrm>
-      </p:grpSpPr>
-      <p:sp>
-        <p:nvSpPr>
-          <p:cNvPr id="2" name="Title 1">
-            <a:extLst>
-              <a:ext uri="{FF2B5EF4-FFF2-40B4-BE49-F238E27FC236}">
-                <a16:creationId xmlns:a16="http://schemas.microsoft.com/office/drawing/2014/main" xmlns="" id="{E8FD0E11-3B37-4336-5BF0-C8C033354AF6}"/>
-              </a:ext>
-            </a:extLst>
-          </p:cNvPr>
-          <p:cNvSpPr>
-            <a:spLocks noGrp="1"/>
-          </p:cNvSpPr>
-          <p:nvPr>
-            <p:ph type="title"/>
-          </p:nvPr>
-        </p:nvSpPr>
-        <p:spPr/>
-        <p:txBody>
-          <a:bodyPr/>
-          <a:lstStyle/>
-          <a:p>
-            <a:r>
-              <a:rPr lang="pt-BR" dirty="0"/>
-              <a:t>Lista de exercícios</a:t>
-            </a:r>
-            <a:endParaRPr lang="en-US" dirty="0"/>
-          </a:p>
-        </p:txBody>
-      </p:sp>
-      <p:sp>
-        <p:nvSpPr>
-          <p:cNvPr id="3" name="Content Placeholder 2">
-            <a:extLst>
-              <a:ext uri="{FF2B5EF4-FFF2-40B4-BE49-F238E27FC236}">
-                <a16:creationId xmlns:a16="http://schemas.microsoft.com/office/drawing/2014/main" xmlns="" id="{32CB14AB-72E4-05EB-962C-F8B4618D0574}"/>
-              </a:ext>
-            </a:extLst>
-          </p:cNvPr>
-          <p:cNvSpPr>
-            <a:spLocks noGrp="1"/>
-          </p:cNvSpPr>
-          <p:nvPr>
-            <p:ph idx="1"/>
-          </p:nvPr>
-        </p:nvSpPr>
-        <p:spPr/>
-        <p:txBody>
-          <a:bodyPr/>
-          <a:lstStyle/>
-          <a:p>
-            <a:pPr marL="0" indent="0">
-              <a:buNone/>
-            </a:pPr>
-            <a:r>
-              <a:rPr lang="pt-BR" dirty="0"/>
-              <a:t>Lista </a:t>
-            </a:r>
-            <a:r>
-              <a:rPr lang="pt-BR" dirty="0" smtClean="0"/>
-              <a:t>#14 – Q-</a:t>
-            </a:r>
-            <a:r>
-              <a:rPr lang="pt-BR" dirty="0" err="1" smtClean="0"/>
-              <a:t>learning</a:t>
-            </a:r>
-            <a:endParaRPr lang="en-US" dirty="0"/>
-          </a:p>
-        </p:txBody>
-      </p:sp>
-    </p:spTree>
-    <p:extLst>
-      <p:ext uri="{BB962C8B-B14F-4D97-AF65-F5344CB8AC3E}">
-        <p14:creationId xmlns:p14="http://schemas.microsoft.com/office/powerpoint/2010/main" val="3294531366"/>
-      </p:ext>
-    </p:extLst>
-  </p:cSld>
-  <p:clrMapOvr>
-    <a:masterClrMapping/>
-  </p:clrMapOvr>
-</p:sld>
-</file>
-
 <file path=ppt/slides/slide3.xml><?xml version="1.0" encoding="utf-8"?>
 <p:sld xmlns:a="http://schemas.openxmlformats.org/drawingml/2006/main" xmlns:r="http://schemas.openxmlformats.org/officeDocument/2006/relationships" xmlns:p="http://schemas.openxmlformats.org/presentationml/2006/main">
   <p:cSld>
@@ -14244,7 +14559,7 @@
           <p:cNvPr id="2" name="Título 1">
             <a:extLst>
               <a:ext uri="{FF2B5EF4-FFF2-40B4-BE49-F238E27FC236}">
-                <a16:creationId xmlns:a16="http://schemas.microsoft.com/office/drawing/2014/main" xmlns="" id="{7F5FF925-67DE-CC62-E869-C6E3C1D771E6}"/>
+                <a16:creationId xmlns="" xmlns:a16="http://schemas.microsoft.com/office/drawing/2014/main" id="{7F5FF925-67DE-CC62-E869-C6E3C1D771E6}"/>
               </a:ext>
             </a:extLst>
           </p:cNvPr>
@@ -14284,7 +14599,7 @@
           <p:cNvPr id="3" name="Espaço Reservado para Conteúdo 2">
             <a:extLst>
               <a:ext uri="{FF2B5EF4-FFF2-40B4-BE49-F238E27FC236}">
-                <a16:creationId xmlns:a16="http://schemas.microsoft.com/office/drawing/2014/main" xmlns="" id="{7DA84068-671A-9D40-4F76-2C57E4F720C2}"/>
+                <a16:creationId xmlns="" xmlns:a16="http://schemas.microsoft.com/office/drawing/2014/main" id="{7DA84068-671A-9D40-4F76-2C57E4F720C2}"/>
               </a:ext>
             </a:extLst>
           </p:cNvPr>
@@ -14347,7 +14662,7 @@
           <p:cNvPr id="2051" name="Picture 3" descr="Understanding the Pillars of Machine Learning: Supervised, Unsupervised,  and Reinforcement Learning">
             <a:extLst>
               <a:ext uri="{FF2B5EF4-FFF2-40B4-BE49-F238E27FC236}">
-                <a16:creationId xmlns:a16="http://schemas.microsoft.com/office/drawing/2014/main" xmlns="" id="{BDF6F402-9EED-6D9D-33D9-227B654D168D}"/>
+                <a16:creationId xmlns="" xmlns:a16="http://schemas.microsoft.com/office/drawing/2014/main" id="{BDF6F402-9EED-6D9D-33D9-227B654D168D}"/>
               </a:ext>
             </a:extLst>
           </p:cNvPr>
@@ -14421,10 +14736,109 @@
       </p:grpSpPr>
       <p:sp>
         <p:nvSpPr>
+          <p:cNvPr id="2" name="Title 1">
+            <a:extLst>
+              <a:ext uri="{FF2B5EF4-FFF2-40B4-BE49-F238E27FC236}">
+                <a16:creationId xmlns="" xmlns:a16="http://schemas.microsoft.com/office/drawing/2014/main" id="{E8FD0E11-3B37-4336-5BF0-C8C033354AF6}"/>
+              </a:ext>
+            </a:extLst>
+          </p:cNvPr>
+          <p:cNvSpPr>
+            <a:spLocks noGrp="1"/>
+          </p:cNvSpPr>
+          <p:nvPr>
+            <p:ph type="title"/>
+          </p:nvPr>
+        </p:nvSpPr>
+        <p:spPr/>
+        <p:txBody>
+          <a:bodyPr/>
+          <a:lstStyle/>
+          <a:p>
+            <a:r>
+              <a:rPr lang="pt-BR" dirty="0"/>
+              <a:t>Lista de exercícios</a:t>
+            </a:r>
+            <a:endParaRPr lang="en-US" dirty="0"/>
+          </a:p>
+        </p:txBody>
+      </p:sp>
+      <p:sp>
+        <p:nvSpPr>
+          <p:cNvPr id="3" name="Content Placeholder 2">
+            <a:extLst>
+              <a:ext uri="{FF2B5EF4-FFF2-40B4-BE49-F238E27FC236}">
+                <a16:creationId xmlns="" xmlns:a16="http://schemas.microsoft.com/office/drawing/2014/main" id="{32CB14AB-72E4-05EB-962C-F8B4618D0574}"/>
+              </a:ext>
+            </a:extLst>
+          </p:cNvPr>
+          <p:cNvSpPr>
+            <a:spLocks noGrp="1"/>
+          </p:cNvSpPr>
+          <p:nvPr>
+            <p:ph idx="1"/>
+          </p:nvPr>
+        </p:nvSpPr>
+        <p:spPr/>
+        <p:txBody>
+          <a:bodyPr/>
+          <a:lstStyle/>
+          <a:p>
+            <a:pPr marL="0" indent="0">
+              <a:buNone/>
+            </a:pPr>
+            <a:r>
+              <a:rPr lang="pt-BR" dirty="0"/>
+              <a:t>Lista </a:t>
+            </a:r>
+            <a:r>
+              <a:rPr lang="pt-BR" dirty="0" smtClean="0"/>
+              <a:t>#14 – Q-</a:t>
+            </a:r>
+            <a:r>
+              <a:rPr lang="pt-BR" dirty="0" err="1" smtClean="0"/>
+              <a:t>learning</a:t>
+            </a:r>
+            <a:endParaRPr lang="en-US" dirty="0"/>
+          </a:p>
+        </p:txBody>
+      </p:sp>
+    </p:spTree>
+    <p:extLst>
+      <p:ext uri="{BB962C8B-B14F-4D97-AF65-F5344CB8AC3E}">
+        <p14:creationId xmlns:p14="http://schemas.microsoft.com/office/powerpoint/2010/main" val="3294531366"/>
+      </p:ext>
+    </p:extLst>
+  </p:cSld>
+  <p:clrMapOvr>
+    <a:masterClrMapping/>
+  </p:clrMapOvr>
+</p:sld>
+</file>
+
+<file path=ppt/slides/slide31.xml><?xml version="1.0" encoding="utf-8"?>
+<p:sld xmlns:a="http://schemas.openxmlformats.org/drawingml/2006/main" xmlns:r="http://schemas.openxmlformats.org/officeDocument/2006/relationships" xmlns:p="http://schemas.openxmlformats.org/presentationml/2006/main">
+  <p:cSld>
+    <p:spTree>
+      <p:nvGrpSpPr>
+        <p:cNvPr id="1" name=""/>
+        <p:cNvGrpSpPr/>
+        <p:nvPr/>
+      </p:nvGrpSpPr>
+      <p:grpSpPr>
+        <a:xfrm>
+          <a:off x="0" y="0"/>
+          <a:ext cx="0" cy="0"/>
+          <a:chOff x="0" y="0"/>
+          <a:chExt cx="0" cy="0"/>
+        </a:xfrm>
+      </p:grpSpPr>
+      <p:sp>
+        <p:nvSpPr>
           <p:cNvPr id="4" name="Título 1">
             <a:extLst>
               <a:ext uri="{FF2B5EF4-FFF2-40B4-BE49-F238E27FC236}">
-                <a16:creationId xmlns:a16="http://schemas.microsoft.com/office/drawing/2014/main" xmlns="" id="{32666AC8-2E17-4DB4-B0F5-60C640CCFD2E}"/>
+                <a16:creationId xmlns="" xmlns:a16="http://schemas.microsoft.com/office/drawing/2014/main" id="{32666AC8-2E17-4DB4-B0F5-60C640CCFD2E}"/>
               </a:ext>
             </a:extLst>
           </p:cNvPr>
@@ -14488,7 +14902,7 @@
 </p:sld>
 </file>
 
-<file path=ppt/slides/slide31.xml><?xml version="1.0" encoding="utf-8"?>
+<file path=ppt/slides/slide32.xml><?xml version="1.0" encoding="utf-8"?>
 <p:sld xmlns:a="http://schemas.openxmlformats.org/drawingml/2006/main" xmlns:r="http://schemas.openxmlformats.org/officeDocument/2006/relationships" xmlns:p="http://schemas.openxmlformats.org/presentationml/2006/main">
   <p:cSld>
     <p:spTree>
@@ -14510,7 +14924,7 @@
           <p:cNvPr id="4" name="Título 1">
             <a:extLst>
               <a:ext uri="{FF2B5EF4-FFF2-40B4-BE49-F238E27FC236}">
-                <a16:creationId xmlns:a16="http://schemas.microsoft.com/office/drawing/2014/main" xmlns="" id="{32666AC8-2E17-4DB4-B0F5-60C640CCFD2E}"/>
+                <a16:creationId xmlns="" xmlns:a16="http://schemas.microsoft.com/office/drawing/2014/main" id="{32666AC8-2E17-4DB4-B0F5-60C640CCFD2E}"/>
               </a:ext>
             </a:extLst>
           </p:cNvPr>
@@ -14574,7 +14988,7 @@
 </p:sld>
 </file>
 
-<file path=ppt/slides/slide32.xml><?xml version="1.0" encoding="utf-8"?>
+<file path=ppt/slides/slide33.xml><?xml version="1.0" encoding="utf-8"?>
 <p:sld xmlns:a="http://schemas.openxmlformats.org/drawingml/2006/main" xmlns:r="http://schemas.openxmlformats.org/officeDocument/2006/relationships" xmlns:p="http://schemas.openxmlformats.org/presentationml/2006/main">
   <p:cSld>
     <p:spTree>
@@ -14582,7 +14996,7 @@
         <p:cNvPr id="1" name="">
           <a:extLst>
             <a:ext uri="{FF2B5EF4-FFF2-40B4-BE49-F238E27FC236}">
-              <a16:creationId xmlns:a16="http://schemas.microsoft.com/office/drawing/2014/main" xmlns="" id="{83DFB381-AAB9-2788-1601-EB1230F302AA}"/>
+              <a16:creationId xmlns="" xmlns:a16="http://schemas.microsoft.com/office/drawing/2014/main" id="{83DFB381-AAB9-2788-1601-EB1230F302AA}"/>
             </a:ext>
           </a:extLst>
         </p:cNvPr>
@@ -14602,7 +15016,7 @@
           <p:cNvPr id="4" name="Título 1">
             <a:extLst>
               <a:ext uri="{FF2B5EF4-FFF2-40B4-BE49-F238E27FC236}">
-                <a16:creationId xmlns:a16="http://schemas.microsoft.com/office/drawing/2014/main" xmlns="" id="{4AF40FF5-E3E4-99F0-8C87-687EB32C12F9}"/>
+                <a16:creationId xmlns="" xmlns:a16="http://schemas.microsoft.com/office/drawing/2014/main" id="{4AF40FF5-E3E4-99F0-8C87-687EB32C12F9}"/>
               </a:ext>
             </a:extLst>
           </p:cNvPr>
@@ -14666,7 +15080,7 @@
 </p:sld>
 </file>
 
-<file path=ppt/slides/slide33.xml><?xml version="1.0" encoding="utf-8"?>
+<file path=ppt/slides/slide34.xml><?xml version="1.0" encoding="utf-8"?>
 <p:sld xmlns:a="http://schemas.openxmlformats.org/drawingml/2006/main" xmlns:r="http://schemas.openxmlformats.org/officeDocument/2006/relationships" xmlns:p="http://schemas.openxmlformats.org/presentationml/2006/main">
   <p:cSld>
     <p:spTree>
@@ -14688,7 +15102,7 @@
           <p:cNvPr id="59" name="Group 58">
             <a:extLst>
               <a:ext uri="{FF2B5EF4-FFF2-40B4-BE49-F238E27FC236}">
-                <a16:creationId xmlns:a16="http://schemas.microsoft.com/office/drawing/2014/main" xmlns="" id="{BB54A8AF-5D7A-DF48-6B51-A97D3BA5AE2B}"/>
+                <a16:creationId xmlns="" xmlns:a16="http://schemas.microsoft.com/office/drawing/2014/main" id="{BB54A8AF-5D7A-DF48-6B51-A97D3BA5AE2B}"/>
               </a:ext>
             </a:extLst>
           </p:cNvPr>
@@ -14708,7 +15122,7 @@
             <p:cNvPr id="26" name="Rectangle 25">
               <a:extLst>
                 <a:ext uri="{FF2B5EF4-FFF2-40B4-BE49-F238E27FC236}">
-                  <a16:creationId xmlns:a16="http://schemas.microsoft.com/office/drawing/2014/main" xmlns="" id="{A78F414E-0878-E9AC-3349-365D683589EF}"/>
+                  <a16:creationId xmlns="" xmlns:a16="http://schemas.microsoft.com/office/drawing/2014/main" id="{A78F414E-0878-E9AC-3349-365D683589EF}"/>
                 </a:ext>
               </a:extLst>
             </p:cNvPr>
@@ -14757,7 +15171,7 @@
             <p:cNvPr id="27" name="Rectangle 26">
               <a:extLst>
                 <a:ext uri="{FF2B5EF4-FFF2-40B4-BE49-F238E27FC236}">
-                  <a16:creationId xmlns:a16="http://schemas.microsoft.com/office/drawing/2014/main" xmlns="" id="{67A2140F-0BEB-DFFC-0173-0DDE81A0BAF4}"/>
+                  <a16:creationId xmlns="" xmlns:a16="http://schemas.microsoft.com/office/drawing/2014/main" id="{67A2140F-0BEB-DFFC-0173-0DDE81A0BAF4}"/>
                 </a:ext>
               </a:extLst>
             </p:cNvPr>
@@ -14806,7 +15220,7 @@
             <p:cNvPr id="33" name="Rectangle 32">
               <a:extLst>
                 <a:ext uri="{FF2B5EF4-FFF2-40B4-BE49-F238E27FC236}">
-                  <a16:creationId xmlns:a16="http://schemas.microsoft.com/office/drawing/2014/main" xmlns="" id="{C67CE66F-B1C9-97C2-5191-323C447A4039}"/>
+                  <a16:creationId xmlns="" xmlns:a16="http://schemas.microsoft.com/office/drawing/2014/main" id="{C67CE66F-B1C9-97C2-5191-323C447A4039}"/>
                 </a:ext>
               </a:extLst>
             </p:cNvPr>
@@ -14855,7 +15269,7 @@
             <p:cNvPr id="34" name="Rectangle 33">
               <a:extLst>
                 <a:ext uri="{FF2B5EF4-FFF2-40B4-BE49-F238E27FC236}">
-                  <a16:creationId xmlns:a16="http://schemas.microsoft.com/office/drawing/2014/main" xmlns="" id="{44116E33-D3F4-D7FB-DCEF-760C9C024249}"/>
+                  <a16:creationId xmlns="" xmlns:a16="http://schemas.microsoft.com/office/drawing/2014/main" id="{44116E33-D3F4-D7FB-DCEF-760C9C024249}"/>
                 </a:ext>
               </a:extLst>
             </p:cNvPr>
@@ -14904,7 +15318,7 @@
             <p:cNvPr id="12" name="Connector: Elbow 11">
               <a:extLst>
                 <a:ext uri="{FF2B5EF4-FFF2-40B4-BE49-F238E27FC236}">
-                  <a16:creationId xmlns:a16="http://schemas.microsoft.com/office/drawing/2014/main" xmlns="" id="{0375811A-BC31-5203-21BF-8C1AEDCA810A}"/>
+                  <a16:creationId xmlns="" xmlns:a16="http://schemas.microsoft.com/office/drawing/2014/main" id="{0375811A-BC31-5203-21BF-8C1AEDCA810A}"/>
                 </a:ext>
               </a:extLst>
             </p:cNvPr>
@@ -14949,7 +15363,7 @@
             <p:cNvPr id="17" name="Rectangle: Rounded Corners 16">
               <a:extLst>
                 <a:ext uri="{FF2B5EF4-FFF2-40B4-BE49-F238E27FC236}">
-                  <a16:creationId xmlns:a16="http://schemas.microsoft.com/office/drawing/2014/main" xmlns="" id="{D957717F-F346-A328-0454-3432762A09F8}"/>
+                  <a16:creationId xmlns="" xmlns:a16="http://schemas.microsoft.com/office/drawing/2014/main" id="{D957717F-F346-A328-0454-3432762A09F8}"/>
                 </a:ext>
               </a:extLst>
             </p:cNvPr>
@@ -14999,7 +15413,7 @@
             <p:cNvPr id="18" name="Rectangle: Rounded Corners 17">
               <a:extLst>
                 <a:ext uri="{FF2B5EF4-FFF2-40B4-BE49-F238E27FC236}">
-                  <a16:creationId xmlns:a16="http://schemas.microsoft.com/office/drawing/2014/main" xmlns="" id="{39EF6FE5-6FBC-BC13-63C8-D6E9E3E272C4}"/>
+                  <a16:creationId xmlns="" xmlns:a16="http://schemas.microsoft.com/office/drawing/2014/main" id="{39EF6FE5-6FBC-BC13-63C8-D6E9E3E272C4}"/>
                 </a:ext>
               </a:extLst>
             </p:cNvPr>
@@ -15051,7 +15465,7 @@
                 <p:cNvPr id="41" name="TextBox 40">
                   <a:extLst>
                     <a:ext uri="{FF2B5EF4-FFF2-40B4-BE49-F238E27FC236}">
-                      <a16:creationId xmlns:a16="http://schemas.microsoft.com/office/drawing/2014/main" xmlns="" id="{DEBC8956-45EC-9A9F-7CAD-7A468058ABF1}"/>
+                      <a16:creationId xmlns="" xmlns:a16="http://schemas.microsoft.com/office/drawing/2014/main" id="{DEBC8956-45EC-9A9F-7CAD-7A468058ABF1}"/>
                     </a:ext>
                   </a:extLst>
                 </p:cNvPr>
@@ -15164,7 +15578,7 @@
                 <p:cNvPr id="10" name="TextBox 9">
                   <a:extLst>
                     <a:ext uri="{FF2B5EF4-FFF2-40B4-BE49-F238E27FC236}">
-                      <a16:creationId xmlns:a16="http://schemas.microsoft.com/office/drawing/2014/main" xmlns="" id="{6B8DF4A4-00E2-9B10-CC12-B0D274CCB842}"/>
+                      <a16:creationId xmlns="" xmlns:a16="http://schemas.microsoft.com/office/drawing/2014/main" id="{6B8DF4A4-00E2-9B10-CC12-B0D274CCB842}"/>
                     </a:ext>
                   </a:extLst>
                 </p:cNvPr>
@@ -15285,7 +15699,7 @@
                 <p:cNvPr id="14" name="TextBox 13">
                   <a:extLst>
                     <a:ext uri="{FF2B5EF4-FFF2-40B4-BE49-F238E27FC236}">
-                      <a16:creationId xmlns:a16="http://schemas.microsoft.com/office/drawing/2014/main" xmlns="" id="{376B01EB-53C8-C2B2-1104-8A2BC1DE4624}"/>
+                      <a16:creationId xmlns="" xmlns:a16="http://schemas.microsoft.com/office/drawing/2014/main" id="{376B01EB-53C8-C2B2-1104-8A2BC1DE4624}"/>
                     </a:ext>
                   </a:extLst>
                 </p:cNvPr>
@@ -15404,7 +15818,7 @@
             <p:cNvPr id="20" name="Rectangle 19">
               <a:extLst>
                 <a:ext uri="{FF2B5EF4-FFF2-40B4-BE49-F238E27FC236}">
-                  <a16:creationId xmlns:a16="http://schemas.microsoft.com/office/drawing/2014/main" xmlns="" id="{8B0A48D5-77C9-C29A-8EF5-BED0E6E38CD2}"/>
+                  <a16:creationId xmlns="" xmlns:a16="http://schemas.microsoft.com/office/drawing/2014/main" id="{8B0A48D5-77C9-C29A-8EF5-BED0E6E38CD2}"/>
                 </a:ext>
               </a:extLst>
             </p:cNvPr>
@@ -15454,7 +15868,7 @@
             <p:cNvPr id="21" name="Rectangle 20">
               <a:extLst>
                 <a:ext uri="{FF2B5EF4-FFF2-40B4-BE49-F238E27FC236}">
-                  <a16:creationId xmlns:a16="http://schemas.microsoft.com/office/drawing/2014/main" xmlns="" id="{48728DA3-DA01-CAB9-540E-37EADA51BE57}"/>
+                  <a16:creationId xmlns="" xmlns:a16="http://schemas.microsoft.com/office/drawing/2014/main" id="{48728DA3-DA01-CAB9-540E-37EADA51BE57}"/>
                 </a:ext>
               </a:extLst>
             </p:cNvPr>
@@ -15504,7 +15918,7 @@
             <p:cNvPr id="25" name="Connector: Elbow 24">
               <a:extLst>
                 <a:ext uri="{FF2B5EF4-FFF2-40B4-BE49-F238E27FC236}">
-                  <a16:creationId xmlns:a16="http://schemas.microsoft.com/office/drawing/2014/main" xmlns="" id="{20E553C2-F044-7C77-F846-B80760291225}"/>
+                  <a16:creationId xmlns="" xmlns:a16="http://schemas.microsoft.com/office/drawing/2014/main" id="{20E553C2-F044-7C77-F846-B80760291225}"/>
                 </a:ext>
               </a:extLst>
             </p:cNvPr>
@@ -15546,7 +15960,7 @@
             <p:cNvPr id="31" name="Straight Arrow Connector 30">
               <a:extLst>
                 <a:ext uri="{FF2B5EF4-FFF2-40B4-BE49-F238E27FC236}">
-                  <a16:creationId xmlns:a16="http://schemas.microsoft.com/office/drawing/2014/main" xmlns="" id="{6AEFECE4-5D15-A8B3-453D-610BA5638D05}"/>
+                  <a16:creationId xmlns="" xmlns:a16="http://schemas.microsoft.com/office/drawing/2014/main" id="{6AEFECE4-5D15-A8B3-453D-610BA5638D05}"/>
                 </a:ext>
               </a:extLst>
             </p:cNvPr>
@@ -15588,7 +16002,7 @@
             <p:cNvPr id="35" name="Straight Arrow Connector 34">
               <a:extLst>
                 <a:ext uri="{FF2B5EF4-FFF2-40B4-BE49-F238E27FC236}">
-                  <a16:creationId xmlns:a16="http://schemas.microsoft.com/office/drawing/2014/main" xmlns="" id="{B6FFE6A0-55AE-62C1-3F6E-5291D436B5AB}"/>
+                  <a16:creationId xmlns="" xmlns:a16="http://schemas.microsoft.com/office/drawing/2014/main" id="{B6FFE6A0-55AE-62C1-3F6E-5291D436B5AB}"/>
                 </a:ext>
               </a:extLst>
             </p:cNvPr>
@@ -15631,7 +16045,7 @@
             <p:cNvPr id="40" name="Connector: Elbow 39">
               <a:extLst>
                 <a:ext uri="{FF2B5EF4-FFF2-40B4-BE49-F238E27FC236}">
-                  <a16:creationId xmlns:a16="http://schemas.microsoft.com/office/drawing/2014/main" xmlns="" id="{73307ED6-2342-7662-DD14-B12FEDB6983C}"/>
+                  <a16:creationId xmlns="" xmlns:a16="http://schemas.microsoft.com/office/drawing/2014/main" id="{73307ED6-2342-7662-DD14-B12FEDB6983C}"/>
                 </a:ext>
               </a:extLst>
             </p:cNvPr>
@@ -15675,7 +16089,7 @@
             <p:cNvPr id="44" name="Straight Connector 43">
               <a:extLst>
                 <a:ext uri="{FF2B5EF4-FFF2-40B4-BE49-F238E27FC236}">
-                  <a16:creationId xmlns:a16="http://schemas.microsoft.com/office/drawing/2014/main" xmlns="" id="{6B737731-0DAB-FB54-8D60-66210A48E60A}"/>
+                  <a16:creationId xmlns="" xmlns:a16="http://schemas.microsoft.com/office/drawing/2014/main" id="{6B737731-0DAB-FB54-8D60-66210A48E60A}"/>
                 </a:ext>
               </a:extLst>
             </p:cNvPr>
@@ -15715,7 +16129,7 @@
             <p:cNvPr id="46" name="Straight Connector 45">
               <a:extLst>
                 <a:ext uri="{FF2B5EF4-FFF2-40B4-BE49-F238E27FC236}">
-                  <a16:creationId xmlns:a16="http://schemas.microsoft.com/office/drawing/2014/main" xmlns="" id="{7AED5B7A-243B-6FAD-C904-A72171DA10E4}"/>
+                  <a16:creationId xmlns="" xmlns:a16="http://schemas.microsoft.com/office/drawing/2014/main" id="{7AED5B7A-243B-6FAD-C904-A72171DA10E4}"/>
                 </a:ext>
               </a:extLst>
             </p:cNvPr>
@@ -15757,7 +16171,7 @@
                 <p:cNvPr id="55" name="TextBox 54">
                   <a:extLst>
                     <a:ext uri="{FF2B5EF4-FFF2-40B4-BE49-F238E27FC236}">
-                      <a16:creationId xmlns:a16="http://schemas.microsoft.com/office/drawing/2014/main" xmlns="" id="{C98BB9BE-FF5B-BD53-700F-EF25882F8757}"/>
+                      <a16:creationId xmlns="" xmlns:a16="http://schemas.microsoft.com/office/drawing/2014/main" id="{C98BB9BE-FF5B-BD53-700F-EF25882F8757}"/>
                     </a:ext>
                   </a:extLst>
                 </p:cNvPr>
@@ -15870,7 +16284,7 @@
                 <p:cNvPr id="56" name="TextBox 55">
                   <a:extLst>
                     <a:ext uri="{FF2B5EF4-FFF2-40B4-BE49-F238E27FC236}">
-                      <a16:creationId xmlns:a16="http://schemas.microsoft.com/office/drawing/2014/main" xmlns="" id="{033C1F87-4FD6-565B-5CE1-B94FB9D5F703}"/>
+                      <a16:creationId xmlns="" xmlns:a16="http://schemas.microsoft.com/office/drawing/2014/main" id="{033C1F87-4FD6-565B-5CE1-B94FB9D5F703}"/>
                     </a:ext>
                   </a:extLst>
                 </p:cNvPr>
@@ -15981,7 +16395,7 @@
             <p:cNvPr id="58" name="Straight Connector 57">
               <a:extLst>
                 <a:ext uri="{FF2B5EF4-FFF2-40B4-BE49-F238E27FC236}">
-                  <a16:creationId xmlns:a16="http://schemas.microsoft.com/office/drawing/2014/main" xmlns="" id="{1A8E8F72-A082-BAC3-6C41-D1C1204F72D8}"/>
+                  <a16:creationId xmlns="" xmlns:a16="http://schemas.microsoft.com/office/drawing/2014/main" id="{1A8E8F72-A082-BAC3-6C41-D1C1204F72D8}"/>
                 </a:ext>
               </a:extLst>
             </p:cNvPr>
@@ -16039,7 +16453,7 @@
         <p:cNvPr id="1" name="">
           <a:extLst>
             <a:ext uri="{FF2B5EF4-FFF2-40B4-BE49-F238E27FC236}">
-              <a16:creationId xmlns:a16="http://schemas.microsoft.com/office/drawing/2014/main" xmlns="" id="{A370B64E-1F58-2FF0-BFB3-B1D955875AD5}"/>
+              <a16:creationId xmlns="" xmlns:a16="http://schemas.microsoft.com/office/drawing/2014/main" id="{A370B64E-1F58-2FF0-BFB3-B1D955875AD5}"/>
             </a:ext>
           </a:extLst>
         </p:cNvPr>
@@ -16059,7 +16473,7 @@
           <p:cNvPr id="2" name="Título 1">
             <a:extLst>
               <a:ext uri="{FF2B5EF4-FFF2-40B4-BE49-F238E27FC236}">
-                <a16:creationId xmlns:a16="http://schemas.microsoft.com/office/drawing/2014/main" xmlns="" id="{86CC3BAE-52FC-3697-DB30-5B05B346937E}"/>
+                <a16:creationId xmlns="" xmlns:a16="http://schemas.microsoft.com/office/drawing/2014/main" id="{86CC3BAE-52FC-3697-DB30-5B05B346937E}"/>
               </a:ext>
             </a:extLst>
           </p:cNvPr>
@@ -16088,7 +16502,7 @@
           <p:cNvPr id="3" name="Espaço Reservado para Conteúdo 2">
             <a:extLst>
               <a:ext uri="{FF2B5EF4-FFF2-40B4-BE49-F238E27FC236}">
-                <a16:creationId xmlns:a16="http://schemas.microsoft.com/office/drawing/2014/main" xmlns="" id="{0A06D34D-8885-14BC-AF7E-F271D7D63333}"/>
+                <a16:creationId xmlns="" xmlns:a16="http://schemas.microsoft.com/office/drawing/2014/main" id="{0A06D34D-8885-14BC-AF7E-F271D7D63333}"/>
               </a:ext>
             </a:extLst>
           </p:cNvPr>
@@ -16169,7 +16583,7 @@
           <p:cNvPr id="4" name="Imagem 16">
             <a:extLst>
               <a:ext uri="{FF2B5EF4-FFF2-40B4-BE49-F238E27FC236}">
-                <a16:creationId xmlns:a16="http://schemas.microsoft.com/office/drawing/2014/main" xmlns="" id="{7937C6EA-BFD8-5278-9EE0-796D1842173C}"/>
+                <a16:creationId xmlns="" xmlns:a16="http://schemas.microsoft.com/office/drawing/2014/main" id="{7937C6EA-BFD8-5278-9EE0-796D1842173C}"/>
               </a:ext>
             </a:extLst>
           </p:cNvPr>
@@ -16221,7 +16635,7 @@
         <p:cNvPr id="1" name="">
           <a:extLst>
             <a:ext uri="{FF2B5EF4-FFF2-40B4-BE49-F238E27FC236}">
-              <a16:creationId xmlns:a16="http://schemas.microsoft.com/office/drawing/2014/main" xmlns="" id="{D3753AED-FA4F-39DE-91A4-E5C845C0C665}"/>
+              <a16:creationId xmlns="" xmlns:a16="http://schemas.microsoft.com/office/drawing/2014/main" id="{D3753AED-FA4F-39DE-91A4-E5C845C0C665}"/>
             </a:ext>
           </a:extLst>
         </p:cNvPr>
@@ -16241,7 +16655,7 @@
           <p:cNvPr id="2" name="Título 1">
             <a:extLst>
               <a:ext uri="{FF2B5EF4-FFF2-40B4-BE49-F238E27FC236}">
-                <a16:creationId xmlns:a16="http://schemas.microsoft.com/office/drawing/2014/main" xmlns="" id="{6E88774E-D7D6-D9E6-4449-244D34EE979C}"/>
+                <a16:creationId xmlns="" xmlns:a16="http://schemas.microsoft.com/office/drawing/2014/main" id="{6E88774E-D7D6-D9E6-4449-244D34EE979C}"/>
               </a:ext>
             </a:extLst>
           </p:cNvPr>
@@ -16270,7 +16684,7 @@
           <p:cNvPr id="3" name="Espaço Reservado para Conteúdo 2">
             <a:extLst>
               <a:ext uri="{FF2B5EF4-FFF2-40B4-BE49-F238E27FC236}">
-                <a16:creationId xmlns:a16="http://schemas.microsoft.com/office/drawing/2014/main" xmlns="" id="{0E79548E-494A-A12A-30F7-F4E225B6C309}"/>
+                <a16:creationId xmlns="" xmlns:a16="http://schemas.microsoft.com/office/drawing/2014/main" id="{0E79548E-494A-A12A-30F7-F4E225B6C309}"/>
               </a:ext>
             </a:extLst>
           </p:cNvPr>
@@ -16345,7 +16759,7 @@
           <p:cNvPr id="6" name="Imagem 16">
             <a:extLst>
               <a:ext uri="{FF2B5EF4-FFF2-40B4-BE49-F238E27FC236}">
-                <a16:creationId xmlns:a16="http://schemas.microsoft.com/office/drawing/2014/main" xmlns="" id="{C8EB1D57-2EF7-64D2-25BE-6F8A0BE933DB}"/>
+                <a16:creationId xmlns="" xmlns:a16="http://schemas.microsoft.com/office/drawing/2014/main" id="{C8EB1D57-2EF7-64D2-25BE-6F8A0BE933DB}"/>
               </a:ext>
             </a:extLst>
           </p:cNvPr>
@@ -16397,7 +16811,7 @@
         <p:cNvPr id="1" name="">
           <a:extLst>
             <a:ext uri="{FF2B5EF4-FFF2-40B4-BE49-F238E27FC236}">
-              <a16:creationId xmlns:a16="http://schemas.microsoft.com/office/drawing/2014/main" xmlns="" id="{D41FFEFA-1EED-2754-CDBD-7CC34D06F8B2}"/>
+              <a16:creationId xmlns="" xmlns:a16="http://schemas.microsoft.com/office/drawing/2014/main" id="{D41FFEFA-1EED-2754-CDBD-7CC34D06F8B2}"/>
             </a:ext>
           </a:extLst>
         </p:cNvPr>
@@ -16417,7 +16831,7 @@
           <p:cNvPr id="2" name="Título 1">
             <a:extLst>
               <a:ext uri="{FF2B5EF4-FFF2-40B4-BE49-F238E27FC236}">
-                <a16:creationId xmlns:a16="http://schemas.microsoft.com/office/drawing/2014/main" xmlns="" id="{E4CDBB74-F243-3F53-FEC5-AF11CE256B39}"/>
+                <a16:creationId xmlns="" xmlns:a16="http://schemas.microsoft.com/office/drawing/2014/main" id="{E4CDBB74-F243-3F53-FEC5-AF11CE256B39}"/>
               </a:ext>
             </a:extLst>
           </p:cNvPr>
@@ -16446,7 +16860,7 @@
           <p:cNvPr id="3" name="Espaço Reservado para Conteúdo 2">
             <a:extLst>
               <a:ext uri="{FF2B5EF4-FFF2-40B4-BE49-F238E27FC236}">
-                <a16:creationId xmlns:a16="http://schemas.microsoft.com/office/drawing/2014/main" xmlns="" id="{8A609E9F-E2C8-D6E3-78D1-C44C117B55A3}"/>
+                <a16:creationId xmlns="" xmlns:a16="http://schemas.microsoft.com/office/drawing/2014/main" id="{8A609E9F-E2C8-D6E3-78D1-C44C117B55A3}"/>
               </a:ext>
             </a:extLst>
           </p:cNvPr>
@@ -16491,7 +16905,7 @@
           <p:cNvPr id="4" name="Imagem 16">
             <a:extLst>
               <a:ext uri="{FF2B5EF4-FFF2-40B4-BE49-F238E27FC236}">
-                <a16:creationId xmlns:a16="http://schemas.microsoft.com/office/drawing/2014/main" xmlns="" id="{DF71A34D-2B36-AF4A-818D-805CF072BD50}"/>
+                <a16:creationId xmlns="" xmlns:a16="http://schemas.microsoft.com/office/drawing/2014/main" id="{DF71A34D-2B36-AF4A-818D-805CF072BD50}"/>
               </a:ext>
             </a:extLst>
           </p:cNvPr>
@@ -16557,7 +16971,7 @@
           <p:cNvPr id="2" name="Title 1">
             <a:extLst>
               <a:ext uri="{FF2B5EF4-FFF2-40B4-BE49-F238E27FC236}">
-                <a16:creationId xmlns:a16="http://schemas.microsoft.com/office/drawing/2014/main" xmlns="" id="{81E045BB-096B-FD28-B7D5-E94A5FD7C8E5}"/>
+                <a16:creationId xmlns="" xmlns:a16="http://schemas.microsoft.com/office/drawing/2014/main" id="{81E045BB-096B-FD28-B7D5-E94A5FD7C8E5}"/>
               </a:ext>
             </a:extLst>
           </p:cNvPr>
@@ -16586,7 +17000,7 @@
           <p:cNvPr id="3" name="Content Placeholder 2">
             <a:extLst>
               <a:ext uri="{FF2B5EF4-FFF2-40B4-BE49-F238E27FC236}">
-                <a16:creationId xmlns:a16="http://schemas.microsoft.com/office/drawing/2014/main" xmlns="" id="{DC3C87D0-4294-EB29-295B-08AD144442B5}"/>
+                <a16:creationId xmlns="" xmlns:a16="http://schemas.microsoft.com/office/drawing/2014/main" id="{DC3C87D0-4294-EB29-295B-08AD144442B5}"/>
               </a:ext>
             </a:extLst>
           </p:cNvPr>
@@ -16654,7 +17068,7 @@
           <p:cNvPr id="4" name="Picture 4" descr="A Beginner's Guide to Reinforcement Learning and its Basic Implementation  from Scratch | by Tanvi Penumudy | Analytics Vidhya | Medium">
             <a:extLst>
               <a:ext uri="{FF2B5EF4-FFF2-40B4-BE49-F238E27FC236}">
-                <a16:creationId xmlns:a16="http://schemas.microsoft.com/office/drawing/2014/main" xmlns="" id="{A37B35F5-6EF1-B612-B863-263AB00420ED}"/>
+                <a16:creationId xmlns="" xmlns:a16="http://schemas.microsoft.com/office/drawing/2014/main" id="{A37B35F5-6EF1-B612-B863-263AB00420ED}"/>
               </a:ext>
             </a:extLst>
           </p:cNvPr>
@@ -16731,7 +17145,7 @@
           <p:cNvPr id="2" name="Title 1">
             <a:extLst>
               <a:ext uri="{FF2B5EF4-FFF2-40B4-BE49-F238E27FC236}">
-                <a16:creationId xmlns:a16="http://schemas.microsoft.com/office/drawing/2014/main" xmlns="" id="{CD479DA3-4A1A-74AE-26DA-FD6E65250CCE}"/>
+                <a16:creationId xmlns="" xmlns:a16="http://schemas.microsoft.com/office/drawing/2014/main" id="{CD479DA3-4A1A-74AE-26DA-FD6E65250CCE}"/>
               </a:ext>
             </a:extLst>
           </p:cNvPr>
@@ -16773,7 +17187,7 @@
               <p:cNvPr id="3" name="Content Placeholder 2">
                 <a:extLst>
                   <a:ext uri="{FF2B5EF4-FFF2-40B4-BE49-F238E27FC236}">
-                    <a16:creationId xmlns:a16="http://schemas.microsoft.com/office/drawing/2014/main" xmlns="" id="{D674119D-90D2-5043-F365-B3EB6F84791A}"/>
+                    <a16:creationId xmlns="" xmlns:a16="http://schemas.microsoft.com/office/drawing/2014/main" id="{D674119D-90D2-5043-F365-B3EB6F84791A}"/>
                   </a:ext>
                 </a:extLst>
               </p:cNvPr>
@@ -17003,7 +17417,7 @@
         <p:cNvPr id="1" name="">
           <a:extLst>
             <a:ext uri="{FF2B5EF4-FFF2-40B4-BE49-F238E27FC236}">
-              <a16:creationId xmlns:a16="http://schemas.microsoft.com/office/drawing/2014/main" xmlns="" id="{DDB2BBDA-DAF3-B7AC-FB99-7C5B9285F912}"/>
+              <a16:creationId xmlns="" xmlns:a16="http://schemas.microsoft.com/office/drawing/2014/main" id="{DDB2BBDA-DAF3-B7AC-FB99-7C5B9285F912}"/>
             </a:ext>
           </a:extLst>
         </p:cNvPr>
@@ -17023,7 +17437,7 @@
           <p:cNvPr id="2" name="Title 1">
             <a:extLst>
               <a:ext uri="{FF2B5EF4-FFF2-40B4-BE49-F238E27FC236}">
-                <a16:creationId xmlns:a16="http://schemas.microsoft.com/office/drawing/2014/main" xmlns="" id="{A98D36C9-8653-8E41-11D8-585B6AC0D03D}"/>
+                <a16:creationId xmlns="" xmlns:a16="http://schemas.microsoft.com/office/drawing/2014/main" id="{A98D36C9-8653-8E41-11D8-585B6AC0D03D}"/>
               </a:ext>
             </a:extLst>
           </p:cNvPr>
@@ -17065,7 +17479,7 @@
               <p:cNvPr id="3" name="Content Placeholder 2">
                 <a:extLst>
                   <a:ext uri="{FF2B5EF4-FFF2-40B4-BE49-F238E27FC236}">
-                    <a16:creationId xmlns:a16="http://schemas.microsoft.com/office/drawing/2014/main" xmlns="" id="{981046E0-93D4-BF9F-C552-72A01838A8A3}"/>
+                    <a16:creationId xmlns="" xmlns:a16="http://schemas.microsoft.com/office/drawing/2014/main" id="{981046E0-93D4-BF9F-C552-72A01838A8A3}"/>
                   </a:ext>
                 </a:extLst>
               </p:cNvPr>
@@ -17460,7 +17874,7 @@
           <p:cNvPr id="61" name="Picture 60">
             <a:extLst>
               <a:ext uri="{FF2B5EF4-FFF2-40B4-BE49-F238E27FC236}">
-                <a16:creationId xmlns:a16="http://schemas.microsoft.com/office/drawing/2014/main" xmlns="" id="{22F895FA-1424-E50C-97F4-4F0BE0413C2F}"/>
+                <a16:creationId xmlns="" xmlns:a16="http://schemas.microsoft.com/office/drawing/2014/main" id="{22F895FA-1424-E50C-97F4-4F0BE0413C2F}"/>
               </a:ext>
             </a:extLst>
           </p:cNvPr>

--- a/slides/C24_Q_learning.pptx
+++ b/slides/C24_Q_learning.pptx
@@ -5,10 +5,10 @@
     <p:sldMasterId id="2147483648" r:id="rId1"/>
   </p:sldMasterIdLst>
   <p:notesMasterIdLst>
-    <p:notesMasterId r:id="rId36"/>
+    <p:notesMasterId r:id="rId39"/>
   </p:notesMasterIdLst>
   <p:handoutMasterIdLst>
-    <p:handoutMasterId r:id="rId37"/>
+    <p:handoutMasterId r:id="rId40"/>
   </p:handoutMasterIdLst>
   <p:sldIdLst>
     <p:sldId id="256" r:id="rId2"/>
@@ -32,19 +32,22 @@
     <p:sldId id="348" r:id="rId20"/>
     <p:sldId id="339" r:id="rId21"/>
     <p:sldId id="337" r:id="rId22"/>
-    <p:sldId id="316" r:id="rId23"/>
-    <p:sldId id="340" r:id="rId24"/>
-    <p:sldId id="345" r:id="rId25"/>
-    <p:sldId id="341" r:id="rId26"/>
-    <p:sldId id="342" r:id="rId27"/>
-    <p:sldId id="343" r:id="rId28"/>
-    <p:sldId id="344" r:id="rId29"/>
-    <p:sldId id="346" r:id="rId30"/>
-    <p:sldId id="347" r:id="rId31"/>
-    <p:sldId id="293" r:id="rId32"/>
-    <p:sldId id="306" r:id="rId33"/>
-    <p:sldId id="324" r:id="rId34"/>
-    <p:sldId id="323" r:id="rId35"/>
+    <p:sldId id="351" r:id="rId23"/>
+    <p:sldId id="316" r:id="rId24"/>
+    <p:sldId id="340" r:id="rId25"/>
+    <p:sldId id="350" r:id="rId26"/>
+    <p:sldId id="349" r:id="rId27"/>
+    <p:sldId id="345" r:id="rId28"/>
+    <p:sldId id="341" r:id="rId29"/>
+    <p:sldId id="342" r:id="rId30"/>
+    <p:sldId id="343" r:id="rId31"/>
+    <p:sldId id="344" r:id="rId32"/>
+    <p:sldId id="346" r:id="rId33"/>
+    <p:sldId id="347" r:id="rId34"/>
+    <p:sldId id="293" r:id="rId35"/>
+    <p:sldId id="306" r:id="rId36"/>
+    <p:sldId id="324" r:id="rId37"/>
+    <p:sldId id="323" r:id="rId38"/>
   </p:sldIdLst>
   <p:sldSz cx="12192000" cy="6858000"/>
   <p:notesSz cx="7315200" cy="9601200"/>
@@ -956,7 +959,7 @@
         <p:cNvPr id="1" name="">
           <a:extLst>
             <a:ext uri="{FF2B5EF4-FFF2-40B4-BE49-F238E27FC236}">
-              <a16:creationId xmlns="" xmlns:a16="http://schemas.microsoft.com/office/drawing/2014/main" id="{255DD39D-8438-4F45-71B4-9F8747421DFC}"/>
+              <a16:creationId xmlns:a16="http://schemas.microsoft.com/office/drawing/2014/main" xmlns="" id="{255DD39D-8438-4F45-71B4-9F8747421DFC}"/>
             </a:ext>
           </a:extLst>
         </p:cNvPr>
@@ -976,7 +979,7 @@
           <p:cNvPr id="2" name="Slide Image Placeholder 1">
             <a:extLst>
               <a:ext uri="{FF2B5EF4-FFF2-40B4-BE49-F238E27FC236}">
-                <a16:creationId xmlns="" xmlns:a16="http://schemas.microsoft.com/office/drawing/2014/main" id="{6C322D5B-AD1C-1DB1-53A1-6978329C3FD0}"/>
+                <a16:creationId xmlns:a16="http://schemas.microsoft.com/office/drawing/2014/main" xmlns="" id="{6C322D5B-AD1C-1DB1-53A1-6978329C3FD0}"/>
               </a:ext>
             </a:extLst>
           </p:cNvPr>
@@ -994,7 +997,7 @@
           <p:cNvPr id="3" name="Notes Placeholder 2">
             <a:extLst>
               <a:ext uri="{FF2B5EF4-FFF2-40B4-BE49-F238E27FC236}">
-                <a16:creationId xmlns="" xmlns:a16="http://schemas.microsoft.com/office/drawing/2014/main" id="{F5D7455F-337E-5D6B-A02A-380397063D2D}"/>
+                <a16:creationId xmlns:a16="http://schemas.microsoft.com/office/drawing/2014/main" xmlns="" id="{F5D7455F-337E-5D6B-A02A-380397063D2D}"/>
               </a:ext>
             </a:extLst>
           </p:cNvPr>
@@ -1022,7 +1025,7 @@
           <p:cNvPr id="4" name="Slide Number Placeholder 3">
             <a:extLst>
               <a:ext uri="{FF2B5EF4-FFF2-40B4-BE49-F238E27FC236}">
-                <a16:creationId xmlns="" xmlns:a16="http://schemas.microsoft.com/office/drawing/2014/main" id="{B5124413-04E6-A99E-E6BA-F56674216BC5}"/>
+                <a16:creationId xmlns:a16="http://schemas.microsoft.com/office/drawing/2014/main" xmlns="" id="{B5124413-04E6-A99E-E6BA-F56674216BC5}"/>
               </a:ext>
             </a:extLst>
           </p:cNvPr>
@@ -1067,7 +1070,7 @@
         <p:cNvPr id="1" name="">
           <a:extLst>
             <a:ext uri="{FF2B5EF4-FFF2-40B4-BE49-F238E27FC236}">
-              <a16:creationId xmlns="" xmlns:a16="http://schemas.microsoft.com/office/drawing/2014/main" id="{83CD62A6-7D00-3C53-05CF-A6197A8362EA}"/>
+              <a16:creationId xmlns:a16="http://schemas.microsoft.com/office/drawing/2014/main" xmlns="" id="{83CD62A6-7D00-3C53-05CF-A6197A8362EA}"/>
             </a:ext>
           </a:extLst>
         </p:cNvPr>
@@ -1087,7 +1090,7 @@
           <p:cNvPr id="2" name="Slide Image Placeholder 1">
             <a:extLst>
               <a:ext uri="{FF2B5EF4-FFF2-40B4-BE49-F238E27FC236}">
-                <a16:creationId xmlns="" xmlns:a16="http://schemas.microsoft.com/office/drawing/2014/main" id="{6DFDE321-184D-9B7D-CEA2-205606B85A43}"/>
+                <a16:creationId xmlns:a16="http://schemas.microsoft.com/office/drawing/2014/main" xmlns="" id="{6DFDE321-184D-9B7D-CEA2-205606B85A43}"/>
               </a:ext>
             </a:extLst>
           </p:cNvPr>
@@ -1105,7 +1108,7 @@
           <p:cNvPr id="3" name="Notes Placeholder 2">
             <a:extLst>
               <a:ext uri="{FF2B5EF4-FFF2-40B4-BE49-F238E27FC236}">
-                <a16:creationId xmlns="" xmlns:a16="http://schemas.microsoft.com/office/drawing/2014/main" id="{6DA764DC-3F53-958D-91A3-DB06BD4A39DA}"/>
+                <a16:creationId xmlns:a16="http://schemas.microsoft.com/office/drawing/2014/main" xmlns="" id="{6DA764DC-3F53-958D-91A3-DB06BD4A39DA}"/>
               </a:ext>
             </a:extLst>
           </p:cNvPr>
@@ -1133,7 +1136,7 @@
           <p:cNvPr id="4" name="Slide Number Placeholder 3">
             <a:extLst>
               <a:ext uri="{FF2B5EF4-FFF2-40B4-BE49-F238E27FC236}">
-                <a16:creationId xmlns="" xmlns:a16="http://schemas.microsoft.com/office/drawing/2014/main" id="{6BC07E3E-C02F-977B-3C72-FEF303694F11}"/>
+                <a16:creationId xmlns:a16="http://schemas.microsoft.com/office/drawing/2014/main" xmlns="" id="{6BC07E3E-C02F-977B-3C72-FEF303694F11}"/>
               </a:ext>
             </a:extLst>
           </p:cNvPr>
@@ -1600,6 +1603,98 @@
 </file>
 
 <file path=ppt/notesSlides/notesSlide17.xml><?xml version="1.0" encoding="utf-8"?>
+<p:notes xmlns:a="http://schemas.openxmlformats.org/drawingml/2006/main" xmlns:r="http://schemas.openxmlformats.org/officeDocument/2006/relationships" xmlns:p="http://schemas.openxmlformats.org/presentationml/2006/main">
+  <p:cSld>
+    <p:spTree>
+      <p:nvGrpSpPr>
+        <p:cNvPr id="1" name=""/>
+        <p:cNvGrpSpPr/>
+        <p:nvPr/>
+      </p:nvGrpSpPr>
+      <p:grpSpPr>
+        <a:xfrm>
+          <a:off x="0" y="0"/>
+          <a:ext cx="0" cy="0"/>
+          <a:chOff x="0" y="0"/>
+          <a:chExt cx="0" cy="0"/>
+        </a:xfrm>
+      </p:grpSpPr>
+      <p:sp>
+        <p:nvSpPr>
+          <p:cNvPr id="2" name="Slide Image Placeholder 1"/>
+          <p:cNvSpPr>
+            <a:spLocks noGrp="1" noRot="1" noChangeAspect="1"/>
+          </p:cNvSpPr>
+          <p:nvPr>
+            <p:ph type="sldImg"/>
+          </p:nvPr>
+        </p:nvSpPr>
+        <p:spPr/>
+      </p:sp>
+      <p:sp>
+        <p:nvSpPr>
+          <p:cNvPr id="3" name="Notes Placeholder 2"/>
+          <p:cNvSpPr>
+            <a:spLocks noGrp="1"/>
+          </p:cNvSpPr>
+          <p:nvPr>
+            <p:ph type="body" idx="1"/>
+          </p:nvPr>
+        </p:nvSpPr>
+        <p:spPr/>
+        <p:txBody>
+          <a:bodyPr/>
+          <a:lstStyle/>
+          <a:p>
+            <a:endParaRPr lang="pt-BR" sz="1200" kern="1200" dirty="0">
+              <a:solidFill>
+                <a:schemeClr val="tx1"/>
+              </a:solidFill>
+              <a:effectLst/>
+              <a:latin typeface="+mn-lt"/>
+              <a:ea typeface="+mn-ea"/>
+              <a:cs typeface="+mn-cs"/>
+            </a:endParaRPr>
+          </a:p>
+        </p:txBody>
+      </p:sp>
+      <p:sp>
+        <p:nvSpPr>
+          <p:cNvPr id="4" name="Slide Number Placeholder 3"/>
+          <p:cNvSpPr>
+            <a:spLocks noGrp="1"/>
+          </p:cNvSpPr>
+          <p:nvPr>
+            <p:ph type="sldNum" sz="quarter" idx="5"/>
+          </p:nvPr>
+        </p:nvSpPr>
+        <p:spPr/>
+        <p:txBody>
+          <a:bodyPr/>
+          <a:lstStyle/>
+          <a:p>
+            <a:fld id="{6FC8D850-966F-45A6-8DE7-15B891E7D40D}" type="slidenum">
+              <a:rPr lang="pt-BR" smtClean="0"/>
+              <a:t>22</a:t>
+            </a:fld>
+            <a:endParaRPr lang="pt-BR"/>
+          </a:p>
+        </p:txBody>
+      </p:sp>
+    </p:spTree>
+    <p:extLst>
+      <p:ext uri="{BB962C8B-B14F-4D97-AF65-F5344CB8AC3E}">
+        <p14:creationId xmlns:p14="http://schemas.microsoft.com/office/powerpoint/2010/main" val="861062909"/>
+      </p:ext>
+    </p:extLst>
+  </p:cSld>
+  <p:clrMapOvr>
+    <a:masterClrMapping/>
+  </p:clrMapOvr>
+</p:notes>
+</file>
+
+<file path=ppt/notesSlides/notesSlide18.xml><?xml version="1.0" encoding="utf-8"?>
 <p:notes xmlns:a="http://schemas.openxmlformats.org/drawingml/2006/main" xmlns:r="http://schemas.openxmlformats.org/officeDocument/2006/relationships" xmlns:p="http://schemas.openxmlformats.org/presentationml/2006/main">
   <p:cSld>
     <p:spTree>
@@ -2368,7 +2463,7 @@
           <a:p>
             <a:fld id="{6FC8D850-966F-45A6-8DE7-15B891E7D40D}" type="slidenum">
               <a:rPr lang="pt-BR" smtClean="0"/>
-              <a:t>23</a:t>
+              <a:t>24</a:t>
             </a:fld>
             <a:endParaRPr lang="pt-BR"/>
           </a:p>
@@ -2378,90 +2473,6 @@
     <p:extLst>
       <p:ext uri="{BB962C8B-B14F-4D97-AF65-F5344CB8AC3E}">
         <p14:creationId xmlns:p14="http://schemas.microsoft.com/office/powerpoint/2010/main" val="2462809402"/>
-      </p:ext>
-    </p:extLst>
-  </p:cSld>
-  <p:clrMapOvr>
-    <a:masterClrMapping/>
-  </p:clrMapOvr>
-</p:notes>
-</file>
-
-<file path=ppt/notesSlides/notesSlide18.xml><?xml version="1.0" encoding="utf-8"?>
-<p:notes xmlns:a="http://schemas.openxmlformats.org/drawingml/2006/main" xmlns:r="http://schemas.openxmlformats.org/officeDocument/2006/relationships" xmlns:p="http://schemas.openxmlformats.org/presentationml/2006/main">
-  <p:cSld>
-    <p:spTree>
-      <p:nvGrpSpPr>
-        <p:cNvPr id="1" name=""/>
-        <p:cNvGrpSpPr/>
-        <p:nvPr/>
-      </p:nvGrpSpPr>
-      <p:grpSpPr>
-        <a:xfrm>
-          <a:off x="0" y="0"/>
-          <a:ext cx="0" cy="0"/>
-          <a:chOff x="0" y="0"/>
-          <a:chExt cx="0" cy="0"/>
-        </a:xfrm>
-      </p:grpSpPr>
-      <p:sp>
-        <p:nvSpPr>
-          <p:cNvPr id="2" name="Slide Image Placeholder 1"/>
-          <p:cNvSpPr>
-            <a:spLocks noGrp="1" noRot="1" noChangeAspect="1"/>
-          </p:cNvSpPr>
-          <p:nvPr>
-            <p:ph type="sldImg"/>
-          </p:nvPr>
-        </p:nvSpPr>
-        <p:spPr/>
-      </p:sp>
-      <p:sp>
-        <p:nvSpPr>
-          <p:cNvPr id="3" name="Notes Placeholder 2"/>
-          <p:cNvSpPr>
-            <a:spLocks noGrp="1"/>
-          </p:cNvSpPr>
-          <p:nvPr>
-            <p:ph type="body" idx="1"/>
-          </p:nvPr>
-        </p:nvSpPr>
-        <p:spPr/>
-        <p:txBody>
-          <a:bodyPr/>
-          <a:lstStyle/>
-          <a:p>
-            <a:endParaRPr lang="en-US" dirty="0"/>
-          </a:p>
-        </p:txBody>
-      </p:sp>
-      <p:sp>
-        <p:nvSpPr>
-          <p:cNvPr id="4" name="Slide Number Placeholder 3"/>
-          <p:cNvSpPr>
-            <a:spLocks noGrp="1"/>
-          </p:cNvSpPr>
-          <p:nvPr>
-            <p:ph type="sldNum" sz="quarter" idx="5"/>
-          </p:nvPr>
-        </p:nvSpPr>
-        <p:spPr/>
-        <p:txBody>
-          <a:bodyPr/>
-          <a:lstStyle/>
-          <a:p>
-            <a:fld id="{6FC8D850-966F-45A6-8DE7-15B891E7D40D}" type="slidenum">
-              <a:rPr lang="pt-BR" smtClean="0"/>
-              <a:t>25</a:t>
-            </a:fld>
-            <a:endParaRPr lang="pt-BR"/>
-          </a:p>
-        </p:txBody>
-      </p:sp>
-    </p:spTree>
-    <p:extLst>
-      <p:ext uri="{BB962C8B-B14F-4D97-AF65-F5344CB8AC3E}">
-        <p14:creationId xmlns:p14="http://schemas.microsoft.com/office/powerpoint/2010/main" val="3365976238"/>
       </p:ext>
     </p:extLst>
   </p:cSld>
@@ -2490,7 +2501,7 @@
       </p:grpSpPr>
       <p:sp>
         <p:nvSpPr>
-          <p:cNvPr id="2" name="Slide Image Placeholder 1"/>
+          <p:cNvPr id="2" name="Espaço Reservado para Imagem de Slide 1"/>
           <p:cNvSpPr>
             <a:spLocks noGrp="1" noRot="1" noChangeAspect="1"/>
           </p:cNvSpPr>
@@ -2502,7 +2513,7 @@
       </p:sp>
       <p:sp>
         <p:nvSpPr>
-          <p:cNvPr id="3" name="Notes Placeholder 2"/>
+          <p:cNvPr id="3" name="Espaço Reservado para Anotações 2"/>
           <p:cNvSpPr>
             <a:spLocks noGrp="1"/>
           </p:cNvSpPr>
@@ -2515,18 +2526,18 @@
           <a:bodyPr/>
           <a:lstStyle/>
           <a:p>
-            <a:endParaRPr lang="en-US" dirty="0"/>
+            <a:endParaRPr lang="pt-BR" dirty="0"/>
           </a:p>
         </p:txBody>
       </p:sp>
       <p:sp>
         <p:nvSpPr>
-          <p:cNvPr id="4" name="Slide Number Placeholder 3"/>
+          <p:cNvPr id="4" name="Espaço Reservado para Número de Slide 3"/>
           <p:cNvSpPr>
             <a:spLocks noGrp="1"/>
           </p:cNvSpPr>
           <p:nvPr>
-            <p:ph type="sldNum" sz="quarter" idx="5"/>
+            <p:ph type="sldNum" sz="quarter" idx="10"/>
           </p:nvPr>
         </p:nvSpPr>
         <p:spPr/>
@@ -2536,7 +2547,7 @@
           <a:p>
             <a:fld id="{6FC8D850-966F-45A6-8DE7-15B891E7D40D}" type="slidenum">
               <a:rPr lang="pt-BR" smtClean="0"/>
-              <a:t>26</a:t>
+              <a:t>25</a:t>
             </a:fld>
             <a:endParaRPr lang="pt-BR"/>
           </a:p>
@@ -2545,7 +2556,7 @@
     </p:spTree>
     <p:extLst>
       <p:ext uri="{BB962C8B-B14F-4D97-AF65-F5344CB8AC3E}">
-        <p14:creationId xmlns:p14="http://schemas.microsoft.com/office/powerpoint/2010/main" val="3240064613"/>
+        <p14:creationId xmlns:p14="http://schemas.microsoft.com/office/powerpoint/2010/main" val="2639992453"/>
       </p:ext>
     </p:extLst>
   </p:cSld>
@@ -2704,7 +2715,7 @@
           <a:p>
             <a:fld id="{6FC8D850-966F-45A6-8DE7-15B891E7D40D}" type="slidenum">
               <a:rPr lang="pt-BR" smtClean="0"/>
-              <a:t>27</a:t>
+              <a:t>28</a:t>
             </a:fld>
             <a:endParaRPr lang="pt-BR"/>
           </a:p>
@@ -2713,7 +2724,7 @@
     </p:spTree>
     <p:extLst>
       <p:ext uri="{BB962C8B-B14F-4D97-AF65-F5344CB8AC3E}">
-        <p14:creationId xmlns:p14="http://schemas.microsoft.com/office/powerpoint/2010/main" val="1000199276"/>
+        <p14:creationId xmlns:p14="http://schemas.microsoft.com/office/powerpoint/2010/main" val="3365976238"/>
       </p:ext>
     </p:extLst>
   </p:cSld>
@@ -2767,14 +2778,6 @@
           <a:bodyPr/>
           <a:lstStyle/>
           <a:p>
-            <a:r>
-              <a:rPr lang="pt-BR" b="1" dirty="0" smtClean="0"/>
-              <a:t>Finanças:</a:t>
-            </a:r>
-            <a:r>
-              <a:rPr lang="pt-BR" dirty="0" smtClean="0"/>
-              <a:t> Algoritmos de trading que aprendem a comprar e vender ações maximizando o lucro ao longo de meses.</a:t>
-            </a:r>
             <a:endParaRPr lang="en-US" dirty="0"/>
           </a:p>
         </p:txBody>
@@ -2796,7 +2799,7 @@
           <a:p>
             <a:fld id="{6FC8D850-966F-45A6-8DE7-15B891E7D40D}" type="slidenum">
               <a:rPr lang="pt-BR" smtClean="0"/>
-              <a:t>28</a:t>
+              <a:t>29</a:t>
             </a:fld>
             <a:endParaRPr lang="pt-BR"/>
           </a:p>
@@ -2805,7 +2808,7 @@
     </p:spTree>
     <p:extLst>
       <p:ext uri="{BB962C8B-B14F-4D97-AF65-F5344CB8AC3E}">
-        <p14:creationId xmlns:p14="http://schemas.microsoft.com/office/powerpoint/2010/main" val="230184113"/>
+        <p14:creationId xmlns:p14="http://schemas.microsoft.com/office/powerpoint/2010/main" val="3240064613"/>
       </p:ext>
     </p:extLst>
   </p:cSld>
@@ -2859,29 +2862,6 @@
           <a:bodyPr/>
           <a:lstStyle/>
           <a:p>
-            <a:pPr marL="0" marR="0" lvl="0" indent="0" algn="l" defTabSz="914400" rtl="0" eaLnBrk="1" fontAlgn="auto" latinLnBrk="0" hangingPunct="1">
-              <a:lnSpc>
-                <a:spcPct val="100000"/>
-              </a:lnSpc>
-              <a:spcBef>
-                <a:spcPts val="0"/>
-              </a:spcBef>
-              <a:spcAft>
-                <a:spcPts val="0"/>
-              </a:spcAft>
-              <a:buClrTx/>
-              <a:buSzTx/>
-              <a:buFontTx/>
-              <a:buNone/>
-              <a:tabLst/>
-              <a:defRPr/>
-            </a:pPr>
-            <a:r>
-              <a:rPr lang="en-US"/>
-              <a:t>https://colab.research.google.com/github/zz4fap/c24_inteligencia_artificial/blob/master/notebooks/mlp.ipynb</a:t>
-            </a:r>
-          </a:p>
-          <a:p>
             <a:endParaRPr lang="en-US" dirty="0"/>
           </a:p>
         </p:txBody>
@@ -2903,7 +2883,7 @@
           <a:p>
             <a:fld id="{6FC8D850-966F-45A6-8DE7-15B891E7D40D}" type="slidenum">
               <a:rPr lang="pt-BR" smtClean="0"/>
-              <a:t>29</a:t>
+              <a:t>30</a:t>
             </a:fld>
             <a:endParaRPr lang="pt-BR"/>
           </a:p>
@@ -2912,7 +2892,7 @@
     </p:spTree>
     <p:extLst>
       <p:ext uri="{BB962C8B-B14F-4D97-AF65-F5344CB8AC3E}">
-        <p14:creationId xmlns:p14="http://schemas.microsoft.com/office/powerpoint/2010/main" val="477841902"/>
+        <p14:creationId xmlns:p14="http://schemas.microsoft.com/office/powerpoint/2010/main" val="1000199276"/>
       </p:ext>
     </p:extLst>
   </p:cSld>
@@ -2966,6 +2946,14 @@
           <a:bodyPr/>
           <a:lstStyle/>
           <a:p>
+            <a:r>
+              <a:rPr lang="pt-BR" b="1" dirty="0" smtClean="0"/>
+              <a:t>Finanças:</a:t>
+            </a:r>
+            <a:r>
+              <a:rPr lang="pt-BR" dirty="0" smtClean="0"/>
+              <a:t> Algoritmos de trading que aprendem a comprar e vender ações maximizando o lucro ao longo de meses.</a:t>
+            </a:r>
             <a:endParaRPr lang="en-US" dirty="0"/>
           </a:p>
         </p:txBody>
@@ -2987,7 +2975,198 @@
           <a:p>
             <a:fld id="{6FC8D850-966F-45A6-8DE7-15B891E7D40D}" type="slidenum">
               <a:rPr lang="pt-BR" smtClean="0"/>
-              <a:t>30</a:t>
+              <a:t>31</a:t>
+            </a:fld>
+            <a:endParaRPr lang="pt-BR"/>
+          </a:p>
+        </p:txBody>
+      </p:sp>
+    </p:spTree>
+    <p:extLst>
+      <p:ext uri="{BB962C8B-B14F-4D97-AF65-F5344CB8AC3E}">
+        <p14:creationId xmlns:p14="http://schemas.microsoft.com/office/powerpoint/2010/main" val="230184113"/>
+      </p:ext>
+    </p:extLst>
+  </p:cSld>
+  <p:clrMapOvr>
+    <a:masterClrMapping/>
+  </p:clrMapOvr>
+</p:notes>
+</file>
+
+<file path=ppt/notesSlides/notesSlide24.xml><?xml version="1.0" encoding="utf-8"?>
+<p:notes xmlns:a="http://schemas.openxmlformats.org/drawingml/2006/main" xmlns:r="http://schemas.openxmlformats.org/officeDocument/2006/relationships" xmlns:p="http://schemas.openxmlformats.org/presentationml/2006/main">
+  <p:cSld>
+    <p:spTree>
+      <p:nvGrpSpPr>
+        <p:cNvPr id="1" name=""/>
+        <p:cNvGrpSpPr/>
+        <p:nvPr/>
+      </p:nvGrpSpPr>
+      <p:grpSpPr>
+        <a:xfrm>
+          <a:off x="0" y="0"/>
+          <a:ext cx="0" cy="0"/>
+          <a:chOff x="0" y="0"/>
+          <a:chExt cx="0" cy="0"/>
+        </a:xfrm>
+      </p:grpSpPr>
+      <p:sp>
+        <p:nvSpPr>
+          <p:cNvPr id="2" name="Slide Image Placeholder 1"/>
+          <p:cNvSpPr>
+            <a:spLocks noGrp="1" noRot="1" noChangeAspect="1"/>
+          </p:cNvSpPr>
+          <p:nvPr>
+            <p:ph type="sldImg"/>
+          </p:nvPr>
+        </p:nvSpPr>
+        <p:spPr/>
+      </p:sp>
+      <p:sp>
+        <p:nvSpPr>
+          <p:cNvPr id="3" name="Notes Placeholder 2"/>
+          <p:cNvSpPr>
+            <a:spLocks noGrp="1"/>
+          </p:cNvSpPr>
+          <p:nvPr>
+            <p:ph type="body" idx="1"/>
+          </p:nvPr>
+        </p:nvSpPr>
+        <p:spPr/>
+        <p:txBody>
+          <a:bodyPr/>
+          <a:lstStyle/>
+          <a:p>
+            <a:pPr marL="0" marR="0" lvl="0" indent="0" algn="l" defTabSz="914400" rtl="0" eaLnBrk="1" fontAlgn="auto" latinLnBrk="0" hangingPunct="1">
+              <a:lnSpc>
+                <a:spcPct val="100000"/>
+              </a:lnSpc>
+              <a:spcBef>
+                <a:spcPts val="0"/>
+              </a:spcBef>
+              <a:spcAft>
+                <a:spcPts val="0"/>
+              </a:spcAft>
+              <a:buClrTx/>
+              <a:buSzTx/>
+              <a:buFontTx/>
+              <a:buNone/>
+              <a:tabLst/>
+              <a:defRPr/>
+            </a:pPr>
+            <a:r>
+              <a:rPr lang="en-US"/>
+              <a:t>https://colab.research.google.com/github/zz4fap/c24_inteligencia_artificial/blob/master/notebooks/mlp.ipynb</a:t>
+            </a:r>
+          </a:p>
+          <a:p>
+            <a:endParaRPr lang="en-US" dirty="0"/>
+          </a:p>
+        </p:txBody>
+      </p:sp>
+      <p:sp>
+        <p:nvSpPr>
+          <p:cNvPr id="4" name="Slide Number Placeholder 3"/>
+          <p:cNvSpPr>
+            <a:spLocks noGrp="1"/>
+          </p:cNvSpPr>
+          <p:nvPr>
+            <p:ph type="sldNum" sz="quarter" idx="5"/>
+          </p:nvPr>
+        </p:nvSpPr>
+        <p:spPr/>
+        <p:txBody>
+          <a:bodyPr/>
+          <a:lstStyle/>
+          <a:p>
+            <a:fld id="{6FC8D850-966F-45A6-8DE7-15B891E7D40D}" type="slidenum">
+              <a:rPr lang="pt-BR" smtClean="0"/>
+              <a:t>32</a:t>
+            </a:fld>
+            <a:endParaRPr lang="pt-BR"/>
+          </a:p>
+        </p:txBody>
+      </p:sp>
+    </p:spTree>
+    <p:extLst>
+      <p:ext uri="{BB962C8B-B14F-4D97-AF65-F5344CB8AC3E}">
+        <p14:creationId xmlns:p14="http://schemas.microsoft.com/office/powerpoint/2010/main" val="477841902"/>
+      </p:ext>
+    </p:extLst>
+  </p:cSld>
+  <p:clrMapOvr>
+    <a:masterClrMapping/>
+  </p:clrMapOvr>
+</p:notes>
+</file>
+
+<file path=ppt/notesSlides/notesSlide25.xml><?xml version="1.0" encoding="utf-8"?>
+<p:notes xmlns:a="http://schemas.openxmlformats.org/drawingml/2006/main" xmlns:r="http://schemas.openxmlformats.org/officeDocument/2006/relationships" xmlns:p="http://schemas.openxmlformats.org/presentationml/2006/main">
+  <p:cSld>
+    <p:spTree>
+      <p:nvGrpSpPr>
+        <p:cNvPr id="1" name=""/>
+        <p:cNvGrpSpPr/>
+        <p:nvPr/>
+      </p:nvGrpSpPr>
+      <p:grpSpPr>
+        <a:xfrm>
+          <a:off x="0" y="0"/>
+          <a:ext cx="0" cy="0"/>
+          <a:chOff x="0" y="0"/>
+          <a:chExt cx="0" cy="0"/>
+        </a:xfrm>
+      </p:grpSpPr>
+      <p:sp>
+        <p:nvSpPr>
+          <p:cNvPr id="2" name="Slide Image Placeholder 1"/>
+          <p:cNvSpPr>
+            <a:spLocks noGrp="1" noRot="1" noChangeAspect="1"/>
+          </p:cNvSpPr>
+          <p:nvPr>
+            <p:ph type="sldImg"/>
+          </p:nvPr>
+        </p:nvSpPr>
+        <p:spPr/>
+      </p:sp>
+      <p:sp>
+        <p:nvSpPr>
+          <p:cNvPr id="3" name="Notes Placeholder 2"/>
+          <p:cNvSpPr>
+            <a:spLocks noGrp="1"/>
+          </p:cNvSpPr>
+          <p:nvPr>
+            <p:ph type="body" idx="1"/>
+          </p:nvPr>
+        </p:nvSpPr>
+        <p:spPr/>
+        <p:txBody>
+          <a:bodyPr/>
+          <a:lstStyle/>
+          <a:p>
+            <a:endParaRPr lang="en-US" dirty="0"/>
+          </a:p>
+        </p:txBody>
+      </p:sp>
+      <p:sp>
+        <p:nvSpPr>
+          <p:cNvPr id="4" name="Slide Number Placeholder 3"/>
+          <p:cNvSpPr>
+            <a:spLocks noGrp="1"/>
+          </p:cNvSpPr>
+          <p:nvPr>
+            <p:ph type="sldNum" sz="quarter" idx="5"/>
+          </p:nvPr>
+        </p:nvSpPr>
+        <p:spPr/>
+        <p:txBody>
+          <a:bodyPr/>
+          <a:lstStyle/>
+          <a:p>
+            <a:fld id="{6FC8D850-966F-45A6-8DE7-15B891E7D40D}" type="slidenum">
+              <a:rPr lang="pt-BR" smtClean="0"/>
+              <a:t>33</a:t>
             </a:fld>
             <a:endParaRPr lang="pt-BR"/>
           </a:p>
@@ -3014,7 +3193,7 @@
         <p:cNvPr id="1" name="">
           <a:extLst>
             <a:ext uri="{FF2B5EF4-FFF2-40B4-BE49-F238E27FC236}">
-              <a16:creationId xmlns="" xmlns:a16="http://schemas.microsoft.com/office/drawing/2014/main" id="{5B4C3711-83BC-221A-A341-2BE62BCF89DC}"/>
+              <a16:creationId xmlns:a16="http://schemas.microsoft.com/office/drawing/2014/main" xmlns="" id="{5B4C3711-83BC-221A-A341-2BE62BCF89DC}"/>
             </a:ext>
           </a:extLst>
         </p:cNvPr>
@@ -3034,7 +3213,7 @@
           <p:cNvPr id="2" name="Slide Image Placeholder 1">
             <a:extLst>
               <a:ext uri="{FF2B5EF4-FFF2-40B4-BE49-F238E27FC236}">
-                <a16:creationId xmlns="" xmlns:a16="http://schemas.microsoft.com/office/drawing/2014/main" id="{5957728F-CFA3-D0A6-7780-F800EBAC1F6E}"/>
+                <a16:creationId xmlns:a16="http://schemas.microsoft.com/office/drawing/2014/main" xmlns="" id="{5957728F-CFA3-D0A6-7780-F800EBAC1F6E}"/>
               </a:ext>
             </a:extLst>
           </p:cNvPr>
@@ -3052,7 +3231,7 @@
           <p:cNvPr id="3" name="Notes Placeholder 2">
             <a:extLst>
               <a:ext uri="{FF2B5EF4-FFF2-40B4-BE49-F238E27FC236}">
-                <a16:creationId xmlns="" xmlns:a16="http://schemas.microsoft.com/office/drawing/2014/main" id="{4AD3E5CB-A8B8-7F4B-200F-94D044C81C3D}"/>
+                <a16:creationId xmlns:a16="http://schemas.microsoft.com/office/drawing/2014/main" xmlns="" id="{4AD3E5CB-A8B8-7F4B-200F-94D044C81C3D}"/>
               </a:ext>
             </a:extLst>
           </p:cNvPr>
@@ -3077,7 +3256,7 @@
           <p:cNvPr id="4" name="Slide Number Placeholder 3">
             <a:extLst>
               <a:ext uri="{FF2B5EF4-FFF2-40B4-BE49-F238E27FC236}">
-                <a16:creationId xmlns="" xmlns:a16="http://schemas.microsoft.com/office/drawing/2014/main" id="{3F9D8EC2-522A-3A24-97FD-162C1CF3C132}"/>
+                <a16:creationId xmlns:a16="http://schemas.microsoft.com/office/drawing/2014/main" xmlns="" id="{3F9D8EC2-522A-3A24-97FD-162C1CF3C132}"/>
               </a:ext>
             </a:extLst>
           </p:cNvPr>
@@ -3122,7 +3301,7 @@
         <p:cNvPr id="1" name="">
           <a:extLst>
             <a:ext uri="{FF2B5EF4-FFF2-40B4-BE49-F238E27FC236}">
-              <a16:creationId xmlns="" xmlns:a16="http://schemas.microsoft.com/office/drawing/2014/main" id="{478600EE-A6A2-2235-BCC6-6DE0C5D8DE78}"/>
+              <a16:creationId xmlns:a16="http://schemas.microsoft.com/office/drawing/2014/main" xmlns="" id="{478600EE-A6A2-2235-BCC6-6DE0C5D8DE78}"/>
             </a:ext>
           </a:extLst>
         </p:cNvPr>
@@ -3142,7 +3321,7 @@
           <p:cNvPr id="2" name="Slide Image Placeholder 1">
             <a:extLst>
               <a:ext uri="{FF2B5EF4-FFF2-40B4-BE49-F238E27FC236}">
-                <a16:creationId xmlns="" xmlns:a16="http://schemas.microsoft.com/office/drawing/2014/main" id="{B1C41149-DCAF-E8F8-FB78-0B242E221738}"/>
+                <a16:creationId xmlns:a16="http://schemas.microsoft.com/office/drawing/2014/main" xmlns="" id="{B1C41149-DCAF-E8F8-FB78-0B242E221738}"/>
               </a:ext>
             </a:extLst>
           </p:cNvPr>
@@ -3160,7 +3339,7 @@
           <p:cNvPr id="3" name="Notes Placeholder 2">
             <a:extLst>
               <a:ext uri="{FF2B5EF4-FFF2-40B4-BE49-F238E27FC236}">
-                <a16:creationId xmlns="" xmlns:a16="http://schemas.microsoft.com/office/drawing/2014/main" id="{F4C5329E-ECB5-4CB1-3A33-CFC57176F475}"/>
+                <a16:creationId xmlns:a16="http://schemas.microsoft.com/office/drawing/2014/main" xmlns="" id="{F4C5329E-ECB5-4CB1-3A33-CFC57176F475}"/>
               </a:ext>
             </a:extLst>
           </p:cNvPr>
@@ -3185,7 +3364,7 @@
           <p:cNvPr id="4" name="Slide Number Placeholder 3">
             <a:extLst>
               <a:ext uri="{FF2B5EF4-FFF2-40B4-BE49-F238E27FC236}">
-                <a16:creationId xmlns="" xmlns:a16="http://schemas.microsoft.com/office/drawing/2014/main" id="{37AB7C02-5FA9-66E4-2433-F97393A5C0BA}"/>
+                <a16:creationId xmlns:a16="http://schemas.microsoft.com/office/drawing/2014/main" xmlns="" id="{37AB7C02-5FA9-66E4-2433-F97393A5C0BA}"/>
               </a:ext>
             </a:extLst>
           </p:cNvPr>
@@ -3230,7 +3409,7 @@
         <p:cNvPr id="1" name="">
           <a:extLst>
             <a:ext uri="{FF2B5EF4-FFF2-40B4-BE49-F238E27FC236}">
-              <a16:creationId xmlns="" xmlns:a16="http://schemas.microsoft.com/office/drawing/2014/main" id="{92F2E69C-0407-4619-FFB1-7502CF033EBA}"/>
+              <a16:creationId xmlns:a16="http://schemas.microsoft.com/office/drawing/2014/main" xmlns="" id="{92F2E69C-0407-4619-FFB1-7502CF033EBA}"/>
             </a:ext>
           </a:extLst>
         </p:cNvPr>
@@ -3250,7 +3429,7 @@
           <p:cNvPr id="2" name="Slide Image Placeholder 1">
             <a:extLst>
               <a:ext uri="{FF2B5EF4-FFF2-40B4-BE49-F238E27FC236}">
-                <a16:creationId xmlns="" xmlns:a16="http://schemas.microsoft.com/office/drawing/2014/main" id="{E3C6894B-B13E-3C0F-BEC3-8A663E98508F}"/>
+                <a16:creationId xmlns:a16="http://schemas.microsoft.com/office/drawing/2014/main" xmlns="" id="{E3C6894B-B13E-3C0F-BEC3-8A663E98508F}"/>
               </a:ext>
             </a:extLst>
           </p:cNvPr>
@@ -3268,7 +3447,7 @@
           <p:cNvPr id="3" name="Notes Placeholder 2">
             <a:extLst>
               <a:ext uri="{FF2B5EF4-FFF2-40B4-BE49-F238E27FC236}">
-                <a16:creationId xmlns="" xmlns:a16="http://schemas.microsoft.com/office/drawing/2014/main" id="{B76A1B01-A242-46E3-F92E-FB0EA28821F9}"/>
+                <a16:creationId xmlns:a16="http://schemas.microsoft.com/office/drawing/2014/main" xmlns="" id="{B76A1B01-A242-46E3-F92E-FB0EA28821F9}"/>
               </a:ext>
             </a:extLst>
           </p:cNvPr>
@@ -3293,7 +3472,7 @@
           <p:cNvPr id="4" name="Slide Number Placeholder 3">
             <a:extLst>
               <a:ext uri="{FF2B5EF4-FFF2-40B4-BE49-F238E27FC236}">
-                <a16:creationId xmlns="" xmlns:a16="http://schemas.microsoft.com/office/drawing/2014/main" id="{4BA915CE-E13E-5840-D0C6-249ACB7C2C1D}"/>
+                <a16:creationId xmlns:a16="http://schemas.microsoft.com/office/drawing/2014/main" xmlns="" id="{4BA915CE-E13E-5840-D0C6-249ACB7C2C1D}"/>
               </a:ext>
             </a:extLst>
           </p:cNvPr>
@@ -3442,7 +3621,7 @@
         <p:cNvPr id="1" name="">
           <a:extLst>
             <a:ext uri="{FF2B5EF4-FFF2-40B4-BE49-F238E27FC236}">
-              <a16:creationId xmlns="" xmlns:a16="http://schemas.microsoft.com/office/drawing/2014/main" id="{0D0A5E72-3763-6194-5E85-BE26354035A3}"/>
+              <a16:creationId xmlns:a16="http://schemas.microsoft.com/office/drawing/2014/main" xmlns="" id="{0D0A5E72-3763-6194-5E85-BE26354035A3}"/>
             </a:ext>
           </a:extLst>
         </p:cNvPr>
@@ -3462,7 +3641,7 @@
           <p:cNvPr id="2" name="Slide Image Placeholder 1">
             <a:extLst>
               <a:ext uri="{FF2B5EF4-FFF2-40B4-BE49-F238E27FC236}">
-                <a16:creationId xmlns="" xmlns:a16="http://schemas.microsoft.com/office/drawing/2014/main" id="{82466988-6655-8B01-840E-0BE3EDB68F07}"/>
+                <a16:creationId xmlns:a16="http://schemas.microsoft.com/office/drawing/2014/main" xmlns="" id="{82466988-6655-8B01-840E-0BE3EDB68F07}"/>
               </a:ext>
             </a:extLst>
           </p:cNvPr>
@@ -3480,7 +3659,7 @@
           <p:cNvPr id="3" name="Notes Placeholder 2">
             <a:extLst>
               <a:ext uri="{FF2B5EF4-FFF2-40B4-BE49-F238E27FC236}">
-                <a16:creationId xmlns="" xmlns:a16="http://schemas.microsoft.com/office/drawing/2014/main" id="{5E09F3D0-11CA-2E8D-04C5-104C59DCE708}"/>
+                <a16:creationId xmlns:a16="http://schemas.microsoft.com/office/drawing/2014/main" xmlns="" id="{5E09F3D0-11CA-2E8D-04C5-104C59DCE708}"/>
               </a:ext>
             </a:extLst>
           </p:cNvPr>
@@ -3525,7 +3704,7 @@
           <p:cNvPr id="4" name="Slide Number Placeholder 3">
             <a:extLst>
               <a:ext uri="{FF2B5EF4-FFF2-40B4-BE49-F238E27FC236}">
-                <a16:creationId xmlns="" xmlns:a16="http://schemas.microsoft.com/office/drawing/2014/main" id="{68F0BCD7-F825-C67D-D845-8316B4C4B6D6}"/>
+                <a16:creationId xmlns:a16="http://schemas.microsoft.com/office/drawing/2014/main" xmlns="" id="{68F0BCD7-F825-C67D-D845-8316B4C4B6D6}"/>
               </a:ext>
             </a:extLst>
           </p:cNvPr>
@@ -3570,7 +3749,7 @@
         <p:cNvPr id="1" name="">
           <a:extLst>
             <a:ext uri="{FF2B5EF4-FFF2-40B4-BE49-F238E27FC236}">
-              <a16:creationId xmlns="" xmlns:a16="http://schemas.microsoft.com/office/drawing/2014/main" id="{0D0A5E72-3763-6194-5E85-BE26354035A3}"/>
+              <a16:creationId xmlns:a16="http://schemas.microsoft.com/office/drawing/2014/main" xmlns="" id="{0D0A5E72-3763-6194-5E85-BE26354035A3}"/>
             </a:ext>
           </a:extLst>
         </p:cNvPr>
@@ -3590,7 +3769,7 @@
           <p:cNvPr id="2" name="Slide Image Placeholder 1">
             <a:extLst>
               <a:ext uri="{FF2B5EF4-FFF2-40B4-BE49-F238E27FC236}">
-                <a16:creationId xmlns="" xmlns:a16="http://schemas.microsoft.com/office/drawing/2014/main" id="{82466988-6655-8B01-840E-0BE3EDB68F07}"/>
+                <a16:creationId xmlns:a16="http://schemas.microsoft.com/office/drawing/2014/main" xmlns="" id="{82466988-6655-8B01-840E-0BE3EDB68F07}"/>
               </a:ext>
             </a:extLst>
           </p:cNvPr>
@@ -3608,7 +3787,7 @@
           <p:cNvPr id="3" name="Notes Placeholder 2">
             <a:extLst>
               <a:ext uri="{FF2B5EF4-FFF2-40B4-BE49-F238E27FC236}">
-                <a16:creationId xmlns="" xmlns:a16="http://schemas.microsoft.com/office/drawing/2014/main" id="{5E09F3D0-11CA-2E8D-04C5-104C59DCE708}"/>
+                <a16:creationId xmlns:a16="http://schemas.microsoft.com/office/drawing/2014/main" xmlns="" id="{5E09F3D0-11CA-2E8D-04C5-104C59DCE708}"/>
               </a:ext>
             </a:extLst>
           </p:cNvPr>
@@ -3653,7 +3832,7 @@
           <p:cNvPr id="4" name="Slide Number Placeholder 3">
             <a:extLst>
               <a:ext uri="{FF2B5EF4-FFF2-40B4-BE49-F238E27FC236}">
-                <a16:creationId xmlns="" xmlns:a16="http://schemas.microsoft.com/office/drawing/2014/main" id="{68F0BCD7-F825-C67D-D845-8316B4C4B6D6}"/>
+                <a16:creationId xmlns:a16="http://schemas.microsoft.com/office/drawing/2014/main" xmlns="" id="{68F0BCD7-F825-C67D-D845-8316B4C4B6D6}"/>
               </a:ext>
             </a:extLst>
           </p:cNvPr>
@@ -3836,7 +4015,7 @@
           <p:cNvPr id="2" name="Título 1">
             <a:extLst>
               <a:ext uri="{FF2B5EF4-FFF2-40B4-BE49-F238E27FC236}">
-                <a16:creationId xmlns="" xmlns:a16="http://schemas.microsoft.com/office/drawing/2014/main" id="{1DB9B4FF-B06E-403C-A326-BDC64D8FF94E}"/>
+                <a16:creationId xmlns:a16="http://schemas.microsoft.com/office/drawing/2014/main" xmlns="" id="{1DB9B4FF-B06E-403C-A326-BDC64D8FF94E}"/>
               </a:ext>
             </a:extLst>
           </p:cNvPr>
@@ -3873,7 +4052,7 @@
           <p:cNvPr id="3" name="Subtítulo 2">
             <a:extLst>
               <a:ext uri="{FF2B5EF4-FFF2-40B4-BE49-F238E27FC236}">
-                <a16:creationId xmlns="" xmlns:a16="http://schemas.microsoft.com/office/drawing/2014/main" id="{247BDFCE-746E-45BF-A319-4733D58D1632}"/>
+                <a16:creationId xmlns:a16="http://schemas.microsoft.com/office/drawing/2014/main" xmlns="" id="{247BDFCE-746E-45BF-A319-4733D58D1632}"/>
               </a:ext>
             </a:extLst>
           </p:cNvPr>
@@ -3943,7 +4122,7 @@
           <p:cNvPr id="4" name="Espaço Reservado para Data 3">
             <a:extLst>
               <a:ext uri="{FF2B5EF4-FFF2-40B4-BE49-F238E27FC236}">
-                <a16:creationId xmlns="" xmlns:a16="http://schemas.microsoft.com/office/drawing/2014/main" id="{9EDE2778-5372-4104-B96D-968184DA8288}"/>
+                <a16:creationId xmlns:a16="http://schemas.microsoft.com/office/drawing/2014/main" xmlns="" id="{9EDE2778-5372-4104-B96D-968184DA8288}"/>
               </a:ext>
             </a:extLst>
           </p:cNvPr>
@@ -3972,7 +4151,7 @@
           <p:cNvPr id="5" name="Espaço Reservado para Rodapé 4">
             <a:extLst>
               <a:ext uri="{FF2B5EF4-FFF2-40B4-BE49-F238E27FC236}">
-                <a16:creationId xmlns="" xmlns:a16="http://schemas.microsoft.com/office/drawing/2014/main" id="{C1DD0F41-C861-4051-988D-3024A37A4B93}"/>
+                <a16:creationId xmlns:a16="http://schemas.microsoft.com/office/drawing/2014/main" xmlns="" id="{C1DD0F41-C861-4051-988D-3024A37A4B93}"/>
               </a:ext>
             </a:extLst>
           </p:cNvPr>
@@ -3997,7 +4176,7 @@
           <p:cNvPr id="6" name="Espaço Reservado para Número de Slide 5">
             <a:extLst>
               <a:ext uri="{FF2B5EF4-FFF2-40B4-BE49-F238E27FC236}">
-                <a16:creationId xmlns="" xmlns:a16="http://schemas.microsoft.com/office/drawing/2014/main" id="{07E5967E-D980-431A-A5DB-3F0C5030A81E}"/>
+                <a16:creationId xmlns:a16="http://schemas.microsoft.com/office/drawing/2014/main" xmlns="" id="{07E5967E-D980-431A-A5DB-3F0C5030A81E}"/>
               </a:ext>
             </a:extLst>
           </p:cNvPr>
@@ -4056,7 +4235,7 @@
           <p:cNvPr id="2" name="Título 1">
             <a:extLst>
               <a:ext uri="{FF2B5EF4-FFF2-40B4-BE49-F238E27FC236}">
-                <a16:creationId xmlns="" xmlns:a16="http://schemas.microsoft.com/office/drawing/2014/main" id="{9036C49F-3E68-4175-81BA-3C3FEE44308A}"/>
+                <a16:creationId xmlns:a16="http://schemas.microsoft.com/office/drawing/2014/main" xmlns="" id="{9036C49F-3E68-4175-81BA-3C3FEE44308A}"/>
               </a:ext>
             </a:extLst>
           </p:cNvPr>
@@ -4084,7 +4263,7 @@
           <p:cNvPr id="3" name="Espaço Reservado para Texto Vertical 2">
             <a:extLst>
               <a:ext uri="{FF2B5EF4-FFF2-40B4-BE49-F238E27FC236}">
-                <a16:creationId xmlns="" xmlns:a16="http://schemas.microsoft.com/office/drawing/2014/main" id="{426FA736-3DD3-4D4E-B57B-BBE1D8F7D424}"/>
+                <a16:creationId xmlns:a16="http://schemas.microsoft.com/office/drawing/2014/main" xmlns="" id="{426FA736-3DD3-4D4E-B57B-BBE1D8F7D424}"/>
               </a:ext>
             </a:extLst>
           </p:cNvPr>
@@ -4141,7 +4320,7 @@
           <p:cNvPr id="4" name="Espaço Reservado para Data 3">
             <a:extLst>
               <a:ext uri="{FF2B5EF4-FFF2-40B4-BE49-F238E27FC236}">
-                <a16:creationId xmlns="" xmlns:a16="http://schemas.microsoft.com/office/drawing/2014/main" id="{99E8855C-D8FD-48F6-B14E-861E0DE4D915}"/>
+                <a16:creationId xmlns:a16="http://schemas.microsoft.com/office/drawing/2014/main" xmlns="" id="{99E8855C-D8FD-48F6-B14E-861E0DE4D915}"/>
               </a:ext>
             </a:extLst>
           </p:cNvPr>
@@ -4170,7 +4349,7 @@
           <p:cNvPr id="5" name="Espaço Reservado para Rodapé 4">
             <a:extLst>
               <a:ext uri="{FF2B5EF4-FFF2-40B4-BE49-F238E27FC236}">
-                <a16:creationId xmlns="" xmlns:a16="http://schemas.microsoft.com/office/drawing/2014/main" id="{97C0BB88-2F21-42A5-ACFF-83DA47F2D340}"/>
+                <a16:creationId xmlns:a16="http://schemas.microsoft.com/office/drawing/2014/main" xmlns="" id="{97C0BB88-2F21-42A5-ACFF-83DA47F2D340}"/>
               </a:ext>
             </a:extLst>
           </p:cNvPr>
@@ -4195,7 +4374,7 @@
           <p:cNvPr id="6" name="Espaço Reservado para Número de Slide 5">
             <a:extLst>
               <a:ext uri="{FF2B5EF4-FFF2-40B4-BE49-F238E27FC236}">
-                <a16:creationId xmlns="" xmlns:a16="http://schemas.microsoft.com/office/drawing/2014/main" id="{6CB462B3-1F22-4C05-B4B8-7A279FB7D5E9}"/>
+                <a16:creationId xmlns:a16="http://schemas.microsoft.com/office/drawing/2014/main" xmlns="" id="{6CB462B3-1F22-4C05-B4B8-7A279FB7D5E9}"/>
               </a:ext>
             </a:extLst>
           </p:cNvPr>
@@ -4254,7 +4433,7 @@
           <p:cNvPr id="2" name="Título Vertical 1">
             <a:extLst>
               <a:ext uri="{FF2B5EF4-FFF2-40B4-BE49-F238E27FC236}">
-                <a16:creationId xmlns="" xmlns:a16="http://schemas.microsoft.com/office/drawing/2014/main" id="{EAEAB728-701C-4207-A9D5-23FF45C60502}"/>
+                <a16:creationId xmlns:a16="http://schemas.microsoft.com/office/drawing/2014/main" xmlns="" id="{EAEAB728-701C-4207-A9D5-23FF45C60502}"/>
               </a:ext>
             </a:extLst>
           </p:cNvPr>
@@ -4287,7 +4466,7 @@
           <p:cNvPr id="3" name="Espaço Reservado para Texto Vertical 2">
             <a:extLst>
               <a:ext uri="{FF2B5EF4-FFF2-40B4-BE49-F238E27FC236}">
-                <a16:creationId xmlns="" xmlns:a16="http://schemas.microsoft.com/office/drawing/2014/main" id="{BA8C8CCF-7823-480A-9A19-0F664DD17E3B}"/>
+                <a16:creationId xmlns:a16="http://schemas.microsoft.com/office/drawing/2014/main" xmlns="" id="{BA8C8CCF-7823-480A-9A19-0F664DD17E3B}"/>
               </a:ext>
             </a:extLst>
           </p:cNvPr>
@@ -4349,7 +4528,7 @@
           <p:cNvPr id="4" name="Espaço Reservado para Data 3">
             <a:extLst>
               <a:ext uri="{FF2B5EF4-FFF2-40B4-BE49-F238E27FC236}">
-                <a16:creationId xmlns="" xmlns:a16="http://schemas.microsoft.com/office/drawing/2014/main" id="{721D5734-7B1F-425D-942F-6EB73344027C}"/>
+                <a16:creationId xmlns:a16="http://schemas.microsoft.com/office/drawing/2014/main" xmlns="" id="{721D5734-7B1F-425D-942F-6EB73344027C}"/>
               </a:ext>
             </a:extLst>
           </p:cNvPr>
@@ -4378,7 +4557,7 @@
           <p:cNvPr id="5" name="Espaço Reservado para Rodapé 4">
             <a:extLst>
               <a:ext uri="{FF2B5EF4-FFF2-40B4-BE49-F238E27FC236}">
-                <a16:creationId xmlns="" xmlns:a16="http://schemas.microsoft.com/office/drawing/2014/main" id="{1E1AAEAC-F08D-45FE-89EC-B1B349A868C9}"/>
+                <a16:creationId xmlns:a16="http://schemas.microsoft.com/office/drawing/2014/main" xmlns="" id="{1E1AAEAC-F08D-45FE-89EC-B1B349A868C9}"/>
               </a:ext>
             </a:extLst>
           </p:cNvPr>
@@ -4403,7 +4582,7 @@
           <p:cNvPr id="6" name="Espaço Reservado para Número de Slide 5">
             <a:extLst>
               <a:ext uri="{FF2B5EF4-FFF2-40B4-BE49-F238E27FC236}">
-                <a16:creationId xmlns="" xmlns:a16="http://schemas.microsoft.com/office/drawing/2014/main" id="{BAA44493-9911-47B2-87A6-C2141A972BC8}"/>
+                <a16:creationId xmlns:a16="http://schemas.microsoft.com/office/drawing/2014/main" xmlns="" id="{BAA44493-9911-47B2-87A6-C2141A972BC8}"/>
               </a:ext>
             </a:extLst>
           </p:cNvPr>
@@ -4462,7 +4641,7 @@
           <p:cNvPr id="2" name="Título 1">
             <a:extLst>
               <a:ext uri="{FF2B5EF4-FFF2-40B4-BE49-F238E27FC236}">
-                <a16:creationId xmlns="" xmlns:a16="http://schemas.microsoft.com/office/drawing/2014/main" id="{71BD44A5-8F21-4626-A01D-48A1C874B1D5}"/>
+                <a16:creationId xmlns:a16="http://schemas.microsoft.com/office/drawing/2014/main" xmlns="" id="{71BD44A5-8F21-4626-A01D-48A1C874B1D5}"/>
               </a:ext>
             </a:extLst>
           </p:cNvPr>
@@ -4490,7 +4669,7 @@
           <p:cNvPr id="3" name="Espaço Reservado para Conteúdo 2">
             <a:extLst>
               <a:ext uri="{FF2B5EF4-FFF2-40B4-BE49-F238E27FC236}">
-                <a16:creationId xmlns="" xmlns:a16="http://schemas.microsoft.com/office/drawing/2014/main" id="{B79E8085-65A9-48AA-951D-71D978BFF4ED}"/>
+                <a16:creationId xmlns:a16="http://schemas.microsoft.com/office/drawing/2014/main" xmlns="" id="{B79E8085-65A9-48AA-951D-71D978BFF4ED}"/>
               </a:ext>
             </a:extLst>
           </p:cNvPr>
@@ -4547,7 +4726,7 @@
           <p:cNvPr id="4" name="Espaço Reservado para Data 3">
             <a:extLst>
               <a:ext uri="{FF2B5EF4-FFF2-40B4-BE49-F238E27FC236}">
-                <a16:creationId xmlns="" xmlns:a16="http://schemas.microsoft.com/office/drawing/2014/main" id="{F05BE1AF-51EA-425D-B188-DE7BD675009F}"/>
+                <a16:creationId xmlns:a16="http://schemas.microsoft.com/office/drawing/2014/main" xmlns="" id="{F05BE1AF-51EA-425D-B188-DE7BD675009F}"/>
               </a:ext>
             </a:extLst>
           </p:cNvPr>
@@ -4576,7 +4755,7 @@
           <p:cNvPr id="5" name="Espaço Reservado para Rodapé 4">
             <a:extLst>
               <a:ext uri="{FF2B5EF4-FFF2-40B4-BE49-F238E27FC236}">
-                <a16:creationId xmlns="" xmlns:a16="http://schemas.microsoft.com/office/drawing/2014/main" id="{121BE632-29CF-4CB9-B365-C9EF38F89BE6}"/>
+                <a16:creationId xmlns:a16="http://schemas.microsoft.com/office/drawing/2014/main" xmlns="" id="{121BE632-29CF-4CB9-B365-C9EF38F89BE6}"/>
               </a:ext>
             </a:extLst>
           </p:cNvPr>
@@ -4601,7 +4780,7 @@
           <p:cNvPr id="6" name="Espaço Reservado para Número de Slide 5">
             <a:extLst>
               <a:ext uri="{FF2B5EF4-FFF2-40B4-BE49-F238E27FC236}">
-                <a16:creationId xmlns="" xmlns:a16="http://schemas.microsoft.com/office/drawing/2014/main" id="{60CF3DD1-9AEC-4A57-B461-4E4DD86FAC18}"/>
+                <a16:creationId xmlns:a16="http://schemas.microsoft.com/office/drawing/2014/main" xmlns="" id="{60CF3DD1-9AEC-4A57-B461-4E4DD86FAC18}"/>
               </a:ext>
             </a:extLst>
           </p:cNvPr>
@@ -4660,7 +4839,7 @@
           <p:cNvPr id="2" name="Título 1">
             <a:extLst>
               <a:ext uri="{FF2B5EF4-FFF2-40B4-BE49-F238E27FC236}">
-                <a16:creationId xmlns="" xmlns:a16="http://schemas.microsoft.com/office/drawing/2014/main" id="{34AB2FF0-A4D7-4E28-991D-FF26140D5988}"/>
+                <a16:creationId xmlns:a16="http://schemas.microsoft.com/office/drawing/2014/main" xmlns="" id="{34AB2FF0-A4D7-4E28-991D-FF26140D5988}"/>
               </a:ext>
             </a:extLst>
           </p:cNvPr>
@@ -4697,7 +4876,7 @@
           <p:cNvPr id="3" name="Espaço Reservado para Texto 2">
             <a:extLst>
               <a:ext uri="{FF2B5EF4-FFF2-40B4-BE49-F238E27FC236}">
-                <a16:creationId xmlns="" xmlns:a16="http://schemas.microsoft.com/office/drawing/2014/main" id="{E2AC45B0-4145-40DB-8E61-105461170604}"/>
+                <a16:creationId xmlns:a16="http://schemas.microsoft.com/office/drawing/2014/main" xmlns="" id="{E2AC45B0-4145-40DB-8E61-105461170604}"/>
               </a:ext>
             </a:extLst>
           </p:cNvPr>
@@ -4822,7 +5001,7 @@
           <p:cNvPr id="4" name="Espaço Reservado para Data 3">
             <a:extLst>
               <a:ext uri="{FF2B5EF4-FFF2-40B4-BE49-F238E27FC236}">
-                <a16:creationId xmlns="" xmlns:a16="http://schemas.microsoft.com/office/drawing/2014/main" id="{50F1D3FB-740A-4EBA-A309-2CE71D12ECFB}"/>
+                <a16:creationId xmlns:a16="http://schemas.microsoft.com/office/drawing/2014/main" xmlns="" id="{50F1D3FB-740A-4EBA-A309-2CE71D12ECFB}"/>
               </a:ext>
             </a:extLst>
           </p:cNvPr>
@@ -4851,7 +5030,7 @@
           <p:cNvPr id="5" name="Espaço Reservado para Rodapé 4">
             <a:extLst>
               <a:ext uri="{FF2B5EF4-FFF2-40B4-BE49-F238E27FC236}">
-                <a16:creationId xmlns="" xmlns:a16="http://schemas.microsoft.com/office/drawing/2014/main" id="{BDCAB18F-8715-4465-A940-F9C193A2ACE9}"/>
+                <a16:creationId xmlns:a16="http://schemas.microsoft.com/office/drawing/2014/main" xmlns="" id="{BDCAB18F-8715-4465-A940-F9C193A2ACE9}"/>
               </a:ext>
             </a:extLst>
           </p:cNvPr>
@@ -4876,7 +5055,7 @@
           <p:cNvPr id="6" name="Espaço Reservado para Número de Slide 5">
             <a:extLst>
               <a:ext uri="{FF2B5EF4-FFF2-40B4-BE49-F238E27FC236}">
-                <a16:creationId xmlns="" xmlns:a16="http://schemas.microsoft.com/office/drawing/2014/main" id="{353466C6-8248-429F-8056-FF040BF509EB}"/>
+                <a16:creationId xmlns:a16="http://schemas.microsoft.com/office/drawing/2014/main" xmlns="" id="{353466C6-8248-429F-8056-FF040BF509EB}"/>
               </a:ext>
             </a:extLst>
           </p:cNvPr>
@@ -4935,7 +5114,7 @@
           <p:cNvPr id="2" name="Título 1">
             <a:extLst>
               <a:ext uri="{FF2B5EF4-FFF2-40B4-BE49-F238E27FC236}">
-                <a16:creationId xmlns="" xmlns:a16="http://schemas.microsoft.com/office/drawing/2014/main" id="{BC7BB9F0-F14B-4A91-B2B7-35BC47FE4DE7}"/>
+                <a16:creationId xmlns:a16="http://schemas.microsoft.com/office/drawing/2014/main" xmlns="" id="{BC7BB9F0-F14B-4A91-B2B7-35BC47FE4DE7}"/>
               </a:ext>
             </a:extLst>
           </p:cNvPr>
@@ -4963,7 +5142,7 @@
           <p:cNvPr id="3" name="Espaço Reservado para Conteúdo 2">
             <a:extLst>
               <a:ext uri="{FF2B5EF4-FFF2-40B4-BE49-F238E27FC236}">
-                <a16:creationId xmlns="" xmlns:a16="http://schemas.microsoft.com/office/drawing/2014/main" id="{EC1FC1C4-73DA-47A6-8496-B0B457F7D39A}"/>
+                <a16:creationId xmlns:a16="http://schemas.microsoft.com/office/drawing/2014/main" xmlns="" id="{EC1FC1C4-73DA-47A6-8496-B0B457F7D39A}"/>
               </a:ext>
             </a:extLst>
           </p:cNvPr>
@@ -5025,7 +5204,7 @@
           <p:cNvPr id="4" name="Espaço Reservado para Conteúdo 3">
             <a:extLst>
               <a:ext uri="{FF2B5EF4-FFF2-40B4-BE49-F238E27FC236}">
-                <a16:creationId xmlns="" xmlns:a16="http://schemas.microsoft.com/office/drawing/2014/main" id="{E92F06A8-A449-4D92-9912-76873E529B38}"/>
+                <a16:creationId xmlns:a16="http://schemas.microsoft.com/office/drawing/2014/main" xmlns="" id="{E92F06A8-A449-4D92-9912-76873E529B38}"/>
               </a:ext>
             </a:extLst>
           </p:cNvPr>
@@ -5087,7 +5266,7 @@
           <p:cNvPr id="5" name="Espaço Reservado para Data 4">
             <a:extLst>
               <a:ext uri="{FF2B5EF4-FFF2-40B4-BE49-F238E27FC236}">
-                <a16:creationId xmlns="" xmlns:a16="http://schemas.microsoft.com/office/drawing/2014/main" id="{938070A4-BC2F-4D55-BD8D-DEAF11BB9EE9}"/>
+                <a16:creationId xmlns:a16="http://schemas.microsoft.com/office/drawing/2014/main" xmlns="" id="{938070A4-BC2F-4D55-BD8D-DEAF11BB9EE9}"/>
               </a:ext>
             </a:extLst>
           </p:cNvPr>
@@ -5116,7 +5295,7 @@
           <p:cNvPr id="6" name="Espaço Reservado para Rodapé 5">
             <a:extLst>
               <a:ext uri="{FF2B5EF4-FFF2-40B4-BE49-F238E27FC236}">
-                <a16:creationId xmlns="" xmlns:a16="http://schemas.microsoft.com/office/drawing/2014/main" id="{45CC2DB8-844A-465F-BA9A-7734C80C7F43}"/>
+                <a16:creationId xmlns:a16="http://schemas.microsoft.com/office/drawing/2014/main" xmlns="" id="{45CC2DB8-844A-465F-BA9A-7734C80C7F43}"/>
               </a:ext>
             </a:extLst>
           </p:cNvPr>
@@ -5141,7 +5320,7 @@
           <p:cNvPr id="7" name="Espaço Reservado para Número de Slide 6">
             <a:extLst>
               <a:ext uri="{FF2B5EF4-FFF2-40B4-BE49-F238E27FC236}">
-                <a16:creationId xmlns="" xmlns:a16="http://schemas.microsoft.com/office/drawing/2014/main" id="{4CC606A8-097B-4040-94E0-CD8C88280D8F}"/>
+                <a16:creationId xmlns:a16="http://schemas.microsoft.com/office/drawing/2014/main" xmlns="" id="{4CC606A8-097B-4040-94E0-CD8C88280D8F}"/>
               </a:ext>
             </a:extLst>
           </p:cNvPr>
@@ -5200,7 +5379,7 @@
           <p:cNvPr id="2" name="Título 1">
             <a:extLst>
               <a:ext uri="{FF2B5EF4-FFF2-40B4-BE49-F238E27FC236}">
-                <a16:creationId xmlns="" xmlns:a16="http://schemas.microsoft.com/office/drawing/2014/main" id="{76D66686-0143-4CB6-8C09-BA326F1E7ACA}"/>
+                <a16:creationId xmlns:a16="http://schemas.microsoft.com/office/drawing/2014/main" xmlns="" id="{76D66686-0143-4CB6-8C09-BA326F1E7ACA}"/>
               </a:ext>
             </a:extLst>
           </p:cNvPr>
@@ -5233,7 +5412,7 @@
           <p:cNvPr id="3" name="Espaço Reservado para Texto 2">
             <a:extLst>
               <a:ext uri="{FF2B5EF4-FFF2-40B4-BE49-F238E27FC236}">
-                <a16:creationId xmlns="" xmlns:a16="http://schemas.microsoft.com/office/drawing/2014/main" id="{0227AB85-F59E-4BCE-B846-4FA0992C2F23}"/>
+                <a16:creationId xmlns:a16="http://schemas.microsoft.com/office/drawing/2014/main" xmlns="" id="{0227AB85-F59E-4BCE-B846-4FA0992C2F23}"/>
               </a:ext>
             </a:extLst>
           </p:cNvPr>
@@ -5304,7 +5483,7 @@
           <p:cNvPr id="4" name="Espaço Reservado para Conteúdo 3">
             <a:extLst>
               <a:ext uri="{FF2B5EF4-FFF2-40B4-BE49-F238E27FC236}">
-                <a16:creationId xmlns="" xmlns:a16="http://schemas.microsoft.com/office/drawing/2014/main" id="{3373456C-7319-4D0A-827D-D29F6B083F5D}"/>
+                <a16:creationId xmlns:a16="http://schemas.microsoft.com/office/drawing/2014/main" xmlns="" id="{3373456C-7319-4D0A-827D-D29F6B083F5D}"/>
               </a:ext>
             </a:extLst>
           </p:cNvPr>
@@ -5366,7 +5545,7 @@
           <p:cNvPr id="5" name="Espaço Reservado para Texto 4">
             <a:extLst>
               <a:ext uri="{FF2B5EF4-FFF2-40B4-BE49-F238E27FC236}">
-                <a16:creationId xmlns="" xmlns:a16="http://schemas.microsoft.com/office/drawing/2014/main" id="{4CD109D0-2E83-4262-8029-A871CEC47406}"/>
+                <a16:creationId xmlns:a16="http://schemas.microsoft.com/office/drawing/2014/main" xmlns="" id="{4CD109D0-2E83-4262-8029-A871CEC47406}"/>
               </a:ext>
             </a:extLst>
           </p:cNvPr>
@@ -5437,7 +5616,7 @@
           <p:cNvPr id="6" name="Espaço Reservado para Conteúdo 5">
             <a:extLst>
               <a:ext uri="{FF2B5EF4-FFF2-40B4-BE49-F238E27FC236}">
-                <a16:creationId xmlns="" xmlns:a16="http://schemas.microsoft.com/office/drawing/2014/main" id="{AD706E3A-CFBB-4A6C-A65F-D0360A9E74FE}"/>
+                <a16:creationId xmlns:a16="http://schemas.microsoft.com/office/drawing/2014/main" xmlns="" id="{AD706E3A-CFBB-4A6C-A65F-D0360A9E74FE}"/>
               </a:ext>
             </a:extLst>
           </p:cNvPr>
@@ -5499,7 +5678,7 @@
           <p:cNvPr id="7" name="Espaço Reservado para Data 6">
             <a:extLst>
               <a:ext uri="{FF2B5EF4-FFF2-40B4-BE49-F238E27FC236}">
-                <a16:creationId xmlns="" xmlns:a16="http://schemas.microsoft.com/office/drawing/2014/main" id="{4172C0E5-5AF0-4805-BB51-443733CD2BD5}"/>
+                <a16:creationId xmlns:a16="http://schemas.microsoft.com/office/drawing/2014/main" xmlns="" id="{4172C0E5-5AF0-4805-BB51-443733CD2BD5}"/>
               </a:ext>
             </a:extLst>
           </p:cNvPr>
@@ -5528,7 +5707,7 @@
           <p:cNvPr id="8" name="Espaço Reservado para Rodapé 7">
             <a:extLst>
               <a:ext uri="{FF2B5EF4-FFF2-40B4-BE49-F238E27FC236}">
-                <a16:creationId xmlns="" xmlns:a16="http://schemas.microsoft.com/office/drawing/2014/main" id="{0E801648-156F-497E-99CF-797DF48051E1}"/>
+                <a16:creationId xmlns:a16="http://schemas.microsoft.com/office/drawing/2014/main" xmlns="" id="{0E801648-156F-497E-99CF-797DF48051E1}"/>
               </a:ext>
             </a:extLst>
           </p:cNvPr>
@@ -5553,7 +5732,7 @@
           <p:cNvPr id="9" name="Espaço Reservado para Número de Slide 8">
             <a:extLst>
               <a:ext uri="{FF2B5EF4-FFF2-40B4-BE49-F238E27FC236}">
-                <a16:creationId xmlns="" xmlns:a16="http://schemas.microsoft.com/office/drawing/2014/main" id="{EEE23D32-80E7-4796-A137-66BF842E4B53}"/>
+                <a16:creationId xmlns:a16="http://schemas.microsoft.com/office/drawing/2014/main" xmlns="" id="{EEE23D32-80E7-4796-A137-66BF842E4B53}"/>
               </a:ext>
             </a:extLst>
           </p:cNvPr>
@@ -5612,7 +5791,7 @@
           <p:cNvPr id="2" name="Título 1">
             <a:extLst>
               <a:ext uri="{FF2B5EF4-FFF2-40B4-BE49-F238E27FC236}">
-                <a16:creationId xmlns="" xmlns:a16="http://schemas.microsoft.com/office/drawing/2014/main" id="{2BCE2379-C78F-47E1-8CFC-B846E7AF148D}"/>
+                <a16:creationId xmlns:a16="http://schemas.microsoft.com/office/drawing/2014/main" xmlns="" id="{2BCE2379-C78F-47E1-8CFC-B846E7AF148D}"/>
               </a:ext>
             </a:extLst>
           </p:cNvPr>
@@ -5640,7 +5819,7 @@
           <p:cNvPr id="3" name="Espaço Reservado para Data 2">
             <a:extLst>
               <a:ext uri="{FF2B5EF4-FFF2-40B4-BE49-F238E27FC236}">
-                <a16:creationId xmlns="" xmlns:a16="http://schemas.microsoft.com/office/drawing/2014/main" id="{342600A9-7F92-4E22-9D94-E4717252A817}"/>
+                <a16:creationId xmlns:a16="http://schemas.microsoft.com/office/drawing/2014/main" xmlns="" id="{342600A9-7F92-4E22-9D94-E4717252A817}"/>
               </a:ext>
             </a:extLst>
           </p:cNvPr>
@@ -5669,7 +5848,7 @@
           <p:cNvPr id="4" name="Espaço Reservado para Rodapé 3">
             <a:extLst>
               <a:ext uri="{FF2B5EF4-FFF2-40B4-BE49-F238E27FC236}">
-                <a16:creationId xmlns="" xmlns:a16="http://schemas.microsoft.com/office/drawing/2014/main" id="{192E6BED-F546-40CC-A2DF-99CBA853654E}"/>
+                <a16:creationId xmlns:a16="http://schemas.microsoft.com/office/drawing/2014/main" xmlns="" id="{192E6BED-F546-40CC-A2DF-99CBA853654E}"/>
               </a:ext>
             </a:extLst>
           </p:cNvPr>
@@ -5694,7 +5873,7 @@
           <p:cNvPr id="5" name="Espaço Reservado para Número de Slide 4">
             <a:extLst>
               <a:ext uri="{FF2B5EF4-FFF2-40B4-BE49-F238E27FC236}">
-                <a16:creationId xmlns="" xmlns:a16="http://schemas.microsoft.com/office/drawing/2014/main" id="{6091CC40-A8C4-4063-80EB-CC5099621678}"/>
+                <a16:creationId xmlns:a16="http://schemas.microsoft.com/office/drawing/2014/main" xmlns="" id="{6091CC40-A8C4-4063-80EB-CC5099621678}"/>
               </a:ext>
             </a:extLst>
           </p:cNvPr>
@@ -5753,7 +5932,7 @@
           <p:cNvPr id="2" name="Espaço Reservado para Data 1">
             <a:extLst>
               <a:ext uri="{FF2B5EF4-FFF2-40B4-BE49-F238E27FC236}">
-                <a16:creationId xmlns="" xmlns:a16="http://schemas.microsoft.com/office/drawing/2014/main" id="{DD19515C-212C-4EAE-84A3-8FF4BC844F1B}"/>
+                <a16:creationId xmlns:a16="http://schemas.microsoft.com/office/drawing/2014/main" xmlns="" id="{DD19515C-212C-4EAE-84A3-8FF4BC844F1B}"/>
               </a:ext>
             </a:extLst>
           </p:cNvPr>
@@ -5782,7 +5961,7 @@
           <p:cNvPr id="3" name="Espaço Reservado para Rodapé 2">
             <a:extLst>
               <a:ext uri="{FF2B5EF4-FFF2-40B4-BE49-F238E27FC236}">
-                <a16:creationId xmlns="" xmlns:a16="http://schemas.microsoft.com/office/drawing/2014/main" id="{94D3D120-B3E8-4C96-861D-7A4F12F49B3A}"/>
+                <a16:creationId xmlns:a16="http://schemas.microsoft.com/office/drawing/2014/main" xmlns="" id="{94D3D120-B3E8-4C96-861D-7A4F12F49B3A}"/>
               </a:ext>
             </a:extLst>
           </p:cNvPr>
@@ -5807,7 +5986,7 @@
           <p:cNvPr id="4" name="Espaço Reservado para Número de Slide 3">
             <a:extLst>
               <a:ext uri="{FF2B5EF4-FFF2-40B4-BE49-F238E27FC236}">
-                <a16:creationId xmlns="" xmlns:a16="http://schemas.microsoft.com/office/drawing/2014/main" id="{42E49B68-FA1B-468B-9F17-D5C09243D454}"/>
+                <a16:creationId xmlns:a16="http://schemas.microsoft.com/office/drawing/2014/main" xmlns="" id="{42E49B68-FA1B-468B-9F17-D5C09243D454}"/>
               </a:ext>
             </a:extLst>
           </p:cNvPr>
@@ -5866,7 +6045,7 @@
           <p:cNvPr id="2" name="Título 1">
             <a:extLst>
               <a:ext uri="{FF2B5EF4-FFF2-40B4-BE49-F238E27FC236}">
-                <a16:creationId xmlns="" xmlns:a16="http://schemas.microsoft.com/office/drawing/2014/main" id="{1C17BCBE-A897-4319-85EC-D87909C24980}"/>
+                <a16:creationId xmlns:a16="http://schemas.microsoft.com/office/drawing/2014/main" xmlns="" id="{1C17BCBE-A897-4319-85EC-D87909C24980}"/>
               </a:ext>
             </a:extLst>
           </p:cNvPr>
@@ -5903,7 +6082,7 @@
           <p:cNvPr id="3" name="Espaço Reservado para Conteúdo 2">
             <a:extLst>
               <a:ext uri="{FF2B5EF4-FFF2-40B4-BE49-F238E27FC236}">
-                <a16:creationId xmlns="" xmlns:a16="http://schemas.microsoft.com/office/drawing/2014/main" id="{4226F885-0204-4913-868B-4B8B82576F17}"/>
+                <a16:creationId xmlns:a16="http://schemas.microsoft.com/office/drawing/2014/main" xmlns="" id="{4226F885-0204-4913-868B-4B8B82576F17}"/>
               </a:ext>
             </a:extLst>
           </p:cNvPr>
@@ -5993,7 +6172,7 @@
           <p:cNvPr id="4" name="Espaço Reservado para Texto 3">
             <a:extLst>
               <a:ext uri="{FF2B5EF4-FFF2-40B4-BE49-F238E27FC236}">
-                <a16:creationId xmlns="" xmlns:a16="http://schemas.microsoft.com/office/drawing/2014/main" id="{00F9F784-A858-441B-8AB5-697098141751}"/>
+                <a16:creationId xmlns:a16="http://schemas.microsoft.com/office/drawing/2014/main" xmlns="" id="{00F9F784-A858-441B-8AB5-697098141751}"/>
               </a:ext>
             </a:extLst>
           </p:cNvPr>
@@ -6064,7 +6243,7 @@
           <p:cNvPr id="5" name="Espaço Reservado para Data 4">
             <a:extLst>
               <a:ext uri="{FF2B5EF4-FFF2-40B4-BE49-F238E27FC236}">
-                <a16:creationId xmlns="" xmlns:a16="http://schemas.microsoft.com/office/drawing/2014/main" id="{A4DC363A-5000-472E-8B17-02E7DCB8840A}"/>
+                <a16:creationId xmlns:a16="http://schemas.microsoft.com/office/drawing/2014/main" xmlns="" id="{A4DC363A-5000-472E-8B17-02E7DCB8840A}"/>
               </a:ext>
             </a:extLst>
           </p:cNvPr>
@@ -6093,7 +6272,7 @@
           <p:cNvPr id="6" name="Espaço Reservado para Rodapé 5">
             <a:extLst>
               <a:ext uri="{FF2B5EF4-FFF2-40B4-BE49-F238E27FC236}">
-                <a16:creationId xmlns="" xmlns:a16="http://schemas.microsoft.com/office/drawing/2014/main" id="{5548425D-2C21-4C56-BAD4-662978775C28}"/>
+                <a16:creationId xmlns:a16="http://schemas.microsoft.com/office/drawing/2014/main" xmlns="" id="{5548425D-2C21-4C56-BAD4-662978775C28}"/>
               </a:ext>
             </a:extLst>
           </p:cNvPr>
@@ -6118,7 +6297,7 @@
           <p:cNvPr id="7" name="Espaço Reservado para Número de Slide 6">
             <a:extLst>
               <a:ext uri="{FF2B5EF4-FFF2-40B4-BE49-F238E27FC236}">
-                <a16:creationId xmlns="" xmlns:a16="http://schemas.microsoft.com/office/drawing/2014/main" id="{C63E9726-E64C-42B2-AE8A-8C235A956B48}"/>
+                <a16:creationId xmlns:a16="http://schemas.microsoft.com/office/drawing/2014/main" xmlns="" id="{C63E9726-E64C-42B2-AE8A-8C235A956B48}"/>
               </a:ext>
             </a:extLst>
           </p:cNvPr>
@@ -6177,7 +6356,7 @@
           <p:cNvPr id="2" name="Título 1">
             <a:extLst>
               <a:ext uri="{FF2B5EF4-FFF2-40B4-BE49-F238E27FC236}">
-                <a16:creationId xmlns="" xmlns:a16="http://schemas.microsoft.com/office/drawing/2014/main" id="{11086A78-3E74-450C-96A6-CA8AC37AF772}"/>
+                <a16:creationId xmlns:a16="http://schemas.microsoft.com/office/drawing/2014/main" xmlns="" id="{11086A78-3E74-450C-96A6-CA8AC37AF772}"/>
               </a:ext>
             </a:extLst>
           </p:cNvPr>
@@ -6214,7 +6393,7 @@
           <p:cNvPr id="3" name="Espaço Reservado para Imagem 2">
             <a:extLst>
               <a:ext uri="{FF2B5EF4-FFF2-40B4-BE49-F238E27FC236}">
-                <a16:creationId xmlns="" xmlns:a16="http://schemas.microsoft.com/office/drawing/2014/main" id="{5F5B7312-975A-4DBC-9B2F-3652ADA006FD}"/>
+                <a16:creationId xmlns:a16="http://schemas.microsoft.com/office/drawing/2014/main" xmlns="" id="{5F5B7312-975A-4DBC-9B2F-3652ADA006FD}"/>
               </a:ext>
             </a:extLst>
           </p:cNvPr>
@@ -6281,7 +6460,7 @@
           <p:cNvPr id="4" name="Espaço Reservado para Texto 3">
             <a:extLst>
               <a:ext uri="{FF2B5EF4-FFF2-40B4-BE49-F238E27FC236}">
-                <a16:creationId xmlns="" xmlns:a16="http://schemas.microsoft.com/office/drawing/2014/main" id="{AAF805F5-1DFF-41C6-944C-7D79FE0D0963}"/>
+                <a16:creationId xmlns:a16="http://schemas.microsoft.com/office/drawing/2014/main" xmlns="" id="{AAF805F5-1DFF-41C6-944C-7D79FE0D0963}"/>
               </a:ext>
             </a:extLst>
           </p:cNvPr>
@@ -6352,7 +6531,7 @@
           <p:cNvPr id="5" name="Espaço Reservado para Data 4">
             <a:extLst>
               <a:ext uri="{FF2B5EF4-FFF2-40B4-BE49-F238E27FC236}">
-                <a16:creationId xmlns="" xmlns:a16="http://schemas.microsoft.com/office/drawing/2014/main" id="{02113D81-8665-4516-BD81-C6A1F254EECD}"/>
+                <a16:creationId xmlns:a16="http://schemas.microsoft.com/office/drawing/2014/main" xmlns="" id="{02113D81-8665-4516-BD81-C6A1F254EECD}"/>
               </a:ext>
             </a:extLst>
           </p:cNvPr>
@@ -6381,7 +6560,7 @@
           <p:cNvPr id="6" name="Espaço Reservado para Rodapé 5">
             <a:extLst>
               <a:ext uri="{FF2B5EF4-FFF2-40B4-BE49-F238E27FC236}">
-                <a16:creationId xmlns="" xmlns:a16="http://schemas.microsoft.com/office/drawing/2014/main" id="{2B00C88B-FF32-40AA-A187-727D96FD7862}"/>
+                <a16:creationId xmlns:a16="http://schemas.microsoft.com/office/drawing/2014/main" xmlns="" id="{2B00C88B-FF32-40AA-A187-727D96FD7862}"/>
               </a:ext>
             </a:extLst>
           </p:cNvPr>
@@ -6406,7 +6585,7 @@
           <p:cNvPr id="7" name="Espaço Reservado para Número de Slide 6">
             <a:extLst>
               <a:ext uri="{FF2B5EF4-FFF2-40B4-BE49-F238E27FC236}">
-                <a16:creationId xmlns="" xmlns:a16="http://schemas.microsoft.com/office/drawing/2014/main" id="{A04D1A2D-69F7-4B8F-A730-BC26DC340BA6}"/>
+                <a16:creationId xmlns:a16="http://schemas.microsoft.com/office/drawing/2014/main" xmlns="" id="{A04D1A2D-69F7-4B8F-A730-BC26DC340BA6}"/>
               </a:ext>
             </a:extLst>
           </p:cNvPr>
@@ -6470,7 +6649,7 @@
           <p:cNvPr id="2" name="Espaço Reservado para Título 1">
             <a:extLst>
               <a:ext uri="{FF2B5EF4-FFF2-40B4-BE49-F238E27FC236}">
-                <a16:creationId xmlns="" xmlns:a16="http://schemas.microsoft.com/office/drawing/2014/main" id="{E69A0273-1966-4A1B-9370-4C1CE5036371}"/>
+                <a16:creationId xmlns:a16="http://schemas.microsoft.com/office/drawing/2014/main" xmlns="" id="{E69A0273-1966-4A1B-9370-4C1CE5036371}"/>
               </a:ext>
             </a:extLst>
           </p:cNvPr>
@@ -6508,7 +6687,7 @@
           <p:cNvPr id="3" name="Espaço Reservado para Texto 2">
             <a:extLst>
               <a:ext uri="{FF2B5EF4-FFF2-40B4-BE49-F238E27FC236}">
-                <a16:creationId xmlns="" xmlns:a16="http://schemas.microsoft.com/office/drawing/2014/main" id="{3B9CF87A-0448-49A7-AB25-EBC1D56A40EF}"/>
+                <a16:creationId xmlns:a16="http://schemas.microsoft.com/office/drawing/2014/main" xmlns="" id="{3B9CF87A-0448-49A7-AB25-EBC1D56A40EF}"/>
               </a:ext>
             </a:extLst>
           </p:cNvPr>
@@ -6575,7 +6754,7 @@
           <p:cNvPr id="4" name="Espaço Reservado para Data 3">
             <a:extLst>
               <a:ext uri="{FF2B5EF4-FFF2-40B4-BE49-F238E27FC236}">
-                <a16:creationId xmlns="" xmlns:a16="http://schemas.microsoft.com/office/drawing/2014/main" id="{2EF7B1F2-BB5A-44D0-816D-16AD2C71430E}"/>
+                <a16:creationId xmlns:a16="http://schemas.microsoft.com/office/drawing/2014/main" xmlns="" id="{2EF7B1F2-BB5A-44D0-816D-16AD2C71430E}"/>
               </a:ext>
             </a:extLst>
           </p:cNvPr>
@@ -6622,7 +6801,7 @@
           <p:cNvPr id="5" name="Espaço Reservado para Rodapé 4">
             <a:extLst>
               <a:ext uri="{FF2B5EF4-FFF2-40B4-BE49-F238E27FC236}">
-                <a16:creationId xmlns="" xmlns:a16="http://schemas.microsoft.com/office/drawing/2014/main" id="{C703F94C-2CC8-4DAA-BC35-14FC3E841DCD}"/>
+                <a16:creationId xmlns:a16="http://schemas.microsoft.com/office/drawing/2014/main" xmlns="" id="{C703F94C-2CC8-4DAA-BC35-14FC3E841DCD}"/>
               </a:ext>
             </a:extLst>
           </p:cNvPr>
@@ -6665,7 +6844,7 @@
           <p:cNvPr id="6" name="Espaço Reservado para Número de Slide 5">
             <a:extLst>
               <a:ext uri="{FF2B5EF4-FFF2-40B4-BE49-F238E27FC236}">
-                <a16:creationId xmlns="" xmlns:a16="http://schemas.microsoft.com/office/drawing/2014/main" id="{64051336-7048-457A-8B61-D94291D71648}"/>
+                <a16:creationId xmlns:a16="http://schemas.microsoft.com/office/drawing/2014/main" xmlns="" id="{64051336-7048-457A-8B61-D94291D71648}"/>
               </a:ext>
             </a:extLst>
           </p:cNvPr>
@@ -7033,7 +7212,7 @@
           <p:cNvPr id="4" name="CaixaDeTexto 3">
             <a:extLst>
               <a:ext uri="{FF2B5EF4-FFF2-40B4-BE49-F238E27FC236}">
-                <a16:creationId xmlns="" xmlns:a16="http://schemas.microsoft.com/office/drawing/2014/main" id="{430EB894-B7D4-434C-9D1A-A14094D9BEEC}"/>
+                <a16:creationId xmlns:a16="http://schemas.microsoft.com/office/drawing/2014/main" xmlns="" id="{430EB894-B7D4-434C-9D1A-A14094D9BEEC}"/>
               </a:ext>
             </a:extLst>
           </p:cNvPr>
@@ -7077,7 +7256,7 @@
           <p:cNvPr id="1026" name="Picture 2" descr="Logo">
             <a:extLst>
               <a:ext uri="{FF2B5EF4-FFF2-40B4-BE49-F238E27FC236}">
-                <a16:creationId xmlns="" xmlns:a16="http://schemas.microsoft.com/office/drawing/2014/main" id="{3F2642E0-4F6A-4196-8F58-E77D36E9A33F}"/>
+                <a16:creationId xmlns:a16="http://schemas.microsoft.com/office/drawing/2014/main" xmlns="" id="{3F2642E0-4F6A-4196-8F58-E77D36E9A33F}"/>
               </a:ext>
             </a:extLst>
           </p:cNvPr>
@@ -7122,7 +7301,7 @@
           <p:cNvPr id="5122" name="Picture 2" descr="Image result for machine learning">
             <a:extLst>
               <a:ext uri="{FF2B5EF4-FFF2-40B4-BE49-F238E27FC236}">
-                <a16:creationId xmlns="" xmlns:a16="http://schemas.microsoft.com/office/drawing/2014/main" id="{810CE0A2-4102-44A6-A370-175E7896CDCB}"/>
+                <a16:creationId xmlns:a16="http://schemas.microsoft.com/office/drawing/2014/main" xmlns="" id="{810CE0A2-4102-44A6-A370-175E7896CDCB}"/>
               </a:ext>
             </a:extLst>
           </p:cNvPr>
@@ -7167,7 +7346,7 @@
           <p:cNvPr id="7" name="Título 1">
             <a:extLst>
               <a:ext uri="{FF2B5EF4-FFF2-40B4-BE49-F238E27FC236}">
-                <a16:creationId xmlns="" xmlns:a16="http://schemas.microsoft.com/office/drawing/2014/main" id="{32666AC8-2E17-4DB4-B0F5-60C640CCFD2E}"/>
+                <a16:creationId xmlns:a16="http://schemas.microsoft.com/office/drawing/2014/main" xmlns="" id="{32666AC8-2E17-4DB4-B0F5-60C640CCFD2E}"/>
               </a:ext>
             </a:extLst>
           </p:cNvPr>
@@ -7230,7 +7409,7 @@
         <p:cNvPr id="1" name="">
           <a:extLst>
             <a:ext uri="{FF2B5EF4-FFF2-40B4-BE49-F238E27FC236}">
-              <a16:creationId xmlns="" xmlns:a16="http://schemas.microsoft.com/office/drawing/2014/main" id="{DDB2BBDA-DAF3-B7AC-FB99-7C5B9285F912}"/>
+              <a16:creationId xmlns:a16="http://schemas.microsoft.com/office/drawing/2014/main" xmlns="" id="{DDB2BBDA-DAF3-B7AC-FB99-7C5B9285F912}"/>
             </a:ext>
           </a:extLst>
         </p:cNvPr>
@@ -7250,7 +7429,7 @@
           <p:cNvPr id="2" name="Title 1">
             <a:extLst>
               <a:ext uri="{FF2B5EF4-FFF2-40B4-BE49-F238E27FC236}">
-                <a16:creationId xmlns="" xmlns:a16="http://schemas.microsoft.com/office/drawing/2014/main" id="{A98D36C9-8653-8E41-11D8-585B6AC0D03D}"/>
+                <a16:creationId xmlns:a16="http://schemas.microsoft.com/office/drawing/2014/main" xmlns="" id="{A98D36C9-8653-8E41-11D8-585B6AC0D03D}"/>
               </a:ext>
             </a:extLst>
           </p:cNvPr>
@@ -7290,7 +7469,7 @@
           <p:cNvPr id="3" name="Content Placeholder 2">
             <a:extLst>
               <a:ext uri="{FF2B5EF4-FFF2-40B4-BE49-F238E27FC236}">
-                <a16:creationId xmlns="" xmlns:a16="http://schemas.microsoft.com/office/drawing/2014/main" id="{981046E0-93D4-BF9F-C552-72A01838A8A3}"/>
+                <a16:creationId xmlns:a16="http://schemas.microsoft.com/office/drawing/2014/main" xmlns="" id="{981046E0-93D4-BF9F-C552-72A01838A8A3}"/>
               </a:ext>
             </a:extLst>
           </p:cNvPr>
@@ -7325,7 +7504,7 @@
           <p:cNvPr id="61" name="Picture 60">
             <a:extLst>
               <a:ext uri="{FF2B5EF4-FFF2-40B4-BE49-F238E27FC236}">
-                <a16:creationId xmlns="" xmlns:a16="http://schemas.microsoft.com/office/drawing/2014/main" id="{22F895FA-1424-E50C-97F4-4F0BE0413C2F}"/>
+                <a16:creationId xmlns:a16="http://schemas.microsoft.com/office/drawing/2014/main" xmlns="" id="{22F895FA-1424-E50C-97F4-4F0BE0413C2F}"/>
               </a:ext>
             </a:extLst>
           </p:cNvPr>
@@ -7391,7 +7570,7 @@
           <p:cNvPr id="2" name="Title 1">
             <a:extLst>
               <a:ext uri="{FF2B5EF4-FFF2-40B4-BE49-F238E27FC236}">
-                <a16:creationId xmlns="" xmlns:a16="http://schemas.microsoft.com/office/drawing/2014/main" id="{6212CAF6-B58D-36CC-E75E-B9EBC01B5494}"/>
+                <a16:creationId xmlns:a16="http://schemas.microsoft.com/office/drawing/2014/main" xmlns="" id="{6212CAF6-B58D-36CC-E75E-B9EBC01B5494}"/>
               </a:ext>
             </a:extLst>
           </p:cNvPr>
@@ -7420,7 +7599,7 @@
           <p:cNvPr id="3" name="Content Placeholder 2">
             <a:extLst>
               <a:ext uri="{FF2B5EF4-FFF2-40B4-BE49-F238E27FC236}">
-                <a16:creationId xmlns="" xmlns:a16="http://schemas.microsoft.com/office/drawing/2014/main" id="{5516FA30-D5F7-2E83-352E-3527EE589DED}"/>
+                <a16:creationId xmlns:a16="http://schemas.microsoft.com/office/drawing/2014/main" xmlns="" id="{5516FA30-D5F7-2E83-352E-3527EE589DED}"/>
               </a:ext>
             </a:extLst>
           </p:cNvPr>
@@ -7691,7 +7870,7 @@
           <p:cNvPr id="2" name="Title 1">
             <a:extLst>
               <a:ext uri="{FF2B5EF4-FFF2-40B4-BE49-F238E27FC236}">
-                <a16:creationId xmlns="" xmlns:a16="http://schemas.microsoft.com/office/drawing/2014/main" id="{8C8E92F5-0D3A-0F43-282A-3A7C0603923D}"/>
+                <a16:creationId xmlns:a16="http://schemas.microsoft.com/office/drawing/2014/main" xmlns="" id="{8C8E92F5-0D3A-0F43-282A-3A7C0603923D}"/>
               </a:ext>
             </a:extLst>
           </p:cNvPr>
@@ -7732,7 +7911,7 @@
           <p:cNvPr id="3" name="Content Placeholder 2">
             <a:extLst>
               <a:ext uri="{FF2B5EF4-FFF2-40B4-BE49-F238E27FC236}">
-                <a16:creationId xmlns="" xmlns:a16="http://schemas.microsoft.com/office/drawing/2014/main" id="{9AB6A6C9-67EC-449F-0095-BDC7619374B2}"/>
+                <a16:creationId xmlns:a16="http://schemas.microsoft.com/office/drawing/2014/main" xmlns="" id="{9AB6A6C9-67EC-449F-0095-BDC7619374B2}"/>
               </a:ext>
             </a:extLst>
           </p:cNvPr>
@@ -7885,7 +8064,7 @@
         <p:cNvPr id="1" name="">
           <a:extLst>
             <a:ext uri="{FF2B5EF4-FFF2-40B4-BE49-F238E27FC236}">
-              <a16:creationId xmlns="" xmlns:a16="http://schemas.microsoft.com/office/drawing/2014/main" id="{74614044-1D84-E441-8AC3-FB3FD9221416}"/>
+              <a16:creationId xmlns:a16="http://schemas.microsoft.com/office/drawing/2014/main" xmlns="" id="{74614044-1D84-E441-8AC3-FB3FD9221416}"/>
             </a:ext>
           </a:extLst>
         </p:cNvPr>
@@ -7905,7 +8084,7 @@
           <p:cNvPr id="2" name="Title 1">
             <a:extLst>
               <a:ext uri="{FF2B5EF4-FFF2-40B4-BE49-F238E27FC236}">
-                <a16:creationId xmlns="" xmlns:a16="http://schemas.microsoft.com/office/drawing/2014/main" id="{C6E93585-9339-7002-7C62-27331F24C140}"/>
+                <a16:creationId xmlns:a16="http://schemas.microsoft.com/office/drawing/2014/main" xmlns="" id="{C6E93585-9339-7002-7C62-27331F24C140}"/>
               </a:ext>
             </a:extLst>
           </p:cNvPr>
@@ -7935,7 +8114,7 @@
               <p:cNvPr id="3" name="Content Placeholder 2">
                 <a:extLst>
                   <a:ext uri="{FF2B5EF4-FFF2-40B4-BE49-F238E27FC236}">
-                    <a16:creationId xmlns="" xmlns:a16="http://schemas.microsoft.com/office/drawing/2014/main" id="{A1483011-729D-F9ED-5FD6-580E6A4020EF}"/>
+                    <a16:creationId xmlns:a16="http://schemas.microsoft.com/office/drawing/2014/main" xmlns="" id="{A1483011-729D-F9ED-5FD6-580E6A4020EF}"/>
                   </a:ext>
                 </a:extLst>
               </p:cNvPr>
@@ -8175,7 +8354,7 @@
           <p:cNvPr id="4" name="Table 3">
             <a:extLst>
               <a:ext uri="{FF2B5EF4-FFF2-40B4-BE49-F238E27FC236}">
-                <a16:creationId xmlns="" xmlns:a16="http://schemas.microsoft.com/office/drawing/2014/main" id="{A14A3494-F972-A92A-0152-CCA1FC8882F5}"/>
+                <a16:creationId xmlns:a16="http://schemas.microsoft.com/office/drawing/2014/main" xmlns="" id="{A14A3494-F972-A92A-0152-CCA1FC8882F5}"/>
               </a:ext>
             </a:extLst>
           </p:cNvPr>
@@ -8204,28 +8383,28 @@
                 <a:gridCol w="439057">
                   <a:extLst>
                     <a:ext uri="{9D8B030D-6E8A-4147-A177-3AD203B41FA5}">
-                      <a16:colId xmlns="" xmlns:a16="http://schemas.microsoft.com/office/drawing/2014/main" val="4237906138"/>
+                      <a16:colId xmlns:a16="http://schemas.microsoft.com/office/drawing/2014/main" xmlns="" val="4237906138"/>
                     </a:ext>
                   </a:extLst>
                 </a:gridCol>
                 <a:gridCol w="439057">
                   <a:extLst>
                     <a:ext uri="{9D8B030D-6E8A-4147-A177-3AD203B41FA5}">
-                      <a16:colId xmlns="" xmlns:a16="http://schemas.microsoft.com/office/drawing/2014/main" val="3865218800"/>
+                      <a16:colId xmlns:a16="http://schemas.microsoft.com/office/drawing/2014/main" xmlns="" val="3865218800"/>
                     </a:ext>
                   </a:extLst>
                 </a:gridCol>
                 <a:gridCol w="439057">
                   <a:extLst>
                     <a:ext uri="{9D8B030D-6E8A-4147-A177-3AD203B41FA5}">
-                      <a16:colId xmlns="" xmlns:a16="http://schemas.microsoft.com/office/drawing/2014/main" val="2205689395"/>
+                      <a16:colId xmlns:a16="http://schemas.microsoft.com/office/drawing/2014/main" xmlns="" val="2205689395"/>
                     </a:ext>
                   </a:extLst>
                 </a:gridCol>
                 <a:gridCol w="439057">
                   <a:extLst>
                     <a:ext uri="{9D8B030D-6E8A-4147-A177-3AD203B41FA5}">
-                      <a16:colId xmlns="" xmlns:a16="http://schemas.microsoft.com/office/drawing/2014/main" val="3536600299"/>
+                      <a16:colId xmlns:a16="http://schemas.microsoft.com/office/drawing/2014/main" xmlns="" val="3536600299"/>
                     </a:ext>
                   </a:extLst>
                 </a:gridCol>
@@ -8469,7 +8648,7 @@
                 </a:tc>
                 <a:extLst>
                   <a:ext uri="{0D108BD9-81ED-4DB2-BD59-A6C34878D82A}">
-                    <a16:rowId xmlns="" xmlns:a16="http://schemas.microsoft.com/office/drawing/2014/main" val="654488680"/>
+                    <a16:rowId xmlns:a16="http://schemas.microsoft.com/office/drawing/2014/main" xmlns="" val="654488680"/>
                   </a:ext>
                 </a:extLst>
               </a:tr>
@@ -8712,7 +8891,7 @@
                 </a:tc>
                 <a:extLst>
                   <a:ext uri="{0D108BD9-81ED-4DB2-BD59-A6C34878D82A}">
-                    <a16:rowId xmlns="" xmlns:a16="http://schemas.microsoft.com/office/drawing/2014/main" val="652569694"/>
+                    <a16:rowId xmlns:a16="http://schemas.microsoft.com/office/drawing/2014/main" xmlns="" val="652569694"/>
                   </a:ext>
                 </a:extLst>
               </a:tr>
@@ -8955,7 +9134,7 @@
                 </a:tc>
                 <a:extLst>
                   <a:ext uri="{0D108BD9-81ED-4DB2-BD59-A6C34878D82A}">
-                    <a16:rowId xmlns="" xmlns:a16="http://schemas.microsoft.com/office/drawing/2014/main" val="200740461"/>
+                    <a16:rowId xmlns:a16="http://schemas.microsoft.com/office/drawing/2014/main" xmlns="" val="200740461"/>
                   </a:ext>
                 </a:extLst>
               </a:tr>
@@ -8968,7 +9147,7 @@
           <p:cNvPr id="5" name="TextBox 4">
             <a:extLst>
               <a:ext uri="{FF2B5EF4-FFF2-40B4-BE49-F238E27FC236}">
-                <a16:creationId xmlns="" xmlns:a16="http://schemas.microsoft.com/office/drawing/2014/main" id="{C8ED1C15-0942-089C-7805-CB510EC72FB1}"/>
+                <a16:creationId xmlns:a16="http://schemas.microsoft.com/office/drawing/2014/main" xmlns="" id="{C8ED1C15-0942-089C-7805-CB510EC72FB1}"/>
               </a:ext>
             </a:extLst>
           </p:cNvPr>
@@ -9004,7 +9183,7 @@
           <p:cNvPr id="6" name="TextBox 5">
             <a:extLst>
               <a:ext uri="{FF2B5EF4-FFF2-40B4-BE49-F238E27FC236}">
-                <a16:creationId xmlns="" xmlns:a16="http://schemas.microsoft.com/office/drawing/2014/main" id="{35E39535-416D-18D0-A4E0-B8FD0EF37FF9}"/>
+                <a16:creationId xmlns:a16="http://schemas.microsoft.com/office/drawing/2014/main" xmlns="" id="{35E39535-416D-18D0-A4E0-B8FD0EF37FF9}"/>
               </a:ext>
             </a:extLst>
           </p:cNvPr>
@@ -9056,7 +9235,7 @@
         <p:cNvPr id="1" name="">
           <a:extLst>
             <a:ext uri="{FF2B5EF4-FFF2-40B4-BE49-F238E27FC236}">
-              <a16:creationId xmlns="" xmlns:a16="http://schemas.microsoft.com/office/drawing/2014/main" id="{E22219F2-045D-7C64-9A87-54D2232BDD3E}"/>
+              <a16:creationId xmlns:a16="http://schemas.microsoft.com/office/drawing/2014/main" xmlns="" id="{E22219F2-045D-7C64-9A87-54D2232BDD3E}"/>
             </a:ext>
           </a:extLst>
         </p:cNvPr>
@@ -9076,7 +9255,7 @@
           <p:cNvPr id="2" name="Title 1">
             <a:extLst>
               <a:ext uri="{FF2B5EF4-FFF2-40B4-BE49-F238E27FC236}">
-                <a16:creationId xmlns="" xmlns:a16="http://schemas.microsoft.com/office/drawing/2014/main" id="{C7EA5E16-B19C-BA31-7BEC-009E02E41E13}"/>
+                <a16:creationId xmlns:a16="http://schemas.microsoft.com/office/drawing/2014/main" xmlns="" id="{C7EA5E16-B19C-BA31-7BEC-009E02E41E13}"/>
               </a:ext>
             </a:extLst>
           </p:cNvPr>
@@ -9104,7 +9283,7 @@
           <p:cNvPr id="3" name="Content Placeholder 2">
             <a:extLst>
               <a:ext uri="{FF2B5EF4-FFF2-40B4-BE49-F238E27FC236}">
-                <a16:creationId xmlns="" xmlns:a16="http://schemas.microsoft.com/office/drawing/2014/main" id="{2D34463B-65B5-66E6-8A30-437FFFA8DEFA}"/>
+                <a16:creationId xmlns:a16="http://schemas.microsoft.com/office/drawing/2014/main" xmlns="" id="{2D34463B-65B5-66E6-8A30-437FFFA8DEFA}"/>
               </a:ext>
             </a:extLst>
           </p:cNvPr>
@@ -9150,7 +9329,7 @@
           <p:cNvPr id="5" name="Picture 4">
             <a:extLst>
               <a:ext uri="{FF2B5EF4-FFF2-40B4-BE49-F238E27FC236}">
-                <a16:creationId xmlns="" xmlns:a16="http://schemas.microsoft.com/office/drawing/2014/main" id="{22635AC4-CE1D-B8AF-A040-2F87EF1759CD}"/>
+                <a16:creationId xmlns:a16="http://schemas.microsoft.com/office/drawing/2014/main" xmlns="" id="{22635AC4-CE1D-B8AF-A040-2F87EF1759CD}"/>
               </a:ext>
             </a:extLst>
           </p:cNvPr>
@@ -9216,7 +9395,7 @@
           <p:cNvPr id="2" name="Title 1">
             <a:extLst>
               <a:ext uri="{FF2B5EF4-FFF2-40B4-BE49-F238E27FC236}">
-                <a16:creationId xmlns="" xmlns:a16="http://schemas.microsoft.com/office/drawing/2014/main" id="{7091E349-E10B-155D-AA4C-5C644F1CA204}"/>
+                <a16:creationId xmlns:a16="http://schemas.microsoft.com/office/drawing/2014/main" xmlns="" id="{7091E349-E10B-155D-AA4C-5C644F1CA204}"/>
               </a:ext>
             </a:extLst>
           </p:cNvPr>
@@ -9259,7 +9438,7 @@
               <p:cNvPr id="5" name="TextBox 4">
                 <a:extLst>
                   <a:ext uri="{FF2B5EF4-FFF2-40B4-BE49-F238E27FC236}">
-                    <a16:creationId xmlns="" xmlns:a16="http://schemas.microsoft.com/office/drawing/2014/main" id="{9A332D99-C136-4CA9-0B03-FA3FA5195ED6}"/>
+                    <a16:creationId xmlns:a16="http://schemas.microsoft.com/office/drawing/2014/main" xmlns="" id="{9A332D99-C136-4CA9-0B03-FA3FA5195ED6}"/>
                   </a:ext>
                 </a:extLst>
               </p:cNvPr>
@@ -9633,7 +9812,7 @@
           <p:cNvPr id="9" name="TextBox 8">
             <a:extLst>
               <a:ext uri="{FF2B5EF4-FFF2-40B4-BE49-F238E27FC236}">
-                <a16:creationId xmlns="" xmlns:a16="http://schemas.microsoft.com/office/drawing/2014/main" id="{5C7A4183-CC79-97FF-3245-59A711D4BDF1}"/>
+                <a16:creationId xmlns:a16="http://schemas.microsoft.com/office/drawing/2014/main" xmlns="" id="{5C7A4183-CC79-97FF-3245-59A711D4BDF1}"/>
               </a:ext>
             </a:extLst>
           </p:cNvPr>
@@ -9700,7 +9879,7 @@
           <p:cNvPr id="2" name="Title 1">
             <a:extLst>
               <a:ext uri="{FF2B5EF4-FFF2-40B4-BE49-F238E27FC236}">
-                <a16:creationId xmlns="" xmlns:a16="http://schemas.microsoft.com/office/drawing/2014/main" id="{8B40FE1F-C1FB-195D-22B9-96044B5DA2CF}"/>
+                <a16:creationId xmlns:a16="http://schemas.microsoft.com/office/drawing/2014/main" xmlns="" id="{8B40FE1F-C1FB-195D-22B9-96044B5DA2CF}"/>
               </a:ext>
             </a:extLst>
           </p:cNvPr>
@@ -9729,7 +9908,7 @@
           <p:cNvPr id="3" name="Content Placeholder 2">
             <a:extLst>
               <a:ext uri="{FF2B5EF4-FFF2-40B4-BE49-F238E27FC236}">
-                <a16:creationId xmlns="" xmlns:a16="http://schemas.microsoft.com/office/drawing/2014/main" id="{EAC332DA-1674-3813-EFF7-0720AB3234B3}"/>
+                <a16:creationId xmlns:a16="http://schemas.microsoft.com/office/drawing/2014/main" xmlns="" id="{EAC332DA-1674-3813-EFF7-0720AB3234B3}"/>
               </a:ext>
             </a:extLst>
           </p:cNvPr>
@@ -9904,7 +10083,7 @@
         <p:cNvPr id="1" name="">
           <a:extLst>
             <a:ext uri="{FF2B5EF4-FFF2-40B4-BE49-F238E27FC236}">
-              <a16:creationId xmlns="" xmlns:a16="http://schemas.microsoft.com/office/drawing/2014/main" id="{2F8A4587-A984-EA93-857E-8D1DC320AFE6}"/>
+              <a16:creationId xmlns:a16="http://schemas.microsoft.com/office/drawing/2014/main" xmlns="" id="{2F8A4587-A984-EA93-857E-8D1DC320AFE6}"/>
             </a:ext>
           </a:extLst>
         </p:cNvPr>
@@ -9924,7 +10103,7 @@
           <p:cNvPr id="2" name="Title 1">
             <a:extLst>
               <a:ext uri="{FF2B5EF4-FFF2-40B4-BE49-F238E27FC236}">
-                <a16:creationId xmlns="" xmlns:a16="http://schemas.microsoft.com/office/drawing/2014/main" id="{0D07A575-E745-E7EC-954B-2D561DB0ADE2}"/>
+                <a16:creationId xmlns:a16="http://schemas.microsoft.com/office/drawing/2014/main" xmlns="" id="{0D07A575-E745-E7EC-954B-2D561DB0ADE2}"/>
               </a:ext>
             </a:extLst>
           </p:cNvPr>
@@ -9953,7 +10132,7 @@
           <p:cNvPr id="3" name="Content Placeholder 2">
             <a:extLst>
               <a:ext uri="{FF2B5EF4-FFF2-40B4-BE49-F238E27FC236}">
-                <a16:creationId xmlns="" xmlns:a16="http://schemas.microsoft.com/office/drawing/2014/main" id="{8FDE82B6-892B-61F8-DE72-D88190E83F1C}"/>
+                <a16:creationId xmlns:a16="http://schemas.microsoft.com/office/drawing/2014/main" xmlns="" id="{8FDE82B6-892B-61F8-DE72-D88190E83F1C}"/>
               </a:ext>
             </a:extLst>
           </p:cNvPr>
@@ -10075,7 +10254,7 @@
               <p:cNvPr id="2" name="Title 1">
                 <a:extLst>
                   <a:ext uri="{FF2B5EF4-FFF2-40B4-BE49-F238E27FC236}">
-                    <a16:creationId xmlns="" xmlns:a16="http://schemas.microsoft.com/office/drawing/2014/main" id="{7BB2B1C3-607B-4033-88D5-A1CF66C9D6F3}"/>
+                    <a16:creationId xmlns:a16="http://schemas.microsoft.com/office/drawing/2014/main" xmlns="" id="{7BB2B1C3-607B-4033-88D5-A1CF66C9D6F3}"/>
                   </a:ext>
                 </a:extLst>
               </p:cNvPr>
@@ -10170,7 +10349,7 @@
               <p:cNvPr id="3" name="Content Placeholder 2">
                 <a:extLst>
                   <a:ext uri="{FF2B5EF4-FFF2-40B4-BE49-F238E27FC236}">
-                    <a16:creationId xmlns="" xmlns:a16="http://schemas.microsoft.com/office/drawing/2014/main" id="{5D80C21A-F4FC-B1BE-7D36-8D93DC02776E}"/>
+                    <a16:creationId xmlns:a16="http://schemas.microsoft.com/office/drawing/2014/main" xmlns="" id="{5D80C21A-F4FC-B1BE-7D36-8D93DC02776E}"/>
                   </a:ext>
                 </a:extLst>
               </p:cNvPr>
@@ -10184,7 +10363,7 @@
             <p:spPr>
               <a:xfrm>
                 <a:off x="4887884" y="1825624"/>
-                <a:ext cx="7119058" cy="5032375"/>
+                <a:ext cx="7304116" cy="5032375"/>
               </a:xfrm>
             </p:spPr>
             <p:txBody>
@@ -10194,7 +10373,7 @@
               <a:lstStyle/>
               <a:p>
                 <a:r>
-                  <a:rPr lang="pt-BR" b="1" dirty="0"/>
+                  <a:rPr lang="pt-BR" b="1" dirty="0" smtClean="0"/>
                   <a:t>Exploração:</a:t>
                 </a:r>
                 <a:r>
@@ -10341,7 +10520,21 @@
                 </a:r>
                 <a:r>
                   <a:rPr lang="pt-BR" dirty="0"/>
-                  <a:t> de Q para </a:t>
+                  <a:t> de </a:t>
+                </a:r>
+                <a14:m>
+                  <m:oMath xmlns:m="http://schemas.openxmlformats.org/officeDocument/2006/math">
+                    <m:r>
+                      <a:rPr lang="pt-BR" b="0" i="1" smtClean="0">
+                        <a:latin typeface="Cambria Math" panose="02040503050406030204" pitchFamily="18" charset="0"/>
+                      </a:rPr>
+                      <m:t>𝑄</m:t>
+                    </m:r>
+                  </m:oMath>
+                </a14:m>
+                <a:r>
+                  <a:rPr lang="pt-BR" dirty="0" smtClean="0"/>
+                  <a:t> para o estado atual </a:t>
                 </a:r>
                 <a14:m>
                   <m:oMath xmlns:m="http://schemas.openxmlformats.org/officeDocument/2006/math">
@@ -10368,7 +10561,7 @@
               <p:cNvPr id="3" name="Content Placeholder 2">
                 <a:extLst>
                   <a:ext uri="{FF2B5EF4-FFF2-40B4-BE49-F238E27FC236}">
-                    <a16:creationId xmlns="" xmlns:a16="http://schemas.microsoft.com/office/drawing/2014/main" xmlns:a14="http://schemas.microsoft.com/office/drawing/2010/main" id="{5D80C21A-F4FC-B1BE-7D36-8D93DC02776E}"/>
+                    <a16:creationId xmlns:a16="http://schemas.microsoft.com/office/drawing/2014/main" xmlns="" xmlns:a14="http://schemas.microsoft.com/office/drawing/2010/main" id="{5D80C21A-F4FC-B1BE-7D36-8D93DC02776E}"/>
                   </a:ext>
                 </a:extLst>
               </p:cNvPr>
@@ -10382,12 +10575,12 @@
             <p:spPr>
               <a:xfrm>
                 <a:off x="4887884" y="1825624"/>
-                <a:ext cx="7119058" cy="5032375"/>
+                <a:ext cx="7304116" cy="5032375"/>
               </a:xfrm>
               <a:blipFill rotWithShape="0">
                 <a:blip r:embed="rId4"/>
                 <a:stretch>
-                  <a:fillRect l="-1541" t="-1937" r="-2654"/>
+                  <a:fillRect l="-1503" t="-1937" r="-83"/>
                 </a:stretch>
               </a:blipFill>
             </p:spPr>
@@ -10484,7 +10677,7 @@
               <p:cNvPr id="2" name="Title 1">
                 <a:extLst>
                   <a:ext uri="{FF2B5EF4-FFF2-40B4-BE49-F238E27FC236}">
-                    <a16:creationId xmlns="" xmlns:a16="http://schemas.microsoft.com/office/drawing/2014/main" id="{7BB2B1C3-607B-4033-88D5-A1CF66C9D6F3}"/>
+                    <a16:creationId xmlns:a16="http://schemas.microsoft.com/office/drawing/2014/main" xmlns="" id="{7BB2B1C3-607B-4033-88D5-A1CF66C9D6F3}"/>
                   </a:ext>
                 </a:extLst>
               </p:cNvPr>
@@ -10579,7 +10772,7 @@
               <p:cNvPr id="3" name="Content Placeholder 2">
                 <a:extLst>
                   <a:ext uri="{FF2B5EF4-FFF2-40B4-BE49-F238E27FC236}">
-                    <a16:creationId xmlns="" xmlns:a16="http://schemas.microsoft.com/office/drawing/2014/main" id="{5D80C21A-F4FC-B1BE-7D36-8D93DC02776E}"/>
+                    <a16:creationId xmlns:a16="http://schemas.microsoft.com/office/drawing/2014/main" xmlns="" id="{5D80C21A-F4FC-B1BE-7D36-8D93DC02776E}"/>
                   </a:ext>
                 </a:extLst>
               </p:cNvPr>
@@ -10592,13 +10785,13 @@
             </p:nvSpPr>
             <p:spPr>
               <a:xfrm>
-                <a:off x="4405745" y="1825624"/>
-                <a:ext cx="7601197" cy="5032375"/>
+                <a:off x="5370022" y="1825624"/>
+                <a:ext cx="6700058" cy="5032375"/>
               </a:xfrm>
             </p:spPr>
             <p:txBody>
               <a:bodyPr>
-                <a:normAutofit lnSpcReduction="10000"/>
+                <a:normAutofit/>
               </a:bodyPr>
               <a:lstStyle/>
               <a:p>
@@ -10613,8 +10806,8 @@
               </a:p>
               <a:p>
                 <a:r>
-                  <a:rPr lang="pt-BR" dirty="0"/>
-                  <a:t>O </a:t>
+                  <a:rPr lang="pt-BR" dirty="0" smtClean="0"/>
+                  <a:t>Assim, o </a:t>
                 </a:r>
                 <a14:m>
                   <m:oMath xmlns:m="http://schemas.openxmlformats.org/officeDocument/2006/math">
@@ -10637,27 +10830,36 @@
                 </a:r>
               </a:p>
               <a:p>
-                <a:pPr lvl="1"/>
+                <a:pPr lvl="1">
+                  <a:buFont typeface="Wingdings" panose="05000000000000000000" pitchFamily="2" charset="2"/>
+                  <a:buChar char="§"/>
+                </a:pPr>
                 <a:r>
                   <a:rPr lang="pt-BR" dirty="0" smtClean="0"/>
                   <a:t>começar </a:t>
                 </a:r>
                 <a:r>
                   <a:rPr lang="pt-BR" dirty="0"/>
-                  <a:t>em 1.0 (100% de exploração</a:t>
+                  <a:t>em 1.0 (100% de exploração), </a:t>
+                </a:r>
+                <a:r>
+                  <a:rPr lang="pt-BR" dirty="0" smtClean="0"/>
+                  <a:t>fazendo com que o agente tome </a:t>
                 </a:r>
                 <a:r>
                   <a:rPr lang="pt-BR" dirty="0"/>
-                  <a:t>), tomando ações aleatórias para descobrir o </a:t>
+                  <a:t>ações aleatórias para descobrir o </a:t>
                 </a:r>
                 <a:r>
                   <a:rPr lang="pt-BR" dirty="0" smtClean="0"/>
                   <a:t>ambiente</a:t>
                 </a:r>
-                <a:endParaRPr lang="pt-BR" dirty="0" smtClean="0"/>
               </a:p>
               <a:p>
-                <a:pPr lvl="1"/>
+                <a:pPr lvl="1">
+                  <a:buFont typeface="Wingdings" panose="05000000000000000000" pitchFamily="2" charset="2"/>
+                  <a:buChar char="§"/>
+                </a:pPr>
                 <a:r>
                   <a:rPr lang="pt-BR" dirty="0" smtClean="0"/>
                   <a:t>e </a:t>
@@ -10681,18 +10883,9 @@
               </a:p>
               <a:p>
                 <a:r>
-                  <a:rPr lang="pt-BR" dirty="0"/>
-                  <a:t>Com -</a:t>
-                </a:r>
-                <a:r>
-                  <a:rPr lang="pt-BR" dirty="0" err="1"/>
-                  <a:t>greedy</a:t>
-                </a:r>
-                <a:r>
-                  <a:rPr lang="pt-BR" dirty="0"/>
-                  <a:t>, inicia-se com alto (fazendo ações aleatórias para descobrir o ambiente) e diminui-se gradualmente. Isso permite aprender o Q corretamente antes de “explorar demais” o que aparenta já ser ótimo</a:t>
-                </a:r>
-                <a:endParaRPr lang="pt-BR" dirty="0"/>
+                  <a:rPr lang="pt-BR" dirty="0" smtClean="0"/>
+                  <a:t>Isso permite que o agente tenha a chance de aprender uma boa política.</a:t>
+                </a:r>
               </a:p>
             </p:txBody>
           </p:sp>
@@ -10703,7 +10896,7 @@
               <p:cNvPr id="3" name="Content Placeholder 2">
                 <a:extLst>
                   <a:ext uri="{FF2B5EF4-FFF2-40B4-BE49-F238E27FC236}">
-                    <a16:creationId xmlns="" xmlns:a16="http://schemas.microsoft.com/office/drawing/2014/main" xmlns:a14="http://schemas.microsoft.com/office/drawing/2010/main" id="{5D80C21A-F4FC-B1BE-7D36-8D93DC02776E}"/>
+                    <a16:creationId xmlns:a16="http://schemas.microsoft.com/office/drawing/2014/main" xmlns="" xmlns:a14="http://schemas.microsoft.com/office/drawing/2010/main" id="{5D80C21A-F4FC-B1BE-7D36-8D93DC02776E}"/>
                   </a:ext>
                 </a:extLst>
               </p:cNvPr>
@@ -10716,13 +10909,13 @@
             </p:nvSpPr>
             <p:spPr>
               <a:xfrm>
-                <a:off x="4405745" y="1825624"/>
-                <a:ext cx="7601197" cy="5032375"/>
+                <a:off x="5370022" y="1825624"/>
+                <a:ext cx="6700058" cy="5032375"/>
               </a:xfrm>
               <a:blipFill rotWithShape="0">
                 <a:blip r:embed="rId4"/>
                 <a:stretch>
-                  <a:fillRect l="-1443" t="-2663"/>
+                  <a:fillRect l="-1638" t="-1937" r="-182"/>
                 </a:stretch>
               </a:blipFill>
             </p:spPr>
@@ -10764,8 +10957,8 @@
         </p:blipFill>
         <p:spPr bwMode="auto">
           <a:xfrm>
-            <a:off x="448887" y="2972739"/>
-            <a:ext cx="3357880" cy="2481911"/>
+            <a:off x="581889" y="2390849"/>
+            <a:ext cx="4305993" cy="3182690"/>
           </a:xfrm>
           <a:prstGeom prst="rect">
             <a:avLst/>
@@ -10817,7 +11010,7 @@
           <p:cNvPr id="3" name="Content Placeholder 2">
             <a:extLst>
               <a:ext uri="{FF2B5EF4-FFF2-40B4-BE49-F238E27FC236}">
-                <a16:creationId xmlns="" xmlns:a16="http://schemas.microsoft.com/office/drawing/2014/main" id="{59B6A74E-8855-B416-1D2B-EC3735DC0079}"/>
+                <a16:creationId xmlns:a16="http://schemas.microsoft.com/office/drawing/2014/main" xmlns="" id="{59B6A74E-8855-B416-1D2B-EC3735DC0079}"/>
               </a:ext>
             </a:extLst>
           </p:cNvPr>
@@ -10893,7 +11086,7 @@
           <p:cNvPr id="1026" name="Picture 2" descr="Reinforcement Learning">
             <a:extLst>
               <a:ext uri="{FF2B5EF4-FFF2-40B4-BE49-F238E27FC236}">
-                <a16:creationId xmlns="" xmlns:a16="http://schemas.microsoft.com/office/drawing/2014/main" id="{5526EDB3-366A-5FFB-4A2D-BC3494C1E889}"/>
+                <a16:creationId xmlns:a16="http://schemas.microsoft.com/office/drawing/2014/main" xmlns="" id="{5526EDB3-366A-5FFB-4A2D-BC3494C1E889}"/>
               </a:ext>
             </a:extLst>
           </p:cNvPr>
@@ -10970,7 +11163,7 @@
           <p:cNvPr id="3" name="Content Placeholder 2">
             <a:extLst>
               <a:ext uri="{FF2B5EF4-FFF2-40B4-BE49-F238E27FC236}">
-                <a16:creationId xmlns="" xmlns:a16="http://schemas.microsoft.com/office/drawing/2014/main" id="{407A6B7C-8AE2-0626-7031-C9A0D36E6CE3}"/>
+                <a16:creationId xmlns:a16="http://schemas.microsoft.com/office/drawing/2014/main" xmlns="" id="{407A6B7C-8AE2-0626-7031-C9A0D36E6CE3}"/>
               </a:ext>
             </a:extLst>
           </p:cNvPr>
@@ -11024,7 +11217,7 @@
           <p:cNvPr id="3074" name="Picture 2" descr="Reinforcement Learning In Real Life. Simple Explanation With Funny Cats">
             <a:extLst>
               <a:ext uri="{FF2B5EF4-FFF2-40B4-BE49-F238E27FC236}">
-                <a16:creationId xmlns="" xmlns:a16="http://schemas.microsoft.com/office/drawing/2014/main" id="{BF6473FC-0F5F-F021-4950-C2C526AE66A2}"/>
+                <a16:creationId xmlns:a16="http://schemas.microsoft.com/office/drawing/2014/main" xmlns="" id="{BF6473FC-0F5F-F021-4950-C2C526AE66A2}"/>
               </a:ext>
             </a:extLst>
           </p:cNvPr>
@@ -11101,7 +11294,7 @@
           <p:cNvPr id="2" name="Title 1">
             <a:extLst>
               <a:ext uri="{FF2B5EF4-FFF2-40B4-BE49-F238E27FC236}">
-                <a16:creationId xmlns="" xmlns:a16="http://schemas.microsoft.com/office/drawing/2014/main" id="{93D78643-03C9-A92E-0919-E944BBC48702}"/>
+                <a16:creationId xmlns:a16="http://schemas.microsoft.com/office/drawing/2014/main" xmlns="" id="{93D78643-03C9-A92E-0919-E944BBC48702}"/>
               </a:ext>
             </a:extLst>
           </p:cNvPr>
@@ -11148,7 +11341,7 @@
               <p:cNvPr id="3" name="Content Placeholder 2">
                 <a:extLst>
                   <a:ext uri="{FF2B5EF4-FFF2-40B4-BE49-F238E27FC236}">
-                    <a16:creationId xmlns="" xmlns:a16="http://schemas.microsoft.com/office/drawing/2014/main" id="{9E56A20D-5587-73F0-6A77-76736D8C972A}"/>
+                    <a16:creationId xmlns:a16="http://schemas.microsoft.com/office/drawing/2014/main" xmlns="" id="{9E56A20D-5587-73F0-6A77-76736D8C972A}"/>
                   </a:ext>
                 </a:extLst>
               </p:cNvPr>
@@ -11167,7 +11360,7 @@
             </p:spPr>
             <p:txBody>
               <a:bodyPr>
-                <a:normAutofit fontScale="92500" lnSpcReduction="10000"/>
+                <a:normAutofit/>
               </a:bodyPr>
               <a:lstStyle/>
               <a:p>
@@ -11585,7 +11778,15 @@
                 </a:r>
                 <a:r>
                   <a:rPr lang="pt-BR" dirty="0"/>
-                  <a:t>valor atual na tabela para o estado e ação.</a:t>
+                  <a:t>valor atual na tabela para o estado e </a:t>
+                </a:r>
+                <a:r>
+                  <a:rPr lang="pt-BR" dirty="0" smtClean="0"/>
+                  <a:t>a ação</a:t>
+                </a:r>
+                <a:r>
+                  <a:rPr lang="pt-BR" dirty="0"/>
+                  <a:t>.</a:t>
                 </a:r>
                 <a:endParaRPr lang="en-US" dirty="0"/>
               </a:p>
@@ -11615,7 +11816,18 @@
                 </a:r>
                 <a:r>
                   <a:rPr lang="pt-BR" dirty="0" smtClean="0"/>
-                  <a:t>. Define </a:t>
+                  <a:t>. </a:t>
+                </a:r>
+                <a:endParaRPr lang="pt-BR" dirty="0" smtClean="0"/>
+              </a:p>
+              <a:p>
+                <a:pPr lvl="1">
+                  <a:buFont typeface="Wingdings" panose="05000000000000000000" pitchFamily="2" charset="2"/>
+                  <a:buChar char="§"/>
+                </a:pPr>
+                <a:r>
+                  <a:rPr lang="pt-BR" dirty="0" smtClean="0"/>
+                  <a:t>Define </a:t>
                 </a:r>
                 <a:r>
                   <a:rPr lang="pt-BR" dirty="0"/>
@@ -11623,7 +11835,44 @@
                 </a:r>
                 <a:r>
                   <a:rPr lang="pt-BR" dirty="0" smtClean="0"/>
-                  <a:t>antiga. </a:t>
+                  <a:t>antiga</a:t>
+                </a:r>
+                <a:r>
+                  <a:rPr lang="pt-BR" dirty="0" smtClean="0"/>
+                  <a:t>.</a:t>
+                </a:r>
+              </a:p>
+              <a:p>
+                <a:pPr lvl="1">
+                  <a:buFont typeface="Wingdings" panose="05000000000000000000" pitchFamily="2" charset="2"/>
+                  <a:buChar char="§"/>
+                </a:pPr>
+                <a:r>
+                  <a:rPr lang="pt-BR" dirty="0" smtClean="0"/>
+                  <a:t>Valor pequeno </a:t>
+                </a:r>
+                <a:r>
+                  <a:rPr lang="pt-BR" dirty="0"/>
+                  <a:t>→ aprendizado lento </a:t>
+                </a:r>
+                <a:endParaRPr lang="pt-BR" dirty="0" smtClean="0"/>
+              </a:p>
+              <a:p>
+                <a:pPr lvl="1">
+                  <a:buFont typeface="Wingdings" panose="05000000000000000000" pitchFamily="2" charset="2"/>
+                  <a:buChar char="§"/>
+                </a:pPr>
+                <a:r>
+                  <a:rPr lang="pt-BR" dirty="0" smtClean="0"/>
+                  <a:t>Valor grande </a:t>
+                </a:r>
+                <a:r>
+                  <a:rPr lang="pt-BR" dirty="0"/>
+                  <a:t>→ atualização </a:t>
+                </a:r>
+                <a:r>
+                  <a:rPr lang="pt-BR" dirty="0" smtClean="0"/>
+                  <a:t>agressiva</a:t>
                 </a:r>
                 <a:endParaRPr lang="pt-BR" dirty="0"/>
               </a:p>
@@ -11649,7 +11898,22 @@
                 </a:r>
                 <a:r>
                   <a:rPr lang="pt-BR" dirty="0"/>
-                  <a:t>. O que ele acabou de ganhar por tomar a ação </a:t>
+                  <a:t>. </a:t>
+                </a:r>
+                <a:endParaRPr lang="pt-BR" dirty="0" smtClean="0"/>
+              </a:p>
+              <a:p>
+                <a:pPr lvl="1">
+                  <a:buFont typeface="Wingdings" panose="05000000000000000000" pitchFamily="2" charset="2"/>
+                  <a:buChar char="§"/>
+                </a:pPr>
+                <a:r>
+                  <a:rPr lang="pt-BR" dirty="0" smtClean="0"/>
+                  <a:t>O </a:t>
+                </a:r>
+                <a:r>
+                  <a:rPr lang="pt-BR" dirty="0"/>
+                  <a:t>que ele acabou de ganhar por tomar a ação </a:t>
                 </a:r>
                 <a14:m>
                   <m:oMath xmlns:m="http://schemas.openxmlformats.org/officeDocument/2006/math">
@@ -11663,9 +11927,525 @@
                   </m:oMath>
                 </a14:m>
                 <a:r>
+                  <a:rPr lang="pt-BR" dirty="0" smtClean="0"/>
+                  <a:t>.</a:t>
+                </a:r>
+                <a:endParaRPr lang="pt-BR" dirty="0"/>
+              </a:p>
+            </p:txBody>
+          </p:sp>
+        </mc:Choice>
+        <mc:Fallback>
+          <p:sp>
+            <p:nvSpPr>
+              <p:cNvPr id="3" name="Content Placeholder 2">
+                <a:extLst>
+                  <a:ext uri="{FF2B5EF4-FFF2-40B4-BE49-F238E27FC236}">
+                    <a16:creationId xmlns:a16="http://schemas.microsoft.com/office/drawing/2014/main" xmlns="" xmlns:a14="http://schemas.microsoft.com/office/drawing/2010/main" id="{9E56A20D-5587-73F0-6A77-76736D8C972A}"/>
+                  </a:ext>
+                </a:extLst>
+              </p:cNvPr>
+              <p:cNvSpPr>
+                <a:spLocks noGrp="1" noRot="1" noChangeAspect="1" noMove="1" noResize="1" noEditPoints="1" noAdjustHandles="1" noChangeArrowheads="1" noChangeShapeType="1" noTextEdit="1"/>
+              </p:cNvSpPr>
+              <p:nvPr>
+                <p:ph idx="1"/>
+              </p:nvPr>
+            </p:nvSpPr>
+            <p:spPr>
+              <a:xfrm>
+                <a:off x="838199" y="1825625"/>
+                <a:ext cx="11353801" cy="5032375"/>
+              </a:xfrm>
+              <a:blipFill rotWithShape="0">
+                <a:blip r:embed="rId3"/>
+                <a:stretch>
+                  <a:fillRect l="-913" t="-1937" r="-644"/>
+                </a:stretch>
+              </a:blipFill>
+            </p:spPr>
+            <p:txBody>
+              <a:bodyPr/>
+              <a:lstStyle/>
+              <a:p>
+                <a:r>
+                  <a:rPr lang="pt-BR">
+                    <a:noFill/>
+                  </a:rPr>
+                  <a:t> </a:t>
+                </a:r>
+              </a:p>
+            </p:txBody>
+          </p:sp>
+        </mc:Fallback>
+      </mc:AlternateContent>
+    </p:spTree>
+    <p:extLst>
+      <p:ext uri="{BB962C8B-B14F-4D97-AF65-F5344CB8AC3E}">
+        <p14:creationId xmlns:p14="http://schemas.microsoft.com/office/powerpoint/2010/main" val="750194977"/>
+      </p:ext>
+    </p:extLst>
+  </p:cSld>
+  <p:clrMapOvr>
+    <a:masterClrMapping/>
+  </p:clrMapOvr>
+</p:sld>
+</file>
+
+<file path=ppt/slides/slide22.xml><?xml version="1.0" encoding="utf-8"?>
+<p:sld xmlns:a="http://schemas.openxmlformats.org/drawingml/2006/main" xmlns:r="http://schemas.openxmlformats.org/officeDocument/2006/relationships" xmlns:p="http://schemas.openxmlformats.org/presentationml/2006/main">
+  <p:cSld>
+    <p:spTree>
+      <p:nvGrpSpPr>
+        <p:cNvPr id="1" name=""/>
+        <p:cNvGrpSpPr/>
+        <p:nvPr/>
+      </p:nvGrpSpPr>
+      <p:grpSpPr>
+        <a:xfrm>
+          <a:off x="0" y="0"/>
+          <a:ext cx="0" cy="0"/>
+          <a:chOff x="0" y="0"/>
+          <a:chExt cx="0" cy="0"/>
+        </a:xfrm>
+      </p:grpSpPr>
+      <p:sp>
+        <p:nvSpPr>
+          <p:cNvPr id="2" name="Title 1">
+            <a:extLst>
+              <a:ext uri="{FF2B5EF4-FFF2-40B4-BE49-F238E27FC236}">
+                <a16:creationId xmlns:a16="http://schemas.microsoft.com/office/drawing/2014/main" xmlns="" id="{93D78643-03C9-A92E-0919-E944BBC48702}"/>
+              </a:ext>
+            </a:extLst>
+          </p:cNvPr>
+          <p:cNvSpPr>
+            <a:spLocks noGrp="1"/>
+          </p:cNvSpPr>
+          <p:nvPr>
+            <p:ph type="title"/>
+          </p:nvPr>
+        </p:nvSpPr>
+        <p:spPr>
+          <a:xfrm>
+            <a:off x="838200" y="365125"/>
+            <a:ext cx="10755086" cy="1325563"/>
+          </a:xfrm>
+        </p:spPr>
+        <p:txBody>
+          <a:bodyPr/>
+          <a:lstStyle/>
+          <a:p>
+            <a:r>
+              <a:rPr lang="pt-BR" dirty="0"/>
+              <a:t>Atualização da tabela-Q: </a:t>
+            </a:r>
+            <a:r>
+              <a:rPr lang="en-US" dirty="0"/>
+              <a:t>a </a:t>
+            </a:r>
+            <a:r>
+              <a:rPr lang="en-US" dirty="0" err="1"/>
+              <a:t>equação</a:t>
+            </a:r>
+            <a:r>
+              <a:rPr lang="en-US" dirty="0"/>
+              <a:t> de Bellman</a:t>
+            </a:r>
+          </a:p>
+        </p:txBody>
+      </p:sp>
+      <mc:AlternateContent xmlns:mc="http://schemas.openxmlformats.org/markup-compatibility/2006">
+        <mc:Choice xmlns:a14="http://schemas.microsoft.com/office/drawing/2010/main" Requires="a14">
+          <p:sp>
+            <p:nvSpPr>
+              <p:cNvPr id="3" name="Content Placeholder 2">
+                <a:extLst>
+                  <a:ext uri="{FF2B5EF4-FFF2-40B4-BE49-F238E27FC236}">
+                    <a16:creationId xmlns:a16="http://schemas.microsoft.com/office/drawing/2014/main" xmlns="" id="{9E56A20D-5587-73F0-6A77-76736D8C972A}"/>
+                  </a:ext>
+                </a:extLst>
+              </p:cNvPr>
+              <p:cNvSpPr>
+                <a:spLocks noGrp="1"/>
+              </p:cNvSpPr>
+              <p:nvPr>
+                <p:ph idx="1"/>
+              </p:nvPr>
+            </p:nvSpPr>
+            <p:spPr>
+              <a:xfrm>
+                <a:off x="838199" y="1825625"/>
+                <a:ext cx="11353801" cy="5032375"/>
+              </a:xfrm>
+            </p:spPr>
+            <p:txBody>
+              <a:bodyPr>
+                <a:normAutofit/>
+              </a:bodyPr>
+              <a:lstStyle/>
+              <a:p>
+                <a:r>
+                  <a:rPr lang="pt-BR" dirty="0" smtClean="0"/>
+                  <a:t>A tabela-Q é atualizada usando-se a equação derivada por Richard </a:t>
+                </a:r>
+                <a:r>
+                  <a:rPr lang="pt-BR" dirty="0" err="1"/>
+                  <a:t>Bellman</a:t>
+                </a:r>
+                <a:r>
                   <a:rPr lang="pt-BR" dirty="0"/>
-                  <a:t>.</a:t>
-                </a:r>
+                  <a:t>:</a:t>
+                </a:r>
+              </a:p>
+              <a:p>
+                <a:pPr marL="0" indent="0">
+                  <a:buNone/>
+                </a:pPr>
+                <a:endParaRPr lang="pt-BR" sz="100" dirty="0"/>
+              </a:p>
+              <a:p>
+                <a:pPr marL="0" indent="0" algn="ctr">
+                  <a:buNone/>
+                </a:pPr>
+                <a14:m>
+                  <m:oMathPara xmlns:m="http://schemas.openxmlformats.org/officeDocument/2006/math">
+                    <m:oMathParaPr>
+                      <m:jc m:val="centerGroup"/>
+                    </m:oMathParaPr>
+                    <m:oMath xmlns:m="http://schemas.openxmlformats.org/officeDocument/2006/math">
+                      <m:r>
+                        <a:rPr lang="pt-BR" b="0" i="1" smtClean="0">
+                          <a:latin typeface="Cambria Math" panose="02040503050406030204" pitchFamily="18" charset="0"/>
+                        </a:rPr>
+                        <m:t>𝑄</m:t>
+                      </m:r>
+                      <m:d>
+                        <m:dPr>
+                          <m:ctrlPr>
+                            <a:rPr lang="pt-BR" b="0" i="1" smtClean="0">
+                              <a:latin typeface="Cambria Math" panose="02040503050406030204" pitchFamily="18" charset="0"/>
+                            </a:rPr>
+                          </m:ctrlPr>
+                        </m:dPr>
+                        <m:e>
+                          <m:r>
+                            <a:rPr lang="pt-BR" b="0" i="1" smtClean="0">
+                              <a:latin typeface="Cambria Math" panose="02040503050406030204" pitchFamily="18" charset="0"/>
+                            </a:rPr>
+                            <m:t>𝑠</m:t>
+                          </m:r>
+                          <m:r>
+                            <a:rPr lang="pt-BR" b="0" i="1" smtClean="0">
+                              <a:latin typeface="Cambria Math" panose="02040503050406030204" pitchFamily="18" charset="0"/>
+                            </a:rPr>
+                            <m:t>,</m:t>
+                          </m:r>
+                          <m:r>
+                            <a:rPr lang="pt-BR" b="0" i="1" smtClean="0">
+                              <a:latin typeface="Cambria Math" panose="02040503050406030204" pitchFamily="18" charset="0"/>
+                            </a:rPr>
+                            <m:t>𝑎</m:t>
+                          </m:r>
+                        </m:e>
+                      </m:d>
+                      <m:r>
+                        <a:rPr lang="pt-BR" b="0" i="1" smtClean="0">
+                          <a:latin typeface="Cambria Math" panose="02040503050406030204" pitchFamily="18" charset="0"/>
+                          <a:ea typeface="Cambria Math" panose="02040503050406030204" pitchFamily="18" charset="0"/>
+                        </a:rPr>
+                        <m:t>←</m:t>
+                      </m:r>
+                      <m:r>
+                        <a:rPr lang="pt-BR" b="0" i="1" smtClean="0">
+                          <a:latin typeface="Cambria Math" panose="02040503050406030204" pitchFamily="18" charset="0"/>
+                          <a:ea typeface="Cambria Math" panose="02040503050406030204" pitchFamily="18" charset="0"/>
+                        </a:rPr>
+                        <m:t>𝑄</m:t>
+                      </m:r>
+                      <m:d>
+                        <m:dPr>
+                          <m:ctrlPr>
+                            <a:rPr lang="pt-BR" b="0" i="1" smtClean="0">
+                              <a:latin typeface="Cambria Math" panose="02040503050406030204" pitchFamily="18" charset="0"/>
+                              <a:ea typeface="Cambria Math" panose="02040503050406030204" pitchFamily="18" charset="0"/>
+                            </a:rPr>
+                          </m:ctrlPr>
+                        </m:dPr>
+                        <m:e>
+                          <m:r>
+                            <a:rPr lang="pt-BR" b="0" i="1" smtClean="0">
+                              <a:latin typeface="Cambria Math" panose="02040503050406030204" pitchFamily="18" charset="0"/>
+                              <a:ea typeface="Cambria Math" panose="02040503050406030204" pitchFamily="18" charset="0"/>
+                            </a:rPr>
+                            <m:t>𝑠</m:t>
+                          </m:r>
+                          <m:r>
+                            <a:rPr lang="pt-BR" b="0" i="1" smtClean="0">
+                              <a:latin typeface="Cambria Math" panose="02040503050406030204" pitchFamily="18" charset="0"/>
+                              <a:ea typeface="Cambria Math" panose="02040503050406030204" pitchFamily="18" charset="0"/>
+                            </a:rPr>
+                            <m:t>,</m:t>
+                          </m:r>
+                          <m:r>
+                            <a:rPr lang="pt-BR" b="0" i="1" smtClean="0">
+                              <a:latin typeface="Cambria Math" panose="02040503050406030204" pitchFamily="18" charset="0"/>
+                              <a:ea typeface="Cambria Math" panose="02040503050406030204" pitchFamily="18" charset="0"/>
+                            </a:rPr>
+                            <m:t>𝑎</m:t>
+                          </m:r>
+                        </m:e>
+                      </m:d>
+                      <m:r>
+                        <a:rPr lang="pt-BR" b="0" i="1" smtClean="0">
+                          <a:latin typeface="Cambria Math" panose="02040503050406030204" pitchFamily="18" charset="0"/>
+                          <a:ea typeface="Cambria Math" panose="02040503050406030204" pitchFamily="18" charset="0"/>
+                        </a:rPr>
+                        <m:t>+</m:t>
+                      </m:r>
+                      <m:r>
+                        <a:rPr lang="pt-BR" b="0" i="1" smtClean="0">
+                          <a:latin typeface="Cambria Math" panose="02040503050406030204" pitchFamily="18" charset="0"/>
+                          <a:ea typeface="Cambria Math" panose="02040503050406030204" pitchFamily="18" charset="0"/>
+                        </a:rPr>
+                        <m:t>𝛼</m:t>
+                      </m:r>
+                      <m:d>
+                        <m:dPr>
+                          <m:begChr m:val="["/>
+                          <m:endChr m:val="]"/>
+                          <m:ctrlPr>
+                            <a:rPr lang="pt-BR" b="0" i="1" smtClean="0">
+                              <a:latin typeface="Cambria Math" panose="02040503050406030204" pitchFamily="18" charset="0"/>
+                              <a:ea typeface="Cambria Math" panose="02040503050406030204" pitchFamily="18" charset="0"/>
+                            </a:rPr>
+                          </m:ctrlPr>
+                        </m:dPr>
+                        <m:e>
+                          <m:r>
+                            <a:rPr lang="pt-BR" b="0" i="1" smtClean="0">
+                              <a:latin typeface="Cambria Math" panose="02040503050406030204" pitchFamily="18" charset="0"/>
+                              <a:ea typeface="Cambria Math" panose="02040503050406030204" pitchFamily="18" charset="0"/>
+                            </a:rPr>
+                            <m:t>𝑟</m:t>
+                          </m:r>
+                          <m:r>
+                            <a:rPr lang="pt-BR" b="0" i="1" smtClean="0">
+                              <a:latin typeface="Cambria Math" panose="02040503050406030204" pitchFamily="18" charset="0"/>
+                              <a:ea typeface="Cambria Math" panose="02040503050406030204" pitchFamily="18" charset="0"/>
+                            </a:rPr>
+                            <m:t>+</m:t>
+                          </m:r>
+                          <m:func>
+                            <m:funcPr>
+                              <m:ctrlPr>
+                                <a:rPr lang="pt-BR" i="1">
+                                  <a:latin typeface="Cambria Math" panose="02040503050406030204" pitchFamily="18" charset="0"/>
+                                  <a:ea typeface="Cambria Math" panose="02040503050406030204" pitchFamily="18" charset="0"/>
+                                </a:rPr>
+                              </m:ctrlPr>
+                            </m:funcPr>
+                            <m:fName>
+                              <m:limLow>
+                                <m:limLowPr>
+                                  <m:ctrlPr>
+                                    <a:rPr lang="pt-BR" i="1">
+                                      <a:latin typeface="Cambria Math" panose="02040503050406030204" pitchFamily="18" charset="0"/>
+                                      <a:ea typeface="Cambria Math" panose="02040503050406030204" pitchFamily="18" charset="0"/>
+                                    </a:rPr>
+                                  </m:ctrlPr>
+                                </m:limLowPr>
+                                <m:e>
+                                  <m:r>
+                                    <m:rPr>
+                                      <m:sty m:val="p"/>
+                                    </m:rPr>
+                                    <a:rPr lang="el-GR" i="1" smtClean="0">
+                                      <a:latin typeface="Cambria Math" panose="02040503050406030204" pitchFamily="18" charset="0"/>
+                                      <a:ea typeface="Cambria Math" panose="02040503050406030204" pitchFamily="18" charset="0"/>
+                                    </a:rPr>
+                                    <m:t>γ</m:t>
+                                  </m:r>
+                                  <m:r>
+                                    <m:rPr>
+                                      <m:sty m:val="p"/>
+                                    </m:rPr>
+                                    <a:rPr lang="pt-BR">
+                                      <a:latin typeface="Cambria Math" panose="02040503050406030204" pitchFamily="18" charset="0"/>
+                                      <a:ea typeface="Cambria Math" panose="02040503050406030204" pitchFamily="18" charset="0"/>
+                                    </a:rPr>
+                                    <m:t>max</m:t>
+                                  </m:r>
+                                </m:e>
+                                <m:lim>
+                                  <m:sSup>
+                                    <m:sSupPr>
+                                      <m:ctrlPr>
+                                        <a:rPr lang="pt-BR" i="1">
+                                          <a:latin typeface="Cambria Math" panose="02040503050406030204" pitchFamily="18" charset="0"/>
+                                          <a:ea typeface="Cambria Math" panose="02040503050406030204" pitchFamily="18" charset="0"/>
+                                        </a:rPr>
+                                      </m:ctrlPr>
+                                    </m:sSupPr>
+                                    <m:e>
+                                      <m:r>
+                                        <a:rPr lang="pt-BR" i="1">
+                                          <a:latin typeface="Cambria Math" panose="02040503050406030204" pitchFamily="18" charset="0"/>
+                                          <a:ea typeface="Cambria Math" panose="02040503050406030204" pitchFamily="18" charset="0"/>
+                                        </a:rPr>
+                                        <m:t>𝑎</m:t>
+                                      </m:r>
+                                    </m:e>
+                                    <m:sup>
+                                      <m:r>
+                                        <a:rPr lang="pt-BR" i="1">
+                                          <a:latin typeface="Cambria Math" panose="02040503050406030204" pitchFamily="18" charset="0"/>
+                                          <a:ea typeface="Cambria Math" panose="02040503050406030204" pitchFamily="18" charset="0"/>
+                                        </a:rPr>
+                                        <m:t>′</m:t>
+                                      </m:r>
+                                    </m:sup>
+                                  </m:sSup>
+                                </m:lim>
+                              </m:limLow>
+                            </m:fName>
+                            <m:e>
+                              <m:r>
+                                <a:rPr lang="pt-BR" i="1">
+                                  <a:latin typeface="Cambria Math" panose="02040503050406030204" pitchFamily="18" charset="0"/>
+                                  <a:ea typeface="Cambria Math" panose="02040503050406030204" pitchFamily="18" charset="0"/>
+                                </a:rPr>
+                                <m:t>𝑄</m:t>
+                              </m:r>
+                              <m:d>
+                                <m:dPr>
+                                  <m:ctrlPr>
+                                    <a:rPr lang="pt-BR" i="1">
+                                      <a:latin typeface="Cambria Math" panose="02040503050406030204" pitchFamily="18" charset="0"/>
+                                      <a:ea typeface="Cambria Math" panose="02040503050406030204" pitchFamily="18" charset="0"/>
+                                    </a:rPr>
+                                  </m:ctrlPr>
+                                </m:dPr>
+                                <m:e>
+                                  <m:sSup>
+                                    <m:sSupPr>
+                                      <m:ctrlPr>
+                                        <a:rPr lang="pt-BR" i="1">
+                                          <a:latin typeface="Cambria Math" panose="02040503050406030204" pitchFamily="18" charset="0"/>
+                                          <a:ea typeface="Cambria Math" panose="02040503050406030204" pitchFamily="18" charset="0"/>
+                                        </a:rPr>
+                                      </m:ctrlPr>
+                                    </m:sSupPr>
+                                    <m:e>
+                                      <m:r>
+                                        <a:rPr lang="pt-BR" i="1">
+                                          <a:latin typeface="Cambria Math" panose="02040503050406030204" pitchFamily="18" charset="0"/>
+                                          <a:ea typeface="Cambria Math" panose="02040503050406030204" pitchFamily="18" charset="0"/>
+                                        </a:rPr>
+                                        <m:t>𝑠</m:t>
+                                      </m:r>
+                                    </m:e>
+                                    <m:sup>
+                                      <m:r>
+                                        <a:rPr lang="pt-BR" i="1">
+                                          <a:latin typeface="Cambria Math" panose="02040503050406030204" pitchFamily="18" charset="0"/>
+                                          <a:ea typeface="Cambria Math" panose="02040503050406030204" pitchFamily="18" charset="0"/>
+                                        </a:rPr>
+                                        <m:t>′</m:t>
+                                      </m:r>
+                                    </m:sup>
+                                  </m:sSup>
+                                  <m:r>
+                                    <a:rPr lang="pt-BR" i="1">
+                                      <a:latin typeface="Cambria Math" panose="02040503050406030204" pitchFamily="18" charset="0"/>
+                                      <a:ea typeface="Cambria Math" panose="02040503050406030204" pitchFamily="18" charset="0"/>
+                                    </a:rPr>
+                                    <m:t>,</m:t>
+                                  </m:r>
+                                  <m:sSup>
+                                    <m:sSupPr>
+                                      <m:ctrlPr>
+                                        <a:rPr lang="pt-BR" i="1">
+                                          <a:latin typeface="Cambria Math" panose="02040503050406030204" pitchFamily="18" charset="0"/>
+                                          <a:ea typeface="Cambria Math" panose="02040503050406030204" pitchFamily="18" charset="0"/>
+                                        </a:rPr>
+                                      </m:ctrlPr>
+                                    </m:sSupPr>
+                                    <m:e>
+                                      <m:r>
+                                        <a:rPr lang="pt-BR" i="1">
+                                          <a:latin typeface="Cambria Math" panose="02040503050406030204" pitchFamily="18" charset="0"/>
+                                          <a:ea typeface="Cambria Math" panose="02040503050406030204" pitchFamily="18" charset="0"/>
+                                        </a:rPr>
+                                        <m:t>𝑎</m:t>
+                                      </m:r>
+                                    </m:e>
+                                    <m:sup>
+                                      <m:r>
+                                        <a:rPr lang="pt-BR" i="1">
+                                          <a:latin typeface="Cambria Math" panose="02040503050406030204" pitchFamily="18" charset="0"/>
+                                          <a:ea typeface="Cambria Math" panose="02040503050406030204" pitchFamily="18" charset="0"/>
+                                        </a:rPr>
+                                        <m:t>′</m:t>
+                                      </m:r>
+                                    </m:sup>
+                                  </m:sSup>
+                                </m:e>
+                              </m:d>
+                            </m:e>
+                          </m:func>
+                          <m:r>
+                            <a:rPr lang="pt-BR" i="1">
+                              <a:latin typeface="Cambria Math" panose="02040503050406030204" pitchFamily="18" charset="0"/>
+                              <a:ea typeface="Cambria Math" panose="02040503050406030204" pitchFamily="18" charset="0"/>
+                            </a:rPr>
+                            <m:t>−</m:t>
+                          </m:r>
+                          <m:r>
+                            <a:rPr lang="pt-BR" i="1">
+                              <a:latin typeface="Cambria Math" panose="02040503050406030204" pitchFamily="18" charset="0"/>
+                              <a:ea typeface="Cambria Math" panose="02040503050406030204" pitchFamily="18" charset="0"/>
+                            </a:rPr>
+                            <m:t>𝑄</m:t>
+                          </m:r>
+                          <m:d>
+                            <m:dPr>
+                              <m:ctrlPr>
+                                <a:rPr lang="pt-BR" i="1">
+                                  <a:latin typeface="Cambria Math" panose="02040503050406030204" pitchFamily="18" charset="0"/>
+                                  <a:ea typeface="Cambria Math" panose="02040503050406030204" pitchFamily="18" charset="0"/>
+                                </a:rPr>
+                              </m:ctrlPr>
+                            </m:dPr>
+                            <m:e>
+                              <m:r>
+                                <a:rPr lang="pt-BR" i="1">
+                                  <a:latin typeface="Cambria Math" panose="02040503050406030204" pitchFamily="18" charset="0"/>
+                                  <a:ea typeface="Cambria Math" panose="02040503050406030204" pitchFamily="18" charset="0"/>
+                                </a:rPr>
+                                <m:t>𝑠</m:t>
+                              </m:r>
+                              <m:r>
+                                <a:rPr lang="pt-BR" i="1">
+                                  <a:latin typeface="Cambria Math" panose="02040503050406030204" pitchFamily="18" charset="0"/>
+                                  <a:ea typeface="Cambria Math" panose="02040503050406030204" pitchFamily="18" charset="0"/>
+                                </a:rPr>
+                                <m:t>,</m:t>
+                              </m:r>
+                              <m:r>
+                                <a:rPr lang="pt-BR" i="1">
+                                  <a:latin typeface="Cambria Math" panose="02040503050406030204" pitchFamily="18" charset="0"/>
+                                  <a:ea typeface="Cambria Math" panose="02040503050406030204" pitchFamily="18" charset="0"/>
+                                </a:rPr>
+                                <m:t>𝑎</m:t>
+                              </m:r>
+                            </m:e>
+                          </m:d>
+                        </m:e>
+                      </m:d>
+                    </m:oMath>
+                  </m:oMathPara>
+                </a14:m>
+                <a:endParaRPr lang="en-US" dirty="0" smtClean="0"/>
               </a:p>
               <a:p>
                 <a14:m>
@@ -11749,7 +12529,6 @@
                   <a:rPr lang="pt-BR" dirty="0" smtClean="0"/>
                   <a:t>imediatas (recompensas futuras não importam). </a:t>
                 </a:r>
-                <a:endParaRPr lang="pt-BR" dirty="0" smtClean="0"/>
               </a:p>
               <a:p>
                 <a:pPr lvl="1">
@@ -11974,11 +12753,64 @@
                 </a:r>
                 <a:r>
                   <a:rPr lang="pt-BR" dirty="0"/>
-                  <a:t>. É a </a:t>
-                </a:r>
+                  <a:t>. </a:t>
+                </a:r>
+                <a:endParaRPr lang="pt-BR" dirty="0" smtClean="0"/>
+              </a:p>
+              <a:p>
+                <a:pPr lvl="1">
+                  <a:buFont typeface="Wingdings" panose="05000000000000000000" pitchFamily="2" charset="2"/>
+                  <a:buChar char="§"/>
+                </a:pPr>
                 <a:r>
                   <a:rPr lang="pt-BR" dirty="0" smtClean="0"/>
-                  <a:t>estimativa da recompensa futura.</a:t>
+                  <a:t>É </a:t>
+                </a:r>
+                <a:r>
+                  <a:rPr lang="pt-BR" dirty="0"/>
+                  <a:t>a </a:t>
+                </a:r>
+                <a:r>
+                  <a:rPr lang="pt-BR" dirty="0" smtClean="0"/>
+                  <a:t>estimativa da recompensa futura</a:t>
+                </a:r>
+                <a:r>
+                  <a:rPr lang="pt-BR" dirty="0" smtClean="0"/>
+                  <a:t>. </a:t>
+                </a:r>
+              </a:p>
+              <a:p>
+                <a:pPr lvl="1">
+                  <a:buFont typeface="Wingdings" panose="05000000000000000000" pitchFamily="2" charset="2"/>
+                  <a:buChar char="§"/>
+                </a:pPr>
+                <a:r>
+                  <a:rPr lang="pt-BR" dirty="0" smtClean="0"/>
+                  <a:t>A equação a</a:t>
+                </a:r>
+                <a:r>
+                  <a:rPr lang="pt-BR" dirty="0" smtClean="0"/>
+                  <a:t>ssume </a:t>
+                </a:r>
+                <a:r>
+                  <a:rPr lang="pt-BR" dirty="0"/>
+                  <a:t>que no próximo estado </a:t>
+                </a:r>
+                <a:r>
+                  <a:rPr lang="pt-BR" dirty="0" smtClean="0"/>
+                  <a:t>tomaremos </a:t>
+                </a:r>
+                <a:r>
+                  <a:rPr lang="pt-BR" dirty="0"/>
+                  <a:t>a </a:t>
+                </a:r>
+                <a:r>
+                  <a:rPr lang="pt-BR" b="1" dirty="0"/>
+                  <a:t>melhor ação </a:t>
+                </a:r>
+                <a:r>
+                  <a:rPr lang="pt-BR" b="1" dirty="0" smtClean="0"/>
+                  <a:t>possível.</a:t>
                 </a:r>
                 <a:endParaRPr lang="pt-BR" dirty="0"/>
               </a:p>
@@ -11991,7 +12823,7 @@
               <p:cNvPr id="3" name="Content Placeholder 2">
                 <a:extLst>
                   <a:ext uri="{FF2B5EF4-FFF2-40B4-BE49-F238E27FC236}">
-                    <a16:creationId xmlns="" xmlns:a16="http://schemas.microsoft.com/office/drawing/2014/main" xmlns:a14="http://schemas.microsoft.com/office/drawing/2010/main" id="{9E56A20D-5587-73F0-6A77-76736D8C972A}"/>
+                    <a16:creationId xmlns:a16="http://schemas.microsoft.com/office/drawing/2014/main" xmlns="" xmlns:a14="http://schemas.microsoft.com/office/drawing/2010/main" id="{9E56A20D-5587-73F0-6A77-76736D8C972A}"/>
                   </a:ext>
                 </a:extLst>
               </p:cNvPr>
@@ -12010,7 +12842,7 @@
               <a:blipFill rotWithShape="0">
                 <a:blip r:embed="rId3"/>
                 <a:stretch>
-                  <a:fillRect l="-805" t="-2421" r="-429"/>
+                  <a:fillRect l="-913" t="-1937" r="-644"/>
                 </a:stretch>
               </a:blipFill>
             </p:spPr>
@@ -12032,101 +12864,7 @@
     </p:spTree>
     <p:extLst>
       <p:ext uri="{BB962C8B-B14F-4D97-AF65-F5344CB8AC3E}">
-        <p14:creationId xmlns:p14="http://schemas.microsoft.com/office/powerpoint/2010/main" val="750194977"/>
-      </p:ext>
-    </p:extLst>
-  </p:cSld>
-  <p:clrMapOvr>
-    <a:masterClrMapping/>
-  </p:clrMapOvr>
-</p:sld>
-</file>
-
-<file path=ppt/slides/slide22.xml><?xml version="1.0" encoding="utf-8"?>
-<p:sld xmlns:a="http://schemas.openxmlformats.org/drawingml/2006/main" xmlns:r="http://schemas.openxmlformats.org/officeDocument/2006/relationships" xmlns:p="http://schemas.openxmlformats.org/presentationml/2006/main">
-  <p:cSld>
-    <p:spTree>
-      <p:nvGrpSpPr>
-        <p:cNvPr id="1" name=""/>
-        <p:cNvGrpSpPr/>
-        <p:nvPr/>
-      </p:nvGrpSpPr>
-      <p:grpSpPr>
-        <a:xfrm>
-          <a:off x="0" y="0"/>
-          <a:ext cx="0" cy="0"/>
-          <a:chOff x="0" y="0"/>
-          <a:chExt cx="0" cy="0"/>
-        </a:xfrm>
-      </p:grpSpPr>
-      <p:sp>
-        <p:nvSpPr>
-          <p:cNvPr id="2" name="Title 1">
-            <a:extLst>
-              <a:ext uri="{FF2B5EF4-FFF2-40B4-BE49-F238E27FC236}">
-                <a16:creationId xmlns="" xmlns:a16="http://schemas.microsoft.com/office/drawing/2014/main" id="{874F2722-DA1E-D930-DC99-59F795E3E8B9}"/>
-              </a:ext>
-            </a:extLst>
-          </p:cNvPr>
-          <p:cNvSpPr>
-            <a:spLocks noGrp="1"/>
-          </p:cNvSpPr>
-          <p:nvPr>
-            <p:ph type="title"/>
-          </p:nvPr>
-        </p:nvSpPr>
-        <p:spPr/>
-        <p:txBody>
-          <a:bodyPr/>
-          <a:lstStyle/>
-          <a:p>
-            <a:endParaRPr lang="en-US"/>
-          </a:p>
-        </p:txBody>
-      </p:sp>
-      <p:sp>
-        <p:nvSpPr>
-          <p:cNvPr id="3" name="Content Placeholder 2">
-            <a:extLst>
-              <a:ext uri="{FF2B5EF4-FFF2-40B4-BE49-F238E27FC236}">
-                <a16:creationId xmlns="" xmlns:a16="http://schemas.microsoft.com/office/drawing/2014/main" id="{97BD2D05-0E48-B94D-DBC7-FBDCBC17C0A5}"/>
-              </a:ext>
-            </a:extLst>
-          </p:cNvPr>
-          <p:cNvSpPr>
-            <a:spLocks noGrp="1"/>
-          </p:cNvSpPr>
-          <p:nvPr>
-            <p:ph idx="1"/>
-          </p:nvPr>
-        </p:nvSpPr>
-        <p:spPr/>
-        <p:txBody>
-          <a:bodyPr>
-            <a:normAutofit/>
-          </a:bodyPr>
-          <a:lstStyle/>
-          <a:p>
-            <a:r>
-              <a:rPr lang="pt-BR" sz="5400" b="1" dirty="0">
-                <a:solidFill>
-                  <a:srgbClr val="FF0000"/>
-                </a:solidFill>
-              </a:rPr>
-              <a:t>PAREI AQUI!!!!!!!!!!!!</a:t>
-            </a:r>
-            <a:endParaRPr lang="en-US" sz="5400" b="1" dirty="0">
-              <a:solidFill>
-                <a:srgbClr val="FF0000"/>
-              </a:solidFill>
-            </a:endParaRPr>
-          </a:p>
-        </p:txBody>
-      </p:sp>
-    </p:spTree>
-    <p:extLst>
-      <p:ext uri="{BB962C8B-B14F-4D97-AF65-F5344CB8AC3E}">
-        <p14:creationId xmlns:p14="http://schemas.microsoft.com/office/powerpoint/2010/main" val="3079050531"/>
+        <p14:creationId xmlns:p14="http://schemas.microsoft.com/office/powerpoint/2010/main" val="2789555792"/>
       </p:ext>
     </p:extLst>
   </p:cSld>
@@ -12158,7 +12896,7 @@
           <p:cNvPr id="2" name="Title 1">
             <a:extLst>
               <a:ext uri="{FF2B5EF4-FFF2-40B4-BE49-F238E27FC236}">
-                <a16:creationId xmlns="" xmlns:a16="http://schemas.microsoft.com/office/drawing/2014/main" id="{52C5A6D8-ECD1-B38D-0188-C905A6EDF96B}"/>
+                <a16:creationId xmlns:a16="http://schemas.microsoft.com/office/drawing/2014/main" xmlns="" id="{874F2722-DA1E-D930-DC99-59F795E3E8B9}"/>
               </a:ext>
             </a:extLst>
           </p:cNvPr>
@@ -12174,6 +12912,100 @@
           <a:bodyPr/>
           <a:lstStyle/>
           <a:p>
+            <a:endParaRPr lang="en-US"/>
+          </a:p>
+        </p:txBody>
+      </p:sp>
+      <p:sp>
+        <p:nvSpPr>
+          <p:cNvPr id="3" name="Content Placeholder 2">
+            <a:extLst>
+              <a:ext uri="{FF2B5EF4-FFF2-40B4-BE49-F238E27FC236}">
+                <a16:creationId xmlns:a16="http://schemas.microsoft.com/office/drawing/2014/main" xmlns="" id="{97BD2D05-0E48-B94D-DBC7-FBDCBC17C0A5}"/>
+              </a:ext>
+            </a:extLst>
+          </p:cNvPr>
+          <p:cNvSpPr>
+            <a:spLocks noGrp="1"/>
+          </p:cNvSpPr>
+          <p:nvPr>
+            <p:ph idx="1"/>
+          </p:nvPr>
+        </p:nvSpPr>
+        <p:spPr/>
+        <p:txBody>
+          <a:bodyPr>
+            <a:normAutofit/>
+          </a:bodyPr>
+          <a:lstStyle/>
+          <a:p>
+            <a:r>
+              <a:rPr lang="pt-BR" sz="5400" b="1" dirty="0">
+                <a:solidFill>
+                  <a:srgbClr val="FF0000"/>
+                </a:solidFill>
+              </a:rPr>
+              <a:t>PAREI AQUI!!!!!!!!!!!!</a:t>
+            </a:r>
+            <a:endParaRPr lang="en-US" sz="5400" b="1" dirty="0">
+              <a:solidFill>
+                <a:srgbClr val="FF0000"/>
+              </a:solidFill>
+            </a:endParaRPr>
+          </a:p>
+        </p:txBody>
+      </p:sp>
+    </p:spTree>
+    <p:extLst>
+      <p:ext uri="{BB962C8B-B14F-4D97-AF65-F5344CB8AC3E}">
+        <p14:creationId xmlns:p14="http://schemas.microsoft.com/office/powerpoint/2010/main" val="3079050531"/>
+      </p:ext>
+    </p:extLst>
+  </p:cSld>
+  <p:clrMapOvr>
+    <a:masterClrMapping/>
+  </p:clrMapOvr>
+</p:sld>
+</file>
+
+<file path=ppt/slides/slide24.xml><?xml version="1.0" encoding="utf-8"?>
+<p:sld xmlns:a="http://schemas.openxmlformats.org/drawingml/2006/main" xmlns:r="http://schemas.openxmlformats.org/officeDocument/2006/relationships" xmlns:p="http://schemas.openxmlformats.org/presentationml/2006/main">
+  <p:cSld>
+    <p:spTree>
+      <p:nvGrpSpPr>
+        <p:cNvPr id="1" name=""/>
+        <p:cNvGrpSpPr/>
+        <p:nvPr/>
+      </p:nvGrpSpPr>
+      <p:grpSpPr>
+        <a:xfrm>
+          <a:off x="0" y="0"/>
+          <a:ext cx="0" cy="0"/>
+          <a:chOff x="0" y="0"/>
+          <a:chExt cx="0" cy="0"/>
+        </a:xfrm>
+      </p:grpSpPr>
+      <p:sp>
+        <p:nvSpPr>
+          <p:cNvPr id="2" name="Title 1">
+            <a:extLst>
+              <a:ext uri="{FF2B5EF4-FFF2-40B4-BE49-F238E27FC236}">
+                <a16:creationId xmlns:a16="http://schemas.microsoft.com/office/drawing/2014/main" xmlns="" id="{52C5A6D8-ECD1-B38D-0188-C905A6EDF96B}"/>
+              </a:ext>
+            </a:extLst>
+          </p:cNvPr>
+          <p:cNvSpPr>
+            <a:spLocks noGrp="1"/>
+          </p:cNvSpPr>
+          <p:nvPr>
+            <p:ph type="title"/>
+          </p:nvPr>
+        </p:nvSpPr>
+        <p:spPr/>
+        <p:txBody>
+          <a:bodyPr/>
+          <a:lstStyle/>
+          <a:p>
             <a:r>
               <a:rPr lang="pt-BR" dirty="0"/>
               <a:t>A </a:t>
@@ -12189,14 +13021,14 @@
           </a:p>
         </p:txBody>
       </p:sp>
-      <mc:AlternateContent xmlns:mc="http://schemas.openxmlformats.org/markup-compatibility/2006" xmlns:a14="http://schemas.microsoft.com/office/drawing/2010/main">
-        <mc:Choice Requires="a14">
+      <mc:AlternateContent xmlns:mc="http://schemas.openxmlformats.org/markup-compatibility/2006">
+        <mc:Choice xmlns:a14="http://schemas.microsoft.com/office/drawing/2010/main" Requires="a14">
           <p:sp>
             <p:nvSpPr>
               <p:cNvPr id="3" name="Content Placeholder 2">
                 <a:extLst>
                   <a:ext uri="{FF2B5EF4-FFF2-40B4-BE49-F238E27FC236}">
-                    <a16:creationId xmlns="" xmlns:a16="http://schemas.microsoft.com/office/drawing/2014/main" id="{9E788D2D-1B58-788D-B9CB-AA2B58DAC90E}"/>
+                    <a16:creationId xmlns:a16="http://schemas.microsoft.com/office/drawing/2014/main" xmlns="" id="{9E788D2D-1B58-788D-B9CB-AA2B58DAC90E}"/>
                   </a:ext>
                 </a:extLst>
               </p:cNvPr>
@@ -12555,6 +13387,13 @@
                           </m:d>
                         </m:e>
                       </m:d>
+                      <m:r>
+                        <a:rPr lang="pt-BR" b="0" i="0" smtClean="0">
+                          <a:latin typeface="Cambria Math" panose="02040503050406030204" pitchFamily="18" charset="0"/>
+                          <a:ea typeface="Cambria Math" panose="02040503050406030204" pitchFamily="18" charset="0"/>
+                        </a:rPr>
+                        <m:t>.</m:t>
+                      </m:r>
                     </m:oMath>
                   </m:oMathPara>
                 </a14:m>
@@ -12563,8 +13402,21 @@
               <a:p>
                 <a:r>
                   <a:rPr lang="pt-BR" dirty="0"/>
-                  <a:t>O termo dentro dos colchetes é chamado de 'Erro de Diferença Temporal'. </a:t>
-                </a:r>
+                  <a:t>O termo dentro dos colchetes é chamado de 'Erro de Diferença </a:t>
+                </a:r>
+                <a:r>
+                  <a:rPr lang="pt-BR" dirty="0" smtClean="0"/>
+                  <a:t>Temporal (TD </a:t>
+                </a:r>
+                <a:r>
+                  <a:rPr lang="pt-BR" i="1" dirty="0" err="1" smtClean="0"/>
+                  <a:t>error</a:t>
+                </a:r>
+                <a:r>
+                  <a:rPr lang="pt-BR" dirty="0" smtClean="0"/>
+                  <a:t>).</a:t>
+                </a:r>
+                <a:endParaRPr lang="pt-BR" dirty="0"/>
               </a:p>
               <a:p>
                 <a:r>
@@ -13087,13 +13939,13 @@
             </p:txBody>
           </p:sp>
         </mc:Choice>
-        <mc:Fallback xmlns="">
+        <mc:Fallback>
           <p:sp>
             <p:nvSpPr>
               <p:cNvPr id="3" name="Content Placeholder 2">
                 <a:extLst>
                   <a:ext uri="{FF2B5EF4-FFF2-40B4-BE49-F238E27FC236}">
-                    <a16:creationId xmlns:a16="http://schemas.microsoft.com/office/drawing/2014/main" xmlns:a14="http://schemas.microsoft.com/office/drawing/2010/main" xmlns="" id="{9E788D2D-1B58-788D-B9CB-AA2B58DAC90E}"/>
+                    <a16:creationId xmlns:a16="http://schemas.microsoft.com/office/drawing/2014/main" xmlns="" xmlns:a14="http://schemas.microsoft.com/office/drawing/2010/main" id="{9E788D2D-1B58-788D-B9CB-AA2B58DAC90E}"/>
                   </a:ext>
                 </a:extLst>
               </p:cNvPr>
@@ -13112,7 +13964,7 @@
               <a:blipFill rotWithShape="0">
                 <a:blip r:embed="rId3"/>
                 <a:stretch>
-                  <a:fillRect l="-922" r="-488"/>
+                  <a:fillRect l="-922"/>
                 </a:stretch>
               </a:blipFill>
             </p:spPr>
@@ -13135,90 +13987,6 @@
     <p:extLst>
       <p:ext uri="{BB962C8B-B14F-4D97-AF65-F5344CB8AC3E}">
         <p14:creationId xmlns:p14="http://schemas.microsoft.com/office/powerpoint/2010/main" val="3885795955"/>
-      </p:ext>
-    </p:extLst>
-  </p:cSld>
-  <p:clrMapOvr>
-    <a:masterClrMapping/>
-  </p:clrMapOvr>
-</p:sld>
-</file>
-
-<file path=ppt/slides/slide24.xml><?xml version="1.0" encoding="utf-8"?>
-<p:sld xmlns:a="http://schemas.openxmlformats.org/drawingml/2006/main" xmlns:r="http://schemas.openxmlformats.org/officeDocument/2006/relationships" xmlns:p="http://schemas.openxmlformats.org/presentationml/2006/main">
-  <p:cSld>
-    <p:spTree>
-      <p:nvGrpSpPr>
-        <p:cNvPr id="1" name=""/>
-        <p:cNvGrpSpPr/>
-        <p:nvPr/>
-      </p:nvGrpSpPr>
-      <p:grpSpPr>
-        <a:xfrm>
-          <a:off x="0" y="0"/>
-          <a:ext cx="0" cy="0"/>
-          <a:chOff x="0" y="0"/>
-          <a:chExt cx="0" cy="0"/>
-        </a:xfrm>
-      </p:grpSpPr>
-      <p:sp>
-        <p:nvSpPr>
-          <p:cNvPr id="2" name="Title 1">
-            <a:extLst>
-              <a:ext uri="{FF2B5EF4-FFF2-40B4-BE49-F238E27FC236}">
-                <a16:creationId xmlns="" xmlns:a16="http://schemas.microsoft.com/office/drawing/2014/main" id="{936F8D36-63A1-F427-6A4F-01E854EEB57B}"/>
-              </a:ext>
-            </a:extLst>
-          </p:cNvPr>
-          <p:cNvSpPr>
-            <a:spLocks noGrp="1"/>
-          </p:cNvSpPr>
-          <p:nvPr>
-            <p:ph type="title"/>
-          </p:nvPr>
-        </p:nvSpPr>
-        <p:spPr/>
-        <p:txBody>
-          <a:bodyPr/>
-          <a:lstStyle/>
-          <a:p>
-            <a:r>
-              <a:rPr lang="pt-BR" dirty="0"/>
-              <a:t>Exemplo numérico</a:t>
-            </a:r>
-            <a:endParaRPr lang="en-US" dirty="0"/>
-          </a:p>
-        </p:txBody>
-      </p:sp>
-      <p:sp>
-        <p:nvSpPr>
-          <p:cNvPr id="3" name="Content Placeholder 2">
-            <a:extLst>
-              <a:ext uri="{FF2B5EF4-FFF2-40B4-BE49-F238E27FC236}">
-                <a16:creationId xmlns="" xmlns:a16="http://schemas.microsoft.com/office/drawing/2014/main" id="{EB894157-32A4-5B45-5642-D7607A5096CE}"/>
-              </a:ext>
-            </a:extLst>
-          </p:cNvPr>
-          <p:cNvSpPr>
-            <a:spLocks noGrp="1"/>
-          </p:cNvSpPr>
-          <p:nvPr>
-            <p:ph idx="1"/>
-          </p:nvPr>
-        </p:nvSpPr>
-        <p:spPr/>
-        <p:txBody>
-          <a:bodyPr/>
-          <a:lstStyle/>
-          <a:p>
-            <a:endParaRPr lang="en-US"/>
-          </a:p>
-        </p:txBody>
-      </p:sp>
-    </p:spTree>
-    <p:extLst>
-      <p:ext uri="{BB962C8B-B14F-4D97-AF65-F5344CB8AC3E}">
-        <p14:creationId xmlns:p14="http://schemas.microsoft.com/office/powerpoint/2010/main" val="1454990387"/>
       </p:ext>
     </p:extLst>
   </p:cSld>
@@ -13247,10 +14015,1268 @@
       </p:grpSpPr>
       <p:sp>
         <p:nvSpPr>
+          <p:cNvPr id="2" name="Título 1"/>
+          <p:cNvSpPr>
+            <a:spLocks noGrp="1"/>
+          </p:cNvSpPr>
+          <p:nvPr>
+            <p:ph type="title"/>
+          </p:nvPr>
+        </p:nvSpPr>
+        <p:spPr/>
+        <p:txBody>
+          <a:bodyPr/>
+          <a:lstStyle/>
+          <a:p>
+            <a:r>
+              <a:rPr lang="pt-BR" dirty="0"/>
+              <a:t>A </a:t>
+            </a:r>
+            <a:r>
+              <a:rPr lang="en-US" dirty="0" err="1"/>
+              <a:t>equação</a:t>
+            </a:r>
+            <a:r>
+              <a:rPr lang="en-US" dirty="0"/>
+              <a:t> de Bellman</a:t>
+            </a:r>
+            <a:endParaRPr lang="pt-BR" dirty="0"/>
+          </a:p>
+        </p:txBody>
+      </p:sp>
+      <mc:AlternateContent xmlns:mc="http://schemas.openxmlformats.org/markup-compatibility/2006">
+        <mc:Choice xmlns:a14="http://schemas.microsoft.com/office/drawing/2010/main" Requires="a14">
+          <p:sp>
+            <p:nvSpPr>
+              <p:cNvPr id="3" name="Espaço Reservado para Conteúdo 2"/>
+              <p:cNvSpPr>
+                <a:spLocks noGrp="1"/>
+              </p:cNvSpPr>
+              <p:nvPr>
+                <p:ph idx="1"/>
+              </p:nvPr>
+            </p:nvSpPr>
+            <p:spPr/>
+            <p:txBody>
+              <a:bodyPr>
+                <a:normAutofit/>
+              </a:bodyPr>
+              <a:lstStyle/>
+              <a:p>
+                <a:r>
+                  <a:rPr lang="pt-BR" dirty="0" smtClean="0"/>
+                  <a:t>A equação de </a:t>
+                </a:r>
+                <a:r>
+                  <a:rPr lang="pt-BR" dirty="0" err="1"/>
+                  <a:t>Bellman</a:t>
+                </a:r>
+                <a:r>
+                  <a:rPr lang="pt-BR" dirty="0"/>
+                  <a:t> diz basicamente</a:t>
+                </a:r>
+                <a:r>
+                  <a:rPr lang="pt-BR" dirty="0" smtClean="0"/>
+                  <a:t>: </a:t>
+                </a:r>
+              </a:p>
+              <a:p>
+                <a:pPr marL="0" indent="0" algn="ctr">
+                  <a:buNone/>
+                </a:pPr>
+                <a:r>
+                  <a:rPr lang="pt-BR" dirty="0" smtClean="0"/>
+                  <a:t>“</a:t>
+                </a:r>
+                <a:r>
+                  <a:rPr lang="pt-BR" dirty="0"/>
+                  <a:t>O valor de uma ação = recompensa imediata + melhor valor futuro possível</a:t>
+                </a:r>
+                <a:r>
+                  <a:rPr lang="pt-BR" dirty="0" smtClean="0"/>
+                  <a:t>”</a:t>
+                </a:r>
+              </a:p>
+              <a:p>
+                <a:r>
+                  <a:rPr lang="pt-BR" dirty="0" smtClean="0"/>
+                  <a:t>Ou seja</a:t>
+                </a:r>
+              </a:p>
+              <a:p>
+                <a:pPr marL="0" indent="0">
+                  <a:buNone/>
+                </a:pPr>
+                <a14:m>
+                  <m:oMathPara xmlns:m="http://schemas.openxmlformats.org/officeDocument/2006/math">
+                    <m:oMathParaPr>
+                      <m:jc m:val="centerGroup"/>
+                    </m:oMathParaPr>
+                    <m:oMath xmlns:m="http://schemas.openxmlformats.org/officeDocument/2006/math">
+                      <m:r>
+                        <a:rPr lang="pt-BR" i="1">
+                          <a:latin typeface="Cambria Math" panose="02040503050406030204" pitchFamily="18" charset="0"/>
+                          <a:ea typeface="Cambria Math" panose="02040503050406030204" pitchFamily="18" charset="0"/>
+                        </a:rPr>
+                        <m:t>𝑄</m:t>
+                      </m:r>
+                      <m:d>
+                        <m:dPr>
+                          <m:ctrlPr>
+                            <a:rPr lang="pt-BR" i="1">
+                              <a:latin typeface="Cambria Math" panose="02040503050406030204" pitchFamily="18" charset="0"/>
+                              <a:ea typeface="Cambria Math" panose="02040503050406030204" pitchFamily="18" charset="0"/>
+                            </a:rPr>
+                          </m:ctrlPr>
+                        </m:dPr>
+                        <m:e>
+                          <m:r>
+                            <a:rPr lang="pt-BR" i="1">
+                              <a:latin typeface="Cambria Math" panose="02040503050406030204" pitchFamily="18" charset="0"/>
+                              <a:ea typeface="Cambria Math" panose="02040503050406030204" pitchFamily="18" charset="0"/>
+                            </a:rPr>
+                            <m:t>𝑠</m:t>
+                          </m:r>
+                          <m:r>
+                            <a:rPr lang="pt-BR" i="1">
+                              <a:latin typeface="Cambria Math" panose="02040503050406030204" pitchFamily="18" charset="0"/>
+                              <a:ea typeface="Cambria Math" panose="02040503050406030204" pitchFamily="18" charset="0"/>
+                            </a:rPr>
+                            <m:t>,</m:t>
+                          </m:r>
+                          <m:r>
+                            <a:rPr lang="pt-BR" i="1">
+                              <a:latin typeface="Cambria Math" panose="02040503050406030204" pitchFamily="18" charset="0"/>
+                              <a:ea typeface="Cambria Math" panose="02040503050406030204" pitchFamily="18" charset="0"/>
+                            </a:rPr>
+                            <m:t>𝑎</m:t>
+                          </m:r>
+                        </m:e>
+                      </m:d>
+                      <m:r>
+                        <a:rPr lang="pt-BR" i="1" smtClean="0">
+                          <a:latin typeface="Cambria Math" panose="02040503050406030204" pitchFamily="18" charset="0"/>
+                          <a:ea typeface="Cambria Math" panose="02040503050406030204" pitchFamily="18" charset="0"/>
+                        </a:rPr>
+                        <m:t>≈</m:t>
+                      </m:r>
+                      <m:r>
+                        <a:rPr lang="pt-BR" i="1">
+                          <a:latin typeface="Cambria Math" panose="02040503050406030204" pitchFamily="18" charset="0"/>
+                          <a:ea typeface="Cambria Math" panose="02040503050406030204" pitchFamily="18" charset="0"/>
+                        </a:rPr>
+                        <m:t>𝑟</m:t>
+                      </m:r>
+                      <m:r>
+                        <a:rPr lang="pt-BR" i="1">
+                          <a:latin typeface="Cambria Math" panose="02040503050406030204" pitchFamily="18" charset="0"/>
+                          <a:ea typeface="Cambria Math" panose="02040503050406030204" pitchFamily="18" charset="0"/>
+                        </a:rPr>
+                        <m:t>+</m:t>
+                      </m:r>
+                      <m:func>
+                        <m:funcPr>
+                          <m:ctrlPr>
+                            <a:rPr lang="pt-BR" i="1">
+                              <a:latin typeface="Cambria Math" panose="02040503050406030204" pitchFamily="18" charset="0"/>
+                              <a:ea typeface="Cambria Math" panose="02040503050406030204" pitchFamily="18" charset="0"/>
+                            </a:rPr>
+                          </m:ctrlPr>
+                        </m:funcPr>
+                        <m:fName>
+                          <m:limLow>
+                            <m:limLowPr>
+                              <m:ctrlPr>
+                                <a:rPr lang="pt-BR" i="1">
+                                  <a:latin typeface="Cambria Math" panose="02040503050406030204" pitchFamily="18" charset="0"/>
+                                  <a:ea typeface="Cambria Math" panose="02040503050406030204" pitchFamily="18" charset="0"/>
+                                </a:rPr>
+                              </m:ctrlPr>
+                            </m:limLowPr>
+                            <m:e>
+                              <m:r>
+                                <m:rPr>
+                                  <m:sty m:val="p"/>
+                                </m:rPr>
+                                <a:rPr lang="el-GR" i="1">
+                                  <a:latin typeface="Cambria Math" panose="02040503050406030204" pitchFamily="18" charset="0"/>
+                                  <a:ea typeface="Cambria Math" panose="02040503050406030204" pitchFamily="18" charset="0"/>
+                                </a:rPr>
+                                <m:t>γ</m:t>
+                              </m:r>
+                              <m:r>
+                                <m:rPr>
+                                  <m:sty m:val="p"/>
+                                </m:rPr>
+                                <a:rPr lang="pt-BR">
+                                  <a:latin typeface="Cambria Math" panose="02040503050406030204" pitchFamily="18" charset="0"/>
+                                  <a:ea typeface="Cambria Math" panose="02040503050406030204" pitchFamily="18" charset="0"/>
+                                </a:rPr>
+                                <m:t>max</m:t>
+                              </m:r>
+                            </m:e>
+                            <m:lim>
+                              <m:sSup>
+                                <m:sSupPr>
+                                  <m:ctrlPr>
+                                    <a:rPr lang="pt-BR" i="1">
+                                      <a:latin typeface="Cambria Math" panose="02040503050406030204" pitchFamily="18" charset="0"/>
+                                      <a:ea typeface="Cambria Math" panose="02040503050406030204" pitchFamily="18" charset="0"/>
+                                    </a:rPr>
+                                  </m:ctrlPr>
+                                </m:sSupPr>
+                                <m:e>
+                                  <m:r>
+                                    <a:rPr lang="pt-BR" i="1">
+                                      <a:latin typeface="Cambria Math" panose="02040503050406030204" pitchFamily="18" charset="0"/>
+                                      <a:ea typeface="Cambria Math" panose="02040503050406030204" pitchFamily="18" charset="0"/>
+                                    </a:rPr>
+                                    <m:t>𝑎</m:t>
+                                  </m:r>
+                                </m:e>
+                                <m:sup>
+                                  <m:r>
+                                    <a:rPr lang="pt-BR" i="1">
+                                      <a:latin typeface="Cambria Math" panose="02040503050406030204" pitchFamily="18" charset="0"/>
+                                      <a:ea typeface="Cambria Math" panose="02040503050406030204" pitchFamily="18" charset="0"/>
+                                    </a:rPr>
+                                    <m:t>′</m:t>
+                                  </m:r>
+                                </m:sup>
+                              </m:sSup>
+                            </m:lim>
+                          </m:limLow>
+                        </m:fName>
+                        <m:e>
+                          <m:r>
+                            <a:rPr lang="pt-BR" i="1">
+                              <a:latin typeface="Cambria Math" panose="02040503050406030204" pitchFamily="18" charset="0"/>
+                              <a:ea typeface="Cambria Math" panose="02040503050406030204" pitchFamily="18" charset="0"/>
+                            </a:rPr>
+                            <m:t>𝑄</m:t>
+                          </m:r>
+                          <m:d>
+                            <m:dPr>
+                              <m:ctrlPr>
+                                <a:rPr lang="pt-BR" i="1">
+                                  <a:latin typeface="Cambria Math" panose="02040503050406030204" pitchFamily="18" charset="0"/>
+                                  <a:ea typeface="Cambria Math" panose="02040503050406030204" pitchFamily="18" charset="0"/>
+                                </a:rPr>
+                              </m:ctrlPr>
+                            </m:dPr>
+                            <m:e>
+                              <m:sSup>
+                                <m:sSupPr>
+                                  <m:ctrlPr>
+                                    <a:rPr lang="pt-BR" i="1">
+                                      <a:latin typeface="Cambria Math" panose="02040503050406030204" pitchFamily="18" charset="0"/>
+                                      <a:ea typeface="Cambria Math" panose="02040503050406030204" pitchFamily="18" charset="0"/>
+                                    </a:rPr>
+                                  </m:ctrlPr>
+                                </m:sSupPr>
+                                <m:e>
+                                  <m:r>
+                                    <a:rPr lang="pt-BR" i="1">
+                                      <a:latin typeface="Cambria Math" panose="02040503050406030204" pitchFamily="18" charset="0"/>
+                                      <a:ea typeface="Cambria Math" panose="02040503050406030204" pitchFamily="18" charset="0"/>
+                                    </a:rPr>
+                                    <m:t>𝑠</m:t>
+                                  </m:r>
+                                </m:e>
+                                <m:sup>
+                                  <m:r>
+                                    <a:rPr lang="pt-BR" i="1">
+                                      <a:latin typeface="Cambria Math" panose="02040503050406030204" pitchFamily="18" charset="0"/>
+                                      <a:ea typeface="Cambria Math" panose="02040503050406030204" pitchFamily="18" charset="0"/>
+                                    </a:rPr>
+                                    <m:t>′</m:t>
+                                  </m:r>
+                                </m:sup>
+                              </m:sSup>
+                              <m:r>
+                                <a:rPr lang="pt-BR" i="1">
+                                  <a:latin typeface="Cambria Math" panose="02040503050406030204" pitchFamily="18" charset="0"/>
+                                  <a:ea typeface="Cambria Math" panose="02040503050406030204" pitchFamily="18" charset="0"/>
+                                </a:rPr>
+                                <m:t>,</m:t>
+                              </m:r>
+                              <m:sSup>
+                                <m:sSupPr>
+                                  <m:ctrlPr>
+                                    <a:rPr lang="pt-BR" i="1">
+                                      <a:latin typeface="Cambria Math" panose="02040503050406030204" pitchFamily="18" charset="0"/>
+                                      <a:ea typeface="Cambria Math" panose="02040503050406030204" pitchFamily="18" charset="0"/>
+                                    </a:rPr>
+                                  </m:ctrlPr>
+                                </m:sSupPr>
+                                <m:e>
+                                  <m:r>
+                                    <a:rPr lang="pt-BR" i="1">
+                                      <a:latin typeface="Cambria Math" panose="02040503050406030204" pitchFamily="18" charset="0"/>
+                                      <a:ea typeface="Cambria Math" panose="02040503050406030204" pitchFamily="18" charset="0"/>
+                                    </a:rPr>
+                                    <m:t>𝑎</m:t>
+                                  </m:r>
+                                </m:e>
+                                <m:sup>
+                                  <m:r>
+                                    <a:rPr lang="pt-BR" i="1">
+                                      <a:latin typeface="Cambria Math" panose="02040503050406030204" pitchFamily="18" charset="0"/>
+                                      <a:ea typeface="Cambria Math" panose="02040503050406030204" pitchFamily="18" charset="0"/>
+                                    </a:rPr>
+                                    <m:t>′</m:t>
+                                  </m:r>
+                                </m:sup>
+                              </m:sSup>
+                            </m:e>
+                          </m:d>
+                        </m:e>
+                      </m:func>
+                      <m:r>
+                        <a:rPr lang="pt-BR" b="0" i="1" smtClean="0">
+                          <a:latin typeface="Cambria Math" panose="02040503050406030204" pitchFamily="18" charset="0"/>
+                          <a:ea typeface="Cambria Math" panose="02040503050406030204" pitchFamily="18" charset="0"/>
+                        </a:rPr>
+                        <m:t>.</m:t>
+                      </m:r>
+                    </m:oMath>
+                  </m:oMathPara>
+                </a14:m>
+                <a:endParaRPr lang="pt-BR" b="0" dirty="0" smtClean="0">
+                  <a:ea typeface="Cambria Math" panose="02040503050406030204" pitchFamily="18" charset="0"/>
+                </a:endParaRPr>
+              </a:p>
+              <a:p>
+                <a:r>
+                  <a:rPr lang="pt-BR" dirty="0"/>
+                  <a:t>A equação </a:t>
+                </a:r>
+                <a:r>
+                  <a:rPr lang="pt-BR" dirty="0" smtClean="0"/>
+                  <a:t>de </a:t>
+                </a:r>
+                <a:r>
+                  <a:rPr lang="pt-BR" dirty="0" err="1" smtClean="0"/>
+                  <a:t>Bellman</a:t>
+                </a:r>
+                <a:r>
+                  <a:rPr lang="pt-BR" dirty="0" smtClean="0"/>
+                  <a:t> pode </a:t>
+                </a:r>
+                <a:r>
+                  <a:rPr lang="pt-BR" dirty="0"/>
+                  <a:t>ser interpretada como:</a:t>
+                </a:r>
+              </a:p>
+              <a:p>
+                <a:pPr marL="0" indent="0" algn="ctr">
+                  <a:buNone/>
+                </a:pPr>
+                <a:r>
+                  <a:rPr lang="pt-BR" dirty="0" smtClean="0"/>
+                  <a:t>Novo valor = Valor antigo + </a:t>
+                </a:r>
+                <a14:m>
+                  <m:oMath xmlns:m="http://schemas.openxmlformats.org/officeDocument/2006/math">
+                    <m:r>
+                      <a:rPr lang="pt-BR" i="1" smtClean="0">
+                        <a:latin typeface="Cambria Math" panose="02040503050406030204" pitchFamily="18" charset="0"/>
+                        <a:ea typeface="Cambria Math" panose="02040503050406030204" pitchFamily="18" charset="0"/>
+                      </a:rPr>
+                      <m:t>𝛼</m:t>
+                    </m:r>
+                  </m:oMath>
+                </a14:m>
+                <a:r>
+                  <a:rPr lang="pt-BR" dirty="0" smtClean="0"/>
+                  <a:t> </a:t>
+                </a:r>
+                <a14:m>
+                  <m:oMath xmlns:m="http://schemas.openxmlformats.org/officeDocument/2006/math">
+                    <m:r>
+                      <a:rPr lang="pt-BR" i="1" dirty="0" smtClean="0">
+                        <a:latin typeface="Cambria Math" panose="02040503050406030204" pitchFamily="18" charset="0"/>
+                        <a:ea typeface="Cambria Math" panose="02040503050406030204" pitchFamily="18" charset="0"/>
+                      </a:rPr>
+                      <m:t>×</m:t>
+                    </m:r>
+                  </m:oMath>
+                </a14:m>
+                <a:r>
+                  <a:rPr lang="pt-BR" dirty="0" smtClean="0"/>
+                  <a:t> erro</a:t>
+                </a:r>
+              </a:p>
+              <a:p>
+                <a:r>
+                  <a:rPr lang="pt-BR" dirty="0" smtClean="0"/>
+                  <a:t>Ou seja, ajusta-se a </a:t>
+                </a:r>
+                <a:r>
+                  <a:rPr lang="pt-BR" dirty="0"/>
+                  <a:t>estimativa </a:t>
+                </a:r>
+                <a:r>
+                  <a:rPr lang="pt-BR" b="1" dirty="0"/>
+                  <a:t>na direção do valor </a:t>
+                </a:r>
+                <a:r>
+                  <a:rPr lang="pt-BR" b="1" dirty="0" smtClean="0"/>
+                  <a:t>alvo.</a:t>
+                </a:r>
+                <a:endParaRPr lang="pt-BR" dirty="0"/>
+              </a:p>
+              <a:p>
+                <a:endParaRPr lang="pt-BR" dirty="0"/>
+              </a:p>
+              <a:p>
+                <a:endParaRPr lang="pt-BR" dirty="0"/>
+              </a:p>
+            </p:txBody>
+          </p:sp>
+        </mc:Choice>
+        <mc:Fallback>
+          <p:sp>
+            <p:nvSpPr>
+              <p:cNvPr id="3" name="Espaço Reservado para Conteúdo 2"/>
+              <p:cNvSpPr>
+                <a:spLocks noGrp="1" noRot="1" noChangeAspect="1" noMove="1" noResize="1" noEditPoints="1" noAdjustHandles="1" noChangeArrowheads="1" noChangeShapeType="1" noTextEdit="1"/>
+              </p:cNvSpPr>
+              <p:nvPr>
+                <p:ph idx="1"/>
+              </p:nvPr>
+            </p:nvSpPr>
+            <p:spPr>
+              <a:blipFill rotWithShape="0">
+                <a:blip r:embed="rId3"/>
+                <a:stretch>
+                  <a:fillRect l="-1043" t="-2241"/>
+                </a:stretch>
+              </a:blipFill>
+            </p:spPr>
+            <p:txBody>
+              <a:bodyPr/>
+              <a:lstStyle/>
+              <a:p>
+                <a:r>
+                  <a:rPr lang="pt-BR">
+                    <a:noFill/>
+                  </a:rPr>
+                  <a:t> </a:t>
+                </a:r>
+              </a:p>
+            </p:txBody>
+          </p:sp>
+        </mc:Fallback>
+      </mc:AlternateContent>
+    </p:spTree>
+    <p:extLst>
+      <p:ext uri="{BB962C8B-B14F-4D97-AF65-F5344CB8AC3E}">
+        <p14:creationId xmlns:p14="http://schemas.microsoft.com/office/powerpoint/2010/main" val="1765895003"/>
+      </p:ext>
+    </p:extLst>
+  </p:cSld>
+  <p:clrMapOvr>
+    <a:masterClrMapping/>
+  </p:clrMapOvr>
+</p:sld>
+</file>
+
+<file path=ppt/slides/slide26.xml><?xml version="1.0" encoding="utf-8"?>
+<p:sld xmlns:a="http://schemas.openxmlformats.org/drawingml/2006/main" xmlns:r="http://schemas.openxmlformats.org/officeDocument/2006/relationships" xmlns:p="http://schemas.openxmlformats.org/presentationml/2006/main">
+  <p:cSld>
+    <p:spTree>
+      <p:nvGrpSpPr>
+        <p:cNvPr id="1" name=""/>
+        <p:cNvGrpSpPr/>
+        <p:nvPr/>
+      </p:nvGrpSpPr>
+      <p:grpSpPr>
+        <a:xfrm>
+          <a:off x="0" y="0"/>
+          <a:ext cx="0" cy="0"/>
+          <a:chOff x="0" y="0"/>
+          <a:chExt cx="0" cy="0"/>
+        </a:xfrm>
+      </p:grpSpPr>
+      <p:sp>
+        <p:nvSpPr>
+          <p:cNvPr id="2" name="Título 1"/>
+          <p:cNvSpPr>
+            <a:spLocks noGrp="1"/>
+          </p:cNvSpPr>
+          <p:nvPr>
+            <p:ph type="title"/>
+          </p:nvPr>
+        </p:nvSpPr>
+        <p:spPr/>
+        <p:txBody>
+          <a:bodyPr/>
+          <a:lstStyle/>
+          <a:p>
+            <a:r>
+              <a:rPr lang="pt-BR" i="1" dirty="0" smtClean="0"/>
+              <a:t>Off-</a:t>
+            </a:r>
+            <a:r>
+              <a:rPr lang="pt-BR" i="1" dirty="0" err="1" smtClean="0"/>
+              <a:t>policy</a:t>
+            </a:r>
+            <a:endParaRPr lang="pt-BR" i="1" dirty="0"/>
+          </a:p>
+        </p:txBody>
+      </p:sp>
+      <mc:AlternateContent xmlns:mc="http://schemas.openxmlformats.org/markup-compatibility/2006">
+        <mc:Choice xmlns:a14="http://schemas.microsoft.com/office/drawing/2010/main" Requires="a14">
+          <p:sp>
+            <p:nvSpPr>
+              <p:cNvPr id="3" name="Espaço Reservado para Conteúdo 2"/>
+              <p:cNvSpPr>
+                <a:spLocks noGrp="1"/>
+              </p:cNvSpPr>
+              <p:nvPr>
+                <p:ph idx="1"/>
+              </p:nvPr>
+            </p:nvSpPr>
+            <p:spPr>
+              <a:xfrm>
+                <a:off x="838200" y="1825625"/>
+                <a:ext cx="11165378" cy="4351338"/>
+              </a:xfrm>
+            </p:spPr>
+            <p:txBody>
+              <a:bodyPr/>
+              <a:lstStyle/>
+              <a:p>
+                <a:pPr marL="0" indent="0">
+                  <a:buNone/>
+                </a:pPr>
+                <a14:m>
+                  <m:oMathPara xmlns:m="http://schemas.openxmlformats.org/officeDocument/2006/math">
+                    <m:oMathParaPr>
+                      <m:jc m:val="centerGroup"/>
+                    </m:oMathParaPr>
+                    <m:oMath xmlns:m="http://schemas.openxmlformats.org/officeDocument/2006/math">
+                      <m:r>
+                        <a:rPr lang="pt-BR" i="1">
+                          <a:latin typeface="Cambria Math" panose="02040503050406030204" pitchFamily="18" charset="0"/>
+                        </a:rPr>
+                        <m:t>𝑄</m:t>
+                      </m:r>
+                      <m:d>
+                        <m:dPr>
+                          <m:ctrlPr>
+                            <a:rPr lang="pt-BR" i="1">
+                              <a:latin typeface="Cambria Math" panose="02040503050406030204" pitchFamily="18" charset="0"/>
+                            </a:rPr>
+                          </m:ctrlPr>
+                        </m:dPr>
+                        <m:e>
+                          <m:r>
+                            <a:rPr lang="pt-BR" i="1">
+                              <a:latin typeface="Cambria Math" panose="02040503050406030204" pitchFamily="18" charset="0"/>
+                            </a:rPr>
+                            <m:t>𝑠</m:t>
+                          </m:r>
+                          <m:r>
+                            <a:rPr lang="pt-BR" i="1">
+                              <a:latin typeface="Cambria Math" panose="02040503050406030204" pitchFamily="18" charset="0"/>
+                            </a:rPr>
+                            <m:t>,</m:t>
+                          </m:r>
+                          <m:r>
+                            <a:rPr lang="pt-BR" i="1">
+                              <a:latin typeface="Cambria Math" panose="02040503050406030204" pitchFamily="18" charset="0"/>
+                            </a:rPr>
+                            <m:t>𝑎</m:t>
+                          </m:r>
+                        </m:e>
+                      </m:d>
+                      <m:r>
+                        <a:rPr lang="pt-BR" i="1">
+                          <a:latin typeface="Cambria Math" panose="02040503050406030204" pitchFamily="18" charset="0"/>
+                          <a:ea typeface="Cambria Math" panose="02040503050406030204" pitchFamily="18" charset="0"/>
+                        </a:rPr>
+                        <m:t>←</m:t>
+                      </m:r>
+                      <m:r>
+                        <a:rPr lang="pt-BR" i="1">
+                          <a:latin typeface="Cambria Math" panose="02040503050406030204" pitchFamily="18" charset="0"/>
+                          <a:ea typeface="Cambria Math" panose="02040503050406030204" pitchFamily="18" charset="0"/>
+                        </a:rPr>
+                        <m:t>𝑄</m:t>
+                      </m:r>
+                      <m:d>
+                        <m:dPr>
+                          <m:ctrlPr>
+                            <a:rPr lang="pt-BR" i="1">
+                              <a:latin typeface="Cambria Math" panose="02040503050406030204" pitchFamily="18" charset="0"/>
+                              <a:ea typeface="Cambria Math" panose="02040503050406030204" pitchFamily="18" charset="0"/>
+                            </a:rPr>
+                          </m:ctrlPr>
+                        </m:dPr>
+                        <m:e>
+                          <m:r>
+                            <a:rPr lang="pt-BR" i="1">
+                              <a:latin typeface="Cambria Math" panose="02040503050406030204" pitchFamily="18" charset="0"/>
+                              <a:ea typeface="Cambria Math" panose="02040503050406030204" pitchFamily="18" charset="0"/>
+                            </a:rPr>
+                            <m:t>𝑠</m:t>
+                          </m:r>
+                          <m:r>
+                            <a:rPr lang="pt-BR" i="1">
+                              <a:latin typeface="Cambria Math" panose="02040503050406030204" pitchFamily="18" charset="0"/>
+                              <a:ea typeface="Cambria Math" panose="02040503050406030204" pitchFamily="18" charset="0"/>
+                            </a:rPr>
+                            <m:t>,</m:t>
+                          </m:r>
+                          <m:r>
+                            <a:rPr lang="pt-BR" i="1">
+                              <a:latin typeface="Cambria Math" panose="02040503050406030204" pitchFamily="18" charset="0"/>
+                              <a:ea typeface="Cambria Math" panose="02040503050406030204" pitchFamily="18" charset="0"/>
+                            </a:rPr>
+                            <m:t>𝑎</m:t>
+                          </m:r>
+                        </m:e>
+                      </m:d>
+                      <m:r>
+                        <a:rPr lang="pt-BR" i="1">
+                          <a:latin typeface="Cambria Math" panose="02040503050406030204" pitchFamily="18" charset="0"/>
+                          <a:ea typeface="Cambria Math" panose="02040503050406030204" pitchFamily="18" charset="0"/>
+                        </a:rPr>
+                        <m:t>+</m:t>
+                      </m:r>
+                      <m:r>
+                        <a:rPr lang="pt-BR" i="1">
+                          <a:latin typeface="Cambria Math" panose="02040503050406030204" pitchFamily="18" charset="0"/>
+                          <a:ea typeface="Cambria Math" panose="02040503050406030204" pitchFamily="18" charset="0"/>
+                        </a:rPr>
+                        <m:t>𝛼</m:t>
+                      </m:r>
+                      <m:d>
+                        <m:dPr>
+                          <m:begChr m:val="["/>
+                          <m:endChr m:val="]"/>
+                          <m:ctrlPr>
+                            <a:rPr lang="pt-BR" i="1">
+                              <a:latin typeface="Cambria Math" panose="02040503050406030204" pitchFamily="18" charset="0"/>
+                              <a:ea typeface="Cambria Math" panose="02040503050406030204" pitchFamily="18" charset="0"/>
+                            </a:rPr>
+                          </m:ctrlPr>
+                        </m:dPr>
+                        <m:e>
+                          <m:r>
+                            <a:rPr lang="pt-BR" i="1">
+                              <a:latin typeface="Cambria Math" panose="02040503050406030204" pitchFamily="18" charset="0"/>
+                              <a:ea typeface="Cambria Math" panose="02040503050406030204" pitchFamily="18" charset="0"/>
+                            </a:rPr>
+                            <m:t>𝑟</m:t>
+                          </m:r>
+                          <m:r>
+                            <a:rPr lang="pt-BR" i="1">
+                              <a:latin typeface="Cambria Math" panose="02040503050406030204" pitchFamily="18" charset="0"/>
+                              <a:ea typeface="Cambria Math" panose="02040503050406030204" pitchFamily="18" charset="0"/>
+                            </a:rPr>
+                            <m:t>+</m:t>
+                          </m:r>
+                          <m:func>
+                            <m:funcPr>
+                              <m:ctrlPr>
+                                <a:rPr lang="pt-BR" i="1">
+                                  <a:latin typeface="Cambria Math" panose="02040503050406030204" pitchFamily="18" charset="0"/>
+                                  <a:ea typeface="Cambria Math" panose="02040503050406030204" pitchFamily="18" charset="0"/>
+                                </a:rPr>
+                              </m:ctrlPr>
+                            </m:funcPr>
+                            <m:fName>
+                              <m:limLow>
+                                <m:limLowPr>
+                                  <m:ctrlPr>
+                                    <a:rPr lang="pt-BR" i="1">
+                                      <a:latin typeface="Cambria Math" panose="02040503050406030204" pitchFamily="18" charset="0"/>
+                                      <a:ea typeface="Cambria Math" panose="02040503050406030204" pitchFamily="18" charset="0"/>
+                                    </a:rPr>
+                                  </m:ctrlPr>
+                                </m:limLowPr>
+                                <m:e>
+                                  <m:r>
+                                    <m:rPr>
+                                      <m:sty m:val="p"/>
+                                    </m:rPr>
+                                    <a:rPr lang="el-GR" i="1">
+                                      <a:latin typeface="Cambria Math" panose="02040503050406030204" pitchFamily="18" charset="0"/>
+                                      <a:ea typeface="Cambria Math" panose="02040503050406030204" pitchFamily="18" charset="0"/>
+                                    </a:rPr>
+                                    <m:t>γ</m:t>
+                                  </m:r>
+                                  <m:r>
+                                    <m:rPr>
+                                      <m:sty m:val="p"/>
+                                    </m:rPr>
+                                    <a:rPr lang="pt-BR">
+                                      <a:latin typeface="Cambria Math" panose="02040503050406030204" pitchFamily="18" charset="0"/>
+                                      <a:ea typeface="Cambria Math" panose="02040503050406030204" pitchFamily="18" charset="0"/>
+                                    </a:rPr>
+                                    <m:t>max</m:t>
+                                  </m:r>
+                                </m:e>
+                                <m:lim>
+                                  <m:sSup>
+                                    <m:sSupPr>
+                                      <m:ctrlPr>
+                                        <a:rPr lang="pt-BR" i="1">
+                                          <a:latin typeface="Cambria Math" panose="02040503050406030204" pitchFamily="18" charset="0"/>
+                                          <a:ea typeface="Cambria Math" panose="02040503050406030204" pitchFamily="18" charset="0"/>
+                                        </a:rPr>
+                                      </m:ctrlPr>
+                                    </m:sSupPr>
+                                    <m:e>
+                                      <m:r>
+                                        <a:rPr lang="pt-BR" i="1">
+                                          <a:latin typeface="Cambria Math" panose="02040503050406030204" pitchFamily="18" charset="0"/>
+                                          <a:ea typeface="Cambria Math" panose="02040503050406030204" pitchFamily="18" charset="0"/>
+                                        </a:rPr>
+                                        <m:t>𝑎</m:t>
+                                      </m:r>
+                                    </m:e>
+                                    <m:sup>
+                                      <m:r>
+                                        <a:rPr lang="pt-BR" i="1">
+                                          <a:latin typeface="Cambria Math" panose="02040503050406030204" pitchFamily="18" charset="0"/>
+                                          <a:ea typeface="Cambria Math" panose="02040503050406030204" pitchFamily="18" charset="0"/>
+                                        </a:rPr>
+                                        <m:t>′</m:t>
+                                      </m:r>
+                                    </m:sup>
+                                  </m:sSup>
+                                </m:lim>
+                              </m:limLow>
+                            </m:fName>
+                            <m:e>
+                              <m:r>
+                                <a:rPr lang="pt-BR" i="1">
+                                  <a:latin typeface="Cambria Math" panose="02040503050406030204" pitchFamily="18" charset="0"/>
+                                  <a:ea typeface="Cambria Math" panose="02040503050406030204" pitchFamily="18" charset="0"/>
+                                </a:rPr>
+                                <m:t>𝑄</m:t>
+                              </m:r>
+                              <m:d>
+                                <m:dPr>
+                                  <m:ctrlPr>
+                                    <a:rPr lang="pt-BR" i="1">
+                                      <a:latin typeface="Cambria Math" panose="02040503050406030204" pitchFamily="18" charset="0"/>
+                                      <a:ea typeface="Cambria Math" panose="02040503050406030204" pitchFamily="18" charset="0"/>
+                                    </a:rPr>
+                                  </m:ctrlPr>
+                                </m:dPr>
+                                <m:e>
+                                  <m:sSup>
+                                    <m:sSupPr>
+                                      <m:ctrlPr>
+                                        <a:rPr lang="pt-BR" i="1">
+                                          <a:latin typeface="Cambria Math" panose="02040503050406030204" pitchFamily="18" charset="0"/>
+                                          <a:ea typeface="Cambria Math" panose="02040503050406030204" pitchFamily="18" charset="0"/>
+                                        </a:rPr>
+                                      </m:ctrlPr>
+                                    </m:sSupPr>
+                                    <m:e>
+                                      <m:r>
+                                        <a:rPr lang="pt-BR" i="1">
+                                          <a:latin typeface="Cambria Math" panose="02040503050406030204" pitchFamily="18" charset="0"/>
+                                          <a:ea typeface="Cambria Math" panose="02040503050406030204" pitchFamily="18" charset="0"/>
+                                        </a:rPr>
+                                        <m:t>𝑠</m:t>
+                                      </m:r>
+                                    </m:e>
+                                    <m:sup>
+                                      <m:r>
+                                        <a:rPr lang="pt-BR" i="1">
+                                          <a:latin typeface="Cambria Math" panose="02040503050406030204" pitchFamily="18" charset="0"/>
+                                          <a:ea typeface="Cambria Math" panose="02040503050406030204" pitchFamily="18" charset="0"/>
+                                        </a:rPr>
+                                        <m:t>′</m:t>
+                                      </m:r>
+                                    </m:sup>
+                                  </m:sSup>
+                                  <m:r>
+                                    <a:rPr lang="pt-BR" i="1">
+                                      <a:latin typeface="Cambria Math" panose="02040503050406030204" pitchFamily="18" charset="0"/>
+                                      <a:ea typeface="Cambria Math" panose="02040503050406030204" pitchFamily="18" charset="0"/>
+                                    </a:rPr>
+                                    <m:t>,</m:t>
+                                  </m:r>
+                                  <m:sSup>
+                                    <m:sSupPr>
+                                      <m:ctrlPr>
+                                        <a:rPr lang="pt-BR" i="1">
+                                          <a:latin typeface="Cambria Math" panose="02040503050406030204" pitchFamily="18" charset="0"/>
+                                          <a:ea typeface="Cambria Math" panose="02040503050406030204" pitchFamily="18" charset="0"/>
+                                        </a:rPr>
+                                      </m:ctrlPr>
+                                    </m:sSupPr>
+                                    <m:e>
+                                      <m:r>
+                                        <a:rPr lang="pt-BR" i="1">
+                                          <a:latin typeface="Cambria Math" panose="02040503050406030204" pitchFamily="18" charset="0"/>
+                                          <a:ea typeface="Cambria Math" panose="02040503050406030204" pitchFamily="18" charset="0"/>
+                                        </a:rPr>
+                                        <m:t>𝑎</m:t>
+                                      </m:r>
+                                    </m:e>
+                                    <m:sup>
+                                      <m:r>
+                                        <a:rPr lang="pt-BR" i="1">
+                                          <a:latin typeface="Cambria Math" panose="02040503050406030204" pitchFamily="18" charset="0"/>
+                                          <a:ea typeface="Cambria Math" panose="02040503050406030204" pitchFamily="18" charset="0"/>
+                                        </a:rPr>
+                                        <m:t>′</m:t>
+                                      </m:r>
+                                    </m:sup>
+                                  </m:sSup>
+                                </m:e>
+                              </m:d>
+                            </m:e>
+                          </m:func>
+                          <m:r>
+                            <a:rPr lang="pt-BR" i="1">
+                              <a:latin typeface="Cambria Math" panose="02040503050406030204" pitchFamily="18" charset="0"/>
+                              <a:ea typeface="Cambria Math" panose="02040503050406030204" pitchFamily="18" charset="0"/>
+                            </a:rPr>
+                            <m:t>−</m:t>
+                          </m:r>
+                          <m:r>
+                            <a:rPr lang="pt-BR" i="1">
+                              <a:latin typeface="Cambria Math" panose="02040503050406030204" pitchFamily="18" charset="0"/>
+                              <a:ea typeface="Cambria Math" panose="02040503050406030204" pitchFamily="18" charset="0"/>
+                            </a:rPr>
+                            <m:t>𝑄</m:t>
+                          </m:r>
+                          <m:d>
+                            <m:dPr>
+                              <m:ctrlPr>
+                                <a:rPr lang="pt-BR" i="1">
+                                  <a:latin typeface="Cambria Math" panose="02040503050406030204" pitchFamily="18" charset="0"/>
+                                  <a:ea typeface="Cambria Math" panose="02040503050406030204" pitchFamily="18" charset="0"/>
+                                </a:rPr>
+                              </m:ctrlPr>
+                            </m:dPr>
+                            <m:e>
+                              <m:r>
+                                <a:rPr lang="pt-BR" i="1">
+                                  <a:latin typeface="Cambria Math" panose="02040503050406030204" pitchFamily="18" charset="0"/>
+                                  <a:ea typeface="Cambria Math" panose="02040503050406030204" pitchFamily="18" charset="0"/>
+                                </a:rPr>
+                                <m:t>𝑠</m:t>
+                              </m:r>
+                              <m:r>
+                                <a:rPr lang="pt-BR" i="1">
+                                  <a:latin typeface="Cambria Math" panose="02040503050406030204" pitchFamily="18" charset="0"/>
+                                  <a:ea typeface="Cambria Math" panose="02040503050406030204" pitchFamily="18" charset="0"/>
+                                </a:rPr>
+                                <m:t>,</m:t>
+                              </m:r>
+                              <m:r>
+                                <a:rPr lang="pt-BR" i="1">
+                                  <a:latin typeface="Cambria Math" panose="02040503050406030204" pitchFamily="18" charset="0"/>
+                                  <a:ea typeface="Cambria Math" panose="02040503050406030204" pitchFamily="18" charset="0"/>
+                                </a:rPr>
+                                <m:t>𝑎</m:t>
+                              </m:r>
+                            </m:e>
+                          </m:d>
+                        </m:e>
+                      </m:d>
+                    </m:oMath>
+                  </m:oMathPara>
+                </a14:m>
+                <a:endParaRPr lang="pt-BR" dirty="0" smtClean="0"/>
+              </a:p>
+              <a:p>
+                <a:r>
+                  <a:rPr lang="pt-BR" dirty="0" smtClean="0"/>
+                  <a:t>O </a:t>
+                </a:r>
+                <a:r>
+                  <a:rPr lang="pt-BR" dirty="0"/>
+                  <a:t>Q-</a:t>
+                </a:r>
+                <a:r>
+                  <a:rPr lang="pt-BR" i="1" dirty="0" err="1"/>
+                  <a:t>learning</a:t>
+                </a:r>
+                <a:r>
+                  <a:rPr lang="pt-BR" dirty="0"/>
+                  <a:t> é </a:t>
+                </a:r>
+                <a:r>
+                  <a:rPr lang="pt-BR" dirty="0" smtClean="0"/>
+                  <a:t>um algoritmo </a:t>
+                </a:r>
+                <a:r>
+                  <a:rPr lang="pt-BR" i="1" dirty="0" smtClean="0"/>
+                  <a:t>off-</a:t>
+                </a:r>
+                <a:r>
+                  <a:rPr lang="pt-BR" i="1" dirty="0" err="1" smtClean="0"/>
+                  <a:t>policy</a:t>
+                </a:r>
+                <a:r>
+                  <a:rPr lang="pt-BR" dirty="0"/>
+                  <a:t>.</a:t>
+                </a:r>
+                <a:endParaRPr lang="pt-BR" dirty="0" smtClean="0"/>
+              </a:p>
+              <a:p>
+                <a:r>
+                  <a:rPr lang="pt-BR" dirty="0" smtClean="0"/>
+                  <a:t>Ele atualiza </a:t>
+                </a:r>
+                <a14:m>
+                  <m:oMath xmlns:m="http://schemas.openxmlformats.org/officeDocument/2006/math">
+                    <m:r>
+                      <a:rPr lang="pt-BR" b="0" i="1" smtClean="0">
+                        <a:latin typeface="Cambria Math" panose="02040503050406030204" pitchFamily="18" charset="0"/>
+                      </a:rPr>
+                      <m:t>𝑄</m:t>
+                    </m:r>
+                    <m:r>
+                      <a:rPr lang="pt-BR" b="0" i="1" smtClean="0">
+                        <a:latin typeface="Cambria Math" panose="02040503050406030204" pitchFamily="18" charset="0"/>
+                      </a:rPr>
+                      <m:t>(</m:t>
+                    </m:r>
+                    <m:r>
+                      <a:rPr lang="pt-BR" b="0" i="1" smtClean="0">
+                        <a:latin typeface="Cambria Math" panose="02040503050406030204" pitchFamily="18" charset="0"/>
+                      </a:rPr>
+                      <m:t>𝑠</m:t>
+                    </m:r>
+                    <m:r>
+                      <a:rPr lang="pt-BR" b="0" i="1" smtClean="0">
+                        <a:latin typeface="Cambria Math" panose="02040503050406030204" pitchFamily="18" charset="0"/>
+                      </a:rPr>
+                      <m:t>,</m:t>
+                    </m:r>
+                    <m:r>
+                      <a:rPr lang="pt-BR" b="0" i="1" smtClean="0">
+                        <a:latin typeface="Cambria Math" panose="02040503050406030204" pitchFamily="18" charset="0"/>
+                      </a:rPr>
+                      <m:t>𝑎</m:t>
+                    </m:r>
+                    <m:r>
+                      <a:rPr lang="pt-BR" b="0" i="1" smtClean="0">
+                        <a:latin typeface="Cambria Math" panose="02040503050406030204" pitchFamily="18" charset="0"/>
+                      </a:rPr>
+                      <m:t>)</m:t>
+                    </m:r>
+                  </m:oMath>
+                </a14:m>
+                <a:r>
+                  <a:rPr lang="pt-BR" dirty="0" smtClean="0"/>
+                  <a:t> assumindo </a:t>
+                </a:r>
+                <a:r>
+                  <a:rPr lang="pt-BR" dirty="0"/>
+                  <a:t>que o agente sempre escolhe a ação ótima futura </a:t>
+                </a:r>
+                <a:r>
+                  <a:rPr lang="pt-BR" dirty="0" smtClean="0"/>
+                  <a:t>(</a:t>
+                </a:r>
+                <a14:m>
+                  <m:oMath xmlns:m="http://schemas.openxmlformats.org/officeDocument/2006/math">
+                    <m:func>
+                      <m:funcPr>
+                        <m:ctrlPr>
+                          <a:rPr lang="pt-BR" i="1" smtClean="0">
+                            <a:latin typeface="Cambria Math" panose="02040503050406030204" pitchFamily="18" charset="0"/>
+                          </a:rPr>
+                        </m:ctrlPr>
+                      </m:funcPr>
+                      <m:fName>
+                        <m:limLow>
+                          <m:limLowPr>
+                            <m:ctrlPr>
+                              <a:rPr lang="pt-BR" i="1" smtClean="0">
+                                <a:latin typeface="Cambria Math" panose="02040503050406030204" pitchFamily="18" charset="0"/>
+                              </a:rPr>
+                            </m:ctrlPr>
+                          </m:limLowPr>
+                          <m:e>
+                            <m:r>
+                              <m:rPr>
+                                <m:sty m:val="p"/>
+                              </m:rPr>
+                              <a:rPr lang="pt-BR" i="0" smtClean="0">
+                                <a:latin typeface="Cambria Math" panose="02040503050406030204" pitchFamily="18" charset="0"/>
+                              </a:rPr>
+                              <m:t>max</m:t>
+                            </m:r>
+                          </m:e>
+                          <m:lim>
+                            <m:sSup>
+                              <m:sSupPr>
+                                <m:ctrlPr>
+                                  <a:rPr lang="pt-BR" i="1" smtClean="0">
+                                    <a:latin typeface="Cambria Math" panose="02040503050406030204" pitchFamily="18" charset="0"/>
+                                  </a:rPr>
+                                </m:ctrlPr>
+                              </m:sSupPr>
+                              <m:e>
+                                <m:r>
+                                  <a:rPr lang="pt-BR" b="0" i="1" smtClean="0">
+                                    <a:latin typeface="Cambria Math" panose="02040503050406030204" pitchFamily="18" charset="0"/>
+                                  </a:rPr>
+                                  <m:t>𝑎</m:t>
+                                </m:r>
+                              </m:e>
+                              <m:sup>
+                                <m:r>
+                                  <a:rPr lang="pt-BR" b="0" i="1" smtClean="0">
+                                    <a:latin typeface="Cambria Math" panose="02040503050406030204" pitchFamily="18" charset="0"/>
+                                  </a:rPr>
+                                  <m:t>′</m:t>
+                                </m:r>
+                              </m:sup>
+                            </m:sSup>
+                          </m:lim>
+                        </m:limLow>
+                      </m:fName>
+                      <m:e>
+                        <m:r>
+                          <a:rPr lang="pt-BR" b="0" i="1" smtClean="0">
+                            <a:latin typeface="Cambria Math" panose="02040503050406030204" pitchFamily="18" charset="0"/>
+                          </a:rPr>
+                          <m:t>𝑄</m:t>
+                        </m:r>
+                        <m:r>
+                          <a:rPr lang="pt-BR" b="0" i="1" smtClean="0">
+                            <a:latin typeface="Cambria Math" panose="02040503050406030204" pitchFamily="18" charset="0"/>
+                          </a:rPr>
+                          <m:t>(</m:t>
+                        </m:r>
+                        <m:sSup>
+                          <m:sSupPr>
+                            <m:ctrlPr>
+                              <a:rPr lang="pt-BR" i="1">
+                                <a:latin typeface="Cambria Math" panose="02040503050406030204" pitchFamily="18" charset="0"/>
+                                <a:ea typeface="Cambria Math" panose="02040503050406030204" pitchFamily="18" charset="0"/>
+                              </a:rPr>
+                            </m:ctrlPr>
+                          </m:sSupPr>
+                          <m:e>
+                            <m:r>
+                              <a:rPr lang="pt-BR" i="1">
+                                <a:latin typeface="Cambria Math" panose="02040503050406030204" pitchFamily="18" charset="0"/>
+                                <a:ea typeface="Cambria Math" panose="02040503050406030204" pitchFamily="18" charset="0"/>
+                              </a:rPr>
+                              <m:t>𝑠</m:t>
+                            </m:r>
+                          </m:e>
+                          <m:sup>
+                            <m:r>
+                              <a:rPr lang="pt-BR" i="1">
+                                <a:latin typeface="Cambria Math" panose="02040503050406030204" pitchFamily="18" charset="0"/>
+                                <a:ea typeface="Cambria Math" panose="02040503050406030204" pitchFamily="18" charset="0"/>
+                              </a:rPr>
+                              <m:t>′</m:t>
+                            </m:r>
+                          </m:sup>
+                        </m:sSup>
+                        <m:r>
+                          <a:rPr lang="pt-BR" b="0" i="1" smtClean="0">
+                            <a:latin typeface="Cambria Math" panose="02040503050406030204" pitchFamily="18" charset="0"/>
+                          </a:rPr>
+                          <m:t>,</m:t>
+                        </m:r>
+                        <m:sSup>
+                          <m:sSupPr>
+                            <m:ctrlPr>
+                              <a:rPr lang="pt-BR" b="0" i="1" smtClean="0">
+                                <a:latin typeface="Cambria Math" panose="02040503050406030204" pitchFamily="18" charset="0"/>
+                              </a:rPr>
+                            </m:ctrlPr>
+                          </m:sSupPr>
+                          <m:e>
+                            <m:r>
+                              <a:rPr lang="pt-BR" b="0" i="1" smtClean="0">
+                                <a:latin typeface="Cambria Math" panose="02040503050406030204" pitchFamily="18" charset="0"/>
+                              </a:rPr>
+                              <m:t>𝑎</m:t>
+                            </m:r>
+                          </m:e>
+                          <m:sup>
+                            <m:r>
+                              <a:rPr lang="pt-BR" b="0" i="1" smtClean="0">
+                                <a:latin typeface="Cambria Math" panose="02040503050406030204" pitchFamily="18" charset="0"/>
+                              </a:rPr>
+                              <m:t>′</m:t>
+                            </m:r>
+                          </m:sup>
+                        </m:sSup>
+                        <m:r>
+                          <a:rPr lang="pt-BR" b="0" i="1" smtClean="0">
+                            <a:latin typeface="Cambria Math" panose="02040503050406030204" pitchFamily="18" charset="0"/>
+                          </a:rPr>
+                          <m:t>)</m:t>
+                        </m:r>
+                      </m:e>
+                    </m:func>
+                  </m:oMath>
+                </a14:m>
+                <a:r>
+                  <a:rPr lang="pt-BR" dirty="0" smtClean="0"/>
+                  <a:t> </a:t>
+                </a:r>
+                <a:r>
+                  <a:rPr lang="pt-BR" dirty="0"/>
+                  <a:t>), independentemente da ação realmente tomada</a:t>
+                </a:r>
+                <a:r>
+                  <a:rPr lang="pt-BR" dirty="0" smtClean="0"/>
+                  <a:t>.</a:t>
+                </a:r>
+              </a:p>
+              <a:p>
+                <a:r>
+                  <a:rPr lang="pt-BR" dirty="0" smtClean="0"/>
+                  <a:t>Algoritmos </a:t>
+                </a:r>
+                <a:r>
+                  <a:rPr lang="pt-BR" i="1" dirty="0" err="1" smtClean="0"/>
+                  <a:t>on-policy</a:t>
+                </a:r>
+                <a:r>
+                  <a:rPr lang="pt-BR" dirty="0"/>
+                  <a:t> usam a ação realmente escolhida para </a:t>
+                </a:r>
+                <a:r>
+                  <a:rPr lang="pt-BR" dirty="0" smtClean="0"/>
+                  <a:t>atualizar </a:t>
+                </a:r>
+                <a14:m>
+                  <m:oMath xmlns:m="http://schemas.openxmlformats.org/officeDocument/2006/math">
+                    <m:r>
+                      <a:rPr lang="pt-BR" i="1">
+                        <a:latin typeface="Cambria Math" panose="02040503050406030204" pitchFamily="18" charset="0"/>
+                      </a:rPr>
+                      <m:t>𝑄</m:t>
+                    </m:r>
+                    <m:r>
+                      <a:rPr lang="pt-BR" i="1">
+                        <a:latin typeface="Cambria Math" panose="02040503050406030204" pitchFamily="18" charset="0"/>
+                      </a:rPr>
+                      <m:t>(</m:t>
+                    </m:r>
+                    <m:r>
+                      <a:rPr lang="pt-BR" i="1">
+                        <a:latin typeface="Cambria Math" panose="02040503050406030204" pitchFamily="18" charset="0"/>
+                      </a:rPr>
+                      <m:t>𝑠</m:t>
+                    </m:r>
+                    <m:r>
+                      <a:rPr lang="pt-BR" i="1">
+                        <a:latin typeface="Cambria Math" panose="02040503050406030204" pitchFamily="18" charset="0"/>
+                      </a:rPr>
+                      <m:t>,</m:t>
+                    </m:r>
+                    <m:r>
+                      <a:rPr lang="pt-BR" i="1">
+                        <a:latin typeface="Cambria Math" panose="02040503050406030204" pitchFamily="18" charset="0"/>
+                      </a:rPr>
+                      <m:t>𝑎</m:t>
+                    </m:r>
+                    <m:r>
+                      <a:rPr lang="pt-BR" i="1">
+                        <a:latin typeface="Cambria Math" panose="02040503050406030204" pitchFamily="18" charset="0"/>
+                      </a:rPr>
+                      <m:t>)</m:t>
+                    </m:r>
+                  </m:oMath>
+                </a14:m>
+                <a:r>
+                  <a:rPr lang="pt-BR" dirty="0" smtClean="0"/>
+                  <a:t>.</a:t>
+                </a:r>
+                <a:endParaRPr lang="pt-BR" dirty="0"/>
+              </a:p>
+            </p:txBody>
+          </p:sp>
+        </mc:Choice>
+        <mc:Fallback>
+          <p:sp>
+            <p:nvSpPr>
+              <p:cNvPr id="3" name="Espaço Reservado para Conteúdo 2"/>
+              <p:cNvSpPr>
+                <a:spLocks noGrp="1" noRot="1" noChangeAspect="1" noMove="1" noResize="1" noEditPoints="1" noAdjustHandles="1" noChangeArrowheads="1" noChangeShapeType="1" noTextEdit="1"/>
+              </p:cNvSpPr>
+              <p:nvPr>
+                <p:ph idx="1"/>
+              </p:nvPr>
+            </p:nvSpPr>
+            <p:spPr>
+              <a:xfrm>
+                <a:off x="838200" y="1825625"/>
+                <a:ext cx="11165378" cy="4351338"/>
+              </a:xfrm>
+              <a:blipFill rotWithShape="0">
+                <a:blip r:embed="rId2"/>
+                <a:stretch>
+                  <a:fillRect l="-983" r="-819"/>
+                </a:stretch>
+              </a:blipFill>
+            </p:spPr>
+            <p:txBody>
+              <a:bodyPr/>
+              <a:lstStyle/>
+              <a:p>
+                <a:r>
+                  <a:rPr lang="pt-BR">
+                    <a:noFill/>
+                  </a:rPr>
+                  <a:t> </a:t>
+                </a:r>
+              </a:p>
+            </p:txBody>
+          </p:sp>
+        </mc:Fallback>
+      </mc:AlternateContent>
+    </p:spTree>
+    <p:extLst>
+      <p:ext uri="{BB962C8B-B14F-4D97-AF65-F5344CB8AC3E}">
+        <p14:creationId xmlns:p14="http://schemas.microsoft.com/office/powerpoint/2010/main" val="1850391546"/>
+      </p:ext>
+    </p:extLst>
+  </p:cSld>
+  <p:clrMapOvr>
+    <a:masterClrMapping/>
+  </p:clrMapOvr>
+</p:sld>
+</file>
+
+<file path=ppt/slides/slide27.xml><?xml version="1.0" encoding="utf-8"?>
+<p:sld xmlns:a="http://schemas.openxmlformats.org/drawingml/2006/main" xmlns:r="http://schemas.openxmlformats.org/officeDocument/2006/relationships" xmlns:p="http://schemas.openxmlformats.org/presentationml/2006/main">
+  <p:cSld>
+    <p:spTree>
+      <p:nvGrpSpPr>
+        <p:cNvPr id="1" name=""/>
+        <p:cNvGrpSpPr/>
+        <p:nvPr/>
+      </p:nvGrpSpPr>
+      <p:grpSpPr>
+        <a:xfrm>
+          <a:off x="0" y="0"/>
+          <a:ext cx="0" cy="0"/>
+          <a:chOff x="0" y="0"/>
+          <a:chExt cx="0" cy="0"/>
+        </a:xfrm>
+      </p:grpSpPr>
+      <p:sp>
+        <p:nvSpPr>
           <p:cNvPr id="2" name="Title 1">
             <a:extLst>
               <a:ext uri="{FF2B5EF4-FFF2-40B4-BE49-F238E27FC236}">
-                <a16:creationId xmlns="" xmlns:a16="http://schemas.microsoft.com/office/drawing/2014/main" id="{8EB01B62-8582-E09F-DA69-E77F3F495399}"/>
+                <a16:creationId xmlns:a16="http://schemas.microsoft.com/office/drawing/2014/main" xmlns="" id="{936F8D36-63A1-F427-6A4F-01E854EEB57B}"/>
               </a:ext>
             </a:extLst>
           </p:cNvPr>
@@ -13267,6 +15293,90 @@
           <a:lstStyle/>
           <a:p>
             <a:r>
+              <a:rPr lang="pt-BR" dirty="0"/>
+              <a:t>Exemplo numérico</a:t>
+            </a:r>
+            <a:endParaRPr lang="en-US" dirty="0"/>
+          </a:p>
+        </p:txBody>
+      </p:sp>
+      <p:sp>
+        <p:nvSpPr>
+          <p:cNvPr id="3" name="Content Placeholder 2">
+            <a:extLst>
+              <a:ext uri="{FF2B5EF4-FFF2-40B4-BE49-F238E27FC236}">
+                <a16:creationId xmlns:a16="http://schemas.microsoft.com/office/drawing/2014/main" xmlns="" id="{EB894157-32A4-5B45-5642-D7607A5096CE}"/>
+              </a:ext>
+            </a:extLst>
+          </p:cNvPr>
+          <p:cNvSpPr>
+            <a:spLocks noGrp="1"/>
+          </p:cNvSpPr>
+          <p:nvPr>
+            <p:ph idx="1"/>
+          </p:nvPr>
+        </p:nvSpPr>
+        <p:spPr/>
+        <p:txBody>
+          <a:bodyPr/>
+          <a:lstStyle/>
+          <a:p>
+            <a:endParaRPr lang="en-US"/>
+          </a:p>
+        </p:txBody>
+      </p:sp>
+    </p:spTree>
+    <p:extLst>
+      <p:ext uri="{BB962C8B-B14F-4D97-AF65-F5344CB8AC3E}">
+        <p14:creationId xmlns:p14="http://schemas.microsoft.com/office/powerpoint/2010/main" val="1454990387"/>
+      </p:ext>
+    </p:extLst>
+  </p:cSld>
+  <p:clrMapOvr>
+    <a:masterClrMapping/>
+  </p:clrMapOvr>
+</p:sld>
+</file>
+
+<file path=ppt/slides/slide28.xml><?xml version="1.0" encoding="utf-8"?>
+<p:sld xmlns:a="http://schemas.openxmlformats.org/drawingml/2006/main" xmlns:r="http://schemas.openxmlformats.org/officeDocument/2006/relationships" xmlns:p="http://schemas.openxmlformats.org/presentationml/2006/main">
+  <p:cSld>
+    <p:spTree>
+      <p:nvGrpSpPr>
+        <p:cNvPr id="1" name=""/>
+        <p:cNvGrpSpPr/>
+        <p:nvPr/>
+      </p:nvGrpSpPr>
+      <p:grpSpPr>
+        <a:xfrm>
+          <a:off x="0" y="0"/>
+          <a:ext cx="0" cy="0"/>
+          <a:chOff x="0" y="0"/>
+          <a:chExt cx="0" cy="0"/>
+        </a:xfrm>
+      </p:grpSpPr>
+      <p:sp>
+        <p:nvSpPr>
+          <p:cNvPr id="2" name="Title 1">
+            <a:extLst>
+              <a:ext uri="{FF2B5EF4-FFF2-40B4-BE49-F238E27FC236}">
+                <a16:creationId xmlns:a16="http://schemas.microsoft.com/office/drawing/2014/main" xmlns="" id="{8EB01B62-8582-E09F-DA69-E77F3F495399}"/>
+              </a:ext>
+            </a:extLst>
+          </p:cNvPr>
+          <p:cNvSpPr>
+            <a:spLocks noGrp="1"/>
+          </p:cNvSpPr>
+          <p:nvPr>
+            <p:ph type="title"/>
+          </p:nvPr>
+        </p:nvSpPr>
+        <p:spPr/>
+        <p:txBody>
+          <a:bodyPr/>
+          <a:lstStyle/>
+          <a:p>
+            <a:r>
               <a:rPr lang="en-US" dirty="0"/>
               <a:t>A </a:t>
             </a:r>
@@ -13293,7 +15403,7 @@
               <p:cNvPr id="3" name="Content Placeholder 2">
                 <a:extLst>
                   <a:ext uri="{FF2B5EF4-FFF2-40B4-BE49-F238E27FC236}">
-                    <a16:creationId xmlns="" xmlns:a16="http://schemas.microsoft.com/office/drawing/2014/main" id="{0DB47E26-1487-F7F1-F157-E71A864B453D}"/>
+                    <a16:creationId xmlns:a16="http://schemas.microsoft.com/office/drawing/2014/main" xmlns="" id="{0DB47E26-1487-F7F1-F157-E71A864B453D}"/>
                   </a:ext>
                 </a:extLst>
               </p:cNvPr>
@@ -13529,7 +15639,7 @@
 </p:sld>
 </file>
 
-<file path=ppt/slides/slide26.xml><?xml version="1.0" encoding="utf-8"?>
+<file path=ppt/slides/slide29.xml><?xml version="1.0" encoding="utf-8"?>
 <p:sld xmlns:a="http://schemas.openxmlformats.org/drawingml/2006/main" xmlns:r="http://schemas.openxmlformats.org/officeDocument/2006/relationships" xmlns:p="http://schemas.openxmlformats.org/presentationml/2006/main">
   <p:cSld>
     <p:spTree>
@@ -13551,7 +15661,7 @@
           <p:cNvPr id="2" name="Title 1">
             <a:extLst>
               <a:ext uri="{FF2B5EF4-FFF2-40B4-BE49-F238E27FC236}">
-                <a16:creationId xmlns="" xmlns:a16="http://schemas.microsoft.com/office/drawing/2014/main" id="{BC71F0FE-EA94-74C4-913C-E1B2789B6121}"/>
+                <a16:creationId xmlns:a16="http://schemas.microsoft.com/office/drawing/2014/main" xmlns="" id="{BC71F0FE-EA94-74C4-913C-E1B2789B6121}"/>
               </a:ext>
             </a:extLst>
           </p:cNvPr>
@@ -13592,7 +15702,7 @@
           <p:cNvPr id="3" name="Content Placeholder 2">
             <a:extLst>
               <a:ext uri="{FF2B5EF4-FFF2-40B4-BE49-F238E27FC236}">
-                <a16:creationId xmlns="" xmlns:a16="http://schemas.microsoft.com/office/drawing/2014/main" id="{387116BB-1259-5A42-97B8-F5F027BBE6D6}"/>
+                <a16:creationId xmlns:a16="http://schemas.microsoft.com/office/drawing/2014/main" xmlns="" id="{387116BB-1259-5A42-97B8-F5F027BBE6D6}"/>
               </a:ext>
             </a:extLst>
           </p:cNvPr>
@@ -13664,870 +15774,6 @@
     <p:extLst>
       <p:ext uri="{BB962C8B-B14F-4D97-AF65-F5344CB8AC3E}">
         <p14:creationId xmlns:p14="http://schemas.microsoft.com/office/powerpoint/2010/main" val="182445256"/>
-      </p:ext>
-    </p:extLst>
-  </p:cSld>
-  <p:clrMapOvr>
-    <a:masterClrMapping/>
-  </p:clrMapOvr>
-</p:sld>
-</file>
-
-<file path=ppt/slides/slide27.xml><?xml version="1.0" encoding="utf-8"?>
-<p:sld xmlns:a="http://schemas.openxmlformats.org/drawingml/2006/main" xmlns:r="http://schemas.openxmlformats.org/officeDocument/2006/relationships" xmlns:p="http://schemas.openxmlformats.org/presentationml/2006/main">
-  <p:cSld>
-    <p:spTree>
-      <p:nvGrpSpPr>
-        <p:cNvPr id="1" name=""/>
-        <p:cNvGrpSpPr/>
-        <p:nvPr/>
-      </p:nvGrpSpPr>
-      <p:grpSpPr>
-        <a:xfrm>
-          <a:off x="0" y="0"/>
-          <a:ext cx="0" cy="0"/>
-          <a:chOff x="0" y="0"/>
-          <a:chExt cx="0" cy="0"/>
-        </a:xfrm>
-      </p:grpSpPr>
-      <p:sp>
-        <p:nvSpPr>
-          <p:cNvPr id="2" name="Title 1">
-            <a:extLst>
-              <a:ext uri="{FF2B5EF4-FFF2-40B4-BE49-F238E27FC236}">
-                <a16:creationId xmlns="" xmlns:a16="http://schemas.microsoft.com/office/drawing/2014/main" id="{0FD9EB4A-BCBE-6A0F-12D6-6770FC41F962}"/>
-              </a:ext>
-            </a:extLst>
-          </p:cNvPr>
-          <p:cNvSpPr>
-            <a:spLocks noGrp="1"/>
-          </p:cNvSpPr>
-          <p:nvPr>
-            <p:ph type="title"/>
-          </p:nvPr>
-        </p:nvSpPr>
-        <p:spPr/>
-        <p:txBody>
-          <a:bodyPr/>
-          <a:lstStyle/>
-          <a:p>
-            <a:r>
-              <a:rPr lang="pt-BR" dirty="0"/>
-              <a:t>Trocando a tabela-Q por redes neurais</a:t>
-            </a:r>
-            <a:endParaRPr lang="en-US" dirty="0"/>
-          </a:p>
-        </p:txBody>
-      </p:sp>
-      <mc:AlternateContent xmlns:mc="http://schemas.openxmlformats.org/markup-compatibility/2006" xmlns:a14="http://schemas.microsoft.com/office/drawing/2010/main">
-        <mc:Choice Requires="a14">
-          <p:sp>
-            <p:nvSpPr>
-              <p:cNvPr id="3" name="Content Placeholder 2">
-                <a:extLst>
-                  <a:ext uri="{FF2B5EF4-FFF2-40B4-BE49-F238E27FC236}">
-                    <a16:creationId xmlns="" xmlns:a16="http://schemas.microsoft.com/office/drawing/2014/main" id="{9B1F2B59-589E-C89D-B023-E847F3DC922F}"/>
-                  </a:ext>
-                </a:extLst>
-              </p:cNvPr>
-              <p:cNvSpPr>
-                <a:spLocks noGrp="1"/>
-              </p:cNvSpPr>
-              <p:nvPr>
-                <p:ph idx="1"/>
-              </p:nvPr>
-            </p:nvSpPr>
-            <p:spPr>
-              <a:xfrm>
-                <a:off x="5747658" y="1825624"/>
-                <a:ext cx="6444342" cy="5032375"/>
-              </a:xfrm>
-            </p:spPr>
-            <p:txBody>
-              <a:bodyPr>
-                <a:normAutofit lnSpcReduction="10000"/>
-              </a:bodyPr>
-              <a:lstStyle/>
-              <a:p>
-                <a:r>
-                  <a:rPr lang="pt-BR" b="1" dirty="0"/>
-                  <a:t>A solução:</a:t>
-                </a:r>
-                <a:r>
-                  <a:rPr lang="pt-BR" dirty="0"/>
-                  <a:t> Em vez de usar uma matriz para buscar </a:t>
-                </a:r>
-                <a14:m>
-                  <m:oMath xmlns:m="http://schemas.openxmlformats.org/officeDocument/2006/math">
-                    <m:r>
-                      <a:rPr lang="pt-BR" b="0" i="1" smtClean="0">
-                        <a:latin typeface="Cambria Math" panose="02040503050406030204" pitchFamily="18" charset="0"/>
-                      </a:rPr>
-                      <m:t>𝑄</m:t>
-                    </m:r>
-                    <m:r>
-                      <a:rPr lang="pt-BR" b="0" i="1" smtClean="0">
-                        <a:latin typeface="Cambria Math" panose="02040503050406030204" pitchFamily="18" charset="0"/>
-                      </a:rPr>
-                      <m:t>(</m:t>
-                    </m:r>
-                    <m:r>
-                      <a:rPr lang="pt-BR" b="0" i="1" smtClean="0">
-                        <a:latin typeface="Cambria Math" panose="02040503050406030204" pitchFamily="18" charset="0"/>
-                      </a:rPr>
-                      <m:t>𝑠</m:t>
-                    </m:r>
-                    <m:r>
-                      <a:rPr lang="pt-BR" b="0" i="1" smtClean="0">
-                        <a:latin typeface="Cambria Math" panose="02040503050406030204" pitchFamily="18" charset="0"/>
-                      </a:rPr>
-                      <m:t>,</m:t>
-                    </m:r>
-                    <m:r>
-                      <a:rPr lang="pt-BR" b="0" i="1" smtClean="0">
-                        <a:latin typeface="Cambria Math" panose="02040503050406030204" pitchFamily="18" charset="0"/>
-                      </a:rPr>
-                      <m:t>𝑎</m:t>
-                    </m:r>
-                    <m:r>
-                      <a:rPr lang="pt-BR" b="0" i="1" smtClean="0">
-                        <a:latin typeface="Cambria Math" panose="02040503050406030204" pitchFamily="18" charset="0"/>
-                      </a:rPr>
-                      <m:t>)</m:t>
-                    </m:r>
-                  </m:oMath>
-                </a14:m>
-                <a:r>
-                  <a:rPr lang="pt-BR" dirty="0"/>
-                  <a:t>, usamos uma </a:t>
-                </a:r>
-                <a:r>
-                  <a:rPr lang="pt-BR" b="1" dirty="0"/>
-                  <a:t>rede neural</a:t>
-                </a:r>
-                <a:r>
-                  <a:rPr lang="pt-BR" dirty="0"/>
-                  <a:t> para </a:t>
-                </a:r>
-                <a:r>
-                  <a:rPr lang="pt-BR" i="1" dirty="0"/>
-                  <a:t>aproximar</a:t>
-                </a:r>
-                <a:r>
-                  <a:rPr lang="pt-BR" dirty="0"/>
-                  <a:t> a função </a:t>
-                </a:r>
-                <a14:m>
-                  <m:oMath xmlns:m="http://schemas.openxmlformats.org/officeDocument/2006/math">
-                    <m:r>
-                      <a:rPr lang="pt-BR" b="0" i="1" smtClean="0">
-                        <a:latin typeface="Cambria Math" panose="02040503050406030204" pitchFamily="18" charset="0"/>
-                      </a:rPr>
-                      <m:t>𝑄</m:t>
-                    </m:r>
-                  </m:oMath>
-                </a14:m>
-                <a:r>
-                  <a:rPr lang="pt-BR" dirty="0"/>
-                  <a:t>.</a:t>
-                </a:r>
-              </a:p>
-              <a:p>
-                <a:r>
-                  <a:rPr lang="pt-BR" dirty="0"/>
-                  <a:t>A rede aprender a generalizar estados: o agente não precisa visitar todos os estados.</a:t>
-                </a:r>
-              </a:p>
-              <a:p>
-                <a:r>
-                  <a:rPr lang="pt-BR" b="1" dirty="0"/>
-                  <a:t>Entrada:</a:t>
-                </a:r>
-                <a:r>
-                  <a:rPr lang="pt-BR" dirty="0"/>
-                  <a:t> O estado (e.g., a imagem da câmera).</a:t>
-                </a:r>
-              </a:p>
-              <a:p>
-                <a:pPr lvl="1">
-                  <a:buFont typeface="Wingdings" panose="05000000000000000000" pitchFamily="2" charset="2"/>
-                  <a:buChar char="§"/>
-                </a:pPr>
-                <a:r>
-                  <a:rPr lang="pt-BR" dirty="0"/>
-                  <a:t>Agora, o estado pode ser composto por valores contínuos.</a:t>
-                </a:r>
-              </a:p>
-              <a:p>
-                <a:r>
-                  <a:rPr lang="pt-BR" b="1" dirty="0"/>
-                  <a:t>Saída:</a:t>
-                </a:r>
-                <a:r>
-                  <a:rPr lang="pt-BR" dirty="0"/>
-                  <a:t> Os valores </a:t>
-                </a:r>
-                <a14:m>
-                  <m:oMath xmlns:m="http://schemas.openxmlformats.org/officeDocument/2006/math">
-                    <m:r>
-                      <a:rPr lang="pt-BR" i="1">
-                        <a:latin typeface="Cambria Math" panose="02040503050406030204" pitchFamily="18" charset="0"/>
-                      </a:rPr>
-                      <m:t>𝑄</m:t>
-                    </m:r>
-                  </m:oMath>
-                </a14:m>
-                <a:r>
-                  <a:rPr lang="pt-BR" dirty="0"/>
-                  <a:t> para todas as ações possíveis naquele estado.</a:t>
-                </a:r>
-              </a:p>
-            </p:txBody>
-          </p:sp>
-        </mc:Choice>
-        <mc:Fallback xmlns="">
-          <p:sp>
-            <p:nvSpPr>
-              <p:cNvPr id="3" name="Content Placeholder 2">
-                <a:extLst>
-                  <a:ext uri="{FF2B5EF4-FFF2-40B4-BE49-F238E27FC236}">
-                    <a16:creationId xmlns:a16="http://schemas.microsoft.com/office/drawing/2014/main" id="{9B1F2B59-589E-C89D-B023-E847F3DC922F}"/>
-                  </a:ext>
-                </a:extLst>
-              </p:cNvPr>
-              <p:cNvSpPr>
-                <a:spLocks noGrp="1" noRot="1" noChangeAspect="1" noMove="1" noResize="1" noEditPoints="1" noAdjustHandles="1" noChangeArrowheads="1" noChangeShapeType="1" noTextEdit="1"/>
-              </p:cNvSpPr>
-              <p:nvPr>
-                <p:ph idx="1"/>
-              </p:nvPr>
-            </p:nvSpPr>
-            <p:spPr>
-              <a:xfrm>
-                <a:off x="5747658" y="1825624"/>
-                <a:ext cx="6444342" cy="5032375"/>
-              </a:xfrm>
-              <a:blipFill>
-                <a:blip r:embed="rId3"/>
-                <a:stretch>
-                  <a:fillRect l="-1703" t="-2663"/>
-                </a:stretch>
-              </a:blipFill>
-            </p:spPr>
-            <p:txBody>
-              <a:bodyPr/>
-              <a:lstStyle/>
-              <a:p>
-                <a:r>
-                  <a:rPr lang="en-US">
-                    <a:noFill/>
-                  </a:rPr>
-                  <a:t> </a:t>
-                </a:r>
-              </a:p>
-            </p:txBody>
-          </p:sp>
-        </mc:Fallback>
-      </mc:AlternateContent>
-      <p:pic>
-        <p:nvPicPr>
-          <p:cNvPr id="1028" name="Picture 4" descr="Cracking the Spell of Q* - A New Method in Problem Solving | Benny's Mind  Hack">
-            <a:extLst>
-              <a:ext uri="{FF2B5EF4-FFF2-40B4-BE49-F238E27FC236}">
-                <a16:creationId xmlns="" xmlns:a16="http://schemas.microsoft.com/office/drawing/2014/main" id="{2FAF9048-FD7A-0345-D833-A8A15BE69361}"/>
-              </a:ext>
-            </a:extLst>
-          </p:cNvPr>
-          <p:cNvPicPr>
-            <a:picLocks noChangeAspect="1" noChangeArrowheads="1"/>
-          </p:cNvPicPr>
-          <p:nvPr/>
-        </p:nvPicPr>
-        <p:blipFill>
-          <a:blip r:embed="rId4">
-            <a:extLst>
-              <a:ext uri="{28A0092B-C50C-407E-A947-70E740481C1C}">
-                <a14:useLocalDpi xmlns:a14="http://schemas.microsoft.com/office/drawing/2010/main" val="0"/>
-              </a:ext>
-            </a:extLst>
-          </a:blip>
-          <a:srcRect/>
-          <a:stretch>
-            <a:fillRect/>
-          </a:stretch>
-        </p:blipFill>
-        <p:spPr bwMode="auto">
-          <a:xfrm>
-            <a:off x="95250" y="2242457"/>
-            <a:ext cx="5172489" cy="3399064"/>
-          </a:xfrm>
-          <a:prstGeom prst="rect">
-            <a:avLst/>
-          </a:prstGeom>
-          <a:noFill/>
-          <a:extLst>
-            <a:ext uri="{909E8E84-426E-40DD-AFC4-6F175D3DCCD1}">
-              <a14:hiddenFill xmlns:a14="http://schemas.microsoft.com/office/drawing/2010/main">
-                <a:solidFill>
-                  <a:srgbClr val="FFFFFF"/>
-                </a:solidFill>
-              </a14:hiddenFill>
-            </a:ext>
-          </a:extLst>
-        </p:spPr>
-      </p:pic>
-    </p:spTree>
-    <p:extLst>
-      <p:ext uri="{BB962C8B-B14F-4D97-AF65-F5344CB8AC3E}">
-        <p14:creationId xmlns:p14="http://schemas.microsoft.com/office/powerpoint/2010/main" val="2875250819"/>
-      </p:ext>
-    </p:extLst>
-  </p:cSld>
-  <p:clrMapOvr>
-    <a:masterClrMapping/>
-  </p:clrMapOvr>
-</p:sld>
-</file>
-
-<file path=ppt/slides/slide28.xml><?xml version="1.0" encoding="utf-8"?>
-<p:sld xmlns:a="http://schemas.openxmlformats.org/drawingml/2006/main" xmlns:r="http://schemas.openxmlformats.org/officeDocument/2006/relationships" xmlns:p="http://schemas.openxmlformats.org/presentationml/2006/main">
-  <p:cSld>
-    <p:spTree>
-      <p:nvGrpSpPr>
-        <p:cNvPr id="1" name=""/>
-        <p:cNvGrpSpPr/>
-        <p:nvPr/>
-      </p:nvGrpSpPr>
-      <p:grpSpPr>
-        <a:xfrm>
-          <a:off x="0" y="0"/>
-          <a:ext cx="0" cy="0"/>
-          <a:chOff x="0" y="0"/>
-          <a:chExt cx="0" cy="0"/>
-        </a:xfrm>
-      </p:grpSpPr>
-      <p:sp>
-        <p:nvSpPr>
-          <p:cNvPr id="2" name="Title 1">
-            <a:extLst>
-              <a:ext uri="{FF2B5EF4-FFF2-40B4-BE49-F238E27FC236}">
-                <a16:creationId xmlns="" xmlns:a16="http://schemas.microsoft.com/office/drawing/2014/main" id="{48EDEA96-2DFF-1829-9984-096F6593BEEE}"/>
-              </a:ext>
-            </a:extLst>
-          </p:cNvPr>
-          <p:cNvSpPr>
-            <a:spLocks noGrp="1"/>
-          </p:cNvSpPr>
-          <p:nvPr>
-            <p:ph type="title"/>
-          </p:nvPr>
-        </p:nvSpPr>
-        <p:spPr/>
-        <p:txBody>
-          <a:bodyPr/>
-          <a:lstStyle/>
-          <a:p>
-            <a:r>
-              <a:rPr lang="en-US" dirty="0"/>
-              <a:t>Onde RL é </a:t>
-            </a:r>
-            <a:r>
-              <a:rPr lang="en-US" dirty="0" err="1"/>
-              <a:t>usado</a:t>
-            </a:r>
-            <a:r>
-              <a:rPr lang="en-US" dirty="0"/>
-              <a:t>?</a:t>
-            </a:r>
-          </a:p>
-        </p:txBody>
-      </p:sp>
-      <p:sp>
-        <p:nvSpPr>
-          <p:cNvPr id="3" name="Content Placeholder 2">
-            <a:extLst>
-              <a:ext uri="{FF2B5EF4-FFF2-40B4-BE49-F238E27FC236}">
-                <a16:creationId xmlns="" xmlns:a16="http://schemas.microsoft.com/office/drawing/2014/main" id="{0160E88F-503C-2590-9D5D-B2BDD50D2767}"/>
-              </a:ext>
-            </a:extLst>
-          </p:cNvPr>
-          <p:cNvSpPr>
-            <a:spLocks noGrp="1"/>
-          </p:cNvSpPr>
-          <p:nvPr>
-            <p:ph idx="1"/>
-          </p:nvPr>
-        </p:nvSpPr>
-        <p:spPr>
-          <a:xfrm>
-            <a:off x="5061856" y="1825624"/>
-            <a:ext cx="7130144" cy="5032375"/>
-          </a:xfrm>
-        </p:spPr>
-        <p:txBody>
-          <a:bodyPr>
-            <a:normAutofit lnSpcReduction="10000"/>
-          </a:bodyPr>
-          <a:lstStyle/>
-          <a:p>
-            <a:r>
-              <a:rPr lang="pt-BR" b="1" dirty="0"/>
-              <a:t>Robótica e </a:t>
-            </a:r>
-            <a:r>
-              <a:rPr lang="pt-BR" b="1" dirty="0" smtClean="0"/>
-              <a:t>manufatura: </a:t>
-            </a:r>
-            <a:r>
-              <a:rPr lang="pt-BR" dirty="0" smtClean="0"/>
-              <a:t>Ensinar </a:t>
-            </a:r>
-            <a:r>
-              <a:rPr lang="pt-BR" dirty="0"/>
-              <a:t>robôs a andar, agarrar objetos ou equilibrar cargas</a:t>
-            </a:r>
-            <a:r>
-              <a:rPr lang="pt-BR" dirty="0" smtClean="0"/>
-              <a:t>.</a:t>
-            </a:r>
-            <a:endParaRPr lang="pt-BR" dirty="0"/>
-          </a:p>
-          <a:p>
-            <a:r>
-              <a:rPr lang="pt-BR" b="1" dirty="0"/>
-              <a:t>Otimização de redes e sistemas:</a:t>
-            </a:r>
-            <a:r>
-              <a:rPr lang="pt-BR" dirty="0"/>
-              <a:t> Roteamento de pacotes dinâmico para evitar gargalos na rede.</a:t>
-            </a:r>
-          </a:p>
-          <a:p>
-            <a:r>
-              <a:rPr lang="pt-BR" b="1" dirty="0"/>
-              <a:t>Sistemas de recomendação</a:t>
-            </a:r>
-            <a:r>
-              <a:rPr lang="pt-BR" b="1" dirty="0" smtClean="0"/>
-              <a:t>: </a:t>
-            </a:r>
-            <a:r>
-              <a:rPr lang="pt-BR" dirty="0"/>
-              <a:t>Otimizar qual vídeo ou anúncio mostrar para você na internet com base no engajamento a longo prazo.</a:t>
-            </a:r>
-          </a:p>
-          <a:p>
-            <a:r>
-              <a:rPr lang="pt-BR" b="1" dirty="0"/>
-              <a:t>Controle industrial:</a:t>
-            </a:r>
-            <a:r>
-              <a:rPr lang="pt-BR" dirty="0"/>
-              <a:t> Ajuste fino de caldeiras e refrigeração em data centers para reduzir consumo de energia</a:t>
-            </a:r>
-            <a:r>
-              <a:rPr lang="pt-BR" dirty="0" smtClean="0"/>
-              <a:t>.</a:t>
-            </a:r>
-            <a:endParaRPr lang="pt-BR" dirty="0"/>
-          </a:p>
-        </p:txBody>
-      </p:sp>
-      <p:pic>
-        <p:nvPicPr>
-          <p:cNvPr id="6" name="Picture 5">
-            <a:extLst>
-              <a:ext uri="{FF2B5EF4-FFF2-40B4-BE49-F238E27FC236}">
-                <a16:creationId xmlns="" xmlns:a16="http://schemas.microsoft.com/office/drawing/2014/main" id="{265EF8FE-70EB-D556-D43F-F69593E54B8C}"/>
-              </a:ext>
-            </a:extLst>
-          </p:cNvPr>
-          <p:cNvPicPr>
-            <a:picLocks noChangeAspect="1"/>
-          </p:cNvPicPr>
-          <p:nvPr/>
-        </p:nvPicPr>
-        <p:blipFill>
-          <a:blip r:embed="rId3" cstate="print">
-            <a:extLst>
-              <a:ext uri="{28A0092B-C50C-407E-A947-70E740481C1C}">
-                <a14:useLocalDpi xmlns:a14="http://schemas.microsoft.com/office/drawing/2010/main" val="0"/>
-              </a:ext>
-            </a:extLst>
-          </a:blip>
-          <a:stretch>
-            <a:fillRect/>
-          </a:stretch>
-        </p:blipFill>
-        <p:spPr>
-          <a:xfrm>
-            <a:off x="293917" y="2416629"/>
-            <a:ext cx="4604655" cy="3069770"/>
-          </a:xfrm>
-          <a:prstGeom prst="rect">
-            <a:avLst/>
-          </a:prstGeom>
-        </p:spPr>
-      </p:pic>
-    </p:spTree>
-    <p:extLst>
-      <p:ext uri="{BB962C8B-B14F-4D97-AF65-F5344CB8AC3E}">
-        <p14:creationId xmlns:p14="http://schemas.microsoft.com/office/powerpoint/2010/main" val="2981192540"/>
-      </p:ext>
-    </p:extLst>
-  </p:cSld>
-  <p:clrMapOvr>
-    <a:masterClrMapping/>
-  </p:clrMapOvr>
-</p:sld>
-</file>
-
-<file path=ppt/slides/slide29.xml><?xml version="1.0" encoding="utf-8"?>
-<p:sld xmlns:a="http://schemas.openxmlformats.org/drawingml/2006/main" xmlns:r="http://schemas.openxmlformats.org/officeDocument/2006/relationships" xmlns:p="http://schemas.openxmlformats.org/presentationml/2006/main">
-  <p:cSld>
-    <p:spTree>
-      <p:nvGrpSpPr>
-        <p:cNvPr id="1" name=""/>
-        <p:cNvGrpSpPr/>
-        <p:nvPr/>
-      </p:nvGrpSpPr>
-      <p:grpSpPr>
-        <a:xfrm>
-          <a:off x="0" y="0"/>
-          <a:ext cx="0" cy="0"/>
-          <a:chOff x="0" y="0"/>
-          <a:chExt cx="0" cy="0"/>
-        </a:xfrm>
-      </p:grpSpPr>
-      <p:sp>
-        <p:nvSpPr>
-          <p:cNvPr id="2" name="Título 1">
-            <a:extLst>
-              <a:ext uri="{FF2B5EF4-FFF2-40B4-BE49-F238E27FC236}">
-                <a16:creationId xmlns="" xmlns:a16="http://schemas.microsoft.com/office/drawing/2014/main" id="{94AB8438-E56E-2412-517C-8456E4CA773C}"/>
-              </a:ext>
-            </a:extLst>
-          </p:cNvPr>
-          <p:cNvSpPr>
-            <a:spLocks noGrp="1"/>
-          </p:cNvSpPr>
-          <p:nvPr>
-            <p:ph type="title"/>
-          </p:nvPr>
-        </p:nvSpPr>
-        <p:spPr/>
-        <p:txBody>
-          <a:bodyPr/>
-          <a:lstStyle/>
-          <a:p>
-            <a:r>
-              <a:rPr lang="pt-BR" dirty="0"/>
-              <a:t>Exemplo</a:t>
-            </a:r>
-          </a:p>
-        </p:txBody>
-      </p:sp>
-      <p:sp>
-        <p:nvSpPr>
-          <p:cNvPr id="3" name="Espaço Reservado para Conteúdo 2">
-            <a:extLst>
-              <a:ext uri="{FF2B5EF4-FFF2-40B4-BE49-F238E27FC236}">
-                <a16:creationId xmlns="" xmlns:a16="http://schemas.microsoft.com/office/drawing/2014/main" id="{F7E2B09C-6D56-4C9F-A364-B904CCE2F1A0}"/>
-              </a:ext>
-            </a:extLst>
-          </p:cNvPr>
-          <p:cNvSpPr>
-            <a:spLocks noGrp="1"/>
-          </p:cNvSpPr>
-          <p:nvPr>
-            <p:ph idx="1"/>
-          </p:nvPr>
-        </p:nvSpPr>
-        <p:spPr/>
-        <p:txBody>
-          <a:bodyPr/>
-          <a:lstStyle/>
-          <a:p>
-            <a:r>
-              <a:rPr lang="pt-BR" dirty="0"/>
-              <a:t>Exemplo: </a:t>
-            </a:r>
-            <a:r>
-              <a:rPr lang="pt-BR" dirty="0" smtClean="0"/>
-              <a:t>q-</a:t>
-            </a:r>
-            <a:r>
-              <a:rPr lang="pt-BR" dirty="0" err="1" smtClean="0"/>
-              <a:t>learning.ipynb</a:t>
-            </a:r>
-            <a:endParaRPr lang="en-US" dirty="0"/>
-          </a:p>
-          <a:p>
-            <a:pPr marL="0" indent="0">
-              <a:buNone/>
-            </a:pPr>
-            <a:endParaRPr lang="pt-BR" dirty="0"/>
-          </a:p>
-        </p:txBody>
-      </p:sp>
-      <p:grpSp>
-        <p:nvGrpSpPr>
-          <p:cNvPr id="18" name="Group 17">
-            <a:extLst>
-              <a:ext uri="{FF2B5EF4-FFF2-40B4-BE49-F238E27FC236}">
-                <a16:creationId xmlns="" xmlns:a16="http://schemas.microsoft.com/office/drawing/2014/main" id="{627C64FD-88E0-EC8E-2A34-0D5737B4C854}"/>
-              </a:ext>
-            </a:extLst>
-          </p:cNvPr>
-          <p:cNvGrpSpPr/>
-          <p:nvPr/>
-        </p:nvGrpSpPr>
-        <p:grpSpPr>
-          <a:xfrm>
-            <a:off x="1752685" y="2681262"/>
-            <a:ext cx="8371070" cy="2659743"/>
-            <a:chOff x="1752685" y="2681262"/>
-            <a:chExt cx="8371070" cy="2659743"/>
-          </a:xfrm>
-        </p:grpSpPr>
-        <p:pic>
-          <p:nvPicPr>
-            <p:cNvPr id="12" name="Picture 4" descr="Project Jupyter | Try Jupyter">
-              <a:extLst>
-                <a:ext uri="{FF2B5EF4-FFF2-40B4-BE49-F238E27FC236}">
-                  <a16:creationId xmlns="" xmlns:a16="http://schemas.microsoft.com/office/drawing/2014/main" id="{FF92EA36-91E7-292B-D7A0-2D4D83A10F98}"/>
-                </a:ext>
-              </a:extLst>
-            </p:cNvPr>
-            <p:cNvPicPr>
-              <a:picLocks noChangeAspect="1" noChangeArrowheads="1"/>
-            </p:cNvPicPr>
-            <p:nvPr/>
-          </p:nvPicPr>
-          <p:blipFill>
-            <a:blip r:embed="rId3" cstate="print">
-              <a:extLst>
-                <a:ext uri="{28A0092B-C50C-407E-A947-70E740481C1C}">
-                  <a14:useLocalDpi xmlns:a14="http://schemas.microsoft.com/office/drawing/2010/main" val="0"/>
-                </a:ext>
-              </a:extLst>
-            </a:blip>
-            <a:srcRect/>
-            <a:stretch>
-              <a:fillRect/>
-            </a:stretch>
-          </p:blipFill>
-          <p:spPr bwMode="auto">
-            <a:xfrm>
-              <a:off x="3331027" y="3102450"/>
-              <a:ext cx="3461657" cy="1817370"/>
-            </a:xfrm>
-            <a:prstGeom prst="rect">
-              <a:avLst/>
-            </a:prstGeom>
-            <a:noFill/>
-            <a:extLst>
-              <a:ext uri="{909E8E84-426E-40DD-AFC4-6F175D3DCCD1}">
-                <a14:hiddenFill xmlns:a14="http://schemas.microsoft.com/office/drawing/2010/main">
-                  <a:solidFill>
-                    <a:srgbClr val="FFFFFF"/>
-                  </a:solidFill>
-                </a14:hiddenFill>
-              </a:ext>
-            </a:extLst>
-          </p:spPr>
-        </p:pic>
-        <p:pic>
-          <p:nvPicPr>
-            <p:cNvPr id="13" name="Picture 8" descr="Google Colaboratory Colab - Guía Completa Español - Marketing Branding">
-              <a:extLst>
-                <a:ext uri="{FF2B5EF4-FFF2-40B4-BE49-F238E27FC236}">
-                  <a16:creationId xmlns="" xmlns:a16="http://schemas.microsoft.com/office/drawing/2014/main" id="{46F1718A-89E6-9E63-E40B-2B19852D6AA0}"/>
-                </a:ext>
-              </a:extLst>
-            </p:cNvPr>
-            <p:cNvPicPr>
-              <a:picLocks noChangeAspect="1" noChangeArrowheads="1"/>
-            </p:cNvPicPr>
-            <p:nvPr/>
-          </p:nvPicPr>
-          <p:blipFill rotWithShape="1">
-            <a:blip r:embed="rId4" cstate="print">
-              <a:extLst>
-                <a:ext uri="{28A0092B-C50C-407E-A947-70E740481C1C}">
-                  <a14:useLocalDpi xmlns:a14="http://schemas.microsoft.com/office/drawing/2010/main" val="0"/>
-                </a:ext>
-              </a:extLst>
-            </a:blip>
-            <a:srcRect l="5865" r="10641"/>
-            <a:stretch/>
-          </p:blipFill>
-          <p:spPr bwMode="auto">
-            <a:xfrm>
-              <a:off x="6792684" y="2681262"/>
-              <a:ext cx="3331071" cy="2659743"/>
-            </a:xfrm>
-            <a:prstGeom prst="rect">
-              <a:avLst/>
-            </a:prstGeom>
-            <a:noFill/>
-            <a:extLst>
-              <a:ext uri="{909E8E84-426E-40DD-AFC4-6F175D3DCCD1}">
-                <a14:hiddenFill xmlns:a14="http://schemas.microsoft.com/office/drawing/2010/main">
-                  <a:solidFill>
-                    <a:srgbClr val="FFFFFF"/>
-                  </a:solidFill>
-                </a14:hiddenFill>
-              </a:ext>
-            </a:extLst>
-          </p:spPr>
-        </p:pic>
-        <p:pic>
-          <p:nvPicPr>
-            <p:cNvPr id="14" name="Picture 10" descr="IT12A01: FUNDAMENTALS OF PYTHON PROGRAMMING (SF) (SYNCHRONOUS E-LEARNING) -  NTUC LearningHub">
-              <a:extLst>
-                <a:ext uri="{FF2B5EF4-FFF2-40B4-BE49-F238E27FC236}">
-                  <a16:creationId xmlns="" xmlns:a16="http://schemas.microsoft.com/office/drawing/2014/main" id="{33F6B1B4-9B79-D634-3E35-33F24609C848}"/>
-                </a:ext>
-              </a:extLst>
-            </p:cNvPr>
-            <p:cNvPicPr>
-              <a:picLocks noChangeAspect="1" noChangeArrowheads="1"/>
-            </p:cNvPicPr>
-            <p:nvPr/>
-          </p:nvPicPr>
-          <p:blipFill rotWithShape="1">
-            <a:blip r:embed="rId5">
-              <a:extLst>
-                <a:ext uri="{28A0092B-C50C-407E-A947-70E740481C1C}">
-                  <a14:useLocalDpi xmlns:a14="http://schemas.microsoft.com/office/drawing/2010/main" val="0"/>
-                </a:ext>
-              </a:extLst>
-            </a:blip>
-            <a:srcRect l="23319" r="20198"/>
-            <a:stretch/>
-          </p:blipFill>
-          <p:spPr bwMode="auto">
-            <a:xfrm>
-              <a:off x="1752685" y="3176833"/>
-              <a:ext cx="1894114" cy="1877924"/>
-            </a:xfrm>
-            <a:prstGeom prst="rect">
-              <a:avLst/>
-            </a:prstGeom>
-            <a:noFill/>
-            <a:extLst>
-              <a:ext uri="{909E8E84-426E-40DD-AFC4-6F175D3DCCD1}">
-                <a14:hiddenFill xmlns:a14="http://schemas.microsoft.com/office/drawing/2010/main">
-                  <a:solidFill>
-                    <a:srgbClr val="FFFFFF"/>
-                  </a:solidFill>
-                </a14:hiddenFill>
-              </a:ext>
-            </a:extLst>
-          </p:spPr>
-        </p:pic>
-        <p:sp>
-          <p:nvSpPr>
-            <p:cNvPr id="15" name="Sinal de Adição 7">
-              <a:extLst>
-                <a:ext uri="{FF2B5EF4-FFF2-40B4-BE49-F238E27FC236}">
-                  <a16:creationId xmlns="" xmlns:a16="http://schemas.microsoft.com/office/drawing/2014/main" id="{6959EE6C-DCDB-E78B-5C50-EBD3FF3049E2}"/>
-                </a:ext>
-              </a:extLst>
-            </p:cNvPr>
-            <p:cNvSpPr>
-              <a:spLocks noChangeAspect="1"/>
-            </p:cNvSpPr>
-            <p:nvPr/>
-          </p:nvSpPr>
-          <p:spPr>
-            <a:xfrm>
-              <a:off x="3646799" y="3545037"/>
-              <a:ext cx="468000" cy="468000"/>
-            </a:xfrm>
-            <a:prstGeom prst="mathPlus">
-              <a:avLst/>
-            </a:prstGeom>
-          </p:spPr>
-          <p:style>
-            <a:lnRef idx="2">
-              <a:schemeClr val="accent1">
-                <a:shade val="15000"/>
-              </a:schemeClr>
-            </a:lnRef>
-            <a:fillRef idx="1">
-              <a:schemeClr val="accent1"/>
-            </a:fillRef>
-            <a:effectRef idx="0">
-              <a:schemeClr val="accent1"/>
-            </a:effectRef>
-            <a:fontRef idx="minor">
-              <a:schemeClr val="lt1"/>
-            </a:fontRef>
-          </p:style>
-          <p:txBody>
-            <a:bodyPr rtlCol="0" anchor="ctr"/>
-            <a:lstStyle/>
-            <a:p>
-              <a:pPr algn="ctr"/>
-              <a:endParaRPr lang="pt-BR"/>
-            </a:p>
-          </p:txBody>
-        </p:sp>
-        <p:sp>
-          <p:nvSpPr>
-            <p:cNvPr id="17" name="Sinal de Adição 10">
-              <a:extLst>
-                <a:ext uri="{FF2B5EF4-FFF2-40B4-BE49-F238E27FC236}">
-                  <a16:creationId xmlns="" xmlns:a16="http://schemas.microsoft.com/office/drawing/2014/main" id="{30A21FDB-ABA6-9FD5-49EF-7762414AEF0C}"/>
-                </a:ext>
-              </a:extLst>
-            </p:cNvPr>
-            <p:cNvSpPr>
-              <a:spLocks noChangeAspect="1"/>
-            </p:cNvSpPr>
-            <p:nvPr/>
-          </p:nvSpPr>
-          <p:spPr>
-            <a:xfrm>
-              <a:off x="6096043" y="3467980"/>
-              <a:ext cx="468000" cy="468000"/>
-            </a:xfrm>
-            <a:prstGeom prst="mathPlus">
-              <a:avLst/>
-            </a:prstGeom>
-          </p:spPr>
-          <p:style>
-            <a:lnRef idx="2">
-              <a:schemeClr val="accent1">
-                <a:shade val="15000"/>
-              </a:schemeClr>
-            </a:lnRef>
-            <a:fillRef idx="1">
-              <a:schemeClr val="accent1"/>
-            </a:fillRef>
-            <a:effectRef idx="0">
-              <a:schemeClr val="accent1"/>
-            </a:effectRef>
-            <a:fontRef idx="minor">
-              <a:schemeClr val="lt1"/>
-            </a:fontRef>
-          </p:style>
-          <p:txBody>
-            <a:bodyPr rtlCol="0" anchor="ctr"/>
-            <a:lstStyle/>
-            <a:p>
-              <a:pPr algn="ctr"/>
-              <a:endParaRPr lang="pt-BR"/>
-            </a:p>
-          </p:txBody>
-        </p:sp>
-      </p:grpSp>
-    </p:spTree>
-    <p:extLst>
-      <p:ext uri="{BB962C8B-B14F-4D97-AF65-F5344CB8AC3E}">
-        <p14:creationId xmlns:p14="http://schemas.microsoft.com/office/powerpoint/2010/main" val="763717033"/>
       </p:ext>
     </p:extLst>
   </p:cSld>
@@ -14559,7 +15805,7 @@
           <p:cNvPr id="2" name="Título 1">
             <a:extLst>
               <a:ext uri="{FF2B5EF4-FFF2-40B4-BE49-F238E27FC236}">
-                <a16:creationId xmlns="" xmlns:a16="http://schemas.microsoft.com/office/drawing/2014/main" id="{7F5FF925-67DE-CC62-E869-C6E3C1D771E6}"/>
+                <a16:creationId xmlns:a16="http://schemas.microsoft.com/office/drawing/2014/main" xmlns="" id="{7F5FF925-67DE-CC62-E869-C6E3C1D771E6}"/>
               </a:ext>
             </a:extLst>
           </p:cNvPr>
@@ -14599,7 +15845,7 @@
           <p:cNvPr id="3" name="Espaço Reservado para Conteúdo 2">
             <a:extLst>
               <a:ext uri="{FF2B5EF4-FFF2-40B4-BE49-F238E27FC236}">
-                <a16:creationId xmlns="" xmlns:a16="http://schemas.microsoft.com/office/drawing/2014/main" id="{7DA84068-671A-9D40-4F76-2C57E4F720C2}"/>
+                <a16:creationId xmlns:a16="http://schemas.microsoft.com/office/drawing/2014/main" xmlns="" id="{7DA84068-671A-9D40-4F76-2C57E4F720C2}"/>
               </a:ext>
             </a:extLst>
           </p:cNvPr>
@@ -14662,7 +15908,7 @@
           <p:cNvPr id="2051" name="Picture 3" descr="Understanding the Pillars of Machine Learning: Supervised, Unsupervised,  and Reinforcement Learning">
             <a:extLst>
               <a:ext uri="{FF2B5EF4-FFF2-40B4-BE49-F238E27FC236}">
-                <a16:creationId xmlns="" xmlns:a16="http://schemas.microsoft.com/office/drawing/2014/main" id="{BDF6F402-9EED-6D9D-33D9-227B654D168D}"/>
+                <a16:creationId xmlns:a16="http://schemas.microsoft.com/office/drawing/2014/main" xmlns="" id="{BDF6F402-9EED-6D9D-33D9-227B654D168D}"/>
               </a:ext>
             </a:extLst>
           </p:cNvPr>
@@ -14739,7 +15985,7 @@
           <p:cNvPr id="2" name="Title 1">
             <a:extLst>
               <a:ext uri="{FF2B5EF4-FFF2-40B4-BE49-F238E27FC236}">
-                <a16:creationId xmlns="" xmlns:a16="http://schemas.microsoft.com/office/drawing/2014/main" id="{E8FD0E11-3B37-4336-5BF0-C8C033354AF6}"/>
+                <a16:creationId xmlns:a16="http://schemas.microsoft.com/office/drawing/2014/main" xmlns="" id="{0FD9EB4A-BCBE-6A0F-12D6-6770FC41F962}"/>
               </a:ext>
             </a:extLst>
           </p:cNvPr>
@@ -14757,56 +16003,273 @@
           <a:p>
             <a:r>
               <a:rPr lang="pt-BR" dirty="0"/>
-              <a:t>Lista de exercícios</a:t>
+              <a:t>Trocando a tabela-Q por redes neurais</a:t>
             </a:r>
             <a:endParaRPr lang="en-US" dirty="0"/>
           </a:p>
         </p:txBody>
       </p:sp>
-      <p:sp>
-        <p:nvSpPr>
-          <p:cNvPr id="3" name="Content Placeholder 2">
+      <mc:AlternateContent xmlns:mc="http://schemas.openxmlformats.org/markup-compatibility/2006" xmlns:a14="http://schemas.microsoft.com/office/drawing/2010/main">
+        <mc:Choice Requires="a14">
+          <p:sp>
+            <p:nvSpPr>
+              <p:cNvPr id="3" name="Content Placeholder 2">
+                <a:extLst>
+                  <a:ext uri="{FF2B5EF4-FFF2-40B4-BE49-F238E27FC236}">
+                    <a16:creationId xmlns:a16="http://schemas.microsoft.com/office/drawing/2014/main" xmlns="" id="{9B1F2B59-589E-C89D-B023-E847F3DC922F}"/>
+                  </a:ext>
+                </a:extLst>
+              </p:cNvPr>
+              <p:cNvSpPr>
+                <a:spLocks noGrp="1"/>
+              </p:cNvSpPr>
+              <p:nvPr>
+                <p:ph idx="1"/>
+              </p:nvPr>
+            </p:nvSpPr>
+            <p:spPr>
+              <a:xfrm>
+                <a:off x="5747658" y="1825624"/>
+                <a:ext cx="6444342" cy="5032375"/>
+              </a:xfrm>
+            </p:spPr>
+            <p:txBody>
+              <a:bodyPr>
+                <a:normAutofit lnSpcReduction="10000"/>
+              </a:bodyPr>
+              <a:lstStyle/>
+              <a:p>
+                <a:r>
+                  <a:rPr lang="pt-BR" b="1" dirty="0"/>
+                  <a:t>A solução:</a:t>
+                </a:r>
+                <a:r>
+                  <a:rPr lang="pt-BR" dirty="0"/>
+                  <a:t> Em vez de usar uma matriz para buscar </a:t>
+                </a:r>
+                <a14:m>
+                  <m:oMath xmlns:m="http://schemas.openxmlformats.org/officeDocument/2006/math">
+                    <m:r>
+                      <a:rPr lang="pt-BR" b="0" i="1" smtClean="0">
+                        <a:latin typeface="Cambria Math" panose="02040503050406030204" pitchFamily="18" charset="0"/>
+                      </a:rPr>
+                      <m:t>𝑄</m:t>
+                    </m:r>
+                    <m:r>
+                      <a:rPr lang="pt-BR" b="0" i="1" smtClean="0">
+                        <a:latin typeface="Cambria Math" panose="02040503050406030204" pitchFamily="18" charset="0"/>
+                      </a:rPr>
+                      <m:t>(</m:t>
+                    </m:r>
+                    <m:r>
+                      <a:rPr lang="pt-BR" b="0" i="1" smtClean="0">
+                        <a:latin typeface="Cambria Math" panose="02040503050406030204" pitchFamily="18" charset="0"/>
+                      </a:rPr>
+                      <m:t>𝑠</m:t>
+                    </m:r>
+                    <m:r>
+                      <a:rPr lang="pt-BR" b="0" i="1" smtClean="0">
+                        <a:latin typeface="Cambria Math" panose="02040503050406030204" pitchFamily="18" charset="0"/>
+                      </a:rPr>
+                      <m:t>,</m:t>
+                    </m:r>
+                    <m:r>
+                      <a:rPr lang="pt-BR" b="0" i="1" smtClean="0">
+                        <a:latin typeface="Cambria Math" panose="02040503050406030204" pitchFamily="18" charset="0"/>
+                      </a:rPr>
+                      <m:t>𝑎</m:t>
+                    </m:r>
+                    <m:r>
+                      <a:rPr lang="pt-BR" b="0" i="1" smtClean="0">
+                        <a:latin typeface="Cambria Math" panose="02040503050406030204" pitchFamily="18" charset="0"/>
+                      </a:rPr>
+                      <m:t>)</m:t>
+                    </m:r>
+                  </m:oMath>
+                </a14:m>
+                <a:r>
+                  <a:rPr lang="pt-BR" dirty="0"/>
+                  <a:t>, usamos uma </a:t>
+                </a:r>
+                <a:r>
+                  <a:rPr lang="pt-BR" b="1" dirty="0"/>
+                  <a:t>rede neural</a:t>
+                </a:r>
+                <a:r>
+                  <a:rPr lang="pt-BR" dirty="0"/>
+                  <a:t> para </a:t>
+                </a:r>
+                <a:r>
+                  <a:rPr lang="pt-BR" i="1" dirty="0"/>
+                  <a:t>aproximar</a:t>
+                </a:r>
+                <a:r>
+                  <a:rPr lang="pt-BR" dirty="0"/>
+                  <a:t> a função </a:t>
+                </a:r>
+                <a14:m>
+                  <m:oMath xmlns:m="http://schemas.openxmlformats.org/officeDocument/2006/math">
+                    <m:r>
+                      <a:rPr lang="pt-BR" b="0" i="1" smtClean="0">
+                        <a:latin typeface="Cambria Math" panose="02040503050406030204" pitchFamily="18" charset="0"/>
+                      </a:rPr>
+                      <m:t>𝑄</m:t>
+                    </m:r>
+                  </m:oMath>
+                </a14:m>
+                <a:r>
+                  <a:rPr lang="pt-BR" dirty="0"/>
+                  <a:t>.</a:t>
+                </a:r>
+              </a:p>
+              <a:p>
+                <a:r>
+                  <a:rPr lang="pt-BR" dirty="0"/>
+                  <a:t>A rede aprender a generalizar estados: o agente não precisa visitar todos os estados.</a:t>
+                </a:r>
+              </a:p>
+              <a:p>
+                <a:r>
+                  <a:rPr lang="pt-BR" b="1" dirty="0"/>
+                  <a:t>Entrada:</a:t>
+                </a:r>
+                <a:r>
+                  <a:rPr lang="pt-BR" dirty="0"/>
+                  <a:t> O estado (e.g., a imagem da câmera).</a:t>
+                </a:r>
+              </a:p>
+              <a:p>
+                <a:pPr lvl="1">
+                  <a:buFont typeface="Wingdings" panose="05000000000000000000" pitchFamily="2" charset="2"/>
+                  <a:buChar char="§"/>
+                </a:pPr>
+                <a:r>
+                  <a:rPr lang="pt-BR" dirty="0"/>
+                  <a:t>Agora, o estado pode ser composto por valores contínuos.</a:t>
+                </a:r>
+              </a:p>
+              <a:p>
+                <a:r>
+                  <a:rPr lang="pt-BR" b="1" dirty="0"/>
+                  <a:t>Saída:</a:t>
+                </a:r>
+                <a:r>
+                  <a:rPr lang="pt-BR" dirty="0"/>
+                  <a:t> Os valores </a:t>
+                </a:r>
+                <a14:m>
+                  <m:oMath xmlns:m="http://schemas.openxmlformats.org/officeDocument/2006/math">
+                    <m:r>
+                      <a:rPr lang="pt-BR" i="1">
+                        <a:latin typeface="Cambria Math" panose="02040503050406030204" pitchFamily="18" charset="0"/>
+                      </a:rPr>
+                      <m:t>𝑄</m:t>
+                    </m:r>
+                  </m:oMath>
+                </a14:m>
+                <a:r>
+                  <a:rPr lang="pt-BR" dirty="0"/>
+                  <a:t> para todas as ações possíveis naquele estado.</a:t>
+                </a:r>
+              </a:p>
+            </p:txBody>
+          </p:sp>
+        </mc:Choice>
+        <mc:Fallback xmlns="">
+          <p:sp>
+            <p:nvSpPr>
+              <p:cNvPr id="3" name="Content Placeholder 2">
+                <a:extLst>
+                  <a:ext uri="{FF2B5EF4-FFF2-40B4-BE49-F238E27FC236}">
+                    <a16:creationId xmlns:a16="http://schemas.microsoft.com/office/drawing/2014/main" id="{9B1F2B59-589E-C89D-B023-E847F3DC922F}"/>
+                  </a:ext>
+                </a:extLst>
+              </p:cNvPr>
+              <p:cNvSpPr>
+                <a:spLocks noGrp="1" noRot="1" noChangeAspect="1" noMove="1" noResize="1" noEditPoints="1" noAdjustHandles="1" noChangeArrowheads="1" noChangeShapeType="1" noTextEdit="1"/>
+              </p:cNvSpPr>
+              <p:nvPr>
+                <p:ph idx="1"/>
+              </p:nvPr>
+            </p:nvSpPr>
+            <p:spPr>
+              <a:xfrm>
+                <a:off x="5747658" y="1825624"/>
+                <a:ext cx="6444342" cy="5032375"/>
+              </a:xfrm>
+              <a:blipFill>
+                <a:blip r:embed="rId3"/>
+                <a:stretch>
+                  <a:fillRect l="-1703" t="-2663"/>
+                </a:stretch>
+              </a:blipFill>
+            </p:spPr>
+            <p:txBody>
+              <a:bodyPr/>
+              <a:lstStyle/>
+              <a:p>
+                <a:r>
+                  <a:rPr lang="en-US">
+                    <a:noFill/>
+                  </a:rPr>
+                  <a:t> </a:t>
+                </a:r>
+              </a:p>
+            </p:txBody>
+          </p:sp>
+        </mc:Fallback>
+      </mc:AlternateContent>
+      <p:pic>
+        <p:nvPicPr>
+          <p:cNvPr id="1028" name="Picture 4" descr="Cracking the Spell of Q* - A New Method in Problem Solving | Benny's Mind  Hack">
             <a:extLst>
               <a:ext uri="{FF2B5EF4-FFF2-40B4-BE49-F238E27FC236}">
-                <a16:creationId xmlns="" xmlns:a16="http://schemas.microsoft.com/office/drawing/2014/main" id="{32CB14AB-72E4-05EB-962C-F8B4618D0574}"/>
+                <a16:creationId xmlns:a16="http://schemas.microsoft.com/office/drawing/2014/main" xmlns="" id="{2FAF9048-FD7A-0345-D833-A8A15BE69361}"/>
               </a:ext>
             </a:extLst>
           </p:cNvPr>
-          <p:cNvSpPr>
-            <a:spLocks noGrp="1"/>
-          </p:cNvSpPr>
-          <p:nvPr>
-            <p:ph idx="1"/>
-          </p:nvPr>
-        </p:nvSpPr>
-        <p:spPr/>
-        <p:txBody>
-          <a:bodyPr/>
-          <a:lstStyle/>
-          <a:p>
-            <a:pPr marL="0" indent="0">
-              <a:buNone/>
-            </a:pPr>
-            <a:r>
-              <a:rPr lang="pt-BR" dirty="0"/>
-              <a:t>Lista </a:t>
-            </a:r>
-            <a:r>
-              <a:rPr lang="pt-BR" dirty="0" smtClean="0"/>
-              <a:t>#14 – Q-</a:t>
-            </a:r>
-            <a:r>
-              <a:rPr lang="pt-BR" dirty="0" err="1" smtClean="0"/>
-              <a:t>learning</a:t>
-            </a:r>
-            <a:endParaRPr lang="en-US" dirty="0"/>
-          </a:p>
-        </p:txBody>
-      </p:sp>
+          <p:cNvPicPr>
+            <a:picLocks noChangeAspect="1" noChangeArrowheads="1"/>
+          </p:cNvPicPr>
+          <p:nvPr/>
+        </p:nvPicPr>
+        <p:blipFill>
+          <a:blip r:embed="rId4">
+            <a:extLst>
+              <a:ext uri="{28A0092B-C50C-407E-A947-70E740481C1C}">
+                <a14:useLocalDpi xmlns:a14="http://schemas.microsoft.com/office/drawing/2010/main" val="0"/>
+              </a:ext>
+            </a:extLst>
+          </a:blip>
+          <a:srcRect/>
+          <a:stretch>
+            <a:fillRect/>
+          </a:stretch>
+        </p:blipFill>
+        <p:spPr bwMode="auto">
+          <a:xfrm>
+            <a:off x="95250" y="2242457"/>
+            <a:ext cx="5172489" cy="3399064"/>
+          </a:xfrm>
+          <a:prstGeom prst="rect">
+            <a:avLst/>
+          </a:prstGeom>
+          <a:noFill/>
+          <a:extLst>
+            <a:ext uri="{909E8E84-426E-40DD-AFC4-6F175D3DCCD1}">
+              <a14:hiddenFill xmlns:a14="http://schemas.microsoft.com/office/drawing/2010/main">
+                <a:solidFill>
+                  <a:srgbClr val="FFFFFF"/>
+                </a:solidFill>
+              </a14:hiddenFill>
+            </a:ext>
+          </a:extLst>
+        </p:spPr>
+      </p:pic>
     </p:spTree>
     <p:extLst>
       <p:ext uri="{BB962C8B-B14F-4D97-AF65-F5344CB8AC3E}">
-        <p14:creationId xmlns:p14="http://schemas.microsoft.com/office/powerpoint/2010/main" val="3294531366"/>
+        <p14:creationId xmlns:p14="http://schemas.microsoft.com/office/powerpoint/2010/main" val="2875250819"/>
       </p:ext>
     </p:extLst>
   </p:cSld>
@@ -14835,10 +16298,657 @@
       </p:grpSpPr>
       <p:sp>
         <p:nvSpPr>
+          <p:cNvPr id="2" name="Title 1">
+            <a:extLst>
+              <a:ext uri="{FF2B5EF4-FFF2-40B4-BE49-F238E27FC236}">
+                <a16:creationId xmlns:a16="http://schemas.microsoft.com/office/drawing/2014/main" xmlns="" id="{48EDEA96-2DFF-1829-9984-096F6593BEEE}"/>
+              </a:ext>
+            </a:extLst>
+          </p:cNvPr>
+          <p:cNvSpPr>
+            <a:spLocks noGrp="1"/>
+          </p:cNvSpPr>
+          <p:nvPr>
+            <p:ph type="title"/>
+          </p:nvPr>
+        </p:nvSpPr>
+        <p:spPr/>
+        <p:txBody>
+          <a:bodyPr/>
+          <a:lstStyle/>
+          <a:p>
+            <a:r>
+              <a:rPr lang="en-US" dirty="0"/>
+              <a:t>Onde RL é </a:t>
+            </a:r>
+            <a:r>
+              <a:rPr lang="en-US" dirty="0" err="1"/>
+              <a:t>usado</a:t>
+            </a:r>
+            <a:r>
+              <a:rPr lang="en-US" dirty="0"/>
+              <a:t>?</a:t>
+            </a:r>
+          </a:p>
+        </p:txBody>
+      </p:sp>
+      <p:sp>
+        <p:nvSpPr>
+          <p:cNvPr id="3" name="Content Placeholder 2">
+            <a:extLst>
+              <a:ext uri="{FF2B5EF4-FFF2-40B4-BE49-F238E27FC236}">
+                <a16:creationId xmlns:a16="http://schemas.microsoft.com/office/drawing/2014/main" xmlns="" id="{0160E88F-503C-2590-9D5D-B2BDD50D2767}"/>
+              </a:ext>
+            </a:extLst>
+          </p:cNvPr>
+          <p:cNvSpPr>
+            <a:spLocks noGrp="1"/>
+          </p:cNvSpPr>
+          <p:nvPr>
+            <p:ph idx="1"/>
+          </p:nvPr>
+        </p:nvSpPr>
+        <p:spPr>
+          <a:xfrm>
+            <a:off x="5061856" y="1825624"/>
+            <a:ext cx="7130144" cy="5032375"/>
+          </a:xfrm>
+        </p:spPr>
+        <p:txBody>
+          <a:bodyPr>
+            <a:normAutofit lnSpcReduction="10000"/>
+          </a:bodyPr>
+          <a:lstStyle/>
+          <a:p>
+            <a:r>
+              <a:rPr lang="pt-BR" b="1" dirty="0"/>
+              <a:t>Robótica e </a:t>
+            </a:r>
+            <a:r>
+              <a:rPr lang="pt-BR" b="1" dirty="0" smtClean="0"/>
+              <a:t>manufatura: </a:t>
+            </a:r>
+            <a:r>
+              <a:rPr lang="pt-BR" dirty="0" smtClean="0"/>
+              <a:t>Ensinar </a:t>
+            </a:r>
+            <a:r>
+              <a:rPr lang="pt-BR" dirty="0"/>
+              <a:t>robôs a andar, agarrar objetos ou equilibrar cargas</a:t>
+            </a:r>
+            <a:r>
+              <a:rPr lang="pt-BR" dirty="0" smtClean="0"/>
+              <a:t>.</a:t>
+            </a:r>
+            <a:endParaRPr lang="pt-BR" dirty="0"/>
+          </a:p>
+          <a:p>
+            <a:r>
+              <a:rPr lang="pt-BR" b="1" dirty="0"/>
+              <a:t>Otimização de redes e sistemas:</a:t>
+            </a:r>
+            <a:r>
+              <a:rPr lang="pt-BR" dirty="0"/>
+              <a:t> Roteamento de pacotes dinâmico para evitar gargalos na rede.</a:t>
+            </a:r>
+          </a:p>
+          <a:p>
+            <a:r>
+              <a:rPr lang="pt-BR" b="1" dirty="0"/>
+              <a:t>Sistemas de recomendação</a:t>
+            </a:r>
+            <a:r>
+              <a:rPr lang="pt-BR" b="1" dirty="0" smtClean="0"/>
+              <a:t>: </a:t>
+            </a:r>
+            <a:r>
+              <a:rPr lang="pt-BR" dirty="0"/>
+              <a:t>Otimizar qual vídeo ou anúncio mostrar para você na internet com base no engajamento a longo prazo.</a:t>
+            </a:r>
+          </a:p>
+          <a:p>
+            <a:r>
+              <a:rPr lang="pt-BR" b="1" dirty="0"/>
+              <a:t>Controle industrial:</a:t>
+            </a:r>
+            <a:r>
+              <a:rPr lang="pt-BR" dirty="0"/>
+              <a:t> Ajuste fino de caldeiras e refrigeração em data centers para reduzir consumo de energia</a:t>
+            </a:r>
+            <a:r>
+              <a:rPr lang="pt-BR" dirty="0" smtClean="0"/>
+              <a:t>.</a:t>
+            </a:r>
+            <a:endParaRPr lang="pt-BR" dirty="0"/>
+          </a:p>
+        </p:txBody>
+      </p:sp>
+      <p:pic>
+        <p:nvPicPr>
+          <p:cNvPr id="6" name="Picture 5">
+            <a:extLst>
+              <a:ext uri="{FF2B5EF4-FFF2-40B4-BE49-F238E27FC236}">
+                <a16:creationId xmlns:a16="http://schemas.microsoft.com/office/drawing/2014/main" xmlns="" id="{265EF8FE-70EB-D556-D43F-F69593E54B8C}"/>
+              </a:ext>
+            </a:extLst>
+          </p:cNvPr>
+          <p:cNvPicPr>
+            <a:picLocks noChangeAspect="1"/>
+          </p:cNvPicPr>
+          <p:nvPr/>
+        </p:nvPicPr>
+        <p:blipFill>
+          <a:blip r:embed="rId3" cstate="print">
+            <a:extLst>
+              <a:ext uri="{28A0092B-C50C-407E-A947-70E740481C1C}">
+                <a14:useLocalDpi xmlns:a14="http://schemas.microsoft.com/office/drawing/2010/main" val="0"/>
+              </a:ext>
+            </a:extLst>
+          </a:blip>
+          <a:stretch>
+            <a:fillRect/>
+          </a:stretch>
+        </p:blipFill>
+        <p:spPr>
+          <a:xfrm>
+            <a:off x="293917" y="2416629"/>
+            <a:ext cx="4604655" cy="3069770"/>
+          </a:xfrm>
+          <a:prstGeom prst="rect">
+            <a:avLst/>
+          </a:prstGeom>
+        </p:spPr>
+      </p:pic>
+    </p:spTree>
+    <p:extLst>
+      <p:ext uri="{BB962C8B-B14F-4D97-AF65-F5344CB8AC3E}">
+        <p14:creationId xmlns:p14="http://schemas.microsoft.com/office/powerpoint/2010/main" val="2981192540"/>
+      </p:ext>
+    </p:extLst>
+  </p:cSld>
+  <p:clrMapOvr>
+    <a:masterClrMapping/>
+  </p:clrMapOvr>
+</p:sld>
+</file>
+
+<file path=ppt/slides/slide32.xml><?xml version="1.0" encoding="utf-8"?>
+<p:sld xmlns:a="http://schemas.openxmlformats.org/drawingml/2006/main" xmlns:r="http://schemas.openxmlformats.org/officeDocument/2006/relationships" xmlns:p="http://schemas.openxmlformats.org/presentationml/2006/main">
+  <p:cSld>
+    <p:spTree>
+      <p:nvGrpSpPr>
+        <p:cNvPr id="1" name=""/>
+        <p:cNvGrpSpPr/>
+        <p:nvPr/>
+      </p:nvGrpSpPr>
+      <p:grpSpPr>
+        <a:xfrm>
+          <a:off x="0" y="0"/>
+          <a:ext cx="0" cy="0"/>
+          <a:chOff x="0" y="0"/>
+          <a:chExt cx="0" cy="0"/>
+        </a:xfrm>
+      </p:grpSpPr>
+      <p:sp>
+        <p:nvSpPr>
+          <p:cNvPr id="2" name="Título 1">
+            <a:extLst>
+              <a:ext uri="{FF2B5EF4-FFF2-40B4-BE49-F238E27FC236}">
+                <a16:creationId xmlns:a16="http://schemas.microsoft.com/office/drawing/2014/main" xmlns="" id="{94AB8438-E56E-2412-517C-8456E4CA773C}"/>
+              </a:ext>
+            </a:extLst>
+          </p:cNvPr>
+          <p:cNvSpPr>
+            <a:spLocks noGrp="1"/>
+          </p:cNvSpPr>
+          <p:nvPr>
+            <p:ph type="title"/>
+          </p:nvPr>
+        </p:nvSpPr>
+        <p:spPr/>
+        <p:txBody>
+          <a:bodyPr/>
+          <a:lstStyle/>
+          <a:p>
+            <a:r>
+              <a:rPr lang="pt-BR" dirty="0"/>
+              <a:t>Exemplo</a:t>
+            </a:r>
+          </a:p>
+        </p:txBody>
+      </p:sp>
+      <p:sp>
+        <p:nvSpPr>
+          <p:cNvPr id="3" name="Espaço Reservado para Conteúdo 2">
+            <a:extLst>
+              <a:ext uri="{FF2B5EF4-FFF2-40B4-BE49-F238E27FC236}">
+                <a16:creationId xmlns:a16="http://schemas.microsoft.com/office/drawing/2014/main" xmlns="" id="{F7E2B09C-6D56-4C9F-A364-B904CCE2F1A0}"/>
+              </a:ext>
+            </a:extLst>
+          </p:cNvPr>
+          <p:cNvSpPr>
+            <a:spLocks noGrp="1"/>
+          </p:cNvSpPr>
+          <p:nvPr>
+            <p:ph idx="1"/>
+          </p:nvPr>
+        </p:nvSpPr>
+        <p:spPr/>
+        <p:txBody>
+          <a:bodyPr/>
+          <a:lstStyle/>
+          <a:p>
+            <a:r>
+              <a:rPr lang="pt-BR" dirty="0"/>
+              <a:t>Exemplo: </a:t>
+            </a:r>
+            <a:r>
+              <a:rPr lang="pt-BR" dirty="0" smtClean="0"/>
+              <a:t>q-</a:t>
+            </a:r>
+            <a:r>
+              <a:rPr lang="pt-BR" dirty="0" err="1" smtClean="0"/>
+              <a:t>learning.ipynb</a:t>
+            </a:r>
+            <a:endParaRPr lang="en-US" dirty="0"/>
+          </a:p>
+          <a:p>
+            <a:pPr marL="0" indent="0">
+              <a:buNone/>
+            </a:pPr>
+            <a:endParaRPr lang="pt-BR" dirty="0"/>
+          </a:p>
+        </p:txBody>
+      </p:sp>
+      <p:grpSp>
+        <p:nvGrpSpPr>
+          <p:cNvPr id="18" name="Group 17">
+            <a:extLst>
+              <a:ext uri="{FF2B5EF4-FFF2-40B4-BE49-F238E27FC236}">
+                <a16:creationId xmlns:a16="http://schemas.microsoft.com/office/drawing/2014/main" xmlns="" id="{627C64FD-88E0-EC8E-2A34-0D5737B4C854}"/>
+              </a:ext>
+            </a:extLst>
+          </p:cNvPr>
+          <p:cNvGrpSpPr/>
+          <p:nvPr/>
+        </p:nvGrpSpPr>
+        <p:grpSpPr>
+          <a:xfrm>
+            <a:off x="1752685" y="2681262"/>
+            <a:ext cx="8371070" cy="2659743"/>
+            <a:chOff x="1752685" y="2681262"/>
+            <a:chExt cx="8371070" cy="2659743"/>
+          </a:xfrm>
+        </p:grpSpPr>
+        <p:pic>
+          <p:nvPicPr>
+            <p:cNvPr id="12" name="Picture 4" descr="Project Jupyter | Try Jupyter">
+              <a:extLst>
+                <a:ext uri="{FF2B5EF4-FFF2-40B4-BE49-F238E27FC236}">
+                  <a16:creationId xmlns:a16="http://schemas.microsoft.com/office/drawing/2014/main" xmlns="" id="{FF92EA36-91E7-292B-D7A0-2D4D83A10F98}"/>
+                </a:ext>
+              </a:extLst>
+            </p:cNvPr>
+            <p:cNvPicPr>
+              <a:picLocks noChangeAspect="1" noChangeArrowheads="1"/>
+            </p:cNvPicPr>
+            <p:nvPr/>
+          </p:nvPicPr>
+          <p:blipFill>
+            <a:blip r:embed="rId3" cstate="print">
+              <a:extLst>
+                <a:ext uri="{28A0092B-C50C-407E-A947-70E740481C1C}">
+                  <a14:useLocalDpi xmlns:a14="http://schemas.microsoft.com/office/drawing/2010/main" val="0"/>
+                </a:ext>
+              </a:extLst>
+            </a:blip>
+            <a:srcRect/>
+            <a:stretch>
+              <a:fillRect/>
+            </a:stretch>
+          </p:blipFill>
+          <p:spPr bwMode="auto">
+            <a:xfrm>
+              <a:off x="3331027" y="3102450"/>
+              <a:ext cx="3461657" cy="1817370"/>
+            </a:xfrm>
+            <a:prstGeom prst="rect">
+              <a:avLst/>
+            </a:prstGeom>
+            <a:noFill/>
+            <a:extLst>
+              <a:ext uri="{909E8E84-426E-40DD-AFC4-6F175D3DCCD1}">
+                <a14:hiddenFill xmlns:a14="http://schemas.microsoft.com/office/drawing/2010/main">
+                  <a:solidFill>
+                    <a:srgbClr val="FFFFFF"/>
+                  </a:solidFill>
+                </a14:hiddenFill>
+              </a:ext>
+            </a:extLst>
+          </p:spPr>
+        </p:pic>
+        <p:pic>
+          <p:nvPicPr>
+            <p:cNvPr id="13" name="Picture 8" descr="Google Colaboratory Colab - Guía Completa Español - Marketing Branding">
+              <a:extLst>
+                <a:ext uri="{FF2B5EF4-FFF2-40B4-BE49-F238E27FC236}">
+                  <a16:creationId xmlns:a16="http://schemas.microsoft.com/office/drawing/2014/main" xmlns="" id="{46F1718A-89E6-9E63-E40B-2B19852D6AA0}"/>
+                </a:ext>
+              </a:extLst>
+            </p:cNvPr>
+            <p:cNvPicPr>
+              <a:picLocks noChangeAspect="1" noChangeArrowheads="1"/>
+            </p:cNvPicPr>
+            <p:nvPr/>
+          </p:nvPicPr>
+          <p:blipFill rotWithShape="1">
+            <a:blip r:embed="rId4" cstate="print">
+              <a:extLst>
+                <a:ext uri="{28A0092B-C50C-407E-A947-70E740481C1C}">
+                  <a14:useLocalDpi xmlns:a14="http://schemas.microsoft.com/office/drawing/2010/main" val="0"/>
+                </a:ext>
+              </a:extLst>
+            </a:blip>
+            <a:srcRect l="5865" r="10641"/>
+            <a:stretch/>
+          </p:blipFill>
+          <p:spPr bwMode="auto">
+            <a:xfrm>
+              <a:off x="6792684" y="2681262"/>
+              <a:ext cx="3331071" cy="2659743"/>
+            </a:xfrm>
+            <a:prstGeom prst="rect">
+              <a:avLst/>
+            </a:prstGeom>
+            <a:noFill/>
+            <a:extLst>
+              <a:ext uri="{909E8E84-426E-40DD-AFC4-6F175D3DCCD1}">
+                <a14:hiddenFill xmlns:a14="http://schemas.microsoft.com/office/drawing/2010/main">
+                  <a:solidFill>
+                    <a:srgbClr val="FFFFFF"/>
+                  </a:solidFill>
+                </a14:hiddenFill>
+              </a:ext>
+            </a:extLst>
+          </p:spPr>
+        </p:pic>
+        <p:pic>
+          <p:nvPicPr>
+            <p:cNvPr id="14" name="Picture 10" descr="IT12A01: FUNDAMENTALS OF PYTHON PROGRAMMING (SF) (SYNCHRONOUS E-LEARNING) -  NTUC LearningHub">
+              <a:extLst>
+                <a:ext uri="{FF2B5EF4-FFF2-40B4-BE49-F238E27FC236}">
+                  <a16:creationId xmlns:a16="http://schemas.microsoft.com/office/drawing/2014/main" xmlns="" id="{33F6B1B4-9B79-D634-3E35-33F24609C848}"/>
+                </a:ext>
+              </a:extLst>
+            </p:cNvPr>
+            <p:cNvPicPr>
+              <a:picLocks noChangeAspect="1" noChangeArrowheads="1"/>
+            </p:cNvPicPr>
+            <p:nvPr/>
+          </p:nvPicPr>
+          <p:blipFill rotWithShape="1">
+            <a:blip r:embed="rId5">
+              <a:extLst>
+                <a:ext uri="{28A0092B-C50C-407E-A947-70E740481C1C}">
+                  <a14:useLocalDpi xmlns:a14="http://schemas.microsoft.com/office/drawing/2010/main" val="0"/>
+                </a:ext>
+              </a:extLst>
+            </a:blip>
+            <a:srcRect l="23319" r="20198"/>
+            <a:stretch/>
+          </p:blipFill>
+          <p:spPr bwMode="auto">
+            <a:xfrm>
+              <a:off x="1752685" y="3176833"/>
+              <a:ext cx="1894114" cy="1877924"/>
+            </a:xfrm>
+            <a:prstGeom prst="rect">
+              <a:avLst/>
+            </a:prstGeom>
+            <a:noFill/>
+            <a:extLst>
+              <a:ext uri="{909E8E84-426E-40DD-AFC4-6F175D3DCCD1}">
+                <a14:hiddenFill xmlns:a14="http://schemas.microsoft.com/office/drawing/2010/main">
+                  <a:solidFill>
+                    <a:srgbClr val="FFFFFF"/>
+                  </a:solidFill>
+                </a14:hiddenFill>
+              </a:ext>
+            </a:extLst>
+          </p:spPr>
+        </p:pic>
+        <p:sp>
+          <p:nvSpPr>
+            <p:cNvPr id="15" name="Sinal de Adição 7">
+              <a:extLst>
+                <a:ext uri="{FF2B5EF4-FFF2-40B4-BE49-F238E27FC236}">
+                  <a16:creationId xmlns:a16="http://schemas.microsoft.com/office/drawing/2014/main" xmlns="" id="{6959EE6C-DCDB-E78B-5C50-EBD3FF3049E2}"/>
+                </a:ext>
+              </a:extLst>
+            </p:cNvPr>
+            <p:cNvSpPr>
+              <a:spLocks noChangeAspect="1"/>
+            </p:cNvSpPr>
+            <p:nvPr/>
+          </p:nvSpPr>
+          <p:spPr>
+            <a:xfrm>
+              <a:off x="3646799" y="3545037"/>
+              <a:ext cx="468000" cy="468000"/>
+            </a:xfrm>
+            <a:prstGeom prst="mathPlus">
+              <a:avLst/>
+            </a:prstGeom>
+          </p:spPr>
+          <p:style>
+            <a:lnRef idx="2">
+              <a:schemeClr val="accent1">
+                <a:shade val="15000"/>
+              </a:schemeClr>
+            </a:lnRef>
+            <a:fillRef idx="1">
+              <a:schemeClr val="accent1"/>
+            </a:fillRef>
+            <a:effectRef idx="0">
+              <a:schemeClr val="accent1"/>
+            </a:effectRef>
+            <a:fontRef idx="minor">
+              <a:schemeClr val="lt1"/>
+            </a:fontRef>
+          </p:style>
+          <p:txBody>
+            <a:bodyPr rtlCol="0" anchor="ctr"/>
+            <a:lstStyle/>
+            <a:p>
+              <a:pPr algn="ctr"/>
+              <a:endParaRPr lang="pt-BR"/>
+            </a:p>
+          </p:txBody>
+        </p:sp>
+        <p:sp>
+          <p:nvSpPr>
+            <p:cNvPr id="17" name="Sinal de Adição 10">
+              <a:extLst>
+                <a:ext uri="{FF2B5EF4-FFF2-40B4-BE49-F238E27FC236}">
+                  <a16:creationId xmlns:a16="http://schemas.microsoft.com/office/drawing/2014/main" xmlns="" id="{30A21FDB-ABA6-9FD5-49EF-7762414AEF0C}"/>
+                </a:ext>
+              </a:extLst>
+            </p:cNvPr>
+            <p:cNvSpPr>
+              <a:spLocks noChangeAspect="1"/>
+            </p:cNvSpPr>
+            <p:nvPr/>
+          </p:nvSpPr>
+          <p:spPr>
+            <a:xfrm>
+              <a:off x="6096043" y="3467980"/>
+              <a:ext cx="468000" cy="468000"/>
+            </a:xfrm>
+            <a:prstGeom prst="mathPlus">
+              <a:avLst/>
+            </a:prstGeom>
+          </p:spPr>
+          <p:style>
+            <a:lnRef idx="2">
+              <a:schemeClr val="accent1">
+                <a:shade val="15000"/>
+              </a:schemeClr>
+            </a:lnRef>
+            <a:fillRef idx="1">
+              <a:schemeClr val="accent1"/>
+            </a:fillRef>
+            <a:effectRef idx="0">
+              <a:schemeClr val="accent1"/>
+            </a:effectRef>
+            <a:fontRef idx="minor">
+              <a:schemeClr val="lt1"/>
+            </a:fontRef>
+          </p:style>
+          <p:txBody>
+            <a:bodyPr rtlCol="0" anchor="ctr"/>
+            <a:lstStyle/>
+            <a:p>
+              <a:pPr algn="ctr"/>
+              <a:endParaRPr lang="pt-BR"/>
+            </a:p>
+          </p:txBody>
+        </p:sp>
+      </p:grpSp>
+    </p:spTree>
+    <p:extLst>
+      <p:ext uri="{BB962C8B-B14F-4D97-AF65-F5344CB8AC3E}">
+        <p14:creationId xmlns:p14="http://schemas.microsoft.com/office/powerpoint/2010/main" val="763717033"/>
+      </p:ext>
+    </p:extLst>
+  </p:cSld>
+  <p:clrMapOvr>
+    <a:masterClrMapping/>
+  </p:clrMapOvr>
+</p:sld>
+</file>
+
+<file path=ppt/slides/slide33.xml><?xml version="1.0" encoding="utf-8"?>
+<p:sld xmlns:a="http://schemas.openxmlformats.org/drawingml/2006/main" xmlns:r="http://schemas.openxmlformats.org/officeDocument/2006/relationships" xmlns:p="http://schemas.openxmlformats.org/presentationml/2006/main">
+  <p:cSld>
+    <p:spTree>
+      <p:nvGrpSpPr>
+        <p:cNvPr id="1" name=""/>
+        <p:cNvGrpSpPr/>
+        <p:nvPr/>
+      </p:nvGrpSpPr>
+      <p:grpSpPr>
+        <a:xfrm>
+          <a:off x="0" y="0"/>
+          <a:ext cx="0" cy="0"/>
+          <a:chOff x="0" y="0"/>
+          <a:chExt cx="0" cy="0"/>
+        </a:xfrm>
+      </p:grpSpPr>
+      <p:sp>
+        <p:nvSpPr>
+          <p:cNvPr id="2" name="Title 1">
+            <a:extLst>
+              <a:ext uri="{FF2B5EF4-FFF2-40B4-BE49-F238E27FC236}">
+                <a16:creationId xmlns:a16="http://schemas.microsoft.com/office/drawing/2014/main" xmlns="" id="{E8FD0E11-3B37-4336-5BF0-C8C033354AF6}"/>
+              </a:ext>
+            </a:extLst>
+          </p:cNvPr>
+          <p:cNvSpPr>
+            <a:spLocks noGrp="1"/>
+          </p:cNvSpPr>
+          <p:nvPr>
+            <p:ph type="title"/>
+          </p:nvPr>
+        </p:nvSpPr>
+        <p:spPr/>
+        <p:txBody>
+          <a:bodyPr/>
+          <a:lstStyle/>
+          <a:p>
+            <a:r>
+              <a:rPr lang="pt-BR" dirty="0"/>
+              <a:t>Lista de exercícios</a:t>
+            </a:r>
+            <a:endParaRPr lang="en-US" dirty="0"/>
+          </a:p>
+        </p:txBody>
+      </p:sp>
+      <p:sp>
+        <p:nvSpPr>
+          <p:cNvPr id="3" name="Content Placeholder 2">
+            <a:extLst>
+              <a:ext uri="{FF2B5EF4-FFF2-40B4-BE49-F238E27FC236}">
+                <a16:creationId xmlns:a16="http://schemas.microsoft.com/office/drawing/2014/main" xmlns="" id="{32CB14AB-72E4-05EB-962C-F8B4618D0574}"/>
+              </a:ext>
+            </a:extLst>
+          </p:cNvPr>
+          <p:cNvSpPr>
+            <a:spLocks noGrp="1"/>
+          </p:cNvSpPr>
+          <p:nvPr>
+            <p:ph idx="1"/>
+          </p:nvPr>
+        </p:nvSpPr>
+        <p:spPr/>
+        <p:txBody>
+          <a:bodyPr/>
+          <a:lstStyle/>
+          <a:p>
+            <a:pPr marL="0" indent="0">
+              <a:buNone/>
+            </a:pPr>
+            <a:r>
+              <a:rPr lang="pt-BR" dirty="0"/>
+              <a:t>Lista </a:t>
+            </a:r>
+            <a:r>
+              <a:rPr lang="pt-BR" dirty="0" smtClean="0"/>
+              <a:t>#14 – Q-</a:t>
+            </a:r>
+            <a:r>
+              <a:rPr lang="pt-BR" dirty="0" err="1" smtClean="0"/>
+              <a:t>learning</a:t>
+            </a:r>
+            <a:endParaRPr lang="en-US" dirty="0"/>
+          </a:p>
+        </p:txBody>
+      </p:sp>
+    </p:spTree>
+    <p:extLst>
+      <p:ext uri="{BB962C8B-B14F-4D97-AF65-F5344CB8AC3E}">
+        <p14:creationId xmlns:p14="http://schemas.microsoft.com/office/powerpoint/2010/main" val="3294531366"/>
+      </p:ext>
+    </p:extLst>
+  </p:cSld>
+  <p:clrMapOvr>
+    <a:masterClrMapping/>
+  </p:clrMapOvr>
+</p:sld>
+</file>
+
+<file path=ppt/slides/slide34.xml><?xml version="1.0" encoding="utf-8"?>
+<p:sld xmlns:a="http://schemas.openxmlformats.org/drawingml/2006/main" xmlns:r="http://schemas.openxmlformats.org/officeDocument/2006/relationships" xmlns:p="http://schemas.openxmlformats.org/presentationml/2006/main">
+  <p:cSld>
+    <p:spTree>
+      <p:nvGrpSpPr>
+        <p:cNvPr id="1" name=""/>
+        <p:cNvGrpSpPr/>
+        <p:nvPr/>
+      </p:nvGrpSpPr>
+      <p:grpSpPr>
+        <a:xfrm>
+          <a:off x="0" y="0"/>
+          <a:ext cx="0" cy="0"/>
+          <a:chOff x="0" y="0"/>
+          <a:chExt cx="0" cy="0"/>
+        </a:xfrm>
+      </p:grpSpPr>
+      <p:sp>
+        <p:nvSpPr>
           <p:cNvPr id="4" name="Título 1">
             <a:extLst>
               <a:ext uri="{FF2B5EF4-FFF2-40B4-BE49-F238E27FC236}">
-                <a16:creationId xmlns="" xmlns:a16="http://schemas.microsoft.com/office/drawing/2014/main" id="{32666AC8-2E17-4DB4-B0F5-60C640CCFD2E}"/>
+                <a16:creationId xmlns:a16="http://schemas.microsoft.com/office/drawing/2014/main" xmlns="" id="{32666AC8-2E17-4DB4-B0F5-60C640CCFD2E}"/>
               </a:ext>
             </a:extLst>
           </p:cNvPr>
@@ -14902,7 +17012,7 @@
 </p:sld>
 </file>
 
-<file path=ppt/slides/slide32.xml><?xml version="1.0" encoding="utf-8"?>
+<file path=ppt/slides/slide35.xml><?xml version="1.0" encoding="utf-8"?>
 <p:sld xmlns:a="http://schemas.openxmlformats.org/drawingml/2006/main" xmlns:r="http://schemas.openxmlformats.org/officeDocument/2006/relationships" xmlns:p="http://schemas.openxmlformats.org/presentationml/2006/main">
   <p:cSld>
     <p:spTree>
@@ -14924,7 +17034,7 @@
           <p:cNvPr id="4" name="Título 1">
             <a:extLst>
               <a:ext uri="{FF2B5EF4-FFF2-40B4-BE49-F238E27FC236}">
-                <a16:creationId xmlns="" xmlns:a16="http://schemas.microsoft.com/office/drawing/2014/main" id="{32666AC8-2E17-4DB4-B0F5-60C640CCFD2E}"/>
+                <a16:creationId xmlns:a16="http://schemas.microsoft.com/office/drawing/2014/main" xmlns="" id="{32666AC8-2E17-4DB4-B0F5-60C640CCFD2E}"/>
               </a:ext>
             </a:extLst>
           </p:cNvPr>
@@ -14988,7 +17098,7 @@
 </p:sld>
 </file>
 
-<file path=ppt/slides/slide33.xml><?xml version="1.0" encoding="utf-8"?>
+<file path=ppt/slides/slide36.xml><?xml version="1.0" encoding="utf-8"?>
 <p:sld xmlns:a="http://schemas.openxmlformats.org/drawingml/2006/main" xmlns:r="http://schemas.openxmlformats.org/officeDocument/2006/relationships" xmlns:p="http://schemas.openxmlformats.org/presentationml/2006/main">
   <p:cSld>
     <p:spTree>
@@ -14996,7 +17106,7 @@
         <p:cNvPr id="1" name="">
           <a:extLst>
             <a:ext uri="{FF2B5EF4-FFF2-40B4-BE49-F238E27FC236}">
-              <a16:creationId xmlns="" xmlns:a16="http://schemas.microsoft.com/office/drawing/2014/main" id="{83DFB381-AAB9-2788-1601-EB1230F302AA}"/>
+              <a16:creationId xmlns:a16="http://schemas.microsoft.com/office/drawing/2014/main" xmlns="" id="{83DFB381-AAB9-2788-1601-EB1230F302AA}"/>
             </a:ext>
           </a:extLst>
         </p:cNvPr>
@@ -15016,7 +17126,7 @@
           <p:cNvPr id="4" name="Título 1">
             <a:extLst>
               <a:ext uri="{FF2B5EF4-FFF2-40B4-BE49-F238E27FC236}">
-                <a16:creationId xmlns="" xmlns:a16="http://schemas.microsoft.com/office/drawing/2014/main" id="{4AF40FF5-E3E4-99F0-8C87-687EB32C12F9}"/>
+                <a16:creationId xmlns:a16="http://schemas.microsoft.com/office/drawing/2014/main" xmlns="" id="{4AF40FF5-E3E4-99F0-8C87-687EB32C12F9}"/>
               </a:ext>
             </a:extLst>
           </p:cNvPr>
@@ -15080,7 +17190,7 @@
 </p:sld>
 </file>
 
-<file path=ppt/slides/slide34.xml><?xml version="1.0" encoding="utf-8"?>
+<file path=ppt/slides/slide37.xml><?xml version="1.0" encoding="utf-8"?>
 <p:sld xmlns:a="http://schemas.openxmlformats.org/drawingml/2006/main" xmlns:r="http://schemas.openxmlformats.org/officeDocument/2006/relationships" xmlns:p="http://schemas.openxmlformats.org/presentationml/2006/main">
   <p:cSld>
     <p:spTree>
@@ -15102,7 +17212,7 @@
           <p:cNvPr id="59" name="Group 58">
             <a:extLst>
               <a:ext uri="{FF2B5EF4-FFF2-40B4-BE49-F238E27FC236}">
-                <a16:creationId xmlns="" xmlns:a16="http://schemas.microsoft.com/office/drawing/2014/main" id="{BB54A8AF-5D7A-DF48-6B51-A97D3BA5AE2B}"/>
+                <a16:creationId xmlns:a16="http://schemas.microsoft.com/office/drawing/2014/main" xmlns="" id="{BB54A8AF-5D7A-DF48-6B51-A97D3BA5AE2B}"/>
               </a:ext>
             </a:extLst>
           </p:cNvPr>
@@ -15122,7 +17232,7 @@
             <p:cNvPr id="26" name="Rectangle 25">
               <a:extLst>
                 <a:ext uri="{FF2B5EF4-FFF2-40B4-BE49-F238E27FC236}">
-                  <a16:creationId xmlns="" xmlns:a16="http://schemas.microsoft.com/office/drawing/2014/main" id="{A78F414E-0878-E9AC-3349-365D683589EF}"/>
+                  <a16:creationId xmlns:a16="http://schemas.microsoft.com/office/drawing/2014/main" xmlns="" id="{A78F414E-0878-E9AC-3349-365D683589EF}"/>
                 </a:ext>
               </a:extLst>
             </p:cNvPr>
@@ -15171,7 +17281,7 @@
             <p:cNvPr id="27" name="Rectangle 26">
               <a:extLst>
                 <a:ext uri="{FF2B5EF4-FFF2-40B4-BE49-F238E27FC236}">
-                  <a16:creationId xmlns="" xmlns:a16="http://schemas.microsoft.com/office/drawing/2014/main" id="{67A2140F-0BEB-DFFC-0173-0DDE81A0BAF4}"/>
+                  <a16:creationId xmlns:a16="http://schemas.microsoft.com/office/drawing/2014/main" xmlns="" id="{67A2140F-0BEB-DFFC-0173-0DDE81A0BAF4}"/>
                 </a:ext>
               </a:extLst>
             </p:cNvPr>
@@ -15220,7 +17330,7 @@
             <p:cNvPr id="33" name="Rectangle 32">
               <a:extLst>
                 <a:ext uri="{FF2B5EF4-FFF2-40B4-BE49-F238E27FC236}">
-                  <a16:creationId xmlns="" xmlns:a16="http://schemas.microsoft.com/office/drawing/2014/main" id="{C67CE66F-B1C9-97C2-5191-323C447A4039}"/>
+                  <a16:creationId xmlns:a16="http://schemas.microsoft.com/office/drawing/2014/main" xmlns="" id="{C67CE66F-B1C9-97C2-5191-323C447A4039}"/>
                 </a:ext>
               </a:extLst>
             </p:cNvPr>
@@ -15269,7 +17379,7 @@
             <p:cNvPr id="34" name="Rectangle 33">
               <a:extLst>
                 <a:ext uri="{FF2B5EF4-FFF2-40B4-BE49-F238E27FC236}">
-                  <a16:creationId xmlns="" xmlns:a16="http://schemas.microsoft.com/office/drawing/2014/main" id="{44116E33-D3F4-D7FB-DCEF-760C9C024249}"/>
+                  <a16:creationId xmlns:a16="http://schemas.microsoft.com/office/drawing/2014/main" xmlns="" id="{44116E33-D3F4-D7FB-DCEF-760C9C024249}"/>
                 </a:ext>
               </a:extLst>
             </p:cNvPr>
@@ -15318,7 +17428,7 @@
             <p:cNvPr id="12" name="Connector: Elbow 11">
               <a:extLst>
                 <a:ext uri="{FF2B5EF4-FFF2-40B4-BE49-F238E27FC236}">
-                  <a16:creationId xmlns="" xmlns:a16="http://schemas.microsoft.com/office/drawing/2014/main" id="{0375811A-BC31-5203-21BF-8C1AEDCA810A}"/>
+                  <a16:creationId xmlns:a16="http://schemas.microsoft.com/office/drawing/2014/main" xmlns="" id="{0375811A-BC31-5203-21BF-8C1AEDCA810A}"/>
                 </a:ext>
               </a:extLst>
             </p:cNvPr>
@@ -15363,7 +17473,7 @@
             <p:cNvPr id="17" name="Rectangle: Rounded Corners 16">
               <a:extLst>
                 <a:ext uri="{FF2B5EF4-FFF2-40B4-BE49-F238E27FC236}">
-                  <a16:creationId xmlns="" xmlns:a16="http://schemas.microsoft.com/office/drawing/2014/main" id="{D957717F-F346-A328-0454-3432762A09F8}"/>
+                  <a16:creationId xmlns:a16="http://schemas.microsoft.com/office/drawing/2014/main" xmlns="" id="{D957717F-F346-A328-0454-3432762A09F8}"/>
                 </a:ext>
               </a:extLst>
             </p:cNvPr>
@@ -15413,7 +17523,7 @@
             <p:cNvPr id="18" name="Rectangle: Rounded Corners 17">
               <a:extLst>
                 <a:ext uri="{FF2B5EF4-FFF2-40B4-BE49-F238E27FC236}">
-                  <a16:creationId xmlns="" xmlns:a16="http://schemas.microsoft.com/office/drawing/2014/main" id="{39EF6FE5-6FBC-BC13-63C8-D6E9E3E272C4}"/>
+                  <a16:creationId xmlns:a16="http://schemas.microsoft.com/office/drawing/2014/main" xmlns="" id="{39EF6FE5-6FBC-BC13-63C8-D6E9E3E272C4}"/>
                 </a:ext>
               </a:extLst>
             </p:cNvPr>
@@ -15465,7 +17575,7 @@
                 <p:cNvPr id="41" name="TextBox 40">
                   <a:extLst>
                     <a:ext uri="{FF2B5EF4-FFF2-40B4-BE49-F238E27FC236}">
-                      <a16:creationId xmlns="" xmlns:a16="http://schemas.microsoft.com/office/drawing/2014/main" id="{DEBC8956-45EC-9A9F-7CAD-7A468058ABF1}"/>
+                      <a16:creationId xmlns:a16="http://schemas.microsoft.com/office/drawing/2014/main" xmlns="" id="{DEBC8956-45EC-9A9F-7CAD-7A468058ABF1}"/>
                     </a:ext>
                   </a:extLst>
                 </p:cNvPr>
@@ -15578,7 +17688,7 @@
                 <p:cNvPr id="10" name="TextBox 9">
                   <a:extLst>
                     <a:ext uri="{FF2B5EF4-FFF2-40B4-BE49-F238E27FC236}">
-                      <a16:creationId xmlns="" xmlns:a16="http://schemas.microsoft.com/office/drawing/2014/main" id="{6B8DF4A4-00E2-9B10-CC12-B0D274CCB842}"/>
+                      <a16:creationId xmlns:a16="http://schemas.microsoft.com/office/drawing/2014/main" xmlns="" id="{6B8DF4A4-00E2-9B10-CC12-B0D274CCB842}"/>
                     </a:ext>
                   </a:extLst>
                 </p:cNvPr>
@@ -15699,7 +17809,7 @@
                 <p:cNvPr id="14" name="TextBox 13">
                   <a:extLst>
                     <a:ext uri="{FF2B5EF4-FFF2-40B4-BE49-F238E27FC236}">
-                      <a16:creationId xmlns="" xmlns:a16="http://schemas.microsoft.com/office/drawing/2014/main" id="{376B01EB-53C8-C2B2-1104-8A2BC1DE4624}"/>
+                      <a16:creationId xmlns:a16="http://schemas.microsoft.com/office/drawing/2014/main" xmlns="" id="{376B01EB-53C8-C2B2-1104-8A2BC1DE4624}"/>
                     </a:ext>
                   </a:extLst>
                 </p:cNvPr>
@@ -15818,7 +17928,7 @@
             <p:cNvPr id="20" name="Rectangle 19">
               <a:extLst>
                 <a:ext uri="{FF2B5EF4-FFF2-40B4-BE49-F238E27FC236}">
-                  <a16:creationId xmlns="" xmlns:a16="http://schemas.microsoft.com/office/drawing/2014/main" id="{8B0A48D5-77C9-C29A-8EF5-BED0E6E38CD2}"/>
+                  <a16:creationId xmlns:a16="http://schemas.microsoft.com/office/drawing/2014/main" xmlns="" id="{8B0A48D5-77C9-C29A-8EF5-BED0E6E38CD2}"/>
                 </a:ext>
               </a:extLst>
             </p:cNvPr>
@@ -15868,7 +17978,7 @@
             <p:cNvPr id="21" name="Rectangle 20">
               <a:extLst>
                 <a:ext uri="{FF2B5EF4-FFF2-40B4-BE49-F238E27FC236}">
-                  <a16:creationId xmlns="" xmlns:a16="http://schemas.microsoft.com/office/drawing/2014/main" id="{48728DA3-DA01-CAB9-540E-37EADA51BE57}"/>
+                  <a16:creationId xmlns:a16="http://schemas.microsoft.com/office/drawing/2014/main" xmlns="" id="{48728DA3-DA01-CAB9-540E-37EADA51BE57}"/>
                 </a:ext>
               </a:extLst>
             </p:cNvPr>
@@ -15918,7 +18028,7 @@
             <p:cNvPr id="25" name="Connector: Elbow 24">
               <a:extLst>
                 <a:ext uri="{FF2B5EF4-FFF2-40B4-BE49-F238E27FC236}">
-                  <a16:creationId xmlns="" xmlns:a16="http://schemas.microsoft.com/office/drawing/2014/main" id="{20E553C2-F044-7C77-F846-B80760291225}"/>
+                  <a16:creationId xmlns:a16="http://schemas.microsoft.com/office/drawing/2014/main" xmlns="" id="{20E553C2-F044-7C77-F846-B80760291225}"/>
                 </a:ext>
               </a:extLst>
             </p:cNvPr>
@@ -15960,7 +18070,7 @@
             <p:cNvPr id="31" name="Straight Arrow Connector 30">
               <a:extLst>
                 <a:ext uri="{FF2B5EF4-FFF2-40B4-BE49-F238E27FC236}">
-                  <a16:creationId xmlns="" xmlns:a16="http://schemas.microsoft.com/office/drawing/2014/main" id="{6AEFECE4-5D15-A8B3-453D-610BA5638D05}"/>
+                  <a16:creationId xmlns:a16="http://schemas.microsoft.com/office/drawing/2014/main" xmlns="" id="{6AEFECE4-5D15-A8B3-453D-610BA5638D05}"/>
                 </a:ext>
               </a:extLst>
             </p:cNvPr>
@@ -16002,7 +18112,7 @@
             <p:cNvPr id="35" name="Straight Arrow Connector 34">
               <a:extLst>
                 <a:ext uri="{FF2B5EF4-FFF2-40B4-BE49-F238E27FC236}">
-                  <a16:creationId xmlns="" xmlns:a16="http://schemas.microsoft.com/office/drawing/2014/main" id="{B6FFE6A0-55AE-62C1-3F6E-5291D436B5AB}"/>
+                  <a16:creationId xmlns:a16="http://schemas.microsoft.com/office/drawing/2014/main" xmlns="" id="{B6FFE6A0-55AE-62C1-3F6E-5291D436B5AB}"/>
                 </a:ext>
               </a:extLst>
             </p:cNvPr>
@@ -16045,7 +18155,7 @@
             <p:cNvPr id="40" name="Connector: Elbow 39">
               <a:extLst>
                 <a:ext uri="{FF2B5EF4-FFF2-40B4-BE49-F238E27FC236}">
-                  <a16:creationId xmlns="" xmlns:a16="http://schemas.microsoft.com/office/drawing/2014/main" id="{73307ED6-2342-7662-DD14-B12FEDB6983C}"/>
+                  <a16:creationId xmlns:a16="http://schemas.microsoft.com/office/drawing/2014/main" xmlns="" id="{73307ED6-2342-7662-DD14-B12FEDB6983C}"/>
                 </a:ext>
               </a:extLst>
             </p:cNvPr>
@@ -16089,7 +18199,7 @@
             <p:cNvPr id="44" name="Straight Connector 43">
               <a:extLst>
                 <a:ext uri="{FF2B5EF4-FFF2-40B4-BE49-F238E27FC236}">
-                  <a16:creationId xmlns="" xmlns:a16="http://schemas.microsoft.com/office/drawing/2014/main" id="{6B737731-0DAB-FB54-8D60-66210A48E60A}"/>
+                  <a16:creationId xmlns:a16="http://schemas.microsoft.com/office/drawing/2014/main" xmlns="" id="{6B737731-0DAB-FB54-8D60-66210A48E60A}"/>
                 </a:ext>
               </a:extLst>
             </p:cNvPr>
@@ -16129,7 +18239,7 @@
             <p:cNvPr id="46" name="Straight Connector 45">
               <a:extLst>
                 <a:ext uri="{FF2B5EF4-FFF2-40B4-BE49-F238E27FC236}">
-                  <a16:creationId xmlns="" xmlns:a16="http://schemas.microsoft.com/office/drawing/2014/main" id="{7AED5B7A-243B-6FAD-C904-A72171DA10E4}"/>
+                  <a16:creationId xmlns:a16="http://schemas.microsoft.com/office/drawing/2014/main" xmlns="" id="{7AED5B7A-243B-6FAD-C904-A72171DA10E4}"/>
                 </a:ext>
               </a:extLst>
             </p:cNvPr>
@@ -16171,7 +18281,7 @@
                 <p:cNvPr id="55" name="TextBox 54">
                   <a:extLst>
                     <a:ext uri="{FF2B5EF4-FFF2-40B4-BE49-F238E27FC236}">
-                      <a16:creationId xmlns="" xmlns:a16="http://schemas.microsoft.com/office/drawing/2014/main" id="{C98BB9BE-FF5B-BD53-700F-EF25882F8757}"/>
+                      <a16:creationId xmlns:a16="http://schemas.microsoft.com/office/drawing/2014/main" xmlns="" id="{C98BB9BE-FF5B-BD53-700F-EF25882F8757}"/>
                     </a:ext>
                   </a:extLst>
                 </p:cNvPr>
@@ -16284,7 +18394,7 @@
                 <p:cNvPr id="56" name="TextBox 55">
                   <a:extLst>
                     <a:ext uri="{FF2B5EF4-FFF2-40B4-BE49-F238E27FC236}">
-                      <a16:creationId xmlns="" xmlns:a16="http://schemas.microsoft.com/office/drawing/2014/main" id="{033C1F87-4FD6-565B-5CE1-B94FB9D5F703}"/>
+                      <a16:creationId xmlns:a16="http://schemas.microsoft.com/office/drawing/2014/main" xmlns="" id="{033C1F87-4FD6-565B-5CE1-B94FB9D5F703}"/>
                     </a:ext>
                   </a:extLst>
                 </p:cNvPr>
@@ -16395,7 +18505,7 @@
             <p:cNvPr id="58" name="Straight Connector 57">
               <a:extLst>
                 <a:ext uri="{FF2B5EF4-FFF2-40B4-BE49-F238E27FC236}">
-                  <a16:creationId xmlns="" xmlns:a16="http://schemas.microsoft.com/office/drawing/2014/main" id="{1A8E8F72-A082-BAC3-6C41-D1C1204F72D8}"/>
+                  <a16:creationId xmlns:a16="http://schemas.microsoft.com/office/drawing/2014/main" xmlns="" id="{1A8E8F72-A082-BAC3-6C41-D1C1204F72D8}"/>
                 </a:ext>
               </a:extLst>
             </p:cNvPr>
@@ -16453,7 +18563,7 @@
         <p:cNvPr id="1" name="">
           <a:extLst>
             <a:ext uri="{FF2B5EF4-FFF2-40B4-BE49-F238E27FC236}">
-              <a16:creationId xmlns="" xmlns:a16="http://schemas.microsoft.com/office/drawing/2014/main" id="{A370B64E-1F58-2FF0-BFB3-B1D955875AD5}"/>
+              <a16:creationId xmlns:a16="http://schemas.microsoft.com/office/drawing/2014/main" xmlns="" id="{A370B64E-1F58-2FF0-BFB3-B1D955875AD5}"/>
             </a:ext>
           </a:extLst>
         </p:cNvPr>
@@ -16473,7 +18583,7 @@
           <p:cNvPr id="2" name="Título 1">
             <a:extLst>
               <a:ext uri="{FF2B5EF4-FFF2-40B4-BE49-F238E27FC236}">
-                <a16:creationId xmlns="" xmlns:a16="http://schemas.microsoft.com/office/drawing/2014/main" id="{86CC3BAE-52FC-3697-DB30-5B05B346937E}"/>
+                <a16:creationId xmlns:a16="http://schemas.microsoft.com/office/drawing/2014/main" xmlns="" id="{86CC3BAE-52FC-3697-DB30-5B05B346937E}"/>
               </a:ext>
             </a:extLst>
           </p:cNvPr>
@@ -16502,7 +18612,7 @@
           <p:cNvPr id="3" name="Espaço Reservado para Conteúdo 2">
             <a:extLst>
               <a:ext uri="{FF2B5EF4-FFF2-40B4-BE49-F238E27FC236}">
-                <a16:creationId xmlns="" xmlns:a16="http://schemas.microsoft.com/office/drawing/2014/main" id="{0A06D34D-8885-14BC-AF7E-F271D7D63333}"/>
+                <a16:creationId xmlns:a16="http://schemas.microsoft.com/office/drawing/2014/main" xmlns="" id="{0A06D34D-8885-14BC-AF7E-F271D7D63333}"/>
               </a:ext>
             </a:extLst>
           </p:cNvPr>
@@ -16583,7 +18693,7 @@
           <p:cNvPr id="4" name="Imagem 16">
             <a:extLst>
               <a:ext uri="{FF2B5EF4-FFF2-40B4-BE49-F238E27FC236}">
-                <a16:creationId xmlns="" xmlns:a16="http://schemas.microsoft.com/office/drawing/2014/main" id="{7937C6EA-BFD8-5278-9EE0-796D1842173C}"/>
+                <a16:creationId xmlns:a16="http://schemas.microsoft.com/office/drawing/2014/main" xmlns="" id="{7937C6EA-BFD8-5278-9EE0-796D1842173C}"/>
               </a:ext>
             </a:extLst>
           </p:cNvPr>
@@ -16635,7 +18745,7 @@
         <p:cNvPr id="1" name="">
           <a:extLst>
             <a:ext uri="{FF2B5EF4-FFF2-40B4-BE49-F238E27FC236}">
-              <a16:creationId xmlns="" xmlns:a16="http://schemas.microsoft.com/office/drawing/2014/main" id="{D3753AED-FA4F-39DE-91A4-E5C845C0C665}"/>
+              <a16:creationId xmlns:a16="http://schemas.microsoft.com/office/drawing/2014/main" xmlns="" id="{D3753AED-FA4F-39DE-91A4-E5C845C0C665}"/>
             </a:ext>
           </a:extLst>
         </p:cNvPr>
@@ -16655,7 +18765,7 @@
           <p:cNvPr id="2" name="Título 1">
             <a:extLst>
               <a:ext uri="{FF2B5EF4-FFF2-40B4-BE49-F238E27FC236}">
-                <a16:creationId xmlns="" xmlns:a16="http://schemas.microsoft.com/office/drawing/2014/main" id="{6E88774E-D7D6-D9E6-4449-244D34EE979C}"/>
+                <a16:creationId xmlns:a16="http://schemas.microsoft.com/office/drawing/2014/main" xmlns="" id="{6E88774E-D7D6-D9E6-4449-244D34EE979C}"/>
               </a:ext>
             </a:extLst>
           </p:cNvPr>
@@ -16684,7 +18794,7 @@
           <p:cNvPr id="3" name="Espaço Reservado para Conteúdo 2">
             <a:extLst>
               <a:ext uri="{FF2B5EF4-FFF2-40B4-BE49-F238E27FC236}">
-                <a16:creationId xmlns="" xmlns:a16="http://schemas.microsoft.com/office/drawing/2014/main" id="{0E79548E-494A-A12A-30F7-F4E225B6C309}"/>
+                <a16:creationId xmlns:a16="http://schemas.microsoft.com/office/drawing/2014/main" xmlns="" id="{0E79548E-494A-A12A-30F7-F4E225B6C309}"/>
               </a:ext>
             </a:extLst>
           </p:cNvPr>
@@ -16759,7 +18869,7 @@
           <p:cNvPr id="6" name="Imagem 16">
             <a:extLst>
               <a:ext uri="{FF2B5EF4-FFF2-40B4-BE49-F238E27FC236}">
-                <a16:creationId xmlns="" xmlns:a16="http://schemas.microsoft.com/office/drawing/2014/main" id="{C8EB1D57-2EF7-64D2-25BE-6F8A0BE933DB}"/>
+                <a16:creationId xmlns:a16="http://schemas.microsoft.com/office/drawing/2014/main" xmlns="" id="{C8EB1D57-2EF7-64D2-25BE-6F8A0BE933DB}"/>
               </a:ext>
             </a:extLst>
           </p:cNvPr>
@@ -16811,7 +18921,7 @@
         <p:cNvPr id="1" name="">
           <a:extLst>
             <a:ext uri="{FF2B5EF4-FFF2-40B4-BE49-F238E27FC236}">
-              <a16:creationId xmlns="" xmlns:a16="http://schemas.microsoft.com/office/drawing/2014/main" id="{D41FFEFA-1EED-2754-CDBD-7CC34D06F8B2}"/>
+              <a16:creationId xmlns:a16="http://schemas.microsoft.com/office/drawing/2014/main" xmlns="" id="{D41FFEFA-1EED-2754-CDBD-7CC34D06F8B2}"/>
             </a:ext>
           </a:extLst>
         </p:cNvPr>
@@ -16831,7 +18941,7 @@
           <p:cNvPr id="2" name="Título 1">
             <a:extLst>
               <a:ext uri="{FF2B5EF4-FFF2-40B4-BE49-F238E27FC236}">
-                <a16:creationId xmlns="" xmlns:a16="http://schemas.microsoft.com/office/drawing/2014/main" id="{E4CDBB74-F243-3F53-FEC5-AF11CE256B39}"/>
+                <a16:creationId xmlns:a16="http://schemas.microsoft.com/office/drawing/2014/main" xmlns="" id="{E4CDBB74-F243-3F53-FEC5-AF11CE256B39}"/>
               </a:ext>
             </a:extLst>
           </p:cNvPr>
@@ -16860,7 +18970,7 @@
           <p:cNvPr id="3" name="Espaço Reservado para Conteúdo 2">
             <a:extLst>
               <a:ext uri="{FF2B5EF4-FFF2-40B4-BE49-F238E27FC236}">
-                <a16:creationId xmlns="" xmlns:a16="http://schemas.microsoft.com/office/drawing/2014/main" id="{8A609E9F-E2C8-D6E3-78D1-C44C117B55A3}"/>
+                <a16:creationId xmlns:a16="http://schemas.microsoft.com/office/drawing/2014/main" xmlns="" id="{8A609E9F-E2C8-D6E3-78D1-C44C117B55A3}"/>
               </a:ext>
             </a:extLst>
           </p:cNvPr>
@@ -16905,7 +19015,7 @@
           <p:cNvPr id="4" name="Imagem 16">
             <a:extLst>
               <a:ext uri="{FF2B5EF4-FFF2-40B4-BE49-F238E27FC236}">
-                <a16:creationId xmlns="" xmlns:a16="http://schemas.microsoft.com/office/drawing/2014/main" id="{DF71A34D-2B36-AF4A-818D-805CF072BD50}"/>
+                <a16:creationId xmlns:a16="http://schemas.microsoft.com/office/drawing/2014/main" xmlns="" id="{DF71A34D-2B36-AF4A-818D-805CF072BD50}"/>
               </a:ext>
             </a:extLst>
           </p:cNvPr>
@@ -16971,7 +19081,7 @@
           <p:cNvPr id="2" name="Title 1">
             <a:extLst>
               <a:ext uri="{FF2B5EF4-FFF2-40B4-BE49-F238E27FC236}">
-                <a16:creationId xmlns="" xmlns:a16="http://schemas.microsoft.com/office/drawing/2014/main" id="{81E045BB-096B-FD28-B7D5-E94A5FD7C8E5}"/>
+                <a16:creationId xmlns:a16="http://schemas.microsoft.com/office/drawing/2014/main" xmlns="" id="{81E045BB-096B-FD28-B7D5-E94A5FD7C8E5}"/>
               </a:ext>
             </a:extLst>
           </p:cNvPr>
@@ -17000,7 +19110,7 @@
           <p:cNvPr id="3" name="Content Placeholder 2">
             <a:extLst>
               <a:ext uri="{FF2B5EF4-FFF2-40B4-BE49-F238E27FC236}">
-                <a16:creationId xmlns="" xmlns:a16="http://schemas.microsoft.com/office/drawing/2014/main" id="{DC3C87D0-4294-EB29-295B-08AD144442B5}"/>
+                <a16:creationId xmlns:a16="http://schemas.microsoft.com/office/drawing/2014/main" xmlns="" id="{DC3C87D0-4294-EB29-295B-08AD144442B5}"/>
               </a:ext>
             </a:extLst>
           </p:cNvPr>
@@ -17068,7 +19178,7 @@
           <p:cNvPr id="4" name="Picture 4" descr="A Beginner's Guide to Reinforcement Learning and its Basic Implementation  from Scratch | by Tanvi Penumudy | Analytics Vidhya | Medium">
             <a:extLst>
               <a:ext uri="{FF2B5EF4-FFF2-40B4-BE49-F238E27FC236}">
-                <a16:creationId xmlns="" xmlns:a16="http://schemas.microsoft.com/office/drawing/2014/main" id="{A37B35F5-6EF1-B612-B863-263AB00420ED}"/>
+                <a16:creationId xmlns:a16="http://schemas.microsoft.com/office/drawing/2014/main" xmlns="" id="{A37B35F5-6EF1-B612-B863-263AB00420ED}"/>
               </a:ext>
             </a:extLst>
           </p:cNvPr>
@@ -17145,7 +19255,7 @@
           <p:cNvPr id="2" name="Title 1">
             <a:extLst>
               <a:ext uri="{FF2B5EF4-FFF2-40B4-BE49-F238E27FC236}">
-                <a16:creationId xmlns="" xmlns:a16="http://schemas.microsoft.com/office/drawing/2014/main" id="{CD479DA3-4A1A-74AE-26DA-FD6E65250CCE}"/>
+                <a16:creationId xmlns:a16="http://schemas.microsoft.com/office/drawing/2014/main" xmlns="" id="{CD479DA3-4A1A-74AE-26DA-FD6E65250CCE}"/>
               </a:ext>
             </a:extLst>
           </p:cNvPr>
@@ -17187,7 +19297,7 @@
               <p:cNvPr id="3" name="Content Placeholder 2">
                 <a:extLst>
                   <a:ext uri="{FF2B5EF4-FFF2-40B4-BE49-F238E27FC236}">
-                    <a16:creationId xmlns="" xmlns:a16="http://schemas.microsoft.com/office/drawing/2014/main" id="{D674119D-90D2-5043-F365-B3EB6F84791A}"/>
+                    <a16:creationId xmlns:a16="http://schemas.microsoft.com/office/drawing/2014/main" xmlns="" id="{D674119D-90D2-5043-F365-B3EB6F84791A}"/>
                   </a:ext>
                 </a:extLst>
               </p:cNvPr>
@@ -17417,7 +19527,7 @@
         <p:cNvPr id="1" name="">
           <a:extLst>
             <a:ext uri="{FF2B5EF4-FFF2-40B4-BE49-F238E27FC236}">
-              <a16:creationId xmlns="" xmlns:a16="http://schemas.microsoft.com/office/drawing/2014/main" id="{DDB2BBDA-DAF3-B7AC-FB99-7C5B9285F912}"/>
+              <a16:creationId xmlns:a16="http://schemas.microsoft.com/office/drawing/2014/main" xmlns="" id="{DDB2BBDA-DAF3-B7AC-FB99-7C5B9285F912}"/>
             </a:ext>
           </a:extLst>
         </p:cNvPr>
@@ -17437,7 +19547,7 @@
           <p:cNvPr id="2" name="Title 1">
             <a:extLst>
               <a:ext uri="{FF2B5EF4-FFF2-40B4-BE49-F238E27FC236}">
-                <a16:creationId xmlns="" xmlns:a16="http://schemas.microsoft.com/office/drawing/2014/main" id="{A98D36C9-8653-8E41-11D8-585B6AC0D03D}"/>
+                <a16:creationId xmlns:a16="http://schemas.microsoft.com/office/drawing/2014/main" xmlns="" id="{A98D36C9-8653-8E41-11D8-585B6AC0D03D}"/>
               </a:ext>
             </a:extLst>
           </p:cNvPr>
@@ -17479,7 +19589,7 @@
               <p:cNvPr id="3" name="Content Placeholder 2">
                 <a:extLst>
                   <a:ext uri="{FF2B5EF4-FFF2-40B4-BE49-F238E27FC236}">
-                    <a16:creationId xmlns="" xmlns:a16="http://schemas.microsoft.com/office/drawing/2014/main" id="{981046E0-93D4-BF9F-C552-72A01838A8A3}"/>
+                    <a16:creationId xmlns:a16="http://schemas.microsoft.com/office/drawing/2014/main" xmlns="" id="{981046E0-93D4-BF9F-C552-72A01838A8A3}"/>
                   </a:ext>
                 </a:extLst>
               </p:cNvPr>
@@ -17874,7 +19984,7 @@
           <p:cNvPr id="61" name="Picture 60">
             <a:extLst>
               <a:ext uri="{FF2B5EF4-FFF2-40B4-BE49-F238E27FC236}">
-                <a16:creationId xmlns="" xmlns:a16="http://schemas.microsoft.com/office/drawing/2014/main" id="{22F895FA-1424-E50C-97F4-4F0BE0413C2F}"/>
+                <a16:creationId xmlns:a16="http://schemas.microsoft.com/office/drawing/2014/main" xmlns="" id="{22F895FA-1424-E50C-97F4-4F0BE0413C2F}"/>
               </a:ext>
             </a:extLst>
           </p:cNvPr>

--- a/slides/C24_Q_learning.pptx
+++ b/slides/C24_Q_learning.pptx
@@ -959,7 +959,7 @@
         <p:cNvPr id="1" name="">
           <a:extLst>
             <a:ext uri="{FF2B5EF4-FFF2-40B4-BE49-F238E27FC236}">
-              <a16:creationId xmlns:a16="http://schemas.microsoft.com/office/drawing/2014/main" xmlns="" id="{255DD39D-8438-4F45-71B4-9F8747421DFC}"/>
+              <a16:creationId xmlns="" xmlns:a16="http://schemas.microsoft.com/office/drawing/2014/main" id="{255DD39D-8438-4F45-71B4-9F8747421DFC}"/>
             </a:ext>
           </a:extLst>
         </p:cNvPr>
@@ -979,7 +979,7 @@
           <p:cNvPr id="2" name="Slide Image Placeholder 1">
             <a:extLst>
               <a:ext uri="{FF2B5EF4-FFF2-40B4-BE49-F238E27FC236}">
-                <a16:creationId xmlns:a16="http://schemas.microsoft.com/office/drawing/2014/main" xmlns="" id="{6C322D5B-AD1C-1DB1-53A1-6978329C3FD0}"/>
+                <a16:creationId xmlns="" xmlns:a16="http://schemas.microsoft.com/office/drawing/2014/main" id="{6C322D5B-AD1C-1DB1-53A1-6978329C3FD0}"/>
               </a:ext>
             </a:extLst>
           </p:cNvPr>
@@ -997,7 +997,7 @@
           <p:cNvPr id="3" name="Notes Placeholder 2">
             <a:extLst>
               <a:ext uri="{FF2B5EF4-FFF2-40B4-BE49-F238E27FC236}">
-                <a16:creationId xmlns:a16="http://schemas.microsoft.com/office/drawing/2014/main" xmlns="" id="{F5D7455F-337E-5D6B-A02A-380397063D2D}"/>
+                <a16:creationId xmlns="" xmlns:a16="http://schemas.microsoft.com/office/drawing/2014/main" id="{F5D7455F-337E-5D6B-A02A-380397063D2D}"/>
               </a:ext>
             </a:extLst>
           </p:cNvPr>
@@ -1025,7 +1025,7 @@
           <p:cNvPr id="4" name="Slide Number Placeholder 3">
             <a:extLst>
               <a:ext uri="{FF2B5EF4-FFF2-40B4-BE49-F238E27FC236}">
-                <a16:creationId xmlns:a16="http://schemas.microsoft.com/office/drawing/2014/main" xmlns="" id="{B5124413-04E6-A99E-E6BA-F56674216BC5}"/>
+                <a16:creationId xmlns="" xmlns:a16="http://schemas.microsoft.com/office/drawing/2014/main" id="{B5124413-04E6-A99E-E6BA-F56674216BC5}"/>
               </a:ext>
             </a:extLst>
           </p:cNvPr>
@@ -1070,7 +1070,7 @@
         <p:cNvPr id="1" name="">
           <a:extLst>
             <a:ext uri="{FF2B5EF4-FFF2-40B4-BE49-F238E27FC236}">
-              <a16:creationId xmlns:a16="http://schemas.microsoft.com/office/drawing/2014/main" xmlns="" id="{83CD62A6-7D00-3C53-05CF-A6197A8362EA}"/>
+              <a16:creationId xmlns="" xmlns:a16="http://schemas.microsoft.com/office/drawing/2014/main" id="{83CD62A6-7D00-3C53-05CF-A6197A8362EA}"/>
             </a:ext>
           </a:extLst>
         </p:cNvPr>
@@ -1090,7 +1090,7 @@
           <p:cNvPr id="2" name="Slide Image Placeholder 1">
             <a:extLst>
               <a:ext uri="{FF2B5EF4-FFF2-40B4-BE49-F238E27FC236}">
-                <a16:creationId xmlns:a16="http://schemas.microsoft.com/office/drawing/2014/main" xmlns="" id="{6DFDE321-184D-9B7D-CEA2-205606B85A43}"/>
+                <a16:creationId xmlns="" xmlns:a16="http://schemas.microsoft.com/office/drawing/2014/main" id="{6DFDE321-184D-9B7D-CEA2-205606B85A43}"/>
               </a:ext>
             </a:extLst>
           </p:cNvPr>
@@ -1108,7 +1108,7 @@
           <p:cNvPr id="3" name="Notes Placeholder 2">
             <a:extLst>
               <a:ext uri="{FF2B5EF4-FFF2-40B4-BE49-F238E27FC236}">
-                <a16:creationId xmlns:a16="http://schemas.microsoft.com/office/drawing/2014/main" xmlns="" id="{6DA764DC-3F53-958D-91A3-DB06BD4A39DA}"/>
+                <a16:creationId xmlns="" xmlns:a16="http://schemas.microsoft.com/office/drawing/2014/main" id="{6DA764DC-3F53-958D-91A3-DB06BD4A39DA}"/>
               </a:ext>
             </a:extLst>
           </p:cNvPr>
@@ -1136,7 +1136,7 @@
           <p:cNvPr id="4" name="Slide Number Placeholder 3">
             <a:extLst>
               <a:ext uri="{FF2B5EF4-FFF2-40B4-BE49-F238E27FC236}">
-                <a16:creationId xmlns:a16="http://schemas.microsoft.com/office/drawing/2014/main" xmlns="" id="{6BC07E3E-C02F-977B-3C72-FEF303694F11}"/>
+                <a16:creationId xmlns="" xmlns:a16="http://schemas.microsoft.com/office/drawing/2014/main" id="{6BC07E3E-C02F-977B-3C72-FEF303694F11}"/>
               </a:ext>
             </a:extLst>
           </p:cNvPr>
@@ -3193,7 +3193,7 @@
         <p:cNvPr id="1" name="">
           <a:extLst>
             <a:ext uri="{FF2B5EF4-FFF2-40B4-BE49-F238E27FC236}">
-              <a16:creationId xmlns:a16="http://schemas.microsoft.com/office/drawing/2014/main" xmlns="" id="{5B4C3711-83BC-221A-A341-2BE62BCF89DC}"/>
+              <a16:creationId xmlns="" xmlns:a16="http://schemas.microsoft.com/office/drawing/2014/main" id="{5B4C3711-83BC-221A-A341-2BE62BCF89DC}"/>
             </a:ext>
           </a:extLst>
         </p:cNvPr>
@@ -3213,7 +3213,7 @@
           <p:cNvPr id="2" name="Slide Image Placeholder 1">
             <a:extLst>
               <a:ext uri="{FF2B5EF4-FFF2-40B4-BE49-F238E27FC236}">
-                <a16:creationId xmlns:a16="http://schemas.microsoft.com/office/drawing/2014/main" xmlns="" id="{5957728F-CFA3-D0A6-7780-F800EBAC1F6E}"/>
+                <a16:creationId xmlns="" xmlns:a16="http://schemas.microsoft.com/office/drawing/2014/main" id="{5957728F-CFA3-D0A6-7780-F800EBAC1F6E}"/>
               </a:ext>
             </a:extLst>
           </p:cNvPr>
@@ -3231,7 +3231,7 @@
           <p:cNvPr id="3" name="Notes Placeholder 2">
             <a:extLst>
               <a:ext uri="{FF2B5EF4-FFF2-40B4-BE49-F238E27FC236}">
-                <a16:creationId xmlns:a16="http://schemas.microsoft.com/office/drawing/2014/main" xmlns="" id="{4AD3E5CB-A8B8-7F4B-200F-94D044C81C3D}"/>
+                <a16:creationId xmlns="" xmlns:a16="http://schemas.microsoft.com/office/drawing/2014/main" id="{4AD3E5CB-A8B8-7F4B-200F-94D044C81C3D}"/>
               </a:ext>
             </a:extLst>
           </p:cNvPr>
@@ -3256,7 +3256,7 @@
           <p:cNvPr id="4" name="Slide Number Placeholder 3">
             <a:extLst>
               <a:ext uri="{FF2B5EF4-FFF2-40B4-BE49-F238E27FC236}">
-                <a16:creationId xmlns:a16="http://schemas.microsoft.com/office/drawing/2014/main" xmlns="" id="{3F9D8EC2-522A-3A24-97FD-162C1CF3C132}"/>
+                <a16:creationId xmlns="" xmlns:a16="http://schemas.microsoft.com/office/drawing/2014/main" id="{3F9D8EC2-522A-3A24-97FD-162C1CF3C132}"/>
               </a:ext>
             </a:extLst>
           </p:cNvPr>
@@ -3301,7 +3301,7 @@
         <p:cNvPr id="1" name="">
           <a:extLst>
             <a:ext uri="{FF2B5EF4-FFF2-40B4-BE49-F238E27FC236}">
-              <a16:creationId xmlns:a16="http://schemas.microsoft.com/office/drawing/2014/main" xmlns="" id="{478600EE-A6A2-2235-BCC6-6DE0C5D8DE78}"/>
+              <a16:creationId xmlns="" xmlns:a16="http://schemas.microsoft.com/office/drawing/2014/main" id="{478600EE-A6A2-2235-BCC6-6DE0C5D8DE78}"/>
             </a:ext>
           </a:extLst>
         </p:cNvPr>
@@ -3321,7 +3321,7 @@
           <p:cNvPr id="2" name="Slide Image Placeholder 1">
             <a:extLst>
               <a:ext uri="{FF2B5EF4-FFF2-40B4-BE49-F238E27FC236}">
-                <a16:creationId xmlns:a16="http://schemas.microsoft.com/office/drawing/2014/main" xmlns="" id="{B1C41149-DCAF-E8F8-FB78-0B242E221738}"/>
+                <a16:creationId xmlns="" xmlns:a16="http://schemas.microsoft.com/office/drawing/2014/main" id="{B1C41149-DCAF-E8F8-FB78-0B242E221738}"/>
               </a:ext>
             </a:extLst>
           </p:cNvPr>
@@ -3339,7 +3339,7 @@
           <p:cNvPr id="3" name="Notes Placeholder 2">
             <a:extLst>
               <a:ext uri="{FF2B5EF4-FFF2-40B4-BE49-F238E27FC236}">
-                <a16:creationId xmlns:a16="http://schemas.microsoft.com/office/drawing/2014/main" xmlns="" id="{F4C5329E-ECB5-4CB1-3A33-CFC57176F475}"/>
+                <a16:creationId xmlns="" xmlns:a16="http://schemas.microsoft.com/office/drawing/2014/main" id="{F4C5329E-ECB5-4CB1-3A33-CFC57176F475}"/>
               </a:ext>
             </a:extLst>
           </p:cNvPr>
@@ -3364,7 +3364,7 @@
           <p:cNvPr id="4" name="Slide Number Placeholder 3">
             <a:extLst>
               <a:ext uri="{FF2B5EF4-FFF2-40B4-BE49-F238E27FC236}">
-                <a16:creationId xmlns:a16="http://schemas.microsoft.com/office/drawing/2014/main" xmlns="" id="{37AB7C02-5FA9-66E4-2433-F97393A5C0BA}"/>
+                <a16:creationId xmlns="" xmlns:a16="http://schemas.microsoft.com/office/drawing/2014/main" id="{37AB7C02-5FA9-66E4-2433-F97393A5C0BA}"/>
               </a:ext>
             </a:extLst>
           </p:cNvPr>
@@ -3409,7 +3409,7 @@
         <p:cNvPr id="1" name="">
           <a:extLst>
             <a:ext uri="{FF2B5EF4-FFF2-40B4-BE49-F238E27FC236}">
-              <a16:creationId xmlns:a16="http://schemas.microsoft.com/office/drawing/2014/main" xmlns="" id="{92F2E69C-0407-4619-FFB1-7502CF033EBA}"/>
+              <a16:creationId xmlns="" xmlns:a16="http://schemas.microsoft.com/office/drawing/2014/main" id="{92F2E69C-0407-4619-FFB1-7502CF033EBA}"/>
             </a:ext>
           </a:extLst>
         </p:cNvPr>
@@ -3429,7 +3429,7 @@
           <p:cNvPr id="2" name="Slide Image Placeholder 1">
             <a:extLst>
               <a:ext uri="{FF2B5EF4-FFF2-40B4-BE49-F238E27FC236}">
-                <a16:creationId xmlns:a16="http://schemas.microsoft.com/office/drawing/2014/main" xmlns="" id="{E3C6894B-B13E-3C0F-BEC3-8A663E98508F}"/>
+                <a16:creationId xmlns="" xmlns:a16="http://schemas.microsoft.com/office/drawing/2014/main" id="{E3C6894B-B13E-3C0F-BEC3-8A663E98508F}"/>
               </a:ext>
             </a:extLst>
           </p:cNvPr>
@@ -3447,7 +3447,7 @@
           <p:cNvPr id="3" name="Notes Placeholder 2">
             <a:extLst>
               <a:ext uri="{FF2B5EF4-FFF2-40B4-BE49-F238E27FC236}">
-                <a16:creationId xmlns:a16="http://schemas.microsoft.com/office/drawing/2014/main" xmlns="" id="{B76A1B01-A242-46E3-F92E-FB0EA28821F9}"/>
+                <a16:creationId xmlns="" xmlns:a16="http://schemas.microsoft.com/office/drawing/2014/main" id="{B76A1B01-A242-46E3-F92E-FB0EA28821F9}"/>
               </a:ext>
             </a:extLst>
           </p:cNvPr>
@@ -3472,7 +3472,7 @@
           <p:cNvPr id="4" name="Slide Number Placeholder 3">
             <a:extLst>
               <a:ext uri="{FF2B5EF4-FFF2-40B4-BE49-F238E27FC236}">
-                <a16:creationId xmlns:a16="http://schemas.microsoft.com/office/drawing/2014/main" xmlns="" id="{4BA915CE-E13E-5840-D0C6-249ACB7C2C1D}"/>
+                <a16:creationId xmlns="" xmlns:a16="http://schemas.microsoft.com/office/drawing/2014/main" id="{4BA915CE-E13E-5840-D0C6-249ACB7C2C1D}"/>
               </a:ext>
             </a:extLst>
           </p:cNvPr>
@@ -3621,7 +3621,7 @@
         <p:cNvPr id="1" name="">
           <a:extLst>
             <a:ext uri="{FF2B5EF4-FFF2-40B4-BE49-F238E27FC236}">
-              <a16:creationId xmlns:a16="http://schemas.microsoft.com/office/drawing/2014/main" xmlns="" id="{0D0A5E72-3763-6194-5E85-BE26354035A3}"/>
+              <a16:creationId xmlns="" xmlns:a16="http://schemas.microsoft.com/office/drawing/2014/main" id="{0D0A5E72-3763-6194-5E85-BE26354035A3}"/>
             </a:ext>
           </a:extLst>
         </p:cNvPr>
@@ -3641,7 +3641,7 @@
           <p:cNvPr id="2" name="Slide Image Placeholder 1">
             <a:extLst>
               <a:ext uri="{FF2B5EF4-FFF2-40B4-BE49-F238E27FC236}">
-                <a16:creationId xmlns:a16="http://schemas.microsoft.com/office/drawing/2014/main" xmlns="" id="{82466988-6655-8B01-840E-0BE3EDB68F07}"/>
+                <a16:creationId xmlns="" xmlns:a16="http://schemas.microsoft.com/office/drawing/2014/main" id="{82466988-6655-8B01-840E-0BE3EDB68F07}"/>
               </a:ext>
             </a:extLst>
           </p:cNvPr>
@@ -3659,7 +3659,7 @@
           <p:cNvPr id="3" name="Notes Placeholder 2">
             <a:extLst>
               <a:ext uri="{FF2B5EF4-FFF2-40B4-BE49-F238E27FC236}">
-                <a16:creationId xmlns:a16="http://schemas.microsoft.com/office/drawing/2014/main" xmlns="" id="{5E09F3D0-11CA-2E8D-04C5-104C59DCE708}"/>
+                <a16:creationId xmlns="" xmlns:a16="http://schemas.microsoft.com/office/drawing/2014/main" id="{5E09F3D0-11CA-2E8D-04C5-104C59DCE708}"/>
               </a:ext>
             </a:extLst>
           </p:cNvPr>
@@ -3704,7 +3704,7 @@
           <p:cNvPr id="4" name="Slide Number Placeholder 3">
             <a:extLst>
               <a:ext uri="{FF2B5EF4-FFF2-40B4-BE49-F238E27FC236}">
-                <a16:creationId xmlns:a16="http://schemas.microsoft.com/office/drawing/2014/main" xmlns="" id="{68F0BCD7-F825-C67D-D845-8316B4C4B6D6}"/>
+                <a16:creationId xmlns="" xmlns:a16="http://schemas.microsoft.com/office/drawing/2014/main" id="{68F0BCD7-F825-C67D-D845-8316B4C4B6D6}"/>
               </a:ext>
             </a:extLst>
           </p:cNvPr>
@@ -3749,7 +3749,7 @@
         <p:cNvPr id="1" name="">
           <a:extLst>
             <a:ext uri="{FF2B5EF4-FFF2-40B4-BE49-F238E27FC236}">
-              <a16:creationId xmlns:a16="http://schemas.microsoft.com/office/drawing/2014/main" xmlns="" id="{0D0A5E72-3763-6194-5E85-BE26354035A3}"/>
+              <a16:creationId xmlns="" xmlns:a16="http://schemas.microsoft.com/office/drawing/2014/main" id="{0D0A5E72-3763-6194-5E85-BE26354035A3}"/>
             </a:ext>
           </a:extLst>
         </p:cNvPr>
@@ -3769,7 +3769,7 @@
           <p:cNvPr id="2" name="Slide Image Placeholder 1">
             <a:extLst>
               <a:ext uri="{FF2B5EF4-FFF2-40B4-BE49-F238E27FC236}">
-                <a16:creationId xmlns:a16="http://schemas.microsoft.com/office/drawing/2014/main" xmlns="" id="{82466988-6655-8B01-840E-0BE3EDB68F07}"/>
+                <a16:creationId xmlns="" xmlns:a16="http://schemas.microsoft.com/office/drawing/2014/main" id="{82466988-6655-8B01-840E-0BE3EDB68F07}"/>
               </a:ext>
             </a:extLst>
           </p:cNvPr>
@@ -3787,7 +3787,7 @@
           <p:cNvPr id="3" name="Notes Placeholder 2">
             <a:extLst>
               <a:ext uri="{FF2B5EF4-FFF2-40B4-BE49-F238E27FC236}">
-                <a16:creationId xmlns:a16="http://schemas.microsoft.com/office/drawing/2014/main" xmlns="" id="{5E09F3D0-11CA-2E8D-04C5-104C59DCE708}"/>
+                <a16:creationId xmlns="" xmlns:a16="http://schemas.microsoft.com/office/drawing/2014/main" id="{5E09F3D0-11CA-2E8D-04C5-104C59DCE708}"/>
               </a:ext>
             </a:extLst>
           </p:cNvPr>
@@ -3832,7 +3832,7 @@
           <p:cNvPr id="4" name="Slide Number Placeholder 3">
             <a:extLst>
               <a:ext uri="{FF2B5EF4-FFF2-40B4-BE49-F238E27FC236}">
-                <a16:creationId xmlns:a16="http://schemas.microsoft.com/office/drawing/2014/main" xmlns="" id="{68F0BCD7-F825-C67D-D845-8316B4C4B6D6}"/>
+                <a16:creationId xmlns="" xmlns:a16="http://schemas.microsoft.com/office/drawing/2014/main" id="{68F0BCD7-F825-C67D-D845-8316B4C4B6D6}"/>
               </a:ext>
             </a:extLst>
           </p:cNvPr>
@@ -4015,7 +4015,7 @@
           <p:cNvPr id="2" name="Título 1">
             <a:extLst>
               <a:ext uri="{FF2B5EF4-FFF2-40B4-BE49-F238E27FC236}">
-                <a16:creationId xmlns:a16="http://schemas.microsoft.com/office/drawing/2014/main" xmlns="" id="{1DB9B4FF-B06E-403C-A326-BDC64D8FF94E}"/>
+                <a16:creationId xmlns="" xmlns:a16="http://schemas.microsoft.com/office/drawing/2014/main" id="{1DB9B4FF-B06E-403C-A326-BDC64D8FF94E}"/>
               </a:ext>
             </a:extLst>
           </p:cNvPr>
@@ -4052,7 +4052,7 @@
           <p:cNvPr id="3" name="Subtítulo 2">
             <a:extLst>
               <a:ext uri="{FF2B5EF4-FFF2-40B4-BE49-F238E27FC236}">
-                <a16:creationId xmlns:a16="http://schemas.microsoft.com/office/drawing/2014/main" xmlns="" id="{247BDFCE-746E-45BF-A319-4733D58D1632}"/>
+                <a16:creationId xmlns="" xmlns:a16="http://schemas.microsoft.com/office/drawing/2014/main" id="{247BDFCE-746E-45BF-A319-4733D58D1632}"/>
               </a:ext>
             </a:extLst>
           </p:cNvPr>
@@ -4122,7 +4122,7 @@
           <p:cNvPr id="4" name="Espaço Reservado para Data 3">
             <a:extLst>
               <a:ext uri="{FF2B5EF4-FFF2-40B4-BE49-F238E27FC236}">
-                <a16:creationId xmlns:a16="http://schemas.microsoft.com/office/drawing/2014/main" xmlns="" id="{9EDE2778-5372-4104-B96D-968184DA8288}"/>
+                <a16:creationId xmlns="" xmlns:a16="http://schemas.microsoft.com/office/drawing/2014/main" id="{9EDE2778-5372-4104-B96D-968184DA8288}"/>
               </a:ext>
             </a:extLst>
           </p:cNvPr>
@@ -4151,7 +4151,7 @@
           <p:cNvPr id="5" name="Espaço Reservado para Rodapé 4">
             <a:extLst>
               <a:ext uri="{FF2B5EF4-FFF2-40B4-BE49-F238E27FC236}">
-                <a16:creationId xmlns:a16="http://schemas.microsoft.com/office/drawing/2014/main" xmlns="" id="{C1DD0F41-C861-4051-988D-3024A37A4B93}"/>
+                <a16:creationId xmlns="" xmlns:a16="http://schemas.microsoft.com/office/drawing/2014/main" id="{C1DD0F41-C861-4051-988D-3024A37A4B93}"/>
               </a:ext>
             </a:extLst>
           </p:cNvPr>
@@ -4176,7 +4176,7 @@
           <p:cNvPr id="6" name="Espaço Reservado para Número de Slide 5">
             <a:extLst>
               <a:ext uri="{FF2B5EF4-FFF2-40B4-BE49-F238E27FC236}">
-                <a16:creationId xmlns:a16="http://schemas.microsoft.com/office/drawing/2014/main" xmlns="" id="{07E5967E-D980-431A-A5DB-3F0C5030A81E}"/>
+                <a16:creationId xmlns="" xmlns:a16="http://schemas.microsoft.com/office/drawing/2014/main" id="{07E5967E-D980-431A-A5DB-3F0C5030A81E}"/>
               </a:ext>
             </a:extLst>
           </p:cNvPr>
@@ -4235,7 +4235,7 @@
           <p:cNvPr id="2" name="Título 1">
             <a:extLst>
               <a:ext uri="{FF2B5EF4-FFF2-40B4-BE49-F238E27FC236}">
-                <a16:creationId xmlns:a16="http://schemas.microsoft.com/office/drawing/2014/main" xmlns="" id="{9036C49F-3E68-4175-81BA-3C3FEE44308A}"/>
+                <a16:creationId xmlns="" xmlns:a16="http://schemas.microsoft.com/office/drawing/2014/main" id="{9036C49F-3E68-4175-81BA-3C3FEE44308A}"/>
               </a:ext>
             </a:extLst>
           </p:cNvPr>
@@ -4263,7 +4263,7 @@
           <p:cNvPr id="3" name="Espaço Reservado para Texto Vertical 2">
             <a:extLst>
               <a:ext uri="{FF2B5EF4-FFF2-40B4-BE49-F238E27FC236}">
-                <a16:creationId xmlns:a16="http://schemas.microsoft.com/office/drawing/2014/main" xmlns="" id="{426FA736-3DD3-4D4E-B57B-BBE1D8F7D424}"/>
+                <a16:creationId xmlns="" xmlns:a16="http://schemas.microsoft.com/office/drawing/2014/main" id="{426FA736-3DD3-4D4E-B57B-BBE1D8F7D424}"/>
               </a:ext>
             </a:extLst>
           </p:cNvPr>
@@ -4320,7 +4320,7 @@
           <p:cNvPr id="4" name="Espaço Reservado para Data 3">
             <a:extLst>
               <a:ext uri="{FF2B5EF4-FFF2-40B4-BE49-F238E27FC236}">
-                <a16:creationId xmlns:a16="http://schemas.microsoft.com/office/drawing/2014/main" xmlns="" id="{99E8855C-D8FD-48F6-B14E-861E0DE4D915}"/>
+                <a16:creationId xmlns="" xmlns:a16="http://schemas.microsoft.com/office/drawing/2014/main" id="{99E8855C-D8FD-48F6-B14E-861E0DE4D915}"/>
               </a:ext>
             </a:extLst>
           </p:cNvPr>
@@ -4349,7 +4349,7 @@
           <p:cNvPr id="5" name="Espaço Reservado para Rodapé 4">
             <a:extLst>
               <a:ext uri="{FF2B5EF4-FFF2-40B4-BE49-F238E27FC236}">
-                <a16:creationId xmlns:a16="http://schemas.microsoft.com/office/drawing/2014/main" xmlns="" id="{97C0BB88-2F21-42A5-ACFF-83DA47F2D340}"/>
+                <a16:creationId xmlns="" xmlns:a16="http://schemas.microsoft.com/office/drawing/2014/main" id="{97C0BB88-2F21-42A5-ACFF-83DA47F2D340}"/>
               </a:ext>
             </a:extLst>
           </p:cNvPr>
@@ -4374,7 +4374,7 @@
           <p:cNvPr id="6" name="Espaço Reservado para Número de Slide 5">
             <a:extLst>
               <a:ext uri="{FF2B5EF4-FFF2-40B4-BE49-F238E27FC236}">
-                <a16:creationId xmlns:a16="http://schemas.microsoft.com/office/drawing/2014/main" xmlns="" id="{6CB462B3-1F22-4C05-B4B8-7A279FB7D5E9}"/>
+                <a16:creationId xmlns="" xmlns:a16="http://schemas.microsoft.com/office/drawing/2014/main" id="{6CB462B3-1F22-4C05-B4B8-7A279FB7D5E9}"/>
               </a:ext>
             </a:extLst>
           </p:cNvPr>
@@ -4433,7 +4433,7 @@
           <p:cNvPr id="2" name="Título Vertical 1">
             <a:extLst>
               <a:ext uri="{FF2B5EF4-FFF2-40B4-BE49-F238E27FC236}">
-                <a16:creationId xmlns:a16="http://schemas.microsoft.com/office/drawing/2014/main" xmlns="" id="{EAEAB728-701C-4207-A9D5-23FF45C60502}"/>
+                <a16:creationId xmlns="" xmlns:a16="http://schemas.microsoft.com/office/drawing/2014/main" id="{EAEAB728-701C-4207-A9D5-23FF45C60502}"/>
               </a:ext>
             </a:extLst>
           </p:cNvPr>
@@ -4466,7 +4466,7 @@
           <p:cNvPr id="3" name="Espaço Reservado para Texto Vertical 2">
             <a:extLst>
               <a:ext uri="{FF2B5EF4-FFF2-40B4-BE49-F238E27FC236}">
-                <a16:creationId xmlns:a16="http://schemas.microsoft.com/office/drawing/2014/main" xmlns="" id="{BA8C8CCF-7823-480A-9A19-0F664DD17E3B}"/>
+                <a16:creationId xmlns="" xmlns:a16="http://schemas.microsoft.com/office/drawing/2014/main" id="{BA8C8CCF-7823-480A-9A19-0F664DD17E3B}"/>
               </a:ext>
             </a:extLst>
           </p:cNvPr>
@@ -4528,7 +4528,7 @@
           <p:cNvPr id="4" name="Espaço Reservado para Data 3">
             <a:extLst>
               <a:ext uri="{FF2B5EF4-FFF2-40B4-BE49-F238E27FC236}">
-                <a16:creationId xmlns:a16="http://schemas.microsoft.com/office/drawing/2014/main" xmlns="" id="{721D5734-7B1F-425D-942F-6EB73344027C}"/>
+                <a16:creationId xmlns="" xmlns:a16="http://schemas.microsoft.com/office/drawing/2014/main" id="{721D5734-7B1F-425D-942F-6EB73344027C}"/>
               </a:ext>
             </a:extLst>
           </p:cNvPr>
@@ -4557,7 +4557,7 @@
           <p:cNvPr id="5" name="Espaço Reservado para Rodapé 4">
             <a:extLst>
               <a:ext uri="{FF2B5EF4-FFF2-40B4-BE49-F238E27FC236}">
-                <a16:creationId xmlns:a16="http://schemas.microsoft.com/office/drawing/2014/main" xmlns="" id="{1E1AAEAC-F08D-45FE-89EC-B1B349A868C9}"/>
+                <a16:creationId xmlns="" xmlns:a16="http://schemas.microsoft.com/office/drawing/2014/main" id="{1E1AAEAC-F08D-45FE-89EC-B1B349A868C9}"/>
               </a:ext>
             </a:extLst>
           </p:cNvPr>
@@ -4582,7 +4582,7 @@
           <p:cNvPr id="6" name="Espaço Reservado para Número de Slide 5">
             <a:extLst>
               <a:ext uri="{FF2B5EF4-FFF2-40B4-BE49-F238E27FC236}">
-                <a16:creationId xmlns:a16="http://schemas.microsoft.com/office/drawing/2014/main" xmlns="" id="{BAA44493-9911-47B2-87A6-C2141A972BC8}"/>
+                <a16:creationId xmlns="" xmlns:a16="http://schemas.microsoft.com/office/drawing/2014/main" id="{BAA44493-9911-47B2-87A6-C2141A972BC8}"/>
               </a:ext>
             </a:extLst>
           </p:cNvPr>
@@ -4641,7 +4641,7 @@
           <p:cNvPr id="2" name="Título 1">
             <a:extLst>
               <a:ext uri="{FF2B5EF4-FFF2-40B4-BE49-F238E27FC236}">
-                <a16:creationId xmlns:a16="http://schemas.microsoft.com/office/drawing/2014/main" xmlns="" id="{71BD44A5-8F21-4626-A01D-48A1C874B1D5}"/>
+                <a16:creationId xmlns="" xmlns:a16="http://schemas.microsoft.com/office/drawing/2014/main" id="{71BD44A5-8F21-4626-A01D-48A1C874B1D5}"/>
               </a:ext>
             </a:extLst>
           </p:cNvPr>
@@ -4669,7 +4669,7 @@
           <p:cNvPr id="3" name="Espaço Reservado para Conteúdo 2">
             <a:extLst>
               <a:ext uri="{FF2B5EF4-FFF2-40B4-BE49-F238E27FC236}">
-                <a16:creationId xmlns:a16="http://schemas.microsoft.com/office/drawing/2014/main" xmlns="" id="{B79E8085-65A9-48AA-951D-71D978BFF4ED}"/>
+                <a16:creationId xmlns="" xmlns:a16="http://schemas.microsoft.com/office/drawing/2014/main" id="{B79E8085-65A9-48AA-951D-71D978BFF4ED}"/>
               </a:ext>
             </a:extLst>
           </p:cNvPr>
@@ -4726,7 +4726,7 @@
           <p:cNvPr id="4" name="Espaço Reservado para Data 3">
             <a:extLst>
               <a:ext uri="{FF2B5EF4-FFF2-40B4-BE49-F238E27FC236}">
-                <a16:creationId xmlns:a16="http://schemas.microsoft.com/office/drawing/2014/main" xmlns="" id="{F05BE1AF-51EA-425D-B188-DE7BD675009F}"/>
+                <a16:creationId xmlns="" xmlns:a16="http://schemas.microsoft.com/office/drawing/2014/main" id="{F05BE1AF-51EA-425D-B188-DE7BD675009F}"/>
               </a:ext>
             </a:extLst>
           </p:cNvPr>
@@ -4755,7 +4755,7 @@
           <p:cNvPr id="5" name="Espaço Reservado para Rodapé 4">
             <a:extLst>
               <a:ext uri="{FF2B5EF4-FFF2-40B4-BE49-F238E27FC236}">
-                <a16:creationId xmlns:a16="http://schemas.microsoft.com/office/drawing/2014/main" xmlns="" id="{121BE632-29CF-4CB9-B365-C9EF38F89BE6}"/>
+                <a16:creationId xmlns="" xmlns:a16="http://schemas.microsoft.com/office/drawing/2014/main" id="{121BE632-29CF-4CB9-B365-C9EF38F89BE6}"/>
               </a:ext>
             </a:extLst>
           </p:cNvPr>
@@ -4780,7 +4780,7 @@
           <p:cNvPr id="6" name="Espaço Reservado para Número de Slide 5">
             <a:extLst>
               <a:ext uri="{FF2B5EF4-FFF2-40B4-BE49-F238E27FC236}">
-                <a16:creationId xmlns:a16="http://schemas.microsoft.com/office/drawing/2014/main" xmlns="" id="{60CF3DD1-9AEC-4A57-B461-4E4DD86FAC18}"/>
+                <a16:creationId xmlns="" xmlns:a16="http://schemas.microsoft.com/office/drawing/2014/main" id="{60CF3DD1-9AEC-4A57-B461-4E4DD86FAC18}"/>
               </a:ext>
             </a:extLst>
           </p:cNvPr>
@@ -4839,7 +4839,7 @@
           <p:cNvPr id="2" name="Título 1">
             <a:extLst>
               <a:ext uri="{FF2B5EF4-FFF2-40B4-BE49-F238E27FC236}">
-                <a16:creationId xmlns:a16="http://schemas.microsoft.com/office/drawing/2014/main" xmlns="" id="{34AB2FF0-A4D7-4E28-991D-FF26140D5988}"/>
+                <a16:creationId xmlns="" xmlns:a16="http://schemas.microsoft.com/office/drawing/2014/main" id="{34AB2FF0-A4D7-4E28-991D-FF26140D5988}"/>
               </a:ext>
             </a:extLst>
           </p:cNvPr>
@@ -4876,7 +4876,7 @@
           <p:cNvPr id="3" name="Espaço Reservado para Texto 2">
             <a:extLst>
               <a:ext uri="{FF2B5EF4-FFF2-40B4-BE49-F238E27FC236}">
-                <a16:creationId xmlns:a16="http://schemas.microsoft.com/office/drawing/2014/main" xmlns="" id="{E2AC45B0-4145-40DB-8E61-105461170604}"/>
+                <a16:creationId xmlns="" xmlns:a16="http://schemas.microsoft.com/office/drawing/2014/main" id="{E2AC45B0-4145-40DB-8E61-105461170604}"/>
               </a:ext>
             </a:extLst>
           </p:cNvPr>
@@ -5001,7 +5001,7 @@
           <p:cNvPr id="4" name="Espaço Reservado para Data 3">
             <a:extLst>
               <a:ext uri="{FF2B5EF4-FFF2-40B4-BE49-F238E27FC236}">
-                <a16:creationId xmlns:a16="http://schemas.microsoft.com/office/drawing/2014/main" xmlns="" id="{50F1D3FB-740A-4EBA-A309-2CE71D12ECFB}"/>
+                <a16:creationId xmlns="" xmlns:a16="http://schemas.microsoft.com/office/drawing/2014/main" id="{50F1D3FB-740A-4EBA-A309-2CE71D12ECFB}"/>
               </a:ext>
             </a:extLst>
           </p:cNvPr>
@@ -5030,7 +5030,7 @@
           <p:cNvPr id="5" name="Espaço Reservado para Rodapé 4">
             <a:extLst>
               <a:ext uri="{FF2B5EF4-FFF2-40B4-BE49-F238E27FC236}">
-                <a16:creationId xmlns:a16="http://schemas.microsoft.com/office/drawing/2014/main" xmlns="" id="{BDCAB18F-8715-4465-A940-F9C193A2ACE9}"/>
+                <a16:creationId xmlns="" xmlns:a16="http://schemas.microsoft.com/office/drawing/2014/main" id="{BDCAB18F-8715-4465-A940-F9C193A2ACE9}"/>
               </a:ext>
             </a:extLst>
           </p:cNvPr>
@@ -5055,7 +5055,7 @@
           <p:cNvPr id="6" name="Espaço Reservado para Número de Slide 5">
             <a:extLst>
               <a:ext uri="{FF2B5EF4-FFF2-40B4-BE49-F238E27FC236}">
-                <a16:creationId xmlns:a16="http://schemas.microsoft.com/office/drawing/2014/main" xmlns="" id="{353466C6-8248-429F-8056-FF040BF509EB}"/>
+                <a16:creationId xmlns="" xmlns:a16="http://schemas.microsoft.com/office/drawing/2014/main" id="{353466C6-8248-429F-8056-FF040BF509EB}"/>
               </a:ext>
             </a:extLst>
           </p:cNvPr>
@@ -5114,7 +5114,7 @@
           <p:cNvPr id="2" name="Título 1">
             <a:extLst>
               <a:ext uri="{FF2B5EF4-FFF2-40B4-BE49-F238E27FC236}">
-                <a16:creationId xmlns:a16="http://schemas.microsoft.com/office/drawing/2014/main" xmlns="" id="{BC7BB9F0-F14B-4A91-B2B7-35BC47FE4DE7}"/>
+                <a16:creationId xmlns="" xmlns:a16="http://schemas.microsoft.com/office/drawing/2014/main" id="{BC7BB9F0-F14B-4A91-B2B7-35BC47FE4DE7}"/>
               </a:ext>
             </a:extLst>
           </p:cNvPr>
@@ -5142,7 +5142,7 @@
           <p:cNvPr id="3" name="Espaço Reservado para Conteúdo 2">
             <a:extLst>
               <a:ext uri="{FF2B5EF4-FFF2-40B4-BE49-F238E27FC236}">
-                <a16:creationId xmlns:a16="http://schemas.microsoft.com/office/drawing/2014/main" xmlns="" id="{EC1FC1C4-73DA-47A6-8496-B0B457F7D39A}"/>
+                <a16:creationId xmlns="" xmlns:a16="http://schemas.microsoft.com/office/drawing/2014/main" id="{EC1FC1C4-73DA-47A6-8496-B0B457F7D39A}"/>
               </a:ext>
             </a:extLst>
           </p:cNvPr>
@@ -5204,7 +5204,7 @@
           <p:cNvPr id="4" name="Espaço Reservado para Conteúdo 3">
             <a:extLst>
               <a:ext uri="{FF2B5EF4-FFF2-40B4-BE49-F238E27FC236}">
-                <a16:creationId xmlns:a16="http://schemas.microsoft.com/office/drawing/2014/main" xmlns="" id="{E92F06A8-A449-4D92-9912-76873E529B38}"/>
+                <a16:creationId xmlns="" xmlns:a16="http://schemas.microsoft.com/office/drawing/2014/main" id="{E92F06A8-A449-4D92-9912-76873E529B38}"/>
               </a:ext>
             </a:extLst>
           </p:cNvPr>
@@ -5266,7 +5266,7 @@
           <p:cNvPr id="5" name="Espaço Reservado para Data 4">
             <a:extLst>
               <a:ext uri="{FF2B5EF4-FFF2-40B4-BE49-F238E27FC236}">
-                <a16:creationId xmlns:a16="http://schemas.microsoft.com/office/drawing/2014/main" xmlns="" id="{938070A4-BC2F-4D55-BD8D-DEAF11BB9EE9}"/>
+                <a16:creationId xmlns="" xmlns:a16="http://schemas.microsoft.com/office/drawing/2014/main" id="{938070A4-BC2F-4D55-BD8D-DEAF11BB9EE9}"/>
               </a:ext>
             </a:extLst>
           </p:cNvPr>
@@ -5295,7 +5295,7 @@
           <p:cNvPr id="6" name="Espaço Reservado para Rodapé 5">
             <a:extLst>
               <a:ext uri="{FF2B5EF4-FFF2-40B4-BE49-F238E27FC236}">
-                <a16:creationId xmlns:a16="http://schemas.microsoft.com/office/drawing/2014/main" xmlns="" id="{45CC2DB8-844A-465F-BA9A-7734C80C7F43}"/>
+                <a16:creationId xmlns="" xmlns:a16="http://schemas.microsoft.com/office/drawing/2014/main" id="{45CC2DB8-844A-465F-BA9A-7734C80C7F43}"/>
               </a:ext>
             </a:extLst>
           </p:cNvPr>
@@ -5320,7 +5320,7 @@
           <p:cNvPr id="7" name="Espaço Reservado para Número de Slide 6">
             <a:extLst>
               <a:ext uri="{FF2B5EF4-FFF2-40B4-BE49-F238E27FC236}">
-                <a16:creationId xmlns:a16="http://schemas.microsoft.com/office/drawing/2014/main" xmlns="" id="{4CC606A8-097B-4040-94E0-CD8C88280D8F}"/>
+                <a16:creationId xmlns="" xmlns:a16="http://schemas.microsoft.com/office/drawing/2014/main" id="{4CC606A8-097B-4040-94E0-CD8C88280D8F}"/>
               </a:ext>
             </a:extLst>
           </p:cNvPr>
@@ -5379,7 +5379,7 @@
           <p:cNvPr id="2" name="Título 1">
             <a:extLst>
               <a:ext uri="{FF2B5EF4-FFF2-40B4-BE49-F238E27FC236}">
-                <a16:creationId xmlns:a16="http://schemas.microsoft.com/office/drawing/2014/main" xmlns="" id="{76D66686-0143-4CB6-8C09-BA326F1E7ACA}"/>
+                <a16:creationId xmlns="" xmlns:a16="http://schemas.microsoft.com/office/drawing/2014/main" id="{76D66686-0143-4CB6-8C09-BA326F1E7ACA}"/>
               </a:ext>
             </a:extLst>
           </p:cNvPr>
@@ -5412,7 +5412,7 @@
           <p:cNvPr id="3" name="Espaço Reservado para Texto 2">
             <a:extLst>
               <a:ext uri="{FF2B5EF4-FFF2-40B4-BE49-F238E27FC236}">
-                <a16:creationId xmlns:a16="http://schemas.microsoft.com/office/drawing/2014/main" xmlns="" id="{0227AB85-F59E-4BCE-B846-4FA0992C2F23}"/>
+                <a16:creationId xmlns="" xmlns:a16="http://schemas.microsoft.com/office/drawing/2014/main" id="{0227AB85-F59E-4BCE-B846-4FA0992C2F23}"/>
               </a:ext>
             </a:extLst>
           </p:cNvPr>
@@ -5483,7 +5483,7 @@
           <p:cNvPr id="4" name="Espaço Reservado para Conteúdo 3">
             <a:extLst>
               <a:ext uri="{FF2B5EF4-FFF2-40B4-BE49-F238E27FC236}">
-                <a16:creationId xmlns:a16="http://schemas.microsoft.com/office/drawing/2014/main" xmlns="" id="{3373456C-7319-4D0A-827D-D29F6B083F5D}"/>
+                <a16:creationId xmlns="" xmlns:a16="http://schemas.microsoft.com/office/drawing/2014/main" id="{3373456C-7319-4D0A-827D-D29F6B083F5D}"/>
               </a:ext>
             </a:extLst>
           </p:cNvPr>
@@ -5545,7 +5545,7 @@
           <p:cNvPr id="5" name="Espaço Reservado para Texto 4">
             <a:extLst>
               <a:ext uri="{FF2B5EF4-FFF2-40B4-BE49-F238E27FC236}">
-                <a16:creationId xmlns:a16="http://schemas.microsoft.com/office/drawing/2014/main" xmlns="" id="{4CD109D0-2E83-4262-8029-A871CEC47406}"/>
+                <a16:creationId xmlns="" xmlns:a16="http://schemas.microsoft.com/office/drawing/2014/main" id="{4CD109D0-2E83-4262-8029-A871CEC47406}"/>
               </a:ext>
             </a:extLst>
           </p:cNvPr>
@@ -5616,7 +5616,7 @@
           <p:cNvPr id="6" name="Espaço Reservado para Conteúdo 5">
             <a:extLst>
               <a:ext uri="{FF2B5EF4-FFF2-40B4-BE49-F238E27FC236}">
-                <a16:creationId xmlns:a16="http://schemas.microsoft.com/office/drawing/2014/main" xmlns="" id="{AD706E3A-CFBB-4A6C-A65F-D0360A9E74FE}"/>
+                <a16:creationId xmlns="" xmlns:a16="http://schemas.microsoft.com/office/drawing/2014/main" id="{AD706E3A-CFBB-4A6C-A65F-D0360A9E74FE}"/>
               </a:ext>
             </a:extLst>
           </p:cNvPr>
@@ -5678,7 +5678,7 @@
           <p:cNvPr id="7" name="Espaço Reservado para Data 6">
             <a:extLst>
               <a:ext uri="{FF2B5EF4-FFF2-40B4-BE49-F238E27FC236}">
-                <a16:creationId xmlns:a16="http://schemas.microsoft.com/office/drawing/2014/main" xmlns="" id="{4172C0E5-5AF0-4805-BB51-443733CD2BD5}"/>
+                <a16:creationId xmlns="" xmlns:a16="http://schemas.microsoft.com/office/drawing/2014/main" id="{4172C0E5-5AF0-4805-BB51-443733CD2BD5}"/>
               </a:ext>
             </a:extLst>
           </p:cNvPr>
@@ -5707,7 +5707,7 @@
           <p:cNvPr id="8" name="Espaço Reservado para Rodapé 7">
             <a:extLst>
               <a:ext uri="{FF2B5EF4-FFF2-40B4-BE49-F238E27FC236}">
-                <a16:creationId xmlns:a16="http://schemas.microsoft.com/office/drawing/2014/main" xmlns="" id="{0E801648-156F-497E-99CF-797DF48051E1}"/>
+                <a16:creationId xmlns="" xmlns:a16="http://schemas.microsoft.com/office/drawing/2014/main" id="{0E801648-156F-497E-99CF-797DF48051E1}"/>
               </a:ext>
             </a:extLst>
           </p:cNvPr>
@@ -5732,7 +5732,7 @@
           <p:cNvPr id="9" name="Espaço Reservado para Número de Slide 8">
             <a:extLst>
               <a:ext uri="{FF2B5EF4-FFF2-40B4-BE49-F238E27FC236}">
-                <a16:creationId xmlns:a16="http://schemas.microsoft.com/office/drawing/2014/main" xmlns="" id="{EEE23D32-80E7-4796-A137-66BF842E4B53}"/>
+                <a16:creationId xmlns="" xmlns:a16="http://schemas.microsoft.com/office/drawing/2014/main" id="{EEE23D32-80E7-4796-A137-66BF842E4B53}"/>
               </a:ext>
             </a:extLst>
           </p:cNvPr>
@@ -5791,7 +5791,7 @@
           <p:cNvPr id="2" name="Título 1">
             <a:extLst>
               <a:ext uri="{FF2B5EF4-FFF2-40B4-BE49-F238E27FC236}">
-                <a16:creationId xmlns:a16="http://schemas.microsoft.com/office/drawing/2014/main" xmlns="" id="{2BCE2379-C78F-47E1-8CFC-B846E7AF148D}"/>
+                <a16:creationId xmlns="" xmlns:a16="http://schemas.microsoft.com/office/drawing/2014/main" id="{2BCE2379-C78F-47E1-8CFC-B846E7AF148D}"/>
               </a:ext>
             </a:extLst>
           </p:cNvPr>
@@ -5819,7 +5819,7 @@
           <p:cNvPr id="3" name="Espaço Reservado para Data 2">
             <a:extLst>
               <a:ext uri="{FF2B5EF4-FFF2-40B4-BE49-F238E27FC236}">
-                <a16:creationId xmlns:a16="http://schemas.microsoft.com/office/drawing/2014/main" xmlns="" id="{342600A9-7F92-4E22-9D94-E4717252A817}"/>
+                <a16:creationId xmlns="" xmlns:a16="http://schemas.microsoft.com/office/drawing/2014/main" id="{342600A9-7F92-4E22-9D94-E4717252A817}"/>
               </a:ext>
             </a:extLst>
           </p:cNvPr>
@@ -5848,7 +5848,7 @@
           <p:cNvPr id="4" name="Espaço Reservado para Rodapé 3">
             <a:extLst>
               <a:ext uri="{FF2B5EF4-FFF2-40B4-BE49-F238E27FC236}">
-                <a16:creationId xmlns:a16="http://schemas.microsoft.com/office/drawing/2014/main" xmlns="" id="{192E6BED-F546-40CC-A2DF-99CBA853654E}"/>
+                <a16:creationId xmlns="" xmlns:a16="http://schemas.microsoft.com/office/drawing/2014/main" id="{192E6BED-F546-40CC-A2DF-99CBA853654E}"/>
               </a:ext>
             </a:extLst>
           </p:cNvPr>
@@ -5873,7 +5873,7 @@
           <p:cNvPr id="5" name="Espaço Reservado para Número de Slide 4">
             <a:extLst>
               <a:ext uri="{FF2B5EF4-FFF2-40B4-BE49-F238E27FC236}">
-                <a16:creationId xmlns:a16="http://schemas.microsoft.com/office/drawing/2014/main" xmlns="" id="{6091CC40-A8C4-4063-80EB-CC5099621678}"/>
+                <a16:creationId xmlns="" xmlns:a16="http://schemas.microsoft.com/office/drawing/2014/main" id="{6091CC40-A8C4-4063-80EB-CC5099621678}"/>
               </a:ext>
             </a:extLst>
           </p:cNvPr>
@@ -5932,7 +5932,7 @@
           <p:cNvPr id="2" name="Espaço Reservado para Data 1">
             <a:extLst>
               <a:ext uri="{FF2B5EF4-FFF2-40B4-BE49-F238E27FC236}">
-                <a16:creationId xmlns:a16="http://schemas.microsoft.com/office/drawing/2014/main" xmlns="" id="{DD19515C-212C-4EAE-84A3-8FF4BC844F1B}"/>
+                <a16:creationId xmlns="" xmlns:a16="http://schemas.microsoft.com/office/drawing/2014/main" id="{DD19515C-212C-4EAE-84A3-8FF4BC844F1B}"/>
               </a:ext>
             </a:extLst>
           </p:cNvPr>
@@ -5961,7 +5961,7 @@
           <p:cNvPr id="3" name="Espaço Reservado para Rodapé 2">
             <a:extLst>
               <a:ext uri="{FF2B5EF4-FFF2-40B4-BE49-F238E27FC236}">
-                <a16:creationId xmlns:a16="http://schemas.microsoft.com/office/drawing/2014/main" xmlns="" id="{94D3D120-B3E8-4C96-861D-7A4F12F49B3A}"/>
+                <a16:creationId xmlns="" xmlns:a16="http://schemas.microsoft.com/office/drawing/2014/main" id="{94D3D120-B3E8-4C96-861D-7A4F12F49B3A}"/>
               </a:ext>
             </a:extLst>
           </p:cNvPr>
@@ -5986,7 +5986,7 @@
           <p:cNvPr id="4" name="Espaço Reservado para Número de Slide 3">
             <a:extLst>
               <a:ext uri="{FF2B5EF4-FFF2-40B4-BE49-F238E27FC236}">
-                <a16:creationId xmlns:a16="http://schemas.microsoft.com/office/drawing/2014/main" xmlns="" id="{42E49B68-FA1B-468B-9F17-D5C09243D454}"/>
+                <a16:creationId xmlns="" xmlns:a16="http://schemas.microsoft.com/office/drawing/2014/main" id="{42E49B68-FA1B-468B-9F17-D5C09243D454}"/>
               </a:ext>
             </a:extLst>
           </p:cNvPr>
@@ -6045,7 +6045,7 @@
           <p:cNvPr id="2" name="Título 1">
             <a:extLst>
               <a:ext uri="{FF2B5EF4-FFF2-40B4-BE49-F238E27FC236}">
-                <a16:creationId xmlns:a16="http://schemas.microsoft.com/office/drawing/2014/main" xmlns="" id="{1C17BCBE-A897-4319-85EC-D87909C24980}"/>
+                <a16:creationId xmlns="" xmlns:a16="http://schemas.microsoft.com/office/drawing/2014/main" id="{1C17BCBE-A897-4319-85EC-D87909C24980}"/>
               </a:ext>
             </a:extLst>
           </p:cNvPr>
@@ -6082,7 +6082,7 @@
           <p:cNvPr id="3" name="Espaço Reservado para Conteúdo 2">
             <a:extLst>
               <a:ext uri="{FF2B5EF4-FFF2-40B4-BE49-F238E27FC236}">
-                <a16:creationId xmlns:a16="http://schemas.microsoft.com/office/drawing/2014/main" xmlns="" id="{4226F885-0204-4913-868B-4B8B82576F17}"/>
+                <a16:creationId xmlns="" xmlns:a16="http://schemas.microsoft.com/office/drawing/2014/main" id="{4226F885-0204-4913-868B-4B8B82576F17}"/>
               </a:ext>
             </a:extLst>
           </p:cNvPr>
@@ -6172,7 +6172,7 @@
           <p:cNvPr id="4" name="Espaço Reservado para Texto 3">
             <a:extLst>
               <a:ext uri="{FF2B5EF4-FFF2-40B4-BE49-F238E27FC236}">
-                <a16:creationId xmlns:a16="http://schemas.microsoft.com/office/drawing/2014/main" xmlns="" id="{00F9F784-A858-441B-8AB5-697098141751}"/>
+                <a16:creationId xmlns="" xmlns:a16="http://schemas.microsoft.com/office/drawing/2014/main" id="{00F9F784-A858-441B-8AB5-697098141751}"/>
               </a:ext>
             </a:extLst>
           </p:cNvPr>
@@ -6243,7 +6243,7 @@
           <p:cNvPr id="5" name="Espaço Reservado para Data 4">
             <a:extLst>
               <a:ext uri="{FF2B5EF4-FFF2-40B4-BE49-F238E27FC236}">
-                <a16:creationId xmlns:a16="http://schemas.microsoft.com/office/drawing/2014/main" xmlns="" id="{A4DC363A-5000-472E-8B17-02E7DCB8840A}"/>
+                <a16:creationId xmlns="" xmlns:a16="http://schemas.microsoft.com/office/drawing/2014/main" id="{A4DC363A-5000-472E-8B17-02E7DCB8840A}"/>
               </a:ext>
             </a:extLst>
           </p:cNvPr>
@@ -6272,7 +6272,7 @@
           <p:cNvPr id="6" name="Espaço Reservado para Rodapé 5">
             <a:extLst>
               <a:ext uri="{FF2B5EF4-FFF2-40B4-BE49-F238E27FC236}">
-                <a16:creationId xmlns:a16="http://schemas.microsoft.com/office/drawing/2014/main" xmlns="" id="{5548425D-2C21-4C56-BAD4-662978775C28}"/>
+                <a16:creationId xmlns="" xmlns:a16="http://schemas.microsoft.com/office/drawing/2014/main" id="{5548425D-2C21-4C56-BAD4-662978775C28}"/>
               </a:ext>
             </a:extLst>
           </p:cNvPr>
@@ -6297,7 +6297,7 @@
           <p:cNvPr id="7" name="Espaço Reservado para Número de Slide 6">
             <a:extLst>
               <a:ext uri="{FF2B5EF4-FFF2-40B4-BE49-F238E27FC236}">
-                <a16:creationId xmlns:a16="http://schemas.microsoft.com/office/drawing/2014/main" xmlns="" id="{C63E9726-E64C-42B2-AE8A-8C235A956B48}"/>
+                <a16:creationId xmlns="" xmlns:a16="http://schemas.microsoft.com/office/drawing/2014/main" id="{C63E9726-E64C-42B2-AE8A-8C235A956B48}"/>
               </a:ext>
             </a:extLst>
           </p:cNvPr>
@@ -6356,7 +6356,7 @@
           <p:cNvPr id="2" name="Título 1">
             <a:extLst>
               <a:ext uri="{FF2B5EF4-FFF2-40B4-BE49-F238E27FC236}">
-                <a16:creationId xmlns:a16="http://schemas.microsoft.com/office/drawing/2014/main" xmlns="" id="{11086A78-3E74-450C-96A6-CA8AC37AF772}"/>
+                <a16:creationId xmlns="" xmlns:a16="http://schemas.microsoft.com/office/drawing/2014/main" id="{11086A78-3E74-450C-96A6-CA8AC37AF772}"/>
               </a:ext>
             </a:extLst>
           </p:cNvPr>
@@ -6393,7 +6393,7 @@
           <p:cNvPr id="3" name="Espaço Reservado para Imagem 2">
             <a:extLst>
               <a:ext uri="{FF2B5EF4-FFF2-40B4-BE49-F238E27FC236}">
-                <a16:creationId xmlns:a16="http://schemas.microsoft.com/office/drawing/2014/main" xmlns="" id="{5F5B7312-975A-4DBC-9B2F-3652ADA006FD}"/>
+                <a16:creationId xmlns="" xmlns:a16="http://schemas.microsoft.com/office/drawing/2014/main" id="{5F5B7312-975A-4DBC-9B2F-3652ADA006FD}"/>
               </a:ext>
             </a:extLst>
           </p:cNvPr>
@@ -6460,7 +6460,7 @@
           <p:cNvPr id="4" name="Espaço Reservado para Texto 3">
             <a:extLst>
               <a:ext uri="{FF2B5EF4-FFF2-40B4-BE49-F238E27FC236}">
-                <a16:creationId xmlns:a16="http://schemas.microsoft.com/office/drawing/2014/main" xmlns="" id="{AAF805F5-1DFF-41C6-944C-7D79FE0D0963}"/>
+                <a16:creationId xmlns="" xmlns:a16="http://schemas.microsoft.com/office/drawing/2014/main" id="{AAF805F5-1DFF-41C6-944C-7D79FE0D0963}"/>
               </a:ext>
             </a:extLst>
           </p:cNvPr>
@@ -6531,7 +6531,7 @@
           <p:cNvPr id="5" name="Espaço Reservado para Data 4">
             <a:extLst>
               <a:ext uri="{FF2B5EF4-FFF2-40B4-BE49-F238E27FC236}">
-                <a16:creationId xmlns:a16="http://schemas.microsoft.com/office/drawing/2014/main" xmlns="" id="{02113D81-8665-4516-BD81-C6A1F254EECD}"/>
+                <a16:creationId xmlns="" xmlns:a16="http://schemas.microsoft.com/office/drawing/2014/main" id="{02113D81-8665-4516-BD81-C6A1F254EECD}"/>
               </a:ext>
             </a:extLst>
           </p:cNvPr>
@@ -6560,7 +6560,7 @@
           <p:cNvPr id="6" name="Espaço Reservado para Rodapé 5">
             <a:extLst>
               <a:ext uri="{FF2B5EF4-FFF2-40B4-BE49-F238E27FC236}">
-                <a16:creationId xmlns:a16="http://schemas.microsoft.com/office/drawing/2014/main" xmlns="" id="{2B00C88B-FF32-40AA-A187-727D96FD7862}"/>
+                <a16:creationId xmlns="" xmlns:a16="http://schemas.microsoft.com/office/drawing/2014/main" id="{2B00C88B-FF32-40AA-A187-727D96FD7862}"/>
               </a:ext>
             </a:extLst>
           </p:cNvPr>
@@ -6585,7 +6585,7 @@
           <p:cNvPr id="7" name="Espaço Reservado para Número de Slide 6">
             <a:extLst>
               <a:ext uri="{FF2B5EF4-FFF2-40B4-BE49-F238E27FC236}">
-                <a16:creationId xmlns:a16="http://schemas.microsoft.com/office/drawing/2014/main" xmlns="" id="{A04D1A2D-69F7-4B8F-A730-BC26DC340BA6}"/>
+                <a16:creationId xmlns="" xmlns:a16="http://schemas.microsoft.com/office/drawing/2014/main" id="{A04D1A2D-69F7-4B8F-A730-BC26DC340BA6}"/>
               </a:ext>
             </a:extLst>
           </p:cNvPr>
@@ -6649,7 +6649,7 @@
           <p:cNvPr id="2" name="Espaço Reservado para Título 1">
             <a:extLst>
               <a:ext uri="{FF2B5EF4-FFF2-40B4-BE49-F238E27FC236}">
-                <a16:creationId xmlns:a16="http://schemas.microsoft.com/office/drawing/2014/main" xmlns="" id="{E69A0273-1966-4A1B-9370-4C1CE5036371}"/>
+                <a16:creationId xmlns="" xmlns:a16="http://schemas.microsoft.com/office/drawing/2014/main" id="{E69A0273-1966-4A1B-9370-4C1CE5036371}"/>
               </a:ext>
             </a:extLst>
           </p:cNvPr>
@@ -6687,7 +6687,7 @@
           <p:cNvPr id="3" name="Espaço Reservado para Texto 2">
             <a:extLst>
               <a:ext uri="{FF2B5EF4-FFF2-40B4-BE49-F238E27FC236}">
-                <a16:creationId xmlns:a16="http://schemas.microsoft.com/office/drawing/2014/main" xmlns="" id="{3B9CF87A-0448-49A7-AB25-EBC1D56A40EF}"/>
+                <a16:creationId xmlns="" xmlns:a16="http://schemas.microsoft.com/office/drawing/2014/main" id="{3B9CF87A-0448-49A7-AB25-EBC1D56A40EF}"/>
               </a:ext>
             </a:extLst>
           </p:cNvPr>
@@ -6754,7 +6754,7 @@
           <p:cNvPr id="4" name="Espaço Reservado para Data 3">
             <a:extLst>
               <a:ext uri="{FF2B5EF4-FFF2-40B4-BE49-F238E27FC236}">
-                <a16:creationId xmlns:a16="http://schemas.microsoft.com/office/drawing/2014/main" xmlns="" id="{2EF7B1F2-BB5A-44D0-816D-16AD2C71430E}"/>
+                <a16:creationId xmlns="" xmlns:a16="http://schemas.microsoft.com/office/drawing/2014/main" id="{2EF7B1F2-BB5A-44D0-816D-16AD2C71430E}"/>
               </a:ext>
             </a:extLst>
           </p:cNvPr>
@@ -6801,7 +6801,7 @@
           <p:cNvPr id="5" name="Espaço Reservado para Rodapé 4">
             <a:extLst>
               <a:ext uri="{FF2B5EF4-FFF2-40B4-BE49-F238E27FC236}">
-                <a16:creationId xmlns:a16="http://schemas.microsoft.com/office/drawing/2014/main" xmlns="" id="{C703F94C-2CC8-4DAA-BC35-14FC3E841DCD}"/>
+                <a16:creationId xmlns="" xmlns:a16="http://schemas.microsoft.com/office/drawing/2014/main" id="{C703F94C-2CC8-4DAA-BC35-14FC3E841DCD}"/>
               </a:ext>
             </a:extLst>
           </p:cNvPr>
@@ -6844,7 +6844,7 @@
           <p:cNvPr id="6" name="Espaço Reservado para Número de Slide 5">
             <a:extLst>
               <a:ext uri="{FF2B5EF4-FFF2-40B4-BE49-F238E27FC236}">
-                <a16:creationId xmlns:a16="http://schemas.microsoft.com/office/drawing/2014/main" xmlns="" id="{64051336-7048-457A-8B61-D94291D71648}"/>
+                <a16:creationId xmlns="" xmlns:a16="http://schemas.microsoft.com/office/drawing/2014/main" id="{64051336-7048-457A-8B61-D94291D71648}"/>
               </a:ext>
             </a:extLst>
           </p:cNvPr>
@@ -7212,7 +7212,7 @@
           <p:cNvPr id="4" name="CaixaDeTexto 3">
             <a:extLst>
               <a:ext uri="{FF2B5EF4-FFF2-40B4-BE49-F238E27FC236}">
-                <a16:creationId xmlns:a16="http://schemas.microsoft.com/office/drawing/2014/main" xmlns="" id="{430EB894-B7D4-434C-9D1A-A14094D9BEEC}"/>
+                <a16:creationId xmlns="" xmlns:a16="http://schemas.microsoft.com/office/drawing/2014/main" id="{430EB894-B7D4-434C-9D1A-A14094D9BEEC}"/>
               </a:ext>
             </a:extLst>
           </p:cNvPr>
@@ -7256,7 +7256,7 @@
           <p:cNvPr id="1026" name="Picture 2" descr="Logo">
             <a:extLst>
               <a:ext uri="{FF2B5EF4-FFF2-40B4-BE49-F238E27FC236}">
-                <a16:creationId xmlns:a16="http://schemas.microsoft.com/office/drawing/2014/main" xmlns="" id="{3F2642E0-4F6A-4196-8F58-E77D36E9A33F}"/>
+                <a16:creationId xmlns="" xmlns:a16="http://schemas.microsoft.com/office/drawing/2014/main" id="{3F2642E0-4F6A-4196-8F58-E77D36E9A33F}"/>
               </a:ext>
             </a:extLst>
           </p:cNvPr>
@@ -7301,7 +7301,7 @@
           <p:cNvPr id="5122" name="Picture 2" descr="Image result for machine learning">
             <a:extLst>
               <a:ext uri="{FF2B5EF4-FFF2-40B4-BE49-F238E27FC236}">
-                <a16:creationId xmlns:a16="http://schemas.microsoft.com/office/drawing/2014/main" xmlns="" id="{810CE0A2-4102-44A6-A370-175E7896CDCB}"/>
+                <a16:creationId xmlns="" xmlns:a16="http://schemas.microsoft.com/office/drawing/2014/main" id="{810CE0A2-4102-44A6-A370-175E7896CDCB}"/>
               </a:ext>
             </a:extLst>
           </p:cNvPr>
@@ -7346,7 +7346,7 @@
           <p:cNvPr id="7" name="Título 1">
             <a:extLst>
               <a:ext uri="{FF2B5EF4-FFF2-40B4-BE49-F238E27FC236}">
-                <a16:creationId xmlns:a16="http://schemas.microsoft.com/office/drawing/2014/main" xmlns="" id="{32666AC8-2E17-4DB4-B0F5-60C640CCFD2E}"/>
+                <a16:creationId xmlns="" xmlns:a16="http://schemas.microsoft.com/office/drawing/2014/main" id="{32666AC8-2E17-4DB4-B0F5-60C640CCFD2E}"/>
               </a:ext>
             </a:extLst>
           </p:cNvPr>
@@ -7409,7 +7409,7 @@
         <p:cNvPr id="1" name="">
           <a:extLst>
             <a:ext uri="{FF2B5EF4-FFF2-40B4-BE49-F238E27FC236}">
-              <a16:creationId xmlns:a16="http://schemas.microsoft.com/office/drawing/2014/main" xmlns="" id="{DDB2BBDA-DAF3-B7AC-FB99-7C5B9285F912}"/>
+              <a16:creationId xmlns="" xmlns:a16="http://schemas.microsoft.com/office/drawing/2014/main" id="{DDB2BBDA-DAF3-B7AC-FB99-7C5B9285F912}"/>
             </a:ext>
           </a:extLst>
         </p:cNvPr>
@@ -7429,7 +7429,7 @@
           <p:cNvPr id="2" name="Title 1">
             <a:extLst>
               <a:ext uri="{FF2B5EF4-FFF2-40B4-BE49-F238E27FC236}">
-                <a16:creationId xmlns:a16="http://schemas.microsoft.com/office/drawing/2014/main" xmlns="" id="{A98D36C9-8653-8E41-11D8-585B6AC0D03D}"/>
+                <a16:creationId xmlns="" xmlns:a16="http://schemas.microsoft.com/office/drawing/2014/main" id="{A98D36C9-8653-8E41-11D8-585B6AC0D03D}"/>
               </a:ext>
             </a:extLst>
           </p:cNvPr>
@@ -7469,7 +7469,7 @@
           <p:cNvPr id="3" name="Content Placeholder 2">
             <a:extLst>
               <a:ext uri="{FF2B5EF4-FFF2-40B4-BE49-F238E27FC236}">
-                <a16:creationId xmlns:a16="http://schemas.microsoft.com/office/drawing/2014/main" xmlns="" id="{981046E0-93D4-BF9F-C552-72A01838A8A3}"/>
+                <a16:creationId xmlns="" xmlns:a16="http://schemas.microsoft.com/office/drawing/2014/main" id="{981046E0-93D4-BF9F-C552-72A01838A8A3}"/>
               </a:ext>
             </a:extLst>
           </p:cNvPr>
@@ -7504,7 +7504,7 @@
           <p:cNvPr id="61" name="Picture 60">
             <a:extLst>
               <a:ext uri="{FF2B5EF4-FFF2-40B4-BE49-F238E27FC236}">
-                <a16:creationId xmlns:a16="http://schemas.microsoft.com/office/drawing/2014/main" xmlns="" id="{22F895FA-1424-E50C-97F4-4F0BE0413C2F}"/>
+                <a16:creationId xmlns="" xmlns:a16="http://schemas.microsoft.com/office/drawing/2014/main" id="{22F895FA-1424-E50C-97F4-4F0BE0413C2F}"/>
               </a:ext>
             </a:extLst>
           </p:cNvPr>
@@ -7570,7 +7570,7 @@
           <p:cNvPr id="2" name="Title 1">
             <a:extLst>
               <a:ext uri="{FF2B5EF4-FFF2-40B4-BE49-F238E27FC236}">
-                <a16:creationId xmlns:a16="http://schemas.microsoft.com/office/drawing/2014/main" xmlns="" id="{6212CAF6-B58D-36CC-E75E-B9EBC01B5494}"/>
+                <a16:creationId xmlns="" xmlns:a16="http://schemas.microsoft.com/office/drawing/2014/main" id="{6212CAF6-B58D-36CC-E75E-B9EBC01B5494}"/>
               </a:ext>
             </a:extLst>
           </p:cNvPr>
@@ -7599,7 +7599,7 @@
           <p:cNvPr id="3" name="Content Placeholder 2">
             <a:extLst>
               <a:ext uri="{FF2B5EF4-FFF2-40B4-BE49-F238E27FC236}">
-                <a16:creationId xmlns:a16="http://schemas.microsoft.com/office/drawing/2014/main" xmlns="" id="{5516FA30-D5F7-2E83-352E-3527EE589DED}"/>
+                <a16:creationId xmlns="" xmlns:a16="http://schemas.microsoft.com/office/drawing/2014/main" id="{5516FA30-D5F7-2E83-352E-3527EE589DED}"/>
               </a:ext>
             </a:extLst>
           </p:cNvPr>
@@ -7870,7 +7870,7 @@
           <p:cNvPr id="2" name="Title 1">
             <a:extLst>
               <a:ext uri="{FF2B5EF4-FFF2-40B4-BE49-F238E27FC236}">
-                <a16:creationId xmlns:a16="http://schemas.microsoft.com/office/drawing/2014/main" xmlns="" id="{8C8E92F5-0D3A-0F43-282A-3A7C0603923D}"/>
+                <a16:creationId xmlns="" xmlns:a16="http://schemas.microsoft.com/office/drawing/2014/main" id="{8C8E92F5-0D3A-0F43-282A-3A7C0603923D}"/>
               </a:ext>
             </a:extLst>
           </p:cNvPr>
@@ -7911,7 +7911,7 @@
           <p:cNvPr id="3" name="Content Placeholder 2">
             <a:extLst>
               <a:ext uri="{FF2B5EF4-FFF2-40B4-BE49-F238E27FC236}">
-                <a16:creationId xmlns:a16="http://schemas.microsoft.com/office/drawing/2014/main" xmlns="" id="{9AB6A6C9-67EC-449F-0095-BDC7619374B2}"/>
+                <a16:creationId xmlns="" xmlns:a16="http://schemas.microsoft.com/office/drawing/2014/main" id="{9AB6A6C9-67EC-449F-0095-BDC7619374B2}"/>
               </a:ext>
             </a:extLst>
           </p:cNvPr>
@@ -8064,7 +8064,7 @@
         <p:cNvPr id="1" name="">
           <a:extLst>
             <a:ext uri="{FF2B5EF4-FFF2-40B4-BE49-F238E27FC236}">
-              <a16:creationId xmlns:a16="http://schemas.microsoft.com/office/drawing/2014/main" xmlns="" id="{74614044-1D84-E441-8AC3-FB3FD9221416}"/>
+              <a16:creationId xmlns="" xmlns:a16="http://schemas.microsoft.com/office/drawing/2014/main" id="{74614044-1D84-E441-8AC3-FB3FD9221416}"/>
             </a:ext>
           </a:extLst>
         </p:cNvPr>
@@ -8084,7 +8084,7 @@
           <p:cNvPr id="2" name="Title 1">
             <a:extLst>
               <a:ext uri="{FF2B5EF4-FFF2-40B4-BE49-F238E27FC236}">
-                <a16:creationId xmlns:a16="http://schemas.microsoft.com/office/drawing/2014/main" xmlns="" id="{C6E93585-9339-7002-7C62-27331F24C140}"/>
+                <a16:creationId xmlns="" xmlns:a16="http://schemas.microsoft.com/office/drawing/2014/main" id="{C6E93585-9339-7002-7C62-27331F24C140}"/>
               </a:ext>
             </a:extLst>
           </p:cNvPr>
@@ -8114,7 +8114,7 @@
               <p:cNvPr id="3" name="Content Placeholder 2">
                 <a:extLst>
                   <a:ext uri="{FF2B5EF4-FFF2-40B4-BE49-F238E27FC236}">
-                    <a16:creationId xmlns:a16="http://schemas.microsoft.com/office/drawing/2014/main" xmlns="" id="{A1483011-729D-F9ED-5FD6-580E6A4020EF}"/>
+                    <a16:creationId xmlns="" xmlns:a16="http://schemas.microsoft.com/office/drawing/2014/main" id="{A1483011-729D-F9ED-5FD6-580E6A4020EF}"/>
                   </a:ext>
                 </a:extLst>
               </p:cNvPr>
@@ -8354,7 +8354,7 @@
           <p:cNvPr id="4" name="Table 3">
             <a:extLst>
               <a:ext uri="{FF2B5EF4-FFF2-40B4-BE49-F238E27FC236}">
-                <a16:creationId xmlns:a16="http://schemas.microsoft.com/office/drawing/2014/main" xmlns="" id="{A14A3494-F972-A92A-0152-CCA1FC8882F5}"/>
+                <a16:creationId xmlns="" xmlns:a16="http://schemas.microsoft.com/office/drawing/2014/main" id="{A14A3494-F972-A92A-0152-CCA1FC8882F5}"/>
               </a:ext>
             </a:extLst>
           </p:cNvPr>
@@ -8383,28 +8383,28 @@
                 <a:gridCol w="439057">
                   <a:extLst>
                     <a:ext uri="{9D8B030D-6E8A-4147-A177-3AD203B41FA5}">
-                      <a16:colId xmlns:a16="http://schemas.microsoft.com/office/drawing/2014/main" xmlns="" val="4237906138"/>
+                      <a16:colId xmlns="" xmlns:a16="http://schemas.microsoft.com/office/drawing/2014/main" val="4237906138"/>
                     </a:ext>
                   </a:extLst>
                 </a:gridCol>
                 <a:gridCol w="439057">
                   <a:extLst>
                     <a:ext uri="{9D8B030D-6E8A-4147-A177-3AD203B41FA5}">
-                      <a16:colId xmlns:a16="http://schemas.microsoft.com/office/drawing/2014/main" xmlns="" val="3865218800"/>
+                      <a16:colId xmlns="" xmlns:a16="http://schemas.microsoft.com/office/drawing/2014/main" val="3865218800"/>
                     </a:ext>
                   </a:extLst>
                 </a:gridCol>
                 <a:gridCol w="439057">
                   <a:extLst>
                     <a:ext uri="{9D8B030D-6E8A-4147-A177-3AD203B41FA5}">
-                      <a16:colId xmlns:a16="http://schemas.microsoft.com/office/drawing/2014/main" xmlns="" val="2205689395"/>
+                      <a16:colId xmlns="" xmlns:a16="http://schemas.microsoft.com/office/drawing/2014/main" val="2205689395"/>
                     </a:ext>
                   </a:extLst>
                 </a:gridCol>
                 <a:gridCol w="439057">
                   <a:extLst>
                     <a:ext uri="{9D8B030D-6E8A-4147-A177-3AD203B41FA5}">
-                      <a16:colId xmlns:a16="http://schemas.microsoft.com/office/drawing/2014/main" xmlns="" val="3536600299"/>
+                      <a16:colId xmlns="" xmlns:a16="http://schemas.microsoft.com/office/drawing/2014/main" val="3536600299"/>
                     </a:ext>
                   </a:extLst>
                 </a:gridCol>
@@ -8648,7 +8648,7 @@
                 </a:tc>
                 <a:extLst>
                   <a:ext uri="{0D108BD9-81ED-4DB2-BD59-A6C34878D82A}">
-                    <a16:rowId xmlns:a16="http://schemas.microsoft.com/office/drawing/2014/main" xmlns="" val="654488680"/>
+                    <a16:rowId xmlns="" xmlns:a16="http://schemas.microsoft.com/office/drawing/2014/main" val="654488680"/>
                   </a:ext>
                 </a:extLst>
               </a:tr>
@@ -8891,7 +8891,7 @@
                 </a:tc>
                 <a:extLst>
                   <a:ext uri="{0D108BD9-81ED-4DB2-BD59-A6C34878D82A}">
-                    <a16:rowId xmlns:a16="http://schemas.microsoft.com/office/drawing/2014/main" xmlns="" val="652569694"/>
+                    <a16:rowId xmlns="" xmlns:a16="http://schemas.microsoft.com/office/drawing/2014/main" val="652569694"/>
                   </a:ext>
                 </a:extLst>
               </a:tr>
@@ -9134,7 +9134,7 @@
                 </a:tc>
                 <a:extLst>
                   <a:ext uri="{0D108BD9-81ED-4DB2-BD59-A6C34878D82A}">
-                    <a16:rowId xmlns:a16="http://schemas.microsoft.com/office/drawing/2014/main" xmlns="" val="200740461"/>
+                    <a16:rowId xmlns="" xmlns:a16="http://schemas.microsoft.com/office/drawing/2014/main" val="200740461"/>
                   </a:ext>
                 </a:extLst>
               </a:tr>
@@ -9147,7 +9147,7 @@
           <p:cNvPr id="5" name="TextBox 4">
             <a:extLst>
               <a:ext uri="{FF2B5EF4-FFF2-40B4-BE49-F238E27FC236}">
-                <a16:creationId xmlns:a16="http://schemas.microsoft.com/office/drawing/2014/main" xmlns="" id="{C8ED1C15-0942-089C-7805-CB510EC72FB1}"/>
+                <a16:creationId xmlns="" xmlns:a16="http://schemas.microsoft.com/office/drawing/2014/main" id="{C8ED1C15-0942-089C-7805-CB510EC72FB1}"/>
               </a:ext>
             </a:extLst>
           </p:cNvPr>
@@ -9183,7 +9183,7 @@
           <p:cNvPr id="6" name="TextBox 5">
             <a:extLst>
               <a:ext uri="{FF2B5EF4-FFF2-40B4-BE49-F238E27FC236}">
-                <a16:creationId xmlns:a16="http://schemas.microsoft.com/office/drawing/2014/main" xmlns="" id="{35E39535-416D-18D0-A4E0-B8FD0EF37FF9}"/>
+                <a16:creationId xmlns="" xmlns:a16="http://schemas.microsoft.com/office/drawing/2014/main" id="{35E39535-416D-18D0-A4E0-B8FD0EF37FF9}"/>
               </a:ext>
             </a:extLst>
           </p:cNvPr>
@@ -9235,7 +9235,7 @@
         <p:cNvPr id="1" name="">
           <a:extLst>
             <a:ext uri="{FF2B5EF4-FFF2-40B4-BE49-F238E27FC236}">
-              <a16:creationId xmlns:a16="http://schemas.microsoft.com/office/drawing/2014/main" xmlns="" id="{E22219F2-045D-7C64-9A87-54D2232BDD3E}"/>
+              <a16:creationId xmlns="" xmlns:a16="http://schemas.microsoft.com/office/drawing/2014/main" id="{E22219F2-045D-7C64-9A87-54D2232BDD3E}"/>
             </a:ext>
           </a:extLst>
         </p:cNvPr>
@@ -9255,7 +9255,7 @@
           <p:cNvPr id="2" name="Title 1">
             <a:extLst>
               <a:ext uri="{FF2B5EF4-FFF2-40B4-BE49-F238E27FC236}">
-                <a16:creationId xmlns:a16="http://schemas.microsoft.com/office/drawing/2014/main" xmlns="" id="{C7EA5E16-B19C-BA31-7BEC-009E02E41E13}"/>
+                <a16:creationId xmlns="" xmlns:a16="http://schemas.microsoft.com/office/drawing/2014/main" id="{C7EA5E16-B19C-BA31-7BEC-009E02E41E13}"/>
               </a:ext>
             </a:extLst>
           </p:cNvPr>
@@ -9283,7 +9283,7 @@
           <p:cNvPr id="3" name="Content Placeholder 2">
             <a:extLst>
               <a:ext uri="{FF2B5EF4-FFF2-40B4-BE49-F238E27FC236}">
-                <a16:creationId xmlns:a16="http://schemas.microsoft.com/office/drawing/2014/main" xmlns="" id="{2D34463B-65B5-66E6-8A30-437FFFA8DEFA}"/>
+                <a16:creationId xmlns="" xmlns:a16="http://schemas.microsoft.com/office/drawing/2014/main" id="{2D34463B-65B5-66E6-8A30-437FFFA8DEFA}"/>
               </a:ext>
             </a:extLst>
           </p:cNvPr>
@@ -9329,7 +9329,7 @@
           <p:cNvPr id="5" name="Picture 4">
             <a:extLst>
               <a:ext uri="{FF2B5EF4-FFF2-40B4-BE49-F238E27FC236}">
-                <a16:creationId xmlns:a16="http://schemas.microsoft.com/office/drawing/2014/main" xmlns="" id="{22635AC4-CE1D-B8AF-A040-2F87EF1759CD}"/>
+                <a16:creationId xmlns="" xmlns:a16="http://schemas.microsoft.com/office/drawing/2014/main" id="{22635AC4-CE1D-B8AF-A040-2F87EF1759CD}"/>
               </a:ext>
             </a:extLst>
           </p:cNvPr>
@@ -9395,7 +9395,7 @@
           <p:cNvPr id="2" name="Title 1">
             <a:extLst>
               <a:ext uri="{FF2B5EF4-FFF2-40B4-BE49-F238E27FC236}">
-                <a16:creationId xmlns:a16="http://schemas.microsoft.com/office/drawing/2014/main" xmlns="" id="{7091E349-E10B-155D-AA4C-5C644F1CA204}"/>
+                <a16:creationId xmlns="" xmlns:a16="http://schemas.microsoft.com/office/drawing/2014/main" id="{7091E349-E10B-155D-AA4C-5C644F1CA204}"/>
               </a:ext>
             </a:extLst>
           </p:cNvPr>
@@ -9438,7 +9438,7 @@
               <p:cNvPr id="5" name="TextBox 4">
                 <a:extLst>
                   <a:ext uri="{FF2B5EF4-FFF2-40B4-BE49-F238E27FC236}">
-                    <a16:creationId xmlns:a16="http://schemas.microsoft.com/office/drawing/2014/main" xmlns="" id="{9A332D99-C136-4CA9-0B03-FA3FA5195ED6}"/>
+                    <a16:creationId xmlns="" xmlns:a16="http://schemas.microsoft.com/office/drawing/2014/main" id="{9A332D99-C136-4CA9-0B03-FA3FA5195ED6}"/>
                   </a:ext>
                 </a:extLst>
               </p:cNvPr>
@@ -9812,7 +9812,7 @@
           <p:cNvPr id="9" name="TextBox 8">
             <a:extLst>
               <a:ext uri="{FF2B5EF4-FFF2-40B4-BE49-F238E27FC236}">
-                <a16:creationId xmlns:a16="http://schemas.microsoft.com/office/drawing/2014/main" xmlns="" id="{5C7A4183-CC79-97FF-3245-59A711D4BDF1}"/>
+                <a16:creationId xmlns="" xmlns:a16="http://schemas.microsoft.com/office/drawing/2014/main" id="{5C7A4183-CC79-97FF-3245-59A711D4BDF1}"/>
               </a:ext>
             </a:extLst>
           </p:cNvPr>
@@ -9879,7 +9879,7 @@
           <p:cNvPr id="2" name="Title 1">
             <a:extLst>
               <a:ext uri="{FF2B5EF4-FFF2-40B4-BE49-F238E27FC236}">
-                <a16:creationId xmlns:a16="http://schemas.microsoft.com/office/drawing/2014/main" xmlns="" id="{8B40FE1F-C1FB-195D-22B9-96044B5DA2CF}"/>
+                <a16:creationId xmlns="" xmlns:a16="http://schemas.microsoft.com/office/drawing/2014/main" id="{8B40FE1F-C1FB-195D-22B9-96044B5DA2CF}"/>
               </a:ext>
             </a:extLst>
           </p:cNvPr>
@@ -9908,7 +9908,7 @@
           <p:cNvPr id="3" name="Content Placeholder 2">
             <a:extLst>
               <a:ext uri="{FF2B5EF4-FFF2-40B4-BE49-F238E27FC236}">
-                <a16:creationId xmlns:a16="http://schemas.microsoft.com/office/drawing/2014/main" xmlns="" id="{EAC332DA-1674-3813-EFF7-0720AB3234B3}"/>
+                <a16:creationId xmlns="" xmlns:a16="http://schemas.microsoft.com/office/drawing/2014/main" id="{EAC332DA-1674-3813-EFF7-0720AB3234B3}"/>
               </a:ext>
             </a:extLst>
           </p:cNvPr>
@@ -10083,7 +10083,7 @@
         <p:cNvPr id="1" name="">
           <a:extLst>
             <a:ext uri="{FF2B5EF4-FFF2-40B4-BE49-F238E27FC236}">
-              <a16:creationId xmlns:a16="http://schemas.microsoft.com/office/drawing/2014/main" xmlns="" id="{2F8A4587-A984-EA93-857E-8D1DC320AFE6}"/>
+              <a16:creationId xmlns="" xmlns:a16="http://schemas.microsoft.com/office/drawing/2014/main" id="{2F8A4587-A984-EA93-857E-8D1DC320AFE6}"/>
             </a:ext>
           </a:extLst>
         </p:cNvPr>
@@ -10103,7 +10103,7 @@
           <p:cNvPr id="2" name="Title 1">
             <a:extLst>
               <a:ext uri="{FF2B5EF4-FFF2-40B4-BE49-F238E27FC236}">
-                <a16:creationId xmlns:a16="http://schemas.microsoft.com/office/drawing/2014/main" xmlns="" id="{0D07A575-E745-E7EC-954B-2D561DB0ADE2}"/>
+                <a16:creationId xmlns="" xmlns:a16="http://schemas.microsoft.com/office/drawing/2014/main" id="{0D07A575-E745-E7EC-954B-2D561DB0ADE2}"/>
               </a:ext>
             </a:extLst>
           </p:cNvPr>
@@ -10132,7 +10132,7 @@
           <p:cNvPr id="3" name="Content Placeholder 2">
             <a:extLst>
               <a:ext uri="{FF2B5EF4-FFF2-40B4-BE49-F238E27FC236}">
-                <a16:creationId xmlns:a16="http://schemas.microsoft.com/office/drawing/2014/main" xmlns="" id="{8FDE82B6-892B-61F8-DE72-D88190E83F1C}"/>
+                <a16:creationId xmlns="" xmlns:a16="http://schemas.microsoft.com/office/drawing/2014/main" id="{8FDE82B6-892B-61F8-DE72-D88190E83F1C}"/>
               </a:ext>
             </a:extLst>
           </p:cNvPr>
@@ -10254,7 +10254,7 @@
               <p:cNvPr id="2" name="Title 1">
                 <a:extLst>
                   <a:ext uri="{FF2B5EF4-FFF2-40B4-BE49-F238E27FC236}">
-                    <a16:creationId xmlns:a16="http://schemas.microsoft.com/office/drawing/2014/main" xmlns="" id="{7BB2B1C3-607B-4033-88D5-A1CF66C9D6F3}"/>
+                    <a16:creationId xmlns="" xmlns:a16="http://schemas.microsoft.com/office/drawing/2014/main" id="{7BB2B1C3-607B-4033-88D5-A1CF66C9D6F3}"/>
                   </a:ext>
                 </a:extLst>
               </p:cNvPr>
@@ -10342,14 +10342,14 @@
           </p:sp>
         </mc:Fallback>
       </mc:AlternateContent>
-      <mc:AlternateContent xmlns:mc="http://schemas.openxmlformats.org/markup-compatibility/2006">
-        <mc:Choice xmlns:a14="http://schemas.microsoft.com/office/drawing/2010/main" Requires="a14">
+      <mc:AlternateContent xmlns:mc="http://schemas.openxmlformats.org/markup-compatibility/2006" xmlns:a14="http://schemas.microsoft.com/office/drawing/2010/main">
+        <mc:Choice Requires="a14">
           <p:sp>
             <p:nvSpPr>
               <p:cNvPr id="3" name="Content Placeholder 2">
                 <a:extLst>
                   <a:ext uri="{FF2B5EF4-FFF2-40B4-BE49-F238E27FC236}">
-                    <a16:creationId xmlns:a16="http://schemas.microsoft.com/office/drawing/2014/main" xmlns="" id="{5D80C21A-F4FC-B1BE-7D36-8D93DC02776E}"/>
+                    <a16:creationId xmlns="" xmlns:a16="http://schemas.microsoft.com/office/drawing/2014/main" id="{5D80C21A-F4FC-B1BE-7D36-8D93DC02776E}"/>
                   </a:ext>
                 </a:extLst>
               </p:cNvPr>
@@ -10555,7 +10555,7 @@
             </p:txBody>
           </p:sp>
         </mc:Choice>
-        <mc:Fallback>
+        <mc:Fallback xmlns="">
           <p:sp>
             <p:nvSpPr>
               <p:cNvPr id="3" name="Content Placeholder 2">
@@ -10677,7 +10677,7 @@
               <p:cNvPr id="2" name="Title 1">
                 <a:extLst>
                   <a:ext uri="{FF2B5EF4-FFF2-40B4-BE49-F238E27FC236}">
-                    <a16:creationId xmlns:a16="http://schemas.microsoft.com/office/drawing/2014/main" xmlns="" id="{7BB2B1C3-607B-4033-88D5-A1CF66C9D6F3}"/>
+                    <a16:creationId xmlns="" xmlns:a16="http://schemas.microsoft.com/office/drawing/2014/main" id="{7BB2B1C3-607B-4033-88D5-A1CF66C9D6F3}"/>
                   </a:ext>
                 </a:extLst>
               </p:cNvPr>
@@ -10765,14 +10765,14 @@
           </p:sp>
         </mc:Fallback>
       </mc:AlternateContent>
-      <mc:AlternateContent xmlns:mc="http://schemas.openxmlformats.org/markup-compatibility/2006">
-        <mc:Choice xmlns:a14="http://schemas.microsoft.com/office/drawing/2010/main" Requires="a14">
+      <mc:AlternateContent xmlns:mc="http://schemas.openxmlformats.org/markup-compatibility/2006" xmlns:a14="http://schemas.microsoft.com/office/drawing/2010/main">
+        <mc:Choice Requires="a14">
           <p:sp>
             <p:nvSpPr>
               <p:cNvPr id="3" name="Content Placeholder 2">
                 <a:extLst>
                   <a:ext uri="{FF2B5EF4-FFF2-40B4-BE49-F238E27FC236}">
-                    <a16:creationId xmlns:a16="http://schemas.microsoft.com/office/drawing/2014/main" xmlns="" id="{5D80C21A-F4FC-B1BE-7D36-8D93DC02776E}"/>
+                    <a16:creationId xmlns="" xmlns:a16="http://schemas.microsoft.com/office/drawing/2014/main" id="{5D80C21A-F4FC-B1BE-7D36-8D93DC02776E}"/>
                   </a:ext>
                 </a:extLst>
               </p:cNvPr>
@@ -10890,7 +10890,7 @@
             </p:txBody>
           </p:sp>
         </mc:Choice>
-        <mc:Fallback>
+        <mc:Fallback xmlns="">
           <p:sp>
             <p:nvSpPr>
               <p:cNvPr id="3" name="Content Placeholder 2">
@@ -11010,7 +11010,7 @@
           <p:cNvPr id="3" name="Content Placeholder 2">
             <a:extLst>
               <a:ext uri="{FF2B5EF4-FFF2-40B4-BE49-F238E27FC236}">
-                <a16:creationId xmlns:a16="http://schemas.microsoft.com/office/drawing/2014/main" xmlns="" id="{59B6A74E-8855-B416-1D2B-EC3735DC0079}"/>
+                <a16:creationId xmlns="" xmlns:a16="http://schemas.microsoft.com/office/drawing/2014/main" id="{59B6A74E-8855-B416-1D2B-EC3735DC0079}"/>
               </a:ext>
             </a:extLst>
           </p:cNvPr>
@@ -11086,7 +11086,7 @@
           <p:cNvPr id="1026" name="Picture 2" descr="Reinforcement Learning">
             <a:extLst>
               <a:ext uri="{FF2B5EF4-FFF2-40B4-BE49-F238E27FC236}">
-                <a16:creationId xmlns:a16="http://schemas.microsoft.com/office/drawing/2014/main" xmlns="" id="{5526EDB3-366A-5FFB-4A2D-BC3494C1E889}"/>
+                <a16:creationId xmlns="" xmlns:a16="http://schemas.microsoft.com/office/drawing/2014/main" id="{5526EDB3-366A-5FFB-4A2D-BC3494C1E889}"/>
               </a:ext>
             </a:extLst>
           </p:cNvPr>
@@ -11163,7 +11163,7 @@
           <p:cNvPr id="3" name="Content Placeholder 2">
             <a:extLst>
               <a:ext uri="{FF2B5EF4-FFF2-40B4-BE49-F238E27FC236}">
-                <a16:creationId xmlns:a16="http://schemas.microsoft.com/office/drawing/2014/main" xmlns="" id="{407A6B7C-8AE2-0626-7031-C9A0D36E6CE3}"/>
+                <a16:creationId xmlns="" xmlns:a16="http://schemas.microsoft.com/office/drawing/2014/main" id="{407A6B7C-8AE2-0626-7031-C9A0D36E6CE3}"/>
               </a:ext>
             </a:extLst>
           </p:cNvPr>
@@ -11217,7 +11217,7 @@
           <p:cNvPr id="3074" name="Picture 2" descr="Reinforcement Learning In Real Life. Simple Explanation With Funny Cats">
             <a:extLst>
               <a:ext uri="{FF2B5EF4-FFF2-40B4-BE49-F238E27FC236}">
-                <a16:creationId xmlns:a16="http://schemas.microsoft.com/office/drawing/2014/main" xmlns="" id="{BF6473FC-0F5F-F021-4950-C2C526AE66A2}"/>
+                <a16:creationId xmlns="" xmlns:a16="http://schemas.microsoft.com/office/drawing/2014/main" id="{BF6473FC-0F5F-F021-4950-C2C526AE66A2}"/>
               </a:ext>
             </a:extLst>
           </p:cNvPr>
@@ -11294,7 +11294,7 @@
           <p:cNvPr id="2" name="Title 1">
             <a:extLst>
               <a:ext uri="{FF2B5EF4-FFF2-40B4-BE49-F238E27FC236}">
-                <a16:creationId xmlns:a16="http://schemas.microsoft.com/office/drawing/2014/main" xmlns="" id="{93D78643-03C9-A92E-0919-E944BBC48702}"/>
+                <a16:creationId xmlns="" xmlns:a16="http://schemas.microsoft.com/office/drawing/2014/main" id="{93D78643-03C9-A92E-0919-E944BBC48702}"/>
               </a:ext>
             </a:extLst>
           </p:cNvPr>
@@ -11334,14 +11334,14 @@
           </a:p>
         </p:txBody>
       </p:sp>
-      <mc:AlternateContent xmlns:mc="http://schemas.openxmlformats.org/markup-compatibility/2006">
-        <mc:Choice xmlns:a14="http://schemas.microsoft.com/office/drawing/2010/main" Requires="a14">
+      <mc:AlternateContent xmlns:mc="http://schemas.openxmlformats.org/markup-compatibility/2006" xmlns:a14="http://schemas.microsoft.com/office/drawing/2010/main">
+        <mc:Choice Requires="a14">
           <p:sp>
             <p:nvSpPr>
               <p:cNvPr id="3" name="Content Placeholder 2">
                 <a:extLst>
                   <a:ext uri="{FF2B5EF4-FFF2-40B4-BE49-F238E27FC236}">
-                    <a16:creationId xmlns:a16="http://schemas.microsoft.com/office/drawing/2014/main" xmlns="" id="{9E56A20D-5587-73F0-6A77-76736D8C972A}"/>
+                    <a16:creationId xmlns="" xmlns:a16="http://schemas.microsoft.com/office/drawing/2014/main" id="{9E56A20D-5587-73F0-6A77-76736D8C972A}"/>
                   </a:ext>
                 </a:extLst>
               </p:cNvPr>
@@ -11818,7 +11818,6 @@
                   <a:rPr lang="pt-BR" dirty="0" smtClean="0"/>
                   <a:t>. </a:t>
                 </a:r>
-                <a:endParaRPr lang="pt-BR" dirty="0" smtClean="0"/>
               </a:p>
               <a:p>
                 <a:pPr lvl="1">
@@ -11835,11 +11834,7 @@
                 </a:r>
                 <a:r>
                   <a:rPr lang="pt-BR" dirty="0" smtClean="0"/>
-                  <a:t>antiga</a:t>
-                </a:r>
-                <a:r>
-                  <a:rPr lang="pt-BR" dirty="0" smtClean="0"/>
-                  <a:t>.</a:t>
+                  <a:t>antiga.</a:t>
                 </a:r>
               </a:p>
               <a:p>
@@ -11935,7 +11930,7 @@
             </p:txBody>
           </p:sp>
         </mc:Choice>
-        <mc:Fallback>
+        <mc:Fallback xmlns="">
           <p:sp>
             <p:nvSpPr>
               <p:cNvPr id="3" name="Content Placeholder 2">
@@ -12014,7 +12009,7 @@
           <p:cNvPr id="2" name="Title 1">
             <a:extLst>
               <a:ext uri="{FF2B5EF4-FFF2-40B4-BE49-F238E27FC236}">
-                <a16:creationId xmlns:a16="http://schemas.microsoft.com/office/drawing/2014/main" xmlns="" id="{93D78643-03C9-A92E-0919-E944BBC48702}"/>
+                <a16:creationId xmlns="" xmlns:a16="http://schemas.microsoft.com/office/drawing/2014/main" id="{93D78643-03C9-A92E-0919-E944BBC48702}"/>
               </a:ext>
             </a:extLst>
           </p:cNvPr>
@@ -12054,14 +12049,14 @@
           </a:p>
         </p:txBody>
       </p:sp>
-      <mc:AlternateContent xmlns:mc="http://schemas.openxmlformats.org/markup-compatibility/2006">
-        <mc:Choice xmlns:a14="http://schemas.microsoft.com/office/drawing/2010/main" Requires="a14">
+      <mc:AlternateContent xmlns:mc="http://schemas.openxmlformats.org/markup-compatibility/2006" xmlns:a14="http://schemas.microsoft.com/office/drawing/2010/main">
+        <mc:Choice Requires="a14">
           <p:sp>
             <p:nvSpPr>
               <p:cNvPr id="3" name="Content Placeholder 2">
                 <a:extLst>
                   <a:ext uri="{FF2B5EF4-FFF2-40B4-BE49-F238E27FC236}">
-                    <a16:creationId xmlns:a16="http://schemas.microsoft.com/office/drawing/2014/main" xmlns="" id="{9E56A20D-5587-73F0-6A77-76736D8C972A}"/>
+                    <a16:creationId xmlns="" xmlns:a16="http://schemas.microsoft.com/office/drawing/2014/main" id="{9E56A20D-5587-73F0-6A77-76736D8C972A}"/>
                   </a:ext>
                 </a:extLst>
               </p:cNvPr>
@@ -12772,11 +12767,7 @@
                 </a:r>
                 <a:r>
                   <a:rPr lang="pt-BR" dirty="0" smtClean="0"/>
-                  <a:t>estimativa da recompensa futura</a:t>
-                </a:r>
-                <a:r>
-                  <a:rPr lang="pt-BR" dirty="0" smtClean="0"/>
-                  <a:t>. </a:t>
+                  <a:t>estimativa da recompensa futura. </a:t>
                 </a:r>
               </a:p>
               <a:p>
@@ -12786,11 +12777,7 @@
                 </a:pPr>
                 <a:r>
                   <a:rPr lang="pt-BR" dirty="0" smtClean="0"/>
-                  <a:t>A equação a</a:t>
-                </a:r>
-                <a:r>
-                  <a:rPr lang="pt-BR" dirty="0" smtClean="0"/>
-                  <a:t>ssume </a:t>
+                  <a:t>A equação assume </a:t>
                 </a:r>
                 <a:r>
                   <a:rPr lang="pt-BR" dirty="0"/>
@@ -12817,7 +12804,7 @@
             </p:txBody>
           </p:sp>
         </mc:Choice>
-        <mc:Fallback>
+        <mc:Fallback xmlns="">
           <p:sp>
             <p:nvSpPr>
               <p:cNvPr id="3" name="Content Placeholder 2">
@@ -12896,7 +12883,7 @@
           <p:cNvPr id="2" name="Title 1">
             <a:extLst>
               <a:ext uri="{FF2B5EF4-FFF2-40B4-BE49-F238E27FC236}">
-                <a16:creationId xmlns:a16="http://schemas.microsoft.com/office/drawing/2014/main" xmlns="" id="{874F2722-DA1E-D930-DC99-59F795E3E8B9}"/>
+                <a16:creationId xmlns="" xmlns:a16="http://schemas.microsoft.com/office/drawing/2014/main" id="{874F2722-DA1E-D930-DC99-59F795E3E8B9}"/>
               </a:ext>
             </a:extLst>
           </p:cNvPr>
@@ -12921,7 +12908,7 @@
           <p:cNvPr id="3" name="Content Placeholder 2">
             <a:extLst>
               <a:ext uri="{FF2B5EF4-FFF2-40B4-BE49-F238E27FC236}">
-                <a16:creationId xmlns:a16="http://schemas.microsoft.com/office/drawing/2014/main" xmlns="" id="{97BD2D05-0E48-B94D-DBC7-FBDCBC17C0A5}"/>
+                <a16:creationId xmlns="" xmlns:a16="http://schemas.microsoft.com/office/drawing/2014/main" id="{97BD2D05-0E48-B94D-DBC7-FBDCBC17C0A5}"/>
               </a:ext>
             </a:extLst>
           </p:cNvPr>
@@ -12990,7 +12977,7 @@
           <p:cNvPr id="2" name="Title 1">
             <a:extLst>
               <a:ext uri="{FF2B5EF4-FFF2-40B4-BE49-F238E27FC236}">
-                <a16:creationId xmlns:a16="http://schemas.microsoft.com/office/drawing/2014/main" xmlns="" id="{52C5A6D8-ECD1-B38D-0188-C905A6EDF96B}"/>
+                <a16:creationId xmlns="" xmlns:a16="http://schemas.microsoft.com/office/drawing/2014/main" id="{52C5A6D8-ECD1-B38D-0188-C905A6EDF96B}"/>
               </a:ext>
             </a:extLst>
           </p:cNvPr>
@@ -13028,7 +13015,7 @@
               <p:cNvPr id="3" name="Content Placeholder 2">
                 <a:extLst>
                   <a:ext uri="{FF2B5EF4-FFF2-40B4-BE49-F238E27FC236}">
-                    <a16:creationId xmlns:a16="http://schemas.microsoft.com/office/drawing/2014/main" xmlns="" id="{9E788D2D-1B58-788D-B9CB-AA2B58DAC90E}"/>
+                    <a16:creationId xmlns="" xmlns:a16="http://schemas.microsoft.com/office/drawing/2014/main" id="{9E788D2D-1B58-788D-B9CB-AA2B58DAC90E}"/>
                   </a:ext>
                 </a:extLst>
               </p:cNvPr>
@@ -13058,201 +13045,249 @@
                       <m:jc m:val="centerGroup"/>
                     </m:oMathParaPr>
                     <m:oMath xmlns:m="http://schemas.openxmlformats.org/officeDocument/2006/math">
-                      <m:r>
-                        <a:rPr lang="pt-BR" i="1" smtClean="0">
-                          <a:latin typeface="Cambria Math" panose="02040503050406030204" pitchFamily="18" charset="0"/>
-                        </a:rPr>
-                        <m:t>𝑄</m:t>
-                      </m:r>
-                      <m:d>
-                        <m:dPr>
+                      <m:limLow>
+                        <m:limLowPr>
                           <m:ctrlPr>
-                            <a:rPr lang="pt-BR" i="1">
+                            <a:rPr lang="pt-BR" i="1" smtClean="0">
                               <a:latin typeface="Cambria Math" panose="02040503050406030204" pitchFamily="18" charset="0"/>
+                              <a:ea typeface="Cambria Math" panose="02040503050406030204" pitchFamily="18" charset="0"/>
                             </a:rPr>
                           </m:ctrlPr>
-                        </m:dPr>
+                        </m:limLowPr>
                         <m:e>
+                          <m:groupChr>
+                            <m:groupChrPr>
+                              <m:chr m:val="⏟"/>
+                              <m:ctrlPr>
+                                <a:rPr lang="pt-BR" i="1" smtClean="0">
+                                  <a:latin typeface="Cambria Math" panose="02040503050406030204" pitchFamily="18" charset="0"/>
+                                  <a:ea typeface="Cambria Math" panose="02040503050406030204" pitchFamily="18" charset="0"/>
+                                </a:rPr>
+                              </m:ctrlPr>
+                            </m:groupChrPr>
+                            <m:e>
+                              <m:r>
+                                <a:rPr lang="pt-BR" i="1">
+                                  <a:latin typeface="Cambria Math" panose="02040503050406030204" pitchFamily="18" charset="0"/>
+                                  <a:ea typeface="Cambria Math" panose="02040503050406030204" pitchFamily="18" charset="0"/>
+                                </a:rPr>
+                                <m:t>𝑟</m:t>
+                              </m:r>
+                              <m:r>
+                                <a:rPr lang="pt-BR" i="1">
+                                  <a:latin typeface="Cambria Math" panose="02040503050406030204" pitchFamily="18" charset="0"/>
+                                  <a:ea typeface="Cambria Math" panose="02040503050406030204" pitchFamily="18" charset="0"/>
+                                </a:rPr>
+                                <m:t>+</m:t>
+                              </m:r>
+                              <m:func>
+                                <m:funcPr>
+                                  <m:ctrlPr>
+                                    <a:rPr lang="pt-BR" i="1">
+                                      <a:latin typeface="Cambria Math" panose="02040503050406030204" pitchFamily="18" charset="0"/>
+                                      <a:ea typeface="Cambria Math" panose="02040503050406030204" pitchFamily="18" charset="0"/>
+                                    </a:rPr>
+                                  </m:ctrlPr>
+                                </m:funcPr>
+                                <m:fName>
+                                  <m:limLow>
+                                    <m:limLowPr>
+                                      <m:ctrlPr>
+                                        <a:rPr lang="pt-BR" i="1">
+                                          <a:latin typeface="Cambria Math" panose="02040503050406030204" pitchFamily="18" charset="0"/>
+                                          <a:ea typeface="Cambria Math" panose="02040503050406030204" pitchFamily="18" charset="0"/>
+                                        </a:rPr>
+                                      </m:ctrlPr>
+                                    </m:limLowPr>
+                                    <m:e>
+                                      <m:r>
+                                        <m:rPr>
+                                          <m:sty m:val="p"/>
+                                        </m:rPr>
+                                        <a:rPr lang="el-GR" i="1">
+                                          <a:latin typeface="Cambria Math" panose="02040503050406030204" pitchFamily="18" charset="0"/>
+                                          <a:ea typeface="Cambria Math" panose="02040503050406030204" pitchFamily="18" charset="0"/>
+                                        </a:rPr>
+                                        <m:t>γ</m:t>
+                                      </m:r>
+                                      <m:r>
+                                        <m:rPr>
+                                          <m:sty m:val="p"/>
+                                        </m:rPr>
+                                        <a:rPr lang="pt-BR">
+                                          <a:latin typeface="Cambria Math" panose="02040503050406030204" pitchFamily="18" charset="0"/>
+                                          <a:ea typeface="Cambria Math" panose="02040503050406030204" pitchFamily="18" charset="0"/>
+                                        </a:rPr>
+                                        <m:t>max</m:t>
+                                      </m:r>
+                                    </m:e>
+                                    <m:lim>
+                                      <m:sSup>
+                                        <m:sSupPr>
+                                          <m:ctrlPr>
+                                            <a:rPr lang="pt-BR" i="1">
+                                              <a:latin typeface="Cambria Math" panose="02040503050406030204" pitchFamily="18" charset="0"/>
+                                              <a:ea typeface="Cambria Math" panose="02040503050406030204" pitchFamily="18" charset="0"/>
+                                            </a:rPr>
+                                          </m:ctrlPr>
+                                        </m:sSupPr>
+                                        <m:e>
+                                          <m:r>
+                                            <a:rPr lang="pt-BR" i="1">
+                                              <a:latin typeface="Cambria Math" panose="02040503050406030204" pitchFamily="18" charset="0"/>
+                                              <a:ea typeface="Cambria Math" panose="02040503050406030204" pitchFamily="18" charset="0"/>
+                                            </a:rPr>
+                                            <m:t>𝑎</m:t>
+                                          </m:r>
+                                        </m:e>
+                                        <m:sup>
+                                          <m:r>
+                                            <a:rPr lang="pt-BR" i="1">
+                                              <a:latin typeface="Cambria Math" panose="02040503050406030204" pitchFamily="18" charset="0"/>
+                                              <a:ea typeface="Cambria Math" panose="02040503050406030204" pitchFamily="18" charset="0"/>
+                                            </a:rPr>
+                                            <m:t>′</m:t>
+                                          </m:r>
+                                        </m:sup>
+                                      </m:sSup>
+                                    </m:lim>
+                                  </m:limLow>
+                                </m:fName>
+                                <m:e>
+                                  <m:r>
+                                    <a:rPr lang="pt-BR" i="1">
+                                      <a:latin typeface="Cambria Math" panose="02040503050406030204" pitchFamily="18" charset="0"/>
+                                      <a:ea typeface="Cambria Math" panose="02040503050406030204" pitchFamily="18" charset="0"/>
+                                    </a:rPr>
+                                    <m:t>𝑄</m:t>
+                                  </m:r>
+                                  <m:d>
+                                    <m:dPr>
+                                      <m:ctrlPr>
+                                        <a:rPr lang="pt-BR" i="1">
+                                          <a:latin typeface="Cambria Math" panose="02040503050406030204" pitchFamily="18" charset="0"/>
+                                          <a:ea typeface="Cambria Math" panose="02040503050406030204" pitchFamily="18" charset="0"/>
+                                        </a:rPr>
+                                      </m:ctrlPr>
+                                    </m:dPr>
+                                    <m:e>
+                                      <m:sSup>
+                                        <m:sSupPr>
+                                          <m:ctrlPr>
+                                            <a:rPr lang="pt-BR" i="1">
+                                              <a:latin typeface="Cambria Math" panose="02040503050406030204" pitchFamily="18" charset="0"/>
+                                              <a:ea typeface="Cambria Math" panose="02040503050406030204" pitchFamily="18" charset="0"/>
+                                            </a:rPr>
+                                          </m:ctrlPr>
+                                        </m:sSupPr>
+                                        <m:e>
+                                          <m:r>
+                                            <a:rPr lang="pt-BR" i="1">
+                                              <a:latin typeface="Cambria Math" panose="02040503050406030204" pitchFamily="18" charset="0"/>
+                                              <a:ea typeface="Cambria Math" panose="02040503050406030204" pitchFamily="18" charset="0"/>
+                                            </a:rPr>
+                                            <m:t>𝑠</m:t>
+                                          </m:r>
+                                        </m:e>
+                                        <m:sup>
+                                          <m:r>
+                                            <a:rPr lang="pt-BR" i="1">
+                                              <a:latin typeface="Cambria Math" panose="02040503050406030204" pitchFamily="18" charset="0"/>
+                                              <a:ea typeface="Cambria Math" panose="02040503050406030204" pitchFamily="18" charset="0"/>
+                                            </a:rPr>
+                                            <m:t>′</m:t>
+                                          </m:r>
+                                        </m:sup>
+                                      </m:sSup>
+                                      <m:r>
+                                        <a:rPr lang="pt-BR" i="1">
+                                          <a:latin typeface="Cambria Math" panose="02040503050406030204" pitchFamily="18" charset="0"/>
+                                          <a:ea typeface="Cambria Math" panose="02040503050406030204" pitchFamily="18" charset="0"/>
+                                        </a:rPr>
+                                        <m:t>,</m:t>
+                                      </m:r>
+                                      <m:sSup>
+                                        <m:sSupPr>
+                                          <m:ctrlPr>
+                                            <a:rPr lang="pt-BR" i="1">
+                                              <a:latin typeface="Cambria Math" panose="02040503050406030204" pitchFamily="18" charset="0"/>
+                                              <a:ea typeface="Cambria Math" panose="02040503050406030204" pitchFamily="18" charset="0"/>
+                                            </a:rPr>
+                                          </m:ctrlPr>
+                                        </m:sSupPr>
+                                        <m:e>
+                                          <m:r>
+                                            <a:rPr lang="pt-BR" i="1">
+                                              <a:latin typeface="Cambria Math" panose="02040503050406030204" pitchFamily="18" charset="0"/>
+                                              <a:ea typeface="Cambria Math" panose="02040503050406030204" pitchFamily="18" charset="0"/>
+                                            </a:rPr>
+                                            <m:t>𝑎</m:t>
+                                          </m:r>
+                                        </m:e>
+                                        <m:sup>
+                                          <m:r>
+                                            <a:rPr lang="pt-BR" i="1">
+                                              <a:latin typeface="Cambria Math" panose="02040503050406030204" pitchFamily="18" charset="0"/>
+                                              <a:ea typeface="Cambria Math" panose="02040503050406030204" pitchFamily="18" charset="0"/>
+                                            </a:rPr>
+                                            <m:t>′</m:t>
+                                          </m:r>
+                                        </m:sup>
+                                      </m:sSup>
+                                    </m:e>
+                                  </m:d>
+                                </m:e>
+                              </m:func>
+                            </m:e>
+                          </m:groupChr>
+                        </m:e>
+                        <m:lim>
                           <m:r>
-                            <a:rPr lang="pt-BR" i="1">
+                            <m:rPr>
+                              <m:sty m:val="p"/>
+                            </m:rPr>
+                            <a:rPr lang="pt-BR" b="0" i="0" smtClean="0">
                               <a:latin typeface="Cambria Math" panose="02040503050406030204" pitchFamily="18" charset="0"/>
+                              <a:ea typeface="Cambria Math" panose="02040503050406030204" pitchFamily="18" charset="0"/>
                             </a:rPr>
-                            <m:t>𝑠</m:t>
+                            <m:t>alvo</m:t>
                           </m:r>
-                          <m:r>
-                            <a:rPr lang="pt-BR" i="1">
-                              <a:latin typeface="Cambria Math" panose="02040503050406030204" pitchFamily="18" charset="0"/>
-                            </a:rPr>
-                            <m:t>,</m:t>
-                          </m:r>
-                          <m:r>
-                            <a:rPr lang="pt-BR" i="1">
-                              <a:latin typeface="Cambria Math" panose="02040503050406030204" pitchFamily="18" charset="0"/>
-                            </a:rPr>
-                            <m:t>𝑎</m:t>
-                          </m:r>
-                        </m:e>
-                      </m:d>
+                        </m:lim>
+                      </m:limLow>
                       <m:r>
-                        <a:rPr lang="pt-BR" i="1">
+                        <a:rPr lang="pt-BR" b="0" i="1" smtClean="0">
                           <a:latin typeface="Cambria Math" panose="02040503050406030204" pitchFamily="18" charset="0"/>
                           <a:ea typeface="Cambria Math" panose="02040503050406030204" pitchFamily="18" charset="0"/>
                         </a:rPr>
-                        <m:t>←</m:t>
+                        <m:t>   </m:t>
                       </m:r>
                       <m:r>
                         <a:rPr lang="pt-BR" i="1">
                           <a:latin typeface="Cambria Math" panose="02040503050406030204" pitchFamily="18" charset="0"/>
                           <a:ea typeface="Cambria Math" panose="02040503050406030204" pitchFamily="18" charset="0"/>
                         </a:rPr>
-                        <m:t>𝑄</m:t>
+                        <m:t>−</m:t>
                       </m:r>
-                      <m:d>
-                        <m:dPr>
+                      <m:limLow>
+                        <m:limLowPr>
                           <m:ctrlPr>
-                            <a:rPr lang="pt-BR" i="1">
+                            <a:rPr lang="pt-BR" i="1" smtClean="0">
                               <a:latin typeface="Cambria Math" panose="02040503050406030204" pitchFamily="18" charset="0"/>
                               <a:ea typeface="Cambria Math" panose="02040503050406030204" pitchFamily="18" charset="0"/>
                             </a:rPr>
                           </m:ctrlPr>
-                        </m:dPr>
+                        </m:limLowPr>
                         <m:e>
-                          <m:r>
-                            <a:rPr lang="pt-BR" i="1">
-                              <a:latin typeface="Cambria Math" panose="02040503050406030204" pitchFamily="18" charset="0"/>
-                              <a:ea typeface="Cambria Math" panose="02040503050406030204" pitchFamily="18" charset="0"/>
-                            </a:rPr>
-                            <m:t>𝑠</m:t>
-                          </m:r>
-                          <m:r>
-                            <a:rPr lang="pt-BR" i="1">
-                              <a:latin typeface="Cambria Math" panose="02040503050406030204" pitchFamily="18" charset="0"/>
-                              <a:ea typeface="Cambria Math" panose="02040503050406030204" pitchFamily="18" charset="0"/>
-                            </a:rPr>
-                            <m:t>,</m:t>
-                          </m:r>
-                          <m:r>
-                            <a:rPr lang="pt-BR" i="1">
-                              <a:latin typeface="Cambria Math" panose="02040503050406030204" pitchFamily="18" charset="0"/>
-                              <a:ea typeface="Cambria Math" panose="02040503050406030204" pitchFamily="18" charset="0"/>
-                            </a:rPr>
-                            <m:t>𝑎</m:t>
-                          </m:r>
-                        </m:e>
-                      </m:d>
-                      <m:r>
-                        <a:rPr lang="pt-BR" i="1">
-                          <a:latin typeface="Cambria Math" panose="02040503050406030204" pitchFamily="18" charset="0"/>
-                          <a:ea typeface="Cambria Math" panose="02040503050406030204" pitchFamily="18" charset="0"/>
-                        </a:rPr>
-                        <m:t>+</m:t>
-                      </m:r>
-                      <m:r>
-                        <a:rPr lang="pt-BR" i="1">
-                          <a:latin typeface="Cambria Math" panose="02040503050406030204" pitchFamily="18" charset="0"/>
-                          <a:ea typeface="Cambria Math" panose="02040503050406030204" pitchFamily="18" charset="0"/>
-                        </a:rPr>
-                        <m:t>𝛼</m:t>
-                      </m:r>
-                      <m:d>
-                        <m:dPr>
-                          <m:begChr m:val="["/>
-                          <m:endChr m:val="]"/>
-                          <m:ctrlPr>
-                            <a:rPr lang="pt-BR" i="1">
-                              <a:latin typeface="Cambria Math" panose="02040503050406030204" pitchFamily="18" charset="0"/>
-                              <a:ea typeface="Cambria Math" panose="02040503050406030204" pitchFamily="18" charset="0"/>
-                            </a:rPr>
-                          </m:ctrlPr>
-                        </m:dPr>
-                        <m:e>
-                          <m:r>
-                            <a:rPr lang="pt-BR" i="1">
-                              <a:latin typeface="Cambria Math" panose="02040503050406030204" pitchFamily="18" charset="0"/>
-                              <a:ea typeface="Cambria Math" panose="02040503050406030204" pitchFamily="18" charset="0"/>
-                            </a:rPr>
-                            <m:t>𝑟</m:t>
-                          </m:r>
-                          <m:r>
-                            <a:rPr lang="pt-BR" i="1">
-                              <a:latin typeface="Cambria Math" panose="02040503050406030204" pitchFamily="18" charset="0"/>
-                              <a:ea typeface="Cambria Math" panose="02040503050406030204" pitchFamily="18" charset="0"/>
-                            </a:rPr>
-                            <m:t>+</m:t>
-                          </m:r>
-                          <m:func>
-                            <m:funcPr>
+                          <m:groupChr>
+                            <m:groupChrPr>
+                              <m:chr m:val="⏟"/>
                               <m:ctrlPr>
-                                <a:rPr lang="pt-BR" i="1">
+                                <a:rPr lang="pt-BR" i="1" smtClean="0">
                                   <a:latin typeface="Cambria Math" panose="02040503050406030204" pitchFamily="18" charset="0"/>
                                   <a:ea typeface="Cambria Math" panose="02040503050406030204" pitchFamily="18" charset="0"/>
                                 </a:rPr>
                               </m:ctrlPr>
-                            </m:funcPr>
-                            <m:fName>
-                              <m:limLow>
-                                <m:limLowPr>
-                                  <m:ctrlPr>
-                                    <a:rPr lang="pt-BR" i="1">
-                                      <a:latin typeface="Cambria Math" panose="02040503050406030204" pitchFamily="18" charset="0"/>
-                                      <a:ea typeface="Cambria Math" panose="02040503050406030204" pitchFamily="18" charset="0"/>
-                                    </a:rPr>
-                                  </m:ctrlPr>
-                                </m:limLowPr>
-                                <m:e>
-                                  <m:r>
-                                    <m:rPr>
-                                      <m:sty m:val="p"/>
-                                    </m:rPr>
-                                    <a:rPr lang="el-GR" i="1">
-                                      <a:latin typeface="Cambria Math" panose="02040503050406030204" pitchFamily="18" charset="0"/>
-                                      <a:ea typeface="Cambria Math" panose="02040503050406030204" pitchFamily="18" charset="0"/>
-                                    </a:rPr>
-                                    <m:t>γ</m:t>
-                                  </m:r>
-                                  <m:r>
-                                    <m:rPr>
-                                      <m:sty m:val="p"/>
-                                    </m:rPr>
-                                    <a:rPr lang="pt-BR">
-                                      <a:latin typeface="Cambria Math" panose="02040503050406030204" pitchFamily="18" charset="0"/>
-                                      <a:ea typeface="Cambria Math" panose="02040503050406030204" pitchFamily="18" charset="0"/>
-                                    </a:rPr>
-                                    <m:t>max</m:t>
-                                  </m:r>
-                                </m:e>
-                                <m:lim>
-                                  <m:sSup>
-                                    <m:sSupPr>
-                                      <m:ctrlPr>
-                                        <a:rPr lang="pt-BR" i="1">
-                                          <a:latin typeface="Cambria Math" panose="02040503050406030204" pitchFamily="18" charset="0"/>
-                                          <a:ea typeface="Cambria Math" panose="02040503050406030204" pitchFamily="18" charset="0"/>
-                                        </a:rPr>
-                                      </m:ctrlPr>
-                                    </m:sSupPr>
-                                    <m:e>
-                                      <m:r>
-                                        <a:rPr lang="pt-BR" i="1">
-                                          <a:latin typeface="Cambria Math" panose="02040503050406030204" pitchFamily="18" charset="0"/>
-                                          <a:ea typeface="Cambria Math" panose="02040503050406030204" pitchFamily="18" charset="0"/>
-                                        </a:rPr>
-                                        <m:t>𝑎</m:t>
-                                      </m:r>
-                                    </m:e>
-                                    <m:sup>
-                                      <m:r>
-                                        <a:rPr lang="pt-BR" i="1">
-                                          <a:latin typeface="Cambria Math" panose="02040503050406030204" pitchFamily="18" charset="0"/>
-                                          <a:ea typeface="Cambria Math" panose="02040503050406030204" pitchFamily="18" charset="0"/>
-                                        </a:rPr>
-                                        <m:t>′</m:t>
-                                      </m:r>
-                                    </m:sup>
-                                  </m:sSup>
-                                </m:lim>
-                              </m:limLow>
-                            </m:fName>
+                            </m:groupChrPr>
                             <m:e>
                               <m:r>
                                 <a:rPr lang="pt-BR" i="1">
@@ -13271,34 +13306,13 @@
                                   </m:ctrlPr>
                                 </m:dPr>
                                 <m:e>
-                                  <m:sSup>
-                                    <m:sSupPr>
-                                      <m:ctrlPr>
-                                        <a:rPr lang="pt-BR" i="1">
-                                          <a:latin typeface="Cambria Math" panose="02040503050406030204" pitchFamily="18" charset="0"/>
-                                          <a:ea typeface="Cambria Math" panose="02040503050406030204" pitchFamily="18" charset="0"/>
-                                        </a:rPr>
-                                      </m:ctrlPr>
-                                    </m:sSupPr>
-                                    <m:e>
-                                      <m:r>
-                                        <a:rPr lang="pt-BR" i="1">
-                                          <a:latin typeface="Cambria Math" panose="02040503050406030204" pitchFamily="18" charset="0"/>
-                                          <a:ea typeface="Cambria Math" panose="02040503050406030204" pitchFamily="18" charset="0"/>
-                                        </a:rPr>
-                                        <m:t>𝑠</m:t>
-                                      </m:r>
-                                    </m:e>
-                                    <m:sup>
-                                      <m:r>
-                                        <a:rPr lang="pt-BR" i="1">
-                                          <a:latin typeface="Cambria Math" panose="02040503050406030204" pitchFamily="18" charset="0"/>
-                                          <a:ea typeface="Cambria Math" panose="02040503050406030204" pitchFamily="18" charset="0"/>
-                                        </a:rPr>
-                                        <m:t>′</m:t>
-                                      </m:r>
-                                    </m:sup>
-                                  </m:sSup>
+                                  <m:r>
+                                    <a:rPr lang="pt-BR" i="1">
+                                      <a:latin typeface="Cambria Math" panose="02040503050406030204" pitchFamily="18" charset="0"/>
+                                      <a:ea typeface="Cambria Math" panose="02040503050406030204" pitchFamily="18" charset="0"/>
+                                    </a:rPr>
+                                    <m:t>𝑠</m:t>
+                                  </m:r>
                                   <m:r>
                                     <a:rPr lang="pt-BR" i="1">
                                       <a:latin typeface="Cambria Math" panose="02040503050406030204" pitchFamily="18" charset="0"/>
@@ -13306,94 +13320,48 @@
                                     </a:rPr>
                                     <m:t>,</m:t>
                                   </m:r>
-                                  <m:sSup>
-                                    <m:sSupPr>
-                                      <m:ctrlPr>
-                                        <a:rPr lang="pt-BR" i="1">
-                                          <a:latin typeface="Cambria Math" panose="02040503050406030204" pitchFamily="18" charset="0"/>
-                                          <a:ea typeface="Cambria Math" panose="02040503050406030204" pitchFamily="18" charset="0"/>
-                                        </a:rPr>
-                                      </m:ctrlPr>
-                                    </m:sSupPr>
-                                    <m:e>
-                                      <m:r>
-                                        <a:rPr lang="pt-BR" i="1">
-                                          <a:latin typeface="Cambria Math" panose="02040503050406030204" pitchFamily="18" charset="0"/>
-                                          <a:ea typeface="Cambria Math" panose="02040503050406030204" pitchFamily="18" charset="0"/>
-                                        </a:rPr>
-                                        <m:t>𝑎</m:t>
-                                      </m:r>
-                                    </m:e>
-                                    <m:sup>
-                                      <m:r>
-                                        <a:rPr lang="pt-BR" i="1">
-                                          <a:latin typeface="Cambria Math" panose="02040503050406030204" pitchFamily="18" charset="0"/>
-                                          <a:ea typeface="Cambria Math" panose="02040503050406030204" pitchFamily="18" charset="0"/>
-                                        </a:rPr>
-                                        <m:t>′</m:t>
-                                      </m:r>
-                                    </m:sup>
-                                  </m:sSup>
+                                  <m:r>
+                                    <a:rPr lang="pt-BR" i="1">
+                                      <a:latin typeface="Cambria Math" panose="02040503050406030204" pitchFamily="18" charset="0"/>
+                                      <a:ea typeface="Cambria Math" panose="02040503050406030204" pitchFamily="18" charset="0"/>
+                                    </a:rPr>
+                                    <m:t>𝑎</m:t>
+                                  </m:r>
                                 </m:e>
                               </m:d>
                             </m:e>
-                          </m:func>
+                          </m:groupChr>
+                        </m:e>
+                        <m:lim>
                           <m:r>
-                            <a:rPr lang="pt-BR" i="1">
+                            <m:rPr>
+                              <m:sty m:val="p"/>
+                            </m:rPr>
+                            <a:rPr lang="pt-BR" b="0" i="0" smtClean="0">
                               <a:latin typeface="Cambria Math" panose="02040503050406030204" pitchFamily="18" charset="0"/>
                               <a:ea typeface="Cambria Math" panose="02040503050406030204" pitchFamily="18" charset="0"/>
                             </a:rPr>
-                            <m:t>−</m:t>
+                            <m:t>estimativa</m:t>
                           </m:r>
                           <m:r>
-                            <a:rPr lang="pt-BR" i="1">
+                            <a:rPr lang="pt-BR" b="0" i="0" smtClean="0">
                               <a:latin typeface="Cambria Math" panose="02040503050406030204" pitchFamily="18" charset="0"/>
                               <a:ea typeface="Cambria Math" panose="02040503050406030204" pitchFamily="18" charset="0"/>
                             </a:rPr>
-                            <m:t>𝑄</m:t>
+                            <m:t> </m:t>
                           </m:r>
-                          <m:d>
-                            <m:dPr>
-                              <m:ctrlPr>
-                                <a:rPr lang="pt-BR" i="1">
-                                  <a:latin typeface="Cambria Math" panose="02040503050406030204" pitchFamily="18" charset="0"/>
-                                  <a:ea typeface="Cambria Math" panose="02040503050406030204" pitchFamily="18" charset="0"/>
-                                </a:rPr>
-                              </m:ctrlPr>
-                            </m:dPr>
-                            <m:e>
-                              <m:r>
-                                <a:rPr lang="pt-BR" i="1">
-                                  <a:latin typeface="Cambria Math" panose="02040503050406030204" pitchFamily="18" charset="0"/>
-                                  <a:ea typeface="Cambria Math" panose="02040503050406030204" pitchFamily="18" charset="0"/>
-                                </a:rPr>
-                                <m:t>𝑠</m:t>
-                              </m:r>
-                              <m:r>
-                                <a:rPr lang="pt-BR" i="1">
-                                  <a:latin typeface="Cambria Math" panose="02040503050406030204" pitchFamily="18" charset="0"/>
-                                  <a:ea typeface="Cambria Math" panose="02040503050406030204" pitchFamily="18" charset="0"/>
-                                </a:rPr>
-                                <m:t>,</m:t>
-                              </m:r>
-                              <m:r>
-                                <a:rPr lang="pt-BR" i="1">
-                                  <a:latin typeface="Cambria Math" panose="02040503050406030204" pitchFamily="18" charset="0"/>
-                                  <a:ea typeface="Cambria Math" panose="02040503050406030204" pitchFamily="18" charset="0"/>
-                                </a:rPr>
-                                <m:t>𝑎</m:t>
-                              </m:r>
-                            </m:e>
-                          </m:d>
-                        </m:e>
-                      </m:d>
-                      <m:r>
-                        <a:rPr lang="pt-BR" b="0" i="0" smtClean="0">
-                          <a:latin typeface="Cambria Math" panose="02040503050406030204" pitchFamily="18" charset="0"/>
-                          <a:ea typeface="Cambria Math" panose="02040503050406030204" pitchFamily="18" charset="0"/>
-                        </a:rPr>
-                        <m:t>.</m:t>
-                      </m:r>
+                          <m:r>
+                            <m:rPr>
+                              <m:sty m:val="p"/>
+                            </m:rPr>
+                            <a:rPr lang="pt-BR" b="0" i="0" smtClean="0">
+                              <a:latin typeface="Cambria Math" panose="02040503050406030204" pitchFamily="18" charset="0"/>
+                              <a:ea typeface="Cambria Math" panose="02040503050406030204" pitchFamily="18" charset="0"/>
+                            </a:rPr>
+                            <m:t>atual</m:t>
+                          </m:r>
+                        </m:lim>
+                      </m:limLow>
                     </m:oMath>
                   </m:oMathPara>
                 </a14:m>
@@ -13945,7 +13913,7 @@
               <p:cNvPr id="3" name="Content Placeholder 2">
                 <a:extLst>
                   <a:ext uri="{FF2B5EF4-FFF2-40B4-BE49-F238E27FC236}">
-                    <a16:creationId xmlns:a16="http://schemas.microsoft.com/office/drawing/2014/main" xmlns="" xmlns:a14="http://schemas.microsoft.com/office/drawing/2010/main" id="{9E788D2D-1B58-788D-B9CB-AA2B58DAC90E}"/>
+                    <a16:creationId xmlns="" xmlns:a16="http://schemas.microsoft.com/office/drawing/2014/main" xmlns:a14="http://schemas.microsoft.com/office/drawing/2010/main" id="{9E788D2D-1B58-788D-B9CB-AA2B58DAC90E}"/>
                   </a:ext>
                 </a:extLst>
               </p:cNvPr>
@@ -13964,7 +13932,7 @@
               <a:blipFill rotWithShape="0">
                 <a:blip r:embed="rId3"/>
                 <a:stretch>
-                  <a:fillRect l="-922"/>
+                  <a:fillRect l="-922" t="-121"/>
                 </a:stretch>
               </a:blipFill>
             </p:spPr>
@@ -14044,8 +14012,8 @@
           </a:p>
         </p:txBody>
       </p:sp>
-      <mc:AlternateContent xmlns:mc="http://schemas.openxmlformats.org/markup-compatibility/2006">
-        <mc:Choice xmlns:a14="http://schemas.microsoft.com/office/drawing/2010/main" Requires="a14">
+      <mc:AlternateContent xmlns:mc="http://schemas.openxmlformats.org/markup-compatibility/2006" xmlns:a14="http://schemas.microsoft.com/office/drawing/2010/main">
+        <mc:Choice Requires="a14">
           <p:sp>
             <p:nvSpPr>
               <p:cNvPr id="3" name="Espaço Reservado para Conteúdo 2"/>
@@ -14435,7 +14403,7 @@
             </p:txBody>
           </p:sp>
         </mc:Choice>
-        <mc:Fallback>
+        <mc:Fallback xmlns="">
           <p:sp>
             <p:nvSpPr>
               <p:cNvPr id="3" name="Espaço Reservado para Conteúdo 2"/>
@@ -14541,7 +14509,7 @@
             <p:spPr>
               <a:xfrm>
                 <a:off x="838200" y="1825625"/>
-                <a:ext cx="11165378" cy="4351338"/>
+                <a:ext cx="11165378" cy="4907684"/>
               </a:xfrm>
             </p:spPr>
             <p:txBody>
@@ -15130,12 +15098,43 @@
                 </a:r>
                 <a:r>
                   <a:rPr lang="pt-BR" dirty="0"/>
-                  <a:t>), independentemente da ação realmente tomada</a:t>
+                  <a:t>), independentemente da ação realmente </a:t>
                 </a:r>
                 <a:r>
                   <a:rPr lang="pt-BR" dirty="0" smtClean="0"/>
-                  <a:t>.</a:t>
-                </a:r>
+                  <a:t>tomada.</a:t>
+                </a:r>
+              </a:p>
+              <a:p>
+                <a:pPr lvl="1">
+                  <a:buFont typeface="Wingdings" panose="05000000000000000000" pitchFamily="2" charset="2"/>
+                  <a:buChar char="§"/>
+                </a:pPr>
+                <a:r>
+                  <a:rPr lang="pt-BR" dirty="0" smtClean="0"/>
+                  <a:t>Mesmo </a:t>
+                </a:r>
+                <a:r>
+                  <a:rPr lang="pt-BR" dirty="0"/>
+                  <a:t>que </a:t>
+                </a:r>
+                <a:r>
+                  <a:rPr lang="pt-BR" dirty="0" smtClean="0"/>
+                  <a:t>o algoritmo tenha </a:t>
+                </a:r>
+                <a:r>
+                  <a:rPr lang="pt-BR" dirty="0"/>
+                  <a:t>explorado (ação aleatória</a:t>
+                </a:r>
+                <a:r>
+                  <a:rPr lang="pt-BR" dirty="0" smtClean="0"/>
+                  <a:t>), ele aprende </a:t>
+                </a:r>
+                <a:r>
+                  <a:rPr lang="pt-BR" dirty="0"/>
+                  <a:t>como se tivesse agido de forma ótima.</a:t>
+                </a:r>
+                <a:endParaRPr lang="pt-BR" dirty="0" smtClean="0"/>
               </a:p>
               <a:p>
                 <a:r>
@@ -15217,7 +15216,7 @@
             <p:spPr>
               <a:xfrm>
                 <a:off x="838200" y="1825625"/>
-                <a:ext cx="11165378" cy="4351338"/>
+                <a:ext cx="11165378" cy="4907684"/>
               </a:xfrm>
               <a:blipFill rotWithShape="0">
                 <a:blip r:embed="rId2"/>
@@ -15276,7 +15275,7 @@
           <p:cNvPr id="2" name="Title 1">
             <a:extLst>
               <a:ext uri="{FF2B5EF4-FFF2-40B4-BE49-F238E27FC236}">
-                <a16:creationId xmlns:a16="http://schemas.microsoft.com/office/drawing/2014/main" xmlns="" id="{936F8D36-63A1-F427-6A4F-01E854EEB57B}"/>
+                <a16:creationId xmlns="" xmlns:a16="http://schemas.microsoft.com/office/drawing/2014/main" id="{936F8D36-63A1-F427-6A4F-01E854EEB57B}"/>
               </a:ext>
             </a:extLst>
           </p:cNvPr>
@@ -15305,7 +15304,7 @@
           <p:cNvPr id="3" name="Content Placeholder 2">
             <a:extLst>
               <a:ext uri="{FF2B5EF4-FFF2-40B4-BE49-F238E27FC236}">
-                <a16:creationId xmlns:a16="http://schemas.microsoft.com/office/drawing/2014/main" xmlns="" id="{EB894157-32A4-5B45-5642-D7607A5096CE}"/>
+                <a16:creationId xmlns="" xmlns:a16="http://schemas.microsoft.com/office/drawing/2014/main" id="{EB894157-32A4-5B45-5642-D7607A5096CE}"/>
               </a:ext>
             </a:extLst>
           </p:cNvPr>
@@ -15360,7 +15359,7 @@
           <p:cNvPr id="2" name="Title 1">
             <a:extLst>
               <a:ext uri="{FF2B5EF4-FFF2-40B4-BE49-F238E27FC236}">
-                <a16:creationId xmlns:a16="http://schemas.microsoft.com/office/drawing/2014/main" xmlns="" id="{8EB01B62-8582-E09F-DA69-E77F3F495399}"/>
+                <a16:creationId xmlns="" xmlns:a16="http://schemas.microsoft.com/office/drawing/2014/main" id="{8EB01B62-8582-E09F-DA69-E77F3F495399}"/>
               </a:ext>
             </a:extLst>
           </p:cNvPr>
@@ -15403,7 +15402,7 @@
               <p:cNvPr id="3" name="Content Placeholder 2">
                 <a:extLst>
                   <a:ext uri="{FF2B5EF4-FFF2-40B4-BE49-F238E27FC236}">
-                    <a16:creationId xmlns:a16="http://schemas.microsoft.com/office/drawing/2014/main" xmlns="" id="{0DB47E26-1487-F7F1-F157-E71A864B453D}"/>
+                    <a16:creationId xmlns="" xmlns:a16="http://schemas.microsoft.com/office/drawing/2014/main" id="{0DB47E26-1487-F7F1-F157-E71A864B453D}"/>
                   </a:ext>
                 </a:extLst>
               </p:cNvPr>
@@ -15661,7 +15660,7 @@
           <p:cNvPr id="2" name="Title 1">
             <a:extLst>
               <a:ext uri="{FF2B5EF4-FFF2-40B4-BE49-F238E27FC236}">
-                <a16:creationId xmlns:a16="http://schemas.microsoft.com/office/drawing/2014/main" xmlns="" id="{BC71F0FE-EA94-74C4-913C-E1B2789B6121}"/>
+                <a16:creationId xmlns="" xmlns:a16="http://schemas.microsoft.com/office/drawing/2014/main" id="{BC71F0FE-EA94-74C4-913C-E1B2789B6121}"/>
               </a:ext>
             </a:extLst>
           </p:cNvPr>
@@ -15702,7 +15701,7 @@
           <p:cNvPr id="3" name="Content Placeholder 2">
             <a:extLst>
               <a:ext uri="{FF2B5EF4-FFF2-40B4-BE49-F238E27FC236}">
-                <a16:creationId xmlns:a16="http://schemas.microsoft.com/office/drawing/2014/main" xmlns="" id="{387116BB-1259-5A42-97B8-F5F027BBE6D6}"/>
+                <a16:creationId xmlns="" xmlns:a16="http://schemas.microsoft.com/office/drawing/2014/main" id="{387116BB-1259-5A42-97B8-F5F027BBE6D6}"/>
               </a:ext>
             </a:extLst>
           </p:cNvPr>
@@ -15805,7 +15804,7 @@
           <p:cNvPr id="2" name="Título 1">
             <a:extLst>
               <a:ext uri="{FF2B5EF4-FFF2-40B4-BE49-F238E27FC236}">
-                <a16:creationId xmlns:a16="http://schemas.microsoft.com/office/drawing/2014/main" xmlns="" id="{7F5FF925-67DE-CC62-E869-C6E3C1D771E6}"/>
+                <a16:creationId xmlns="" xmlns:a16="http://schemas.microsoft.com/office/drawing/2014/main" id="{7F5FF925-67DE-CC62-E869-C6E3C1D771E6}"/>
               </a:ext>
             </a:extLst>
           </p:cNvPr>
@@ -15845,7 +15844,7 @@
           <p:cNvPr id="3" name="Espaço Reservado para Conteúdo 2">
             <a:extLst>
               <a:ext uri="{FF2B5EF4-FFF2-40B4-BE49-F238E27FC236}">
-                <a16:creationId xmlns:a16="http://schemas.microsoft.com/office/drawing/2014/main" xmlns="" id="{7DA84068-671A-9D40-4F76-2C57E4F720C2}"/>
+                <a16:creationId xmlns="" xmlns:a16="http://schemas.microsoft.com/office/drawing/2014/main" id="{7DA84068-671A-9D40-4F76-2C57E4F720C2}"/>
               </a:ext>
             </a:extLst>
           </p:cNvPr>
@@ -15908,7 +15907,7 @@
           <p:cNvPr id="2051" name="Picture 3" descr="Understanding the Pillars of Machine Learning: Supervised, Unsupervised,  and Reinforcement Learning">
             <a:extLst>
               <a:ext uri="{FF2B5EF4-FFF2-40B4-BE49-F238E27FC236}">
-                <a16:creationId xmlns:a16="http://schemas.microsoft.com/office/drawing/2014/main" xmlns="" id="{BDF6F402-9EED-6D9D-33D9-227B654D168D}"/>
+                <a16:creationId xmlns="" xmlns:a16="http://schemas.microsoft.com/office/drawing/2014/main" id="{BDF6F402-9EED-6D9D-33D9-227B654D168D}"/>
               </a:ext>
             </a:extLst>
           </p:cNvPr>
@@ -15985,7 +15984,7 @@
           <p:cNvPr id="2" name="Title 1">
             <a:extLst>
               <a:ext uri="{FF2B5EF4-FFF2-40B4-BE49-F238E27FC236}">
-                <a16:creationId xmlns:a16="http://schemas.microsoft.com/office/drawing/2014/main" xmlns="" id="{0FD9EB4A-BCBE-6A0F-12D6-6770FC41F962}"/>
+                <a16:creationId xmlns="" xmlns:a16="http://schemas.microsoft.com/office/drawing/2014/main" id="{0FD9EB4A-BCBE-6A0F-12D6-6770FC41F962}"/>
               </a:ext>
             </a:extLst>
           </p:cNvPr>
@@ -16016,7 +16015,7 @@
               <p:cNvPr id="3" name="Content Placeholder 2">
                 <a:extLst>
                   <a:ext uri="{FF2B5EF4-FFF2-40B4-BE49-F238E27FC236}">
-                    <a16:creationId xmlns:a16="http://schemas.microsoft.com/office/drawing/2014/main" xmlns="" id="{9B1F2B59-589E-C89D-B023-E847F3DC922F}"/>
+                    <a16:creationId xmlns="" xmlns:a16="http://schemas.microsoft.com/office/drawing/2014/main" id="{9B1F2B59-589E-C89D-B023-E847F3DC922F}"/>
                   </a:ext>
                 </a:extLst>
               </p:cNvPr>
@@ -16224,7 +16223,7 @@
           <p:cNvPr id="1028" name="Picture 4" descr="Cracking the Spell of Q* - A New Method in Problem Solving | Benny's Mind  Hack">
             <a:extLst>
               <a:ext uri="{FF2B5EF4-FFF2-40B4-BE49-F238E27FC236}">
-                <a16:creationId xmlns:a16="http://schemas.microsoft.com/office/drawing/2014/main" xmlns="" id="{2FAF9048-FD7A-0345-D833-A8A15BE69361}"/>
+                <a16:creationId xmlns="" xmlns:a16="http://schemas.microsoft.com/office/drawing/2014/main" id="{2FAF9048-FD7A-0345-D833-A8A15BE69361}"/>
               </a:ext>
             </a:extLst>
           </p:cNvPr>
@@ -16301,7 +16300,7 @@
           <p:cNvPr id="2" name="Title 1">
             <a:extLst>
               <a:ext uri="{FF2B5EF4-FFF2-40B4-BE49-F238E27FC236}">
-                <a16:creationId xmlns:a16="http://schemas.microsoft.com/office/drawing/2014/main" xmlns="" id="{48EDEA96-2DFF-1829-9984-096F6593BEEE}"/>
+                <a16:creationId xmlns="" xmlns:a16="http://schemas.microsoft.com/office/drawing/2014/main" id="{48EDEA96-2DFF-1829-9984-096F6593BEEE}"/>
               </a:ext>
             </a:extLst>
           </p:cNvPr>
@@ -16337,7 +16336,7 @@
           <p:cNvPr id="3" name="Content Placeholder 2">
             <a:extLst>
               <a:ext uri="{FF2B5EF4-FFF2-40B4-BE49-F238E27FC236}">
-                <a16:creationId xmlns:a16="http://schemas.microsoft.com/office/drawing/2014/main" xmlns="" id="{0160E88F-503C-2590-9D5D-B2BDD50D2767}"/>
+                <a16:creationId xmlns="" xmlns:a16="http://schemas.microsoft.com/office/drawing/2014/main" id="{0160E88F-503C-2590-9D5D-B2BDD50D2767}"/>
               </a:ext>
             </a:extLst>
           </p:cNvPr>
@@ -16428,7 +16427,7 @@
           <p:cNvPr id="6" name="Picture 5">
             <a:extLst>
               <a:ext uri="{FF2B5EF4-FFF2-40B4-BE49-F238E27FC236}">
-                <a16:creationId xmlns:a16="http://schemas.microsoft.com/office/drawing/2014/main" xmlns="" id="{265EF8FE-70EB-D556-D43F-F69593E54B8C}"/>
+                <a16:creationId xmlns="" xmlns:a16="http://schemas.microsoft.com/office/drawing/2014/main" id="{265EF8FE-70EB-D556-D43F-F69593E54B8C}"/>
               </a:ext>
             </a:extLst>
           </p:cNvPr>
@@ -16494,7 +16493,7 @@
           <p:cNvPr id="2" name="Título 1">
             <a:extLst>
               <a:ext uri="{FF2B5EF4-FFF2-40B4-BE49-F238E27FC236}">
-                <a16:creationId xmlns:a16="http://schemas.microsoft.com/office/drawing/2014/main" xmlns="" id="{94AB8438-E56E-2412-517C-8456E4CA773C}"/>
+                <a16:creationId xmlns="" xmlns:a16="http://schemas.microsoft.com/office/drawing/2014/main" id="{94AB8438-E56E-2412-517C-8456E4CA773C}"/>
               </a:ext>
             </a:extLst>
           </p:cNvPr>
@@ -16522,7 +16521,7 @@
           <p:cNvPr id="3" name="Espaço Reservado para Conteúdo 2">
             <a:extLst>
               <a:ext uri="{FF2B5EF4-FFF2-40B4-BE49-F238E27FC236}">
-                <a16:creationId xmlns:a16="http://schemas.microsoft.com/office/drawing/2014/main" xmlns="" id="{F7E2B09C-6D56-4C9F-A364-B904CCE2F1A0}"/>
+                <a16:creationId xmlns="" xmlns:a16="http://schemas.microsoft.com/office/drawing/2014/main" id="{F7E2B09C-6D56-4C9F-A364-B904CCE2F1A0}"/>
               </a:ext>
             </a:extLst>
           </p:cNvPr>
@@ -16565,7 +16564,7 @@
           <p:cNvPr id="18" name="Group 17">
             <a:extLst>
               <a:ext uri="{FF2B5EF4-FFF2-40B4-BE49-F238E27FC236}">
-                <a16:creationId xmlns:a16="http://schemas.microsoft.com/office/drawing/2014/main" xmlns="" id="{627C64FD-88E0-EC8E-2A34-0D5737B4C854}"/>
+                <a16:creationId xmlns="" xmlns:a16="http://schemas.microsoft.com/office/drawing/2014/main" id="{627C64FD-88E0-EC8E-2A34-0D5737B4C854}"/>
               </a:ext>
             </a:extLst>
           </p:cNvPr>
@@ -16585,7 +16584,7 @@
             <p:cNvPr id="12" name="Picture 4" descr="Project Jupyter | Try Jupyter">
               <a:extLst>
                 <a:ext uri="{FF2B5EF4-FFF2-40B4-BE49-F238E27FC236}">
-                  <a16:creationId xmlns:a16="http://schemas.microsoft.com/office/drawing/2014/main" xmlns="" id="{FF92EA36-91E7-292B-D7A0-2D4D83A10F98}"/>
+                  <a16:creationId xmlns="" xmlns:a16="http://schemas.microsoft.com/office/drawing/2014/main" id="{FF92EA36-91E7-292B-D7A0-2D4D83A10F98}"/>
                 </a:ext>
               </a:extLst>
             </p:cNvPr>
@@ -16632,7 +16631,7 @@
             <p:cNvPr id="13" name="Picture 8" descr="Google Colaboratory Colab - Guía Completa Español - Marketing Branding">
               <a:extLst>
                 <a:ext uri="{FF2B5EF4-FFF2-40B4-BE49-F238E27FC236}">
-                  <a16:creationId xmlns:a16="http://schemas.microsoft.com/office/drawing/2014/main" xmlns="" id="{46F1718A-89E6-9E63-E40B-2B19852D6AA0}"/>
+                  <a16:creationId xmlns="" xmlns:a16="http://schemas.microsoft.com/office/drawing/2014/main" id="{46F1718A-89E6-9E63-E40B-2B19852D6AA0}"/>
                 </a:ext>
               </a:extLst>
             </p:cNvPr>
@@ -16677,7 +16676,7 @@
             <p:cNvPr id="14" name="Picture 10" descr="IT12A01: FUNDAMENTALS OF PYTHON PROGRAMMING (SF) (SYNCHRONOUS E-LEARNING) -  NTUC LearningHub">
               <a:extLst>
                 <a:ext uri="{FF2B5EF4-FFF2-40B4-BE49-F238E27FC236}">
-                  <a16:creationId xmlns:a16="http://schemas.microsoft.com/office/drawing/2014/main" xmlns="" id="{33F6B1B4-9B79-D634-3E35-33F24609C848}"/>
+                  <a16:creationId xmlns="" xmlns:a16="http://schemas.microsoft.com/office/drawing/2014/main" id="{33F6B1B4-9B79-D634-3E35-33F24609C848}"/>
                 </a:ext>
               </a:extLst>
             </p:cNvPr>
@@ -16722,7 +16721,7 @@
             <p:cNvPr id="15" name="Sinal de Adição 7">
               <a:extLst>
                 <a:ext uri="{FF2B5EF4-FFF2-40B4-BE49-F238E27FC236}">
-                  <a16:creationId xmlns:a16="http://schemas.microsoft.com/office/drawing/2014/main" xmlns="" id="{6959EE6C-DCDB-E78B-5C50-EBD3FF3049E2}"/>
+                  <a16:creationId xmlns="" xmlns:a16="http://schemas.microsoft.com/office/drawing/2014/main" id="{6959EE6C-DCDB-E78B-5C50-EBD3FF3049E2}"/>
                 </a:ext>
               </a:extLst>
             </p:cNvPr>
@@ -16770,7 +16769,7 @@
             <p:cNvPr id="17" name="Sinal de Adição 10">
               <a:extLst>
                 <a:ext uri="{FF2B5EF4-FFF2-40B4-BE49-F238E27FC236}">
-                  <a16:creationId xmlns:a16="http://schemas.microsoft.com/office/drawing/2014/main" xmlns="" id="{30A21FDB-ABA6-9FD5-49EF-7762414AEF0C}"/>
+                  <a16:creationId xmlns="" xmlns:a16="http://schemas.microsoft.com/office/drawing/2014/main" id="{30A21FDB-ABA6-9FD5-49EF-7762414AEF0C}"/>
                 </a:ext>
               </a:extLst>
             </p:cNvPr>
@@ -16849,7 +16848,7 @@
           <p:cNvPr id="2" name="Title 1">
             <a:extLst>
               <a:ext uri="{FF2B5EF4-FFF2-40B4-BE49-F238E27FC236}">
-                <a16:creationId xmlns:a16="http://schemas.microsoft.com/office/drawing/2014/main" xmlns="" id="{E8FD0E11-3B37-4336-5BF0-C8C033354AF6}"/>
+                <a16:creationId xmlns="" xmlns:a16="http://schemas.microsoft.com/office/drawing/2014/main" id="{E8FD0E11-3B37-4336-5BF0-C8C033354AF6}"/>
               </a:ext>
             </a:extLst>
           </p:cNvPr>
@@ -16878,7 +16877,7 @@
           <p:cNvPr id="3" name="Content Placeholder 2">
             <a:extLst>
               <a:ext uri="{FF2B5EF4-FFF2-40B4-BE49-F238E27FC236}">
-                <a16:creationId xmlns:a16="http://schemas.microsoft.com/office/drawing/2014/main" xmlns="" id="{32CB14AB-72E4-05EB-962C-F8B4618D0574}"/>
+                <a16:creationId xmlns="" xmlns:a16="http://schemas.microsoft.com/office/drawing/2014/main" id="{32CB14AB-72E4-05EB-962C-F8B4618D0574}"/>
               </a:ext>
             </a:extLst>
           </p:cNvPr>
@@ -16948,7 +16947,7 @@
           <p:cNvPr id="4" name="Título 1">
             <a:extLst>
               <a:ext uri="{FF2B5EF4-FFF2-40B4-BE49-F238E27FC236}">
-                <a16:creationId xmlns:a16="http://schemas.microsoft.com/office/drawing/2014/main" xmlns="" id="{32666AC8-2E17-4DB4-B0F5-60C640CCFD2E}"/>
+                <a16:creationId xmlns="" xmlns:a16="http://schemas.microsoft.com/office/drawing/2014/main" id="{32666AC8-2E17-4DB4-B0F5-60C640CCFD2E}"/>
               </a:ext>
             </a:extLst>
           </p:cNvPr>
@@ -17034,7 +17033,7 @@
           <p:cNvPr id="4" name="Título 1">
             <a:extLst>
               <a:ext uri="{FF2B5EF4-FFF2-40B4-BE49-F238E27FC236}">
-                <a16:creationId xmlns:a16="http://schemas.microsoft.com/office/drawing/2014/main" xmlns="" id="{32666AC8-2E17-4DB4-B0F5-60C640CCFD2E}"/>
+                <a16:creationId xmlns="" xmlns:a16="http://schemas.microsoft.com/office/drawing/2014/main" id="{32666AC8-2E17-4DB4-B0F5-60C640CCFD2E}"/>
               </a:ext>
             </a:extLst>
           </p:cNvPr>
@@ -17106,7 +17105,7 @@
         <p:cNvPr id="1" name="">
           <a:extLst>
             <a:ext uri="{FF2B5EF4-FFF2-40B4-BE49-F238E27FC236}">
-              <a16:creationId xmlns:a16="http://schemas.microsoft.com/office/drawing/2014/main" xmlns="" id="{83DFB381-AAB9-2788-1601-EB1230F302AA}"/>
+              <a16:creationId xmlns="" xmlns:a16="http://schemas.microsoft.com/office/drawing/2014/main" id="{83DFB381-AAB9-2788-1601-EB1230F302AA}"/>
             </a:ext>
           </a:extLst>
         </p:cNvPr>
@@ -17126,7 +17125,7 @@
           <p:cNvPr id="4" name="Título 1">
             <a:extLst>
               <a:ext uri="{FF2B5EF4-FFF2-40B4-BE49-F238E27FC236}">
-                <a16:creationId xmlns:a16="http://schemas.microsoft.com/office/drawing/2014/main" xmlns="" id="{4AF40FF5-E3E4-99F0-8C87-687EB32C12F9}"/>
+                <a16:creationId xmlns="" xmlns:a16="http://schemas.microsoft.com/office/drawing/2014/main" id="{4AF40FF5-E3E4-99F0-8C87-687EB32C12F9}"/>
               </a:ext>
             </a:extLst>
           </p:cNvPr>
@@ -17212,7 +17211,7 @@
           <p:cNvPr id="59" name="Group 58">
             <a:extLst>
               <a:ext uri="{FF2B5EF4-FFF2-40B4-BE49-F238E27FC236}">
-                <a16:creationId xmlns:a16="http://schemas.microsoft.com/office/drawing/2014/main" xmlns="" id="{BB54A8AF-5D7A-DF48-6B51-A97D3BA5AE2B}"/>
+                <a16:creationId xmlns="" xmlns:a16="http://schemas.microsoft.com/office/drawing/2014/main" id="{BB54A8AF-5D7A-DF48-6B51-A97D3BA5AE2B}"/>
               </a:ext>
             </a:extLst>
           </p:cNvPr>
@@ -17232,7 +17231,7 @@
             <p:cNvPr id="26" name="Rectangle 25">
               <a:extLst>
                 <a:ext uri="{FF2B5EF4-FFF2-40B4-BE49-F238E27FC236}">
-                  <a16:creationId xmlns:a16="http://schemas.microsoft.com/office/drawing/2014/main" xmlns="" id="{A78F414E-0878-E9AC-3349-365D683589EF}"/>
+                  <a16:creationId xmlns="" xmlns:a16="http://schemas.microsoft.com/office/drawing/2014/main" id="{A78F414E-0878-E9AC-3349-365D683589EF}"/>
                 </a:ext>
               </a:extLst>
             </p:cNvPr>
@@ -17281,7 +17280,7 @@
             <p:cNvPr id="27" name="Rectangle 26">
               <a:extLst>
                 <a:ext uri="{FF2B5EF4-FFF2-40B4-BE49-F238E27FC236}">
-                  <a16:creationId xmlns:a16="http://schemas.microsoft.com/office/drawing/2014/main" xmlns="" id="{67A2140F-0BEB-DFFC-0173-0DDE81A0BAF4}"/>
+                  <a16:creationId xmlns="" xmlns:a16="http://schemas.microsoft.com/office/drawing/2014/main" id="{67A2140F-0BEB-DFFC-0173-0DDE81A0BAF4}"/>
                 </a:ext>
               </a:extLst>
             </p:cNvPr>
@@ -17330,7 +17329,7 @@
             <p:cNvPr id="33" name="Rectangle 32">
               <a:extLst>
                 <a:ext uri="{FF2B5EF4-FFF2-40B4-BE49-F238E27FC236}">
-                  <a16:creationId xmlns:a16="http://schemas.microsoft.com/office/drawing/2014/main" xmlns="" id="{C67CE66F-B1C9-97C2-5191-323C447A4039}"/>
+                  <a16:creationId xmlns="" xmlns:a16="http://schemas.microsoft.com/office/drawing/2014/main" id="{C67CE66F-B1C9-97C2-5191-323C447A4039}"/>
                 </a:ext>
               </a:extLst>
             </p:cNvPr>
@@ -17379,7 +17378,7 @@
             <p:cNvPr id="34" name="Rectangle 33">
               <a:extLst>
                 <a:ext uri="{FF2B5EF4-FFF2-40B4-BE49-F238E27FC236}">
-                  <a16:creationId xmlns:a16="http://schemas.microsoft.com/office/drawing/2014/main" xmlns="" id="{44116E33-D3F4-D7FB-DCEF-760C9C024249}"/>
+                  <a16:creationId xmlns="" xmlns:a16="http://schemas.microsoft.com/office/drawing/2014/main" id="{44116E33-D3F4-D7FB-DCEF-760C9C024249}"/>
                 </a:ext>
               </a:extLst>
             </p:cNvPr>
@@ -17428,7 +17427,7 @@
             <p:cNvPr id="12" name="Connector: Elbow 11">
               <a:extLst>
                 <a:ext uri="{FF2B5EF4-FFF2-40B4-BE49-F238E27FC236}">
-                  <a16:creationId xmlns:a16="http://schemas.microsoft.com/office/drawing/2014/main" xmlns="" id="{0375811A-BC31-5203-21BF-8C1AEDCA810A}"/>
+                  <a16:creationId xmlns="" xmlns:a16="http://schemas.microsoft.com/office/drawing/2014/main" id="{0375811A-BC31-5203-21BF-8C1AEDCA810A}"/>
                 </a:ext>
               </a:extLst>
             </p:cNvPr>
@@ -17473,7 +17472,7 @@
             <p:cNvPr id="17" name="Rectangle: Rounded Corners 16">
               <a:extLst>
                 <a:ext uri="{FF2B5EF4-FFF2-40B4-BE49-F238E27FC236}">
-                  <a16:creationId xmlns:a16="http://schemas.microsoft.com/office/drawing/2014/main" xmlns="" id="{D957717F-F346-A328-0454-3432762A09F8}"/>
+                  <a16:creationId xmlns="" xmlns:a16="http://schemas.microsoft.com/office/drawing/2014/main" id="{D957717F-F346-A328-0454-3432762A09F8}"/>
                 </a:ext>
               </a:extLst>
             </p:cNvPr>
@@ -17523,7 +17522,7 @@
             <p:cNvPr id="18" name="Rectangle: Rounded Corners 17">
               <a:extLst>
                 <a:ext uri="{FF2B5EF4-FFF2-40B4-BE49-F238E27FC236}">
-                  <a16:creationId xmlns:a16="http://schemas.microsoft.com/office/drawing/2014/main" xmlns="" id="{39EF6FE5-6FBC-BC13-63C8-D6E9E3E272C4}"/>
+                  <a16:creationId xmlns="" xmlns:a16="http://schemas.microsoft.com/office/drawing/2014/main" id="{39EF6FE5-6FBC-BC13-63C8-D6E9E3E272C4}"/>
                 </a:ext>
               </a:extLst>
             </p:cNvPr>
@@ -17575,7 +17574,7 @@
                 <p:cNvPr id="41" name="TextBox 40">
                   <a:extLst>
                     <a:ext uri="{FF2B5EF4-FFF2-40B4-BE49-F238E27FC236}">
-                      <a16:creationId xmlns:a16="http://schemas.microsoft.com/office/drawing/2014/main" xmlns="" id="{DEBC8956-45EC-9A9F-7CAD-7A468058ABF1}"/>
+                      <a16:creationId xmlns="" xmlns:a16="http://schemas.microsoft.com/office/drawing/2014/main" id="{DEBC8956-45EC-9A9F-7CAD-7A468058ABF1}"/>
                     </a:ext>
                   </a:extLst>
                 </p:cNvPr>
@@ -17688,7 +17687,7 @@
                 <p:cNvPr id="10" name="TextBox 9">
                   <a:extLst>
                     <a:ext uri="{FF2B5EF4-FFF2-40B4-BE49-F238E27FC236}">
-                      <a16:creationId xmlns:a16="http://schemas.microsoft.com/office/drawing/2014/main" xmlns="" id="{6B8DF4A4-00E2-9B10-CC12-B0D274CCB842}"/>
+                      <a16:creationId xmlns="" xmlns:a16="http://schemas.microsoft.com/office/drawing/2014/main" id="{6B8DF4A4-00E2-9B10-CC12-B0D274CCB842}"/>
                     </a:ext>
                   </a:extLst>
                 </p:cNvPr>
@@ -17809,7 +17808,7 @@
                 <p:cNvPr id="14" name="TextBox 13">
                   <a:extLst>
                     <a:ext uri="{FF2B5EF4-FFF2-40B4-BE49-F238E27FC236}">
-                      <a16:creationId xmlns:a16="http://schemas.microsoft.com/office/drawing/2014/main" xmlns="" id="{376B01EB-53C8-C2B2-1104-8A2BC1DE4624}"/>
+                      <a16:creationId xmlns="" xmlns:a16="http://schemas.microsoft.com/office/drawing/2014/main" id="{376B01EB-53C8-C2B2-1104-8A2BC1DE4624}"/>
                     </a:ext>
                   </a:extLst>
                 </p:cNvPr>
@@ -17928,7 +17927,7 @@
             <p:cNvPr id="20" name="Rectangle 19">
               <a:extLst>
                 <a:ext uri="{FF2B5EF4-FFF2-40B4-BE49-F238E27FC236}">
-                  <a16:creationId xmlns:a16="http://schemas.microsoft.com/office/drawing/2014/main" xmlns="" id="{8B0A48D5-77C9-C29A-8EF5-BED0E6E38CD2}"/>
+                  <a16:creationId xmlns="" xmlns:a16="http://schemas.microsoft.com/office/drawing/2014/main" id="{8B0A48D5-77C9-C29A-8EF5-BED0E6E38CD2}"/>
                 </a:ext>
               </a:extLst>
             </p:cNvPr>
@@ -17978,7 +17977,7 @@
             <p:cNvPr id="21" name="Rectangle 20">
               <a:extLst>
                 <a:ext uri="{FF2B5EF4-FFF2-40B4-BE49-F238E27FC236}">
-                  <a16:creationId xmlns:a16="http://schemas.microsoft.com/office/drawing/2014/main" xmlns="" id="{48728DA3-DA01-CAB9-540E-37EADA51BE57}"/>
+                  <a16:creationId xmlns="" xmlns:a16="http://schemas.microsoft.com/office/drawing/2014/main" id="{48728DA3-DA01-CAB9-540E-37EADA51BE57}"/>
                 </a:ext>
               </a:extLst>
             </p:cNvPr>
@@ -18028,7 +18027,7 @@
             <p:cNvPr id="25" name="Connector: Elbow 24">
               <a:extLst>
                 <a:ext uri="{FF2B5EF4-FFF2-40B4-BE49-F238E27FC236}">
-                  <a16:creationId xmlns:a16="http://schemas.microsoft.com/office/drawing/2014/main" xmlns="" id="{20E553C2-F044-7C77-F846-B80760291225}"/>
+                  <a16:creationId xmlns="" xmlns:a16="http://schemas.microsoft.com/office/drawing/2014/main" id="{20E553C2-F044-7C77-F846-B80760291225}"/>
                 </a:ext>
               </a:extLst>
             </p:cNvPr>
@@ -18070,7 +18069,7 @@
             <p:cNvPr id="31" name="Straight Arrow Connector 30">
               <a:extLst>
                 <a:ext uri="{FF2B5EF4-FFF2-40B4-BE49-F238E27FC236}">
-                  <a16:creationId xmlns:a16="http://schemas.microsoft.com/office/drawing/2014/main" xmlns="" id="{6AEFECE4-5D15-A8B3-453D-610BA5638D05}"/>
+                  <a16:creationId xmlns="" xmlns:a16="http://schemas.microsoft.com/office/drawing/2014/main" id="{6AEFECE4-5D15-A8B3-453D-610BA5638D05}"/>
                 </a:ext>
               </a:extLst>
             </p:cNvPr>
@@ -18112,7 +18111,7 @@
             <p:cNvPr id="35" name="Straight Arrow Connector 34">
               <a:extLst>
                 <a:ext uri="{FF2B5EF4-FFF2-40B4-BE49-F238E27FC236}">
-                  <a16:creationId xmlns:a16="http://schemas.microsoft.com/office/drawing/2014/main" xmlns="" id="{B6FFE6A0-55AE-62C1-3F6E-5291D436B5AB}"/>
+                  <a16:creationId xmlns="" xmlns:a16="http://schemas.microsoft.com/office/drawing/2014/main" id="{B6FFE6A0-55AE-62C1-3F6E-5291D436B5AB}"/>
                 </a:ext>
               </a:extLst>
             </p:cNvPr>
@@ -18155,7 +18154,7 @@
             <p:cNvPr id="40" name="Connector: Elbow 39">
               <a:extLst>
                 <a:ext uri="{FF2B5EF4-FFF2-40B4-BE49-F238E27FC236}">
-                  <a16:creationId xmlns:a16="http://schemas.microsoft.com/office/drawing/2014/main" xmlns="" id="{73307ED6-2342-7662-DD14-B12FEDB6983C}"/>
+                  <a16:creationId xmlns="" xmlns:a16="http://schemas.microsoft.com/office/drawing/2014/main" id="{73307ED6-2342-7662-DD14-B12FEDB6983C}"/>
                 </a:ext>
               </a:extLst>
             </p:cNvPr>
@@ -18199,7 +18198,7 @@
             <p:cNvPr id="44" name="Straight Connector 43">
               <a:extLst>
                 <a:ext uri="{FF2B5EF4-FFF2-40B4-BE49-F238E27FC236}">
-                  <a16:creationId xmlns:a16="http://schemas.microsoft.com/office/drawing/2014/main" xmlns="" id="{6B737731-0DAB-FB54-8D60-66210A48E60A}"/>
+                  <a16:creationId xmlns="" xmlns:a16="http://schemas.microsoft.com/office/drawing/2014/main" id="{6B737731-0DAB-FB54-8D60-66210A48E60A}"/>
                 </a:ext>
               </a:extLst>
             </p:cNvPr>
@@ -18239,7 +18238,7 @@
             <p:cNvPr id="46" name="Straight Connector 45">
               <a:extLst>
                 <a:ext uri="{FF2B5EF4-FFF2-40B4-BE49-F238E27FC236}">
-                  <a16:creationId xmlns:a16="http://schemas.microsoft.com/office/drawing/2014/main" xmlns="" id="{7AED5B7A-243B-6FAD-C904-A72171DA10E4}"/>
+                  <a16:creationId xmlns="" xmlns:a16="http://schemas.microsoft.com/office/drawing/2014/main" id="{7AED5B7A-243B-6FAD-C904-A72171DA10E4}"/>
                 </a:ext>
               </a:extLst>
             </p:cNvPr>
@@ -18281,7 +18280,7 @@
                 <p:cNvPr id="55" name="TextBox 54">
                   <a:extLst>
                     <a:ext uri="{FF2B5EF4-FFF2-40B4-BE49-F238E27FC236}">
-                      <a16:creationId xmlns:a16="http://schemas.microsoft.com/office/drawing/2014/main" xmlns="" id="{C98BB9BE-FF5B-BD53-700F-EF25882F8757}"/>
+                      <a16:creationId xmlns="" xmlns:a16="http://schemas.microsoft.com/office/drawing/2014/main" id="{C98BB9BE-FF5B-BD53-700F-EF25882F8757}"/>
                     </a:ext>
                   </a:extLst>
                 </p:cNvPr>
@@ -18394,7 +18393,7 @@
                 <p:cNvPr id="56" name="TextBox 55">
                   <a:extLst>
                     <a:ext uri="{FF2B5EF4-FFF2-40B4-BE49-F238E27FC236}">
-                      <a16:creationId xmlns:a16="http://schemas.microsoft.com/office/drawing/2014/main" xmlns="" id="{033C1F87-4FD6-565B-5CE1-B94FB9D5F703}"/>
+                      <a16:creationId xmlns="" xmlns:a16="http://schemas.microsoft.com/office/drawing/2014/main" id="{033C1F87-4FD6-565B-5CE1-B94FB9D5F703}"/>
                     </a:ext>
                   </a:extLst>
                 </p:cNvPr>
@@ -18505,7 +18504,7 @@
             <p:cNvPr id="58" name="Straight Connector 57">
               <a:extLst>
                 <a:ext uri="{FF2B5EF4-FFF2-40B4-BE49-F238E27FC236}">
-                  <a16:creationId xmlns:a16="http://schemas.microsoft.com/office/drawing/2014/main" xmlns="" id="{1A8E8F72-A082-BAC3-6C41-D1C1204F72D8}"/>
+                  <a16:creationId xmlns="" xmlns:a16="http://schemas.microsoft.com/office/drawing/2014/main" id="{1A8E8F72-A082-BAC3-6C41-D1C1204F72D8}"/>
                 </a:ext>
               </a:extLst>
             </p:cNvPr>
@@ -18563,7 +18562,7 @@
         <p:cNvPr id="1" name="">
           <a:extLst>
             <a:ext uri="{FF2B5EF4-FFF2-40B4-BE49-F238E27FC236}">
-              <a16:creationId xmlns:a16="http://schemas.microsoft.com/office/drawing/2014/main" xmlns="" id="{A370B64E-1F58-2FF0-BFB3-B1D955875AD5}"/>
+              <a16:creationId xmlns="" xmlns:a16="http://schemas.microsoft.com/office/drawing/2014/main" id="{A370B64E-1F58-2FF0-BFB3-B1D955875AD5}"/>
             </a:ext>
           </a:extLst>
         </p:cNvPr>
@@ -18583,7 +18582,7 @@
           <p:cNvPr id="2" name="Título 1">
             <a:extLst>
               <a:ext uri="{FF2B5EF4-FFF2-40B4-BE49-F238E27FC236}">
-                <a16:creationId xmlns:a16="http://schemas.microsoft.com/office/drawing/2014/main" xmlns="" id="{86CC3BAE-52FC-3697-DB30-5B05B346937E}"/>
+                <a16:creationId xmlns="" xmlns:a16="http://schemas.microsoft.com/office/drawing/2014/main" id="{86CC3BAE-52FC-3697-DB30-5B05B346937E}"/>
               </a:ext>
             </a:extLst>
           </p:cNvPr>
@@ -18612,7 +18611,7 @@
           <p:cNvPr id="3" name="Espaço Reservado para Conteúdo 2">
             <a:extLst>
               <a:ext uri="{FF2B5EF4-FFF2-40B4-BE49-F238E27FC236}">
-                <a16:creationId xmlns:a16="http://schemas.microsoft.com/office/drawing/2014/main" xmlns="" id="{0A06D34D-8885-14BC-AF7E-F271D7D63333}"/>
+                <a16:creationId xmlns="" xmlns:a16="http://schemas.microsoft.com/office/drawing/2014/main" id="{0A06D34D-8885-14BC-AF7E-F271D7D63333}"/>
               </a:ext>
             </a:extLst>
           </p:cNvPr>
@@ -18693,7 +18692,7 @@
           <p:cNvPr id="4" name="Imagem 16">
             <a:extLst>
               <a:ext uri="{FF2B5EF4-FFF2-40B4-BE49-F238E27FC236}">
-                <a16:creationId xmlns:a16="http://schemas.microsoft.com/office/drawing/2014/main" xmlns="" id="{7937C6EA-BFD8-5278-9EE0-796D1842173C}"/>
+                <a16:creationId xmlns="" xmlns:a16="http://schemas.microsoft.com/office/drawing/2014/main" id="{7937C6EA-BFD8-5278-9EE0-796D1842173C}"/>
               </a:ext>
             </a:extLst>
           </p:cNvPr>
@@ -18745,7 +18744,7 @@
         <p:cNvPr id="1" name="">
           <a:extLst>
             <a:ext uri="{FF2B5EF4-FFF2-40B4-BE49-F238E27FC236}">
-              <a16:creationId xmlns:a16="http://schemas.microsoft.com/office/drawing/2014/main" xmlns="" id="{D3753AED-FA4F-39DE-91A4-E5C845C0C665}"/>
+              <a16:creationId xmlns="" xmlns:a16="http://schemas.microsoft.com/office/drawing/2014/main" id="{D3753AED-FA4F-39DE-91A4-E5C845C0C665}"/>
             </a:ext>
           </a:extLst>
         </p:cNvPr>
@@ -18765,7 +18764,7 @@
           <p:cNvPr id="2" name="Título 1">
             <a:extLst>
               <a:ext uri="{FF2B5EF4-FFF2-40B4-BE49-F238E27FC236}">
-                <a16:creationId xmlns:a16="http://schemas.microsoft.com/office/drawing/2014/main" xmlns="" id="{6E88774E-D7D6-D9E6-4449-244D34EE979C}"/>
+                <a16:creationId xmlns="" xmlns:a16="http://schemas.microsoft.com/office/drawing/2014/main" id="{6E88774E-D7D6-D9E6-4449-244D34EE979C}"/>
               </a:ext>
             </a:extLst>
           </p:cNvPr>
@@ -18794,7 +18793,7 @@
           <p:cNvPr id="3" name="Espaço Reservado para Conteúdo 2">
             <a:extLst>
               <a:ext uri="{FF2B5EF4-FFF2-40B4-BE49-F238E27FC236}">
-                <a16:creationId xmlns:a16="http://schemas.microsoft.com/office/drawing/2014/main" xmlns="" id="{0E79548E-494A-A12A-30F7-F4E225B6C309}"/>
+                <a16:creationId xmlns="" xmlns:a16="http://schemas.microsoft.com/office/drawing/2014/main" id="{0E79548E-494A-A12A-30F7-F4E225B6C309}"/>
               </a:ext>
             </a:extLst>
           </p:cNvPr>
@@ -18869,7 +18868,7 @@
           <p:cNvPr id="6" name="Imagem 16">
             <a:extLst>
               <a:ext uri="{FF2B5EF4-FFF2-40B4-BE49-F238E27FC236}">
-                <a16:creationId xmlns:a16="http://schemas.microsoft.com/office/drawing/2014/main" xmlns="" id="{C8EB1D57-2EF7-64D2-25BE-6F8A0BE933DB}"/>
+                <a16:creationId xmlns="" xmlns:a16="http://schemas.microsoft.com/office/drawing/2014/main" id="{C8EB1D57-2EF7-64D2-25BE-6F8A0BE933DB}"/>
               </a:ext>
             </a:extLst>
           </p:cNvPr>
@@ -18921,7 +18920,7 @@
         <p:cNvPr id="1" name="">
           <a:extLst>
             <a:ext uri="{FF2B5EF4-FFF2-40B4-BE49-F238E27FC236}">
-              <a16:creationId xmlns:a16="http://schemas.microsoft.com/office/drawing/2014/main" xmlns="" id="{D41FFEFA-1EED-2754-CDBD-7CC34D06F8B2}"/>
+              <a16:creationId xmlns="" xmlns:a16="http://schemas.microsoft.com/office/drawing/2014/main" id="{D41FFEFA-1EED-2754-CDBD-7CC34D06F8B2}"/>
             </a:ext>
           </a:extLst>
         </p:cNvPr>
@@ -18941,7 +18940,7 @@
           <p:cNvPr id="2" name="Título 1">
             <a:extLst>
               <a:ext uri="{FF2B5EF4-FFF2-40B4-BE49-F238E27FC236}">
-                <a16:creationId xmlns:a16="http://schemas.microsoft.com/office/drawing/2014/main" xmlns="" id="{E4CDBB74-F243-3F53-FEC5-AF11CE256B39}"/>
+                <a16:creationId xmlns="" xmlns:a16="http://schemas.microsoft.com/office/drawing/2014/main" id="{E4CDBB74-F243-3F53-FEC5-AF11CE256B39}"/>
               </a:ext>
             </a:extLst>
           </p:cNvPr>
@@ -18970,7 +18969,7 @@
           <p:cNvPr id="3" name="Espaço Reservado para Conteúdo 2">
             <a:extLst>
               <a:ext uri="{FF2B5EF4-FFF2-40B4-BE49-F238E27FC236}">
-                <a16:creationId xmlns:a16="http://schemas.microsoft.com/office/drawing/2014/main" xmlns="" id="{8A609E9F-E2C8-D6E3-78D1-C44C117B55A3}"/>
+                <a16:creationId xmlns="" xmlns:a16="http://schemas.microsoft.com/office/drawing/2014/main" id="{8A609E9F-E2C8-D6E3-78D1-C44C117B55A3}"/>
               </a:ext>
             </a:extLst>
           </p:cNvPr>
@@ -19015,7 +19014,7 @@
           <p:cNvPr id="4" name="Imagem 16">
             <a:extLst>
               <a:ext uri="{FF2B5EF4-FFF2-40B4-BE49-F238E27FC236}">
-                <a16:creationId xmlns:a16="http://schemas.microsoft.com/office/drawing/2014/main" xmlns="" id="{DF71A34D-2B36-AF4A-818D-805CF072BD50}"/>
+                <a16:creationId xmlns="" xmlns:a16="http://schemas.microsoft.com/office/drawing/2014/main" id="{DF71A34D-2B36-AF4A-818D-805CF072BD50}"/>
               </a:ext>
             </a:extLst>
           </p:cNvPr>
@@ -19081,7 +19080,7 @@
           <p:cNvPr id="2" name="Title 1">
             <a:extLst>
               <a:ext uri="{FF2B5EF4-FFF2-40B4-BE49-F238E27FC236}">
-                <a16:creationId xmlns:a16="http://schemas.microsoft.com/office/drawing/2014/main" xmlns="" id="{81E045BB-096B-FD28-B7D5-E94A5FD7C8E5}"/>
+                <a16:creationId xmlns="" xmlns:a16="http://schemas.microsoft.com/office/drawing/2014/main" id="{81E045BB-096B-FD28-B7D5-E94A5FD7C8E5}"/>
               </a:ext>
             </a:extLst>
           </p:cNvPr>
@@ -19110,7 +19109,7 @@
           <p:cNvPr id="3" name="Content Placeholder 2">
             <a:extLst>
               <a:ext uri="{FF2B5EF4-FFF2-40B4-BE49-F238E27FC236}">
-                <a16:creationId xmlns:a16="http://schemas.microsoft.com/office/drawing/2014/main" xmlns="" id="{DC3C87D0-4294-EB29-295B-08AD144442B5}"/>
+                <a16:creationId xmlns="" xmlns:a16="http://schemas.microsoft.com/office/drawing/2014/main" id="{DC3C87D0-4294-EB29-295B-08AD144442B5}"/>
               </a:ext>
             </a:extLst>
           </p:cNvPr>
@@ -19178,7 +19177,7 @@
           <p:cNvPr id="4" name="Picture 4" descr="A Beginner's Guide to Reinforcement Learning and its Basic Implementation  from Scratch | by Tanvi Penumudy | Analytics Vidhya | Medium">
             <a:extLst>
               <a:ext uri="{FF2B5EF4-FFF2-40B4-BE49-F238E27FC236}">
-                <a16:creationId xmlns:a16="http://schemas.microsoft.com/office/drawing/2014/main" xmlns="" id="{A37B35F5-6EF1-B612-B863-263AB00420ED}"/>
+                <a16:creationId xmlns="" xmlns:a16="http://schemas.microsoft.com/office/drawing/2014/main" id="{A37B35F5-6EF1-B612-B863-263AB00420ED}"/>
               </a:ext>
             </a:extLst>
           </p:cNvPr>
@@ -19255,7 +19254,7 @@
           <p:cNvPr id="2" name="Title 1">
             <a:extLst>
               <a:ext uri="{FF2B5EF4-FFF2-40B4-BE49-F238E27FC236}">
-                <a16:creationId xmlns:a16="http://schemas.microsoft.com/office/drawing/2014/main" xmlns="" id="{CD479DA3-4A1A-74AE-26DA-FD6E65250CCE}"/>
+                <a16:creationId xmlns="" xmlns:a16="http://schemas.microsoft.com/office/drawing/2014/main" id="{CD479DA3-4A1A-74AE-26DA-FD6E65250CCE}"/>
               </a:ext>
             </a:extLst>
           </p:cNvPr>
@@ -19297,7 +19296,7 @@
               <p:cNvPr id="3" name="Content Placeholder 2">
                 <a:extLst>
                   <a:ext uri="{FF2B5EF4-FFF2-40B4-BE49-F238E27FC236}">
-                    <a16:creationId xmlns:a16="http://schemas.microsoft.com/office/drawing/2014/main" xmlns="" id="{D674119D-90D2-5043-F365-B3EB6F84791A}"/>
+                    <a16:creationId xmlns="" xmlns:a16="http://schemas.microsoft.com/office/drawing/2014/main" id="{D674119D-90D2-5043-F365-B3EB6F84791A}"/>
                   </a:ext>
                 </a:extLst>
               </p:cNvPr>
@@ -19527,7 +19526,7 @@
         <p:cNvPr id="1" name="">
           <a:extLst>
             <a:ext uri="{FF2B5EF4-FFF2-40B4-BE49-F238E27FC236}">
-              <a16:creationId xmlns:a16="http://schemas.microsoft.com/office/drawing/2014/main" xmlns="" id="{DDB2BBDA-DAF3-B7AC-FB99-7C5B9285F912}"/>
+              <a16:creationId xmlns="" xmlns:a16="http://schemas.microsoft.com/office/drawing/2014/main" id="{DDB2BBDA-DAF3-B7AC-FB99-7C5B9285F912}"/>
             </a:ext>
           </a:extLst>
         </p:cNvPr>
@@ -19547,7 +19546,7 @@
           <p:cNvPr id="2" name="Title 1">
             <a:extLst>
               <a:ext uri="{FF2B5EF4-FFF2-40B4-BE49-F238E27FC236}">
-                <a16:creationId xmlns:a16="http://schemas.microsoft.com/office/drawing/2014/main" xmlns="" id="{A98D36C9-8653-8E41-11D8-585B6AC0D03D}"/>
+                <a16:creationId xmlns="" xmlns:a16="http://schemas.microsoft.com/office/drawing/2014/main" id="{A98D36C9-8653-8E41-11D8-585B6AC0D03D}"/>
               </a:ext>
             </a:extLst>
           </p:cNvPr>
@@ -19589,7 +19588,7 @@
               <p:cNvPr id="3" name="Content Placeholder 2">
                 <a:extLst>
                   <a:ext uri="{FF2B5EF4-FFF2-40B4-BE49-F238E27FC236}">
-                    <a16:creationId xmlns:a16="http://schemas.microsoft.com/office/drawing/2014/main" xmlns="" id="{981046E0-93D4-BF9F-C552-72A01838A8A3}"/>
+                    <a16:creationId xmlns="" xmlns:a16="http://schemas.microsoft.com/office/drawing/2014/main" id="{981046E0-93D4-BF9F-C552-72A01838A8A3}"/>
                   </a:ext>
                 </a:extLst>
               </p:cNvPr>
@@ -19984,7 +19983,7 @@
           <p:cNvPr id="61" name="Picture 60">
             <a:extLst>
               <a:ext uri="{FF2B5EF4-FFF2-40B4-BE49-F238E27FC236}">
-                <a16:creationId xmlns:a16="http://schemas.microsoft.com/office/drawing/2014/main" xmlns="" id="{22F895FA-1424-E50C-97F4-4F0BE0413C2F}"/>
+                <a16:creationId xmlns="" xmlns:a16="http://schemas.microsoft.com/office/drawing/2014/main" id="{22F895FA-1424-E50C-97F4-4F0BE0413C2F}"/>
               </a:ext>
             </a:extLst>
           </p:cNvPr>

--- a/slides/C24_Q_learning.pptx
+++ b/slides/C24_Q_learning.pptx
@@ -5,10 +5,10 @@
     <p:sldMasterId id="2147483648" r:id="rId1"/>
   </p:sldMasterIdLst>
   <p:notesMasterIdLst>
-    <p:notesMasterId r:id="rId39"/>
+    <p:notesMasterId r:id="rId40"/>
   </p:notesMasterIdLst>
   <p:handoutMasterIdLst>
-    <p:handoutMasterId r:id="rId40"/>
+    <p:handoutMasterId r:id="rId41"/>
   </p:handoutMasterIdLst>
   <p:sldIdLst>
     <p:sldId id="256" r:id="rId2"/>
@@ -36,18 +36,19 @@
     <p:sldId id="316" r:id="rId24"/>
     <p:sldId id="340" r:id="rId25"/>
     <p:sldId id="350" r:id="rId26"/>
-    <p:sldId id="349" r:id="rId27"/>
-    <p:sldId id="345" r:id="rId28"/>
-    <p:sldId id="341" r:id="rId29"/>
-    <p:sldId id="342" r:id="rId30"/>
-    <p:sldId id="343" r:id="rId31"/>
-    <p:sldId id="344" r:id="rId32"/>
-    <p:sldId id="346" r:id="rId33"/>
-    <p:sldId id="347" r:id="rId34"/>
-    <p:sldId id="293" r:id="rId35"/>
-    <p:sldId id="306" r:id="rId36"/>
-    <p:sldId id="324" r:id="rId37"/>
-    <p:sldId id="323" r:id="rId38"/>
+    <p:sldId id="352" r:id="rId27"/>
+    <p:sldId id="349" r:id="rId28"/>
+    <p:sldId id="345" r:id="rId29"/>
+    <p:sldId id="341" r:id="rId30"/>
+    <p:sldId id="342" r:id="rId31"/>
+    <p:sldId id="343" r:id="rId32"/>
+    <p:sldId id="344" r:id="rId33"/>
+    <p:sldId id="346" r:id="rId34"/>
+    <p:sldId id="347" r:id="rId35"/>
+    <p:sldId id="293" r:id="rId36"/>
+    <p:sldId id="306" r:id="rId37"/>
+    <p:sldId id="324" r:id="rId38"/>
+    <p:sldId id="323" r:id="rId39"/>
   </p:sldIdLst>
   <p:sldSz cx="12192000" cy="6858000"/>
   <p:notesSz cx="7315200" cy="9601200"/>
@@ -311,7 +312,7 @@
           <a:p>
             <a:fld id="{144F1436-6906-4D93-B7A2-786C327BFA14}" type="datetimeFigureOut">
               <a:rPr lang="nl-BE" smtClean="0"/>
-              <a:t>26/04/2026</a:t>
+              <a:t>3/05/2026</a:t>
             </a:fld>
             <a:endParaRPr lang="nl-BE"/>
           </a:p>
@@ -476,7 +477,7 @@
           <a:p>
             <a:fld id="{AA8CD09E-2914-4F47-B6C1-51B2C31814C9}" type="datetimeFigureOut">
               <a:rPr lang="pt-BR" smtClean="0"/>
-              <a:t>26/04/2026</a:t>
+              <a:t>03/05/2026</a:t>
             </a:fld>
             <a:endParaRPr lang="pt-BR"/>
           </a:p>
@@ -832,6 +833,134 @@
   <p:cSld>
     <p:spTree>
       <p:nvGrpSpPr>
+        <p:cNvPr id="1" name="">
+          <a:extLst>
+            <a:ext uri="{FF2B5EF4-FFF2-40B4-BE49-F238E27FC236}">
+              <a16:creationId xmlns:a16="http://schemas.microsoft.com/office/drawing/2014/main" id="{0D0A5E72-3763-6194-5E85-BE26354035A3}"/>
+            </a:ext>
+          </a:extLst>
+        </p:cNvPr>
+        <p:cNvGrpSpPr/>
+        <p:nvPr/>
+      </p:nvGrpSpPr>
+      <p:grpSpPr>
+        <a:xfrm>
+          <a:off x="0" y="0"/>
+          <a:ext cx="0" cy="0"/>
+          <a:chOff x="0" y="0"/>
+          <a:chExt cx="0" cy="0"/>
+        </a:xfrm>
+      </p:grpSpPr>
+      <p:sp>
+        <p:nvSpPr>
+          <p:cNvPr id="2" name="Slide Image Placeholder 1">
+            <a:extLst>
+              <a:ext uri="{FF2B5EF4-FFF2-40B4-BE49-F238E27FC236}">
+                <a16:creationId xmlns:a16="http://schemas.microsoft.com/office/drawing/2014/main" id="{82466988-6655-8B01-840E-0BE3EDB68F07}"/>
+              </a:ext>
+            </a:extLst>
+          </p:cNvPr>
+          <p:cNvSpPr>
+            <a:spLocks noGrp="1" noRot="1" noChangeAspect="1"/>
+          </p:cNvSpPr>
+          <p:nvPr>
+            <p:ph type="sldImg"/>
+          </p:nvPr>
+        </p:nvSpPr>
+        <p:spPr/>
+      </p:sp>
+      <p:sp>
+        <p:nvSpPr>
+          <p:cNvPr id="3" name="Notes Placeholder 2">
+            <a:extLst>
+              <a:ext uri="{FF2B5EF4-FFF2-40B4-BE49-F238E27FC236}">
+                <a16:creationId xmlns:a16="http://schemas.microsoft.com/office/drawing/2014/main" id="{5E09F3D0-11CA-2E8D-04C5-104C59DCE708}"/>
+              </a:ext>
+            </a:extLst>
+          </p:cNvPr>
+          <p:cNvSpPr>
+            <a:spLocks noGrp="1"/>
+          </p:cNvSpPr>
+          <p:nvPr>
+            <p:ph type="body" idx="1"/>
+          </p:nvPr>
+        </p:nvSpPr>
+        <p:spPr/>
+        <p:txBody>
+          <a:bodyPr/>
+          <a:lstStyle/>
+          <a:p>
+            <a:r>
+              <a:rPr lang="pt-BR" dirty="0"/>
+              <a:t>O processo ocorre em etapas de tempo discretas (</a:t>
+            </a:r>
+            <a:r>
+              <a:rPr lang="pt-BR" sz="1200" kern="1200" dirty="0">
+                <a:solidFill>
+                  <a:schemeClr val="tx1"/>
+                </a:solidFill>
+                <a:effectLst/>
+                <a:latin typeface="+mn-lt"/>
+                <a:ea typeface="+mn-ea"/>
+                <a:cs typeface="+mn-cs"/>
+              </a:rPr>
+              <a:t>$t, t+1, t+2...$</a:t>
+            </a:r>
+            <a:r>
+              <a:rPr lang="pt-BR" dirty="0"/>
+              <a:t>).</a:t>
+            </a:r>
+            <a:endParaRPr lang="en-US" dirty="0"/>
+          </a:p>
+        </p:txBody>
+      </p:sp>
+      <p:sp>
+        <p:nvSpPr>
+          <p:cNvPr id="4" name="Slide Number Placeholder 3">
+            <a:extLst>
+              <a:ext uri="{FF2B5EF4-FFF2-40B4-BE49-F238E27FC236}">
+                <a16:creationId xmlns:a16="http://schemas.microsoft.com/office/drawing/2014/main" id="{68F0BCD7-F825-C67D-D845-8316B4C4B6D6}"/>
+              </a:ext>
+            </a:extLst>
+          </p:cNvPr>
+          <p:cNvSpPr>
+            <a:spLocks noGrp="1"/>
+          </p:cNvSpPr>
+          <p:nvPr>
+            <p:ph type="sldNum" sz="quarter" idx="5"/>
+          </p:nvPr>
+        </p:nvSpPr>
+        <p:spPr/>
+        <p:txBody>
+          <a:bodyPr/>
+          <a:lstStyle/>
+          <a:p>
+            <a:fld id="{6FC8D850-966F-45A6-8DE7-15B891E7D40D}" type="slidenum">
+              <a:rPr lang="pt-BR" smtClean="0"/>
+              <a:t>10</a:t>
+            </a:fld>
+            <a:endParaRPr lang="pt-BR"/>
+          </a:p>
+        </p:txBody>
+      </p:sp>
+    </p:spTree>
+    <p:extLst>
+      <p:ext uri="{BB962C8B-B14F-4D97-AF65-F5344CB8AC3E}">
+        <p14:creationId xmlns:p14="http://schemas.microsoft.com/office/powerpoint/2010/main" val="3778172451"/>
+      </p:ext>
+    </p:extLst>
+  </p:cSld>
+  <p:clrMapOvr>
+    <a:masterClrMapping/>
+  </p:clrMapOvr>
+</p:notes>
+</file>
+
+<file path=ppt/notesSlides/notesSlide11.xml><?xml version="1.0" encoding="utf-8"?>
+<p:notes xmlns:a="http://schemas.openxmlformats.org/drawingml/2006/main" xmlns:r="http://schemas.openxmlformats.org/officeDocument/2006/relationships" xmlns:p="http://schemas.openxmlformats.org/presentationml/2006/main">
+  <p:cSld>
+    <p:spTree>
+      <p:nvGrpSpPr>
         <p:cNvPr id="1" name=""/>
         <p:cNvGrpSpPr/>
         <p:nvPr/>
@@ -872,42 +1001,42 @@
           <a:lstStyle/>
           <a:p>
             <a:r>
-              <a:rPr lang="pt-BR" dirty="0"/>
-              <a:t>Um algoritmo </a:t>
-            </a:r>
-            <a:r>
-              <a:rPr lang="pt-BR" b="1" i="1" dirty="0"/>
-              <a:t>model-</a:t>
-            </a:r>
-            <a:r>
-              <a:rPr lang="pt-BR" b="1" i="1" dirty="0" err="1"/>
-              <a:t>based</a:t>
-            </a:r>
-            <a:r>
-              <a:rPr lang="pt-BR" dirty="0"/>
-              <a:t> é como alguém que estuda o mapa (regras do ambiente) de uma cidade antes de sair de casa. </a:t>
-            </a:r>
-          </a:p>
-          <a:p>
-            <a:r>
-              <a:rPr lang="pt-BR" dirty="0"/>
-              <a:t>O </a:t>
+              <a:rPr lang="pt-BR" b="1" dirty="0"/>
+              <a:t>• PPO (Proximal </a:t>
             </a:r>
             <a:r>
               <a:rPr lang="pt-BR" b="1" dirty="0" err="1"/>
-              <a:t>Q-</a:t>
-            </a:r>
-            <a:r>
-              <a:rPr lang="pt-BR" b="1" i="1" dirty="0" err="1"/>
-              <a:t>learning</a:t>
+              <a:t>Policy</a:t>
             </a:r>
             <a:r>
               <a:rPr lang="pt-BR" b="1" dirty="0"/>
               <a:t> </a:t>
             </a:r>
             <a:r>
+              <a:rPr lang="pt-BR" b="1" dirty="0" err="1"/>
+              <a:t>Optimization</a:t>
+            </a:r>
+            <a:r>
+              <a:rPr lang="pt-BR" b="1" dirty="0"/>
+              <a:t>)</a:t>
+            </a:r>
+          </a:p>
+          <a:p>
+            <a:r>
               <a:rPr lang="pt-BR" dirty="0"/>
-              <a:t>é a pessoa que sai andando sem mapa, errando até decorar o caminho.</a:t>
+              <a:t>Um dos mais usados hoje. </a:t>
+            </a:r>
+          </a:p>
+          <a:p>
+            <a:r>
+              <a:rPr lang="pt-BR" dirty="0"/>
+              <a:t>Estável e relativamente simples. </a:t>
+            </a:r>
+          </a:p>
+          <a:p>
+            <a:r>
+              <a:rPr lang="pt-BR" dirty="0"/>
+              <a:t>Muito popular em aplicações práticas.</a:t>
             </a:r>
           </a:p>
           <a:p>
@@ -932,6 +1061,130 @@
           <a:p>
             <a:fld id="{6FC8D850-966F-45A6-8DE7-15B891E7D40D}" type="slidenum">
               <a:rPr lang="pt-BR" smtClean="0"/>
+              <a:t>11</a:t>
+            </a:fld>
+            <a:endParaRPr lang="pt-BR"/>
+          </a:p>
+        </p:txBody>
+      </p:sp>
+    </p:spTree>
+    <p:extLst>
+      <p:ext uri="{BB962C8B-B14F-4D97-AF65-F5344CB8AC3E}">
+        <p14:creationId xmlns:p14="http://schemas.microsoft.com/office/powerpoint/2010/main" val="3660457592"/>
+      </p:ext>
+    </p:extLst>
+  </p:cSld>
+  <p:clrMapOvr>
+    <a:masterClrMapping/>
+  </p:clrMapOvr>
+</p:notes>
+</file>
+
+<file path=ppt/notesSlides/notesSlide12.xml><?xml version="1.0" encoding="utf-8"?>
+<p:notes xmlns:a="http://schemas.openxmlformats.org/drawingml/2006/main" xmlns:r="http://schemas.openxmlformats.org/officeDocument/2006/relationships" xmlns:p="http://schemas.openxmlformats.org/presentationml/2006/main">
+  <p:cSld>
+    <p:spTree>
+      <p:nvGrpSpPr>
+        <p:cNvPr id="1" name=""/>
+        <p:cNvGrpSpPr/>
+        <p:nvPr/>
+      </p:nvGrpSpPr>
+      <p:grpSpPr>
+        <a:xfrm>
+          <a:off x="0" y="0"/>
+          <a:ext cx="0" cy="0"/>
+          <a:chOff x="0" y="0"/>
+          <a:chExt cx="0" cy="0"/>
+        </a:xfrm>
+      </p:grpSpPr>
+      <p:sp>
+        <p:nvSpPr>
+          <p:cNvPr id="2" name="Slide Image Placeholder 1"/>
+          <p:cNvSpPr>
+            <a:spLocks noGrp="1" noRot="1" noChangeAspect="1"/>
+          </p:cNvSpPr>
+          <p:nvPr>
+            <p:ph type="sldImg"/>
+          </p:nvPr>
+        </p:nvSpPr>
+        <p:spPr/>
+      </p:sp>
+      <p:sp>
+        <p:nvSpPr>
+          <p:cNvPr id="3" name="Notes Placeholder 2"/>
+          <p:cNvSpPr>
+            <a:spLocks noGrp="1"/>
+          </p:cNvSpPr>
+          <p:nvPr>
+            <p:ph type="body" idx="1"/>
+          </p:nvPr>
+        </p:nvSpPr>
+        <p:spPr/>
+        <p:txBody>
+          <a:bodyPr/>
+          <a:lstStyle/>
+          <a:p>
+            <a:r>
+              <a:rPr lang="pt-BR" dirty="0"/>
+              <a:t>Um algoritmo </a:t>
+            </a:r>
+            <a:r>
+              <a:rPr lang="pt-BR" b="1" i="1" dirty="0"/>
+              <a:t>model-</a:t>
+            </a:r>
+            <a:r>
+              <a:rPr lang="pt-BR" b="1" i="1" dirty="0" err="1"/>
+              <a:t>based</a:t>
+            </a:r>
+            <a:r>
+              <a:rPr lang="pt-BR" dirty="0"/>
+              <a:t> é como alguém que estuda o mapa (regras do ambiente) de uma cidade antes de sair de casa. </a:t>
+            </a:r>
+          </a:p>
+          <a:p>
+            <a:r>
+              <a:rPr lang="pt-BR" dirty="0"/>
+              <a:t>O </a:t>
+            </a:r>
+            <a:r>
+              <a:rPr lang="pt-BR" b="1" dirty="0" err="1"/>
+              <a:t>Q-</a:t>
+            </a:r>
+            <a:r>
+              <a:rPr lang="pt-BR" b="1" i="1" dirty="0" err="1"/>
+              <a:t>learning</a:t>
+            </a:r>
+            <a:r>
+              <a:rPr lang="pt-BR" b="1" dirty="0"/>
+              <a:t> </a:t>
+            </a:r>
+            <a:r>
+              <a:rPr lang="pt-BR" dirty="0"/>
+              <a:t>é a pessoa que sai andando sem mapa, errando até decorar o caminho.</a:t>
+            </a:r>
+          </a:p>
+          <a:p>
+            <a:endParaRPr lang="en-US" dirty="0"/>
+          </a:p>
+        </p:txBody>
+      </p:sp>
+      <p:sp>
+        <p:nvSpPr>
+          <p:cNvPr id="4" name="Slide Number Placeholder 3"/>
+          <p:cNvSpPr>
+            <a:spLocks noGrp="1"/>
+          </p:cNvSpPr>
+          <p:nvPr>
+            <p:ph type="sldNum" sz="quarter" idx="5"/>
+          </p:nvPr>
+        </p:nvSpPr>
+        <p:spPr/>
+        <p:txBody>
+          <a:bodyPr/>
+          <a:lstStyle/>
+          <a:p>
+            <a:fld id="{6FC8D850-966F-45A6-8DE7-15B891E7D40D}" type="slidenum">
+              <a:rPr lang="pt-BR" smtClean="0"/>
               <a:t>12</a:t>
             </a:fld>
             <a:endParaRPr lang="pt-BR"/>
@@ -951,7 +1204,7 @@
 </p:notes>
 </file>
 
-<file path=ppt/notesSlides/notesSlide11.xml><?xml version="1.0" encoding="utf-8"?>
+<file path=ppt/notesSlides/notesSlide13.xml><?xml version="1.0" encoding="utf-8"?>
 <p:notes xmlns:a="http://schemas.openxmlformats.org/drawingml/2006/main" xmlns:r="http://schemas.openxmlformats.org/officeDocument/2006/relationships" xmlns:p="http://schemas.openxmlformats.org/presentationml/2006/main">
   <p:cSld>
     <p:spTree>
@@ -959,7 +1212,7 @@
         <p:cNvPr id="1" name="">
           <a:extLst>
             <a:ext uri="{FF2B5EF4-FFF2-40B4-BE49-F238E27FC236}">
-              <a16:creationId xmlns="" xmlns:a16="http://schemas.microsoft.com/office/drawing/2014/main" id="{255DD39D-8438-4F45-71B4-9F8747421DFC}"/>
+              <a16:creationId xmlns:a16="http://schemas.microsoft.com/office/drawing/2014/main" id="{255DD39D-8438-4F45-71B4-9F8747421DFC}"/>
             </a:ext>
           </a:extLst>
         </p:cNvPr>
@@ -979,7 +1232,7 @@
           <p:cNvPr id="2" name="Slide Image Placeholder 1">
             <a:extLst>
               <a:ext uri="{FF2B5EF4-FFF2-40B4-BE49-F238E27FC236}">
-                <a16:creationId xmlns="" xmlns:a16="http://schemas.microsoft.com/office/drawing/2014/main" id="{6C322D5B-AD1C-1DB1-53A1-6978329C3FD0}"/>
+                <a16:creationId xmlns:a16="http://schemas.microsoft.com/office/drawing/2014/main" id="{6C322D5B-AD1C-1DB1-53A1-6978329C3FD0}"/>
               </a:ext>
             </a:extLst>
           </p:cNvPr>
@@ -997,7 +1250,7 @@
           <p:cNvPr id="3" name="Notes Placeholder 2">
             <a:extLst>
               <a:ext uri="{FF2B5EF4-FFF2-40B4-BE49-F238E27FC236}">
-                <a16:creationId xmlns="" xmlns:a16="http://schemas.microsoft.com/office/drawing/2014/main" id="{F5D7455F-337E-5D6B-A02A-380397063D2D}"/>
+                <a16:creationId xmlns:a16="http://schemas.microsoft.com/office/drawing/2014/main" id="{F5D7455F-337E-5D6B-A02A-380397063D2D}"/>
               </a:ext>
             </a:extLst>
           </p:cNvPr>
@@ -1025,7 +1278,7 @@
           <p:cNvPr id="4" name="Slide Number Placeholder 3">
             <a:extLst>
               <a:ext uri="{FF2B5EF4-FFF2-40B4-BE49-F238E27FC236}">
-                <a16:creationId xmlns="" xmlns:a16="http://schemas.microsoft.com/office/drawing/2014/main" id="{B5124413-04E6-A99E-E6BA-F56674216BC5}"/>
+                <a16:creationId xmlns:a16="http://schemas.microsoft.com/office/drawing/2014/main" id="{B5124413-04E6-A99E-E6BA-F56674216BC5}"/>
               </a:ext>
             </a:extLst>
           </p:cNvPr>
@@ -1062,7 +1315,7 @@
 </p:notes>
 </file>
 
-<file path=ppt/notesSlides/notesSlide12.xml><?xml version="1.0" encoding="utf-8"?>
+<file path=ppt/notesSlides/notesSlide14.xml><?xml version="1.0" encoding="utf-8"?>
 <p:notes xmlns:a="http://schemas.openxmlformats.org/drawingml/2006/main" xmlns:r="http://schemas.openxmlformats.org/officeDocument/2006/relationships" xmlns:p="http://schemas.openxmlformats.org/presentationml/2006/main">
   <p:cSld>
     <p:spTree>
@@ -1070,7 +1323,7 @@
         <p:cNvPr id="1" name="">
           <a:extLst>
             <a:ext uri="{FF2B5EF4-FFF2-40B4-BE49-F238E27FC236}">
-              <a16:creationId xmlns="" xmlns:a16="http://schemas.microsoft.com/office/drawing/2014/main" id="{83CD62A6-7D00-3C53-05CF-A6197A8362EA}"/>
+              <a16:creationId xmlns:a16="http://schemas.microsoft.com/office/drawing/2014/main" id="{83CD62A6-7D00-3C53-05CF-A6197A8362EA}"/>
             </a:ext>
           </a:extLst>
         </p:cNvPr>
@@ -1090,7 +1343,7 @@
           <p:cNvPr id="2" name="Slide Image Placeholder 1">
             <a:extLst>
               <a:ext uri="{FF2B5EF4-FFF2-40B4-BE49-F238E27FC236}">
-                <a16:creationId xmlns="" xmlns:a16="http://schemas.microsoft.com/office/drawing/2014/main" id="{6DFDE321-184D-9B7D-CEA2-205606B85A43}"/>
+                <a16:creationId xmlns:a16="http://schemas.microsoft.com/office/drawing/2014/main" id="{6DFDE321-184D-9B7D-CEA2-205606B85A43}"/>
               </a:ext>
             </a:extLst>
           </p:cNvPr>
@@ -1108,7 +1361,7 @@
           <p:cNvPr id="3" name="Notes Placeholder 2">
             <a:extLst>
               <a:ext uri="{FF2B5EF4-FFF2-40B4-BE49-F238E27FC236}">
-                <a16:creationId xmlns="" xmlns:a16="http://schemas.microsoft.com/office/drawing/2014/main" id="{6DA764DC-3F53-958D-91A3-DB06BD4A39DA}"/>
+                <a16:creationId xmlns:a16="http://schemas.microsoft.com/office/drawing/2014/main" id="{6DA764DC-3F53-958D-91A3-DB06BD4A39DA}"/>
               </a:ext>
             </a:extLst>
           </p:cNvPr>
@@ -1136,7 +1389,7 @@
           <p:cNvPr id="4" name="Slide Number Placeholder 3">
             <a:extLst>
               <a:ext uri="{FF2B5EF4-FFF2-40B4-BE49-F238E27FC236}">
-                <a16:creationId xmlns="" xmlns:a16="http://schemas.microsoft.com/office/drawing/2014/main" id="{6BC07E3E-C02F-977B-3C72-FEF303694F11}"/>
+                <a16:creationId xmlns:a16="http://schemas.microsoft.com/office/drawing/2014/main" id="{6BC07E3E-C02F-977B-3C72-FEF303694F11}"/>
               </a:ext>
             </a:extLst>
           </p:cNvPr>
@@ -1173,7 +1426,7 @@
 </p:notes>
 </file>
 
-<file path=ppt/notesSlides/notesSlide13.xml><?xml version="1.0" encoding="utf-8"?>
+<file path=ppt/notesSlides/notesSlide15.xml><?xml version="1.0" encoding="utf-8"?>
 <p:notes xmlns:a="http://schemas.openxmlformats.org/drawingml/2006/main" xmlns:r="http://schemas.openxmlformats.org/officeDocument/2006/relationships" xmlns:p="http://schemas.openxmlformats.org/presentationml/2006/main">
   <p:cSld>
     <p:spTree>
@@ -1315,192 +1568,6 @@
     <p:extLst>
       <p:ext uri="{BB962C8B-B14F-4D97-AF65-F5344CB8AC3E}">
         <p14:creationId xmlns:p14="http://schemas.microsoft.com/office/powerpoint/2010/main" val="2918120953"/>
-      </p:ext>
-    </p:extLst>
-  </p:cSld>
-  <p:clrMapOvr>
-    <a:masterClrMapping/>
-  </p:clrMapOvr>
-</p:notes>
-</file>
-
-<file path=ppt/notesSlides/notesSlide14.xml><?xml version="1.0" encoding="utf-8"?>
-<p:notes xmlns:a="http://schemas.openxmlformats.org/drawingml/2006/main" xmlns:r="http://schemas.openxmlformats.org/officeDocument/2006/relationships" xmlns:p="http://schemas.openxmlformats.org/presentationml/2006/main">
-  <p:cSld>
-    <p:spTree>
-      <p:nvGrpSpPr>
-        <p:cNvPr id="1" name=""/>
-        <p:cNvGrpSpPr/>
-        <p:nvPr/>
-      </p:nvGrpSpPr>
-      <p:grpSpPr>
-        <a:xfrm>
-          <a:off x="0" y="0"/>
-          <a:ext cx="0" cy="0"/>
-          <a:chOff x="0" y="0"/>
-          <a:chExt cx="0" cy="0"/>
-        </a:xfrm>
-      </p:grpSpPr>
-      <p:sp>
-        <p:nvSpPr>
-          <p:cNvPr id="2" name="Slide Image Placeholder 1"/>
-          <p:cNvSpPr>
-            <a:spLocks noGrp="1" noRot="1" noChangeAspect="1"/>
-          </p:cNvSpPr>
-          <p:nvPr>
-            <p:ph type="sldImg"/>
-          </p:nvPr>
-        </p:nvSpPr>
-        <p:spPr/>
-      </p:sp>
-      <p:sp>
-        <p:nvSpPr>
-          <p:cNvPr id="3" name="Notes Placeholder 2"/>
-          <p:cNvSpPr>
-            <a:spLocks noGrp="1"/>
-          </p:cNvSpPr>
-          <p:nvPr>
-            <p:ph type="body" idx="1"/>
-          </p:nvPr>
-        </p:nvSpPr>
-        <p:spPr/>
-        <p:txBody>
-          <a:bodyPr/>
-          <a:lstStyle/>
-          <a:p>
-            <a:r>
-              <a:rPr lang="pt-BR" dirty="0"/>
-              <a:t>Uma pessoa de frente para dois restaurantes: um que ela sempre vai e ama (Explotação) e um restaurante novo recém-inaugurado (Exploração).</a:t>
-            </a:r>
-          </a:p>
-          <a:p>
-            <a:endParaRPr lang="pt-BR" dirty="0"/>
-          </a:p>
-          <a:p>
-            <a:endParaRPr lang="en-US" dirty="0"/>
-          </a:p>
-        </p:txBody>
-      </p:sp>
-      <p:sp>
-        <p:nvSpPr>
-          <p:cNvPr id="4" name="Slide Number Placeholder 3"/>
-          <p:cNvSpPr>
-            <a:spLocks noGrp="1"/>
-          </p:cNvSpPr>
-          <p:nvPr>
-            <p:ph type="sldNum" sz="quarter" idx="5"/>
-          </p:nvPr>
-        </p:nvSpPr>
-        <p:spPr/>
-        <p:txBody>
-          <a:bodyPr/>
-          <a:lstStyle/>
-          <a:p>
-            <a:fld id="{6FC8D850-966F-45A6-8DE7-15B891E7D40D}" type="slidenum">
-              <a:rPr lang="pt-BR" smtClean="0"/>
-              <a:t>18</a:t>
-            </a:fld>
-            <a:endParaRPr lang="pt-BR"/>
-          </a:p>
-        </p:txBody>
-      </p:sp>
-    </p:spTree>
-    <p:extLst>
-      <p:ext uri="{BB962C8B-B14F-4D97-AF65-F5344CB8AC3E}">
-        <p14:creationId xmlns:p14="http://schemas.microsoft.com/office/powerpoint/2010/main" val="3820503987"/>
-      </p:ext>
-    </p:extLst>
-  </p:cSld>
-  <p:clrMapOvr>
-    <a:masterClrMapping/>
-  </p:clrMapOvr>
-</p:notes>
-</file>
-
-<file path=ppt/notesSlides/notesSlide15.xml><?xml version="1.0" encoding="utf-8"?>
-<p:notes xmlns:a="http://schemas.openxmlformats.org/drawingml/2006/main" xmlns:r="http://schemas.openxmlformats.org/officeDocument/2006/relationships" xmlns:p="http://schemas.openxmlformats.org/presentationml/2006/main">
-  <p:cSld>
-    <p:spTree>
-      <p:nvGrpSpPr>
-        <p:cNvPr id="1" name=""/>
-        <p:cNvGrpSpPr/>
-        <p:nvPr/>
-      </p:nvGrpSpPr>
-      <p:grpSpPr>
-        <a:xfrm>
-          <a:off x="0" y="0"/>
-          <a:ext cx="0" cy="0"/>
-          <a:chOff x="0" y="0"/>
-          <a:chExt cx="0" cy="0"/>
-        </a:xfrm>
-      </p:grpSpPr>
-      <p:sp>
-        <p:nvSpPr>
-          <p:cNvPr id="2" name="Slide Image Placeholder 1"/>
-          <p:cNvSpPr>
-            <a:spLocks noGrp="1" noRot="1" noChangeAspect="1"/>
-          </p:cNvSpPr>
-          <p:nvPr>
-            <p:ph type="sldImg"/>
-          </p:nvPr>
-        </p:nvSpPr>
-        <p:spPr/>
-      </p:sp>
-      <p:sp>
-        <p:nvSpPr>
-          <p:cNvPr id="3" name="Notes Placeholder 2"/>
-          <p:cNvSpPr>
-            <a:spLocks noGrp="1"/>
-          </p:cNvSpPr>
-          <p:nvPr>
-            <p:ph type="body" idx="1"/>
-          </p:nvPr>
-        </p:nvSpPr>
-        <p:spPr/>
-        <p:txBody>
-          <a:bodyPr/>
-          <a:lstStyle/>
-          <a:p>
-            <a:r>
-              <a:rPr lang="pt-BR" dirty="0"/>
-              <a:t>Uma pessoa de frente para dois restaurantes: um que ela sempre vai e ama (Explotação) e um restaurante novo recém-inaugurado (Exploração).</a:t>
-            </a:r>
-          </a:p>
-          <a:p>
-            <a:endParaRPr lang="pt-BR" dirty="0"/>
-          </a:p>
-          <a:p>
-            <a:endParaRPr lang="en-US" dirty="0"/>
-          </a:p>
-        </p:txBody>
-      </p:sp>
-      <p:sp>
-        <p:nvSpPr>
-          <p:cNvPr id="4" name="Slide Number Placeholder 3"/>
-          <p:cNvSpPr>
-            <a:spLocks noGrp="1"/>
-          </p:cNvSpPr>
-          <p:nvPr>
-            <p:ph type="sldNum" sz="quarter" idx="5"/>
-          </p:nvPr>
-        </p:nvSpPr>
-        <p:spPr/>
-        <p:txBody>
-          <a:bodyPr/>
-          <a:lstStyle/>
-          <a:p>
-            <a:fld id="{6FC8D850-966F-45A6-8DE7-15B891E7D40D}" type="slidenum">
-              <a:rPr lang="pt-BR" smtClean="0"/>
-              <a:t>19</a:t>
-            </a:fld>
-            <a:endParaRPr lang="pt-BR"/>
-          </a:p>
-        </p:txBody>
-      </p:sp>
-    </p:spTree>
-    <p:extLst>
-      <p:ext uri="{BB962C8B-B14F-4D97-AF65-F5344CB8AC3E}">
-        <p14:creationId xmlns:p14="http://schemas.microsoft.com/office/powerpoint/2010/main" val="2219677365"/>
       </p:ext>
     </p:extLst>
   </p:cSld>
@@ -1554,15 +1621,50 @@
           <a:bodyPr/>
           <a:lstStyle/>
           <a:p>
-            <a:endParaRPr lang="pt-BR" sz="1200" kern="1200" dirty="0">
-              <a:solidFill>
-                <a:schemeClr val="tx1"/>
-              </a:solidFill>
-              <a:effectLst/>
-              <a:latin typeface="+mn-lt"/>
-              <a:ea typeface="+mn-ea"/>
-              <a:cs typeface="+mn-cs"/>
-            </a:endParaRPr>
+            <a:r>
+              <a:rPr lang="pt-BR" dirty="0"/>
+              <a:t>Uma pessoa de frente para dois restaurantes: um que ela sempre vai e ama (Explotação) e um restaurante novo recém-inaugurado (Exploração).</a:t>
+            </a:r>
+          </a:p>
+          <a:p>
+            <a:endParaRPr lang="pt-BR" dirty="0"/>
+          </a:p>
+          <a:p>
+            <a:r>
+              <a:rPr lang="pt-BR" sz="1200" b="0" i="0" kern="1200" dirty="0">
+                <a:solidFill>
+                  <a:schemeClr val="tx1"/>
+                </a:solidFill>
+                <a:effectLst/>
+                <a:latin typeface="+mn-lt"/>
+                <a:ea typeface="+mn-ea"/>
+                <a:cs typeface="+mn-cs"/>
+              </a:rPr>
+              <a:t>Quero a recompensa imediata? (explorar o que já sei que é bom)</a:t>
+            </a:r>
+          </a:p>
+          <a:p>
+            <a:r>
+              <a:rPr lang="pt-BR" sz="1200" b="0" i="0" kern="1200" dirty="0">
+                <a:solidFill>
+                  <a:schemeClr val="tx1"/>
+                </a:solidFill>
+                <a:effectLst/>
+                <a:latin typeface="+mn-lt"/>
+                <a:ea typeface="+mn-ea"/>
+                <a:cs typeface="+mn-cs"/>
+              </a:rPr>
+              <a:t>Quero descobrir algo potencialmente melhor? (explorar o desconhecido)</a:t>
+            </a:r>
+          </a:p>
+          <a:p>
+            <a:endParaRPr lang="pt-BR" dirty="0"/>
+          </a:p>
+          <a:p>
+            <a:endParaRPr lang="pt-BR" dirty="0"/>
+          </a:p>
+          <a:p>
+            <a:endParaRPr lang="en-US" dirty="0"/>
           </a:p>
         </p:txBody>
       </p:sp>
@@ -1583,7 +1685,7 @@
           <a:p>
             <a:fld id="{6FC8D850-966F-45A6-8DE7-15B891E7D40D}" type="slidenum">
               <a:rPr lang="pt-BR" smtClean="0"/>
-              <a:t>21</a:t>
+              <a:t>18</a:t>
             </a:fld>
             <a:endParaRPr lang="pt-BR"/>
           </a:p>
@@ -1592,7 +1694,7 @@
     </p:spTree>
     <p:extLst>
       <p:ext uri="{BB962C8B-B14F-4D97-AF65-F5344CB8AC3E}">
-        <p14:creationId xmlns:p14="http://schemas.microsoft.com/office/powerpoint/2010/main" val="596767558"/>
+        <p14:creationId xmlns:p14="http://schemas.microsoft.com/office/powerpoint/2010/main" val="3820503987"/>
       </p:ext>
     </p:extLst>
   </p:cSld>
@@ -1646,15 +1748,16 @@
           <a:bodyPr/>
           <a:lstStyle/>
           <a:p>
-            <a:endParaRPr lang="pt-BR" sz="1200" kern="1200" dirty="0">
-              <a:solidFill>
-                <a:schemeClr val="tx1"/>
-              </a:solidFill>
-              <a:effectLst/>
-              <a:latin typeface="+mn-lt"/>
-              <a:ea typeface="+mn-ea"/>
-              <a:cs typeface="+mn-cs"/>
-            </a:endParaRPr>
+            <a:r>
+              <a:rPr lang="pt-BR" dirty="0"/>
+              <a:t>Uma pessoa de frente para dois restaurantes: um que ela sempre vai e ama (Explotação) e um restaurante novo recém-inaugurado (Exploração).</a:t>
+            </a:r>
+          </a:p>
+          <a:p>
+            <a:endParaRPr lang="pt-BR" dirty="0"/>
+          </a:p>
+          <a:p>
+            <a:endParaRPr lang="en-US" dirty="0"/>
           </a:p>
         </p:txBody>
       </p:sp>
@@ -1675,6 +1778,367 @@
           <a:p>
             <a:fld id="{6FC8D850-966F-45A6-8DE7-15B891E7D40D}" type="slidenum">
               <a:rPr lang="pt-BR" smtClean="0"/>
+              <a:t>19</a:t>
+            </a:fld>
+            <a:endParaRPr lang="pt-BR"/>
+          </a:p>
+        </p:txBody>
+      </p:sp>
+    </p:spTree>
+    <p:extLst>
+      <p:ext uri="{BB962C8B-B14F-4D97-AF65-F5344CB8AC3E}">
+        <p14:creationId xmlns:p14="http://schemas.microsoft.com/office/powerpoint/2010/main" val="2219677365"/>
+      </p:ext>
+    </p:extLst>
+  </p:cSld>
+  <p:clrMapOvr>
+    <a:masterClrMapping/>
+  </p:clrMapOvr>
+</p:notes>
+</file>
+
+<file path=ppt/notesSlides/notesSlide18.xml><?xml version="1.0" encoding="utf-8"?>
+<p:notes xmlns:a="http://schemas.openxmlformats.org/drawingml/2006/main" xmlns:r="http://schemas.openxmlformats.org/officeDocument/2006/relationships" xmlns:p="http://schemas.openxmlformats.org/presentationml/2006/main">
+  <p:cSld>
+    <p:spTree>
+      <p:nvGrpSpPr>
+        <p:cNvPr id="1" name=""/>
+        <p:cNvGrpSpPr/>
+        <p:nvPr/>
+      </p:nvGrpSpPr>
+      <p:grpSpPr>
+        <a:xfrm>
+          <a:off x="0" y="0"/>
+          <a:ext cx="0" cy="0"/>
+          <a:chOff x="0" y="0"/>
+          <a:chExt cx="0" cy="0"/>
+        </a:xfrm>
+      </p:grpSpPr>
+      <p:sp>
+        <p:nvSpPr>
+          <p:cNvPr id="2" name="Slide Image Placeholder 1"/>
+          <p:cNvSpPr>
+            <a:spLocks noGrp="1" noRot="1" noChangeAspect="1"/>
+          </p:cNvSpPr>
+          <p:nvPr>
+            <p:ph type="sldImg"/>
+          </p:nvPr>
+        </p:nvSpPr>
+        <p:spPr/>
+      </p:sp>
+      <p:sp>
+        <p:nvSpPr>
+          <p:cNvPr id="3" name="Notes Placeholder 2"/>
+          <p:cNvSpPr>
+            <a:spLocks noGrp="1"/>
+          </p:cNvSpPr>
+          <p:nvPr>
+            <p:ph type="body" idx="1"/>
+          </p:nvPr>
+        </p:nvSpPr>
+        <p:spPr/>
+        <p:txBody>
+          <a:bodyPr/>
+          <a:lstStyle/>
+          <a:p>
+            <a:r>
+              <a:rPr lang="pt-BR" sz="1200" b="0" i="0" kern="1200" dirty="0">
+                <a:solidFill>
+                  <a:schemeClr val="tx1"/>
+                </a:solidFill>
+                <a:effectLst/>
+                <a:latin typeface="+mn-lt"/>
+                <a:ea typeface="+mn-ea"/>
+                <a:cs typeface="+mn-cs"/>
+              </a:rPr>
+              <a:t>não há uma regra teórica rígida, mas a </a:t>
+            </a:r>
+            <a:r>
+              <a:rPr lang="pt-BR" sz="1200" b="1" i="0" kern="1200" dirty="0">
+                <a:solidFill>
+                  <a:schemeClr val="tx1"/>
+                </a:solidFill>
+                <a:effectLst/>
+                <a:latin typeface="+mn-lt"/>
+                <a:ea typeface="+mn-ea"/>
+                <a:cs typeface="+mn-cs"/>
+              </a:rPr>
+              <a:t>sensibilidade prática</a:t>
+            </a:r>
+            <a:r>
+              <a:rPr lang="pt-BR" sz="1200" b="0" i="0" kern="1200" dirty="0">
+                <a:solidFill>
+                  <a:schemeClr val="tx1"/>
+                </a:solidFill>
+                <a:effectLst/>
+                <a:latin typeface="+mn-lt"/>
+                <a:ea typeface="+mn-ea"/>
+                <a:cs typeface="+mn-cs"/>
+              </a:rPr>
+              <a:t> mostra que manter as recompensas numa escala moderada (tipicamente entre -1 e 1) é uma escolha segura que evita uma série de armadilhas numéricas e facilita a sintonia dos hiperparâmetros.</a:t>
+            </a:r>
+          </a:p>
+          <a:p>
+            <a:endParaRPr lang="pt-BR" sz="1200" b="0" i="0" kern="1200" dirty="0">
+              <a:solidFill>
+                <a:schemeClr val="tx1"/>
+              </a:solidFill>
+              <a:effectLst/>
+              <a:latin typeface="+mn-lt"/>
+              <a:ea typeface="+mn-ea"/>
+              <a:cs typeface="+mn-cs"/>
+            </a:endParaRPr>
+          </a:p>
+          <a:p>
+            <a:r>
+              <a:rPr lang="pt-BR" sz="1200" b="1" kern="1200" dirty="0">
+                <a:solidFill>
+                  <a:schemeClr val="tx1"/>
+                </a:solidFill>
+                <a:effectLst/>
+                <a:latin typeface="+mn-lt"/>
+                <a:ea typeface="+mn-ea"/>
+                <a:cs typeface="+mn-cs"/>
+              </a:rPr>
+              <a:t>Recomendações</a:t>
+            </a:r>
+          </a:p>
+          <a:p>
+            <a:r>
+              <a:rPr lang="pt-BR" sz="1200" b="0" i="0" kern="1200" dirty="0">
+                <a:solidFill>
+                  <a:schemeClr val="tx1"/>
+                </a:solidFill>
+                <a:effectLst/>
+                <a:latin typeface="+mn-lt"/>
+                <a:ea typeface="+mn-ea"/>
+                <a:cs typeface="+mn-cs"/>
+              </a:rPr>
+              <a:t>Comece com recompensas no intervalo </a:t>
+            </a:r>
+            <a:r>
+              <a:rPr lang="pt-BR" sz="1200" b="1" i="0" kern="1200" dirty="0">
+                <a:solidFill>
+                  <a:schemeClr val="tx1"/>
+                </a:solidFill>
+                <a:effectLst/>
+                <a:latin typeface="+mn-lt"/>
+                <a:ea typeface="+mn-ea"/>
+                <a:cs typeface="+mn-cs"/>
+              </a:rPr>
+              <a:t>[-1, 1]</a:t>
+            </a:r>
+            <a:r>
+              <a:rPr lang="pt-BR" sz="1200" b="0" i="0" kern="1200" dirty="0">
+                <a:solidFill>
+                  <a:schemeClr val="tx1"/>
+                </a:solidFill>
+                <a:effectLst/>
+                <a:latin typeface="+mn-lt"/>
+                <a:ea typeface="+mn-ea"/>
+                <a:cs typeface="+mn-cs"/>
+              </a:rPr>
+              <a:t>; é o mais testado e robusto.</a:t>
+            </a:r>
+          </a:p>
+          <a:p>
+            <a:r>
+              <a:rPr lang="pt-BR" sz="1200" b="0" i="0" kern="1200" dirty="0">
+                <a:solidFill>
+                  <a:schemeClr val="tx1"/>
+                </a:solidFill>
+                <a:effectLst/>
+                <a:latin typeface="+mn-lt"/>
+                <a:ea typeface="+mn-ea"/>
+                <a:cs typeface="+mn-cs"/>
+              </a:rPr>
+              <a:t>Caso o ambiente forneça recompensas muito maiores, </a:t>
+            </a:r>
+            <a:r>
+              <a:rPr lang="pt-BR" sz="1200" b="1" i="0" kern="1200" dirty="0">
+                <a:solidFill>
+                  <a:schemeClr val="tx1"/>
+                </a:solidFill>
+                <a:effectLst/>
+                <a:latin typeface="+mn-lt"/>
+                <a:ea typeface="+mn-ea"/>
+                <a:cs typeface="+mn-cs"/>
+              </a:rPr>
+              <a:t>reescale‑as</a:t>
+            </a:r>
+            <a:r>
+              <a:rPr lang="pt-BR" sz="1200" b="0" i="0" kern="1200" dirty="0">
+                <a:solidFill>
+                  <a:schemeClr val="tx1"/>
+                </a:solidFill>
+                <a:effectLst/>
+                <a:latin typeface="+mn-lt"/>
+                <a:ea typeface="+mn-ea"/>
+                <a:cs typeface="+mn-cs"/>
+              </a:rPr>
+              <a:t> antes de alimentar o agente.</a:t>
+            </a:r>
+          </a:p>
+          <a:p>
+            <a:r>
+              <a:rPr lang="pt-BR" sz="1200" b="0" i="0" kern="1200" dirty="0">
+                <a:solidFill>
+                  <a:schemeClr val="tx1"/>
+                </a:solidFill>
+                <a:effectLst/>
+                <a:latin typeface="+mn-lt"/>
+                <a:ea typeface="+mn-ea"/>
+                <a:cs typeface="+mn-cs"/>
+              </a:rPr>
+              <a:t>Se possível, faça com que o </a:t>
+            </a:r>
+            <a:r>
+              <a:rPr lang="pt-BR" sz="1200" b="1" i="0" kern="1200" dirty="0">
+                <a:solidFill>
+                  <a:schemeClr val="tx1"/>
+                </a:solidFill>
+                <a:effectLst/>
+                <a:latin typeface="+mn-lt"/>
+                <a:ea typeface="+mn-ea"/>
+                <a:cs typeface="+mn-cs"/>
+              </a:rPr>
+              <a:t>retorno total máximo</a:t>
+            </a:r>
+            <a:r>
+              <a:rPr lang="pt-BR" sz="1200" b="0" i="0" kern="1200" dirty="0">
+                <a:solidFill>
+                  <a:schemeClr val="tx1"/>
+                </a:solidFill>
+                <a:effectLst/>
+                <a:latin typeface="+mn-lt"/>
+                <a:ea typeface="+mn-ea"/>
+                <a:cs typeface="+mn-cs"/>
+              </a:rPr>
+              <a:t> de um episódio não exceda algo como 100~1000, para evitar que os Q‑valores cresçam indefinidamente.</a:t>
+            </a:r>
+          </a:p>
+          <a:p>
+            <a:endParaRPr lang="pt-BR" sz="1200" kern="1200" dirty="0">
+              <a:solidFill>
+                <a:schemeClr val="tx1"/>
+              </a:solidFill>
+              <a:effectLst/>
+              <a:latin typeface="+mn-lt"/>
+              <a:ea typeface="+mn-ea"/>
+              <a:cs typeface="+mn-cs"/>
+            </a:endParaRPr>
+          </a:p>
+        </p:txBody>
+      </p:sp>
+      <p:sp>
+        <p:nvSpPr>
+          <p:cNvPr id="4" name="Slide Number Placeholder 3"/>
+          <p:cNvSpPr>
+            <a:spLocks noGrp="1"/>
+          </p:cNvSpPr>
+          <p:nvPr>
+            <p:ph type="sldNum" sz="quarter" idx="5"/>
+          </p:nvPr>
+        </p:nvSpPr>
+        <p:spPr/>
+        <p:txBody>
+          <a:bodyPr/>
+          <a:lstStyle/>
+          <a:p>
+            <a:fld id="{6FC8D850-966F-45A6-8DE7-15B891E7D40D}" type="slidenum">
+              <a:rPr lang="pt-BR" smtClean="0"/>
+              <a:t>21</a:t>
+            </a:fld>
+            <a:endParaRPr lang="pt-BR"/>
+          </a:p>
+        </p:txBody>
+      </p:sp>
+    </p:spTree>
+    <p:extLst>
+      <p:ext uri="{BB962C8B-B14F-4D97-AF65-F5344CB8AC3E}">
+        <p14:creationId xmlns:p14="http://schemas.microsoft.com/office/powerpoint/2010/main" val="596767558"/>
+      </p:ext>
+    </p:extLst>
+  </p:cSld>
+  <p:clrMapOvr>
+    <a:masterClrMapping/>
+  </p:clrMapOvr>
+</p:notes>
+</file>
+
+<file path=ppt/notesSlides/notesSlide19.xml><?xml version="1.0" encoding="utf-8"?>
+<p:notes xmlns:a="http://schemas.openxmlformats.org/drawingml/2006/main" xmlns:r="http://schemas.openxmlformats.org/officeDocument/2006/relationships" xmlns:p="http://schemas.openxmlformats.org/presentationml/2006/main">
+  <p:cSld>
+    <p:spTree>
+      <p:nvGrpSpPr>
+        <p:cNvPr id="1" name=""/>
+        <p:cNvGrpSpPr/>
+        <p:nvPr/>
+      </p:nvGrpSpPr>
+      <p:grpSpPr>
+        <a:xfrm>
+          <a:off x="0" y="0"/>
+          <a:ext cx="0" cy="0"/>
+          <a:chOff x="0" y="0"/>
+          <a:chExt cx="0" cy="0"/>
+        </a:xfrm>
+      </p:grpSpPr>
+      <p:sp>
+        <p:nvSpPr>
+          <p:cNvPr id="2" name="Slide Image Placeholder 1"/>
+          <p:cNvSpPr>
+            <a:spLocks noGrp="1" noRot="1" noChangeAspect="1"/>
+          </p:cNvSpPr>
+          <p:nvPr>
+            <p:ph type="sldImg"/>
+          </p:nvPr>
+        </p:nvSpPr>
+        <p:spPr/>
+      </p:sp>
+      <p:sp>
+        <p:nvSpPr>
+          <p:cNvPr id="3" name="Notes Placeholder 2"/>
+          <p:cNvSpPr>
+            <a:spLocks noGrp="1"/>
+          </p:cNvSpPr>
+          <p:nvPr>
+            <p:ph type="body" idx="1"/>
+          </p:nvPr>
+        </p:nvSpPr>
+        <p:spPr/>
+        <p:txBody>
+          <a:bodyPr/>
+          <a:lstStyle/>
+          <a:p>
+            <a:endParaRPr lang="pt-BR" sz="1200" kern="1200" dirty="0">
+              <a:solidFill>
+                <a:schemeClr val="tx1"/>
+              </a:solidFill>
+              <a:effectLst/>
+              <a:latin typeface="+mn-lt"/>
+              <a:ea typeface="+mn-ea"/>
+              <a:cs typeface="+mn-cs"/>
+            </a:endParaRPr>
+          </a:p>
+        </p:txBody>
+      </p:sp>
+      <p:sp>
+        <p:nvSpPr>
+          <p:cNvPr id="4" name="Slide Number Placeholder 3"/>
+          <p:cNvSpPr>
+            <a:spLocks noGrp="1"/>
+          </p:cNvSpPr>
+          <p:nvPr>
+            <p:ph type="sldNum" sz="quarter" idx="5"/>
+          </p:nvPr>
+        </p:nvSpPr>
+        <p:spPr/>
+        <p:txBody>
+          <a:bodyPr/>
+          <a:lstStyle/>
+          <a:p>
+            <a:fld id="{6FC8D850-966F-45A6-8DE7-15B891E7D40D}" type="slidenum">
+              <a:rPr lang="pt-BR" smtClean="0"/>
               <a:t>22</a:t>
             </a:fld>
             <a:endParaRPr lang="pt-BR"/>
@@ -1694,7 +2158,134 @@
 </p:notes>
 </file>
 
-<file path=ppt/notesSlides/notesSlide18.xml><?xml version="1.0" encoding="utf-8"?>
+<file path=ppt/notesSlides/notesSlide2.xml><?xml version="1.0" encoding="utf-8"?>
+<p:notes xmlns:a="http://schemas.openxmlformats.org/drawingml/2006/main" xmlns:r="http://schemas.openxmlformats.org/officeDocument/2006/relationships" xmlns:p="http://schemas.openxmlformats.org/presentationml/2006/main">
+  <p:cSld>
+    <p:spTree>
+      <p:nvGrpSpPr>
+        <p:cNvPr id="1" name=""/>
+        <p:cNvGrpSpPr/>
+        <p:nvPr/>
+      </p:nvGrpSpPr>
+      <p:grpSpPr>
+        <a:xfrm>
+          <a:off x="0" y="0"/>
+          <a:ext cx="0" cy="0"/>
+          <a:chOff x="0" y="0"/>
+          <a:chExt cx="0" cy="0"/>
+        </a:xfrm>
+      </p:grpSpPr>
+      <p:sp>
+        <p:nvSpPr>
+          <p:cNvPr id="2" name="Espaço Reservado para Imagem de Slide 1"/>
+          <p:cNvSpPr>
+            <a:spLocks noGrp="1" noRot="1" noChangeAspect="1"/>
+          </p:cNvSpPr>
+          <p:nvPr>
+            <p:ph type="sldImg"/>
+          </p:nvPr>
+        </p:nvSpPr>
+        <p:spPr/>
+      </p:sp>
+      <p:sp>
+        <p:nvSpPr>
+          <p:cNvPr id="3" name="Espaço Reservado para Anotações 2"/>
+          <p:cNvSpPr>
+            <a:spLocks noGrp="1"/>
+          </p:cNvSpPr>
+          <p:nvPr>
+            <p:ph type="body" idx="1"/>
+          </p:nvPr>
+        </p:nvSpPr>
+        <p:spPr/>
+        <p:txBody>
+          <a:bodyPr/>
+          <a:lstStyle/>
+          <a:p>
+            <a:pPr marL="0" marR="0" lvl="0" indent="0" algn="l" defTabSz="914400" rtl="0" eaLnBrk="1" fontAlgn="auto" latinLnBrk="0" hangingPunct="1">
+              <a:lnSpc>
+                <a:spcPct val="100000"/>
+              </a:lnSpc>
+              <a:spcBef>
+                <a:spcPts val="0"/>
+              </a:spcBef>
+              <a:spcAft>
+                <a:spcPts val="0"/>
+              </a:spcAft>
+              <a:buClrTx/>
+              <a:buSzTx/>
+              <a:buFontTx/>
+              <a:buNone/>
+              <a:tabLst/>
+              <a:defRPr/>
+            </a:pPr>
+            <a:r>
+              <a:rPr lang="pt-BR" sz="1200" b="1" i="0" kern="1200" dirty="0">
+                <a:solidFill>
+                  <a:schemeClr val="tx1"/>
+                </a:solidFill>
+                <a:effectLst/>
+                <a:latin typeface="+mn-lt"/>
+                <a:ea typeface="+mn-ea"/>
+                <a:cs typeface="+mn-cs"/>
+              </a:rPr>
+              <a:t>É um aprendizado por tentativa e erro</a:t>
+            </a:r>
+            <a:r>
+              <a:rPr lang="pt-BR" sz="1200" b="0" i="0" kern="1200" dirty="0">
+                <a:solidFill>
+                  <a:schemeClr val="tx1"/>
+                </a:solidFill>
+                <a:effectLst/>
+                <a:latin typeface="+mn-lt"/>
+                <a:ea typeface="+mn-ea"/>
+                <a:cs typeface="+mn-cs"/>
+              </a:rPr>
+              <a:t>, focado em decisão sequencial.</a:t>
+            </a:r>
+          </a:p>
+          <a:p>
+            <a:endParaRPr lang="en-US" dirty="0"/>
+          </a:p>
+        </p:txBody>
+      </p:sp>
+      <p:sp>
+        <p:nvSpPr>
+          <p:cNvPr id="4" name="Espaço Reservado para Número de Slide 3"/>
+          <p:cNvSpPr>
+            <a:spLocks noGrp="1"/>
+          </p:cNvSpPr>
+          <p:nvPr>
+            <p:ph type="sldNum" sz="quarter" idx="5"/>
+          </p:nvPr>
+        </p:nvSpPr>
+        <p:spPr/>
+        <p:txBody>
+          <a:bodyPr/>
+          <a:lstStyle/>
+          <a:p>
+            <a:fld id="{6FC8D850-966F-45A6-8DE7-15B891E7D40D}" type="slidenum">
+              <a:rPr lang="pt-BR" smtClean="0"/>
+              <a:t>2</a:t>
+            </a:fld>
+            <a:endParaRPr lang="pt-BR"/>
+          </a:p>
+        </p:txBody>
+      </p:sp>
+    </p:spTree>
+    <p:extLst>
+      <p:ext uri="{BB962C8B-B14F-4D97-AF65-F5344CB8AC3E}">
+        <p14:creationId xmlns:p14="http://schemas.microsoft.com/office/powerpoint/2010/main" val="55088620"/>
+      </p:ext>
+    </p:extLst>
+  </p:cSld>
+  <p:clrMapOvr>
+    <a:masterClrMapping/>
+  </p:clrMapOvr>
+</p:notes>
+</file>
+
+<file path=ppt/notesSlides/notesSlide20.xml><?xml version="1.0" encoding="utf-8"?>
 <p:notes xmlns:a="http://schemas.openxmlformats.org/drawingml/2006/main" xmlns:r="http://schemas.openxmlformats.org/officeDocument/2006/relationships" xmlns:p="http://schemas.openxmlformats.org/presentationml/2006/main">
   <p:cSld>
     <p:spTree>
@@ -1741,11 +2332,11 @@
               <a:lstStyle/>
               <a:p>
                 <a:r>
-                  <a:rPr lang="pt-BR" noProof="0" dirty="0" smtClean="0"/>
+                  <a:rPr lang="pt-BR" noProof="0" dirty="0"/>
                   <a:t>Se a</a:t>
                 </a:r>
                 <a:r>
-                  <a:rPr lang="pt-BR" baseline="0" noProof="0" dirty="0" smtClean="0"/>
+                  <a:rPr lang="pt-BR" baseline="0" noProof="0" dirty="0"/>
                   <a:t> recompensa atual mais a estimativa da recompensa futura (TD error = </a:t>
                 </a:r>
                 <a14:m>
@@ -1925,15 +2516,15 @@
                   </m:oMath>
                 </a14:m>
                 <a:r>
-                  <a:rPr lang="pt-BR" baseline="0" noProof="0" dirty="0" smtClean="0"/>
+                  <a:rPr lang="pt-BR" baseline="0" noProof="0" dirty="0"/>
                   <a:t>) for baixa, a diferença TD </a:t>
                 </a:r>
                 <a:r>
-                  <a:rPr lang="pt-BR" baseline="0" noProof="0" dirty="0" err="1" smtClean="0"/>
+                  <a:rPr lang="pt-BR" baseline="0" noProof="0" dirty="0" err="1"/>
                   <a:t>error</a:t>
                 </a:r>
                 <a:r>
-                  <a:rPr lang="pt-BR" baseline="0" noProof="0" dirty="0" smtClean="0"/>
+                  <a:rPr lang="pt-BR" baseline="0" noProof="0" dirty="0"/>
                   <a:t> e </a:t>
                 </a:r>
                 <a14:m>
@@ -1981,17 +2572,17 @@
                   </m:oMath>
                 </a14:m>
                 <a:r>
-                  <a:rPr lang="pt-BR" noProof="0" dirty="0" smtClean="0"/>
+                  <a:rPr lang="pt-BR" noProof="0" dirty="0"/>
                   <a:t> poderá ser negativa, diminuindo a qualidade da</a:t>
                 </a:r>
                 <a:r>
-                  <a:rPr lang="pt-BR" baseline="0" noProof="0" dirty="0" smtClean="0"/>
+                  <a:rPr lang="pt-BR" baseline="0" noProof="0" dirty="0"/>
                   <a:t> ação a no estado s.</a:t>
                 </a:r>
               </a:p>
               <a:p>
                 <a:r>
-                  <a:rPr lang="pt-BR" baseline="0" noProof="0" dirty="0" smtClean="0"/>
+                  <a:rPr lang="pt-BR" baseline="0" noProof="0" dirty="0"/>
                   <a:t>TD error = </a:t>
                 </a:r>
                 <a14:m>
@@ -2171,7 +2762,7 @@
                   </m:oMath>
                 </a14:m>
                 <a:r>
-                  <a:rPr lang="pt-BR" noProof="0" dirty="0" smtClean="0"/>
+                  <a:rPr lang="pt-BR" noProof="0" dirty="0"/>
                   <a:t> é chamado de alvo, ou seja, queremos que </a:t>
                 </a:r>
                 <a14:m>
@@ -2214,13 +2805,13 @@
                   </m:oMath>
                 </a14:m>
                 <a:r>
-                  <a:rPr lang="pt-BR" noProof="0" dirty="0" smtClean="0"/>
+                  <a:rPr lang="pt-BR" noProof="0" dirty="0"/>
                   <a:t> se aproxime dele ao longo do tempo iterativamente.</a:t>
                 </a:r>
               </a:p>
               <a:p>
                 <a:r>
-                  <a:rPr lang="pt-BR" dirty="0" smtClean="0"/>
+                  <a:rPr lang="pt-BR" dirty="0"/>
                   <a:t>O aprendizado busca ajustar </a:t>
                 </a:r>
                 <a14:m>
@@ -2268,7 +2859,7 @@
                   </m:oMath>
                 </a14:m>
                 <a:r>
-                  <a:rPr lang="pt-BR" dirty="0" smtClean="0"/>
+                  <a:rPr lang="pt-BR" dirty="0"/>
                   <a:t> na direção do alvo</a:t>
                 </a:r>
                 <a:endParaRPr lang="pt-BR" noProof="0" dirty="0"/>
@@ -2482,7 +3073,7 @@
 </p:notes>
 </file>
 
-<file path=ppt/notesSlides/notesSlide19.xml><?xml version="1.0" encoding="utf-8"?>
+<file path=ppt/notesSlides/notesSlide21.xml><?xml version="1.0" encoding="utf-8"?>
 <p:notes xmlns:a="http://schemas.openxmlformats.org/drawingml/2006/main" xmlns:r="http://schemas.openxmlformats.org/officeDocument/2006/relationships" xmlns:p="http://schemas.openxmlformats.org/presentationml/2006/main">
   <p:cSld>
     <p:spTree>
@@ -2566,258 +3157,6 @@
 </p:notes>
 </file>
 
-<file path=ppt/notesSlides/notesSlide2.xml><?xml version="1.0" encoding="utf-8"?>
-<p:notes xmlns:a="http://schemas.openxmlformats.org/drawingml/2006/main" xmlns:r="http://schemas.openxmlformats.org/officeDocument/2006/relationships" xmlns:p="http://schemas.openxmlformats.org/presentationml/2006/main">
-  <p:cSld>
-    <p:spTree>
-      <p:nvGrpSpPr>
-        <p:cNvPr id="1" name=""/>
-        <p:cNvGrpSpPr/>
-        <p:nvPr/>
-      </p:nvGrpSpPr>
-      <p:grpSpPr>
-        <a:xfrm>
-          <a:off x="0" y="0"/>
-          <a:ext cx="0" cy="0"/>
-          <a:chOff x="0" y="0"/>
-          <a:chExt cx="0" cy="0"/>
-        </a:xfrm>
-      </p:grpSpPr>
-      <p:sp>
-        <p:nvSpPr>
-          <p:cNvPr id="2" name="Slide Image Placeholder 1"/>
-          <p:cNvSpPr>
-            <a:spLocks noGrp="1" noRot="1" noChangeAspect="1"/>
-          </p:cNvSpPr>
-          <p:nvPr>
-            <p:ph type="sldImg"/>
-          </p:nvPr>
-        </p:nvSpPr>
-        <p:spPr/>
-      </p:sp>
-      <p:sp>
-        <p:nvSpPr>
-          <p:cNvPr id="3" name="Notes Placeholder 2"/>
-          <p:cNvSpPr>
-            <a:spLocks noGrp="1"/>
-          </p:cNvSpPr>
-          <p:nvPr>
-            <p:ph type="body" idx="1"/>
-          </p:nvPr>
-        </p:nvSpPr>
-        <p:spPr/>
-        <p:txBody>
-          <a:bodyPr/>
-          <a:lstStyle/>
-          <a:p>
-            <a:endParaRPr lang="en-US" dirty="0"/>
-          </a:p>
-        </p:txBody>
-      </p:sp>
-      <p:sp>
-        <p:nvSpPr>
-          <p:cNvPr id="4" name="Slide Number Placeholder 3"/>
-          <p:cNvSpPr>
-            <a:spLocks noGrp="1"/>
-          </p:cNvSpPr>
-          <p:nvPr>
-            <p:ph type="sldNum" sz="quarter" idx="5"/>
-          </p:nvPr>
-        </p:nvSpPr>
-        <p:spPr/>
-        <p:txBody>
-          <a:bodyPr/>
-          <a:lstStyle/>
-          <a:p>
-            <a:fld id="{6FC8D850-966F-45A6-8DE7-15B891E7D40D}" type="slidenum">
-              <a:rPr lang="pt-BR" smtClean="0"/>
-              <a:t>3</a:t>
-            </a:fld>
-            <a:endParaRPr lang="pt-BR"/>
-          </a:p>
-        </p:txBody>
-      </p:sp>
-    </p:spTree>
-    <p:extLst>
-      <p:ext uri="{BB962C8B-B14F-4D97-AF65-F5344CB8AC3E}">
-        <p14:creationId xmlns:p14="http://schemas.microsoft.com/office/powerpoint/2010/main" val="3286691423"/>
-      </p:ext>
-    </p:extLst>
-  </p:cSld>
-  <p:clrMapOvr>
-    <a:masterClrMapping/>
-  </p:clrMapOvr>
-</p:notes>
-</file>
-
-<file path=ppt/notesSlides/notesSlide20.xml><?xml version="1.0" encoding="utf-8"?>
-<p:notes xmlns:a="http://schemas.openxmlformats.org/drawingml/2006/main" xmlns:r="http://schemas.openxmlformats.org/officeDocument/2006/relationships" xmlns:p="http://schemas.openxmlformats.org/presentationml/2006/main">
-  <p:cSld>
-    <p:spTree>
-      <p:nvGrpSpPr>
-        <p:cNvPr id="1" name=""/>
-        <p:cNvGrpSpPr/>
-        <p:nvPr/>
-      </p:nvGrpSpPr>
-      <p:grpSpPr>
-        <a:xfrm>
-          <a:off x="0" y="0"/>
-          <a:ext cx="0" cy="0"/>
-          <a:chOff x="0" y="0"/>
-          <a:chExt cx="0" cy="0"/>
-        </a:xfrm>
-      </p:grpSpPr>
-      <p:sp>
-        <p:nvSpPr>
-          <p:cNvPr id="2" name="Slide Image Placeholder 1"/>
-          <p:cNvSpPr>
-            <a:spLocks noGrp="1" noRot="1" noChangeAspect="1"/>
-          </p:cNvSpPr>
-          <p:nvPr>
-            <p:ph type="sldImg"/>
-          </p:nvPr>
-        </p:nvSpPr>
-        <p:spPr/>
-      </p:sp>
-      <p:sp>
-        <p:nvSpPr>
-          <p:cNvPr id="3" name="Notes Placeholder 2"/>
-          <p:cNvSpPr>
-            <a:spLocks noGrp="1"/>
-          </p:cNvSpPr>
-          <p:nvPr>
-            <p:ph type="body" idx="1"/>
-          </p:nvPr>
-        </p:nvSpPr>
-        <p:spPr/>
-        <p:txBody>
-          <a:bodyPr/>
-          <a:lstStyle/>
-          <a:p>
-            <a:endParaRPr lang="en-US" dirty="0"/>
-          </a:p>
-        </p:txBody>
-      </p:sp>
-      <p:sp>
-        <p:nvSpPr>
-          <p:cNvPr id="4" name="Slide Number Placeholder 3"/>
-          <p:cNvSpPr>
-            <a:spLocks noGrp="1"/>
-          </p:cNvSpPr>
-          <p:nvPr>
-            <p:ph type="sldNum" sz="quarter" idx="5"/>
-          </p:nvPr>
-        </p:nvSpPr>
-        <p:spPr/>
-        <p:txBody>
-          <a:bodyPr/>
-          <a:lstStyle/>
-          <a:p>
-            <a:fld id="{6FC8D850-966F-45A6-8DE7-15B891E7D40D}" type="slidenum">
-              <a:rPr lang="pt-BR" smtClean="0"/>
-              <a:t>28</a:t>
-            </a:fld>
-            <a:endParaRPr lang="pt-BR"/>
-          </a:p>
-        </p:txBody>
-      </p:sp>
-    </p:spTree>
-    <p:extLst>
-      <p:ext uri="{BB962C8B-B14F-4D97-AF65-F5344CB8AC3E}">
-        <p14:creationId xmlns:p14="http://schemas.microsoft.com/office/powerpoint/2010/main" val="3365976238"/>
-      </p:ext>
-    </p:extLst>
-  </p:cSld>
-  <p:clrMapOvr>
-    <a:masterClrMapping/>
-  </p:clrMapOvr>
-</p:notes>
-</file>
-
-<file path=ppt/notesSlides/notesSlide21.xml><?xml version="1.0" encoding="utf-8"?>
-<p:notes xmlns:a="http://schemas.openxmlformats.org/drawingml/2006/main" xmlns:r="http://schemas.openxmlformats.org/officeDocument/2006/relationships" xmlns:p="http://schemas.openxmlformats.org/presentationml/2006/main">
-  <p:cSld>
-    <p:spTree>
-      <p:nvGrpSpPr>
-        <p:cNvPr id="1" name=""/>
-        <p:cNvGrpSpPr/>
-        <p:nvPr/>
-      </p:nvGrpSpPr>
-      <p:grpSpPr>
-        <a:xfrm>
-          <a:off x="0" y="0"/>
-          <a:ext cx="0" cy="0"/>
-          <a:chOff x="0" y="0"/>
-          <a:chExt cx="0" cy="0"/>
-        </a:xfrm>
-      </p:grpSpPr>
-      <p:sp>
-        <p:nvSpPr>
-          <p:cNvPr id="2" name="Slide Image Placeholder 1"/>
-          <p:cNvSpPr>
-            <a:spLocks noGrp="1" noRot="1" noChangeAspect="1"/>
-          </p:cNvSpPr>
-          <p:nvPr>
-            <p:ph type="sldImg"/>
-          </p:nvPr>
-        </p:nvSpPr>
-        <p:spPr/>
-      </p:sp>
-      <p:sp>
-        <p:nvSpPr>
-          <p:cNvPr id="3" name="Notes Placeholder 2"/>
-          <p:cNvSpPr>
-            <a:spLocks noGrp="1"/>
-          </p:cNvSpPr>
-          <p:nvPr>
-            <p:ph type="body" idx="1"/>
-          </p:nvPr>
-        </p:nvSpPr>
-        <p:spPr/>
-        <p:txBody>
-          <a:bodyPr/>
-          <a:lstStyle/>
-          <a:p>
-            <a:endParaRPr lang="en-US" dirty="0"/>
-          </a:p>
-        </p:txBody>
-      </p:sp>
-      <p:sp>
-        <p:nvSpPr>
-          <p:cNvPr id="4" name="Slide Number Placeholder 3"/>
-          <p:cNvSpPr>
-            <a:spLocks noGrp="1"/>
-          </p:cNvSpPr>
-          <p:nvPr>
-            <p:ph type="sldNum" sz="quarter" idx="5"/>
-          </p:nvPr>
-        </p:nvSpPr>
-        <p:spPr/>
-        <p:txBody>
-          <a:bodyPr/>
-          <a:lstStyle/>
-          <a:p>
-            <a:fld id="{6FC8D850-966F-45A6-8DE7-15B891E7D40D}" type="slidenum">
-              <a:rPr lang="pt-BR" smtClean="0"/>
-              <a:t>29</a:t>
-            </a:fld>
-            <a:endParaRPr lang="pt-BR"/>
-          </a:p>
-        </p:txBody>
-      </p:sp>
-    </p:spTree>
-    <p:extLst>
-      <p:ext uri="{BB962C8B-B14F-4D97-AF65-F5344CB8AC3E}">
-        <p14:creationId xmlns:p14="http://schemas.microsoft.com/office/powerpoint/2010/main" val="3240064613"/>
-      </p:ext>
-    </p:extLst>
-  </p:cSld>
-  <p:clrMapOvr>
-    <a:masterClrMapping/>
-  </p:clrMapOvr>
-</p:notes>
-</file>
-
 <file path=ppt/notesSlides/notesSlide22.xml><?xml version="1.0" encoding="utf-8"?>
 <p:notes xmlns:a="http://schemas.openxmlformats.org/drawingml/2006/main" xmlns:r="http://schemas.openxmlformats.org/officeDocument/2006/relationships" xmlns:p="http://schemas.openxmlformats.org/presentationml/2006/main">
   <p:cSld>
@@ -2837,7 +3176,7 @@
       </p:grpSpPr>
       <p:sp>
         <p:nvSpPr>
-          <p:cNvPr id="2" name="Slide Image Placeholder 1"/>
+          <p:cNvPr id="2" name="Espaço Reservado para Imagem de Slide 1"/>
           <p:cNvSpPr>
             <a:spLocks noGrp="1" noRot="1" noChangeAspect="1"/>
           </p:cNvSpPr>
@@ -2849,7 +3188,7 @@
       </p:sp>
       <p:sp>
         <p:nvSpPr>
-          <p:cNvPr id="3" name="Notes Placeholder 2"/>
+          <p:cNvPr id="3" name="Espaço Reservado para Anotações 2"/>
           <p:cNvSpPr>
             <a:spLocks noGrp="1"/>
           </p:cNvSpPr>
@@ -2862,13 +3201,210 @@
           <a:bodyPr/>
           <a:lstStyle/>
           <a:p>
+            <a:r>
+              <a:rPr lang="pt-BR" b="1" dirty="0"/>
+              <a:t>γ pequeno (≈ 0)</a:t>
+            </a:r>
+            <a:r>
+              <a:rPr lang="pt-BR" dirty="0"/>
+              <a:t> → agente </a:t>
+            </a:r>
+            <a:r>
+              <a:rPr lang="pt-BR" b="1" dirty="0"/>
+              <a:t>míope</a:t>
+            </a:r>
+            <a:r>
+              <a:rPr lang="pt-BR" dirty="0"/>
+              <a:t> (curto prazo) </a:t>
+            </a:r>
+          </a:p>
+          <a:p>
+            <a:r>
+              <a:rPr lang="pt-BR" b="1" dirty="0"/>
+              <a:t>γ grande (≈ 1)</a:t>
+            </a:r>
+            <a:r>
+              <a:rPr lang="pt-BR" dirty="0"/>
+              <a:t> → agente </a:t>
+            </a:r>
+            <a:r>
+              <a:rPr lang="pt-BR" b="1" dirty="0"/>
+              <a:t>visionário</a:t>
+            </a:r>
+            <a:r>
+              <a:rPr lang="pt-BR" dirty="0"/>
+              <a:t> (longo prazo)</a:t>
+            </a:r>
+          </a:p>
+          <a:p>
+            <a:endParaRPr lang="pt-BR" dirty="0"/>
+          </a:p>
+          <a:p>
+            <a:r>
+              <a:rPr lang="pt-BR" sz="1200" b="0" i="0" kern="1200" dirty="0">
+                <a:solidFill>
+                  <a:schemeClr val="tx1"/>
+                </a:solidFill>
+                <a:effectLst/>
+                <a:latin typeface="+mn-lt"/>
+                <a:ea typeface="+mn-ea"/>
+                <a:cs typeface="+mn-cs"/>
+              </a:rPr>
+              <a:t>A escolha entre valores pequenos (</a:t>
+            </a:r>
+            <a:r>
+              <a:rPr lang="pt-BR" sz="1200" b="0" i="0" kern="1200" dirty="0" err="1">
+                <a:solidFill>
+                  <a:schemeClr val="tx1"/>
+                </a:solidFill>
+                <a:effectLst/>
+                <a:latin typeface="+mn-lt"/>
+                <a:ea typeface="+mn-ea"/>
+                <a:cs typeface="+mn-cs"/>
+              </a:rPr>
+              <a:t>ex</a:t>
+            </a:r>
+            <a:r>
+              <a:rPr lang="pt-BR" sz="1200" b="0" i="0" kern="1200" dirty="0">
+                <a:solidFill>
+                  <a:schemeClr val="tx1"/>
+                </a:solidFill>
+                <a:effectLst/>
+                <a:latin typeface="+mn-lt"/>
+                <a:ea typeface="+mn-ea"/>
+                <a:cs typeface="+mn-cs"/>
+              </a:rPr>
+              <a:t>: 0,1; 0,5) e grandes (</a:t>
+            </a:r>
+            <a:r>
+              <a:rPr lang="pt-BR" sz="1200" b="0" i="0" kern="1200" dirty="0" err="1">
+                <a:solidFill>
+                  <a:schemeClr val="tx1"/>
+                </a:solidFill>
+                <a:effectLst/>
+                <a:latin typeface="+mn-lt"/>
+                <a:ea typeface="+mn-ea"/>
+                <a:cs typeface="+mn-cs"/>
+              </a:rPr>
+              <a:t>ex</a:t>
+            </a:r>
+            <a:r>
+              <a:rPr lang="pt-BR" sz="1200" b="0" i="0" kern="1200" dirty="0">
+                <a:solidFill>
+                  <a:schemeClr val="tx1"/>
+                </a:solidFill>
+                <a:effectLst/>
+                <a:latin typeface="+mn-lt"/>
+                <a:ea typeface="+mn-ea"/>
+                <a:cs typeface="+mn-cs"/>
+              </a:rPr>
+              <a:t>: 0,95; 0,99) depende do horizonte de planejamento necessário para a tarefa e da estabilidade do aprendizado.</a:t>
+            </a:r>
+          </a:p>
+          <a:p>
+            <a:endParaRPr lang="pt-BR" sz="1200" b="0" i="0" kern="1200" dirty="0">
+              <a:solidFill>
+                <a:schemeClr val="tx1"/>
+              </a:solidFill>
+              <a:effectLst/>
+              <a:latin typeface="+mn-lt"/>
+              <a:ea typeface="+mn-ea"/>
+              <a:cs typeface="+mn-cs"/>
+            </a:endParaRPr>
+          </a:p>
+          <a:p>
+            <a:r>
+              <a:rPr lang="pt-BR" sz="1200" b="1" i="0" kern="1200" dirty="0">
+                <a:solidFill>
+                  <a:schemeClr val="tx1"/>
+                </a:solidFill>
+                <a:effectLst/>
+                <a:latin typeface="+mn-lt"/>
+                <a:ea typeface="+mn-ea"/>
+                <a:cs typeface="+mn-cs"/>
+              </a:rPr>
+              <a:t>Por que γ pequeno?</a:t>
+            </a:r>
+            <a:r>
+              <a:rPr lang="pt-BR" sz="1200" b="0" i="0" kern="1200" dirty="0">
+                <a:solidFill>
+                  <a:schemeClr val="tx1"/>
+                </a:solidFill>
+                <a:effectLst/>
+                <a:latin typeface="+mn-lt"/>
+                <a:ea typeface="+mn-ea"/>
+                <a:cs typeface="+mn-cs"/>
+              </a:rPr>
+              <a:t> A cada passo já existe sinal de recompensa.</a:t>
+            </a:r>
+          </a:p>
+          <a:p>
+            <a:endParaRPr lang="pt-BR" sz="1200" b="0" i="0" kern="1200" dirty="0">
+              <a:solidFill>
+                <a:schemeClr val="tx1"/>
+              </a:solidFill>
+              <a:effectLst/>
+              <a:latin typeface="+mn-lt"/>
+              <a:ea typeface="+mn-ea"/>
+              <a:cs typeface="+mn-cs"/>
+            </a:endParaRPr>
+          </a:p>
+          <a:p>
+            <a:r>
+              <a:rPr lang="pt-BR" sz="1200" b="1" i="0" kern="1200" dirty="0">
+                <a:solidFill>
+                  <a:schemeClr val="tx1"/>
+                </a:solidFill>
+                <a:effectLst/>
+                <a:latin typeface="+mn-lt"/>
+                <a:ea typeface="+mn-ea"/>
+                <a:cs typeface="+mn-cs"/>
+              </a:rPr>
+              <a:t>Por que γ grande?</a:t>
+            </a:r>
+            <a:r>
+              <a:rPr lang="pt-BR" sz="1200" b="0" i="0" kern="1200" dirty="0">
+                <a:solidFill>
+                  <a:schemeClr val="tx1"/>
+                </a:solidFill>
+                <a:effectLst/>
+                <a:latin typeface="+mn-lt"/>
+                <a:ea typeface="+mn-ea"/>
+                <a:cs typeface="+mn-cs"/>
+              </a:rPr>
+              <a:t> A informação do sucesso precisa se propagar </a:t>
+            </a:r>
+            <a:r>
+              <a:rPr lang="pt-BR" sz="1200" b="0" i="1" kern="1200" dirty="0">
+                <a:solidFill>
+                  <a:schemeClr val="tx1"/>
+                </a:solidFill>
+                <a:effectLst/>
+                <a:latin typeface="+mn-lt"/>
+                <a:ea typeface="+mn-ea"/>
+                <a:cs typeface="+mn-cs"/>
+              </a:rPr>
+              <a:t>de volta</a:t>
+            </a:r>
+            <a:r>
+              <a:rPr lang="pt-BR" sz="1200" b="0" i="0" kern="1200" dirty="0">
+                <a:solidFill>
+                  <a:schemeClr val="tx1"/>
+                </a:solidFill>
+                <a:effectLst/>
+                <a:latin typeface="+mn-lt"/>
+                <a:ea typeface="+mn-ea"/>
+                <a:cs typeface="+mn-cs"/>
+              </a:rPr>
+              <a:t> por muitos estados.</a:t>
+            </a:r>
             <a:endParaRPr lang="en-US" dirty="0"/>
           </a:p>
         </p:txBody>
       </p:sp>
       <p:sp>
         <p:nvSpPr>
-          <p:cNvPr id="4" name="Slide Number Placeholder 3"/>
+          <p:cNvPr id="4" name="Espaço Reservado para Número de Slide 3"/>
           <p:cNvSpPr>
             <a:spLocks noGrp="1"/>
           </p:cNvSpPr>
@@ -2883,7 +3419,7 @@
           <a:p>
             <a:fld id="{6FC8D850-966F-45A6-8DE7-15B891E7D40D}" type="slidenum">
               <a:rPr lang="pt-BR" smtClean="0"/>
-              <a:t>30</a:t>
+              <a:t>26</a:t>
             </a:fld>
             <a:endParaRPr lang="pt-BR"/>
           </a:p>
@@ -2892,7 +3428,7 @@
     </p:spTree>
     <p:extLst>
       <p:ext uri="{BB962C8B-B14F-4D97-AF65-F5344CB8AC3E}">
-        <p14:creationId xmlns:p14="http://schemas.microsoft.com/office/powerpoint/2010/main" val="1000199276"/>
+        <p14:creationId xmlns:p14="http://schemas.microsoft.com/office/powerpoint/2010/main" val="3110750001"/>
       </p:ext>
     </p:extLst>
   </p:cSld>
@@ -2921,7 +3457,7 @@
       </p:grpSpPr>
       <p:sp>
         <p:nvSpPr>
-          <p:cNvPr id="2" name="Slide Image Placeholder 1"/>
+          <p:cNvPr id="2" name="Espaço Reservado para Imagem de Slide 1"/>
           <p:cNvSpPr>
             <a:spLocks noGrp="1" noRot="1" noChangeAspect="1"/>
           </p:cNvSpPr>
@@ -2933,7 +3469,7 @@
       </p:sp>
       <p:sp>
         <p:nvSpPr>
-          <p:cNvPr id="3" name="Notes Placeholder 2"/>
+          <p:cNvPr id="3" name="Espaço Reservado para Anotações 2"/>
           <p:cNvSpPr>
             <a:spLocks noGrp="1"/>
           </p:cNvSpPr>
@@ -2947,20 +3483,77 @@
           <a:lstStyle/>
           <a:p>
             <a:r>
-              <a:rPr lang="pt-BR" b="1" dirty="0" smtClean="0"/>
-              <a:t>Finanças:</a:t>
-            </a:r>
-            <a:r>
-              <a:rPr lang="pt-BR" dirty="0" smtClean="0"/>
-              <a:t> Algoritmos de trading que aprendem a comprar e vender ações maximizando o lucro ao longo de meses.</a:t>
-            </a:r>
+              <a:rPr lang="pt-BR" sz="1200" b="1" i="0" kern="1200" dirty="0">
+                <a:solidFill>
+                  <a:schemeClr val="tx1"/>
+                </a:solidFill>
+                <a:effectLst/>
+                <a:latin typeface="+mn-lt"/>
+                <a:ea typeface="+mn-ea"/>
+                <a:cs typeface="+mn-cs"/>
+              </a:rPr>
+              <a:t>Off-</a:t>
+            </a:r>
+            <a:r>
+              <a:rPr lang="pt-BR" sz="1200" b="1" i="0" kern="1200" dirty="0" err="1">
+                <a:solidFill>
+                  <a:schemeClr val="tx1"/>
+                </a:solidFill>
+                <a:effectLst/>
+                <a:latin typeface="+mn-lt"/>
+                <a:ea typeface="+mn-ea"/>
+                <a:cs typeface="+mn-cs"/>
+              </a:rPr>
+              <a:t>policy</a:t>
+            </a:r>
+            <a:r>
+              <a:rPr lang="pt-BR" sz="1200" b="0" i="0" kern="1200" dirty="0">
+                <a:solidFill>
+                  <a:schemeClr val="tx1"/>
+                </a:solidFill>
+                <a:effectLst/>
+                <a:latin typeface="+mn-lt"/>
+                <a:ea typeface="+mn-ea"/>
+                <a:cs typeface="+mn-cs"/>
+              </a:rPr>
+              <a:t>: enquanto aprende sobre a política ótima, pode agir com outra (</a:t>
+            </a:r>
+            <a:r>
+              <a:rPr lang="pt-BR" sz="1200" b="0" i="0" kern="1200" dirty="0" err="1">
+                <a:solidFill>
+                  <a:schemeClr val="tx1"/>
+                </a:solidFill>
+                <a:effectLst/>
+                <a:latin typeface="+mn-lt"/>
+                <a:ea typeface="+mn-ea"/>
+                <a:cs typeface="+mn-cs"/>
+              </a:rPr>
+              <a:t>ex</a:t>
+            </a:r>
+            <a:r>
+              <a:rPr lang="pt-BR" sz="1200" b="0" i="0" kern="1200" dirty="0">
+                <a:solidFill>
+                  <a:schemeClr val="tx1"/>
+                </a:solidFill>
+                <a:effectLst/>
+                <a:latin typeface="+mn-lt"/>
+                <a:ea typeface="+mn-ea"/>
+                <a:cs typeface="+mn-cs"/>
+              </a:rPr>
+              <a:t>: exploratória).</a:t>
+            </a:r>
+          </a:p>
+          <a:p>
+            <a:br>
+              <a:rPr lang="pt-BR" dirty="0"/>
+            </a:br>
             <a:endParaRPr lang="en-US" dirty="0"/>
           </a:p>
         </p:txBody>
       </p:sp>
       <p:sp>
         <p:nvSpPr>
-          <p:cNvPr id="4" name="Slide Number Placeholder 3"/>
+          <p:cNvPr id="4" name="Espaço Reservado para Número de Slide 3"/>
           <p:cNvSpPr>
             <a:spLocks noGrp="1"/>
           </p:cNvSpPr>
@@ -2975,7 +3568,7 @@
           <a:p>
             <a:fld id="{6FC8D850-966F-45A6-8DE7-15B891E7D40D}" type="slidenum">
               <a:rPr lang="pt-BR" smtClean="0"/>
-              <a:t>31</a:t>
+              <a:t>27</a:t>
             </a:fld>
             <a:endParaRPr lang="pt-BR"/>
           </a:p>
@@ -2984,7 +3577,7 @@
     </p:spTree>
     <p:extLst>
       <p:ext uri="{BB962C8B-B14F-4D97-AF65-F5344CB8AC3E}">
-        <p14:creationId xmlns:p14="http://schemas.microsoft.com/office/powerpoint/2010/main" val="230184113"/>
+        <p14:creationId xmlns:p14="http://schemas.microsoft.com/office/powerpoint/2010/main" val="3660035395"/>
       </p:ext>
     </p:extLst>
   </p:cSld>
@@ -3038,29 +3631,6 @@
           <a:bodyPr/>
           <a:lstStyle/>
           <a:p>
-            <a:pPr marL="0" marR="0" lvl="0" indent="0" algn="l" defTabSz="914400" rtl="0" eaLnBrk="1" fontAlgn="auto" latinLnBrk="0" hangingPunct="1">
-              <a:lnSpc>
-                <a:spcPct val="100000"/>
-              </a:lnSpc>
-              <a:spcBef>
-                <a:spcPts val="0"/>
-              </a:spcBef>
-              <a:spcAft>
-                <a:spcPts val="0"/>
-              </a:spcAft>
-              <a:buClrTx/>
-              <a:buSzTx/>
-              <a:buFontTx/>
-              <a:buNone/>
-              <a:tabLst/>
-              <a:defRPr/>
-            </a:pPr>
-            <a:r>
-              <a:rPr lang="en-US"/>
-              <a:t>https://colab.research.google.com/github/zz4fap/c24_inteligencia_artificial/blob/master/notebooks/mlp.ipynb</a:t>
-            </a:r>
-          </a:p>
-          <a:p>
             <a:endParaRPr lang="en-US" dirty="0"/>
           </a:p>
         </p:txBody>
@@ -3082,7 +3652,7 @@
           <a:p>
             <a:fld id="{6FC8D850-966F-45A6-8DE7-15B891E7D40D}" type="slidenum">
               <a:rPr lang="pt-BR" smtClean="0"/>
-              <a:t>32</a:t>
+              <a:t>29</a:t>
             </a:fld>
             <a:endParaRPr lang="pt-BR"/>
           </a:p>
@@ -3091,7 +3661,7 @@
     </p:spTree>
     <p:extLst>
       <p:ext uri="{BB962C8B-B14F-4D97-AF65-F5344CB8AC3E}">
-        <p14:creationId xmlns:p14="http://schemas.microsoft.com/office/powerpoint/2010/main" val="477841902"/>
+        <p14:creationId xmlns:p14="http://schemas.microsoft.com/office/powerpoint/2010/main" val="3365976238"/>
       </p:ext>
     </p:extLst>
   </p:cSld>
@@ -3166,7 +3736,7 @@
           <a:p>
             <a:fld id="{6FC8D850-966F-45A6-8DE7-15B891E7D40D}" type="slidenum">
               <a:rPr lang="pt-BR" smtClean="0"/>
-              <a:t>33</a:t>
+              <a:t>30</a:t>
             </a:fld>
             <a:endParaRPr lang="pt-BR"/>
           </a:p>
@@ -3175,7 +3745,7 @@
     </p:spTree>
     <p:extLst>
       <p:ext uri="{BB962C8B-B14F-4D97-AF65-F5344CB8AC3E}">
-        <p14:creationId xmlns:p14="http://schemas.microsoft.com/office/powerpoint/2010/main" val="1121654450"/>
+        <p14:creationId xmlns:p14="http://schemas.microsoft.com/office/powerpoint/2010/main" val="3240064613"/>
       </p:ext>
     </p:extLst>
   </p:cSld>
@@ -3185,331 +3755,7 @@
 </p:notes>
 </file>
 
-<file path=ppt/notesSlides/notesSlide3.xml><?xml version="1.0" encoding="utf-8"?>
-<p:notes xmlns:a="http://schemas.openxmlformats.org/drawingml/2006/main" xmlns:r="http://schemas.openxmlformats.org/officeDocument/2006/relationships" xmlns:p="http://schemas.openxmlformats.org/presentationml/2006/main">
-  <p:cSld>
-    <p:spTree>
-      <p:nvGrpSpPr>
-        <p:cNvPr id="1" name="">
-          <a:extLst>
-            <a:ext uri="{FF2B5EF4-FFF2-40B4-BE49-F238E27FC236}">
-              <a16:creationId xmlns="" xmlns:a16="http://schemas.microsoft.com/office/drawing/2014/main" id="{5B4C3711-83BC-221A-A341-2BE62BCF89DC}"/>
-            </a:ext>
-          </a:extLst>
-        </p:cNvPr>
-        <p:cNvGrpSpPr/>
-        <p:nvPr/>
-      </p:nvGrpSpPr>
-      <p:grpSpPr>
-        <a:xfrm>
-          <a:off x="0" y="0"/>
-          <a:ext cx="0" cy="0"/>
-          <a:chOff x="0" y="0"/>
-          <a:chExt cx="0" cy="0"/>
-        </a:xfrm>
-      </p:grpSpPr>
-      <p:sp>
-        <p:nvSpPr>
-          <p:cNvPr id="2" name="Slide Image Placeholder 1">
-            <a:extLst>
-              <a:ext uri="{FF2B5EF4-FFF2-40B4-BE49-F238E27FC236}">
-                <a16:creationId xmlns="" xmlns:a16="http://schemas.microsoft.com/office/drawing/2014/main" id="{5957728F-CFA3-D0A6-7780-F800EBAC1F6E}"/>
-              </a:ext>
-            </a:extLst>
-          </p:cNvPr>
-          <p:cNvSpPr>
-            <a:spLocks noGrp="1" noRot="1" noChangeAspect="1"/>
-          </p:cNvSpPr>
-          <p:nvPr>
-            <p:ph type="sldImg"/>
-          </p:nvPr>
-        </p:nvSpPr>
-        <p:spPr/>
-      </p:sp>
-      <p:sp>
-        <p:nvSpPr>
-          <p:cNvPr id="3" name="Notes Placeholder 2">
-            <a:extLst>
-              <a:ext uri="{FF2B5EF4-FFF2-40B4-BE49-F238E27FC236}">
-                <a16:creationId xmlns="" xmlns:a16="http://schemas.microsoft.com/office/drawing/2014/main" id="{4AD3E5CB-A8B8-7F4B-200F-94D044C81C3D}"/>
-              </a:ext>
-            </a:extLst>
-          </p:cNvPr>
-          <p:cNvSpPr>
-            <a:spLocks noGrp="1"/>
-          </p:cNvSpPr>
-          <p:nvPr>
-            <p:ph type="body" idx="1"/>
-          </p:nvPr>
-        </p:nvSpPr>
-        <p:spPr/>
-        <p:txBody>
-          <a:bodyPr/>
-          <a:lstStyle/>
-          <a:p>
-            <a:endParaRPr lang="en-US" dirty="0"/>
-          </a:p>
-        </p:txBody>
-      </p:sp>
-      <p:sp>
-        <p:nvSpPr>
-          <p:cNvPr id="4" name="Slide Number Placeholder 3">
-            <a:extLst>
-              <a:ext uri="{FF2B5EF4-FFF2-40B4-BE49-F238E27FC236}">
-                <a16:creationId xmlns="" xmlns:a16="http://schemas.microsoft.com/office/drawing/2014/main" id="{3F9D8EC2-522A-3A24-97FD-162C1CF3C132}"/>
-              </a:ext>
-            </a:extLst>
-          </p:cNvPr>
-          <p:cNvSpPr>
-            <a:spLocks noGrp="1"/>
-          </p:cNvSpPr>
-          <p:nvPr>
-            <p:ph type="sldNum" sz="quarter" idx="5"/>
-          </p:nvPr>
-        </p:nvSpPr>
-        <p:spPr/>
-        <p:txBody>
-          <a:bodyPr/>
-          <a:lstStyle/>
-          <a:p>
-            <a:fld id="{6FC8D850-966F-45A6-8DE7-15B891E7D40D}" type="slidenum">
-              <a:rPr lang="pt-BR" smtClean="0"/>
-              <a:t>4</a:t>
-            </a:fld>
-            <a:endParaRPr lang="pt-BR"/>
-          </a:p>
-        </p:txBody>
-      </p:sp>
-    </p:spTree>
-    <p:extLst>
-      <p:ext uri="{BB962C8B-B14F-4D97-AF65-F5344CB8AC3E}">
-        <p14:creationId xmlns:p14="http://schemas.microsoft.com/office/powerpoint/2010/main" val="1882326999"/>
-      </p:ext>
-    </p:extLst>
-  </p:cSld>
-  <p:clrMapOvr>
-    <a:masterClrMapping/>
-  </p:clrMapOvr>
-</p:notes>
-</file>
-
-<file path=ppt/notesSlides/notesSlide4.xml><?xml version="1.0" encoding="utf-8"?>
-<p:notes xmlns:a="http://schemas.openxmlformats.org/drawingml/2006/main" xmlns:r="http://schemas.openxmlformats.org/officeDocument/2006/relationships" xmlns:p="http://schemas.openxmlformats.org/presentationml/2006/main">
-  <p:cSld>
-    <p:spTree>
-      <p:nvGrpSpPr>
-        <p:cNvPr id="1" name="">
-          <a:extLst>
-            <a:ext uri="{FF2B5EF4-FFF2-40B4-BE49-F238E27FC236}">
-              <a16:creationId xmlns="" xmlns:a16="http://schemas.microsoft.com/office/drawing/2014/main" id="{478600EE-A6A2-2235-BCC6-6DE0C5D8DE78}"/>
-            </a:ext>
-          </a:extLst>
-        </p:cNvPr>
-        <p:cNvGrpSpPr/>
-        <p:nvPr/>
-      </p:nvGrpSpPr>
-      <p:grpSpPr>
-        <a:xfrm>
-          <a:off x="0" y="0"/>
-          <a:ext cx="0" cy="0"/>
-          <a:chOff x="0" y="0"/>
-          <a:chExt cx="0" cy="0"/>
-        </a:xfrm>
-      </p:grpSpPr>
-      <p:sp>
-        <p:nvSpPr>
-          <p:cNvPr id="2" name="Slide Image Placeholder 1">
-            <a:extLst>
-              <a:ext uri="{FF2B5EF4-FFF2-40B4-BE49-F238E27FC236}">
-                <a16:creationId xmlns="" xmlns:a16="http://schemas.microsoft.com/office/drawing/2014/main" id="{B1C41149-DCAF-E8F8-FB78-0B242E221738}"/>
-              </a:ext>
-            </a:extLst>
-          </p:cNvPr>
-          <p:cNvSpPr>
-            <a:spLocks noGrp="1" noRot="1" noChangeAspect="1"/>
-          </p:cNvSpPr>
-          <p:nvPr>
-            <p:ph type="sldImg"/>
-          </p:nvPr>
-        </p:nvSpPr>
-        <p:spPr/>
-      </p:sp>
-      <p:sp>
-        <p:nvSpPr>
-          <p:cNvPr id="3" name="Notes Placeholder 2">
-            <a:extLst>
-              <a:ext uri="{FF2B5EF4-FFF2-40B4-BE49-F238E27FC236}">
-                <a16:creationId xmlns="" xmlns:a16="http://schemas.microsoft.com/office/drawing/2014/main" id="{F4C5329E-ECB5-4CB1-3A33-CFC57176F475}"/>
-              </a:ext>
-            </a:extLst>
-          </p:cNvPr>
-          <p:cNvSpPr>
-            <a:spLocks noGrp="1"/>
-          </p:cNvSpPr>
-          <p:nvPr>
-            <p:ph type="body" idx="1"/>
-          </p:nvPr>
-        </p:nvSpPr>
-        <p:spPr/>
-        <p:txBody>
-          <a:bodyPr/>
-          <a:lstStyle/>
-          <a:p>
-            <a:endParaRPr lang="en-US" dirty="0"/>
-          </a:p>
-        </p:txBody>
-      </p:sp>
-      <p:sp>
-        <p:nvSpPr>
-          <p:cNvPr id="4" name="Slide Number Placeholder 3">
-            <a:extLst>
-              <a:ext uri="{FF2B5EF4-FFF2-40B4-BE49-F238E27FC236}">
-                <a16:creationId xmlns="" xmlns:a16="http://schemas.microsoft.com/office/drawing/2014/main" id="{37AB7C02-5FA9-66E4-2433-F97393A5C0BA}"/>
-              </a:ext>
-            </a:extLst>
-          </p:cNvPr>
-          <p:cNvSpPr>
-            <a:spLocks noGrp="1"/>
-          </p:cNvSpPr>
-          <p:nvPr>
-            <p:ph type="sldNum" sz="quarter" idx="5"/>
-          </p:nvPr>
-        </p:nvSpPr>
-        <p:spPr/>
-        <p:txBody>
-          <a:bodyPr/>
-          <a:lstStyle/>
-          <a:p>
-            <a:fld id="{6FC8D850-966F-45A6-8DE7-15B891E7D40D}" type="slidenum">
-              <a:rPr lang="pt-BR" smtClean="0"/>
-              <a:t>5</a:t>
-            </a:fld>
-            <a:endParaRPr lang="pt-BR"/>
-          </a:p>
-        </p:txBody>
-      </p:sp>
-    </p:spTree>
-    <p:extLst>
-      <p:ext uri="{BB962C8B-B14F-4D97-AF65-F5344CB8AC3E}">
-        <p14:creationId xmlns:p14="http://schemas.microsoft.com/office/powerpoint/2010/main" val="877577173"/>
-      </p:ext>
-    </p:extLst>
-  </p:cSld>
-  <p:clrMapOvr>
-    <a:masterClrMapping/>
-  </p:clrMapOvr>
-</p:notes>
-</file>
-
-<file path=ppt/notesSlides/notesSlide5.xml><?xml version="1.0" encoding="utf-8"?>
-<p:notes xmlns:a="http://schemas.openxmlformats.org/drawingml/2006/main" xmlns:r="http://schemas.openxmlformats.org/officeDocument/2006/relationships" xmlns:p="http://schemas.openxmlformats.org/presentationml/2006/main">
-  <p:cSld>
-    <p:spTree>
-      <p:nvGrpSpPr>
-        <p:cNvPr id="1" name="">
-          <a:extLst>
-            <a:ext uri="{FF2B5EF4-FFF2-40B4-BE49-F238E27FC236}">
-              <a16:creationId xmlns="" xmlns:a16="http://schemas.microsoft.com/office/drawing/2014/main" id="{92F2E69C-0407-4619-FFB1-7502CF033EBA}"/>
-            </a:ext>
-          </a:extLst>
-        </p:cNvPr>
-        <p:cNvGrpSpPr/>
-        <p:nvPr/>
-      </p:nvGrpSpPr>
-      <p:grpSpPr>
-        <a:xfrm>
-          <a:off x="0" y="0"/>
-          <a:ext cx="0" cy="0"/>
-          <a:chOff x="0" y="0"/>
-          <a:chExt cx="0" cy="0"/>
-        </a:xfrm>
-      </p:grpSpPr>
-      <p:sp>
-        <p:nvSpPr>
-          <p:cNvPr id="2" name="Slide Image Placeholder 1">
-            <a:extLst>
-              <a:ext uri="{FF2B5EF4-FFF2-40B4-BE49-F238E27FC236}">
-                <a16:creationId xmlns="" xmlns:a16="http://schemas.microsoft.com/office/drawing/2014/main" id="{E3C6894B-B13E-3C0F-BEC3-8A663E98508F}"/>
-              </a:ext>
-            </a:extLst>
-          </p:cNvPr>
-          <p:cNvSpPr>
-            <a:spLocks noGrp="1" noRot="1" noChangeAspect="1"/>
-          </p:cNvSpPr>
-          <p:nvPr>
-            <p:ph type="sldImg"/>
-          </p:nvPr>
-        </p:nvSpPr>
-        <p:spPr/>
-      </p:sp>
-      <p:sp>
-        <p:nvSpPr>
-          <p:cNvPr id="3" name="Notes Placeholder 2">
-            <a:extLst>
-              <a:ext uri="{FF2B5EF4-FFF2-40B4-BE49-F238E27FC236}">
-                <a16:creationId xmlns="" xmlns:a16="http://schemas.microsoft.com/office/drawing/2014/main" id="{B76A1B01-A242-46E3-F92E-FB0EA28821F9}"/>
-              </a:ext>
-            </a:extLst>
-          </p:cNvPr>
-          <p:cNvSpPr>
-            <a:spLocks noGrp="1"/>
-          </p:cNvSpPr>
-          <p:nvPr>
-            <p:ph type="body" idx="1"/>
-          </p:nvPr>
-        </p:nvSpPr>
-        <p:spPr/>
-        <p:txBody>
-          <a:bodyPr/>
-          <a:lstStyle/>
-          <a:p>
-            <a:endParaRPr lang="en-US" dirty="0"/>
-          </a:p>
-        </p:txBody>
-      </p:sp>
-      <p:sp>
-        <p:nvSpPr>
-          <p:cNvPr id="4" name="Slide Number Placeholder 3">
-            <a:extLst>
-              <a:ext uri="{FF2B5EF4-FFF2-40B4-BE49-F238E27FC236}">
-                <a16:creationId xmlns="" xmlns:a16="http://schemas.microsoft.com/office/drawing/2014/main" id="{4BA915CE-E13E-5840-D0C6-249ACB7C2C1D}"/>
-              </a:ext>
-            </a:extLst>
-          </p:cNvPr>
-          <p:cNvSpPr>
-            <a:spLocks noGrp="1"/>
-          </p:cNvSpPr>
-          <p:nvPr>
-            <p:ph type="sldNum" sz="quarter" idx="5"/>
-          </p:nvPr>
-        </p:nvSpPr>
-        <p:spPr/>
-        <p:txBody>
-          <a:bodyPr/>
-          <a:lstStyle/>
-          <a:p>
-            <a:fld id="{6FC8D850-966F-45A6-8DE7-15B891E7D40D}" type="slidenum">
-              <a:rPr lang="pt-BR" smtClean="0"/>
-              <a:t>6</a:t>
-            </a:fld>
-            <a:endParaRPr lang="pt-BR"/>
-          </a:p>
-        </p:txBody>
-      </p:sp>
-    </p:spTree>
-    <p:extLst>
-      <p:ext uri="{BB962C8B-B14F-4D97-AF65-F5344CB8AC3E}">
-        <p14:creationId xmlns:p14="http://schemas.microsoft.com/office/powerpoint/2010/main" val="5515121"/>
-      </p:ext>
-    </p:extLst>
-  </p:cSld>
-  <p:clrMapOvr>
-    <a:masterClrMapping/>
-  </p:clrMapOvr>
-</p:notes>
-</file>
-
-<file path=ppt/notesSlides/notesSlide6.xml><?xml version="1.0" encoding="utf-8"?>
+<file path=ppt/notesSlides/notesSlide26.xml><?xml version="1.0" encoding="utf-8"?>
 <p:notes xmlns:a="http://schemas.openxmlformats.org/drawingml/2006/main" xmlns:r="http://schemas.openxmlformats.org/officeDocument/2006/relationships" xmlns:p="http://schemas.openxmlformats.org/presentationml/2006/main">
   <p:cSld>
     <p:spTree>
@@ -3553,26 +3799,6 @@
           <a:bodyPr/>
           <a:lstStyle/>
           <a:p>
-            <a:r>
-              <a:rPr lang="pt-BR" dirty="0"/>
-              <a:t>O processo ocorre em etapas de tempo discretas (</a:t>
-            </a:r>
-            <a:r>
-              <a:rPr lang="pt-BR" sz="1200" kern="1200" dirty="0">
-                <a:solidFill>
-                  <a:schemeClr val="tx1"/>
-                </a:solidFill>
-                <a:effectLst/>
-                <a:latin typeface="+mn-lt"/>
-                <a:ea typeface="+mn-ea"/>
-                <a:cs typeface="+mn-cs"/>
-              </a:rPr>
-              <a:t>$t, t+1, t+2...$</a:t>
-            </a:r>
-            <a:r>
-              <a:rPr lang="pt-BR" dirty="0"/>
-              <a:t>).</a:t>
-            </a:r>
             <a:endParaRPr lang="en-US" dirty="0"/>
           </a:p>
         </p:txBody>
@@ -3594,7 +3820,7 @@
           <a:p>
             <a:fld id="{6FC8D850-966F-45A6-8DE7-15B891E7D40D}" type="slidenum">
               <a:rPr lang="pt-BR" smtClean="0"/>
-              <a:t>8</a:t>
+              <a:t>31</a:t>
             </a:fld>
             <a:endParaRPr lang="pt-BR"/>
           </a:p>
@@ -3603,7 +3829,7 @@
     </p:spTree>
     <p:extLst>
       <p:ext uri="{BB962C8B-B14F-4D97-AF65-F5344CB8AC3E}">
-        <p14:creationId xmlns:p14="http://schemas.microsoft.com/office/powerpoint/2010/main" val="2390445129"/>
+        <p14:creationId xmlns:p14="http://schemas.microsoft.com/office/powerpoint/2010/main" val="1000199276"/>
       </p:ext>
     </p:extLst>
   </p:cSld>
@@ -3613,263 +3839,7 @@
 </p:notes>
 </file>
 
-<file path=ppt/notesSlides/notesSlide7.xml><?xml version="1.0" encoding="utf-8"?>
-<p:notes xmlns:a="http://schemas.openxmlformats.org/drawingml/2006/main" xmlns:r="http://schemas.openxmlformats.org/officeDocument/2006/relationships" xmlns:p="http://schemas.openxmlformats.org/presentationml/2006/main">
-  <p:cSld>
-    <p:spTree>
-      <p:nvGrpSpPr>
-        <p:cNvPr id="1" name="">
-          <a:extLst>
-            <a:ext uri="{FF2B5EF4-FFF2-40B4-BE49-F238E27FC236}">
-              <a16:creationId xmlns="" xmlns:a16="http://schemas.microsoft.com/office/drawing/2014/main" id="{0D0A5E72-3763-6194-5E85-BE26354035A3}"/>
-            </a:ext>
-          </a:extLst>
-        </p:cNvPr>
-        <p:cNvGrpSpPr/>
-        <p:nvPr/>
-      </p:nvGrpSpPr>
-      <p:grpSpPr>
-        <a:xfrm>
-          <a:off x="0" y="0"/>
-          <a:ext cx="0" cy="0"/>
-          <a:chOff x="0" y="0"/>
-          <a:chExt cx="0" cy="0"/>
-        </a:xfrm>
-      </p:grpSpPr>
-      <p:sp>
-        <p:nvSpPr>
-          <p:cNvPr id="2" name="Slide Image Placeholder 1">
-            <a:extLst>
-              <a:ext uri="{FF2B5EF4-FFF2-40B4-BE49-F238E27FC236}">
-                <a16:creationId xmlns="" xmlns:a16="http://schemas.microsoft.com/office/drawing/2014/main" id="{82466988-6655-8B01-840E-0BE3EDB68F07}"/>
-              </a:ext>
-            </a:extLst>
-          </p:cNvPr>
-          <p:cNvSpPr>
-            <a:spLocks noGrp="1" noRot="1" noChangeAspect="1"/>
-          </p:cNvSpPr>
-          <p:nvPr>
-            <p:ph type="sldImg"/>
-          </p:nvPr>
-        </p:nvSpPr>
-        <p:spPr/>
-      </p:sp>
-      <p:sp>
-        <p:nvSpPr>
-          <p:cNvPr id="3" name="Notes Placeholder 2">
-            <a:extLst>
-              <a:ext uri="{FF2B5EF4-FFF2-40B4-BE49-F238E27FC236}">
-                <a16:creationId xmlns="" xmlns:a16="http://schemas.microsoft.com/office/drawing/2014/main" id="{5E09F3D0-11CA-2E8D-04C5-104C59DCE708}"/>
-              </a:ext>
-            </a:extLst>
-          </p:cNvPr>
-          <p:cNvSpPr>
-            <a:spLocks noGrp="1"/>
-          </p:cNvSpPr>
-          <p:nvPr>
-            <p:ph type="body" idx="1"/>
-          </p:nvPr>
-        </p:nvSpPr>
-        <p:spPr/>
-        <p:txBody>
-          <a:bodyPr/>
-          <a:lstStyle/>
-          <a:p>
-            <a:r>
-              <a:rPr lang="pt-BR" dirty="0"/>
-              <a:t>O processo ocorre em etapas de tempo discretas (</a:t>
-            </a:r>
-            <a:r>
-              <a:rPr lang="pt-BR" sz="1200" kern="1200" dirty="0">
-                <a:solidFill>
-                  <a:schemeClr val="tx1"/>
-                </a:solidFill>
-                <a:effectLst/>
-                <a:latin typeface="+mn-lt"/>
-                <a:ea typeface="+mn-ea"/>
-                <a:cs typeface="+mn-cs"/>
-              </a:rPr>
-              <a:t>$t, t+1, t+2...$</a:t>
-            </a:r>
-            <a:r>
-              <a:rPr lang="pt-BR" dirty="0"/>
-              <a:t>).</a:t>
-            </a:r>
-            <a:endParaRPr lang="en-US" dirty="0"/>
-          </a:p>
-        </p:txBody>
-      </p:sp>
-      <p:sp>
-        <p:nvSpPr>
-          <p:cNvPr id="4" name="Slide Number Placeholder 3">
-            <a:extLst>
-              <a:ext uri="{FF2B5EF4-FFF2-40B4-BE49-F238E27FC236}">
-                <a16:creationId xmlns="" xmlns:a16="http://schemas.microsoft.com/office/drawing/2014/main" id="{68F0BCD7-F825-C67D-D845-8316B4C4B6D6}"/>
-              </a:ext>
-            </a:extLst>
-          </p:cNvPr>
-          <p:cNvSpPr>
-            <a:spLocks noGrp="1"/>
-          </p:cNvSpPr>
-          <p:nvPr>
-            <p:ph type="sldNum" sz="quarter" idx="5"/>
-          </p:nvPr>
-        </p:nvSpPr>
-        <p:spPr/>
-        <p:txBody>
-          <a:bodyPr/>
-          <a:lstStyle/>
-          <a:p>
-            <a:fld id="{6FC8D850-966F-45A6-8DE7-15B891E7D40D}" type="slidenum">
-              <a:rPr lang="pt-BR" smtClean="0"/>
-              <a:t>9</a:t>
-            </a:fld>
-            <a:endParaRPr lang="pt-BR"/>
-          </a:p>
-        </p:txBody>
-      </p:sp>
-    </p:spTree>
-    <p:extLst>
-      <p:ext uri="{BB962C8B-B14F-4D97-AF65-F5344CB8AC3E}">
-        <p14:creationId xmlns:p14="http://schemas.microsoft.com/office/powerpoint/2010/main" val="3921267477"/>
-      </p:ext>
-    </p:extLst>
-  </p:cSld>
-  <p:clrMapOvr>
-    <a:masterClrMapping/>
-  </p:clrMapOvr>
-</p:notes>
-</file>
-
-<file path=ppt/notesSlides/notesSlide8.xml><?xml version="1.0" encoding="utf-8"?>
-<p:notes xmlns:a="http://schemas.openxmlformats.org/drawingml/2006/main" xmlns:r="http://schemas.openxmlformats.org/officeDocument/2006/relationships" xmlns:p="http://schemas.openxmlformats.org/presentationml/2006/main">
-  <p:cSld>
-    <p:spTree>
-      <p:nvGrpSpPr>
-        <p:cNvPr id="1" name="">
-          <a:extLst>
-            <a:ext uri="{FF2B5EF4-FFF2-40B4-BE49-F238E27FC236}">
-              <a16:creationId xmlns="" xmlns:a16="http://schemas.microsoft.com/office/drawing/2014/main" id="{0D0A5E72-3763-6194-5E85-BE26354035A3}"/>
-            </a:ext>
-          </a:extLst>
-        </p:cNvPr>
-        <p:cNvGrpSpPr/>
-        <p:nvPr/>
-      </p:nvGrpSpPr>
-      <p:grpSpPr>
-        <a:xfrm>
-          <a:off x="0" y="0"/>
-          <a:ext cx="0" cy="0"/>
-          <a:chOff x="0" y="0"/>
-          <a:chExt cx="0" cy="0"/>
-        </a:xfrm>
-      </p:grpSpPr>
-      <p:sp>
-        <p:nvSpPr>
-          <p:cNvPr id="2" name="Slide Image Placeholder 1">
-            <a:extLst>
-              <a:ext uri="{FF2B5EF4-FFF2-40B4-BE49-F238E27FC236}">
-                <a16:creationId xmlns="" xmlns:a16="http://schemas.microsoft.com/office/drawing/2014/main" id="{82466988-6655-8B01-840E-0BE3EDB68F07}"/>
-              </a:ext>
-            </a:extLst>
-          </p:cNvPr>
-          <p:cNvSpPr>
-            <a:spLocks noGrp="1" noRot="1" noChangeAspect="1"/>
-          </p:cNvSpPr>
-          <p:nvPr>
-            <p:ph type="sldImg"/>
-          </p:nvPr>
-        </p:nvSpPr>
-        <p:spPr/>
-      </p:sp>
-      <p:sp>
-        <p:nvSpPr>
-          <p:cNvPr id="3" name="Notes Placeholder 2">
-            <a:extLst>
-              <a:ext uri="{FF2B5EF4-FFF2-40B4-BE49-F238E27FC236}">
-                <a16:creationId xmlns="" xmlns:a16="http://schemas.microsoft.com/office/drawing/2014/main" id="{5E09F3D0-11CA-2E8D-04C5-104C59DCE708}"/>
-              </a:ext>
-            </a:extLst>
-          </p:cNvPr>
-          <p:cNvSpPr>
-            <a:spLocks noGrp="1"/>
-          </p:cNvSpPr>
-          <p:nvPr>
-            <p:ph type="body" idx="1"/>
-          </p:nvPr>
-        </p:nvSpPr>
-        <p:spPr/>
-        <p:txBody>
-          <a:bodyPr/>
-          <a:lstStyle/>
-          <a:p>
-            <a:r>
-              <a:rPr lang="pt-BR" dirty="0"/>
-              <a:t>O processo ocorre em etapas de tempo discretas (</a:t>
-            </a:r>
-            <a:r>
-              <a:rPr lang="pt-BR" sz="1200" kern="1200" dirty="0">
-                <a:solidFill>
-                  <a:schemeClr val="tx1"/>
-                </a:solidFill>
-                <a:effectLst/>
-                <a:latin typeface="+mn-lt"/>
-                <a:ea typeface="+mn-ea"/>
-                <a:cs typeface="+mn-cs"/>
-              </a:rPr>
-              <a:t>$t, t+1, t+2...$</a:t>
-            </a:r>
-            <a:r>
-              <a:rPr lang="pt-BR" dirty="0"/>
-              <a:t>).</a:t>
-            </a:r>
-            <a:endParaRPr lang="en-US" dirty="0"/>
-          </a:p>
-        </p:txBody>
-      </p:sp>
-      <p:sp>
-        <p:nvSpPr>
-          <p:cNvPr id="4" name="Slide Number Placeholder 3">
-            <a:extLst>
-              <a:ext uri="{FF2B5EF4-FFF2-40B4-BE49-F238E27FC236}">
-                <a16:creationId xmlns="" xmlns:a16="http://schemas.microsoft.com/office/drawing/2014/main" id="{68F0BCD7-F825-C67D-D845-8316B4C4B6D6}"/>
-              </a:ext>
-            </a:extLst>
-          </p:cNvPr>
-          <p:cNvSpPr>
-            <a:spLocks noGrp="1"/>
-          </p:cNvSpPr>
-          <p:nvPr>
-            <p:ph type="sldNum" sz="quarter" idx="5"/>
-          </p:nvPr>
-        </p:nvSpPr>
-        <p:spPr/>
-        <p:txBody>
-          <a:bodyPr/>
-          <a:lstStyle/>
-          <a:p>
-            <a:fld id="{6FC8D850-966F-45A6-8DE7-15B891E7D40D}" type="slidenum">
-              <a:rPr lang="pt-BR" smtClean="0"/>
-              <a:t>10</a:t>
-            </a:fld>
-            <a:endParaRPr lang="pt-BR"/>
-          </a:p>
-        </p:txBody>
-      </p:sp>
-    </p:spTree>
-    <p:extLst>
-      <p:ext uri="{BB962C8B-B14F-4D97-AF65-F5344CB8AC3E}">
-        <p14:creationId xmlns:p14="http://schemas.microsoft.com/office/powerpoint/2010/main" val="3778172451"/>
-      </p:ext>
-    </p:extLst>
-  </p:cSld>
-  <p:clrMapOvr>
-    <a:masterClrMapping/>
-  </p:clrMapOvr>
-</p:notes>
-</file>
-
-<file path=ppt/notesSlides/notesSlide9.xml><?xml version="1.0" encoding="utf-8"?>
+<file path=ppt/notesSlides/notesSlide27.xml><?xml version="1.0" encoding="utf-8"?>
 <p:notes xmlns:a="http://schemas.openxmlformats.org/drawingml/2006/main" xmlns:r="http://schemas.openxmlformats.org/officeDocument/2006/relationships" xmlns:p="http://schemas.openxmlformats.org/presentationml/2006/main">
   <p:cSld>
     <p:spTree>
@@ -3915,44 +3885,12 @@
           <a:p>
             <a:r>
               <a:rPr lang="pt-BR" b="1" dirty="0"/>
-              <a:t>• PPO (Proximal </a:t>
-            </a:r>
-            <a:r>
-              <a:rPr lang="pt-BR" b="1" dirty="0" err="1"/>
-              <a:t>Policy</a:t>
-            </a:r>
-            <a:r>
-              <a:rPr lang="pt-BR" b="1" dirty="0"/>
-              <a:t> </a:t>
-            </a:r>
-            <a:r>
-              <a:rPr lang="pt-BR" b="1" dirty="0" err="1"/>
-              <a:t>Optimization</a:t>
-            </a:r>
-            <a:r>
-              <a:rPr lang="pt-BR" b="1" dirty="0"/>
-              <a:t>)</a:t>
-            </a:r>
-          </a:p>
-          <a:p>
+              <a:t>Finanças:</a:t>
+            </a:r>
             <a:r>
               <a:rPr lang="pt-BR" dirty="0"/>
-              <a:t>Um dos mais usados hoje. </a:t>
-            </a:r>
-          </a:p>
-          <a:p>
-            <a:r>
-              <a:rPr lang="pt-BR" dirty="0"/>
-              <a:t>Estável e relativamente simples. </a:t>
-            </a:r>
-          </a:p>
-          <a:p>
-            <a:r>
-              <a:rPr lang="pt-BR" dirty="0"/>
-              <a:t>Muito popular em aplicações práticas.</a:t>
-            </a:r>
-          </a:p>
-          <a:p>
+              <a:t> Algoritmos de trading que aprendem a comprar e vender ações maximizando o lucro ao longo de meses.</a:t>
+            </a:r>
             <a:endParaRPr lang="en-US" dirty="0"/>
           </a:p>
         </p:txBody>
@@ -3974,7 +3912,7 @@
           <a:p>
             <a:fld id="{6FC8D850-966F-45A6-8DE7-15B891E7D40D}" type="slidenum">
               <a:rPr lang="pt-BR" smtClean="0"/>
-              <a:t>11</a:t>
+              <a:t>32</a:t>
             </a:fld>
             <a:endParaRPr lang="pt-BR"/>
           </a:p>
@@ -3983,7 +3921,964 @@
     </p:spTree>
     <p:extLst>
       <p:ext uri="{BB962C8B-B14F-4D97-AF65-F5344CB8AC3E}">
-        <p14:creationId xmlns:p14="http://schemas.microsoft.com/office/powerpoint/2010/main" val="3660457592"/>
+        <p14:creationId xmlns:p14="http://schemas.microsoft.com/office/powerpoint/2010/main" val="230184113"/>
+      </p:ext>
+    </p:extLst>
+  </p:cSld>
+  <p:clrMapOvr>
+    <a:masterClrMapping/>
+  </p:clrMapOvr>
+</p:notes>
+</file>
+
+<file path=ppt/notesSlides/notesSlide28.xml><?xml version="1.0" encoding="utf-8"?>
+<p:notes xmlns:a="http://schemas.openxmlformats.org/drawingml/2006/main" xmlns:r="http://schemas.openxmlformats.org/officeDocument/2006/relationships" xmlns:p="http://schemas.openxmlformats.org/presentationml/2006/main">
+  <p:cSld>
+    <p:spTree>
+      <p:nvGrpSpPr>
+        <p:cNvPr id="1" name=""/>
+        <p:cNvGrpSpPr/>
+        <p:nvPr/>
+      </p:nvGrpSpPr>
+      <p:grpSpPr>
+        <a:xfrm>
+          <a:off x="0" y="0"/>
+          <a:ext cx="0" cy="0"/>
+          <a:chOff x="0" y="0"/>
+          <a:chExt cx="0" cy="0"/>
+        </a:xfrm>
+      </p:grpSpPr>
+      <p:sp>
+        <p:nvSpPr>
+          <p:cNvPr id="2" name="Slide Image Placeholder 1"/>
+          <p:cNvSpPr>
+            <a:spLocks noGrp="1" noRot="1" noChangeAspect="1"/>
+          </p:cNvSpPr>
+          <p:nvPr>
+            <p:ph type="sldImg"/>
+          </p:nvPr>
+        </p:nvSpPr>
+        <p:spPr/>
+      </p:sp>
+      <p:sp>
+        <p:nvSpPr>
+          <p:cNvPr id="3" name="Notes Placeholder 2"/>
+          <p:cNvSpPr>
+            <a:spLocks noGrp="1"/>
+          </p:cNvSpPr>
+          <p:nvPr>
+            <p:ph type="body" idx="1"/>
+          </p:nvPr>
+        </p:nvSpPr>
+        <p:spPr/>
+        <p:txBody>
+          <a:bodyPr/>
+          <a:lstStyle/>
+          <a:p>
+            <a:pPr marL="0" marR="0" lvl="0" indent="0" algn="l" defTabSz="914400" rtl="0" eaLnBrk="1" fontAlgn="auto" latinLnBrk="0" hangingPunct="1">
+              <a:lnSpc>
+                <a:spcPct val="100000"/>
+              </a:lnSpc>
+              <a:spcBef>
+                <a:spcPts val="0"/>
+              </a:spcBef>
+              <a:spcAft>
+                <a:spcPts val="0"/>
+              </a:spcAft>
+              <a:buClrTx/>
+              <a:buSzTx/>
+              <a:buFontTx/>
+              <a:buNone/>
+              <a:tabLst/>
+              <a:defRPr/>
+            </a:pPr>
+            <a:r>
+              <a:rPr lang="en-US"/>
+              <a:t>https://colab.research.google.com/github/zz4fap/c24_inteligencia_artificial/blob/master/notebooks/mlp.ipynb</a:t>
+            </a:r>
+          </a:p>
+          <a:p>
+            <a:endParaRPr lang="en-US" dirty="0"/>
+          </a:p>
+        </p:txBody>
+      </p:sp>
+      <p:sp>
+        <p:nvSpPr>
+          <p:cNvPr id="4" name="Slide Number Placeholder 3"/>
+          <p:cNvSpPr>
+            <a:spLocks noGrp="1"/>
+          </p:cNvSpPr>
+          <p:nvPr>
+            <p:ph type="sldNum" sz="quarter" idx="5"/>
+          </p:nvPr>
+        </p:nvSpPr>
+        <p:spPr/>
+        <p:txBody>
+          <a:bodyPr/>
+          <a:lstStyle/>
+          <a:p>
+            <a:fld id="{6FC8D850-966F-45A6-8DE7-15B891E7D40D}" type="slidenum">
+              <a:rPr lang="pt-BR" smtClean="0"/>
+              <a:t>33</a:t>
+            </a:fld>
+            <a:endParaRPr lang="pt-BR"/>
+          </a:p>
+        </p:txBody>
+      </p:sp>
+    </p:spTree>
+    <p:extLst>
+      <p:ext uri="{BB962C8B-B14F-4D97-AF65-F5344CB8AC3E}">
+        <p14:creationId xmlns:p14="http://schemas.microsoft.com/office/powerpoint/2010/main" val="477841902"/>
+      </p:ext>
+    </p:extLst>
+  </p:cSld>
+  <p:clrMapOvr>
+    <a:masterClrMapping/>
+  </p:clrMapOvr>
+</p:notes>
+</file>
+
+<file path=ppt/notesSlides/notesSlide29.xml><?xml version="1.0" encoding="utf-8"?>
+<p:notes xmlns:a="http://schemas.openxmlformats.org/drawingml/2006/main" xmlns:r="http://schemas.openxmlformats.org/officeDocument/2006/relationships" xmlns:p="http://schemas.openxmlformats.org/presentationml/2006/main">
+  <p:cSld>
+    <p:spTree>
+      <p:nvGrpSpPr>
+        <p:cNvPr id="1" name=""/>
+        <p:cNvGrpSpPr/>
+        <p:nvPr/>
+      </p:nvGrpSpPr>
+      <p:grpSpPr>
+        <a:xfrm>
+          <a:off x="0" y="0"/>
+          <a:ext cx="0" cy="0"/>
+          <a:chOff x="0" y="0"/>
+          <a:chExt cx="0" cy="0"/>
+        </a:xfrm>
+      </p:grpSpPr>
+      <p:sp>
+        <p:nvSpPr>
+          <p:cNvPr id="2" name="Slide Image Placeholder 1"/>
+          <p:cNvSpPr>
+            <a:spLocks noGrp="1" noRot="1" noChangeAspect="1"/>
+          </p:cNvSpPr>
+          <p:nvPr>
+            <p:ph type="sldImg"/>
+          </p:nvPr>
+        </p:nvSpPr>
+        <p:spPr/>
+      </p:sp>
+      <p:sp>
+        <p:nvSpPr>
+          <p:cNvPr id="3" name="Notes Placeholder 2"/>
+          <p:cNvSpPr>
+            <a:spLocks noGrp="1"/>
+          </p:cNvSpPr>
+          <p:nvPr>
+            <p:ph type="body" idx="1"/>
+          </p:nvPr>
+        </p:nvSpPr>
+        <p:spPr/>
+        <p:txBody>
+          <a:bodyPr/>
+          <a:lstStyle/>
+          <a:p>
+            <a:endParaRPr lang="en-US" dirty="0"/>
+          </a:p>
+        </p:txBody>
+      </p:sp>
+      <p:sp>
+        <p:nvSpPr>
+          <p:cNvPr id="4" name="Slide Number Placeholder 3"/>
+          <p:cNvSpPr>
+            <a:spLocks noGrp="1"/>
+          </p:cNvSpPr>
+          <p:nvPr>
+            <p:ph type="sldNum" sz="quarter" idx="5"/>
+          </p:nvPr>
+        </p:nvSpPr>
+        <p:spPr/>
+        <p:txBody>
+          <a:bodyPr/>
+          <a:lstStyle/>
+          <a:p>
+            <a:fld id="{6FC8D850-966F-45A6-8DE7-15B891E7D40D}" type="slidenum">
+              <a:rPr lang="pt-BR" smtClean="0"/>
+              <a:t>34</a:t>
+            </a:fld>
+            <a:endParaRPr lang="pt-BR"/>
+          </a:p>
+        </p:txBody>
+      </p:sp>
+    </p:spTree>
+    <p:extLst>
+      <p:ext uri="{BB962C8B-B14F-4D97-AF65-F5344CB8AC3E}">
+        <p14:creationId xmlns:p14="http://schemas.microsoft.com/office/powerpoint/2010/main" val="1121654450"/>
+      </p:ext>
+    </p:extLst>
+  </p:cSld>
+  <p:clrMapOvr>
+    <a:masterClrMapping/>
+  </p:clrMapOvr>
+</p:notes>
+</file>
+
+<file path=ppt/notesSlides/notesSlide3.xml><?xml version="1.0" encoding="utf-8"?>
+<p:notes xmlns:a="http://schemas.openxmlformats.org/drawingml/2006/main" xmlns:r="http://schemas.openxmlformats.org/officeDocument/2006/relationships" xmlns:p="http://schemas.openxmlformats.org/presentationml/2006/main">
+  <p:cSld>
+    <p:spTree>
+      <p:nvGrpSpPr>
+        <p:cNvPr id="1" name=""/>
+        <p:cNvGrpSpPr/>
+        <p:nvPr/>
+      </p:nvGrpSpPr>
+      <p:grpSpPr>
+        <a:xfrm>
+          <a:off x="0" y="0"/>
+          <a:ext cx="0" cy="0"/>
+          <a:chOff x="0" y="0"/>
+          <a:chExt cx="0" cy="0"/>
+        </a:xfrm>
+      </p:grpSpPr>
+      <p:sp>
+        <p:nvSpPr>
+          <p:cNvPr id="2" name="Slide Image Placeholder 1"/>
+          <p:cNvSpPr>
+            <a:spLocks noGrp="1" noRot="1" noChangeAspect="1"/>
+          </p:cNvSpPr>
+          <p:nvPr>
+            <p:ph type="sldImg"/>
+          </p:nvPr>
+        </p:nvSpPr>
+        <p:spPr/>
+      </p:sp>
+      <p:sp>
+        <p:nvSpPr>
+          <p:cNvPr id="3" name="Notes Placeholder 2"/>
+          <p:cNvSpPr>
+            <a:spLocks noGrp="1"/>
+          </p:cNvSpPr>
+          <p:nvPr>
+            <p:ph type="body" idx="1"/>
+          </p:nvPr>
+        </p:nvSpPr>
+        <p:spPr/>
+        <p:txBody>
+          <a:bodyPr/>
+          <a:lstStyle/>
+          <a:p>
+            <a:endParaRPr lang="en-US" dirty="0"/>
+          </a:p>
+        </p:txBody>
+      </p:sp>
+      <p:sp>
+        <p:nvSpPr>
+          <p:cNvPr id="4" name="Slide Number Placeholder 3"/>
+          <p:cNvSpPr>
+            <a:spLocks noGrp="1"/>
+          </p:cNvSpPr>
+          <p:nvPr>
+            <p:ph type="sldNum" sz="quarter" idx="5"/>
+          </p:nvPr>
+        </p:nvSpPr>
+        <p:spPr/>
+        <p:txBody>
+          <a:bodyPr/>
+          <a:lstStyle/>
+          <a:p>
+            <a:fld id="{6FC8D850-966F-45A6-8DE7-15B891E7D40D}" type="slidenum">
+              <a:rPr lang="pt-BR" smtClean="0"/>
+              <a:t>3</a:t>
+            </a:fld>
+            <a:endParaRPr lang="pt-BR"/>
+          </a:p>
+        </p:txBody>
+      </p:sp>
+    </p:spTree>
+    <p:extLst>
+      <p:ext uri="{BB962C8B-B14F-4D97-AF65-F5344CB8AC3E}">
+        <p14:creationId xmlns:p14="http://schemas.microsoft.com/office/powerpoint/2010/main" val="3286691423"/>
+      </p:ext>
+    </p:extLst>
+  </p:cSld>
+  <p:clrMapOvr>
+    <a:masterClrMapping/>
+  </p:clrMapOvr>
+</p:notes>
+</file>
+
+<file path=ppt/notesSlides/notesSlide4.xml><?xml version="1.0" encoding="utf-8"?>
+<p:notes xmlns:a="http://schemas.openxmlformats.org/drawingml/2006/main" xmlns:r="http://schemas.openxmlformats.org/officeDocument/2006/relationships" xmlns:p="http://schemas.openxmlformats.org/presentationml/2006/main">
+  <p:cSld>
+    <p:spTree>
+      <p:nvGrpSpPr>
+        <p:cNvPr id="1" name="">
+          <a:extLst>
+            <a:ext uri="{FF2B5EF4-FFF2-40B4-BE49-F238E27FC236}">
+              <a16:creationId xmlns:a16="http://schemas.microsoft.com/office/drawing/2014/main" id="{5B4C3711-83BC-221A-A341-2BE62BCF89DC}"/>
+            </a:ext>
+          </a:extLst>
+        </p:cNvPr>
+        <p:cNvGrpSpPr/>
+        <p:nvPr/>
+      </p:nvGrpSpPr>
+      <p:grpSpPr>
+        <a:xfrm>
+          <a:off x="0" y="0"/>
+          <a:ext cx="0" cy="0"/>
+          <a:chOff x="0" y="0"/>
+          <a:chExt cx="0" cy="0"/>
+        </a:xfrm>
+      </p:grpSpPr>
+      <p:sp>
+        <p:nvSpPr>
+          <p:cNvPr id="2" name="Slide Image Placeholder 1">
+            <a:extLst>
+              <a:ext uri="{FF2B5EF4-FFF2-40B4-BE49-F238E27FC236}">
+                <a16:creationId xmlns:a16="http://schemas.microsoft.com/office/drawing/2014/main" id="{5957728F-CFA3-D0A6-7780-F800EBAC1F6E}"/>
+              </a:ext>
+            </a:extLst>
+          </p:cNvPr>
+          <p:cNvSpPr>
+            <a:spLocks noGrp="1" noRot="1" noChangeAspect="1"/>
+          </p:cNvSpPr>
+          <p:nvPr>
+            <p:ph type="sldImg"/>
+          </p:nvPr>
+        </p:nvSpPr>
+        <p:spPr/>
+      </p:sp>
+      <p:sp>
+        <p:nvSpPr>
+          <p:cNvPr id="3" name="Notes Placeholder 2">
+            <a:extLst>
+              <a:ext uri="{FF2B5EF4-FFF2-40B4-BE49-F238E27FC236}">
+                <a16:creationId xmlns:a16="http://schemas.microsoft.com/office/drawing/2014/main" id="{4AD3E5CB-A8B8-7F4B-200F-94D044C81C3D}"/>
+              </a:ext>
+            </a:extLst>
+          </p:cNvPr>
+          <p:cNvSpPr>
+            <a:spLocks noGrp="1"/>
+          </p:cNvSpPr>
+          <p:nvPr>
+            <p:ph type="body" idx="1"/>
+          </p:nvPr>
+        </p:nvSpPr>
+        <p:spPr/>
+        <p:txBody>
+          <a:bodyPr/>
+          <a:lstStyle/>
+          <a:p>
+            <a:endParaRPr lang="en-US" dirty="0"/>
+          </a:p>
+        </p:txBody>
+      </p:sp>
+      <p:sp>
+        <p:nvSpPr>
+          <p:cNvPr id="4" name="Slide Number Placeholder 3">
+            <a:extLst>
+              <a:ext uri="{FF2B5EF4-FFF2-40B4-BE49-F238E27FC236}">
+                <a16:creationId xmlns:a16="http://schemas.microsoft.com/office/drawing/2014/main" id="{3F9D8EC2-522A-3A24-97FD-162C1CF3C132}"/>
+              </a:ext>
+            </a:extLst>
+          </p:cNvPr>
+          <p:cNvSpPr>
+            <a:spLocks noGrp="1"/>
+          </p:cNvSpPr>
+          <p:nvPr>
+            <p:ph type="sldNum" sz="quarter" idx="5"/>
+          </p:nvPr>
+        </p:nvSpPr>
+        <p:spPr/>
+        <p:txBody>
+          <a:bodyPr/>
+          <a:lstStyle/>
+          <a:p>
+            <a:fld id="{6FC8D850-966F-45A6-8DE7-15B891E7D40D}" type="slidenum">
+              <a:rPr lang="pt-BR" smtClean="0"/>
+              <a:t>4</a:t>
+            </a:fld>
+            <a:endParaRPr lang="pt-BR"/>
+          </a:p>
+        </p:txBody>
+      </p:sp>
+    </p:spTree>
+    <p:extLst>
+      <p:ext uri="{BB962C8B-B14F-4D97-AF65-F5344CB8AC3E}">
+        <p14:creationId xmlns:p14="http://schemas.microsoft.com/office/powerpoint/2010/main" val="1882326999"/>
+      </p:ext>
+    </p:extLst>
+  </p:cSld>
+  <p:clrMapOvr>
+    <a:masterClrMapping/>
+  </p:clrMapOvr>
+</p:notes>
+</file>
+
+<file path=ppt/notesSlides/notesSlide5.xml><?xml version="1.0" encoding="utf-8"?>
+<p:notes xmlns:a="http://schemas.openxmlformats.org/drawingml/2006/main" xmlns:r="http://schemas.openxmlformats.org/officeDocument/2006/relationships" xmlns:p="http://schemas.openxmlformats.org/presentationml/2006/main">
+  <p:cSld>
+    <p:spTree>
+      <p:nvGrpSpPr>
+        <p:cNvPr id="1" name="">
+          <a:extLst>
+            <a:ext uri="{FF2B5EF4-FFF2-40B4-BE49-F238E27FC236}">
+              <a16:creationId xmlns:a16="http://schemas.microsoft.com/office/drawing/2014/main" id="{478600EE-A6A2-2235-BCC6-6DE0C5D8DE78}"/>
+            </a:ext>
+          </a:extLst>
+        </p:cNvPr>
+        <p:cNvGrpSpPr/>
+        <p:nvPr/>
+      </p:nvGrpSpPr>
+      <p:grpSpPr>
+        <a:xfrm>
+          <a:off x="0" y="0"/>
+          <a:ext cx="0" cy="0"/>
+          <a:chOff x="0" y="0"/>
+          <a:chExt cx="0" cy="0"/>
+        </a:xfrm>
+      </p:grpSpPr>
+      <p:sp>
+        <p:nvSpPr>
+          <p:cNvPr id="2" name="Slide Image Placeholder 1">
+            <a:extLst>
+              <a:ext uri="{FF2B5EF4-FFF2-40B4-BE49-F238E27FC236}">
+                <a16:creationId xmlns:a16="http://schemas.microsoft.com/office/drawing/2014/main" id="{B1C41149-DCAF-E8F8-FB78-0B242E221738}"/>
+              </a:ext>
+            </a:extLst>
+          </p:cNvPr>
+          <p:cNvSpPr>
+            <a:spLocks noGrp="1" noRot="1" noChangeAspect="1"/>
+          </p:cNvSpPr>
+          <p:nvPr>
+            <p:ph type="sldImg"/>
+          </p:nvPr>
+        </p:nvSpPr>
+        <p:spPr/>
+      </p:sp>
+      <p:sp>
+        <p:nvSpPr>
+          <p:cNvPr id="3" name="Notes Placeholder 2">
+            <a:extLst>
+              <a:ext uri="{FF2B5EF4-FFF2-40B4-BE49-F238E27FC236}">
+                <a16:creationId xmlns:a16="http://schemas.microsoft.com/office/drawing/2014/main" id="{F4C5329E-ECB5-4CB1-3A33-CFC57176F475}"/>
+              </a:ext>
+            </a:extLst>
+          </p:cNvPr>
+          <p:cNvSpPr>
+            <a:spLocks noGrp="1"/>
+          </p:cNvSpPr>
+          <p:nvPr>
+            <p:ph type="body" idx="1"/>
+          </p:nvPr>
+        </p:nvSpPr>
+        <p:spPr/>
+        <p:txBody>
+          <a:bodyPr/>
+          <a:lstStyle/>
+          <a:p>
+            <a:endParaRPr lang="en-US" dirty="0"/>
+          </a:p>
+        </p:txBody>
+      </p:sp>
+      <p:sp>
+        <p:nvSpPr>
+          <p:cNvPr id="4" name="Slide Number Placeholder 3">
+            <a:extLst>
+              <a:ext uri="{FF2B5EF4-FFF2-40B4-BE49-F238E27FC236}">
+                <a16:creationId xmlns:a16="http://schemas.microsoft.com/office/drawing/2014/main" id="{37AB7C02-5FA9-66E4-2433-F97393A5C0BA}"/>
+              </a:ext>
+            </a:extLst>
+          </p:cNvPr>
+          <p:cNvSpPr>
+            <a:spLocks noGrp="1"/>
+          </p:cNvSpPr>
+          <p:nvPr>
+            <p:ph type="sldNum" sz="quarter" idx="5"/>
+          </p:nvPr>
+        </p:nvSpPr>
+        <p:spPr/>
+        <p:txBody>
+          <a:bodyPr/>
+          <a:lstStyle/>
+          <a:p>
+            <a:fld id="{6FC8D850-966F-45A6-8DE7-15B891E7D40D}" type="slidenum">
+              <a:rPr lang="pt-BR" smtClean="0"/>
+              <a:t>5</a:t>
+            </a:fld>
+            <a:endParaRPr lang="pt-BR"/>
+          </a:p>
+        </p:txBody>
+      </p:sp>
+    </p:spTree>
+    <p:extLst>
+      <p:ext uri="{BB962C8B-B14F-4D97-AF65-F5344CB8AC3E}">
+        <p14:creationId xmlns:p14="http://schemas.microsoft.com/office/powerpoint/2010/main" val="877577173"/>
+      </p:ext>
+    </p:extLst>
+  </p:cSld>
+  <p:clrMapOvr>
+    <a:masterClrMapping/>
+  </p:clrMapOvr>
+</p:notes>
+</file>
+
+<file path=ppt/notesSlides/notesSlide6.xml><?xml version="1.0" encoding="utf-8"?>
+<p:notes xmlns:a="http://schemas.openxmlformats.org/drawingml/2006/main" xmlns:r="http://schemas.openxmlformats.org/officeDocument/2006/relationships" xmlns:p="http://schemas.openxmlformats.org/presentationml/2006/main">
+  <p:cSld>
+    <p:spTree>
+      <p:nvGrpSpPr>
+        <p:cNvPr id="1" name="">
+          <a:extLst>
+            <a:ext uri="{FF2B5EF4-FFF2-40B4-BE49-F238E27FC236}">
+              <a16:creationId xmlns:a16="http://schemas.microsoft.com/office/drawing/2014/main" id="{92F2E69C-0407-4619-FFB1-7502CF033EBA}"/>
+            </a:ext>
+          </a:extLst>
+        </p:cNvPr>
+        <p:cNvGrpSpPr/>
+        <p:nvPr/>
+      </p:nvGrpSpPr>
+      <p:grpSpPr>
+        <a:xfrm>
+          <a:off x="0" y="0"/>
+          <a:ext cx="0" cy="0"/>
+          <a:chOff x="0" y="0"/>
+          <a:chExt cx="0" cy="0"/>
+        </a:xfrm>
+      </p:grpSpPr>
+      <p:sp>
+        <p:nvSpPr>
+          <p:cNvPr id="2" name="Slide Image Placeholder 1">
+            <a:extLst>
+              <a:ext uri="{FF2B5EF4-FFF2-40B4-BE49-F238E27FC236}">
+                <a16:creationId xmlns:a16="http://schemas.microsoft.com/office/drawing/2014/main" id="{E3C6894B-B13E-3C0F-BEC3-8A663E98508F}"/>
+              </a:ext>
+            </a:extLst>
+          </p:cNvPr>
+          <p:cNvSpPr>
+            <a:spLocks noGrp="1" noRot="1" noChangeAspect="1"/>
+          </p:cNvSpPr>
+          <p:nvPr>
+            <p:ph type="sldImg"/>
+          </p:nvPr>
+        </p:nvSpPr>
+        <p:spPr/>
+      </p:sp>
+      <p:sp>
+        <p:nvSpPr>
+          <p:cNvPr id="3" name="Notes Placeholder 2">
+            <a:extLst>
+              <a:ext uri="{FF2B5EF4-FFF2-40B4-BE49-F238E27FC236}">
+                <a16:creationId xmlns:a16="http://schemas.microsoft.com/office/drawing/2014/main" id="{B76A1B01-A242-46E3-F92E-FB0EA28821F9}"/>
+              </a:ext>
+            </a:extLst>
+          </p:cNvPr>
+          <p:cNvSpPr>
+            <a:spLocks noGrp="1"/>
+          </p:cNvSpPr>
+          <p:nvPr>
+            <p:ph type="body" idx="1"/>
+          </p:nvPr>
+        </p:nvSpPr>
+        <p:spPr/>
+        <p:txBody>
+          <a:bodyPr/>
+          <a:lstStyle/>
+          <a:p>
+            <a:endParaRPr lang="en-US" dirty="0"/>
+          </a:p>
+        </p:txBody>
+      </p:sp>
+      <p:sp>
+        <p:nvSpPr>
+          <p:cNvPr id="4" name="Slide Number Placeholder 3">
+            <a:extLst>
+              <a:ext uri="{FF2B5EF4-FFF2-40B4-BE49-F238E27FC236}">
+                <a16:creationId xmlns:a16="http://schemas.microsoft.com/office/drawing/2014/main" id="{4BA915CE-E13E-5840-D0C6-249ACB7C2C1D}"/>
+              </a:ext>
+            </a:extLst>
+          </p:cNvPr>
+          <p:cNvSpPr>
+            <a:spLocks noGrp="1"/>
+          </p:cNvSpPr>
+          <p:nvPr>
+            <p:ph type="sldNum" sz="quarter" idx="5"/>
+          </p:nvPr>
+        </p:nvSpPr>
+        <p:spPr/>
+        <p:txBody>
+          <a:bodyPr/>
+          <a:lstStyle/>
+          <a:p>
+            <a:fld id="{6FC8D850-966F-45A6-8DE7-15B891E7D40D}" type="slidenum">
+              <a:rPr lang="pt-BR" smtClean="0"/>
+              <a:t>6</a:t>
+            </a:fld>
+            <a:endParaRPr lang="pt-BR"/>
+          </a:p>
+        </p:txBody>
+      </p:sp>
+    </p:spTree>
+    <p:extLst>
+      <p:ext uri="{BB962C8B-B14F-4D97-AF65-F5344CB8AC3E}">
+        <p14:creationId xmlns:p14="http://schemas.microsoft.com/office/powerpoint/2010/main" val="5515121"/>
+      </p:ext>
+    </p:extLst>
+  </p:cSld>
+  <p:clrMapOvr>
+    <a:masterClrMapping/>
+  </p:clrMapOvr>
+</p:notes>
+</file>
+
+<file path=ppt/notesSlides/notesSlide7.xml><?xml version="1.0" encoding="utf-8"?>
+<p:notes xmlns:a="http://schemas.openxmlformats.org/drawingml/2006/main" xmlns:r="http://schemas.openxmlformats.org/officeDocument/2006/relationships" xmlns:p="http://schemas.openxmlformats.org/presentationml/2006/main">
+  <p:cSld>
+    <p:spTree>
+      <p:nvGrpSpPr>
+        <p:cNvPr id="1" name=""/>
+        <p:cNvGrpSpPr/>
+        <p:nvPr/>
+      </p:nvGrpSpPr>
+      <p:grpSpPr>
+        <a:xfrm>
+          <a:off x="0" y="0"/>
+          <a:ext cx="0" cy="0"/>
+          <a:chOff x="0" y="0"/>
+          <a:chExt cx="0" cy="0"/>
+        </a:xfrm>
+      </p:grpSpPr>
+      <p:sp>
+        <p:nvSpPr>
+          <p:cNvPr id="2" name="Espaço Reservado para Imagem de Slide 1"/>
+          <p:cNvSpPr>
+            <a:spLocks noGrp="1" noRot="1" noChangeAspect="1"/>
+          </p:cNvSpPr>
+          <p:nvPr>
+            <p:ph type="sldImg"/>
+          </p:nvPr>
+        </p:nvSpPr>
+        <p:spPr/>
+      </p:sp>
+      <p:sp>
+        <p:nvSpPr>
+          <p:cNvPr id="3" name="Espaço Reservado para Anotações 2"/>
+          <p:cNvSpPr>
+            <a:spLocks noGrp="1"/>
+          </p:cNvSpPr>
+          <p:nvPr>
+            <p:ph type="body" idx="1"/>
+          </p:nvPr>
+        </p:nvSpPr>
+        <p:spPr/>
+        <p:txBody>
+          <a:bodyPr/>
+          <a:lstStyle/>
+          <a:p>
+            <a:r>
+              <a:rPr lang="pt-BR" sz="1200" b="0" i="0" kern="1200" dirty="0">
+                <a:solidFill>
+                  <a:schemeClr val="tx1"/>
+                </a:solidFill>
+                <a:effectLst/>
+                <a:latin typeface="+mn-lt"/>
+                <a:ea typeface="+mn-ea"/>
+                <a:cs typeface="+mn-cs"/>
+              </a:rPr>
+              <a:t>Analogia: treinar um cão.</a:t>
+            </a:r>
+            <a:br>
+              <a:rPr lang="pt-BR" dirty="0"/>
+            </a:br>
+            <a:r>
+              <a:rPr lang="pt-BR" sz="1200" b="0" i="0" kern="1200" dirty="0">
+                <a:solidFill>
+                  <a:schemeClr val="tx1"/>
+                </a:solidFill>
+                <a:effectLst/>
+                <a:latin typeface="+mn-lt"/>
+                <a:ea typeface="+mn-ea"/>
+                <a:cs typeface="+mn-cs"/>
+              </a:rPr>
+              <a:t>“Sentou” → petisco (recompensa). “Pulou” → bronca (penalidade).</a:t>
+            </a:r>
+            <a:br>
+              <a:rPr lang="pt-BR" dirty="0"/>
+            </a:br>
+            <a:r>
+              <a:rPr lang="pt-BR" sz="1200" b="0" i="0" kern="1200" dirty="0">
+                <a:solidFill>
+                  <a:schemeClr val="tx1"/>
+                </a:solidFill>
+                <a:effectLst/>
+                <a:latin typeface="+mn-lt"/>
+                <a:ea typeface="+mn-ea"/>
+                <a:cs typeface="+mn-cs"/>
+              </a:rPr>
+              <a:t>Com o tempo ele descobre a ação que maximiza petiscos.</a:t>
+            </a:r>
+            <a:endParaRPr lang="en-US" dirty="0"/>
+          </a:p>
+        </p:txBody>
+      </p:sp>
+      <p:sp>
+        <p:nvSpPr>
+          <p:cNvPr id="4" name="Espaço Reservado para Número de Slide 3"/>
+          <p:cNvSpPr>
+            <a:spLocks noGrp="1"/>
+          </p:cNvSpPr>
+          <p:nvPr>
+            <p:ph type="sldNum" sz="quarter" idx="5"/>
+          </p:nvPr>
+        </p:nvSpPr>
+        <p:spPr/>
+        <p:txBody>
+          <a:bodyPr/>
+          <a:lstStyle/>
+          <a:p>
+            <a:fld id="{6FC8D850-966F-45A6-8DE7-15B891E7D40D}" type="slidenum">
+              <a:rPr lang="pt-BR" smtClean="0"/>
+              <a:t>7</a:t>
+            </a:fld>
+            <a:endParaRPr lang="pt-BR"/>
+          </a:p>
+        </p:txBody>
+      </p:sp>
+    </p:spTree>
+    <p:extLst>
+      <p:ext uri="{BB962C8B-B14F-4D97-AF65-F5344CB8AC3E}">
+        <p14:creationId xmlns:p14="http://schemas.microsoft.com/office/powerpoint/2010/main" val="1903007552"/>
+      </p:ext>
+    </p:extLst>
+  </p:cSld>
+  <p:clrMapOvr>
+    <a:masterClrMapping/>
+  </p:clrMapOvr>
+</p:notes>
+</file>
+
+<file path=ppt/notesSlides/notesSlide8.xml><?xml version="1.0" encoding="utf-8"?>
+<p:notes xmlns:a="http://schemas.openxmlformats.org/drawingml/2006/main" xmlns:r="http://schemas.openxmlformats.org/officeDocument/2006/relationships" xmlns:p="http://schemas.openxmlformats.org/presentationml/2006/main">
+  <p:cSld>
+    <p:spTree>
+      <p:nvGrpSpPr>
+        <p:cNvPr id="1" name=""/>
+        <p:cNvGrpSpPr/>
+        <p:nvPr/>
+      </p:nvGrpSpPr>
+      <p:grpSpPr>
+        <a:xfrm>
+          <a:off x="0" y="0"/>
+          <a:ext cx="0" cy="0"/>
+          <a:chOff x="0" y="0"/>
+          <a:chExt cx="0" cy="0"/>
+        </a:xfrm>
+      </p:grpSpPr>
+      <p:sp>
+        <p:nvSpPr>
+          <p:cNvPr id="2" name="Slide Image Placeholder 1"/>
+          <p:cNvSpPr>
+            <a:spLocks noGrp="1" noRot="1" noChangeAspect="1"/>
+          </p:cNvSpPr>
+          <p:nvPr>
+            <p:ph type="sldImg"/>
+          </p:nvPr>
+        </p:nvSpPr>
+        <p:spPr/>
+      </p:sp>
+      <p:sp>
+        <p:nvSpPr>
+          <p:cNvPr id="3" name="Notes Placeholder 2"/>
+          <p:cNvSpPr>
+            <a:spLocks noGrp="1"/>
+          </p:cNvSpPr>
+          <p:nvPr>
+            <p:ph type="body" idx="1"/>
+          </p:nvPr>
+        </p:nvSpPr>
+        <p:spPr/>
+        <p:txBody>
+          <a:bodyPr/>
+          <a:lstStyle/>
+          <a:p>
+            <a:r>
+              <a:rPr lang="pt-BR" dirty="0"/>
+              <a:t>O processo ocorre em etapas de tempo discretas (</a:t>
+            </a:r>
+            <a:r>
+              <a:rPr lang="pt-BR" sz="1200" kern="1200" dirty="0">
+                <a:solidFill>
+                  <a:schemeClr val="tx1"/>
+                </a:solidFill>
+                <a:effectLst/>
+                <a:latin typeface="+mn-lt"/>
+                <a:ea typeface="+mn-ea"/>
+                <a:cs typeface="+mn-cs"/>
+              </a:rPr>
+              <a:t>$t, t+1, t+2...$</a:t>
+            </a:r>
+            <a:r>
+              <a:rPr lang="pt-BR" dirty="0"/>
+              <a:t>).</a:t>
+            </a:r>
+            <a:endParaRPr lang="en-US" dirty="0"/>
+          </a:p>
+        </p:txBody>
+      </p:sp>
+      <p:sp>
+        <p:nvSpPr>
+          <p:cNvPr id="4" name="Slide Number Placeholder 3"/>
+          <p:cNvSpPr>
+            <a:spLocks noGrp="1"/>
+          </p:cNvSpPr>
+          <p:nvPr>
+            <p:ph type="sldNum" sz="quarter" idx="5"/>
+          </p:nvPr>
+        </p:nvSpPr>
+        <p:spPr/>
+        <p:txBody>
+          <a:bodyPr/>
+          <a:lstStyle/>
+          <a:p>
+            <a:fld id="{6FC8D850-966F-45A6-8DE7-15B891E7D40D}" type="slidenum">
+              <a:rPr lang="pt-BR" smtClean="0"/>
+              <a:t>8</a:t>
+            </a:fld>
+            <a:endParaRPr lang="pt-BR"/>
+          </a:p>
+        </p:txBody>
+      </p:sp>
+    </p:spTree>
+    <p:extLst>
+      <p:ext uri="{BB962C8B-B14F-4D97-AF65-F5344CB8AC3E}">
+        <p14:creationId xmlns:p14="http://schemas.microsoft.com/office/powerpoint/2010/main" val="2390445129"/>
+      </p:ext>
+    </p:extLst>
+  </p:cSld>
+  <p:clrMapOvr>
+    <a:masterClrMapping/>
+  </p:clrMapOvr>
+</p:notes>
+</file>
+
+<file path=ppt/notesSlides/notesSlide9.xml><?xml version="1.0" encoding="utf-8"?>
+<p:notes xmlns:a="http://schemas.openxmlformats.org/drawingml/2006/main" xmlns:r="http://schemas.openxmlformats.org/officeDocument/2006/relationships" xmlns:p="http://schemas.openxmlformats.org/presentationml/2006/main">
+  <p:cSld>
+    <p:spTree>
+      <p:nvGrpSpPr>
+        <p:cNvPr id="1" name="">
+          <a:extLst>
+            <a:ext uri="{FF2B5EF4-FFF2-40B4-BE49-F238E27FC236}">
+              <a16:creationId xmlns:a16="http://schemas.microsoft.com/office/drawing/2014/main" id="{0D0A5E72-3763-6194-5E85-BE26354035A3}"/>
+            </a:ext>
+          </a:extLst>
+        </p:cNvPr>
+        <p:cNvGrpSpPr/>
+        <p:nvPr/>
+      </p:nvGrpSpPr>
+      <p:grpSpPr>
+        <a:xfrm>
+          <a:off x="0" y="0"/>
+          <a:ext cx="0" cy="0"/>
+          <a:chOff x="0" y="0"/>
+          <a:chExt cx="0" cy="0"/>
+        </a:xfrm>
+      </p:grpSpPr>
+      <p:sp>
+        <p:nvSpPr>
+          <p:cNvPr id="2" name="Slide Image Placeholder 1">
+            <a:extLst>
+              <a:ext uri="{FF2B5EF4-FFF2-40B4-BE49-F238E27FC236}">
+                <a16:creationId xmlns:a16="http://schemas.microsoft.com/office/drawing/2014/main" id="{82466988-6655-8B01-840E-0BE3EDB68F07}"/>
+              </a:ext>
+            </a:extLst>
+          </p:cNvPr>
+          <p:cNvSpPr>
+            <a:spLocks noGrp="1" noRot="1" noChangeAspect="1"/>
+          </p:cNvSpPr>
+          <p:nvPr>
+            <p:ph type="sldImg"/>
+          </p:nvPr>
+        </p:nvSpPr>
+        <p:spPr/>
+      </p:sp>
+      <p:sp>
+        <p:nvSpPr>
+          <p:cNvPr id="3" name="Notes Placeholder 2">
+            <a:extLst>
+              <a:ext uri="{FF2B5EF4-FFF2-40B4-BE49-F238E27FC236}">
+                <a16:creationId xmlns:a16="http://schemas.microsoft.com/office/drawing/2014/main" id="{5E09F3D0-11CA-2E8D-04C5-104C59DCE708}"/>
+              </a:ext>
+            </a:extLst>
+          </p:cNvPr>
+          <p:cNvSpPr>
+            <a:spLocks noGrp="1"/>
+          </p:cNvSpPr>
+          <p:nvPr>
+            <p:ph type="body" idx="1"/>
+          </p:nvPr>
+        </p:nvSpPr>
+        <p:spPr/>
+        <p:txBody>
+          <a:bodyPr/>
+          <a:lstStyle/>
+          <a:p>
+            <a:r>
+              <a:rPr lang="pt-BR" dirty="0"/>
+              <a:t>O processo ocorre em etapas de tempo discretas (</a:t>
+            </a:r>
+            <a:r>
+              <a:rPr lang="pt-BR" sz="1200" kern="1200" dirty="0">
+                <a:solidFill>
+                  <a:schemeClr val="tx1"/>
+                </a:solidFill>
+                <a:effectLst/>
+                <a:latin typeface="+mn-lt"/>
+                <a:ea typeface="+mn-ea"/>
+                <a:cs typeface="+mn-cs"/>
+              </a:rPr>
+              <a:t>$t, t+1, t+2...$</a:t>
+            </a:r>
+            <a:r>
+              <a:rPr lang="pt-BR" dirty="0"/>
+              <a:t>).</a:t>
+            </a:r>
+            <a:endParaRPr lang="en-US" dirty="0"/>
+          </a:p>
+        </p:txBody>
+      </p:sp>
+      <p:sp>
+        <p:nvSpPr>
+          <p:cNvPr id="4" name="Slide Number Placeholder 3">
+            <a:extLst>
+              <a:ext uri="{FF2B5EF4-FFF2-40B4-BE49-F238E27FC236}">
+                <a16:creationId xmlns:a16="http://schemas.microsoft.com/office/drawing/2014/main" id="{68F0BCD7-F825-C67D-D845-8316B4C4B6D6}"/>
+              </a:ext>
+            </a:extLst>
+          </p:cNvPr>
+          <p:cNvSpPr>
+            <a:spLocks noGrp="1"/>
+          </p:cNvSpPr>
+          <p:nvPr>
+            <p:ph type="sldNum" sz="quarter" idx="5"/>
+          </p:nvPr>
+        </p:nvSpPr>
+        <p:spPr/>
+        <p:txBody>
+          <a:bodyPr/>
+          <a:lstStyle/>
+          <a:p>
+            <a:fld id="{6FC8D850-966F-45A6-8DE7-15B891E7D40D}" type="slidenum">
+              <a:rPr lang="pt-BR" smtClean="0"/>
+              <a:t>9</a:t>
+            </a:fld>
+            <a:endParaRPr lang="pt-BR"/>
+          </a:p>
+        </p:txBody>
+      </p:sp>
+    </p:spTree>
+    <p:extLst>
+      <p:ext uri="{BB962C8B-B14F-4D97-AF65-F5344CB8AC3E}">
+        <p14:creationId xmlns:p14="http://schemas.microsoft.com/office/powerpoint/2010/main" val="3921267477"/>
       </p:ext>
     </p:extLst>
   </p:cSld>
@@ -4015,7 +4910,7 @@
           <p:cNvPr id="2" name="Título 1">
             <a:extLst>
               <a:ext uri="{FF2B5EF4-FFF2-40B4-BE49-F238E27FC236}">
-                <a16:creationId xmlns="" xmlns:a16="http://schemas.microsoft.com/office/drawing/2014/main" id="{1DB9B4FF-B06E-403C-A326-BDC64D8FF94E}"/>
+                <a16:creationId xmlns:a16="http://schemas.microsoft.com/office/drawing/2014/main" id="{1DB9B4FF-B06E-403C-A326-BDC64D8FF94E}"/>
               </a:ext>
             </a:extLst>
           </p:cNvPr>
@@ -4052,7 +4947,7 @@
           <p:cNvPr id="3" name="Subtítulo 2">
             <a:extLst>
               <a:ext uri="{FF2B5EF4-FFF2-40B4-BE49-F238E27FC236}">
-                <a16:creationId xmlns="" xmlns:a16="http://schemas.microsoft.com/office/drawing/2014/main" id="{247BDFCE-746E-45BF-A319-4733D58D1632}"/>
+                <a16:creationId xmlns:a16="http://schemas.microsoft.com/office/drawing/2014/main" id="{247BDFCE-746E-45BF-A319-4733D58D1632}"/>
               </a:ext>
             </a:extLst>
           </p:cNvPr>
@@ -4122,7 +5017,7 @@
           <p:cNvPr id="4" name="Espaço Reservado para Data 3">
             <a:extLst>
               <a:ext uri="{FF2B5EF4-FFF2-40B4-BE49-F238E27FC236}">
-                <a16:creationId xmlns="" xmlns:a16="http://schemas.microsoft.com/office/drawing/2014/main" id="{9EDE2778-5372-4104-B96D-968184DA8288}"/>
+                <a16:creationId xmlns:a16="http://schemas.microsoft.com/office/drawing/2014/main" id="{9EDE2778-5372-4104-B96D-968184DA8288}"/>
               </a:ext>
             </a:extLst>
           </p:cNvPr>
@@ -4140,7 +5035,7 @@
           <a:p>
             <a:fld id="{63289F7E-B80B-496E-81B4-D396C37C9454}" type="datetimeFigureOut">
               <a:rPr lang="pt-BR" smtClean="0"/>
-              <a:t>26/04/2026</a:t>
+              <a:t>03/05/2026</a:t>
             </a:fld>
             <a:endParaRPr lang="pt-BR"/>
           </a:p>
@@ -4151,7 +5046,7 @@
           <p:cNvPr id="5" name="Espaço Reservado para Rodapé 4">
             <a:extLst>
               <a:ext uri="{FF2B5EF4-FFF2-40B4-BE49-F238E27FC236}">
-                <a16:creationId xmlns="" xmlns:a16="http://schemas.microsoft.com/office/drawing/2014/main" id="{C1DD0F41-C861-4051-988D-3024A37A4B93}"/>
+                <a16:creationId xmlns:a16="http://schemas.microsoft.com/office/drawing/2014/main" id="{C1DD0F41-C861-4051-988D-3024A37A4B93}"/>
               </a:ext>
             </a:extLst>
           </p:cNvPr>
@@ -4176,7 +5071,7 @@
           <p:cNvPr id="6" name="Espaço Reservado para Número de Slide 5">
             <a:extLst>
               <a:ext uri="{FF2B5EF4-FFF2-40B4-BE49-F238E27FC236}">
-                <a16:creationId xmlns="" xmlns:a16="http://schemas.microsoft.com/office/drawing/2014/main" id="{07E5967E-D980-431A-A5DB-3F0C5030A81E}"/>
+                <a16:creationId xmlns:a16="http://schemas.microsoft.com/office/drawing/2014/main" id="{07E5967E-D980-431A-A5DB-3F0C5030A81E}"/>
               </a:ext>
             </a:extLst>
           </p:cNvPr>
@@ -4235,7 +5130,7 @@
           <p:cNvPr id="2" name="Título 1">
             <a:extLst>
               <a:ext uri="{FF2B5EF4-FFF2-40B4-BE49-F238E27FC236}">
-                <a16:creationId xmlns="" xmlns:a16="http://schemas.microsoft.com/office/drawing/2014/main" id="{9036C49F-3E68-4175-81BA-3C3FEE44308A}"/>
+                <a16:creationId xmlns:a16="http://schemas.microsoft.com/office/drawing/2014/main" id="{9036C49F-3E68-4175-81BA-3C3FEE44308A}"/>
               </a:ext>
             </a:extLst>
           </p:cNvPr>
@@ -4263,7 +5158,7 @@
           <p:cNvPr id="3" name="Espaço Reservado para Texto Vertical 2">
             <a:extLst>
               <a:ext uri="{FF2B5EF4-FFF2-40B4-BE49-F238E27FC236}">
-                <a16:creationId xmlns="" xmlns:a16="http://schemas.microsoft.com/office/drawing/2014/main" id="{426FA736-3DD3-4D4E-B57B-BBE1D8F7D424}"/>
+                <a16:creationId xmlns:a16="http://schemas.microsoft.com/office/drawing/2014/main" id="{426FA736-3DD3-4D4E-B57B-BBE1D8F7D424}"/>
               </a:ext>
             </a:extLst>
           </p:cNvPr>
@@ -4320,7 +5215,7 @@
           <p:cNvPr id="4" name="Espaço Reservado para Data 3">
             <a:extLst>
               <a:ext uri="{FF2B5EF4-FFF2-40B4-BE49-F238E27FC236}">
-                <a16:creationId xmlns="" xmlns:a16="http://schemas.microsoft.com/office/drawing/2014/main" id="{99E8855C-D8FD-48F6-B14E-861E0DE4D915}"/>
+                <a16:creationId xmlns:a16="http://schemas.microsoft.com/office/drawing/2014/main" id="{99E8855C-D8FD-48F6-B14E-861E0DE4D915}"/>
               </a:ext>
             </a:extLst>
           </p:cNvPr>
@@ -4338,7 +5233,7 @@
           <a:p>
             <a:fld id="{63289F7E-B80B-496E-81B4-D396C37C9454}" type="datetimeFigureOut">
               <a:rPr lang="pt-BR" smtClean="0"/>
-              <a:t>26/04/2026</a:t>
+              <a:t>03/05/2026</a:t>
             </a:fld>
             <a:endParaRPr lang="pt-BR"/>
           </a:p>
@@ -4349,7 +5244,7 @@
           <p:cNvPr id="5" name="Espaço Reservado para Rodapé 4">
             <a:extLst>
               <a:ext uri="{FF2B5EF4-FFF2-40B4-BE49-F238E27FC236}">
-                <a16:creationId xmlns="" xmlns:a16="http://schemas.microsoft.com/office/drawing/2014/main" id="{97C0BB88-2F21-42A5-ACFF-83DA47F2D340}"/>
+                <a16:creationId xmlns:a16="http://schemas.microsoft.com/office/drawing/2014/main" id="{97C0BB88-2F21-42A5-ACFF-83DA47F2D340}"/>
               </a:ext>
             </a:extLst>
           </p:cNvPr>
@@ -4374,7 +5269,7 @@
           <p:cNvPr id="6" name="Espaço Reservado para Número de Slide 5">
             <a:extLst>
               <a:ext uri="{FF2B5EF4-FFF2-40B4-BE49-F238E27FC236}">
-                <a16:creationId xmlns="" xmlns:a16="http://schemas.microsoft.com/office/drawing/2014/main" id="{6CB462B3-1F22-4C05-B4B8-7A279FB7D5E9}"/>
+                <a16:creationId xmlns:a16="http://schemas.microsoft.com/office/drawing/2014/main" id="{6CB462B3-1F22-4C05-B4B8-7A279FB7D5E9}"/>
               </a:ext>
             </a:extLst>
           </p:cNvPr>
@@ -4433,7 +5328,7 @@
           <p:cNvPr id="2" name="Título Vertical 1">
             <a:extLst>
               <a:ext uri="{FF2B5EF4-FFF2-40B4-BE49-F238E27FC236}">
-                <a16:creationId xmlns="" xmlns:a16="http://schemas.microsoft.com/office/drawing/2014/main" id="{EAEAB728-701C-4207-A9D5-23FF45C60502}"/>
+                <a16:creationId xmlns:a16="http://schemas.microsoft.com/office/drawing/2014/main" id="{EAEAB728-701C-4207-A9D5-23FF45C60502}"/>
               </a:ext>
             </a:extLst>
           </p:cNvPr>
@@ -4466,7 +5361,7 @@
           <p:cNvPr id="3" name="Espaço Reservado para Texto Vertical 2">
             <a:extLst>
               <a:ext uri="{FF2B5EF4-FFF2-40B4-BE49-F238E27FC236}">
-                <a16:creationId xmlns="" xmlns:a16="http://schemas.microsoft.com/office/drawing/2014/main" id="{BA8C8CCF-7823-480A-9A19-0F664DD17E3B}"/>
+                <a16:creationId xmlns:a16="http://schemas.microsoft.com/office/drawing/2014/main" id="{BA8C8CCF-7823-480A-9A19-0F664DD17E3B}"/>
               </a:ext>
             </a:extLst>
           </p:cNvPr>
@@ -4528,7 +5423,7 @@
           <p:cNvPr id="4" name="Espaço Reservado para Data 3">
             <a:extLst>
               <a:ext uri="{FF2B5EF4-FFF2-40B4-BE49-F238E27FC236}">
-                <a16:creationId xmlns="" xmlns:a16="http://schemas.microsoft.com/office/drawing/2014/main" id="{721D5734-7B1F-425D-942F-6EB73344027C}"/>
+                <a16:creationId xmlns:a16="http://schemas.microsoft.com/office/drawing/2014/main" id="{721D5734-7B1F-425D-942F-6EB73344027C}"/>
               </a:ext>
             </a:extLst>
           </p:cNvPr>
@@ -4546,7 +5441,7 @@
           <a:p>
             <a:fld id="{63289F7E-B80B-496E-81B4-D396C37C9454}" type="datetimeFigureOut">
               <a:rPr lang="pt-BR" smtClean="0"/>
-              <a:t>26/04/2026</a:t>
+              <a:t>03/05/2026</a:t>
             </a:fld>
             <a:endParaRPr lang="pt-BR"/>
           </a:p>
@@ -4557,7 +5452,7 @@
           <p:cNvPr id="5" name="Espaço Reservado para Rodapé 4">
             <a:extLst>
               <a:ext uri="{FF2B5EF4-FFF2-40B4-BE49-F238E27FC236}">
-                <a16:creationId xmlns="" xmlns:a16="http://schemas.microsoft.com/office/drawing/2014/main" id="{1E1AAEAC-F08D-45FE-89EC-B1B349A868C9}"/>
+                <a16:creationId xmlns:a16="http://schemas.microsoft.com/office/drawing/2014/main" id="{1E1AAEAC-F08D-45FE-89EC-B1B349A868C9}"/>
               </a:ext>
             </a:extLst>
           </p:cNvPr>
@@ -4582,7 +5477,7 @@
           <p:cNvPr id="6" name="Espaço Reservado para Número de Slide 5">
             <a:extLst>
               <a:ext uri="{FF2B5EF4-FFF2-40B4-BE49-F238E27FC236}">
-                <a16:creationId xmlns="" xmlns:a16="http://schemas.microsoft.com/office/drawing/2014/main" id="{BAA44493-9911-47B2-87A6-C2141A972BC8}"/>
+                <a16:creationId xmlns:a16="http://schemas.microsoft.com/office/drawing/2014/main" id="{BAA44493-9911-47B2-87A6-C2141A972BC8}"/>
               </a:ext>
             </a:extLst>
           </p:cNvPr>
@@ -4641,7 +5536,7 @@
           <p:cNvPr id="2" name="Título 1">
             <a:extLst>
               <a:ext uri="{FF2B5EF4-FFF2-40B4-BE49-F238E27FC236}">
-                <a16:creationId xmlns="" xmlns:a16="http://schemas.microsoft.com/office/drawing/2014/main" id="{71BD44A5-8F21-4626-A01D-48A1C874B1D5}"/>
+                <a16:creationId xmlns:a16="http://schemas.microsoft.com/office/drawing/2014/main" id="{71BD44A5-8F21-4626-A01D-48A1C874B1D5}"/>
               </a:ext>
             </a:extLst>
           </p:cNvPr>
@@ -4669,7 +5564,7 @@
           <p:cNvPr id="3" name="Espaço Reservado para Conteúdo 2">
             <a:extLst>
               <a:ext uri="{FF2B5EF4-FFF2-40B4-BE49-F238E27FC236}">
-                <a16:creationId xmlns="" xmlns:a16="http://schemas.microsoft.com/office/drawing/2014/main" id="{B79E8085-65A9-48AA-951D-71D978BFF4ED}"/>
+                <a16:creationId xmlns:a16="http://schemas.microsoft.com/office/drawing/2014/main" id="{B79E8085-65A9-48AA-951D-71D978BFF4ED}"/>
               </a:ext>
             </a:extLst>
           </p:cNvPr>
@@ -4726,7 +5621,7 @@
           <p:cNvPr id="4" name="Espaço Reservado para Data 3">
             <a:extLst>
               <a:ext uri="{FF2B5EF4-FFF2-40B4-BE49-F238E27FC236}">
-                <a16:creationId xmlns="" xmlns:a16="http://schemas.microsoft.com/office/drawing/2014/main" id="{F05BE1AF-51EA-425D-B188-DE7BD675009F}"/>
+                <a16:creationId xmlns:a16="http://schemas.microsoft.com/office/drawing/2014/main" id="{F05BE1AF-51EA-425D-B188-DE7BD675009F}"/>
               </a:ext>
             </a:extLst>
           </p:cNvPr>
@@ -4744,7 +5639,7 @@
           <a:p>
             <a:fld id="{63289F7E-B80B-496E-81B4-D396C37C9454}" type="datetimeFigureOut">
               <a:rPr lang="pt-BR" smtClean="0"/>
-              <a:t>26/04/2026</a:t>
+              <a:t>03/05/2026</a:t>
             </a:fld>
             <a:endParaRPr lang="pt-BR"/>
           </a:p>
@@ -4755,7 +5650,7 @@
           <p:cNvPr id="5" name="Espaço Reservado para Rodapé 4">
             <a:extLst>
               <a:ext uri="{FF2B5EF4-FFF2-40B4-BE49-F238E27FC236}">
-                <a16:creationId xmlns="" xmlns:a16="http://schemas.microsoft.com/office/drawing/2014/main" id="{121BE632-29CF-4CB9-B365-C9EF38F89BE6}"/>
+                <a16:creationId xmlns:a16="http://schemas.microsoft.com/office/drawing/2014/main" id="{121BE632-29CF-4CB9-B365-C9EF38F89BE6}"/>
               </a:ext>
             </a:extLst>
           </p:cNvPr>
@@ -4780,7 +5675,7 @@
           <p:cNvPr id="6" name="Espaço Reservado para Número de Slide 5">
             <a:extLst>
               <a:ext uri="{FF2B5EF4-FFF2-40B4-BE49-F238E27FC236}">
-                <a16:creationId xmlns="" xmlns:a16="http://schemas.microsoft.com/office/drawing/2014/main" id="{60CF3DD1-9AEC-4A57-B461-4E4DD86FAC18}"/>
+                <a16:creationId xmlns:a16="http://schemas.microsoft.com/office/drawing/2014/main" id="{60CF3DD1-9AEC-4A57-B461-4E4DD86FAC18}"/>
               </a:ext>
             </a:extLst>
           </p:cNvPr>
@@ -4839,7 +5734,7 @@
           <p:cNvPr id="2" name="Título 1">
             <a:extLst>
               <a:ext uri="{FF2B5EF4-FFF2-40B4-BE49-F238E27FC236}">
-                <a16:creationId xmlns="" xmlns:a16="http://schemas.microsoft.com/office/drawing/2014/main" id="{34AB2FF0-A4D7-4E28-991D-FF26140D5988}"/>
+                <a16:creationId xmlns:a16="http://schemas.microsoft.com/office/drawing/2014/main" id="{34AB2FF0-A4D7-4E28-991D-FF26140D5988}"/>
               </a:ext>
             </a:extLst>
           </p:cNvPr>
@@ -4876,7 +5771,7 @@
           <p:cNvPr id="3" name="Espaço Reservado para Texto 2">
             <a:extLst>
               <a:ext uri="{FF2B5EF4-FFF2-40B4-BE49-F238E27FC236}">
-                <a16:creationId xmlns="" xmlns:a16="http://schemas.microsoft.com/office/drawing/2014/main" id="{E2AC45B0-4145-40DB-8E61-105461170604}"/>
+                <a16:creationId xmlns:a16="http://schemas.microsoft.com/office/drawing/2014/main" id="{E2AC45B0-4145-40DB-8E61-105461170604}"/>
               </a:ext>
             </a:extLst>
           </p:cNvPr>
@@ -5001,7 +5896,7 @@
           <p:cNvPr id="4" name="Espaço Reservado para Data 3">
             <a:extLst>
               <a:ext uri="{FF2B5EF4-FFF2-40B4-BE49-F238E27FC236}">
-                <a16:creationId xmlns="" xmlns:a16="http://schemas.microsoft.com/office/drawing/2014/main" id="{50F1D3FB-740A-4EBA-A309-2CE71D12ECFB}"/>
+                <a16:creationId xmlns:a16="http://schemas.microsoft.com/office/drawing/2014/main" id="{50F1D3FB-740A-4EBA-A309-2CE71D12ECFB}"/>
               </a:ext>
             </a:extLst>
           </p:cNvPr>
@@ -5019,7 +5914,7 @@
           <a:p>
             <a:fld id="{63289F7E-B80B-496E-81B4-D396C37C9454}" type="datetimeFigureOut">
               <a:rPr lang="pt-BR" smtClean="0"/>
-              <a:t>26/04/2026</a:t>
+              <a:t>03/05/2026</a:t>
             </a:fld>
             <a:endParaRPr lang="pt-BR"/>
           </a:p>
@@ -5030,7 +5925,7 @@
           <p:cNvPr id="5" name="Espaço Reservado para Rodapé 4">
             <a:extLst>
               <a:ext uri="{FF2B5EF4-FFF2-40B4-BE49-F238E27FC236}">
-                <a16:creationId xmlns="" xmlns:a16="http://schemas.microsoft.com/office/drawing/2014/main" id="{BDCAB18F-8715-4465-A940-F9C193A2ACE9}"/>
+                <a16:creationId xmlns:a16="http://schemas.microsoft.com/office/drawing/2014/main" id="{BDCAB18F-8715-4465-A940-F9C193A2ACE9}"/>
               </a:ext>
             </a:extLst>
           </p:cNvPr>
@@ -5055,7 +5950,7 @@
           <p:cNvPr id="6" name="Espaço Reservado para Número de Slide 5">
             <a:extLst>
               <a:ext uri="{FF2B5EF4-FFF2-40B4-BE49-F238E27FC236}">
-                <a16:creationId xmlns="" xmlns:a16="http://schemas.microsoft.com/office/drawing/2014/main" id="{353466C6-8248-429F-8056-FF040BF509EB}"/>
+                <a16:creationId xmlns:a16="http://schemas.microsoft.com/office/drawing/2014/main" id="{353466C6-8248-429F-8056-FF040BF509EB}"/>
               </a:ext>
             </a:extLst>
           </p:cNvPr>
@@ -5114,7 +6009,7 @@
           <p:cNvPr id="2" name="Título 1">
             <a:extLst>
               <a:ext uri="{FF2B5EF4-FFF2-40B4-BE49-F238E27FC236}">
-                <a16:creationId xmlns="" xmlns:a16="http://schemas.microsoft.com/office/drawing/2014/main" id="{BC7BB9F0-F14B-4A91-B2B7-35BC47FE4DE7}"/>
+                <a16:creationId xmlns:a16="http://schemas.microsoft.com/office/drawing/2014/main" id="{BC7BB9F0-F14B-4A91-B2B7-35BC47FE4DE7}"/>
               </a:ext>
             </a:extLst>
           </p:cNvPr>
@@ -5142,7 +6037,7 @@
           <p:cNvPr id="3" name="Espaço Reservado para Conteúdo 2">
             <a:extLst>
               <a:ext uri="{FF2B5EF4-FFF2-40B4-BE49-F238E27FC236}">
-                <a16:creationId xmlns="" xmlns:a16="http://schemas.microsoft.com/office/drawing/2014/main" id="{EC1FC1C4-73DA-47A6-8496-B0B457F7D39A}"/>
+                <a16:creationId xmlns:a16="http://schemas.microsoft.com/office/drawing/2014/main" id="{EC1FC1C4-73DA-47A6-8496-B0B457F7D39A}"/>
               </a:ext>
             </a:extLst>
           </p:cNvPr>
@@ -5204,7 +6099,7 @@
           <p:cNvPr id="4" name="Espaço Reservado para Conteúdo 3">
             <a:extLst>
               <a:ext uri="{FF2B5EF4-FFF2-40B4-BE49-F238E27FC236}">
-                <a16:creationId xmlns="" xmlns:a16="http://schemas.microsoft.com/office/drawing/2014/main" id="{E92F06A8-A449-4D92-9912-76873E529B38}"/>
+                <a16:creationId xmlns:a16="http://schemas.microsoft.com/office/drawing/2014/main" id="{E92F06A8-A449-4D92-9912-76873E529B38}"/>
               </a:ext>
             </a:extLst>
           </p:cNvPr>
@@ -5266,7 +6161,7 @@
           <p:cNvPr id="5" name="Espaço Reservado para Data 4">
             <a:extLst>
               <a:ext uri="{FF2B5EF4-FFF2-40B4-BE49-F238E27FC236}">
-                <a16:creationId xmlns="" xmlns:a16="http://schemas.microsoft.com/office/drawing/2014/main" id="{938070A4-BC2F-4D55-BD8D-DEAF11BB9EE9}"/>
+                <a16:creationId xmlns:a16="http://schemas.microsoft.com/office/drawing/2014/main" id="{938070A4-BC2F-4D55-BD8D-DEAF11BB9EE9}"/>
               </a:ext>
             </a:extLst>
           </p:cNvPr>
@@ -5284,7 +6179,7 @@
           <a:p>
             <a:fld id="{63289F7E-B80B-496E-81B4-D396C37C9454}" type="datetimeFigureOut">
               <a:rPr lang="pt-BR" smtClean="0"/>
-              <a:t>26/04/2026</a:t>
+              <a:t>03/05/2026</a:t>
             </a:fld>
             <a:endParaRPr lang="pt-BR"/>
           </a:p>
@@ -5295,7 +6190,7 @@
           <p:cNvPr id="6" name="Espaço Reservado para Rodapé 5">
             <a:extLst>
               <a:ext uri="{FF2B5EF4-FFF2-40B4-BE49-F238E27FC236}">
-                <a16:creationId xmlns="" xmlns:a16="http://schemas.microsoft.com/office/drawing/2014/main" id="{45CC2DB8-844A-465F-BA9A-7734C80C7F43}"/>
+                <a16:creationId xmlns:a16="http://schemas.microsoft.com/office/drawing/2014/main" id="{45CC2DB8-844A-465F-BA9A-7734C80C7F43}"/>
               </a:ext>
             </a:extLst>
           </p:cNvPr>
@@ -5320,7 +6215,7 @@
           <p:cNvPr id="7" name="Espaço Reservado para Número de Slide 6">
             <a:extLst>
               <a:ext uri="{FF2B5EF4-FFF2-40B4-BE49-F238E27FC236}">
-                <a16:creationId xmlns="" xmlns:a16="http://schemas.microsoft.com/office/drawing/2014/main" id="{4CC606A8-097B-4040-94E0-CD8C88280D8F}"/>
+                <a16:creationId xmlns:a16="http://schemas.microsoft.com/office/drawing/2014/main" id="{4CC606A8-097B-4040-94E0-CD8C88280D8F}"/>
               </a:ext>
             </a:extLst>
           </p:cNvPr>
@@ -5379,7 +6274,7 @@
           <p:cNvPr id="2" name="Título 1">
             <a:extLst>
               <a:ext uri="{FF2B5EF4-FFF2-40B4-BE49-F238E27FC236}">
-                <a16:creationId xmlns="" xmlns:a16="http://schemas.microsoft.com/office/drawing/2014/main" id="{76D66686-0143-4CB6-8C09-BA326F1E7ACA}"/>
+                <a16:creationId xmlns:a16="http://schemas.microsoft.com/office/drawing/2014/main" id="{76D66686-0143-4CB6-8C09-BA326F1E7ACA}"/>
               </a:ext>
             </a:extLst>
           </p:cNvPr>
@@ -5412,7 +6307,7 @@
           <p:cNvPr id="3" name="Espaço Reservado para Texto 2">
             <a:extLst>
               <a:ext uri="{FF2B5EF4-FFF2-40B4-BE49-F238E27FC236}">
-                <a16:creationId xmlns="" xmlns:a16="http://schemas.microsoft.com/office/drawing/2014/main" id="{0227AB85-F59E-4BCE-B846-4FA0992C2F23}"/>
+                <a16:creationId xmlns:a16="http://schemas.microsoft.com/office/drawing/2014/main" id="{0227AB85-F59E-4BCE-B846-4FA0992C2F23}"/>
               </a:ext>
             </a:extLst>
           </p:cNvPr>
@@ -5483,7 +6378,7 @@
           <p:cNvPr id="4" name="Espaço Reservado para Conteúdo 3">
             <a:extLst>
               <a:ext uri="{FF2B5EF4-FFF2-40B4-BE49-F238E27FC236}">
-                <a16:creationId xmlns="" xmlns:a16="http://schemas.microsoft.com/office/drawing/2014/main" id="{3373456C-7319-4D0A-827D-D29F6B083F5D}"/>
+                <a16:creationId xmlns:a16="http://schemas.microsoft.com/office/drawing/2014/main" id="{3373456C-7319-4D0A-827D-D29F6B083F5D}"/>
               </a:ext>
             </a:extLst>
           </p:cNvPr>
@@ -5545,7 +6440,7 @@
           <p:cNvPr id="5" name="Espaço Reservado para Texto 4">
             <a:extLst>
               <a:ext uri="{FF2B5EF4-FFF2-40B4-BE49-F238E27FC236}">
-                <a16:creationId xmlns="" xmlns:a16="http://schemas.microsoft.com/office/drawing/2014/main" id="{4CD109D0-2E83-4262-8029-A871CEC47406}"/>
+                <a16:creationId xmlns:a16="http://schemas.microsoft.com/office/drawing/2014/main" id="{4CD109D0-2E83-4262-8029-A871CEC47406}"/>
               </a:ext>
             </a:extLst>
           </p:cNvPr>
@@ -5616,7 +6511,7 @@
           <p:cNvPr id="6" name="Espaço Reservado para Conteúdo 5">
             <a:extLst>
               <a:ext uri="{FF2B5EF4-FFF2-40B4-BE49-F238E27FC236}">
-                <a16:creationId xmlns="" xmlns:a16="http://schemas.microsoft.com/office/drawing/2014/main" id="{AD706E3A-CFBB-4A6C-A65F-D0360A9E74FE}"/>
+                <a16:creationId xmlns:a16="http://schemas.microsoft.com/office/drawing/2014/main" id="{AD706E3A-CFBB-4A6C-A65F-D0360A9E74FE}"/>
               </a:ext>
             </a:extLst>
           </p:cNvPr>
@@ -5678,7 +6573,7 @@
           <p:cNvPr id="7" name="Espaço Reservado para Data 6">
             <a:extLst>
               <a:ext uri="{FF2B5EF4-FFF2-40B4-BE49-F238E27FC236}">
-                <a16:creationId xmlns="" xmlns:a16="http://schemas.microsoft.com/office/drawing/2014/main" id="{4172C0E5-5AF0-4805-BB51-443733CD2BD5}"/>
+                <a16:creationId xmlns:a16="http://schemas.microsoft.com/office/drawing/2014/main" id="{4172C0E5-5AF0-4805-BB51-443733CD2BD5}"/>
               </a:ext>
             </a:extLst>
           </p:cNvPr>
@@ -5696,7 +6591,7 @@
           <a:p>
             <a:fld id="{63289F7E-B80B-496E-81B4-D396C37C9454}" type="datetimeFigureOut">
               <a:rPr lang="pt-BR" smtClean="0"/>
-              <a:t>26/04/2026</a:t>
+              <a:t>03/05/2026</a:t>
             </a:fld>
             <a:endParaRPr lang="pt-BR"/>
           </a:p>
@@ -5707,7 +6602,7 @@
           <p:cNvPr id="8" name="Espaço Reservado para Rodapé 7">
             <a:extLst>
               <a:ext uri="{FF2B5EF4-FFF2-40B4-BE49-F238E27FC236}">
-                <a16:creationId xmlns="" xmlns:a16="http://schemas.microsoft.com/office/drawing/2014/main" id="{0E801648-156F-497E-99CF-797DF48051E1}"/>
+                <a16:creationId xmlns:a16="http://schemas.microsoft.com/office/drawing/2014/main" id="{0E801648-156F-497E-99CF-797DF48051E1}"/>
               </a:ext>
             </a:extLst>
           </p:cNvPr>
@@ -5732,7 +6627,7 @@
           <p:cNvPr id="9" name="Espaço Reservado para Número de Slide 8">
             <a:extLst>
               <a:ext uri="{FF2B5EF4-FFF2-40B4-BE49-F238E27FC236}">
-                <a16:creationId xmlns="" xmlns:a16="http://schemas.microsoft.com/office/drawing/2014/main" id="{EEE23D32-80E7-4796-A137-66BF842E4B53}"/>
+                <a16:creationId xmlns:a16="http://schemas.microsoft.com/office/drawing/2014/main" id="{EEE23D32-80E7-4796-A137-66BF842E4B53}"/>
               </a:ext>
             </a:extLst>
           </p:cNvPr>
@@ -5791,7 +6686,7 @@
           <p:cNvPr id="2" name="Título 1">
             <a:extLst>
               <a:ext uri="{FF2B5EF4-FFF2-40B4-BE49-F238E27FC236}">
-                <a16:creationId xmlns="" xmlns:a16="http://schemas.microsoft.com/office/drawing/2014/main" id="{2BCE2379-C78F-47E1-8CFC-B846E7AF148D}"/>
+                <a16:creationId xmlns:a16="http://schemas.microsoft.com/office/drawing/2014/main" id="{2BCE2379-C78F-47E1-8CFC-B846E7AF148D}"/>
               </a:ext>
             </a:extLst>
           </p:cNvPr>
@@ -5819,7 +6714,7 @@
           <p:cNvPr id="3" name="Espaço Reservado para Data 2">
             <a: